--- a/docs/multimodal-actuator-workshop.pptx
+++ b/docs/multimodal-actuator-workshop.pptx
@@ -520,7 +520,7 @@
           <a:lstStyle/>
           <a:p>
             <a:r>
-              <a:t>0:00 — Start here. Don't read the slide.</a:t>
+              <a:t>0:00. Start here. Don't read the slide.</a:t>
             </a:r>
           </a:p>
           <a:p/>
@@ -726,18 +726,18 @@
           <a:lstStyle/>
           <a:p>
             <a:r>
-              <a:t>Thermal. The lecture said people are bad at thermal patterns — this is</a:t>
-            </a:r>
-          </a:p>
-          <a:p>
-            <a:r>
-              <a:t>where they feel why.</a:t>
+              <a:t>Thermal. People are bad at reading thermal patterns, and this is</a:t>
+            </a:r>
+          </a:p>
+          <a:p>
+            <a:r>
+              <a:t>where they find that out for themselves.</a:t>
             </a:r>
           </a:p>
           <a:p/>
           <a:p>
             <a:r>
-              <a:t>Make them time themselves. The 3-8 second onset kills a lot of bad project</a:t>
+              <a:t>Make them time themselves. The 3 to 8 second onset kills a lot of bad project</a:t>
             </a:r>
           </a:p>
           <a:p>
@@ -747,7 +747,7 @@
           </a:p>
           <a:p>
             <a:r>
-              <a:t>rather than in week 47.</a:t>
+              <a:t>rather than in week 46.</a:t>
             </a:r>
           </a:p>
           <a:p/>
@@ -823,7 +823,7 @@
           <a:lstStyle/>
           <a:p>
             <a:r>
-              <a:t>Redundancy, made physical. Same driver, two frequencies — one you feel,</a:t>
+              <a:t>Redundancy, made physical. Same driver, two frequencies: one you feel,</a:t>
             </a:r>
           </a:p>
           <a:p>
@@ -839,12 +839,12 @@
           </a:p>
           <a:p>
             <a:r>
-              <a:t>That's crossmodal redundancy from Lecture 7 and it's the cheapest reliability</a:t>
-            </a:r>
-          </a:p>
-          <a:p>
-            <a:r>
-              <a:t>win available to their projects.</a:t>
+              <a:t>Sending the same thing down two channels is the cheapest reliability their</a:t>
+            </a:r>
+          </a:p>
+          <a:p>
+            <a:r>
+              <a:t>projects can buy.</a:t>
             </a:r>
           </a:p>
           <a:p/>
@@ -920,7 +920,7 @@
           <a:lstStyle/>
           <a:p>
             <a:r>
-              <a:t>1:10 — Rotation over. Round-the-room now.</a:t>
+              <a:t>1:10. Rotation over. Round-the-room now.</a:t>
             </a:r>
           </a:p>
           <a:p/>
@@ -932,7 +932,7 @@
           <a:p/>
           <a:p>
             <a:r>
-              <a:t>Expect the thermal group to report the delay. Let that land — it's more</a:t>
+              <a:t>Expect the thermal group to report the delay. Let that land, it is more</a:t>
             </a:r>
           </a:p>
           <a:p>
@@ -1201,7 +1201,7 @@
           <a:lstStyle/>
           <a:p>
             <a:r>
-              <a:t>1:20 — Build starts. Thirty minutes.</a:t>
+              <a:t>1:20. Build starts. Thirty minutes.</a:t>
             </a:r>
           </a:p>
           <a:p/>
@@ -1212,7 +1212,7 @@
           </a:p>
           <a:p>
             <a:r>
-              <a:t>because they're simplest — that's fine, the constraint does the work.</a:t>
+              <a:t>because they are simplest. That is fine, the constraint does the work.</a:t>
             </a:r>
           </a:p>
         </p:txBody>
@@ -1288,12 +1288,12 @@
           <a:p/>
           <a:p>
             <a:r>
-              <a:t>Rhythm and roughness only. If someone asks to add a second actuator, say no —</a:t>
-            </a:r>
-          </a:p>
-          <a:p>
-            <a:r>
-              <a:t>the constraint IS the exercise. Encoding within one channel is the skill.</a:t>
+              <a:t>Rhythm and strength only. If someone asks to add a second actuator, say no.</a:t>
+            </a:r>
+          </a:p>
+          <a:p>
+            <a:r>
+              <a:t>The constraint is the exercise. Encoding within one channel is the skill.</a:t>
             </a:r>
           </a:p>
           <a:p/>
@@ -1380,7 +1380,7 @@
           <a:p/>
           <a:p>
             <a:r>
-              <a:t>1:50 — Blind test. Swap groups, receiver looks away, guess all three.</a:t>
+              <a:t>1:50. Blind test. Swap groups, receiver looks away, guess all three.</a:t>
             </a:r>
           </a:p>
           <a:p/>
@@ -1564,19 +1564,25 @@
           </a:p>
           <a:p>
             <a:r>
-              <a:t>speaker, and haptics gets designed on paper then dropped.</a:t>
+              <a:t>speaker, and touch gets designed on paper then dropped.</a:t>
             </a:r>
           </a:p>
           <a:p/>
           <a:p>
             <a:r>
-              <a:t>Not because it was wrong. Because nobody had touched the parts.</a:t>
+              <a:t>Not because it was wrong. Because nobody had held the parts.</a:t>
             </a:r>
           </a:p>
           <a:p/>
           <a:p>
             <a:r>
-              <a:t>Keep this short — 2 minutes. They came to do things, not hear framing.</a:t>
+              <a:t>They get the Actuators lecture tomorrow. Today is the hands, not the theory.</a:t>
+            </a:r>
+          </a:p>
+          <a:p/>
+          <a:p>
+            <a:r>
+              <a:t>Keep this short, 2 minutes. They came to do things, not hear framing.</a:t>
             </a:r>
           </a:p>
         </p:txBody>
@@ -1663,12 +1669,12 @@
           <a:p/>
           <a:p>
             <a:r>
-              <a:t>Say out loud: the timer is hard. Ten minutes means ten minutes. Bench 3 (the</a:t>
-            </a:r>
-          </a:p>
-          <a:p>
-            <a:r>
-              <a:t>solenoid) is the one people won't want to leave.</a:t>
+              <a:t>Say out loud: the timer is hard. Ten minutes means ten minutes. Bench 3, the</a:t>
+            </a:r>
+          </a:p>
+          <a:p>
+            <a:r>
+              <a:t>solenoid, is the one people will not want to leave.</a:t>
             </a:r>
           </a:p>
         </p:txBody>
@@ -1830,7 +1836,7 @@
           <a:lstStyle/>
           <a:p>
             <a:r>
-              <a:t>0:10 — Rotation starts. Set a visible timer.</a:t>
+              <a:t>0:10. Rotation starts. Set a visible timer.</a:t>
             </a:r>
           </a:p>
           <a:p/>
@@ -1841,7 +1847,7 @@
           </a:p>
           <a:p>
             <a:r>
-              <a:t>minutes. Circulate, but don't rescue — let them poke at things.</a:t>
+              <a:t>minutes. Circulate, but do not rescue. Let them poke at things.</a:t>
             </a:r>
           </a:p>
           <a:p/>
@@ -1927,12 +1933,12 @@
           <a:lstStyle/>
           <a:p>
             <a:r>
-              <a:t>ERM. The lecture point made physical: frequency and amplitude are</a:t>
-            </a:r>
-          </a:p>
-          <a:p>
-            <a:r>
-              <a:t>mechanically linked. You cannot get gentle-but-fast.</a:t>
+              <a:t>The core limitation, made physical: speed and strength are mechanically</a:t>
+            </a:r>
+          </a:p>
+          <a:p>
+            <a:r>
+              <a:t>linked on this motor. You cannot get gentle-but-fast.</a:t>
             </a:r>
           </a:p>
           <a:p/>
@@ -1943,13 +1949,13 @@
           </a:p>
           <a:p>
             <a:r>
-              <a:t>can't overcome its own friction. That floor is real and worth naming.</a:t>
+              <a:t>cannot overcome its own friction. That floor is real and worth naming.</a:t>
             </a:r>
           </a:p>
           <a:p/>
           <a:p>
             <a:r>
-              <a:t>Never let anyone rewire this to a bare pin — 40 mA limit, motor pulls 75.</a:t>
+              <a:t>Never let anyone rewire this to a bare pin. 40 mA limit, motor pulls 75.</a:t>
             </a:r>
           </a:p>
         </p:txBody>
@@ -2030,7 +2036,7 @@
           <a:p/>
           <a:p>
             <a:r>
-              <a:t>If the LRA sounds wrong, the DRV2605L is in ERM mode — it must be told which</a:t>
+              <a:t>If the LRA sounds wrong, the DRV2605L is in ERM mode. It must be told which</a:t>
             </a:r>
           </a:p>
           <a:p>
@@ -2116,23 +2122,28 @@
           <a:lstStyle/>
           <a:p>
             <a:r>
-              <a:t>The memorable one. A knock reads as a person tapping you — indexical,</a:t>
-            </a:r>
-          </a:p>
-          <a:p>
-            <a:r>
-              <a:t>not symbolic, straight from Lecture 7's semiotics.</a:t>
+              <a:t>The memorable one. A single knock reads as a person tapping you</a:t>
+            </a:r>
+          </a:p>
+          <a:p>
+            <a:r>
+              <a:t>rather than a machine signalling. Worth naming out loud, because it is the</a:t>
+            </a:r>
+          </a:p>
+          <a:p>
+            <a:r>
+              <a:t>whole reason it feels different.</a:t>
             </a:r>
           </a:p>
           <a:p/>
           <a:p>
             <a:r>
-              <a:t>Watch the duty cycle. Solenoids get hot fast; if it's been hammering for ten</a:t>
-            </a:r>
-          </a:p>
-          <a:p>
-            <a:r>
-              <a:t>minutes, let it rest.</a:t>
+              <a:t>Watch the duty cycle. Solenoids get hot fast, so if it has been hammering for</a:t>
+            </a:r>
+          </a:p>
+          <a:p>
+            <a:r>
+              <a:t>ten minutes, let it rest.</a:t>
             </a:r>
           </a:p>
           <a:p/>
@@ -2213,7 +2224,7 @@
           <a:lstStyle/>
           <a:p>
             <a:r>
-              <a:t>The surprise bench. No breakout board — the input is a wire.</a:t>
+              <a:t>The surprise bench. No breakout board. The input is a wire.</a:t>
             </a:r>
           </a:p>
           <a:p/>
@@ -5286,7 +5297,7 @@
                 </a:solidFill>
                 <a:latin typeface="Arial"/>
               </a:rPr>
-              <a:t>THE ACTUATOR PETTING ZOO</a:t>
+              <a:t>FEEL BEFORE YOU BUILD</a:t>
             </a:r>
           </a:p>
         </p:txBody>
@@ -5328,7 +5339,7 @@
                 </a:solidFill>
                 <a:latin typeface="Arial"/>
               </a:rPr>
-              <a:t>Hands-on multimodal prototyping  ·  Week 39 lab  ·  2 hours</a:t>
+              <a:t>Hands-on prototyping with actuators  ·  2 hours</a:t>
             </a:r>
           </a:p>
         </p:txBody>
@@ -5437,7 +5448,7 @@
                 </a:solidFill>
                 <a:latin typeface="Arial"/>
               </a:rPr>
-              <a:t>WEEK 39 LAB</a:t>
+              <a:t>PROTOTYPING WORKSHOP</a:t>
             </a:r>
           </a:p>
         </p:txBody>
@@ -5566,7 +5577,7 @@
                 </a:solidFill>
                 <a:latin typeface="Arial"/>
               </a:rPr>
-              <a:t>BENCH 04 — THE WHOLE TRICK</a:t>
+              <a:t>BENCH 04: THE WHOLE TRICK</a:t>
             </a:r>
           </a:p>
         </p:txBody>
@@ -5652,7 +5663,7 @@
                 </a:solidFill>
                 <a:latin typeface="Arial"/>
               </a:rPr>
-              <a:t>Capacitive sensing costs a wire. What it does not cost you is thinking.</a:t>
+              <a:t>Touch input for the price of a wire. The thinking is where it costs you.</a:t>
             </a:r>
           </a:p>
         </p:txBody>
@@ -5742,7 +5753,7 @@
                 </a:solidFill>
                 <a:latin typeface="Arial"/>
               </a:rPr>
-              <a:t>• Readings drift with humidity, mains hum, how you are sitting. A fixed threshold works in the morning and fails after lunch.</a:t>
+              <a:t>• Readings drift with humidity, with mains hum, with how you are sitting. A fixed threshold works in the morning and fails after lunch.</a:t>
             </a:r>
           </a:p>
           <a:p>
@@ -5790,7 +5801,7 @@
                 </a:solidFill>
                 <a:latin typeface="Arial"/>
               </a:rPr>
-              <a:t>• Otherwise a long press slowly teaches it that a finger is normal, and the touch silently stops registering.</a:t>
+              <a:t>• Otherwise a long press slowly teaches it that a finger is normal, and the touch quietly stops registering.</a:t>
             </a:r>
           </a:p>
         </p:txBody>
@@ -5899,7 +5910,7 @@
                 </a:solidFill>
                 <a:latin typeface="Arial"/>
               </a:rPr>
-              <a:t>WEEK 39 LAB</a:t>
+              <a:t>PROTOTYPING WORKSHOP</a:t>
             </a:r>
           </a:p>
         </p:txBody>
@@ -6028,7 +6039,7 @@
                 </a:solidFill>
                 <a:latin typeface="Arial"/>
               </a:rPr>
-              <a:t>05 — PELTIER WARM / COOL</a:t>
+              <a:t>05   PELTIER WARM / COOL</a:t>
             </a:r>
           </a:p>
         </p:txBody>
@@ -6194,7 +6205,7 @@
                 </a:solidFill>
                 <a:latin typeface="Arial"/>
               </a:rPr>
-              <a:t>The lecture's warning holds up in person — alternating hot and cold just reads as lukewarm.</a:t>
+              <a:t>And alternating hot with cold does not read as a pattern. It just reads as lukewarm.</a:t>
             </a:r>
           </a:p>
         </p:txBody>
@@ -6501,7 +6512,7 @@
                 </a:solidFill>
                 <a:latin typeface="Arial"/>
               </a:rPr>
-              <a:t>WEEK 39 LAB</a:t>
+              <a:t>PROTOTYPING WORKSHOP</a:t>
             </a:r>
           </a:p>
         </p:txBody>
@@ -6630,7 +6641,7 @@
                 </a:solidFill>
                 <a:latin typeface="Arial"/>
               </a:rPr>
-              <a:t>06 — THE SAME SIGNAL, TWICE</a:t>
+              <a:t>06   THE SAME SIGNAL, TWICE</a:t>
             </a:r>
           </a:p>
         </p:txBody>
@@ -6758,7 +6769,7 @@
                 </a:solidFill>
                 <a:latin typeface="Arial"/>
               </a:rPr>
-              <a:t>One transducer on a plate, playing 40 Hz you feel and 400 Hz you hear — from the same driver.</a:t>
+              <a:t>One transducer on a plate, playing 40 Hz you feel and 400 Hz you hear, both from the same driver.</a:t>
             </a:r>
           </a:p>
           <a:p>
@@ -6796,7 +6807,7 @@
                 </a:solidFill>
                 <a:latin typeface="Arial"/>
               </a:rPr>
-              <a:t>Together is not louder. It is more CERTAIN. That is redundancy from Lecture 7, and the cheapest reliability win your project can get.</a:t>
+              <a:t>Together is not louder. It is more certain. Sending the same thing down two channels is the cheapest reliability your project can buy.</a:t>
             </a:r>
           </a:p>
         </p:txBody>
@@ -6857,7 +6868,7 @@
                 </a:solidFill>
                 <a:latin typeface="Arial"/>
               </a:rPr>
-              <a:t>With ear defenders on, does the tacton still work?</a:t>
+              <a:t>With ear defenders on, does the signal still work?</a:t>
             </a:r>
           </a:p>
         </p:txBody>
@@ -7103,7 +7114,7 @@
                 </a:solidFill>
                 <a:latin typeface="Arial"/>
               </a:rPr>
-              <a:t>WEEK 39 LAB</a:t>
+              <a:t>PROTOTYPING WORKSHOP</a:t>
             </a:r>
           </a:p>
         </p:txBody>
@@ -7385,7 +7396,7 @@
                 </a:solidFill>
                 <a:latin typeface="Arial"/>
               </a:rPr>
-              <a:t>WEEK 39 LAB</a:t>
+              <a:t>PROTOTYPING WORKSHOP</a:t>
             </a:r>
           </a:p>
         </p:txBody>
@@ -7642,7 +7653,7 @@
                 </a:solidFill>
                 <a:latin typeface="Arial"/>
               </a:rPr>
-              <a:t>• Capacitive touch — a wire on an analogue pin. See bench 04.</a:t>
+              <a:t>• Capacitive touch. A wire on an analogue pin. See bench 04.</a:t>
             </a:r>
           </a:p>
           <a:p>
@@ -7661,7 +7672,7 @@
                 </a:solidFill>
                 <a:latin typeface="Arial"/>
               </a:rPr>
-              <a:t>• Heart rate (PPG) — steady at rest, garbage the moment the hand moves.</a:t>
+              <a:t>• Heart rate (PPG). Steady at rest, useless once the hand moves.</a:t>
             </a:r>
           </a:p>
           <a:p>
@@ -7680,7 +7691,7 @@
                 </a:solidFill>
                 <a:latin typeface="Arial"/>
               </a:rPr>
-              <a:t>• GSR — arousal, but it drifts. Relative change only, never absolute.</a:t>
+              <a:t>• Skin conductance (GSR). Drifts constantly, so relative change only.</a:t>
             </a:r>
           </a:p>
           <a:p>
@@ -7699,7 +7710,7 @@
                 </a:solidFill>
                 <a:latin typeface="Arial"/>
               </a:rPr>
-              <a:t>• Flex sensor — the cheap route to a data glove.</a:t>
+              <a:t>• Flex sensor. The cheap route to a data glove.</a:t>
             </a:r>
           </a:p>
           <a:p>
@@ -7718,7 +7729,7 @@
                 </a:solidFill>
                 <a:latin typeface="Arial"/>
               </a:rPr>
-              <a:t>• Pressure (FSR) — how hard, not just whether. Calibrate per pad.</a:t>
+              <a:t>• Pressure (FSR). How hard, not just whether. Calibrate each pad.</a:t>
             </a:r>
           </a:p>
           <a:p>
@@ -7737,7 +7748,7 @@
                 </a:solidFill>
                 <a:latin typeface="Arial"/>
               </a:rPr>
-              <a:t>• Your own phone — accelerometer, gyro, mic, camera, vibration. No soldering at all.</a:t>
+              <a:t>• Your own phone. Accelerometer, gyro, mic, camera, vibration motor. No soldering at all.</a:t>
             </a:r>
           </a:p>
         </p:txBody>
@@ -7846,7 +7857,7 @@
                 </a:solidFill>
                 <a:latin typeface="Arial"/>
               </a:rPr>
-              <a:t>WEEK 39 LAB</a:t>
+              <a:t>PROTOTYPING WORKSHOP</a:t>
             </a:r>
           </a:p>
         </p:txBody>
@@ -8103,7 +8114,7 @@
                 </a:solidFill>
                 <a:latin typeface="Arial"/>
               </a:rPr>
-              <a:t>Capacitive sensing + servos + actuators — SOS 2025, Arduino Uno</a:t>
+              <a:t>Capacitive sensing, servos and actuators (Arduino Uno)</a:t>
             </a:r>
           </a:p>
           <a:p>
@@ -8122,7 +8133,7 @@
                 </a:solidFill>
                 <a:latin typeface="Arial"/>
               </a:rPr>
-              <a:t>• A moving screen that breathes when idle and retreats when touched. 922 lines, plus a browser control panel over serial.</a:t>
+              <a:t>• A moving screen that breathes when idle and retreats when you touch it, with a browser control panel over the serial port.</a:t>
             </a:r>
           </a:p>
           <a:p>
@@ -8170,7 +8181,7 @@
                 </a:solidFill>
                 <a:latin typeface="Arial"/>
               </a:rPr>
-              <a:t>Instrumented sock — bachelor project, ESP32</a:t>
+              <a:t>Instrumented sock (ESP32, bachelor project)</a:t>
             </a:r>
           </a:p>
           <a:p>
@@ -8189,7 +8200,7 @@
                 </a:solidFill>
                 <a:latin typeface="Arial"/>
               </a:rPr>
-              <a:t>• Six force sensors under a foot, batched to a server over Wi-Fi, each with its own calibration constants.</a:t>
+              <a:t>• Six force sensors under a foot, sent to a server over Wi-Fi in batches, each with its own calibration constants.</a:t>
             </a:r>
           </a:p>
           <a:p>
@@ -8317,7 +8328,7 @@
                 </a:solidFill>
                 <a:latin typeface="Arial"/>
               </a:rPr>
-              <a:t>WEEK 39 LAB</a:t>
+              <a:t>PROTOTYPING WORKSHOP</a:t>
             </a:r>
           </a:p>
         </p:txBody>
@@ -8490,7 +8501,7 @@
                 </a:solidFill>
                 <a:latin typeface="Arial"/>
               </a:rPr>
-              <a:t>BUILD ONE TACTON</a:t>
+              <a:t>BUILD ONE SIGNAL</a:t>
             </a:r>
           </a:p>
         </p:txBody>
@@ -8599,7 +8610,7 @@
                 </a:solidFill>
                 <a:latin typeface="Arial"/>
               </a:rPr>
-              <a:t>WEEK 39 LAB</a:t>
+              <a:t>PROTOTYPING WORKSHOP</a:t>
             </a:r>
           </a:p>
         </p:txBody>
@@ -8875,7 +8886,7 @@
                 </a:solidFill>
                 <a:latin typeface="Arial"/>
               </a:rPr>
-              <a:t>Encode three messages: arrived / something wrong / finished.</a:t>
+              <a:t>Encode three messages: arrived, something wrong, finished.</a:t>
             </a:r>
           </a:p>
           <a:p>
@@ -8894,7 +8905,7 @@
                 </a:solidFill>
                 <a:latin typeface="Arial"/>
               </a:rPr>
-              <a:t>Vary RHYTHM and ROUGHNESS only — the Lecture 7 tacton parameters. No swapping actuators between messages.</a:t>
+              <a:t>Vary only two things: the RHYTHM of the pulses, and how STRONG they are. No swapping actuators between messages.</a:t>
             </a:r>
           </a:p>
           <a:p>
@@ -8913,7 +8924,7 @@
                 </a:solidFill>
                 <a:latin typeface="Arial"/>
               </a:rPr>
-              <a:t>Hand it to another group with the display turned away. They name all three.</a:t>
+              <a:t>Hand it to another group with the screen turned away. They name all three.</a:t>
             </a:r>
           </a:p>
           <a:p>
@@ -9041,7 +9052,7 @@
                 </a:solidFill>
                 <a:latin typeface="Arial"/>
               </a:rPr>
-              <a:t>WEEK 39 LAB</a:t>
+              <a:t>PROTOTYPING WORKSHOP</a:t>
             </a:r>
           </a:p>
         </p:txBody>
@@ -9394,7 +9405,7 @@
                 </a:solidFill>
                 <a:latin typeface="Arial"/>
               </a:rPr>
-              <a:t>WEEK 39 LAB</a:t>
+              <a:t>PROTOTYPING WORKSHOP</a:t>
             </a:r>
           </a:p>
         </p:txBody>
@@ -9674,7 +9685,7 @@
                 </a:solidFill>
                 <a:latin typeface="Arial"/>
               </a:rPr>
-              <a:t>WEEK 39 LAB</a:t>
+              <a:t>PROTOTYPING WORKSHOP</a:t>
             </a:r>
           </a:p>
         </p:txBody>
@@ -9889,7 +9900,7 @@
                 </a:solidFill>
                 <a:latin typeface="Arial"/>
               </a:rPr>
-              <a:t>You have had the actuator lecture. You know what an ERM is on a slide.</a:t>
+              <a:t>You can read a datasheet. You have never held one of these.</a:t>
             </a:r>
           </a:p>
         </p:txBody>
@@ -9931,7 +9942,7 @@
                 </a:solidFill>
                 <a:latin typeface="Arial"/>
               </a:rPr>
-              <a:t>Today you put one against your own wrist, decide it feels cheap, and pick something else — before you commit a project to it.</a:t>
+              <a:t>Today you put a vibration motor against your own wrist, decide it feels cheap, and pick something else. Better now than in week 46.</a:t>
             </a:r>
           </a:p>
           <a:p>
@@ -9960,7 +9971,7 @@
                 </a:solidFill>
                 <a:latin typeface="Arial"/>
               </a:rPr>
-              <a:t>Every year projects arrive at the mid-way pitch built entirely on the screen and the speaker.</a:t>
+              <a:t>Every year, projects end up built entirely on the screen and the speaker.</a:t>
             </a:r>
           </a:p>
           <a:p>
@@ -9979,7 +9990,7 @@
                 </a:solidFill>
                 <a:latin typeface="Arial"/>
               </a:rPr>
-              <a:t>Not because haptics was the wrong choice — because nobody knew a coin motor costs 12 kr and takes two wires.</a:t>
+              <a:t>Not because touch was the wrong choice. Because nobody knew that a coin motor costs 12 kr and takes two wires.</a:t>
             </a:r>
           </a:p>
         </p:txBody>
@@ -10088,7 +10099,7 @@
                 </a:solidFill>
                 <a:latin typeface="Arial"/>
               </a:rPr>
-              <a:t>WEEK 39 LAB</a:t>
+              <a:t>PROTOTYPING WORKSHOP</a:t>
             </a:r>
           </a:p>
         </p:txBody>
@@ -10360,7 +10371,7 @@
                 </a:solidFill>
                 <a:latin typeface="Arial"/>
               </a:rPr>
-              <a:t>• You wire nothing — that is what the project weeks are for.</a:t>
+              <a:t>• You wire nothing. That is what the project weeks are for.</a:t>
             </a:r>
           </a:p>
           <a:p>
@@ -10389,7 +10400,7 @@
                 </a:solidFill>
                 <a:latin typeface="Arial"/>
               </a:rPr>
-              <a:t>Then you build one tacton and someone else tries to read it.</a:t>
+              <a:t>Then you build one signal and someone else tries to read it.</a:t>
             </a:r>
           </a:p>
         </p:txBody>
@@ -10498,7 +10509,7 @@
                 </a:solidFill>
                 <a:latin typeface="Arial"/>
               </a:rPr>
-              <a:t>WEEK 39 LAB</a:t>
+              <a:t>PROTOTYPING WORKSHOP</a:t>
             </a:r>
           </a:p>
         </p:txBody>
@@ -10713,7 +10724,7 @@
                 </a:solidFill>
                 <a:latin typeface="Arial"/>
               </a:rPr>
-              <a:t>Times are offsets from the start. The rotation is the spine — keep it moving.</a:t>
+              <a:t>Times are offsets from the start. The rotation is the spine of it, so keep it moving.</a:t>
             </a:r>
           </a:p>
         </p:txBody>
@@ -10839,7 +10850,7 @@
                 </a:solidFill>
                 <a:latin typeface="Arial"/>
               </a:rPr>
-              <a:t>Framing, and a demo that fails</a:t>
+              <a:t>Two motors, same message. Which felt urgent?</a:t>
             </a:r>
           </a:p>
         </p:txBody>
@@ -10965,7 +10976,7 @@
                 </a:solidFill>
                 <a:latin typeface="Arial"/>
               </a:rPr>
-              <a:t>Bench rotation — 10 minutes each</a:t>
+              <a:t>Bench rotation, 10 minutes each</a:t>
             </a:r>
           </a:p>
         </p:txBody>
@@ -11217,7 +11228,7 @@
                 </a:solidFill>
                 <a:latin typeface="Arial"/>
               </a:rPr>
-              <a:t>Build one tacton</a:t>
+              <a:t>Build one signal</a:t>
             </a:r>
           </a:p>
         </p:txBody>
@@ -11452,7 +11463,7 @@
                 </a:solidFill>
                 <a:latin typeface="Arial"/>
               </a:rPr>
-              <a:t>WEEK 39 LAB</a:t>
+              <a:t>PROTOTYPING WORKSHOP</a:t>
             </a:r>
           </a:p>
         </p:txBody>
@@ -11734,7 +11745,7 @@
                 </a:solidFill>
                 <a:latin typeface="Arial"/>
               </a:rPr>
-              <a:t>WEEK 39 LAB</a:t>
+              <a:t>PROTOTYPING WORKSHOP</a:t>
             </a:r>
           </a:p>
         </p:txBody>
@@ -11863,7 +11874,7 @@
                 </a:solidFill>
                 <a:latin typeface="Arial"/>
               </a:rPr>
-              <a:t>01 — ERM COIN MOTOR</a:t>
+              <a:t>01   ERM COIN MOTOR</a:t>
             </a:r>
           </a:p>
         </p:txBody>
@@ -11991,7 +12002,7 @@
                 </a:solidFill>
                 <a:latin typeface="Arial"/>
               </a:rPr>
-              <a:t>The eccentric rotating mass from Lecture 6. The same part that is in your phone and every game controller.</a:t>
+              <a:t>An off-centre weight on a motor shaft. The same part that is in your phone and every game controller.</a:t>
             </a:r>
           </a:p>
           <a:p>
@@ -12010,7 +12021,7 @@
                 </a:solidFill>
                 <a:latin typeface="Arial"/>
               </a:rPr>
-              <a:t>Turn the pot and notice what you cannot do: frequency and amplitude are mechanically welded together. "Gentle but fast" is not available to you.</a:t>
+              <a:t>Turn the knob and notice what you cannot do. Speed and strength are mechanically welded together, so "gentle but fast" is not available to you.</a:t>
             </a:r>
           </a:p>
         </p:txBody>
@@ -12317,7 +12328,7 @@
                 </a:solidFill>
                 <a:latin typeface="Arial"/>
               </a:rPr>
-              <a:t>WEEK 39 LAB</a:t>
+              <a:t>PROTOTYPING WORKSHOP</a:t>
             </a:r>
           </a:p>
         </p:txBody>
@@ -12446,7 +12457,7 @@
                 </a:solidFill>
                 <a:latin typeface="Arial"/>
               </a:rPr>
-              <a:t>02 — LRA + PIEZO DISC</a:t>
+              <a:t>02   LRA + PIEZO DISC</a:t>
             </a:r>
           </a:p>
         </p:txBody>
@@ -12593,7 +12604,7 @@
                 </a:solidFill>
                 <a:latin typeface="Arial"/>
               </a:rPr>
-              <a:t>The LRA hits resonance in ~5 ms and stops just as fast — which is why phone keyboards use it.</a:t>
+              <a:t>The LRA hits resonance in about 5 ms and stops just as fast, which is why phone keyboards use it.</a:t>
             </a:r>
           </a:p>
           <a:p>
@@ -12612,7 +12623,7 @@
                 </a:solidFill>
                 <a:latin typeface="Arial"/>
               </a:rPr>
-              <a:t>The piezo is the crystal from the lecture: near-instant, almost no power, but shallow. A tick, not a thump.</a:t>
+              <a:t>The piezo is a crystal that flexes when you put current across it. Near-instant, almost no power, but shallow. A tick, not a thump.</a:t>
             </a:r>
           </a:p>
         </p:txBody>
@@ -12900,7 +12911,7 @@
                 </a:solidFill>
                 <a:latin typeface="Arial"/>
               </a:rPr>
-              <a:t>WEEK 39 LAB</a:t>
+              <a:t>PROTOTYPING WORKSHOP</a:t>
             </a:r>
           </a:p>
         </p:txBody>
@@ -13029,7 +13040,7 @@
                 </a:solidFill>
                 <a:latin typeface="Arial"/>
               </a:rPr>
-              <a:t>03 — SOLENOID TAP</a:t>
+              <a:t>03   SOLENOID TAP</a:t>
             </a:r>
           </a:p>
         </p:txBody>
@@ -13176,26 +13187,7 @@
                 </a:solidFill>
                 <a:latin typeface="Arial"/>
               </a:rPr>
-              <a:t>This is the bench everyone remembers. A discrete knock carries urgency no amount of buzzing does — it reads as somebody tapping you.</a:t>
-            </a:r>
-          </a:p>
-          <a:p>
-            <a:pPr>
-              <a:lnSpc>
-                <a:spcPct val="130000"/>
-              </a:lnSpc>
-              <a:spcAft>
-                <a:spcPts val="900"/>
-              </a:spcAft>
-            </a:pPr>
-            <a:r>
-              <a:rPr sz="1600" b="0">
-                <a:solidFill>
-                  <a:srgbClr val="000000"/>
-                </a:solidFill>
-                <a:latin typeface="Arial"/>
-              </a:rPr>
-              <a:t>Indexical, not symbolic.</a:t>
+              <a:t>This is the bench everyone remembers. A single knock carries urgency that no amount of buzzing does, because it reads as a person tapping you rather than a machine signalling.</a:t>
             </a:r>
           </a:p>
         </p:txBody>
@@ -13502,7 +13494,7 @@
                 </a:solidFill>
                 <a:latin typeface="Arial"/>
               </a:rPr>
-              <a:t>WEEK 39 LAB</a:t>
+              <a:t>PROTOTYPING WORKSHOP</a:t>
             </a:r>
           </a:p>
         </p:txBody>
@@ -13631,7 +13623,7 @@
                 </a:solidFill>
                 <a:latin typeface="Arial"/>
               </a:rPr>
-              <a:t>04 — CAPACITIVE TOUCH</a:t>
+              <a:t>04   CAPACITIVE TOUCH</a:t>
             </a:r>
           </a:p>
         </p:txBody>
@@ -13778,7 +13770,7 @@
                 </a:solidFill>
                 <a:latin typeface="Arial"/>
               </a:rPr>
-              <a:t>There is no button and no sensor you can point at. The input IS a wire taped to a plate, read on an analogue pin.</a:t>
+              <a:t>There is no button and no sensor you can point at. The input is a wire taped behind a plate, read on an analogue pin.</a:t>
             </a:r>
           </a:p>
           <a:p>
@@ -13797,7 +13789,7 @@
                 </a:solidFill>
                 <a:latin typeface="Arial"/>
               </a:rPr>
-              <a:t>This is the SOS 2025 rig running its real sketch.</a:t>
+              <a:t>Any surface can become an input this way: foil, card, fabric.</a:t>
             </a:r>
           </a:p>
         </p:txBody>
@@ -13995,7 +13987,7 @@
                 </a:solidFill>
                 <a:latin typeface="Consolas"/>
               </a:rPr>
-              <a:t>cost   ~0 kr — a wire</a:t>
+              <a:t>cost   ~0 kr, a wire</a:t>
             </a:r>
           </a:p>
         </p:txBody>
@@ -14104,7 +14096,7 @@
                 </a:solidFill>
                 <a:latin typeface="Arial"/>
               </a:rPr>
-              <a:t>WEEK 39 LAB</a:t>
+              <a:t>PROTOTYPING WORKSHOP</a:t>
             </a:r>
           </a:p>
         </p:txBody>

--- a/docs/multimodal-actuator-workshop.pptx
+++ b/docs/multimodal-actuator-workshop.pptx
@@ -823,12 +823,12 @@
           <a:lstStyle/>
           <a:p>
             <a:r>
-              <a:t>Redundancy, made physical. Same driver, two frequencies: one you feel,</a:t>
-            </a:r>
-          </a:p>
-          <a:p>
-            <a:r>
-              <a:t>one you hear.</a:t>
+              <a:t>Redundancy, made physical. One transducer on a plate, two frequencies: 40 Hz</a:t>
+            </a:r>
+          </a:p>
+          <a:p>
+            <a:r>
+              <a:t>you feel, 400 Hz you hear, both from the same driver.</a:t>
             </a:r>
           </a:p>
           <a:p/>
@@ -1007,7 +1007,12 @@
           <a:lstStyle/>
           <a:p>
             <a:r>
-              <a:t>Mention, don't teach. These sit on one table with a sign.</a:t>
+              <a:t>Mention, don't teach. These sit on one table with a sign. The slide is one</a:t>
+            </a:r>
+          </a:p>
+          <a:p>
+            <a:r>
+              <a:t>line each; the caveats below are what actually saves them time.</a:t>
             </a:r>
           </a:p>
           <a:p/>
@@ -1104,7 +1109,23 @@
           <a:lstStyle/>
           <a:p>
             <a:r>
-              <a:t>Five minutes, and show the actual repos on screen if you can.</a:t>
+              <a:t>Five minutes, and show the actual repos on screen if you can. The slide names</a:t>
+            </a:r>
+          </a:p>
+          <a:p>
+            <a:r>
+              <a:t>them; you supply the detail.</a:t>
+            </a:r>
+          </a:p>
+          <a:p/>
+          <a:p>
+            <a:r>
+              <a:t>The moving screen has a browser control panel over the serial port, which is</a:t>
+            </a:r>
+          </a:p>
+          <a:p>
+            <a:r>
+              <a:t>exactly what you want at the project demonstrations.</a:t>
             </a:r>
           </a:p>
           <a:p/>
@@ -1282,7 +1303,28 @@
           <a:lstStyle/>
           <a:p>
             <a:r>
-              <a:t>Read the brief out once, then get out of the way.</a:t>
+              <a:t>Read the brief out once, then get out of the way. Full wording, since the</a:t>
+            </a:r>
+          </a:p>
+          <a:p>
+            <a:r>
+              <a:t>slide is only the bones:</a:t>
+            </a:r>
+          </a:p>
+          <a:p/>
+          <a:p>
+            <a:r>
+              <a:t>"Pick one actuator. Encode three messages: arrived, something wrong, finished.</a:t>
+            </a:r>
+          </a:p>
+          <a:p>
+            <a:r>
+              <a:t>Vary only the rhythm of the pulses and how strong they are. Then hand it to</a:t>
+            </a:r>
+          </a:p>
+          <a:p>
+            <a:r>
+              <a:t>another group with the screen turned away and see if they can name all three."</a:t>
             </a:r>
           </a:p>
           <a:p/>
@@ -1559,12 +1601,34 @@
           <a:lstStyle/>
           <a:p>
             <a:r>
-              <a:t>Say the honest version: every year projects end up on the screen and the</a:t>
-            </a:r>
-          </a:p>
-          <a:p>
-            <a:r>
-              <a:t>speaker, and touch gets designed on paper then dropped.</a:t>
+              <a:t>Say the full version out loud, the slide only carries the skeleton:</a:t>
+            </a:r>
+          </a:p>
+          <a:p/>
+          <a:p>
+            <a:r>
+              <a:t>"You can read a datasheet. You have never held one of these. Today you put a</a:t>
+            </a:r>
+          </a:p>
+          <a:p>
+            <a:r>
+              <a:t>vibration motor against your own wrist, decide it feels cheap, and pick</a:t>
+            </a:r>
+          </a:p>
+          <a:p>
+            <a:r>
+              <a:t>something else. Better now than in week 46 with the demo three days out."</a:t>
+            </a:r>
+          </a:p>
+          <a:p/>
+          <a:p>
+            <a:r>
+              <a:t>Every year projects end up on the screen and the speaker, and touch gets</a:t>
+            </a:r>
+          </a:p>
+          <a:p>
+            <a:r>
+              <a:t>designed on paper then dropped.</a:t>
             </a:r>
           </a:p>
           <a:p/>
@@ -2030,7 +2094,12 @@
           </a:p>
           <a:p>
             <a:r>
-              <a:t>5 ms on, 5 ms off. Piezo is sharp but shallow.</a:t>
+              <a:t>5 ms on, 5 ms off. Piezo is a crystal that flexes when you put current across</a:t>
+            </a:r>
+          </a:p>
+          <a:p>
+            <a:r>
+              <a:t>it, so it is sharp but shallow.</a:t>
             </a:r>
           </a:p>
           <a:p/>
@@ -2132,7 +2201,7 @@
           </a:p>
           <a:p>
             <a:r>
-              <a:t>whole reason it feels different.</a:t>
+              <a:t>whole reason it feels different, and the slide only says the short version.</a:t>
             </a:r>
           </a:p>
           <a:p/>
@@ -5491,7 +5560,7 @@
                 </a:solidFill>
                 <a:latin typeface="Arial"/>
               </a:rPr>
-              <a:t>Touch input for the price of a wire. The thinking is where it costs you.</a:t>
+              <a:t>Touch input for the price of a wire.</a:t>
             </a:r>
           </a:p>
           <a:p>
@@ -5542,7 +5611,7 @@
                 </a:solidFill>
                 <a:latin typeface="Arial"/>
               </a:rPr>
-              <a:t>The threshold is RELATIVE, never absolute.</a:t>
+              <a:t>Threshold is relative, never absolute</a:t>
             </a:r>
           </a:p>
           <a:p>
@@ -5562,7 +5631,27 @@
                 </a:solidFill>
                 <a:latin typeface="Arial"/>
               </a:rPr>
-              <a:t>• Readings drift with humidity, with mains hum, with how you are sitting. A fixed threshold works in the morning and fails after lunch.</a:t>
+              <a:t>• Readings drift with humidity and mains hum</a:t>
+            </a:r>
+          </a:p>
+          <a:p>
+            <a:pPr marL="0" indent="0" algn="l">
+              <a:lnSpc>
+                <a:spcPct val="128000"/>
+              </a:lnSpc>
+              <a:spcAft>
+                <a:spcPts val="700"/>
+              </a:spcAft>
+              <a:buNone/>
+            </a:pPr>
+            <a:r>
+              <a:rPr sz="1500" b="0">
+                <a:solidFill>
+                  <a:srgbClr val="000000"/>
+                </a:solidFill>
+                <a:latin typeface="Arial"/>
+              </a:rPr>
+              <a:t>• Fixed threshold works at 9am, fails at 1pm</a:t>
             </a:r>
           </a:p>
           <a:p>
@@ -5593,7 +5682,7 @@
                 </a:solidFill>
                 <a:latin typeface="Arial"/>
               </a:rPr>
-              <a:t>The baseline only learns while untouched.</a:t>
+              <a:t>Baseline only learns while untouched</a:t>
             </a:r>
           </a:p>
           <a:p>
@@ -5613,7 +5702,7 @@
                 </a:solidFill>
                 <a:latin typeface="Arial"/>
               </a:rPr>
-              <a:t>• Otherwise a long press slowly teaches it that a finger is normal, and the touch quietly stops registering.</a:t>
+              <a:t>• Or a long press teaches it that a finger is normal</a:t>
             </a:r>
           </a:p>
         </p:txBody>
@@ -5734,87 +5823,129 @@
                 <a:spcPct val="128000"/>
               </a:lnSpc>
               <a:spcAft>
+                <a:spcPts val="1200"/>
+              </a:spcAft>
+              <a:buNone/>
+            </a:pPr>
+            <a:r>
+              <a:rPr sz="1000" b="1">
+                <a:solidFill>
+                  <a:srgbClr val="595959"/>
+                </a:solidFill>
+                <a:latin typeface="Arial"/>
+              </a:rPr>
+              <a:t>THERMAL</a:t>
+            </a:r>
+          </a:p>
+          <a:p>
+            <a:pPr marL="0" indent="0" algn="l">
+              <a:lnSpc>
+                <a:spcPct val="128000"/>
+              </a:lnSpc>
+              <a:spcAft>
+                <a:spcPts val="400"/>
+              </a:spcAft>
+              <a:buNone/>
+            </a:pPr>
+            <a:r>
+              <a:rPr sz="1600" b="0">
+                <a:solidFill>
+                  <a:srgbClr val="000000"/>
+                </a:solidFill>
+                <a:latin typeface="Arial"/>
+              </a:rPr>
+              <a:t>Heats one side, cools the other.</a:t>
+            </a:r>
+          </a:p>
+          <a:p>
+            <a:pPr marL="0" indent="0" algn="l">
+              <a:lnSpc>
+                <a:spcPct val="128000"/>
+              </a:lnSpc>
+              <a:spcAft>
+                <a:spcPts val="400"/>
+              </a:spcAft>
+              <a:buNone/>
+            </a:pPr>
+            <a:r>
+              <a:rPr sz="1600" b="0">
+                <a:solidFill>
+                  <a:srgbClr val="000000"/>
+                </a:solidFill>
+                <a:latin typeface="Arial"/>
+              </a:rPr>
+              <a:t>Flip the current, it reverses.</a:t>
+            </a:r>
+          </a:p>
+          <a:p>
+            <a:pPr marL="0" indent="0" algn="l">
+              <a:lnSpc>
+                <a:spcPct val="128000"/>
+              </a:lnSpc>
+              <a:spcAft>
+                <a:spcPts val="0"/>
+              </a:spcAft>
+              <a:buNone/>
+            </a:pPr>
+          </a:p>
+          <a:p>
+            <a:pPr marL="0" indent="0" algn="l">
+              <a:lnSpc>
+                <a:spcPct val="128000"/>
+              </a:lnSpc>
+              <a:spcAft>
+                <a:spcPts val="400"/>
+              </a:spcAft>
+              <a:buNone/>
+            </a:pPr>
+            <a:r>
+              <a:rPr sz="1600" b="0">
+                <a:solidFill>
+                  <a:srgbClr val="000000"/>
+                </a:solidFill>
+                <a:latin typeface="Arial"/>
+              </a:rPr>
+              <a:t>Sit with it. Seconds before you are sure.</a:t>
+            </a:r>
+          </a:p>
+          <a:p>
+            <a:pPr marL="0" indent="0" algn="l">
+              <a:lnSpc>
+                <a:spcPct val="128000"/>
+              </a:lnSpc>
+              <a:spcAft>
+                <a:spcPts val="0"/>
+              </a:spcAft>
+              <a:buNone/>
+            </a:pPr>
+          </a:p>
+          <a:p>
+            <a:pPr marL="0" indent="0" algn="l">
+              <a:lnSpc>
+                <a:spcPct val="128000"/>
+              </a:lnSpc>
+              <a:spcAft>
+                <a:spcPts val="400"/>
+              </a:spcAft>
+              <a:buNone/>
+            </a:pPr>
+            <a:r>
+              <a:rPr sz="1600" b="0">
+                <a:solidFill>
+                  <a:srgbClr val="000000"/>
+                </a:solidFill>
+                <a:latin typeface="Arial"/>
+              </a:rPr>
+              <a:t>Hot alternating with cold reads as lukewarm.</a:t>
+            </a:r>
+          </a:p>
+          <a:p>
+            <a:pPr marL="0" indent="0" algn="l">
+              <a:lnSpc>
+                <a:spcPct val="128000"/>
+              </a:lnSpc>
+              <a:spcAft>
                 <a:spcPts val="1000"/>
-              </a:spcAft>
-              <a:buNone/>
-            </a:pPr>
-            <a:r>
-              <a:rPr sz="1000" b="1">
-                <a:solidFill>
-                  <a:srgbClr val="595959"/>
-                </a:solidFill>
-                <a:latin typeface="Arial"/>
-              </a:rPr>
-              <a:t>THERMAL</a:t>
-            </a:r>
-          </a:p>
-          <a:p>
-            <a:pPr marL="0" indent="0" algn="l">
-              <a:lnSpc>
-                <a:spcPct val="128000"/>
-              </a:lnSpc>
-              <a:spcAft>
-                <a:spcPts val="900"/>
-              </a:spcAft>
-              <a:buNone/>
-            </a:pPr>
-            <a:r>
-              <a:rPr sz="1600" b="0">
-                <a:solidFill>
-                  <a:srgbClr val="000000"/>
-                </a:solidFill>
-                <a:latin typeface="Arial"/>
-              </a:rPr>
-              <a:t>A thermoelectric tile: heats one side, cools the other, reverses when you flip the current.</a:t>
-            </a:r>
-          </a:p>
-          <a:p>
-            <a:pPr marL="0" indent="0" algn="l">
-              <a:lnSpc>
-                <a:spcPct val="128000"/>
-              </a:lnSpc>
-              <a:spcAft>
-                <a:spcPts val="900"/>
-              </a:spcAft>
-              <a:buNone/>
-            </a:pPr>
-            <a:r>
-              <a:rPr sz="1600" b="0">
-                <a:solidFill>
-                  <a:srgbClr val="000000"/>
-                </a:solidFill>
-                <a:latin typeface="Arial"/>
-              </a:rPr>
-              <a:t>Sit with it. It takes several seconds before you are sure which way it went.</a:t>
-            </a:r>
-          </a:p>
-          <a:p>
-            <a:pPr marL="0" indent="0" algn="l">
-              <a:lnSpc>
-                <a:spcPct val="128000"/>
-              </a:lnSpc>
-              <a:spcAft>
-                <a:spcPts val="900"/>
-              </a:spcAft>
-              <a:buNone/>
-            </a:pPr>
-            <a:r>
-              <a:rPr sz="1600" b="0">
-                <a:solidFill>
-                  <a:srgbClr val="000000"/>
-                </a:solidFill>
-                <a:latin typeface="Arial"/>
-              </a:rPr>
-              <a:t>And alternating hot with cold does not read as a pattern. It just reads as lukewarm.</a:t>
-            </a:r>
-          </a:p>
-          <a:p>
-            <a:pPr marL="0" indent="0" algn="l">
-              <a:lnSpc>
-                <a:spcPct val="128000"/>
-              </a:lnSpc>
-              <a:spcAft>
-                <a:spcPts val="400"/>
               </a:spcAft>
               <a:buNone/>
             </a:pPr>
@@ -6113,87 +6244,129 @@
                 <a:spcPct val="128000"/>
               </a:lnSpc>
               <a:spcAft>
+                <a:spcPts val="1200"/>
+              </a:spcAft>
+              <a:buNone/>
+            </a:pPr>
+            <a:r>
+              <a:rPr sz="1000" b="1">
+                <a:solidFill>
+                  <a:srgbClr val="595959"/>
+                </a:solidFill>
+                <a:latin typeface="Arial"/>
+              </a:rPr>
+              <a:t>AUDIO + TOUCH</a:t>
+            </a:r>
+          </a:p>
+          <a:p>
+            <a:pPr marL="0" indent="0" algn="l">
+              <a:lnSpc>
+                <a:spcPct val="128000"/>
+              </a:lnSpc>
+              <a:spcAft>
+                <a:spcPts val="400"/>
+              </a:spcAft>
+              <a:buNone/>
+            </a:pPr>
+            <a:r>
+              <a:rPr sz="1600" b="0">
+                <a:solidFill>
+                  <a:srgbClr val="000000"/>
+                </a:solidFill>
+                <a:latin typeface="Arial"/>
+              </a:rPr>
+              <a:t>One driver. 40 Hz you feel, 400 Hz you hear.</a:t>
+            </a:r>
+          </a:p>
+          <a:p>
+            <a:pPr marL="0" indent="0" algn="l">
+              <a:lnSpc>
+                <a:spcPct val="128000"/>
+              </a:lnSpc>
+              <a:spcAft>
+                <a:spcPts val="0"/>
+              </a:spcAft>
+              <a:buNone/>
+            </a:pPr>
+          </a:p>
+          <a:p>
+            <a:pPr marL="0" indent="0" algn="l">
+              <a:lnSpc>
+                <a:spcPct val="128000"/>
+              </a:lnSpc>
+              <a:spcAft>
+                <a:spcPts val="400"/>
+              </a:spcAft>
+              <a:buNone/>
+            </a:pPr>
+            <a:r>
+              <a:rPr sz="1600" b="0">
+                <a:solidFill>
+                  <a:srgbClr val="000000"/>
+                </a:solidFill>
+                <a:latin typeface="Arial"/>
+              </a:rPr>
+              <a:t>Toggle them alone, then together.</a:t>
+            </a:r>
+          </a:p>
+          <a:p>
+            <a:pPr marL="0" indent="0" algn="l">
+              <a:lnSpc>
+                <a:spcPct val="128000"/>
+              </a:lnSpc>
+              <a:spcAft>
+                <a:spcPts val="0"/>
+              </a:spcAft>
+              <a:buNone/>
+            </a:pPr>
+          </a:p>
+          <a:p>
+            <a:pPr marL="0" indent="0" algn="l">
+              <a:lnSpc>
+                <a:spcPct val="128000"/>
+              </a:lnSpc>
+              <a:spcAft>
+                <a:spcPts val="400"/>
+              </a:spcAft>
+              <a:buNone/>
+            </a:pPr>
+            <a:r>
+              <a:rPr sz="1600" b="0">
+                <a:solidFill>
+                  <a:srgbClr val="000000"/>
+                </a:solidFill>
+                <a:latin typeface="Arial"/>
+              </a:rPr>
+              <a:t>Together is not louder. It is more certain.</a:t>
+            </a:r>
+          </a:p>
+          <a:p>
+            <a:pPr marL="0" indent="0" algn="l">
+              <a:lnSpc>
+                <a:spcPct val="128000"/>
+              </a:lnSpc>
+              <a:spcAft>
+                <a:spcPts val="400"/>
+              </a:spcAft>
+              <a:buNone/>
+            </a:pPr>
+            <a:r>
+              <a:rPr sz="1600" b="0">
+                <a:solidFill>
+                  <a:srgbClr val="000000"/>
+                </a:solidFill>
+                <a:latin typeface="Arial"/>
+              </a:rPr>
+              <a:t>Two channels, same message. Cheap reliability.</a:t>
+            </a:r>
+          </a:p>
+          <a:p>
+            <a:pPr marL="0" indent="0" algn="l">
+              <a:lnSpc>
+                <a:spcPct val="128000"/>
+              </a:lnSpc>
+              <a:spcAft>
                 <a:spcPts val="1000"/>
-              </a:spcAft>
-              <a:buNone/>
-            </a:pPr>
-            <a:r>
-              <a:rPr sz="1000" b="1">
-                <a:solidFill>
-                  <a:srgbClr val="595959"/>
-                </a:solidFill>
-                <a:latin typeface="Arial"/>
-              </a:rPr>
-              <a:t>AUDIO + TOUCH</a:t>
-            </a:r>
-          </a:p>
-          <a:p>
-            <a:pPr marL="0" indent="0" algn="l">
-              <a:lnSpc>
-                <a:spcPct val="128000"/>
-              </a:lnSpc>
-              <a:spcAft>
-                <a:spcPts val="900"/>
-              </a:spcAft>
-              <a:buNone/>
-            </a:pPr>
-            <a:r>
-              <a:rPr sz="1600" b="0">
-                <a:solidFill>
-                  <a:srgbClr val="000000"/>
-                </a:solidFill>
-                <a:latin typeface="Arial"/>
-              </a:rPr>
-              <a:t>One transducer on a plate, playing 40 Hz you feel and 400 Hz you hear, both from the same driver.</a:t>
-            </a:r>
-          </a:p>
-          <a:p>
-            <a:pPr marL="0" indent="0" algn="l">
-              <a:lnSpc>
-                <a:spcPct val="128000"/>
-              </a:lnSpc>
-              <a:spcAft>
-                <a:spcPts val="900"/>
-              </a:spcAft>
-              <a:buNone/>
-            </a:pPr>
-            <a:r>
-              <a:rPr sz="1600" b="0">
-                <a:solidFill>
-                  <a:srgbClr val="000000"/>
-                </a:solidFill>
-                <a:latin typeface="Arial"/>
-              </a:rPr>
-              <a:t>Toggle between them alone and together.</a:t>
-            </a:r>
-          </a:p>
-          <a:p>
-            <a:pPr marL="0" indent="0" algn="l">
-              <a:lnSpc>
-                <a:spcPct val="128000"/>
-              </a:lnSpc>
-              <a:spcAft>
-                <a:spcPts val="900"/>
-              </a:spcAft>
-              <a:buNone/>
-            </a:pPr>
-            <a:r>
-              <a:rPr sz="1600" b="0">
-                <a:solidFill>
-                  <a:srgbClr val="000000"/>
-                </a:solidFill>
-                <a:latin typeface="Arial"/>
-              </a:rPr>
-              <a:t>Together is not louder. It is more certain. Sending the same thing down two channels is the cheapest reliability your project can buy.</a:t>
-            </a:r>
-          </a:p>
-          <a:p>
-            <a:pPr marL="0" indent="0" algn="l">
-              <a:lnSpc>
-                <a:spcPct val="128000"/>
-              </a:lnSpc>
-              <a:spcAft>
-                <a:spcPts val="400"/>
               </a:spcAft>
               <a:buNone/>
             </a:pPr>
@@ -6619,7 +6792,7 @@
                 </a:solidFill>
                 <a:latin typeface="Arial"/>
               </a:rPr>
-              <a:t>• Capacitive touch. A wire on an analogue pin. See bench 04.</a:t>
+              <a:t>• Capacitive touch. A wire. See bench 04</a:t>
             </a:r>
           </a:p>
           <a:p>
@@ -6639,7 +6812,7 @@
                 </a:solidFill>
                 <a:latin typeface="Arial"/>
               </a:rPr>
-              <a:t>• Heart rate (PPG). Steady at rest, useless once the hand moves.</a:t>
+              <a:t>• Heart rate (PPG). Useless once the hand moves</a:t>
             </a:r>
           </a:p>
           <a:p>
@@ -6659,7 +6832,7 @@
                 </a:solidFill>
                 <a:latin typeface="Arial"/>
               </a:rPr>
-              <a:t>• Skin conductance (GSR). Drifts constantly, so relative change only.</a:t>
+              <a:t>• Skin conductance (GSR). Relative change only</a:t>
             </a:r>
           </a:p>
           <a:p>
@@ -6679,7 +6852,7 @@
                 </a:solidFill>
                 <a:latin typeface="Arial"/>
               </a:rPr>
-              <a:t>• Flex sensor. The cheap route to a data glove.</a:t>
+              <a:t>• Flex sensor. The cheap data glove</a:t>
             </a:r>
           </a:p>
           <a:p>
@@ -6699,7 +6872,7 @@
                 </a:solidFill>
                 <a:latin typeface="Arial"/>
               </a:rPr>
-              <a:t>• Pressure (FSR). How hard, not just whether. Calibrate each pad.</a:t>
+              <a:t>• Pressure (FSR). Calibrate every pad</a:t>
             </a:r>
           </a:p>
           <a:p>
@@ -6719,7 +6892,7 @@
                 </a:solidFill>
                 <a:latin typeface="Arial"/>
               </a:rPr>
-              <a:t>• Your own phone. Accelerometer, gyro, mic, camera, vibration motor. No soldering at all.</a:t>
+              <a:t>• Your own phone. No soldering at all</a:t>
             </a:r>
           </a:p>
         </p:txBody>
@@ -6871,7 +7044,7 @@
                 </a:solidFill>
                 <a:latin typeface="Arial"/>
               </a:rPr>
-              <a:t>Capacitive sensing, servos and actuators (Arduino Uno)</a:t>
+              <a:t>Moving screen, Arduino Uno</a:t>
             </a:r>
           </a:p>
           <a:p>
@@ -6891,7 +7064,7 @@
                 </a:solidFill>
                 <a:latin typeface="Arial"/>
               </a:rPr>
-              <a:t>• A moving screen that breathes when idle and retreats when you touch it, with a browser control panel over the serial port.</a:t>
+              <a:t>• Breathes when idle. Retreats when touched</a:t>
             </a:r>
           </a:p>
           <a:p>
@@ -6911,7 +7084,7 @@
                 </a:solidFill>
                 <a:latin typeface="Arial"/>
               </a:rPr>
-              <a:t>• Take away: easing and idle motion are what separate "a servo moved" from "it reacted to me". Both are a dozen lines.</a:t>
+              <a:t>• Easing and idle motion do the work. A dozen lines</a:t>
             </a:r>
           </a:p>
           <a:p>
@@ -6942,7 +7115,7 @@
                 </a:solidFill>
                 <a:latin typeface="Arial"/>
               </a:rPr>
-              <a:t>Instrumented sock (ESP32, bachelor project)</a:t>
+              <a:t>Instrumented sock, ESP32</a:t>
             </a:r>
           </a:p>
           <a:p>
@@ -6962,7 +7135,7 @@
                 </a:solidFill>
                 <a:latin typeface="Arial"/>
               </a:rPr>
-              <a:t>• Six force sensors under a foot, sent to a server over Wi-Fi in batches, each with its own calibration constants.</a:t>
+              <a:t>• Six force sensors under a foot, batched over Wi-Fi</a:t>
             </a:r>
           </a:p>
           <a:p>
@@ -6982,7 +7155,7 @@
                 </a:solidFill>
                 <a:latin typeface="Arial"/>
               </a:rPr>
-              <a:t>• Take away: calibrate per sensor, and batch your writes.</a:t>
+              <a:t>• Calibrate per sensor. Batch your writes</a:t>
             </a:r>
           </a:p>
         </p:txBody>
@@ -7210,7 +7383,7 @@
                 </a:solidFill>
                 <a:latin typeface="Arial"/>
               </a:rPr>
-              <a:t>30 minutes. Deliberately not long enough to be precious about it.</a:t>
+              <a:t>30 minutes. Not long enough to be precious about it.</a:t>
             </a:r>
           </a:p>
           <a:p>
@@ -7224,13 +7397,13 @@
               <a:buNone/>
             </a:pPr>
             <a:r>
-              <a:rPr sz="1700" b="0">
-                <a:solidFill>
-                  <a:srgbClr val="000000"/>
-                </a:solidFill>
-                <a:latin typeface="Arial"/>
-              </a:rPr>
-              <a:t>Pick one actuator from the rotation.</a:t>
+              <a:rPr sz="1700" b="1">
+                <a:solidFill>
+                  <a:srgbClr val="000000"/>
+                </a:solidFill>
+                <a:latin typeface="Arial"/>
+              </a:rPr>
+              <a:t>One actuator. Three messages</a:t>
             </a:r>
           </a:p>
           <a:p>
@@ -7244,14 +7417,25 @@
               <a:buNone/>
             </a:pPr>
             <a:r>
-              <a:rPr sz="1700" b="0">
-                <a:solidFill>
-                  <a:srgbClr val="000000"/>
-                </a:solidFill>
-                <a:latin typeface="Arial"/>
-              </a:rPr>
-              <a:t>Encode three messages: arrived, something wrong, finished.</a:t>
-            </a:r>
+              <a:rPr sz="1500" b="0">
+                <a:solidFill>
+                  <a:srgbClr val="000000"/>
+                </a:solidFill>
+                <a:latin typeface="Arial"/>
+              </a:rPr>
+              <a:t>• Arrived. Something wrong. Finished</a:t>
+            </a:r>
+          </a:p>
+          <a:p>
+            <a:pPr marL="0" indent="0" algn="l">
+              <a:lnSpc>
+                <a:spcPct val="128000"/>
+              </a:lnSpc>
+              <a:spcAft>
+                <a:spcPts val="0"/>
+              </a:spcAft>
+              <a:buNone/>
+            </a:pPr>
           </a:p>
           <a:p>
             <a:pPr marL="0" indent="0" algn="l">
@@ -7264,13 +7448,13 @@
               <a:buNone/>
             </a:pPr>
             <a:r>
-              <a:rPr sz="1700" b="0">
-                <a:solidFill>
-                  <a:srgbClr val="000000"/>
-                </a:solidFill>
-                <a:latin typeface="Arial"/>
-              </a:rPr>
-              <a:t>Vary only two things: the RHYTHM of the pulses, and how STRONG they are. No swapping actuators between messages.</a:t>
+              <a:rPr sz="1700" b="1">
+                <a:solidFill>
+                  <a:srgbClr val="000000"/>
+                </a:solidFill>
+                <a:latin typeface="Arial"/>
+              </a:rPr>
+              <a:t>Vary two things only</a:t>
             </a:r>
           </a:p>
           <a:p>
@@ -7284,13 +7468,13 @@
               <a:buNone/>
             </a:pPr>
             <a:r>
-              <a:rPr sz="1700" b="0">
-                <a:solidFill>
-                  <a:srgbClr val="000000"/>
-                </a:solidFill>
-                <a:latin typeface="Arial"/>
-              </a:rPr>
-              <a:t>Hand it to another group with the screen turned away. They name all three.</a:t>
+              <a:rPr sz="1500" b="0">
+                <a:solidFill>
+                  <a:srgbClr val="000000"/>
+                </a:solidFill>
+                <a:latin typeface="Arial"/>
+              </a:rPr>
+              <a:t>• Rhythm of the pulses</a:t>
             </a:r>
           </a:p>
           <a:p>
@@ -7304,13 +7488,64 @@
               <a:buNone/>
             </a:pPr>
             <a:r>
-              <a:rPr sz="1700" b="0">
-                <a:solidFill>
-                  <a:srgbClr val="000000"/>
-                </a:solidFill>
-                <a:latin typeface="Arial"/>
-              </a:rPr>
-              <a:t>Write down which two got confused, and what would have separated them.</a:t>
+              <a:rPr sz="1500" b="0">
+                <a:solidFill>
+                  <a:srgbClr val="000000"/>
+                </a:solidFill>
+                <a:latin typeface="Arial"/>
+              </a:rPr>
+              <a:t>• How strong they are</a:t>
+            </a:r>
+          </a:p>
+          <a:p>
+            <a:pPr marL="0" indent="0" algn="l">
+              <a:lnSpc>
+                <a:spcPct val="128000"/>
+              </a:lnSpc>
+              <a:spcAft>
+                <a:spcPts val="0"/>
+              </a:spcAft>
+              <a:buNone/>
+            </a:pPr>
+          </a:p>
+          <a:p>
+            <a:pPr marL="0" indent="0" algn="l">
+              <a:lnSpc>
+                <a:spcPct val="128000"/>
+              </a:lnSpc>
+              <a:spcAft>
+                <a:spcPts val="700"/>
+              </a:spcAft>
+              <a:buNone/>
+            </a:pPr>
+            <a:r>
+              <a:rPr sz="1700" b="1">
+                <a:solidFill>
+                  <a:srgbClr val="000000"/>
+                </a:solidFill>
+                <a:latin typeface="Arial"/>
+              </a:rPr>
+              <a:t>Blind test: they name all three</a:t>
+            </a:r>
+          </a:p>
+          <a:p>
+            <a:pPr marL="0" indent="0" algn="l">
+              <a:lnSpc>
+                <a:spcPct val="128000"/>
+              </a:lnSpc>
+              <a:spcAft>
+                <a:spcPts val="700"/>
+              </a:spcAft>
+              <a:buNone/>
+            </a:pPr>
+            <a:r>
+              <a:rPr sz="1500" b="0">
+                <a:solidFill>
+                  <a:srgbClr val="000000"/>
+                </a:solidFill>
+                <a:latin typeface="Arial"/>
+              </a:rPr>
+              <a:t>• Note which two got confused, and why</a:t>
             </a:r>
           </a:p>
         </p:txBody>
@@ -7473,7 +7708,27 @@
                 </a:solidFill>
                 <a:latin typeface="Arial"/>
               </a:rPr>
-              <a:t>If your design only works when someone is watching a screen, you built a visual interface with a motor glued to it.</a:t>
+              <a:t>If it only works while someone watches a screen,</a:t>
+            </a:r>
+          </a:p>
+          <a:p>
+            <a:pPr marL="0" indent="0" algn="l">
+              <a:lnSpc>
+                <a:spcPct val="128000"/>
+              </a:lnSpc>
+              <a:spcAft>
+                <a:spcPts val="700"/>
+              </a:spcAft>
+              <a:buNone/>
+            </a:pPr>
+            <a:r>
+              <a:rPr sz="1700" b="0">
+                <a:solidFill>
+                  <a:srgbClr val="000000"/>
+                </a:solidFill>
+                <a:latin typeface="Arial"/>
+              </a:rPr>
+              <a:t>you built a visual interface with a motor glued to it.</a:t>
             </a:r>
           </a:p>
         </p:txBody>
@@ -7751,7 +8006,47 @@
                 </a:solidFill>
                 <a:latin typeface="Arial"/>
               </a:rPr>
-              <a:t>Today you put a vibration motor against your own wrist, decide it feels cheap, and pick something else. Better now than in week 46.</a:t>
+              <a:t>Most projects end up on the screen and the speaker</a:t>
+            </a:r>
+          </a:p>
+          <a:p>
+            <a:pPr marL="0" indent="0" algn="l">
+              <a:lnSpc>
+                <a:spcPct val="128000"/>
+              </a:lnSpc>
+              <a:spcAft>
+                <a:spcPts val="700"/>
+              </a:spcAft>
+              <a:buNone/>
+            </a:pPr>
+            <a:r>
+              <a:rPr sz="1500" b="0">
+                <a:solidFill>
+                  <a:srgbClr val="000000"/>
+                </a:solidFill>
+                <a:latin typeface="Arial"/>
+              </a:rPr>
+              <a:t>• Not because touch was wrong</a:t>
+            </a:r>
+          </a:p>
+          <a:p>
+            <a:pPr marL="0" indent="0" algn="l">
+              <a:lnSpc>
+                <a:spcPct val="128000"/>
+              </a:lnSpc>
+              <a:spcAft>
+                <a:spcPts val="700"/>
+              </a:spcAft>
+              <a:buNone/>
+            </a:pPr>
+            <a:r>
+              <a:rPr sz="1500" b="0">
+                <a:solidFill>
+                  <a:srgbClr val="000000"/>
+                </a:solidFill>
+                <a:latin typeface="Arial"/>
+              </a:rPr>
+              <a:t>• Because nobody knew a coin motor costs 12 kr</a:t>
             </a:r>
           </a:p>
           <a:p>
@@ -7776,13 +8071,13 @@
               <a:buNone/>
             </a:pPr>
             <a:r>
-              <a:rPr sz="1700" b="0">
-                <a:solidFill>
-                  <a:srgbClr val="000000"/>
-                </a:solidFill>
-                <a:latin typeface="Arial"/>
-              </a:rPr>
-              <a:t>Every year, projects end up built entirely on the screen and the speaker.</a:t>
+              <a:rPr sz="1700" b="1">
+                <a:solidFill>
+                  <a:srgbClr val="000000"/>
+                </a:solidFill>
+                <a:latin typeface="Arial"/>
+              </a:rPr>
+              <a:t>Today: decide it feels cheap, pick something else</a:t>
             </a:r>
           </a:p>
           <a:p>
@@ -7796,13 +8091,13 @@
               <a:buNone/>
             </a:pPr>
             <a:r>
-              <a:rPr sz="1700" b="0">
-                <a:solidFill>
-                  <a:srgbClr val="000000"/>
-                </a:solidFill>
-                <a:latin typeface="Arial"/>
-              </a:rPr>
-              <a:t>Not because touch was the wrong choice. Because nobody knew that a coin motor costs 12 kr and takes two wires.</a:t>
+              <a:rPr sz="1500" b="0">
+                <a:solidFill>
+                  <a:srgbClr val="000000"/>
+                </a:solidFill>
+                <a:latin typeface="Arial"/>
+              </a:rPr>
+              <a:t>• Better now than in week 46</a:t>
             </a:r>
           </a:p>
         </p:txBody>
@@ -7934,7 +8229,7 @@
                 </a:solidFill>
                 <a:latin typeface="Arial"/>
               </a:rPr>
-              <a:t>Six benches. Already wired. Already running.</a:t>
+              <a:t>Six benches, already wired and running</a:t>
             </a:r>
           </a:p>
           <a:p>
@@ -7954,7 +8249,7 @@
                 </a:solidFill>
                 <a:latin typeface="Arial"/>
               </a:rPr>
-              <a:t>• Ten minutes each, on a hard timer.</a:t>
+              <a:t>• Ten minutes each. Hard timer</a:t>
             </a:r>
           </a:p>
           <a:p>
@@ -7974,7 +8269,7 @@
                 </a:solidFill>
                 <a:latin typeface="Arial"/>
               </a:rPr>
-              <a:t>• You change one parameter and answer one question.</a:t>
+              <a:t>• Change one parameter, answer one question</a:t>
             </a:r>
           </a:p>
           <a:p>
@@ -7994,7 +8289,7 @@
                 </a:solidFill>
                 <a:latin typeface="Arial"/>
               </a:rPr>
-              <a:t>• You wire nothing. That is what the project weeks are for.</a:t>
+              <a:t>• You wire nothing today</a:t>
             </a:r>
           </a:p>
           <a:p>
@@ -8025,7 +8320,27 @@
                 </a:solidFill>
                 <a:latin typeface="Arial"/>
               </a:rPr>
-              <a:t>Then you build one signal and someone else tries to read it.</a:t>
+              <a:t>Then build one signal</a:t>
+            </a:r>
+          </a:p>
+          <a:p>
+            <a:pPr marL="0" indent="0" algn="l">
+              <a:lnSpc>
+                <a:spcPct val="128000"/>
+              </a:lnSpc>
+              <a:spcAft>
+                <a:spcPts val="700"/>
+              </a:spcAft>
+              <a:buNone/>
+            </a:pPr>
+            <a:r>
+              <a:rPr sz="1500" b="0">
+                <a:solidFill>
+                  <a:srgbClr val="000000"/>
+                </a:solidFill>
+                <a:latin typeface="Arial"/>
+              </a:rPr>
+              <a:t>• Someone else has to read it</a:t>
             </a:r>
           </a:p>
         </p:txBody>
@@ -8474,67 +8789,118 @@
                 <a:spcPct val="128000"/>
               </a:lnSpc>
               <a:spcAft>
+                <a:spcPts val="1200"/>
+              </a:spcAft>
+              <a:buNone/>
+            </a:pPr>
+            <a:r>
+              <a:rPr sz="1000" b="1">
+                <a:solidFill>
+                  <a:srgbClr val="595959"/>
+                </a:solidFill>
+                <a:latin typeface="Arial"/>
+              </a:rPr>
+              <a:t>VIBRATION</a:t>
+            </a:r>
+          </a:p>
+          <a:p>
+            <a:pPr marL="0" indent="0" algn="l">
+              <a:lnSpc>
+                <a:spcPct val="128000"/>
+              </a:lnSpc>
+              <a:spcAft>
+                <a:spcPts val="400"/>
+              </a:spcAft>
+              <a:buNone/>
+            </a:pPr>
+            <a:r>
+              <a:rPr sz="1600" b="0">
+                <a:solidFill>
+                  <a:srgbClr val="000000"/>
+                </a:solidFill>
+                <a:latin typeface="Arial"/>
+              </a:rPr>
+              <a:t>An off-centre weight on a motor shaft.</a:t>
+            </a:r>
+          </a:p>
+          <a:p>
+            <a:pPr marL="0" indent="0" algn="l">
+              <a:lnSpc>
+                <a:spcPct val="128000"/>
+              </a:lnSpc>
+              <a:spcAft>
+                <a:spcPts val="400"/>
+              </a:spcAft>
+              <a:buNone/>
+            </a:pPr>
+            <a:r>
+              <a:rPr sz="1600" b="0">
+                <a:solidFill>
+                  <a:srgbClr val="000000"/>
+                </a:solidFill>
+                <a:latin typeface="Arial"/>
+              </a:rPr>
+              <a:t>The same part as in your phone.</a:t>
+            </a:r>
+          </a:p>
+          <a:p>
+            <a:pPr marL="0" indent="0" algn="l">
+              <a:lnSpc>
+                <a:spcPct val="128000"/>
+              </a:lnSpc>
+              <a:spcAft>
+                <a:spcPts val="0"/>
+              </a:spcAft>
+              <a:buNone/>
+            </a:pPr>
+          </a:p>
+          <a:p>
+            <a:pPr marL="0" indent="0" algn="l">
+              <a:lnSpc>
+                <a:spcPct val="128000"/>
+              </a:lnSpc>
+              <a:spcAft>
+                <a:spcPts val="400"/>
+              </a:spcAft>
+              <a:buNone/>
+            </a:pPr>
+            <a:r>
+              <a:rPr sz="1600" b="0">
+                <a:solidFill>
+                  <a:srgbClr val="000000"/>
+                </a:solidFill>
+                <a:latin typeface="Arial"/>
+              </a:rPr>
+              <a:t>Speed and strength are welded together.</a:t>
+            </a:r>
+          </a:p>
+          <a:p>
+            <a:pPr marL="0" indent="0" algn="l">
+              <a:lnSpc>
+                <a:spcPct val="128000"/>
+              </a:lnSpc>
+              <a:spcAft>
+                <a:spcPts val="400"/>
+              </a:spcAft>
+              <a:buNone/>
+            </a:pPr>
+            <a:r>
+              <a:rPr sz="1600" b="0">
+                <a:solidFill>
+                  <a:srgbClr val="000000"/>
+                </a:solidFill>
+                <a:latin typeface="Arial"/>
+              </a:rPr>
+              <a:t>"Gentle but fast" is not on offer.</a:t>
+            </a:r>
+          </a:p>
+          <a:p>
+            <a:pPr marL="0" indent="0" algn="l">
+              <a:lnSpc>
+                <a:spcPct val="128000"/>
+              </a:lnSpc>
+              <a:spcAft>
                 <a:spcPts val="1000"/>
-              </a:spcAft>
-              <a:buNone/>
-            </a:pPr>
-            <a:r>
-              <a:rPr sz="1000" b="1">
-                <a:solidFill>
-                  <a:srgbClr val="595959"/>
-                </a:solidFill>
-                <a:latin typeface="Arial"/>
-              </a:rPr>
-              <a:t>VIBRATION</a:t>
-            </a:r>
-          </a:p>
-          <a:p>
-            <a:pPr marL="0" indent="0" algn="l">
-              <a:lnSpc>
-                <a:spcPct val="128000"/>
-              </a:lnSpc>
-              <a:spcAft>
-                <a:spcPts val="900"/>
-              </a:spcAft>
-              <a:buNone/>
-            </a:pPr>
-            <a:r>
-              <a:rPr sz="1600" b="0">
-                <a:solidFill>
-                  <a:srgbClr val="000000"/>
-                </a:solidFill>
-                <a:latin typeface="Arial"/>
-              </a:rPr>
-              <a:t>An off-centre weight on a motor shaft. The same part that is in your phone and every game controller.</a:t>
-            </a:r>
-          </a:p>
-          <a:p>
-            <a:pPr marL="0" indent="0" algn="l">
-              <a:lnSpc>
-                <a:spcPct val="128000"/>
-              </a:lnSpc>
-              <a:spcAft>
-                <a:spcPts val="900"/>
-              </a:spcAft>
-              <a:buNone/>
-            </a:pPr>
-            <a:r>
-              <a:rPr sz="1600" b="0">
-                <a:solidFill>
-                  <a:srgbClr val="000000"/>
-                </a:solidFill>
-                <a:latin typeface="Arial"/>
-              </a:rPr>
-              <a:t>Turn the knob and notice what you cannot do. Speed and strength are mechanically welded together, so "gentle but fast" is not available to you.</a:t>
-            </a:r>
-          </a:p>
-          <a:p>
-            <a:pPr marL="0" indent="0" algn="l">
-              <a:lnSpc>
-                <a:spcPct val="128000"/>
-              </a:lnSpc>
-              <a:spcAft>
-                <a:spcPts val="400"/>
               </a:spcAft>
               <a:buNone/>
             </a:pPr>
@@ -8833,87 +9199,149 @@
                 <a:spcPct val="128000"/>
               </a:lnSpc>
               <a:spcAft>
+                <a:spcPts val="1200"/>
+              </a:spcAft>
+              <a:buNone/>
+            </a:pPr>
+            <a:r>
+              <a:rPr sz="1000" b="1">
+                <a:solidFill>
+                  <a:srgbClr val="595959"/>
+                </a:solidFill>
+                <a:latin typeface="Arial"/>
+              </a:rPr>
+              <a:t>VIBRATION</a:t>
+            </a:r>
+          </a:p>
+          <a:p>
+            <a:pPr marL="0" indent="0" algn="l">
+              <a:lnSpc>
+                <a:spcPct val="128000"/>
+              </a:lnSpc>
+              <a:spcAft>
+                <a:spcPts val="400"/>
+              </a:spcAft>
+              <a:buNone/>
+            </a:pPr>
+            <a:r>
+              <a:rPr sz="1600" b="0">
+                <a:solidFill>
+                  <a:srgbClr val="000000"/>
+                </a:solidFill>
+                <a:latin typeface="Arial"/>
+              </a:rPr>
+              <a:t>Two ways out of bench 01's compromise.</a:t>
+            </a:r>
+          </a:p>
+          <a:p>
+            <a:pPr marL="0" indent="0" algn="l">
+              <a:lnSpc>
+                <a:spcPct val="128000"/>
+              </a:lnSpc>
+              <a:spcAft>
+                <a:spcPts val="0"/>
+              </a:spcAft>
+              <a:buNone/>
+            </a:pPr>
+          </a:p>
+          <a:p>
+            <a:pPr marL="0" indent="0" algn="l">
+              <a:lnSpc>
+                <a:spcPct val="128000"/>
+              </a:lnSpc>
+              <a:spcAft>
+                <a:spcPts val="400"/>
+              </a:spcAft>
+              <a:buNone/>
+            </a:pPr>
+            <a:r>
+              <a:rPr sz="1600" b="0">
+                <a:solidFill>
+                  <a:srgbClr val="000000"/>
+                </a:solidFill>
+                <a:latin typeface="Arial"/>
+              </a:rPr>
+              <a:t>LRA: resonance in 5 ms, stops just as fast.</a:t>
+            </a:r>
+          </a:p>
+          <a:p>
+            <a:pPr marL="0" indent="0" algn="l">
+              <a:lnSpc>
+                <a:spcPct val="128000"/>
+              </a:lnSpc>
+              <a:spcAft>
+                <a:spcPts val="400"/>
+              </a:spcAft>
+              <a:buNone/>
+            </a:pPr>
+            <a:r>
+              <a:rPr sz="1600" b="0">
+                <a:solidFill>
+                  <a:srgbClr val="000000"/>
+                </a:solidFill>
+                <a:latin typeface="Arial"/>
+              </a:rPr>
+              <a:t>The phone-keyboard feel.</a:t>
+            </a:r>
+          </a:p>
+          <a:p>
+            <a:pPr marL="0" indent="0" algn="l">
+              <a:lnSpc>
+                <a:spcPct val="128000"/>
+              </a:lnSpc>
+              <a:spcAft>
+                <a:spcPts val="0"/>
+              </a:spcAft>
+              <a:buNone/>
+            </a:pPr>
+          </a:p>
+          <a:p>
+            <a:pPr marL="0" indent="0" algn="l">
+              <a:lnSpc>
+                <a:spcPct val="128000"/>
+              </a:lnSpc>
+              <a:spcAft>
+                <a:spcPts val="400"/>
+              </a:spcAft>
+              <a:buNone/>
+            </a:pPr>
+            <a:r>
+              <a:rPr sz="1600" b="0">
+                <a:solidFill>
+                  <a:srgbClr val="000000"/>
+                </a:solidFill>
+                <a:latin typeface="Arial"/>
+              </a:rPr>
+              <a:t>Piezo: near-instant, almost no power.</a:t>
+            </a:r>
+          </a:p>
+          <a:p>
+            <a:pPr marL="0" indent="0" algn="l">
+              <a:lnSpc>
+                <a:spcPct val="128000"/>
+              </a:lnSpc>
+              <a:spcAft>
+                <a:spcPts val="400"/>
+              </a:spcAft>
+              <a:buNone/>
+            </a:pPr>
+            <a:r>
+              <a:rPr sz="1600" b="0">
+                <a:solidFill>
+                  <a:srgbClr val="000000"/>
+                </a:solidFill>
+                <a:latin typeface="Arial"/>
+              </a:rPr>
+              <a:t>A tick, not a thump.</a:t>
+            </a:r>
+          </a:p>
+          <a:p>
+            <a:pPr marL="0" indent="0" algn="l">
+              <a:lnSpc>
+                <a:spcPct val="128000"/>
+              </a:lnSpc>
+              <a:spcAft>
                 <a:spcPts val="1000"/>
-              </a:spcAft>
-              <a:buNone/>
-            </a:pPr>
-            <a:r>
-              <a:rPr sz="1000" b="1">
-                <a:solidFill>
-                  <a:srgbClr val="595959"/>
-                </a:solidFill>
-                <a:latin typeface="Arial"/>
-              </a:rPr>
-              <a:t>VIBRATION</a:t>
-            </a:r>
-          </a:p>
-          <a:p>
-            <a:pPr marL="0" indent="0" algn="l">
-              <a:lnSpc>
-                <a:spcPct val="128000"/>
-              </a:lnSpc>
-              <a:spcAft>
-                <a:spcPts val="900"/>
-              </a:spcAft>
-              <a:buNone/>
-            </a:pPr>
-            <a:r>
-              <a:rPr sz="1600" b="0">
-                <a:solidFill>
-                  <a:srgbClr val="000000"/>
-                </a:solidFill>
-                <a:latin typeface="Arial"/>
-              </a:rPr>
-              <a:t>Two ways out of the ERM's compromise.</a:t>
-            </a:r>
-          </a:p>
-          <a:p>
-            <a:pPr marL="0" indent="0" algn="l">
-              <a:lnSpc>
-                <a:spcPct val="128000"/>
-              </a:lnSpc>
-              <a:spcAft>
-                <a:spcPts val="900"/>
-              </a:spcAft>
-              <a:buNone/>
-            </a:pPr>
-            <a:r>
-              <a:rPr sz="1600" b="0">
-                <a:solidFill>
-                  <a:srgbClr val="000000"/>
-                </a:solidFill>
-                <a:latin typeface="Arial"/>
-              </a:rPr>
-              <a:t>The LRA hits resonance in about 5 ms and stops just as fast, which is why phone keyboards use it.</a:t>
-            </a:r>
-          </a:p>
-          <a:p>
-            <a:pPr marL="0" indent="0" algn="l">
-              <a:lnSpc>
-                <a:spcPct val="128000"/>
-              </a:lnSpc>
-              <a:spcAft>
-                <a:spcPts val="900"/>
-              </a:spcAft>
-              <a:buNone/>
-            </a:pPr>
-            <a:r>
-              <a:rPr sz="1600" b="0">
-                <a:solidFill>
-                  <a:srgbClr val="000000"/>
-                </a:solidFill>
-                <a:latin typeface="Arial"/>
-              </a:rPr>
-              <a:t>The piezo is a crystal that flexes when you put current across it. Near-instant, almost no power, but shallow. A tick, not a thump.</a:t>
-            </a:r>
-          </a:p>
-          <a:p>
-            <a:pPr marL="0" indent="0" algn="l">
-              <a:lnSpc>
-                <a:spcPct val="128000"/>
-              </a:lnSpc>
-              <a:spcAft>
-                <a:spcPts val="400"/>
               </a:spcAft>
               <a:buNone/>
             </a:pPr>
@@ -9192,67 +9620,118 @@
                 <a:spcPct val="128000"/>
               </a:lnSpc>
               <a:spcAft>
+                <a:spcPts val="1200"/>
+              </a:spcAft>
+              <a:buNone/>
+            </a:pPr>
+            <a:r>
+              <a:rPr sz="1000" b="1">
+                <a:solidFill>
+                  <a:srgbClr val="595959"/>
+                </a:solidFill>
+                <a:latin typeface="Arial"/>
+              </a:rPr>
+              <a:t>IMPACT</a:t>
+            </a:r>
+          </a:p>
+          <a:p>
+            <a:pPr marL="0" indent="0" algn="l">
+              <a:lnSpc>
+                <a:spcPct val="128000"/>
+              </a:lnSpc>
+              <a:spcAft>
+                <a:spcPts val="400"/>
+              </a:spcAft>
+              <a:buNone/>
+            </a:pPr>
+            <a:r>
+              <a:rPr sz="1600" b="0">
+                <a:solidFill>
+                  <a:srgbClr val="000000"/>
+                </a:solidFill>
+                <a:latin typeface="Arial"/>
+              </a:rPr>
+              <a:t>One 15 ms pulse against a fingertip.</a:t>
+            </a:r>
+          </a:p>
+          <a:p>
+            <a:pPr marL="0" indent="0" algn="l">
+              <a:lnSpc>
+                <a:spcPct val="128000"/>
+              </a:lnSpc>
+              <a:spcAft>
+                <a:spcPts val="0"/>
+              </a:spcAft>
+              <a:buNone/>
+            </a:pPr>
+          </a:p>
+          <a:p>
+            <a:pPr marL="0" indent="0" algn="l">
+              <a:lnSpc>
+                <a:spcPct val="128000"/>
+              </a:lnSpc>
+              <a:spcAft>
+                <a:spcPts val="400"/>
+              </a:spcAft>
+              <a:buNone/>
+            </a:pPr>
+            <a:r>
+              <a:rPr sz="1600" b="0">
+                <a:solidFill>
+                  <a:srgbClr val="000000"/>
+                </a:solidFill>
+                <a:latin typeface="Arial"/>
+              </a:rPr>
+              <a:t>The bench everyone remembers.</a:t>
+            </a:r>
+          </a:p>
+          <a:p>
+            <a:pPr marL="0" indent="0" algn="l">
+              <a:lnSpc>
+                <a:spcPct val="128000"/>
+              </a:lnSpc>
+              <a:spcAft>
+                <a:spcPts val="400"/>
+              </a:spcAft>
+              <a:buNone/>
+            </a:pPr>
+            <a:r>
+              <a:rPr sz="1600" b="0">
+                <a:solidFill>
+                  <a:srgbClr val="000000"/>
+                </a:solidFill>
+                <a:latin typeface="Arial"/>
+              </a:rPr>
+              <a:t>A knock reads as a person tapping you.</a:t>
+            </a:r>
+          </a:p>
+          <a:p>
+            <a:pPr marL="0" indent="0" algn="l">
+              <a:lnSpc>
+                <a:spcPct val="128000"/>
+              </a:lnSpc>
+              <a:spcAft>
+                <a:spcPts val="400"/>
+              </a:spcAft>
+              <a:buNone/>
+            </a:pPr>
+            <a:r>
+              <a:rPr sz="1600" b="0">
+                <a:solidFill>
+                  <a:srgbClr val="000000"/>
+                </a:solidFill>
+                <a:latin typeface="Arial"/>
+              </a:rPr>
+              <a:t>Buzzing reads as a machine.</a:t>
+            </a:r>
+          </a:p>
+          <a:p>
+            <a:pPr marL="0" indent="0" algn="l">
+              <a:lnSpc>
+                <a:spcPct val="128000"/>
+              </a:lnSpc>
+              <a:spcAft>
                 <a:spcPts val="1000"/>
-              </a:spcAft>
-              <a:buNone/>
-            </a:pPr>
-            <a:r>
-              <a:rPr sz="1000" b="1">
-                <a:solidFill>
-                  <a:srgbClr val="595959"/>
-                </a:solidFill>
-                <a:latin typeface="Arial"/>
-              </a:rPr>
-              <a:t>IMPACT</a:t>
-            </a:r>
-          </a:p>
-          <a:p>
-            <a:pPr marL="0" indent="0" algn="l">
-              <a:lnSpc>
-                <a:spcPct val="128000"/>
-              </a:lnSpc>
-              <a:spcAft>
-                <a:spcPts val="900"/>
-              </a:spcAft>
-              <a:buNone/>
-            </a:pPr>
-            <a:r>
-              <a:rPr sz="1600" b="0">
-                <a:solidFill>
-                  <a:srgbClr val="000000"/>
-                </a:solidFill>
-                <a:latin typeface="Arial"/>
-              </a:rPr>
-              <a:t>A push-pull solenoid firing a single 15 ms pulse against a fingertip.</a:t>
-            </a:r>
-          </a:p>
-          <a:p>
-            <a:pPr marL="0" indent="0" algn="l">
-              <a:lnSpc>
-                <a:spcPct val="128000"/>
-              </a:lnSpc>
-              <a:spcAft>
-                <a:spcPts val="900"/>
-              </a:spcAft>
-              <a:buNone/>
-            </a:pPr>
-            <a:r>
-              <a:rPr sz="1600" b="0">
-                <a:solidFill>
-                  <a:srgbClr val="000000"/>
-                </a:solidFill>
-                <a:latin typeface="Arial"/>
-              </a:rPr>
-              <a:t>This is the bench everyone remembers. A single knock carries urgency that no amount of buzzing does, because it reads as a person tapping you rather than a machine signalling.</a:t>
-            </a:r>
-          </a:p>
-          <a:p>
-            <a:pPr marL="0" indent="0" algn="l">
-              <a:lnSpc>
-                <a:spcPct val="128000"/>
-              </a:lnSpc>
-              <a:spcAft>
-                <a:spcPts val="400"/>
               </a:spcAft>
               <a:buNone/>
             </a:pPr>
@@ -9551,87 +10030,129 @@
                 <a:spcPct val="128000"/>
               </a:lnSpc>
               <a:spcAft>
+                <a:spcPts val="1200"/>
+              </a:spcAft>
+              <a:buNone/>
+            </a:pPr>
+            <a:r>
+              <a:rPr sz="1000" b="1">
+                <a:solidFill>
+                  <a:srgbClr val="595959"/>
+                </a:solidFill>
+                <a:latin typeface="Arial"/>
+              </a:rPr>
+              <a:t>TOUCH INPUT</a:t>
+            </a:r>
+          </a:p>
+          <a:p>
+            <a:pPr marL="0" indent="0" algn="l">
+              <a:lnSpc>
+                <a:spcPct val="128000"/>
+              </a:lnSpc>
+              <a:spcAft>
+                <a:spcPts val="400"/>
+              </a:spcAft>
+              <a:buNone/>
+            </a:pPr>
+            <a:r>
+              <a:rPr sz="1600" b="0">
+                <a:solidFill>
+                  <a:srgbClr val="000000"/>
+                </a:solidFill>
+                <a:latin typeface="Arial"/>
+              </a:rPr>
+              <a:t>Bare finger on a surface. Servos react.</a:t>
+            </a:r>
+          </a:p>
+          <a:p>
+            <a:pPr marL="0" indent="0" algn="l">
+              <a:lnSpc>
+                <a:spcPct val="128000"/>
+              </a:lnSpc>
+              <a:spcAft>
+                <a:spcPts val="0"/>
+              </a:spcAft>
+              <a:buNone/>
+            </a:pPr>
+          </a:p>
+          <a:p>
+            <a:pPr marL="0" indent="0" algn="l">
+              <a:lnSpc>
+                <a:spcPct val="128000"/>
+              </a:lnSpc>
+              <a:spcAft>
+                <a:spcPts val="400"/>
+              </a:spcAft>
+              <a:buNone/>
+            </a:pPr>
+            <a:r>
+              <a:rPr sz="1600" b="0">
+                <a:solidFill>
+                  <a:srgbClr val="000000"/>
+                </a:solidFill>
+                <a:latin typeface="Arial"/>
+              </a:rPr>
+              <a:t>No button. No sensor you can point at.</a:t>
+            </a:r>
+          </a:p>
+          <a:p>
+            <a:pPr marL="0" indent="0" algn="l">
+              <a:lnSpc>
+                <a:spcPct val="128000"/>
+              </a:lnSpc>
+              <a:spcAft>
+                <a:spcPts val="400"/>
+              </a:spcAft>
+              <a:buNone/>
+            </a:pPr>
+            <a:r>
+              <a:rPr sz="1600" b="0">
+                <a:solidFill>
+                  <a:srgbClr val="000000"/>
+                </a:solidFill>
+                <a:latin typeface="Arial"/>
+              </a:rPr>
+              <a:t>The input is a wire behind a plate.</a:t>
+            </a:r>
+          </a:p>
+          <a:p>
+            <a:pPr marL="0" indent="0" algn="l">
+              <a:lnSpc>
+                <a:spcPct val="128000"/>
+              </a:lnSpc>
+              <a:spcAft>
+                <a:spcPts val="0"/>
+              </a:spcAft>
+              <a:buNone/>
+            </a:pPr>
+          </a:p>
+          <a:p>
+            <a:pPr marL="0" indent="0" algn="l">
+              <a:lnSpc>
+                <a:spcPct val="128000"/>
+              </a:lnSpc>
+              <a:spcAft>
+                <a:spcPts val="400"/>
+              </a:spcAft>
+              <a:buNone/>
+            </a:pPr>
+            <a:r>
+              <a:rPr sz="1600" b="0">
+                <a:solidFill>
+                  <a:srgbClr val="000000"/>
+                </a:solidFill>
+                <a:latin typeface="Arial"/>
+              </a:rPr>
+              <a:t>Foil, card, fabric. Anything works.</a:t>
+            </a:r>
+          </a:p>
+          <a:p>
+            <a:pPr marL="0" indent="0" algn="l">
+              <a:lnSpc>
+                <a:spcPct val="128000"/>
+              </a:lnSpc>
+              <a:spcAft>
                 <a:spcPts val="1000"/>
-              </a:spcAft>
-              <a:buNone/>
-            </a:pPr>
-            <a:r>
-              <a:rPr sz="1000" b="1">
-                <a:solidFill>
-                  <a:srgbClr val="595959"/>
-                </a:solidFill>
-                <a:latin typeface="Arial"/>
-              </a:rPr>
-              <a:t>TOUCH INPUT</a:t>
-            </a:r>
-          </a:p>
-          <a:p>
-            <a:pPr marL="0" indent="0" algn="l">
-              <a:lnSpc>
-                <a:spcPct val="128000"/>
-              </a:lnSpc>
-              <a:spcAft>
-                <a:spcPts val="900"/>
-              </a:spcAft>
-              <a:buNone/>
-            </a:pPr>
-            <a:r>
-              <a:rPr sz="1600" b="0">
-                <a:solidFill>
-                  <a:srgbClr val="000000"/>
-                </a:solidFill>
-                <a:latin typeface="Arial"/>
-              </a:rPr>
-              <a:t>Touch a surface with a bare finger and the servos react.</a:t>
-            </a:r>
-          </a:p>
-          <a:p>
-            <a:pPr marL="0" indent="0" algn="l">
-              <a:lnSpc>
-                <a:spcPct val="128000"/>
-              </a:lnSpc>
-              <a:spcAft>
-                <a:spcPts val="900"/>
-              </a:spcAft>
-              <a:buNone/>
-            </a:pPr>
-            <a:r>
-              <a:rPr sz="1600" b="0">
-                <a:solidFill>
-                  <a:srgbClr val="000000"/>
-                </a:solidFill>
-                <a:latin typeface="Arial"/>
-              </a:rPr>
-              <a:t>There is no button and no sensor you can point at. The input is a wire taped behind a plate, read on an analogue pin.</a:t>
-            </a:r>
-          </a:p>
-          <a:p>
-            <a:pPr marL="0" indent="0" algn="l">
-              <a:lnSpc>
-                <a:spcPct val="128000"/>
-              </a:lnSpc>
-              <a:spcAft>
-                <a:spcPts val="900"/>
-              </a:spcAft>
-              <a:buNone/>
-            </a:pPr>
-            <a:r>
-              <a:rPr sz="1600" b="0">
-                <a:solidFill>
-                  <a:srgbClr val="000000"/>
-                </a:solidFill>
-                <a:latin typeface="Arial"/>
-              </a:rPr>
-              <a:t>Any surface can become an input this way: foil, card, fabric.</a:t>
-            </a:r>
-          </a:p>
-          <a:p>
-            <a:pPr marL="0" indent="0" algn="l">
-              <a:lnSpc>
-                <a:spcPct val="128000"/>
-              </a:lnSpc>
-              <a:spcAft>
-                <a:spcPts val="400"/>
               </a:spcAft>
               <a:buNone/>
             </a:pPr>

--- a/docs/multimodal-actuator-workshop.pptx
+++ b/docs/multimodal-actuator-workshop.pptx
@@ -24,6 +24,9 @@
     <p:sldId id="272" r:id="rId23"/>
     <p:sldId id="273" r:id="rId24"/>
     <p:sldId id="274" r:id="rId25"/>
+    <p:sldId id="275" r:id="rId26"/>
+    <p:sldId id="276" r:id="rId27"/>
+    <p:sldId id="277" r:id="rId28"/>
   </p:sldIdLst>
   <p:sldSz cx="12188952" cy="6858000" type="screen4x3"/>
   <p:notesSz cx="6858000" cy="9144000"/>
@@ -920,24 +923,34 @@
           <a:lstStyle/>
           <a:p>
             <a:r>
-              <a:t>1:10. Rotation over. Round-the-room now.</a:t>
+              <a:t>0:50. Tasks start. This is the half of the session they will remember</a:t>
+            </a:r>
+          </a:p>
+          <a:p>
+            <a:r>
+              <a:t>having done, rather than watched.</a:t>
             </a:r>
           </a:p>
           <a:p/>
           <a:p>
             <a:r>
-              <a:t>One sentence per group: what surprised you. No slides, no laptops. Ten minutes.</a:t>
+              <a:t>Hand out boards. One per pair is fine, one each is better. Everything is on</a:t>
+            </a:r>
+          </a:p>
+          <a:p>
+            <a:r>
+              <a:t>GitHub, and the repo link is on the next-but-one slide.</a:t>
             </a:r>
           </a:p>
           <a:p/>
           <a:p>
             <a:r>
-              <a:t>Expect the thermal group to report the delay. Let that land, it is more</a:t>
-            </a:r>
-          </a:p>
-          <a:p>
-            <a:r>
-              <a:t>persuasive coming from a peer than from you.</a:t>
+              <a:t>Say clearly: you do NOT have to finish all five. Getting task 1 working and</a:t>
+            </a:r>
+          </a:p>
+          <a:p>
+            <a:r>
+              <a:t>then properly playing with task 2 beats rushing through all of them.</a:t>
             </a:r>
           </a:p>
         </p:txBody>
@@ -1007,39 +1020,34 @@
           <a:lstStyle/>
           <a:p>
             <a:r>
-              <a:t>Mention, don't teach. These sit on one table with a sign. The slide is one</a:t>
-            </a:r>
-          </a:p>
-          <a:p>
-            <a:r>
-              <a:t>line each; the caveats below are what actually saves them time.</a:t>
+              <a:t>Walk the list in about ninety seconds, no more.</a:t>
             </a:r>
           </a:p>
           <a:p/>
           <a:p>
             <a:r>
-              <a:t>The honest warnings matter more than the specs: PPG is garbage once the hand</a:t>
-            </a:r>
-          </a:p>
-          <a:p>
-            <a:r>
-              <a:t>moves, GSR drifts so only relative change is usable, FSRs need per-pad</a:t>
-            </a:r>
-          </a:p>
-          <a:p>
-            <a:r>
-              <a:t>calibration.</a:t>
+              <a:t>The arc matters and is worth naming: 1 to 3 are output, 4 is input, 5 is both</a:t>
+            </a:r>
+          </a:p>
+          <a:p>
+            <a:r>
+              <a:t>together. By task 5 they have built a complete interaction loop, which is the</a:t>
+            </a:r>
+          </a:p>
+          <a:p>
+            <a:r>
+              <a:t>shape of most things they will make in the project weeks.</a:t>
             </a:r>
           </a:p>
           <a:p/>
           <a:p>
             <a:r>
-              <a:t>Push the phone option hard. For a lot of projects it genuinely beats</a:t>
-            </a:r>
-          </a:p>
-          <a:p>
-            <a:r>
-              <a:t>everything else on the table and needs no soldering.</a:t>
+              <a:t>Point out that task 5's last experiment IS the closing brief, so the work</a:t>
+            </a:r>
+          </a:p>
+          <a:p>
+            <a:r>
+              <a:t>carries straight over.</a:t>
             </a:r>
           </a:p>
         </p:txBody>
@@ -1109,50 +1117,55 @@
           <a:lstStyle/>
           <a:p>
             <a:r>
-              <a:t>Five minutes, and show the actual repos on screen if you can. The slide names</a:t>
-            </a:r>
-          </a:p>
-          <a:p>
-            <a:r>
-              <a:t>them; you supply the detail.</a:t>
+              <a:t>The format is the same every time, so say it once here rather than at</a:t>
+            </a:r>
+          </a:p>
+          <a:p>
+            <a:r>
+              <a:t>every bench.</a:t>
             </a:r>
           </a:p>
           <a:p/>
           <a:p>
             <a:r>
-              <a:t>The moving screen has a browser control panel over the serial port, which is</a:t>
-            </a:r>
-          </a:p>
-          <a:p>
-            <a:r>
-              <a:t>exactly what you want at the project demonstrations.</a:t>
+              <a:t>CHANGE ME at the top: two or three numbers, already set to something that</a:t>
+            </a:r>
+          </a:p>
+          <a:p>
+            <a:r>
+              <a:t>works. THINGS TO TRY at the bottom: four experiments, easy to hard, and the</a:t>
+            </a:r>
+          </a:p>
+          <a:p>
+            <a:r>
+              <a:t>last one usually asks them to rewrite a function rather than tweak a value.</a:t>
             </a:r>
           </a:p>
           <a:p/>
           <a:p>
             <a:r>
-              <a:t>The argument: this was built by students at your stage, not by a lab with a</a:t>
-            </a:r>
-          </a:p>
-          <a:p>
-            <a:r>
-              <a:t>budget. The gap between "we should use haptics" and "it moves when you touch</a:t>
-            </a:r>
-          </a:p>
-          <a:p>
-            <a:r>
-              <a:t>it" is smaller than it looks.</a:t>
+              <a:t>Common upload problems, in the order they will hit you:</a:t>
+            </a:r>
+          </a:p>
+          <a:p>
+            <a:r>
+              <a:t>  * wrong board or port under Tools</a:t>
+            </a:r>
+          </a:p>
+          <a:p>
+            <a:r>
+              <a:t>  * ADCTouch not installed (tasks 4 and 5)</a:t>
+            </a:r>
+          </a:p>
+          <a:p>
+            <a:r>
+              <a:t>  * solenoid bench: board resets on fire = the bench supply is off</a:t>
             </a:r>
           </a:p>
           <a:p/>
           <a:p>
             <a:r>
-              <a:t>Note for you: the sock repo has a hardcoded Wi-Fi password and live patient</a:t>
-            </a:r>
-          </a:p>
-          <a:p>
-            <a:r>
-              <a:t>IDs in it. Scrub before showing, or show only the calibration section.</a:t>
+              <a:t>Write the repo URL on the whiteboard now. It will be asked for six times.</a:t>
             </a:r>
           </a:p>
         </p:txBody>
@@ -1222,18 +1235,24 @@
           <a:lstStyle/>
           <a:p>
             <a:r>
-              <a:t>1:20. Build starts. Thirty minutes.</a:t>
+              <a:t>0:40. Tour over. Round-the-room now.</a:t>
             </a:r>
           </a:p>
           <a:p/>
           <a:p>
             <a:r>
-              <a:t>Groups pick any actuator from the rotation. Most will pick bench 1 or 3</a:t>
-            </a:r>
-          </a:p>
-          <a:p>
-            <a:r>
-              <a:t>because they are simplest. That is fine, the constraint does the work.</a:t>
+              <a:t>One sentence per group: what surprised you. No slides, no laptops. Ten minutes.</a:t>
+            </a:r>
+          </a:p>
+          <a:p/>
+          <a:p>
+            <a:r>
+              <a:t>Expect the thermal group to report the delay. Let that land, it is more</a:t>
+            </a:r>
+          </a:p>
+          <a:p>
+            <a:r>
+              <a:t>persuasive coming from a peer than from you.</a:t>
             </a:r>
           </a:p>
         </p:txBody>
@@ -1303,50 +1322,39 @@
           <a:lstStyle/>
           <a:p>
             <a:r>
-              <a:t>Read the brief out once, then get out of the way. Full wording, since the</a:t>
-            </a:r>
-          </a:p>
-          <a:p>
-            <a:r>
-              <a:t>slide is only the bones:</a:t>
+              <a:t>Mention, don't teach. These sit on one table with a sign. The slide is one</a:t>
+            </a:r>
+          </a:p>
+          <a:p>
+            <a:r>
+              <a:t>line each; the caveats below are what actually saves them time.</a:t>
             </a:r>
           </a:p>
           <a:p/>
           <a:p>
             <a:r>
-              <a:t>"Pick one actuator. Encode three messages: arrived, something wrong, finished.</a:t>
-            </a:r>
-          </a:p>
-          <a:p>
-            <a:r>
-              <a:t>Vary only the rhythm of the pulses and how strong they are. Then hand it to</a:t>
-            </a:r>
-          </a:p>
-          <a:p>
-            <a:r>
-              <a:t>another group with the screen turned away and see if they can name all three."</a:t>
+              <a:t>The honest warnings matter more than the specs: PPG is garbage once the hand</a:t>
+            </a:r>
+          </a:p>
+          <a:p>
+            <a:r>
+              <a:t>moves, GSR drifts so only relative change is usable, FSRs need per-pad</a:t>
+            </a:r>
+          </a:p>
+          <a:p>
+            <a:r>
+              <a:t>calibration.</a:t>
             </a:r>
           </a:p>
           <a:p/>
           <a:p>
             <a:r>
-              <a:t>Rhythm and strength only. If someone asks to add a second actuator, say no.</a:t>
-            </a:r>
-          </a:p>
-          <a:p>
-            <a:r>
-              <a:t>The constraint is the exercise. Encoding within one channel is the skill.</a:t>
-            </a:r>
-          </a:p>
-          <a:p/>
-          <a:p>
-            <a:r>
-              <a:t>Suggested set is on the slide, but let them choose their own three messages if</a:t>
-            </a:r>
-          </a:p>
-          <a:p>
-            <a:r>
-              <a:t>they have a better idea.</a:t>
+              <a:t>Push the phone option hard. For a lot of projects it genuinely beats</a:t>
+            </a:r>
+          </a:p>
+          <a:p>
+            <a:r>
+              <a:t>everything else on the table and needs no soldering.</a:t>
             </a:r>
           </a:p>
         </p:txBody>
@@ -1416,35 +1424,50 @@
           <a:lstStyle/>
           <a:p>
             <a:r>
-              <a:t>This is the line worth repeating twice.</a:t>
+              <a:t>Five minutes, and show the actual repos on screen if you can. The slide names</a:t>
+            </a:r>
+          </a:p>
+          <a:p>
+            <a:r>
+              <a:t>them; you supply the detail.</a:t>
             </a:r>
           </a:p>
           <a:p/>
           <a:p>
             <a:r>
-              <a:t>1:50. Blind test. Swap groups, receiver looks away, guess all three.</a:t>
+              <a:t>The moving screen has a browser control panel over the serial port, which is</a:t>
+            </a:r>
+          </a:p>
+          <a:p>
+            <a:r>
+              <a:t>exactly what you want at the project demonstrations.</a:t>
             </a:r>
           </a:p>
           <a:p/>
           <a:p>
             <a:r>
-              <a:t>Then have each group name which two got confused and what would have separated</a:t>
-            </a:r>
-          </a:p>
-          <a:p>
-            <a:r>
-              <a:t>them. That confusion is the actual learning, not the successful ones.</a:t>
+              <a:t>The argument: this was built by students at your stage, not by a lab with a</a:t>
+            </a:r>
+          </a:p>
+          <a:p>
+            <a:r>
+              <a:t>budget. The gap between "we should use haptics" and "it moves when you touch</a:t>
+            </a:r>
+          </a:p>
+          <a:p>
+            <a:r>
+              <a:t>it" is smaller than it looks.</a:t>
             </a:r>
           </a:p>
           <a:p/>
           <a:p>
             <a:r>
-              <a:t>Pack down: everything back in the box, including the resistors. It will not</a:t>
-            </a:r>
-          </a:p>
-          <a:p>
-            <a:r>
-              <a:t>all come back.</a:t>
+              <a:t>Note for you: the sock repo has a hardcoded Wi-Fi password and live patient</a:t>
+            </a:r>
+          </a:p>
+          <a:p>
+            <a:r>
+              <a:t>IDs in it. Scrub before showing, or show only the calibration section.</a:t>
             </a:r>
           </a:p>
         </p:txBody>
@@ -1514,24 +1537,18 @@
           <a:lstStyle/>
           <a:p>
             <a:r>
-              <a:t>Point them at the repo. Bench 01 and 04 sketches are commented for them.</a:t>
+              <a:t>1:40. Blind test. Thirty minutes.</a:t>
             </a:r>
           </a:p>
           <a:p/>
           <a:p>
             <a:r>
-              <a:t>Last thing to say: pick your actuator before you design the interaction, not</a:t>
-            </a:r>
-          </a:p>
-          <a:p>
-            <a:r>
-              <a:t>after. Today was so they can do that from experience rather than a datasheet.</a:t>
-            </a:r>
-          </a:p>
-          <a:p/>
-          <a:p>
-            <a:r>
-              <a:t>If anyone wants to borrow parts for the project weeks, now is when they ask.</a:t>
+              <a:t>Groups pick any actuator from the rotation. Most will pick bench 1 or 3</a:t>
+            </a:r>
+          </a:p>
+          <a:p>
+            <a:r>
+              <a:t>because they are simplest. That is fine, the constraint does the work.</a:t>
             </a:r>
           </a:p>
         </p:txBody>
@@ -1671,6 +1688,304 @@
 </p:notes>
 </file>
 
+<file path=ppt/notesSlides/notesSlide20.xml><?xml version="1.0" encoding="utf-8"?>
+<p:notes xmlns:a="http://schemas.openxmlformats.org/drawingml/2006/main" xmlns:p="http://schemas.openxmlformats.org/presentationml/2006/main" xmlns:r="http://schemas.openxmlformats.org/officeDocument/2006/relationships">
+  <p:cSld>
+    <p:spTree>
+      <p:nvGrpSpPr>
+        <p:cNvPr id="1" name=""/>
+        <p:cNvGrpSpPr/>
+        <p:nvPr/>
+      </p:nvGrpSpPr>
+      <p:grpSpPr>
+        <a:xfrm>
+          <a:off x="0" y="0"/>
+          <a:ext cx="0" cy="0"/>
+          <a:chOff x="0" y="0"/>
+          <a:chExt cx="0" cy="0"/>
+        </a:xfrm>
+      </p:grpSpPr>
+      <p:sp>
+        <p:nvSpPr>
+          <p:cNvPr id="2" name="Slide Image Placeholder 1"/>
+          <p:cNvSpPr>
+            <a:spLocks noGrp="1"/>
+          </p:cNvSpPr>
+          <p:nvPr>
+            <p:ph type="sldImg" idx="2"/>
+          </p:nvPr>
+        </p:nvSpPr>
+        <p:spPr/>
+      </p:sp>
+      <p:sp>
+        <p:nvSpPr>
+          <p:cNvPr id="3" name="Notes Placeholder 2"/>
+          <p:cNvSpPr>
+            <a:spLocks noGrp="1"/>
+          </p:cNvSpPr>
+          <p:nvPr>
+            <p:ph type="body" idx="3" sz="quarter"/>
+          </p:nvPr>
+        </p:nvSpPr>
+        <p:spPr/>
+        <p:txBody>
+          <a:bodyPr/>
+          <a:lstStyle/>
+          <a:p>
+            <a:r>
+              <a:t>Read the brief out once, then get out of the way. Full wording, since the</a:t>
+            </a:r>
+          </a:p>
+          <a:p>
+            <a:r>
+              <a:t>slide is only the bones:</a:t>
+            </a:r>
+          </a:p>
+          <a:p/>
+          <a:p>
+            <a:r>
+              <a:t>"Pick one actuator. Encode three messages: arrived, something wrong, finished.</a:t>
+            </a:r>
+          </a:p>
+          <a:p>
+            <a:r>
+              <a:t>Vary only the rhythm of the pulses and how strong they are. Then hand it to</a:t>
+            </a:r>
+          </a:p>
+          <a:p>
+            <a:r>
+              <a:t>another group with the screen turned away and see if they can name all three."</a:t>
+            </a:r>
+          </a:p>
+          <a:p/>
+          <a:p>
+            <a:r>
+              <a:t>Rhythm and strength only. If someone asks to add a second actuator, say no.</a:t>
+            </a:r>
+          </a:p>
+          <a:p>
+            <a:r>
+              <a:t>The constraint is the exercise. Encoding within one channel is the skill.</a:t>
+            </a:r>
+          </a:p>
+          <a:p/>
+          <a:p>
+            <a:r>
+              <a:t>Suggested set is on the slide, but let them choose their own three messages if</a:t>
+            </a:r>
+          </a:p>
+          <a:p>
+            <a:r>
+              <a:t>they have a better idea.</a:t>
+            </a:r>
+          </a:p>
+        </p:txBody>
+      </p:sp>
+      <p:sp>
+        <p:nvSpPr>
+          <p:cNvPr id="4" name="Slide Number Placeholder 3"/>
+          <p:cNvSpPr>
+            <a:spLocks noGrp="1"/>
+          </p:cNvSpPr>
+          <p:nvPr>
+            <p:ph type="sldNum" idx="5" sz="quarter"/>
+          </p:nvPr>
+        </p:nvSpPr>
+        <p:spPr/>
+      </p:sp>
+    </p:spTree>
+  </p:cSld>
+  <p:clrMapOvr>
+    <a:masterClrMapping/>
+  </p:clrMapOvr>
+</p:notes>
+</file>
+
+<file path=ppt/notesSlides/notesSlide21.xml><?xml version="1.0" encoding="utf-8"?>
+<p:notes xmlns:a="http://schemas.openxmlformats.org/drawingml/2006/main" xmlns:p="http://schemas.openxmlformats.org/presentationml/2006/main" xmlns:r="http://schemas.openxmlformats.org/officeDocument/2006/relationships">
+  <p:cSld>
+    <p:spTree>
+      <p:nvGrpSpPr>
+        <p:cNvPr id="1" name=""/>
+        <p:cNvGrpSpPr/>
+        <p:nvPr/>
+      </p:nvGrpSpPr>
+      <p:grpSpPr>
+        <a:xfrm>
+          <a:off x="0" y="0"/>
+          <a:ext cx="0" cy="0"/>
+          <a:chOff x="0" y="0"/>
+          <a:chExt cx="0" cy="0"/>
+        </a:xfrm>
+      </p:grpSpPr>
+      <p:sp>
+        <p:nvSpPr>
+          <p:cNvPr id="2" name="Slide Image Placeholder 1"/>
+          <p:cNvSpPr>
+            <a:spLocks noGrp="1"/>
+          </p:cNvSpPr>
+          <p:nvPr>
+            <p:ph type="sldImg" idx="2"/>
+          </p:nvPr>
+        </p:nvSpPr>
+        <p:spPr/>
+      </p:sp>
+      <p:sp>
+        <p:nvSpPr>
+          <p:cNvPr id="3" name="Notes Placeholder 2"/>
+          <p:cNvSpPr>
+            <a:spLocks noGrp="1"/>
+          </p:cNvSpPr>
+          <p:nvPr>
+            <p:ph type="body" idx="3" sz="quarter"/>
+          </p:nvPr>
+        </p:nvSpPr>
+        <p:spPr/>
+        <p:txBody>
+          <a:bodyPr/>
+          <a:lstStyle/>
+          <a:p>
+            <a:r>
+              <a:t>This is the line worth repeating twice.</a:t>
+            </a:r>
+          </a:p>
+          <a:p/>
+          <a:p>
+            <a:r>
+              <a:t>Wrap up. Swap groups, receiver looks away, guess all three.</a:t>
+            </a:r>
+          </a:p>
+          <a:p/>
+          <a:p>
+            <a:r>
+              <a:t>Then have each group name which two got confused and what would have separated</a:t>
+            </a:r>
+          </a:p>
+          <a:p>
+            <a:r>
+              <a:t>them. That confusion is the actual learning, not the successful ones.</a:t>
+            </a:r>
+          </a:p>
+          <a:p/>
+          <a:p>
+            <a:r>
+              <a:t>Pack down: everything back in the box, including the resistors. It will not</a:t>
+            </a:r>
+          </a:p>
+          <a:p>
+            <a:r>
+              <a:t>all come back.</a:t>
+            </a:r>
+          </a:p>
+        </p:txBody>
+      </p:sp>
+      <p:sp>
+        <p:nvSpPr>
+          <p:cNvPr id="4" name="Slide Number Placeholder 3"/>
+          <p:cNvSpPr>
+            <a:spLocks noGrp="1"/>
+          </p:cNvSpPr>
+          <p:nvPr>
+            <p:ph type="sldNum" idx="5" sz="quarter"/>
+          </p:nvPr>
+        </p:nvSpPr>
+        <p:spPr/>
+      </p:sp>
+    </p:spTree>
+  </p:cSld>
+  <p:clrMapOvr>
+    <a:masterClrMapping/>
+  </p:clrMapOvr>
+</p:notes>
+</file>
+
+<file path=ppt/notesSlides/notesSlide22.xml><?xml version="1.0" encoding="utf-8"?>
+<p:notes xmlns:a="http://schemas.openxmlformats.org/drawingml/2006/main" xmlns:p="http://schemas.openxmlformats.org/presentationml/2006/main" xmlns:r="http://schemas.openxmlformats.org/officeDocument/2006/relationships">
+  <p:cSld>
+    <p:spTree>
+      <p:nvGrpSpPr>
+        <p:cNvPr id="1" name=""/>
+        <p:cNvGrpSpPr/>
+        <p:nvPr/>
+      </p:nvGrpSpPr>
+      <p:grpSpPr>
+        <a:xfrm>
+          <a:off x="0" y="0"/>
+          <a:ext cx="0" cy="0"/>
+          <a:chOff x="0" y="0"/>
+          <a:chExt cx="0" cy="0"/>
+        </a:xfrm>
+      </p:grpSpPr>
+      <p:sp>
+        <p:nvSpPr>
+          <p:cNvPr id="2" name="Slide Image Placeholder 1"/>
+          <p:cNvSpPr>
+            <a:spLocks noGrp="1"/>
+          </p:cNvSpPr>
+          <p:nvPr>
+            <p:ph type="sldImg" idx="2"/>
+          </p:nvPr>
+        </p:nvSpPr>
+        <p:spPr/>
+      </p:sp>
+      <p:sp>
+        <p:nvSpPr>
+          <p:cNvPr id="3" name="Notes Placeholder 2"/>
+          <p:cNvSpPr>
+            <a:spLocks noGrp="1"/>
+          </p:cNvSpPr>
+          <p:nvPr>
+            <p:ph type="body" idx="3" sz="quarter"/>
+          </p:nvPr>
+        </p:nvSpPr>
+        <p:spPr/>
+        <p:txBody>
+          <a:bodyPr/>
+          <a:lstStyle/>
+          <a:p>
+            <a:r>
+              <a:t>Point them at the repo. Bench 01 and 04 sketches are commented for them.</a:t>
+            </a:r>
+          </a:p>
+          <a:p/>
+          <a:p>
+            <a:r>
+              <a:t>Last thing to say: pick your actuator before you design the interaction, not</a:t>
+            </a:r>
+          </a:p>
+          <a:p>
+            <a:r>
+              <a:t>after. Today was so they can do that from experience rather than a datasheet.</a:t>
+            </a:r>
+          </a:p>
+          <a:p/>
+          <a:p>
+            <a:r>
+              <a:t>If anyone wants to borrow parts for the project weeks, now is when they ask.</a:t>
+            </a:r>
+          </a:p>
+        </p:txBody>
+      </p:sp>
+      <p:sp>
+        <p:nvSpPr>
+          <p:cNvPr id="4" name="Slide Number Placeholder 3"/>
+          <p:cNvSpPr>
+            <a:spLocks noGrp="1"/>
+          </p:cNvSpPr>
+          <p:nvPr>
+            <p:ph type="sldNum" idx="5" sz="quarter"/>
+          </p:nvPr>
+        </p:nvSpPr>
+        <p:spPr/>
+      </p:sp>
+    </p:spTree>
+  </p:cSld>
+  <p:clrMapOvr>
+    <a:masterClrMapping/>
+  </p:clrMapOvr>
+</p:notes>
+</file>
+
 <file path=ppt/notesSlides/notesSlide3.xml><?xml version="1.0" encoding="utf-8"?>
 <p:notes xmlns:a="http://schemas.openxmlformats.org/drawingml/2006/main" xmlns:p="http://schemas.openxmlformats.org/presentationml/2006/main" xmlns:r="http://schemas.openxmlformats.org/officeDocument/2006/relationships">
   <p:cSld>
@@ -1900,7 +2215,7 @@
           <a:lstStyle/>
           <a:p>
             <a:r>
-              <a:t>0:10. Rotation starts. Set a visible timer.</a:t>
+              <a:t>0:10. Tour starts. Five minutes a bench, not ten. Set a visible timer.</a:t>
             </a:r>
           </a:p>
           <a:p/>
@@ -5914,6 +6229,26 @@
                 <a:spcPct val="128000"/>
               </a:lnSpc>
               <a:spcAft>
+                <a:spcPts val="400"/>
+              </a:spcAft>
+              <a:buNone/>
+            </a:pPr>
+            <a:r>
+              <a:rPr sz="1600" b="0">
+                <a:solidFill>
+                  <a:srgbClr val="000000"/>
+                </a:solidFill>
+                <a:latin typeface="Arial"/>
+              </a:rPr>
+              <a:t>Hot alternating with cold reads as lukewarm.</a:t>
+            </a:r>
+          </a:p>
+          <a:p>
+            <a:pPr marL="0" indent="0" algn="l">
+              <a:lnSpc>
+                <a:spcPct val="128000"/>
+              </a:lnSpc>
+              <a:spcAft>
                 <a:spcPts val="0"/>
               </a:spcAft>
               <a:buNone/>
@@ -5936,7 +6271,27 @@
                 </a:solidFill>
                 <a:latin typeface="Arial"/>
               </a:rPr>
-              <a:t>Hot alternating with cold reads as lukewarm.</a:t>
+              <a:t>USED FOR: slow ambient state, not alerts.</a:t>
+            </a:r>
+          </a:p>
+          <a:p>
+            <a:pPr marL="0" indent="0" algn="l">
+              <a:lnSpc>
+                <a:spcPct val="128000"/>
+              </a:lnSpc>
+              <a:spcAft>
+                <a:spcPts val="400"/>
+              </a:spcAft>
+              <a:buNone/>
+            </a:pPr>
+            <a:r>
+              <a:rPr sz="1600" b="0">
+                <a:solidFill>
+                  <a:srgbClr val="000000"/>
+                </a:solidFill>
+                <a:latin typeface="Arial"/>
+              </a:rPr>
+              <a:t>"The room is busy", never "you have mail".</a:t>
             </a:r>
           </a:p>
           <a:p>
@@ -6306,19 +6661,8 @@
                 </a:solidFill>
                 <a:latin typeface="Arial"/>
               </a:rPr>
-              <a:t>Toggle them alone, then together.</a:t>
-            </a:r>
-          </a:p>
-          <a:p>
-            <a:pPr marL="0" indent="0" algn="l">
-              <a:lnSpc>
-                <a:spcPct val="128000"/>
-              </a:lnSpc>
-              <a:spcAft>
-                <a:spcPts val="0"/>
-              </a:spcAft>
-              <a:buNone/>
-            </a:pPr>
+              <a:t>Together is not louder. It is more certain.</a:t>
+            </a:r>
           </a:p>
           <a:p>
             <a:pPr marL="0" indent="0" algn="l">
@@ -6337,27 +6681,7 @@
                 </a:solidFill>
                 <a:latin typeface="Arial"/>
               </a:rPr>
-              <a:t>Together is not louder. It is more certain.</a:t>
-            </a:r>
-          </a:p>
-          <a:p>
-            <a:pPr marL="0" indent="0" algn="l">
-              <a:lnSpc>
-                <a:spcPct val="128000"/>
-              </a:lnSpc>
-              <a:spcAft>
-                <a:spcPts val="400"/>
-              </a:spcAft>
-              <a:buNone/>
-            </a:pPr>
-            <a:r>
-              <a:rPr sz="1600" b="0">
-                <a:solidFill>
-                  <a:srgbClr val="000000"/>
-                </a:solidFill>
-                <a:latin typeface="Arial"/>
-              </a:rPr>
-              <a:t>Two channels, same message. Cheap reliability.</a:t>
+              <a:t>Two channels, same message.</a:t>
             </a:r>
           </a:p>
           <a:p>
@@ -6427,6 +6751,43 @@
         <p:txBody>
           <a:bodyPr/>
           <a:lstStyle/>
+          <a:p>
+            <a:pPr marL="0" indent="0" algn="l">
+              <a:spcAft>
+                <a:spcPts val="400"/>
+              </a:spcAft>
+              <a:buNone/>
+            </a:pPr>
+            <a:r>
+              <a:rPr sz="900" b="1">
+                <a:solidFill>
+                  <a:srgbClr val="595959"/>
+                </a:solidFill>
+                <a:latin typeface="Arial"/>
+              </a:rPr>
+              <a:t>USED FOR</a:t>
+            </a:r>
+          </a:p>
+          <a:p>
+            <a:pPr marL="0" indent="0" algn="l">
+              <a:lnSpc>
+                <a:spcPct val="125000"/>
+              </a:lnSpc>
+              <a:spcAft>
+                <a:spcPts val="1600"/>
+              </a:spcAft>
+              <a:buNone/>
+            </a:pPr>
+            <a:r>
+              <a:rPr sz="1200" b="0">
+                <a:solidFill>
+                  <a:srgbClr val="002546"/>
+                </a:solidFill>
+                <a:latin typeface="Arial"/>
+              </a:rPr>
+              <a:t>noisy or bright environments, and accessibility. If one channel fails, one lands.</a:t>
+            </a:r>
+          </a:p>
           <a:p>
             <a:pPr marL="0" indent="0" algn="l">
               <a:lnSpc>
@@ -6640,7 +7001,7 @@
                 </a:solidFill>
                 <a:latin typeface="Arial"/>
               </a:rPr>
-              <a:t>INPUTS, AND PRIOR ART</a:t>
+              <a:t>NOW MAKE ONE DO SOMETHING</a:t>
             </a:r>
           </a:p>
         </p:txBody>
@@ -6736,7 +7097,7 @@
                 </a:solidFill>
                 <a:latin typeface="Arial"/>
               </a:rPr>
-              <a:t>INPUTS WORTH KNOWING ABOUT</a:t>
+              <a:t>FIVE TASKS, ONE BOARD EACH</a:t>
             </a:r>
           </a:p>
         </p:txBody>
@@ -6772,7 +7133,7 @@
                 </a:solidFill>
                 <a:latin typeface="Arial"/>
               </a:rPr>
-              <a:t>One table, not a rotation. Wander over during the build.</a:t>
+              <a:t>Upload, change two numbers, upload again. That loop is the point.</a:t>
             </a:r>
           </a:p>
           <a:p>
@@ -6786,13 +7147,13 @@
               <a:buNone/>
             </a:pPr>
             <a:r>
-              <a:rPr sz="1500" b="0">
-                <a:solidFill>
-                  <a:srgbClr val="000000"/>
-                </a:solidFill>
-                <a:latin typeface="Arial"/>
-              </a:rPr>
-              <a:t>• Capacitive touch. A wire. See bench 04</a:t>
+              <a:rPr sz="1700" b="1">
+                <a:solidFill>
+                  <a:srgbClr val="000000"/>
+                </a:solidFill>
+                <a:latin typeface="Arial"/>
+              </a:rPr>
+              <a:t>01   Make something spin</a:t>
             </a:r>
           </a:p>
           <a:p>
@@ -6806,13 +7167,13 @@
               <a:buNone/>
             </a:pPr>
             <a:r>
-              <a:rPr sz="1500" b="0">
-                <a:solidFill>
-                  <a:srgbClr val="000000"/>
-                </a:solidFill>
-                <a:latin typeface="Arial"/>
-              </a:rPr>
-              <a:t>• Heart rate (PPG). Useless once the hand moves</a:t>
+              <a:rPr sz="1700" b="1">
+                <a:solidFill>
+                  <a:srgbClr val="000000"/>
+                </a:solidFill>
+                <a:latin typeface="Arial"/>
+              </a:rPr>
+              <a:t>02   Make something tap</a:t>
             </a:r>
           </a:p>
           <a:p>
@@ -6826,13 +7187,13 @@
               <a:buNone/>
             </a:pPr>
             <a:r>
-              <a:rPr sz="1500" b="0">
-                <a:solidFill>
-                  <a:srgbClr val="000000"/>
-                </a:solidFill>
-                <a:latin typeface="Arial"/>
-              </a:rPr>
-              <a:t>• Skin conductance (GSR). Relative change only</a:t>
+              <a:rPr sz="1700" b="1">
+                <a:solidFill>
+                  <a:srgbClr val="000000"/>
+                </a:solidFill>
+                <a:latin typeface="Arial"/>
+              </a:rPr>
+              <a:t>03   Make something warm</a:t>
             </a:r>
           </a:p>
           <a:p>
@@ -6846,13 +7207,13 @@
               <a:buNone/>
             </a:pPr>
             <a:r>
-              <a:rPr sz="1500" b="0">
-                <a:solidFill>
-                  <a:srgbClr val="000000"/>
-                </a:solidFill>
-                <a:latin typeface="Arial"/>
-              </a:rPr>
-              <a:t>• Flex sensor. The cheap data glove</a:t>
+              <a:rPr sz="1700" b="1">
+                <a:solidFill>
+                  <a:srgbClr val="000000"/>
+                </a:solidFill>
+                <a:latin typeface="Arial"/>
+              </a:rPr>
+              <a:t>04   Make it notice you</a:t>
             </a:r>
           </a:p>
           <a:p>
@@ -6866,14 +7227,25 @@
               <a:buNone/>
             </a:pPr>
             <a:r>
-              <a:rPr sz="1500" b="0">
-                <a:solidFill>
-                  <a:srgbClr val="000000"/>
-                </a:solidFill>
-                <a:latin typeface="Arial"/>
-              </a:rPr>
-              <a:t>• Pressure (FSR). Calibrate every pad</a:t>
-            </a:r>
+              <a:rPr sz="1700" b="1">
+                <a:solidFill>
+                  <a:srgbClr val="000000"/>
+                </a:solidFill>
+                <a:latin typeface="Arial"/>
+              </a:rPr>
+              <a:t>05   Make it answer back</a:t>
+            </a:r>
+          </a:p>
+          <a:p>
+            <a:pPr marL="0" indent="0" algn="l">
+              <a:lnSpc>
+                <a:spcPct val="128000"/>
+              </a:lnSpc>
+              <a:spcAft>
+                <a:spcPts val="0"/>
+              </a:spcAft>
+              <a:buNone/>
+            </a:pPr>
           </a:p>
           <a:p>
             <a:pPr marL="0" indent="0" algn="l">
@@ -6886,13 +7258,33 @@
               <a:buNone/>
             </a:pPr>
             <a:r>
-              <a:rPr sz="1500" b="0">
-                <a:solidFill>
-                  <a:srgbClr val="000000"/>
-                </a:solidFill>
-                <a:latin typeface="Arial"/>
-              </a:rPr>
-              <a:t>• Your own phone. No soldering at all</a:t>
+              <a:rPr sz="1700" b="0">
+                <a:solidFill>
+                  <a:srgbClr val="000000"/>
+                </a:solidFill>
+                <a:latin typeface="Arial"/>
+              </a:rPr>
+              <a:t>1 to 3 are output. 4 is input. 5 is both.</a:t>
+            </a:r>
+          </a:p>
+          <a:p>
+            <a:pPr marL="0" indent="0" algn="l">
+              <a:lnSpc>
+                <a:spcPct val="128000"/>
+              </a:lnSpc>
+              <a:spcAft>
+                <a:spcPts val="700"/>
+              </a:spcAft>
+              <a:buNone/>
+            </a:pPr>
+            <a:r>
+              <a:rPr sz="1700" b="0">
+                <a:solidFill>
+                  <a:srgbClr val="000000"/>
+                </a:solidFill>
+                <a:latin typeface="Arial"/>
+              </a:rPr>
+              <a:t>You are not expected to finish all five.</a:t>
             </a:r>
           </a:p>
         </p:txBody>
@@ -6988,7 +7380,7 @@
                 </a:solidFill>
                 <a:latin typeface="Arial"/>
               </a:rPr>
-              <a:t>TWO RIGS THAT ALREADY EXIST</a:t>
+              <a:t>HOW THE TASK SKETCHES WORK</a:t>
             </a:r>
           </a:p>
         </p:txBody>
@@ -7024,7 +7416,7 @@
                 </a:solidFill>
                 <a:latin typeface="Arial"/>
               </a:rPr>
-              <a:t>Built here, by students at roughly your stage.</a:t>
+              <a:t>Every sketch runs the moment you upload it. Nothing to wire.</a:t>
             </a:r>
           </a:p>
           <a:p>
@@ -7044,7 +7436,7 @@
                 </a:solidFill>
                 <a:latin typeface="Arial"/>
               </a:rPr>
-              <a:t>Moving screen, Arduino Uno</a:t>
+              <a:t>A CHANGE ME block at the top</a:t>
             </a:r>
           </a:p>
           <a:p>
@@ -7064,8 +7456,19 @@
                 </a:solidFill>
                 <a:latin typeface="Arial"/>
               </a:rPr>
-              <a:t>• Breathes when idle. Retreats when touched</a:t>
-            </a:r>
+              <a:t>• Two or three numbers. Edit, upload, feel the difference</a:t>
+            </a:r>
+          </a:p>
+          <a:p>
+            <a:pPr marL="0" indent="0" algn="l">
+              <a:lnSpc>
+                <a:spcPct val="128000"/>
+              </a:lnSpc>
+              <a:spcAft>
+                <a:spcPts val="0"/>
+              </a:spcAft>
+              <a:buNone/>
+            </a:pPr>
           </a:p>
           <a:p>
             <a:pPr marL="0" indent="0" algn="l">
@@ -7078,13 +7481,53 @@
               <a:buNone/>
             </a:pPr>
             <a:r>
+              <a:rPr sz="1700" b="1">
+                <a:solidFill>
+                  <a:srgbClr val="000000"/>
+                </a:solidFill>
+                <a:latin typeface="Arial"/>
+              </a:rPr>
+              <a:t>A THINGS TO TRY list at the bottom</a:t>
+            </a:r>
+          </a:p>
+          <a:p>
+            <a:pPr marL="0" indent="0" algn="l">
+              <a:lnSpc>
+                <a:spcPct val="128000"/>
+              </a:lnSpc>
+              <a:spcAft>
+                <a:spcPts val="700"/>
+              </a:spcAft>
+              <a:buNone/>
+            </a:pPr>
+            <a:r>
               <a:rPr sz="1500" b="0">
                 <a:solidFill>
                   <a:srgbClr val="000000"/>
                 </a:solidFill>
                 <a:latin typeface="Arial"/>
               </a:rPr>
-              <a:t>• Easing and idle motion do the work. A dozen lines</a:t>
+              <a:t>• Four experiments, roughly in order of difficulty</a:t>
+            </a:r>
+          </a:p>
+          <a:p>
+            <a:pPr marL="0" indent="0" algn="l">
+              <a:lnSpc>
+                <a:spcPct val="128000"/>
+              </a:lnSpc>
+              <a:spcAft>
+                <a:spcPts val="700"/>
+              </a:spcAft>
+              <a:buNone/>
+            </a:pPr>
+            <a:r>
+              <a:rPr sz="1500" b="0">
+                <a:solidFill>
+                  <a:srgbClr val="000000"/>
+                </a:solidFill>
+                <a:latin typeface="Arial"/>
+              </a:rPr>
+              <a:t>• The last one is usually the interesting one</a:t>
             </a:r>
           </a:p>
           <a:p>
@@ -7115,47 +7558,7 @@
                 </a:solidFill>
                 <a:latin typeface="Arial"/>
               </a:rPr>
-              <a:t>Instrumented sock, ESP32</a:t>
-            </a:r>
-          </a:p>
-          <a:p>
-            <a:pPr marL="0" indent="0" algn="l">
-              <a:lnSpc>
-                <a:spcPct val="128000"/>
-              </a:lnSpc>
-              <a:spcAft>
-                <a:spcPts val="700"/>
-              </a:spcAft>
-              <a:buNone/>
-            </a:pPr>
-            <a:r>
-              <a:rPr sz="1500" b="0">
-                <a:solidFill>
-                  <a:srgbClr val="000000"/>
-                </a:solidFill>
-                <a:latin typeface="Arial"/>
-              </a:rPr>
-              <a:t>• Six force sensors under a foot, batched over Wi-Fi</a:t>
-            </a:r>
-          </a:p>
-          <a:p>
-            <a:pPr marL="0" indent="0" algn="l">
-              <a:lnSpc>
-                <a:spcPct val="128000"/>
-              </a:lnSpc>
-              <a:spcAft>
-                <a:spcPts val="700"/>
-              </a:spcAft>
-              <a:buNone/>
-            </a:pPr>
-            <a:r>
-              <a:rPr sz="1500" b="0">
-                <a:solidFill>
-                  <a:srgbClr val="000000"/>
-                </a:solidFill>
-                <a:latin typeface="Arial"/>
-              </a:rPr>
-              <a:t>• Calibrate per sensor. Batch your writes</a:t>
+              <a:t>github.com/gust1527/multimodal-actuator-workshop</a:t>
             </a:r>
           </a:p>
         </p:txBody>
@@ -7251,7 +7654,7 @@
                 </a:solidFill>
                 <a:latin typeface="Arial"/>
               </a:rPr>
-              <a:t>BUILD ONE SIGNAL</a:t>
+              <a:t>INPUTS, AND PRIOR ART</a:t>
             </a:r>
           </a:p>
         </p:txBody>
@@ -7347,7 +7750,7 @@
                 </a:solidFill>
                 <a:latin typeface="Arial"/>
               </a:rPr>
-              <a:t>THE BRIEF</a:t>
+              <a:t>INPUTS WORTH KNOWING ABOUT</a:t>
             </a:r>
           </a:p>
         </p:txBody>
@@ -7383,7 +7786,7 @@
                 </a:solidFill>
                 <a:latin typeface="Arial"/>
               </a:rPr>
-              <a:t>30 minutes. Not long enough to be precious about it.</a:t>
+              <a:t>One table, not a rotation. Wander over during the build.</a:t>
             </a:r>
           </a:p>
           <a:p>
@@ -7397,13 +7800,13 @@
               <a:buNone/>
             </a:pPr>
             <a:r>
-              <a:rPr sz="1700" b="1">
-                <a:solidFill>
-                  <a:srgbClr val="000000"/>
-                </a:solidFill>
-                <a:latin typeface="Arial"/>
-              </a:rPr>
-              <a:t>One actuator. Three messages</a:t>
+              <a:rPr sz="1500" b="0">
+                <a:solidFill>
+                  <a:srgbClr val="000000"/>
+                </a:solidFill>
+                <a:latin typeface="Arial"/>
+              </a:rPr>
+              <a:t>• Capacitive touch. A wire. See bench 04</a:t>
             </a:r>
           </a:p>
           <a:p>
@@ -7423,19 +7826,8 @@
                 </a:solidFill>
                 <a:latin typeface="Arial"/>
               </a:rPr>
-              <a:t>• Arrived. Something wrong. Finished</a:t>
-            </a:r>
-          </a:p>
-          <a:p>
-            <a:pPr marL="0" indent="0" algn="l">
-              <a:lnSpc>
-                <a:spcPct val="128000"/>
-              </a:lnSpc>
-              <a:spcAft>
-                <a:spcPts val="0"/>
-              </a:spcAft>
-              <a:buNone/>
-            </a:pPr>
+              <a:t>• Heart rate (PPG). Useless once the hand moves</a:t>
+            </a:r>
           </a:p>
           <a:p>
             <a:pPr marL="0" indent="0" algn="l">
@@ -7448,13 +7840,13 @@
               <a:buNone/>
             </a:pPr>
             <a:r>
-              <a:rPr sz="1700" b="1">
-                <a:solidFill>
-                  <a:srgbClr val="000000"/>
-                </a:solidFill>
-                <a:latin typeface="Arial"/>
-              </a:rPr>
-              <a:t>Vary two things only</a:t>
+              <a:rPr sz="1500" b="0">
+                <a:solidFill>
+                  <a:srgbClr val="000000"/>
+                </a:solidFill>
+                <a:latin typeface="Arial"/>
+              </a:rPr>
+              <a:t>• Skin conductance (GSR). Relative change only</a:t>
             </a:r>
           </a:p>
           <a:p>
@@ -7474,7 +7866,7 @@
                 </a:solidFill>
                 <a:latin typeface="Arial"/>
               </a:rPr>
-              <a:t>• Rhythm of the pulses</a:t>
+              <a:t>• Flex sensor. The cheap data glove</a:t>
             </a:r>
           </a:p>
           <a:p>
@@ -7494,19 +7886,8 @@
                 </a:solidFill>
                 <a:latin typeface="Arial"/>
               </a:rPr>
-              <a:t>• How strong they are</a:t>
-            </a:r>
-          </a:p>
-          <a:p>
-            <a:pPr marL="0" indent="0" algn="l">
-              <a:lnSpc>
-                <a:spcPct val="128000"/>
-              </a:lnSpc>
-              <a:spcAft>
-                <a:spcPts val="0"/>
-              </a:spcAft>
-              <a:buNone/>
-            </a:pPr>
+              <a:t>• Pressure (FSR). Calibrate every pad</a:t>
+            </a:r>
           </a:p>
           <a:p>
             <a:pPr marL="0" indent="0" algn="l">
@@ -7519,33 +7900,13 @@
               <a:buNone/>
             </a:pPr>
             <a:r>
-              <a:rPr sz="1700" b="1">
-                <a:solidFill>
-                  <a:srgbClr val="000000"/>
-                </a:solidFill>
-                <a:latin typeface="Arial"/>
-              </a:rPr>
-              <a:t>Blind test: they name all three</a:t>
-            </a:r>
-          </a:p>
-          <a:p>
-            <a:pPr marL="0" indent="0" algn="l">
-              <a:lnSpc>
-                <a:spcPct val="128000"/>
-              </a:lnSpc>
-              <a:spcAft>
-                <a:spcPts val="700"/>
-              </a:spcAft>
-              <a:buNone/>
-            </a:pPr>
-            <a:r>
               <a:rPr sz="1500" b="0">
                 <a:solidFill>
                   <a:srgbClr val="000000"/>
                 </a:solidFill>
                 <a:latin typeface="Arial"/>
               </a:rPr>
-              <a:t>• Note which two got confused, and why</a:t>
+              <a:t>• Your own phone. No soldering at all</a:t>
             </a:r>
           </a:p>
         </p:txBody>
@@ -7641,7 +8002,7 @@
                 </a:solidFill>
                 <a:latin typeface="Arial"/>
               </a:rPr>
-              <a:t>THE CONSTRAINT THAT MATTERS</a:t>
+              <a:t>TWO RIGS THAT ALREADY EXIST</a:t>
             </a:r>
           </a:p>
         </p:txBody>
@@ -7666,6 +8027,26 @@
                 <a:spcPct val="128000"/>
               </a:lnSpc>
               <a:spcAft>
+                <a:spcPts val="1400"/>
+              </a:spcAft>
+              <a:buNone/>
+            </a:pPr>
+            <a:r>
+              <a:rPr sz="1700" b="0">
+                <a:solidFill>
+                  <a:srgbClr val="595959"/>
+                </a:solidFill>
+                <a:latin typeface="Arial"/>
+              </a:rPr>
+              <a:t>Built here, by students at roughly your stage.</a:t>
+            </a:r>
+          </a:p>
+          <a:p>
+            <a:pPr marL="0" indent="0" algn="l">
+              <a:lnSpc>
+                <a:spcPct val="128000"/>
+              </a:lnSpc>
+              <a:spcAft>
                 <a:spcPts val="700"/>
               </a:spcAft>
               <a:buNone/>
@@ -7677,7 +8058,47 @@
                 </a:solidFill>
                 <a:latin typeface="Arial"/>
               </a:rPr>
-              <a:t>The recipient cannot look at the device.</a:t>
+              <a:t>Moving screen, Arduino Uno</a:t>
+            </a:r>
+          </a:p>
+          <a:p>
+            <a:pPr marL="0" indent="0" algn="l">
+              <a:lnSpc>
+                <a:spcPct val="128000"/>
+              </a:lnSpc>
+              <a:spcAft>
+                <a:spcPts val="700"/>
+              </a:spcAft>
+              <a:buNone/>
+            </a:pPr>
+            <a:r>
+              <a:rPr sz="1500" b="0">
+                <a:solidFill>
+                  <a:srgbClr val="000000"/>
+                </a:solidFill>
+                <a:latin typeface="Arial"/>
+              </a:rPr>
+              <a:t>• Breathes when idle. Retreats when touched</a:t>
+            </a:r>
+          </a:p>
+          <a:p>
+            <a:pPr marL="0" indent="0" algn="l">
+              <a:lnSpc>
+                <a:spcPct val="128000"/>
+              </a:lnSpc>
+              <a:spcAft>
+                <a:spcPts val="700"/>
+              </a:spcAft>
+              <a:buNone/>
+            </a:pPr>
+            <a:r>
+              <a:rPr sz="1500" b="0">
+                <a:solidFill>
+                  <a:srgbClr val="000000"/>
+                </a:solidFill>
+                <a:latin typeface="Arial"/>
+              </a:rPr>
+              <a:t>• Easing and idle motion do the work. A dozen lines</a:t>
             </a:r>
           </a:p>
           <a:p>
@@ -7702,13 +8123,13 @@
               <a:buNone/>
             </a:pPr>
             <a:r>
-              <a:rPr sz="1700" b="0">
-                <a:solidFill>
-                  <a:srgbClr val="000000"/>
-                </a:solidFill>
-                <a:latin typeface="Arial"/>
-              </a:rPr>
-              <a:t>If it only works while someone watches a screen,</a:t>
+              <a:rPr sz="1700" b="1">
+                <a:solidFill>
+                  <a:srgbClr val="000000"/>
+                </a:solidFill>
+                <a:latin typeface="Arial"/>
+              </a:rPr>
+              <a:t>Instrumented sock, ESP32</a:t>
             </a:r>
           </a:p>
           <a:p>
@@ -7722,13 +8143,33 @@
               <a:buNone/>
             </a:pPr>
             <a:r>
-              <a:rPr sz="1700" b="0">
-                <a:solidFill>
-                  <a:srgbClr val="000000"/>
-                </a:solidFill>
-                <a:latin typeface="Arial"/>
-              </a:rPr>
-              <a:t>you built a visual interface with a motor glued to it.</a:t>
+              <a:rPr sz="1500" b="0">
+                <a:solidFill>
+                  <a:srgbClr val="000000"/>
+                </a:solidFill>
+                <a:latin typeface="Arial"/>
+              </a:rPr>
+              <a:t>• Six force sensors under a foot, batched over Wi-Fi</a:t>
+            </a:r>
+          </a:p>
+          <a:p>
+            <a:pPr marL="0" indent="0" algn="l">
+              <a:lnSpc>
+                <a:spcPct val="128000"/>
+              </a:lnSpc>
+              <a:spcAft>
+                <a:spcPts val="700"/>
+              </a:spcAft>
+              <a:buNone/>
+            </a:pPr>
+            <a:r>
+              <a:rPr sz="1500" b="0">
+                <a:solidFill>
+                  <a:srgbClr val="000000"/>
+                </a:solidFill>
+                <a:latin typeface="Arial"/>
+              </a:rPr>
+              <a:t>• Calibrate per sensor. Batch your writes</a:t>
             </a:r>
           </a:p>
         </p:txBody>
@@ -7806,7 +8247,7 @@
             <a:spLocks noGrp="1"/>
           </p:cNvSpPr>
           <p:nvPr>
-            <p:ph type="ctrTitle"/>
+            <p:ph type="title"/>
           </p:nvPr>
         </p:nvSpPr>
         <p:spPr/>
@@ -7818,50 +8259,20 @@
               <a:buNone/>
             </a:pPr>
             <a:r>
-              <a:rPr sz="5400" b="1">
-                <a:solidFill>
-                  <a:srgbClr val="FFFFFF"/>
-                </a:solidFill>
-                <a:latin typeface="Arial"/>
-              </a:rPr>
-              <a:t>GO AND TOUCH THINGS</a:t>
-            </a:r>
-          </a:p>
-        </p:txBody>
-      </p:sp>
-      <p:sp>
-        <p:nvSpPr>
-          <p:cNvPr id="3" name="Subtitle 2"/>
-          <p:cNvSpPr>
-            <a:spLocks noGrp="1"/>
-          </p:cNvSpPr>
-          <p:nvPr>
-            <p:ph type="subTitle" idx="1"/>
-          </p:nvPr>
-        </p:nvSpPr>
-        <p:spPr/>
-        <p:txBody>
-          <a:bodyPr/>
-          <a:lstStyle/>
-          <a:p>
-            <a:pPr marL="0" indent="0" algn="l">
-              <a:buNone/>
-            </a:pPr>
-            <a:r>
-              <a:rPr sz="2000" b="0">
-                <a:solidFill>
-                  <a:srgbClr val="FFFFFF"/>
-                </a:solidFill>
-                <a:latin typeface="Arial"/>
-              </a:rPr>
-              <a:t>github.com/gust1527/multimodal-actuator-workshop</a:t>
+              <a:rPr sz="4400" b="1">
+                <a:solidFill>
+                  <a:srgbClr val="000000"/>
+                </a:solidFill>
+                <a:latin typeface="Arial"/>
+              </a:rPr>
+              <a:t>BUILD ONE SIGNAL</a:t>
             </a:r>
           </a:p>
         </p:txBody>
       </p:sp>
       <p:pic>
         <p:nvPicPr>
-          <p:cNvPr id="4" name="Picture 3" descr="wordmark_light.png"/>
+          <p:cNvPr id="3" name="Picture 2" descr="wordmark_dark.png"/>
           <p:cNvPicPr>
             <a:picLocks noChangeAspect="1"/>
           </p:cNvPicPr>
@@ -7885,7 +8296,7 @@
       </p:pic>
       <p:pic>
         <p:nvPicPr>
-          <p:cNvPr id="5" name="Picture 4" descr="seal_light.png"/>
+          <p:cNvPr id="4" name="Picture 3" descr="seal_dark.png"/>
           <p:cNvPicPr>
             <a:picLocks noChangeAspect="1"/>
           </p:cNvPicPr>
@@ -8129,6 +8540,609 @@
       <p:pic>
         <p:nvPicPr>
           <p:cNvPr id="5" name="Picture 4" descr="seal_dark.png"/>
+          <p:cNvPicPr>
+            <a:picLocks noChangeAspect="1"/>
+          </p:cNvPicPr>
+          <p:nvPr/>
+        </p:nvPicPr>
+        <p:blipFill>
+          <a:blip r:embed="rId3"/>
+          <a:stretch>
+            <a:fillRect/>
+          </a:stretch>
+        </p:blipFill>
+        <p:spPr>
+          <a:xfrm>
+            <a:off x="11226800" y="5969000"/>
+            <a:ext cx="713915" cy="711200"/>
+          </a:xfrm>
+          <a:prstGeom prst="rect">
+            <a:avLst/>
+          </a:prstGeom>
+        </p:spPr>
+      </p:pic>
+    </p:spTree>
+  </p:cSld>
+  <p:clrMapOvr>
+    <a:masterClrMapping/>
+  </p:clrMapOvr>
+</p:sld>
+</file>
+
+<file path=ppt/slides/slide20.xml><?xml version="1.0" encoding="utf-8"?>
+<p:sld xmlns:a="http://schemas.openxmlformats.org/drawingml/2006/main" xmlns:p="http://schemas.openxmlformats.org/presentationml/2006/main" xmlns:r="http://schemas.openxmlformats.org/officeDocument/2006/relationships">
+  <p:cSld>
+    <p:spTree>
+      <p:nvGrpSpPr>
+        <p:cNvPr id="1" name=""/>
+        <p:cNvGrpSpPr/>
+        <p:nvPr/>
+      </p:nvGrpSpPr>
+      <p:grpSpPr/>
+      <p:sp>
+        <p:nvSpPr>
+          <p:cNvPr id="2" name="Title 1"/>
+          <p:cNvSpPr>
+            <a:spLocks noGrp="1"/>
+          </p:cNvSpPr>
+          <p:nvPr>
+            <p:ph type="title"/>
+          </p:nvPr>
+        </p:nvSpPr>
+        <p:spPr/>
+        <p:txBody>
+          <a:bodyPr/>
+          <a:lstStyle/>
+          <a:p>
+            <a:pPr marL="0" indent="0" algn="l">
+              <a:buNone/>
+            </a:pPr>
+            <a:r>
+              <a:rPr sz="3200" b="1">
+                <a:solidFill>
+                  <a:srgbClr val="000000"/>
+                </a:solidFill>
+                <a:latin typeface="Arial"/>
+              </a:rPr>
+              <a:t>THE BRIEF</a:t>
+            </a:r>
+          </a:p>
+        </p:txBody>
+      </p:sp>
+      <p:sp>
+        <p:nvSpPr>
+          <p:cNvPr id="3" name="Text Placeholder 2"/>
+          <p:cNvSpPr>
+            <a:spLocks noGrp="1"/>
+          </p:cNvSpPr>
+          <p:nvPr>
+            <p:ph type="body" idx="1"/>
+          </p:nvPr>
+        </p:nvSpPr>
+        <p:spPr/>
+        <p:txBody>
+          <a:bodyPr/>
+          <a:lstStyle/>
+          <a:p>
+            <a:pPr marL="0" indent="0" algn="l">
+              <a:lnSpc>
+                <a:spcPct val="128000"/>
+              </a:lnSpc>
+              <a:spcAft>
+                <a:spcPts val="1400"/>
+              </a:spcAft>
+              <a:buNone/>
+            </a:pPr>
+            <a:r>
+              <a:rPr sz="1700" b="0">
+                <a:solidFill>
+                  <a:srgbClr val="595959"/>
+                </a:solidFill>
+                <a:latin typeface="Arial"/>
+              </a:rPr>
+              <a:t>30 minutes. Not long enough to be precious about it.</a:t>
+            </a:r>
+          </a:p>
+          <a:p>
+            <a:pPr marL="0" indent="0" algn="l">
+              <a:lnSpc>
+                <a:spcPct val="128000"/>
+              </a:lnSpc>
+              <a:spcAft>
+                <a:spcPts val="700"/>
+              </a:spcAft>
+              <a:buNone/>
+            </a:pPr>
+            <a:r>
+              <a:rPr sz="1700" b="1">
+                <a:solidFill>
+                  <a:srgbClr val="000000"/>
+                </a:solidFill>
+                <a:latin typeface="Arial"/>
+              </a:rPr>
+              <a:t>One actuator. Three messages</a:t>
+            </a:r>
+          </a:p>
+          <a:p>
+            <a:pPr marL="0" indent="0" algn="l">
+              <a:lnSpc>
+                <a:spcPct val="128000"/>
+              </a:lnSpc>
+              <a:spcAft>
+                <a:spcPts val="700"/>
+              </a:spcAft>
+              <a:buNone/>
+            </a:pPr>
+            <a:r>
+              <a:rPr sz="1500" b="0">
+                <a:solidFill>
+                  <a:srgbClr val="000000"/>
+                </a:solidFill>
+                <a:latin typeface="Arial"/>
+              </a:rPr>
+              <a:t>• Arrived. Something wrong. Finished</a:t>
+            </a:r>
+          </a:p>
+          <a:p>
+            <a:pPr marL="0" indent="0" algn="l">
+              <a:lnSpc>
+                <a:spcPct val="128000"/>
+              </a:lnSpc>
+              <a:spcAft>
+                <a:spcPts val="0"/>
+              </a:spcAft>
+              <a:buNone/>
+            </a:pPr>
+          </a:p>
+          <a:p>
+            <a:pPr marL="0" indent="0" algn="l">
+              <a:lnSpc>
+                <a:spcPct val="128000"/>
+              </a:lnSpc>
+              <a:spcAft>
+                <a:spcPts val="700"/>
+              </a:spcAft>
+              <a:buNone/>
+            </a:pPr>
+            <a:r>
+              <a:rPr sz="1700" b="1">
+                <a:solidFill>
+                  <a:srgbClr val="000000"/>
+                </a:solidFill>
+                <a:latin typeface="Arial"/>
+              </a:rPr>
+              <a:t>Vary two things only</a:t>
+            </a:r>
+          </a:p>
+          <a:p>
+            <a:pPr marL="0" indent="0" algn="l">
+              <a:lnSpc>
+                <a:spcPct val="128000"/>
+              </a:lnSpc>
+              <a:spcAft>
+                <a:spcPts val="700"/>
+              </a:spcAft>
+              <a:buNone/>
+            </a:pPr>
+            <a:r>
+              <a:rPr sz="1500" b="0">
+                <a:solidFill>
+                  <a:srgbClr val="000000"/>
+                </a:solidFill>
+                <a:latin typeface="Arial"/>
+              </a:rPr>
+              <a:t>• Rhythm of the pulses</a:t>
+            </a:r>
+          </a:p>
+          <a:p>
+            <a:pPr marL="0" indent="0" algn="l">
+              <a:lnSpc>
+                <a:spcPct val="128000"/>
+              </a:lnSpc>
+              <a:spcAft>
+                <a:spcPts val="700"/>
+              </a:spcAft>
+              <a:buNone/>
+            </a:pPr>
+            <a:r>
+              <a:rPr sz="1500" b="0">
+                <a:solidFill>
+                  <a:srgbClr val="000000"/>
+                </a:solidFill>
+                <a:latin typeface="Arial"/>
+              </a:rPr>
+              <a:t>• How strong they are</a:t>
+            </a:r>
+          </a:p>
+          <a:p>
+            <a:pPr marL="0" indent="0" algn="l">
+              <a:lnSpc>
+                <a:spcPct val="128000"/>
+              </a:lnSpc>
+              <a:spcAft>
+                <a:spcPts val="0"/>
+              </a:spcAft>
+              <a:buNone/>
+            </a:pPr>
+          </a:p>
+          <a:p>
+            <a:pPr marL="0" indent="0" algn="l">
+              <a:lnSpc>
+                <a:spcPct val="128000"/>
+              </a:lnSpc>
+              <a:spcAft>
+                <a:spcPts val="700"/>
+              </a:spcAft>
+              <a:buNone/>
+            </a:pPr>
+            <a:r>
+              <a:rPr sz="1700" b="1">
+                <a:solidFill>
+                  <a:srgbClr val="000000"/>
+                </a:solidFill>
+                <a:latin typeface="Arial"/>
+              </a:rPr>
+              <a:t>Blind test: they name all three</a:t>
+            </a:r>
+          </a:p>
+          <a:p>
+            <a:pPr marL="0" indent="0" algn="l">
+              <a:lnSpc>
+                <a:spcPct val="128000"/>
+              </a:lnSpc>
+              <a:spcAft>
+                <a:spcPts val="700"/>
+              </a:spcAft>
+              <a:buNone/>
+            </a:pPr>
+            <a:r>
+              <a:rPr sz="1500" b="0">
+                <a:solidFill>
+                  <a:srgbClr val="000000"/>
+                </a:solidFill>
+                <a:latin typeface="Arial"/>
+              </a:rPr>
+              <a:t>• Note which two got confused, and why</a:t>
+            </a:r>
+          </a:p>
+        </p:txBody>
+      </p:sp>
+      <p:pic>
+        <p:nvPicPr>
+          <p:cNvPr id="4" name="Picture 3" descr="wordmark_dark.png"/>
+          <p:cNvPicPr>
+            <a:picLocks noChangeAspect="1"/>
+          </p:cNvPicPr>
+          <p:nvPr/>
+        </p:nvPicPr>
+        <p:blipFill>
+          <a:blip r:embed="rId2"/>
+          <a:stretch>
+            <a:fillRect/>
+          </a:stretch>
+        </p:blipFill>
+        <p:spPr>
+          <a:xfrm>
+            <a:off x="342900" y="6184900"/>
+            <a:ext cx="2070100" cy="529560"/>
+          </a:xfrm>
+          <a:prstGeom prst="rect">
+            <a:avLst/>
+          </a:prstGeom>
+        </p:spPr>
+      </p:pic>
+      <p:pic>
+        <p:nvPicPr>
+          <p:cNvPr id="5" name="Picture 4" descr="seal_dark.png"/>
+          <p:cNvPicPr>
+            <a:picLocks noChangeAspect="1"/>
+          </p:cNvPicPr>
+          <p:nvPr/>
+        </p:nvPicPr>
+        <p:blipFill>
+          <a:blip r:embed="rId3"/>
+          <a:stretch>
+            <a:fillRect/>
+          </a:stretch>
+        </p:blipFill>
+        <p:spPr>
+          <a:xfrm>
+            <a:off x="11226800" y="5969000"/>
+            <a:ext cx="713915" cy="711200"/>
+          </a:xfrm>
+          <a:prstGeom prst="rect">
+            <a:avLst/>
+          </a:prstGeom>
+        </p:spPr>
+      </p:pic>
+    </p:spTree>
+  </p:cSld>
+  <p:clrMapOvr>
+    <a:masterClrMapping/>
+  </p:clrMapOvr>
+</p:sld>
+</file>
+
+<file path=ppt/slides/slide21.xml><?xml version="1.0" encoding="utf-8"?>
+<p:sld xmlns:a="http://schemas.openxmlformats.org/drawingml/2006/main" xmlns:p="http://schemas.openxmlformats.org/presentationml/2006/main" xmlns:r="http://schemas.openxmlformats.org/officeDocument/2006/relationships">
+  <p:cSld>
+    <p:spTree>
+      <p:nvGrpSpPr>
+        <p:cNvPr id="1" name=""/>
+        <p:cNvGrpSpPr/>
+        <p:nvPr/>
+      </p:nvGrpSpPr>
+      <p:grpSpPr/>
+      <p:sp>
+        <p:nvSpPr>
+          <p:cNvPr id="2" name="Title 1"/>
+          <p:cNvSpPr>
+            <a:spLocks noGrp="1"/>
+          </p:cNvSpPr>
+          <p:nvPr>
+            <p:ph type="title"/>
+          </p:nvPr>
+        </p:nvSpPr>
+        <p:spPr/>
+        <p:txBody>
+          <a:bodyPr/>
+          <a:lstStyle/>
+          <a:p>
+            <a:pPr marL="0" indent="0" algn="l">
+              <a:buNone/>
+            </a:pPr>
+            <a:r>
+              <a:rPr sz="3200" b="1">
+                <a:solidFill>
+                  <a:srgbClr val="000000"/>
+                </a:solidFill>
+                <a:latin typeface="Arial"/>
+              </a:rPr>
+              <a:t>THE CONSTRAINT THAT MATTERS</a:t>
+            </a:r>
+          </a:p>
+        </p:txBody>
+      </p:sp>
+      <p:sp>
+        <p:nvSpPr>
+          <p:cNvPr id="3" name="Text Placeholder 2"/>
+          <p:cNvSpPr>
+            <a:spLocks noGrp="1"/>
+          </p:cNvSpPr>
+          <p:nvPr>
+            <p:ph type="body" idx="1"/>
+          </p:nvPr>
+        </p:nvSpPr>
+        <p:spPr/>
+        <p:txBody>
+          <a:bodyPr/>
+          <a:lstStyle/>
+          <a:p>
+            <a:pPr marL="0" indent="0" algn="l">
+              <a:lnSpc>
+                <a:spcPct val="128000"/>
+              </a:lnSpc>
+              <a:spcAft>
+                <a:spcPts val="700"/>
+              </a:spcAft>
+              <a:buNone/>
+            </a:pPr>
+            <a:r>
+              <a:rPr sz="1700" b="1">
+                <a:solidFill>
+                  <a:srgbClr val="000000"/>
+                </a:solidFill>
+                <a:latin typeface="Arial"/>
+              </a:rPr>
+              <a:t>The recipient cannot look at the device.</a:t>
+            </a:r>
+          </a:p>
+          <a:p>
+            <a:pPr marL="0" indent="0" algn="l">
+              <a:lnSpc>
+                <a:spcPct val="128000"/>
+              </a:lnSpc>
+              <a:spcAft>
+                <a:spcPts val="0"/>
+              </a:spcAft>
+              <a:buNone/>
+            </a:pPr>
+          </a:p>
+          <a:p>
+            <a:pPr marL="0" indent="0" algn="l">
+              <a:lnSpc>
+                <a:spcPct val="128000"/>
+              </a:lnSpc>
+              <a:spcAft>
+                <a:spcPts val="700"/>
+              </a:spcAft>
+              <a:buNone/>
+            </a:pPr>
+            <a:r>
+              <a:rPr sz="1700" b="0">
+                <a:solidFill>
+                  <a:srgbClr val="000000"/>
+                </a:solidFill>
+                <a:latin typeface="Arial"/>
+              </a:rPr>
+              <a:t>If it only works while someone watches a screen,</a:t>
+            </a:r>
+          </a:p>
+          <a:p>
+            <a:pPr marL="0" indent="0" algn="l">
+              <a:lnSpc>
+                <a:spcPct val="128000"/>
+              </a:lnSpc>
+              <a:spcAft>
+                <a:spcPts val="700"/>
+              </a:spcAft>
+              <a:buNone/>
+            </a:pPr>
+            <a:r>
+              <a:rPr sz="1700" b="0">
+                <a:solidFill>
+                  <a:srgbClr val="000000"/>
+                </a:solidFill>
+                <a:latin typeface="Arial"/>
+              </a:rPr>
+              <a:t>you built a visual interface with a motor glued to it.</a:t>
+            </a:r>
+          </a:p>
+        </p:txBody>
+      </p:sp>
+      <p:pic>
+        <p:nvPicPr>
+          <p:cNvPr id="4" name="Picture 3" descr="wordmark_dark.png"/>
+          <p:cNvPicPr>
+            <a:picLocks noChangeAspect="1"/>
+          </p:cNvPicPr>
+          <p:nvPr/>
+        </p:nvPicPr>
+        <p:blipFill>
+          <a:blip r:embed="rId2"/>
+          <a:stretch>
+            <a:fillRect/>
+          </a:stretch>
+        </p:blipFill>
+        <p:spPr>
+          <a:xfrm>
+            <a:off x="342900" y="6184900"/>
+            <a:ext cx="2070100" cy="529560"/>
+          </a:xfrm>
+          <a:prstGeom prst="rect">
+            <a:avLst/>
+          </a:prstGeom>
+        </p:spPr>
+      </p:pic>
+      <p:pic>
+        <p:nvPicPr>
+          <p:cNvPr id="5" name="Picture 4" descr="seal_dark.png"/>
+          <p:cNvPicPr>
+            <a:picLocks noChangeAspect="1"/>
+          </p:cNvPicPr>
+          <p:nvPr/>
+        </p:nvPicPr>
+        <p:blipFill>
+          <a:blip r:embed="rId3"/>
+          <a:stretch>
+            <a:fillRect/>
+          </a:stretch>
+        </p:blipFill>
+        <p:spPr>
+          <a:xfrm>
+            <a:off x="11226800" y="5969000"/>
+            <a:ext cx="713915" cy="711200"/>
+          </a:xfrm>
+          <a:prstGeom prst="rect">
+            <a:avLst/>
+          </a:prstGeom>
+        </p:spPr>
+      </p:pic>
+    </p:spTree>
+  </p:cSld>
+  <p:clrMapOvr>
+    <a:masterClrMapping/>
+  </p:clrMapOvr>
+</p:sld>
+</file>
+
+<file path=ppt/slides/slide22.xml><?xml version="1.0" encoding="utf-8"?>
+<p:sld xmlns:a="http://schemas.openxmlformats.org/drawingml/2006/main" xmlns:p="http://schemas.openxmlformats.org/presentationml/2006/main" xmlns:r="http://schemas.openxmlformats.org/officeDocument/2006/relationships">
+  <p:cSld>
+    <p:spTree>
+      <p:nvGrpSpPr>
+        <p:cNvPr id="1" name=""/>
+        <p:cNvGrpSpPr/>
+        <p:nvPr/>
+      </p:nvGrpSpPr>
+      <p:grpSpPr/>
+      <p:sp>
+        <p:nvSpPr>
+          <p:cNvPr id="2" name="Title 1"/>
+          <p:cNvSpPr>
+            <a:spLocks noGrp="1"/>
+          </p:cNvSpPr>
+          <p:nvPr>
+            <p:ph type="ctrTitle"/>
+          </p:nvPr>
+        </p:nvSpPr>
+        <p:spPr/>
+        <p:txBody>
+          <a:bodyPr/>
+          <a:lstStyle/>
+          <a:p>
+            <a:pPr marL="0" indent="0" algn="l">
+              <a:buNone/>
+            </a:pPr>
+            <a:r>
+              <a:rPr sz="5400" b="1">
+                <a:solidFill>
+                  <a:srgbClr val="FFFFFF"/>
+                </a:solidFill>
+                <a:latin typeface="Arial"/>
+              </a:rPr>
+              <a:t>GO AND TOUCH THINGS</a:t>
+            </a:r>
+          </a:p>
+        </p:txBody>
+      </p:sp>
+      <p:sp>
+        <p:nvSpPr>
+          <p:cNvPr id="3" name="Subtitle 2"/>
+          <p:cNvSpPr>
+            <a:spLocks noGrp="1"/>
+          </p:cNvSpPr>
+          <p:nvPr>
+            <p:ph type="subTitle" idx="1"/>
+          </p:nvPr>
+        </p:nvSpPr>
+        <p:spPr/>
+        <p:txBody>
+          <a:bodyPr/>
+          <a:lstStyle/>
+          <a:p>
+            <a:pPr marL="0" indent="0" algn="l">
+              <a:buNone/>
+            </a:pPr>
+            <a:r>
+              <a:rPr sz="2000" b="0">
+                <a:solidFill>
+                  <a:srgbClr val="FFFFFF"/>
+                </a:solidFill>
+                <a:latin typeface="Arial"/>
+              </a:rPr>
+              <a:t>github.com/gust1527/multimodal-actuator-workshop</a:t>
+            </a:r>
+          </a:p>
+        </p:txBody>
+      </p:sp>
+      <p:pic>
+        <p:nvPicPr>
+          <p:cNvPr id="4" name="Picture 3" descr="wordmark_light.png"/>
+          <p:cNvPicPr>
+            <a:picLocks noChangeAspect="1"/>
+          </p:cNvPicPr>
+          <p:nvPr/>
+        </p:nvPicPr>
+        <p:blipFill>
+          <a:blip r:embed="rId2"/>
+          <a:stretch>
+            <a:fillRect/>
+          </a:stretch>
+        </p:blipFill>
+        <p:spPr>
+          <a:xfrm>
+            <a:off x="342900" y="6184900"/>
+            <a:ext cx="2070100" cy="529560"/>
+          </a:xfrm>
+          <a:prstGeom prst="rect">
+            <a:avLst/>
+          </a:prstGeom>
+        </p:spPr>
+      </p:pic>
+      <p:pic>
+        <p:nvPicPr>
+          <p:cNvPr id="5" name="Picture 4" descr="seal_light.png"/>
           <p:cNvPicPr>
             <a:picLocks noChangeAspect="1"/>
           </p:cNvPicPr>
@@ -8512,7 +9526,7 @@
                 </a:solidFill>
                 <a:latin typeface="Consolas"/>
               </a:rPr>
-              <a:t>0:10     60 min    Bench rotation, 10 minutes each</a:t>
+              <a:t>0:10     30 min    Bench tour: touch all six, five minutes each</a:t>
             </a:r>
           </a:p>
           <a:p>
@@ -8532,7 +9546,7 @@
                 </a:solidFill>
                 <a:latin typeface="Consolas"/>
               </a:rPr>
-              <a:t>1:10     10 min    Round-the-room: what surprised you</a:t>
+              <a:t>0:40     10 min    Round-the-room: what surprised you</a:t>
             </a:r>
           </a:p>
           <a:p>
@@ -8552,7 +9566,7 @@
                 </a:solidFill>
                 <a:latin typeface="Consolas"/>
               </a:rPr>
-              <a:t>1:20     30 min    Build one signal</a:t>
+              <a:t>0:50     50 min    Tasks. Grab a board, work at your own pace</a:t>
             </a:r>
           </a:p>
           <a:p>
@@ -8572,7 +9586,27 @@
                 </a:solidFill>
                 <a:latin typeface="Consolas"/>
               </a:rPr>
-              <a:t>1:50     10 min    Blind test and pack down</a:t>
+              <a:t>1:40     15 min    Blind test on task 5</a:t>
+            </a:r>
+          </a:p>
+          <a:p>
+            <a:pPr marL="0" indent="0" algn="l">
+              <a:lnSpc>
+                <a:spcPct val="128000"/>
+              </a:lnSpc>
+              <a:spcAft>
+                <a:spcPts val="1200"/>
+              </a:spcAft>
+              <a:buNone/>
+            </a:pPr>
+            <a:r>
+              <a:rPr sz="1400" b="0">
+                <a:solidFill>
+                  <a:srgbClr val="000000"/>
+                </a:solidFill>
+                <a:latin typeface="Consolas"/>
+              </a:rPr>
+              <a:t>1:55      5 min    Pack down</a:t>
             </a:r>
           </a:p>
         </p:txBody>
@@ -8963,6 +9997,43 @@
           <a:lstStyle/>
           <a:p>
             <a:pPr marL="0" indent="0" algn="l">
+              <a:spcAft>
+                <a:spcPts val="400"/>
+              </a:spcAft>
+              <a:buNone/>
+            </a:pPr>
+            <a:r>
+              <a:rPr sz="900" b="1">
+                <a:solidFill>
+                  <a:srgbClr val="595959"/>
+                </a:solidFill>
+                <a:latin typeface="Arial"/>
+              </a:rPr>
+              <a:t>USED FOR</a:t>
+            </a:r>
+          </a:p>
+          <a:p>
+            <a:pPr marL="0" indent="0" algn="l">
+              <a:lnSpc>
+                <a:spcPct val="125000"/>
+              </a:lnSpc>
+              <a:spcAft>
+                <a:spcPts val="1600"/>
+              </a:spcAft>
+              <a:buNone/>
+            </a:pPr>
+            <a:r>
+              <a:rPr sz="1200" b="0">
+                <a:solidFill>
+                  <a:srgbClr val="002546"/>
+                </a:solidFill>
+                <a:latin typeface="Arial"/>
+              </a:rPr>
+              <a:t>phone notifications, game controller rumble, anything worn under clothing.</a:t>
+            </a:r>
+          </a:p>
+          <a:p>
+            <a:pPr marL="0" indent="0" algn="l">
               <a:lnSpc>
                 <a:spcPct val="120000"/>
               </a:lnSpc>
@@ -9281,37 +10352,6 @@
                 </a:solidFill>
                 <a:latin typeface="Arial"/>
               </a:rPr>
-              <a:t>The phone-keyboard feel.</a:t>
-            </a:r>
-          </a:p>
-          <a:p>
-            <a:pPr marL="0" indent="0" algn="l">
-              <a:lnSpc>
-                <a:spcPct val="128000"/>
-              </a:lnSpc>
-              <a:spcAft>
-                <a:spcPts val="0"/>
-              </a:spcAft>
-              <a:buNone/>
-            </a:pPr>
-          </a:p>
-          <a:p>
-            <a:pPr marL="0" indent="0" algn="l">
-              <a:lnSpc>
-                <a:spcPct val="128000"/>
-              </a:lnSpc>
-              <a:spcAft>
-                <a:spcPts val="400"/>
-              </a:spcAft>
-              <a:buNone/>
-            </a:pPr>
-            <a:r>
-              <a:rPr sz="1600" b="0">
-                <a:solidFill>
-                  <a:srgbClr val="000000"/>
-                </a:solidFill>
-                <a:latin typeface="Arial"/>
-              </a:rPr>
               <a:t>Piezo: near-instant, almost no power.</a:t>
             </a:r>
           </a:p>
@@ -9402,6 +10442,43 @@
         <p:txBody>
           <a:bodyPr/>
           <a:lstStyle/>
+          <a:p>
+            <a:pPr marL="0" indent="0" algn="l">
+              <a:spcAft>
+                <a:spcPts val="400"/>
+              </a:spcAft>
+              <a:buNone/>
+            </a:pPr>
+            <a:r>
+              <a:rPr sz="900" b="1">
+                <a:solidFill>
+                  <a:srgbClr val="595959"/>
+                </a:solidFill>
+                <a:latin typeface="Arial"/>
+              </a:rPr>
+              <a:t>USED FOR</a:t>
+            </a:r>
+          </a:p>
+          <a:p>
+            <a:pPr marL="0" indent="0" algn="l">
+              <a:lnSpc>
+                <a:spcPct val="125000"/>
+              </a:lnSpc>
+              <a:spcAft>
+                <a:spcPts val="1600"/>
+              </a:spcAft>
+              <a:buNone/>
+            </a:pPr>
+            <a:r>
+              <a:rPr sz="1200" b="0">
+                <a:solidFill>
+                  <a:srgbClr val="002546"/>
+                </a:solidFill>
+                <a:latin typeface="Arial"/>
+              </a:rPr>
+              <a:t>keyboard clicks, Apple Watch taps, anything where lag would feel broken.</a:t>
+            </a:r>
+          </a:p>
           <a:p>
             <a:pPr marL="0" indent="0" algn="l">
               <a:lnSpc>
@@ -9682,26 +10759,6 @@
                 </a:solidFill>
                 <a:latin typeface="Arial"/>
               </a:rPr>
-              <a:t>The bench everyone remembers.</a:t>
-            </a:r>
-          </a:p>
-          <a:p>
-            <a:pPr marL="0" indent="0" algn="l">
-              <a:lnSpc>
-                <a:spcPct val="128000"/>
-              </a:lnSpc>
-              <a:spcAft>
-                <a:spcPts val="400"/>
-              </a:spcAft>
-              <a:buNone/>
-            </a:pPr>
-            <a:r>
-              <a:rPr sz="1600" b="0">
-                <a:solidFill>
-                  <a:srgbClr val="000000"/>
-                </a:solidFill>
-                <a:latin typeface="Arial"/>
-              </a:rPr>
               <a:t>A knock reads as a person tapping you.</a:t>
             </a:r>
           </a:p>
@@ -9792,6 +10849,43 @@
         <p:txBody>
           <a:bodyPr/>
           <a:lstStyle/>
+          <a:p>
+            <a:pPr marL="0" indent="0" algn="l">
+              <a:spcAft>
+                <a:spcPts val="400"/>
+              </a:spcAft>
+              <a:buNone/>
+            </a:pPr>
+            <a:r>
+              <a:rPr sz="900" b="1">
+                <a:solidFill>
+                  <a:srgbClr val="595959"/>
+                </a:solidFill>
+                <a:latin typeface="Arial"/>
+              </a:rPr>
+              <a:t>USED FOR</a:t>
+            </a:r>
+          </a:p>
+          <a:p>
+            <a:pPr marL="0" indent="0" algn="l">
+              <a:lnSpc>
+                <a:spcPct val="125000"/>
+              </a:lnSpc>
+              <a:spcAft>
+                <a:spcPts val="1600"/>
+              </a:spcAft>
+              <a:buNone/>
+            </a:pPr>
+            <a:r>
+              <a:rPr sz="1200" b="0">
+                <a:solidFill>
+                  <a:srgbClr val="002546"/>
+                </a:solidFill>
+                <a:latin typeface="Arial"/>
+              </a:rPr>
+              <a:t>navigation cues on the body, braille cells, alerts that must cut through noise.</a:t>
+            </a:r>
+          </a:p>
           <a:p>
             <a:pPr marL="0" indent="0" algn="l">
               <a:lnSpc>
@@ -10121,37 +11215,6 @@
                 <a:spcPct val="128000"/>
               </a:lnSpc>
               <a:spcAft>
-                <a:spcPts val="0"/>
-              </a:spcAft>
-              <a:buNone/>
-            </a:pPr>
-          </a:p>
-          <a:p>
-            <a:pPr marL="0" indent="0" algn="l">
-              <a:lnSpc>
-                <a:spcPct val="128000"/>
-              </a:lnSpc>
-              <a:spcAft>
-                <a:spcPts val="400"/>
-              </a:spcAft>
-              <a:buNone/>
-            </a:pPr>
-            <a:r>
-              <a:rPr sz="1600" b="0">
-                <a:solidFill>
-                  <a:srgbClr val="000000"/>
-                </a:solidFill>
-                <a:latin typeface="Arial"/>
-              </a:rPr>
-              <a:t>Foil, card, fabric. Anything works.</a:t>
-            </a:r>
-          </a:p>
-          <a:p>
-            <a:pPr marL="0" indent="0" algn="l">
-              <a:lnSpc>
-                <a:spcPct val="128000"/>
-              </a:lnSpc>
-              <a:spcAft>
                 <a:spcPts val="1000"/>
               </a:spcAft>
               <a:buNone/>
@@ -10213,6 +11276,43 @@
         <p:txBody>
           <a:bodyPr/>
           <a:lstStyle/>
+          <a:p>
+            <a:pPr marL="0" indent="0" algn="l">
+              <a:spcAft>
+                <a:spcPts val="400"/>
+              </a:spcAft>
+              <a:buNone/>
+            </a:pPr>
+            <a:r>
+              <a:rPr sz="900" b="1">
+                <a:solidFill>
+                  <a:srgbClr val="595959"/>
+                </a:solidFill>
+                <a:latin typeface="Arial"/>
+              </a:rPr>
+              <a:t>USED FOR</a:t>
+            </a:r>
+          </a:p>
+          <a:p>
+            <a:pPr marL="0" indent="0" algn="l">
+              <a:lnSpc>
+                <a:spcPct val="125000"/>
+              </a:lnSpc>
+              <a:spcAft>
+                <a:spcPts val="1600"/>
+              </a:spcAft>
+              <a:buNone/>
+            </a:pPr>
+            <a:r>
+              <a:rPr sz="1200" b="0">
+                <a:solidFill>
+                  <a:srgbClr val="002546"/>
+                </a:solidFill>
+                <a:latin typeface="Arial"/>
+              </a:rPr>
+              <a:t>invisible controls in wood or fabric, waterproof panels, touch-sensitive prototypes.</a:t>
+            </a:r>
+          </a:p>
           <a:p>
             <a:pPr marL="0" indent="0" algn="l">
               <a:lnSpc>

--- a/docs/multimodal-actuator-workshop.pptx
+++ b/docs/multimodal-actuator-workshop.pptx
@@ -20,13 +20,6 @@
     <p:sldId id="268" r:id="rId19"/>
     <p:sldId id="269" r:id="rId20"/>
     <p:sldId id="270" r:id="rId21"/>
-    <p:sldId id="271" r:id="rId22"/>
-    <p:sldId id="272" r:id="rId23"/>
-    <p:sldId id="273" r:id="rId24"/>
-    <p:sldId id="274" r:id="rId25"/>
-    <p:sldId id="275" r:id="rId26"/>
-    <p:sldId id="276" r:id="rId27"/>
-    <p:sldId id="277" r:id="rId28"/>
   </p:sldIdLst>
   <p:sldSz cx="12188952" cy="6858000" type="screen4x3"/>
   <p:notesSz cx="6858000" cy="9144000"/>
@@ -523,34 +516,34 @@
           <a:lstStyle/>
           <a:p>
             <a:r>
-              <a:t>0:00. Start here. Don't read the slide.</a:t>
+              <a:t>0:00. Start here, and do not read the slide.</a:t>
             </a:r>
           </a:p>
           <a:p/>
           <a:p>
             <a:r>
-              <a:t>Open with the failing demo, not with talking. Have the coin motor and the</a:t>
-            </a:r>
-          </a:p>
-          <a:p>
-            <a:r>
-              <a:t>solenoid both wired and ready before anyone sits down.</a:t>
+              <a:t>Open with the demo, not with talking. Have the coin motor and the solenoid both</a:t>
+            </a:r>
+          </a:p>
+          <a:p>
+            <a:r>
+              <a:t>wired and running before anyone sits down.</a:t>
             </a:r>
           </a:p>
           <a:p/>
           <a:p>
             <a:r>
-              <a:t>Buzz a phone-style notification on the ERM. Then send the same message on the</a:t>
-            </a:r>
-          </a:p>
-          <a:p>
-            <a:r>
-              <a:t>solenoid. Ask: which felt more urgent? Let them answer. Nobody needs theory</a:t>
-            </a:r>
-          </a:p>
-          <a:p>
-            <a:r>
-              <a:t>for that, and that IS the argument for the whole session.</a:t>
+              <a:t>Buzz a phone-style notification on the motor. Then send the same message on the</a:t>
+            </a:r>
+          </a:p>
+          <a:p>
+            <a:r>
+              <a:t>solenoid. Ask which felt more urgent. Let them answer. Nobody needs theory for</a:t>
+            </a:r>
+          </a:p>
+          <a:p>
+            <a:r>
+              <a:t>that, and it is the argument for the whole session.</a:t>
             </a:r>
           </a:p>
         </p:txBody>
@@ -620,46 +613,29 @@
           <a:lstStyle/>
           <a:p>
             <a:r>
-              <a:t>Slow down here. This is the one idea most worth stealing from today.</a:t>
+              <a:t>Mention, do not teach. These sit on one table with a sign.</a:t>
             </a:r>
           </a:p>
           <a:p/>
           <a:p>
             <a:r>
-              <a:t>Two things students get wrong:</a:t>
+              <a:t>The honest warnings matter more than the specs: PPG is useless once the hand</a:t>
+            </a:r>
+          </a:p>
+          <a:p>
+            <a:r>
+              <a:t>moves, GSR drifts so only relative change works, FSRs need per-pad calibration.</a:t>
             </a:r>
           </a:p>
           <a:p/>
           <a:p>
             <a:r>
-              <a:t>1. They use a fixed threshold. Works in the morning, fails after lunch,</a:t>
-            </a:r>
-          </a:p>
-          <a:p>
-            <a:r>
-              <a:t>   because the reading drifts with humidity and mains hum.</a:t>
-            </a:r>
-          </a:p>
-          <a:p/>
-          <a:p>
-            <a:r>
-              <a:t>2. They feed the baseline buffer always. Then a long press teaches the</a:t>
-            </a:r>
-          </a:p>
-          <a:p>
-            <a:r>
-              <a:t>   baseline that a finger is normal, and the touch silently stops working.</a:t>
-            </a:r>
-          </a:p>
-          <a:p>
-            <a:r>
-              <a:t>   The buffer must ONLY learn while untouched.</a:t>
-            </a:r>
-          </a:p>
-          <a:p/>
-          <a:p>
-            <a:r>
-              <a:t>Code is in the repo, bench 04, commented for them.</a:t>
+              <a:t>Push the phone option hard. For a lot of projects it beats everything else on</a:t>
+            </a:r>
+          </a:p>
+          <a:p>
+            <a:r>
+              <a:t>the table and needs no soldering at all.</a:t>
             </a:r>
           </a:p>
         </p:txBody>
@@ -729,34 +705,45 @@
           <a:lstStyle/>
           <a:p>
             <a:r>
-              <a:t>Thermal. People are bad at reading thermal patterns, and this is</a:t>
-            </a:r>
-          </a:p>
-          <a:p>
-            <a:r>
-              <a:t>where they find that out for themselves.</a:t>
+              <a:t>Five minutes, and put the actual repos on screen if you can.</a:t>
             </a:r>
           </a:p>
           <a:p/>
           <a:p>
             <a:r>
-              <a:t>Make them time themselves. The 3 to 8 second onset kills a lot of bad project</a:t>
-            </a:r>
-          </a:p>
-          <a:p>
-            <a:r>
-              <a:t>ideas before they get proposed, which is exactly what you want happening now</a:t>
-            </a:r>
-          </a:p>
-          <a:p>
-            <a:r>
-              <a:t>rather than in week 46.</a:t>
+              <a:t>The argument: this was built by students at your stage, not by a lab with a</a:t>
+            </a:r>
+          </a:p>
+          <a:p>
+            <a:r>
+              <a:t>budget. The gap between "we should use touch" and "it moves when you touch it"</a:t>
+            </a:r>
+          </a:p>
+          <a:p>
+            <a:r>
+              <a:t>is smaller than it looks.</a:t>
             </a:r>
           </a:p>
           <a:p/>
           <a:p>
             <a:r>
-              <a:t>Safety: heatsink on the hot side, capped at 45 C. Skin burns above 50.</a:t>
+              <a:t>The moving screen has a browser control panel over the serial port, which is</a:t>
+            </a:r>
+          </a:p>
+          <a:p>
+            <a:r>
+              <a:t>what you will wish you had at the project demonstrations.</a:t>
+            </a:r>
+          </a:p>
+          <a:p/>
+          <a:p>
+            <a:r>
+              <a:t>Note for you: the sock repo has a hardcoded Wi-Fi password and live patient IDs</a:t>
+            </a:r>
+          </a:p>
+          <a:p>
+            <a:r>
+              <a:t>in it. Scrub before showing, or show only the calibration section.</a:t>
             </a:r>
           </a:p>
         </p:txBody>
@@ -826,34 +813,18 @@
           <a:lstStyle/>
           <a:p>
             <a:r>
-              <a:t>Redundancy, made physical. One transducer on a plate, two frequencies: 40 Hz</a:t>
-            </a:r>
-          </a:p>
-          <a:p>
-            <a:r>
-              <a:t>you feel, 400 Hz you hear, both from the same driver.</a:t>
+              <a:t>1:35. The blind test.</a:t>
             </a:r>
           </a:p>
           <a:p/>
           <a:p>
             <a:r>
-              <a:t>The point isn't that together is louder. It's that together is more CERTAIN.</a:t>
-            </a:r>
-          </a:p>
-          <a:p>
-            <a:r>
-              <a:t>Sending the same thing down two channels is the cheapest reliability their</a:t>
-            </a:r>
-          </a:p>
-          <a:p>
-            <a:r>
-              <a:t>projects can buy.</a:t>
-            </a:r>
-          </a:p>
-          <a:p/>
-          <a:p>
-            <a:r>
-              <a:t>Ear defenders must actually be used or the comparison is dishonest.</a:t>
+              <a:t>Most groups will already have something from task 05. This is where it gets</a:t>
+            </a:r>
+          </a:p>
+          <a:p>
+            <a:r>
+              <a:t>tested by someone who did not build it.</a:t>
             </a:r>
           </a:p>
         </p:txBody>
@@ -923,34 +894,39 @@
           <a:lstStyle/>
           <a:p>
             <a:r>
-              <a:t>0:50. Tasks start. This is the half of the session they will remember</a:t>
-            </a:r>
-          </a:p>
-          <a:p>
-            <a:r>
-              <a:t>having done, rather than watched.</a:t>
+              <a:t>Read the brief out once, then get out of the way. Full wording, since the</a:t>
+            </a:r>
+          </a:p>
+          <a:p>
+            <a:r>
+              <a:t>slide is only the bones:</a:t>
             </a:r>
           </a:p>
           <a:p/>
           <a:p>
             <a:r>
-              <a:t>Hand out boards. One per pair is fine, one each is better. Everything is on</a:t>
-            </a:r>
-          </a:p>
-          <a:p>
-            <a:r>
-              <a:t>GitHub, and the repo link is on the next-but-one slide.</a:t>
+              <a:t>"Pick one actuator. Encode three messages: arrived, something wrong, finished.</a:t>
+            </a:r>
+          </a:p>
+          <a:p>
+            <a:r>
+              <a:t>Vary only the rhythm of the pulses and how strong they are. Then hand it to</a:t>
+            </a:r>
+          </a:p>
+          <a:p>
+            <a:r>
+              <a:t>another group with the screen turned away and see if they can name all three."</a:t>
             </a:r>
           </a:p>
           <a:p/>
           <a:p>
             <a:r>
-              <a:t>Say clearly: you do NOT have to finish all five. Getting task 1 working and</a:t>
-            </a:r>
-          </a:p>
-          <a:p>
-            <a:r>
-              <a:t>then properly playing with task 2 beats rushing through all of them.</a:t>
+              <a:t>If someone asks to add a second actuator, say no. The constraint is the</a:t>
+            </a:r>
+          </a:p>
+          <a:p>
+            <a:r>
+              <a:t>exercise.</a:t>
             </a:r>
           </a:p>
         </p:txBody>
@@ -1020,34 +996,24 @@
           <a:lstStyle/>
           <a:p>
             <a:r>
-              <a:t>Walk the list in about ninety seconds, no more.</a:t>
+              <a:t>The line worth repeating twice.</a:t>
             </a:r>
           </a:p>
           <a:p/>
           <a:p>
             <a:r>
-              <a:t>The arc matters and is worth naming: 1 to 3 are output, 4 is input, 5 is both</a:t>
-            </a:r>
-          </a:p>
-          <a:p>
-            <a:r>
-              <a:t>together. By task 5 they have built a complete interaction loop, which is the</a:t>
-            </a:r>
-          </a:p>
-          <a:p>
-            <a:r>
-              <a:t>shape of most things they will make in the project weeks.</a:t>
+              <a:t>Run the test: swap groups, receiver looks away, guess all three.</a:t>
             </a:r>
           </a:p>
           <a:p/>
           <a:p>
             <a:r>
-              <a:t>Point out that task 5's last experiment IS the closing brief, so the work</a:t>
-            </a:r>
-          </a:p>
-          <a:p>
-            <a:r>
-              <a:t>carries straight over.</a:t>
+              <a:t>Then have each group name which two got confused and what would have separated</a:t>
+            </a:r>
+          </a:p>
+          <a:p>
+            <a:r>
+              <a:t>them. That confusion is the actual learning, not the successful ones.</a:t>
             </a:r>
           </a:p>
         </p:txBody>
@@ -1117,438 +1083,40 @@
           <a:lstStyle/>
           <a:p>
             <a:r>
-              <a:t>The format is the same every time, so say it once here rather than at</a:t>
-            </a:r>
-          </a:p>
-          <a:p>
-            <a:r>
-              <a:t>every bench.</a:t>
+              <a:t>Point them at the repo. Every task sketch is commented for them, and the</a:t>
+            </a:r>
+          </a:p>
+          <a:p>
+            <a:r>
+              <a:t>bench test sketches are there too if they want to see the minimal version.</a:t>
             </a:r>
           </a:p>
           <a:p/>
           <a:p>
             <a:r>
-              <a:t>CHANGE ME at the top: two or three numbers, already set to something that</a:t>
-            </a:r>
-          </a:p>
-          <a:p>
-            <a:r>
-              <a:t>works. THINGS TO TRY at the bottom: four experiments, easy to hard, and the</a:t>
-            </a:r>
-          </a:p>
-          <a:p>
-            <a:r>
-              <a:t>last one usually asks them to rewrite a function rather than tweak a value.</a:t>
+              <a:t>Last thing to say: pick your actuator before you design the interaction, not</a:t>
+            </a:r>
+          </a:p>
+          <a:p>
+            <a:r>
+              <a:t>after. Today was so they can do that from experience rather than a datasheet.</a:t>
             </a:r>
           </a:p>
           <a:p/>
           <a:p>
             <a:r>
-              <a:t>Common upload problems, in the order they will hit you:</a:t>
-            </a:r>
-          </a:p>
-          <a:p>
-            <a:r>
-              <a:t>  * wrong board or port under Tools</a:t>
-            </a:r>
-          </a:p>
-          <a:p>
-            <a:r>
-              <a:t>  * ADCTouch not installed (tasks 4 and 5)</a:t>
-            </a:r>
-          </a:p>
-          <a:p>
-            <a:r>
-              <a:t>  * solenoid bench: board resets on fire = the bench supply is off</a:t>
+              <a:t>Pack down: everything back in the box, including the resistors. It will not all</a:t>
+            </a:r>
+          </a:p>
+          <a:p>
+            <a:r>
+              <a:t>come back.</a:t>
             </a:r>
           </a:p>
           <a:p/>
           <a:p>
             <a:r>
-              <a:t>Write the repo URL on the whiteboard now. It will be asked for six times.</a:t>
-            </a:r>
-          </a:p>
-        </p:txBody>
-      </p:sp>
-      <p:sp>
-        <p:nvSpPr>
-          <p:cNvPr id="4" name="Slide Number Placeholder 3"/>
-          <p:cNvSpPr>
-            <a:spLocks noGrp="1"/>
-          </p:cNvSpPr>
-          <p:nvPr>
-            <p:ph type="sldNum" idx="5" sz="quarter"/>
-          </p:nvPr>
-        </p:nvSpPr>
-        <p:spPr/>
-      </p:sp>
-    </p:spTree>
-  </p:cSld>
-  <p:clrMapOvr>
-    <a:masterClrMapping/>
-  </p:clrMapOvr>
-</p:notes>
-</file>
-
-<file path=ppt/notesSlides/notesSlide16.xml><?xml version="1.0" encoding="utf-8"?>
-<p:notes xmlns:a="http://schemas.openxmlformats.org/drawingml/2006/main" xmlns:p="http://schemas.openxmlformats.org/presentationml/2006/main" xmlns:r="http://schemas.openxmlformats.org/officeDocument/2006/relationships">
-  <p:cSld>
-    <p:spTree>
-      <p:nvGrpSpPr>
-        <p:cNvPr id="1" name=""/>
-        <p:cNvGrpSpPr/>
-        <p:nvPr/>
-      </p:nvGrpSpPr>
-      <p:grpSpPr>
-        <a:xfrm>
-          <a:off x="0" y="0"/>
-          <a:ext cx="0" cy="0"/>
-          <a:chOff x="0" y="0"/>
-          <a:chExt cx="0" cy="0"/>
-        </a:xfrm>
-      </p:grpSpPr>
-      <p:sp>
-        <p:nvSpPr>
-          <p:cNvPr id="2" name="Slide Image Placeholder 1"/>
-          <p:cNvSpPr>
-            <a:spLocks noGrp="1"/>
-          </p:cNvSpPr>
-          <p:nvPr>
-            <p:ph type="sldImg" idx="2"/>
-          </p:nvPr>
-        </p:nvSpPr>
-        <p:spPr/>
-      </p:sp>
-      <p:sp>
-        <p:nvSpPr>
-          <p:cNvPr id="3" name="Notes Placeholder 2"/>
-          <p:cNvSpPr>
-            <a:spLocks noGrp="1"/>
-          </p:cNvSpPr>
-          <p:nvPr>
-            <p:ph type="body" idx="3" sz="quarter"/>
-          </p:nvPr>
-        </p:nvSpPr>
-        <p:spPr/>
-        <p:txBody>
-          <a:bodyPr/>
-          <a:lstStyle/>
-          <a:p>
-            <a:r>
-              <a:t>0:40. Tour over. Round-the-room now.</a:t>
-            </a:r>
-          </a:p>
-          <a:p/>
-          <a:p>
-            <a:r>
-              <a:t>One sentence per group: what surprised you. No slides, no laptops. Ten minutes.</a:t>
-            </a:r>
-          </a:p>
-          <a:p/>
-          <a:p>
-            <a:r>
-              <a:t>Expect the thermal group to report the delay. Let that land, it is more</a:t>
-            </a:r>
-          </a:p>
-          <a:p>
-            <a:r>
-              <a:t>persuasive coming from a peer than from you.</a:t>
-            </a:r>
-          </a:p>
-        </p:txBody>
-      </p:sp>
-      <p:sp>
-        <p:nvSpPr>
-          <p:cNvPr id="4" name="Slide Number Placeholder 3"/>
-          <p:cNvSpPr>
-            <a:spLocks noGrp="1"/>
-          </p:cNvSpPr>
-          <p:nvPr>
-            <p:ph type="sldNum" idx="5" sz="quarter"/>
-          </p:nvPr>
-        </p:nvSpPr>
-        <p:spPr/>
-      </p:sp>
-    </p:spTree>
-  </p:cSld>
-  <p:clrMapOvr>
-    <a:masterClrMapping/>
-  </p:clrMapOvr>
-</p:notes>
-</file>
-
-<file path=ppt/notesSlides/notesSlide17.xml><?xml version="1.0" encoding="utf-8"?>
-<p:notes xmlns:a="http://schemas.openxmlformats.org/drawingml/2006/main" xmlns:p="http://schemas.openxmlformats.org/presentationml/2006/main" xmlns:r="http://schemas.openxmlformats.org/officeDocument/2006/relationships">
-  <p:cSld>
-    <p:spTree>
-      <p:nvGrpSpPr>
-        <p:cNvPr id="1" name=""/>
-        <p:cNvGrpSpPr/>
-        <p:nvPr/>
-      </p:nvGrpSpPr>
-      <p:grpSpPr>
-        <a:xfrm>
-          <a:off x="0" y="0"/>
-          <a:ext cx="0" cy="0"/>
-          <a:chOff x="0" y="0"/>
-          <a:chExt cx="0" cy="0"/>
-        </a:xfrm>
-      </p:grpSpPr>
-      <p:sp>
-        <p:nvSpPr>
-          <p:cNvPr id="2" name="Slide Image Placeholder 1"/>
-          <p:cNvSpPr>
-            <a:spLocks noGrp="1"/>
-          </p:cNvSpPr>
-          <p:nvPr>
-            <p:ph type="sldImg" idx="2"/>
-          </p:nvPr>
-        </p:nvSpPr>
-        <p:spPr/>
-      </p:sp>
-      <p:sp>
-        <p:nvSpPr>
-          <p:cNvPr id="3" name="Notes Placeholder 2"/>
-          <p:cNvSpPr>
-            <a:spLocks noGrp="1"/>
-          </p:cNvSpPr>
-          <p:nvPr>
-            <p:ph type="body" idx="3" sz="quarter"/>
-          </p:nvPr>
-        </p:nvSpPr>
-        <p:spPr/>
-        <p:txBody>
-          <a:bodyPr/>
-          <a:lstStyle/>
-          <a:p>
-            <a:r>
-              <a:t>Mention, don't teach. These sit on one table with a sign. The slide is one</a:t>
-            </a:r>
-          </a:p>
-          <a:p>
-            <a:r>
-              <a:t>line each; the caveats below are what actually saves them time.</a:t>
-            </a:r>
-          </a:p>
-          <a:p/>
-          <a:p>
-            <a:r>
-              <a:t>The honest warnings matter more than the specs: PPG is garbage once the hand</a:t>
-            </a:r>
-          </a:p>
-          <a:p>
-            <a:r>
-              <a:t>moves, GSR drifts so only relative change is usable, FSRs need per-pad</a:t>
-            </a:r>
-          </a:p>
-          <a:p>
-            <a:r>
-              <a:t>calibration.</a:t>
-            </a:r>
-          </a:p>
-          <a:p/>
-          <a:p>
-            <a:r>
-              <a:t>Push the phone option hard. For a lot of projects it genuinely beats</a:t>
-            </a:r>
-          </a:p>
-          <a:p>
-            <a:r>
-              <a:t>everything else on the table and needs no soldering.</a:t>
-            </a:r>
-          </a:p>
-        </p:txBody>
-      </p:sp>
-      <p:sp>
-        <p:nvSpPr>
-          <p:cNvPr id="4" name="Slide Number Placeholder 3"/>
-          <p:cNvSpPr>
-            <a:spLocks noGrp="1"/>
-          </p:cNvSpPr>
-          <p:nvPr>
-            <p:ph type="sldNum" idx="5" sz="quarter"/>
-          </p:nvPr>
-        </p:nvSpPr>
-        <p:spPr/>
-      </p:sp>
-    </p:spTree>
-  </p:cSld>
-  <p:clrMapOvr>
-    <a:masterClrMapping/>
-  </p:clrMapOvr>
-</p:notes>
-</file>
-
-<file path=ppt/notesSlides/notesSlide18.xml><?xml version="1.0" encoding="utf-8"?>
-<p:notes xmlns:a="http://schemas.openxmlformats.org/drawingml/2006/main" xmlns:p="http://schemas.openxmlformats.org/presentationml/2006/main" xmlns:r="http://schemas.openxmlformats.org/officeDocument/2006/relationships">
-  <p:cSld>
-    <p:spTree>
-      <p:nvGrpSpPr>
-        <p:cNvPr id="1" name=""/>
-        <p:cNvGrpSpPr/>
-        <p:nvPr/>
-      </p:nvGrpSpPr>
-      <p:grpSpPr>
-        <a:xfrm>
-          <a:off x="0" y="0"/>
-          <a:ext cx="0" cy="0"/>
-          <a:chOff x="0" y="0"/>
-          <a:chExt cx="0" cy="0"/>
-        </a:xfrm>
-      </p:grpSpPr>
-      <p:sp>
-        <p:nvSpPr>
-          <p:cNvPr id="2" name="Slide Image Placeholder 1"/>
-          <p:cNvSpPr>
-            <a:spLocks noGrp="1"/>
-          </p:cNvSpPr>
-          <p:nvPr>
-            <p:ph type="sldImg" idx="2"/>
-          </p:nvPr>
-        </p:nvSpPr>
-        <p:spPr/>
-      </p:sp>
-      <p:sp>
-        <p:nvSpPr>
-          <p:cNvPr id="3" name="Notes Placeholder 2"/>
-          <p:cNvSpPr>
-            <a:spLocks noGrp="1"/>
-          </p:cNvSpPr>
-          <p:nvPr>
-            <p:ph type="body" idx="3" sz="quarter"/>
-          </p:nvPr>
-        </p:nvSpPr>
-        <p:spPr/>
-        <p:txBody>
-          <a:bodyPr/>
-          <a:lstStyle/>
-          <a:p>
-            <a:r>
-              <a:t>Five minutes, and show the actual repos on screen if you can. The slide names</a:t>
-            </a:r>
-          </a:p>
-          <a:p>
-            <a:r>
-              <a:t>them; you supply the detail.</a:t>
-            </a:r>
-          </a:p>
-          <a:p/>
-          <a:p>
-            <a:r>
-              <a:t>The moving screen has a browser control panel over the serial port, which is</a:t>
-            </a:r>
-          </a:p>
-          <a:p>
-            <a:r>
-              <a:t>exactly what you want at the project demonstrations.</a:t>
-            </a:r>
-          </a:p>
-          <a:p/>
-          <a:p>
-            <a:r>
-              <a:t>The argument: this was built by students at your stage, not by a lab with a</a:t>
-            </a:r>
-          </a:p>
-          <a:p>
-            <a:r>
-              <a:t>budget. The gap between "we should use haptics" and "it moves when you touch</a:t>
-            </a:r>
-          </a:p>
-          <a:p>
-            <a:r>
-              <a:t>it" is smaller than it looks.</a:t>
-            </a:r>
-          </a:p>
-          <a:p/>
-          <a:p>
-            <a:r>
-              <a:t>Note for you: the sock repo has a hardcoded Wi-Fi password and live patient</a:t>
-            </a:r>
-          </a:p>
-          <a:p>
-            <a:r>
-              <a:t>IDs in it. Scrub before showing, or show only the calibration section.</a:t>
-            </a:r>
-          </a:p>
-        </p:txBody>
-      </p:sp>
-      <p:sp>
-        <p:nvSpPr>
-          <p:cNvPr id="4" name="Slide Number Placeholder 3"/>
-          <p:cNvSpPr>
-            <a:spLocks noGrp="1"/>
-          </p:cNvSpPr>
-          <p:nvPr>
-            <p:ph type="sldNum" idx="5" sz="quarter"/>
-          </p:nvPr>
-        </p:nvSpPr>
-        <p:spPr/>
-      </p:sp>
-    </p:spTree>
-  </p:cSld>
-  <p:clrMapOvr>
-    <a:masterClrMapping/>
-  </p:clrMapOvr>
-</p:notes>
-</file>
-
-<file path=ppt/notesSlides/notesSlide19.xml><?xml version="1.0" encoding="utf-8"?>
-<p:notes xmlns:a="http://schemas.openxmlformats.org/drawingml/2006/main" xmlns:p="http://schemas.openxmlformats.org/presentationml/2006/main" xmlns:r="http://schemas.openxmlformats.org/officeDocument/2006/relationships">
-  <p:cSld>
-    <p:spTree>
-      <p:nvGrpSpPr>
-        <p:cNvPr id="1" name=""/>
-        <p:cNvGrpSpPr/>
-        <p:nvPr/>
-      </p:nvGrpSpPr>
-      <p:grpSpPr>
-        <a:xfrm>
-          <a:off x="0" y="0"/>
-          <a:ext cx="0" cy="0"/>
-          <a:chOff x="0" y="0"/>
-          <a:chExt cx="0" cy="0"/>
-        </a:xfrm>
-      </p:grpSpPr>
-      <p:sp>
-        <p:nvSpPr>
-          <p:cNvPr id="2" name="Slide Image Placeholder 1"/>
-          <p:cNvSpPr>
-            <a:spLocks noGrp="1"/>
-          </p:cNvSpPr>
-          <p:nvPr>
-            <p:ph type="sldImg" idx="2"/>
-          </p:nvPr>
-        </p:nvSpPr>
-        <p:spPr/>
-      </p:sp>
-      <p:sp>
-        <p:nvSpPr>
-          <p:cNvPr id="3" name="Notes Placeholder 2"/>
-          <p:cNvSpPr>
-            <a:spLocks noGrp="1"/>
-          </p:cNvSpPr>
-          <p:nvPr>
-            <p:ph type="body" idx="3" sz="quarter"/>
-          </p:nvPr>
-        </p:nvSpPr>
-        <p:spPr/>
-        <p:txBody>
-          <a:bodyPr/>
-          <a:lstStyle/>
-          <a:p>
-            <a:r>
-              <a:t>1:40. Blind test. Thirty minutes.</a:t>
-            </a:r>
-          </a:p>
-          <a:p/>
-          <a:p>
-            <a:r>
-              <a:t>Groups pick any actuator from the rotation. Most will pick bench 1 or 3</a:t>
-            </a:r>
-          </a:p>
-          <a:p>
-            <a:r>
-              <a:t>because they are simplest. That is fine, the constraint does the work.</a:t>
+              <a:t>If anyone wants to borrow parts for the project weeks, now is when they ask.</a:t>
             </a:r>
           </a:p>
         </p:txBody>
@@ -1645,323 +1213,7 @@
           </a:p>
           <a:p>
             <a:r>
-              <a:t>designed on paper then dropped.</a:t>
-            </a:r>
-          </a:p>
-          <a:p/>
-          <a:p>
-            <a:r>
-              <a:t>Not because it was wrong. Because nobody had held the parts.</a:t>
-            </a:r>
-          </a:p>
-          <a:p/>
-          <a:p>
-            <a:r>
-              <a:t>They get the Actuators lecture tomorrow. Today is the hands, not the theory.</a:t>
-            </a:r>
-          </a:p>
-          <a:p/>
-          <a:p>
-            <a:r>
-              <a:t>Keep this short, 2 minutes. They came to do things, not hear framing.</a:t>
-            </a:r>
-          </a:p>
-        </p:txBody>
-      </p:sp>
-      <p:sp>
-        <p:nvSpPr>
-          <p:cNvPr id="4" name="Slide Number Placeholder 3"/>
-          <p:cNvSpPr>
-            <a:spLocks noGrp="1"/>
-          </p:cNvSpPr>
-          <p:nvPr>
-            <p:ph type="sldNum" idx="5" sz="quarter"/>
-          </p:nvPr>
-        </p:nvSpPr>
-        <p:spPr/>
-      </p:sp>
-    </p:spTree>
-  </p:cSld>
-  <p:clrMapOvr>
-    <a:masterClrMapping/>
-  </p:clrMapOvr>
-</p:notes>
-</file>
-
-<file path=ppt/notesSlides/notesSlide20.xml><?xml version="1.0" encoding="utf-8"?>
-<p:notes xmlns:a="http://schemas.openxmlformats.org/drawingml/2006/main" xmlns:p="http://schemas.openxmlformats.org/presentationml/2006/main" xmlns:r="http://schemas.openxmlformats.org/officeDocument/2006/relationships">
-  <p:cSld>
-    <p:spTree>
-      <p:nvGrpSpPr>
-        <p:cNvPr id="1" name=""/>
-        <p:cNvGrpSpPr/>
-        <p:nvPr/>
-      </p:nvGrpSpPr>
-      <p:grpSpPr>
-        <a:xfrm>
-          <a:off x="0" y="0"/>
-          <a:ext cx="0" cy="0"/>
-          <a:chOff x="0" y="0"/>
-          <a:chExt cx="0" cy="0"/>
-        </a:xfrm>
-      </p:grpSpPr>
-      <p:sp>
-        <p:nvSpPr>
-          <p:cNvPr id="2" name="Slide Image Placeholder 1"/>
-          <p:cNvSpPr>
-            <a:spLocks noGrp="1"/>
-          </p:cNvSpPr>
-          <p:nvPr>
-            <p:ph type="sldImg" idx="2"/>
-          </p:nvPr>
-        </p:nvSpPr>
-        <p:spPr/>
-      </p:sp>
-      <p:sp>
-        <p:nvSpPr>
-          <p:cNvPr id="3" name="Notes Placeholder 2"/>
-          <p:cNvSpPr>
-            <a:spLocks noGrp="1"/>
-          </p:cNvSpPr>
-          <p:nvPr>
-            <p:ph type="body" idx="3" sz="quarter"/>
-          </p:nvPr>
-        </p:nvSpPr>
-        <p:spPr/>
-        <p:txBody>
-          <a:bodyPr/>
-          <a:lstStyle/>
-          <a:p>
-            <a:r>
-              <a:t>Read the brief out once, then get out of the way. Full wording, since the</a:t>
-            </a:r>
-          </a:p>
-          <a:p>
-            <a:r>
-              <a:t>slide is only the bones:</a:t>
-            </a:r>
-          </a:p>
-          <a:p/>
-          <a:p>
-            <a:r>
-              <a:t>"Pick one actuator. Encode three messages: arrived, something wrong, finished.</a:t>
-            </a:r>
-          </a:p>
-          <a:p>
-            <a:r>
-              <a:t>Vary only the rhythm of the pulses and how strong they are. Then hand it to</a:t>
-            </a:r>
-          </a:p>
-          <a:p>
-            <a:r>
-              <a:t>another group with the screen turned away and see if they can name all three."</a:t>
-            </a:r>
-          </a:p>
-          <a:p/>
-          <a:p>
-            <a:r>
-              <a:t>Rhythm and strength only. If someone asks to add a second actuator, say no.</a:t>
-            </a:r>
-          </a:p>
-          <a:p>
-            <a:r>
-              <a:t>The constraint is the exercise. Encoding within one channel is the skill.</a:t>
-            </a:r>
-          </a:p>
-          <a:p/>
-          <a:p>
-            <a:r>
-              <a:t>Suggested set is on the slide, but let them choose their own three messages if</a:t>
-            </a:r>
-          </a:p>
-          <a:p>
-            <a:r>
-              <a:t>they have a better idea.</a:t>
-            </a:r>
-          </a:p>
-        </p:txBody>
-      </p:sp>
-      <p:sp>
-        <p:nvSpPr>
-          <p:cNvPr id="4" name="Slide Number Placeholder 3"/>
-          <p:cNvSpPr>
-            <a:spLocks noGrp="1"/>
-          </p:cNvSpPr>
-          <p:nvPr>
-            <p:ph type="sldNum" idx="5" sz="quarter"/>
-          </p:nvPr>
-        </p:nvSpPr>
-        <p:spPr/>
-      </p:sp>
-    </p:spTree>
-  </p:cSld>
-  <p:clrMapOvr>
-    <a:masterClrMapping/>
-  </p:clrMapOvr>
-</p:notes>
-</file>
-
-<file path=ppt/notesSlides/notesSlide21.xml><?xml version="1.0" encoding="utf-8"?>
-<p:notes xmlns:a="http://schemas.openxmlformats.org/drawingml/2006/main" xmlns:p="http://schemas.openxmlformats.org/presentationml/2006/main" xmlns:r="http://schemas.openxmlformats.org/officeDocument/2006/relationships">
-  <p:cSld>
-    <p:spTree>
-      <p:nvGrpSpPr>
-        <p:cNvPr id="1" name=""/>
-        <p:cNvGrpSpPr/>
-        <p:nvPr/>
-      </p:nvGrpSpPr>
-      <p:grpSpPr>
-        <a:xfrm>
-          <a:off x="0" y="0"/>
-          <a:ext cx="0" cy="0"/>
-          <a:chOff x="0" y="0"/>
-          <a:chExt cx="0" cy="0"/>
-        </a:xfrm>
-      </p:grpSpPr>
-      <p:sp>
-        <p:nvSpPr>
-          <p:cNvPr id="2" name="Slide Image Placeholder 1"/>
-          <p:cNvSpPr>
-            <a:spLocks noGrp="1"/>
-          </p:cNvSpPr>
-          <p:nvPr>
-            <p:ph type="sldImg" idx="2"/>
-          </p:nvPr>
-        </p:nvSpPr>
-        <p:spPr/>
-      </p:sp>
-      <p:sp>
-        <p:nvSpPr>
-          <p:cNvPr id="3" name="Notes Placeholder 2"/>
-          <p:cNvSpPr>
-            <a:spLocks noGrp="1"/>
-          </p:cNvSpPr>
-          <p:nvPr>
-            <p:ph type="body" idx="3" sz="quarter"/>
-          </p:nvPr>
-        </p:nvSpPr>
-        <p:spPr/>
-        <p:txBody>
-          <a:bodyPr/>
-          <a:lstStyle/>
-          <a:p>
-            <a:r>
-              <a:t>This is the line worth repeating twice.</a:t>
-            </a:r>
-          </a:p>
-          <a:p/>
-          <a:p>
-            <a:r>
-              <a:t>Wrap up. Swap groups, receiver looks away, guess all three.</a:t>
-            </a:r>
-          </a:p>
-          <a:p/>
-          <a:p>
-            <a:r>
-              <a:t>Then have each group name which two got confused and what would have separated</a:t>
-            </a:r>
-          </a:p>
-          <a:p>
-            <a:r>
-              <a:t>them. That confusion is the actual learning, not the successful ones.</a:t>
-            </a:r>
-          </a:p>
-          <a:p/>
-          <a:p>
-            <a:r>
-              <a:t>Pack down: everything back in the box, including the resistors. It will not</a:t>
-            </a:r>
-          </a:p>
-          <a:p>
-            <a:r>
-              <a:t>all come back.</a:t>
-            </a:r>
-          </a:p>
-        </p:txBody>
-      </p:sp>
-      <p:sp>
-        <p:nvSpPr>
-          <p:cNvPr id="4" name="Slide Number Placeholder 3"/>
-          <p:cNvSpPr>
-            <a:spLocks noGrp="1"/>
-          </p:cNvSpPr>
-          <p:nvPr>
-            <p:ph type="sldNum" idx="5" sz="quarter"/>
-          </p:nvPr>
-        </p:nvSpPr>
-        <p:spPr/>
-      </p:sp>
-    </p:spTree>
-  </p:cSld>
-  <p:clrMapOvr>
-    <a:masterClrMapping/>
-  </p:clrMapOvr>
-</p:notes>
-</file>
-
-<file path=ppt/notesSlides/notesSlide22.xml><?xml version="1.0" encoding="utf-8"?>
-<p:notes xmlns:a="http://schemas.openxmlformats.org/drawingml/2006/main" xmlns:p="http://schemas.openxmlformats.org/presentationml/2006/main" xmlns:r="http://schemas.openxmlformats.org/officeDocument/2006/relationships">
-  <p:cSld>
-    <p:spTree>
-      <p:nvGrpSpPr>
-        <p:cNvPr id="1" name=""/>
-        <p:cNvGrpSpPr/>
-        <p:nvPr/>
-      </p:nvGrpSpPr>
-      <p:grpSpPr>
-        <a:xfrm>
-          <a:off x="0" y="0"/>
-          <a:ext cx="0" cy="0"/>
-          <a:chOff x="0" y="0"/>
-          <a:chExt cx="0" cy="0"/>
-        </a:xfrm>
-      </p:grpSpPr>
-      <p:sp>
-        <p:nvSpPr>
-          <p:cNvPr id="2" name="Slide Image Placeholder 1"/>
-          <p:cNvSpPr>
-            <a:spLocks noGrp="1"/>
-          </p:cNvSpPr>
-          <p:nvPr>
-            <p:ph type="sldImg" idx="2"/>
-          </p:nvPr>
-        </p:nvSpPr>
-        <p:spPr/>
-      </p:sp>
-      <p:sp>
-        <p:nvSpPr>
-          <p:cNvPr id="3" name="Notes Placeholder 2"/>
-          <p:cNvSpPr>
-            <a:spLocks noGrp="1"/>
-          </p:cNvSpPr>
-          <p:nvPr>
-            <p:ph type="body" idx="3" sz="quarter"/>
-          </p:nvPr>
-        </p:nvSpPr>
-        <p:spPr/>
-        <p:txBody>
-          <a:bodyPr/>
-          <a:lstStyle/>
-          <a:p>
-            <a:r>
-              <a:t>Point them at the repo. Bench 01 and 04 sketches are commented for them.</a:t>
-            </a:r>
-          </a:p>
-          <a:p/>
-          <a:p>
-            <a:r>
-              <a:t>Last thing to say: pick your actuator before you design the interaction, not</a:t>
-            </a:r>
-          </a:p>
-          <a:p>
-            <a:r>
-              <a:t>after. Today was so they can do that from experience rather than a datasheet.</a:t>
-            </a:r>
-          </a:p>
-          <a:p/>
-          <a:p>
-            <a:r>
-              <a:t>If anyone wants to borrow parts for the project weeks, now is when they ask.</a:t>
+              <a:t>designed on paper then dropped. Two minutes, then move.</a:t>
             </a:r>
           </a:p>
         </p:txBody>
@@ -2031,29 +1283,44 @@
           <a:lstStyle/>
           <a:p>
             <a:r>
-              <a:t>Set the rules firmly, because the rotation collapses if you don't.</a:t>
+              <a:t>Set the shape clearly, because it is not a lecture and they will wait to be</a:t>
+            </a:r>
+          </a:p>
+          <a:p>
+            <a:r>
+              <a:t>lectured at.</a:t>
             </a:r>
           </a:p>
           <a:p/>
           <a:p>
             <a:r>
-              <a:t>Nobody wires anything today. Everything is pre-wired and running. They turn</a:t>
-            </a:r>
-          </a:p>
-          <a:p>
-            <a:r>
-              <a:t>one knob and answer one question.</a:t>
+              <a:t>A board each. Five tasks. Everything pre-wired. They upload, change numbers,</a:t>
+            </a:r>
+          </a:p>
+          <a:p>
+            <a:r>
+              <a:t>upload again.</a:t>
             </a:r>
           </a:p>
           <a:p/>
           <a:p>
             <a:r>
-              <a:t>Say out loud: the timer is hard. Ten minutes means ten minutes. Bench 3, the</a:t>
-            </a:r>
-          </a:p>
-          <a:p>
-            <a:r>
-              <a:t>solenoid, is the one people will not want to leave.</a:t>
+              <a:t>The actuators they are NOT using sit on the benches around the room. Tell them</a:t>
+            </a:r>
+          </a:p>
+          <a:p>
+            <a:r>
+              <a:t>explicitly to go and feel those between tasks. That is the comparison that used</a:t>
+            </a:r>
+          </a:p>
+          <a:p>
+            <a:r>
+              <a:t>to be a guided tour; it now happens on their own initiative, which works better</a:t>
+            </a:r>
+          </a:p>
+          <a:p>
+            <a:r>
+              <a:t>anyway.</a:t>
             </a:r>
           </a:p>
         </p:txBody>
@@ -2123,29 +1390,23 @@
           <a:lstStyle/>
           <a:p>
             <a:r>
-              <a:t>Show it, don't narrate it. Fifteen seconds.</a:t>
+              <a:t>Show it, do not narrate it. Fifteen seconds.</a:t>
             </a:r>
           </a:p>
           <a:p/>
           <a:p>
             <a:r>
-              <a:t>Practical: assign each group a DIFFERENT starting bench so they rotate cleanly.</a:t>
-            </a:r>
-          </a:p>
-          <a:p>
-            <a:r>
-              <a:t>Six groups, six benches. Write starting numbers on the whiteboard.</a:t>
-            </a:r>
-          </a:p>
-          <a:p/>
-          <a:p>
-            <a:r>
-              <a:t>If a bench breaks mid-session, pull it and go to five. Five working benches</a:t>
-            </a:r>
-          </a:p>
-          <a:p>
-            <a:r>
-              <a:t>beat six with a mystery.</a:t>
+              <a:t>The one hard checkpoint is 0:25. Everyone should have task 01 running by then.</a:t>
+            </a:r>
+          </a:p>
+          <a:p>
+            <a:r>
+              <a:t>If someone is still fighting drivers at 0:30, pair them with a group that is</a:t>
+            </a:r>
+          </a:p>
+          <a:p>
+            <a:r>
+              <a:t>working rather than debugging it alone.</a:t>
             </a:r>
           </a:p>
         </p:txBody>
@@ -2215,34 +1476,24 @@
           <a:lstStyle/>
           <a:p>
             <a:r>
-              <a:t>0:10. Tour starts. Five minutes a bench, not ten. Set a visible timer.</a:t>
+              <a:t>0:10. Boards out.</a:t>
             </a:r>
           </a:p>
           <a:p/>
           <a:p>
             <a:r>
-              <a:t>You are now a timekeeper, not a lecturer. Call the rotation loudly every ten</a:t>
-            </a:r>
-          </a:p>
-          <a:p>
-            <a:r>
-              <a:t>minutes. Circulate, but do not rescue. Let them poke at things.</a:t>
+              <a:t>Get EVERYONE through task 01 before anyone races ahead. It is the shortest and</a:t>
+            </a:r>
+          </a:p>
+          <a:p>
+            <a:r>
+              <a:t>it flushes out the setup problems: wrong board, wrong port, missing driver.</a:t>
             </a:r>
           </a:p>
           <a:p/>
           <a:p>
             <a:r>
-              <a:t>The bench slides that follow are reference for YOU and for anyone who wants to</a:t>
-            </a:r>
-          </a:p>
-          <a:p>
-            <a:r>
-              <a:t>look back. Do not present them one by one before the rotation. That would eat</a:t>
-            </a:r>
-          </a:p>
-          <a:p>
-            <a:r>
-              <a:t>the hour.</a:t>
+              <a:t>Once task 01 runs for a pair, they can move at their own pace.</a:t>
             </a:r>
           </a:p>
         </p:txBody>
@@ -2312,29 +1563,40 @@
           <a:lstStyle/>
           <a:p>
             <a:r>
-              <a:t>The core limitation, made physical: speed and strength are mechanically</a:t>
-            </a:r>
-          </a:p>
-          <a:p>
-            <a:r>
-              <a:t>linked on this motor. You cannot get gentle-but-fast.</a:t>
+              <a:t>Ninety seconds on this slide, no more.</a:t>
             </a:r>
           </a:p>
           <a:p/>
           <a:p>
             <a:r>
-              <a:t>Common question: "why does it feel weak at low PWM?" Below about 90 the motor</a:t>
-            </a:r>
-          </a:p>
-          <a:p>
-            <a:r>
-              <a:t>cannot overcome its own friction. That floor is real and worth naming.</a:t>
+              <a:t>Name the arc, it is the point: 1 to 3 are output, 4 is input, 5 is both. By</a:t>
+            </a:r>
+          </a:p>
+          <a:p>
+            <a:r>
+              <a:t>task 5 they have built a complete interaction loop, which is the shape of most</a:t>
+            </a:r>
+          </a:p>
+          <a:p>
+            <a:r>
+              <a:t>project work.</a:t>
             </a:r>
           </a:p>
           <a:p/>
           <a:p>
             <a:r>
-              <a:t>Never let anyone rewire this to a bare pin. 40 mA limit, motor pulls 75.</a:t>
+              <a:t>Say clearly that nobody is expected to finish all five. Getting 01 working and</a:t>
+            </a:r>
+          </a:p>
+          <a:p>
+            <a:r>
+              <a:t>then properly playing with 02 beats rushing all of them.</a:t>
+            </a:r>
+          </a:p>
+          <a:p/>
+          <a:p>
+            <a:r>
+              <a:t>Task 05's last experiment IS the closing brief, so the work carries over.</a:t>
             </a:r>
           </a:p>
         </p:txBody>
@@ -2404,39 +1666,61 @@
           <a:lstStyle/>
           <a:p>
             <a:r>
-              <a:t>The escape from bench 1's compromise. LRA is the phone-keyboard feel:</a:t>
-            </a:r>
-          </a:p>
-          <a:p>
-            <a:r>
-              <a:t>5 ms on, 5 ms off. Piezo is a crystal that flexes when you put current across</a:t>
-            </a:r>
-          </a:p>
-          <a:p>
-            <a:r>
-              <a:t>it, so it is sharp but shallow.</a:t>
+              <a:t>Say the format once here rather than at every bench.</a:t>
             </a:r>
           </a:p>
           <a:p/>
           <a:p>
             <a:r>
-              <a:t>If the LRA sounds wrong, the DRV2605L is in ERM mode. It must be told which</a:t>
-            </a:r>
-          </a:p>
-          <a:p>
-            <a:r>
-              <a:t>type it's driving. That's the failure to expect here.</a:t>
+              <a:t>CHANGE ME at the top: two or three numbers, already set to something that</a:t>
+            </a:r>
+          </a:p>
+          <a:p>
+            <a:r>
+              <a:t>works. THINGS TO TRY at the bottom: four experiments, easy to hard, and the</a:t>
+            </a:r>
+          </a:p>
+          <a:p>
+            <a:r>
+              <a:t>last one usually asks for a rewrite rather than a tweak.</a:t>
             </a:r>
           </a:p>
           <a:p/>
           <a:p>
             <a:r>
-              <a:t>Good moment to point out: 123 built-in waveforms means they don't have to</a:t>
-            </a:r>
-          </a:p>
-          <a:p>
-            <a:r>
-              <a:t>design vibration from scratch in their project.</a:t>
+              <a:t>Upload problems, in the order they will hit you:</a:t>
+            </a:r>
+          </a:p>
+          <a:p>
+            <a:r>
+              <a:t>  * wrong board or port under Tools</a:t>
+            </a:r>
+          </a:p>
+          <a:p>
+            <a:r>
+              <a:t>  * ADCTouch not installed (tasks 04 and 05)</a:t>
+            </a:r>
+          </a:p>
+          <a:p>
+            <a:r>
+              <a:t>  * solenoid task: board resets on fire means the bench supply is off</a:t>
+            </a:r>
+          </a:p>
+          <a:p/>
+          <a:p>
+            <a:r>
+              <a:t>Write the repo URL on the whiteboard now. It gets asked for six times.</a:t>
+            </a:r>
+          </a:p>
+          <a:p/>
+          <a:p>
+            <a:r>
+              <a:t>If a task's hardware fails, utils/ has the diagnostics: pin_sweep, i2c_scanner,</a:t>
+            </a:r>
+          </a:p>
+          <a:p>
+            <a:r>
+              <a:t>analog_monitor.</a:t>
             </a:r>
           </a:p>
         </p:txBody>
@@ -2506,39 +1790,72 @@
           <a:lstStyle/>
           <a:p>
             <a:r>
-              <a:t>The memorable one. A single knock reads as a person tapping you</a:t>
-            </a:r>
-          </a:p>
-          <a:p>
-            <a:r>
-              <a:t>rather than a machine signalling. Worth naming out loud, because it is the</a:t>
-            </a:r>
-          </a:p>
-          <a:p>
-            <a:r>
-              <a:t>whole reason it feels different, and the slide only says the short version.</a:t>
+              <a:t>Slow down here. This is the single idea most worth stealing from today, and</a:t>
+            </a:r>
+          </a:p>
+          <a:p>
+            <a:r>
+              <a:t>it is worth interrupting the room for once most people have reached task 04.</a:t>
             </a:r>
           </a:p>
           <a:p/>
           <a:p>
             <a:r>
-              <a:t>Watch the duty cycle. Solenoids get hot fast, so if it has been hammering for</a:t>
-            </a:r>
-          </a:p>
-          <a:p>
-            <a:r>
-              <a:t>ten minutes, let it rest.</a:t>
+              <a:t>Two things students get wrong:</a:t>
             </a:r>
           </a:p>
           <a:p/>
           <a:p>
             <a:r>
-              <a:t>Separate supply, common ground. On USB alone the board browns out and resets,</a:t>
-            </a:r>
-          </a:p>
-          <a:p>
-            <a:r>
-              <a:t>which looks like a code bug and isn't.</a:t>
+              <a:t>1. A fixed threshold. Works in the morning, fails after lunch, because the</a:t>
+            </a:r>
+          </a:p>
+          <a:p>
+            <a:r>
+              <a:t>   reading drifts with humidity and mains hum.</a:t>
+            </a:r>
+          </a:p>
+          <a:p/>
+          <a:p>
+            <a:r>
+              <a:t>2. Feeding the baseline buffer always. A long press then teaches the baseline</a:t>
+            </a:r>
+          </a:p>
+          <a:p>
+            <a:r>
+              <a:t>   that a finger is normal, and the touch silently stops working. The buffer</a:t>
+            </a:r>
+          </a:p>
+          <a:p>
+            <a:r>
+              <a:t>   must only learn while untouched.</a:t>
+            </a:r>
+          </a:p>
+          <a:p/>
+          <a:p>
+            <a:r>
+              <a:t>Put the Serial Plotter on the projector. Watching the baseline wander while the</a:t>
+            </a:r>
+          </a:p>
+          <a:p>
+            <a:r>
+              <a:t>trigger line tracks it explains the whole design in ten seconds.</a:t>
+            </a:r>
+          </a:p>
+          <a:p/>
+          <a:p>
+            <a:r>
+              <a:t>For what it is worth, the rig this came from went through the same tuning: an</a:t>
+            </a:r>
+          </a:p>
+          <a:p>
+            <a:r>
+              <a:t>earlier version used 1.008 with a 50-sample baseline, the final one 1.01 with</a:t>
+            </a:r>
+          </a:p>
+          <a:p>
+            <a:r>
+              <a:t>25. Everyone tunes these.</a:t>
             </a:r>
           </a:p>
         </p:txBody>
@@ -2608,29 +1925,24 @@
           <a:lstStyle/>
           <a:p>
             <a:r>
-              <a:t>The surprise bench. No breakout board. The input is a wire.</a:t>
+              <a:t>1:25. Pull the room back together.</a:t>
             </a:r>
           </a:p>
           <a:p/>
           <a:p>
             <a:r>
-              <a:t>Have the Serial Plotter on a screen here. Watching the baseline wander while</a:t>
-            </a:r>
-          </a:p>
-          <a:p>
-            <a:r>
-              <a:t>the trigger line tracks it teaches the whole idea in ten seconds.</a:t>
+              <a:t>One sentence per group: what surprised you. No slides, no laptops. Ten minutes.</a:t>
             </a:r>
           </a:p>
           <a:p/>
           <a:p>
             <a:r>
-              <a:t>Let someone hold their hand NEAR without touching. The gradual approach is</a:t>
-            </a:r>
-          </a:p>
-          <a:p>
-            <a:r>
-              <a:t>what makes the threshold question real.</a:t>
+              <a:t>Expect someone to report the Peltier delay. Let that land, it is far more</a:t>
+            </a:r>
+          </a:p>
+          <a:p>
+            <a:r>
+              <a:t>persuasive from a peer than from you.</a:t>
             </a:r>
           </a:p>
         </p:txBody>
@@ -5839,7 +5151,7 @@
                 </a:solidFill>
                 <a:latin typeface="Arial"/>
               </a:rPr>
-              <a:t>BENCH 04: THE WHOLE TRICK</a:t>
+              <a:t>INPUTS WORTH KNOWING ABOUT</a:t>
             </a:r>
           </a:p>
         </p:txBody>
@@ -5875,7 +5187,7 @@
                 </a:solidFill>
                 <a:latin typeface="Arial"/>
               </a:rPr>
-              <a:t>Touch input for the price of a wire.</a:t>
+              <a:t>One table with a sign. Wander over between tasks.</a:t>
             </a:r>
           </a:p>
           <a:p>
@@ -5884,18 +5196,18 @@
                 <a:spcPct val="128000"/>
               </a:lnSpc>
               <a:spcAft>
-                <a:spcPts val="700"/>
+                <a:spcPts val="600"/>
               </a:spcAft>
               <a:buNone/>
             </a:pPr>
             <a:r>
-              <a:rPr sz="1700" b="1">
-                <a:solidFill>
-                  <a:srgbClr val="000000"/>
-                </a:solidFill>
-                <a:latin typeface="Arial"/>
-              </a:rPr>
-              <a:t>reading &gt; baselineAverage() * 1.01</a:t>
+              <a:rPr sz="1500" b="0">
+                <a:solidFill>
+                  <a:srgbClr val="000000"/>
+                </a:solidFill>
+                <a:latin typeface="Arial"/>
+              </a:rPr>
+              <a:t>• Capacitive touch. A wire. That is task 04</a:t>
             </a:r>
           </a:p>
           <a:p>
@@ -5904,10 +5216,19 @@
                 <a:spcPct val="128000"/>
               </a:lnSpc>
               <a:spcAft>
-                <a:spcPts val="0"/>
+                <a:spcPts val="600"/>
               </a:spcAft>
               <a:buNone/>
             </a:pPr>
+            <a:r>
+              <a:rPr sz="1500" b="0">
+                <a:solidFill>
+                  <a:srgbClr val="000000"/>
+                </a:solidFill>
+                <a:latin typeface="Arial"/>
+              </a:rPr>
+              <a:t>• Heart rate (PPG). Useless once the hand moves</a:t>
+            </a:r>
           </a:p>
           <a:p>
             <a:pPr marL="0" indent="0" algn="l">
@@ -5915,18 +5236,18 @@
                 <a:spcPct val="128000"/>
               </a:lnSpc>
               <a:spcAft>
-                <a:spcPts val="700"/>
+                <a:spcPts val="600"/>
               </a:spcAft>
               <a:buNone/>
             </a:pPr>
             <a:r>
-              <a:rPr sz="1700" b="1">
-                <a:solidFill>
-                  <a:srgbClr val="000000"/>
-                </a:solidFill>
-                <a:latin typeface="Arial"/>
-              </a:rPr>
-              <a:t>Threshold is relative, never absolute</a:t>
+              <a:rPr sz="1500" b="0">
+                <a:solidFill>
+                  <a:srgbClr val="000000"/>
+                </a:solidFill>
+                <a:latin typeface="Arial"/>
+              </a:rPr>
+              <a:t>• Skin conductance (GSR). Relative change only</a:t>
             </a:r>
           </a:p>
           <a:p>
@@ -5935,7 +5256,7 @@
                 <a:spcPct val="128000"/>
               </a:lnSpc>
               <a:spcAft>
-                <a:spcPts val="700"/>
+                <a:spcPts val="600"/>
               </a:spcAft>
               <a:buNone/>
             </a:pPr>
@@ -5946,7 +5267,7 @@
                 </a:solidFill>
                 <a:latin typeface="Arial"/>
               </a:rPr>
-              <a:t>• Readings drift with humidity and mains hum</a:t>
+              <a:t>• Flex sensor. The cheap data glove</a:t>
             </a:r>
           </a:p>
           <a:p>
@@ -5955,7 +5276,7 @@
                 <a:spcPct val="128000"/>
               </a:lnSpc>
               <a:spcAft>
-                <a:spcPts val="700"/>
+                <a:spcPts val="600"/>
               </a:spcAft>
               <a:buNone/>
             </a:pPr>
@@ -5966,7 +5287,7 @@
                 </a:solidFill>
                 <a:latin typeface="Arial"/>
               </a:rPr>
-              <a:t>• Fixed threshold works at 9am, fails at 1pm</a:t>
+              <a:t>• Pressure (FSR). Calibrate every pad</a:t>
             </a:r>
           </a:p>
           <a:p>
@@ -5975,41 +5296,10 @@
                 <a:spcPct val="128000"/>
               </a:lnSpc>
               <a:spcAft>
-                <a:spcPts val="0"/>
+                <a:spcPts val="600"/>
               </a:spcAft>
               <a:buNone/>
             </a:pPr>
-          </a:p>
-          <a:p>
-            <a:pPr marL="0" indent="0" algn="l">
-              <a:lnSpc>
-                <a:spcPct val="128000"/>
-              </a:lnSpc>
-              <a:spcAft>
-                <a:spcPts val="700"/>
-              </a:spcAft>
-              <a:buNone/>
-            </a:pPr>
-            <a:r>
-              <a:rPr sz="1700" b="1">
-                <a:solidFill>
-                  <a:srgbClr val="000000"/>
-                </a:solidFill>
-                <a:latin typeface="Arial"/>
-              </a:rPr>
-              <a:t>Baseline only learns while untouched</a:t>
-            </a:r>
-          </a:p>
-          <a:p>
-            <a:pPr marL="0" indent="0" algn="l">
-              <a:lnSpc>
-                <a:spcPct val="128000"/>
-              </a:lnSpc>
-              <a:spcAft>
-                <a:spcPts val="700"/>
-              </a:spcAft>
-              <a:buNone/>
-            </a:pPr>
             <a:r>
               <a:rPr sz="1500" b="0">
                 <a:solidFill>
@@ -6017,7 +5307,7 @@
                 </a:solidFill>
                 <a:latin typeface="Arial"/>
               </a:rPr>
-              <a:t>• Or a long press teaches it that a finger is normal</a:t>
+              <a:t>• Your own phone. No soldering at all</a:t>
             </a:r>
           </a:p>
         </p:txBody>
@@ -6107,13 +5397,13 @@
               <a:buNone/>
             </a:pPr>
             <a:r>
-              <a:rPr sz="3000" b="1">
-                <a:solidFill>
-                  <a:srgbClr val="000000"/>
-                </a:solidFill>
-                <a:latin typeface="Arial"/>
-              </a:rPr>
-              <a:t>05   PELTIER WARM / COOL</a:t>
+              <a:rPr sz="3200" b="1">
+                <a:solidFill>
+                  <a:srgbClr val="000000"/>
+                </a:solidFill>
+                <a:latin typeface="Arial"/>
+              </a:rPr>
+              <a:t>TWO RIGS THAT ALREADY EXIST</a:t>
             </a:r>
           </a:p>
         </p:txBody>
@@ -6138,18 +5428,18 @@
                 <a:spcPct val="128000"/>
               </a:lnSpc>
               <a:spcAft>
-                <a:spcPts val="1200"/>
+                <a:spcPts val="1400"/>
               </a:spcAft>
               <a:buNone/>
             </a:pPr>
             <a:r>
-              <a:rPr sz="1000" b="1">
+              <a:rPr sz="1700" b="0">
                 <a:solidFill>
                   <a:srgbClr val="595959"/>
                 </a:solidFill>
                 <a:latin typeface="Arial"/>
               </a:rPr>
-              <a:t>THERMAL</a:t>
+              <a:t>Built here, by students at roughly your stage.</a:t>
             </a:r>
           </a:p>
           <a:p>
@@ -6158,18 +5448,18 @@
                 <a:spcPct val="128000"/>
               </a:lnSpc>
               <a:spcAft>
-                <a:spcPts val="400"/>
+                <a:spcPts val="600"/>
               </a:spcAft>
               <a:buNone/>
             </a:pPr>
             <a:r>
-              <a:rPr sz="1600" b="0">
-                <a:solidFill>
-                  <a:srgbClr val="000000"/>
-                </a:solidFill>
-                <a:latin typeface="Arial"/>
-              </a:rPr>
-              <a:t>Heats one side, cools the other.</a:t>
+              <a:rPr sz="1700" b="1">
+                <a:solidFill>
+                  <a:srgbClr val="000000"/>
+                </a:solidFill>
+                <a:latin typeface="Arial"/>
+              </a:rPr>
+              <a:t>Moving screen, Arduino Uno</a:t>
             </a:r>
           </a:p>
           <a:p>
@@ -6178,18 +5468,38 @@
                 <a:spcPct val="128000"/>
               </a:lnSpc>
               <a:spcAft>
-                <a:spcPts val="400"/>
+                <a:spcPts val="600"/>
               </a:spcAft>
               <a:buNone/>
             </a:pPr>
             <a:r>
-              <a:rPr sz="1600" b="0">
-                <a:solidFill>
-                  <a:srgbClr val="000000"/>
-                </a:solidFill>
-                <a:latin typeface="Arial"/>
-              </a:rPr>
-              <a:t>Flip the current, it reverses.</a:t>
+              <a:rPr sz="1500" b="0">
+                <a:solidFill>
+                  <a:srgbClr val="000000"/>
+                </a:solidFill>
+                <a:latin typeface="Arial"/>
+              </a:rPr>
+              <a:t>• Breathes when idle. Retreats when touched</a:t>
+            </a:r>
+          </a:p>
+          <a:p>
+            <a:pPr marL="0" indent="0" algn="l">
+              <a:lnSpc>
+                <a:spcPct val="128000"/>
+              </a:lnSpc>
+              <a:spcAft>
+                <a:spcPts val="600"/>
+              </a:spcAft>
+              <a:buNone/>
+            </a:pPr>
+            <a:r>
+              <a:rPr sz="1500" b="0">
+                <a:solidFill>
+                  <a:srgbClr val="000000"/>
+                </a:solidFill>
+                <a:latin typeface="Arial"/>
+              </a:rPr>
+              <a:t>• Easing and idle motion do the work. A dozen lines</a:t>
             </a:r>
           </a:p>
           <a:p>
@@ -6209,162 +5519,24 @@
                 <a:spcPct val="128000"/>
               </a:lnSpc>
               <a:spcAft>
-                <a:spcPts val="400"/>
+                <a:spcPts val="600"/>
               </a:spcAft>
               <a:buNone/>
             </a:pPr>
             <a:r>
-              <a:rPr sz="1600" b="0">
-                <a:solidFill>
-                  <a:srgbClr val="000000"/>
-                </a:solidFill>
-                <a:latin typeface="Arial"/>
-              </a:rPr>
-              <a:t>Sit with it. Seconds before you are sure.</a:t>
+              <a:rPr sz="1700" b="1">
+                <a:solidFill>
+                  <a:srgbClr val="000000"/>
+                </a:solidFill>
+                <a:latin typeface="Arial"/>
+              </a:rPr>
+              <a:t>Instrumented sock, ESP32</a:t>
             </a:r>
           </a:p>
           <a:p>
             <a:pPr marL="0" indent="0" algn="l">
               <a:lnSpc>
                 <a:spcPct val="128000"/>
-              </a:lnSpc>
-              <a:spcAft>
-                <a:spcPts val="400"/>
-              </a:spcAft>
-              <a:buNone/>
-            </a:pPr>
-            <a:r>
-              <a:rPr sz="1600" b="0">
-                <a:solidFill>
-                  <a:srgbClr val="000000"/>
-                </a:solidFill>
-                <a:latin typeface="Arial"/>
-              </a:rPr>
-              <a:t>Hot alternating with cold reads as lukewarm.</a:t>
-            </a:r>
-          </a:p>
-          <a:p>
-            <a:pPr marL="0" indent="0" algn="l">
-              <a:lnSpc>
-                <a:spcPct val="128000"/>
-              </a:lnSpc>
-              <a:spcAft>
-                <a:spcPts val="0"/>
-              </a:spcAft>
-              <a:buNone/>
-            </a:pPr>
-          </a:p>
-          <a:p>
-            <a:pPr marL="0" indent="0" algn="l">
-              <a:lnSpc>
-                <a:spcPct val="128000"/>
-              </a:lnSpc>
-              <a:spcAft>
-                <a:spcPts val="400"/>
-              </a:spcAft>
-              <a:buNone/>
-            </a:pPr>
-            <a:r>
-              <a:rPr sz="1600" b="0">
-                <a:solidFill>
-                  <a:srgbClr val="000000"/>
-                </a:solidFill>
-                <a:latin typeface="Arial"/>
-              </a:rPr>
-              <a:t>USED FOR: slow ambient state, not alerts.</a:t>
-            </a:r>
-          </a:p>
-          <a:p>
-            <a:pPr marL="0" indent="0" algn="l">
-              <a:lnSpc>
-                <a:spcPct val="128000"/>
-              </a:lnSpc>
-              <a:spcAft>
-                <a:spcPts val="400"/>
-              </a:spcAft>
-              <a:buNone/>
-            </a:pPr>
-            <a:r>
-              <a:rPr sz="1600" b="0">
-                <a:solidFill>
-                  <a:srgbClr val="000000"/>
-                </a:solidFill>
-                <a:latin typeface="Arial"/>
-              </a:rPr>
-              <a:t>"The room is busy", never "you have mail".</a:t>
-            </a:r>
-          </a:p>
-          <a:p>
-            <a:pPr marL="0" indent="0" algn="l">
-              <a:lnSpc>
-                <a:spcPct val="128000"/>
-              </a:lnSpc>
-              <a:spcAft>
-                <a:spcPts val="1000"/>
-              </a:spcAft>
-              <a:buNone/>
-            </a:pPr>
-          </a:p>
-          <a:p>
-            <a:pPr marL="0" indent="0" algn="l">
-              <a:lnSpc>
-                <a:spcPct val="128000"/>
-              </a:lnSpc>
-              <a:spcAft>
-                <a:spcPts val="400"/>
-              </a:spcAft>
-              <a:buNone/>
-            </a:pPr>
-            <a:r>
-              <a:rPr sz="900" b="1">
-                <a:solidFill>
-                  <a:srgbClr val="595959"/>
-                </a:solidFill>
-                <a:latin typeface="Arial"/>
-              </a:rPr>
-              <a:t>CARD QUESTION</a:t>
-            </a:r>
-          </a:p>
-          <a:p>
-            <a:pPr marL="0" indent="0" algn="l">
-              <a:lnSpc>
-                <a:spcPct val="128000"/>
-              </a:lnSpc>
-              <a:spcAft>
-                <a:spcPts val="0"/>
-              </a:spcAft>
-              <a:buNone/>
-            </a:pPr>
-            <a:r>
-              <a:rPr sz="1500" b="1">
-                <a:solidFill>
-                  <a:srgbClr val="002546"/>
-                </a:solidFill>
-                <a:latin typeface="Arial"/>
-              </a:rPr>
-              <a:t>Time yourself. How long until you would bet money on warmer vs cooler?</a:t>
-            </a:r>
-          </a:p>
-        </p:txBody>
-      </p:sp>
-      <p:sp>
-        <p:nvSpPr>
-          <p:cNvPr id="4" name="Text Placeholder 3"/>
-          <p:cNvSpPr>
-            <a:spLocks noGrp="1"/>
-          </p:cNvSpPr>
-          <p:nvPr>
-            <p:ph type="body" idx="2"/>
-          </p:nvPr>
-        </p:nvSpPr>
-        <p:spPr/>
-        <p:txBody>
-          <a:bodyPr/>
-          <a:lstStyle/>
-          <a:p>
-            <a:pPr marL="0" indent="0" algn="l">
-              <a:lnSpc>
-                <a:spcPct val="120000"/>
               </a:lnSpc>
               <a:spcAft>
                 <a:spcPts val="600"/>
@@ -6372,19 +5544,19 @@
               <a:buNone/>
             </a:pPr>
             <a:r>
-              <a:rPr sz="1200" b="0">
-                <a:solidFill>
-                  <a:srgbClr val="000000"/>
-                </a:solidFill>
-                <a:latin typeface="Consolas"/>
-              </a:rPr>
-              <a:t>part   TEC1-12706</a:t>
-            </a:r>
-          </a:p>
-          <a:p>
-            <a:pPr marL="0" indent="0" algn="l">
-              <a:lnSpc>
-                <a:spcPct val="120000"/>
+              <a:rPr sz="1500" b="0">
+                <a:solidFill>
+                  <a:srgbClr val="000000"/>
+                </a:solidFill>
+                <a:latin typeface="Arial"/>
+              </a:rPr>
+              <a:t>• Six force sensors under a foot, batched over Wi-Fi</a:t>
+            </a:r>
+          </a:p>
+          <a:p>
+            <a:pPr marL="0" indent="0" algn="l">
+              <a:lnSpc>
+                <a:spcPct val="128000"/>
               </a:lnSpc>
               <a:spcAft>
                 <a:spcPts val="600"/>
@@ -6392,100 +5564,20 @@
               <a:buNone/>
             </a:pPr>
             <a:r>
-              <a:rPr sz="1200" b="0">
-                <a:solidFill>
-                  <a:srgbClr val="000000"/>
-                </a:solidFill>
-                <a:latin typeface="Consolas"/>
-              </a:rPr>
-              <a:t>drive   L298N H-bridge</a:t>
-            </a:r>
-          </a:p>
-          <a:p>
-            <a:pPr marL="0" indent="0" algn="l">
-              <a:lnSpc>
-                <a:spcPct val="120000"/>
-              </a:lnSpc>
-              <a:spcAft>
-                <a:spcPts val="600"/>
-              </a:spcAft>
-              <a:buNone/>
-            </a:pPr>
-            <a:r>
-              <a:rPr sz="1200" b="0">
-                <a:solidFill>
-                  <a:srgbClr val="000000"/>
-                </a:solidFill>
-                <a:latin typeface="Consolas"/>
-              </a:rPr>
-              <a:t>pin   D3 PWM / D4-5</a:t>
-            </a:r>
-          </a:p>
-          <a:p>
-            <a:pPr marL="0" indent="0" algn="l">
-              <a:lnSpc>
-                <a:spcPct val="120000"/>
-              </a:lnSpc>
-              <a:spcAft>
-                <a:spcPts val="600"/>
-              </a:spcAft>
-              <a:buNone/>
-            </a:pPr>
-            <a:r>
-              <a:rPr sz="1200" b="0">
-                <a:solidFill>
-                  <a:srgbClr val="000000"/>
-                </a:solidFill>
-                <a:latin typeface="Consolas"/>
-              </a:rPr>
-              <a:t>draw   2-4 A, bench PSU</a:t>
-            </a:r>
-          </a:p>
-          <a:p>
-            <a:pPr marL="0" indent="0" algn="l">
-              <a:lnSpc>
-                <a:spcPct val="120000"/>
-              </a:lnSpc>
-              <a:spcAft>
-                <a:spcPts val="600"/>
-              </a:spcAft>
-              <a:buNone/>
-            </a:pPr>
-            <a:r>
-              <a:rPr sz="1200" b="0">
-                <a:solidFill>
-                  <a:srgbClr val="000000"/>
-                </a:solidFill>
-                <a:latin typeface="Consolas"/>
-              </a:rPr>
-              <a:t>onset   3-8 s</a:t>
-            </a:r>
-          </a:p>
-          <a:p>
-            <a:pPr marL="0" indent="0" algn="l">
-              <a:lnSpc>
-                <a:spcPct val="120000"/>
-              </a:lnSpc>
-              <a:spcAft>
-                <a:spcPts val="600"/>
-              </a:spcAft>
-              <a:buNone/>
-            </a:pPr>
-            <a:r>
-              <a:rPr sz="1200" b="0">
-                <a:solidFill>
-                  <a:srgbClr val="000000"/>
-                </a:solidFill>
-                <a:latin typeface="Consolas"/>
-              </a:rPr>
-              <a:t>cap   45 C in software</a:t>
+              <a:rPr sz="1500" b="0">
+                <a:solidFill>
+                  <a:srgbClr val="000000"/>
+                </a:solidFill>
+                <a:latin typeface="Arial"/>
+              </a:rPr>
+              <a:t>• Calibrate per sensor. Batch your writes</a:t>
             </a:r>
           </a:p>
         </p:txBody>
       </p:sp>
       <p:pic>
         <p:nvPicPr>
-          <p:cNvPr id="5" name="Picture 4" descr="wordmark_dark.png"/>
+          <p:cNvPr id="4" name="Picture 3" descr="wordmark_dark.png"/>
           <p:cNvPicPr>
             <a:picLocks noChangeAspect="1"/>
           </p:cNvPicPr>
@@ -6509,7 +5601,7 @@
       </p:pic>
       <p:pic>
         <p:nvPicPr>
-          <p:cNvPr id="6" name="Picture 5" descr="seal_dark.png"/>
+          <p:cNvPr id="5" name="Picture 4" descr="seal_dark.png"/>
           <p:cNvPicPr>
             <a:picLocks noChangeAspect="1"/>
           </p:cNvPicPr>
@@ -6568,440 +5660,13 @@
               <a:buNone/>
             </a:pPr>
             <a:r>
-              <a:rPr sz="3000" b="1">
-                <a:solidFill>
-                  <a:srgbClr val="000000"/>
-                </a:solidFill>
-                <a:latin typeface="Arial"/>
-              </a:rPr>
-              <a:t>06   THE SAME SIGNAL, TWICE</a:t>
-            </a:r>
-          </a:p>
-        </p:txBody>
-      </p:sp>
-      <p:sp>
-        <p:nvSpPr>
-          <p:cNvPr id="3" name="Text Placeholder 2"/>
-          <p:cNvSpPr>
-            <a:spLocks noGrp="1"/>
-          </p:cNvSpPr>
-          <p:nvPr>
-            <p:ph type="body" idx="1"/>
-          </p:nvPr>
-        </p:nvSpPr>
-        <p:spPr/>
-        <p:txBody>
-          <a:bodyPr/>
-          <a:lstStyle/>
-          <a:p>
-            <a:pPr marL="0" indent="0" algn="l">
-              <a:lnSpc>
-                <a:spcPct val="128000"/>
-              </a:lnSpc>
-              <a:spcAft>
-                <a:spcPts val="1200"/>
-              </a:spcAft>
-              <a:buNone/>
-            </a:pPr>
-            <a:r>
-              <a:rPr sz="1000" b="1">
-                <a:solidFill>
-                  <a:srgbClr val="595959"/>
-                </a:solidFill>
-                <a:latin typeface="Arial"/>
-              </a:rPr>
-              <a:t>AUDIO + TOUCH</a:t>
-            </a:r>
-          </a:p>
-          <a:p>
-            <a:pPr marL="0" indent="0" algn="l">
-              <a:lnSpc>
-                <a:spcPct val="128000"/>
-              </a:lnSpc>
-              <a:spcAft>
-                <a:spcPts val="400"/>
-              </a:spcAft>
-              <a:buNone/>
-            </a:pPr>
-            <a:r>
-              <a:rPr sz="1600" b="0">
-                <a:solidFill>
-                  <a:srgbClr val="000000"/>
-                </a:solidFill>
-                <a:latin typeface="Arial"/>
-              </a:rPr>
-              <a:t>One driver. 40 Hz you feel, 400 Hz you hear.</a:t>
-            </a:r>
-          </a:p>
-          <a:p>
-            <a:pPr marL="0" indent="0" algn="l">
-              <a:lnSpc>
-                <a:spcPct val="128000"/>
-              </a:lnSpc>
-              <a:spcAft>
-                <a:spcPts val="0"/>
-              </a:spcAft>
-              <a:buNone/>
-            </a:pPr>
-          </a:p>
-          <a:p>
-            <a:pPr marL="0" indent="0" algn="l">
-              <a:lnSpc>
-                <a:spcPct val="128000"/>
-              </a:lnSpc>
-              <a:spcAft>
-                <a:spcPts val="400"/>
-              </a:spcAft>
-              <a:buNone/>
-            </a:pPr>
-            <a:r>
-              <a:rPr sz="1600" b="0">
-                <a:solidFill>
-                  <a:srgbClr val="000000"/>
-                </a:solidFill>
-                <a:latin typeface="Arial"/>
-              </a:rPr>
-              <a:t>Together is not louder. It is more certain.</a:t>
-            </a:r>
-          </a:p>
-          <a:p>
-            <a:pPr marL="0" indent="0" algn="l">
-              <a:lnSpc>
-                <a:spcPct val="128000"/>
-              </a:lnSpc>
-              <a:spcAft>
-                <a:spcPts val="400"/>
-              </a:spcAft>
-              <a:buNone/>
-            </a:pPr>
-            <a:r>
-              <a:rPr sz="1600" b="0">
-                <a:solidFill>
-                  <a:srgbClr val="000000"/>
-                </a:solidFill>
-                <a:latin typeface="Arial"/>
-              </a:rPr>
-              <a:t>Two channels, same message.</a:t>
-            </a:r>
-          </a:p>
-          <a:p>
-            <a:pPr marL="0" indent="0" algn="l">
-              <a:lnSpc>
-                <a:spcPct val="128000"/>
-              </a:lnSpc>
-              <a:spcAft>
-                <a:spcPts val="1000"/>
-              </a:spcAft>
-              <a:buNone/>
-            </a:pPr>
-          </a:p>
-          <a:p>
-            <a:pPr marL="0" indent="0" algn="l">
-              <a:lnSpc>
-                <a:spcPct val="128000"/>
-              </a:lnSpc>
-              <a:spcAft>
-                <a:spcPts val="400"/>
-              </a:spcAft>
-              <a:buNone/>
-            </a:pPr>
-            <a:r>
-              <a:rPr sz="900" b="1">
-                <a:solidFill>
-                  <a:srgbClr val="595959"/>
-                </a:solidFill>
-                <a:latin typeface="Arial"/>
-              </a:rPr>
-              <a:t>CARD QUESTION</a:t>
-            </a:r>
-          </a:p>
-          <a:p>
-            <a:pPr marL="0" indent="0" algn="l">
-              <a:lnSpc>
-                <a:spcPct val="128000"/>
-              </a:lnSpc>
-              <a:spcAft>
-                <a:spcPts val="0"/>
-              </a:spcAft>
-              <a:buNone/>
-            </a:pPr>
-            <a:r>
-              <a:rPr sz="1500" b="1">
-                <a:solidFill>
-                  <a:srgbClr val="002546"/>
-                </a:solidFill>
-                <a:latin typeface="Arial"/>
-              </a:rPr>
-              <a:t>With ear defenders on, does the signal still work?</a:t>
-            </a:r>
-          </a:p>
-        </p:txBody>
-      </p:sp>
-      <p:sp>
-        <p:nvSpPr>
-          <p:cNvPr id="4" name="Text Placeholder 3"/>
-          <p:cNvSpPr>
-            <a:spLocks noGrp="1"/>
-          </p:cNvSpPr>
-          <p:nvPr>
-            <p:ph type="body" idx="2"/>
-          </p:nvPr>
-        </p:nvSpPr>
-        <p:spPr/>
-        <p:txBody>
-          <a:bodyPr/>
-          <a:lstStyle/>
-          <a:p>
-            <a:pPr marL="0" indent="0" algn="l">
-              <a:spcAft>
-                <a:spcPts val="400"/>
-              </a:spcAft>
-              <a:buNone/>
-            </a:pPr>
-            <a:r>
-              <a:rPr sz="900" b="1">
-                <a:solidFill>
-                  <a:srgbClr val="595959"/>
-                </a:solidFill>
-                <a:latin typeface="Arial"/>
-              </a:rPr>
-              <a:t>USED FOR</a:t>
-            </a:r>
-          </a:p>
-          <a:p>
-            <a:pPr marL="0" indent="0" algn="l">
-              <a:lnSpc>
-                <a:spcPct val="125000"/>
-              </a:lnSpc>
-              <a:spcAft>
-                <a:spcPts val="1600"/>
-              </a:spcAft>
-              <a:buNone/>
-            </a:pPr>
-            <a:r>
-              <a:rPr sz="1200" b="0">
-                <a:solidFill>
-                  <a:srgbClr val="002546"/>
-                </a:solidFill>
-                <a:latin typeface="Arial"/>
-              </a:rPr>
-              <a:t>noisy or bright environments, and accessibility. If one channel fails, one lands.</a:t>
-            </a:r>
-          </a:p>
-          <a:p>
-            <a:pPr marL="0" indent="0" algn="l">
-              <a:lnSpc>
-                <a:spcPct val="120000"/>
-              </a:lnSpc>
-              <a:spcAft>
-                <a:spcPts val="600"/>
-              </a:spcAft>
-              <a:buNone/>
-            </a:pPr>
-            <a:r>
-              <a:rPr sz="1200" b="0">
-                <a:solidFill>
-                  <a:srgbClr val="000000"/>
-                </a:solidFill>
-                <a:latin typeface="Consolas"/>
-              </a:rPr>
-              <a:t>part   bone-conduction</a:t>
-            </a:r>
-          </a:p>
-          <a:p>
-            <a:pPr marL="0" indent="0" algn="l">
-              <a:lnSpc>
-                <a:spcPct val="120000"/>
-              </a:lnSpc>
-              <a:spcAft>
-                <a:spcPts val="600"/>
-              </a:spcAft>
-              <a:buNone/>
-            </a:pPr>
-            <a:r>
-              <a:rPr sz="1200" b="0">
-                <a:solidFill>
-                  <a:srgbClr val="000000"/>
-                </a:solidFill>
-                <a:latin typeface="Consolas"/>
-              </a:rPr>
-              <a:t>amp   PAM8403 class-D</a:t>
-            </a:r>
-          </a:p>
-          <a:p>
-            <a:pPr marL="0" indent="0" algn="l">
-              <a:lnSpc>
-                <a:spcPct val="120000"/>
-              </a:lnSpc>
-              <a:spcAft>
-                <a:spcPts val="600"/>
-              </a:spcAft>
-              <a:buNone/>
-            </a:pPr>
-            <a:r>
-              <a:rPr sz="1200" b="0">
-                <a:solidFill>
-                  <a:srgbClr val="000000"/>
-                </a:solidFill>
-                <a:latin typeface="Consolas"/>
-              </a:rPr>
-              <a:t>pin   D11 (tone)</a:t>
-            </a:r>
-          </a:p>
-          <a:p>
-            <a:pPr marL="0" indent="0" algn="l">
-              <a:lnSpc>
-                <a:spcPct val="120000"/>
-              </a:lnSpc>
-              <a:spcAft>
-                <a:spcPts val="600"/>
-              </a:spcAft>
-              <a:buNone/>
-            </a:pPr>
-            <a:r>
-              <a:rPr sz="1200" b="0">
-                <a:solidFill>
-                  <a:srgbClr val="000000"/>
-                </a:solidFill>
-                <a:latin typeface="Consolas"/>
-              </a:rPr>
-              <a:t>felt   ~40 Hz</a:t>
-            </a:r>
-          </a:p>
-          <a:p>
-            <a:pPr marL="0" indent="0" algn="l">
-              <a:lnSpc>
-                <a:spcPct val="120000"/>
-              </a:lnSpc>
-              <a:spcAft>
-                <a:spcPts val="600"/>
-              </a:spcAft>
-              <a:buNone/>
-            </a:pPr>
-            <a:r>
-              <a:rPr sz="1200" b="0">
-                <a:solidFill>
-                  <a:srgbClr val="000000"/>
-                </a:solidFill>
-                <a:latin typeface="Consolas"/>
-              </a:rPr>
-              <a:t>heard   ~400 Hz</a:t>
-            </a:r>
-          </a:p>
-          <a:p>
-            <a:pPr marL="0" indent="0" algn="l">
-              <a:lnSpc>
-                <a:spcPct val="120000"/>
-              </a:lnSpc>
-              <a:spcAft>
-                <a:spcPts val="600"/>
-              </a:spcAft>
-              <a:buNone/>
-            </a:pPr>
-            <a:r>
-              <a:rPr sz="1200" b="0">
-                <a:solidFill>
-                  <a:srgbClr val="000000"/>
-                </a:solidFill>
-                <a:latin typeface="Consolas"/>
-              </a:rPr>
-              <a:t>cost   ~110 kr</a:t>
-            </a:r>
-          </a:p>
-        </p:txBody>
-      </p:sp>
-      <p:pic>
-        <p:nvPicPr>
-          <p:cNvPr id="5" name="Picture 4" descr="wordmark_dark.png"/>
-          <p:cNvPicPr>
-            <a:picLocks noChangeAspect="1"/>
-          </p:cNvPicPr>
-          <p:nvPr/>
-        </p:nvPicPr>
-        <p:blipFill>
-          <a:blip r:embed="rId2"/>
-          <a:stretch>
-            <a:fillRect/>
-          </a:stretch>
-        </p:blipFill>
-        <p:spPr>
-          <a:xfrm>
-            <a:off x="342900" y="6184900"/>
-            <a:ext cx="2070100" cy="529560"/>
-          </a:xfrm>
-          <a:prstGeom prst="rect">
-            <a:avLst/>
-          </a:prstGeom>
-        </p:spPr>
-      </p:pic>
-      <p:pic>
-        <p:nvPicPr>
-          <p:cNvPr id="6" name="Picture 5" descr="seal_dark.png"/>
-          <p:cNvPicPr>
-            <a:picLocks noChangeAspect="1"/>
-          </p:cNvPicPr>
-          <p:nvPr/>
-        </p:nvPicPr>
-        <p:blipFill>
-          <a:blip r:embed="rId3"/>
-          <a:stretch>
-            <a:fillRect/>
-          </a:stretch>
-        </p:blipFill>
-        <p:spPr>
-          <a:xfrm>
-            <a:off x="11226800" y="5969000"/>
-            <a:ext cx="713915" cy="711200"/>
-          </a:xfrm>
-          <a:prstGeom prst="rect">
-            <a:avLst/>
-          </a:prstGeom>
-        </p:spPr>
-      </p:pic>
-    </p:spTree>
-  </p:cSld>
-  <p:clrMapOvr>
-    <a:masterClrMapping/>
-  </p:clrMapOvr>
-</p:sld>
-</file>
-
-<file path=ppt/slides/slide13.xml><?xml version="1.0" encoding="utf-8"?>
-<p:sld xmlns:a="http://schemas.openxmlformats.org/drawingml/2006/main" xmlns:p="http://schemas.openxmlformats.org/presentationml/2006/main" xmlns:r="http://schemas.openxmlformats.org/officeDocument/2006/relationships">
-  <p:cSld>
-    <p:spTree>
-      <p:nvGrpSpPr>
-        <p:cNvPr id="1" name=""/>
-        <p:cNvGrpSpPr/>
-        <p:nvPr/>
-      </p:nvGrpSpPr>
-      <p:grpSpPr/>
-      <p:sp>
-        <p:nvSpPr>
-          <p:cNvPr id="2" name="Title 1"/>
-          <p:cNvSpPr>
-            <a:spLocks noGrp="1"/>
-          </p:cNvSpPr>
-          <p:nvPr>
-            <p:ph type="title"/>
-          </p:nvPr>
-        </p:nvSpPr>
-        <p:spPr/>
-        <p:txBody>
-          <a:bodyPr/>
-          <a:lstStyle/>
-          <a:p>
-            <a:pPr marL="0" indent="0" algn="l">
-              <a:buNone/>
-            </a:pPr>
-            <a:r>
               <a:rPr sz="4400" b="1">
                 <a:solidFill>
                   <a:srgbClr val="000000"/>
                 </a:solidFill>
                 <a:latin typeface="Arial"/>
               </a:rPr>
-              <a:t>NOW MAKE ONE DO SOMETHING</a:t>
+              <a:t>BUILD ONE SIGNAL</a:t>
             </a:r>
           </a:p>
         </p:txBody>
@@ -7062,6 +5727,300 @@
 </p:sld>
 </file>
 
+<file path=ppt/slides/slide13.xml><?xml version="1.0" encoding="utf-8"?>
+<p:sld xmlns:a="http://schemas.openxmlformats.org/drawingml/2006/main" xmlns:p="http://schemas.openxmlformats.org/presentationml/2006/main" xmlns:r="http://schemas.openxmlformats.org/officeDocument/2006/relationships">
+  <p:cSld>
+    <p:spTree>
+      <p:nvGrpSpPr>
+        <p:cNvPr id="1" name=""/>
+        <p:cNvGrpSpPr/>
+        <p:nvPr/>
+      </p:nvGrpSpPr>
+      <p:grpSpPr/>
+      <p:sp>
+        <p:nvSpPr>
+          <p:cNvPr id="2" name="Title 1"/>
+          <p:cNvSpPr>
+            <a:spLocks noGrp="1"/>
+          </p:cNvSpPr>
+          <p:nvPr>
+            <p:ph type="title"/>
+          </p:nvPr>
+        </p:nvSpPr>
+        <p:spPr/>
+        <p:txBody>
+          <a:bodyPr/>
+          <a:lstStyle/>
+          <a:p>
+            <a:pPr marL="0" indent="0" algn="l">
+              <a:buNone/>
+            </a:pPr>
+            <a:r>
+              <a:rPr sz="3200" b="1">
+                <a:solidFill>
+                  <a:srgbClr val="000000"/>
+                </a:solidFill>
+                <a:latin typeface="Arial"/>
+              </a:rPr>
+              <a:t>THE BRIEF</a:t>
+            </a:r>
+          </a:p>
+        </p:txBody>
+      </p:sp>
+      <p:sp>
+        <p:nvSpPr>
+          <p:cNvPr id="3" name="Text Placeholder 2"/>
+          <p:cNvSpPr>
+            <a:spLocks noGrp="1"/>
+          </p:cNvSpPr>
+          <p:nvPr>
+            <p:ph type="body" idx="1"/>
+          </p:nvPr>
+        </p:nvSpPr>
+        <p:spPr/>
+        <p:txBody>
+          <a:bodyPr/>
+          <a:lstStyle/>
+          <a:p>
+            <a:pPr marL="0" indent="0" algn="l">
+              <a:lnSpc>
+                <a:spcPct val="128000"/>
+              </a:lnSpc>
+              <a:spcAft>
+                <a:spcPts val="1400"/>
+              </a:spcAft>
+              <a:buNone/>
+            </a:pPr>
+            <a:r>
+              <a:rPr sz="1700" b="0">
+                <a:solidFill>
+                  <a:srgbClr val="595959"/>
+                </a:solidFill>
+                <a:latin typeface="Arial"/>
+              </a:rPr>
+              <a:t>30 minutes. Not long enough to be precious about it.</a:t>
+            </a:r>
+          </a:p>
+          <a:p>
+            <a:pPr marL="0" indent="0" algn="l">
+              <a:lnSpc>
+                <a:spcPct val="128000"/>
+              </a:lnSpc>
+              <a:spcAft>
+                <a:spcPts val="600"/>
+              </a:spcAft>
+              <a:buNone/>
+            </a:pPr>
+            <a:r>
+              <a:rPr sz="1700" b="1">
+                <a:solidFill>
+                  <a:srgbClr val="000000"/>
+                </a:solidFill>
+                <a:latin typeface="Arial"/>
+              </a:rPr>
+              <a:t>One actuator. Three messages</a:t>
+            </a:r>
+          </a:p>
+          <a:p>
+            <a:pPr marL="0" indent="0" algn="l">
+              <a:lnSpc>
+                <a:spcPct val="128000"/>
+              </a:lnSpc>
+              <a:spcAft>
+                <a:spcPts val="600"/>
+              </a:spcAft>
+              <a:buNone/>
+            </a:pPr>
+            <a:r>
+              <a:rPr sz="1500" b="0">
+                <a:solidFill>
+                  <a:srgbClr val="000000"/>
+                </a:solidFill>
+                <a:latin typeface="Arial"/>
+              </a:rPr>
+              <a:t>• Arrived. Something wrong. Finished</a:t>
+            </a:r>
+          </a:p>
+          <a:p>
+            <a:pPr marL="0" indent="0" algn="l">
+              <a:lnSpc>
+                <a:spcPct val="128000"/>
+              </a:lnSpc>
+              <a:spcAft>
+                <a:spcPts val="0"/>
+              </a:spcAft>
+              <a:buNone/>
+            </a:pPr>
+          </a:p>
+          <a:p>
+            <a:pPr marL="0" indent="0" algn="l">
+              <a:lnSpc>
+                <a:spcPct val="128000"/>
+              </a:lnSpc>
+              <a:spcAft>
+                <a:spcPts val="600"/>
+              </a:spcAft>
+              <a:buNone/>
+            </a:pPr>
+            <a:r>
+              <a:rPr sz="1700" b="1">
+                <a:solidFill>
+                  <a:srgbClr val="000000"/>
+                </a:solidFill>
+                <a:latin typeface="Arial"/>
+              </a:rPr>
+              <a:t>Vary two things only</a:t>
+            </a:r>
+          </a:p>
+          <a:p>
+            <a:pPr marL="0" indent="0" algn="l">
+              <a:lnSpc>
+                <a:spcPct val="128000"/>
+              </a:lnSpc>
+              <a:spcAft>
+                <a:spcPts val="600"/>
+              </a:spcAft>
+              <a:buNone/>
+            </a:pPr>
+            <a:r>
+              <a:rPr sz="1500" b="0">
+                <a:solidFill>
+                  <a:srgbClr val="000000"/>
+                </a:solidFill>
+                <a:latin typeface="Arial"/>
+              </a:rPr>
+              <a:t>• Rhythm of the pulses</a:t>
+            </a:r>
+          </a:p>
+          <a:p>
+            <a:pPr marL="0" indent="0" algn="l">
+              <a:lnSpc>
+                <a:spcPct val="128000"/>
+              </a:lnSpc>
+              <a:spcAft>
+                <a:spcPts val="600"/>
+              </a:spcAft>
+              <a:buNone/>
+            </a:pPr>
+            <a:r>
+              <a:rPr sz="1500" b="0">
+                <a:solidFill>
+                  <a:srgbClr val="000000"/>
+                </a:solidFill>
+                <a:latin typeface="Arial"/>
+              </a:rPr>
+              <a:t>• How strong they are</a:t>
+            </a:r>
+          </a:p>
+          <a:p>
+            <a:pPr marL="0" indent="0" algn="l">
+              <a:lnSpc>
+                <a:spcPct val="128000"/>
+              </a:lnSpc>
+              <a:spcAft>
+                <a:spcPts val="0"/>
+              </a:spcAft>
+              <a:buNone/>
+            </a:pPr>
+          </a:p>
+          <a:p>
+            <a:pPr marL="0" indent="0" algn="l">
+              <a:lnSpc>
+                <a:spcPct val="128000"/>
+              </a:lnSpc>
+              <a:spcAft>
+                <a:spcPts val="600"/>
+              </a:spcAft>
+              <a:buNone/>
+            </a:pPr>
+            <a:r>
+              <a:rPr sz="1700" b="1">
+                <a:solidFill>
+                  <a:srgbClr val="000000"/>
+                </a:solidFill>
+                <a:latin typeface="Arial"/>
+              </a:rPr>
+              <a:t>Blind test: they name all three</a:t>
+            </a:r>
+          </a:p>
+          <a:p>
+            <a:pPr marL="0" indent="0" algn="l">
+              <a:lnSpc>
+                <a:spcPct val="128000"/>
+              </a:lnSpc>
+              <a:spcAft>
+                <a:spcPts val="600"/>
+              </a:spcAft>
+              <a:buNone/>
+            </a:pPr>
+            <a:r>
+              <a:rPr sz="1500" b="0">
+                <a:solidFill>
+                  <a:srgbClr val="000000"/>
+                </a:solidFill>
+                <a:latin typeface="Arial"/>
+              </a:rPr>
+              <a:t>• Note which two got confused, and why</a:t>
+            </a:r>
+          </a:p>
+        </p:txBody>
+      </p:sp>
+      <p:pic>
+        <p:nvPicPr>
+          <p:cNvPr id="4" name="Picture 3" descr="wordmark_dark.png"/>
+          <p:cNvPicPr>
+            <a:picLocks noChangeAspect="1"/>
+          </p:cNvPicPr>
+          <p:nvPr/>
+        </p:nvPicPr>
+        <p:blipFill>
+          <a:blip r:embed="rId2"/>
+          <a:stretch>
+            <a:fillRect/>
+          </a:stretch>
+        </p:blipFill>
+        <p:spPr>
+          <a:xfrm>
+            <a:off x="342900" y="6184900"/>
+            <a:ext cx="2070100" cy="529560"/>
+          </a:xfrm>
+          <a:prstGeom prst="rect">
+            <a:avLst/>
+          </a:prstGeom>
+        </p:spPr>
+      </p:pic>
+      <p:pic>
+        <p:nvPicPr>
+          <p:cNvPr id="5" name="Picture 4" descr="seal_dark.png"/>
+          <p:cNvPicPr>
+            <a:picLocks noChangeAspect="1"/>
+          </p:cNvPicPr>
+          <p:nvPr/>
+        </p:nvPicPr>
+        <p:blipFill>
+          <a:blip r:embed="rId3"/>
+          <a:stretch>
+            <a:fillRect/>
+          </a:stretch>
+        </p:blipFill>
+        <p:spPr>
+          <a:xfrm>
+            <a:off x="11226800" y="5969000"/>
+            <a:ext cx="713915" cy="711200"/>
+          </a:xfrm>
+          <a:prstGeom prst="rect">
+            <a:avLst/>
+          </a:prstGeom>
+        </p:spPr>
+      </p:pic>
+    </p:spTree>
+  </p:cSld>
+  <p:clrMapOvr>
+    <a:masterClrMapping/>
+  </p:clrMapOvr>
+</p:sld>
+</file>
+
 <file path=ppt/slides/slide14.xml><?xml version="1.0" encoding="utf-8"?>
 <p:sld xmlns:a="http://schemas.openxmlformats.org/drawingml/2006/main" xmlns:p="http://schemas.openxmlformats.org/presentationml/2006/main" xmlns:r="http://schemas.openxmlformats.org/officeDocument/2006/relationships">
   <p:cSld>
@@ -7097,7 +6056,7 @@
                 </a:solidFill>
                 <a:latin typeface="Arial"/>
               </a:rPr>
-              <a:t>FIVE TASKS, ONE BOARD EACH</a:t>
+              <a:t>THE CONSTRAINT THAT MATTERS</a:t>
             </a:r>
           </a:p>
         </p:txBody>
@@ -7122,118 +6081,18 @@
                 <a:spcPct val="128000"/>
               </a:lnSpc>
               <a:spcAft>
-                <a:spcPts val="1400"/>
+                <a:spcPts val="600"/>
               </a:spcAft>
               <a:buNone/>
             </a:pPr>
             <a:r>
-              <a:rPr sz="1700" b="0">
-                <a:solidFill>
-                  <a:srgbClr val="595959"/>
-                </a:solidFill>
-                <a:latin typeface="Arial"/>
-              </a:rPr>
-              <a:t>Upload, change two numbers, upload again. That loop is the point.</a:t>
-            </a:r>
-          </a:p>
-          <a:p>
-            <a:pPr marL="0" indent="0" algn="l">
-              <a:lnSpc>
-                <a:spcPct val="128000"/>
-              </a:lnSpc>
-              <a:spcAft>
-                <a:spcPts val="700"/>
-              </a:spcAft>
-              <a:buNone/>
-            </a:pPr>
-            <a:r>
               <a:rPr sz="1700" b="1">
                 <a:solidFill>
                   <a:srgbClr val="000000"/>
                 </a:solidFill>
                 <a:latin typeface="Arial"/>
               </a:rPr>
-              <a:t>01   Make something spin</a:t>
-            </a:r>
-          </a:p>
-          <a:p>
-            <a:pPr marL="0" indent="0" algn="l">
-              <a:lnSpc>
-                <a:spcPct val="128000"/>
-              </a:lnSpc>
-              <a:spcAft>
-                <a:spcPts val="700"/>
-              </a:spcAft>
-              <a:buNone/>
-            </a:pPr>
-            <a:r>
-              <a:rPr sz="1700" b="1">
-                <a:solidFill>
-                  <a:srgbClr val="000000"/>
-                </a:solidFill>
-                <a:latin typeface="Arial"/>
-              </a:rPr>
-              <a:t>02   Make something tap</a:t>
-            </a:r>
-          </a:p>
-          <a:p>
-            <a:pPr marL="0" indent="0" algn="l">
-              <a:lnSpc>
-                <a:spcPct val="128000"/>
-              </a:lnSpc>
-              <a:spcAft>
-                <a:spcPts val="700"/>
-              </a:spcAft>
-              <a:buNone/>
-            </a:pPr>
-            <a:r>
-              <a:rPr sz="1700" b="1">
-                <a:solidFill>
-                  <a:srgbClr val="000000"/>
-                </a:solidFill>
-                <a:latin typeface="Arial"/>
-              </a:rPr>
-              <a:t>03   Make something warm</a:t>
-            </a:r>
-          </a:p>
-          <a:p>
-            <a:pPr marL="0" indent="0" algn="l">
-              <a:lnSpc>
-                <a:spcPct val="128000"/>
-              </a:lnSpc>
-              <a:spcAft>
-                <a:spcPts val="700"/>
-              </a:spcAft>
-              <a:buNone/>
-            </a:pPr>
-            <a:r>
-              <a:rPr sz="1700" b="1">
-                <a:solidFill>
-                  <a:srgbClr val="000000"/>
-                </a:solidFill>
-                <a:latin typeface="Arial"/>
-              </a:rPr>
-              <a:t>04   Make it notice you</a:t>
-            </a:r>
-          </a:p>
-          <a:p>
-            <a:pPr marL="0" indent="0" algn="l">
-              <a:lnSpc>
-                <a:spcPct val="128000"/>
-              </a:lnSpc>
-              <a:spcAft>
-                <a:spcPts val="700"/>
-              </a:spcAft>
-              <a:buNone/>
-            </a:pPr>
-            <a:r>
-              <a:rPr sz="1700" b="1">
-                <a:solidFill>
-                  <a:srgbClr val="000000"/>
-                </a:solidFill>
-                <a:latin typeface="Arial"/>
-              </a:rPr>
-              <a:t>05   Make it answer back</a:t>
+              <a:t>The recipient cannot look at the device.</a:t>
             </a:r>
           </a:p>
           <a:p>
@@ -7253,7 +6112,7 @@
                 <a:spcPct val="128000"/>
               </a:lnSpc>
               <a:spcAft>
-                <a:spcPts val="700"/>
+                <a:spcPts val="600"/>
               </a:spcAft>
               <a:buNone/>
             </a:pPr>
@@ -7264,7 +6123,7 @@
                 </a:solidFill>
                 <a:latin typeface="Arial"/>
               </a:rPr>
-              <a:t>1 to 3 are output. 4 is input. 5 is both.</a:t>
+              <a:t>If it only works while someone watches a screen,</a:t>
             </a:r>
           </a:p>
           <a:p>
@@ -7273,7 +6132,7 @@
                 <a:spcPct val="128000"/>
               </a:lnSpc>
               <a:spcAft>
-                <a:spcPts val="700"/>
+                <a:spcPts val="600"/>
               </a:spcAft>
               <a:buNone/>
             </a:pPr>
@@ -7284,7 +6143,7 @@
                 </a:solidFill>
                 <a:latin typeface="Arial"/>
               </a:rPr>
-              <a:t>You are not expected to finish all five.</a:t>
+              <a:t>you built a visual interface with a motor glued to it.</a:t>
             </a:r>
           </a:p>
         </p:txBody>
@@ -7362,6 +6221,132 @@
             <a:spLocks noGrp="1"/>
           </p:cNvSpPr>
           <p:nvPr>
+            <p:ph type="ctrTitle"/>
+          </p:nvPr>
+        </p:nvSpPr>
+        <p:spPr/>
+        <p:txBody>
+          <a:bodyPr/>
+          <a:lstStyle/>
+          <a:p>
+            <a:pPr marL="0" indent="0" algn="l">
+              <a:buNone/>
+            </a:pPr>
+            <a:r>
+              <a:rPr sz="5400" b="1">
+                <a:solidFill>
+                  <a:srgbClr val="FFFFFF"/>
+                </a:solidFill>
+                <a:latin typeface="Arial"/>
+              </a:rPr>
+              <a:t>GO AND TOUCH THINGS</a:t>
+            </a:r>
+          </a:p>
+        </p:txBody>
+      </p:sp>
+      <p:sp>
+        <p:nvSpPr>
+          <p:cNvPr id="3" name="Subtitle 2"/>
+          <p:cNvSpPr>
+            <a:spLocks noGrp="1"/>
+          </p:cNvSpPr>
+          <p:nvPr>
+            <p:ph type="subTitle" idx="1"/>
+          </p:nvPr>
+        </p:nvSpPr>
+        <p:spPr/>
+        <p:txBody>
+          <a:bodyPr/>
+          <a:lstStyle/>
+          <a:p>
+            <a:pPr marL="0" indent="0" algn="l">
+              <a:buNone/>
+            </a:pPr>
+            <a:r>
+              <a:rPr sz="2000" b="0">
+                <a:solidFill>
+                  <a:srgbClr val="FFFFFF"/>
+                </a:solidFill>
+                <a:latin typeface="Arial"/>
+              </a:rPr>
+              <a:t>github.com/gust1527/multimodal-actuator-workshop</a:t>
+            </a:r>
+          </a:p>
+        </p:txBody>
+      </p:sp>
+      <p:pic>
+        <p:nvPicPr>
+          <p:cNvPr id="4" name="Picture 3" descr="wordmark_light.png"/>
+          <p:cNvPicPr>
+            <a:picLocks noChangeAspect="1"/>
+          </p:cNvPicPr>
+          <p:nvPr/>
+        </p:nvPicPr>
+        <p:blipFill>
+          <a:blip r:embed="rId2"/>
+          <a:stretch>
+            <a:fillRect/>
+          </a:stretch>
+        </p:blipFill>
+        <p:spPr>
+          <a:xfrm>
+            <a:off x="342900" y="6184900"/>
+            <a:ext cx="2070100" cy="529560"/>
+          </a:xfrm>
+          <a:prstGeom prst="rect">
+            <a:avLst/>
+          </a:prstGeom>
+        </p:spPr>
+      </p:pic>
+      <p:pic>
+        <p:nvPicPr>
+          <p:cNvPr id="5" name="Picture 4" descr="seal_light.png"/>
+          <p:cNvPicPr>
+            <a:picLocks noChangeAspect="1"/>
+          </p:cNvPicPr>
+          <p:nvPr/>
+        </p:nvPicPr>
+        <p:blipFill>
+          <a:blip r:embed="rId3"/>
+          <a:stretch>
+            <a:fillRect/>
+          </a:stretch>
+        </p:blipFill>
+        <p:spPr>
+          <a:xfrm>
+            <a:off x="11226800" y="5969000"/>
+            <a:ext cx="713915" cy="711200"/>
+          </a:xfrm>
+          <a:prstGeom prst="rect">
+            <a:avLst/>
+          </a:prstGeom>
+        </p:spPr>
+      </p:pic>
+    </p:spTree>
+  </p:cSld>
+  <p:clrMapOvr>
+    <a:masterClrMapping/>
+  </p:clrMapOvr>
+</p:sld>
+</file>
+
+<file path=ppt/slides/slide2.xml><?xml version="1.0" encoding="utf-8"?>
+<p:sld xmlns:a="http://schemas.openxmlformats.org/drawingml/2006/main" xmlns:p="http://schemas.openxmlformats.org/presentationml/2006/main" xmlns:r="http://schemas.openxmlformats.org/officeDocument/2006/relationships">
+  <p:cSld>
+    <p:spTree>
+      <p:nvGrpSpPr>
+        <p:cNvPr id="1" name=""/>
+        <p:cNvGrpSpPr/>
+        <p:nvPr/>
+      </p:nvGrpSpPr>
+      <p:grpSpPr/>
+      <p:sp>
+        <p:nvSpPr>
+          <p:cNvPr id="2" name="Title 1"/>
+          <p:cNvSpPr>
+            <a:spLocks noGrp="1"/>
+          </p:cNvSpPr>
+          <p:nvPr>
             <p:ph type="title"/>
           </p:nvPr>
         </p:nvSpPr>
@@ -7380,7 +6365,7 @@
                 </a:solidFill>
                 <a:latin typeface="Arial"/>
               </a:rPr>
-              <a:t>HOW THE TASK SKETCHES WORK</a:t>
+              <a:t>WHY WE ARE HERE</a:t>
             </a:r>
           </a:p>
         </p:txBody>
@@ -7416,7 +6401,7 @@
                 </a:solidFill>
                 <a:latin typeface="Arial"/>
               </a:rPr>
-              <a:t>Every sketch runs the moment you upload it. Nothing to wire.</a:t>
+              <a:t>You can read a datasheet. You have never held one of these.</a:t>
             </a:r>
           </a:p>
           <a:p>
@@ -7425,18 +6410,18 @@
                 <a:spcPct val="128000"/>
               </a:lnSpc>
               <a:spcAft>
-                <a:spcPts val="700"/>
+                <a:spcPts val="600"/>
               </a:spcAft>
               <a:buNone/>
             </a:pPr>
             <a:r>
-              <a:rPr sz="1700" b="1">
-                <a:solidFill>
-                  <a:srgbClr val="000000"/>
-                </a:solidFill>
-                <a:latin typeface="Arial"/>
-              </a:rPr>
-              <a:t>A CHANGE ME block at the top</a:t>
+              <a:rPr sz="1700" b="0">
+                <a:solidFill>
+                  <a:srgbClr val="000000"/>
+                </a:solidFill>
+                <a:latin typeface="Arial"/>
+              </a:rPr>
+              <a:t>Most projects end up on the screen and the speaker</a:t>
             </a:r>
           </a:p>
           <a:p>
@@ -7445,7 +6430,7 @@
                 <a:spcPct val="128000"/>
               </a:lnSpc>
               <a:spcAft>
-                <a:spcPts val="700"/>
+                <a:spcPts val="600"/>
               </a:spcAft>
               <a:buNone/>
             </a:pPr>
@@ -7456,7 +6441,27 @@
                 </a:solidFill>
                 <a:latin typeface="Arial"/>
               </a:rPr>
-              <a:t>• Two or three numbers. Edit, upload, feel the difference</a:t>
+              <a:t>• Not because touch was wrong</a:t>
+            </a:r>
+          </a:p>
+          <a:p>
+            <a:pPr marL="0" indent="0" algn="l">
+              <a:lnSpc>
+                <a:spcPct val="128000"/>
+              </a:lnSpc>
+              <a:spcAft>
+                <a:spcPts val="600"/>
+              </a:spcAft>
+              <a:buNone/>
+            </a:pPr>
+            <a:r>
+              <a:rPr sz="1500" b="0">
+                <a:solidFill>
+                  <a:srgbClr val="000000"/>
+                </a:solidFill>
+                <a:latin typeface="Arial"/>
+              </a:rPr>
+              <a:t>• Because nobody knew a coin motor costs 12 kr</a:t>
             </a:r>
           </a:p>
           <a:p>
@@ -7476,7 +6481,7 @@
                 <a:spcPct val="128000"/>
               </a:lnSpc>
               <a:spcAft>
-                <a:spcPts val="700"/>
+                <a:spcPts val="600"/>
               </a:spcAft>
               <a:buNone/>
             </a:pPr>
@@ -7487,7 +6492,7 @@
                 </a:solidFill>
                 <a:latin typeface="Arial"/>
               </a:rPr>
-              <a:t>A THINGS TO TRY list at the bottom</a:t>
+              <a:t>Today: decide it feels cheap, pick something else</a:t>
             </a:r>
           </a:p>
           <a:p>
@@ -7496,7 +6501,7 @@
                 <a:spcPct val="128000"/>
               </a:lnSpc>
               <a:spcAft>
-                <a:spcPts val="700"/>
+                <a:spcPts val="600"/>
               </a:spcAft>
               <a:buNone/>
             </a:pPr>
@@ -7507,58 +6512,7 @@
                 </a:solidFill>
                 <a:latin typeface="Arial"/>
               </a:rPr>
-              <a:t>• Four experiments, roughly in order of difficulty</a:t>
-            </a:r>
-          </a:p>
-          <a:p>
-            <a:pPr marL="0" indent="0" algn="l">
-              <a:lnSpc>
-                <a:spcPct val="128000"/>
-              </a:lnSpc>
-              <a:spcAft>
-                <a:spcPts val="700"/>
-              </a:spcAft>
-              <a:buNone/>
-            </a:pPr>
-            <a:r>
-              <a:rPr sz="1500" b="0">
-                <a:solidFill>
-                  <a:srgbClr val="000000"/>
-                </a:solidFill>
-                <a:latin typeface="Arial"/>
-              </a:rPr>
-              <a:t>• The last one is usually the interesting one</a:t>
-            </a:r>
-          </a:p>
-          <a:p>
-            <a:pPr marL="0" indent="0" algn="l">
-              <a:lnSpc>
-                <a:spcPct val="128000"/>
-              </a:lnSpc>
-              <a:spcAft>
-                <a:spcPts val="0"/>
-              </a:spcAft>
-              <a:buNone/>
-            </a:pPr>
-          </a:p>
-          <a:p>
-            <a:pPr marL="0" indent="0" algn="l">
-              <a:lnSpc>
-                <a:spcPct val="128000"/>
-              </a:lnSpc>
-              <a:spcAft>
-                <a:spcPts val="700"/>
-              </a:spcAft>
-              <a:buNone/>
-            </a:pPr>
-            <a:r>
-              <a:rPr sz="1700" b="1">
-                <a:solidFill>
-                  <a:srgbClr val="000000"/>
-                </a:solidFill>
-                <a:latin typeface="Arial"/>
-              </a:rPr>
-              <a:t>github.com/gust1527/multimodal-actuator-workshop</a:t>
+              <a:t>• Better now than in week 46</a:t>
             </a:r>
           </a:p>
         </p:txBody>
@@ -7619,1559 +6573,6 @@
 </p:sld>
 </file>
 
-<file path=ppt/slides/slide16.xml><?xml version="1.0" encoding="utf-8"?>
-<p:sld xmlns:a="http://schemas.openxmlformats.org/drawingml/2006/main" xmlns:p="http://schemas.openxmlformats.org/presentationml/2006/main" xmlns:r="http://schemas.openxmlformats.org/officeDocument/2006/relationships">
-  <p:cSld>
-    <p:spTree>
-      <p:nvGrpSpPr>
-        <p:cNvPr id="1" name=""/>
-        <p:cNvGrpSpPr/>
-        <p:nvPr/>
-      </p:nvGrpSpPr>
-      <p:grpSpPr/>
-      <p:sp>
-        <p:nvSpPr>
-          <p:cNvPr id="2" name="Title 1"/>
-          <p:cNvSpPr>
-            <a:spLocks noGrp="1"/>
-          </p:cNvSpPr>
-          <p:nvPr>
-            <p:ph type="title"/>
-          </p:nvPr>
-        </p:nvSpPr>
-        <p:spPr/>
-        <p:txBody>
-          <a:bodyPr/>
-          <a:lstStyle/>
-          <a:p>
-            <a:pPr marL="0" indent="0" algn="l">
-              <a:buNone/>
-            </a:pPr>
-            <a:r>
-              <a:rPr sz="4400" b="1">
-                <a:solidFill>
-                  <a:srgbClr val="000000"/>
-                </a:solidFill>
-                <a:latin typeface="Arial"/>
-              </a:rPr>
-              <a:t>INPUTS, AND PRIOR ART</a:t>
-            </a:r>
-          </a:p>
-        </p:txBody>
-      </p:sp>
-      <p:pic>
-        <p:nvPicPr>
-          <p:cNvPr id="3" name="Picture 2" descr="wordmark_dark.png"/>
-          <p:cNvPicPr>
-            <a:picLocks noChangeAspect="1"/>
-          </p:cNvPicPr>
-          <p:nvPr/>
-        </p:nvPicPr>
-        <p:blipFill>
-          <a:blip r:embed="rId2"/>
-          <a:stretch>
-            <a:fillRect/>
-          </a:stretch>
-        </p:blipFill>
-        <p:spPr>
-          <a:xfrm>
-            <a:off x="342900" y="6184900"/>
-            <a:ext cx="2070100" cy="529560"/>
-          </a:xfrm>
-          <a:prstGeom prst="rect">
-            <a:avLst/>
-          </a:prstGeom>
-        </p:spPr>
-      </p:pic>
-      <p:pic>
-        <p:nvPicPr>
-          <p:cNvPr id="4" name="Picture 3" descr="seal_dark.png"/>
-          <p:cNvPicPr>
-            <a:picLocks noChangeAspect="1"/>
-          </p:cNvPicPr>
-          <p:nvPr/>
-        </p:nvPicPr>
-        <p:blipFill>
-          <a:blip r:embed="rId3"/>
-          <a:stretch>
-            <a:fillRect/>
-          </a:stretch>
-        </p:blipFill>
-        <p:spPr>
-          <a:xfrm>
-            <a:off x="11226800" y="5969000"/>
-            <a:ext cx="713915" cy="711200"/>
-          </a:xfrm>
-          <a:prstGeom prst="rect">
-            <a:avLst/>
-          </a:prstGeom>
-        </p:spPr>
-      </p:pic>
-    </p:spTree>
-  </p:cSld>
-  <p:clrMapOvr>
-    <a:masterClrMapping/>
-  </p:clrMapOvr>
-</p:sld>
-</file>
-
-<file path=ppt/slides/slide17.xml><?xml version="1.0" encoding="utf-8"?>
-<p:sld xmlns:a="http://schemas.openxmlformats.org/drawingml/2006/main" xmlns:p="http://schemas.openxmlformats.org/presentationml/2006/main" xmlns:r="http://schemas.openxmlformats.org/officeDocument/2006/relationships">
-  <p:cSld>
-    <p:spTree>
-      <p:nvGrpSpPr>
-        <p:cNvPr id="1" name=""/>
-        <p:cNvGrpSpPr/>
-        <p:nvPr/>
-      </p:nvGrpSpPr>
-      <p:grpSpPr/>
-      <p:sp>
-        <p:nvSpPr>
-          <p:cNvPr id="2" name="Title 1"/>
-          <p:cNvSpPr>
-            <a:spLocks noGrp="1"/>
-          </p:cNvSpPr>
-          <p:nvPr>
-            <p:ph type="title"/>
-          </p:nvPr>
-        </p:nvSpPr>
-        <p:spPr/>
-        <p:txBody>
-          <a:bodyPr/>
-          <a:lstStyle/>
-          <a:p>
-            <a:pPr marL="0" indent="0" algn="l">
-              <a:buNone/>
-            </a:pPr>
-            <a:r>
-              <a:rPr sz="3200" b="1">
-                <a:solidFill>
-                  <a:srgbClr val="000000"/>
-                </a:solidFill>
-                <a:latin typeface="Arial"/>
-              </a:rPr>
-              <a:t>INPUTS WORTH KNOWING ABOUT</a:t>
-            </a:r>
-          </a:p>
-        </p:txBody>
-      </p:sp>
-      <p:sp>
-        <p:nvSpPr>
-          <p:cNvPr id="3" name="Text Placeholder 2"/>
-          <p:cNvSpPr>
-            <a:spLocks noGrp="1"/>
-          </p:cNvSpPr>
-          <p:nvPr>
-            <p:ph type="body" idx="1"/>
-          </p:nvPr>
-        </p:nvSpPr>
-        <p:spPr/>
-        <p:txBody>
-          <a:bodyPr/>
-          <a:lstStyle/>
-          <a:p>
-            <a:pPr marL="0" indent="0" algn="l">
-              <a:lnSpc>
-                <a:spcPct val="128000"/>
-              </a:lnSpc>
-              <a:spcAft>
-                <a:spcPts val="1400"/>
-              </a:spcAft>
-              <a:buNone/>
-            </a:pPr>
-            <a:r>
-              <a:rPr sz="1700" b="0">
-                <a:solidFill>
-                  <a:srgbClr val="595959"/>
-                </a:solidFill>
-                <a:latin typeface="Arial"/>
-              </a:rPr>
-              <a:t>One table, not a rotation. Wander over during the build.</a:t>
-            </a:r>
-          </a:p>
-          <a:p>
-            <a:pPr marL="0" indent="0" algn="l">
-              <a:lnSpc>
-                <a:spcPct val="128000"/>
-              </a:lnSpc>
-              <a:spcAft>
-                <a:spcPts val="700"/>
-              </a:spcAft>
-              <a:buNone/>
-            </a:pPr>
-            <a:r>
-              <a:rPr sz="1500" b="0">
-                <a:solidFill>
-                  <a:srgbClr val="000000"/>
-                </a:solidFill>
-                <a:latin typeface="Arial"/>
-              </a:rPr>
-              <a:t>• Capacitive touch. A wire. See bench 04</a:t>
-            </a:r>
-          </a:p>
-          <a:p>
-            <a:pPr marL="0" indent="0" algn="l">
-              <a:lnSpc>
-                <a:spcPct val="128000"/>
-              </a:lnSpc>
-              <a:spcAft>
-                <a:spcPts val="700"/>
-              </a:spcAft>
-              <a:buNone/>
-            </a:pPr>
-            <a:r>
-              <a:rPr sz="1500" b="0">
-                <a:solidFill>
-                  <a:srgbClr val="000000"/>
-                </a:solidFill>
-                <a:latin typeface="Arial"/>
-              </a:rPr>
-              <a:t>• Heart rate (PPG). Useless once the hand moves</a:t>
-            </a:r>
-          </a:p>
-          <a:p>
-            <a:pPr marL="0" indent="0" algn="l">
-              <a:lnSpc>
-                <a:spcPct val="128000"/>
-              </a:lnSpc>
-              <a:spcAft>
-                <a:spcPts val="700"/>
-              </a:spcAft>
-              <a:buNone/>
-            </a:pPr>
-            <a:r>
-              <a:rPr sz="1500" b="0">
-                <a:solidFill>
-                  <a:srgbClr val="000000"/>
-                </a:solidFill>
-                <a:latin typeface="Arial"/>
-              </a:rPr>
-              <a:t>• Skin conductance (GSR). Relative change only</a:t>
-            </a:r>
-          </a:p>
-          <a:p>
-            <a:pPr marL="0" indent="0" algn="l">
-              <a:lnSpc>
-                <a:spcPct val="128000"/>
-              </a:lnSpc>
-              <a:spcAft>
-                <a:spcPts val="700"/>
-              </a:spcAft>
-              <a:buNone/>
-            </a:pPr>
-            <a:r>
-              <a:rPr sz="1500" b="0">
-                <a:solidFill>
-                  <a:srgbClr val="000000"/>
-                </a:solidFill>
-                <a:latin typeface="Arial"/>
-              </a:rPr>
-              <a:t>• Flex sensor. The cheap data glove</a:t>
-            </a:r>
-          </a:p>
-          <a:p>
-            <a:pPr marL="0" indent="0" algn="l">
-              <a:lnSpc>
-                <a:spcPct val="128000"/>
-              </a:lnSpc>
-              <a:spcAft>
-                <a:spcPts val="700"/>
-              </a:spcAft>
-              <a:buNone/>
-            </a:pPr>
-            <a:r>
-              <a:rPr sz="1500" b="0">
-                <a:solidFill>
-                  <a:srgbClr val="000000"/>
-                </a:solidFill>
-                <a:latin typeface="Arial"/>
-              </a:rPr>
-              <a:t>• Pressure (FSR). Calibrate every pad</a:t>
-            </a:r>
-          </a:p>
-          <a:p>
-            <a:pPr marL="0" indent="0" algn="l">
-              <a:lnSpc>
-                <a:spcPct val="128000"/>
-              </a:lnSpc>
-              <a:spcAft>
-                <a:spcPts val="700"/>
-              </a:spcAft>
-              <a:buNone/>
-            </a:pPr>
-            <a:r>
-              <a:rPr sz="1500" b="0">
-                <a:solidFill>
-                  <a:srgbClr val="000000"/>
-                </a:solidFill>
-                <a:latin typeface="Arial"/>
-              </a:rPr>
-              <a:t>• Your own phone. No soldering at all</a:t>
-            </a:r>
-          </a:p>
-        </p:txBody>
-      </p:sp>
-      <p:pic>
-        <p:nvPicPr>
-          <p:cNvPr id="4" name="Picture 3" descr="wordmark_dark.png"/>
-          <p:cNvPicPr>
-            <a:picLocks noChangeAspect="1"/>
-          </p:cNvPicPr>
-          <p:nvPr/>
-        </p:nvPicPr>
-        <p:blipFill>
-          <a:blip r:embed="rId2"/>
-          <a:stretch>
-            <a:fillRect/>
-          </a:stretch>
-        </p:blipFill>
-        <p:spPr>
-          <a:xfrm>
-            <a:off x="342900" y="6184900"/>
-            <a:ext cx="2070100" cy="529560"/>
-          </a:xfrm>
-          <a:prstGeom prst="rect">
-            <a:avLst/>
-          </a:prstGeom>
-        </p:spPr>
-      </p:pic>
-      <p:pic>
-        <p:nvPicPr>
-          <p:cNvPr id="5" name="Picture 4" descr="seal_dark.png"/>
-          <p:cNvPicPr>
-            <a:picLocks noChangeAspect="1"/>
-          </p:cNvPicPr>
-          <p:nvPr/>
-        </p:nvPicPr>
-        <p:blipFill>
-          <a:blip r:embed="rId3"/>
-          <a:stretch>
-            <a:fillRect/>
-          </a:stretch>
-        </p:blipFill>
-        <p:spPr>
-          <a:xfrm>
-            <a:off x="11226800" y="5969000"/>
-            <a:ext cx="713915" cy="711200"/>
-          </a:xfrm>
-          <a:prstGeom prst="rect">
-            <a:avLst/>
-          </a:prstGeom>
-        </p:spPr>
-      </p:pic>
-    </p:spTree>
-  </p:cSld>
-  <p:clrMapOvr>
-    <a:masterClrMapping/>
-  </p:clrMapOvr>
-</p:sld>
-</file>
-
-<file path=ppt/slides/slide18.xml><?xml version="1.0" encoding="utf-8"?>
-<p:sld xmlns:a="http://schemas.openxmlformats.org/drawingml/2006/main" xmlns:p="http://schemas.openxmlformats.org/presentationml/2006/main" xmlns:r="http://schemas.openxmlformats.org/officeDocument/2006/relationships">
-  <p:cSld>
-    <p:spTree>
-      <p:nvGrpSpPr>
-        <p:cNvPr id="1" name=""/>
-        <p:cNvGrpSpPr/>
-        <p:nvPr/>
-      </p:nvGrpSpPr>
-      <p:grpSpPr/>
-      <p:sp>
-        <p:nvSpPr>
-          <p:cNvPr id="2" name="Title 1"/>
-          <p:cNvSpPr>
-            <a:spLocks noGrp="1"/>
-          </p:cNvSpPr>
-          <p:nvPr>
-            <p:ph type="title"/>
-          </p:nvPr>
-        </p:nvSpPr>
-        <p:spPr/>
-        <p:txBody>
-          <a:bodyPr/>
-          <a:lstStyle/>
-          <a:p>
-            <a:pPr marL="0" indent="0" algn="l">
-              <a:buNone/>
-            </a:pPr>
-            <a:r>
-              <a:rPr sz="3200" b="1">
-                <a:solidFill>
-                  <a:srgbClr val="000000"/>
-                </a:solidFill>
-                <a:latin typeface="Arial"/>
-              </a:rPr>
-              <a:t>TWO RIGS THAT ALREADY EXIST</a:t>
-            </a:r>
-          </a:p>
-        </p:txBody>
-      </p:sp>
-      <p:sp>
-        <p:nvSpPr>
-          <p:cNvPr id="3" name="Text Placeholder 2"/>
-          <p:cNvSpPr>
-            <a:spLocks noGrp="1"/>
-          </p:cNvSpPr>
-          <p:nvPr>
-            <p:ph type="body" idx="1"/>
-          </p:nvPr>
-        </p:nvSpPr>
-        <p:spPr/>
-        <p:txBody>
-          <a:bodyPr/>
-          <a:lstStyle/>
-          <a:p>
-            <a:pPr marL="0" indent="0" algn="l">
-              <a:lnSpc>
-                <a:spcPct val="128000"/>
-              </a:lnSpc>
-              <a:spcAft>
-                <a:spcPts val="1400"/>
-              </a:spcAft>
-              <a:buNone/>
-            </a:pPr>
-            <a:r>
-              <a:rPr sz="1700" b="0">
-                <a:solidFill>
-                  <a:srgbClr val="595959"/>
-                </a:solidFill>
-                <a:latin typeface="Arial"/>
-              </a:rPr>
-              <a:t>Built here, by students at roughly your stage.</a:t>
-            </a:r>
-          </a:p>
-          <a:p>
-            <a:pPr marL="0" indent="0" algn="l">
-              <a:lnSpc>
-                <a:spcPct val="128000"/>
-              </a:lnSpc>
-              <a:spcAft>
-                <a:spcPts val="700"/>
-              </a:spcAft>
-              <a:buNone/>
-            </a:pPr>
-            <a:r>
-              <a:rPr sz="1700" b="1">
-                <a:solidFill>
-                  <a:srgbClr val="000000"/>
-                </a:solidFill>
-                <a:latin typeface="Arial"/>
-              </a:rPr>
-              <a:t>Moving screen, Arduino Uno</a:t>
-            </a:r>
-          </a:p>
-          <a:p>
-            <a:pPr marL="0" indent="0" algn="l">
-              <a:lnSpc>
-                <a:spcPct val="128000"/>
-              </a:lnSpc>
-              <a:spcAft>
-                <a:spcPts val="700"/>
-              </a:spcAft>
-              <a:buNone/>
-            </a:pPr>
-            <a:r>
-              <a:rPr sz="1500" b="0">
-                <a:solidFill>
-                  <a:srgbClr val="000000"/>
-                </a:solidFill>
-                <a:latin typeface="Arial"/>
-              </a:rPr>
-              <a:t>• Breathes when idle. Retreats when touched</a:t>
-            </a:r>
-          </a:p>
-          <a:p>
-            <a:pPr marL="0" indent="0" algn="l">
-              <a:lnSpc>
-                <a:spcPct val="128000"/>
-              </a:lnSpc>
-              <a:spcAft>
-                <a:spcPts val="700"/>
-              </a:spcAft>
-              <a:buNone/>
-            </a:pPr>
-            <a:r>
-              <a:rPr sz="1500" b="0">
-                <a:solidFill>
-                  <a:srgbClr val="000000"/>
-                </a:solidFill>
-                <a:latin typeface="Arial"/>
-              </a:rPr>
-              <a:t>• Easing and idle motion do the work. A dozen lines</a:t>
-            </a:r>
-          </a:p>
-          <a:p>
-            <a:pPr marL="0" indent="0" algn="l">
-              <a:lnSpc>
-                <a:spcPct val="128000"/>
-              </a:lnSpc>
-              <a:spcAft>
-                <a:spcPts val="0"/>
-              </a:spcAft>
-              <a:buNone/>
-            </a:pPr>
-          </a:p>
-          <a:p>
-            <a:pPr marL="0" indent="0" algn="l">
-              <a:lnSpc>
-                <a:spcPct val="128000"/>
-              </a:lnSpc>
-              <a:spcAft>
-                <a:spcPts val="700"/>
-              </a:spcAft>
-              <a:buNone/>
-            </a:pPr>
-            <a:r>
-              <a:rPr sz="1700" b="1">
-                <a:solidFill>
-                  <a:srgbClr val="000000"/>
-                </a:solidFill>
-                <a:latin typeface="Arial"/>
-              </a:rPr>
-              <a:t>Instrumented sock, ESP32</a:t>
-            </a:r>
-          </a:p>
-          <a:p>
-            <a:pPr marL="0" indent="0" algn="l">
-              <a:lnSpc>
-                <a:spcPct val="128000"/>
-              </a:lnSpc>
-              <a:spcAft>
-                <a:spcPts val="700"/>
-              </a:spcAft>
-              <a:buNone/>
-            </a:pPr>
-            <a:r>
-              <a:rPr sz="1500" b="0">
-                <a:solidFill>
-                  <a:srgbClr val="000000"/>
-                </a:solidFill>
-                <a:latin typeface="Arial"/>
-              </a:rPr>
-              <a:t>• Six force sensors under a foot, batched over Wi-Fi</a:t>
-            </a:r>
-          </a:p>
-          <a:p>
-            <a:pPr marL="0" indent="0" algn="l">
-              <a:lnSpc>
-                <a:spcPct val="128000"/>
-              </a:lnSpc>
-              <a:spcAft>
-                <a:spcPts val="700"/>
-              </a:spcAft>
-              <a:buNone/>
-            </a:pPr>
-            <a:r>
-              <a:rPr sz="1500" b="0">
-                <a:solidFill>
-                  <a:srgbClr val="000000"/>
-                </a:solidFill>
-                <a:latin typeface="Arial"/>
-              </a:rPr>
-              <a:t>• Calibrate per sensor. Batch your writes</a:t>
-            </a:r>
-          </a:p>
-        </p:txBody>
-      </p:sp>
-      <p:pic>
-        <p:nvPicPr>
-          <p:cNvPr id="4" name="Picture 3" descr="wordmark_dark.png"/>
-          <p:cNvPicPr>
-            <a:picLocks noChangeAspect="1"/>
-          </p:cNvPicPr>
-          <p:nvPr/>
-        </p:nvPicPr>
-        <p:blipFill>
-          <a:blip r:embed="rId2"/>
-          <a:stretch>
-            <a:fillRect/>
-          </a:stretch>
-        </p:blipFill>
-        <p:spPr>
-          <a:xfrm>
-            <a:off x="342900" y="6184900"/>
-            <a:ext cx="2070100" cy="529560"/>
-          </a:xfrm>
-          <a:prstGeom prst="rect">
-            <a:avLst/>
-          </a:prstGeom>
-        </p:spPr>
-      </p:pic>
-      <p:pic>
-        <p:nvPicPr>
-          <p:cNvPr id="5" name="Picture 4" descr="seal_dark.png"/>
-          <p:cNvPicPr>
-            <a:picLocks noChangeAspect="1"/>
-          </p:cNvPicPr>
-          <p:nvPr/>
-        </p:nvPicPr>
-        <p:blipFill>
-          <a:blip r:embed="rId3"/>
-          <a:stretch>
-            <a:fillRect/>
-          </a:stretch>
-        </p:blipFill>
-        <p:spPr>
-          <a:xfrm>
-            <a:off x="11226800" y="5969000"/>
-            <a:ext cx="713915" cy="711200"/>
-          </a:xfrm>
-          <a:prstGeom prst="rect">
-            <a:avLst/>
-          </a:prstGeom>
-        </p:spPr>
-      </p:pic>
-    </p:spTree>
-  </p:cSld>
-  <p:clrMapOvr>
-    <a:masterClrMapping/>
-  </p:clrMapOvr>
-</p:sld>
-</file>
-
-<file path=ppt/slides/slide19.xml><?xml version="1.0" encoding="utf-8"?>
-<p:sld xmlns:a="http://schemas.openxmlformats.org/drawingml/2006/main" xmlns:p="http://schemas.openxmlformats.org/presentationml/2006/main" xmlns:r="http://schemas.openxmlformats.org/officeDocument/2006/relationships">
-  <p:cSld>
-    <p:spTree>
-      <p:nvGrpSpPr>
-        <p:cNvPr id="1" name=""/>
-        <p:cNvGrpSpPr/>
-        <p:nvPr/>
-      </p:nvGrpSpPr>
-      <p:grpSpPr/>
-      <p:sp>
-        <p:nvSpPr>
-          <p:cNvPr id="2" name="Title 1"/>
-          <p:cNvSpPr>
-            <a:spLocks noGrp="1"/>
-          </p:cNvSpPr>
-          <p:nvPr>
-            <p:ph type="title"/>
-          </p:nvPr>
-        </p:nvSpPr>
-        <p:spPr/>
-        <p:txBody>
-          <a:bodyPr/>
-          <a:lstStyle/>
-          <a:p>
-            <a:pPr marL="0" indent="0" algn="l">
-              <a:buNone/>
-            </a:pPr>
-            <a:r>
-              <a:rPr sz="4400" b="1">
-                <a:solidFill>
-                  <a:srgbClr val="000000"/>
-                </a:solidFill>
-                <a:latin typeface="Arial"/>
-              </a:rPr>
-              <a:t>BUILD ONE SIGNAL</a:t>
-            </a:r>
-          </a:p>
-        </p:txBody>
-      </p:sp>
-      <p:pic>
-        <p:nvPicPr>
-          <p:cNvPr id="3" name="Picture 2" descr="wordmark_dark.png"/>
-          <p:cNvPicPr>
-            <a:picLocks noChangeAspect="1"/>
-          </p:cNvPicPr>
-          <p:nvPr/>
-        </p:nvPicPr>
-        <p:blipFill>
-          <a:blip r:embed="rId2"/>
-          <a:stretch>
-            <a:fillRect/>
-          </a:stretch>
-        </p:blipFill>
-        <p:spPr>
-          <a:xfrm>
-            <a:off x="342900" y="6184900"/>
-            <a:ext cx="2070100" cy="529560"/>
-          </a:xfrm>
-          <a:prstGeom prst="rect">
-            <a:avLst/>
-          </a:prstGeom>
-        </p:spPr>
-      </p:pic>
-      <p:pic>
-        <p:nvPicPr>
-          <p:cNvPr id="4" name="Picture 3" descr="seal_dark.png"/>
-          <p:cNvPicPr>
-            <a:picLocks noChangeAspect="1"/>
-          </p:cNvPicPr>
-          <p:nvPr/>
-        </p:nvPicPr>
-        <p:blipFill>
-          <a:blip r:embed="rId3"/>
-          <a:stretch>
-            <a:fillRect/>
-          </a:stretch>
-        </p:blipFill>
-        <p:spPr>
-          <a:xfrm>
-            <a:off x="11226800" y="5969000"/>
-            <a:ext cx="713915" cy="711200"/>
-          </a:xfrm>
-          <a:prstGeom prst="rect">
-            <a:avLst/>
-          </a:prstGeom>
-        </p:spPr>
-      </p:pic>
-    </p:spTree>
-  </p:cSld>
-  <p:clrMapOvr>
-    <a:masterClrMapping/>
-  </p:clrMapOvr>
-</p:sld>
-</file>
-
-<file path=ppt/slides/slide2.xml><?xml version="1.0" encoding="utf-8"?>
-<p:sld xmlns:a="http://schemas.openxmlformats.org/drawingml/2006/main" xmlns:p="http://schemas.openxmlformats.org/presentationml/2006/main" xmlns:r="http://schemas.openxmlformats.org/officeDocument/2006/relationships">
-  <p:cSld>
-    <p:spTree>
-      <p:nvGrpSpPr>
-        <p:cNvPr id="1" name=""/>
-        <p:cNvGrpSpPr/>
-        <p:nvPr/>
-      </p:nvGrpSpPr>
-      <p:grpSpPr/>
-      <p:sp>
-        <p:nvSpPr>
-          <p:cNvPr id="2" name="Title 1"/>
-          <p:cNvSpPr>
-            <a:spLocks noGrp="1"/>
-          </p:cNvSpPr>
-          <p:nvPr>
-            <p:ph type="title"/>
-          </p:nvPr>
-        </p:nvSpPr>
-        <p:spPr/>
-        <p:txBody>
-          <a:bodyPr/>
-          <a:lstStyle/>
-          <a:p>
-            <a:pPr marL="0" indent="0" algn="l">
-              <a:buNone/>
-            </a:pPr>
-            <a:r>
-              <a:rPr sz="3200" b="1">
-                <a:solidFill>
-                  <a:srgbClr val="000000"/>
-                </a:solidFill>
-                <a:latin typeface="Arial"/>
-              </a:rPr>
-              <a:t>WHY WE ARE HERE</a:t>
-            </a:r>
-          </a:p>
-        </p:txBody>
-      </p:sp>
-      <p:sp>
-        <p:nvSpPr>
-          <p:cNvPr id="3" name="Text Placeholder 2"/>
-          <p:cNvSpPr>
-            <a:spLocks noGrp="1"/>
-          </p:cNvSpPr>
-          <p:nvPr>
-            <p:ph type="body" idx="1"/>
-          </p:nvPr>
-        </p:nvSpPr>
-        <p:spPr/>
-        <p:txBody>
-          <a:bodyPr/>
-          <a:lstStyle/>
-          <a:p>
-            <a:pPr marL="0" indent="0" algn="l">
-              <a:lnSpc>
-                <a:spcPct val="128000"/>
-              </a:lnSpc>
-              <a:spcAft>
-                <a:spcPts val="1400"/>
-              </a:spcAft>
-              <a:buNone/>
-            </a:pPr>
-            <a:r>
-              <a:rPr sz="1700" b="0">
-                <a:solidFill>
-                  <a:srgbClr val="595959"/>
-                </a:solidFill>
-                <a:latin typeface="Arial"/>
-              </a:rPr>
-              <a:t>You can read a datasheet. You have never held one of these.</a:t>
-            </a:r>
-          </a:p>
-          <a:p>
-            <a:pPr marL="0" indent="0" algn="l">
-              <a:lnSpc>
-                <a:spcPct val="128000"/>
-              </a:lnSpc>
-              <a:spcAft>
-                <a:spcPts val="700"/>
-              </a:spcAft>
-              <a:buNone/>
-            </a:pPr>
-            <a:r>
-              <a:rPr sz="1700" b="0">
-                <a:solidFill>
-                  <a:srgbClr val="000000"/>
-                </a:solidFill>
-                <a:latin typeface="Arial"/>
-              </a:rPr>
-              <a:t>Most projects end up on the screen and the speaker</a:t>
-            </a:r>
-          </a:p>
-          <a:p>
-            <a:pPr marL="0" indent="0" algn="l">
-              <a:lnSpc>
-                <a:spcPct val="128000"/>
-              </a:lnSpc>
-              <a:spcAft>
-                <a:spcPts val="700"/>
-              </a:spcAft>
-              <a:buNone/>
-            </a:pPr>
-            <a:r>
-              <a:rPr sz="1500" b="0">
-                <a:solidFill>
-                  <a:srgbClr val="000000"/>
-                </a:solidFill>
-                <a:latin typeface="Arial"/>
-              </a:rPr>
-              <a:t>• Not because touch was wrong</a:t>
-            </a:r>
-          </a:p>
-          <a:p>
-            <a:pPr marL="0" indent="0" algn="l">
-              <a:lnSpc>
-                <a:spcPct val="128000"/>
-              </a:lnSpc>
-              <a:spcAft>
-                <a:spcPts val="700"/>
-              </a:spcAft>
-              <a:buNone/>
-            </a:pPr>
-            <a:r>
-              <a:rPr sz="1500" b="0">
-                <a:solidFill>
-                  <a:srgbClr val="000000"/>
-                </a:solidFill>
-                <a:latin typeface="Arial"/>
-              </a:rPr>
-              <a:t>• Because nobody knew a coin motor costs 12 kr</a:t>
-            </a:r>
-          </a:p>
-          <a:p>
-            <a:pPr marL="0" indent="0" algn="l">
-              <a:lnSpc>
-                <a:spcPct val="128000"/>
-              </a:lnSpc>
-              <a:spcAft>
-                <a:spcPts val="0"/>
-              </a:spcAft>
-              <a:buNone/>
-            </a:pPr>
-          </a:p>
-          <a:p>
-            <a:pPr marL="0" indent="0" algn="l">
-              <a:lnSpc>
-                <a:spcPct val="128000"/>
-              </a:lnSpc>
-              <a:spcAft>
-                <a:spcPts val="700"/>
-              </a:spcAft>
-              <a:buNone/>
-            </a:pPr>
-            <a:r>
-              <a:rPr sz="1700" b="1">
-                <a:solidFill>
-                  <a:srgbClr val="000000"/>
-                </a:solidFill>
-                <a:latin typeface="Arial"/>
-              </a:rPr>
-              <a:t>Today: decide it feels cheap, pick something else</a:t>
-            </a:r>
-          </a:p>
-          <a:p>
-            <a:pPr marL="0" indent="0" algn="l">
-              <a:lnSpc>
-                <a:spcPct val="128000"/>
-              </a:lnSpc>
-              <a:spcAft>
-                <a:spcPts val="700"/>
-              </a:spcAft>
-              <a:buNone/>
-            </a:pPr>
-            <a:r>
-              <a:rPr sz="1500" b="0">
-                <a:solidFill>
-                  <a:srgbClr val="000000"/>
-                </a:solidFill>
-                <a:latin typeface="Arial"/>
-              </a:rPr>
-              <a:t>• Better now than in week 46</a:t>
-            </a:r>
-          </a:p>
-        </p:txBody>
-      </p:sp>
-      <p:pic>
-        <p:nvPicPr>
-          <p:cNvPr id="4" name="Picture 3" descr="wordmark_dark.png"/>
-          <p:cNvPicPr>
-            <a:picLocks noChangeAspect="1"/>
-          </p:cNvPicPr>
-          <p:nvPr/>
-        </p:nvPicPr>
-        <p:blipFill>
-          <a:blip r:embed="rId2"/>
-          <a:stretch>
-            <a:fillRect/>
-          </a:stretch>
-        </p:blipFill>
-        <p:spPr>
-          <a:xfrm>
-            <a:off x="342900" y="6184900"/>
-            <a:ext cx="2070100" cy="529560"/>
-          </a:xfrm>
-          <a:prstGeom prst="rect">
-            <a:avLst/>
-          </a:prstGeom>
-        </p:spPr>
-      </p:pic>
-      <p:pic>
-        <p:nvPicPr>
-          <p:cNvPr id="5" name="Picture 4" descr="seal_dark.png"/>
-          <p:cNvPicPr>
-            <a:picLocks noChangeAspect="1"/>
-          </p:cNvPicPr>
-          <p:nvPr/>
-        </p:nvPicPr>
-        <p:blipFill>
-          <a:blip r:embed="rId3"/>
-          <a:stretch>
-            <a:fillRect/>
-          </a:stretch>
-        </p:blipFill>
-        <p:spPr>
-          <a:xfrm>
-            <a:off x="11226800" y="5969000"/>
-            <a:ext cx="713915" cy="711200"/>
-          </a:xfrm>
-          <a:prstGeom prst="rect">
-            <a:avLst/>
-          </a:prstGeom>
-        </p:spPr>
-      </p:pic>
-    </p:spTree>
-  </p:cSld>
-  <p:clrMapOvr>
-    <a:masterClrMapping/>
-  </p:clrMapOvr>
-</p:sld>
-</file>
-
-<file path=ppt/slides/slide20.xml><?xml version="1.0" encoding="utf-8"?>
-<p:sld xmlns:a="http://schemas.openxmlformats.org/drawingml/2006/main" xmlns:p="http://schemas.openxmlformats.org/presentationml/2006/main" xmlns:r="http://schemas.openxmlformats.org/officeDocument/2006/relationships">
-  <p:cSld>
-    <p:spTree>
-      <p:nvGrpSpPr>
-        <p:cNvPr id="1" name=""/>
-        <p:cNvGrpSpPr/>
-        <p:nvPr/>
-      </p:nvGrpSpPr>
-      <p:grpSpPr/>
-      <p:sp>
-        <p:nvSpPr>
-          <p:cNvPr id="2" name="Title 1"/>
-          <p:cNvSpPr>
-            <a:spLocks noGrp="1"/>
-          </p:cNvSpPr>
-          <p:nvPr>
-            <p:ph type="title"/>
-          </p:nvPr>
-        </p:nvSpPr>
-        <p:spPr/>
-        <p:txBody>
-          <a:bodyPr/>
-          <a:lstStyle/>
-          <a:p>
-            <a:pPr marL="0" indent="0" algn="l">
-              <a:buNone/>
-            </a:pPr>
-            <a:r>
-              <a:rPr sz="3200" b="1">
-                <a:solidFill>
-                  <a:srgbClr val="000000"/>
-                </a:solidFill>
-                <a:latin typeface="Arial"/>
-              </a:rPr>
-              <a:t>THE BRIEF</a:t>
-            </a:r>
-          </a:p>
-        </p:txBody>
-      </p:sp>
-      <p:sp>
-        <p:nvSpPr>
-          <p:cNvPr id="3" name="Text Placeholder 2"/>
-          <p:cNvSpPr>
-            <a:spLocks noGrp="1"/>
-          </p:cNvSpPr>
-          <p:nvPr>
-            <p:ph type="body" idx="1"/>
-          </p:nvPr>
-        </p:nvSpPr>
-        <p:spPr/>
-        <p:txBody>
-          <a:bodyPr/>
-          <a:lstStyle/>
-          <a:p>
-            <a:pPr marL="0" indent="0" algn="l">
-              <a:lnSpc>
-                <a:spcPct val="128000"/>
-              </a:lnSpc>
-              <a:spcAft>
-                <a:spcPts val="1400"/>
-              </a:spcAft>
-              <a:buNone/>
-            </a:pPr>
-            <a:r>
-              <a:rPr sz="1700" b="0">
-                <a:solidFill>
-                  <a:srgbClr val="595959"/>
-                </a:solidFill>
-                <a:latin typeface="Arial"/>
-              </a:rPr>
-              <a:t>30 minutes. Not long enough to be precious about it.</a:t>
-            </a:r>
-          </a:p>
-          <a:p>
-            <a:pPr marL="0" indent="0" algn="l">
-              <a:lnSpc>
-                <a:spcPct val="128000"/>
-              </a:lnSpc>
-              <a:spcAft>
-                <a:spcPts val="700"/>
-              </a:spcAft>
-              <a:buNone/>
-            </a:pPr>
-            <a:r>
-              <a:rPr sz="1700" b="1">
-                <a:solidFill>
-                  <a:srgbClr val="000000"/>
-                </a:solidFill>
-                <a:latin typeface="Arial"/>
-              </a:rPr>
-              <a:t>One actuator. Three messages</a:t>
-            </a:r>
-          </a:p>
-          <a:p>
-            <a:pPr marL="0" indent="0" algn="l">
-              <a:lnSpc>
-                <a:spcPct val="128000"/>
-              </a:lnSpc>
-              <a:spcAft>
-                <a:spcPts val="700"/>
-              </a:spcAft>
-              <a:buNone/>
-            </a:pPr>
-            <a:r>
-              <a:rPr sz="1500" b="0">
-                <a:solidFill>
-                  <a:srgbClr val="000000"/>
-                </a:solidFill>
-                <a:latin typeface="Arial"/>
-              </a:rPr>
-              <a:t>• Arrived. Something wrong. Finished</a:t>
-            </a:r>
-          </a:p>
-          <a:p>
-            <a:pPr marL="0" indent="0" algn="l">
-              <a:lnSpc>
-                <a:spcPct val="128000"/>
-              </a:lnSpc>
-              <a:spcAft>
-                <a:spcPts val="0"/>
-              </a:spcAft>
-              <a:buNone/>
-            </a:pPr>
-          </a:p>
-          <a:p>
-            <a:pPr marL="0" indent="0" algn="l">
-              <a:lnSpc>
-                <a:spcPct val="128000"/>
-              </a:lnSpc>
-              <a:spcAft>
-                <a:spcPts val="700"/>
-              </a:spcAft>
-              <a:buNone/>
-            </a:pPr>
-            <a:r>
-              <a:rPr sz="1700" b="1">
-                <a:solidFill>
-                  <a:srgbClr val="000000"/>
-                </a:solidFill>
-                <a:latin typeface="Arial"/>
-              </a:rPr>
-              <a:t>Vary two things only</a:t>
-            </a:r>
-          </a:p>
-          <a:p>
-            <a:pPr marL="0" indent="0" algn="l">
-              <a:lnSpc>
-                <a:spcPct val="128000"/>
-              </a:lnSpc>
-              <a:spcAft>
-                <a:spcPts val="700"/>
-              </a:spcAft>
-              <a:buNone/>
-            </a:pPr>
-            <a:r>
-              <a:rPr sz="1500" b="0">
-                <a:solidFill>
-                  <a:srgbClr val="000000"/>
-                </a:solidFill>
-                <a:latin typeface="Arial"/>
-              </a:rPr>
-              <a:t>• Rhythm of the pulses</a:t>
-            </a:r>
-          </a:p>
-          <a:p>
-            <a:pPr marL="0" indent="0" algn="l">
-              <a:lnSpc>
-                <a:spcPct val="128000"/>
-              </a:lnSpc>
-              <a:spcAft>
-                <a:spcPts val="700"/>
-              </a:spcAft>
-              <a:buNone/>
-            </a:pPr>
-            <a:r>
-              <a:rPr sz="1500" b="0">
-                <a:solidFill>
-                  <a:srgbClr val="000000"/>
-                </a:solidFill>
-                <a:latin typeface="Arial"/>
-              </a:rPr>
-              <a:t>• How strong they are</a:t>
-            </a:r>
-          </a:p>
-          <a:p>
-            <a:pPr marL="0" indent="0" algn="l">
-              <a:lnSpc>
-                <a:spcPct val="128000"/>
-              </a:lnSpc>
-              <a:spcAft>
-                <a:spcPts val="0"/>
-              </a:spcAft>
-              <a:buNone/>
-            </a:pPr>
-          </a:p>
-          <a:p>
-            <a:pPr marL="0" indent="0" algn="l">
-              <a:lnSpc>
-                <a:spcPct val="128000"/>
-              </a:lnSpc>
-              <a:spcAft>
-                <a:spcPts val="700"/>
-              </a:spcAft>
-              <a:buNone/>
-            </a:pPr>
-            <a:r>
-              <a:rPr sz="1700" b="1">
-                <a:solidFill>
-                  <a:srgbClr val="000000"/>
-                </a:solidFill>
-                <a:latin typeface="Arial"/>
-              </a:rPr>
-              <a:t>Blind test: they name all three</a:t>
-            </a:r>
-          </a:p>
-          <a:p>
-            <a:pPr marL="0" indent="0" algn="l">
-              <a:lnSpc>
-                <a:spcPct val="128000"/>
-              </a:lnSpc>
-              <a:spcAft>
-                <a:spcPts val="700"/>
-              </a:spcAft>
-              <a:buNone/>
-            </a:pPr>
-            <a:r>
-              <a:rPr sz="1500" b="0">
-                <a:solidFill>
-                  <a:srgbClr val="000000"/>
-                </a:solidFill>
-                <a:latin typeface="Arial"/>
-              </a:rPr>
-              <a:t>• Note which two got confused, and why</a:t>
-            </a:r>
-          </a:p>
-        </p:txBody>
-      </p:sp>
-      <p:pic>
-        <p:nvPicPr>
-          <p:cNvPr id="4" name="Picture 3" descr="wordmark_dark.png"/>
-          <p:cNvPicPr>
-            <a:picLocks noChangeAspect="1"/>
-          </p:cNvPicPr>
-          <p:nvPr/>
-        </p:nvPicPr>
-        <p:blipFill>
-          <a:blip r:embed="rId2"/>
-          <a:stretch>
-            <a:fillRect/>
-          </a:stretch>
-        </p:blipFill>
-        <p:spPr>
-          <a:xfrm>
-            <a:off x="342900" y="6184900"/>
-            <a:ext cx="2070100" cy="529560"/>
-          </a:xfrm>
-          <a:prstGeom prst="rect">
-            <a:avLst/>
-          </a:prstGeom>
-        </p:spPr>
-      </p:pic>
-      <p:pic>
-        <p:nvPicPr>
-          <p:cNvPr id="5" name="Picture 4" descr="seal_dark.png"/>
-          <p:cNvPicPr>
-            <a:picLocks noChangeAspect="1"/>
-          </p:cNvPicPr>
-          <p:nvPr/>
-        </p:nvPicPr>
-        <p:blipFill>
-          <a:blip r:embed="rId3"/>
-          <a:stretch>
-            <a:fillRect/>
-          </a:stretch>
-        </p:blipFill>
-        <p:spPr>
-          <a:xfrm>
-            <a:off x="11226800" y="5969000"/>
-            <a:ext cx="713915" cy="711200"/>
-          </a:xfrm>
-          <a:prstGeom prst="rect">
-            <a:avLst/>
-          </a:prstGeom>
-        </p:spPr>
-      </p:pic>
-    </p:spTree>
-  </p:cSld>
-  <p:clrMapOvr>
-    <a:masterClrMapping/>
-  </p:clrMapOvr>
-</p:sld>
-</file>
-
-<file path=ppt/slides/slide21.xml><?xml version="1.0" encoding="utf-8"?>
-<p:sld xmlns:a="http://schemas.openxmlformats.org/drawingml/2006/main" xmlns:p="http://schemas.openxmlformats.org/presentationml/2006/main" xmlns:r="http://schemas.openxmlformats.org/officeDocument/2006/relationships">
-  <p:cSld>
-    <p:spTree>
-      <p:nvGrpSpPr>
-        <p:cNvPr id="1" name=""/>
-        <p:cNvGrpSpPr/>
-        <p:nvPr/>
-      </p:nvGrpSpPr>
-      <p:grpSpPr/>
-      <p:sp>
-        <p:nvSpPr>
-          <p:cNvPr id="2" name="Title 1"/>
-          <p:cNvSpPr>
-            <a:spLocks noGrp="1"/>
-          </p:cNvSpPr>
-          <p:nvPr>
-            <p:ph type="title"/>
-          </p:nvPr>
-        </p:nvSpPr>
-        <p:spPr/>
-        <p:txBody>
-          <a:bodyPr/>
-          <a:lstStyle/>
-          <a:p>
-            <a:pPr marL="0" indent="0" algn="l">
-              <a:buNone/>
-            </a:pPr>
-            <a:r>
-              <a:rPr sz="3200" b="1">
-                <a:solidFill>
-                  <a:srgbClr val="000000"/>
-                </a:solidFill>
-                <a:latin typeface="Arial"/>
-              </a:rPr>
-              <a:t>THE CONSTRAINT THAT MATTERS</a:t>
-            </a:r>
-          </a:p>
-        </p:txBody>
-      </p:sp>
-      <p:sp>
-        <p:nvSpPr>
-          <p:cNvPr id="3" name="Text Placeholder 2"/>
-          <p:cNvSpPr>
-            <a:spLocks noGrp="1"/>
-          </p:cNvSpPr>
-          <p:nvPr>
-            <p:ph type="body" idx="1"/>
-          </p:nvPr>
-        </p:nvSpPr>
-        <p:spPr/>
-        <p:txBody>
-          <a:bodyPr/>
-          <a:lstStyle/>
-          <a:p>
-            <a:pPr marL="0" indent="0" algn="l">
-              <a:lnSpc>
-                <a:spcPct val="128000"/>
-              </a:lnSpc>
-              <a:spcAft>
-                <a:spcPts val="700"/>
-              </a:spcAft>
-              <a:buNone/>
-            </a:pPr>
-            <a:r>
-              <a:rPr sz="1700" b="1">
-                <a:solidFill>
-                  <a:srgbClr val="000000"/>
-                </a:solidFill>
-                <a:latin typeface="Arial"/>
-              </a:rPr>
-              <a:t>The recipient cannot look at the device.</a:t>
-            </a:r>
-          </a:p>
-          <a:p>
-            <a:pPr marL="0" indent="0" algn="l">
-              <a:lnSpc>
-                <a:spcPct val="128000"/>
-              </a:lnSpc>
-              <a:spcAft>
-                <a:spcPts val="0"/>
-              </a:spcAft>
-              <a:buNone/>
-            </a:pPr>
-          </a:p>
-          <a:p>
-            <a:pPr marL="0" indent="0" algn="l">
-              <a:lnSpc>
-                <a:spcPct val="128000"/>
-              </a:lnSpc>
-              <a:spcAft>
-                <a:spcPts val="700"/>
-              </a:spcAft>
-              <a:buNone/>
-            </a:pPr>
-            <a:r>
-              <a:rPr sz="1700" b="0">
-                <a:solidFill>
-                  <a:srgbClr val="000000"/>
-                </a:solidFill>
-                <a:latin typeface="Arial"/>
-              </a:rPr>
-              <a:t>If it only works while someone watches a screen,</a:t>
-            </a:r>
-          </a:p>
-          <a:p>
-            <a:pPr marL="0" indent="0" algn="l">
-              <a:lnSpc>
-                <a:spcPct val="128000"/>
-              </a:lnSpc>
-              <a:spcAft>
-                <a:spcPts val="700"/>
-              </a:spcAft>
-              <a:buNone/>
-            </a:pPr>
-            <a:r>
-              <a:rPr sz="1700" b="0">
-                <a:solidFill>
-                  <a:srgbClr val="000000"/>
-                </a:solidFill>
-                <a:latin typeface="Arial"/>
-              </a:rPr>
-              <a:t>you built a visual interface with a motor glued to it.</a:t>
-            </a:r>
-          </a:p>
-        </p:txBody>
-      </p:sp>
-      <p:pic>
-        <p:nvPicPr>
-          <p:cNvPr id="4" name="Picture 3" descr="wordmark_dark.png"/>
-          <p:cNvPicPr>
-            <a:picLocks noChangeAspect="1"/>
-          </p:cNvPicPr>
-          <p:nvPr/>
-        </p:nvPicPr>
-        <p:blipFill>
-          <a:blip r:embed="rId2"/>
-          <a:stretch>
-            <a:fillRect/>
-          </a:stretch>
-        </p:blipFill>
-        <p:spPr>
-          <a:xfrm>
-            <a:off x="342900" y="6184900"/>
-            <a:ext cx="2070100" cy="529560"/>
-          </a:xfrm>
-          <a:prstGeom prst="rect">
-            <a:avLst/>
-          </a:prstGeom>
-        </p:spPr>
-      </p:pic>
-      <p:pic>
-        <p:nvPicPr>
-          <p:cNvPr id="5" name="Picture 4" descr="seal_dark.png"/>
-          <p:cNvPicPr>
-            <a:picLocks noChangeAspect="1"/>
-          </p:cNvPicPr>
-          <p:nvPr/>
-        </p:nvPicPr>
-        <p:blipFill>
-          <a:blip r:embed="rId3"/>
-          <a:stretch>
-            <a:fillRect/>
-          </a:stretch>
-        </p:blipFill>
-        <p:spPr>
-          <a:xfrm>
-            <a:off x="11226800" y="5969000"/>
-            <a:ext cx="713915" cy="711200"/>
-          </a:xfrm>
-          <a:prstGeom prst="rect">
-            <a:avLst/>
-          </a:prstGeom>
-        </p:spPr>
-      </p:pic>
-    </p:spTree>
-  </p:cSld>
-  <p:clrMapOvr>
-    <a:masterClrMapping/>
-  </p:clrMapOvr>
-</p:sld>
-</file>
-
-<file path=ppt/slides/slide22.xml><?xml version="1.0" encoding="utf-8"?>
-<p:sld xmlns:a="http://schemas.openxmlformats.org/drawingml/2006/main" xmlns:p="http://schemas.openxmlformats.org/presentationml/2006/main" xmlns:r="http://schemas.openxmlformats.org/officeDocument/2006/relationships">
-  <p:cSld>
-    <p:spTree>
-      <p:nvGrpSpPr>
-        <p:cNvPr id="1" name=""/>
-        <p:cNvGrpSpPr/>
-        <p:nvPr/>
-      </p:nvGrpSpPr>
-      <p:grpSpPr/>
-      <p:sp>
-        <p:nvSpPr>
-          <p:cNvPr id="2" name="Title 1"/>
-          <p:cNvSpPr>
-            <a:spLocks noGrp="1"/>
-          </p:cNvSpPr>
-          <p:nvPr>
-            <p:ph type="ctrTitle"/>
-          </p:nvPr>
-        </p:nvSpPr>
-        <p:spPr/>
-        <p:txBody>
-          <a:bodyPr/>
-          <a:lstStyle/>
-          <a:p>
-            <a:pPr marL="0" indent="0" algn="l">
-              <a:buNone/>
-            </a:pPr>
-            <a:r>
-              <a:rPr sz="5400" b="1">
-                <a:solidFill>
-                  <a:srgbClr val="FFFFFF"/>
-                </a:solidFill>
-                <a:latin typeface="Arial"/>
-              </a:rPr>
-              <a:t>GO AND TOUCH THINGS</a:t>
-            </a:r>
-          </a:p>
-        </p:txBody>
-      </p:sp>
-      <p:sp>
-        <p:nvSpPr>
-          <p:cNvPr id="3" name="Subtitle 2"/>
-          <p:cNvSpPr>
-            <a:spLocks noGrp="1"/>
-          </p:cNvSpPr>
-          <p:nvPr>
-            <p:ph type="subTitle" idx="1"/>
-          </p:nvPr>
-        </p:nvSpPr>
-        <p:spPr/>
-        <p:txBody>
-          <a:bodyPr/>
-          <a:lstStyle/>
-          <a:p>
-            <a:pPr marL="0" indent="0" algn="l">
-              <a:buNone/>
-            </a:pPr>
-            <a:r>
-              <a:rPr sz="2000" b="0">
-                <a:solidFill>
-                  <a:srgbClr val="FFFFFF"/>
-                </a:solidFill>
-                <a:latin typeface="Arial"/>
-              </a:rPr>
-              <a:t>github.com/gust1527/multimodal-actuator-workshop</a:t>
-            </a:r>
-          </a:p>
-        </p:txBody>
-      </p:sp>
-      <p:pic>
-        <p:nvPicPr>
-          <p:cNvPr id="4" name="Picture 3" descr="wordmark_light.png"/>
-          <p:cNvPicPr>
-            <a:picLocks noChangeAspect="1"/>
-          </p:cNvPicPr>
-          <p:nvPr/>
-        </p:nvPicPr>
-        <p:blipFill>
-          <a:blip r:embed="rId2"/>
-          <a:stretch>
-            <a:fillRect/>
-          </a:stretch>
-        </p:blipFill>
-        <p:spPr>
-          <a:xfrm>
-            <a:off x="342900" y="6184900"/>
-            <a:ext cx="2070100" cy="529560"/>
-          </a:xfrm>
-          <a:prstGeom prst="rect">
-            <a:avLst/>
-          </a:prstGeom>
-        </p:spPr>
-      </p:pic>
-      <p:pic>
-        <p:nvPicPr>
-          <p:cNvPr id="5" name="Picture 4" descr="seal_light.png"/>
-          <p:cNvPicPr>
-            <a:picLocks noChangeAspect="1"/>
-          </p:cNvPicPr>
-          <p:nvPr/>
-        </p:nvPicPr>
-        <p:blipFill>
-          <a:blip r:embed="rId3"/>
-          <a:stretch>
-            <a:fillRect/>
-          </a:stretch>
-        </p:blipFill>
-        <p:spPr>
-          <a:xfrm>
-            <a:off x="11226800" y="5969000"/>
-            <a:ext cx="713915" cy="711200"/>
-          </a:xfrm>
-          <a:prstGeom prst="rect">
-            <a:avLst/>
-          </a:prstGeom>
-        </p:spPr>
-      </p:pic>
-    </p:spTree>
-  </p:cSld>
-  <p:clrMapOvr>
-    <a:masterClrMapping/>
-  </p:clrMapOvr>
-</p:sld>
-</file>
-
 <file path=ppt/slides/slide3.xml><?xml version="1.0" encoding="utf-8"?>
 <p:sld xmlns:a="http://schemas.openxmlformats.org/drawingml/2006/main" xmlns:p="http://schemas.openxmlformats.org/presentationml/2006/main" xmlns:r="http://schemas.openxmlformats.org/officeDocument/2006/relationships">
   <p:cSld>
@@ -9232,7 +6633,7 @@
                 <a:spcPct val="128000"/>
               </a:lnSpc>
               <a:spcAft>
-                <a:spcPts val="700"/>
+                <a:spcPts val="600"/>
               </a:spcAft>
               <a:buNone/>
             </a:pPr>
@@ -9243,7 +6644,7 @@
                 </a:solidFill>
                 <a:latin typeface="Arial"/>
               </a:rPr>
-              <a:t>Six benches, already wired and running</a:t>
+              <a:t>A board each, five tasks, everything pre-wired</a:t>
             </a:r>
           </a:p>
           <a:p>
@@ -9252,7 +6653,7 @@
                 <a:spcPct val="128000"/>
               </a:lnSpc>
               <a:spcAft>
-                <a:spcPts val="700"/>
+                <a:spcPts val="600"/>
               </a:spcAft>
               <a:buNone/>
             </a:pPr>
@@ -9263,7 +6664,7 @@
                 </a:solidFill>
                 <a:latin typeface="Arial"/>
               </a:rPr>
-              <a:t>• Ten minutes each. Hard timer</a:t>
+              <a:t>• Upload, change two numbers, upload again</a:t>
             </a:r>
           </a:p>
           <a:p>
@@ -9272,27 +6673,7 @@
                 <a:spcPct val="128000"/>
               </a:lnSpc>
               <a:spcAft>
-                <a:spcPts val="700"/>
-              </a:spcAft>
-              <a:buNone/>
-            </a:pPr>
-            <a:r>
-              <a:rPr sz="1500" b="0">
-                <a:solidFill>
-                  <a:srgbClr val="000000"/>
-                </a:solidFill>
-                <a:latin typeface="Arial"/>
-              </a:rPr>
-              <a:t>• Change one parameter, answer one question</a:t>
-            </a:r>
-          </a:p>
-          <a:p>
-            <a:pPr marL="0" indent="0" algn="l">
-              <a:lnSpc>
-                <a:spcPct val="128000"/>
-              </a:lnSpc>
-              <a:spcAft>
-                <a:spcPts val="700"/>
+                <a:spcPts val="600"/>
               </a:spcAft>
               <a:buNone/>
             </a:pPr>
@@ -9323,7 +6704,7 @@
                 <a:spcPct val="128000"/>
               </a:lnSpc>
               <a:spcAft>
-                <a:spcPts val="700"/>
+                <a:spcPts val="600"/>
               </a:spcAft>
               <a:buNone/>
             </a:pPr>
@@ -9334,7 +6715,7 @@
                 </a:solidFill>
                 <a:latin typeface="Arial"/>
               </a:rPr>
-              <a:t>Then build one signal</a:t>
+              <a:t>Actuators are on the benches around you</a:t>
             </a:r>
           </a:p>
           <a:p>
@@ -9343,7 +6724,58 @@
                 <a:spcPct val="128000"/>
               </a:lnSpc>
               <a:spcAft>
-                <a:spcPts val="700"/>
+                <a:spcPts val="600"/>
+              </a:spcAft>
+              <a:buNone/>
+            </a:pPr>
+            <a:r>
+              <a:rPr sz="1500" b="0">
+                <a:solidFill>
+                  <a:srgbClr val="000000"/>
+                </a:solidFill>
+                <a:latin typeface="Arial"/>
+              </a:rPr>
+              <a:t>• Go and feel the ones your task does not use</a:t>
+            </a:r>
+          </a:p>
+          <a:p>
+            <a:pPr marL="0" indent="0" algn="l">
+              <a:lnSpc>
+                <a:spcPct val="128000"/>
+              </a:lnSpc>
+              <a:spcAft>
+                <a:spcPts val="0"/>
+              </a:spcAft>
+              <a:buNone/>
+            </a:pPr>
+          </a:p>
+          <a:p>
+            <a:pPr marL="0" indent="0" algn="l">
+              <a:lnSpc>
+                <a:spcPct val="128000"/>
+              </a:lnSpc>
+              <a:spcAft>
+                <a:spcPts val="600"/>
+              </a:spcAft>
+              <a:buNone/>
+            </a:pPr>
+            <a:r>
+              <a:rPr sz="1700" b="1">
+                <a:solidFill>
+                  <a:srgbClr val="000000"/>
+                </a:solidFill>
+                <a:latin typeface="Arial"/>
+              </a:rPr>
+              <a:t>Finish by building one signal</a:t>
+            </a:r>
+          </a:p>
+          <a:p>
+            <a:pPr marL="0" indent="0" algn="l">
+              <a:lnSpc>
+                <a:spcPct val="128000"/>
+              </a:lnSpc>
+              <a:spcAft>
+                <a:spcPts val="600"/>
               </a:spcAft>
               <a:buNone/>
             </a:pPr>
@@ -9486,7 +6918,7 @@
                 </a:solidFill>
                 <a:latin typeface="Arial"/>
               </a:rPr>
-              <a:t>Times are offsets from the start. The rotation is the spine of the session, so keep it moving.</a:t>
+              <a:t>Times are offsets from the start. The only hard checkpoint is 0:25: everyone has task 01 running.</a:t>
             </a:r>
           </a:p>
           <a:p>
@@ -9526,7 +6958,7 @@
                 </a:solidFill>
                 <a:latin typeface="Consolas"/>
               </a:rPr>
-              <a:t>0:10     30 min    Bench tour: touch all six, five minutes each</a:t>
+              <a:t>0:10     15 min    Boards out, task 01 running for everyone</a:t>
             </a:r>
           </a:p>
           <a:p>
@@ -9546,7 +6978,7 @@
                 </a:solidFill>
                 <a:latin typeface="Consolas"/>
               </a:rPr>
-              <a:t>0:40     10 min    Round-the-room: what surprised you</a:t>
+              <a:t>0:25     60 min    Tasks 02 to 05, at your own pace</a:t>
             </a:r>
           </a:p>
           <a:p>
@@ -9566,7 +6998,7 @@
                 </a:solidFill>
                 <a:latin typeface="Consolas"/>
               </a:rPr>
-              <a:t>0:50     50 min    Tasks. Grab a board, work at your own pace</a:t>
+              <a:t>1:25     10 min    Round-the-room: what surprised you</a:t>
             </a:r>
           </a:p>
           <a:p>
@@ -9586,7 +7018,7 @@
                 </a:solidFill>
                 <a:latin typeface="Consolas"/>
               </a:rPr>
-              <a:t>1:40     15 min    Blind test on task 5</a:t>
+              <a:t>1:35     20 min    Blind test on task 05</a:t>
             </a:r>
           </a:p>
           <a:p>
@@ -9702,7 +7134,7 @@
                 </a:solidFill>
                 <a:latin typeface="Arial"/>
               </a:rPr>
-              <a:t>THE SIX BENCHES</a:t>
+              <a:t>FIVE TASKS</a:t>
             </a:r>
           </a:p>
         </p:txBody>
@@ -9792,13 +7224,13 @@
               <a:buNone/>
             </a:pPr>
             <a:r>
-              <a:rPr sz="3000" b="1">
-                <a:solidFill>
-                  <a:srgbClr val="000000"/>
-                </a:solidFill>
-                <a:latin typeface="Arial"/>
-              </a:rPr>
-              <a:t>01   ERM COIN MOTOR</a:t>
+              <a:rPr sz="3200" b="1">
+                <a:solidFill>
+                  <a:srgbClr val="000000"/>
+                </a:solidFill>
+                <a:latin typeface="Arial"/>
+              </a:rPr>
+              <a:t>FIVE TASKS, ONE BOARD EACH</a:t>
             </a:r>
           </a:p>
         </p:txBody>
@@ -9823,18 +7255,18 @@
                 <a:spcPct val="128000"/>
               </a:lnSpc>
               <a:spcAft>
-                <a:spcPts val="1200"/>
+                <a:spcPts val="1400"/>
               </a:spcAft>
               <a:buNone/>
             </a:pPr>
             <a:r>
-              <a:rPr sz="1000" b="1">
+              <a:rPr sz="1700" b="0">
                 <a:solidFill>
                   <a:srgbClr val="595959"/>
                 </a:solidFill>
                 <a:latin typeface="Arial"/>
               </a:rPr>
-              <a:t>VIBRATION</a:t>
+              <a:t>Upload, change two numbers, upload again. That loop is the point.</a:t>
             </a:r>
           </a:p>
           <a:p>
@@ -9843,18 +7275,18 @@
                 <a:spcPct val="128000"/>
               </a:lnSpc>
               <a:spcAft>
-                <a:spcPts val="400"/>
+                <a:spcPts val="600"/>
               </a:spcAft>
               <a:buNone/>
             </a:pPr>
             <a:r>
-              <a:rPr sz="1600" b="0">
-                <a:solidFill>
-                  <a:srgbClr val="000000"/>
-                </a:solidFill>
-                <a:latin typeface="Arial"/>
-              </a:rPr>
-              <a:t>An off-centre weight on a motor shaft.</a:t>
+              <a:rPr sz="1700" b="1">
+                <a:solidFill>
+                  <a:srgbClr val="000000"/>
+                </a:solidFill>
+                <a:latin typeface="Arial"/>
+              </a:rPr>
+              <a:t>01   Make something spin        coin motor</a:t>
             </a:r>
           </a:p>
           <a:p>
@@ -9863,18 +7295,78 @@
                 <a:spcPct val="128000"/>
               </a:lnSpc>
               <a:spcAft>
-                <a:spcPts val="400"/>
+                <a:spcPts val="600"/>
               </a:spcAft>
               <a:buNone/>
             </a:pPr>
             <a:r>
-              <a:rPr sz="1600" b="0">
-                <a:solidFill>
-                  <a:srgbClr val="000000"/>
-                </a:solidFill>
-                <a:latin typeface="Arial"/>
-              </a:rPr>
-              <a:t>The same part as in your phone.</a:t>
+              <a:rPr sz="1700" b="1">
+                <a:solidFill>
+                  <a:srgbClr val="000000"/>
+                </a:solidFill>
+                <a:latin typeface="Arial"/>
+              </a:rPr>
+              <a:t>02   Make something tap         solenoid</a:t>
+            </a:r>
+          </a:p>
+          <a:p>
+            <a:pPr marL="0" indent="0" algn="l">
+              <a:lnSpc>
+                <a:spcPct val="128000"/>
+              </a:lnSpc>
+              <a:spcAft>
+                <a:spcPts val="600"/>
+              </a:spcAft>
+              <a:buNone/>
+            </a:pPr>
+            <a:r>
+              <a:rPr sz="1700" b="1">
+                <a:solidFill>
+                  <a:srgbClr val="000000"/>
+                </a:solidFill>
+                <a:latin typeface="Arial"/>
+              </a:rPr>
+              <a:t>03   Make something warm        Peltier tile</a:t>
+            </a:r>
+          </a:p>
+          <a:p>
+            <a:pPr marL="0" indent="0" algn="l">
+              <a:lnSpc>
+                <a:spcPct val="128000"/>
+              </a:lnSpc>
+              <a:spcAft>
+                <a:spcPts val="600"/>
+              </a:spcAft>
+              <a:buNone/>
+            </a:pPr>
+            <a:r>
+              <a:rPr sz="1700" b="1">
+                <a:solidFill>
+                  <a:srgbClr val="000000"/>
+                </a:solidFill>
+                <a:latin typeface="Arial"/>
+              </a:rPr>
+              <a:t>04   Make it notice you         a wire and foil</a:t>
+            </a:r>
+          </a:p>
+          <a:p>
+            <a:pPr marL="0" indent="0" algn="l">
+              <a:lnSpc>
+                <a:spcPct val="128000"/>
+              </a:lnSpc>
+              <a:spcAft>
+                <a:spcPts val="600"/>
+              </a:spcAft>
+              <a:buNone/>
+            </a:pPr>
+            <a:r>
+              <a:rPr sz="1700" b="1">
+                <a:solidFill>
+                  <a:srgbClr val="000000"/>
+                </a:solidFill>
+                <a:latin typeface="Arial"/>
+              </a:rPr>
+              <a:t>05   Make it answer back        both together</a:t>
             </a:r>
           </a:p>
           <a:p>
@@ -9894,148 +7386,24 @@
                 <a:spcPct val="128000"/>
               </a:lnSpc>
               <a:spcAft>
-                <a:spcPts val="400"/>
+                <a:spcPts val="600"/>
               </a:spcAft>
               <a:buNone/>
             </a:pPr>
             <a:r>
-              <a:rPr sz="1600" b="0">
-                <a:solidFill>
-                  <a:srgbClr val="000000"/>
-                </a:solidFill>
-                <a:latin typeface="Arial"/>
-              </a:rPr>
-              <a:t>Speed and strength are welded together.</a:t>
+              <a:rPr sz="1700" b="0">
+                <a:solidFill>
+                  <a:srgbClr val="000000"/>
+                </a:solidFill>
+                <a:latin typeface="Arial"/>
+              </a:rPr>
+              <a:t>1 to 3 are output. 4 is input. 5 is both.</a:t>
             </a:r>
           </a:p>
           <a:p>
             <a:pPr marL="0" indent="0" algn="l">
               <a:lnSpc>
                 <a:spcPct val="128000"/>
-              </a:lnSpc>
-              <a:spcAft>
-                <a:spcPts val="400"/>
-              </a:spcAft>
-              <a:buNone/>
-            </a:pPr>
-            <a:r>
-              <a:rPr sz="1600" b="0">
-                <a:solidFill>
-                  <a:srgbClr val="000000"/>
-                </a:solidFill>
-                <a:latin typeface="Arial"/>
-              </a:rPr>
-              <a:t>"Gentle but fast" is not on offer.</a:t>
-            </a:r>
-          </a:p>
-          <a:p>
-            <a:pPr marL="0" indent="0" algn="l">
-              <a:lnSpc>
-                <a:spcPct val="128000"/>
-              </a:lnSpc>
-              <a:spcAft>
-                <a:spcPts val="1000"/>
-              </a:spcAft>
-              <a:buNone/>
-            </a:pPr>
-          </a:p>
-          <a:p>
-            <a:pPr marL="0" indent="0" algn="l">
-              <a:lnSpc>
-                <a:spcPct val="128000"/>
-              </a:lnSpc>
-              <a:spcAft>
-                <a:spcPts val="400"/>
-              </a:spcAft>
-              <a:buNone/>
-            </a:pPr>
-            <a:r>
-              <a:rPr sz="900" b="1">
-                <a:solidFill>
-                  <a:srgbClr val="595959"/>
-                </a:solidFill>
-                <a:latin typeface="Arial"/>
-              </a:rPr>
-              <a:t>CARD QUESTION</a:t>
-            </a:r>
-          </a:p>
-          <a:p>
-            <a:pPr marL="0" indent="0" algn="l">
-              <a:lnSpc>
-                <a:spcPct val="128000"/>
-              </a:lnSpc>
-              <a:spcAft>
-                <a:spcPts val="0"/>
-              </a:spcAft>
-              <a:buNone/>
-            </a:pPr>
-            <a:r>
-              <a:rPr sz="1500" b="1">
-                <a:solidFill>
-                  <a:srgbClr val="002546"/>
-                </a:solidFill>
-                <a:latin typeface="Arial"/>
-              </a:rPr>
-              <a:t>At what point does it stop feeling like information and start feeling like a malfunction?</a:t>
-            </a:r>
-          </a:p>
-        </p:txBody>
-      </p:sp>
-      <p:sp>
-        <p:nvSpPr>
-          <p:cNvPr id="4" name="Text Placeholder 3"/>
-          <p:cNvSpPr>
-            <a:spLocks noGrp="1"/>
-          </p:cNvSpPr>
-          <p:nvPr>
-            <p:ph type="body" idx="2"/>
-          </p:nvPr>
-        </p:nvSpPr>
-        <p:spPr/>
-        <p:txBody>
-          <a:bodyPr/>
-          <a:lstStyle/>
-          <a:p>
-            <a:pPr marL="0" indent="0" algn="l">
-              <a:spcAft>
-                <a:spcPts val="400"/>
-              </a:spcAft>
-              <a:buNone/>
-            </a:pPr>
-            <a:r>
-              <a:rPr sz="900" b="1">
-                <a:solidFill>
-                  <a:srgbClr val="595959"/>
-                </a:solidFill>
-                <a:latin typeface="Arial"/>
-              </a:rPr>
-              <a:t>USED FOR</a:t>
-            </a:r>
-          </a:p>
-          <a:p>
-            <a:pPr marL="0" indent="0" algn="l">
-              <a:lnSpc>
-                <a:spcPct val="125000"/>
-              </a:lnSpc>
-              <a:spcAft>
-                <a:spcPts val="1600"/>
-              </a:spcAft>
-              <a:buNone/>
-            </a:pPr>
-            <a:r>
-              <a:rPr sz="1200" b="0">
-                <a:solidFill>
-                  <a:srgbClr val="002546"/>
-                </a:solidFill>
-                <a:latin typeface="Arial"/>
-              </a:rPr>
-              <a:t>phone notifications, game controller rumble, anything worn under clothing.</a:t>
-            </a:r>
-          </a:p>
-          <a:p>
-            <a:pPr marL="0" indent="0" algn="l">
-              <a:lnSpc>
-                <a:spcPct val="120000"/>
               </a:lnSpc>
               <a:spcAft>
                 <a:spcPts val="600"/>
@@ -10043,120 +7411,20 @@
               <a:buNone/>
             </a:pPr>
             <a:r>
-              <a:rPr sz="1200" b="0">
-                <a:solidFill>
-                  <a:srgbClr val="000000"/>
-                </a:solidFill>
-                <a:latin typeface="Consolas"/>
-              </a:rPr>
-              <a:t>part   10mm 3V coin ERM</a:t>
-            </a:r>
-          </a:p>
-          <a:p>
-            <a:pPr marL="0" indent="0" algn="l">
-              <a:lnSpc>
-                <a:spcPct val="120000"/>
-              </a:lnSpc>
-              <a:spcAft>
-                <a:spcPts val="600"/>
-              </a:spcAft>
-              <a:buNone/>
-            </a:pPr>
-            <a:r>
-              <a:rPr sz="1200" b="0">
-                <a:solidFill>
-                  <a:srgbClr val="000000"/>
-                </a:solidFill>
-                <a:latin typeface="Consolas"/>
-              </a:rPr>
-              <a:t>drive   2N2222 + 1N4148</a:t>
-            </a:r>
-          </a:p>
-          <a:p>
-            <a:pPr marL="0" indent="0" algn="l">
-              <a:lnSpc>
-                <a:spcPct val="120000"/>
-              </a:lnSpc>
-              <a:spcAft>
-                <a:spcPts val="600"/>
-              </a:spcAft>
-              <a:buNone/>
-            </a:pPr>
-            <a:r>
-              <a:rPr sz="1200" b="0">
-                <a:solidFill>
-                  <a:srgbClr val="000000"/>
-                </a:solidFill>
-                <a:latin typeface="Consolas"/>
-              </a:rPr>
-              <a:t>pin   D9 (PWM)</a:t>
-            </a:r>
-          </a:p>
-          <a:p>
-            <a:pPr marL="0" indent="0" algn="l">
-              <a:lnSpc>
-                <a:spcPct val="120000"/>
-              </a:lnSpc>
-              <a:spcAft>
-                <a:spcPts val="600"/>
-              </a:spcAft>
-              <a:buNone/>
-            </a:pPr>
-            <a:r>
-              <a:rPr sz="1200" b="0">
-                <a:solidFill>
-                  <a:srgbClr val="000000"/>
-                </a:solidFill>
-                <a:latin typeface="Consolas"/>
-              </a:rPr>
-              <a:t>draw   ~75 mA</a:t>
-            </a:r>
-          </a:p>
-          <a:p>
-            <a:pPr marL="0" indent="0" algn="l">
-              <a:lnSpc>
-                <a:spcPct val="120000"/>
-              </a:lnSpc>
-              <a:spcAft>
-                <a:spcPts val="600"/>
-              </a:spcAft>
-              <a:buNone/>
-            </a:pPr>
-            <a:r>
-              <a:rPr sz="1200" b="0">
-                <a:solidFill>
-                  <a:srgbClr val="000000"/>
-                </a:solidFill>
-                <a:latin typeface="Consolas"/>
-              </a:rPr>
-              <a:t>spin-up   20-40 ms</a:t>
-            </a:r>
-          </a:p>
-          <a:p>
-            <a:pPr marL="0" indent="0" algn="l">
-              <a:lnSpc>
-                <a:spcPct val="120000"/>
-              </a:lnSpc>
-              <a:spcAft>
-                <a:spcPts val="600"/>
-              </a:spcAft>
-              <a:buNone/>
-            </a:pPr>
-            <a:r>
-              <a:rPr sz="1200" b="0">
-                <a:solidFill>
-                  <a:srgbClr val="000000"/>
-                </a:solidFill>
-                <a:latin typeface="Consolas"/>
-              </a:rPr>
-              <a:t>cost   ~12 kr</a:t>
+              <a:rPr sz="1700" b="0">
+                <a:solidFill>
+                  <a:srgbClr val="000000"/>
+                </a:solidFill>
+                <a:latin typeface="Arial"/>
+              </a:rPr>
+              <a:t>Nobody is expected to finish all five.</a:t>
             </a:r>
           </a:p>
         </p:txBody>
       </p:sp>
       <p:pic>
         <p:nvPicPr>
-          <p:cNvPr id="5" name="Picture 4" descr="wordmark_dark.png"/>
+          <p:cNvPr id="4" name="Picture 3" descr="wordmark_dark.png"/>
           <p:cNvPicPr>
             <a:picLocks noChangeAspect="1"/>
           </p:cNvPicPr>
@@ -10180,7 +7448,7 @@
       </p:pic>
       <p:pic>
         <p:nvPicPr>
-          <p:cNvPr id="6" name="Picture 5" descr="seal_dark.png"/>
+          <p:cNvPr id="5" name="Picture 4" descr="seal_dark.png"/>
           <p:cNvPicPr>
             <a:picLocks noChangeAspect="1"/>
           </p:cNvPicPr>
@@ -10239,13 +7507,13 @@
               <a:buNone/>
             </a:pPr>
             <a:r>
-              <a:rPr sz="3000" b="1">
-                <a:solidFill>
-                  <a:srgbClr val="000000"/>
-                </a:solidFill>
-                <a:latin typeface="Arial"/>
-              </a:rPr>
-              <a:t>02   LRA + PIEZO DISC</a:t>
+              <a:rPr sz="3200" b="1">
+                <a:solidFill>
+                  <a:srgbClr val="000000"/>
+                </a:solidFill>
+                <a:latin typeface="Arial"/>
+              </a:rPr>
+              <a:t>HOW THE TASK SKETCHES WORK</a:t>
             </a:r>
           </a:p>
         </p:txBody>
@@ -10270,18 +7538,18 @@
                 <a:spcPct val="128000"/>
               </a:lnSpc>
               <a:spcAft>
-                <a:spcPts val="1200"/>
+                <a:spcPts val="1400"/>
               </a:spcAft>
               <a:buNone/>
             </a:pPr>
             <a:r>
-              <a:rPr sz="1000" b="1">
+              <a:rPr sz="1700" b="0">
                 <a:solidFill>
                   <a:srgbClr val="595959"/>
                 </a:solidFill>
                 <a:latin typeface="Arial"/>
               </a:rPr>
-              <a:t>VIBRATION</a:t>
+              <a:t>Every sketch runs the moment you upload it. Nothing to wire.</a:t>
             </a:r>
           </a:p>
           <a:p>
@@ -10290,18 +7558,38 @@
                 <a:spcPct val="128000"/>
               </a:lnSpc>
               <a:spcAft>
-                <a:spcPts val="400"/>
+                <a:spcPts val="600"/>
               </a:spcAft>
               <a:buNone/>
             </a:pPr>
             <a:r>
-              <a:rPr sz="1600" b="0">
-                <a:solidFill>
-                  <a:srgbClr val="000000"/>
-                </a:solidFill>
-                <a:latin typeface="Arial"/>
-              </a:rPr>
-              <a:t>Two ways out of bench 01's compromise.</a:t>
+              <a:rPr sz="1700" b="1">
+                <a:solidFill>
+                  <a:srgbClr val="000000"/>
+                </a:solidFill>
+                <a:latin typeface="Arial"/>
+              </a:rPr>
+              <a:t>A CHANGE ME block at the top</a:t>
+            </a:r>
+          </a:p>
+          <a:p>
+            <a:pPr marL="0" indent="0" algn="l">
+              <a:lnSpc>
+                <a:spcPct val="128000"/>
+              </a:lnSpc>
+              <a:spcAft>
+                <a:spcPts val="600"/>
+              </a:spcAft>
+              <a:buNone/>
+            </a:pPr>
+            <a:r>
+              <a:rPr sz="1500" b="0">
+                <a:solidFill>
+                  <a:srgbClr val="000000"/>
+                </a:solidFill>
+                <a:latin typeface="Arial"/>
+              </a:rPr>
+              <a:t>• Two or three numbers. Edit, upload, feel the difference</a:t>
             </a:r>
           </a:p>
           <a:p>
@@ -10321,18 +7609,18 @@
                 <a:spcPct val="128000"/>
               </a:lnSpc>
               <a:spcAft>
-                <a:spcPts val="400"/>
+                <a:spcPts val="600"/>
               </a:spcAft>
               <a:buNone/>
             </a:pPr>
             <a:r>
-              <a:rPr sz="1600" b="0">
-                <a:solidFill>
-                  <a:srgbClr val="000000"/>
-                </a:solidFill>
-                <a:latin typeface="Arial"/>
-              </a:rPr>
-              <a:t>LRA: resonance in 5 ms, stops just as fast.</a:t>
+              <a:rPr sz="1700" b="1">
+                <a:solidFill>
+                  <a:srgbClr val="000000"/>
+                </a:solidFill>
+                <a:latin typeface="Arial"/>
+              </a:rPr>
+              <a:t>A THINGS TO TRY list at the bottom</a:t>
             </a:r>
           </a:p>
           <a:p>
@@ -10341,18 +7629,18 @@
                 <a:spcPct val="128000"/>
               </a:lnSpc>
               <a:spcAft>
-                <a:spcPts val="400"/>
+                <a:spcPts val="600"/>
               </a:spcAft>
               <a:buNone/>
             </a:pPr>
             <a:r>
-              <a:rPr sz="1600" b="0">
-                <a:solidFill>
-                  <a:srgbClr val="000000"/>
-                </a:solidFill>
-                <a:latin typeface="Arial"/>
-              </a:rPr>
-              <a:t>Piezo: near-instant, almost no power.</a:t>
+              <a:rPr sz="1500" b="0">
+                <a:solidFill>
+                  <a:srgbClr val="000000"/>
+                </a:solidFill>
+                <a:latin typeface="Arial"/>
+              </a:rPr>
+              <a:t>• Four experiments, roughly in order of difficulty</a:t>
             </a:r>
           </a:p>
           <a:p>
@@ -10361,49 +7649,18 @@
                 <a:spcPct val="128000"/>
               </a:lnSpc>
               <a:spcAft>
-                <a:spcPts val="400"/>
+                <a:spcPts val="600"/>
               </a:spcAft>
               <a:buNone/>
             </a:pPr>
             <a:r>
-              <a:rPr sz="1600" b="0">
-                <a:solidFill>
-                  <a:srgbClr val="000000"/>
-                </a:solidFill>
-                <a:latin typeface="Arial"/>
-              </a:rPr>
-              <a:t>A tick, not a thump.</a:t>
-            </a:r>
-          </a:p>
-          <a:p>
-            <a:pPr marL="0" indent="0" algn="l">
-              <a:lnSpc>
-                <a:spcPct val="128000"/>
-              </a:lnSpc>
-              <a:spcAft>
-                <a:spcPts val="1000"/>
-              </a:spcAft>
-              <a:buNone/>
-            </a:pPr>
-          </a:p>
-          <a:p>
-            <a:pPr marL="0" indent="0" algn="l">
-              <a:lnSpc>
-                <a:spcPct val="128000"/>
-              </a:lnSpc>
-              <a:spcAft>
-                <a:spcPts val="400"/>
-              </a:spcAft>
-              <a:buNone/>
-            </a:pPr>
-            <a:r>
-              <a:rPr sz="900" b="1">
-                <a:solidFill>
-                  <a:srgbClr val="595959"/>
-                </a:solidFill>
-                <a:latin typeface="Arial"/>
-              </a:rPr>
-              <a:t>CARD QUESTION</a:t>
+              <a:rPr sz="1500" b="0">
+                <a:solidFill>
+                  <a:srgbClr val="000000"/>
+                </a:solidFill>
+                <a:latin typeface="Arial"/>
+              </a:rPr>
+              <a:t>• The last one is usually the interesting one</a:t>
             </a:r>
           </a:p>
           <a:p>
@@ -10416,73 +7673,11 @@
               </a:spcAft>
               <a:buNone/>
             </a:pPr>
-            <a:r>
-              <a:rPr sz="1500" b="1">
-                <a:solidFill>
-                  <a:srgbClr val="002546"/>
-                </a:solidFill>
-                <a:latin typeface="Arial"/>
-              </a:rPr>
-              <a:t>Which of the three vibrators would you actually put on a wrist, and why not the others?</a:t>
-            </a:r>
-          </a:p>
-        </p:txBody>
-      </p:sp>
-      <p:sp>
-        <p:nvSpPr>
-          <p:cNvPr id="4" name="Text Placeholder 3"/>
-          <p:cNvSpPr>
-            <a:spLocks noGrp="1"/>
-          </p:cNvSpPr>
-          <p:nvPr>
-            <p:ph type="body" idx="2"/>
-          </p:nvPr>
-        </p:nvSpPr>
-        <p:spPr/>
-        <p:txBody>
-          <a:bodyPr/>
-          <a:lstStyle/>
-          <a:p>
-            <a:pPr marL="0" indent="0" algn="l">
-              <a:spcAft>
-                <a:spcPts val="400"/>
-              </a:spcAft>
-              <a:buNone/>
-            </a:pPr>
-            <a:r>
-              <a:rPr sz="900" b="1">
-                <a:solidFill>
-                  <a:srgbClr val="595959"/>
-                </a:solidFill>
-                <a:latin typeface="Arial"/>
-              </a:rPr>
-              <a:t>USED FOR</a:t>
-            </a:r>
-          </a:p>
-          <a:p>
-            <a:pPr marL="0" indent="0" algn="l">
-              <a:lnSpc>
-                <a:spcPct val="125000"/>
-              </a:lnSpc>
-              <a:spcAft>
-                <a:spcPts val="1600"/>
-              </a:spcAft>
-              <a:buNone/>
-            </a:pPr>
-            <a:r>
-              <a:rPr sz="1200" b="0">
-                <a:solidFill>
-                  <a:srgbClr val="002546"/>
-                </a:solidFill>
-                <a:latin typeface="Arial"/>
-              </a:rPr>
-              <a:t>keyboard clicks, Apple Watch taps, anything where lag would feel broken.</a:t>
-            </a:r>
-          </a:p>
-          <a:p>
-            <a:pPr marL="0" indent="0" algn="l">
-              <a:lnSpc>
-                <a:spcPct val="120000"/>
+          </a:p>
+          <a:p>
+            <a:pPr marL="0" indent="0" algn="l">
+              <a:lnSpc>
+                <a:spcPct val="128000"/>
               </a:lnSpc>
               <a:spcAft>
                 <a:spcPts val="600"/>
@@ -10490,100 +7685,20 @@
               <a:buNone/>
             </a:pPr>
             <a:r>
-              <a:rPr sz="1200" b="0">
-                <a:solidFill>
-                  <a:srgbClr val="000000"/>
-                </a:solidFill>
-                <a:latin typeface="Consolas"/>
-              </a:rPr>
-              <a:t>parts   LRA 10mm + piezo</a:t>
-            </a:r>
-          </a:p>
-          <a:p>
-            <a:pPr marL="0" indent="0" algn="l">
-              <a:lnSpc>
-                <a:spcPct val="120000"/>
-              </a:lnSpc>
-              <a:spcAft>
-                <a:spcPts val="600"/>
-              </a:spcAft>
-              <a:buNone/>
-            </a:pPr>
-            <a:r>
-              <a:rPr sz="1200" b="0">
-                <a:solidFill>
-                  <a:srgbClr val="000000"/>
-                </a:solidFill>
-                <a:latin typeface="Consolas"/>
-              </a:rPr>
-              <a:t>driver   DRV2605L (I2C)</a:t>
-            </a:r>
-          </a:p>
-          <a:p>
-            <a:pPr marL="0" indent="0" algn="l">
-              <a:lnSpc>
-                <a:spcPct val="120000"/>
-              </a:lnSpc>
-              <a:spcAft>
-                <a:spcPts val="600"/>
-              </a:spcAft>
-              <a:buNone/>
-            </a:pPr>
-            <a:r>
-              <a:rPr sz="1200" b="0">
-                <a:solidFill>
-                  <a:srgbClr val="000000"/>
-                </a:solidFill>
-                <a:latin typeface="Consolas"/>
-              </a:rPr>
-              <a:t>pin   A4 SDA / A5 SCL</a:t>
-            </a:r>
-          </a:p>
-          <a:p>
-            <a:pPr marL="0" indent="0" algn="l">
-              <a:lnSpc>
-                <a:spcPct val="120000"/>
-              </a:lnSpc>
-              <a:spcAft>
-                <a:spcPts val="600"/>
-              </a:spcAft>
-              <a:buNone/>
-            </a:pPr>
-            <a:r>
-              <a:rPr sz="1200" b="0">
-                <a:solidFill>
-                  <a:srgbClr val="000000"/>
-                </a:solidFill>
-                <a:latin typeface="Consolas"/>
-              </a:rPr>
-              <a:t>effects   123 waveforms</a:t>
-            </a:r>
-          </a:p>
-          <a:p>
-            <a:pPr marL="0" indent="0" algn="l">
-              <a:lnSpc>
-                <a:spcPct val="120000"/>
-              </a:lnSpc>
-              <a:spcAft>
-                <a:spcPts val="600"/>
-              </a:spcAft>
-              <a:buNone/>
-            </a:pPr>
-            <a:r>
-              <a:rPr sz="1200" b="0">
-                <a:solidFill>
-                  <a:srgbClr val="000000"/>
-                </a:solidFill>
-                <a:latin typeface="Consolas"/>
-              </a:rPr>
-              <a:t>cost   ~90 kr</a:t>
+              <a:rPr sz="1700" b="1">
+                <a:solidFill>
+                  <a:srgbClr val="000000"/>
+                </a:solidFill>
+                <a:latin typeface="Arial"/>
+              </a:rPr>
+              <a:t>github.com/gust1527/multimodal-actuator-workshop</a:t>
             </a:r>
           </a:p>
         </p:txBody>
       </p:sp>
       <p:pic>
         <p:nvPicPr>
-          <p:cNvPr id="5" name="Picture 4" descr="wordmark_dark.png"/>
+          <p:cNvPr id="4" name="Picture 3" descr="wordmark_dark.png"/>
           <p:cNvPicPr>
             <a:picLocks noChangeAspect="1"/>
           </p:cNvPicPr>
@@ -10607,7 +7722,7 @@
       </p:pic>
       <p:pic>
         <p:nvPicPr>
-          <p:cNvPr id="6" name="Picture 5" descr="seal_dark.png"/>
+          <p:cNvPr id="5" name="Picture 4" descr="seal_dark.png"/>
           <p:cNvPicPr>
             <a:picLocks noChangeAspect="1"/>
           </p:cNvPicPr>
@@ -10666,13 +7781,13 @@
               <a:buNone/>
             </a:pPr>
             <a:r>
-              <a:rPr sz="3000" b="1">
-                <a:solidFill>
-                  <a:srgbClr val="000000"/>
-                </a:solidFill>
-                <a:latin typeface="Arial"/>
-              </a:rPr>
-              <a:t>03   SOLENOID TAP</a:t>
+              <a:rPr sz="3200" b="1">
+                <a:solidFill>
+                  <a:srgbClr val="000000"/>
+                </a:solidFill>
+                <a:latin typeface="Arial"/>
+              </a:rPr>
+              <a:t>THE ONE THAT SURPRISES PEOPLE</a:t>
             </a:r>
           </a:p>
         </p:txBody>
@@ -10697,18 +7812,18 @@
                 <a:spcPct val="128000"/>
               </a:lnSpc>
               <a:spcAft>
-                <a:spcPts val="1200"/>
+                <a:spcPts val="1400"/>
               </a:spcAft>
               <a:buNone/>
             </a:pPr>
             <a:r>
-              <a:rPr sz="1000" b="1">
+              <a:rPr sz="1700" b="0">
                 <a:solidFill>
                   <a:srgbClr val="595959"/>
                 </a:solidFill>
                 <a:latin typeface="Arial"/>
               </a:rPr>
-              <a:t>IMPACT</a:t>
+              <a:t>Touch input for the price of a wire. The thinking is where it costs you.</a:t>
             </a:r>
           </a:p>
           <a:p>
@@ -10717,18 +7832,18 @@
                 <a:spcPct val="128000"/>
               </a:lnSpc>
               <a:spcAft>
-                <a:spcPts val="400"/>
+                <a:spcPts val="600"/>
               </a:spcAft>
               <a:buNone/>
             </a:pPr>
             <a:r>
-              <a:rPr sz="1600" b="0">
-                <a:solidFill>
-                  <a:srgbClr val="000000"/>
-                </a:solidFill>
-                <a:latin typeface="Arial"/>
-              </a:rPr>
-              <a:t>One 15 ms pulse against a fingertip.</a:t>
+              <a:rPr sz="1700" b="1">
+                <a:solidFill>
+                  <a:srgbClr val="000000"/>
+                </a:solidFill>
+                <a:latin typeface="Arial"/>
+              </a:rPr>
+              <a:t>reading &gt; baselineAverage() * 1.01</a:t>
             </a:r>
           </a:p>
           <a:p>
@@ -10748,18 +7863,18 @@
                 <a:spcPct val="128000"/>
               </a:lnSpc>
               <a:spcAft>
-                <a:spcPts val="400"/>
+                <a:spcPts val="600"/>
               </a:spcAft>
               <a:buNone/>
             </a:pPr>
             <a:r>
-              <a:rPr sz="1600" b="0">
-                <a:solidFill>
-                  <a:srgbClr val="000000"/>
-                </a:solidFill>
-                <a:latin typeface="Arial"/>
-              </a:rPr>
-              <a:t>A knock reads as a person tapping you.</a:t>
+              <a:rPr sz="1700" b="1">
+                <a:solidFill>
+                  <a:srgbClr val="000000"/>
+                </a:solidFill>
+                <a:latin typeface="Arial"/>
+              </a:rPr>
+              <a:t>Threshold is relative, never absolute</a:t>
             </a:r>
           </a:p>
           <a:p>
@@ -10768,18 +7883,18 @@
                 <a:spcPct val="128000"/>
               </a:lnSpc>
               <a:spcAft>
-                <a:spcPts val="400"/>
+                <a:spcPts val="600"/>
               </a:spcAft>
               <a:buNone/>
             </a:pPr>
             <a:r>
-              <a:rPr sz="1600" b="0">
-                <a:solidFill>
-                  <a:srgbClr val="000000"/>
-                </a:solidFill>
-                <a:latin typeface="Arial"/>
-              </a:rPr>
-              <a:t>Buzzing reads as a machine.</a:t>
+              <a:rPr sz="1500" b="0">
+                <a:solidFill>
+                  <a:srgbClr val="000000"/>
+                </a:solidFill>
+                <a:latin typeface="Arial"/>
+              </a:rPr>
+              <a:t>• Readings drift with humidity and mains hum</a:t>
             </a:r>
           </a:p>
           <a:p>
@@ -10788,29 +7903,18 @@
                 <a:spcPct val="128000"/>
               </a:lnSpc>
               <a:spcAft>
-                <a:spcPts val="1000"/>
+                <a:spcPts val="600"/>
               </a:spcAft>
               <a:buNone/>
             </a:pPr>
-          </a:p>
-          <a:p>
-            <a:pPr marL="0" indent="0" algn="l">
-              <a:lnSpc>
-                <a:spcPct val="128000"/>
-              </a:lnSpc>
-              <a:spcAft>
-                <a:spcPts val="400"/>
-              </a:spcAft>
-              <a:buNone/>
-            </a:pPr>
-            <a:r>
-              <a:rPr sz="900" b="1">
-                <a:solidFill>
-                  <a:srgbClr val="595959"/>
-                </a:solidFill>
-                <a:latin typeface="Arial"/>
-              </a:rPr>
-              <a:t>CARD QUESTION</a:t>
+            <a:r>
+              <a:rPr sz="1500" b="0">
+                <a:solidFill>
+                  <a:srgbClr val="000000"/>
+                </a:solidFill>
+                <a:latin typeface="Arial"/>
+              </a:rPr>
+              <a:t>• Fixed threshold works at 9am, fails at 1pm</a:t>
             </a:r>
           </a:p>
           <a:p>
@@ -10823,73 +7927,11 @@
               </a:spcAft>
               <a:buNone/>
             </a:pPr>
-            <a:r>
-              <a:rPr sz="1500" b="1">
-                <a:solidFill>
-                  <a:srgbClr val="002546"/>
-                </a:solidFill>
-                <a:latin typeface="Arial"/>
-              </a:rPr>
-              <a:t>How many taps before it goes from alert to nagging?</a:t>
-            </a:r>
-          </a:p>
-        </p:txBody>
-      </p:sp>
-      <p:sp>
-        <p:nvSpPr>
-          <p:cNvPr id="4" name="Text Placeholder 3"/>
-          <p:cNvSpPr>
-            <a:spLocks noGrp="1"/>
-          </p:cNvSpPr>
-          <p:nvPr>
-            <p:ph type="body" idx="2"/>
-          </p:nvPr>
-        </p:nvSpPr>
-        <p:spPr/>
-        <p:txBody>
-          <a:bodyPr/>
-          <a:lstStyle/>
-          <a:p>
-            <a:pPr marL="0" indent="0" algn="l">
-              <a:spcAft>
-                <a:spcPts val="400"/>
-              </a:spcAft>
-              <a:buNone/>
-            </a:pPr>
-            <a:r>
-              <a:rPr sz="900" b="1">
-                <a:solidFill>
-                  <a:srgbClr val="595959"/>
-                </a:solidFill>
-                <a:latin typeface="Arial"/>
-              </a:rPr>
-              <a:t>USED FOR</a:t>
-            </a:r>
-          </a:p>
-          <a:p>
-            <a:pPr marL="0" indent="0" algn="l">
-              <a:lnSpc>
-                <a:spcPct val="125000"/>
-              </a:lnSpc>
-              <a:spcAft>
-                <a:spcPts val="1600"/>
-              </a:spcAft>
-              <a:buNone/>
-            </a:pPr>
-            <a:r>
-              <a:rPr sz="1200" b="0">
-                <a:solidFill>
-                  <a:srgbClr val="002546"/>
-                </a:solidFill>
-                <a:latin typeface="Arial"/>
-              </a:rPr>
-              <a:t>navigation cues on the body, braille cells, alerts that must cut through noise.</a:t>
-            </a:r>
-          </a:p>
-          <a:p>
-            <a:pPr marL="0" indent="0" algn="l">
-              <a:lnSpc>
-                <a:spcPct val="120000"/>
+          </a:p>
+          <a:p>
+            <a:pPr marL="0" indent="0" algn="l">
+              <a:lnSpc>
+                <a:spcPct val="128000"/>
               </a:lnSpc>
               <a:spcAft>
                 <a:spcPts val="600"/>
@@ -10897,19 +7939,19 @@
               <a:buNone/>
             </a:pPr>
             <a:r>
-              <a:rPr sz="1200" b="0">
-                <a:solidFill>
-                  <a:srgbClr val="000000"/>
-                </a:solidFill>
-                <a:latin typeface="Consolas"/>
-              </a:rPr>
-              <a:t>part   5V push-pull</a:t>
-            </a:r>
-          </a:p>
-          <a:p>
-            <a:pPr marL="0" indent="0" algn="l">
-              <a:lnSpc>
-                <a:spcPct val="120000"/>
+              <a:rPr sz="1700" b="1">
+                <a:solidFill>
+                  <a:srgbClr val="000000"/>
+                </a:solidFill>
+                <a:latin typeface="Arial"/>
+              </a:rPr>
+              <a:t>Baseline only learns while untouched</a:t>
+            </a:r>
+          </a:p>
+          <a:p>
+            <a:pPr marL="0" indent="0" algn="l">
+              <a:lnSpc>
+                <a:spcPct val="128000"/>
               </a:lnSpc>
               <a:spcAft>
                 <a:spcPts val="600"/>
@@ -10917,100 +7959,20 @@
               <a:buNone/>
             </a:pPr>
             <a:r>
-              <a:rPr sz="1200" b="0">
-                <a:solidFill>
-                  <a:srgbClr val="000000"/>
-                </a:solidFill>
-                <a:latin typeface="Consolas"/>
-              </a:rPr>
-              <a:t>drive   MOSFET + flyback</a:t>
-            </a:r>
-          </a:p>
-          <a:p>
-            <a:pPr marL="0" indent="0" algn="l">
-              <a:lnSpc>
-                <a:spcPct val="120000"/>
-              </a:lnSpc>
-              <a:spcAft>
-                <a:spcPts val="600"/>
-              </a:spcAft>
-              <a:buNone/>
-            </a:pPr>
-            <a:r>
-              <a:rPr sz="1200" b="0">
-                <a:solidFill>
-                  <a:srgbClr val="000000"/>
-                </a:solidFill>
-                <a:latin typeface="Consolas"/>
-              </a:rPr>
-              <a:t>pin   D6</a:t>
-            </a:r>
-          </a:p>
-          <a:p>
-            <a:pPr marL="0" indent="0" algn="l">
-              <a:lnSpc>
-                <a:spcPct val="120000"/>
-              </a:lnSpc>
-              <a:spcAft>
-                <a:spcPts val="600"/>
-              </a:spcAft>
-              <a:buNone/>
-            </a:pPr>
-            <a:r>
-              <a:rPr sz="1200" b="0">
-                <a:solidFill>
-                  <a:srgbClr val="000000"/>
-                </a:solidFill>
-                <a:latin typeface="Consolas"/>
-              </a:rPr>
-              <a:t>peak   ~1.1 A</a:t>
-            </a:r>
-          </a:p>
-          <a:p>
-            <a:pPr marL="0" indent="0" algn="l">
-              <a:lnSpc>
-                <a:spcPct val="120000"/>
-              </a:lnSpc>
-              <a:spcAft>
-                <a:spcPts val="600"/>
-              </a:spcAft>
-              <a:buNone/>
-            </a:pPr>
-            <a:r>
-              <a:rPr sz="1200" b="0">
-                <a:solidFill>
-                  <a:srgbClr val="000000"/>
-                </a:solidFill>
-                <a:latin typeface="Consolas"/>
-              </a:rPr>
-              <a:t>duty   &lt;= 25%, gets hot</a:t>
-            </a:r>
-          </a:p>
-          <a:p>
-            <a:pPr marL="0" indent="0" algn="l">
-              <a:lnSpc>
-                <a:spcPct val="120000"/>
-              </a:lnSpc>
-              <a:spcAft>
-                <a:spcPts val="600"/>
-              </a:spcAft>
-              <a:buNone/>
-            </a:pPr>
-            <a:r>
-              <a:rPr sz="1200" b="0">
-                <a:solidFill>
-                  <a:srgbClr val="000000"/>
-                </a:solidFill>
-                <a:latin typeface="Consolas"/>
-              </a:rPr>
-              <a:t>cost   ~45 kr</a:t>
+              <a:rPr sz="1500" b="0">
+                <a:solidFill>
+                  <a:srgbClr val="000000"/>
+                </a:solidFill>
+                <a:latin typeface="Arial"/>
+              </a:rPr>
+              <a:t>• Or a long press teaches it that a finger is normal</a:t>
             </a:r>
           </a:p>
         </p:txBody>
       </p:sp>
       <p:pic>
         <p:nvPicPr>
-          <p:cNvPr id="5" name="Picture 4" descr="wordmark_dark.png"/>
+          <p:cNvPr id="4" name="Picture 3" descr="wordmark_dark.png"/>
           <p:cNvPicPr>
             <a:picLocks noChangeAspect="1"/>
           </p:cNvPicPr>
@@ -11034,7 +7996,7 @@
       </p:pic>
       <p:pic>
         <p:nvPicPr>
-          <p:cNvPr id="6" name="Picture 5" descr="seal_dark.png"/>
+          <p:cNvPr id="5" name="Picture 4" descr="seal_dark.png"/>
           <p:cNvPicPr>
             <a:picLocks noChangeAspect="1"/>
           </p:cNvPicPr>
@@ -11093,351 +8055,20 @@
               <a:buNone/>
             </a:pPr>
             <a:r>
-              <a:rPr sz="3000" b="1">
-                <a:solidFill>
-                  <a:srgbClr val="000000"/>
-                </a:solidFill>
-                <a:latin typeface="Arial"/>
-              </a:rPr>
-              <a:t>04   CAPACITIVE TOUCH</a:t>
-            </a:r>
-          </a:p>
-        </p:txBody>
-      </p:sp>
-      <p:sp>
-        <p:nvSpPr>
-          <p:cNvPr id="3" name="Text Placeholder 2"/>
-          <p:cNvSpPr>
-            <a:spLocks noGrp="1"/>
-          </p:cNvSpPr>
-          <p:nvPr>
-            <p:ph type="body" idx="1"/>
-          </p:nvPr>
-        </p:nvSpPr>
-        <p:spPr/>
-        <p:txBody>
-          <a:bodyPr/>
-          <a:lstStyle/>
-          <a:p>
-            <a:pPr marL="0" indent="0" algn="l">
-              <a:lnSpc>
-                <a:spcPct val="128000"/>
-              </a:lnSpc>
-              <a:spcAft>
-                <a:spcPts val="1200"/>
-              </a:spcAft>
-              <a:buNone/>
-            </a:pPr>
-            <a:r>
-              <a:rPr sz="1000" b="1">
-                <a:solidFill>
-                  <a:srgbClr val="595959"/>
-                </a:solidFill>
-                <a:latin typeface="Arial"/>
-              </a:rPr>
-              <a:t>TOUCH INPUT</a:t>
-            </a:r>
-          </a:p>
-          <a:p>
-            <a:pPr marL="0" indent="0" algn="l">
-              <a:lnSpc>
-                <a:spcPct val="128000"/>
-              </a:lnSpc>
-              <a:spcAft>
-                <a:spcPts val="400"/>
-              </a:spcAft>
-              <a:buNone/>
-            </a:pPr>
-            <a:r>
-              <a:rPr sz="1600" b="0">
-                <a:solidFill>
-                  <a:srgbClr val="000000"/>
-                </a:solidFill>
-                <a:latin typeface="Arial"/>
-              </a:rPr>
-              <a:t>Bare finger on a surface. Servos react.</a:t>
-            </a:r>
-          </a:p>
-          <a:p>
-            <a:pPr marL="0" indent="0" algn="l">
-              <a:lnSpc>
-                <a:spcPct val="128000"/>
-              </a:lnSpc>
-              <a:spcAft>
-                <a:spcPts val="0"/>
-              </a:spcAft>
-              <a:buNone/>
-            </a:pPr>
-          </a:p>
-          <a:p>
-            <a:pPr marL="0" indent="0" algn="l">
-              <a:lnSpc>
-                <a:spcPct val="128000"/>
-              </a:lnSpc>
-              <a:spcAft>
-                <a:spcPts val="400"/>
-              </a:spcAft>
-              <a:buNone/>
-            </a:pPr>
-            <a:r>
-              <a:rPr sz="1600" b="0">
-                <a:solidFill>
-                  <a:srgbClr val="000000"/>
-                </a:solidFill>
-                <a:latin typeface="Arial"/>
-              </a:rPr>
-              <a:t>No button. No sensor you can point at.</a:t>
-            </a:r>
-          </a:p>
-          <a:p>
-            <a:pPr marL="0" indent="0" algn="l">
-              <a:lnSpc>
-                <a:spcPct val="128000"/>
-              </a:lnSpc>
-              <a:spcAft>
-                <a:spcPts val="400"/>
-              </a:spcAft>
-              <a:buNone/>
-            </a:pPr>
-            <a:r>
-              <a:rPr sz="1600" b="0">
-                <a:solidFill>
-                  <a:srgbClr val="000000"/>
-                </a:solidFill>
-                <a:latin typeface="Arial"/>
-              </a:rPr>
-              <a:t>The input is a wire behind a plate.</a:t>
-            </a:r>
-          </a:p>
-          <a:p>
-            <a:pPr marL="0" indent="0" algn="l">
-              <a:lnSpc>
-                <a:spcPct val="128000"/>
-              </a:lnSpc>
-              <a:spcAft>
-                <a:spcPts val="1000"/>
-              </a:spcAft>
-              <a:buNone/>
-            </a:pPr>
-          </a:p>
-          <a:p>
-            <a:pPr marL="0" indent="0" algn="l">
-              <a:lnSpc>
-                <a:spcPct val="128000"/>
-              </a:lnSpc>
-              <a:spcAft>
-                <a:spcPts val="400"/>
-              </a:spcAft>
-              <a:buNone/>
-            </a:pPr>
-            <a:r>
-              <a:rPr sz="900" b="1">
-                <a:solidFill>
-                  <a:srgbClr val="595959"/>
-                </a:solidFill>
-                <a:latin typeface="Arial"/>
-              </a:rPr>
-              <a:t>CARD QUESTION</a:t>
-            </a:r>
-          </a:p>
-          <a:p>
-            <a:pPr marL="0" indent="0" algn="l">
-              <a:lnSpc>
-                <a:spcPct val="128000"/>
-              </a:lnSpc>
-              <a:spcAft>
-                <a:spcPts val="0"/>
-              </a:spcAft>
-              <a:buNone/>
-            </a:pPr>
-            <a:r>
-              <a:rPr sz="1500" b="1">
-                <a:solidFill>
-                  <a:srgbClr val="002546"/>
-                </a:solidFill>
-                <a:latin typeface="Arial"/>
-              </a:rPr>
-              <a:t>Put your hand near the plate without touching. When exactly did it decide that was a touch?</a:t>
-            </a:r>
-          </a:p>
-        </p:txBody>
-      </p:sp>
-      <p:sp>
-        <p:nvSpPr>
-          <p:cNvPr id="4" name="Text Placeholder 3"/>
-          <p:cNvSpPr>
-            <a:spLocks noGrp="1"/>
-          </p:cNvSpPr>
-          <p:nvPr>
-            <p:ph type="body" idx="2"/>
-          </p:nvPr>
-        </p:nvSpPr>
-        <p:spPr/>
-        <p:txBody>
-          <a:bodyPr/>
-          <a:lstStyle/>
-          <a:p>
-            <a:pPr marL="0" indent="0" algn="l">
-              <a:spcAft>
-                <a:spcPts val="400"/>
-              </a:spcAft>
-              <a:buNone/>
-            </a:pPr>
-            <a:r>
-              <a:rPr sz="900" b="1">
-                <a:solidFill>
-                  <a:srgbClr val="595959"/>
-                </a:solidFill>
-                <a:latin typeface="Arial"/>
-              </a:rPr>
-              <a:t>USED FOR</a:t>
-            </a:r>
-          </a:p>
-          <a:p>
-            <a:pPr marL="0" indent="0" algn="l">
-              <a:lnSpc>
-                <a:spcPct val="125000"/>
-              </a:lnSpc>
-              <a:spcAft>
-                <a:spcPts val="1600"/>
-              </a:spcAft>
-              <a:buNone/>
-            </a:pPr>
-            <a:r>
-              <a:rPr sz="1200" b="0">
-                <a:solidFill>
-                  <a:srgbClr val="002546"/>
-                </a:solidFill>
-                <a:latin typeface="Arial"/>
-              </a:rPr>
-              <a:t>invisible controls in wood or fabric, waterproof panels, touch-sensitive prototypes.</a:t>
-            </a:r>
-          </a:p>
-          <a:p>
-            <a:pPr marL="0" indent="0" algn="l">
-              <a:lnSpc>
-                <a:spcPct val="120000"/>
-              </a:lnSpc>
-              <a:spcAft>
-                <a:spcPts val="600"/>
-              </a:spcAft>
-              <a:buNone/>
-            </a:pPr>
-            <a:r>
-              <a:rPr sz="1200" b="0">
-                <a:solidFill>
-                  <a:srgbClr val="000000"/>
-                </a:solidFill>
-                <a:latin typeface="Consolas"/>
-              </a:rPr>
-              <a:t>sense   ADCTouch on A0</a:t>
-            </a:r>
-          </a:p>
-          <a:p>
-            <a:pPr marL="0" indent="0" algn="l">
-              <a:lnSpc>
-                <a:spcPct val="120000"/>
-              </a:lnSpc>
-              <a:spcAft>
-                <a:spcPts val="600"/>
-              </a:spcAft>
-              <a:buNone/>
-            </a:pPr>
-            <a:r>
-              <a:rPr sz="1200" b="0">
-                <a:solidFill>
-                  <a:srgbClr val="000000"/>
-                </a:solidFill>
-                <a:latin typeface="Consolas"/>
-              </a:rPr>
-              <a:t>baseline   25-sample roll</a:t>
-            </a:r>
-          </a:p>
-          <a:p>
-            <a:pPr marL="0" indent="0" algn="l">
-              <a:lnSpc>
-                <a:spcPct val="120000"/>
-              </a:lnSpc>
-              <a:spcAft>
-                <a:spcPts val="600"/>
-              </a:spcAft>
-              <a:buNone/>
-            </a:pPr>
-            <a:r>
-              <a:rPr sz="1200" b="0">
-                <a:solidFill>
-                  <a:srgbClr val="000000"/>
-                </a:solidFill>
-                <a:latin typeface="Consolas"/>
-              </a:rPr>
-              <a:t>trigger   1.01x average</a:t>
-            </a:r>
-          </a:p>
-          <a:p>
-            <a:pPr marL="0" indent="0" algn="l">
-              <a:lnSpc>
-                <a:spcPct val="120000"/>
-              </a:lnSpc>
-              <a:spcAft>
-                <a:spcPts val="600"/>
-              </a:spcAft>
-              <a:buNone/>
-            </a:pPr>
-            <a:r>
-              <a:rPr sz="1200" b="0">
-                <a:solidFill>
-                  <a:srgbClr val="000000"/>
-                </a:solidFill>
-                <a:latin typeface="Consolas"/>
-              </a:rPr>
-              <a:t>debounce   100 ms</a:t>
-            </a:r>
-          </a:p>
-          <a:p>
-            <a:pPr marL="0" indent="0" algn="l">
-              <a:lnSpc>
-                <a:spcPct val="120000"/>
-              </a:lnSpc>
-              <a:spcAft>
-                <a:spcPts val="600"/>
-              </a:spcAft>
-              <a:buNone/>
-            </a:pPr>
-            <a:r>
-              <a:rPr sz="1200" b="0">
-                <a:solidFill>
-                  <a:srgbClr val="000000"/>
-                </a:solidFill>
-                <a:latin typeface="Consolas"/>
-              </a:rPr>
-              <a:t>servos   D4 + D13</a:t>
-            </a:r>
-          </a:p>
-          <a:p>
-            <a:pPr marL="0" indent="0" algn="l">
-              <a:lnSpc>
-                <a:spcPct val="120000"/>
-              </a:lnSpc>
-              <a:spcAft>
-                <a:spcPts val="600"/>
-              </a:spcAft>
-              <a:buNone/>
-            </a:pPr>
-            <a:r>
-              <a:rPr sz="1200" b="0">
-                <a:solidFill>
-                  <a:srgbClr val="000000"/>
-                </a:solidFill>
-                <a:latin typeface="Consolas"/>
-              </a:rPr>
-              <a:t>cost   ~0 kr, a wire</a:t>
+              <a:rPr sz="4400" b="1">
+                <a:solidFill>
+                  <a:srgbClr val="000000"/>
+                </a:solidFill>
+                <a:latin typeface="Arial"/>
+              </a:rPr>
+              <a:t>INPUTS, AND PRIOR ART</a:t>
             </a:r>
           </a:p>
         </p:txBody>
       </p:sp>
       <p:pic>
         <p:nvPicPr>
-          <p:cNvPr id="5" name="Picture 4" descr="wordmark_dark.png"/>
+          <p:cNvPr id="3" name="Picture 2" descr="wordmark_dark.png"/>
           <p:cNvPicPr>
             <a:picLocks noChangeAspect="1"/>
           </p:cNvPicPr>
@@ -11461,7 +8092,7 @@
       </p:pic>
       <p:pic>
         <p:nvPicPr>
-          <p:cNvPr id="6" name="Picture 5" descr="seal_dark.png"/>
+          <p:cNvPr id="4" name="Picture 3" descr="seal_dark.png"/>
           <p:cNvPicPr>
             <a:picLocks noChangeAspect="1"/>
           </p:cNvPicPr>

--- a/docs/multimodal-actuator-workshop.pptx
+++ b/docs/multimodal-actuator-workshop.pptx
@@ -20,6 +20,11 @@
     <p:sldId id="268" r:id="rId19"/>
     <p:sldId id="269" r:id="rId20"/>
     <p:sldId id="270" r:id="rId21"/>
+    <p:sldId id="271" r:id="rId22"/>
+    <p:sldId id="272" r:id="rId23"/>
+    <p:sldId id="273" r:id="rId24"/>
+    <p:sldId id="274" r:id="rId25"/>
+    <p:sldId id="275" r:id="rId26"/>
   </p:sldIdLst>
   <p:sldSz cx="12188952" cy="6858000" type="screen4x3"/>
   <p:notesSz cx="6858000" cy="9144000"/>
@@ -613,29 +618,50 @@
           <a:lstStyle/>
           <a:p>
             <a:r>
-              <a:t>Mention, do not teach. These sit on one table with a sign.</a:t>
+              <a:t>The only slide where you should sound firm.</a:t>
             </a:r>
           </a:p>
           <a:p/>
           <a:p>
             <a:r>
-              <a:t>The honest warnings matter more than the specs: PPG is useless once the hand</a:t>
-            </a:r>
-          </a:p>
-          <a:p>
-            <a:r>
-              <a:t>moves, GSR drifts so only relative change works, FSRs need per-pad calibration.</a:t>
+              <a:t>Three real hazards:</a:t>
+            </a:r>
+          </a:p>
+          <a:p>
+            <a:r>
+              <a:t>  * solenoid and Peltier on their own supply, not USB</a:t>
+            </a:r>
+          </a:p>
+          <a:p>
+            <a:r>
+              <a:t>  * Peltier heatsink on before it is switched on, no exceptions</a:t>
+            </a:r>
+          </a:p>
+          <a:p>
+            <a:r>
+              <a:t>  * no motor straight from a pin</a:t>
             </a:r>
           </a:p>
           <a:p/>
           <a:p>
             <a:r>
-              <a:t>Push the phone option hard. For a lot of projects it beats everything else on</a:t>
-            </a:r>
-          </a:p>
-          <a:p>
-            <a:r>
-              <a:t>the table and needs no soldering at all.</a:t>
+              <a:t>Say the numbers: a pin gives 40 mA, the motor wants about 75. It is not a rule</a:t>
+            </a:r>
+          </a:p>
+          <a:p>
+            <a:r>
+              <a:t>they have to take on faith.</a:t>
+            </a:r>
+          </a:p>
+          <a:p/>
+          <a:p>
+            <a:r>
+              <a:t>Also mention that a board resetting when the solenoid fires is a POWER problem,</a:t>
+            </a:r>
+          </a:p>
+          <a:p>
+            <a:r>
+              <a:t>not a code bug. It will save someone twenty minutes.</a:t>
             </a:r>
           </a:p>
         </p:txBody>
@@ -705,45 +731,72 @@
           <a:lstStyle/>
           <a:p>
             <a:r>
-              <a:t>Five minutes, and put the actual repos on screen if you can.</a:t>
+              <a:t>Slow down here. This is the single idea most worth stealing from today, and</a:t>
+            </a:r>
+          </a:p>
+          <a:p>
+            <a:r>
+              <a:t>it is worth interrupting the room for once most people have reached task 04.</a:t>
             </a:r>
           </a:p>
           <a:p/>
           <a:p>
             <a:r>
-              <a:t>The argument: this was built by students at your stage, not by a lab with a</a:t>
-            </a:r>
-          </a:p>
-          <a:p>
-            <a:r>
-              <a:t>budget. The gap between "we should use touch" and "it moves when you touch it"</a:t>
-            </a:r>
-          </a:p>
-          <a:p>
-            <a:r>
-              <a:t>is smaller than it looks.</a:t>
+              <a:t>Two things students get wrong:</a:t>
             </a:r>
           </a:p>
           <a:p/>
           <a:p>
             <a:r>
-              <a:t>The moving screen has a browser control panel over the serial port, which is</a:t>
-            </a:r>
-          </a:p>
-          <a:p>
-            <a:r>
-              <a:t>what you will wish you had at the project demonstrations.</a:t>
+              <a:t>1. A fixed threshold. Works in the morning, fails after lunch, because the</a:t>
+            </a:r>
+          </a:p>
+          <a:p>
+            <a:r>
+              <a:t>   reading drifts with humidity and mains hum.</a:t>
             </a:r>
           </a:p>
           <a:p/>
           <a:p>
             <a:r>
-              <a:t>Note for you: the sock repo has a hardcoded Wi-Fi password and live patient IDs</a:t>
-            </a:r>
-          </a:p>
-          <a:p>
-            <a:r>
-              <a:t>in it. Scrub before showing, or show only the calibration section.</a:t>
+              <a:t>2. Feeding the baseline buffer always. A long press then teaches the baseline</a:t>
+            </a:r>
+          </a:p>
+          <a:p>
+            <a:r>
+              <a:t>   that a finger is normal, and the touch silently stops working. The buffer</a:t>
+            </a:r>
+          </a:p>
+          <a:p>
+            <a:r>
+              <a:t>   must only learn while untouched.</a:t>
+            </a:r>
+          </a:p>
+          <a:p/>
+          <a:p>
+            <a:r>
+              <a:t>Put the Serial Plotter on the projector. Watching the baseline wander while the</a:t>
+            </a:r>
+          </a:p>
+          <a:p>
+            <a:r>
+              <a:t>trigger line tracks it explains the whole design in ten seconds.</a:t>
+            </a:r>
+          </a:p>
+          <a:p/>
+          <a:p>
+            <a:r>
+              <a:t>For what it is worth, the rig this came from went through the same tuning: an</a:t>
+            </a:r>
+          </a:p>
+          <a:p>
+            <a:r>
+              <a:t>earlier version used 1.008 with a 50-sample baseline, the final one 1.01 with</a:t>
+            </a:r>
+          </a:p>
+          <a:p>
+            <a:r>
+              <a:t>25. Everyone tunes these.</a:t>
             </a:r>
           </a:p>
         </p:txBody>
@@ -813,18 +866,24 @@
           <a:lstStyle/>
           <a:p>
             <a:r>
-              <a:t>1:35. The blind test.</a:t>
+              <a:t>1:25. Pull the room back together.</a:t>
             </a:r>
           </a:p>
           <a:p/>
           <a:p>
             <a:r>
-              <a:t>Most groups will already have something from task 05. This is where it gets</a:t>
-            </a:r>
-          </a:p>
-          <a:p>
-            <a:r>
-              <a:t>tested by someone who did not build it.</a:t>
+              <a:t>One sentence per group: what surprised you. No slides, no laptops. Ten minutes.</a:t>
+            </a:r>
+          </a:p>
+          <a:p/>
+          <a:p>
+            <a:r>
+              <a:t>Expect someone to report the Peltier delay. Let that land, it is far more</a:t>
+            </a:r>
+          </a:p>
+          <a:p>
+            <a:r>
+              <a:t>persuasive from a peer than from you.</a:t>
             </a:r>
           </a:p>
         </p:txBody>
@@ -894,39 +953,29 @@
           <a:lstStyle/>
           <a:p>
             <a:r>
-              <a:t>Read the brief out once, then get out of the way. Full wording, since the</a:t>
-            </a:r>
-          </a:p>
-          <a:p>
-            <a:r>
-              <a:t>slide is only the bones:</a:t>
+              <a:t>Mention, do not teach. These sit on one table with a sign.</a:t>
             </a:r>
           </a:p>
           <a:p/>
           <a:p>
             <a:r>
-              <a:t>"Pick one actuator. Encode three messages: arrived, something wrong, finished.</a:t>
-            </a:r>
-          </a:p>
-          <a:p>
-            <a:r>
-              <a:t>Vary only the rhythm of the pulses and how strong they are. Then hand it to</a:t>
-            </a:r>
-          </a:p>
-          <a:p>
-            <a:r>
-              <a:t>another group with the screen turned away and see if they can name all three."</a:t>
+              <a:t>The honest warnings matter more than the specs: PPG is useless once the hand</a:t>
+            </a:r>
+          </a:p>
+          <a:p>
+            <a:r>
+              <a:t>moves, GSR drifts so only relative change works, FSRs need per-pad calibration.</a:t>
             </a:r>
           </a:p>
           <a:p/>
           <a:p>
             <a:r>
-              <a:t>If someone asks to add a second actuator, say no. The constraint is the</a:t>
-            </a:r>
-          </a:p>
-          <a:p>
-            <a:r>
-              <a:t>exercise.</a:t>
+              <a:t>Push the phone option hard. For a lot of projects it beats everything else on</a:t>
+            </a:r>
+          </a:p>
+          <a:p>
+            <a:r>
+              <a:t>the table and needs no soldering at all.</a:t>
             </a:r>
           </a:p>
         </p:txBody>
@@ -996,24 +1045,45 @@
           <a:lstStyle/>
           <a:p>
             <a:r>
-              <a:t>The line worth repeating twice.</a:t>
+              <a:t>Five minutes, and put the actual repos on screen if you can.</a:t>
             </a:r>
           </a:p>
           <a:p/>
           <a:p>
             <a:r>
-              <a:t>Run the test: swap groups, receiver looks away, guess all three.</a:t>
+              <a:t>The argument: this was built by students at your stage, not by a lab with a</a:t>
+            </a:r>
+          </a:p>
+          <a:p>
+            <a:r>
+              <a:t>budget. The gap between "we should use touch" and "it moves when you touch it"</a:t>
+            </a:r>
+          </a:p>
+          <a:p>
+            <a:r>
+              <a:t>is smaller than it looks.</a:t>
             </a:r>
           </a:p>
           <a:p/>
           <a:p>
             <a:r>
-              <a:t>Then have each group name which two got confused and what would have separated</a:t>
-            </a:r>
-          </a:p>
-          <a:p>
-            <a:r>
-              <a:t>them. That confusion is the actual learning, not the successful ones.</a:t>
+              <a:t>The moving screen has a browser control panel over the serial port, which is</a:t>
+            </a:r>
+          </a:p>
+          <a:p>
+            <a:r>
+              <a:t>what you will wish you had at the project demonstrations.</a:t>
+            </a:r>
+          </a:p>
+          <a:p/>
+          <a:p>
+            <a:r>
+              <a:t>Note for you: the sock repo has a hardcoded Wi-Fi password and live patient IDs</a:t>
+            </a:r>
+          </a:p>
+          <a:p>
+            <a:r>
+              <a:t>in it. Scrub before showing, or show only the calibration section.</a:t>
             </a:r>
           </a:p>
         </p:txBody>
@@ -1083,40 +1153,379 @@
           <a:lstStyle/>
           <a:p>
             <a:r>
-              <a:t>Point them at the repo. Every task sketch is commented for them, and the</a:t>
-            </a:r>
-          </a:p>
-          <a:p>
-            <a:r>
-              <a:t>bench test sketches are there too if they want to see the minimal version.</a:t>
+              <a:t>1:35. The blind test.</a:t>
             </a:r>
           </a:p>
           <a:p/>
           <a:p>
             <a:r>
-              <a:t>Last thing to say: pick your actuator before you design the interaction, not</a:t>
-            </a:r>
-          </a:p>
-          <a:p>
-            <a:r>
-              <a:t>after. Today was so they can do that from experience rather than a datasheet.</a:t>
+              <a:t>Most groups will already have something from task 05. This is where it gets</a:t>
+            </a:r>
+          </a:p>
+          <a:p>
+            <a:r>
+              <a:t>tested by someone who did not build it.</a:t>
+            </a:r>
+          </a:p>
+        </p:txBody>
+      </p:sp>
+      <p:sp>
+        <p:nvSpPr>
+          <p:cNvPr id="4" name="Slide Number Placeholder 3"/>
+          <p:cNvSpPr>
+            <a:spLocks noGrp="1"/>
+          </p:cNvSpPr>
+          <p:nvPr>
+            <p:ph type="sldNum" idx="5" sz="quarter"/>
+          </p:nvPr>
+        </p:nvSpPr>
+        <p:spPr/>
+      </p:sp>
+    </p:spTree>
+  </p:cSld>
+  <p:clrMapOvr>
+    <a:masterClrMapping/>
+  </p:clrMapOvr>
+</p:notes>
+</file>
+
+<file path=ppt/notesSlides/notesSlide16.xml><?xml version="1.0" encoding="utf-8"?>
+<p:notes xmlns:a="http://schemas.openxmlformats.org/drawingml/2006/main" xmlns:p="http://schemas.openxmlformats.org/presentationml/2006/main" xmlns:r="http://schemas.openxmlformats.org/officeDocument/2006/relationships">
+  <p:cSld>
+    <p:spTree>
+      <p:nvGrpSpPr>
+        <p:cNvPr id="1" name=""/>
+        <p:cNvGrpSpPr/>
+        <p:nvPr/>
+      </p:nvGrpSpPr>
+      <p:grpSpPr>
+        <a:xfrm>
+          <a:off x="0" y="0"/>
+          <a:ext cx="0" cy="0"/>
+          <a:chOff x="0" y="0"/>
+          <a:chExt cx="0" cy="0"/>
+        </a:xfrm>
+      </p:grpSpPr>
+      <p:sp>
+        <p:nvSpPr>
+          <p:cNvPr id="2" name="Slide Image Placeholder 1"/>
+          <p:cNvSpPr>
+            <a:spLocks noGrp="1"/>
+          </p:cNvSpPr>
+          <p:nvPr>
+            <p:ph type="sldImg" idx="2"/>
+          </p:nvPr>
+        </p:nvSpPr>
+        <p:spPr/>
+      </p:sp>
+      <p:sp>
+        <p:nvSpPr>
+          <p:cNvPr id="3" name="Notes Placeholder 2"/>
+          <p:cNvSpPr>
+            <a:spLocks noGrp="1"/>
+          </p:cNvSpPr>
+          <p:nvPr>
+            <p:ph type="body" idx="3" sz="quarter"/>
+          </p:nvPr>
+        </p:nvSpPr>
+        <p:spPr/>
+        <p:txBody>
+          <a:bodyPr/>
+          <a:lstStyle/>
+          <a:p>
+            <a:r>
+              <a:t>Read the brief out once, then get out of the way. Full wording, since the</a:t>
+            </a:r>
+          </a:p>
+          <a:p>
+            <a:r>
+              <a:t>slide is only the bones:</a:t>
             </a:r>
           </a:p>
           <a:p/>
           <a:p>
             <a:r>
-              <a:t>Pack down: everything back in the box, including the resistors. It will not all</a:t>
-            </a:r>
-          </a:p>
-          <a:p>
-            <a:r>
-              <a:t>come back.</a:t>
+              <a:t>"Pick one actuator. Encode three messages: arrived, something wrong, finished.</a:t>
+            </a:r>
+          </a:p>
+          <a:p>
+            <a:r>
+              <a:t>Vary only the rhythm of the pulses and how strong they are. Then hand it to</a:t>
+            </a:r>
+          </a:p>
+          <a:p>
+            <a:r>
+              <a:t>another group with the screen turned away and see if they can name all three."</a:t>
             </a:r>
           </a:p>
           <a:p/>
           <a:p>
             <a:r>
-              <a:t>If anyone wants to borrow parts for the project weeks, now is when they ask.</a:t>
+              <a:t>If someone asks to add a second actuator, say no. The constraint is the</a:t>
+            </a:r>
+          </a:p>
+          <a:p>
+            <a:r>
+              <a:t>exercise.</a:t>
+            </a:r>
+          </a:p>
+        </p:txBody>
+      </p:sp>
+      <p:sp>
+        <p:nvSpPr>
+          <p:cNvPr id="4" name="Slide Number Placeholder 3"/>
+          <p:cNvSpPr>
+            <a:spLocks noGrp="1"/>
+          </p:cNvSpPr>
+          <p:nvPr>
+            <p:ph type="sldNum" idx="5" sz="quarter"/>
+          </p:nvPr>
+        </p:nvSpPr>
+        <p:spPr/>
+      </p:sp>
+    </p:spTree>
+  </p:cSld>
+  <p:clrMapOvr>
+    <a:masterClrMapping/>
+  </p:clrMapOvr>
+</p:notes>
+</file>
+
+<file path=ppt/notesSlides/notesSlide17.xml><?xml version="1.0" encoding="utf-8"?>
+<p:notes xmlns:a="http://schemas.openxmlformats.org/drawingml/2006/main" xmlns:p="http://schemas.openxmlformats.org/presentationml/2006/main" xmlns:r="http://schemas.openxmlformats.org/officeDocument/2006/relationships">
+  <p:cSld>
+    <p:spTree>
+      <p:nvGrpSpPr>
+        <p:cNvPr id="1" name=""/>
+        <p:cNvGrpSpPr/>
+        <p:nvPr/>
+      </p:nvGrpSpPr>
+      <p:grpSpPr>
+        <a:xfrm>
+          <a:off x="0" y="0"/>
+          <a:ext cx="0" cy="0"/>
+          <a:chOff x="0" y="0"/>
+          <a:chExt cx="0" cy="0"/>
+        </a:xfrm>
+      </p:grpSpPr>
+      <p:sp>
+        <p:nvSpPr>
+          <p:cNvPr id="2" name="Slide Image Placeholder 1"/>
+          <p:cNvSpPr>
+            <a:spLocks noGrp="1"/>
+          </p:cNvSpPr>
+          <p:nvPr>
+            <p:ph type="sldImg" idx="2"/>
+          </p:nvPr>
+        </p:nvSpPr>
+        <p:spPr/>
+      </p:sp>
+      <p:sp>
+        <p:nvSpPr>
+          <p:cNvPr id="3" name="Notes Placeholder 2"/>
+          <p:cNvSpPr>
+            <a:spLocks noGrp="1"/>
+          </p:cNvSpPr>
+          <p:nvPr>
+            <p:ph type="body" idx="3" sz="quarter"/>
+          </p:nvPr>
+        </p:nvSpPr>
+        <p:spPr/>
+        <p:txBody>
+          <a:bodyPr/>
+          <a:lstStyle/>
+          <a:p>
+            <a:r>
+              <a:t>The line worth repeating twice.</a:t>
+            </a:r>
+          </a:p>
+          <a:p/>
+          <a:p>
+            <a:r>
+              <a:t>Run the test: swap groups, receiver looks away, guess all three.</a:t>
+            </a:r>
+          </a:p>
+          <a:p/>
+          <a:p>
+            <a:r>
+              <a:t>Then have each group name which two got confused and what would have separated</a:t>
+            </a:r>
+          </a:p>
+          <a:p>
+            <a:r>
+              <a:t>them. That confusion is the actual learning, not the successful ones.</a:t>
+            </a:r>
+          </a:p>
+        </p:txBody>
+      </p:sp>
+      <p:sp>
+        <p:nvSpPr>
+          <p:cNvPr id="4" name="Slide Number Placeholder 3"/>
+          <p:cNvSpPr>
+            <a:spLocks noGrp="1"/>
+          </p:cNvSpPr>
+          <p:nvPr>
+            <p:ph type="sldNum" idx="5" sz="quarter"/>
+          </p:nvPr>
+        </p:nvSpPr>
+        <p:spPr/>
+      </p:sp>
+    </p:spTree>
+  </p:cSld>
+  <p:clrMapOvr>
+    <a:masterClrMapping/>
+  </p:clrMapOvr>
+</p:notes>
+</file>
+
+<file path=ppt/notesSlides/notesSlide18.xml><?xml version="1.0" encoding="utf-8"?>
+<p:notes xmlns:a="http://schemas.openxmlformats.org/drawingml/2006/main" xmlns:p="http://schemas.openxmlformats.org/presentationml/2006/main" xmlns:r="http://schemas.openxmlformats.org/officeDocument/2006/relationships">
+  <p:cSld>
+    <p:spTree>
+      <p:nvGrpSpPr>
+        <p:cNvPr id="1" name=""/>
+        <p:cNvGrpSpPr/>
+        <p:nvPr/>
+      </p:nvGrpSpPr>
+      <p:grpSpPr>
+        <a:xfrm>
+          <a:off x="0" y="0"/>
+          <a:ext cx="0" cy="0"/>
+          <a:chOff x="0" y="0"/>
+          <a:chExt cx="0" cy="0"/>
+        </a:xfrm>
+      </p:grpSpPr>
+      <p:sp>
+        <p:nvSpPr>
+          <p:cNvPr id="2" name="Slide Image Placeholder 1"/>
+          <p:cNvSpPr>
+            <a:spLocks noGrp="1"/>
+          </p:cNvSpPr>
+          <p:nvPr>
+            <p:ph type="sldImg" idx="2"/>
+          </p:nvPr>
+        </p:nvSpPr>
+        <p:spPr/>
+      </p:sp>
+      <p:sp>
+        <p:nvSpPr>
+          <p:cNvPr id="3" name="Notes Placeholder 2"/>
+          <p:cNvSpPr>
+            <a:spLocks noGrp="1"/>
+          </p:cNvSpPr>
+          <p:nvPr>
+            <p:ph type="body" idx="3" sz="quarter"/>
+          </p:nvPr>
+        </p:nvSpPr>
+        <p:spPr/>
+        <p:txBody>
+          <a:bodyPr/>
+          <a:lstStyle/>
+          <a:p>
+            <a:r>
+              <a:t>Put this up while the blind tests are running so groups can check</a:t>
+            </a:r>
+          </a:p>
+          <a:p>
+            <a:r>
+              <a:t>themselves without asking you.</a:t>
+            </a:r>
+          </a:p>
+          <a:p/>
+          <a:p>
+            <a:r>
+              <a:t>The second line matters most: a device that fires continuously when held is</a:t>
+            </a:r>
+          </a:p>
+          <a:p>
+            <a:r>
+              <a:t>the single most common bug, and it is a debounce problem.</a:t>
+            </a:r>
+          </a:p>
+        </p:txBody>
+      </p:sp>
+      <p:sp>
+        <p:nvSpPr>
+          <p:cNvPr id="4" name="Slide Number Placeholder 3"/>
+          <p:cNvSpPr>
+            <a:spLocks noGrp="1"/>
+          </p:cNvSpPr>
+          <p:nvPr>
+            <p:ph type="sldNum" idx="5" sz="quarter"/>
+          </p:nvPr>
+        </p:nvSpPr>
+        <p:spPr/>
+      </p:sp>
+    </p:spTree>
+  </p:cSld>
+  <p:clrMapOvr>
+    <a:masterClrMapping/>
+  </p:clrMapOvr>
+</p:notes>
+</file>
+
+<file path=ppt/notesSlides/notesSlide19.xml><?xml version="1.0" encoding="utf-8"?>
+<p:notes xmlns:a="http://schemas.openxmlformats.org/drawingml/2006/main" xmlns:p="http://schemas.openxmlformats.org/presentationml/2006/main" xmlns:r="http://schemas.openxmlformats.org/officeDocument/2006/relationships">
+  <p:cSld>
+    <p:spTree>
+      <p:nvGrpSpPr>
+        <p:cNvPr id="1" name=""/>
+        <p:cNvGrpSpPr/>
+        <p:nvPr/>
+      </p:nvGrpSpPr>
+      <p:grpSpPr>
+        <a:xfrm>
+          <a:off x="0" y="0"/>
+          <a:ext cx="0" cy="0"/>
+          <a:chOff x="0" y="0"/>
+          <a:chExt cx="0" cy="0"/>
+        </a:xfrm>
+      </p:grpSpPr>
+      <p:sp>
+        <p:nvSpPr>
+          <p:cNvPr id="2" name="Slide Image Placeholder 1"/>
+          <p:cNvSpPr>
+            <a:spLocks noGrp="1"/>
+          </p:cNvSpPr>
+          <p:nvPr>
+            <p:ph type="sldImg" idx="2"/>
+          </p:nvPr>
+        </p:nvSpPr>
+        <p:spPr/>
+      </p:sp>
+      <p:sp>
+        <p:nvSpPr>
+          <p:cNvPr id="3" name="Notes Placeholder 2"/>
+          <p:cNvSpPr>
+            <a:spLocks noGrp="1"/>
+          </p:cNvSpPr>
+          <p:nvPr>
+            <p:ph type="body" idx="3" sz="quarter"/>
+          </p:nvPr>
+        </p:nvSpPr>
+        <p:spPr/>
+        <p:txBody>
+          <a:bodyPr/>
+          <a:lstStyle/>
+          <a:p>
+            <a:r>
+              <a:t>The closing argument. Thirty seconds.</a:t>
+            </a:r>
+          </a:p>
+          <a:p/>
+          <a:p>
+            <a:r>
+              <a:t>If they leave with only one thing, it should be the third: pick the actuator</a:t>
+            </a:r>
+          </a:p>
+          <a:p>
+            <a:r>
+              <a:t>before designing the interaction. Discovering in week 46 that the chosen one</a:t>
+            </a:r>
+          </a:p>
+          <a:p>
+            <a:r>
+              <a:t>cannot do the job is the expensive mistake this session exists to prevent.</a:t>
             </a:r>
           </a:p>
         </p:txBody>
@@ -1186,34 +1595,121 @@
           <a:lstStyle/>
           <a:p>
             <a:r>
-              <a:t>Say the full version out loud, the slide only carries the skeleton:</a:t>
+              <a:t>Fifteen seconds. It is a map, not a talk.</a:t>
             </a:r>
           </a:p>
           <a:p/>
           <a:p>
             <a:r>
-              <a:t>"You can read a datasheet. You have never held one of these. Today you put a</a:t>
-            </a:r>
-          </a:p>
-          <a:p>
-            <a:r>
-              <a:t>vibration motor against your own wrist, decide it feels cheap, and pick</a:t>
-            </a:r>
-          </a:p>
-          <a:p>
-            <a:r>
-              <a:t>something else. Better now than in week 46 with the demo three days out."</a:t>
+              <a:t>Useful because half the room arrives expecting a lecture and needs to be told</a:t>
+            </a:r>
+          </a:p>
+          <a:p>
+            <a:r>
+              <a:t>immediately that this is not one.</a:t>
+            </a:r>
+          </a:p>
+        </p:txBody>
+      </p:sp>
+      <p:sp>
+        <p:nvSpPr>
+          <p:cNvPr id="4" name="Slide Number Placeholder 3"/>
+          <p:cNvSpPr>
+            <a:spLocks noGrp="1"/>
+          </p:cNvSpPr>
+          <p:nvPr>
+            <p:ph type="sldNum" idx="5" sz="quarter"/>
+          </p:nvPr>
+        </p:nvSpPr>
+        <p:spPr/>
+      </p:sp>
+    </p:spTree>
+  </p:cSld>
+  <p:clrMapOvr>
+    <a:masterClrMapping/>
+  </p:clrMapOvr>
+</p:notes>
+</file>
+
+<file path=ppt/notesSlides/notesSlide20.xml><?xml version="1.0" encoding="utf-8"?>
+<p:notes xmlns:a="http://schemas.openxmlformats.org/drawingml/2006/main" xmlns:p="http://schemas.openxmlformats.org/presentationml/2006/main" xmlns:r="http://schemas.openxmlformats.org/officeDocument/2006/relationships">
+  <p:cSld>
+    <p:spTree>
+      <p:nvGrpSpPr>
+        <p:cNvPr id="1" name=""/>
+        <p:cNvGrpSpPr/>
+        <p:nvPr/>
+      </p:nvGrpSpPr>
+      <p:grpSpPr>
+        <a:xfrm>
+          <a:off x="0" y="0"/>
+          <a:ext cx="0" cy="0"/>
+          <a:chOff x="0" y="0"/>
+          <a:chExt cx="0" cy="0"/>
+        </a:xfrm>
+      </p:grpSpPr>
+      <p:sp>
+        <p:nvSpPr>
+          <p:cNvPr id="2" name="Slide Image Placeholder 1"/>
+          <p:cNvSpPr>
+            <a:spLocks noGrp="1"/>
+          </p:cNvSpPr>
+          <p:nvPr>
+            <p:ph type="sldImg" idx="2"/>
+          </p:nvPr>
+        </p:nvSpPr>
+        <p:spPr/>
+      </p:sp>
+      <p:sp>
+        <p:nvSpPr>
+          <p:cNvPr id="3" name="Notes Placeholder 2"/>
+          <p:cNvSpPr>
+            <a:spLocks noGrp="1"/>
+          </p:cNvSpPr>
+          <p:nvPr>
+            <p:ph type="body" idx="3" sz="quarter"/>
+          </p:nvPr>
+        </p:nvSpPr>
+        <p:spPr/>
+        <p:txBody>
+          <a:bodyPr/>
+          <a:lstStyle/>
+          <a:p>
+            <a:r>
+              <a:t>Point them at the repo. Every task sketch is commented for them, and the</a:t>
+            </a:r>
+          </a:p>
+          <a:p>
+            <a:r>
+              <a:t>bench test sketches are there too if they want to see the minimal version.</a:t>
             </a:r>
           </a:p>
           <a:p/>
           <a:p>
             <a:r>
-              <a:t>Every year projects end up on the screen and the speaker, and touch gets</a:t>
-            </a:r>
-          </a:p>
-          <a:p>
-            <a:r>
-              <a:t>designed on paper then dropped. Two minutes, then move.</a:t>
+              <a:t>Last thing to say: pick your actuator before you design the interaction, not</a:t>
+            </a:r>
+          </a:p>
+          <a:p>
+            <a:r>
+              <a:t>after. Today was so they can do that from experience rather than a datasheet.</a:t>
+            </a:r>
+          </a:p>
+          <a:p/>
+          <a:p>
+            <a:r>
+              <a:t>Pack down: everything back in the box, including the resistors. It will not all</a:t>
+            </a:r>
+          </a:p>
+          <a:p>
+            <a:r>
+              <a:t>come back.</a:t>
+            </a:r>
+          </a:p>
+          <a:p/>
+          <a:p>
+            <a:r>
+              <a:t>If anyone wants to borrow parts for the project weeks, now is when they ask.</a:t>
             </a:r>
           </a:p>
         </p:txBody>
@@ -1283,44 +1779,34 @@
           <a:lstStyle/>
           <a:p>
             <a:r>
-              <a:t>Set the shape clearly, because it is not a lecture and they will wait to be</a:t>
-            </a:r>
-          </a:p>
-          <a:p>
-            <a:r>
-              <a:t>lectured at.</a:t>
+              <a:t>Say the full version out loud, the slide only carries the skeleton:</a:t>
             </a:r>
           </a:p>
           <a:p/>
           <a:p>
             <a:r>
-              <a:t>A board each. Five tasks. Everything pre-wired. They upload, change numbers,</a:t>
-            </a:r>
-          </a:p>
-          <a:p>
-            <a:r>
-              <a:t>upload again.</a:t>
+              <a:t>"You can read a datasheet. You have never held one of these. Today you put a</a:t>
+            </a:r>
+          </a:p>
+          <a:p>
+            <a:r>
+              <a:t>vibration motor against your own wrist, decide it feels cheap, and pick</a:t>
+            </a:r>
+          </a:p>
+          <a:p>
+            <a:r>
+              <a:t>something else. Better now than in week 46 with the demo three days out."</a:t>
             </a:r>
           </a:p>
           <a:p/>
           <a:p>
             <a:r>
-              <a:t>The actuators they are NOT using sit on the benches around the room. Tell them</a:t>
-            </a:r>
-          </a:p>
-          <a:p>
-            <a:r>
-              <a:t>explicitly to go and feel those between tasks. That is the comparison that used</a:t>
-            </a:r>
-          </a:p>
-          <a:p>
-            <a:r>
-              <a:t>to be a guided tour; it now happens on their own initiative, which works better</a:t>
-            </a:r>
-          </a:p>
-          <a:p>
-            <a:r>
-              <a:t>anyway.</a:t>
+              <a:t>Every year projects end up on the screen and the speaker, and touch gets</a:t>
+            </a:r>
+          </a:p>
+          <a:p>
+            <a:r>
+              <a:t>designed on paper then dropped. Two minutes, then move.</a:t>
             </a:r>
           </a:p>
         </p:txBody>
@@ -1390,23 +1876,39 @@
           <a:lstStyle/>
           <a:p>
             <a:r>
-              <a:t>Show it, do not narrate it. Fifteen seconds.</a:t>
+              <a:t>Set the shape clearly, because it is not a lecture and they will wait to be</a:t>
+            </a:r>
+          </a:p>
+          <a:p>
+            <a:r>
+              <a:t>lectured at.</a:t>
             </a:r>
           </a:p>
           <a:p/>
           <a:p>
             <a:r>
-              <a:t>The one hard checkpoint is 0:25. Everyone should have task 01 running by then.</a:t>
-            </a:r>
-          </a:p>
-          <a:p>
-            <a:r>
-              <a:t>If someone is still fighting drivers at 0:30, pair them with a group that is</a:t>
-            </a:r>
-          </a:p>
-          <a:p>
-            <a:r>
-              <a:t>working rather than debugging it alone.</a:t>
+              <a:t>A board each. Five tasks. Everything pre-wired. They upload, change numbers,</a:t>
+            </a:r>
+          </a:p>
+          <a:p>
+            <a:r>
+              <a:t>upload again.</a:t>
+            </a:r>
+          </a:p>
+          <a:p/>
+          <a:p>
+            <a:r>
+              <a:t>The actuators they are NOT driving sit on tables around the room. Tell them</a:t>
+            </a:r>
+          </a:p>
+          <a:p>
+            <a:r>
+              <a:t>explicitly to go and pick those up between tasks. The comparison still happens,</a:t>
+            </a:r>
+          </a:p>
+          <a:p>
+            <a:r>
+              <a:t>just on their own initiative rather than on a timer.</a:t>
             </a:r>
           </a:p>
         </p:txBody>
@@ -1476,24 +1978,23 @@
           <a:lstStyle/>
           <a:p>
             <a:r>
-              <a:t>0:10. Boards out.</a:t>
+              <a:t>Show it, do not narrate it. Fifteen seconds.</a:t>
             </a:r>
           </a:p>
           <a:p/>
           <a:p>
             <a:r>
-              <a:t>Get EVERYONE through task 01 before anyone races ahead. It is the shortest and</a:t>
-            </a:r>
-          </a:p>
-          <a:p>
-            <a:r>
-              <a:t>it flushes out the setup problems: wrong board, wrong port, missing driver.</a:t>
-            </a:r>
-          </a:p>
-          <a:p/>
-          <a:p>
-            <a:r>
-              <a:t>Once task 01 runs for a pair, they can move at their own pace.</a:t>
+              <a:t>The one hard checkpoint is 0:25. Everyone should have task 01 running by then.</a:t>
+            </a:r>
+          </a:p>
+          <a:p>
+            <a:r>
+              <a:t>If someone is still fighting drivers at 0:30, pair them with a group that is</a:t>
+            </a:r>
+          </a:p>
+          <a:p>
+            <a:r>
+              <a:t>working rather than debugging it alone.</a:t>
             </a:r>
           </a:p>
         </p:txBody>
@@ -1563,40 +2064,24 @@
           <a:lstStyle/>
           <a:p>
             <a:r>
-              <a:t>Ninety seconds on this slide, no more.</a:t>
+              <a:t>0:10. Boards out.</a:t>
             </a:r>
           </a:p>
           <a:p/>
           <a:p>
             <a:r>
-              <a:t>Name the arc, it is the point: 1 to 3 are output, 4 is input, 5 is both. By</a:t>
-            </a:r>
-          </a:p>
-          <a:p>
-            <a:r>
-              <a:t>task 5 they have built a complete interaction loop, which is the shape of most</a:t>
-            </a:r>
-          </a:p>
-          <a:p>
-            <a:r>
-              <a:t>project work.</a:t>
+              <a:t>Get EVERYONE through task 01 before anyone races ahead. It is the shortest and</a:t>
+            </a:r>
+          </a:p>
+          <a:p>
+            <a:r>
+              <a:t>it flushes out the setup problems: wrong board, wrong port, missing driver.</a:t>
             </a:r>
           </a:p>
           <a:p/>
           <a:p>
             <a:r>
-              <a:t>Say clearly that nobody is expected to finish all five. Getting 01 working and</a:t>
-            </a:r>
-          </a:p>
-          <a:p>
-            <a:r>
-              <a:t>then properly playing with 02 beats rushing all of them.</a:t>
-            </a:r>
-          </a:p>
-          <a:p/>
-          <a:p>
-            <a:r>
-              <a:t>Task 05's last experiment IS the closing brief, so the work carries over.</a:t>
+              <a:t>Once task 01 runs for a pair, they can move at their own pace.</a:t>
             </a:r>
           </a:p>
         </p:txBody>
@@ -1666,61 +2151,40 @@
           <a:lstStyle/>
           <a:p>
             <a:r>
-              <a:t>Say the format once here rather than at every bench.</a:t>
+              <a:t>Ninety seconds on this slide, no more.</a:t>
             </a:r>
           </a:p>
           <a:p/>
           <a:p>
             <a:r>
-              <a:t>CHANGE ME at the top: two or three numbers, already set to something that</a:t>
-            </a:r>
-          </a:p>
-          <a:p>
-            <a:r>
-              <a:t>works. THINGS TO TRY at the bottom: four experiments, easy to hard, and the</a:t>
-            </a:r>
-          </a:p>
-          <a:p>
-            <a:r>
-              <a:t>last one usually asks for a rewrite rather than a tweak.</a:t>
+              <a:t>Name the arc, it is the point: 1 to 3 are output, 4 is input, 5 is both. By</a:t>
+            </a:r>
+          </a:p>
+          <a:p>
+            <a:r>
+              <a:t>task 5 they have built a complete interaction loop, which is the shape of most</a:t>
+            </a:r>
+          </a:p>
+          <a:p>
+            <a:r>
+              <a:t>project work.</a:t>
             </a:r>
           </a:p>
           <a:p/>
           <a:p>
             <a:r>
-              <a:t>Upload problems, in the order they will hit you:</a:t>
-            </a:r>
-          </a:p>
-          <a:p>
-            <a:r>
-              <a:t>  * wrong board or port under Tools</a:t>
-            </a:r>
-          </a:p>
-          <a:p>
-            <a:r>
-              <a:t>  * ADCTouch not installed (tasks 04 and 05)</a:t>
-            </a:r>
-          </a:p>
-          <a:p>
-            <a:r>
-              <a:t>  * solenoid task: board resets on fire means the bench supply is off</a:t>
+              <a:t>Say clearly that nobody is expected to finish all five. Getting 01 working and</a:t>
+            </a:r>
+          </a:p>
+          <a:p>
+            <a:r>
+              <a:t>then properly playing with 02 beats rushing all of them.</a:t>
             </a:r>
           </a:p>
           <a:p/>
           <a:p>
             <a:r>
-              <a:t>Write the repo URL on the whiteboard now. It gets asked for six times.</a:t>
-            </a:r>
-          </a:p>
-          <a:p/>
-          <a:p>
-            <a:r>
-              <a:t>If a task's hardware fails, utils/ has the diagnostics: pin_sweep, i2c_scanner,</a:t>
-            </a:r>
-          </a:p>
-          <a:p>
-            <a:r>
-              <a:t>analog_monitor.</a:t>
+              <a:t>Task 05's last experiment IS the closing brief, so the work carries over.</a:t>
             </a:r>
           </a:p>
         </p:txBody>
@@ -1790,72 +2254,61 @@
           <a:lstStyle/>
           <a:p>
             <a:r>
-              <a:t>Slow down here. This is the single idea most worth stealing from today, and</a:t>
-            </a:r>
-          </a:p>
-          <a:p>
-            <a:r>
-              <a:t>it is worth interrupting the room for once most people have reached task 04.</a:t>
+              <a:t>Say the format once here rather than repeating it per task.</a:t>
             </a:r>
           </a:p>
           <a:p/>
           <a:p>
             <a:r>
-              <a:t>Two things students get wrong:</a:t>
+              <a:t>CHANGE ME at the top: two or three numbers, already set to something that</a:t>
+            </a:r>
+          </a:p>
+          <a:p>
+            <a:r>
+              <a:t>works. THINGS TO TRY at the bottom: four experiments, easy to hard, and the</a:t>
+            </a:r>
+          </a:p>
+          <a:p>
+            <a:r>
+              <a:t>last one usually asks for a rewrite rather than a tweak.</a:t>
             </a:r>
           </a:p>
           <a:p/>
           <a:p>
             <a:r>
-              <a:t>1. A fixed threshold. Works in the morning, fails after lunch, because the</a:t>
-            </a:r>
-          </a:p>
-          <a:p>
-            <a:r>
-              <a:t>   reading drifts with humidity and mains hum.</a:t>
+              <a:t>Upload problems, in the order they will hit you:</a:t>
+            </a:r>
+          </a:p>
+          <a:p>
+            <a:r>
+              <a:t>  * wrong board or port under Tools</a:t>
+            </a:r>
+          </a:p>
+          <a:p>
+            <a:r>
+              <a:t>  * ADCTouch not installed (tasks 04 and 05)</a:t>
+            </a:r>
+          </a:p>
+          <a:p>
+            <a:r>
+              <a:t>  * solenoid task: board resets when it fires means its supply is off</a:t>
             </a:r>
           </a:p>
           <a:p/>
           <a:p>
             <a:r>
-              <a:t>2. Feeding the baseline buffer always. A long press then teaches the baseline</a:t>
-            </a:r>
-          </a:p>
-          <a:p>
-            <a:r>
-              <a:t>   that a finger is normal, and the touch silently stops working. The buffer</a:t>
-            </a:r>
-          </a:p>
-          <a:p>
-            <a:r>
-              <a:t>   must only learn while untouched.</a:t>
+              <a:t>Write the repo URL on the whiteboard now. It gets asked for six times.</a:t>
             </a:r>
           </a:p>
           <a:p/>
           <a:p>
             <a:r>
-              <a:t>Put the Serial Plotter on the projector. Watching the baseline wander while the</a:t>
-            </a:r>
-          </a:p>
-          <a:p>
-            <a:r>
-              <a:t>trigger line tracks it explains the whole design in ten seconds.</a:t>
-            </a:r>
-          </a:p>
-          <a:p/>
-          <a:p>
-            <a:r>
-              <a:t>For what it is worth, the rig this came from went through the same tuning: an</a:t>
-            </a:r>
-          </a:p>
-          <a:p>
-            <a:r>
-              <a:t>earlier version used 1.008 with a 50-sample baseline, the final one 1.01 with</a:t>
-            </a:r>
-          </a:p>
-          <a:p>
-            <a:r>
-              <a:t>25. Everyone tunes these.</a:t>
+              <a:t>If a task's hardware fails, utils/ has the diagnostics: pin_sweep, i2c_scanner,</a:t>
+            </a:r>
+          </a:p>
+          <a:p>
+            <a:r>
+              <a:t>analog_monitor.</a:t>
             </a:r>
           </a:p>
         </p:txBody>
@@ -1925,24 +2378,23 @@
           <a:lstStyle/>
           <a:p>
             <a:r>
-              <a:t>1:25. Pull the room back together.</a:t>
+              <a:t>Say this out loud, do not just show it. Some students will not believe</a:t>
+            </a:r>
+          </a:p>
+          <a:p>
+            <a:r>
+              <a:t>they are allowed to skip ahead or stop early unless you tell them.</a:t>
             </a:r>
           </a:p>
           <a:p/>
           <a:p>
             <a:r>
-              <a:t>One sentence per group: what surprised you. No slides, no laptops. Ten minutes.</a:t>
-            </a:r>
-          </a:p>
-          <a:p/>
-          <a:p>
-            <a:r>
-              <a:t>Expect someone to report the Peltier delay. Let that land, it is far more</a:t>
-            </a:r>
-          </a:p>
-          <a:p>
-            <a:r>
-              <a:t>persuasive from a peer than from you.</a:t>
+              <a:t>The failure mode is a pair rushing all five tasks badly instead of doing two</a:t>
+            </a:r>
+          </a:p>
+          <a:p>
+            <a:r>
+              <a:t>properly. Name that explicitly.</a:t>
             </a:r>
           </a:p>
         </p:txBody>
@@ -5151,7 +5603,7 @@
                 </a:solidFill>
                 <a:latin typeface="Arial"/>
               </a:rPr>
-              <a:t>INPUTS WORTH KNOWING ABOUT</a:t>
+              <a:t>BEFORE YOU POWER ANYTHING</a:t>
             </a:r>
           </a:p>
         </p:txBody>
@@ -5176,39 +5628,50 @@
                 <a:spcPct val="128000"/>
               </a:lnSpc>
               <a:spcAft>
-                <a:spcPts val="1400"/>
-              </a:spcAft>
-              <a:buNone/>
-            </a:pPr>
-            <a:r>
-              <a:rPr sz="1700" b="0">
-                <a:solidFill>
-                  <a:srgbClr val="595959"/>
-                </a:solidFill>
-                <a:latin typeface="Arial"/>
-              </a:rPr>
-              <a:t>One table with a sign. Wander over between tasks.</a:t>
-            </a:r>
-          </a:p>
-          <a:p>
-            <a:pPr marL="0" indent="0" algn="l">
-              <a:lnSpc>
-                <a:spcPct val="128000"/>
-              </a:lnSpc>
-              <a:spcAft>
                 <a:spcPts val="600"/>
               </a:spcAft>
               <a:buNone/>
             </a:pPr>
             <a:r>
+              <a:rPr sz="1700" b="1">
+                <a:solidFill>
+                  <a:srgbClr val="000000"/>
+                </a:solidFill>
+                <a:latin typeface="Arial"/>
+              </a:rPr>
+              <a:t>The solenoid and the Peltier both pull real current.</a:t>
+            </a:r>
+          </a:p>
+          <a:p>
+            <a:pPr marL="0" indent="0" algn="l">
+              <a:lnSpc>
+                <a:spcPct val="128000"/>
+              </a:lnSpc>
+              <a:spcAft>
+                <a:spcPts val="600"/>
+              </a:spcAft>
+              <a:buNone/>
+            </a:pPr>
+            <a:r>
               <a:rPr sz="1500" b="0">
                 <a:solidFill>
                   <a:srgbClr val="000000"/>
                 </a:solidFill>
                 <a:latin typeface="Arial"/>
               </a:rPr>
-              <a:t>• Capacitive touch. A wire. That is task 04</a:t>
-            </a:r>
+              <a:t>• They need their own supply. Ask before you rewire either.</a:t>
+            </a:r>
+          </a:p>
+          <a:p>
+            <a:pPr marL="0" indent="0" algn="l">
+              <a:lnSpc>
+                <a:spcPct val="128000"/>
+              </a:lnSpc>
+              <a:spcAft>
+                <a:spcPts val="0"/>
+              </a:spcAft>
+              <a:buNone/>
+            </a:pPr>
           </a:p>
           <a:p>
             <a:pPr marL="0" indent="0" algn="l">
@@ -5221,14 +5684,45 @@
               <a:buNone/>
             </a:pPr>
             <a:r>
+              <a:rPr sz="1700" b="1">
+                <a:solidFill>
+                  <a:srgbClr val="000000"/>
+                </a:solidFill>
+                <a:latin typeface="Arial"/>
+              </a:rPr>
+              <a:t>The Peltier needs its heatsink on. Every time.</a:t>
+            </a:r>
+          </a:p>
+          <a:p>
+            <a:pPr marL="0" indent="0" algn="l">
+              <a:lnSpc>
+                <a:spcPct val="128000"/>
+              </a:lnSpc>
+              <a:spcAft>
+                <a:spcPts val="600"/>
+              </a:spcAft>
+              <a:buNone/>
+            </a:pPr>
+            <a:r>
               <a:rPr sz="1500" b="0">
                 <a:solidFill>
                   <a:srgbClr val="000000"/>
                 </a:solidFill>
                 <a:latin typeface="Arial"/>
               </a:rPr>
-              <a:t>• Heart rate (PPG). Useless once the hand moves</a:t>
-            </a:r>
+              <a:t>• Without it the tile cooks itself in about a minute.</a:t>
+            </a:r>
+          </a:p>
+          <a:p>
+            <a:pPr marL="0" indent="0" algn="l">
+              <a:lnSpc>
+                <a:spcPct val="128000"/>
+              </a:lnSpc>
+              <a:spcAft>
+                <a:spcPts val="0"/>
+              </a:spcAft>
+              <a:buNone/>
+            </a:pPr>
           </a:p>
           <a:p>
             <a:pPr marL="0" indent="0" algn="l">
@@ -5241,73 +5735,33 @@
               <a:buNone/>
             </a:pPr>
             <a:r>
+              <a:rPr sz="1700" b="1">
+                <a:solidFill>
+                  <a:srgbClr val="000000"/>
+                </a:solidFill>
+                <a:latin typeface="Arial"/>
+              </a:rPr>
+              <a:t>Never drive a motor straight from a pin.</a:t>
+            </a:r>
+          </a:p>
+          <a:p>
+            <a:pPr marL="0" indent="0" algn="l">
+              <a:lnSpc>
+                <a:spcPct val="128000"/>
+              </a:lnSpc>
+              <a:spcAft>
+                <a:spcPts val="600"/>
+              </a:spcAft>
+              <a:buNone/>
+            </a:pPr>
+            <a:r>
               <a:rPr sz="1500" b="0">
                 <a:solidFill>
                   <a:srgbClr val="000000"/>
                 </a:solidFill>
                 <a:latin typeface="Arial"/>
               </a:rPr>
-              <a:t>• Skin conductance (GSR). Relative change only</a:t>
-            </a:r>
-          </a:p>
-          <a:p>
-            <a:pPr marL="0" indent="0" algn="l">
-              <a:lnSpc>
-                <a:spcPct val="128000"/>
-              </a:lnSpc>
-              <a:spcAft>
-                <a:spcPts val="600"/>
-              </a:spcAft>
-              <a:buNone/>
-            </a:pPr>
-            <a:r>
-              <a:rPr sz="1500" b="0">
-                <a:solidFill>
-                  <a:srgbClr val="000000"/>
-                </a:solidFill>
-                <a:latin typeface="Arial"/>
-              </a:rPr>
-              <a:t>• Flex sensor. The cheap data glove</a:t>
-            </a:r>
-          </a:p>
-          <a:p>
-            <a:pPr marL="0" indent="0" algn="l">
-              <a:lnSpc>
-                <a:spcPct val="128000"/>
-              </a:lnSpc>
-              <a:spcAft>
-                <a:spcPts val="600"/>
-              </a:spcAft>
-              <a:buNone/>
-            </a:pPr>
-            <a:r>
-              <a:rPr sz="1500" b="0">
-                <a:solidFill>
-                  <a:srgbClr val="000000"/>
-                </a:solidFill>
-                <a:latin typeface="Arial"/>
-              </a:rPr>
-              <a:t>• Pressure (FSR). Calibrate every pad</a:t>
-            </a:r>
-          </a:p>
-          <a:p>
-            <a:pPr marL="0" indent="0" algn="l">
-              <a:lnSpc>
-                <a:spcPct val="128000"/>
-              </a:lnSpc>
-              <a:spcAft>
-                <a:spcPts val="600"/>
-              </a:spcAft>
-              <a:buNone/>
-            </a:pPr>
-            <a:r>
-              <a:rPr sz="1500" b="0">
-                <a:solidFill>
-                  <a:srgbClr val="000000"/>
-                </a:solidFill>
-                <a:latin typeface="Arial"/>
-              </a:rPr>
-              <a:t>• Your own phone. No soldering at all</a:t>
+              <a:t>• 40 mA limit. The motor wants nearly twice that.</a:t>
             </a:r>
           </a:p>
         </p:txBody>
@@ -5403,7 +5857,7 @@
                 </a:solidFill>
                 <a:latin typeface="Arial"/>
               </a:rPr>
-              <a:t>TWO RIGS THAT ALREADY EXIST</a:t>
+              <a:t>THE ONE THAT SURPRISES PEOPLE</a:t>
             </a:r>
           </a:p>
         </p:txBody>
@@ -5439,7 +5893,7 @@
                 </a:solidFill>
                 <a:latin typeface="Arial"/>
               </a:rPr>
-              <a:t>Built here, by students at roughly your stage.</a:t>
+              <a:t>Touch input for the price of a wire. The thinking is where it costs you.</a:t>
             </a:r>
           </a:p>
           <a:p>
@@ -5459,8 +5913,19 @@
                 </a:solidFill>
                 <a:latin typeface="Arial"/>
               </a:rPr>
-              <a:t>Moving screen, Arduino Uno</a:t>
-            </a:r>
+              <a:t>reading &gt; baselineAverage() * 1.01</a:t>
+            </a:r>
+          </a:p>
+          <a:p>
+            <a:pPr marL="0" indent="0" algn="l">
+              <a:lnSpc>
+                <a:spcPct val="128000"/>
+              </a:lnSpc>
+              <a:spcAft>
+                <a:spcPts val="0"/>
+              </a:spcAft>
+              <a:buNone/>
+            </a:pPr>
           </a:p>
           <a:p>
             <a:pPr marL="0" indent="0" algn="l">
@@ -5473,13 +5938,33 @@
               <a:buNone/>
             </a:pPr>
             <a:r>
+              <a:rPr sz="1700" b="1">
+                <a:solidFill>
+                  <a:srgbClr val="000000"/>
+                </a:solidFill>
+                <a:latin typeface="Arial"/>
+              </a:rPr>
+              <a:t>Threshold is relative, never absolute</a:t>
+            </a:r>
+          </a:p>
+          <a:p>
+            <a:pPr marL="0" indent="0" algn="l">
+              <a:lnSpc>
+                <a:spcPct val="128000"/>
+              </a:lnSpc>
+              <a:spcAft>
+                <a:spcPts val="600"/>
+              </a:spcAft>
+              <a:buNone/>
+            </a:pPr>
+            <a:r>
               <a:rPr sz="1500" b="0">
                 <a:solidFill>
                   <a:srgbClr val="000000"/>
                 </a:solidFill>
                 <a:latin typeface="Arial"/>
               </a:rPr>
-              <a:t>• Breathes when idle. Retreats when touched</a:t>
+              <a:t>• Readings drift with humidity and mains hum</a:t>
             </a:r>
           </a:p>
           <a:p>
@@ -5499,7 +5984,7 @@
                 </a:solidFill>
                 <a:latin typeface="Arial"/>
               </a:rPr>
-              <a:t>• Easing and idle motion do the work. A dozen lines</a:t>
+              <a:t>• Fixed threshold works at 9am, fails at 1pm</a:t>
             </a:r>
           </a:p>
           <a:p>
@@ -5530,7 +6015,7 @@
                 </a:solidFill>
                 <a:latin typeface="Arial"/>
               </a:rPr>
-              <a:t>Instrumented sock, ESP32</a:t>
+              <a:t>Baseline only learns while untouched</a:t>
             </a:r>
           </a:p>
           <a:p>
@@ -5550,27 +6035,7 @@
                 </a:solidFill>
                 <a:latin typeface="Arial"/>
               </a:rPr>
-              <a:t>• Six force sensors under a foot, batched over Wi-Fi</a:t>
-            </a:r>
-          </a:p>
-          <a:p>
-            <a:pPr marL="0" indent="0" algn="l">
-              <a:lnSpc>
-                <a:spcPct val="128000"/>
-              </a:lnSpc>
-              <a:spcAft>
-                <a:spcPts val="600"/>
-              </a:spcAft>
-              <a:buNone/>
-            </a:pPr>
-            <a:r>
-              <a:rPr sz="1500" b="0">
-                <a:solidFill>
-                  <a:srgbClr val="000000"/>
-                </a:solidFill>
-                <a:latin typeface="Arial"/>
-              </a:rPr>
-              <a:t>• Calibrate per sensor. Batch your writes</a:t>
+              <a:t>• Or a long press teaches it that a finger is normal</a:t>
             </a:r>
           </a:p>
         </p:txBody>
@@ -5666,7 +6131,7 @@
                 </a:solidFill>
                 <a:latin typeface="Arial"/>
               </a:rPr>
-              <a:t>BUILD ONE SIGNAL</a:t>
+              <a:t>INPUTS, AND PRIOR ART</a:t>
             </a:r>
           </a:p>
         </p:txBody>
@@ -5762,7 +6227,7 @@
                 </a:solidFill>
                 <a:latin typeface="Arial"/>
               </a:rPr>
-              <a:t>THE BRIEF</a:t>
+              <a:t>INPUTS WORTH KNOWING ABOUT</a:t>
             </a:r>
           </a:p>
         </p:txBody>
@@ -5798,7 +6263,7 @@
                 </a:solidFill>
                 <a:latin typeface="Arial"/>
               </a:rPr>
-              <a:t>30 minutes. Not long enough to be precious about it.</a:t>
+              <a:t>One table with a sign. Wander over between tasks.</a:t>
             </a:r>
           </a:p>
           <a:p>
@@ -5812,13 +6277,13 @@
               <a:buNone/>
             </a:pPr>
             <a:r>
-              <a:rPr sz="1700" b="1">
-                <a:solidFill>
-                  <a:srgbClr val="000000"/>
-                </a:solidFill>
-                <a:latin typeface="Arial"/>
-              </a:rPr>
-              <a:t>One actuator. Three messages</a:t>
+              <a:rPr sz="1500" b="0">
+                <a:solidFill>
+                  <a:srgbClr val="000000"/>
+                </a:solidFill>
+                <a:latin typeface="Arial"/>
+              </a:rPr>
+              <a:t>• Capacitive touch. A wire. That is task 04</a:t>
             </a:r>
           </a:p>
           <a:p>
@@ -5838,19 +6303,8 @@
                 </a:solidFill>
                 <a:latin typeface="Arial"/>
               </a:rPr>
-              <a:t>• Arrived. Something wrong. Finished</a:t>
-            </a:r>
-          </a:p>
-          <a:p>
-            <a:pPr marL="0" indent="0" algn="l">
-              <a:lnSpc>
-                <a:spcPct val="128000"/>
-              </a:lnSpc>
-              <a:spcAft>
-                <a:spcPts val="0"/>
-              </a:spcAft>
-              <a:buNone/>
-            </a:pPr>
+              <a:t>• Heart rate (PPG). Useless once the hand moves</a:t>
+            </a:r>
           </a:p>
           <a:p>
             <a:pPr marL="0" indent="0" algn="l">
@@ -5863,13 +6317,13 @@
               <a:buNone/>
             </a:pPr>
             <a:r>
-              <a:rPr sz="1700" b="1">
-                <a:solidFill>
-                  <a:srgbClr val="000000"/>
-                </a:solidFill>
-                <a:latin typeface="Arial"/>
-              </a:rPr>
-              <a:t>Vary two things only</a:t>
+              <a:rPr sz="1500" b="0">
+                <a:solidFill>
+                  <a:srgbClr val="000000"/>
+                </a:solidFill>
+                <a:latin typeface="Arial"/>
+              </a:rPr>
+              <a:t>• Skin conductance (GSR). Relative change only</a:t>
             </a:r>
           </a:p>
           <a:p>
@@ -5889,7 +6343,7 @@
                 </a:solidFill>
                 <a:latin typeface="Arial"/>
               </a:rPr>
-              <a:t>• Rhythm of the pulses</a:t>
+              <a:t>• Flex sensor. The cheap data glove</a:t>
             </a:r>
           </a:p>
           <a:p>
@@ -5909,19 +6363,8 @@
                 </a:solidFill>
                 <a:latin typeface="Arial"/>
               </a:rPr>
-              <a:t>• How strong they are</a:t>
-            </a:r>
-          </a:p>
-          <a:p>
-            <a:pPr marL="0" indent="0" algn="l">
-              <a:lnSpc>
-                <a:spcPct val="128000"/>
-              </a:lnSpc>
-              <a:spcAft>
-                <a:spcPts val="0"/>
-              </a:spcAft>
-              <a:buNone/>
-            </a:pPr>
+              <a:t>• Pressure (FSR). Calibrate every pad</a:t>
+            </a:r>
           </a:p>
           <a:p>
             <a:pPr marL="0" indent="0" algn="l">
@@ -5934,33 +6377,13 @@
               <a:buNone/>
             </a:pPr>
             <a:r>
-              <a:rPr sz="1700" b="1">
-                <a:solidFill>
-                  <a:srgbClr val="000000"/>
-                </a:solidFill>
-                <a:latin typeface="Arial"/>
-              </a:rPr>
-              <a:t>Blind test: they name all three</a:t>
-            </a:r>
-          </a:p>
-          <a:p>
-            <a:pPr marL="0" indent="0" algn="l">
-              <a:lnSpc>
-                <a:spcPct val="128000"/>
-              </a:lnSpc>
-              <a:spcAft>
-                <a:spcPts val="600"/>
-              </a:spcAft>
-              <a:buNone/>
-            </a:pPr>
-            <a:r>
               <a:rPr sz="1500" b="0">
                 <a:solidFill>
                   <a:srgbClr val="000000"/>
                 </a:solidFill>
                 <a:latin typeface="Arial"/>
               </a:rPr>
-              <a:t>• Note which two got confused, and why</a:t>
+              <a:t>• Your own phone. No soldering at all</a:t>
             </a:r>
           </a:p>
         </p:txBody>
@@ -6056,7 +6479,7 @@
                 </a:solidFill>
                 <a:latin typeface="Arial"/>
               </a:rPr>
-              <a:t>THE CONSTRAINT THAT MATTERS</a:t>
+              <a:t>TWO RIGS THAT ALREADY EXIST</a:t>
             </a:r>
           </a:p>
         </p:txBody>
@@ -6081,6 +6504,26 @@
                 <a:spcPct val="128000"/>
               </a:lnSpc>
               <a:spcAft>
+                <a:spcPts val="1400"/>
+              </a:spcAft>
+              <a:buNone/>
+            </a:pPr>
+            <a:r>
+              <a:rPr sz="1700" b="0">
+                <a:solidFill>
+                  <a:srgbClr val="595959"/>
+                </a:solidFill>
+                <a:latin typeface="Arial"/>
+              </a:rPr>
+              <a:t>Built here, by students at roughly your stage.</a:t>
+            </a:r>
+          </a:p>
+          <a:p>
+            <a:pPr marL="0" indent="0" algn="l">
+              <a:lnSpc>
+                <a:spcPct val="128000"/>
+              </a:lnSpc>
+              <a:spcAft>
                 <a:spcPts val="600"/>
               </a:spcAft>
               <a:buNone/>
@@ -6092,7 +6535,47 @@
                 </a:solidFill>
                 <a:latin typeface="Arial"/>
               </a:rPr>
-              <a:t>The recipient cannot look at the device.</a:t>
+              <a:t>Moving screen, Arduino Uno</a:t>
+            </a:r>
+          </a:p>
+          <a:p>
+            <a:pPr marL="0" indent="0" algn="l">
+              <a:lnSpc>
+                <a:spcPct val="128000"/>
+              </a:lnSpc>
+              <a:spcAft>
+                <a:spcPts val="600"/>
+              </a:spcAft>
+              <a:buNone/>
+            </a:pPr>
+            <a:r>
+              <a:rPr sz="1500" b="0">
+                <a:solidFill>
+                  <a:srgbClr val="000000"/>
+                </a:solidFill>
+                <a:latin typeface="Arial"/>
+              </a:rPr>
+              <a:t>• Breathes when idle. Retreats when touched</a:t>
+            </a:r>
+          </a:p>
+          <a:p>
+            <a:pPr marL="0" indent="0" algn="l">
+              <a:lnSpc>
+                <a:spcPct val="128000"/>
+              </a:lnSpc>
+              <a:spcAft>
+                <a:spcPts val="600"/>
+              </a:spcAft>
+              <a:buNone/>
+            </a:pPr>
+            <a:r>
+              <a:rPr sz="1500" b="0">
+                <a:solidFill>
+                  <a:srgbClr val="000000"/>
+                </a:solidFill>
+                <a:latin typeface="Arial"/>
+              </a:rPr>
+              <a:t>• Easing and idle motion do the work. A dozen lines</a:t>
             </a:r>
           </a:p>
           <a:p>
@@ -6117,13 +6600,13 @@
               <a:buNone/>
             </a:pPr>
             <a:r>
-              <a:rPr sz="1700" b="0">
-                <a:solidFill>
-                  <a:srgbClr val="000000"/>
-                </a:solidFill>
-                <a:latin typeface="Arial"/>
-              </a:rPr>
-              <a:t>If it only works while someone watches a screen,</a:t>
+              <a:rPr sz="1700" b="1">
+                <a:solidFill>
+                  <a:srgbClr val="000000"/>
+                </a:solidFill>
+                <a:latin typeface="Arial"/>
+              </a:rPr>
+              <a:t>Instrumented sock, ESP32</a:t>
             </a:r>
           </a:p>
           <a:p>
@@ -6137,13 +6620,33 @@
               <a:buNone/>
             </a:pPr>
             <a:r>
-              <a:rPr sz="1700" b="0">
-                <a:solidFill>
-                  <a:srgbClr val="000000"/>
-                </a:solidFill>
-                <a:latin typeface="Arial"/>
-              </a:rPr>
-              <a:t>you built a visual interface with a motor glued to it.</a:t>
+              <a:rPr sz="1500" b="0">
+                <a:solidFill>
+                  <a:srgbClr val="000000"/>
+                </a:solidFill>
+                <a:latin typeface="Arial"/>
+              </a:rPr>
+              <a:t>• Six force sensors under a foot, batched over Wi-Fi</a:t>
+            </a:r>
+          </a:p>
+          <a:p>
+            <a:pPr marL="0" indent="0" algn="l">
+              <a:lnSpc>
+                <a:spcPct val="128000"/>
+              </a:lnSpc>
+              <a:spcAft>
+                <a:spcPts val="600"/>
+              </a:spcAft>
+              <a:buNone/>
+            </a:pPr>
+            <a:r>
+              <a:rPr sz="1500" b="0">
+                <a:solidFill>
+                  <a:srgbClr val="000000"/>
+                </a:solidFill>
+                <a:latin typeface="Arial"/>
+              </a:rPr>
+              <a:t>• Calibrate per sensor. Batch your writes</a:t>
             </a:r>
           </a:p>
         </p:txBody>
@@ -6221,6 +6724,1297 @@
             <a:spLocks noGrp="1"/>
           </p:cNvSpPr>
           <p:nvPr>
+            <p:ph type="title"/>
+          </p:nvPr>
+        </p:nvSpPr>
+        <p:spPr/>
+        <p:txBody>
+          <a:bodyPr/>
+          <a:lstStyle/>
+          <a:p>
+            <a:pPr marL="0" indent="0" algn="l">
+              <a:buNone/>
+            </a:pPr>
+            <a:r>
+              <a:rPr sz="4400" b="1">
+                <a:solidFill>
+                  <a:srgbClr val="000000"/>
+                </a:solidFill>
+                <a:latin typeface="Arial"/>
+              </a:rPr>
+              <a:t>BUILD ONE SIGNAL</a:t>
+            </a:r>
+          </a:p>
+        </p:txBody>
+      </p:sp>
+      <p:pic>
+        <p:nvPicPr>
+          <p:cNvPr id="3" name="Picture 2" descr="wordmark_dark.png"/>
+          <p:cNvPicPr>
+            <a:picLocks noChangeAspect="1"/>
+          </p:cNvPicPr>
+          <p:nvPr/>
+        </p:nvPicPr>
+        <p:blipFill>
+          <a:blip r:embed="rId2"/>
+          <a:stretch>
+            <a:fillRect/>
+          </a:stretch>
+        </p:blipFill>
+        <p:spPr>
+          <a:xfrm>
+            <a:off x="342900" y="6184900"/>
+            <a:ext cx="2070100" cy="529560"/>
+          </a:xfrm>
+          <a:prstGeom prst="rect">
+            <a:avLst/>
+          </a:prstGeom>
+        </p:spPr>
+      </p:pic>
+      <p:pic>
+        <p:nvPicPr>
+          <p:cNvPr id="4" name="Picture 3" descr="seal_dark.png"/>
+          <p:cNvPicPr>
+            <a:picLocks noChangeAspect="1"/>
+          </p:cNvPicPr>
+          <p:nvPr/>
+        </p:nvPicPr>
+        <p:blipFill>
+          <a:blip r:embed="rId3"/>
+          <a:stretch>
+            <a:fillRect/>
+          </a:stretch>
+        </p:blipFill>
+        <p:spPr>
+          <a:xfrm>
+            <a:off x="11226800" y="5969000"/>
+            <a:ext cx="713915" cy="711200"/>
+          </a:xfrm>
+          <a:prstGeom prst="rect">
+            <a:avLst/>
+          </a:prstGeom>
+        </p:spPr>
+      </p:pic>
+    </p:spTree>
+  </p:cSld>
+  <p:clrMapOvr>
+    <a:masterClrMapping/>
+  </p:clrMapOvr>
+</p:sld>
+</file>
+
+<file path=ppt/slides/slide16.xml><?xml version="1.0" encoding="utf-8"?>
+<p:sld xmlns:a="http://schemas.openxmlformats.org/drawingml/2006/main" xmlns:p="http://schemas.openxmlformats.org/presentationml/2006/main" xmlns:r="http://schemas.openxmlformats.org/officeDocument/2006/relationships">
+  <p:cSld>
+    <p:spTree>
+      <p:nvGrpSpPr>
+        <p:cNvPr id="1" name=""/>
+        <p:cNvGrpSpPr/>
+        <p:nvPr/>
+      </p:nvGrpSpPr>
+      <p:grpSpPr/>
+      <p:sp>
+        <p:nvSpPr>
+          <p:cNvPr id="2" name="Title 1"/>
+          <p:cNvSpPr>
+            <a:spLocks noGrp="1"/>
+          </p:cNvSpPr>
+          <p:nvPr>
+            <p:ph type="title"/>
+          </p:nvPr>
+        </p:nvSpPr>
+        <p:spPr/>
+        <p:txBody>
+          <a:bodyPr/>
+          <a:lstStyle/>
+          <a:p>
+            <a:pPr marL="0" indent="0" algn="l">
+              <a:buNone/>
+            </a:pPr>
+            <a:r>
+              <a:rPr sz="3200" b="1">
+                <a:solidFill>
+                  <a:srgbClr val="000000"/>
+                </a:solidFill>
+                <a:latin typeface="Arial"/>
+              </a:rPr>
+              <a:t>THE BRIEF</a:t>
+            </a:r>
+          </a:p>
+        </p:txBody>
+      </p:sp>
+      <p:sp>
+        <p:nvSpPr>
+          <p:cNvPr id="3" name="Text Placeholder 2"/>
+          <p:cNvSpPr>
+            <a:spLocks noGrp="1"/>
+          </p:cNvSpPr>
+          <p:nvPr>
+            <p:ph type="body" idx="1"/>
+          </p:nvPr>
+        </p:nvSpPr>
+        <p:spPr/>
+        <p:txBody>
+          <a:bodyPr/>
+          <a:lstStyle/>
+          <a:p>
+            <a:pPr marL="0" indent="0" algn="l">
+              <a:lnSpc>
+                <a:spcPct val="128000"/>
+              </a:lnSpc>
+              <a:spcAft>
+                <a:spcPts val="1400"/>
+              </a:spcAft>
+              <a:buNone/>
+            </a:pPr>
+            <a:r>
+              <a:rPr sz="1700" b="0">
+                <a:solidFill>
+                  <a:srgbClr val="595959"/>
+                </a:solidFill>
+                <a:latin typeface="Arial"/>
+              </a:rPr>
+              <a:t>30 minutes. Not long enough to be precious about it.</a:t>
+            </a:r>
+          </a:p>
+          <a:p>
+            <a:pPr marL="0" indent="0" algn="l">
+              <a:lnSpc>
+                <a:spcPct val="128000"/>
+              </a:lnSpc>
+              <a:spcAft>
+                <a:spcPts val="600"/>
+              </a:spcAft>
+              <a:buNone/>
+            </a:pPr>
+            <a:r>
+              <a:rPr sz="1700" b="1">
+                <a:solidFill>
+                  <a:srgbClr val="000000"/>
+                </a:solidFill>
+                <a:latin typeface="Arial"/>
+              </a:rPr>
+              <a:t>One actuator. Three messages</a:t>
+            </a:r>
+          </a:p>
+          <a:p>
+            <a:pPr marL="0" indent="0" algn="l">
+              <a:lnSpc>
+                <a:spcPct val="128000"/>
+              </a:lnSpc>
+              <a:spcAft>
+                <a:spcPts val="600"/>
+              </a:spcAft>
+              <a:buNone/>
+            </a:pPr>
+            <a:r>
+              <a:rPr sz="1500" b="0">
+                <a:solidFill>
+                  <a:srgbClr val="000000"/>
+                </a:solidFill>
+                <a:latin typeface="Arial"/>
+              </a:rPr>
+              <a:t>• Arrived. Something wrong. Finished</a:t>
+            </a:r>
+          </a:p>
+          <a:p>
+            <a:pPr marL="0" indent="0" algn="l">
+              <a:lnSpc>
+                <a:spcPct val="128000"/>
+              </a:lnSpc>
+              <a:spcAft>
+                <a:spcPts val="0"/>
+              </a:spcAft>
+              <a:buNone/>
+            </a:pPr>
+          </a:p>
+          <a:p>
+            <a:pPr marL="0" indent="0" algn="l">
+              <a:lnSpc>
+                <a:spcPct val="128000"/>
+              </a:lnSpc>
+              <a:spcAft>
+                <a:spcPts val="600"/>
+              </a:spcAft>
+              <a:buNone/>
+            </a:pPr>
+            <a:r>
+              <a:rPr sz="1700" b="1">
+                <a:solidFill>
+                  <a:srgbClr val="000000"/>
+                </a:solidFill>
+                <a:latin typeface="Arial"/>
+              </a:rPr>
+              <a:t>Vary two things only</a:t>
+            </a:r>
+          </a:p>
+          <a:p>
+            <a:pPr marL="0" indent="0" algn="l">
+              <a:lnSpc>
+                <a:spcPct val="128000"/>
+              </a:lnSpc>
+              <a:spcAft>
+                <a:spcPts val="600"/>
+              </a:spcAft>
+              <a:buNone/>
+            </a:pPr>
+            <a:r>
+              <a:rPr sz="1500" b="0">
+                <a:solidFill>
+                  <a:srgbClr val="000000"/>
+                </a:solidFill>
+                <a:latin typeface="Arial"/>
+              </a:rPr>
+              <a:t>• Rhythm of the pulses</a:t>
+            </a:r>
+          </a:p>
+          <a:p>
+            <a:pPr marL="0" indent="0" algn="l">
+              <a:lnSpc>
+                <a:spcPct val="128000"/>
+              </a:lnSpc>
+              <a:spcAft>
+                <a:spcPts val="600"/>
+              </a:spcAft>
+              <a:buNone/>
+            </a:pPr>
+            <a:r>
+              <a:rPr sz="1500" b="0">
+                <a:solidFill>
+                  <a:srgbClr val="000000"/>
+                </a:solidFill>
+                <a:latin typeface="Arial"/>
+              </a:rPr>
+              <a:t>• How strong they are</a:t>
+            </a:r>
+          </a:p>
+          <a:p>
+            <a:pPr marL="0" indent="0" algn="l">
+              <a:lnSpc>
+                <a:spcPct val="128000"/>
+              </a:lnSpc>
+              <a:spcAft>
+                <a:spcPts val="0"/>
+              </a:spcAft>
+              <a:buNone/>
+            </a:pPr>
+          </a:p>
+          <a:p>
+            <a:pPr marL="0" indent="0" algn="l">
+              <a:lnSpc>
+                <a:spcPct val="128000"/>
+              </a:lnSpc>
+              <a:spcAft>
+                <a:spcPts val="600"/>
+              </a:spcAft>
+              <a:buNone/>
+            </a:pPr>
+            <a:r>
+              <a:rPr sz="1700" b="1">
+                <a:solidFill>
+                  <a:srgbClr val="000000"/>
+                </a:solidFill>
+                <a:latin typeface="Arial"/>
+              </a:rPr>
+              <a:t>Blind test: they name all three</a:t>
+            </a:r>
+          </a:p>
+          <a:p>
+            <a:pPr marL="0" indent="0" algn="l">
+              <a:lnSpc>
+                <a:spcPct val="128000"/>
+              </a:lnSpc>
+              <a:spcAft>
+                <a:spcPts val="600"/>
+              </a:spcAft>
+              <a:buNone/>
+            </a:pPr>
+            <a:r>
+              <a:rPr sz="1500" b="0">
+                <a:solidFill>
+                  <a:srgbClr val="000000"/>
+                </a:solidFill>
+                <a:latin typeface="Arial"/>
+              </a:rPr>
+              <a:t>• Note which two got confused, and why</a:t>
+            </a:r>
+          </a:p>
+        </p:txBody>
+      </p:sp>
+      <p:pic>
+        <p:nvPicPr>
+          <p:cNvPr id="4" name="Picture 3" descr="wordmark_dark.png"/>
+          <p:cNvPicPr>
+            <a:picLocks noChangeAspect="1"/>
+          </p:cNvPicPr>
+          <p:nvPr/>
+        </p:nvPicPr>
+        <p:blipFill>
+          <a:blip r:embed="rId2"/>
+          <a:stretch>
+            <a:fillRect/>
+          </a:stretch>
+        </p:blipFill>
+        <p:spPr>
+          <a:xfrm>
+            <a:off x="342900" y="6184900"/>
+            <a:ext cx="2070100" cy="529560"/>
+          </a:xfrm>
+          <a:prstGeom prst="rect">
+            <a:avLst/>
+          </a:prstGeom>
+        </p:spPr>
+      </p:pic>
+      <p:pic>
+        <p:nvPicPr>
+          <p:cNvPr id="5" name="Picture 4" descr="seal_dark.png"/>
+          <p:cNvPicPr>
+            <a:picLocks noChangeAspect="1"/>
+          </p:cNvPicPr>
+          <p:nvPr/>
+        </p:nvPicPr>
+        <p:blipFill>
+          <a:blip r:embed="rId3"/>
+          <a:stretch>
+            <a:fillRect/>
+          </a:stretch>
+        </p:blipFill>
+        <p:spPr>
+          <a:xfrm>
+            <a:off x="11226800" y="5969000"/>
+            <a:ext cx="713915" cy="711200"/>
+          </a:xfrm>
+          <a:prstGeom prst="rect">
+            <a:avLst/>
+          </a:prstGeom>
+        </p:spPr>
+      </p:pic>
+    </p:spTree>
+  </p:cSld>
+  <p:clrMapOvr>
+    <a:masterClrMapping/>
+  </p:clrMapOvr>
+</p:sld>
+</file>
+
+<file path=ppt/slides/slide17.xml><?xml version="1.0" encoding="utf-8"?>
+<p:sld xmlns:a="http://schemas.openxmlformats.org/drawingml/2006/main" xmlns:p="http://schemas.openxmlformats.org/presentationml/2006/main" xmlns:r="http://schemas.openxmlformats.org/officeDocument/2006/relationships">
+  <p:cSld>
+    <p:spTree>
+      <p:nvGrpSpPr>
+        <p:cNvPr id="1" name=""/>
+        <p:cNvGrpSpPr/>
+        <p:nvPr/>
+      </p:nvGrpSpPr>
+      <p:grpSpPr/>
+      <p:sp>
+        <p:nvSpPr>
+          <p:cNvPr id="2" name="Title 1"/>
+          <p:cNvSpPr>
+            <a:spLocks noGrp="1"/>
+          </p:cNvSpPr>
+          <p:nvPr>
+            <p:ph type="title"/>
+          </p:nvPr>
+        </p:nvSpPr>
+        <p:spPr/>
+        <p:txBody>
+          <a:bodyPr/>
+          <a:lstStyle/>
+          <a:p>
+            <a:pPr marL="0" indent="0" algn="l">
+              <a:buNone/>
+            </a:pPr>
+            <a:r>
+              <a:rPr sz="3200" b="1">
+                <a:solidFill>
+                  <a:srgbClr val="000000"/>
+                </a:solidFill>
+                <a:latin typeface="Arial"/>
+              </a:rPr>
+              <a:t>THE CONSTRAINT THAT MATTERS</a:t>
+            </a:r>
+          </a:p>
+        </p:txBody>
+      </p:sp>
+      <p:sp>
+        <p:nvSpPr>
+          <p:cNvPr id="3" name="Text Placeholder 2"/>
+          <p:cNvSpPr>
+            <a:spLocks noGrp="1"/>
+          </p:cNvSpPr>
+          <p:nvPr>
+            <p:ph type="body" idx="1"/>
+          </p:nvPr>
+        </p:nvSpPr>
+        <p:spPr/>
+        <p:txBody>
+          <a:bodyPr/>
+          <a:lstStyle/>
+          <a:p>
+            <a:pPr marL="0" indent="0" algn="l">
+              <a:lnSpc>
+                <a:spcPct val="128000"/>
+              </a:lnSpc>
+              <a:spcAft>
+                <a:spcPts val="600"/>
+              </a:spcAft>
+              <a:buNone/>
+            </a:pPr>
+            <a:r>
+              <a:rPr sz="1700" b="1">
+                <a:solidFill>
+                  <a:srgbClr val="000000"/>
+                </a:solidFill>
+                <a:latin typeface="Arial"/>
+              </a:rPr>
+              <a:t>The recipient cannot look at the device.</a:t>
+            </a:r>
+          </a:p>
+          <a:p>
+            <a:pPr marL="0" indent="0" algn="l">
+              <a:lnSpc>
+                <a:spcPct val="128000"/>
+              </a:lnSpc>
+              <a:spcAft>
+                <a:spcPts val="0"/>
+              </a:spcAft>
+              <a:buNone/>
+            </a:pPr>
+          </a:p>
+          <a:p>
+            <a:pPr marL="0" indent="0" algn="l">
+              <a:lnSpc>
+                <a:spcPct val="128000"/>
+              </a:lnSpc>
+              <a:spcAft>
+                <a:spcPts val="600"/>
+              </a:spcAft>
+              <a:buNone/>
+            </a:pPr>
+            <a:r>
+              <a:rPr sz="1700" b="0">
+                <a:solidFill>
+                  <a:srgbClr val="000000"/>
+                </a:solidFill>
+                <a:latin typeface="Arial"/>
+              </a:rPr>
+              <a:t>If it only works while someone watches a screen,</a:t>
+            </a:r>
+          </a:p>
+          <a:p>
+            <a:pPr marL="0" indent="0" algn="l">
+              <a:lnSpc>
+                <a:spcPct val="128000"/>
+              </a:lnSpc>
+              <a:spcAft>
+                <a:spcPts val="600"/>
+              </a:spcAft>
+              <a:buNone/>
+            </a:pPr>
+            <a:r>
+              <a:rPr sz="1700" b="0">
+                <a:solidFill>
+                  <a:srgbClr val="000000"/>
+                </a:solidFill>
+                <a:latin typeface="Arial"/>
+              </a:rPr>
+              <a:t>you built a visual interface with a motor glued to it.</a:t>
+            </a:r>
+          </a:p>
+        </p:txBody>
+      </p:sp>
+      <p:pic>
+        <p:nvPicPr>
+          <p:cNvPr id="4" name="Picture 3" descr="wordmark_dark.png"/>
+          <p:cNvPicPr>
+            <a:picLocks noChangeAspect="1"/>
+          </p:cNvPicPr>
+          <p:nvPr/>
+        </p:nvPicPr>
+        <p:blipFill>
+          <a:blip r:embed="rId2"/>
+          <a:stretch>
+            <a:fillRect/>
+          </a:stretch>
+        </p:blipFill>
+        <p:spPr>
+          <a:xfrm>
+            <a:off x="342900" y="6184900"/>
+            <a:ext cx="2070100" cy="529560"/>
+          </a:xfrm>
+          <a:prstGeom prst="rect">
+            <a:avLst/>
+          </a:prstGeom>
+        </p:spPr>
+      </p:pic>
+      <p:pic>
+        <p:nvPicPr>
+          <p:cNvPr id="5" name="Picture 4" descr="seal_dark.png"/>
+          <p:cNvPicPr>
+            <a:picLocks noChangeAspect="1"/>
+          </p:cNvPicPr>
+          <p:nvPr/>
+        </p:nvPicPr>
+        <p:blipFill>
+          <a:blip r:embed="rId3"/>
+          <a:stretch>
+            <a:fillRect/>
+          </a:stretch>
+        </p:blipFill>
+        <p:spPr>
+          <a:xfrm>
+            <a:off x="11226800" y="5969000"/>
+            <a:ext cx="713915" cy="711200"/>
+          </a:xfrm>
+          <a:prstGeom prst="rect">
+            <a:avLst/>
+          </a:prstGeom>
+        </p:spPr>
+      </p:pic>
+    </p:spTree>
+  </p:cSld>
+  <p:clrMapOvr>
+    <a:masterClrMapping/>
+  </p:clrMapOvr>
+</p:sld>
+</file>
+
+<file path=ppt/slides/slide18.xml><?xml version="1.0" encoding="utf-8"?>
+<p:sld xmlns:a="http://schemas.openxmlformats.org/drawingml/2006/main" xmlns:p="http://schemas.openxmlformats.org/presentationml/2006/main" xmlns:r="http://schemas.openxmlformats.org/officeDocument/2006/relationships">
+  <p:cSld>
+    <p:spTree>
+      <p:nvGrpSpPr>
+        <p:cNvPr id="1" name=""/>
+        <p:cNvGrpSpPr/>
+        <p:nvPr/>
+      </p:nvGrpSpPr>
+      <p:grpSpPr/>
+      <p:sp>
+        <p:nvSpPr>
+          <p:cNvPr id="2" name="Title 1"/>
+          <p:cNvSpPr>
+            <a:spLocks noGrp="1"/>
+          </p:cNvSpPr>
+          <p:nvPr>
+            <p:ph type="title"/>
+          </p:nvPr>
+        </p:nvSpPr>
+        <p:spPr/>
+        <p:txBody>
+          <a:bodyPr/>
+          <a:lstStyle/>
+          <a:p>
+            <a:pPr marL="0" indent="0" algn="l">
+              <a:buNone/>
+            </a:pPr>
+            <a:r>
+              <a:rPr sz="3200" b="1">
+                <a:solidFill>
+                  <a:srgbClr val="000000"/>
+                </a:solidFill>
+                <a:latin typeface="Arial"/>
+              </a:rPr>
+              <a:t>TEST IT</a:t>
+            </a:r>
+          </a:p>
+        </p:txBody>
+      </p:sp>
+      <p:sp>
+        <p:nvSpPr>
+          <p:cNvPr id="3" name="Text Placeholder 2"/>
+          <p:cNvSpPr>
+            <a:spLocks noGrp="1"/>
+          </p:cNvSpPr>
+          <p:nvPr>
+            <p:ph type="body" idx="1"/>
+          </p:nvPr>
+        </p:nvSpPr>
+        <p:spPr/>
+        <p:txBody>
+          <a:bodyPr/>
+          <a:lstStyle/>
+          <a:p>
+            <a:pPr marL="0" indent="0" algn="l">
+              <a:lnSpc>
+                <a:spcPct val="128000"/>
+              </a:lnSpc>
+              <a:spcAft>
+                <a:spcPts val="1400"/>
+              </a:spcAft>
+              <a:buNone/>
+            </a:pPr>
+            <a:r>
+              <a:rPr sz="1700" b="0">
+                <a:solidFill>
+                  <a:srgbClr val="595959"/>
+                </a:solidFill>
+                <a:latin typeface="Arial"/>
+              </a:rPr>
+              <a:t>Hand your device to another group with the screen turned away.</a:t>
+            </a:r>
+          </a:p>
+          <a:p>
+            <a:pPr marL="0" indent="0" algn="l">
+              <a:lnSpc>
+                <a:spcPct val="128000"/>
+              </a:lnSpc>
+              <a:spcAft>
+                <a:spcPts val="600"/>
+              </a:spcAft>
+              <a:buNone/>
+            </a:pPr>
+            <a:r>
+              <a:rPr sz="1500" b="0">
+                <a:solidFill>
+                  <a:srgbClr val="000000"/>
+                </a:solidFill>
+                <a:latin typeface="Arial"/>
+              </a:rPr>
+              <a:t>• They can tell all three messages apart.</a:t>
+            </a:r>
+          </a:p>
+          <a:p>
+            <a:pPr marL="0" indent="0" algn="l">
+              <a:lnSpc>
+                <a:spcPct val="128000"/>
+              </a:lnSpc>
+              <a:spcAft>
+                <a:spcPts val="600"/>
+              </a:spcAft>
+              <a:buNone/>
+            </a:pPr>
+            <a:r>
+              <a:rPr sz="1500" b="0">
+                <a:solidFill>
+                  <a:srgbClr val="000000"/>
+                </a:solidFill>
+                <a:latin typeface="Arial"/>
+              </a:rPr>
+              <a:t>• It does not fire continuously when held.</a:t>
+            </a:r>
+          </a:p>
+          <a:p>
+            <a:pPr marL="0" indent="0" algn="l">
+              <a:lnSpc>
+                <a:spcPct val="128000"/>
+              </a:lnSpc>
+              <a:spcAft>
+                <a:spcPts val="600"/>
+              </a:spcAft>
+              <a:buNone/>
+            </a:pPr>
+            <a:r>
+              <a:rPr sz="1500" b="0">
+                <a:solidFill>
+                  <a:srgbClr val="000000"/>
+                </a:solidFill>
+                <a:latin typeface="Arial"/>
+              </a:rPr>
+              <a:t>• You know which two got confused, and what would have separated them.</a:t>
+            </a:r>
+          </a:p>
+          <a:p>
+            <a:pPr marL="0" indent="0" algn="l">
+              <a:lnSpc>
+                <a:spcPct val="128000"/>
+              </a:lnSpc>
+              <a:spcAft>
+                <a:spcPts val="600"/>
+              </a:spcAft>
+              <a:buNone/>
+            </a:pPr>
+            <a:r>
+              <a:rPr sz="1500" b="0">
+                <a:solidFill>
+                  <a:srgbClr val="000000"/>
+                </a:solidFill>
+                <a:latin typeface="Arial"/>
+              </a:rPr>
+              <a:t>• It still works when they are not looking at it.</a:t>
+            </a:r>
+          </a:p>
+        </p:txBody>
+      </p:sp>
+      <p:pic>
+        <p:nvPicPr>
+          <p:cNvPr id="4" name="Picture 3" descr="wordmark_dark.png"/>
+          <p:cNvPicPr>
+            <a:picLocks noChangeAspect="1"/>
+          </p:cNvPicPr>
+          <p:nvPr/>
+        </p:nvPicPr>
+        <p:blipFill>
+          <a:blip r:embed="rId2"/>
+          <a:stretch>
+            <a:fillRect/>
+          </a:stretch>
+        </p:blipFill>
+        <p:spPr>
+          <a:xfrm>
+            <a:off x="342900" y="6184900"/>
+            <a:ext cx="2070100" cy="529560"/>
+          </a:xfrm>
+          <a:prstGeom prst="rect">
+            <a:avLst/>
+          </a:prstGeom>
+        </p:spPr>
+      </p:pic>
+      <p:pic>
+        <p:nvPicPr>
+          <p:cNvPr id="5" name="Picture 4" descr="seal_dark.png"/>
+          <p:cNvPicPr>
+            <a:picLocks noChangeAspect="1"/>
+          </p:cNvPicPr>
+          <p:nvPr/>
+        </p:nvPicPr>
+        <p:blipFill>
+          <a:blip r:embed="rId3"/>
+          <a:stretch>
+            <a:fillRect/>
+          </a:stretch>
+        </p:blipFill>
+        <p:spPr>
+          <a:xfrm>
+            <a:off x="11226800" y="5969000"/>
+            <a:ext cx="713915" cy="711200"/>
+          </a:xfrm>
+          <a:prstGeom prst="rect">
+            <a:avLst/>
+          </a:prstGeom>
+        </p:spPr>
+      </p:pic>
+    </p:spTree>
+  </p:cSld>
+  <p:clrMapOvr>
+    <a:masterClrMapping/>
+  </p:clrMapOvr>
+</p:sld>
+</file>
+
+<file path=ppt/slides/slide19.xml><?xml version="1.0" encoding="utf-8"?>
+<p:sld xmlns:a="http://schemas.openxmlformats.org/drawingml/2006/main" xmlns:p="http://schemas.openxmlformats.org/presentationml/2006/main" xmlns:r="http://schemas.openxmlformats.org/officeDocument/2006/relationships">
+  <p:cSld>
+    <p:spTree>
+      <p:nvGrpSpPr>
+        <p:cNvPr id="1" name=""/>
+        <p:cNvGrpSpPr/>
+        <p:nvPr/>
+      </p:nvGrpSpPr>
+      <p:grpSpPr/>
+      <p:sp>
+        <p:nvSpPr>
+          <p:cNvPr id="2" name="Title 1"/>
+          <p:cNvSpPr>
+            <a:spLocks noGrp="1"/>
+          </p:cNvSpPr>
+          <p:nvPr>
+            <p:ph type="title"/>
+          </p:nvPr>
+        </p:nvSpPr>
+        <p:spPr/>
+        <p:txBody>
+          <a:bodyPr/>
+          <a:lstStyle/>
+          <a:p>
+            <a:pPr marL="0" indent="0" algn="l">
+              <a:buNone/>
+            </a:pPr>
+            <a:r>
+              <a:rPr sz="3200" b="1">
+                <a:solidFill>
+                  <a:srgbClr val="000000"/>
+                </a:solidFill>
+                <a:latin typeface="Arial"/>
+              </a:rPr>
+              <a:t>WHAT YOU ACTUALLY LEARN</a:t>
+            </a:r>
+          </a:p>
+        </p:txBody>
+      </p:sp>
+      <p:sp>
+        <p:nvSpPr>
+          <p:cNvPr id="3" name="Text Placeholder 2"/>
+          <p:cNvSpPr>
+            <a:spLocks noGrp="1"/>
+          </p:cNvSpPr>
+          <p:nvPr>
+            <p:ph type="body" idx="1"/>
+          </p:nvPr>
+        </p:nvSpPr>
+        <p:spPr/>
+        <p:txBody>
+          <a:bodyPr/>
+          <a:lstStyle/>
+          <a:p>
+            <a:pPr marL="0" indent="0" algn="l">
+              <a:lnSpc>
+                <a:spcPct val="128000"/>
+              </a:lnSpc>
+              <a:spcAft>
+                <a:spcPts val="1400"/>
+              </a:spcAft>
+              <a:buNone/>
+            </a:pPr>
+            <a:r>
+              <a:rPr sz="1700" b="0">
+                <a:solidFill>
+                  <a:srgbClr val="595959"/>
+                </a:solidFill>
+                <a:latin typeface="Arial"/>
+              </a:rPr>
+              <a:t>Three things you cannot get from a datasheet.</a:t>
+            </a:r>
+          </a:p>
+          <a:p>
+            <a:pPr marL="0" indent="0" algn="l">
+              <a:lnSpc>
+                <a:spcPct val="128000"/>
+              </a:lnSpc>
+              <a:spcAft>
+                <a:spcPts val="600"/>
+              </a:spcAft>
+              <a:buNone/>
+            </a:pPr>
+            <a:r>
+              <a:rPr sz="1700" b="1">
+                <a:solidFill>
+                  <a:srgbClr val="000000"/>
+                </a:solidFill>
+                <a:latin typeface="Arial"/>
+              </a:rPr>
+              <a:t>What things feel like</a:t>
+            </a:r>
+          </a:p>
+          <a:p>
+            <a:pPr marL="0" indent="0" algn="l">
+              <a:lnSpc>
+                <a:spcPct val="128000"/>
+              </a:lnSpc>
+              <a:spcAft>
+                <a:spcPts val="600"/>
+              </a:spcAft>
+              <a:buNone/>
+            </a:pPr>
+            <a:r>
+              <a:rPr sz="1500" b="0">
+                <a:solidFill>
+                  <a:srgbClr val="000000"/>
+                </a:solidFill>
+                <a:latin typeface="Arial"/>
+              </a:rPr>
+              <a:t>• A motor is a nudge. A solenoid is a knock. A Peltier is slow.</a:t>
+            </a:r>
+          </a:p>
+          <a:p>
+            <a:pPr marL="0" indent="0" algn="l">
+              <a:lnSpc>
+                <a:spcPct val="128000"/>
+              </a:lnSpc>
+              <a:spcAft>
+                <a:spcPts val="0"/>
+              </a:spcAft>
+              <a:buNone/>
+            </a:pPr>
+          </a:p>
+          <a:p>
+            <a:pPr marL="0" indent="0" algn="l">
+              <a:lnSpc>
+                <a:spcPct val="128000"/>
+              </a:lnSpc>
+              <a:spcAft>
+                <a:spcPts val="600"/>
+              </a:spcAft>
+              <a:buNone/>
+            </a:pPr>
+            <a:r>
+              <a:rPr sz="1700" b="1">
+                <a:solidFill>
+                  <a:srgbClr val="000000"/>
+                </a:solidFill>
+                <a:latin typeface="Arial"/>
+              </a:rPr>
+              <a:t>How to drive one</a:t>
+            </a:r>
+          </a:p>
+          <a:p>
+            <a:pPr marL="0" indent="0" algn="l">
+              <a:lnSpc>
+                <a:spcPct val="128000"/>
+              </a:lnSpc>
+              <a:spcAft>
+                <a:spcPts val="600"/>
+              </a:spcAft>
+              <a:buNone/>
+            </a:pPr>
+            <a:r>
+              <a:rPr sz="1500" b="0">
+                <a:solidFill>
+                  <a:srgbClr val="000000"/>
+                </a:solidFill>
+                <a:latin typeface="Arial"/>
+              </a:rPr>
+              <a:t>• PWM, direction, debouncing, and why a motor never goes straight to a pin.</a:t>
+            </a:r>
+          </a:p>
+          <a:p>
+            <a:pPr marL="0" indent="0" algn="l">
+              <a:lnSpc>
+                <a:spcPct val="128000"/>
+              </a:lnSpc>
+              <a:spcAft>
+                <a:spcPts val="0"/>
+              </a:spcAft>
+              <a:buNone/>
+            </a:pPr>
+          </a:p>
+          <a:p>
+            <a:pPr marL="0" indent="0" algn="l">
+              <a:lnSpc>
+                <a:spcPct val="128000"/>
+              </a:lnSpc>
+              <a:spcAft>
+                <a:spcPts val="600"/>
+              </a:spcAft>
+              <a:buNone/>
+            </a:pPr>
+            <a:r>
+              <a:rPr sz="1700" b="1">
+                <a:solidFill>
+                  <a:srgbClr val="000000"/>
+                </a:solidFill>
+                <a:latin typeface="Arial"/>
+              </a:rPr>
+              <a:t>What to pick</a:t>
+            </a:r>
+          </a:p>
+          <a:p>
+            <a:pPr marL="0" indent="0" algn="l">
+              <a:lnSpc>
+                <a:spcPct val="128000"/>
+              </a:lnSpc>
+              <a:spcAft>
+                <a:spcPts val="600"/>
+              </a:spcAft>
+              <a:buNone/>
+            </a:pPr>
+            <a:r>
+              <a:rPr sz="1500" b="0">
+                <a:solidFill>
+                  <a:srgbClr val="000000"/>
+                </a:solidFill>
+                <a:latin typeface="Arial"/>
+              </a:rPr>
+              <a:t>• Choosing the actuator before designing the interaction, not in week 46.</a:t>
+            </a:r>
+          </a:p>
+        </p:txBody>
+      </p:sp>
+      <p:pic>
+        <p:nvPicPr>
+          <p:cNvPr id="4" name="Picture 3" descr="wordmark_dark.png"/>
+          <p:cNvPicPr>
+            <a:picLocks noChangeAspect="1"/>
+          </p:cNvPicPr>
+          <p:nvPr/>
+        </p:nvPicPr>
+        <p:blipFill>
+          <a:blip r:embed="rId2"/>
+          <a:stretch>
+            <a:fillRect/>
+          </a:stretch>
+        </p:blipFill>
+        <p:spPr>
+          <a:xfrm>
+            <a:off x="342900" y="6184900"/>
+            <a:ext cx="2070100" cy="529560"/>
+          </a:xfrm>
+          <a:prstGeom prst="rect">
+            <a:avLst/>
+          </a:prstGeom>
+        </p:spPr>
+      </p:pic>
+      <p:pic>
+        <p:nvPicPr>
+          <p:cNvPr id="5" name="Picture 4" descr="seal_dark.png"/>
+          <p:cNvPicPr>
+            <a:picLocks noChangeAspect="1"/>
+          </p:cNvPicPr>
+          <p:nvPr/>
+        </p:nvPicPr>
+        <p:blipFill>
+          <a:blip r:embed="rId3"/>
+          <a:stretch>
+            <a:fillRect/>
+          </a:stretch>
+        </p:blipFill>
+        <p:spPr>
+          <a:xfrm>
+            <a:off x="11226800" y="5969000"/>
+            <a:ext cx="713915" cy="711200"/>
+          </a:xfrm>
+          <a:prstGeom prst="rect">
+            <a:avLst/>
+          </a:prstGeom>
+        </p:spPr>
+      </p:pic>
+    </p:spTree>
+  </p:cSld>
+  <p:clrMapOvr>
+    <a:masterClrMapping/>
+  </p:clrMapOvr>
+</p:sld>
+</file>
+
+<file path=ppt/slides/slide2.xml><?xml version="1.0" encoding="utf-8"?>
+<p:sld xmlns:a="http://schemas.openxmlformats.org/drawingml/2006/main" xmlns:p="http://schemas.openxmlformats.org/presentationml/2006/main" xmlns:r="http://schemas.openxmlformats.org/officeDocument/2006/relationships">
+  <p:cSld>
+    <p:spTree>
+      <p:nvGrpSpPr>
+        <p:cNvPr id="1" name=""/>
+        <p:cNvGrpSpPr/>
+        <p:nvPr/>
+      </p:nvGrpSpPr>
+      <p:grpSpPr/>
+      <p:sp>
+        <p:nvSpPr>
+          <p:cNvPr id="2" name="Title 1"/>
+          <p:cNvSpPr>
+            <a:spLocks noGrp="1"/>
+          </p:cNvSpPr>
+          <p:nvPr>
+            <p:ph type="title"/>
+          </p:nvPr>
+        </p:nvSpPr>
+        <p:spPr/>
+        <p:txBody>
+          <a:bodyPr/>
+          <a:lstStyle/>
+          <a:p>
+            <a:pPr marL="0" indent="0" algn="l">
+              <a:buNone/>
+            </a:pPr>
+            <a:r>
+              <a:rPr sz="3200" b="1">
+                <a:solidFill>
+                  <a:srgbClr val="000000"/>
+                </a:solidFill>
+                <a:latin typeface="Arial"/>
+              </a:rPr>
+              <a:t>TLDR</a:t>
+            </a:r>
+          </a:p>
+        </p:txBody>
+      </p:sp>
+      <p:sp>
+        <p:nvSpPr>
+          <p:cNvPr id="3" name="Text Placeholder 2"/>
+          <p:cNvSpPr>
+            <a:spLocks noGrp="1"/>
+          </p:cNvSpPr>
+          <p:nvPr>
+            <p:ph type="body" idx="1"/>
+          </p:nvPr>
+        </p:nvSpPr>
+        <p:spPr/>
+        <p:txBody>
+          <a:bodyPr/>
+          <a:lstStyle/>
+          <a:p>
+            <a:pPr marL="0" indent="0" algn="l">
+              <a:lnSpc>
+                <a:spcPct val="128000"/>
+              </a:lnSpc>
+              <a:spcAft>
+                <a:spcPts val="1400"/>
+              </a:spcAft>
+              <a:buNone/>
+            </a:pPr>
+            <a:r>
+              <a:rPr sz="1700" b="0">
+                <a:solidFill>
+                  <a:srgbClr val="595959"/>
+                </a:solidFill>
+                <a:latin typeface="Arial"/>
+              </a:rPr>
+              <a:t>Two hours finding out what actuators feel like, and leaving able to drive one from your own code.</a:t>
+            </a:r>
+          </a:p>
+          <a:p>
+            <a:pPr marL="0" indent="0" algn="l">
+              <a:lnSpc>
+                <a:spcPct val="128000"/>
+              </a:lnSpc>
+              <a:spcAft>
+                <a:spcPts val="600"/>
+              </a:spcAft>
+              <a:buNone/>
+            </a:pPr>
+            <a:r>
+              <a:rPr sz="1700" b="0">
+                <a:solidFill>
+                  <a:srgbClr val="000000"/>
+                </a:solidFill>
+                <a:latin typeface="Arial"/>
+              </a:rPr>
+              <a:t>Get a board and run task 01. Something spins.</a:t>
+            </a:r>
+          </a:p>
+          <a:p>
+            <a:pPr marL="0" indent="0" algn="l">
+              <a:lnSpc>
+                <a:spcPct val="128000"/>
+              </a:lnSpc>
+              <a:spcAft>
+                <a:spcPts val="600"/>
+              </a:spcAft>
+              <a:buNone/>
+            </a:pPr>
+            <a:r>
+              <a:rPr sz="1700" b="0">
+                <a:solidFill>
+                  <a:srgbClr val="000000"/>
+                </a:solidFill>
+                <a:latin typeface="Arial"/>
+              </a:rPr>
+              <a:t>Change two numbers, upload again. That loop is the workshop.</a:t>
+            </a:r>
+          </a:p>
+          <a:p>
+            <a:pPr marL="0" indent="0" algn="l">
+              <a:lnSpc>
+                <a:spcPct val="128000"/>
+              </a:lnSpc>
+              <a:spcAft>
+                <a:spcPts val="600"/>
+              </a:spcAft>
+              <a:buNone/>
+            </a:pPr>
+            <a:r>
+              <a:rPr sz="1700" b="0">
+                <a:solidFill>
+                  <a:srgbClr val="000000"/>
+                </a:solidFill>
+                <a:latin typeface="Arial"/>
+              </a:rPr>
+              <a:t>Pick up the actuators you are not driving.</a:t>
+            </a:r>
+          </a:p>
+          <a:p>
+            <a:pPr marL="0" indent="0" algn="l">
+              <a:lnSpc>
+                <a:spcPct val="128000"/>
+              </a:lnSpc>
+              <a:spcAft>
+                <a:spcPts val="600"/>
+              </a:spcAft>
+              <a:buNone/>
+            </a:pPr>
+            <a:r>
+              <a:rPr sz="1700" b="0">
+                <a:solidFill>
+                  <a:srgbClr val="000000"/>
+                </a:solidFill>
+                <a:latin typeface="Arial"/>
+              </a:rPr>
+              <a:t>Work through as many of the five tasks as you get to.</a:t>
+            </a:r>
+          </a:p>
+          <a:p>
+            <a:pPr marL="0" indent="0" algn="l">
+              <a:lnSpc>
+                <a:spcPct val="128000"/>
+              </a:lnSpc>
+              <a:spcAft>
+                <a:spcPts val="600"/>
+              </a:spcAft>
+              <a:buNone/>
+            </a:pPr>
+            <a:r>
+              <a:rPr sz="1700" b="0">
+                <a:solidFill>
+                  <a:srgbClr val="000000"/>
+                </a:solidFill>
+                <a:latin typeface="Arial"/>
+              </a:rPr>
+              <a:t>Build one signal someone else can read without looking.</a:t>
+            </a:r>
+          </a:p>
+        </p:txBody>
+      </p:sp>
+      <p:pic>
+        <p:nvPicPr>
+          <p:cNvPr id="4" name="Picture 3" descr="wordmark_dark.png"/>
+          <p:cNvPicPr>
+            <a:picLocks noChangeAspect="1"/>
+          </p:cNvPicPr>
+          <p:nvPr/>
+        </p:nvPicPr>
+        <p:blipFill>
+          <a:blip r:embed="rId2"/>
+          <a:stretch>
+            <a:fillRect/>
+          </a:stretch>
+        </p:blipFill>
+        <p:spPr>
+          <a:xfrm>
+            <a:off x="342900" y="6184900"/>
+            <a:ext cx="2070100" cy="529560"/>
+          </a:xfrm>
+          <a:prstGeom prst="rect">
+            <a:avLst/>
+          </a:prstGeom>
+        </p:spPr>
+      </p:pic>
+      <p:pic>
+        <p:nvPicPr>
+          <p:cNvPr id="5" name="Picture 4" descr="seal_dark.png"/>
+          <p:cNvPicPr>
+            <a:picLocks noChangeAspect="1"/>
+          </p:cNvPicPr>
+          <p:nvPr/>
+        </p:nvPicPr>
+        <p:blipFill>
+          <a:blip r:embed="rId3"/>
+          <a:stretch>
+            <a:fillRect/>
+          </a:stretch>
+        </p:blipFill>
+        <p:spPr>
+          <a:xfrm>
+            <a:off x="11226800" y="5969000"/>
+            <a:ext cx="713915" cy="711200"/>
+          </a:xfrm>
+          <a:prstGeom prst="rect">
+            <a:avLst/>
+          </a:prstGeom>
+        </p:spPr>
+      </p:pic>
+    </p:spTree>
+  </p:cSld>
+  <p:clrMapOvr>
+    <a:masterClrMapping/>
+  </p:clrMapOvr>
+</p:sld>
+</file>
+
+<file path=ppt/slides/slide20.xml><?xml version="1.0" encoding="utf-8"?>
+<p:sld xmlns:a="http://schemas.openxmlformats.org/drawingml/2006/main" xmlns:p="http://schemas.openxmlformats.org/presentationml/2006/main" xmlns:r="http://schemas.openxmlformats.org/officeDocument/2006/relationships">
+  <p:cSld>
+    <p:spTree>
+      <p:nvGrpSpPr>
+        <p:cNvPr id="1" name=""/>
+        <p:cNvGrpSpPr/>
+        <p:nvPr/>
+      </p:nvGrpSpPr>
+      <p:grpSpPr/>
+      <p:sp>
+        <p:nvSpPr>
+          <p:cNvPr id="2" name="Title 1"/>
+          <p:cNvSpPr>
+            <a:spLocks noGrp="1"/>
+          </p:cNvSpPr>
+          <p:nvPr>
             <p:ph type="ctrTitle"/>
           </p:nvPr>
         </p:nvSpPr>
@@ -6330,249 +8124,6 @@
 </p:sld>
 </file>
 
-<file path=ppt/slides/slide2.xml><?xml version="1.0" encoding="utf-8"?>
-<p:sld xmlns:a="http://schemas.openxmlformats.org/drawingml/2006/main" xmlns:p="http://schemas.openxmlformats.org/presentationml/2006/main" xmlns:r="http://schemas.openxmlformats.org/officeDocument/2006/relationships">
-  <p:cSld>
-    <p:spTree>
-      <p:nvGrpSpPr>
-        <p:cNvPr id="1" name=""/>
-        <p:cNvGrpSpPr/>
-        <p:nvPr/>
-      </p:nvGrpSpPr>
-      <p:grpSpPr/>
-      <p:sp>
-        <p:nvSpPr>
-          <p:cNvPr id="2" name="Title 1"/>
-          <p:cNvSpPr>
-            <a:spLocks noGrp="1"/>
-          </p:cNvSpPr>
-          <p:nvPr>
-            <p:ph type="title"/>
-          </p:nvPr>
-        </p:nvSpPr>
-        <p:spPr/>
-        <p:txBody>
-          <a:bodyPr/>
-          <a:lstStyle/>
-          <a:p>
-            <a:pPr marL="0" indent="0" algn="l">
-              <a:buNone/>
-            </a:pPr>
-            <a:r>
-              <a:rPr sz="3200" b="1">
-                <a:solidFill>
-                  <a:srgbClr val="000000"/>
-                </a:solidFill>
-                <a:latin typeface="Arial"/>
-              </a:rPr>
-              <a:t>WHY WE ARE HERE</a:t>
-            </a:r>
-          </a:p>
-        </p:txBody>
-      </p:sp>
-      <p:sp>
-        <p:nvSpPr>
-          <p:cNvPr id="3" name="Text Placeholder 2"/>
-          <p:cNvSpPr>
-            <a:spLocks noGrp="1"/>
-          </p:cNvSpPr>
-          <p:nvPr>
-            <p:ph type="body" idx="1"/>
-          </p:nvPr>
-        </p:nvSpPr>
-        <p:spPr/>
-        <p:txBody>
-          <a:bodyPr/>
-          <a:lstStyle/>
-          <a:p>
-            <a:pPr marL="0" indent="0" algn="l">
-              <a:lnSpc>
-                <a:spcPct val="128000"/>
-              </a:lnSpc>
-              <a:spcAft>
-                <a:spcPts val="1400"/>
-              </a:spcAft>
-              <a:buNone/>
-            </a:pPr>
-            <a:r>
-              <a:rPr sz="1700" b="0">
-                <a:solidFill>
-                  <a:srgbClr val="595959"/>
-                </a:solidFill>
-                <a:latin typeface="Arial"/>
-              </a:rPr>
-              <a:t>You can read a datasheet. You have never held one of these.</a:t>
-            </a:r>
-          </a:p>
-          <a:p>
-            <a:pPr marL="0" indent="0" algn="l">
-              <a:lnSpc>
-                <a:spcPct val="128000"/>
-              </a:lnSpc>
-              <a:spcAft>
-                <a:spcPts val="600"/>
-              </a:spcAft>
-              <a:buNone/>
-            </a:pPr>
-            <a:r>
-              <a:rPr sz="1700" b="0">
-                <a:solidFill>
-                  <a:srgbClr val="000000"/>
-                </a:solidFill>
-                <a:latin typeface="Arial"/>
-              </a:rPr>
-              <a:t>Most projects end up on the screen and the speaker</a:t>
-            </a:r>
-          </a:p>
-          <a:p>
-            <a:pPr marL="0" indent="0" algn="l">
-              <a:lnSpc>
-                <a:spcPct val="128000"/>
-              </a:lnSpc>
-              <a:spcAft>
-                <a:spcPts val="600"/>
-              </a:spcAft>
-              <a:buNone/>
-            </a:pPr>
-            <a:r>
-              <a:rPr sz="1500" b="0">
-                <a:solidFill>
-                  <a:srgbClr val="000000"/>
-                </a:solidFill>
-                <a:latin typeface="Arial"/>
-              </a:rPr>
-              <a:t>• Not because touch was wrong</a:t>
-            </a:r>
-          </a:p>
-          <a:p>
-            <a:pPr marL="0" indent="0" algn="l">
-              <a:lnSpc>
-                <a:spcPct val="128000"/>
-              </a:lnSpc>
-              <a:spcAft>
-                <a:spcPts val="600"/>
-              </a:spcAft>
-              <a:buNone/>
-            </a:pPr>
-            <a:r>
-              <a:rPr sz="1500" b="0">
-                <a:solidFill>
-                  <a:srgbClr val="000000"/>
-                </a:solidFill>
-                <a:latin typeface="Arial"/>
-              </a:rPr>
-              <a:t>• Because nobody knew a coin motor costs 12 kr</a:t>
-            </a:r>
-          </a:p>
-          <a:p>
-            <a:pPr marL="0" indent="0" algn="l">
-              <a:lnSpc>
-                <a:spcPct val="128000"/>
-              </a:lnSpc>
-              <a:spcAft>
-                <a:spcPts val="0"/>
-              </a:spcAft>
-              <a:buNone/>
-            </a:pPr>
-          </a:p>
-          <a:p>
-            <a:pPr marL="0" indent="0" algn="l">
-              <a:lnSpc>
-                <a:spcPct val="128000"/>
-              </a:lnSpc>
-              <a:spcAft>
-                <a:spcPts val="600"/>
-              </a:spcAft>
-              <a:buNone/>
-            </a:pPr>
-            <a:r>
-              <a:rPr sz="1700" b="1">
-                <a:solidFill>
-                  <a:srgbClr val="000000"/>
-                </a:solidFill>
-                <a:latin typeface="Arial"/>
-              </a:rPr>
-              <a:t>Today: decide it feels cheap, pick something else</a:t>
-            </a:r>
-          </a:p>
-          <a:p>
-            <a:pPr marL="0" indent="0" algn="l">
-              <a:lnSpc>
-                <a:spcPct val="128000"/>
-              </a:lnSpc>
-              <a:spcAft>
-                <a:spcPts val="600"/>
-              </a:spcAft>
-              <a:buNone/>
-            </a:pPr>
-            <a:r>
-              <a:rPr sz="1500" b="0">
-                <a:solidFill>
-                  <a:srgbClr val="000000"/>
-                </a:solidFill>
-                <a:latin typeface="Arial"/>
-              </a:rPr>
-              <a:t>• Better now than in week 46</a:t>
-            </a:r>
-          </a:p>
-        </p:txBody>
-      </p:sp>
-      <p:pic>
-        <p:nvPicPr>
-          <p:cNvPr id="4" name="Picture 3" descr="wordmark_dark.png"/>
-          <p:cNvPicPr>
-            <a:picLocks noChangeAspect="1"/>
-          </p:cNvPicPr>
-          <p:nvPr/>
-        </p:nvPicPr>
-        <p:blipFill>
-          <a:blip r:embed="rId2"/>
-          <a:stretch>
-            <a:fillRect/>
-          </a:stretch>
-        </p:blipFill>
-        <p:spPr>
-          <a:xfrm>
-            <a:off x="342900" y="6184900"/>
-            <a:ext cx="2070100" cy="529560"/>
-          </a:xfrm>
-          <a:prstGeom prst="rect">
-            <a:avLst/>
-          </a:prstGeom>
-        </p:spPr>
-      </p:pic>
-      <p:pic>
-        <p:nvPicPr>
-          <p:cNvPr id="5" name="Picture 4" descr="seal_dark.png"/>
-          <p:cNvPicPr>
-            <a:picLocks noChangeAspect="1"/>
-          </p:cNvPicPr>
-          <p:nvPr/>
-        </p:nvPicPr>
-        <p:blipFill>
-          <a:blip r:embed="rId3"/>
-          <a:stretch>
-            <a:fillRect/>
-          </a:stretch>
-        </p:blipFill>
-        <p:spPr>
-          <a:xfrm>
-            <a:off x="11226800" y="5969000"/>
-            <a:ext cx="713915" cy="711200"/>
-          </a:xfrm>
-          <a:prstGeom prst="rect">
-            <a:avLst/>
-          </a:prstGeom>
-        </p:spPr>
-      </p:pic>
-    </p:spTree>
-  </p:cSld>
-  <p:clrMapOvr>
-    <a:masterClrMapping/>
-  </p:clrMapOvr>
-</p:sld>
-</file>
-
 <file path=ppt/slides/slide3.xml><?xml version="1.0" encoding="utf-8"?>
 <p:sld xmlns:a="http://schemas.openxmlformats.org/drawingml/2006/main" xmlns:p="http://schemas.openxmlformats.org/presentationml/2006/main" xmlns:r="http://schemas.openxmlformats.org/officeDocument/2006/relationships">
   <p:cSld>
@@ -6608,7 +8159,7 @@
                 </a:solidFill>
                 <a:latin typeface="Arial"/>
               </a:rPr>
-              <a:t>HOW TODAY WORKS</a:t>
+              <a:t>WHY WE ARE HERE</a:t>
             </a:r>
           </a:p>
         </p:txBody>
@@ -6633,18 +8184,109 @@
                 <a:spcPct val="128000"/>
               </a:lnSpc>
               <a:spcAft>
+                <a:spcPts val="1400"/>
+              </a:spcAft>
+              <a:buNone/>
+            </a:pPr>
+            <a:r>
+              <a:rPr sz="1700" b="0">
+                <a:solidFill>
+                  <a:srgbClr val="595959"/>
+                </a:solidFill>
+                <a:latin typeface="Arial"/>
+              </a:rPr>
+              <a:t>You can read a datasheet. You have never held one of these.</a:t>
+            </a:r>
+          </a:p>
+          <a:p>
+            <a:pPr marL="0" indent="0" algn="l">
+              <a:lnSpc>
+                <a:spcPct val="128000"/>
+              </a:lnSpc>
+              <a:spcAft>
                 <a:spcPts val="600"/>
               </a:spcAft>
               <a:buNone/>
             </a:pPr>
             <a:r>
+              <a:rPr sz="1700" b="0">
+                <a:solidFill>
+                  <a:srgbClr val="000000"/>
+                </a:solidFill>
+                <a:latin typeface="Arial"/>
+              </a:rPr>
+              <a:t>Most projects end up on the screen and the speaker</a:t>
+            </a:r>
+          </a:p>
+          <a:p>
+            <a:pPr marL="0" indent="0" algn="l">
+              <a:lnSpc>
+                <a:spcPct val="128000"/>
+              </a:lnSpc>
+              <a:spcAft>
+                <a:spcPts val="600"/>
+              </a:spcAft>
+              <a:buNone/>
+            </a:pPr>
+            <a:r>
+              <a:rPr sz="1500" b="0">
+                <a:solidFill>
+                  <a:srgbClr val="000000"/>
+                </a:solidFill>
+                <a:latin typeface="Arial"/>
+              </a:rPr>
+              <a:t>• Not because touch was wrong</a:t>
+            </a:r>
+          </a:p>
+          <a:p>
+            <a:pPr marL="0" indent="0" algn="l">
+              <a:lnSpc>
+                <a:spcPct val="128000"/>
+              </a:lnSpc>
+              <a:spcAft>
+                <a:spcPts val="600"/>
+              </a:spcAft>
+              <a:buNone/>
+            </a:pPr>
+            <a:r>
+              <a:rPr sz="1500" b="0">
+                <a:solidFill>
+                  <a:srgbClr val="000000"/>
+                </a:solidFill>
+                <a:latin typeface="Arial"/>
+              </a:rPr>
+              <a:t>• Because nobody knew a coin motor costs 12 kr</a:t>
+            </a:r>
+          </a:p>
+          <a:p>
+            <a:pPr marL="0" indent="0" algn="l">
+              <a:lnSpc>
+                <a:spcPct val="128000"/>
+              </a:lnSpc>
+              <a:spcAft>
+                <a:spcPts val="0"/>
+              </a:spcAft>
+              <a:buNone/>
+            </a:pPr>
+          </a:p>
+          <a:p>
+            <a:pPr marL="0" indent="0" algn="l">
+              <a:lnSpc>
+                <a:spcPct val="128000"/>
+              </a:lnSpc>
+              <a:spcAft>
+                <a:spcPts val="600"/>
+              </a:spcAft>
+              <a:buNone/>
+            </a:pPr>
+            <a:r>
               <a:rPr sz="1700" b="1">
                 <a:solidFill>
                   <a:srgbClr val="000000"/>
                 </a:solidFill>
                 <a:latin typeface="Arial"/>
               </a:rPr>
-              <a:t>A board each, five tasks, everything pre-wired</a:t>
+              <a:t>Today: decide it feels cheap, pick something else</a:t>
             </a:r>
           </a:p>
           <a:p>
@@ -6664,129 +8306,7 @@
                 </a:solidFill>
                 <a:latin typeface="Arial"/>
               </a:rPr>
-              <a:t>• Upload, change two numbers, upload again</a:t>
-            </a:r>
-          </a:p>
-          <a:p>
-            <a:pPr marL="0" indent="0" algn="l">
-              <a:lnSpc>
-                <a:spcPct val="128000"/>
-              </a:lnSpc>
-              <a:spcAft>
-                <a:spcPts val="600"/>
-              </a:spcAft>
-              <a:buNone/>
-            </a:pPr>
-            <a:r>
-              <a:rPr sz="1500" b="0">
-                <a:solidFill>
-                  <a:srgbClr val="000000"/>
-                </a:solidFill>
-                <a:latin typeface="Arial"/>
-              </a:rPr>
-              <a:t>• You wire nothing today</a:t>
-            </a:r>
-          </a:p>
-          <a:p>
-            <a:pPr marL="0" indent="0" algn="l">
-              <a:lnSpc>
-                <a:spcPct val="128000"/>
-              </a:lnSpc>
-              <a:spcAft>
-                <a:spcPts val="0"/>
-              </a:spcAft>
-              <a:buNone/>
-            </a:pPr>
-          </a:p>
-          <a:p>
-            <a:pPr marL="0" indent="0" algn="l">
-              <a:lnSpc>
-                <a:spcPct val="128000"/>
-              </a:lnSpc>
-              <a:spcAft>
-                <a:spcPts val="600"/>
-              </a:spcAft>
-              <a:buNone/>
-            </a:pPr>
-            <a:r>
-              <a:rPr sz="1700" b="1">
-                <a:solidFill>
-                  <a:srgbClr val="000000"/>
-                </a:solidFill>
-                <a:latin typeface="Arial"/>
-              </a:rPr>
-              <a:t>Actuators are on the benches around you</a:t>
-            </a:r>
-          </a:p>
-          <a:p>
-            <a:pPr marL="0" indent="0" algn="l">
-              <a:lnSpc>
-                <a:spcPct val="128000"/>
-              </a:lnSpc>
-              <a:spcAft>
-                <a:spcPts val="600"/>
-              </a:spcAft>
-              <a:buNone/>
-            </a:pPr>
-            <a:r>
-              <a:rPr sz="1500" b="0">
-                <a:solidFill>
-                  <a:srgbClr val="000000"/>
-                </a:solidFill>
-                <a:latin typeface="Arial"/>
-              </a:rPr>
-              <a:t>• Go and feel the ones your task does not use</a:t>
-            </a:r>
-          </a:p>
-          <a:p>
-            <a:pPr marL="0" indent="0" algn="l">
-              <a:lnSpc>
-                <a:spcPct val="128000"/>
-              </a:lnSpc>
-              <a:spcAft>
-                <a:spcPts val="0"/>
-              </a:spcAft>
-              <a:buNone/>
-            </a:pPr>
-          </a:p>
-          <a:p>
-            <a:pPr marL="0" indent="0" algn="l">
-              <a:lnSpc>
-                <a:spcPct val="128000"/>
-              </a:lnSpc>
-              <a:spcAft>
-                <a:spcPts val="600"/>
-              </a:spcAft>
-              <a:buNone/>
-            </a:pPr>
-            <a:r>
-              <a:rPr sz="1700" b="1">
-                <a:solidFill>
-                  <a:srgbClr val="000000"/>
-                </a:solidFill>
-                <a:latin typeface="Arial"/>
-              </a:rPr>
-              <a:t>Finish by building one signal</a:t>
-            </a:r>
-          </a:p>
-          <a:p>
-            <a:pPr marL="0" indent="0" algn="l">
-              <a:lnSpc>
-                <a:spcPct val="128000"/>
-              </a:lnSpc>
-              <a:spcAft>
-                <a:spcPts val="600"/>
-              </a:spcAft>
-              <a:buNone/>
-            </a:pPr>
-            <a:r>
-              <a:rPr sz="1500" b="0">
-                <a:solidFill>
-                  <a:srgbClr val="000000"/>
-                </a:solidFill>
-                <a:latin typeface="Arial"/>
-              </a:rPr>
-              <a:t>• Someone else has to read it</a:t>
+              <a:t>• Better now than in week 46</a:t>
             </a:r>
           </a:p>
         </p:txBody>
@@ -6882,7 +8402,7 @@
                 </a:solidFill>
                 <a:latin typeface="Arial"/>
               </a:rPr>
-              <a:t>RUN SHEET</a:t>
+              <a:t>HOW TODAY WORKS</a:t>
             </a:r>
           </a:p>
         </p:txBody>
@@ -6907,138 +8427,160 @@
                 <a:spcPct val="128000"/>
               </a:lnSpc>
               <a:spcAft>
-                <a:spcPts val="1600"/>
+                <a:spcPts val="600"/>
+              </a:spcAft>
+              <a:buNone/>
+            </a:pPr>
+            <a:r>
+              <a:rPr sz="1700" b="1">
+                <a:solidFill>
+                  <a:srgbClr val="000000"/>
+                </a:solidFill>
+                <a:latin typeface="Arial"/>
+              </a:rPr>
+              <a:t>A board each, five tasks, everything pre-wired</a:t>
+            </a:r>
+          </a:p>
+          <a:p>
+            <a:pPr marL="0" indent="0" algn="l">
+              <a:lnSpc>
+                <a:spcPct val="128000"/>
+              </a:lnSpc>
+              <a:spcAft>
+                <a:spcPts val="600"/>
               </a:spcAft>
               <a:buNone/>
             </a:pPr>
             <a:r>
               <a:rPr sz="1500" b="0">
                 <a:solidFill>
-                  <a:srgbClr val="595959"/>
-                </a:solidFill>
-                <a:latin typeface="Arial"/>
-              </a:rPr>
-              <a:t>Times are offsets from the start. The only hard checkpoint is 0:25: everyone has task 01 running.</a:t>
-            </a:r>
-          </a:p>
-          <a:p>
-            <a:pPr marL="0" indent="0" algn="l">
-              <a:lnSpc>
-                <a:spcPct val="128000"/>
-              </a:lnSpc>
-              <a:spcAft>
-                <a:spcPts val="1200"/>
-              </a:spcAft>
-              <a:buNone/>
-            </a:pPr>
-            <a:r>
-              <a:rPr sz="1400" b="0">
-                <a:solidFill>
-                  <a:srgbClr val="000000"/>
-                </a:solidFill>
-                <a:latin typeface="Consolas"/>
-              </a:rPr>
-              <a:t>0:00     10 min    Two motors, same message. Which felt urgent?</a:t>
-            </a:r>
-          </a:p>
-          <a:p>
-            <a:pPr marL="0" indent="0" algn="l">
-              <a:lnSpc>
-                <a:spcPct val="128000"/>
-              </a:lnSpc>
-              <a:spcAft>
-                <a:spcPts val="1200"/>
-              </a:spcAft>
-              <a:buNone/>
-            </a:pPr>
-            <a:r>
-              <a:rPr sz="1400" b="0">
-                <a:solidFill>
-                  <a:srgbClr val="000000"/>
-                </a:solidFill>
-                <a:latin typeface="Consolas"/>
-              </a:rPr>
-              <a:t>0:10     15 min    Boards out, task 01 running for everyone</a:t>
-            </a:r>
-          </a:p>
-          <a:p>
-            <a:pPr marL="0" indent="0" algn="l">
-              <a:lnSpc>
-                <a:spcPct val="128000"/>
-              </a:lnSpc>
-              <a:spcAft>
-                <a:spcPts val="1200"/>
-              </a:spcAft>
-              <a:buNone/>
-            </a:pPr>
-            <a:r>
-              <a:rPr sz="1400" b="0">
-                <a:solidFill>
-                  <a:srgbClr val="000000"/>
-                </a:solidFill>
-                <a:latin typeface="Consolas"/>
-              </a:rPr>
-              <a:t>0:25     60 min    Tasks 02 to 05, at your own pace</a:t>
-            </a:r>
-          </a:p>
-          <a:p>
-            <a:pPr marL="0" indent="0" algn="l">
-              <a:lnSpc>
-                <a:spcPct val="128000"/>
-              </a:lnSpc>
-              <a:spcAft>
-                <a:spcPts val="1200"/>
-              </a:spcAft>
-              <a:buNone/>
-            </a:pPr>
-            <a:r>
-              <a:rPr sz="1400" b="0">
-                <a:solidFill>
-                  <a:srgbClr val="000000"/>
-                </a:solidFill>
-                <a:latin typeface="Consolas"/>
-              </a:rPr>
-              <a:t>1:25     10 min    Round-the-room: what surprised you</a:t>
-            </a:r>
-          </a:p>
-          <a:p>
-            <a:pPr marL="0" indent="0" algn="l">
-              <a:lnSpc>
-                <a:spcPct val="128000"/>
-              </a:lnSpc>
-              <a:spcAft>
-                <a:spcPts val="1200"/>
-              </a:spcAft>
-              <a:buNone/>
-            </a:pPr>
-            <a:r>
-              <a:rPr sz="1400" b="0">
-                <a:solidFill>
-                  <a:srgbClr val="000000"/>
-                </a:solidFill>
-                <a:latin typeface="Consolas"/>
-              </a:rPr>
-              <a:t>1:35     20 min    Blind test on task 05</a:t>
-            </a:r>
-          </a:p>
-          <a:p>
-            <a:pPr marL="0" indent="0" algn="l">
-              <a:lnSpc>
-                <a:spcPct val="128000"/>
-              </a:lnSpc>
-              <a:spcAft>
-                <a:spcPts val="1200"/>
-              </a:spcAft>
-              <a:buNone/>
-            </a:pPr>
-            <a:r>
-              <a:rPr sz="1400" b="0">
-                <a:solidFill>
-                  <a:srgbClr val="000000"/>
-                </a:solidFill>
-                <a:latin typeface="Consolas"/>
-              </a:rPr>
-              <a:t>1:55      5 min    Pack down</a:t>
+                  <a:srgbClr val="000000"/>
+                </a:solidFill>
+                <a:latin typeface="Arial"/>
+              </a:rPr>
+              <a:t>• Upload, change two numbers, upload again</a:t>
+            </a:r>
+          </a:p>
+          <a:p>
+            <a:pPr marL="0" indent="0" algn="l">
+              <a:lnSpc>
+                <a:spcPct val="128000"/>
+              </a:lnSpc>
+              <a:spcAft>
+                <a:spcPts val="600"/>
+              </a:spcAft>
+              <a:buNone/>
+            </a:pPr>
+            <a:r>
+              <a:rPr sz="1500" b="0">
+                <a:solidFill>
+                  <a:srgbClr val="000000"/>
+                </a:solidFill>
+                <a:latin typeface="Arial"/>
+              </a:rPr>
+              <a:t>• You wire nothing today</a:t>
+            </a:r>
+          </a:p>
+          <a:p>
+            <a:pPr marL="0" indent="0" algn="l">
+              <a:lnSpc>
+                <a:spcPct val="128000"/>
+              </a:lnSpc>
+              <a:spcAft>
+                <a:spcPts val="0"/>
+              </a:spcAft>
+              <a:buNone/>
+            </a:pPr>
+          </a:p>
+          <a:p>
+            <a:pPr marL="0" indent="0" algn="l">
+              <a:lnSpc>
+                <a:spcPct val="128000"/>
+              </a:lnSpc>
+              <a:spcAft>
+                <a:spcPts val="600"/>
+              </a:spcAft>
+              <a:buNone/>
+            </a:pPr>
+            <a:r>
+              <a:rPr sz="1700" b="1">
+                <a:solidFill>
+                  <a:srgbClr val="000000"/>
+                </a:solidFill>
+                <a:latin typeface="Arial"/>
+              </a:rPr>
+              <a:t>Actuators are on the tables around you</a:t>
+            </a:r>
+          </a:p>
+          <a:p>
+            <a:pPr marL="0" indent="0" algn="l">
+              <a:lnSpc>
+                <a:spcPct val="128000"/>
+              </a:lnSpc>
+              <a:spcAft>
+                <a:spcPts val="600"/>
+              </a:spcAft>
+              <a:buNone/>
+            </a:pPr>
+            <a:r>
+              <a:rPr sz="1500" b="0">
+                <a:solidFill>
+                  <a:srgbClr val="000000"/>
+                </a:solidFill>
+                <a:latin typeface="Arial"/>
+              </a:rPr>
+              <a:t>• Go and feel the ones your task does not use</a:t>
+            </a:r>
+          </a:p>
+          <a:p>
+            <a:pPr marL="0" indent="0" algn="l">
+              <a:lnSpc>
+                <a:spcPct val="128000"/>
+              </a:lnSpc>
+              <a:spcAft>
+                <a:spcPts val="0"/>
+              </a:spcAft>
+              <a:buNone/>
+            </a:pPr>
+          </a:p>
+          <a:p>
+            <a:pPr marL="0" indent="0" algn="l">
+              <a:lnSpc>
+                <a:spcPct val="128000"/>
+              </a:lnSpc>
+              <a:spcAft>
+                <a:spcPts val="600"/>
+              </a:spcAft>
+              <a:buNone/>
+            </a:pPr>
+            <a:r>
+              <a:rPr sz="1700" b="1">
+                <a:solidFill>
+                  <a:srgbClr val="000000"/>
+                </a:solidFill>
+                <a:latin typeface="Arial"/>
+              </a:rPr>
+              <a:t>Finish by building one signal</a:t>
+            </a:r>
+          </a:p>
+          <a:p>
+            <a:pPr marL="0" indent="0" algn="l">
+              <a:lnSpc>
+                <a:spcPct val="128000"/>
+              </a:lnSpc>
+              <a:spcAft>
+                <a:spcPts val="600"/>
+              </a:spcAft>
+              <a:buNone/>
+            </a:pPr>
+            <a:r>
+              <a:rPr sz="1500" b="0">
+                <a:solidFill>
+                  <a:srgbClr val="000000"/>
+                </a:solidFill>
+                <a:latin typeface="Arial"/>
+              </a:rPr>
+              <a:t>• Someone else has to read it</a:t>
             </a:r>
           </a:p>
         </p:txBody>
@@ -7128,6 +8670,258 @@
               <a:buNone/>
             </a:pPr>
             <a:r>
+              <a:rPr sz="3200" b="1">
+                <a:solidFill>
+                  <a:srgbClr val="000000"/>
+                </a:solidFill>
+                <a:latin typeface="Arial"/>
+              </a:rPr>
+              <a:t>RUN SHEET</a:t>
+            </a:r>
+          </a:p>
+        </p:txBody>
+      </p:sp>
+      <p:sp>
+        <p:nvSpPr>
+          <p:cNvPr id="3" name="Text Placeholder 2"/>
+          <p:cNvSpPr>
+            <a:spLocks noGrp="1"/>
+          </p:cNvSpPr>
+          <p:nvPr>
+            <p:ph type="body" idx="1"/>
+          </p:nvPr>
+        </p:nvSpPr>
+        <p:spPr/>
+        <p:txBody>
+          <a:bodyPr/>
+          <a:lstStyle/>
+          <a:p>
+            <a:pPr marL="0" indent="0" algn="l">
+              <a:lnSpc>
+                <a:spcPct val="128000"/>
+              </a:lnSpc>
+              <a:spcAft>
+                <a:spcPts val="1600"/>
+              </a:spcAft>
+              <a:buNone/>
+            </a:pPr>
+            <a:r>
+              <a:rPr sz="1500" b="0">
+                <a:solidFill>
+                  <a:srgbClr val="595959"/>
+                </a:solidFill>
+                <a:latin typeface="Arial"/>
+              </a:rPr>
+              <a:t>Times are offsets from the start. The only hard checkpoint is 0:25: everyone has task 01 running.</a:t>
+            </a:r>
+          </a:p>
+          <a:p>
+            <a:pPr marL="0" indent="0" algn="l">
+              <a:lnSpc>
+                <a:spcPct val="128000"/>
+              </a:lnSpc>
+              <a:spcAft>
+                <a:spcPts val="1200"/>
+              </a:spcAft>
+              <a:buNone/>
+            </a:pPr>
+            <a:r>
+              <a:rPr sz="1400" b="0">
+                <a:solidFill>
+                  <a:srgbClr val="000000"/>
+                </a:solidFill>
+                <a:latin typeface="Consolas"/>
+              </a:rPr>
+              <a:t>0:00     10 min    Two motors, same message. Which felt urgent?</a:t>
+            </a:r>
+          </a:p>
+          <a:p>
+            <a:pPr marL="0" indent="0" algn="l">
+              <a:lnSpc>
+                <a:spcPct val="128000"/>
+              </a:lnSpc>
+              <a:spcAft>
+                <a:spcPts val="1200"/>
+              </a:spcAft>
+              <a:buNone/>
+            </a:pPr>
+            <a:r>
+              <a:rPr sz="1400" b="0">
+                <a:solidFill>
+                  <a:srgbClr val="000000"/>
+                </a:solidFill>
+                <a:latin typeface="Consolas"/>
+              </a:rPr>
+              <a:t>0:10     15 min    Boards out, task 01 running for everyone</a:t>
+            </a:r>
+          </a:p>
+          <a:p>
+            <a:pPr marL="0" indent="0" algn="l">
+              <a:lnSpc>
+                <a:spcPct val="128000"/>
+              </a:lnSpc>
+              <a:spcAft>
+                <a:spcPts val="1200"/>
+              </a:spcAft>
+              <a:buNone/>
+            </a:pPr>
+            <a:r>
+              <a:rPr sz="1400" b="0">
+                <a:solidFill>
+                  <a:srgbClr val="000000"/>
+                </a:solidFill>
+                <a:latin typeface="Consolas"/>
+              </a:rPr>
+              <a:t>0:25     60 min    Tasks 02 to 05, at your own pace</a:t>
+            </a:r>
+          </a:p>
+          <a:p>
+            <a:pPr marL="0" indent="0" algn="l">
+              <a:lnSpc>
+                <a:spcPct val="128000"/>
+              </a:lnSpc>
+              <a:spcAft>
+                <a:spcPts val="1200"/>
+              </a:spcAft>
+              <a:buNone/>
+            </a:pPr>
+            <a:r>
+              <a:rPr sz="1400" b="0">
+                <a:solidFill>
+                  <a:srgbClr val="000000"/>
+                </a:solidFill>
+                <a:latin typeface="Consolas"/>
+              </a:rPr>
+              <a:t>1:25     10 min    Round-the-room: what surprised you</a:t>
+            </a:r>
+          </a:p>
+          <a:p>
+            <a:pPr marL="0" indent="0" algn="l">
+              <a:lnSpc>
+                <a:spcPct val="128000"/>
+              </a:lnSpc>
+              <a:spcAft>
+                <a:spcPts val="1200"/>
+              </a:spcAft>
+              <a:buNone/>
+            </a:pPr>
+            <a:r>
+              <a:rPr sz="1400" b="0">
+                <a:solidFill>
+                  <a:srgbClr val="000000"/>
+                </a:solidFill>
+                <a:latin typeface="Consolas"/>
+              </a:rPr>
+              <a:t>1:35     20 min    Blind test on task 05</a:t>
+            </a:r>
+          </a:p>
+          <a:p>
+            <a:pPr marL="0" indent="0" algn="l">
+              <a:lnSpc>
+                <a:spcPct val="128000"/>
+              </a:lnSpc>
+              <a:spcAft>
+                <a:spcPts val="1200"/>
+              </a:spcAft>
+              <a:buNone/>
+            </a:pPr>
+            <a:r>
+              <a:rPr sz="1400" b="0">
+                <a:solidFill>
+                  <a:srgbClr val="000000"/>
+                </a:solidFill>
+                <a:latin typeface="Consolas"/>
+              </a:rPr>
+              <a:t>1:55      5 min    Pack down</a:t>
+            </a:r>
+          </a:p>
+        </p:txBody>
+      </p:sp>
+      <p:pic>
+        <p:nvPicPr>
+          <p:cNvPr id="4" name="Picture 3" descr="wordmark_dark.png"/>
+          <p:cNvPicPr>
+            <a:picLocks noChangeAspect="1"/>
+          </p:cNvPicPr>
+          <p:nvPr/>
+        </p:nvPicPr>
+        <p:blipFill>
+          <a:blip r:embed="rId2"/>
+          <a:stretch>
+            <a:fillRect/>
+          </a:stretch>
+        </p:blipFill>
+        <p:spPr>
+          <a:xfrm>
+            <a:off x="342900" y="6184900"/>
+            <a:ext cx="2070100" cy="529560"/>
+          </a:xfrm>
+          <a:prstGeom prst="rect">
+            <a:avLst/>
+          </a:prstGeom>
+        </p:spPr>
+      </p:pic>
+      <p:pic>
+        <p:nvPicPr>
+          <p:cNvPr id="5" name="Picture 4" descr="seal_dark.png"/>
+          <p:cNvPicPr>
+            <a:picLocks noChangeAspect="1"/>
+          </p:cNvPicPr>
+          <p:nvPr/>
+        </p:nvPicPr>
+        <p:blipFill>
+          <a:blip r:embed="rId3"/>
+          <a:stretch>
+            <a:fillRect/>
+          </a:stretch>
+        </p:blipFill>
+        <p:spPr>
+          <a:xfrm>
+            <a:off x="11226800" y="5969000"/>
+            <a:ext cx="713915" cy="711200"/>
+          </a:xfrm>
+          <a:prstGeom prst="rect">
+            <a:avLst/>
+          </a:prstGeom>
+        </p:spPr>
+      </p:pic>
+    </p:spTree>
+  </p:cSld>
+  <p:clrMapOvr>
+    <a:masterClrMapping/>
+  </p:clrMapOvr>
+</p:sld>
+</file>
+
+<file path=ppt/slides/slide6.xml><?xml version="1.0" encoding="utf-8"?>
+<p:sld xmlns:a="http://schemas.openxmlformats.org/drawingml/2006/main" xmlns:p="http://schemas.openxmlformats.org/presentationml/2006/main" xmlns:r="http://schemas.openxmlformats.org/officeDocument/2006/relationships">
+  <p:cSld>
+    <p:spTree>
+      <p:nvGrpSpPr>
+        <p:cNvPr id="1" name=""/>
+        <p:cNvGrpSpPr/>
+        <p:nvPr/>
+      </p:nvGrpSpPr>
+      <p:grpSpPr/>
+      <p:sp>
+        <p:nvSpPr>
+          <p:cNvPr id="2" name="Title 1"/>
+          <p:cNvSpPr>
+            <a:spLocks noGrp="1"/>
+          </p:cNvSpPr>
+          <p:nvPr>
+            <p:ph type="title"/>
+          </p:nvPr>
+        </p:nvSpPr>
+        <p:spPr/>
+        <p:txBody>
+          <a:bodyPr/>
+          <a:lstStyle/>
+          <a:p>
+            <a:pPr marL="0" indent="0" algn="l">
+              <a:buNone/>
+            </a:pPr>
+            <a:r>
               <a:rPr sz="4400" b="1">
                 <a:solidFill>
                   <a:srgbClr val="000000"/>
@@ -7195,289 +8989,6 @@
 </p:sld>
 </file>
 
-<file path=ppt/slides/slide6.xml><?xml version="1.0" encoding="utf-8"?>
-<p:sld xmlns:a="http://schemas.openxmlformats.org/drawingml/2006/main" xmlns:p="http://schemas.openxmlformats.org/presentationml/2006/main" xmlns:r="http://schemas.openxmlformats.org/officeDocument/2006/relationships">
-  <p:cSld>
-    <p:spTree>
-      <p:nvGrpSpPr>
-        <p:cNvPr id="1" name=""/>
-        <p:cNvGrpSpPr/>
-        <p:nvPr/>
-      </p:nvGrpSpPr>
-      <p:grpSpPr/>
-      <p:sp>
-        <p:nvSpPr>
-          <p:cNvPr id="2" name="Title 1"/>
-          <p:cNvSpPr>
-            <a:spLocks noGrp="1"/>
-          </p:cNvSpPr>
-          <p:nvPr>
-            <p:ph type="title"/>
-          </p:nvPr>
-        </p:nvSpPr>
-        <p:spPr/>
-        <p:txBody>
-          <a:bodyPr/>
-          <a:lstStyle/>
-          <a:p>
-            <a:pPr marL="0" indent="0" algn="l">
-              <a:buNone/>
-            </a:pPr>
-            <a:r>
-              <a:rPr sz="3200" b="1">
-                <a:solidFill>
-                  <a:srgbClr val="000000"/>
-                </a:solidFill>
-                <a:latin typeface="Arial"/>
-              </a:rPr>
-              <a:t>FIVE TASKS, ONE BOARD EACH</a:t>
-            </a:r>
-          </a:p>
-        </p:txBody>
-      </p:sp>
-      <p:sp>
-        <p:nvSpPr>
-          <p:cNvPr id="3" name="Text Placeholder 2"/>
-          <p:cNvSpPr>
-            <a:spLocks noGrp="1"/>
-          </p:cNvSpPr>
-          <p:nvPr>
-            <p:ph type="body" idx="1"/>
-          </p:nvPr>
-        </p:nvSpPr>
-        <p:spPr/>
-        <p:txBody>
-          <a:bodyPr/>
-          <a:lstStyle/>
-          <a:p>
-            <a:pPr marL="0" indent="0" algn="l">
-              <a:lnSpc>
-                <a:spcPct val="128000"/>
-              </a:lnSpc>
-              <a:spcAft>
-                <a:spcPts val="1400"/>
-              </a:spcAft>
-              <a:buNone/>
-            </a:pPr>
-            <a:r>
-              <a:rPr sz="1700" b="0">
-                <a:solidFill>
-                  <a:srgbClr val="595959"/>
-                </a:solidFill>
-                <a:latin typeface="Arial"/>
-              </a:rPr>
-              <a:t>Upload, change two numbers, upload again. That loop is the point.</a:t>
-            </a:r>
-          </a:p>
-          <a:p>
-            <a:pPr marL="0" indent="0" algn="l">
-              <a:lnSpc>
-                <a:spcPct val="128000"/>
-              </a:lnSpc>
-              <a:spcAft>
-                <a:spcPts val="600"/>
-              </a:spcAft>
-              <a:buNone/>
-            </a:pPr>
-            <a:r>
-              <a:rPr sz="1700" b="1">
-                <a:solidFill>
-                  <a:srgbClr val="000000"/>
-                </a:solidFill>
-                <a:latin typeface="Arial"/>
-              </a:rPr>
-              <a:t>01   Make something spin        coin motor</a:t>
-            </a:r>
-          </a:p>
-          <a:p>
-            <a:pPr marL="0" indent="0" algn="l">
-              <a:lnSpc>
-                <a:spcPct val="128000"/>
-              </a:lnSpc>
-              <a:spcAft>
-                <a:spcPts val="600"/>
-              </a:spcAft>
-              <a:buNone/>
-            </a:pPr>
-            <a:r>
-              <a:rPr sz="1700" b="1">
-                <a:solidFill>
-                  <a:srgbClr val="000000"/>
-                </a:solidFill>
-                <a:latin typeface="Arial"/>
-              </a:rPr>
-              <a:t>02   Make something tap         solenoid</a:t>
-            </a:r>
-          </a:p>
-          <a:p>
-            <a:pPr marL="0" indent="0" algn="l">
-              <a:lnSpc>
-                <a:spcPct val="128000"/>
-              </a:lnSpc>
-              <a:spcAft>
-                <a:spcPts val="600"/>
-              </a:spcAft>
-              <a:buNone/>
-            </a:pPr>
-            <a:r>
-              <a:rPr sz="1700" b="1">
-                <a:solidFill>
-                  <a:srgbClr val="000000"/>
-                </a:solidFill>
-                <a:latin typeface="Arial"/>
-              </a:rPr>
-              <a:t>03   Make something warm        Peltier tile</a:t>
-            </a:r>
-          </a:p>
-          <a:p>
-            <a:pPr marL="0" indent="0" algn="l">
-              <a:lnSpc>
-                <a:spcPct val="128000"/>
-              </a:lnSpc>
-              <a:spcAft>
-                <a:spcPts val="600"/>
-              </a:spcAft>
-              <a:buNone/>
-            </a:pPr>
-            <a:r>
-              <a:rPr sz="1700" b="1">
-                <a:solidFill>
-                  <a:srgbClr val="000000"/>
-                </a:solidFill>
-                <a:latin typeface="Arial"/>
-              </a:rPr>
-              <a:t>04   Make it notice you         a wire and foil</a:t>
-            </a:r>
-          </a:p>
-          <a:p>
-            <a:pPr marL="0" indent="0" algn="l">
-              <a:lnSpc>
-                <a:spcPct val="128000"/>
-              </a:lnSpc>
-              <a:spcAft>
-                <a:spcPts val="600"/>
-              </a:spcAft>
-              <a:buNone/>
-            </a:pPr>
-            <a:r>
-              <a:rPr sz="1700" b="1">
-                <a:solidFill>
-                  <a:srgbClr val="000000"/>
-                </a:solidFill>
-                <a:latin typeface="Arial"/>
-              </a:rPr>
-              <a:t>05   Make it answer back        both together</a:t>
-            </a:r>
-          </a:p>
-          <a:p>
-            <a:pPr marL="0" indent="0" algn="l">
-              <a:lnSpc>
-                <a:spcPct val="128000"/>
-              </a:lnSpc>
-              <a:spcAft>
-                <a:spcPts val="0"/>
-              </a:spcAft>
-              <a:buNone/>
-            </a:pPr>
-          </a:p>
-          <a:p>
-            <a:pPr marL="0" indent="0" algn="l">
-              <a:lnSpc>
-                <a:spcPct val="128000"/>
-              </a:lnSpc>
-              <a:spcAft>
-                <a:spcPts val="600"/>
-              </a:spcAft>
-              <a:buNone/>
-            </a:pPr>
-            <a:r>
-              <a:rPr sz="1700" b="0">
-                <a:solidFill>
-                  <a:srgbClr val="000000"/>
-                </a:solidFill>
-                <a:latin typeface="Arial"/>
-              </a:rPr>
-              <a:t>1 to 3 are output. 4 is input. 5 is both.</a:t>
-            </a:r>
-          </a:p>
-          <a:p>
-            <a:pPr marL="0" indent="0" algn="l">
-              <a:lnSpc>
-                <a:spcPct val="128000"/>
-              </a:lnSpc>
-              <a:spcAft>
-                <a:spcPts val="600"/>
-              </a:spcAft>
-              <a:buNone/>
-            </a:pPr>
-            <a:r>
-              <a:rPr sz="1700" b="0">
-                <a:solidFill>
-                  <a:srgbClr val="000000"/>
-                </a:solidFill>
-                <a:latin typeface="Arial"/>
-              </a:rPr>
-              <a:t>Nobody is expected to finish all five.</a:t>
-            </a:r>
-          </a:p>
-        </p:txBody>
-      </p:sp>
-      <p:pic>
-        <p:nvPicPr>
-          <p:cNvPr id="4" name="Picture 3" descr="wordmark_dark.png"/>
-          <p:cNvPicPr>
-            <a:picLocks noChangeAspect="1"/>
-          </p:cNvPicPr>
-          <p:nvPr/>
-        </p:nvPicPr>
-        <p:blipFill>
-          <a:blip r:embed="rId2"/>
-          <a:stretch>
-            <a:fillRect/>
-          </a:stretch>
-        </p:blipFill>
-        <p:spPr>
-          <a:xfrm>
-            <a:off x="342900" y="6184900"/>
-            <a:ext cx="2070100" cy="529560"/>
-          </a:xfrm>
-          <a:prstGeom prst="rect">
-            <a:avLst/>
-          </a:prstGeom>
-        </p:spPr>
-      </p:pic>
-      <p:pic>
-        <p:nvPicPr>
-          <p:cNvPr id="5" name="Picture 4" descr="seal_dark.png"/>
-          <p:cNvPicPr>
-            <a:picLocks noChangeAspect="1"/>
-          </p:cNvPicPr>
-          <p:nvPr/>
-        </p:nvPicPr>
-        <p:blipFill>
-          <a:blip r:embed="rId3"/>
-          <a:stretch>
-            <a:fillRect/>
-          </a:stretch>
-        </p:blipFill>
-        <p:spPr>
-          <a:xfrm>
-            <a:off x="11226800" y="5969000"/>
-            <a:ext cx="713915" cy="711200"/>
-          </a:xfrm>
-          <a:prstGeom prst="rect">
-            <a:avLst/>
-          </a:prstGeom>
-        </p:spPr>
-      </p:pic>
-    </p:spTree>
-  </p:cSld>
-  <p:clrMapOvr>
-    <a:masterClrMapping/>
-  </p:clrMapOvr>
-</p:sld>
-</file>
-
 <file path=ppt/slides/slide7.xml><?xml version="1.0" encoding="utf-8"?>
 <p:sld xmlns:a="http://schemas.openxmlformats.org/drawingml/2006/main" xmlns:p="http://schemas.openxmlformats.org/presentationml/2006/main" xmlns:r="http://schemas.openxmlformats.org/officeDocument/2006/relationships">
   <p:cSld>
@@ -7513,7 +9024,7 @@
                 </a:solidFill>
                 <a:latin typeface="Arial"/>
               </a:rPr>
-              <a:t>HOW THE TASK SKETCHES WORK</a:t>
+              <a:t>FIVE TASKS, ONE BOARD EACH</a:t>
             </a:r>
           </a:p>
         </p:txBody>
@@ -7549,7 +9060,7 @@
                 </a:solidFill>
                 <a:latin typeface="Arial"/>
               </a:rPr>
-              <a:t>Every sketch runs the moment you upload it. Nothing to wire.</a:t>
+              <a:t>Upload, change two numbers, upload again. That loop is the point.</a:t>
             </a:r>
           </a:p>
           <a:p>
@@ -7569,7 +9080,7 @@
                 </a:solidFill>
                 <a:latin typeface="Arial"/>
               </a:rPr>
-              <a:t>A CHANGE ME block at the top</a:t>
+              <a:t>01   Make something spin        coin motor</a:t>
             </a:r>
           </a:p>
           <a:p>
@@ -7583,13 +9094,73 @@
               <a:buNone/>
             </a:pPr>
             <a:r>
-              <a:rPr sz="1500" b="0">
-                <a:solidFill>
-                  <a:srgbClr val="000000"/>
-                </a:solidFill>
-                <a:latin typeface="Arial"/>
-              </a:rPr>
-              <a:t>• Two or three numbers. Edit, upload, feel the difference</a:t>
+              <a:rPr sz="1700" b="1">
+                <a:solidFill>
+                  <a:srgbClr val="000000"/>
+                </a:solidFill>
+                <a:latin typeface="Arial"/>
+              </a:rPr>
+              <a:t>02   Make something tap         solenoid</a:t>
+            </a:r>
+          </a:p>
+          <a:p>
+            <a:pPr marL="0" indent="0" algn="l">
+              <a:lnSpc>
+                <a:spcPct val="128000"/>
+              </a:lnSpc>
+              <a:spcAft>
+                <a:spcPts val="600"/>
+              </a:spcAft>
+              <a:buNone/>
+            </a:pPr>
+            <a:r>
+              <a:rPr sz="1700" b="1">
+                <a:solidFill>
+                  <a:srgbClr val="000000"/>
+                </a:solidFill>
+                <a:latin typeface="Arial"/>
+              </a:rPr>
+              <a:t>03   Make something warm        Peltier tile</a:t>
+            </a:r>
+          </a:p>
+          <a:p>
+            <a:pPr marL="0" indent="0" algn="l">
+              <a:lnSpc>
+                <a:spcPct val="128000"/>
+              </a:lnSpc>
+              <a:spcAft>
+                <a:spcPts val="600"/>
+              </a:spcAft>
+              <a:buNone/>
+            </a:pPr>
+            <a:r>
+              <a:rPr sz="1700" b="1">
+                <a:solidFill>
+                  <a:srgbClr val="000000"/>
+                </a:solidFill>
+                <a:latin typeface="Arial"/>
+              </a:rPr>
+              <a:t>04   Make it notice you         a wire and foil</a:t>
+            </a:r>
+          </a:p>
+          <a:p>
+            <a:pPr marL="0" indent="0" algn="l">
+              <a:lnSpc>
+                <a:spcPct val="128000"/>
+              </a:lnSpc>
+              <a:spcAft>
+                <a:spcPts val="600"/>
+              </a:spcAft>
+              <a:buNone/>
+            </a:pPr>
+            <a:r>
+              <a:rPr sz="1700" b="1">
+                <a:solidFill>
+                  <a:srgbClr val="000000"/>
+                </a:solidFill>
+                <a:latin typeface="Arial"/>
+              </a:rPr>
+              <a:t>05   Make it answer back        both together</a:t>
             </a:r>
           </a:p>
           <a:p>
@@ -7614,13 +9185,13 @@
               <a:buNone/>
             </a:pPr>
             <a:r>
-              <a:rPr sz="1700" b="1">
-                <a:solidFill>
-                  <a:srgbClr val="000000"/>
-                </a:solidFill>
-                <a:latin typeface="Arial"/>
-              </a:rPr>
-              <a:t>A THINGS TO TRY list at the bottom</a:t>
+              <a:rPr sz="1700" b="0">
+                <a:solidFill>
+                  <a:srgbClr val="000000"/>
+                </a:solidFill>
+                <a:latin typeface="Arial"/>
+              </a:rPr>
+              <a:t>1 to 3 are output. 4 is input. 5 is both.</a:t>
             </a:r>
           </a:p>
           <a:p>
@@ -7634,64 +9205,13 @@
               <a:buNone/>
             </a:pPr>
             <a:r>
-              <a:rPr sz="1500" b="0">
-                <a:solidFill>
-                  <a:srgbClr val="000000"/>
-                </a:solidFill>
-                <a:latin typeface="Arial"/>
-              </a:rPr>
-              <a:t>• Four experiments, roughly in order of difficulty</a:t>
-            </a:r>
-          </a:p>
-          <a:p>
-            <a:pPr marL="0" indent="0" algn="l">
-              <a:lnSpc>
-                <a:spcPct val="128000"/>
-              </a:lnSpc>
-              <a:spcAft>
-                <a:spcPts val="600"/>
-              </a:spcAft>
-              <a:buNone/>
-            </a:pPr>
-            <a:r>
-              <a:rPr sz="1500" b="0">
-                <a:solidFill>
-                  <a:srgbClr val="000000"/>
-                </a:solidFill>
-                <a:latin typeface="Arial"/>
-              </a:rPr>
-              <a:t>• The last one is usually the interesting one</a:t>
-            </a:r>
-          </a:p>
-          <a:p>
-            <a:pPr marL="0" indent="0" algn="l">
-              <a:lnSpc>
-                <a:spcPct val="128000"/>
-              </a:lnSpc>
-              <a:spcAft>
-                <a:spcPts val="0"/>
-              </a:spcAft>
-              <a:buNone/>
-            </a:pPr>
-          </a:p>
-          <a:p>
-            <a:pPr marL="0" indent="0" algn="l">
-              <a:lnSpc>
-                <a:spcPct val="128000"/>
-              </a:lnSpc>
-              <a:spcAft>
-                <a:spcPts val="600"/>
-              </a:spcAft>
-              <a:buNone/>
-            </a:pPr>
-            <a:r>
-              <a:rPr sz="1700" b="1">
-                <a:solidFill>
-                  <a:srgbClr val="000000"/>
-                </a:solidFill>
-                <a:latin typeface="Arial"/>
-              </a:rPr>
-              <a:t>github.com/gust1527/multimodal-actuator-workshop</a:t>
+              <a:rPr sz="1700" b="0">
+                <a:solidFill>
+                  <a:srgbClr val="000000"/>
+                </a:solidFill>
+                <a:latin typeface="Arial"/>
+              </a:rPr>
+              <a:t>Nobody is expected to finish all five.</a:t>
             </a:r>
           </a:p>
         </p:txBody>
@@ -7787,7 +9307,7 @@
                 </a:solidFill>
                 <a:latin typeface="Arial"/>
               </a:rPr>
-              <a:t>THE ONE THAT SURPRISES PEOPLE</a:t>
+              <a:t>HOW THE TASK SKETCHES WORK</a:t>
             </a:r>
           </a:p>
         </p:txBody>
@@ -7823,7 +9343,7 @@
                 </a:solidFill>
                 <a:latin typeface="Arial"/>
               </a:rPr>
-              <a:t>Touch input for the price of a wire. The thinking is where it costs you.</a:t>
+              <a:t>Every sketch runs the moment you upload it. Nothing to wire.</a:t>
             </a:r>
           </a:p>
           <a:p>
@@ -7843,7 +9363,27 @@
                 </a:solidFill>
                 <a:latin typeface="Arial"/>
               </a:rPr>
-              <a:t>reading &gt; baselineAverage() * 1.01</a:t>
+              <a:t>A CHANGE ME block at the top</a:t>
+            </a:r>
+          </a:p>
+          <a:p>
+            <a:pPr marL="0" indent="0" algn="l">
+              <a:lnSpc>
+                <a:spcPct val="128000"/>
+              </a:lnSpc>
+              <a:spcAft>
+                <a:spcPts val="600"/>
+              </a:spcAft>
+              <a:buNone/>
+            </a:pPr>
+            <a:r>
+              <a:rPr sz="1500" b="0">
+                <a:solidFill>
+                  <a:srgbClr val="000000"/>
+                </a:solidFill>
+                <a:latin typeface="Arial"/>
+              </a:rPr>
+              <a:t>• Two or three numbers. Edit, upload, feel the difference</a:t>
             </a:r>
           </a:p>
           <a:p>
@@ -7874,7 +9414,7 @@
                 </a:solidFill>
                 <a:latin typeface="Arial"/>
               </a:rPr>
-              <a:t>Threshold is relative, never absolute</a:t>
+              <a:t>A THINGS TO TRY list at the bottom</a:t>
             </a:r>
           </a:p>
           <a:p>
@@ -7894,7 +9434,7 @@
                 </a:solidFill>
                 <a:latin typeface="Arial"/>
               </a:rPr>
-              <a:t>• Readings drift with humidity and mains hum</a:t>
+              <a:t>• Four experiments, roughly in order of difficulty</a:t>
             </a:r>
           </a:p>
           <a:p>
@@ -7914,7 +9454,7 @@
                 </a:solidFill>
                 <a:latin typeface="Arial"/>
               </a:rPr>
-              <a:t>• Fixed threshold works at 9am, fails at 1pm</a:t>
+              <a:t>• The last one is usually the interesting one</a:t>
             </a:r>
           </a:p>
           <a:p>
@@ -7945,27 +9485,7 @@
                 </a:solidFill>
                 <a:latin typeface="Arial"/>
               </a:rPr>
-              <a:t>Baseline only learns while untouched</a:t>
-            </a:r>
-          </a:p>
-          <a:p>
-            <a:pPr marL="0" indent="0" algn="l">
-              <a:lnSpc>
-                <a:spcPct val="128000"/>
-              </a:lnSpc>
-              <a:spcAft>
-                <a:spcPts val="600"/>
-              </a:spcAft>
-              <a:buNone/>
-            </a:pPr>
-            <a:r>
-              <a:rPr sz="1500" b="0">
-                <a:solidFill>
-                  <a:srgbClr val="000000"/>
-                </a:solidFill>
-                <a:latin typeface="Arial"/>
-              </a:rPr>
-              <a:t>• Or a long press teaches it that a finger is normal</a:t>
+              <a:t>github.com/gust1527/multimodal-actuator-workshop</a:t>
             </a:r>
           </a:p>
         </p:txBody>
@@ -8055,20 +9575,138 @@
               <a:buNone/>
             </a:pPr>
             <a:r>
-              <a:rPr sz="4400" b="1">
-                <a:solidFill>
-                  <a:srgbClr val="000000"/>
-                </a:solidFill>
-                <a:latin typeface="Arial"/>
-              </a:rPr>
-              <a:t>INPUTS, AND PRIOR ART</a:t>
+              <a:rPr sz="3200" b="1">
+                <a:solidFill>
+                  <a:srgbClr val="000000"/>
+                </a:solidFill>
+                <a:latin typeface="Arial"/>
+              </a:rPr>
+              <a:t>FREESTYLE IS ENCOURAGED</a:t>
+            </a:r>
+          </a:p>
+        </p:txBody>
+      </p:sp>
+      <p:sp>
+        <p:nvSpPr>
+          <p:cNvPr id="3" name="Text Placeholder 2"/>
+          <p:cNvSpPr>
+            <a:spLocks noGrp="1"/>
+          </p:cNvSpPr>
+          <p:nvPr>
+            <p:ph type="body" idx="1"/>
+          </p:nvPr>
+        </p:nvSpPr>
+        <p:spPr/>
+        <p:txBody>
+          <a:bodyPr/>
+          <a:lstStyle/>
+          <a:p>
+            <a:pPr marL="0" indent="0" algn="l">
+              <a:lnSpc>
+                <a:spcPct val="128000"/>
+              </a:lnSpc>
+              <a:spcAft>
+                <a:spcPts val="600"/>
+              </a:spcAft>
+              <a:buNone/>
+            </a:pPr>
+            <a:r>
+              <a:rPr sz="1700" b="1">
+                <a:solidFill>
+                  <a:srgbClr val="000000"/>
+                </a:solidFill>
+                <a:latin typeface="Arial"/>
+              </a:rPr>
+              <a:t>You do not have to do the tasks in order.</a:t>
+            </a:r>
+          </a:p>
+          <a:p>
+            <a:pPr marL="0" indent="0" algn="l">
+              <a:lnSpc>
+                <a:spcPct val="128000"/>
+              </a:lnSpc>
+              <a:spcAft>
+                <a:spcPts val="600"/>
+              </a:spcAft>
+              <a:buNone/>
+            </a:pPr>
+            <a:r>
+              <a:rPr sz="1700" b="1">
+                <a:solidFill>
+                  <a:srgbClr val="000000"/>
+                </a:solidFill>
+                <a:latin typeface="Arial"/>
+              </a:rPr>
+              <a:t>You do not have to finish them.</a:t>
+            </a:r>
+          </a:p>
+          <a:p>
+            <a:pPr marL="0" indent="0" algn="l">
+              <a:lnSpc>
+                <a:spcPct val="128000"/>
+              </a:lnSpc>
+              <a:spcAft>
+                <a:spcPts val="0"/>
+              </a:spcAft>
+              <a:buNone/>
+            </a:pPr>
+          </a:p>
+          <a:p>
+            <a:pPr marL="0" indent="0" algn="l">
+              <a:lnSpc>
+                <a:spcPct val="128000"/>
+              </a:lnSpc>
+              <a:spcAft>
+                <a:spcPts val="600"/>
+              </a:spcAft>
+              <a:buNone/>
+            </a:pPr>
+            <a:r>
+              <a:rPr sz="1700" b="0">
+                <a:solidFill>
+                  <a:srgbClr val="000000"/>
+                </a:solidFill>
+                <a:latin typeface="Arial"/>
+              </a:rPr>
+              <a:t>Getting task 01 working and then properly playing with task 02 beats rushing through all five.</a:t>
+            </a:r>
+          </a:p>
+          <a:p>
+            <a:pPr marL="0" indent="0" algn="l">
+              <a:lnSpc>
+                <a:spcPct val="128000"/>
+              </a:lnSpc>
+              <a:spcAft>
+                <a:spcPts val="0"/>
+              </a:spcAft>
+              <a:buNone/>
+            </a:pPr>
+          </a:p>
+          <a:p>
+            <a:pPr marL="0" indent="0" algn="l">
+              <a:lnSpc>
+                <a:spcPct val="128000"/>
+              </a:lnSpc>
+              <a:spcAft>
+                <a:spcPts val="600"/>
+              </a:spcAft>
+              <a:buNone/>
+            </a:pPr>
+            <a:r>
+              <a:rPr sz="1700" b="0">
+                <a:solidFill>
+                  <a:srgbClr val="000000"/>
+                </a:solidFill>
+                <a:latin typeface="Arial"/>
+              </a:rPr>
+              <a:t>If you want to drive something that is not in front of you, go and get it.</a:t>
             </a:r>
           </a:p>
         </p:txBody>
       </p:sp>
       <p:pic>
         <p:nvPicPr>
-          <p:cNvPr id="3" name="Picture 2" descr="wordmark_dark.png"/>
+          <p:cNvPr id="4" name="Picture 3" descr="wordmark_dark.png"/>
           <p:cNvPicPr>
             <a:picLocks noChangeAspect="1"/>
           </p:cNvPicPr>
@@ -8092,7 +9730,7 @@
       </p:pic>
       <p:pic>
         <p:nvPicPr>
-          <p:cNvPr id="4" name="Picture 3" descr="seal_dark.png"/>
+          <p:cNvPr id="5" name="Picture 4" descr="seal_dark.png"/>
           <p:cNvPicPr>
             <a:picLocks noChangeAspect="1"/>
           </p:cNvPicPr>

--- a/docs/multimodal-actuator-workshop.pptx
+++ b/docs/multimodal-actuator-workshop.pptx
@@ -25,6 +25,13 @@
     <p:sldId id="273" r:id="rId24"/>
     <p:sldId id="274" r:id="rId25"/>
     <p:sldId id="275" r:id="rId26"/>
+    <p:sldId id="276" r:id="rId27"/>
+    <p:sldId id="277" r:id="rId28"/>
+    <p:sldId id="278" r:id="rId29"/>
+    <p:sldId id="279" r:id="rId30"/>
+    <p:sldId id="280" r:id="rId31"/>
+    <p:sldId id="281" r:id="rId32"/>
+    <p:sldId id="282" r:id="rId33"/>
   </p:sldIdLst>
   <p:sldSz cx="12188952" cy="6858000" type="screen4x3"/>
   <p:notesSz cx="6858000" cy="9144000"/>
@@ -618,50 +625,18 @@
           <a:lstStyle/>
           <a:p>
             <a:r>
-              <a:t>The only slide where you should sound firm.</a:t>
+              <a:t>The one everybody already owns without knowing it. Every phone has one.</a:t>
             </a:r>
           </a:p>
           <a:p/>
           <a:p>
             <a:r>
-              <a:t>Three real hazards:</a:t>
-            </a:r>
-          </a:p>
-          <a:p>
-            <a:r>
-              <a:t>  * solenoid and Peltier on their own supply, not USB</a:t>
-            </a:r>
-          </a:p>
-          <a:p>
-            <a:r>
-              <a:t>  * Peltier heatsink on before it is switched on, no exceptions</a:t>
-            </a:r>
-          </a:p>
-          <a:p>
-            <a:r>
-              <a:t>  * no motor straight from a pin</a:t>
-            </a:r>
-          </a:p>
-          <a:p/>
-          <a:p>
-            <a:r>
-              <a:t>Say the numbers: a pin gives 40 mA, the motor wants about 75. It is not a rule</a:t>
-            </a:r>
-          </a:p>
-          <a:p>
-            <a:r>
-              <a:t>they have to take on faith.</a:t>
-            </a:r>
-          </a:p>
-          <a:p/>
-          <a:p>
-            <a:r>
-              <a:t>Also mention that a board resetting when the solenoid fires is a POWER problem,</a:t>
-            </a:r>
-          </a:p>
-          <a:p>
-            <a:r>
-              <a:t>not a code bug. It will save someone twenty minutes.</a:t>
+              <a:t>The point worth making: speed and strength are welded together. That single</a:t>
+            </a:r>
+          </a:p>
+          <a:p>
+            <a:r>
+              <a:t>constraint is why the other five exist.</a:t>
             </a:r>
           </a:p>
         </p:txBody>
@@ -731,72 +706,23 @@
           <a:lstStyle/>
           <a:p>
             <a:r>
-              <a:t>Slow down here. This is the single idea most worth stealing from today, and</a:t>
-            </a:r>
-          </a:p>
-          <a:p>
-            <a:r>
-              <a:t>it is worth interrupting the room for once most people have reached task 04.</a:t>
+              <a:t>Both solve the coin motor's problem, differently. LRA is what a modern</a:t>
+            </a:r>
+          </a:p>
+          <a:p>
+            <a:r>
+              <a:t>phone keyboard uses. Piezo is sharp but shallow.</a:t>
             </a:r>
           </a:p>
           <a:p/>
           <a:p>
             <a:r>
-              <a:t>Two things students get wrong:</a:t>
-            </a:r>
-          </a:p>
-          <a:p/>
-          <a:p>
-            <a:r>
-              <a:t>1. A fixed threshold. Works in the morning, fails after lunch, because the</a:t>
-            </a:r>
-          </a:p>
-          <a:p>
-            <a:r>
-              <a:t>   reading drifts with humidity and mains hum.</a:t>
-            </a:r>
-          </a:p>
-          <a:p/>
-          <a:p>
-            <a:r>
-              <a:t>2. Feeding the baseline buffer always. A long press then teaches the baseline</a:t>
-            </a:r>
-          </a:p>
-          <a:p>
-            <a:r>
-              <a:t>   that a finger is normal, and the touch silently stops working. The buffer</a:t>
-            </a:r>
-          </a:p>
-          <a:p>
-            <a:r>
-              <a:t>   must only learn while untouched.</a:t>
-            </a:r>
-          </a:p>
-          <a:p/>
-          <a:p>
-            <a:r>
-              <a:t>Put the Serial Plotter on the projector. Watching the baseline wander while the</a:t>
-            </a:r>
-          </a:p>
-          <a:p>
-            <a:r>
-              <a:t>trigger line tracks it explains the whole design in ten seconds.</a:t>
-            </a:r>
-          </a:p>
-          <a:p/>
-          <a:p>
-            <a:r>
-              <a:t>For what it is worth, the rig this came from went through the same tuning: an</a:t>
-            </a:r>
-          </a:p>
-          <a:p>
-            <a:r>
-              <a:t>earlier version used 1.008 with a 50-sample baseline, the final one 1.01 with</a:t>
-            </a:r>
-          </a:p>
-          <a:p>
-            <a:r>
-              <a:t>25. Everyone tunes these.</a:t>
+              <a:t>If someone is designing anything that needs to feel responsive rather than</a:t>
+            </a:r>
+          </a:p>
+          <a:p>
+            <a:r>
+              <a:t>just present, point them here.</a:t>
             </a:r>
           </a:p>
         </p:txBody>
@@ -866,24 +792,23 @@
           <a:lstStyle/>
           <a:p>
             <a:r>
-              <a:t>1:25. Pull the room back together.</a:t>
+              <a:t>Pass this one around if you can. It is the one people remember, because a</a:t>
+            </a:r>
+          </a:p>
+          <a:p>
+            <a:r>
+              <a:t>knock reads as a person rather than a machine.</a:t>
             </a:r>
           </a:p>
           <a:p/>
           <a:p>
             <a:r>
-              <a:t>One sentence per group: what surprised you. No slides, no laptops. Ten minutes.</a:t>
-            </a:r>
-          </a:p>
-          <a:p/>
-          <a:p>
-            <a:r>
-              <a:t>Expect someone to report the Peltier delay. Let that land, it is far more</a:t>
-            </a:r>
-          </a:p>
-          <a:p>
-            <a:r>
-              <a:t>persuasive from a peer than from you.</a:t>
+              <a:t>Warn them now that it needs its own supply, so it does not come as a surprise</a:t>
+            </a:r>
+          </a:p>
+          <a:p>
+            <a:r>
+              <a:t>at task 02.</a:t>
             </a:r>
           </a:p>
         </p:txBody>
@@ -953,29 +878,18 @@
           <a:lstStyle/>
           <a:p>
             <a:r>
-              <a:t>Mention, do not teach. These sit on one table with a sign.</a:t>
+              <a:t>Hold up a wire and a piece of foil. That is genuinely the whole sensor.</a:t>
             </a:r>
           </a:p>
           <a:p/>
           <a:p>
             <a:r>
-              <a:t>The honest warnings matter more than the specs: PPG is useless once the hand</a:t>
-            </a:r>
-          </a:p>
-          <a:p>
-            <a:r>
-              <a:t>moves, GSR drifts so only relative change works, FSRs need per-pad calibration.</a:t>
-            </a:r>
-          </a:p>
-          <a:p/>
-          <a:p>
-            <a:r>
-              <a:t>Push the phone option hard. For a lot of projects it beats everything else on</a:t>
-            </a:r>
-          </a:p>
-          <a:p>
-            <a:r>
-              <a:t>the table and needs no soldering at all.</a:t>
+              <a:t>This is the slide that changes what people think is possible, because it costs</a:t>
+            </a:r>
+          </a:p>
+          <a:p>
+            <a:r>
+              <a:t>nothing and hides completely inside a prototype.</a:t>
             </a:r>
           </a:p>
         </p:txBody>
@@ -1045,45 +959,23 @@
           <a:lstStyle/>
           <a:p>
             <a:r>
-              <a:t>Five minutes, and put the actual repos on screen if you can.</a:t>
+              <a:t>Say the honest limitation out loud: it is slow, and hot alternating with</a:t>
+            </a:r>
+          </a:p>
+          <a:p>
+            <a:r>
+              <a:t>cold just reads as lukewarm.</a:t>
             </a:r>
           </a:p>
           <a:p/>
           <a:p>
             <a:r>
-              <a:t>The argument: this was built by students at your stage, not by a lab with a</a:t>
-            </a:r>
-          </a:p>
-          <a:p>
-            <a:r>
-              <a:t>budget. The gap between "we should use touch" and "it moves when you touch it"</a:t>
-            </a:r>
-          </a:p>
-          <a:p>
-            <a:r>
-              <a:t>is smaller than it looks.</a:t>
-            </a:r>
-          </a:p>
-          <a:p/>
-          <a:p>
-            <a:r>
-              <a:t>The moving screen has a browser control panel over the serial port, which is</a:t>
-            </a:r>
-          </a:p>
-          <a:p>
-            <a:r>
-              <a:t>what you will wish you had at the project demonstrations.</a:t>
-            </a:r>
-          </a:p>
-          <a:p/>
-          <a:p>
-            <a:r>
-              <a:t>Note for you: the sock repo has a hardcoded Wi-Fi password and live patient IDs</a:t>
-            </a:r>
-          </a:p>
-          <a:p>
-            <a:r>
-              <a:t>in it. Scrub before showing, or show only the calibration section.</a:t>
+              <a:t>Good for slow ambient state. Wrong for alerts. Saying so here saves a project</a:t>
+            </a:r>
+          </a:p>
+          <a:p>
+            <a:r>
+              <a:t>from finding out in week 46.</a:t>
             </a:r>
           </a:p>
         </p:txBody>
@@ -1153,18 +1045,23 @@
           <a:lstStyle/>
           <a:p>
             <a:r>
-              <a:t>1:35. The blind test.</a:t>
+              <a:t>The redundancy argument. Same driver, one frequency you feel and one you</a:t>
+            </a:r>
+          </a:p>
+          <a:p>
+            <a:r>
+              <a:t>hear.</a:t>
             </a:r>
           </a:p>
           <a:p/>
           <a:p>
             <a:r>
-              <a:t>Most groups will already have something from task 05. This is where it gets</a:t>
-            </a:r>
-          </a:p>
-          <a:p>
-            <a:r>
-              <a:t>tested by someone who did not build it.</a:t>
+              <a:t>Together is not louder, it is more certain. Cheapest reliability a project can</a:t>
+            </a:r>
+          </a:p>
+          <a:p>
+            <a:r>
+              <a:t>buy, and it is also the accessibility answer.</a:t>
             </a:r>
           </a:p>
         </p:txBody>
@@ -1234,39 +1131,23 @@
           <a:lstStyle/>
           <a:p>
             <a:r>
-              <a:t>Read the brief out once, then get out of the way. Full wording, since the</a:t>
-            </a:r>
-          </a:p>
-          <a:p>
-            <a:r>
-              <a:t>slide is only the bones:</a:t>
+              <a:t>Say this out loud, do not just show it. Some students will not believe</a:t>
+            </a:r>
+          </a:p>
+          <a:p>
+            <a:r>
+              <a:t>they are allowed to skip ahead or stop early unless you tell them.</a:t>
             </a:r>
           </a:p>
           <a:p/>
           <a:p>
             <a:r>
-              <a:t>"Pick one actuator. Encode three messages: arrived, something wrong, finished.</a:t>
-            </a:r>
-          </a:p>
-          <a:p>
-            <a:r>
-              <a:t>Vary only the rhythm of the pulses and how strong they are. Then hand it to</a:t>
-            </a:r>
-          </a:p>
-          <a:p>
-            <a:r>
-              <a:t>another group with the screen turned away and see if they can name all three."</a:t>
-            </a:r>
-          </a:p>
-          <a:p/>
-          <a:p>
-            <a:r>
-              <a:t>If someone asks to add a second actuator, say no. The constraint is the</a:t>
-            </a:r>
-          </a:p>
-          <a:p>
-            <a:r>
-              <a:t>exercise.</a:t>
+              <a:t>The failure mode is a pair rushing all five tasks badly instead of doing two</a:t>
+            </a:r>
+          </a:p>
+          <a:p>
+            <a:r>
+              <a:t>properly. Name that explicitly.</a:t>
             </a:r>
           </a:p>
         </p:txBody>
@@ -1336,24 +1217,50 @@
           <a:lstStyle/>
           <a:p>
             <a:r>
-              <a:t>The line worth repeating twice.</a:t>
+              <a:t>The only slide where you should sound firm.</a:t>
             </a:r>
           </a:p>
           <a:p/>
           <a:p>
             <a:r>
-              <a:t>Run the test: swap groups, receiver looks away, guess all three.</a:t>
+              <a:t>Three real hazards:</a:t>
+            </a:r>
+          </a:p>
+          <a:p>
+            <a:r>
+              <a:t>  * solenoid and Peltier on their own supply, not USB</a:t>
+            </a:r>
+          </a:p>
+          <a:p>
+            <a:r>
+              <a:t>  * Peltier heatsink on before it is switched on, no exceptions</a:t>
+            </a:r>
+          </a:p>
+          <a:p>
+            <a:r>
+              <a:t>  * no motor straight from a pin</a:t>
             </a:r>
           </a:p>
           <a:p/>
           <a:p>
             <a:r>
-              <a:t>Then have each group name which two got confused and what would have separated</a:t>
-            </a:r>
-          </a:p>
-          <a:p>
-            <a:r>
-              <a:t>them. That confusion is the actual learning, not the successful ones.</a:t>
+              <a:t>Say the numbers: a pin gives 40 mA, the motor wants about 75. It is not a rule</a:t>
+            </a:r>
+          </a:p>
+          <a:p>
+            <a:r>
+              <a:t>they have to take on faith.</a:t>
+            </a:r>
+          </a:p>
+          <a:p/>
+          <a:p>
+            <a:r>
+              <a:t>Also mention that a board resetting when the solenoid fires is a POWER problem,</a:t>
+            </a:r>
+          </a:p>
+          <a:p>
+            <a:r>
+              <a:t>not a code bug. It will save someone twenty minutes.</a:t>
             </a:r>
           </a:p>
         </p:txBody>
@@ -1423,23 +1330,72 @@
           <a:lstStyle/>
           <a:p>
             <a:r>
-              <a:t>Put this up while the blind tests are running so groups can check</a:t>
-            </a:r>
-          </a:p>
-          <a:p>
-            <a:r>
-              <a:t>themselves without asking you.</a:t>
+              <a:t>Slow down here. This is the single idea most worth stealing from today, and</a:t>
+            </a:r>
+          </a:p>
+          <a:p>
+            <a:r>
+              <a:t>it is worth interrupting the room for once most people have reached task 04.</a:t>
             </a:r>
           </a:p>
           <a:p/>
           <a:p>
             <a:r>
-              <a:t>The second line matters most: a device that fires continuously when held is</a:t>
-            </a:r>
-          </a:p>
-          <a:p>
-            <a:r>
-              <a:t>the single most common bug, and it is a debounce problem.</a:t>
+              <a:t>Two things students get wrong:</a:t>
+            </a:r>
+          </a:p>
+          <a:p/>
+          <a:p>
+            <a:r>
+              <a:t>1. A fixed threshold. Works in the morning, fails after lunch, because the</a:t>
+            </a:r>
+          </a:p>
+          <a:p>
+            <a:r>
+              <a:t>   reading drifts with humidity and mains hum.</a:t>
+            </a:r>
+          </a:p>
+          <a:p/>
+          <a:p>
+            <a:r>
+              <a:t>2. Feeding the baseline buffer always. A long press then teaches the baseline</a:t>
+            </a:r>
+          </a:p>
+          <a:p>
+            <a:r>
+              <a:t>   that a finger is normal, and the touch silently stops working. The buffer</a:t>
+            </a:r>
+          </a:p>
+          <a:p>
+            <a:r>
+              <a:t>   must only learn while untouched.</a:t>
+            </a:r>
+          </a:p>
+          <a:p/>
+          <a:p>
+            <a:r>
+              <a:t>Put the Serial Plotter on the projector. Watching the baseline wander while the</a:t>
+            </a:r>
+          </a:p>
+          <a:p>
+            <a:r>
+              <a:t>trigger line tracks it explains the whole design in ten seconds.</a:t>
+            </a:r>
+          </a:p>
+          <a:p/>
+          <a:p>
+            <a:r>
+              <a:t>For what it is worth, the rig this came from went through the same tuning: an</a:t>
+            </a:r>
+          </a:p>
+          <a:p>
+            <a:r>
+              <a:t>earlier version used 1.008 with a 50-sample baseline, the final one 1.01 with</a:t>
+            </a:r>
+          </a:p>
+          <a:p>
+            <a:r>
+              <a:t>25. Everyone tunes these.</a:t>
             </a:r>
           </a:p>
         </p:txBody>
@@ -1509,23 +1465,24 @@
           <a:lstStyle/>
           <a:p>
             <a:r>
-              <a:t>The closing argument. Thirty seconds.</a:t>
+              <a:t>1:25. Pull the room back together.</a:t>
             </a:r>
           </a:p>
           <a:p/>
           <a:p>
             <a:r>
-              <a:t>If they leave with only one thing, it should be the third: pick the actuator</a:t>
-            </a:r>
-          </a:p>
-          <a:p>
-            <a:r>
-              <a:t>before designing the interaction. Discovering in week 46 that the chosen one</a:t>
-            </a:r>
-          </a:p>
-          <a:p>
-            <a:r>
-              <a:t>cannot do the job is the expensive mistake this session exists to prevent.</a:t>
+              <a:t>One sentence per group: what surprised you. No slides, no laptops. Ten minutes.</a:t>
+            </a:r>
+          </a:p>
+          <a:p/>
+          <a:p>
+            <a:r>
+              <a:t>Expect someone to report the Peltier delay. Let that land, it is far more</a:t>
+            </a:r>
+          </a:p>
+          <a:p>
+            <a:r>
+              <a:t>persuasive from a peer than from you.</a:t>
             </a:r>
           </a:p>
         </p:txBody>
@@ -1676,6 +1633,648 @@
           <a:lstStyle/>
           <a:p>
             <a:r>
+              <a:t>Mention, do not teach. These sit on one table with a sign.</a:t>
+            </a:r>
+          </a:p>
+          <a:p/>
+          <a:p>
+            <a:r>
+              <a:t>The honest warnings matter more than the specs: PPG is useless once the hand</a:t>
+            </a:r>
+          </a:p>
+          <a:p>
+            <a:r>
+              <a:t>moves, GSR drifts so only relative change works, FSRs need per-pad calibration.</a:t>
+            </a:r>
+          </a:p>
+          <a:p/>
+          <a:p>
+            <a:r>
+              <a:t>Push the phone option hard. For a lot of projects it beats everything else on</a:t>
+            </a:r>
+          </a:p>
+          <a:p>
+            <a:r>
+              <a:t>the table and needs no soldering at all.</a:t>
+            </a:r>
+          </a:p>
+        </p:txBody>
+      </p:sp>
+      <p:sp>
+        <p:nvSpPr>
+          <p:cNvPr id="4" name="Slide Number Placeholder 3"/>
+          <p:cNvSpPr>
+            <a:spLocks noGrp="1"/>
+          </p:cNvSpPr>
+          <p:nvPr>
+            <p:ph type="sldNum" idx="5" sz="quarter"/>
+          </p:nvPr>
+        </p:nvSpPr>
+        <p:spPr/>
+      </p:sp>
+    </p:spTree>
+  </p:cSld>
+  <p:clrMapOvr>
+    <a:masterClrMapping/>
+  </p:clrMapOvr>
+</p:notes>
+</file>
+
+<file path=ppt/notesSlides/notesSlide21.xml><?xml version="1.0" encoding="utf-8"?>
+<p:notes xmlns:a="http://schemas.openxmlformats.org/drawingml/2006/main" xmlns:p="http://schemas.openxmlformats.org/presentationml/2006/main" xmlns:r="http://schemas.openxmlformats.org/officeDocument/2006/relationships">
+  <p:cSld>
+    <p:spTree>
+      <p:nvGrpSpPr>
+        <p:cNvPr id="1" name=""/>
+        <p:cNvGrpSpPr/>
+        <p:nvPr/>
+      </p:nvGrpSpPr>
+      <p:grpSpPr>
+        <a:xfrm>
+          <a:off x="0" y="0"/>
+          <a:ext cx="0" cy="0"/>
+          <a:chOff x="0" y="0"/>
+          <a:chExt cx="0" cy="0"/>
+        </a:xfrm>
+      </p:grpSpPr>
+      <p:sp>
+        <p:nvSpPr>
+          <p:cNvPr id="2" name="Slide Image Placeholder 1"/>
+          <p:cNvSpPr>
+            <a:spLocks noGrp="1"/>
+          </p:cNvSpPr>
+          <p:nvPr>
+            <p:ph type="sldImg" idx="2"/>
+          </p:nvPr>
+        </p:nvSpPr>
+        <p:spPr/>
+      </p:sp>
+      <p:sp>
+        <p:nvSpPr>
+          <p:cNvPr id="3" name="Notes Placeholder 2"/>
+          <p:cNvSpPr>
+            <a:spLocks noGrp="1"/>
+          </p:cNvSpPr>
+          <p:nvPr>
+            <p:ph type="body" idx="3" sz="quarter"/>
+          </p:nvPr>
+        </p:nvSpPr>
+        <p:spPr/>
+        <p:txBody>
+          <a:bodyPr/>
+          <a:lstStyle/>
+          <a:p>
+            <a:r>
+              <a:t>Five minutes, and put the actual repos on screen if you can.</a:t>
+            </a:r>
+          </a:p>
+          <a:p/>
+          <a:p>
+            <a:r>
+              <a:t>The argument: this was built by students at your stage, not by a lab with a</a:t>
+            </a:r>
+          </a:p>
+          <a:p>
+            <a:r>
+              <a:t>budget. The gap between "we should use touch" and "it moves when you touch it"</a:t>
+            </a:r>
+          </a:p>
+          <a:p>
+            <a:r>
+              <a:t>is smaller than it looks.</a:t>
+            </a:r>
+          </a:p>
+          <a:p/>
+          <a:p>
+            <a:r>
+              <a:t>The moving screen has a browser control panel over the serial port, which is</a:t>
+            </a:r>
+          </a:p>
+          <a:p>
+            <a:r>
+              <a:t>what you will wish you had at the project demonstrations.</a:t>
+            </a:r>
+          </a:p>
+          <a:p/>
+          <a:p>
+            <a:r>
+              <a:t>Note for you: the sock repo has a hardcoded Wi-Fi password and live patient IDs</a:t>
+            </a:r>
+          </a:p>
+          <a:p>
+            <a:r>
+              <a:t>in it. Scrub before showing, or show only the calibration section.</a:t>
+            </a:r>
+          </a:p>
+        </p:txBody>
+      </p:sp>
+      <p:sp>
+        <p:nvSpPr>
+          <p:cNvPr id="4" name="Slide Number Placeholder 3"/>
+          <p:cNvSpPr>
+            <a:spLocks noGrp="1"/>
+          </p:cNvSpPr>
+          <p:nvPr>
+            <p:ph type="sldNum" idx="5" sz="quarter"/>
+          </p:nvPr>
+        </p:nvSpPr>
+        <p:spPr/>
+      </p:sp>
+    </p:spTree>
+  </p:cSld>
+  <p:clrMapOvr>
+    <a:masterClrMapping/>
+  </p:clrMapOvr>
+</p:notes>
+</file>
+
+<file path=ppt/notesSlides/notesSlide22.xml><?xml version="1.0" encoding="utf-8"?>
+<p:notes xmlns:a="http://schemas.openxmlformats.org/drawingml/2006/main" xmlns:p="http://schemas.openxmlformats.org/presentationml/2006/main" xmlns:r="http://schemas.openxmlformats.org/officeDocument/2006/relationships">
+  <p:cSld>
+    <p:spTree>
+      <p:nvGrpSpPr>
+        <p:cNvPr id="1" name=""/>
+        <p:cNvGrpSpPr/>
+        <p:nvPr/>
+      </p:nvGrpSpPr>
+      <p:grpSpPr>
+        <a:xfrm>
+          <a:off x="0" y="0"/>
+          <a:ext cx="0" cy="0"/>
+          <a:chOff x="0" y="0"/>
+          <a:chExt cx="0" cy="0"/>
+        </a:xfrm>
+      </p:grpSpPr>
+      <p:sp>
+        <p:nvSpPr>
+          <p:cNvPr id="2" name="Slide Image Placeholder 1"/>
+          <p:cNvSpPr>
+            <a:spLocks noGrp="1"/>
+          </p:cNvSpPr>
+          <p:nvPr>
+            <p:ph type="sldImg" idx="2"/>
+          </p:nvPr>
+        </p:nvSpPr>
+        <p:spPr/>
+      </p:sp>
+      <p:sp>
+        <p:nvSpPr>
+          <p:cNvPr id="3" name="Notes Placeholder 2"/>
+          <p:cNvSpPr>
+            <a:spLocks noGrp="1"/>
+          </p:cNvSpPr>
+          <p:nvPr>
+            <p:ph type="body" idx="3" sz="quarter"/>
+          </p:nvPr>
+        </p:nvSpPr>
+        <p:spPr/>
+        <p:txBody>
+          <a:bodyPr/>
+          <a:lstStyle/>
+          <a:p>
+            <a:r>
+              <a:t>1:35. The blind test.</a:t>
+            </a:r>
+          </a:p>
+          <a:p/>
+          <a:p>
+            <a:r>
+              <a:t>Most groups will already have something from task 05. This is where it gets</a:t>
+            </a:r>
+          </a:p>
+          <a:p>
+            <a:r>
+              <a:t>tested by someone who did not build it.</a:t>
+            </a:r>
+          </a:p>
+        </p:txBody>
+      </p:sp>
+      <p:sp>
+        <p:nvSpPr>
+          <p:cNvPr id="4" name="Slide Number Placeholder 3"/>
+          <p:cNvSpPr>
+            <a:spLocks noGrp="1"/>
+          </p:cNvSpPr>
+          <p:nvPr>
+            <p:ph type="sldNum" idx="5" sz="quarter"/>
+          </p:nvPr>
+        </p:nvSpPr>
+        <p:spPr/>
+      </p:sp>
+    </p:spTree>
+  </p:cSld>
+  <p:clrMapOvr>
+    <a:masterClrMapping/>
+  </p:clrMapOvr>
+</p:notes>
+</file>
+
+<file path=ppt/notesSlides/notesSlide23.xml><?xml version="1.0" encoding="utf-8"?>
+<p:notes xmlns:a="http://schemas.openxmlformats.org/drawingml/2006/main" xmlns:p="http://schemas.openxmlformats.org/presentationml/2006/main" xmlns:r="http://schemas.openxmlformats.org/officeDocument/2006/relationships">
+  <p:cSld>
+    <p:spTree>
+      <p:nvGrpSpPr>
+        <p:cNvPr id="1" name=""/>
+        <p:cNvGrpSpPr/>
+        <p:nvPr/>
+      </p:nvGrpSpPr>
+      <p:grpSpPr>
+        <a:xfrm>
+          <a:off x="0" y="0"/>
+          <a:ext cx="0" cy="0"/>
+          <a:chOff x="0" y="0"/>
+          <a:chExt cx="0" cy="0"/>
+        </a:xfrm>
+      </p:grpSpPr>
+      <p:sp>
+        <p:nvSpPr>
+          <p:cNvPr id="2" name="Slide Image Placeholder 1"/>
+          <p:cNvSpPr>
+            <a:spLocks noGrp="1"/>
+          </p:cNvSpPr>
+          <p:nvPr>
+            <p:ph type="sldImg" idx="2"/>
+          </p:nvPr>
+        </p:nvSpPr>
+        <p:spPr/>
+      </p:sp>
+      <p:sp>
+        <p:nvSpPr>
+          <p:cNvPr id="3" name="Notes Placeholder 2"/>
+          <p:cNvSpPr>
+            <a:spLocks noGrp="1"/>
+          </p:cNvSpPr>
+          <p:nvPr>
+            <p:ph type="body" idx="3" sz="quarter"/>
+          </p:nvPr>
+        </p:nvSpPr>
+        <p:spPr/>
+        <p:txBody>
+          <a:bodyPr/>
+          <a:lstStyle/>
+          <a:p>
+            <a:r>
+              <a:t>Read the brief out once, then get out of the way. Full wording, since the</a:t>
+            </a:r>
+          </a:p>
+          <a:p>
+            <a:r>
+              <a:t>slide is only the bones:</a:t>
+            </a:r>
+          </a:p>
+          <a:p/>
+          <a:p>
+            <a:r>
+              <a:t>"Pick one actuator. Encode three messages: arrived, something wrong, finished.</a:t>
+            </a:r>
+          </a:p>
+          <a:p>
+            <a:r>
+              <a:t>Vary only the rhythm of the pulses and how strong they are. Then hand it to</a:t>
+            </a:r>
+          </a:p>
+          <a:p>
+            <a:r>
+              <a:t>another group with the screen turned away and see if they can name all three."</a:t>
+            </a:r>
+          </a:p>
+          <a:p/>
+          <a:p>
+            <a:r>
+              <a:t>If someone asks to add a second actuator, say no. The constraint is the</a:t>
+            </a:r>
+          </a:p>
+          <a:p>
+            <a:r>
+              <a:t>exercise.</a:t>
+            </a:r>
+          </a:p>
+        </p:txBody>
+      </p:sp>
+      <p:sp>
+        <p:nvSpPr>
+          <p:cNvPr id="4" name="Slide Number Placeholder 3"/>
+          <p:cNvSpPr>
+            <a:spLocks noGrp="1"/>
+          </p:cNvSpPr>
+          <p:nvPr>
+            <p:ph type="sldNum" idx="5" sz="quarter"/>
+          </p:nvPr>
+        </p:nvSpPr>
+        <p:spPr/>
+      </p:sp>
+    </p:spTree>
+  </p:cSld>
+  <p:clrMapOvr>
+    <a:masterClrMapping/>
+  </p:clrMapOvr>
+</p:notes>
+</file>
+
+<file path=ppt/notesSlides/notesSlide24.xml><?xml version="1.0" encoding="utf-8"?>
+<p:notes xmlns:a="http://schemas.openxmlformats.org/drawingml/2006/main" xmlns:p="http://schemas.openxmlformats.org/presentationml/2006/main" xmlns:r="http://schemas.openxmlformats.org/officeDocument/2006/relationships">
+  <p:cSld>
+    <p:spTree>
+      <p:nvGrpSpPr>
+        <p:cNvPr id="1" name=""/>
+        <p:cNvGrpSpPr/>
+        <p:nvPr/>
+      </p:nvGrpSpPr>
+      <p:grpSpPr>
+        <a:xfrm>
+          <a:off x="0" y="0"/>
+          <a:ext cx="0" cy="0"/>
+          <a:chOff x="0" y="0"/>
+          <a:chExt cx="0" cy="0"/>
+        </a:xfrm>
+      </p:grpSpPr>
+      <p:sp>
+        <p:nvSpPr>
+          <p:cNvPr id="2" name="Slide Image Placeholder 1"/>
+          <p:cNvSpPr>
+            <a:spLocks noGrp="1"/>
+          </p:cNvSpPr>
+          <p:nvPr>
+            <p:ph type="sldImg" idx="2"/>
+          </p:nvPr>
+        </p:nvSpPr>
+        <p:spPr/>
+      </p:sp>
+      <p:sp>
+        <p:nvSpPr>
+          <p:cNvPr id="3" name="Notes Placeholder 2"/>
+          <p:cNvSpPr>
+            <a:spLocks noGrp="1"/>
+          </p:cNvSpPr>
+          <p:nvPr>
+            <p:ph type="body" idx="3" sz="quarter"/>
+          </p:nvPr>
+        </p:nvSpPr>
+        <p:spPr/>
+        <p:txBody>
+          <a:bodyPr/>
+          <a:lstStyle/>
+          <a:p>
+            <a:r>
+              <a:t>The line worth repeating twice.</a:t>
+            </a:r>
+          </a:p>
+          <a:p/>
+          <a:p>
+            <a:r>
+              <a:t>Run the test: swap groups, receiver looks away, guess all three.</a:t>
+            </a:r>
+          </a:p>
+          <a:p/>
+          <a:p>
+            <a:r>
+              <a:t>Then have each group name which two got confused and what would have separated</a:t>
+            </a:r>
+          </a:p>
+          <a:p>
+            <a:r>
+              <a:t>them. That confusion is the actual learning, not the successful ones.</a:t>
+            </a:r>
+          </a:p>
+        </p:txBody>
+      </p:sp>
+      <p:sp>
+        <p:nvSpPr>
+          <p:cNvPr id="4" name="Slide Number Placeholder 3"/>
+          <p:cNvSpPr>
+            <a:spLocks noGrp="1"/>
+          </p:cNvSpPr>
+          <p:nvPr>
+            <p:ph type="sldNum" idx="5" sz="quarter"/>
+          </p:nvPr>
+        </p:nvSpPr>
+        <p:spPr/>
+      </p:sp>
+    </p:spTree>
+  </p:cSld>
+  <p:clrMapOvr>
+    <a:masterClrMapping/>
+  </p:clrMapOvr>
+</p:notes>
+</file>
+
+<file path=ppt/notesSlides/notesSlide25.xml><?xml version="1.0" encoding="utf-8"?>
+<p:notes xmlns:a="http://schemas.openxmlformats.org/drawingml/2006/main" xmlns:p="http://schemas.openxmlformats.org/presentationml/2006/main" xmlns:r="http://schemas.openxmlformats.org/officeDocument/2006/relationships">
+  <p:cSld>
+    <p:spTree>
+      <p:nvGrpSpPr>
+        <p:cNvPr id="1" name=""/>
+        <p:cNvGrpSpPr/>
+        <p:nvPr/>
+      </p:nvGrpSpPr>
+      <p:grpSpPr>
+        <a:xfrm>
+          <a:off x="0" y="0"/>
+          <a:ext cx="0" cy="0"/>
+          <a:chOff x="0" y="0"/>
+          <a:chExt cx="0" cy="0"/>
+        </a:xfrm>
+      </p:grpSpPr>
+      <p:sp>
+        <p:nvSpPr>
+          <p:cNvPr id="2" name="Slide Image Placeholder 1"/>
+          <p:cNvSpPr>
+            <a:spLocks noGrp="1"/>
+          </p:cNvSpPr>
+          <p:nvPr>
+            <p:ph type="sldImg" idx="2"/>
+          </p:nvPr>
+        </p:nvSpPr>
+        <p:spPr/>
+      </p:sp>
+      <p:sp>
+        <p:nvSpPr>
+          <p:cNvPr id="3" name="Notes Placeholder 2"/>
+          <p:cNvSpPr>
+            <a:spLocks noGrp="1"/>
+          </p:cNvSpPr>
+          <p:nvPr>
+            <p:ph type="body" idx="3" sz="quarter"/>
+          </p:nvPr>
+        </p:nvSpPr>
+        <p:spPr/>
+        <p:txBody>
+          <a:bodyPr/>
+          <a:lstStyle/>
+          <a:p>
+            <a:r>
+              <a:t>Put this up while the blind tests are running so groups can check</a:t>
+            </a:r>
+          </a:p>
+          <a:p>
+            <a:r>
+              <a:t>themselves without asking you.</a:t>
+            </a:r>
+          </a:p>
+          <a:p/>
+          <a:p>
+            <a:r>
+              <a:t>The second line matters most: a device that fires continuously when held is</a:t>
+            </a:r>
+          </a:p>
+          <a:p>
+            <a:r>
+              <a:t>the single most common bug, and it is a debounce problem.</a:t>
+            </a:r>
+          </a:p>
+        </p:txBody>
+      </p:sp>
+      <p:sp>
+        <p:nvSpPr>
+          <p:cNvPr id="4" name="Slide Number Placeholder 3"/>
+          <p:cNvSpPr>
+            <a:spLocks noGrp="1"/>
+          </p:cNvSpPr>
+          <p:nvPr>
+            <p:ph type="sldNum" idx="5" sz="quarter"/>
+          </p:nvPr>
+        </p:nvSpPr>
+        <p:spPr/>
+      </p:sp>
+    </p:spTree>
+  </p:cSld>
+  <p:clrMapOvr>
+    <a:masterClrMapping/>
+  </p:clrMapOvr>
+</p:notes>
+</file>
+
+<file path=ppt/notesSlides/notesSlide26.xml><?xml version="1.0" encoding="utf-8"?>
+<p:notes xmlns:a="http://schemas.openxmlformats.org/drawingml/2006/main" xmlns:p="http://schemas.openxmlformats.org/presentationml/2006/main" xmlns:r="http://schemas.openxmlformats.org/officeDocument/2006/relationships">
+  <p:cSld>
+    <p:spTree>
+      <p:nvGrpSpPr>
+        <p:cNvPr id="1" name=""/>
+        <p:cNvGrpSpPr/>
+        <p:nvPr/>
+      </p:nvGrpSpPr>
+      <p:grpSpPr>
+        <a:xfrm>
+          <a:off x="0" y="0"/>
+          <a:ext cx="0" cy="0"/>
+          <a:chOff x="0" y="0"/>
+          <a:chExt cx="0" cy="0"/>
+        </a:xfrm>
+      </p:grpSpPr>
+      <p:sp>
+        <p:nvSpPr>
+          <p:cNvPr id="2" name="Slide Image Placeholder 1"/>
+          <p:cNvSpPr>
+            <a:spLocks noGrp="1"/>
+          </p:cNvSpPr>
+          <p:nvPr>
+            <p:ph type="sldImg" idx="2"/>
+          </p:nvPr>
+        </p:nvSpPr>
+        <p:spPr/>
+      </p:sp>
+      <p:sp>
+        <p:nvSpPr>
+          <p:cNvPr id="3" name="Notes Placeholder 2"/>
+          <p:cNvSpPr>
+            <a:spLocks noGrp="1"/>
+          </p:cNvSpPr>
+          <p:nvPr>
+            <p:ph type="body" idx="3" sz="quarter"/>
+          </p:nvPr>
+        </p:nvSpPr>
+        <p:spPr/>
+        <p:txBody>
+          <a:bodyPr/>
+          <a:lstStyle/>
+          <a:p>
+            <a:r>
+              <a:t>The closing argument. Thirty seconds.</a:t>
+            </a:r>
+          </a:p>
+          <a:p/>
+          <a:p>
+            <a:r>
+              <a:t>If they leave with only one thing, it should be the third: pick the actuator</a:t>
+            </a:r>
+          </a:p>
+          <a:p>
+            <a:r>
+              <a:t>before designing the interaction. Discovering in week 46 that the chosen one</a:t>
+            </a:r>
+          </a:p>
+          <a:p>
+            <a:r>
+              <a:t>cannot do the job is the expensive mistake this session exists to prevent.</a:t>
+            </a:r>
+          </a:p>
+        </p:txBody>
+      </p:sp>
+      <p:sp>
+        <p:nvSpPr>
+          <p:cNvPr id="4" name="Slide Number Placeholder 3"/>
+          <p:cNvSpPr>
+            <a:spLocks noGrp="1"/>
+          </p:cNvSpPr>
+          <p:nvPr>
+            <p:ph type="sldNum" idx="5" sz="quarter"/>
+          </p:nvPr>
+        </p:nvSpPr>
+        <p:spPr/>
+      </p:sp>
+    </p:spTree>
+  </p:cSld>
+  <p:clrMapOvr>
+    <a:masterClrMapping/>
+  </p:clrMapOvr>
+</p:notes>
+</file>
+
+<file path=ppt/notesSlides/notesSlide27.xml><?xml version="1.0" encoding="utf-8"?>
+<p:notes xmlns:a="http://schemas.openxmlformats.org/drawingml/2006/main" xmlns:p="http://schemas.openxmlformats.org/presentationml/2006/main" xmlns:r="http://schemas.openxmlformats.org/officeDocument/2006/relationships">
+  <p:cSld>
+    <p:spTree>
+      <p:nvGrpSpPr>
+        <p:cNvPr id="1" name=""/>
+        <p:cNvGrpSpPr/>
+        <p:nvPr/>
+      </p:nvGrpSpPr>
+      <p:grpSpPr>
+        <a:xfrm>
+          <a:off x="0" y="0"/>
+          <a:ext cx="0" cy="0"/>
+          <a:chOff x="0" y="0"/>
+          <a:chExt cx="0" cy="0"/>
+        </a:xfrm>
+      </p:grpSpPr>
+      <p:sp>
+        <p:nvSpPr>
+          <p:cNvPr id="2" name="Slide Image Placeholder 1"/>
+          <p:cNvSpPr>
+            <a:spLocks noGrp="1"/>
+          </p:cNvSpPr>
+          <p:nvPr>
+            <p:ph type="sldImg" idx="2"/>
+          </p:nvPr>
+        </p:nvSpPr>
+        <p:spPr/>
+      </p:sp>
+      <p:sp>
+        <p:nvSpPr>
+          <p:cNvPr id="3" name="Notes Placeholder 2"/>
+          <p:cNvSpPr>
+            <a:spLocks noGrp="1"/>
+          </p:cNvSpPr>
+          <p:nvPr>
+            <p:ph type="body" idx="3" sz="quarter"/>
+          </p:nvPr>
+        </p:nvSpPr>
+        <p:spPr/>
+        <p:txBody>
+          <a:bodyPr/>
+          <a:lstStyle/>
+          <a:p>
+            <a:r>
               <a:t>Point them at the repo. Every task sketch is commented for them, and the</a:t>
             </a:r>
           </a:p>
@@ -2378,23 +2977,28 @@
           <a:lstStyle/>
           <a:p>
             <a:r>
-              <a:t>Say this out loud, do not just show it. Some students will not believe</a:t>
-            </a:r>
-          </a:p>
-          <a:p>
-            <a:r>
-              <a:t>they are allowed to skip ahead or stop early unless you tell them.</a:t>
+              <a:t>Two minutes total for this whole run of slides. It is a menu, not a</a:t>
+            </a:r>
+          </a:p>
+          <a:p>
+            <a:r>
+              <a:t>lecture: they are choosing what to go and pick up later.</a:t>
             </a:r>
           </a:p>
           <a:p/>
           <a:p>
             <a:r>
-              <a:t>The failure mode is a pair rushing all five tasks badly instead of doing two</a:t>
-            </a:r>
-          </a:p>
-          <a:p>
-            <a:r>
-              <a:t>properly. Name that explicitly.</a:t>
+              <a:t>Hold up the real part as you show each one. The photo is a reminder for people</a:t>
+            </a:r>
+          </a:p>
+          <a:p>
+            <a:r>
+              <a:t>reading the deck afterwards; the object in your hand is what lands in the</a:t>
+            </a:r>
+          </a:p>
+          <a:p>
+            <a:r>
+              <a:t>room.</a:t>
             </a:r>
           </a:p>
         </p:txBody>
@@ -5603,7 +6207,7 @@
                 </a:solidFill>
                 <a:latin typeface="Arial"/>
               </a:rPr>
-              <a:t>BEFORE YOU POWER ANYTHING</a:t>
+              <a:t>COIN MOTOR (ERM)</a:t>
             </a:r>
           </a:p>
         </p:txBody>
@@ -5618,157 +6222,190 @@
             <p:ph type="body" idx="1"/>
           </p:nvPr>
         </p:nvSpPr>
-        <p:spPr/>
+        <p:spPr>
+          <a:xfrm>
+            <a:off x="5461000" y="1905000"/>
+            <a:ext cx="5486400" cy="3302000"/>
+          </a:xfrm>
+        </p:spPr>
         <p:txBody>
           <a:bodyPr/>
           <a:lstStyle/>
           <a:p>
             <a:pPr marL="0" indent="0" algn="l">
               <a:lnSpc>
-                <a:spcPct val="128000"/>
-              </a:lnSpc>
-              <a:spcAft>
-                <a:spcPts val="600"/>
-              </a:spcAft>
-              <a:buNone/>
-            </a:pPr>
-            <a:r>
-              <a:rPr sz="1700" b="1">
-                <a:solidFill>
-                  <a:srgbClr val="000000"/>
-                </a:solidFill>
-                <a:latin typeface="Arial"/>
-              </a:rPr>
-              <a:t>The solenoid and the Peltier both pull real current.</a:t>
-            </a:r>
-          </a:p>
-          <a:p>
-            <a:pPr marL="0" indent="0" algn="l">
-              <a:lnSpc>
-                <a:spcPct val="128000"/>
-              </a:lnSpc>
-              <a:spcAft>
-                <a:spcPts val="600"/>
-              </a:spcAft>
-              <a:buNone/>
-            </a:pPr>
-            <a:r>
-              <a:rPr sz="1500" b="0">
-                <a:solidFill>
-                  <a:srgbClr val="000000"/>
-                </a:solidFill>
-                <a:latin typeface="Arial"/>
-              </a:rPr>
-              <a:t>• They need their own supply. Ask before you rewire either.</a:t>
-            </a:r>
-          </a:p>
-          <a:p>
-            <a:pPr marL="0" indent="0" algn="l">
-              <a:lnSpc>
-                <a:spcPct val="128000"/>
+                <a:spcPct val="130000"/>
+              </a:lnSpc>
+              <a:spcAft>
+                <a:spcPts val="1200"/>
+              </a:spcAft>
+              <a:buNone/>
+            </a:pPr>
+            <a:r>
+              <a:rPr sz="1600" b="0">
+                <a:solidFill>
+                  <a:srgbClr val="000000"/>
+                </a:solidFill>
+                <a:latin typeface="Arial"/>
+              </a:rPr>
+              <a:t>An off-centre weight on a motor shaft. The same part as in your phone.</a:t>
+            </a:r>
+          </a:p>
+          <a:p>
+            <a:pPr marL="0" indent="0" algn="l">
+              <a:lnSpc>
+                <a:spcPct val="130000"/>
+              </a:lnSpc>
+              <a:spcAft>
+                <a:spcPts val="1400"/>
+              </a:spcAft>
+              <a:buNone/>
+            </a:pPr>
+            <a:r>
+              <a:rPr sz="1600" b="1">
+                <a:solidFill>
+                  <a:srgbClr val="002546"/>
+                </a:solidFill>
+                <a:latin typeface="Arial"/>
+              </a:rPr>
+              <a:t>Feels like: a buzz you cannot make gentle and fast at once.</a:t>
+            </a:r>
+          </a:p>
+          <a:p>
+            <a:pPr marL="0" indent="0" algn="l">
+              <a:lnSpc>
+                <a:spcPct val="130000"/>
+              </a:lnSpc>
+              <a:spcAft>
+                <a:spcPts val="400"/>
+              </a:spcAft>
+              <a:buNone/>
+            </a:pPr>
+            <a:r>
+              <a:rPr sz="900" b="1">
+                <a:solidFill>
+                  <a:srgbClr val="595959"/>
+                </a:solidFill>
+                <a:latin typeface="Arial"/>
+              </a:rPr>
+              <a:t>USED FOR</a:t>
+            </a:r>
+          </a:p>
+          <a:p>
+            <a:pPr marL="0" indent="0" algn="l">
+              <a:lnSpc>
+                <a:spcPct val="130000"/>
+              </a:lnSpc>
+              <a:spcAft>
+                <a:spcPts val="1400"/>
+              </a:spcAft>
+              <a:buNone/>
+            </a:pPr>
+            <a:r>
+              <a:rPr sz="1400" b="0">
+                <a:solidFill>
+                  <a:srgbClr val="000000"/>
+                </a:solidFill>
+                <a:latin typeface="Arial"/>
+              </a:rPr>
+              <a:t>Phone notifications, controller rumble, anything worn under clothing.</a:t>
+            </a:r>
+          </a:p>
+          <a:p>
+            <a:pPr marL="0" indent="0" algn="l">
+              <a:lnSpc>
+                <a:spcPct val="130000"/>
               </a:lnSpc>
               <a:spcAft>
                 <a:spcPts val="0"/>
               </a:spcAft>
               <a:buNone/>
             </a:pPr>
-          </a:p>
-          <a:p>
-            <a:pPr marL="0" indent="0" algn="l">
-              <a:lnSpc>
-                <a:spcPct val="128000"/>
-              </a:lnSpc>
-              <a:spcAft>
-                <a:spcPts val="600"/>
-              </a:spcAft>
-              <a:buNone/>
-            </a:pPr>
-            <a:r>
-              <a:rPr sz="1700" b="1">
-                <a:solidFill>
-                  <a:srgbClr val="000000"/>
-                </a:solidFill>
-                <a:latin typeface="Arial"/>
-              </a:rPr>
-              <a:t>The Peltier needs its heatsink on. Every time.</a:t>
-            </a:r>
-          </a:p>
-          <a:p>
-            <a:pPr marL="0" indent="0" algn="l">
-              <a:lnSpc>
-                <a:spcPct val="128000"/>
-              </a:lnSpc>
-              <a:spcAft>
-                <a:spcPts val="600"/>
-              </a:spcAft>
-              <a:buNone/>
-            </a:pPr>
-            <a:r>
-              <a:rPr sz="1500" b="0">
-                <a:solidFill>
-                  <a:srgbClr val="000000"/>
-                </a:solidFill>
-                <a:latin typeface="Arial"/>
-              </a:rPr>
-              <a:t>• Without it the tile cooks itself in about a minute.</a:t>
-            </a:r>
-          </a:p>
-          <a:p>
-            <a:pPr marL="0" indent="0" algn="l">
-              <a:lnSpc>
-                <a:spcPct val="128000"/>
-              </a:lnSpc>
-              <a:spcAft>
-                <a:spcPts val="0"/>
-              </a:spcAft>
-              <a:buNone/>
-            </a:pPr>
-          </a:p>
-          <a:p>
-            <a:pPr marL="0" indent="0" algn="l">
-              <a:lnSpc>
-                <a:spcPct val="128000"/>
-              </a:lnSpc>
-              <a:spcAft>
-                <a:spcPts val="600"/>
-              </a:spcAft>
-              <a:buNone/>
-            </a:pPr>
-            <a:r>
-              <a:rPr sz="1700" b="1">
-                <a:solidFill>
-                  <a:srgbClr val="000000"/>
-                </a:solidFill>
-                <a:latin typeface="Arial"/>
-              </a:rPr>
-              <a:t>Never drive a motor straight from a pin.</a:t>
-            </a:r>
-          </a:p>
-          <a:p>
-            <a:pPr marL="0" indent="0" algn="l">
-              <a:lnSpc>
-                <a:spcPct val="128000"/>
-              </a:lnSpc>
-              <a:spcAft>
-                <a:spcPts val="600"/>
-              </a:spcAft>
-              <a:buNone/>
-            </a:pPr>
-            <a:r>
-              <a:rPr sz="1500" b="0">
-                <a:solidFill>
-                  <a:srgbClr val="000000"/>
-                </a:solidFill>
-                <a:latin typeface="Arial"/>
-              </a:rPr>
-              <a:t>• 40 mA limit. The motor wants nearly twice that.</a:t>
+            <a:r>
+              <a:rPr sz="1200" b="0">
+                <a:solidFill>
+                  <a:srgbClr val="595959"/>
+                </a:solidFill>
+                <a:latin typeface="Consolas"/>
+              </a:rPr>
+              <a:t>10mm 3V  |  D9 PWM  |  ~75 mA  |  ~12 kr</a:t>
+            </a:r>
+          </a:p>
+        </p:txBody>
+      </p:sp>
+      <p:sp>
+        <p:nvSpPr>
+          <p:cNvPr id="4" name="Rectangle 3"/>
+          <p:cNvSpPr/>
+          <p:nvPr/>
+        </p:nvSpPr>
+        <p:spPr>
+          <a:xfrm>
+            <a:off x="914400" y="1905000"/>
+            <a:ext cx="4191000" cy="3175000"/>
+          </a:xfrm>
+          <a:prstGeom prst="rect">
+            <a:avLst/>
+          </a:prstGeom>
+          <a:noFill/>
+          <a:ln w="12700">
+            <a:solidFill>
+              <a:srgbClr val="595959"/>
+            </a:solidFill>
+            <a:prstDash val="dash"/>
+          </a:ln>
+          <a:effectLst/>
+        </p:spPr>
+        <p:style>
+          <a:lnRef idx="1">
+            <a:schemeClr val="accent1"/>
+          </a:lnRef>
+          <a:fillRef idx="3">
+            <a:schemeClr val="accent1"/>
+          </a:fillRef>
+          <a:effectRef idx="2">
+            <a:schemeClr val="accent1"/>
+          </a:effectRef>
+          <a:fontRef idx="minor">
+            <a:schemeClr val="lt1"/>
+          </a:fontRef>
+        </p:style>
+        <p:txBody>
+          <a:bodyPr rtlCol="0" anchor="ctr" wrap="square" lIns="127000" rIns="127000"/>
+          <a:lstStyle/>
+          <a:p>
+            <a:pPr algn="ctr"/>
+            <a:r>
+              <a:rPr sz="900" b="1">
+                <a:solidFill>
+                  <a:srgbClr val="595959"/>
+                </a:solidFill>
+                <a:latin typeface="Arial"/>
+              </a:rPr>
+              <a:t>PHOTO</a:t>
+            </a:r>
+          </a:p>
+          <a:p>
+            <a:pPr algn="ctr">
+              <a:lnSpc>
+                <a:spcPct val="120000"/>
+              </a:lnSpc>
+            </a:pPr>
+            <a:r>
+              <a:rPr sz="1100">
+                <a:solidFill>
+                  <a:srgbClr val="595959"/>
+                </a:solidFill>
+                <a:latin typeface="Arial"/>
+              </a:rPr>
+              <a:t>Coin motor (ERM)</a:t>
             </a:r>
           </a:p>
         </p:txBody>
       </p:sp>
       <p:pic>
         <p:nvPicPr>
-          <p:cNvPr id="4" name="Picture 3" descr="wordmark_dark.png"/>
+          <p:cNvPr id="5" name="Picture 4" descr="wordmark_dark.png"/>
           <p:cNvPicPr>
             <a:picLocks noChangeAspect="1"/>
           </p:cNvPicPr>
@@ -5792,7 +6429,7 @@
       </p:pic>
       <p:pic>
         <p:nvPicPr>
-          <p:cNvPr id="5" name="Picture 4" descr="seal_dark.png"/>
+          <p:cNvPr id="6" name="Picture 5" descr="seal_dark.png"/>
           <p:cNvPicPr>
             <a:picLocks noChangeAspect="1"/>
           </p:cNvPicPr>
@@ -5857,7 +6494,7 @@
                 </a:solidFill>
                 <a:latin typeface="Arial"/>
               </a:rPr>
-              <a:t>THE ONE THAT SURPRISES PEOPLE</a:t>
+              <a:t>LRA AND PIEZO DISC</a:t>
             </a:r>
           </a:p>
         </p:txBody>
@@ -5872,14 +6509,39 @@
             <p:ph type="body" idx="1"/>
           </p:nvPr>
         </p:nvSpPr>
-        <p:spPr/>
+        <p:spPr>
+          <a:xfrm>
+            <a:off x="5461000" y="1905000"/>
+            <a:ext cx="5486400" cy="3302000"/>
+          </a:xfrm>
+        </p:spPr>
         <p:txBody>
           <a:bodyPr/>
           <a:lstStyle/>
           <a:p>
             <a:pPr marL="0" indent="0" algn="l">
               <a:lnSpc>
-                <a:spcPct val="128000"/>
+                <a:spcPct val="130000"/>
+              </a:lnSpc>
+              <a:spcAft>
+                <a:spcPts val="1200"/>
+              </a:spcAft>
+              <a:buNone/>
+            </a:pPr>
+            <a:r>
+              <a:rPr sz="1600" b="0">
+                <a:solidFill>
+                  <a:srgbClr val="000000"/>
+                </a:solidFill>
+                <a:latin typeface="Arial"/>
+              </a:rPr>
+              <a:t>Two ways out of the coin motor's compromise. The LRA hits resonance in about 5 ms and stops just as fast.</a:t>
+            </a:r>
+          </a:p>
+          <a:p>
+            <a:pPr marL="0" indent="0" algn="l">
+              <a:lnSpc>
+                <a:spcPct val="130000"/>
               </a:lnSpc>
               <a:spcAft>
                 <a:spcPts val="1400"/>
@@ -5887,162 +6549,150 @@
               <a:buNone/>
             </a:pPr>
             <a:r>
-              <a:rPr sz="1700" b="0">
+              <a:rPr sz="1600" b="1">
+                <a:solidFill>
+                  <a:srgbClr val="002546"/>
+                </a:solidFill>
+                <a:latin typeface="Arial"/>
+              </a:rPr>
+              <a:t>Feels like: a crisp click. The phone-keyboard feel.</a:t>
+            </a:r>
+          </a:p>
+          <a:p>
+            <a:pPr marL="0" indent="0" algn="l">
+              <a:lnSpc>
+                <a:spcPct val="130000"/>
+              </a:lnSpc>
+              <a:spcAft>
+                <a:spcPts val="400"/>
+              </a:spcAft>
+              <a:buNone/>
+            </a:pPr>
+            <a:r>
+              <a:rPr sz="900" b="1">
                 <a:solidFill>
                   <a:srgbClr val="595959"/>
                 </a:solidFill>
                 <a:latin typeface="Arial"/>
               </a:rPr>
-              <a:t>Touch input for the price of a wire. The thinking is where it costs you.</a:t>
-            </a:r>
-          </a:p>
-          <a:p>
-            <a:pPr marL="0" indent="0" algn="l">
-              <a:lnSpc>
-                <a:spcPct val="128000"/>
-              </a:lnSpc>
-              <a:spcAft>
-                <a:spcPts val="600"/>
-              </a:spcAft>
-              <a:buNone/>
-            </a:pPr>
-            <a:r>
-              <a:rPr sz="1700" b="1">
-                <a:solidFill>
-                  <a:srgbClr val="000000"/>
-                </a:solidFill>
-                <a:latin typeface="Arial"/>
-              </a:rPr>
-              <a:t>reading &gt; baselineAverage() * 1.01</a:t>
-            </a:r>
-          </a:p>
-          <a:p>
-            <a:pPr marL="0" indent="0" algn="l">
-              <a:lnSpc>
-                <a:spcPct val="128000"/>
+              <a:t>USED FOR</a:t>
+            </a:r>
+          </a:p>
+          <a:p>
+            <a:pPr marL="0" indent="0" algn="l">
+              <a:lnSpc>
+                <a:spcPct val="130000"/>
+              </a:lnSpc>
+              <a:spcAft>
+                <a:spcPts val="1400"/>
+              </a:spcAft>
+              <a:buNone/>
+            </a:pPr>
+            <a:r>
+              <a:rPr sz="1400" b="0">
+                <a:solidFill>
+                  <a:srgbClr val="000000"/>
+                </a:solidFill>
+                <a:latin typeface="Arial"/>
+              </a:rPr>
+              <a:t>Keyboard clicks, watch taps, anything where lag would feel broken.</a:t>
+            </a:r>
+          </a:p>
+          <a:p>
+            <a:pPr marL="0" indent="0" algn="l">
+              <a:lnSpc>
+                <a:spcPct val="130000"/>
               </a:lnSpc>
               <a:spcAft>
                 <a:spcPts val="0"/>
               </a:spcAft>
               <a:buNone/>
             </a:pPr>
-          </a:p>
-          <a:p>
-            <a:pPr marL="0" indent="0" algn="l">
-              <a:lnSpc>
-                <a:spcPct val="128000"/>
-              </a:lnSpc>
-              <a:spcAft>
-                <a:spcPts val="600"/>
-              </a:spcAft>
-              <a:buNone/>
-            </a:pPr>
-            <a:r>
-              <a:rPr sz="1700" b="1">
-                <a:solidFill>
-                  <a:srgbClr val="000000"/>
-                </a:solidFill>
-                <a:latin typeface="Arial"/>
-              </a:rPr>
-              <a:t>Threshold is relative, never absolute</a:t>
-            </a:r>
-          </a:p>
-          <a:p>
-            <a:pPr marL="0" indent="0" algn="l">
-              <a:lnSpc>
-                <a:spcPct val="128000"/>
-              </a:lnSpc>
-              <a:spcAft>
-                <a:spcPts val="600"/>
-              </a:spcAft>
-              <a:buNone/>
-            </a:pPr>
-            <a:r>
-              <a:rPr sz="1500" b="0">
-                <a:solidFill>
-                  <a:srgbClr val="000000"/>
-                </a:solidFill>
-                <a:latin typeface="Arial"/>
-              </a:rPr>
-              <a:t>• Readings drift with humidity and mains hum</a:t>
-            </a:r>
-          </a:p>
-          <a:p>
-            <a:pPr marL="0" indent="0" algn="l">
-              <a:lnSpc>
-                <a:spcPct val="128000"/>
-              </a:lnSpc>
-              <a:spcAft>
-                <a:spcPts val="600"/>
-              </a:spcAft>
-              <a:buNone/>
-            </a:pPr>
-            <a:r>
-              <a:rPr sz="1500" b="0">
-                <a:solidFill>
-                  <a:srgbClr val="000000"/>
-                </a:solidFill>
-                <a:latin typeface="Arial"/>
-              </a:rPr>
-              <a:t>• Fixed threshold works at 9am, fails at 1pm</a:t>
-            </a:r>
-          </a:p>
-          <a:p>
-            <a:pPr marL="0" indent="0" algn="l">
-              <a:lnSpc>
-                <a:spcPct val="128000"/>
-              </a:lnSpc>
-              <a:spcAft>
-                <a:spcPts val="0"/>
-              </a:spcAft>
-              <a:buNone/>
-            </a:pPr>
-          </a:p>
-          <a:p>
-            <a:pPr marL="0" indent="0" algn="l">
-              <a:lnSpc>
-                <a:spcPct val="128000"/>
-              </a:lnSpc>
-              <a:spcAft>
-                <a:spcPts val="600"/>
-              </a:spcAft>
-              <a:buNone/>
-            </a:pPr>
-            <a:r>
-              <a:rPr sz="1700" b="1">
-                <a:solidFill>
-                  <a:srgbClr val="000000"/>
-                </a:solidFill>
-                <a:latin typeface="Arial"/>
-              </a:rPr>
-              <a:t>Baseline only learns while untouched</a:t>
-            </a:r>
-          </a:p>
-          <a:p>
-            <a:pPr marL="0" indent="0" algn="l">
-              <a:lnSpc>
-                <a:spcPct val="128000"/>
-              </a:lnSpc>
-              <a:spcAft>
-                <a:spcPts val="600"/>
-              </a:spcAft>
-              <a:buNone/>
-            </a:pPr>
-            <a:r>
-              <a:rPr sz="1500" b="0">
-                <a:solidFill>
-                  <a:srgbClr val="000000"/>
-                </a:solidFill>
-                <a:latin typeface="Arial"/>
-              </a:rPr>
-              <a:t>• Or a long press teaches it that a finger is normal</a:t>
+            <a:r>
+              <a:rPr sz="1200" b="0">
+                <a:solidFill>
+                  <a:srgbClr val="595959"/>
+                </a:solidFill>
+                <a:latin typeface="Consolas"/>
+              </a:rPr>
+              <a:t>DRV2605L I2C  |  A4/A5  |  123 effects  |  ~90 kr</a:t>
+            </a:r>
+          </a:p>
+        </p:txBody>
+      </p:sp>
+      <p:sp>
+        <p:nvSpPr>
+          <p:cNvPr id="4" name="Rectangle 3"/>
+          <p:cNvSpPr/>
+          <p:nvPr/>
+        </p:nvSpPr>
+        <p:spPr>
+          <a:xfrm>
+            <a:off x="914400" y="1905000"/>
+            <a:ext cx="4191000" cy="3175000"/>
+          </a:xfrm>
+          <a:prstGeom prst="rect">
+            <a:avLst/>
+          </a:prstGeom>
+          <a:noFill/>
+          <a:ln w="12700">
+            <a:solidFill>
+              <a:srgbClr val="595959"/>
+            </a:solidFill>
+            <a:prstDash val="dash"/>
+          </a:ln>
+          <a:effectLst/>
+        </p:spPr>
+        <p:style>
+          <a:lnRef idx="1">
+            <a:schemeClr val="accent1"/>
+          </a:lnRef>
+          <a:fillRef idx="3">
+            <a:schemeClr val="accent1"/>
+          </a:fillRef>
+          <a:effectRef idx="2">
+            <a:schemeClr val="accent1"/>
+          </a:effectRef>
+          <a:fontRef idx="minor">
+            <a:schemeClr val="lt1"/>
+          </a:fontRef>
+        </p:style>
+        <p:txBody>
+          <a:bodyPr rtlCol="0" anchor="ctr" wrap="square" lIns="127000" rIns="127000"/>
+          <a:lstStyle/>
+          <a:p>
+            <a:pPr algn="ctr"/>
+            <a:r>
+              <a:rPr sz="900" b="1">
+                <a:solidFill>
+                  <a:srgbClr val="595959"/>
+                </a:solidFill>
+                <a:latin typeface="Arial"/>
+              </a:rPr>
+              <a:t>PHOTO</a:t>
+            </a:r>
+          </a:p>
+          <a:p>
+            <a:pPr algn="ctr">
+              <a:lnSpc>
+                <a:spcPct val="120000"/>
+              </a:lnSpc>
+            </a:pPr>
+            <a:r>
+              <a:rPr sz="1100">
+                <a:solidFill>
+                  <a:srgbClr val="595959"/>
+                </a:solidFill>
+                <a:latin typeface="Arial"/>
+              </a:rPr>
+              <a:t>LRA and piezo disc</a:t>
             </a:r>
           </a:p>
         </p:txBody>
       </p:sp>
       <p:pic>
         <p:nvPicPr>
-          <p:cNvPr id="4" name="Picture 3" descr="wordmark_dark.png"/>
+          <p:cNvPr id="5" name="Picture 4" descr="wordmark_dark.png"/>
           <p:cNvPicPr>
             <a:picLocks noChangeAspect="1"/>
           </p:cNvPicPr>
@@ -6066,7 +6716,7 @@
       </p:pic>
       <p:pic>
         <p:nvPicPr>
-          <p:cNvPr id="5" name="Picture 4" descr="seal_dark.png"/>
+          <p:cNvPr id="6" name="Picture 5" descr="seal_dark.png"/>
           <p:cNvPicPr>
             <a:picLocks noChangeAspect="1"/>
           </p:cNvPicPr>
@@ -6125,20 +6775,211 @@
               <a:buNone/>
             </a:pPr>
             <a:r>
-              <a:rPr sz="4400" b="1">
-                <a:solidFill>
-                  <a:srgbClr val="000000"/>
-                </a:solidFill>
-                <a:latin typeface="Arial"/>
-              </a:rPr>
-              <a:t>INPUTS, AND PRIOR ART</a:t>
+              <a:rPr sz="3200" b="1">
+                <a:solidFill>
+                  <a:srgbClr val="000000"/>
+                </a:solidFill>
+                <a:latin typeface="Arial"/>
+              </a:rPr>
+              <a:t>SOLENOID</a:t>
+            </a:r>
+          </a:p>
+        </p:txBody>
+      </p:sp>
+      <p:sp>
+        <p:nvSpPr>
+          <p:cNvPr id="3" name="Text Placeholder 2"/>
+          <p:cNvSpPr>
+            <a:spLocks noGrp="1"/>
+          </p:cNvSpPr>
+          <p:nvPr>
+            <p:ph type="body" idx="1"/>
+          </p:nvPr>
+        </p:nvSpPr>
+        <p:spPr>
+          <a:xfrm>
+            <a:off x="5461000" y="1905000"/>
+            <a:ext cx="5486400" cy="3302000"/>
+          </a:xfrm>
+        </p:spPr>
+        <p:txBody>
+          <a:bodyPr/>
+          <a:lstStyle/>
+          <a:p>
+            <a:pPr marL="0" indent="0" algn="l">
+              <a:lnSpc>
+                <a:spcPct val="130000"/>
+              </a:lnSpc>
+              <a:spcAft>
+                <a:spcPts val="1200"/>
+              </a:spcAft>
+              <a:buNone/>
+            </a:pPr>
+            <a:r>
+              <a:rPr sz="1600" b="0">
+                <a:solidFill>
+                  <a:srgbClr val="000000"/>
+                </a:solidFill>
+                <a:latin typeface="Arial"/>
+              </a:rPr>
+              <a:t>A coil that yanks a metal rod when you energise it. No half a tap: it fires or it does not.</a:t>
+            </a:r>
+          </a:p>
+          <a:p>
+            <a:pPr marL="0" indent="0" algn="l">
+              <a:lnSpc>
+                <a:spcPct val="130000"/>
+              </a:lnSpc>
+              <a:spcAft>
+                <a:spcPts val="1400"/>
+              </a:spcAft>
+              <a:buNone/>
+            </a:pPr>
+            <a:r>
+              <a:rPr sz="1600" b="1">
+                <a:solidFill>
+                  <a:srgbClr val="002546"/>
+                </a:solidFill>
+                <a:latin typeface="Arial"/>
+              </a:rPr>
+              <a:t>Feels like: a person tapping you, not a machine signalling.</a:t>
+            </a:r>
+          </a:p>
+          <a:p>
+            <a:pPr marL="0" indent="0" algn="l">
+              <a:lnSpc>
+                <a:spcPct val="130000"/>
+              </a:lnSpc>
+              <a:spcAft>
+                <a:spcPts val="400"/>
+              </a:spcAft>
+              <a:buNone/>
+            </a:pPr>
+            <a:r>
+              <a:rPr sz="900" b="1">
+                <a:solidFill>
+                  <a:srgbClr val="595959"/>
+                </a:solidFill>
+                <a:latin typeface="Arial"/>
+              </a:rPr>
+              <a:t>USED FOR</a:t>
+            </a:r>
+          </a:p>
+          <a:p>
+            <a:pPr marL="0" indent="0" algn="l">
+              <a:lnSpc>
+                <a:spcPct val="130000"/>
+              </a:lnSpc>
+              <a:spcAft>
+                <a:spcPts val="1400"/>
+              </a:spcAft>
+              <a:buNone/>
+            </a:pPr>
+            <a:r>
+              <a:rPr sz="1400" b="0">
+                <a:solidFill>
+                  <a:srgbClr val="000000"/>
+                </a:solidFill>
+                <a:latin typeface="Arial"/>
+              </a:rPr>
+              <a:t>Navigation cues on the body, braille cells, alerts in noise.</a:t>
+            </a:r>
+          </a:p>
+          <a:p>
+            <a:pPr marL="0" indent="0" algn="l">
+              <a:lnSpc>
+                <a:spcPct val="130000"/>
+              </a:lnSpc>
+              <a:spcAft>
+                <a:spcPts val="0"/>
+              </a:spcAft>
+              <a:buNone/>
+            </a:pPr>
+            <a:r>
+              <a:rPr sz="1200" b="0">
+                <a:solidFill>
+                  <a:srgbClr val="595959"/>
+                </a:solidFill>
+                <a:latin typeface="Consolas"/>
+              </a:rPr>
+              <a:t>5V push-pull  |  D6 + MOSFET  |  ~1.1 A peak  |  ~45 kr</a:t>
+            </a:r>
+          </a:p>
+        </p:txBody>
+      </p:sp>
+      <p:sp>
+        <p:nvSpPr>
+          <p:cNvPr id="4" name="Rectangle 3"/>
+          <p:cNvSpPr/>
+          <p:nvPr/>
+        </p:nvSpPr>
+        <p:spPr>
+          <a:xfrm>
+            <a:off x="914400" y="1905000"/>
+            <a:ext cx="4191000" cy="3175000"/>
+          </a:xfrm>
+          <a:prstGeom prst="rect">
+            <a:avLst/>
+          </a:prstGeom>
+          <a:noFill/>
+          <a:ln w="12700">
+            <a:solidFill>
+              <a:srgbClr val="595959"/>
+            </a:solidFill>
+            <a:prstDash val="dash"/>
+          </a:ln>
+          <a:effectLst/>
+        </p:spPr>
+        <p:style>
+          <a:lnRef idx="1">
+            <a:schemeClr val="accent1"/>
+          </a:lnRef>
+          <a:fillRef idx="3">
+            <a:schemeClr val="accent1"/>
+          </a:fillRef>
+          <a:effectRef idx="2">
+            <a:schemeClr val="accent1"/>
+          </a:effectRef>
+          <a:fontRef idx="minor">
+            <a:schemeClr val="lt1"/>
+          </a:fontRef>
+        </p:style>
+        <p:txBody>
+          <a:bodyPr rtlCol="0" anchor="ctr" wrap="square" lIns="127000" rIns="127000"/>
+          <a:lstStyle/>
+          <a:p>
+            <a:pPr algn="ctr"/>
+            <a:r>
+              <a:rPr sz="900" b="1">
+                <a:solidFill>
+                  <a:srgbClr val="595959"/>
+                </a:solidFill>
+                <a:latin typeface="Arial"/>
+              </a:rPr>
+              <a:t>PHOTO</a:t>
+            </a:r>
+          </a:p>
+          <a:p>
+            <a:pPr algn="ctr">
+              <a:lnSpc>
+                <a:spcPct val="120000"/>
+              </a:lnSpc>
+            </a:pPr>
+            <a:r>
+              <a:rPr sz="1100">
+                <a:solidFill>
+                  <a:srgbClr val="595959"/>
+                </a:solidFill>
+                <a:latin typeface="Arial"/>
+              </a:rPr>
+              <a:t>Solenoid</a:t>
             </a:r>
           </a:p>
         </p:txBody>
       </p:sp>
       <p:pic>
         <p:nvPicPr>
-          <p:cNvPr id="3" name="Picture 2" descr="wordmark_dark.png"/>
+          <p:cNvPr id="5" name="Picture 4" descr="wordmark_dark.png"/>
           <p:cNvPicPr>
             <a:picLocks noChangeAspect="1"/>
           </p:cNvPicPr>
@@ -6162,7 +7003,7 @@
       </p:pic>
       <p:pic>
         <p:nvPicPr>
-          <p:cNvPr id="4" name="Picture 3" descr="seal_dark.png"/>
+          <p:cNvPr id="6" name="Picture 5" descr="seal_dark.png"/>
           <p:cNvPicPr>
             <a:picLocks noChangeAspect="1"/>
           </p:cNvPicPr>
@@ -6227,7 +7068,7 @@
                 </a:solidFill>
                 <a:latin typeface="Arial"/>
               </a:rPr>
-              <a:t>INPUTS WORTH KNOWING ABOUT</a:t>
+              <a:t>CAPACITIVE PAD</a:t>
             </a:r>
           </a:p>
         </p:txBody>
@@ -6242,14 +7083,39 @@
             <p:ph type="body" idx="1"/>
           </p:nvPr>
         </p:nvSpPr>
-        <p:spPr/>
+        <p:spPr>
+          <a:xfrm>
+            <a:off x="5461000" y="1905000"/>
+            <a:ext cx="5486400" cy="3302000"/>
+          </a:xfrm>
+        </p:spPr>
         <p:txBody>
           <a:bodyPr/>
           <a:lstStyle/>
           <a:p>
             <a:pPr marL="0" indent="0" algn="l">
               <a:lnSpc>
-                <a:spcPct val="128000"/>
+                <a:spcPct val="130000"/>
+              </a:lnSpc>
+              <a:spcAft>
+                <a:spcPts val="1200"/>
+              </a:spcAft>
+              <a:buNone/>
+            </a:pPr>
+            <a:r>
+              <a:rPr sz="1600" b="0">
+                <a:solidFill>
+                  <a:srgbClr val="000000"/>
+                </a:solidFill>
+                <a:latin typeface="Arial"/>
+              </a:rPr>
+              <a:t>A wire taped behind foil, card or fabric. No sensor, no breakout board.</a:t>
+            </a:r>
+          </a:p>
+          <a:p>
+            <a:pPr marL="0" indent="0" algn="l">
+              <a:lnSpc>
+                <a:spcPct val="130000"/>
               </a:lnSpc>
               <a:spcAft>
                 <a:spcPts val="1400"/>
@@ -6257,140 +7123,150 @@
               <a:buNone/>
             </a:pPr>
             <a:r>
-              <a:rPr sz="1700" b="0">
+              <a:rPr sz="1600" b="1">
+                <a:solidFill>
+                  <a:srgbClr val="002546"/>
+                </a:solidFill>
+                <a:latin typeface="Arial"/>
+              </a:rPr>
+              <a:t>Feels like: nothing. That is the point. The surface stays plain.</a:t>
+            </a:r>
+          </a:p>
+          <a:p>
+            <a:pPr marL="0" indent="0" algn="l">
+              <a:lnSpc>
+                <a:spcPct val="130000"/>
+              </a:lnSpc>
+              <a:spcAft>
+                <a:spcPts val="400"/>
+              </a:spcAft>
+              <a:buNone/>
+            </a:pPr>
+            <a:r>
+              <a:rPr sz="900" b="1">
                 <a:solidFill>
                   <a:srgbClr val="595959"/>
                 </a:solidFill>
                 <a:latin typeface="Arial"/>
               </a:rPr>
-              <a:t>One table with a sign. Wander over between tasks.</a:t>
-            </a:r>
-          </a:p>
-          <a:p>
-            <a:pPr marL="0" indent="0" algn="l">
-              <a:lnSpc>
-                <a:spcPct val="128000"/>
-              </a:lnSpc>
-              <a:spcAft>
-                <a:spcPts val="600"/>
-              </a:spcAft>
-              <a:buNone/>
-            </a:pPr>
-            <a:r>
-              <a:rPr sz="1500" b="0">
-                <a:solidFill>
-                  <a:srgbClr val="000000"/>
-                </a:solidFill>
-                <a:latin typeface="Arial"/>
-              </a:rPr>
-              <a:t>• Capacitive touch. A wire. That is task 04</a:t>
-            </a:r>
-          </a:p>
-          <a:p>
-            <a:pPr marL="0" indent="0" algn="l">
-              <a:lnSpc>
-                <a:spcPct val="128000"/>
-              </a:lnSpc>
-              <a:spcAft>
-                <a:spcPts val="600"/>
-              </a:spcAft>
-              <a:buNone/>
-            </a:pPr>
-            <a:r>
-              <a:rPr sz="1500" b="0">
-                <a:solidFill>
-                  <a:srgbClr val="000000"/>
-                </a:solidFill>
-                <a:latin typeface="Arial"/>
-              </a:rPr>
-              <a:t>• Heart rate (PPG). Useless once the hand moves</a:t>
-            </a:r>
-          </a:p>
-          <a:p>
-            <a:pPr marL="0" indent="0" algn="l">
-              <a:lnSpc>
-                <a:spcPct val="128000"/>
-              </a:lnSpc>
-              <a:spcAft>
-                <a:spcPts val="600"/>
-              </a:spcAft>
-              <a:buNone/>
-            </a:pPr>
-            <a:r>
-              <a:rPr sz="1500" b="0">
-                <a:solidFill>
-                  <a:srgbClr val="000000"/>
-                </a:solidFill>
-                <a:latin typeface="Arial"/>
-              </a:rPr>
-              <a:t>• Skin conductance (GSR). Relative change only</a:t>
-            </a:r>
-          </a:p>
-          <a:p>
-            <a:pPr marL="0" indent="0" algn="l">
-              <a:lnSpc>
-                <a:spcPct val="128000"/>
-              </a:lnSpc>
-              <a:spcAft>
-                <a:spcPts val="600"/>
-              </a:spcAft>
-              <a:buNone/>
-            </a:pPr>
-            <a:r>
-              <a:rPr sz="1500" b="0">
-                <a:solidFill>
-                  <a:srgbClr val="000000"/>
-                </a:solidFill>
-                <a:latin typeface="Arial"/>
-              </a:rPr>
-              <a:t>• Flex sensor. The cheap data glove</a:t>
-            </a:r>
-          </a:p>
-          <a:p>
-            <a:pPr marL="0" indent="0" algn="l">
-              <a:lnSpc>
-                <a:spcPct val="128000"/>
-              </a:lnSpc>
-              <a:spcAft>
-                <a:spcPts val="600"/>
-              </a:spcAft>
-              <a:buNone/>
-            </a:pPr>
-            <a:r>
-              <a:rPr sz="1500" b="0">
-                <a:solidFill>
-                  <a:srgbClr val="000000"/>
-                </a:solidFill>
-                <a:latin typeface="Arial"/>
-              </a:rPr>
-              <a:t>• Pressure (FSR). Calibrate every pad</a:t>
-            </a:r>
-          </a:p>
-          <a:p>
-            <a:pPr marL="0" indent="0" algn="l">
-              <a:lnSpc>
-                <a:spcPct val="128000"/>
-              </a:lnSpc>
-              <a:spcAft>
-                <a:spcPts val="600"/>
-              </a:spcAft>
-              <a:buNone/>
-            </a:pPr>
-            <a:r>
-              <a:rPr sz="1500" b="0">
-                <a:solidFill>
-                  <a:srgbClr val="000000"/>
-                </a:solidFill>
-                <a:latin typeface="Arial"/>
-              </a:rPr>
-              <a:t>• Your own phone. No soldering at all</a:t>
+              <a:t>USED FOR</a:t>
+            </a:r>
+          </a:p>
+          <a:p>
+            <a:pPr marL="0" indent="0" algn="l">
+              <a:lnSpc>
+                <a:spcPct val="130000"/>
+              </a:lnSpc>
+              <a:spcAft>
+                <a:spcPts val="1400"/>
+              </a:spcAft>
+              <a:buNone/>
+            </a:pPr>
+            <a:r>
+              <a:rPr sz="1400" b="0">
+                <a:solidFill>
+                  <a:srgbClr val="000000"/>
+                </a:solidFill>
+                <a:latin typeface="Arial"/>
+              </a:rPr>
+              <a:t>Invisible controls in wood or fabric, waterproof panels.</a:t>
+            </a:r>
+          </a:p>
+          <a:p>
+            <a:pPr marL="0" indent="0" algn="l">
+              <a:lnSpc>
+                <a:spcPct val="130000"/>
+              </a:lnSpc>
+              <a:spcAft>
+                <a:spcPts val="0"/>
+              </a:spcAft>
+              <a:buNone/>
+            </a:pPr>
+            <a:r>
+              <a:rPr sz="1200" b="0">
+                <a:solidFill>
+                  <a:srgbClr val="595959"/>
+                </a:solidFill>
+                <a:latin typeface="Consolas"/>
+              </a:rPr>
+              <a:t>ADCTouch  |  A0  |  ~0 kr, a wire</a:t>
+            </a:r>
+          </a:p>
+        </p:txBody>
+      </p:sp>
+      <p:sp>
+        <p:nvSpPr>
+          <p:cNvPr id="4" name="Rectangle 3"/>
+          <p:cNvSpPr/>
+          <p:nvPr/>
+        </p:nvSpPr>
+        <p:spPr>
+          <a:xfrm>
+            <a:off x="914400" y="1905000"/>
+            <a:ext cx="4191000" cy="3175000"/>
+          </a:xfrm>
+          <a:prstGeom prst="rect">
+            <a:avLst/>
+          </a:prstGeom>
+          <a:noFill/>
+          <a:ln w="12700">
+            <a:solidFill>
+              <a:srgbClr val="595959"/>
+            </a:solidFill>
+            <a:prstDash val="dash"/>
+          </a:ln>
+          <a:effectLst/>
+        </p:spPr>
+        <p:style>
+          <a:lnRef idx="1">
+            <a:schemeClr val="accent1"/>
+          </a:lnRef>
+          <a:fillRef idx="3">
+            <a:schemeClr val="accent1"/>
+          </a:fillRef>
+          <a:effectRef idx="2">
+            <a:schemeClr val="accent1"/>
+          </a:effectRef>
+          <a:fontRef idx="minor">
+            <a:schemeClr val="lt1"/>
+          </a:fontRef>
+        </p:style>
+        <p:txBody>
+          <a:bodyPr rtlCol="0" anchor="ctr" wrap="square" lIns="127000" rIns="127000"/>
+          <a:lstStyle/>
+          <a:p>
+            <a:pPr algn="ctr"/>
+            <a:r>
+              <a:rPr sz="900" b="1">
+                <a:solidFill>
+                  <a:srgbClr val="595959"/>
+                </a:solidFill>
+                <a:latin typeface="Arial"/>
+              </a:rPr>
+              <a:t>PHOTO</a:t>
+            </a:r>
+          </a:p>
+          <a:p>
+            <a:pPr algn="ctr">
+              <a:lnSpc>
+                <a:spcPct val="120000"/>
+              </a:lnSpc>
+            </a:pPr>
+            <a:r>
+              <a:rPr sz="1100">
+                <a:solidFill>
+                  <a:srgbClr val="595959"/>
+                </a:solidFill>
+                <a:latin typeface="Arial"/>
+              </a:rPr>
+              <a:t>Capacitive pad</a:t>
             </a:r>
           </a:p>
         </p:txBody>
       </p:sp>
       <p:pic>
         <p:nvPicPr>
-          <p:cNvPr id="4" name="Picture 3" descr="wordmark_dark.png"/>
+          <p:cNvPr id="5" name="Picture 4" descr="wordmark_dark.png"/>
           <p:cNvPicPr>
             <a:picLocks noChangeAspect="1"/>
           </p:cNvPicPr>
@@ -6414,7 +7290,7 @@
       </p:pic>
       <p:pic>
         <p:nvPicPr>
-          <p:cNvPr id="5" name="Picture 4" descr="seal_dark.png"/>
+          <p:cNvPr id="6" name="Picture 5" descr="seal_dark.png"/>
           <p:cNvPicPr>
             <a:picLocks noChangeAspect="1"/>
           </p:cNvPicPr>
@@ -6479,7 +7355,7 @@
                 </a:solidFill>
                 <a:latin typeface="Arial"/>
               </a:rPr>
-              <a:t>TWO RIGS THAT ALREADY EXIST</a:t>
+              <a:t>PELTIER TILE</a:t>
             </a:r>
           </a:p>
         </p:txBody>
@@ -6494,14 +7370,39 @@
             <p:ph type="body" idx="1"/>
           </p:nvPr>
         </p:nvSpPr>
-        <p:spPr/>
+        <p:spPr>
+          <a:xfrm>
+            <a:off x="5461000" y="1905000"/>
+            <a:ext cx="5486400" cy="3302000"/>
+          </a:xfrm>
+        </p:spPr>
         <p:txBody>
           <a:bodyPr/>
           <a:lstStyle/>
           <a:p>
             <a:pPr marL="0" indent="0" algn="l">
               <a:lnSpc>
-                <a:spcPct val="128000"/>
+                <a:spcPct val="130000"/>
+              </a:lnSpc>
+              <a:spcAft>
+                <a:spcPts val="1200"/>
+              </a:spcAft>
+              <a:buNone/>
+            </a:pPr>
+            <a:r>
+              <a:rPr sz="1600" b="0">
+                <a:solidFill>
+                  <a:srgbClr val="000000"/>
+                </a:solidFill>
+                <a:latin typeface="Arial"/>
+              </a:rPr>
+              <a:t>Heats one face and cools the other. Flip the current and it reverses.</a:t>
+            </a:r>
+          </a:p>
+          <a:p>
+            <a:pPr marL="0" indent="0" algn="l">
+              <a:lnSpc>
+                <a:spcPct val="130000"/>
               </a:lnSpc>
               <a:spcAft>
                 <a:spcPts val="1400"/>
@@ -6509,151 +7410,150 @@
               <a:buNone/>
             </a:pPr>
             <a:r>
-              <a:rPr sz="1700" b="0">
+              <a:rPr sz="1600" b="1">
+                <a:solidFill>
+                  <a:srgbClr val="002546"/>
+                </a:solidFill>
+                <a:latin typeface="Arial"/>
+              </a:rPr>
+              <a:t>Feels like: slow. Several seconds before you are sure which way.</a:t>
+            </a:r>
+          </a:p>
+          <a:p>
+            <a:pPr marL="0" indent="0" algn="l">
+              <a:lnSpc>
+                <a:spcPct val="130000"/>
+              </a:lnSpc>
+              <a:spcAft>
+                <a:spcPts val="400"/>
+              </a:spcAft>
+              <a:buNone/>
+            </a:pPr>
+            <a:r>
+              <a:rPr sz="900" b="1">
                 <a:solidFill>
                   <a:srgbClr val="595959"/>
                 </a:solidFill>
                 <a:latin typeface="Arial"/>
               </a:rPr>
-              <a:t>Built here, by students at roughly your stage.</a:t>
-            </a:r>
-          </a:p>
-          <a:p>
-            <a:pPr marL="0" indent="0" algn="l">
-              <a:lnSpc>
-                <a:spcPct val="128000"/>
-              </a:lnSpc>
-              <a:spcAft>
-                <a:spcPts val="600"/>
-              </a:spcAft>
-              <a:buNone/>
-            </a:pPr>
-            <a:r>
-              <a:rPr sz="1700" b="1">
-                <a:solidFill>
-                  <a:srgbClr val="000000"/>
-                </a:solidFill>
-                <a:latin typeface="Arial"/>
-              </a:rPr>
-              <a:t>Moving screen, Arduino Uno</a:t>
-            </a:r>
-          </a:p>
-          <a:p>
-            <a:pPr marL="0" indent="0" algn="l">
-              <a:lnSpc>
-                <a:spcPct val="128000"/>
-              </a:lnSpc>
-              <a:spcAft>
-                <a:spcPts val="600"/>
-              </a:spcAft>
-              <a:buNone/>
-            </a:pPr>
-            <a:r>
-              <a:rPr sz="1500" b="0">
-                <a:solidFill>
-                  <a:srgbClr val="000000"/>
-                </a:solidFill>
-                <a:latin typeface="Arial"/>
-              </a:rPr>
-              <a:t>• Breathes when idle. Retreats when touched</a:t>
-            </a:r>
-          </a:p>
-          <a:p>
-            <a:pPr marL="0" indent="0" algn="l">
-              <a:lnSpc>
-                <a:spcPct val="128000"/>
-              </a:lnSpc>
-              <a:spcAft>
-                <a:spcPts val="600"/>
-              </a:spcAft>
-              <a:buNone/>
-            </a:pPr>
-            <a:r>
-              <a:rPr sz="1500" b="0">
-                <a:solidFill>
-                  <a:srgbClr val="000000"/>
-                </a:solidFill>
-                <a:latin typeface="Arial"/>
-              </a:rPr>
-              <a:t>• Easing and idle motion do the work. A dozen lines</a:t>
-            </a:r>
-          </a:p>
-          <a:p>
-            <a:pPr marL="0" indent="0" algn="l">
-              <a:lnSpc>
-                <a:spcPct val="128000"/>
+              <a:t>USED FOR</a:t>
+            </a:r>
+          </a:p>
+          <a:p>
+            <a:pPr marL="0" indent="0" algn="l">
+              <a:lnSpc>
+                <a:spcPct val="130000"/>
+              </a:lnSpc>
+              <a:spcAft>
+                <a:spcPts val="1400"/>
+              </a:spcAft>
+              <a:buNone/>
+            </a:pPr>
+            <a:r>
+              <a:rPr sz="1400" b="0">
+                <a:solidFill>
+                  <a:srgbClr val="000000"/>
+                </a:solidFill>
+                <a:latin typeface="Arial"/>
+              </a:rPr>
+              <a:t>Slow ambient state. Never an alert.</a:t>
+            </a:r>
+          </a:p>
+          <a:p>
+            <a:pPr marL="0" indent="0" algn="l">
+              <a:lnSpc>
+                <a:spcPct val="130000"/>
               </a:lnSpc>
               <a:spcAft>
                 <a:spcPts val="0"/>
               </a:spcAft>
               <a:buNone/>
             </a:pPr>
-          </a:p>
-          <a:p>
-            <a:pPr marL="0" indent="0" algn="l">
-              <a:lnSpc>
-                <a:spcPct val="128000"/>
-              </a:lnSpc>
-              <a:spcAft>
-                <a:spcPts val="600"/>
-              </a:spcAft>
-              <a:buNone/>
-            </a:pPr>
-            <a:r>
-              <a:rPr sz="1700" b="1">
-                <a:solidFill>
-                  <a:srgbClr val="000000"/>
-                </a:solidFill>
-                <a:latin typeface="Arial"/>
-              </a:rPr>
-              <a:t>Instrumented sock, ESP32</a:t>
-            </a:r>
-          </a:p>
-          <a:p>
-            <a:pPr marL="0" indent="0" algn="l">
-              <a:lnSpc>
-                <a:spcPct val="128000"/>
-              </a:lnSpc>
-              <a:spcAft>
-                <a:spcPts val="600"/>
-              </a:spcAft>
-              <a:buNone/>
-            </a:pPr>
-            <a:r>
-              <a:rPr sz="1500" b="0">
-                <a:solidFill>
-                  <a:srgbClr val="000000"/>
-                </a:solidFill>
-                <a:latin typeface="Arial"/>
-              </a:rPr>
-              <a:t>• Six force sensors under a foot, batched over Wi-Fi</a:t>
-            </a:r>
-          </a:p>
-          <a:p>
-            <a:pPr marL="0" indent="0" algn="l">
-              <a:lnSpc>
-                <a:spcPct val="128000"/>
-              </a:lnSpc>
-              <a:spcAft>
-                <a:spcPts val="600"/>
-              </a:spcAft>
-              <a:buNone/>
-            </a:pPr>
-            <a:r>
-              <a:rPr sz="1500" b="0">
-                <a:solidFill>
-                  <a:srgbClr val="000000"/>
-                </a:solidFill>
-                <a:latin typeface="Arial"/>
-              </a:rPr>
-              <a:t>• Calibrate per sensor. Batch your writes</a:t>
+            <a:r>
+              <a:rPr sz="1200" b="0">
+                <a:solidFill>
+                  <a:srgbClr val="595959"/>
+                </a:solidFill>
+                <a:latin typeface="Consolas"/>
+              </a:rPr>
+              <a:t>TEC1-12706  |  D3 + D5  |  2-4 A  |  ~70 kr</a:t>
+            </a:r>
+          </a:p>
+        </p:txBody>
+      </p:sp>
+      <p:sp>
+        <p:nvSpPr>
+          <p:cNvPr id="4" name="Rectangle 3"/>
+          <p:cNvSpPr/>
+          <p:nvPr/>
+        </p:nvSpPr>
+        <p:spPr>
+          <a:xfrm>
+            <a:off x="914400" y="1905000"/>
+            <a:ext cx="4191000" cy="3175000"/>
+          </a:xfrm>
+          <a:prstGeom prst="rect">
+            <a:avLst/>
+          </a:prstGeom>
+          <a:noFill/>
+          <a:ln w="12700">
+            <a:solidFill>
+              <a:srgbClr val="595959"/>
+            </a:solidFill>
+            <a:prstDash val="dash"/>
+          </a:ln>
+          <a:effectLst/>
+        </p:spPr>
+        <p:style>
+          <a:lnRef idx="1">
+            <a:schemeClr val="accent1"/>
+          </a:lnRef>
+          <a:fillRef idx="3">
+            <a:schemeClr val="accent1"/>
+          </a:fillRef>
+          <a:effectRef idx="2">
+            <a:schemeClr val="accent1"/>
+          </a:effectRef>
+          <a:fontRef idx="minor">
+            <a:schemeClr val="lt1"/>
+          </a:fontRef>
+        </p:style>
+        <p:txBody>
+          <a:bodyPr rtlCol="0" anchor="ctr" wrap="square" lIns="127000" rIns="127000"/>
+          <a:lstStyle/>
+          <a:p>
+            <a:pPr algn="ctr"/>
+            <a:r>
+              <a:rPr sz="900" b="1">
+                <a:solidFill>
+                  <a:srgbClr val="595959"/>
+                </a:solidFill>
+                <a:latin typeface="Arial"/>
+              </a:rPr>
+              <a:t>PHOTO</a:t>
+            </a:r>
+          </a:p>
+          <a:p>
+            <a:pPr algn="ctr">
+              <a:lnSpc>
+                <a:spcPct val="120000"/>
+              </a:lnSpc>
+            </a:pPr>
+            <a:r>
+              <a:rPr sz="1100">
+                <a:solidFill>
+                  <a:srgbClr val="595959"/>
+                </a:solidFill>
+                <a:latin typeface="Arial"/>
+              </a:rPr>
+              <a:t>Peltier tile</a:t>
             </a:r>
           </a:p>
         </p:txBody>
       </p:sp>
       <p:pic>
         <p:nvPicPr>
-          <p:cNvPr id="4" name="Picture 3" descr="wordmark_dark.png"/>
+          <p:cNvPr id="5" name="Picture 4" descr="wordmark_dark.png"/>
           <p:cNvPicPr>
             <a:picLocks noChangeAspect="1"/>
           </p:cNvPicPr>
@@ -6677,7 +7577,7 @@
       </p:pic>
       <p:pic>
         <p:nvPicPr>
-          <p:cNvPr id="5" name="Picture 4" descr="seal_dark.png"/>
+          <p:cNvPr id="6" name="Picture 5" descr="seal_dark.png"/>
           <p:cNvPicPr>
             <a:picLocks noChangeAspect="1"/>
           </p:cNvPicPr>
@@ -6736,20 +7636,211 @@
               <a:buNone/>
             </a:pPr>
             <a:r>
-              <a:rPr sz="4400" b="1">
-                <a:solidFill>
-                  <a:srgbClr val="000000"/>
-                </a:solidFill>
-                <a:latin typeface="Arial"/>
-              </a:rPr>
-              <a:t>BUILD ONE SIGNAL</a:t>
+              <a:rPr sz="3200" b="1">
+                <a:solidFill>
+                  <a:srgbClr val="000000"/>
+                </a:solidFill>
+                <a:latin typeface="Arial"/>
+              </a:rPr>
+              <a:t>TRANSDUCER</a:t>
+            </a:r>
+          </a:p>
+        </p:txBody>
+      </p:sp>
+      <p:sp>
+        <p:nvSpPr>
+          <p:cNvPr id="3" name="Text Placeholder 2"/>
+          <p:cNvSpPr>
+            <a:spLocks noGrp="1"/>
+          </p:cNvSpPr>
+          <p:nvPr>
+            <p:ph type="body" idx="1"/>
+          </p:nvPr>
+        </p:nvSpPr>
+        <p:spPr>
+          <a:xfrm>
+            <a:off x="5461000" y="1905000"/>
+            <a:ext cx="5486400" cy="3302000"/>
+          </a:xfrm>
+        </p:spPr>
+        <p:txBody>
+          <a:bodyPr/>
+          <a:lstStyle/>
+          <a:p>
+            <a:pPr marL="0" indent="0" algn="l">
+              <a:lnSpc>
+                <a:spcPct val="130000"/>
+              </a:lnSpc>
+              <a:spcAft>
+                <a:spcPts val="1200"/>
+              </a:spcAft>
+              <a:buNone/>
+            </a:pPr>
+            <a:r>
+              <a:rPr sz="1600" b="0">
+                <a:solidFill>
+                  <a:srgbClr val="000000"/>
+                </a:solidFill>
+                <a:latin typeface="Arial"/>
+              </a:rPr>
+              <a:t>Drives a plate so one frequency is felt and another is heard, from the same driver.</a:t>
+            </a:r>
+          </a:p>
+          <a:p>
+            <a:pPr marL="0" indent="0" algn="l">
+              <a:lnSpc>
+                <a:spcPct val="130000"/>
+              </a:lnSpc>
+              <a:spcAft>
+                <a:spcPts val="1400"/>
+              </a:spcAft>
+              <a:buNone/>
+            </a:pPr>
+            <a:r>
+              <a:rPr sz="1600" b="1">
+                <a:solidFill>
+                  <a:srgbClr val="002546"/>
+                </a:solidFill>
+                <a:latin typeface="Arial"/>
+              </a:rPr>
+              <a:t>Feels like: more certain, rather than louder.</a:t>
+            </a:r>
+          </a:p>
+          <a:p>
+            <a:pPr marL="0" indent="0" algn="l">
+              <a:lnSpc>
+                <a:spcPct val="130000"/>
+              </a:lnSpc>
+              <a:spcAft>
+                <a:spcPts val="400"/>
+              </a:spcAft>
+              <a:buNone/>
+            </a:pPr>
+            <a:r>
+              <a:rPr sz="900" b="1">
+                <a:solidFill>
+                  <a:srgbClr val="595959"/>
+                </a:solidFill>
+                <a:latin typeface="Arial"/>
+              </a:rPr>
+              <a:t>USED FOR</a:t>
+            </a:r>
+          </a:p>
+          <a:p>
+            <a:pPr marL="0" indent="0" algn="l">
+              <a:lnSpc>
+                <a:spcPct val="130000"/>
+              </a:lnSpc>
+              <a:spcAft>
+                <a:spcPts val="1400"/>
+              </a:spcAft>
+              <a:buNone/>
+            </a:pPr>
+            <a:r>
+              <a:rPr sz="1400" b="0">
+                <a:solidFill>
+                  <a:srgbClr val="000000"/>
+                </a:solidFill>
+                <a:latin typeface="Arial"/>
+              </a:rPr>
+              <a:t>Noisy or bright environments, and accessibility.</a:t>
+            </a:r>
+          </a:p>
+          <a:p>
+            <a:pPr marL="0" indent="0" algn="l">
+              <a:lnSpc>
+                <a:spcPct val="130000"/>
+              </a:lnSpc>
+              <a:spcAft>
+                <a:spcPts val="0"/>
+              </a:spcAft>
+              <a:buNone/>
+            </a:pPr>
+            <a:r>
+              <a:rPr sz="1200" b="0">
+                <a:solidFill>
+                  <a:srgbClr val="595959"/>
+                </a:solidFill>
+                <a:latin typeface="Consolas"/>
+              </a:rPr>
+              <a:t>Bone-conduction  |  D11 + PAM8403  |  ~110 kr</a:t>
+            </a:r>
+          </a:p>
+        </p:txBody>
+      </p:sp>
+      <p:sp>
+        <p:nvSpPr>
+          <p:cNvPr id="4" name="Rectangle 3"/>
+          <p:cNvSpPr/>
+          <p:nvPr/>
+        </p:nvSpPr>
+        <p:spPr>
+          <a:xfrm>
+            <a:off x="914400" y="1905000"/>
+            <a:ext cx="4191000" cy="3175000"/>
+          </a:xfrm>
+          <a:prstGeom prst="rect">
+            <a:avLst/>
+          </a:prstGeom>
+          <a:noFill/>
+          <a:ln w="12700">
+            <a:solidFill>
+              <a:srgbClr val="595959"/>
+            </a:solidFill>
+            <a:prstDash val="dash"/>
+          </a:ln>
+          <a:effectLst/>
+        </p:spPr>
+        <p:style>
+          <a:lnRef idx="1">
+            <a:schemeClr val="accent1"/>
+          </a:lnRef>
+          <a:fillRef idx="3">
+            <a:schemeClr val="accent1"/>
+          </a:fillRef>
+          <a:effectRef idx="2">
+            <a:schemeClr val="accent1"/>
+          </a:effectRef>
+          <a:fontRef idx="minor">
+            <a:schemeClr val="lt1"/>
+          </a:fontRef>
+        </p:style>
+        <p:txBody>
+          <a:bodyPr rtlCol="0" anchor="ctr" wrap="square" lIns="127000" rIns="127000"/>
+          <a:lstStyle/>
+          <a:p>
+            <a:pPr algn="ctr"/>
+            <a:r>
+              <a:rPr sz="900" b="1">
+                <a:solidFill>
+                  <a:srgbClr val="595959"/>
+                </a:solidFill>
+                <a:latin typeface="Arial"/>
+              </a:rPr>
+              <a:t>PHOTO</a:t>
+            </a:r>
+          </a:p>
+          <a:p>
+            <a:pPr algn="ctr">
+              <a:lnSpc>
+                <a:spcPct val="120000"/>
+              </a:lnSpc>
+            </a:pPr>
+            <a:r>
+              <a:rPr sz="1100">
+                <a:solidFill>
+                  <a:srgbClr val="595959"/>
+                </a:solidFill>
+                <a:latin typeface="Arial"/>
+              </a:rPr>
+              <a:t>Transducer</a:t>
             </a:r>
           </a:p>
         </p:txBody>
       </p:sp>
       <p:pic>
         <p:nvPicPr>
-          <p:cNvPr id="3" name="Picture 2" descr="wordmark_dark.png"/>
+          <p:cNvPr id="5" name="Picture 4" descr="wordmark_dark.png"/>
           <p:cNvPicPr>
             <a:picLocks noChangeAspect="1"/>
           </p:cNvPicPr>
@@ -6773,7 +7864,7 @@
       </p:pic>
       <p:pic>
         <p:nvPicPr>
-          <p:cNvPr id="4" name="Picture 3" descr="seal_dark.png"/>
+          <p:cNvPr id="6" name="Picture 5" descr="seal_dark.png"/>
           <p:cNvPicPr>
             <a:picLocks noChangeAspect="1"/>
           </p:cNvPicPr>
@@ -6838,7 +7929,7 @@
                 </a:solidFill>
                 <a:latin typeface="Arial"/>
               </a:rPr>
-              <a:t>THE BRIEF</a:t>
+              <a:t>FREESTYLE IS ENCOURAGED</a:t>
             </a:r>
           </a:p>
         </p:txBody>
@@ -6863,18 +7954,69 @@
                 <a:spcPct val="128000"/>
               </a:lnSpc>
               <a:spcAft>
-                <a:spcPts val="1400"/>
+                <a:spcPts val="600"/>
+              </a:spcAft>
+              <a:buNone/>
+            </a:pPr>
+            <a:r>
+              <a:rPr sz="1700" b="1">
+                <a:solidFill>
+                  <a:srgbClr val="000000"/>
+                </a:solidFill>
+                <a:latin typeface="Arial"/>
+              </a:rPr>
+              <a:t>You do not have to do the tasks in order.</a:t>
+            </a:r>
+          </a:p>
+          <a:p>
+            <a:pPr marL="0" indent="0" algn="l">
+              <a:lnSpc>
+                <a:spcPct val="128000"/>
+              </a:lnSpc>
+              <a:spcAft>
+                <a:spcPts val="600"/>
+              </a:spcAft>
+              <a:buNone/>
+            </a:pPr>
+            <a:r>
+              <a:rPr sz="1700" b="1">
+                <a:solidFill>
+                  <a:srgbClr val="000000"/>
+                </a:solidFill>
+                <a:latin typeface="Arial"/>
+              </a:rPr>
+              <a:t>You do not have to finish them.</a:t>
+            </a:r>
+          </a:p>
+          <a:p>
+            <a:pPr marL="0" indent="0" algn="l">
+              <a:lnSpc>
+                <a:spcPct val="128000"/>
+              </a:lnSpc>
+              <a:spcAft>
+                <a:spcPts val="0"/>
+              </a:spcAft>
+              <a:buNone/>
+            </a:pPr>
+          </a:p>
+          <a:p>
+            <a:pPr marL="0" indent="0" algn="l">
+              <a:lnSpc>
+                <a:spcPct val="128000"/>
+              </a:lnSpc>
+              <a:spcAft>
+                <a:spcPts val="600"/>
               </a:spcAft>
               <a:buNone/>
             </a:pPr>
             <a:r>
               <a:rPr sz="1700" b="0">
                 <a:solidFill>
-                  <a:srgbClr val="595959"/>
-                </a:solidFill>
-                <a:latin typeface="Arial"/>
-              </a:rPr>
-              <a:t>30 minutes. Not long enough to be precious about it.</a:t>
+                  <a:srgbClr val="000000"/>
+                </a:solidFill>
+                <a:latin typeface="Arial"/>
+              </a:rPr>
+              <a:t>Getting task 01 working and then properly playing with task 02 beats rushing through all five.</a:t>
             </a:r>
           </a:p>
           <a:p>
@@ -6883,160 +8025,29 @@
                 <a:spcPct val="128000"/>
               </a:lnSpc>
               <a:spcAft>
+                <a:spcPts val="0"/>
+              </a:spcAft>
+              <a:buNone/>
+            </a:pPr>
+          </a:p>
+          <a:p>
+            <a:pPr marL="0" indent="0" algn="l">
+              <a:lnSpc>
+                <a:spcPct val="128000"/>
+              </a:lnSpc>
+              <a:spcAft>
                 <a:spcPts val="600"/>
               </a:spcAft>
               <a:buNone/>
             </a:pPr>
             <a:r>
-              <a:rPr sz="1700" b="1">
-                <a:solidFill>
-                  <a:srgbClr val="000000"/>
-                </a:solidFill>
-                <a:latin typeface="Arial"/>
-              </a:rPr>
-              <a:t>One actuator. Three messages</a:t>
-            </a:r>
-          </a:p>
-          <a:p>
-            <a:pPr marL="0" indent="0" algn="l">
-              <a:lnSpc>
-                <a:spcPct val="128000"/>
-              </a:lnSpc>
-              <a:spcAft>
-                <a:spcPts val="600"/>
-              </a:spcAft>
-              <a:buNone/>
-            </a:pPr>
-            <a:r>
-              <a:rPr sz="1500" b="0">
-                <a:solidFill>
-                  <a:srgbClr val="000000"/>
-                </a:solidFill>
-                <a:latin typeface="Arial"/>
-              </a:rPr>
-              <a:t>• Arrived. Something wrong. Finished</a:t>
-            </a:r>
-          </a:p>
-          <a:p>
-            <a:pPr marL="0" indent="0" algn="l">
-              <a:lnSpc>
-                <a:spcPct val="128000"/>
-              </a:lnSpc>
-              <a:spcAft>
-                <a:spcPts val="0"/>
-              </a:spcAft>
-              <a:buNone/>
-            </a:pPr>
-          </a:p>
-          <a:p>
-            <a:pPr marL="0" indent="0" algn="l">
-              <a:lnSpc>
-                <a:spcPct val="128000"/>
-              </a:lnSpc>
-              <a:spcAft>
-                <a:spcPts val="600"/>
-              </a:spcAft>
-              <a:buNone/>
-            </a:pPr>
-            <a:r>
-              <a:rPr sz="1700" b="1">
-                <a:solidFill>
-                  <a:srgbClr val="000000"/>
-                </a:solidFill>
-                <a:latin typeface="Arial"/>
-              </a:rPr>
-              <a:t>Vary two things only</a:t>
-            </a:r>
-          </a:p>
-          <a:p>
-            <a:pPr marL="0" indent="0" algn="l">
-              <a:lnSpc>
-                <a:spcPct val="128000"/>
-              </a:lnSpc>
-              <a:spcAft>
-                <a:spcPts val="600"/>
-              </a:spcAft>
-              <a:buNone/>
-            </a:pPr>
-            <a:r>
-              <a:rPr sz="1500" b="0">
-                <a:solidFill>
-                  <a:srgbClr val="000000"/>
-                </a:solidFill>
-                <a:latin typeface="Arial"/>
-              </a:rPr>
-              <a:t>• Rhythm of the pulses</a:t>
-            </a:r>
-          </a:p>
-          <a:p>
-            <a:pPr marL="0" indent="0" algn="l">
-              <a:lnSpc>
-                <a:spcPct val="128000"/>
-              </a:lnSpc>
-              <a:spcAft>
-                <a:spcPts val="600"/>
-              </a:spcAft>
-              <a:buNone/>
-            </a:pPr>
-            <a:r>
-              <a:rPr sz="1500" b="0">
-                <a:solidFill>
-                  <a:srgbClr val="000000"/>
-                </a:solidFill>
-                <a:latin typeface="Arial"/>
-              </a:rPr>
-              <a:t>• How strong they are</a:t>
-            </a:r>
-          </a:p>
-          <a:p>
-            <a:pPr marL="0" indent="0" algn="l">
-              <a:lnSpc>
-                <a:spcPct val="128000"/>
-              </a:lnSpc>
-              <a:spcAft>
-                <a:spcPts val="0"/>
-              </a:spcAft>
-              <a:buNone/>
-            </a:pPr>
-          </a:p>
-          <a:p>
-            <a:pPr marL="0" indent="0" algn="l">
-              <a:lnSpc>
-                <a:spcPct val="128000"/>
-              </a:lnSpc>
-              <a:spcAft>
-                <a:spcPts val="600"/>
-              </a:spcAft>
-              <a:buNone/>
-            </a:pPr>
-            <a:r>
-              <a:rPr sz="1700" b="1">
-                <a:solidFill>
-                  <a:srgbClr val="000000"/>
-                </a:solidFill>
-                <a:latin typeface="Arial"/>
-              </a:rPr>
-              <a:t>Blind test: they name all three</a:t>
-            </a:r>
-          </a:p>
-          <a:p>
-            <a:pPr marL="0" indent="0" algn="l">
-              <a:lnSpc>
-                <a:spcPct val="128000"/>
-              </a:lnSpc>
-              <a:spcAft>
-                <a:spcPts val="600"/>
-              </a:spcAft>
-              <a:buNone/>
-            </a:pPr>
-            <a:r>
-              <a:rPr sz="1500" b="0">
-                <a:solidFill>
-                  <a:srgbClr val="000000"/>
-                </a:solidFill>
-                <a:latin typeface="Arial"/>
-              </a:rPr>
-              <a:t>• Note which two got confused, and why</a:t>
+              <a:rPr sz="1700" b="0">
+                <a:solidFill>
+                  <a:srgbClr val="000000"/>
+                </a:solidFill>
+                <a:latin typeface="Arial"/>
+              </a:rPr>
+              <a:t>If you want to drive something that is not in front of you, go and get it.</a:t>
             </a:r>
           </a:p>
         </p:txBody>
@@ -7132,7 +8143,7 @@
                 </a:solidFill>
                 <a:latin typeface="Arial"/>
               </a:rPr>
-              <a:t>THE CONSTRAINT THAT MATTERS</a:t>
+              <a:t>BEFORE YOU POWER ANYTHING</a:t>
             </a:r>
           </a:p>
         </p:txBody>
@@ -7168,7 +8179,7 @@
                 </a:solidFill>
                 <a:latin typeface="Arial"/>
               </a:rPr>
-              <a:t>The recipient cannot look at the device.</a:t>
+              <a:t>The solenoid and the Peltier both pull real current.</a:t>
             </a:r>
           </a:p>
           <a:p>
@@ -7177,6 +8188,26 @@
                 <a:spcPct val="128000"/>
               </a:lnSpc>
               <a:spcAft>
+                <a:spcPts val="600"/>
+              </a:spcAft>
+              <a:buNone/>
+            </a:pPr>
+            <a:r>
+              <a:rPr sz="1500" b="0">
+                <a:solidFill>
+                  <a:srgbClr val="000000"/>
+                </a:solidFill>
+                <a:latin typeface="Arial"/>
+              </a:rPr>
+              <a:t>• They need their own supply. Ask before you rewire either.</a:t>
+            </a:r>
+          </a:p>
+          <a:p>
+            <a:pPr marL="0" indent="0" algn="l">
+              <a:lnSpc>
+                <a:spcPct val="128000"/>
+              </a:lnSpc>
+              <a:spcAft>
                 <a:spcPts val="0"/>
               </a:spcAft>
               <a:buNone/>
@@ -7193,13 +8224,13 @@
               <a:buNone/>
             </a:pPr>
             <a:r>
-              <a:rPr sz="1700" b="0">
-                <a:solidFill>
-                  <a:srgbClr val="000000"/>
-                </a:solidFill>
-                <a:latin typeface="Arial"/>
-              </a:rPr>
-              <a:t>If it only works while someone watches a screen,</a:t>
+              <a:rPr sz="1700" b="1">
+                <a:solidFill>
+                  <a:srgbClr val="000000"/>
+                </a:solidFill>
+                <a:latin typeface="Arial"/>
+              </a:rPr>
+              <a:t>The Peltier needs its heatsink on. Every time.</a:t>
             </a:r>
           </a:p>
           <a:p>
@@ -7213,13 +8244,64 @@
               <a:buNone/>
             </a:pPr>
             <a:r>
-              <a:rPr sz="1700" b="0">
-                <a:solidFill>
-                  <a:srgbClr val="000000"/>
-                </a:solidFill>
-                <a:latin typeface="Arial"/>
-              </a:rPr>
-              <a:t>you built a visual interface with a motor glued to it.</a:t>
+              <a:rPr sz="1500" b="0">
+                <a:solidFill>
+                  <a:srgbClr val="000000"/>
+                </a:solidFill>
+                <a:latin typeface="Arial"/>
+              </a:rPr>
+              <a:t>• Without it the tile cooks itself in about a minute.</a:t>
+            </a:r>
+          </a:p>
+          <a:p>
+            <a:pPr marL="0" indent="0" algn="l">
+              <a:lnSpc>
+                <a:spcPct val="128000"/>
+              </a:lnSpc>
+              <a:spcAft>
+                <a:spcPts val="0"/>
+              </a:spcAft>
+              <a:buNone/>
+            </a:pPr>
+          </a:p>
+          <a:p>
+            <a:pPr marL="0" indent="0" algn="l">
+              <a:lnSpc>
+                <a:spcPct val="128000"/>
+              </a:lnSpc>
+              <a:spcAft>
+                <a:spcPts val="600"/>
+              </a:spcAft>
+              <a:buNone/>
+            </a:pPr>
+            <a:r>
+              <a:rPr sz="1700" b="1">
+                <a:solidFill>
+                  <a:srgbClr val="000000"/>
+                </a:solidFill>
+                <a:latin typeface="Arial"/>
+              </a:rPr>
+              <a:t>Never drive a motor straight from a pin.</a:t>
+            </a:r>
+          </a:p>
+          <a:p>
+            <a:pPr marL="0" indent="0" algn="l">
+              <a:lnSpc>
+                <a:spcPct val="128000"/>
+              </a:lnSpc>
+              <a:spcAft>
+                <a:spcPts val="600"/>
+              </a:spcAft>
+              <a:buNone/>
+            </a:pPr>
+            <a:r>
+              <a:rPr sz="1500" b="0">
+                <a:solidFill>
+                  <a:srgbClr val="000000"/>
+                </a:solidFill>
+                <a:latin typeface="Arial"/>
+              </a:rPr>
+              <a:t>• 40 mA limit. The motor wants nearly twice that.</a:t>
             </a:r>
           </a:p>
         </p:txBody>
@@ -7315,7 +8397,7 @@
                 </a:solidFill>
                 <a:latin typeface="Arial"/>
               </a:rPr>
-              <a:t>TEST IT</a:t>
+              <a:t>THE ONE THAT SURPRISES PEOPLE</a:t>
             </a:r>
           </a:p>
         </p:txBody>
@@ -7351,7 +8433,7 @@
                 </a:solidFill>
                 <a:latin typeface="Arial"/>
               </a:rPr>
-              <a:t>Hand your device to another group with the screen turned away.</a:t>
+              <a:t>Touch input for the price of a wire. The thinking is where it costs you.</a:t>
             </a:r>
           </a:p>
           <a:p>
@@ -7365,13 +8447,64 @@
               <a:buNone/>
             </a:pPr>
             <a:r>
+              <a:rPr sz="1700" b="1">
+                <a:solidFill>
+                  <a:srgbClr val="000000"/>
+                </a:solidFill>
+                <a:latin typeface="Arial"/>
+              </a:rPr>
+              <a:t>reading &gt; baselineAverage() * 1.01</a:t>
+            </a:r>
+          </a:p>
+          <a:p>
+            <a:pPr marL="0" indent="0" algn="l">
+              <a:lnSpc>
+                <a:spcPct val="128000"/>
+              </a:lnSpc>
+              <a:spcAft>
+                <a:spcPts val="0"/>
+              </a:spcAft>
+              <a:buNone/>
+            </a:pPr>
+          </a:p>
+          <a:p>
+            <a:pPr marL="0" indent="0" algn="l">
+              <a:lnSpc>
+                <a:spcPct val="128000"/>
+              </a:lnSpc>
+              <a:spcAft>
+                <a:spcPts val="600"/>
+              </a:spcAft>
+              <a:buNone/>
+            </a:pPr>
+            <a:r>
+              <a:rPr sz="1700" b="1">
+                <a:solidFill>
+                  <a:srgbClr val="000000"/>
+                </a:solidFill>
+                <a:latin typeface="Arial"/>
+              </a:rPr>
+              <a:t>Threshold is relative, never absolute</a:t>
+            </a:r>
+          </a:p>
+          <a:p>
+            <a:pPr marL="0" indent="0" algn="l">
+              <a:lnSpc>
+                <a:spcPct val="128000"/>
+              </a:lnSpc>
+              <a:spcAft>
+                <a:spcPts val="600"/>
+              </a:spcAft>
+              <a:buNone/>
+            </a:pPr>
+            <a:r>
               <a:rPr sz="1500" b="0">
                 <a:solidFill>
                   <a:srgbClr val="000000"/>
                 </a:solidFill>
                 <a:latin typeface="Arial"/>
               </a:rPr>
-              <a:t>• They can tell all three messages apart.</a:t>
+              <a:t>• Readings drift with humidity and mains hum</a:t>
             </a:r>
           </a:p>
           <a:p>
@@ -7391,7 +8524,7 @@
                 </a:solidFill>
                 <a:latin typeface="Arial"/>
               </a:rPr>
-              <a:t>• It does not fire continuously when held.</a:t>
+              <a:t>• Fixed threshold works at 9am, fails at 1pm</a:t>
             </a:r>
           </a:p>
           <a:p>
@@ -7400,38 +8533,49 @@
                 <a:spcPct val="128000"/>
               </a:lnSpc>
               <a:spcAft>
+                <a:spcPts val="0"/>
+              </a:spcAft>
+              <a:buNone/>
+            </a:pPr>
+          </a:p>
+          <a:p>
+            <a:pPr marL="0" indent="0" algn="l">
+              <a:lnSpc>
+                <a:spcPct val="128000"/>
+              </a:lnSpc>
+              <a:spcAft>
                 <a:spcPts val="600"/>
               </a:spcAft>
               <a:buNone/>
             </a:pPr>
             <a:r>
+              <a:rPr sz="1700" b="1">
+                <a:solidFill>
+                  <a:srgbClr val="000000"/>
+                </a:solidFill>
+                <a:latin typeface="Arial"/>
+              </a:rPr>
+              <a:t>Baseline only learns while untouched</a:t>
+            </a:r>
+          </a:p>
+          <a:p>
+            <a:pPr marL="0" indent="0" algn="l">
+              <a:lnSpc>
+                <a:spcPct val="128000"/>
+              </a:lnSpc>
+              <a:spcAft>
+                <a:spcPts val="600"/>
+              </a:spcAft>
+              <a:buNone/>
+            </a:pPr>
+            <a:r>
               <a:rPr sz="1500" b="0">
                 <a:solidFill>
                   <a:srgbClr val="000000"/>
                 </a:solidFill>
                 <a:latin typeface="Arial"/>
               </a:rPr>
-              <a:t>• You know which two got confused, and what would have separated them.</a:t>
-            </a:r>
-          </a:p>
-          <a:p>
-            <a:pPr marL="0" indent="0" algn="l">
-              <a:lnSpc>
-                <a:spcPct val="128000"/>
-              </a:lnSpc>
-              <a:spcAft>
-                <a:spcPts val="600"/>
-              </a:spcAft>
-              <a:buNone/>
-            </a:pPr>
-            <a:r>
-              <a:rPr sz="1500" b="0">
-                <a:solidFill>
-                  <a:srgbClr val="000000"/>
-                </a:solidFill>
-                <a:latin typeface="Arial"/>
-              </a:rPr>
-              <a:t>• It still works when they are not looking at it.</a:t>
+              <a:t>• Or a long press teaches it that a finger is normal</a:t>
             </a:r>
           </a:p>
         </p:txBody>
@@ -7521,198 +8665,20 @@
               <a:buNone/>
             </a:pPr>
             <a:r>
-              <a:rPr sz="3200" b="1">
-                <a:solidFill>
-                  <a:srgbClr val="000000"/>
-                </a:solidFill>
-                <a:latin typeface="Arial"/>
-              </a:rPr>
-              <a:t>WHAT YOU ACTUALLY LEARN</a:t>
-            </a:r>
-          </a:p>
-        </p:txBody>
-      </p:sp>
-      <p:sp>
-        <p:nvSpPr>
-          <p:cNvPr id="3" name="Text Placeholder 2"/>
-          <p:cNvSpPr>
-            <a:spLocks noGrp="1"/>
-          </p:cNvSpPr>
-          <p:nvPr>
-            <p:ph type="body" idx="1"/>
-          </p:nvPr>
-        </p:nvSpPr>
-        <p:spPr/>
-        <p:txBody>
-          <a:bodyPr/>
-          <a:lstStyle/>
-          <a:p>
-            <a:pPr marL="0" indent="0" algn="l">
-              <a:lnSpc>
-                <a:spcPct val="128000"/>
-              </a:lnSpc>
-              <a:spcAft>
-                <a:spcPts val="1400"/>
-              </a:spcAft>
-              <a:buNone/>
-            </a:pPr>
-            <a:r>
-              <a:rPr sz="1700" b="0">
-                <a:solidFill>
-                  <a:srgbClr val="595959"/>
-                </a:solidFill>
-                <a:latin typeface="Arial"/>
-              </a:rPr>
-              <a:t>Three things you cannot get from a datasheet.</a:t>
-            </a:r>
-          </a:p>
-          <a:p>
-            <a:pPr marL="0" indent="0" algn="l">
-              <a:lnSpc>
-                <a:spcPct val="128000"/>
-              </a:lnSpc>
-              <a:spcAft>
-                <a:spcPts val="600"/>
-              </a:spcAft>
-              <a:buNone/>
-            </a:pPr>
-            <a:r>
-              <a:rPr sz="1700" b="1">
-                <a:solidFill>
-                  <a:srgbClr val="000000"/>
-                </a:solidFill>
-                <a:latin typeface="Arial"/>
-              </a:rPr>
-              <a:t>What things feel like</a:t>
-            </a:r>
-          </a:p>
-          <a:p>
-            <a:pPr marL="0" indent="0" algn="l">
-              <a:lnSpc>
-                <a:spcPct val="128000"/>
-              </a:lnSpc>
-              <a:spcAft>
-                <a:spcPts val="600"/>
-              </a:spcAft>
-              <a:buNone/>
-            </a:pPr>
-            <a:r>
-              <a:rPr sz="1500" b="0">
-                <a:solidFill>
-                  <a:srgbClr val="000000"/>
-                </a:solidFill>
-                <a:latin typeface="Arial"/>
-              </a:rPr>
-              <a:t>• A motor is a nudge. A solenoid is a knock. A Peltier is slow.</a:t>
-            </a:r>
-          </a:p>
-          <a:p>
-            <a:pPr marL="0" indent="0" algn="l">
-              <a:lnSpc>
-                <a:spcPct val="128000"/>
-              </a:lnSpc>
-              <a:spcAft>
-                <a:spcPts val="0"/>
-              </a:spcAft>
-              <a:buNone/>
-            </a:pPr>
-          </a:p>
-          <a:p>
-            <a:pPr marL="0" indent="0" algn="l">
-              <a:lnSpc>
-                <a:spcPct val="128000"/>
-              </a:lnSpc>
-              <a:spcAft>
-                <a:spcPts val="600"/>
-              </a:spcAft>
-              <a:buNone/>
-            </a:pPr>
-            <a:r>
-              <a:rPr sz="1700" b="1">
-                <a:solidFill>
-                  <a:srgbClr val="000000"/>
-                </a:solidFill>
-                <a:latin typeface="Arial"/>
-              </a:rPr>
-              <a:t>How to drive one</a:t>
-            </a:r>
-          </a:p>
-          <a:p>
-            <a:pPr marL="0" indent="0" algn="l">
-              <a:lnSpc>
-                <a:spcPct val="128000"/>
-              </a:lnSpc>
-              <a:spcAft>
-                <a:spcPts val="600"/>
-              </a:spcAft>
-              <a:buNone/>
-            </a:pPr>
-            <a:r>
-              <a:rPr sz="1500" b="0">
-                <a:solidFill>
-                  <a:srgbClr val="000000"/>
-                </a:solidFill>
-                <a:latin typeface="Arial"/>
-              </a:rPr>
-              <a:t>• PWM, direction, debouncing, and why a motor never goes straight to a pin.</a:t>
-            </a:r>
-          </a:p>
-          <a:p>
-            <a:pPr marL="0" indent="0" algn="l">
-              <a:lnSpc>
-                <a:spcPct val="128000"/>
-              </a:lnSpc>
-              <a:spcAft>
-                <a:spcPts val="0"/>
-              </a:spcAft>
-              <a:buNone/>
-            </a:pPr>
-          </a:p>
-          <a:p>
-            <a:pPr marL="0" indent="0" algn="l">
-              <a:lnSpc>
-                <a:spcPct val="128000"/>
-              </a:lnSpc>
-              <a:spcAft>
-                <a:spcPts val="600"/>
-              </a:spcAft>
-              <a:buNone/>
-            </a:pPr>
-            <a:r>
-              <a:rPr sz="1700" b="1">
-                <a:solidFill>
-                  <a:srgbClr val="000000"/>
-                </a:solidFill>
-                <a:latin typeface="Arial"/>
-              </a:rPr>
-              <a:t>What to pick</a:t>
-            </a:r>
-          </a:p>
-          <a:p>
-            <a:pPr marL="0" indent="0" algn="l">
-              <a:lnSpc>
-                <a:spcPct val="128000"/>
-              </a:lnSpc>
-              <a:spcAft>
-                <a:spcPts val="600"/>
-              </a:spcAft>
-              <a:buNone/>
-            </a:pPr>
-            <a:r>
-              <a:rPr sz="1500" b="0">
-                <a:solidFill>
-                  <a:srgbClr val="000000"/>
-                </a:solidFill>
-                <a:latin typeface="Arial"/>
-              </a:rPr>
-              <a:t>• Choosing the actuator before designing the interaction, not in week 46.</a:t>
+              <a:rPr sz="4400" b="1">
+                <a:solidFill>
+                  <a:srgbClr val="000000"/>
+                </a:solidFill>
+                <a:latin typeface="Arial"/>
+              </a:rPr>
+              <a:t>INPUTS, AND PRIOR ART</a:t>
             </a:r>
           </a:p>
         </p:txBody>
       </p:sp>
       <p:pic>
         <p:nvPicPr>
-          <p:cNvPr id="4" name="Picture 3" descr="wordmark_dark.png"/>
+          <p:cNvPr id="3" name="Picture 2" descr="wordmark_dark.png"/>
           <p:cNvPicPr>
             <a:picLocks noChangeAspect="1"/>
           </p:cNvPicPr>
@@ -7736,7 +8702,7 @@
       </p:pic>
       <p:pic>
         <p:nvPicPr>
-          <p:cNvPr id="5" name="Picture 4" descr="seal_dark.png"/>
+          <p:cNvPr id="4" name="Picture 3" descr="seal_dark.png"/>
           <p:cNvPicPr>
             <a:picLocks noChangeAspect="1"/>
           </p:cNvPicPr>
@@ -8015,6 +8981,1580 @@
             <a:spLocks noGrp="1"/>
           </p:cNvSpPr>
           <p:nvPr>
+            <p:ph type="title"/>
+          </p:nvPr>
+        </p:nvSpPr>
+        <p:spPr/>
+        <p:txBody>
+          <a:bodyPr/>
+          <a:lstStyle/>
+          <a:p>
+            <a:pPr marL="0" indent="0" algn="l">
+              <a:buNone/>
+            </a:pPr>
+            <a:r>
+              <a:rPr sz="3200" b="1">
+                <a:solidFill>
+                  <a:srgbClr val="000000"/>
+                </a:solidFill>
+                <a:latin typeface="Arial"/>
+              </a:rPr>
+              <a:t>INPUTS WORTH KNOWING ABOUT</a:t>
+            </a:r>
+          </a:p>
+        </p:txBody>
+      </p:sp>
+      <p:sp>
+        <p:nvSpPr>
+          <p:cNvPr id="3" name="Text Placeholder 2"/>
+          <p:cNvSpPr>
+            <a:spLocks noGrp="1"/>
+          </p:cNvSpPr>
+          <p:nvPr>
+            <p:ph type="body" idx="1"/>
+          </p:nvPr>
+        </p:nvSpPr>
+        <p:spPr/>
+        <p:txBody>
+          <a:bodyPr/>
+          <a:lstStyle/>
+          <a:p>
+            <a:pPr marL="0" indent="0" algn="l">
+              <a:lnSpc>
+                <a:spcPct val="128000"/>
+              </a:lnSpc>
+              <a:spcAft>
+                <a:spcPts val="1400"/>
+              </a:spcAft>
+              <a:buNone/>
+            </a:pPr>
+            <a:r>
+              <a:rPr sz="1700" b="0">
+                <a:solidFill>
+                  <a:srgbClr val="595959"/>
+                </a:solidFill>
+                <a:latin typeface="Arial"/>
+              </a:rPr>
+              <a:t>One table with a sign. Wander over between tasks.</a:t>
+            </a:r>
+          </a:p>
+          <a:p>
+            <a:pPr marL="0" indent="0" algn="l">
+              <a:lnSpc>
+                <a:spcPct val="128000"/>
+              </a:lnSpc>
+              <a:spcAft>
+                <a:spcPts val="600"/>
+              </a:spcAft>
+              <a:buNone/>
+            </a:pPr>
+            <a:r>
+              <a:rPr sz="1500" b="0">
+                <a:solidFill>
+                  <a:srgbClr val="000000"/>
+                </a:solidFill>
+                <a:latin typeface="Arial"/>
+              </a:rPr>
+              <a:t>• Capacitive touch. A wire. That is task 04</a:t>
+            </a:r>
+          </a:p>
+          <a:p>
+            <a:pPr marL="0" indent="0" algn="l">
+              <a:lnSpc>
+                <a:spcPct val="128000"/>
+              </a:lnSpc>
+              <a:spcAft>
+                <a:spcPts val="600"/>
+              </a:spcAft>
+              <a:buNone/>
+            </a:pPr>
+            <a:r>
+              <a:rPr sz="1500" b="0">
+                <a:solidFill>
+                  <a:srgbClr val="000000"/>
+                </a:solidFill>
+                <a:latin typeface="Arial"/>
+              </a:rPr>
+              <a:t>• Heart rate (PPG). Useless once the hand moves</a:t>
+            </a:r>
+          </a:p>
+          <a:p>
+            <a:pPr marL="0" indent="0" algn="l">
+              <a:lnSpc>
+                <a:spcPct val="128000"/>
+              </a:lnSpc>
+              <a:spcAft>
+                <a:spcPts val="600"/>
+              </a:spcAft>
+              <a:buNone/>
+            </a:pPr>
+            <a:r>
+              <a:rPr sz="1500" b="0">
+                <a:solidFill>
+                  <a:srgbClr val="000000"/>
+                </a:solidFill>
+                <a:latin typeface="Arial"/>
+              </a:rPr>
+              <a:t>• Skin conductance (GSR). Relative change only</a:t>
+            </a:r>
+          </a:p>
+          <a:p>
+            <a:pPr marL="0" indent="0" algn="l">
+              <a:lnSpc>
+                <a:spcPct val="128000"/>
+              </a:lnSpc>
+              <a:spcAft>
+                <a:spcPts val="600"/>
+              </a:spcAft>
+              <a:buNone/>
+            </a:pPr>
+            <a:r>
+              <a:rPr sz="1500" b="0">
+                <a:solidFill>
+                  <a:srgbClr val="000000"/>
+                </a:solidFill>
+                <a:latin typeface="Arial"/>
+              </a:rPr>
+              <a:t>• Flex sensor. The cheap data glove</a:t>
+            </a:r>
+          </a:p>
+          <a:p>
+            <a:pPr marL="0" indent="0" algn="l">
+              <a:lnSpc>
+                <a:spcPct val="128000"/>
+              </a:lnSpc>
+              <a:spcAft>
+                <a:spcPts val="600"/>
+              </a:spcAft>
+              <a:buNone/>
+            </a:pPr>
+            <a:r>
+              <a:rPr sz="1500" b="0">
+                <a:solidFill>
+                  <a:srgbClr val="000000"/>
+                </a:solidFill>
+                <a:latin typeface="Arial"/>
+              </a:rPr>
+              <a:t>• Pressure (FSR). Calibrate every pad</a:t>
+            </a:r>
+          </a:p>
+          <a:p>
+            <a:pPr marL="0" indent="0" algn="l">
+              <a:lnSpc>
+                <a:spcPct val="128000"/>
+              </a:lnSpc>
+              <a:spcAft>
+                <a:spcPts val="600"/>
+              </a:spcAft>
+              <a:buNone/>
+            </a:pPr>
+            <a:r>
+              <a:rPr sz="1500" b="0">
+                <a:solidFill>
+                  <a:srgbClr val="000000"/>
+                </a:solidFill>
+                <a:latin typeface="Arial"/>
+              </a:rPr>
+              <a:t>• Your own phone. No soldering at all</a:t>
+            </a:r>
+          </a:p>
+        </p:txBody>
+      </p:sp>
+      <p:pic>
+        <p:nvPicPr>
+          <p:cNvPr id="4" name="Picture 3" descr="wordmark_dark.png"/>
+          <p:cNvPicPr>
+            <a:picLocks noChangeAspect="1"/>
+          </p:cNvPicPr>
+          <p:nvPr/>
+        </p:nvPicPr>
+        <p:blipFill>
+          <a:blip r:embed="rId2"/>
+          <a:stretch>
+            <a:fillRect/>
+          </a:stretch>
+        </p:blipFill>
+        <p:spPr>
+          <a:xfrm>
+            <a:off x="342900" y="6184900"/>
+            <a:ext cx="2070100" cy="529560"/>
+          </a:xfrm>
+          <a:prstGeom prst="rect">
+            <a:avLst/>
+          </a:prstGeom>
+        </p:spPr>
+      </p:pic>
+      <p:pic>
+        <p:nvPicPr>
+          <p:cNvPr id="5" name="Picture 4" descr="seal_dark.png"/>
+          <p:cNvPicPr>
+            <a:picLocks noChangeAspect="1"/>
+          </p:cNvPicPr>
+          <p:nvPr/>
+        </p:nvPicPr>
+        <p:blipFill>
+          <a:blip r:embed="rId3"/>
+          <a:stretch>
+            <a:fillRect/>
+          </a:stretch>
+        </p:blipFill>
+        <p:spPr>
+          <a:xfrm>
+            <a:off x="11226800" y="5969000"/>
+            <a:ext cx="713915" cy="711200"/>
+          </a:xfrm>
+          <a:prstGeom prst="rect">
+            <a:avLst/>
+          </a:prstGeom>
+        </p:spPr>
+      </p:pic>
+    </p:spTree>
+  </p:cSld>
+  <p:clrMapOvr>
+    <a:masterClrMapping/>
+  </p:clrMapOvr>
+</p:sld>
+</file>
+
+<file path=ppt/slides/slide21.xml><?xml version="1.0" encoding="utf-8"?>
+<p:sld xmlns:a="http://schemas.openxmlformats.org/drawingml/2006/main" xmlns:p="http://schemas.openxmlformats.org/presentationml/2006/main" xmlns:r="http://schemas.openxmlformats.org/officeDocument/2006/relationships">
+  <p:cSld>
+    <p:spTree>
+      <p:nvGrpSpPr>
+        <p:cNvPr id="1" name=""/>
+        <p:cNvGrpSpPr/>
+        <p:nvPr/>
+      </p:nvGrpSpPr>
+      <p:grpSpPr/>
+      <p:sp>
+        <p:nvSpPr>
+          <p:cNvPr id="2" name="Title 1"/>
+          <p:cNvSpPr>
+            <a:spLocks noGrp="1"/>
+          </p:cNvSpPr>
+          <p:nvPr>
+            <p:ph type="title"/>
+          </p:nvPr>
+        </p:nvSpPr>
+        <p:spPr/>
+        <p:txBody>
+          <a:bodyPr/>
+          <a:lstStyle/>
+          <a:p>
+            <a:pPr marL="0" indent="0" algn="l">
+              <a:buNone/>
+            </a:pPr>
+            <a:r>
+              <a:rPr sz="3200" b="1">
+                <a:solidFill>
+                  <a:srgbClr val="000000"/>
+                </a:solidFill>
+                <a:latin typeface="Arial"/>
+              </a:rPr>
+              <a:t>TWO RIGS THAT ALREADY EXIST</a:t>
+            </a:r>
+          </a:p>
+        </p:txBody>
+      </p:sp>
+      <p:sp>
+        <p:nvSpPr>
+          <p:cNvPr id="3" name="Text Placeholder 2"/>
+          <p:cNvSpPr>
+            <a:spLocks noGrp="1"/>
+          </p:cNvSpPr>
+          <p:nvPr>
+            <p:ph type="body" idx="1"/>
+          </p:nvPr>
+        </p:nvSpPr>
+        <p:spPr/>
+        <p:txBody>
+          <a:bodyPr/>
+          <a:lstStyle/>
+          <a:p>
+            <a:pPr marL="0" indent="0" algn="l">
+              <a:lnSpc>
+                <a:spcPct val="128000"/>
+              </a:lnSpc>
+              <a:spcAft>
+                <a:spcPts val="1400"/>
+              </a:spcAft>
+              <a:buNone/>
+            </a:pPr>
+            <a:r>
+              <a:rPr sz="1700" b="0">
+                <a:solidFill>
+                  <a:srgbClr val="595959"/>
+                </a:solidFill>
+                <a:latin typeface="Arial"/>
+              </a:rPr>
+              <a:t>Built here, by students at roughly your stage.</a:t>
+            </a:r>
+          </a:p>
+          <a:p>
+            <a:pPr marL="0" indent="0" algn="l">
+              <a:lnSpc>
+                <a:spcPct val="128000"/>
+              </a:lnSpc>
+              <a:spcAft>
+                <a:spcPts val="600"/>
+              </a:spcAft>
+              <a:buNone/>
+            </a:pPr>
+            <a:r>
+              <a:rPr sz="1700" b="1">
+                <a:solidFill>
+                  <a:srgbClr val="000000"/>
+                </a:solidFill>
+                <a:latin typeface="Arial"/>
+              </a:rPr>
+              <a:t>Moving screen, Arduino Uno</a:t>
+            </a:r>
+          </a:p>
+          <a:p>
+            <a:pPr marL="0" indent="0" algn="l">
+              <a:lnSpc>
+                <a:spcPct val="128000"/>
+              </a:lnSpc>
+              <a:spcAft>
+                <a:spcPts val="600"/>
+              </a:spcAft>
+              <a:buNone/>
+            </a:pPr>
+            <a:r>
+              <a:rPr sz="1500" b="0">
+                <a:solidFill>
+                  <a:srgbClr val="000000"/>
+                </a:solidFill>
+                <a:latin typeface="Arial"/>
+              </a:rPr>
+              <a:t>• Breathes when idle. Retreats when touched</a:t>
+            </a:r>
+          </a:p>
+          <a:p>
+            <a:pPr marL="0" indent="0" algn="l">
+              <a:lnSpc>
+                <a:spcPct val="128000"/>
+              </a:lnSpc>
+              <a:spcAft>
+                <a:spcPts val="600"/>
+              </a:spcAft>
+              <a:buNone/>
+            </a:pPr>
+            <a:r>
+              <a:rPr sz="1500" b="0">
+                <a:solidFill>
+                  <a:srgbClr val="000000"/>
+                </a:solidFill>
+                <a:latin typeface="Arial"/>
+              </a:rPr>
+              <a:t>• Easing and idle motion do the work. A dozen lines</a:t>
+            </a:r>
+          </a:p>
+          <a:p>
+            <a:pPr marL="0" indent="0" algn="l">
+              <a:lnSpc>
+                <a:spcPct val="128000"/>
+              </a:lnSpc>
+              <a:spcAft>
+                <a:spcPts val="0"/>
+              </a:spcAft>
+              <a:buNone/>
+            </a:pPr>
+          </a:p>
+          <a:p>
+            <a:pPr marL="0" indent="0" algn="l">
+              <a:lnSpc>
+                <a:spcPct val="128000"/>
+              </a:lnSpc>
+              <a:spcAft>
+                <a:spcPts val="600"/>
+              </a:spcAft>
+              <a:buNone/>
+            </a:pPr>
+            <a:r>
+              <a:rPr sz="1700" b="1">
+                <a:solidFill>
+                  <a:srgbClr val="000000"/>
+                </a:solidFill>
+                <a:latin typeface="Arial"/>
+              </a:rPr>
+              <a:t>Instrumented sock, ESP32</a:t>
+            </a:r>
+          </a:p>
+          <a:p>
+            <a:pPr marL="0" indent="0" algn="l">
+              <a:lnSpc>
+                <a:spcPct val="128000"/>
+              </a:lnSpc>
+              <a:spcAft>
+                <a:spcPts val="600"/>
+              </a:spcAft>
+              <a:buNone/>
+            </a:pPr>
+            <a:r>
+              <a:rPr sz="1500" b="0">
+                <a:solidFill>
+                  <a:srgbClr val="000000"/>
+                </a:solidFill>
+                <a:latin typeface="Arial"/>
+              </a:rPr>
+              <a:t>• Six force sensors under a foot, batched over Wi-Fi</a:t>
+            </a:r>
+          </a:p>
+          <a:p>
+            <a:pPr marL="0" indent="0" algn="l">
+              <a:lnSpc>
+                <a:spcPct val="128000"/>
+              </a:lnSpc>
+              <a:spcAft>
+                <a:spcPts val="600"/>
+              </a:spcAft>
+              <a:buNone/>
+            </a:pPr>
+            <a:r>
+              <a:rPr sz="1500" b="0">
+                <a:solidFill>
+                  <a:srgbClr val="000000"/>
+                </a:solidFill>
+                <a:latin typeface="Arial"/>
+              </a:rPr>
+              <a:t>• Calibrate per sensor. Batch your writes</a:t>
+            </a:r>
+          </a:p>
+        </p:txBody>
+      </p:sp>
+      <p:pic>
+        <p:nvPicPr>
+          <p:cNvPr id="4" name="Picture 3" descr="wordmark_dark.png"/>
+          <p:cNvPicPr>
+            <a:picLocks noChangeAspect="1"/>
+          </p:cNvPicPr>
+          <p:nvPr/>
+        </p:nvPicPr>
+        <p:blipFill>
+          <a:blip r:embed="rId2"/>
+          <a:stretch>
+            <a:fillRect/>
+          </a:stretch>
+        </p:blipFill>
+        <p:spPr>
+          <a:xfrm>
+            <a:off x="342900" y="6184900"/>
+            <a:ext cx="2070100" cy="529560"/>
+          </a:xfrm>
+          <a:prstGeom prst="rect">
+            <a:avLst/>
+          </a:prstGeom>
+        </p:spPr>
+      </p:pic>
+      <p:pic>
+        <p:nvPicPr>
+          <p:cNvPr id="5" name="Picture 4" descr="seal_dark.png"/>
+          <p:cNvPicPr>
+            <a:picLocks noChangeAspect="1"/>
+          </p:cNvPicPr>
+          <p:nvPr/>
+        </p:nvPicPr>
+        <p:blipFill>
+          <a:blip r:embed="rId3"/>
+          <a:stretch>
+            <a:fillRect/>
+          </a:stretch>
+        </p:blipFill>
+        <p:spPr>
+          <a:xfrm>
+            <a:off x="11226800" y="5969000"/>
+            <a:ext cx="713915" cy="711200"/>
+          </a:xfrm>
+          <a:prstGeom prst="rect">
+            <a:avLst/>
+          </a:prstGeom>
+        </p:spPr>
+      </p:pic>
+    </p:spTree>
+  </p:cSld>
+  <p:clrMapOvr>
+    <a:masterClrMapping/>
+  </p:clrMapOvr>
+</p:sld>
+</file>
+
+<file path=ppt/slides/slide22.xml><?xml version="1.0" encoding="utf-8"?>
+<p:sld xmlns:a="http://schemas.openxmlformats.org/drawingml/2006/main" xmlns:p="http://schemas.openxmlformats.org/presentationml/2006/main" xmlns:r="http://schemas.openxmlformats.org/officeDocument/2006/relationships">
+  <p:cSld>
+    <p:spTree>
+      <p:nvGrpSpPr>
+        <p:cNvPr id="1" name=""/>
+        <p:cNvGrpSpPr/>
+        <p:nvPr/>
+      </p:nvGrpSpPr>
+      <p:grpSpPr/>
+      <p:sp>
+        <p:nvSpPr>
+          <p:cNvPr id="2" name="Title 1"/>
+          <p:cNvSpPr>
+            <a:spLocks noGrp="1"/>
+          </p:cNvSpPr>
+          <p:nvPr>
+            <p:ph type="title"/>
+          </p:nvPr>
+        </p:nvSpPr>
+        <p:spPr/>
+        <p:txBody>
+          <a:bodyPr/>
+          <a:lstStyle/>
+          <a:p>
+            <a:pPr marL="0" indent="0" algn="l">
+              <a:buNone/>
+            </a:pPr>
+            <a:r>
+              <a:rPr sz="4400" b="1">
+                <a:solidFill>
+                  <a:srgbClr val="000000"/>
+                </a:solidFill>
+                <a:latin typeface="Arial"/>
+              </a:rPr>
+              <a:t>BUILD ONE SIGNAL</a:t>
+            </a:r>
+          </a:p>
+        </p:txBody>
+      </p:sp>
+      <p:pic>
+        <p:nvPicPr>
+          <p:cNvPr id="3" name="Picture 2" descr="wordmark_dark.png"/>
+          <p:cNvPicPr>
+            <a:picLocks noChangeAspect="1"/>
+          </p:cNvPicPr>
+          <p:nvPr/>
+        </p:nvPicPr>
+        <p:blipFill>
+          <a:blip r:embed="rId2"/>
+          <a:stretch>
+            <a:fillRect/>
+          </a:stretch>
+        </p:blipFill>
+        <p:spPr>
+          <a:xfrm>
+            <a:off x="342900" y="6184900"/>
+            <a:ext cx="2070100" cy="529560"/>
+          </a:xfrm>
+          <a:prstGeom prst="rect">
+            <a:avLst/>
+          </a:prstGeom>
+        </p:spPr>
+      </p:pic>
+      <p:pic>
+        <p:nvPicPr>
+          <p:cNvPr id="4" name="Picture 3" descr="seal_dark.png"/>
+          <p:cNvPicPr>
+            <a:picLocks noChangeAspect="1"/>
+          </p:cNvPicPr>
+          <p:nvPr/>
+        </p:nvPicPr>
+        <p:blipFill>
+          <a:blip r:embed="rId3"/>
+          <a:stretch>
+            <a:fillRect/>
+          </a:stretch>
+        </p:blipFill>
+        <p:spPr>
+          <a:xfrm>
+            <a:off x="11226800" y="5969000"/>
+            <a:ext cx="713915" cy="711200"/>
+          </a:xfrm>
+          <a:prstGeom prst="rect">
+            <a:avLst/>
+          </a:prstGeom>
+        </p:spPr>
+      </p:pic>
+    </p:spTree>
+  </p:cSld>
+  <p:clrMapOvr>
+    <a:masterClrMapping/>
+  </p:clrMapOvr>
+</p:sld>
+</file>
+
+<file path=ppt/slides/slide23.xml><?xml version="1.0" encoding="utf-8"?>
+<p:sld xmlns:a="http://schemas.openxmlformats.org/drawingml/2006/main" xmlns:p="http://schemas.openxmlformats.org/presentationml/2006/main" xmlns:r="http://schemas.openxmlformats.org/officeDocument/2006/relationships">
+  <p:cSld>
+    <p:spTree>
+      <p:nvGrpSpPr>
+        <p:cNvPr id="1" name=""/>
+        <p:cNvGrpSpPr/>
+        <p:nvPr/>
+      </p:nvGrpSpPr>
+      <p:grpSpPr/>
+      <p:sp>
+        <p:nvSpPr>
+          <p:cNvPr id="2" name="Title 1"/>
+          <p:cNvSpPr>
+            <a:spLocks noGrp="1"/>
+          </p:cNvSpPr>
+          <p:nvPr>
+            <p:ph type="title"/>
+          </p:nvPr>
+        </p:nvSpPr>
+        <p:spPr/>
+        <p:txBody>
+          <a:bodyPr/>
+          <a:lstStyle/>
+          <a:p>
+            <a:pPr marL="0" indent="0" algn="l">
+              <a:buNone/>
+            </a:pPr>
+            <a:r>
+              <a:rPr sz="3200" b="1">
+                <a:solidFill>
+                  <a:srgbClr val="000000"/>
+                </a:solidFill>
+                <a:latin typeface="Arial"/>
+              </a:rPr>
+              <a:t>THE BRIEF</a:t>
+            </a:r>
+          </a:p>
+        </p:txBody>
+      </p:sp>
+      <p:sp>
+        <p:nvSpPr>
+          <p:cNvPr id="3" name="Text Placeholder 2"/>
+          <p:cNvSpPr>
+            <a:spLocks noGrp="1"/>
+          </p:cNvSpPr>
+          <p:nvPr>
+            <p:ph type="body" idx="1"/>
+          </p:nvPr>
+        </p:nvSpPr>
+        <p:spPr/>
+        <p:txBody>
+          <a:bodyPr/>
+          <a:lstStyle/>
+          <a:p>
+            <a:pPr marL="0" indent="0" algn="l">
+              <a:lnSpc>
+                <a:spcPct val="128000"/>
+              </a:lnSpc>
+              <a:spcAft>
+                <a:spcPts val="1400"/>
+              </a:spcAft>
+              <a:buNone/>
+            </a:pPr>
+            <a:r>
+              <a:rPr sz="1700" b="0">
+                <a:solidFill>
+                  <a:srgbClr val="595959"/>
+                </a:solidFill>
+                <a:latin typeface="Arial"/>
+              </a:rPr>
+              <a:t>30 minutes. Not long enough to be precious about it.</a:t>
+            </a:r>
+          </a:p>
+          <a:p>
+            <a:pPr marL="0" indent="0" algn="l">
+              <a:lnSpc>
+                <a:spcPct val="128000"/>
+              </a:lnSpc>
+              <a:spcAft>
+                <a:spcPts val="600"/>
+              </a:spcAft>
+              <a:buNone/>
+            </a:pPr>
+            <a:r>
+              <a:rPr sz="1700" b="1">
+                <a:solidFill>
+                  <a:srgbClr val="000000"/>
+                </a:solidFill>
+                <a:latin typeface="Arial"/>
+              </a:rPr>
+              <a:t>One actuator. Three messages</a:t>
+            </a:r>
+          </a:p>
+          <a:p>
+            <a:pPr marL="0" indent="0" algn="l">
+              <a:lnSpc>
+                <a:spcPct val="128000"/>
+              </a:lnSpc>
+              <a:spcAft>
+                <a:spcPts val="600"/>
+              </a:spcAft>
+              <a:buNone/>
+            </a:pPr>
+            <a:r>
+              <a:rPr sz="1500" b="0">
+                <a:solidFill>
+                  <a:srgbClr val="000000"/>
+                </a:solidFill>
+                <a:latin typeface="Arial"/>
+              </a:rPr>
+              <a:t>• Arrived. Something wrong. Finished</a:t>
+            </a:r>
+          </a:p>
+          <a:p>
+            <a:pPr marL="0" indent="0" algn="l">
+              <a:lnSpc>
+                <a:spcPct val="128000"/>
+              </a:lnSpc>
+              <a:spcAft>
+                <a:spcPts val="0"/>
+              </a:spcAft>
+              <a:buNone/>
+            </a:pPr>
+          </a:p>
+          <a:p>
+            <a:pPr marL="0" indent="0" algn="l">
+              <a:lnSpc>
+                <a:spcPct val="128000"/>
+              </a:lnSpc>
+              <a:spcAft>
+                <a:spcPts val="600"/>
+              </a:spcAft>
+              <a:buNone/>
+            </a:pPr>
+            <a:r>
+              <a:rPr sz="1700" b="1">
+                <a:solidFill>
+                  <a:srgbClr val="000000"/>
+                </a:solidFill>
+                <a:latin typeface="Arial"/>
+              </a:rPr>
+              <a:t>Vary two things only</a:t>
+            </a:r>
+          </a:p>
+          <a:p>
+            <a:pPr marL="0" indent="0" algn="l">
+              <a:lnSpc>
+                <a:spcPct val="128000"/>
+              </a:lnSpc>
+              <a:spcAft>
+                <a:spcPts val="600"/>
+              </a:spcAft>
+              <a:buNone/>
+            </a:pPr>
+            <a:r>
+              <a:rPr sz="1500" b="0">
+                <a:solidFill>
+                  <a:srgbClr val="000000"/>
+                </a:solidFill>
+                <a:latin typeface="Arial"/>
+              </a:rPr>
+              <a:t>• Rhythm of the pulses</a:t>
+            </a:r>
+          </a:p>
+          <a:p>
+            <a:pPr marL="0" indent="0" algn="l">
+              <a:lnSpc>
+                <a:spcPct val="128000"/>
+              </a:lnSpc>
+              <a:spcAft>
+                <a:spcPts val="600"/>
+              </a:spcAft>
+              <a:buNone/>
+            </a:pPr>
+            <a:r>
+              <a:rPr sz="1500" b="0">
+                <a:solidFill>
+                  <a:srgbClr val="000000"/>
+                </a:solidFill>
+                <a:latin typeface="Arial"/>
+              </a:rPr>
+              <a:t>• How strong they are</a:t>
+            </a:r>
+          </a:p>
+          <a:p>
+            <a:pPr marL="0" indent="0" algn="l">
+              <a:lnSpc>
+                <a:spcPct val="128000"/>
+              </a:lnSpc>
+              <a:spcAft>
+                <a:spcPts val="0"/>
+              </a:spcAft>
+              <a:buNone/>
+            </a:pPr>
+          </a:p>
+          <a:p>
+            <a:pPr marL="0" indent="0" algn="l">
+              <a:lnSpc>
+                <a:spcPct val="128000"/>
+              </a:lnSpc>
+              <a:spcAft>
+                <a:spcPts val="600"/>
+              </a:spcAft>
+              <a:buNone/>
+            </a:pPr>
+            <a:r>
+              <a:rPr sz="1700" b="1">
+                <a:solidFill>
+                  <a:srgbClr val="000000"/>
+                </a:solidFill>
+                <a:latin typeface="Arial"/>
+              </a:rPr>
+              <a:t>Blind test: they name all three</a:t>
+            </a:r>
+          </a:p>
+          <a:p>
+            <a:pPr marL="0" indent="0" algn="l">
+              <a:lnSpc>
+                <a:spcPct val="128000"/>
+              </a:lnSpc>
+              <a:spcAft>
+                <a:spcPts val="600"/>
+              </a:spcAft>
+              <a:buNone/>
+            </a:pPr>
+            <a:r>
+              <a:rPr sz="1500" b="0">
+                <a:solidFill>
+                  <a:srgbClr val="000000"/>
+                </a:solidFill>
+                <a:latin typeface="Arial"/>
+              </a:rPr>
+              <a:t>• Note which two got confused, and why</a:t>
+            </a:r>
+          </a:p>
+        </p:txBody>
+      </p:sp>
+      <p:pic>
+        <p:nvPicPr>
+          <p:cNvPr id="4" name="Picture 3" descr="wordmark_dark.png"/>
+          <p:cNvPicPr>
+            <a:picLocks noChangeAspect="1"/>
+          </p:cNvPicPr>
+          <p:nvPr/>
+        </p:nvPicPr>
+        <p:blipFill>
+          <a:blip r:embed="rId2"/>
+          <a:stretch>
+            <a:fillRect/>
+          </a:stretch>
+        </p:blipFill>
+        <p:spPr>
+          <a:xfrm>
+            <a:off x="342900" y="6184900"/>
+            <a:ext cx="2070100" cy="529560"/>
+          </a:xfrm>
+          <a:prstGeom prst="rect">
+            <a:avLst/>
+          </a:prstGeom>
+        </p:spPr>
+      </p:pic>
+      <p:pic>
+        <p:nvPicPr>
+          <p:cNvPr id="5" name="Picture 4" descr="seal_dark.png"/>
+          <p:cNvPicPr>
+            <a:picLocks noChangeAspect="1"/>
+          </p:cNvPicPr>
+          <p:nvPr/>
+        </p:nvPicPr>
+        <p:blipFill>
+          <a:blip r:embed="rId3"/>
+          <a:stretch>
+            <a:fillRect/>
+          </a:stretch>
+        </p:blipFill>
+        <p:spPr>
+          <a:xfrm>
+            <a:off x="11226800" y="5969000"/>
+            <a:ext cx="713915" cy="711200"/>
+          </a:xfrm>
+          <a:prstGeom prst="rect">
+            <a:avLst/>
+          </a:prstGeom>
+        </p:spPr>
+      </p:pic>
+    </p:spTree>
+  </p:cSld>
+  <p:clrMapOvr>
+    <a:masterClrMapping/>
+  </p:clrMapOvr>
+</p:sld>
+</file>
+
+<file path=ppt/slides/slide24.xml><?xml version="1.0" encoding="utf-8"?>
+<p:sld xmlns:a="http://schemas.openxmlformats.org/drawingml/2006/main" xmlns:p="http://schemas.openxmlformats.org/presentationml/2006/main" xmlns:r="http://schemas.openxmlformats.org/officeDocument/2006/relationships">
+  <p:cSld>
+    <p:spTree>
+      <p:nvGrpSpPr>
+        <p:cNvPr id="1" name=""/>
+        <p:cNvGrpSpPr/>
+        <p:nvPr/>
+      </p:nvGrpSpPr>
+      <p:grpSpPr/>
+      <p:sp>
+        <p:nvSpPr>
+          <p:cNvPr id="2" name="Title 1"/>
+          <p:cNvSpPr>
+            <a:spLocks noGrp="1"/>
+          </p:cNvSpPr>
+          <p:nvPr>
+            <p:ph type="title"/>
+          </p:nvPr>
+        </p:nvSpPr>
+        <p:spPr/>
+        <p:txBody>
+          <a:bodyPr/>
+          <a:lstStyle/>
+          <a:p>
+            <a:pPr marL="0" indent="0" algn="l">
+              <a:buNone/>
+            </a:pPr>
+            <a:r>
+              <a:rPr sz="3200" b="1">
+                <a:solidFill>
+                  <a:srgbClr val="000000"/>
+                </a:solidFill>
+                <a:latin typeface="Arial"/>
+              </a:rPr>
+              <a:t>THE CONSTRAINT THAT MATTERS</a:t>
+            </a:r>
+          </a:p>
+        </p:txBody>
+      </p:sp>
+      <p:sp>
+        <p:nvSpPr>
+          <p:cNvPr id="3" name="Text Placeholder 2"/>
+          <p:cNvSpPr>
+            <a:spLocks noGrp="1"/>
+          </p:cNvSpPr>
+          <p:nvPr>
+            <p:ph type="body" idx="1"/>
+          </p:nvPr>
+        </p:nvSpPr>
+        <p:spPr/>
+        <p:txBody>
+          <a:bodyPr/>
+          <a:lstStyle/>
+          <a:p>
+            <a:pPr marL="0" indent="0" algn="l">
+              <a:lnSpc>
+                <a:spcPct val="128000"/>
+              </a:lnSpc>
+              <a:spcAft>
+                <a:spcPts val="600"/>
+              </a:spcAft>
+              <a:buNone/>
+            </a:pPr>
+            <a:r>
+              <a:rPr sz="1700" b="1">
+                <a:solidFill>
+                  <a:srgbClr val="000000"/>
+                </a:solidFill>
+                <a:latin typeface="Arial"/>
+              </a:rPr>
+              <a:t>The recipient cannot look at the device.</a:t>
+            </a:r>
+          </a:p>
+          <a:p>
+            <a:pPr marL="0" indent="0" algn="l">
+              <a:lnSpc>
+                <a:spcPct val="128000"/>
+              </a:lnSpc>
+              <a:spcAft>
+                <a:spcPts val="0"/>
+              </a:spcAft>
+              <a:buNone/>
+            </a:pPr>
+          </a:p>
+          <a:p>
+            <a:pPr marL="0" indent="0" algn="l">
+              <a:lnSpc>
+                <a:spcPct val="128000"/>
+              </a:lnSpc>
+              <a:spcAft>
+                <a:spcPts val="600"/>
+              </a:spcAft>
+              <a:buNone/>
+            </a:pPr>
+            <a:r>
+              <a:rPr sz="1700" b="0">
+                <a:solidFill>
+                  <a:srgbClr val="000000"/>
+                </a:solidFill>
+                <a:latin typeface="Arial"/>
+              </a:rPr>
+              <a:t>If it only works while someone watches a screen,</a:t>
+            </a:r>
+          </a:p>
+          <a:p>
+            <a:pPr marL="0" indent="0" algn="l">
+              <a:lnSpc>
+                <a:spcPct val="128000"/>
+              </a:lnSpc>
+              <a:spcAft>
+                <a:spcPts val="600"/>
+              </a:spcAft>
+              <a:buNone/>
+            </a:pPr>
+            <a:r>
+              <a:rPr sz="1700" b="0">
+                <a:solidFill>
+                  <a:srgbClr val="000000"/>
+                </a:solidFill>
+                <a:latin typeface="Arial"/>
+              </a:rPr>
+              <a:t>you built a visual interface with a motor glued to it.</a:t>
+            </a:r>
+          </a:p>
+        </p:txBody>
+      </p:sp>
+      <p:pic>
+        <p:nvPicPr>
+          <p:cNvPr id="4" name="Picture 3" descr="wordmark_dark.png"/>
+          <p:cNvPicPr>
+            <a:picLocks noChangeAspect="1"/>
+          </p:cNvPicPr>
+          <p:nvPr/>
+        </p:nvPicPr>
+        <p:blipFill>
+          <a:blip r:embed="rId2"/>
+          <a:stretch>
+            <a:fillRect/>
+          </a:stretch>
+        </p:blipFill>
+        <p:spPr>
+          <a:xfrm>
+            <a:off x="342900" y="6184900"/>
+            <a:ext cx="2070100" cy="529560"/>
+          </a:xfrm>
+          <a:prstGeom prst="rect">
+            <a:avLst/>
+          </a:prstGeom>
+        </p:spPr>
+      </p:pic>
+      <p:pic>
+        <p:nvPicPr>
+          <p:cNvPr id="5" name="Picture 4" descr="seal_dark.png"/>
+          <p:cNvPicPr>
+            <a:picLocks noChangeAspect="1"/>
+          </p:cNvPicPr>
+          <p:nvPr/>
+        </p:nvPicPr>
+        <p:blipFill>
+          <a:blip r:embed="rId3"/>
+          <a:stretch>
+            <a:fillRect/>
+          </a:stretch>
+        </p:blipFill>
+        <p:spPr>
+          <a:xfrm>
+            <a:off x="11226800" y="5969000"/>
+            <a:ext cx="713915" cy="711200"/>
+          </a:xfrm>
+          <a:prstGeom prst="rect">
+            <a:avLst/>
+          </a:prstGeom>
+        </p:spPr>
+      </p:pic>
+    </p:spTree>
+  </p:cSld>
+  <p:clrMapOvr>
+    <a:masterClrMapping/>
+  </p:clrMapOvr>
+</p:sld>
+</file>
+
+<file path=ppt/slides/slide25.xml><?xml version="1.0" encoding="utf-8"?>
+<p:sld xmlns:a="http://schemas.openxmlformats.org/drawingml/2006/main" xmlns:p="http://schemas.openxmlformats.org/presentationml/2006/main" xmlns:r="http://schemas.openxmlformats.org/officeDocument/2006/relationships">
+  <p:cSld>
+    <p:spTree>
+      <p:nvGrpSpPr>
+        <p:cNvPr id="1" name=""/>
+        <p:cNvGrpSpPr/>
+        <p:nvPr/>
+      </p:nvGrpSpPr>
+      <p:grpSpPr/>
+      <p:sp>
+        <p:nvSpPr>
+          <p:cNvPr id="2" name="Title 1"/>
+          <p:cNvSpPr>
+            <a:spLocks noGrp="1"/>
+          </p:cNvSpPr>
+          <p:nvPr>
+            <p:ph type="title"/>
+          </p:nvPr>
+        </p:nvSpPr>
+        <p:spPr/>
+        <p:txBody>
+          <a:bodyPr/>
+          <a:lstStyle/>
+          <a:p>
+            <a:pPr marL="0" indent="0" algn="l">
+              <a:buNone/>
+            </a:pPr>
+            <a:r>
+              <a:rPr sz="3200" b="1">
+                <a:solidFill>
+                  <a:srgbClr val="000000"/>
+                </a:solidFill>
+                <a:latin typeface="Arial"/>
+              </a:rPr>
+              <a:t>TEST IT</a:t>
+            </a:r>
+          </a:p>
+        </p:txBody>
+      </p:sp>
+      <p:sp>
+        <p:nvSpPr>
+          <p:cNvPr id="3" name="Text Placeholder 2"/>
+          <p:cNvSpPr>
+            <a:spLocks noGrp="1"/>
+          </p:cNvSpPr>
+          <p:nvPr>
+            <p:ph type="body" idx="1"/>
+          </p:nvPr>
+        </p:nvSpPr>
+        <p:spPr/>
+        <p:txBody>
+          <a:bodyPr/>
+          <a:lstStyle/>
+          <a:p>
+            <a:pPr marL="0" indent="0" algn="l">
+              <a:lnSpc>
+                <a:spcPct val="128000"/>
+              </a:lnSpc>
+              <a:spcAft>
+                <a:spcPts val="1400"/>
+              </a:spcAft>
+              <a:buNone/>
+            </a:pPr>
+            <a:r>
+              <a:rPr sz="1700" b="0">
+                <a:solidFill>
+                  <a:srgbClr val="595959"/>
+                </a:solidFill>
+                <a:latin typeface="Arial"/>
+              </a:rPr>
+              <a:t>Hand your device to another group with the screen turned away.</a:t>
+            </a:r>
+          </a:p>
+          <a:p>
+            <a:pPr marL="0" indent="0" algn="l">
+              <a:lnSpc>
+                <a:spcPct val="128000"/>
+              </a:lnSpc>
+              <a:spcAft>
+                <a:spcPts val="600"/>
+              </a:spcAft>
+              <a:buNone/>
+            </a:pPr>
+            <a:r>
+              <a:rPr sz="1500" b="0">
+                <a:solidFill>
+                  <a:srgbClr val="000000"/>
+                </a:solidFill>
+                <a:latin typeface="Arial"/>
+              </a:rPr>
+              <a:t>• They can tell all three messages apart.</a:t>
+            </a:r>
+          </a:p>
+          <a:p>
+            <a:pPr marL="0" indent="0" algn="l">
+              <a:lnSpc>
+                <a:spcPct val="128000"/>
+              </a:lnSpc>
+              <a:spcAft>
+                <a:spcPts val="600"/>
+              </a:spcAft>
+              <a:buNone/>
+            </a:pPr>
+            <a:r>
+              <a:rPr sz="1500" b="0">
+                <a:solidFill>
+                  <a:srgbClr val="000000"/>
+                </a:solidFill>
+                <a:latin typeface="Arial"/>
+              </a:rPr>
+              <a:t>• It does not fire continuously when held.</a:t>
+            </a:r>
+          </a:p>
+          <a:p>
+            <a:pPr marL="0" indent="0" algn="l">
+              <a:lnSpc>
+                <a:spcPct val="128000"/>
+              </a:lnSpc>
+              <a:spcAft>
+                <a:spcPts val="600"/>
+              </a:spcAft>
+              <a:buNone/>
+            </a:pPr>
+            <a:r>
+              <a:rPr sz="1500" b="0">
+                <a:solidFill>
+                  <a:srgbClr val="000000"/>
+                </a:solidFill>
+                <a:latin typeface="Arial"/>
+              </a:rPr>
+              <a:t>• You know which two got confused, and what would have separated them.</a:t>
+            </a:r>
+          </a:p>
+          <a:p>
+            <a:pPr marL="0" indent="0" algn="l">
+              <a:lnSpc>
+                <a:spcPct val="128000"/>
+              </a:lnSpc>
+              <a:spcAft>
+                <a:spcPts val="600"/>
+              </a:spcAft>
+              <a:buNone/>
+            </a:pPr>
+            <a:r>
+              <a:rPr sz="1500" b="0">
+                <a:solidFill>
+                  <a:srgbClr val="000000"/>
+                </a:solidFill>
+                <a:latin typeface="Arial"/>
+              </a:rPr>
+              <a:t>• It still works when they are not looking at it.</a:t>
+            </a:r>
+          </a:p>
+        </p:txBody>
+      </p:sp>
+      <p:pic>
+        <p:nvPicPr>
+          <p:cNvPr id="4" name="Picture 3" descr="wordmark_dark.png"/>
+          <p:cNvPicPr>
+            <a:picLocks noChangeAspect="1"/>
+          </p:cNvPicPr>
+          <p:nvPr/>
+        </p:nvPicPr>
+        <p:blipFill>
+          <a:blip r:embed="rId2"/>
+          <a:stretch>
+            <a:fillRect/>
+          </a:stretch>
+        </p:blipFill>
+        <p:spPr>
+          <a:xfrm>
+            <a:off x="342900" y="6184900"/>
+            <a:ext cx="2070100" cy="529560"/>
+          </a:xfrm>
+          <a:prstGeom prst="rect">
+            <a:avLst/>
+          </a:prstGeom>
+        </p:spPr>
+      </p:pic>
+      <p:pic>
+        <p:nvPicPr>
+          <p:cNvPr id="5" name="Picture 4" descr="seal_dark.png"/>
+          <p:cNvPicPr>
+            <a:picLocks noChangeAspect="1"/>
+          </p:cNvPicPr>
+          <p:nvPr/>
+        </p:nvPicPr>
+        <p:blipFill>
+          <a:blip r:embed="rId3"/>
+          <a:stretch>
+            <a:fillRect/>
+          </a:stretch>
+        </p:blipFill>
+        <p:spPr>
+          <a:xfrm>
+            <a:off x="11226800" y="5969000"/>
+            <a:ext cx="713915" cy="711200"/>
+          </a:xfrm>
+          <a:prstGeom prst="rect">
+            <a:avLst/>
+          </a:prstGeom>
+        </p:spPr>
+      </p:pic>
+    </p:spTree>
+  </p:cSld>
+  <p:clrMapOvr>
+    <a:masterClrMapping/>
+  </p:clrMapOvr>
+</p:sld>
+</file>
+
+<file path=ppt/slides/slide26.xml><?xml version="1.0" encoding="utf-8"?>
+<p:sld xmlns:a="http://schemas.openxmlformats.org/drawingml/2006/main" xmlns:p="http://schemas.openxmlformats.org/presentationml/2006/main" xmlns:r="http://schemas.openxmlformats.org/officeDocument/2006/relationships">
+  <p:cSld>
+    <p:spTree>
+      <p:nvGrpSpPr>
+        <p:cNvPr id="1" name=""/>
+        <p:cNvGrpSpPr/>
+        <p:nvPr/>
+      </p:nvGrpSpPr>
+      <p:grpSpPr/>
+      <p:sp>
+        <p:nvSpPr>
+          <p:cNvPr id="2" name="Title 1"/>
+          <p:cNvSpPr>
+            <a:spLocks noGrp="1"/>
+          </p:cNvSpPr>
+          <p:nvPr>
+            <p:ph type="title"/>
+          </p:nvPr>
+        </p:nvSpPr>
+        <p:spPr/>
+        <p:txBody>
+          <a:bodyPr/>
+          <a:lstStyle/>
+          <a:p>
+            <a:pPr marL="0" indent="0" algn="l">
+              <a:buNone/>
+            </a:pPr>
+            <a:r>
+              <a:rPr sz="3200" b="1">
+                <a:solidFill>
+                  <a:srgbClr val="000000"/>
+                </a:solidFill>
+                <a:latin typeface="Arial"/>
+              </a:rPr>
+              <a:t>WHAT YOU ACTUALLY LEARN</a:t>
+            </a:r>
+          </a:p>
+        </p:txBody>
+      </p:sp>
+      <p:sp>
+        <p:nvSpPr>
+          <p:cNvPr id="3" name="Text Placeholder 2"/>
+          <p:cNvSpPr>
+            <a:spLocks noGrp="1"/>
+          </p:cNvSpPr>
+          <p:nvPr>
+            <p:ph type="body" idx="1"/>
+          </p:nvPr>
+        </p:nvSpPr>
+        <p:spPr/>
+        <p:txBody>
+          <a:bodyPr/>
+          <a:lstStyle/>
+          <a:p>
+            <a:pPr marL="0" indent="0" algn="l">
+              <a:lnSpc>
+                <a:spcPct val="128000"/>
+              </a:lnSpc>
+              <a:spcAft>
+                <a:spcPts val="1400"/>
+              </a:spcAft>
+              <a:buNone/>
+            </a:pPr>
+            <a:r>
+              <a:rPr sz="1700" b="0">
+                <a:solidFill>
+                  <a:srgbClr val="595959"/>
+                </a:solidFill>
+                <a:latin typeface="Arial"/>
+              </a:rPr>
+              <a:t>Three things you cannot get from a datasheet.</a:t>
+            </a:r>
+          </a:p>
+          <a:p>
+            <a:pPr marL="0" indent="0" algn="l">
+              <a:lnSpc>
+                <a:spcPct val="128000"/>
+              </a:lnSpc>
+              <a:spcAft>
+                <a:spcPts val="600"/>
+              </a:spcAft>
+              <a:buNone/>
+            </a:pPr>
+            <a:r>
+              <a:rPr sz="1700" b="1">
+                <a:solidFill>
+                  <a:srgbClr val="000000"/>
+                </a:solidFill>
+                <a:latin typeface="Arial"/>
+              </a:rPr>
+              <a:t>What things feel like</a:t>
+            </a:r>
+          </a:p>
+          <a:p>
+            <a:pPr marL="0" indent="0" algn="l">
+              <a:lnSpc>
+                <a:spcPct val="128000"/>
+              </a:lnSpc>
+              <a:spcAft>
+                <a:spcPts val="600"/>
+              </a:spcAft>
+              <a:buNone/>
+            </a:pPr>
+            <a:r>
+              <a:rPr sz="1500" b="0">
+                <a:solidFill>
+                  <a:srgbClr val="000000"/>
+                </a:solidFill>
+                <a:latin typeface="Arial"/>
+              </a:rPr>
+              <a:t>• A motor is a nudge. A solenoid is a knock. A Peltier is slow.</a:t>
+            </a:r>
+          </a:p>
+          <a:p>
+            <a:pPr marL="0" indent="0" algn="l">
+              <a:lnSpc>
+                <a:spcPct val="128000"/>
+              </a:lnSpc>
+              <a:spcAft>
+                <a:spcPts val="0"/>
+              </a:spcAft>
+              <a:buNone/>
+            </a:pPr>
+          </a:p>
+          <a:p>
+            <a:pPr marL="0" indent="0" algn="l">
+              <a:lnSpc>
+                <a:spcPct val="128000"/>
+              </a:lnSpc>
+              <a:spcAft>
+                <a:spcPts val="600"/>
+              </a:spcAft>
+              <a:buNone/>
+            </a:pPr>
+            <a:r>
+              <a:rPr sz="1700" b="1">
+                <a:solidFill>
+                  <a:srgbClr val="000000"/>
+                </a:solidFill>
+                <a:latin typeface="Arial"/>
+              </a:rPr>
+              <a:t>How to drive one</a:t>
+            </a:r>
+          </a:p>
+          <a:p>
+            <a:pPr marL="0" indent="0" algn="l">
+              <a:lnSpc>
+                <a:spcPct val="128000"/>
+              </a:lnSpc>
+              <a:spcAft>
+                <a:spcPts val="600"/>
+              </a:spcAft>
+              <a:buNone/>
+            </a:pPr>
+            <a:r>
+              <a:rPr sz="1500" b="0">
+                <a:solidFill>
+                  <a:srgbClr val="000000"/>
+                </a:solidFill>
+                <a:latin typeface="Arial"/>
+              </a:rPr>
+              <a:t>• PWM, direction, debouncing, and why a motor never goes straight to a pin.</a:t>
+            </a:r>
+          </a:p>
+          <a:p>
+            <a:pPr marL="0" indent="0" algn="l">
+              <a:lnSpc>
+                <a:spcPct val="128000"/>
+              </a:lnSpc>
+              <a:spcAft>
+                <a:spcPts val="0"/>
+              </a:spcAft>
+              <a:buNone/>
+            </a:pPr>
+          </a:p>
+          <a:p>
+            <a:pPr marL="0" indent="0" algn="l">
+              <a:lnSpc>
+                <a:spcPct val="128000"/>
+              </a:lnSpc>
+              <a:spcAft>
+                <a:spcPts val="600"/>
+              </a:spcAft>
+              <a:buNone/>
+            </a:pPr>
+            <a:r>
+              <a:rPr sz="1700" b="1">
+                <a:solidFill>
+                  <a:srgbClr val="000000"/>
+                </a:solidFill>
+                <a:latin typeface="Arial"/>
+              </a:rPr>
+              <a:t>What to pick</a:t>
+            </a:r>
+          </a:p>
+          <a:p>
+            <a:pPr marL="0" indent="0" algn="l">
+              <a:lnSpc>
+                <a:spcPct val="128000"/>
+              </a:lnSpc>
+              <a:spcAft>
+                <a:spcPts val="600"/>
+              </a:spcAft>
+              <a:buNone/>
+            </a:pPr>
+            <a:r>
+              <a:rPr sz="1500" b="0">
+                <a:solidFill>
+                  <a:srgbClr val="000000"/>
+                </a:solidFill>
+                <a:latin typeface="Arial"/>
+              </a:rPr>
+              <a:t>• Choosing the actuator before designing the interaction, not in week 46.</a:t>
+            </a:r>
+          </a:p>
+        </p:txBody>
+      </p:sp>
+      <p:pic>
+        <p:nvPicPr>
+          <p:cNvPr id="4" name="Picture 3" descr="wordmark_dark.png"/>
+          <p:cNvPicPr>
+            <a:picLocks noChangeAspect="1"/>
+          </p:cNvPicPr>
+          <p:nvPr/>
+        </p:nvPicPr>
+        <p:blipFill>
+          <a:blip r:embed="rId2"/>
+          <a:stretch>
+            <a:fillRect/>
+          </a:stretch>
+        </p:blipFill>
+        <p:spPr>
+          <a:xfrm>
+            <a:off x="342900" y="6184900"/>
+            <a:ext cx="2070100" cy="529560"/>
+          </a:xfrm>
+          <a:prstGeom prst="rect">
+            <a:avLst/>
+          </a:prstGeom>
+        </p:spPr>
+      </p:pic>
+      <p:pic>
+        <p:nvPicPr>
+          <p:cNvPr id="5" name="Picture 4" descr="seal_dark.png"/>
+          <p:cNvPicPr>
+            <a:picLocks noChangeAspect="1"/>
+          </p:cNvPicPr>
+          <p:nvPr/>
+        </p:nvPicPr>
+        <p:blipFill>
+          <a:blip r:embed="rId3"/>
+          <a:stretch>
+            <a:fillRect/>
+          </a:stretch>
+        </p:blipFill>
+        <p:spPr>
+          <a:xfrm>
+            <a:off x="11226800" y="5969000"/>
+            <a:ext cx="713915" cy="711200"/>
+          </a:xfrm>
+          <a:prstGeom prst="rect">
+            <a:avLst/>
+          </a:prstGeom>
+        </p:spPr>
+      </p:pic>
+    </p:spTree>
+  </p:cSld>
+  <p:clrMapOvr>
+    <a:masterClrMapping/>
+  </p:clrMapOvr>
+</p:sld>
+</file>
+
+<file path=ppt/slides/slide27.xml><?xml version="1.0" encoding="utf-8"?>
+<p:sld xmlns:a="http://schemas.openxmlformats.org/drawingml/2006/main" xmlns:p="http://schemas.openxmlformats.org/presentationml/2006/main" xmlns:r="http://schemas.openxmlformats.org/officeDocument/2006/relationships">
+  <p:cSld>
+    <p:spTree>
+      <p:nvGrpSpPr>
+        <p:cNvPr id="1" name=""/>
+        <p:cNvGrpSpPr/>
+        <p:nvPr/>
+      </p:nvGrpSpPr>
+      <p:grpSpPr/>
+      <p:sp>
+        <p:nvSpPr>
+          <p:cNvPr id="2" name="Title 1"/>
+          <p:cNvSpPr>
+            <a:spLocks noGrp="1"/>
+          </p:cNvSpPr>
+          <p:nvPr>
             <p:ph type="ctrTitle"/>
           </p:nvPr>
         </p:nvSpPr>
@@ -8509,7 +11049,7 @@
                 </a:solidFill>
                 <a:latin typeface="Arial"/>
               </a:rPr>
-              <a:t>Actuators are on the tables around you</a:t>
+              <a:t>Actuators are on the tables at the front</a:t>
             </a:r>
           </a:p>
           <a:p>
@@ -9575,138 +12115,20 @@
               <a:buNone/>
             </a:pPr>
             <a:r>
-              <a:rPr sz="3200" b="1">
-                <a:solidFill>
-                  <a:srgbClr val="000000"/>
-                </a:solidFill>
-                <a:latin typeface="Arial"/>
-              </a:rPr>
-              <a:t>FREESTYLE IS ENCOURAGED</a:t>
-            </a:r>
-          </a:p>
-        </p:txBody>
-      </p:sp>
-      <p:sp>
-        <p:nvSpPr>
-          <p:cNvPr id="3" name="Text Placeholder 2"/>
-          <p:cNvSpPr>
-            <a:spLocks noGrp="1"/>
-          </p:cNvSpPr>
-          <p:nvPr>
-            <p:ph type="body" idx="1"/>
-          </p:nvPr>
-        </p:nvSpPr>
-        <p:spPr/>
-        <p:txBody>
-          <a:bodyPr/>
-          <a:lstStyle/>
-          <a:p>
-            <a:pPr marL="0" indent="0" algn="l">
-              <a:lnSpc>
-                <a:spcPct val="128000"/>
-              </a:lnSpc>
-              <a:spcAft>
-                <a:spcPts val="600"/>
-              </a:spcAft>
-              <a:buNone/>
-            </a:pPr>
-            <a:r>
-              <a:rPr sz="1700" b="1">
-                <a:solidFill>
-                  <a:srgbClr val="000000"/>
-                </a:solidFill>
-                <a:latin typeface="Arial"/>
-              </a:rPr>
-              <a:t>You do not have to do the tasks in order.</a:t>
-            </a:r>
-          </a:p>
-          <a:p>
-            <a:pPr marL="0" indent="0" algn="l">
-              <a:lnSpc>
-                <a:spcPct val="128000"/>
-              </a:lnSpc>
-              <a:spcAft>
-                <a:spcPts val="600"/>
-              </a:spcAft>
-              <a:buNone/>
-            </a:pPr>
-            <a:r>
-              <a:rPr sz="1700" b="1">
-                <a:solidFill>
-                  <a:srgbClr val="000000"/>
-                </a:solidFill>
-                <a:latin typeface="Arial"/>
-              </a:rPr>
-              <a:t>You do not have to finish them.</a:t>
-            </a:r>
-          </a:p>
-          <a:p>
-            <a:pPr marL="0" indent="0" algn="l">
-              <a:lnSpc>
-                <a:spcPct val="128000"/>
-              </a:lnSpc>
-              <a:spcAft>
-                <a:spcPts val="0"/>
-              </a:spcAft>
-              <a:buNone/>
-            </a:pPr>
-          </a:p>
-          <a:p>
-            <a:pPr marL="0" indent="0" algn="l">
-              <a:lnSpc>
-                <a:spcPct val="128000"/>
-              </a:lnSpc>
-              <a:spcAft>
-                <a:spcPts val="600"/>
-              </a:spcAft>
-              <a:buNone/>
-            </a:pPr>
-            <a:r>
-              <a:rPr sz="1700" b="0">
-                <a:solidFill>
-                  <a:srgbClr val="000000"/>
-                </a:solidFill>
-                <a:latin typeface="Arial"/>
-              </a:rPr>
-              <a:t>Getting task 01 working and then properly playing with task 02 beats rushing through all five.</a:t>
-            </a:r>
-          </a:p>
-          <a:p>
-            <a:pPr marL="0" indent="0" algn="l">
-              <a:lnSpc>
-                <a:spcPct val="128000"/>
-              </a:lnSpc>
-              <a:spcAft>
-                <a:spcPts val="0"/>
-              </a:spcAft>
-              <a:buNone/>
-            </a:pPr>
-          </a:p>
-          <a:p>
-            <a:pPr marL="0" indent="0" algn="l">
-              <a:lnSpc>
-                <a:spcPct val="128000"/>
-              </a:lnSpc>
-              <a:spcAft>
-                <a:spcPts val="600"/>
-              </a:spcAft>
-              <a:buNone/>
-            </a:pPr>
-            <a:r>
-              <a:rPr sz="1700" b="0">
-                <a:solidFill>
-                  <a:srgbClr val="000000"/>
-                </a:solidFill>
-                <a:latin typeface="Arial"/>
-              </a:rPr>
-              <a:t>If you want to drive something that is not in front of you, go and get it.</a:t>
+              <a:rPr sz="4400" b="1">
+                <a:solidFill>
+                  <a:srgbClr val="000000"/>
+                </a:solidFill>
+                <a:latin typeface="Arial"/>
+              </a:rPr>
+              <a:t>WHAT IS ON THE TABLES</a:t>
             </a:r>
           </a:p>
         </p:txBody>
       </p:sp>
       <p:pic>
         <p:nvPicPr>
-          <p:cNvPr id="4" name="Picture 3" descr="wordmark_dark.png"/>
+          <p:cNvPr id="3" name="Picture 2" descr="wordmark_dark.png"/>
           <p:cNvPicPr>
             <a:picLocks noChangeAspect="1"/>
           </p:cNvPicPr>
@@ -9730,7 +12152,7 @@
       </p:pic>
       <p:pic>
         <p:nvPicPr>
-          <p:cNvPr id="5" name="Picture 4" descr="seal_dark.png"/>
+          <p:cNvPr id="4" name="Picture 3" descr="seal_dark.png"/>
           <p:cNvPicPr>
             <a:picLocks noChangeAspect="1"/>
           </p:cNvPicPr>

--- a/docs/multimodal-actuator-workshop.pptx
+++ b/docs/multimodal-actuator-workshop.pptx
@@ -6207,7 +6207,7 @@
                 </a:solidFill>
                 <a:latin typeface="Arial"/>
               </a:rPr>
-              <a:t>COIN MOTOR (ERM)</a:t>
+              <a:t>VIBRATING MINI MOTOR DISC</a:t>
             </a:r>
           </a:p>
         </p:txBody>
@@ -6248,7 +6248,7 @@
                 </a:solidFill>
                 <a:latin typeface="Arial"/>
               </a:rPr>
-              <a:t>An off-centre weight on a motor shaft. The same part as in your phone.</a:t>
+              <a:t>An off-centre weight on a motor shaft, sealed in a disc. The same part as in your phone.</a:t>
             </a:r>
           </a:p>
           <a:p>
@@ -6328,81 +6328,35 @@
                 </a:solidFill>
                 <a:latin typeface="Consolas"/>
               </a:rPr>
-              <a:t>10mm 3V  |  D9 PWM  |  ~75 mA  |  ~12 kr</a:t>
-            </a:r>
-          </a:p>
-        </p:txBody>
-      </p:sp>
-      <p:sp>
-        <p:nvSpPr>
-          <p:cNvPr id="4" name="Rectangle 3"/>
-          <p:cNvSpPr/>
+              <a:t>Drawer 1E  |  117 in stock  |  2.5-3.8 V  |  PWM pin</a:t>
+            </a:r>
+          </a:p>
+        </p:txBody>
+      </p:sp>
+      <p:pic>
+        <p:nvPicPr>
+          <p:cNvPr id="4" name="Picture 3" descr="erm.jpg"/>
+          <p:cNvPicPr>
+            <a:picLocks noChangeAspect="1"/>
+          </p:cNvPicPr>
           <p:nvPr/>
-        </p:nvSpPr>
+        </p:nvPicPr>
+        <p:blipFill>
+          <a:blip r:embed="rId2"/>
+          <a:stretch>
+            <a:fillRect/>
+          </a:stretch>
+        </p:blipFill>
         <p:spPr>
           <a:xfrm>
             <a:off x="914400" y="1905000"/>
-            <a:ext cx="4191000" cy="3175000"/>
+            <a:ext cx="4191000" cy="3145410"/>
           </a:xfrm>
           <a:prstGeom prst="rect">
             <a:avLst/>
           </a:prstGeom>
-          <a:noFill/>
-          <a:ln w="12700">
-            <a:solidFill>
-              <a:srgbClr val="595959"/>
-            </a:solidFill>
-            <a:prstDash val="dash"/>
-          </a:ln>
-          <a:effectLst/>
         </p:spPr>
-        <p:style>
-          <a:lnRef idx="1">
-            <a:schemeClr val="accent1"/>
-          </a:lnRef>
-          <a:fillRef idx="3">
-            <a:schemeClr val="accent1"/>
-          </a:fillRef>
-          <a:effectRef idx="2">
-            <a:schemeClr val="accent1"/>
-          </a:effectRef>
-          <a:fontRef idx="minor">
-            <a:schemeClr val="lt1"/>
-          </a:fontRef>
-        </p:style>
-        <p:txBody>
-          <a:bodyPr rtlCol="0" anchor="ctr" wrap="square" lIns="127000" rIns="127000"/>
-          <a:lstStyle/>
-          <a:p>
-            <a:pPr algn="ctr"/>
-            <a:r>
-              <a:rPr sz="900" b="1">
-                <a:solidFill>
-                  <a:srgbClr val="595959"/>
-                </a:solidFill>
-                <a:latin typeface="Arial"/>
-              </a:rPr>
-              <a:t>PHOTO</a:t>
-            </a:r>
-          </a:p>
-          <a:p>
-            <a:pPr algn="ctr">
-              <a:lnSpc>
-                <a:spcPct val="120000"/>
-              </a:lnSpc>
-            </a:pPr>
-            <a:r>
-              <a:rPr sz="1100">
-                <a:solidFill>
-                  <a:srgbClr val="595959"/>
-                </a:solidFill>
-                <a:latin typeface="Arial"/>
-              </a:rPr>
-              <a:t>Coin motor (ERM)</a:t>
-            </a:r>
-          </a:p>
-        </p:txBody>
-      </p:sp>
+      </p:pic>
       <p:pic>
         <p:nvPicPr>
           <p:cNvPr id="5" name="Picture 4" descr="wordmark_dark.png"/>
@@ -6412,7 +6366,7 @@
           <p:nvPr/>
         </p:nvPicPr>
         <p:blipFill>
-          <a:blip r:embed="rId2"/>
+          <a:blip r:embed="rId3"/>
           <a:stretch>
             <a:fillRect/>
           </a:stretch>
@@ -6436,7 +6390,7 @@
           <p:nvPr/>
         </p:nvPicPr>
         <p:blipFill>
-          <a:blip r:embed="rId3"/>
+          <a:blip r:embed="rId4"/>
           <a:stretch>
             <a:fillRect/>
           </a:stretch>
@@ -6494,7 +6448,7 @@
                 </a:solidFill>
                 <a:latin typeface="Arial"/>
               </a:rPr>
-              <a:t>LRA AND PIEZO DISC</a:t>
+              <a:t>PIEZO ELEMENT</a:t>
             </a:r>
           </a:p>
         </p:txBody>
@@ -6535,7 +6489,7 @@
                 </a:solidFill>
                 <a:latin typeface="Arial"/>
               </a:rPr>
-              <a:t>Two ways out of the coin motor's compromise. The LRA hits resonance in about 5 ms and stops just as fast.</a:t>
+              <a:t>A crystal that flexes when you put current across it. Near-instant, almost no power, but shallow.</a:t>
             </a:r>
           </a:p>
           <a:p>
@@ -6555,7 +6509,7 @@
                 </a:solidFill>
                 <a:latin typeface="Arial"/>
               </a:rPr>
-              <a:t>Feels like: a crisp click. The phone-keyboard feel.</a:t>
+              <a:t>Feels like: a tick, not a thump.</a:t>
             </a:r>
           </a:p>
           <a:p>
@@ -6595,7 +6549,7 @@
                 </a:solidFill>
                 <a:latin typeface="Arial"/>
               </a:rPr>
-              <a:t>Keyboard clicks, watch taps, anything where lag would feel broken.</a:t>
+              <a:t>Clicks and confirmations. Anything where lag would feel broken.</a:t>
             </a:r>
           </a:p>
           <a:p>
@@ -6615,81 +6569,35 @@
                 </a:solidFill>
                 <a:latin typeface="Consolas"/>
               </a:rPr>
-              <a:t>DRV2605L I2C  |  A4/A5  |  123 effects  |  ~90 kr</a:t>
-            </a:r>
-          </a:p>
-        </p:txBody>
-      </p:sp>
-      <p:sp>
-        <p:nvSpPr>
-          <p:cNvPr id="4" name="Rectangle 3"/>
-          <p:cNvSpPr/>
+              <a:t>Drawer 6F  |  69 in stock  |  any digital pin</a:t>
+            </a:r>
+          </a:p>
+        </p:txBody>
+      </p:sp>
+      <p:pic>
+        <p:nvPicPr>
+          <p:cNvPr id="4" name="Picture 3" descr="piezo.png"/>
+          <p:cNvPicPr>
+            <a:picLocks noChangeAspect="1"/>
+          </p:cNvPicPr>
           <p:nvPr/>
-        </p:nvSpPr>
+        </p:nvPicPr>
+        <p:blipFill>
+          <a:blip r:embed="rId2"/>
+          <a:stretch>
+            <a:fillRect/>
+          </a:stretch>
+        </p:blipFill>
         <p:spPr>
           <a:xfrm>
             <a:off x="914400" y="1905000"/>
-            <a:ext cx="4191000" cy="3175000"/>
+            <a:ext cx="3175000" cy="3175000"/>
           </a:xfrm>
           <a:prstGeom prst="rect">
             <a:avLst/>
           </a:prstGeom>
-          <a:noFill/>
-          <a:ln w="12700">
-            <a:solidFill>
-              <a:srgbClr val="595959"/>
-            </a:solidFill>
-            <a:prstDash val="dash"/>
-          </a:ln>
-          <a:effectLst/>
         </p:spPr>
-        <p:style>
-          <a:lnRef idx="1">
-            <a:schemeClr val="accent1"/>
-          </a:lnRef>
-          <a:fillRef idx="3">
-            <a:schemeClr val="accent1"/>
-          </a:fillRef>
-          <a:effectRef idx="2">
-            <a:schemeClr val="accent1"/>
-          </a:effectRef>
-          <a:fontRef idx="minor">
-            <a:schemeClr val="lt1"/>
-          </a:fontRef>
-        </p:style>
-        <p:txBody>
-          <a:bodyPr rtlCol="0" anchor="ctr" wrap="square" lIns="127000" rIns="127000"/>
-          <a:lstStyle/>
-          <a:p>
-            <a:pPr algn="ctr"/>
-            <a:r>
-              <a:rPr sz="900" b="1">
-                <a:solidFill>
-                  <a:srgbClr val="595959"/>
-                </a:solidFill>
-                <a:latin typeface="Arial"/>
-              </a:rPr>
-              <a:t>PHOTO</a:t>
-            </a:r>
-          </a:p>
-          <a:p>
-            <a:pPr algn="ctr">
-              <a:lnSpc>
-                <a:spcPct val="120000"/>
-              </a:lnSpc>
-            </a:pPr>
-            <a:r>
-              <a:rPr sz="1100">
-                <a:solidFill>
-                  <a:srgbClr val="595959"/>
-                </a:solidFill>
-                <a:latin typeface="Arial"/>
-              </a:rPr>
-              <a:t>LRA and piezo disc</a:t>
-            </a:r>
-          </a:p>
-        </p:txBody>
-      </p:sp>
+      </p:pic>
       <p:pic>
         <p:nvPicPr>
           <p:cNvPr id="5" name="Picture 4" descr="wordmark_dark.png"/>
@@ -6699,7 +6607,7 @@
           <p:nvPr/>
         </p:nvPicPr>
         <p:blipFill>
-          <a:blip r:embed="rId2"/>
+          <a:blip r:embed="rId3"/>
           <a:stretch>
             <a:fillRect/>
           </a:stretch>
@@ -6723,7 +6631,7 @@
           <p:nvPr/>
         </p:nvPicPr>
         <p:blipFill>
-          <a:blip r:embed="rId3"/>
+          <a:blip r:embed="rId4"/>
           <a:stretch>
             <a:fillRect/>
           </a:stretch>
@@ -6781,7 +6689,7 @@
                 </a:solidFill>
                 <a:latin typeface="Arial"/>
               </a:rPr>
-              <a:t>SOLENOID</a:t>
+              <a:t>MINI PUSH-PULL SOLENOID</a:t>
             </a:r>
           </a:p>
         </p:txBody>
@@ -6902,81 +6810,35 @@
                 </a:solidFill>
                 <a:latin typeface="Consolas"/>
               </a:rPr>
-              <a:t>5V push-pull  |  D6 + MOSFET  |  ~1.1 A peak  |  ~45 kr</a:t>
-            </a:r>
-          </a:p>
-        </p:txBody>
-      </p:sp>
-      <p:sp>
-        <p:nvSpPr>
-          <p:cNvPr id="4" name="Rectangle 3"/>
-          <p:cNvSpPr/>
+              <a:t>Drawer 3E  |  24 in stock  |  5V  |  needs a MOSFET</a:t>
+            </a:r>
+          </a:p>
+        </p:txBody>
+      </p:sp>
+      <p:pic>
+        <p:nvPicPr>
+          <p:cNvPr id="4" name="Picture 3" descr="solenoid.jpg"/>
+          <p:cNvPicPr>
+            <a:picLocks noChangeAspect="1"/>
+          </p:cNvPicPr>
           <p:nvPr/>
-        </p:nvSpPr>
+        </p:nvPicPr>
+        <p:blipFill>
+          <a:blip r:embed="rId2"/>
+          <a:stretch>
+            <a:fillRect/>
+          </a:stretch>
+        </p:blipFill>
         <p:spPr>
           <a:xfrm>
             <a:off x="914400" y="1905000"/>
-            <a:ext cx="4191000" cy="3175000"/>
+            <a:ext cx="4191000" cy="3145410"/>
           </a:xfrm>
           <a:prstGeom prst="rect">
             <a:avLst/>
           </a:prstGeom>
-          <a:noFill/>
-          <a:ln w="12700">
-            <a:solidFill>
-              <a:srgbClr val="595959"/>
-            </a:solidFill>
-            <a:prstDash val="dash"/>
-          </a:ln>
-          <a:effectLst/>
         </p:spPr>
-        <p:style>
-          <a:lnRef idx="1">
-            <a:schemeClr val="accent1"/>
-          </a:lnRef>
-          <a:fillRef idx="3">
-            <a:schemeClr val="accent1"/>
-          </a:fillRef>
-          <a:effectRef idx="2">
-            <a:schemeClr val="accent1"/>
-          </a:effectRef>
-          <a:fontRef idx="minor">
-            <a:schemeClr val="lt1"/>
-          </a:fontRef>
-        </p:style>
-        <p:txBody>
-          <a:bodyPr rtlCol="0" anchor="ctr" wrap="square" lIns="127000" rIns="127000"/>
-          <a:lstStyle/>
-          <a:p>
-            <a:pPr algn="ctr"/>
-            <a:r>
-              <a:rPr sz="900" b="1">
-                <a:solidFill>
-                  <a:srgbClr val="595959"/>
-                </a:solidFill>
-                <a:latin typeface="Arial"/>
-              </a:rPr>
-              <a:t>PHOTO</a:t>
-            </a:r>
-          </a:p>
-          <a:p>
-            <a:pPr algn="ctr">
-              <a:lnSpc>
-                <a:spcPct val="120000"/>
-              </a:lnSpc>
-            </a:pPr>
-            <a:r>
-              <a:rPr sz="1100">
-                <a:solidFill>
-                  <a:srgbClr val="595959"/>
-                </a:solidFill>
-                <a:latin typeface="Arial"/>
-              </a:rPr>
-              <a:t>Solenoid</a:t>
-            </a:r>
-          </a:p>
-        </p:txBody>
-      </p:sp>
+      </p:pic>
       <p:pic>
         <p:nvPicPr>
           <p:cNvPr id="5" name="Picture 4" descr="wordmark_dark.png"/>
@@ -6986,7 +6848,7 @@
           <p:nvPr/>
         </p:nvPicPr>
         <p:blipFill>
-          <a:blip r:embed="rId2"/>
+          <a:blip r:embed="rId3"/>
           <a:stretch>
             <a:fillRect/>
           </a:stretch>
@@ -7010,7 +6872,7 @@
           <p:nvPr/>
         </p:nvPicPr>
         <p:blipFill>
-          <a:blip r:embed="rId3"/>
+          <a:blip r:embed="rId4"/>
           <a:stretch>
             <a:fillRect/>
           </a:stretch>
@@ -7189,7 +7051,7 @@
                 </a:solidFill>
                 <a:latin typeface="Consolas"/>
               </a:rPr>
-              <a:t>ADCTouch  |  A0  |  ~0 kr, a wire</a:t>
+              <a:t>No part number. A wire, on any analogue pin</a:t>
             </a:r>
           </a:p>
         </p:txBody>
@@ -7476,81 +7338,35 @@
                 </a:solidFill>
                 <a:latin typeface="Consolas"/>
               </a:rPr>
-              <a:t>TEC1-12706  |  D3 + D5  |  2-4 A  |  ~70 kr</a:t>
-            </a:r>
-          </a:p>
-        </p:txBody>
-      </p:sp>
-      <p:sp>
-        <p:nvSpPr>
-          <p:cNvPr id="4" name="Rectangle 3"/>
-          <p:cNvSpPr/>
+              <a:t>Drawer 4C  |  25 small, 35 big  |  needs an H bridge</a:t>
+            </a:r>
+          </a:p>
+        </p:txBody>
+      </p:sp>
+      <p:pic>
+        <p:nvPicPr>
+          <p:cNvPr id="4" name="Picture 3" descr="peltier.jpg"/>
+          <p:cNvPicPr>
+            <a:picLocks noChangeAspect="1"/>
+          </p:cNvPicPr>
           <p:nvPr/>
-        </p:nvSpPr>
+        </p:nvPicPr>
+        <p:blipFill>
+          <a:blip r:embed="rId2"/>
+          <a:stretch>
+            <a:fillRect/>
+          </a:stretch>
+        </p:blipFill>
         <p:spPr>
           <a:xfrm>
             <a:off x="914400" y="1905000"/>
-            <a:ext cx="4191000" cy="3175000"/>
+            <a:ext cx="4191000" cy="3143250"/>
           </a:xfrm>
           <a:prstGeom prst="rect">
             <a:avLst/>
           </a:prstGeom>
-          <a:noFill/>
-          <a:ln w="12700">
-            <a:solidFill>
-              <a:srgbClr val="595959"/>
-            </a:solidFill>
-            <a:prstDash val="dash"/>
-          </a:ln>
-          <a:effectLst/>
         </p:spPr>
-        <p:style>
-          <a:lnRef idx="1">
-            <a:schemeClr val="accent1"/>
-          </a:lnRef>
-          <a:fillRef idx="3">
-            <a:schemeClr val="accent1"/>
-          </a:fillRef>
-          <a:effectRef idx="2">
-            <a:schemeClr val="accent1"/>
-          </a:effectRef>
-          <a:fontRef idx="minor">
-            <a:schemeClr val="lt1"/>
-          </a:fontRef>
-        </p:style>
-        <p:txBody>
-          <a:bodyPr rtlCol="0" anchor="ctr" wrap="square" lIns="127000" rIns="127000"/>
-          <a:lstStyle/>
-          <a:p>
-            <a:pPr algn="ctr"/>
-            <a:r>
-              <a:rPr sz="900" b="1">
-                <a:solidFill>
-                  <a:srgbClr val="595959"/>
-                </a:solidFill>
-                <a:latin typeface="Arial"/>
-              </a:rPr>
-              <a:t>PHOTO</a:t>
-            </a:r>
-          </a:p>
-          <a:p>
-            <a:pPr algn="ctr">
-              <a:lnSpc>
-                <a:spcPct val="120000"/>
-              </a:lnSpc>
-            </a:pPr>
-            <a:r>
-              <a:rPr sz="1100">
-                <a:solidFill>
-                  <a:srgbClr val="595959"/>
-                </a:solidFill>
-                <a:latin typeface="Arial"/>
-              </a:rPr>
-              <a:t>Peltier tile</a:t>
-            </a:r>
-          </a:p>
-        </p:txBody>
-      </p:sp>
+      </p:pic>
       <p:pic>
         <p:nvPicPr>
           <p:cNvPr id="5" name="Picture 4" descr="wordmark_dark.png"/>
@@ -7560,7 +7376,7 @@
           <p:nvPr/>
         </p:nvPicPr>
         <p:blipFill>
-          <a:blip r:embed="rId2"/>
+          <a:blip r:embed="rId3"/>
           <a:stretch>
             <a:fillRect/>
           </a:stretch>
@@ -7584,7 +7400,7 @@
           <p:nvPr/>
         </p:nvPicPr>
         <p:blipFill>
-          <a:blip r:embed="rId3"/>
+          <a:blip r:embed="rId4"/>
           <a:stretch>
             <a:fillRect/>
           </a:stretch>
@@ -7642,7 +7458,7 @@
                 </a:solidFill>
                 <a:latin typeface="Arial"/>
               </a:rPr>
-              <a:t>TRANSDUCER</a:t>
+              <a:t>SURFACE TRANSDUCER</a:t>
             </a:r>
           </a:p>
         </p:txBody>
@@ -7683,7 +7499,7 @@
                 </a:solidFill>
                 <a:latin typeface="Arial"/>
               </a:rPr>
-              <a:t>Drives a plate so one frequency is felt and another is heard, from the same driver.</a:t>
+              <a:t>Turns any surface into a speaker. Drive it so one frequency is felt and another is heard, from the same part.</a:t>
             </a:r>
           </a:p>
           <a:p>
@@ -7763,81 +7579,35 @@
                 </a:solidFill>
                 <a:latin typeface="Consolas"/>
               </a:rPr>
-              <a:t>Bone-conduction  |  D11 + PAM8403  |  ~110 kr</a:t>
-            </a:r>
-          </a:p>
-        </p:txBody>
-      </p:sp>
-      <p:sp>
-        <p:nvSpPr>
-          <p:cNvPr id="4" name="Rectangle 3"/>
-          <p:cNvSpPr/>
+              <a:t>Drawer 7F  |  12 large, 13 medium  |  needs an amp</a:t>
+            </a:r>
+          </a:p>
+        </p:txBody>
+      </p:sp>
+      <p:pic>
+        <p:nvPicPr>
+          <p:cNvPr id="4" name="Picture 3" descr="transducer.jpg"/>
+          <p:cNvPicPr>
+            <a:picLocks noChangeAspect="1"/>
+          </p:cNvPicPr>
           <p:nvPr/>
-        </p:nvSpPr>
+        </p:nvPicPr>
+        <p:blipFill>
+          <a:blip r:embed="rId2"/>
+          <a:stretch>
+            <a:fillRect/>
+          </a:stretch>
+        </p:blipFill>
         <p:spPr>
           <a:xfrm>
             <a:off x="914400" y="1905000"/>
-            <a:ext cx="4191000" cy="3175000"/>
+            <a:ext cx="3175000" cy="3175000"/>
           </a:xfrm>
           <a:prstGeom prst="rect">
             <a:avLst/>
           </a:prstGeom>
-          <a:noFill/>
-          <a:ln w="12700">
-            <a:solidFill>
-              <a:srgbClr val="595959"/>
-            </a:solidFill>
-            <a:prstDash val="dash"/>
-          </a:ln>
-          <a:effectLst/>
         </p:spPr>
-        <p:style>
-          <a:lnRef idx="1">
-            <a:schemeClr val="accent1"/>
-          </a:lnRef>
-          <a:fillRef idx="3">
-            <a:schemeClr val="accent1"/>
-          </a:fillRef>
-          <a:effectRef idx="2">
-            <a:schemeClr val="accent1"/>
-          </a:effectRef>
-          <a:fontRef idx="minor">
-            <a:schemeClr val="lt1"/>
-          </a:fontRef>
-        </p:style>
-        <p:txBody>
-          <a:bodyPr rtlCol="0" anchor="ctr" wrap="square" lIns="127000" rIns="127000"/>
-          <a:lstStyle/>
-          <a:p>
-            <a:pPr algn="ctr"/>
-            <a:r>
-              <a:rPr sz="900" b="1">
-                <a:solidFill>
-                  <a:srgbClr val="595959"/>
-                </a:solidFill>
-                <a:latin typeface="Arial"/>
-              </a:rPr>
-              <a:t>PHOTO</a:t>
-            </a:r>
-          </a:p>
-          <a:p>
-            <a:pPr algn="ctr">
-              <a:lnSpc>
-                <a:spcPct val="120000"/>
-              </a:lnSpc>
-            </a:pPr>
-            <a:r>
-              <a:rPr sz="1100">
-                <a:solidFill>
-                  <a:srgbClr val="595959"/>
-                </a:solidFill>
-                <a:latin typeface="Arial"/>
-              </a:rPr>
-              <a:t>Transducer</a:t>
-            </a:r>
-          </a:p>
-        </p:txBody>
-      </p:sp>
+      </p:pic>
       <p:pic>
         <p:nvPicPr>
           <p:cNvPr id="5" name="Picture 4" descr="wordmark_dark.png"/>
@@ -7847,7 +7617,7 @@
           <p:nvPr/>
         </p:nvPicPr>
         <p:blipFill>
-          <a:blip r:embed="rId2"/>
+          <a:blip r:embed="rId3"/>
           <a:stretch>
             <a:fillRect/>
           </a:stretch>
@@ -7871,7 +7641,7 @@
           <p:nvPr/>
         </p:nvPicPr>
         <p:blipFill>
-          <a:blip r:embed="rId3"/>
+          <a:blip r:embed="rId4"/>
           <a:stretch>
             <a:fillRect/>
           </a:stretch>

--- a/docs/multimodal-actuator-workshop.pptx
+++ b/docs/multimodal-actuator-workshop.pptx
@@ -32,6 +32,10 @@
     <p:sldId id="280" r:id="rId31"/>
     <p:sldId id="281" r:id="rId32"/>
     <p:sldId id="282" r:id="rId33"/>
+    <p:sldId id="283" r:id="rId34"/>
+    <p:sldId id="284" r:id="rId35"/>
+    <p:sldId id="285" r:id="rId36"/>
+    <p:sldId id="286" r:id="rId37"/>
   </p:sldIdLst>
   <p:sldSz cx="12188952" cy="6858000" type="screen4x3"/>
   <p:notesSz cx="6858000" cy="9144000"/>
@@ -625,18 +629,28 @@
           <a:lstStyle/>
           <a:p>
             <a:r>
-              <a:t>The one everybody already owns without knowing it. Every phone has one.</a:t>
+              <a:t>Two minutes total for this whole run of slides. It is a menu, not a</a:t>
+            </a:r>
+          </a:p>
+          <a:p>
+            <a:r>
+              <a:t>lecture: they are choosing what to go and pick up later.</a:t>
             </a:r>
           </a:p>
           <a:p/>
           <a:p>
             <a:r>
-              <a:t>The point worth making: speed and strength are welded together. That single</a:t>
-            </a:r>
-          </a:p>
-          <a:p>
-            <a:r>
-              <a:t>constraint is why the other five exist.</a:t>
+              <a:t>Hold up the real part as you show each one. The photo is a reminder for people</a:t>
+            </a:r>
+          </a:p>
+          <a:p>
+            <a:r>
+              <a:t>reading the deck afterwards; the object in your hand is what lands in the</a:t>
+            </a:r>
+          </a:p>
+          <a:p>
+            <a:r>
+              <a:t>room.</a:t>
             </a:r>
           </a:p>
         </p:txBody>
@@ -706,23 +720,18 @@
           <a:lstStyle/>
           <a:p>
             <a:r>
-              <a:t>Both solve the coin motor's problem, differently. LRA is what a modern</a:t>
-            </a:r>
-          </a:p>
-          <a:p>
-            <a:r>
-              <a:t>phone keyboard uses. Piezo is sharp but shallow.</a:t>
+              <a:t>The one everybody already owns without knowing it. Every phone has one.</a:t>
             </a:r>
           </a:p>
           <a:p/>
           <a:p>
             <a:r>
-              <a:t>If someone is designing anything that needs to feel responsive rather than</a:t>
-            </a:r>
-          </a:p>
-          <a:p>
-            <a:r>
-              <a:t>just present, point them here.</a:t>
+              <a:t>The point worth making: speed and strength are welded together. That single</a:t>
+            </a:r>
+          </a:p>
+          <a:p>
+            <a:r>
+              <a:t>constraint is why the other five exist.</a:t>
             </a:r>
           </a:p>
         </p:txBody>
@@ -792,23 +801,23 @@
           <a:lstStyle/>
           <a:p>
             <a:r>
-              <a:t>Pass this one around if you can. It is the one people remember, because a</a:t>
-            </a:r>
-          </a:p>
-          <a:p>
-            <a:r>
-              <a:t>knock reads as a person rather than a machine.</a:t>
+              <a:t>The escape from the coin motor's compromise. A crystal that flexes when</a:t>
+            </a:r>
+          </a:p>
+          <a:p>
+            <a:r>
+              <a:t>you put current across it: near-instant, almost no power, but shallow.</a:t>
             </a:r>
           </a:p>
           <a:p/>
           <a:p>
             <a:r>
-              <a:t>Warn them now that it needs its own supply, so it does not come as a surprise</a:t>
-            </a:r>
-          </a:p>
-          <a:p>
-            <a:r>
-              <a:t>at task 02.</a:t>
+              <a:t>A tick, not a thump. Point anyone here who needs something to feel responsive</a:t>
+            </a:r>
+          </a:p>
+          <a:p>
+            <a:r>
+              <a:t>rather than just present. 69 in the drawer, so nobody has to share.</a:t>
             </a:r>
           </a:p>
         </p:txBody>
@@ -878,18 +887,23 @@
           <a:lstStyle/>
           <a:p>
             <a:r>
-              <a:t>Hold up a wire and a piece of foil. That is genuinely the whole sensor.</a:t>
+              <a:t>Pass this one around if you can. It is the one people remember, because a</a:t>
+            </a:r>
+          </a:p>
+          <a:p>
+            <a:r>
+              <a:t>knock reads as a person rather than a machine.</a:t>
             </a:r>
           </a:p>
           <a:p/>
           <a:p>
             <a:r>
-              <a:t>This is the slide that changes what people think is possible, because it costs</a:t>
-            </a:r>
-          </a:p>
-          <a:p>
-            <a:r>
-              <a:t>nothing and hides completely inside a prototype.</a:t>
+              <a:t>Warn them now that it needs its own supply, so it does not come as a surprise</a:t>
+            </a:r>
+          </a:p>
+          <a:p>
+            <a:r>
+              <a:t>at task 02.</a:t>
             </a:r>
           </a:p>
         </p:txBody>
@@ -959,23 +973,18 @@
           <a:lstStyle/>
           <a:p>
             <a:r>
-              <a:t>Say the honest limitation out loud: it is slow, and hot alternating with</a:t>
-            </a:r>
-          </a:p>
-          <a:p>
-            <a:r>
-              <a:t>cold just reads as lukewarm.</a:t>
+              <a:t>Hold up a wire and a piece of foil. That is genuinely the whole sensor.</a:t>
             </a:r>
           </a:p>
           <a:p/>
           <a:p>
             <a:r>
-              <a:t>Good for slow ambient state. Wrong for alerts. Saying so here saves a project</a:t>
-            </a:r>
-          </a:p>
-          <a:p>
-            <a:r>
-              <a:t>from finding out in week 46.</a:t>
+              <a:t>This is the slide that changes what people think is possible, because it costs</a:t>
+            </a:r>
+          </a:p>
+          <a:p>
+            <a:r>
+              <a:t>nothing and hides completely inside a prototype.</a:t>
             </a:r>
           </a:p>
         </p:txBody>
@@ -1045,23 +1054,23 @@
           <a:lstStyle/>
           <a:p>
             <a:r>
-              <a:t>The redundancy argument. Same driver, one frequency you feel and one you</a:t>
-            </a:r>
-          </a:p>
-          <a:p>
-            <a:r>
-              <a:t>hear.</a:t>
+              <a:t>Say the honest limitation out loud: it is slow, and hot alternating with</a:t>
+            </a:r>
+          </a:p>
+          <a:p>
+            <a:r>
+              <a:t>cold just reads as lukewarm.</a:t>
             </a:r>
           </a:p>
           <a:p/>
           <a:p>
             <a:r>
-              <a:t>Together is not louder, it is more certain. Cheapest reliability a project can</a:t>
-            </a:r>
-          </a:p>
-          <a:p>
-            <a:r>
-              <a:t>buy, and it is also the accessibility answer.</a:t>
+              <a:t>Good for slow ambient state. Wrong for alerts. Saying so here saves a project</a:t>
+            </a:r>
+          </a:p>
+          <a:p>
+            <a:r>
+              <a:t>from finding out in week 46.</a:t>
             </a:r>
           </a:p>
         </p:txBody>
@@ -1131,23 +1140,23 @@
           <a:lstStyle/>
           <a:p>
             <a:r>
-              <a:t>Say this out loud, do not just show it. Some students will not believe</a:t>
-            </a:r>
-          </a:p>
-          <a:p>
-            <a:r>
-              <a:t>they are allowed to skip ahead or stop early unless you tell them.</a:t>
+              <a:t>The redundancy argument. Same driver, one frequency you feel and one you</a:t>
+            </a:r>
+          </a:p>
+          <a:p>
+            <a:r>
+              <a:t>hear.</a:t>
             </a:r>
           </a:p>
           <a:p/>
           <a:p>
             <a:r>
-              <a:t>The failure mode is a pair rushing all five tasks badly instead of doing two</a:t>
-            </a:r>
-          </a:p>
-          <a:p>
-            <a:r>
-              <a:t>properly. Name that explicitly.</a:t>
+              <a:t>Together is not louder, it is more certain. Cheapest reliability a project can</a:t>
+            </a:r>
+          </a:p>
+          <a:p>
+            <a:r>
+              <a:t>buy, and it is also the accessibility answer.</a:t>
             </a:r>
           </a:p>
         </p:txBody>
@@ -1217,50 +1226,18 @@
           <a:lstStyle/>
           <a:p>
             <a:r>
-              <a:t>The only slide where you should sound firm.</a:t>
+              <a:t>Worth showing even though it is not in a task. Most projects that need</a:t>
+            </a:r>
+          </a:p>
+          <a:p>
+            <a:r>
+              <a:t>something to physically move end up here rather than on a vibration motor.</a:t>
             </a:r>
           </a:p>
           <a:p/>
           <a:p>
             <a:r>
-              <a:t>Three real hazards:</a:t>
-            </a:r>
-          </a:p>
-          <a:p>
-            <a:r>
-              <a:t>  * solenoid and Peltier on their own supply, not USB</a:t>
-            </a:r>
-          </a:p>
-          <a:p>
-            <a:r>
-              <a:t>  * Peltier heatsink on before it is switched on, no exceptions</a:t>
-            </a:r>
-          </a:p>
-          <a:p>
-            <a:r>
-              <a:t>  * no motor straight from a pin</a:t>
-            </a:r>
-          </a:p>
-          <a:p/>
-          <a:p>
-            <a:r>
-              <a:t>Say the numbers: a pin gives 40 mA, the motor wants about 75. It is not a rule</a:t>
-            </a:r>
-          </a:p>
-          <a:p>
-            <a:r>
-              <a:t>they have to take on faith.</a:t>
-            </a:r>
-          </a:p>
-          <a:p/>
-          <a:p>
-            <a:r>
-              <a:t>Also mention that a board resetting when the solenoid fires is a POWER problem,</a:t>
-            </a:r>
-          </a:p>
-          <a:p>
-            <a:r>
-              <a:t>not a code bug. It will save someone twenty minutes.</a:t>
+              <a:t>80 in stock, so nobody has to share.</a:t>
             </a:r>
           </a:p>
         </p:txBody>
@@ -1330,72 +1307,18 @@
           <a:lstStyle/>
           <a:p>
             <a:r>
-              <a:t>Slow down here. This is the single idea most worth stealing from today, and</a:t>
-            </a:r>
-          </a:p>
-          <a:p>
-            <a:r>
-              <a:t>it is worth interrupting the room for once most people have reached task 04.</a:t>
+              <a:t>The precision option. Moves in known steps, so you can position it</a:t>
+            </a:r>
+          </a:p>
+          <a:p>
+            <a:r>
+              <a:t>without any feedback sensor at all.</a:t>
             </a:r>
           </a:p>
           <a:p/>
           <a:p>
             <a:r>
-              <a:t>Two things students get wrong:</a:t>
-            </a:r>
-          </a:p>
-          <a:p/>
-          <a:p>
-            <a:r>
-              <a:t>1. A fixed threshold. Works in the morning, fails after lunch, because the</a:t>
-            </a:r>
-          </a:p>
-          <a:p>
-            <a:r>
-              <a:t>   reading drifts with humidity and mains hum.</a:t>
-            </a:r>
-          </a:p>
-          <a:p/>
-          <a:p>
-            <a:r>
-              <a:t>2. Feeding the baseline buffer always. A long press then teaches the baseline</a:t>
-            </a:r>
-          </a:p>
-          <a:p>
-            <a:r>
-              <a:t>   that a finger is normal, and the touch silently stops working. The buffer</a:t>
-            </a:r>
-          </a:p>
-          <a:p>
-            <a:r>
-              <a:t>   must only learn while untouched.</a:t>
-            </a:r>
-          </a:p>
-          <a:p/>
-          <a:p>
-            <a:r>
-              <a:t>Put the Serial Plotter on the projector. Watching the baseline wander while the</a:t>
-            </a:r>
-          </a:p>
-          <a:p>
-            <a:r>
-              <a:t>trigger line tracks it explains the whole design in ten seconds.</a:t>
-            </a:r>
-          </a:p>
-          <a:p/>
-          <a:p>
-            <a:r>
-              <a:t>For what it is worth, the rig this came from went through the same tuning: an</a:t>
-            </a:r>
-          </a:p>
-          <a:p>
-            <a:r>
-              <a:t>earlier version used 1.008 with a 50-sample baseline, the final one 1.01 with</a:t>
-            </a:r>
-          </a:p>
-          <a:p>
-            <a:r>
-              <a:t>25. Everyone tunes these.</a:t>
+              <a:t>Needs a ULN2003 driver board, drawer 2A, 27 of them.</a:t>
             </a:r>
           </a:p>
         </p:txBody>
@@ -1465,24 +1388,18 @@
           <a:lstStyle/>
           <a:p>
             <a:r>
-              <a:t>1:25. Pull the room back together.</a:t>
+              <a:t>The one people forget exists. It grabs and lets go, with nothing moving.</a:t>
             </a:r>
           </a:p>
           <a:p/>
           <a:p>
             <a:r>
-              <a:t>One sentence per group: what surprised you. No slides, no laptops. Ten minutes.</a:t>
-            </a:r>
-          </a:p>
-          <a:p/>
-          <a:p>
-            <a:r>
-              <a:t>Expect someone to report the Peltier delay. Let that land, it is far more</a:t>
-            </a:r>
-          </a:p>
-          <a:p>
-            <a:r>
-              <a:t>persuasive from a peer than from you.</a:t>
+              <a:t>Good answer for anything that should hold and then release: a latch, a door, a</a:t>
+            </a:r>
+          </a:p>
+          <a:p>
+            <a:r>
+              <a:t>thing that falls when the event happens.</a:t>
             </a:r>
           </a:p>
         </p:txBody>
@@ -1633,29 +1550,23 @@
           <a:lstStyle/>
           <a:p>
             <a:r>
-              <a:t>Mention, do not teach. These sit on one table with a sign.</a:t>
+              <a:t>Say this out loud, do not just show it. Some students will not believe</a:t>
+            </a:r>
+          </a:p>
+          <a:p>
+            <a:r>
+              <a:t>they are allowed to skip ahead or stop early unless you tell them.</a:t>
             </a:r>
           </a:p>
           <a:p/>
           <a:p>
             <a:r>
-              <a:t>The honest warnings matter more than the specs: PPG is useless once the hand</a:t>
-            </a:r>
-          </a:p>
-          <a:p>
-            <a:r>
-              <a:t>moves, GSR drifts so only relative change works, FSRs need per-pad calibration.</a:t>
-            </a:r>
-          </a:p>
-          <a:p/>
-          <a:p>
-            <a:r>
-              <a:t>Push the phone option hard. For a lot of projects it beats everything else on</a:t>
-            </a:r>
-          </a:p>
-          <a:p>
-            <a:r>
-              <a:t>the table and needs no soldering at all.</a:t>
+              <a:t>The failure mode is a pair rushing all five tasks badly instead of doing two</a:t>
+            </a:r>
+          </a:p>
+          <a:p>
+            <a:r>
+              <a:t>properly. Name that explicitly.</a:t>
             </a:r>
           </a:p>
         </p:txBody>
@@ -1725,45 +1636,50 @@
           <a:lstStyle/>
           <a:p>
             <a:r>
-              <a:t>Five minutes, and put the actual repos on screen if you can.</a:t>
+              <a:t>The only slide where you should sound firm.</a:t>
             </a:r>
           </a:p>
           <a:p/>
           <a:p>
             <a:r>
-              <a:t>The argument: this was built by students at your stage, not by a lab with a</a:t>
-            </a:r>
-          </a:p>
-          <a:p>
-            <a:r>
-              <a:t>budget. The gap between "we should use touch" and "it moves when you touch it"</a:t>
-            </a:r>
-          </a:p>
-          <a:p>
-            <a:r>
-              <a:t>is smaller than it looks.</a:t>
+              <a:t>Three real hazards:</a:t>
+            </a:r>
+          </a:p>
+          <a:p>
+            <a:r>
+              <a:t>  * solenoid and Peltier on their own supply, not USB</a:t>
+            </a:r>
+          </a:p>
+          <a:p>
+            <a:r>
+              <a:t>  * Peltier heatsink on before it is switched on, no exceptions</a:t>
+            </a:r>
+          </a:p>
+          <a:p>
+            <a:r>
+              <a:t>  * no motor straight from a pin</a:t>
             </a:r>
           </a:p>
           <a:p/>
           <a:p>
             <a:r>
-              <a:t>The moving screen has a browser control panel over the serial port, which is</a:t>
-            </a:r>
-          </a:p>
-          <a:p>
-            <a:r>
-              <a:t>what you will wish you had at the project demonstrations.</a:t>
+              <a:t>Say the numbers: a pin gives 40 mA, the motor wants about 75. It is not a rule</a:t>
+            </a:r>
+          </a:p>
+          <a:p>
+            <a:r>
+              <a:t>they have to take on faith.</a:t>
             </a:r>
           </a:p>
           <a:p/>
           <a:p>
             <a:r>
-              <a:t>Note for you: the sock repo has a hardcoded Wi-Fi password and live patient IDs</a:t>
-            </a:r>
-          </a:p>
-          <a:p>
-            <a:r>
-              <a:t>in it. Scrub before showing, or show only the calibration section.</a:t>
+              <a:t>Also mention that a board resetting when the solenoid fires is a POWER problem,</a:t>
+            </a:r>
+          </a:p>
+          <a:p>
+            <a:r>
+              <a:t>not a code bug. It will save someone twenty minutes.</a:t>
             </a:r>
           </a:p>
         </p:txBody>
@@ -1833,18 +1749,72 @@
           <a:lstStyle/>
           <a:p>
             <a:r>
-              <a:t>1:35. The blind test.</a:t>
+              <a:t>Slow down here. This is the single idea most worth stealing from today, and</a:t>
+            </a:r>
+          </a:p>
+          <a:p>
+            <a:r>
+              <a:t>it is worth interrupting the room for once most people have reached task 04.</a:t>
             </a:r>
           </a:p>
           <a:p/>
           <a:p>
             <a:r>
-              <a:t>Most groups will already have something from task 05. This is where it gets</a:t>
-            </a:r>
-          </a:p>
-          <a:p>
-            <a:r>
-              <a:t>tested by someone who did not build it.</a:t>
+              <a:t>Two things students get wrong:</a:t>
+            </a:r>
+          </a:p>
+          <a:p/>
+          <a:p>
+            <a:r>
+              <a:t>1. A fixed threshold. Works in the morning, fails after lunch, because the</a:t>
+            </a:r>
+          </a:p>
+          <a:p>
+            <a:r>
+              <a:t>   reading drifts with humidity and mains hum.</a:t>
+            </a:r>
+          </a:p>
+          <a:p/>
+          <a:p>
+            <a:r>
+              <a:t>2. Feeding the baseline buffer always. A long press then teaches the baseline</a:t>
+            </a:r>
+          </a:p>
+          <a:p>
+            <a:r>
+              <a:t>   that a finger is normal, and the touch silently stops working. The buffer</a:t>
+            </a:r>
+          </a:p>
+          <a:p>
+            <a:r>
+              <a:t>   must only learn while untouched.</a:t>
+            </a:r>
+          </a:p>
+          <a:p/>
+          <a:p>
+            <a:r>
+              <a:t>Put the Serial Plotter on the projector. Watching the baseline wander while the</a:t>
+            </a:r>
+          </a:p>
+          <a:p>
+            <a:r>
+              <a:t>trigger line tracks it explains the whole design in ten seconds.</a:t>
+            </a:r>
+          </a:p>
+          <a:p/>
+          <a:p>
+            <a:r>
+              <a:t>For what it is worth, the rig this came from went through the same tuning: an</a:t>
+            </a:r>
+          </a:p>
+          <a:p>
+            <a:r>
+              <a:t>earlier version used 1.008 with a 50-sample baseline, the final one 1.01 with</a:t>
+            </a:r>
+          </a:p>
+          <a:p>
+            <a:r>
+              <a:t>25. Everyone tunes these.</a:t>
             </a:r>
           </a:p>
         </p:txBody>
@@ -1914,39 +1884,24 @@
           <a:lstStyle/>
           <a:p>
             <a:r>
-              <a:t>Read the brief out once, then get out of the way. Full wording, since the</a:t>
-            </a:r>
-          </a:p>
-          <a:p>
-            <a:r>
-              <a:t>slide is only the bones:</a:t>
+              <a:t>1:25. Pull the room back together.</a:t>
             </a:r>
           </a:p>
           <a:p/>
           <a:p>
             <a:r>
-              <a:t>"Pick one actuator. Encode three messages: arrived, something wrong, finished.</a:t>
-            </a:r>
-          </a:p>
-          <a:p>
-            <a:r>
-              <a:t>Vary only the rhythm of the pulses and how strong they are. Then hand it to</a:t>
-            </a:r>
-          </a:p>
-          <a:p>
-            <a:r>
-              <a:t>another group with the screen turned away and see if they can name all three."</a:t>
+              <a:t>One sentence per group: what surprised you. No slides, no laptops. Ten minutes.</a:t>
             </a:r>
           </a:p>
           <a:p/>
           <a:p>
             <a:r>
-              <a:t>If someone asks to add a second actuator, say no. The constraint is the</a:t>
-            </a:r>
-          </a:p>
-          <a:p>
-            <a:r>
-              <a:t>exercise.</a:t>
+              <a:t>Expect someone to report the Peltier delay. Let that land, it is far more</a:t>
+            </a:r>
+          </a:p>
+          <a:p>
+            <a:r>
+              <a:t>persuasive from a peer than from you.</a:t>
             </a:r>
           </a:p>
         </p:txBody>
@@ -2016,24 +1971,29 @@
           <a:lstStyle/>
           <a:p>
             <a:r>
-              <a:t>The line worth repeating twice.</a:t>
+              <a:t>Mention, do not teach. These sit on one table with a sign.</a:t>
             </a:r>
           </a:p>
           <a:p/>
           <a:p>
             <a:r>
-              <a:t>Run the test: swap groups, receiver looks away, guess all three.</a:t>
+              <a:t>The honest warnings matter more than the specs: PPG is useless once the hand</a:t>
+            </a:r>
+          </a:p>
+          <a:p>
+            <a:r>
+              <a:t>moves, GSR drifts so only relative change works, FSRs need per-pad calibration.</a:t>
             </a:r>
           </a:p>
           <a:p/>
           <a:p>
             <a:r>
-              <a:t>Then have each group name which two got confused and what would have separated</a:t>
-            </a:r>
-          </a:p>
-          <a:p>
-            <a:r>
-              <a:t>them. That confusion is the actual learning, not the successful ones.</a:t>
+              <a:t>Push the phone option hard. For a lot of projects it beats everything else on</a:t>
+            </a:r>
+          </a:p>
+          <a:p>
+            <a:r>
+              <a:t>the table and needs no soldering at all.</a:t>
             </a:r>
           </a:p>
         </p:txBody>
@@ -2103,23 +2063,45 @@
           <a:lstStyle/>
           <a:p>
             <a:r>
-              <a:t>Put this up while the blind tests are running so groups can check</a:t>
-            </a:r>
-          </a:p>
-          <a:p>
-            <a:r>
-              <a:t>themselves without asking you.</a:t>
+              <a:t>Five minutes, and put the actual repos on screen if you can.</a:t>
             </a:r>
           </a:p>
           <a:p/>
           <a:p>
             <a:r>
-              <a:t>The second line matters most: a device that fires continuously when held is</a:t>
-            </a:r>
-          </a:p>
-          <a:p>
-            <a:r>
-              <a:t>the single most common bug, and it is a debounce problem.</a:t>
+              <a:t>The argument: this was built by students at your stage, not by a lab with a</a:t>
+            </a:r>
+          </a:p>
+          <a:p>
+            <a:r>
+              <a:t>budget. The gap between "we should use touch" and "it moves when you touch it"</a:t>
+            </a:r>
+          </a:p>
+          <a:p>
+            <a:r>
+              <a:t>is smaller than it looks.</a:t>
+            </a:r>
+          </a:p>
+          <a:p/>
+          <a:p>
+            <a:r>
+              <a:t>The moving screen has a browser control panel over the serial port, which is</a:t>
+            </a:r>
+          </a:p>
+          <a:p>
+            <a:r>
+              <a:t>what you will wish you had at the project demonstrations.</a:t>
+            </a:r>
+          </a:p>
+          <a:p/>
+          <a:p>
+            <a:r>
+              <a:t>Note for you: the sock repo has a hardcoded Wi-Fi password and live patient IDs</a:t>
+            </a:r>
+          </a:p>
+          <a:p>
+            <a:r>
+              <a:t>in it. Scrub before showing, or show only the calibration section.</a:t>
             </a:r>
           </a:p>
         </p:txBody>
@@ -2189,23 +2171,18 @@
           <a:lstStyle/>
           <a:p>
             <a:r>
-              <a:t>The closing argument. Thirty seconds.</a:t>
+              <a:t>1:35. The blind test.</a:t>
             </a:r>
           </a:p>
           <a:p/>
           <a:p>
             <a:r>
-              <a:t>If they leave with only one thing, it should be the third: pick the actuator</a:t>
-            </a:r>
-          </a:p>
-          <a:p>
-            <a:r>
-              <a:t>before designing the interaction. Discovering in week 46 that the chosen one</a:t>
-            </a:r>
-          </a:p>
-          <a:p>
-            <a:r>
-              <a:t>cannot do the job is the expensive mistake this session exists to prevent.</a:t>
+              <a:t>Most groups will already have something from task 05. This is where it gets</a:t>
+            </a:r>
+          </a:p>
+          <a:p>
+            <a:r>
+              <a:t>tested by someone who did not build it.</a:t>
             </a:r>
           </a:p>
         </p:txBody>
@@ -2275,40 +2252,212 @@
           <a:lstStyle/>
           <a:p>
             <a:r>
-              <a:t>Point them at the repo. Every task sketch is commented for them, and the</a:t>
-            </a:r>
-          </a:p>
-          <a:p>
-            <a:r>
-              <a:t>bench test sketches are there too if they want to see the minimal version.</a:t>
+              <a:t>Read the brief out once, then get out of the way. Full wording, since the</a:t>
+            </a:r>
+          </a:p>
+          <a:p>
+            <a:r>
+              <a:t>slide is only the bones:</a:t>
             </a:r>
           </a:p>
           <a:p/>
           <a:p>
             <a:r>
-              <a:t>Last thing to say: pick your actuator before you design the interaction, not</a:t>
-            </a:r>
-          </a:p>
-          <a:p>
-            <a:r>
-              <a:t>after. Today was so they can do that from experience rather than a datasheet.</a:t>
+              <a:t>"Pick one actuator. Encode three messages: arrived, something wrong, finished.</a:t>
+            </a:r>
+          </a:p>
+          <a:p>
+            <a:r>
+              <a:t>Vary only the rhythm of the pulses and how strong they are. Then hand it to</a:t>
+            </a:r>
+          </a:p>
+          <a:p>
+            <a:r>
+              <a:t>another group with the screen turned away and see if they can name all three."</a:t>
             </a:r>
           </a:p>
           <a:p/>
           <a:p>
             <a:r>
-              <a:t>Pack down: everything back in the box, including the resistors. It will not all</a:t>
-            </a:r>
-          </a:p>
-          <a:p>
-            <a:r>
-              <a:t>come back.</a:t>
+              <a:t>If someone asks to add a second actuator, say no. The constraint is the</a:t>
+            </a:r>
+          </a:p>
+          <a:p>
+            <a:r>
+              <a:t>exercise.</a:t>
+            </a:r>
+          </a:p>
+        </p:txBody>
+      </p:sp>
+      <p:sp>
+        <p:nvSpPr>
+          <p:cNvPr id="4" name="Slide Number Placeholder 3"/>
+          <p:cNvSpPr>
+            <a:spLocks noGrp="1"/>
+          </p:cNvSpPr>
+          <p:nvPr>
+            <p:ph type="sldNum" idx="5" sz="quarter"/>
+          </p:nvPr>
+        </p:nvSpPr>
+        <p:spPr/>
+      </p:sp>
+    </p:spTree>
+  </p:cSld>
+  <p:clrMapOvr>
+    <a:masterClrMapping/>
+  </p:clrMapOvr>
+</p:notes>
+</file>
+
+<file path=ppt/notesSlides/notesSlide28.xml><?xml version="1.0" encoding="utf-8"?>
+<p:notes xmlns:a="http://schemas.openxmlformats.org/drawingml/2006/main" xmlns:p="http://schemas.openxmlformats.org/presentationml/2006/main" xmlns:r="http://schemas.openxmlformats.org/officeDocument/2006/relationships">
+  <p:cSld>
+    <p:spTree>
+      <p:nvGrpSpPr>
+        <p:cNvPr id="1" name=""/>
+        <p:cNvGrpSpPr/>
+        <p:nvPr/>
+      </p:nvGrpSpPr>
+      <p:grpSpPr>
+        <a:xfrm>
+          <a:off x="0" y="0"/>
+          <a:ext cx="0" cy="0"/>
+          <a:chOff x="0" y="0"/>
+          <a:chExt cx="0" cy="0"/>
+        </a:xfrm>
+      </p:grpSpPr>
+      <p:sp>
+        <p:nvSpPr>
+          <p:cNvPr id="2" name="Slide Image Placeholder 1"/>
+          <p:cNvSpPr>
+            <a:spLocks noGrp="1"/>
+          </p:cNvSpPr>
+          <p:nvPr>
+            <p:ph type="sldImg" idx="2"/>
+          </p:nvPr>
+        </p:nvSpPr>
+        <p:spPr/>
+      </p:sp>
+      <p:sp>
+        <p:nvSpPr>
+          <p:cNvPr id="3" name="Notes Placeholder 2"/>
+          <p:cNvSpPr>
+            <a:spLocks noGrp="1"/>
+          </p:cNvSpPr>
+          <p:nvPr>
+            <p:ph type="body" idx="3" sz="quarter"/>
+          </p:nvPr>
+        </p:nvSpPr>
+        <p:spPr/>
+        <p:txBody>
+          <a:bodyPr/>
+          <a:lstStyle/>
+          <a:p>
+            <a:r>
+              <a:t>The line worth repeating twice.</a:t>
             </a:r>
           </a:p>
           <a:p/>
           <a:p>
             <a:r>
-              <a:t>If anyone wants to borrow parts for the project weeks, now is when they ask.</a:t>
+              <a:t>Run the test: swap groups, receiver looks away, guess all three.</a:t>
+            </a:r>
+          </a:p>
+          <a:p/>
+          <a:p>
+            <a:r>
+              <a:t>Then have each group name which two got confused and what would have separated</a:t>
+            </a:r>
+          </a:p>
+          <a:p>
+            <a:r>
+              <a:t>them. That confusion is the actual learning, not the successful ones.</a:t>
+            </a:r>
+          </a:p>
+        </p:txBody>
+      </p:sp>
+      <p:sp>
+        <p:nvSpPr>
+          <p:cNvPr id="4" name="Slide Number Placeholder 3"/>
+          <p:cNvSpPr>
+            <a:spLocks noGrp="1"/>
+          </p:cNvSpPr>
+          <p:nvPr>
+            <p:ph type="sldNum" idx="5" sz="quarter"/>
+          </p:nvPr>
+        </p:nvSpPr>
+        <p:spPr/>
+      </p:sp>
+    </p:spTree>
+  </p:cSld>
+  <p:clrMapOvr>
+    <a:masterClrMapping/>
+  </p:clrMapOvr>
+</p:notes>
+</file>
+
+<file path=ppt/notesSlides/notesSlide29.xml><?xml version="1.0" encoding="utf-8"?>
+<p:notes xmlns:a="http://schemas.openxmlformats.org/drawingml/2006/main" xmlns:p="http://schemas.openxmlformats.org/presentationml/2006/main" xmlns:r="http://schemas.openxmlformats.org/officeDocument/2006/relationships">
+  <p:cSld>
+    <p:spTree>
+      <p:nvGrpSpPr>
+        <p:cNvPr id="1" name=""/>
+        <p:cNvGrpSpPr/>
+        <p:nvPr/>
+      </p:nvGrpSpPr>
+      <p:grpSpPr>
+        <a:xfrm>
+          <a:off x="0" y="0"/>
+          <a:ext cx="0" cy="0"/>
+          <a:chOff x="0" y="0"/>
+          <a:chExt cx="0" cy="0"/>
+        </a:xfrm>
+      </p:grpSpPr>
+      <p:sp>
+        <p:nvSpPr>
+          <p:cNvPr id="2" name="Slide Image Placeholder 1"/>
+          <p:cNvSpPr>
+            <a:spLocks noGrp="1"/>
+          </p:cNvSpPr>
+          <p:nvPr>
+            <p:ph type="sldImg" idx="2"/>
+          </p:nvPr>
+        </p:nvSpPr>
+        <p:spPr/>
+      </p:sp>
+      <p:sp>
+        <p:nvSpPr>
+          <p:cNvPr id="3" name="Notes Placeholder 2"/>
+          <p:cNvSpPr>
+            <a:spLocks noGrp="1"/>
+          </p:cNvSpPr>
+          <p:nvPr>
+            <p:ph type="body" idx="3" sz="quarter"/>
+          </p:nvPr>
+        </p:nvSpPr>
+        <p:spPr/>
+        <p:txBody>
+          <a:bodyPr/>
+          <a:lstStyle/>
+          <a:p>
+            <a:r>
+              <a:t>Put this up while the blind tests are running so groups can check</a:t>
+            </a:r>
+          </a:p>
+          <a:p>
+            <a:r>
+              <a:t>themselves without asking you.</a:t>
+            </a:r>
+          </a:p>
+          <a:p/>
+          <a:p>
+            <a:r>
+              <a:t>The second line matters most: a device that fires continuously when held is</a:t>
+            </a:r>
+          </a:p>
+          <a:p>
+            <a:r>
+              <a:t>the single most common bug, and it is a debounce problem.</a:t>
             </a:r>
           </a:p>
         </p:txBody>
@@ -2430,6 +2579,195 @@
 </p:notes>
 </file>
 
+<file path=ppt/notesSlides/notesSlide30.xml><?xml version="1.0" encoding="utf-8"?>
+<p:notes xmlns:a="http://schemas.openxmlformats.org/drawingml/2006/main" xmlns:p="http://schemas.openxmlformats.org/presentationml/2006/main" xmlns:r="http://schemas.openxmlformats.org/officeDocument/2006/relationships">
+  <p:cSld>
+    <p:spTree>
+      <p:nvGrpSpPr>
+        <p:cNvPr id="1" name=""/>
+        <p:cNvGrpSpPr/>
+        <p:nvPr/>
+      </p:nvGrpSpPr>
+      <p:grpSpPr>
+        <a:xfrm>
+          <a:off x="0" y="0"/>
+          <a:ext cx="0" cy="0"/>
+          <a:chOff x="0" y="0"/>
+          <a:chExt cx="0" cy="0"/>
+        </a:xfrm>
+      </p:grpSpPr>
+      <p:sp>
+        <p:nvSpPr>
+          <p:cNvPr id="2" name="Slide Image Placeholder 1"/>
+          <p:cNvSpPr>
+            <a:spLocks noGrp="1"/>
+          </p:cNvSpPr>
+          <p:nvPr>
+            <p:ph type="sldImg" idx="2"/>
+          </p:nvPr>
+        </p:nvSpPr>
+        <p:spPr/>
+      </p:sp>
+      <p:sp>
+        <p:nvSpPr>
+          <p:cNvPr id="3" name="Notes Placeholder 2"/>
+          <p:cNvSpPr>
+            <a:spLocks noGrp="1"/>
+          </p:cNvSpPr>
+          <p:nvPr>
+            <p:ph type="body" idx="3" sz="quarter"/>
+          </p:nvPr>
+        </p:nvSpPr>
+        <p:spPr/>
+        <p:txBody>
+          <a:bodyPr/>
+          <a:lstStyle/>
+          <a:p>
+            <a:r>
+              <a:t>The closing argument. Thirty seconds.</a:t>
+            </a:r>
+          </a:p>
+          <a:p/>
+          <a:p>
+            <a:r>
+              <a:t>If they leave with only one thing, it should be the third: pick the actuator</a:t>
+            </a:r>
+          </a:p>
+          <a:p>
+            <a:r>
+              <a:t>before designing the interaction. Discovering in week 46 that the chosen one</a:t>
+            </a:r>
+          </a:p>
+          <a:p>
+            <a:r>
+              <a:t>cannot do the job is the expensive mistake this session exists to prevent.</a:t>
+            </a:r>
+          </a:p>
+        </p:txBody>
+      </p:sp>
+      <p:sp>
+        <p:nvSpPr>
+          <p:cNvPr id="4" name="Slide Number Placeholder 3"/>
+          <p:cNvSpPr>
+            <a:spLocks noGrp="1"/>
+          </p:cNvSpPr>
+          <p:nvPr>
+            <p:ph type="sldNum" idx="5" sz="quarter"/>
+          </p:nvPr>
+        </p:nvSpPr>
+        <p:spPr/>
+      </p:sp>
+    </p:spTree>
+  </p:cSld>
+  <p:clrMapOvr>
+    <a:masterClrMapping/>
+  </p:clrMapOvr>
+</p:notes>
+</file>
+
+<file path=ppt/notesSlides/notesSlide31.xml><?xml version="1.0" encoding="utf-8"?>
+<p:notes xmlns:a="http://schemas.openxmlformats.org/drawingml/2006/main" xmlns:p="http://schemas.openxmlformats.org/presentationml/2006/main" xmlns:r="http://schemas.openxmlformats.org/officeDocument/2006/relationships">
+  <p:cSld>
+    <p:spTree>
+      <p:nvGrpSpPr>
+        <p:cNvPr id="1" name=""/>
+        <p:cNvGrpSpPr/>
+        <p:nvPr/>
+      </p:nvGrpSpPr>
+      <p:grpSpPr>
+        <a:xfrm>
+          <a:off x="0" y="0"/>
+          <a:ext cx="0" cy="0"/>
+          <a:chOff x="0" y="0"/>
+          <a:chExt cx="0" cy="0"/>
+        </a:xfrm>
+      </p:grpSpPr>
+      <p:sp>
+        <p:nvSpPr>
+          <p:cNvPr id="2" name="Slide Image Placeholder 1"/>
+          <p:cNvSpPr>
+            <a:spLocks noGrp="1"/>
+          </p:cNvSpPr>
+          <p:nvPr>
+            <p:ph type="sldImg" idx="2"/>
+          </p:nvPr>
+        </p:nvSpPr>
+        <p:spPr/>
+      </p:sp>
+      <p:sp>
+        <p:nvSpPr>
+          <p:cNvPr id="3" name="Notes Placeholder 2"/>
+          <p:cNvSpPr>
+            <a:spLocks noGrp="1"/>
+          </p:cNvSpPr>
+          <p:nvPr>
+            <p:ph type="body" idx="3" sz="quarter"/>
+          </p:nvPr>
+        </p:nvSpPr>
+        <p:spPr/>
+        <p:txBody>
+          <a:bodyPr/>
+          <a:lstStyle/>
+          <a:p>
+            <a:r>
+              <a:t>Point them at the repo. Every task sketch is commented for them, and the</a:t>
+            </a:r>
+          </a:p>
+          <a:p>
+            <a:r>
+              <a:t>bench test sketches are there too if they want to see the minimal version.</a:t>
+            </a:r>
+          </a:p>
+          <a:p/>
+          <a:p>
+            <a:r>
+              <a:t>Last thing to say: pick your actuator before you design the interaction, not</a:t>
+            </a:r>
+          </a:p>
+          <a:p>
+            <a:r>
+              <a:t>after. Today was so they can do that from experience rather than a datasheet.</a:t>
+            </a:r>
+          </a:p>
+          <a:p/>
+          <a:p>
+            <a:r>
+              <a:t>Pack down: everything back in the box, including the resistors. It will not all</a:t>
+            </a:r>
+          </a:p>
+          <a:p>
+            <a:r>
+              <a:t>come back.</a:t>
+            </a:r>
+          </a:p>
+          <a:p/>
+          <a:p>
+            <a:r>
+              <a:t>If anyone wants to borrow parts for the project weeks, now is when they ask.</a:t>
+            </a:r>
+          </a:p>
+        </p:txBody>
+      </p:sp>
+      <p:sp>
+        <p:nvSpPr>
+          <p:cNvPr id="4" name="Slide Number Placeholder 3"/>
+          <p:cNvSpPr>
+            <a:spLocks noGrp="1"/>
+          </p:cNvSpPr>
+          <p:nvPr>
+            <p:ph type="sldNum" idx="5" sz="quarter"/>
+          </p:nvPr>
+        </p:nvSpPr>
+        <p:spPr/>
+      </p:sp>
+    </p:spTree>
+  </p:cSld>
+  <p:clrMapOvr>
+    <a:masterClrMapping/>
+  </p:clrMapOvr>
+</p:notes>
+</file>
+
 <file path=ppt/notesSlides/notesSlide4.xml><?xml version="1.0" encoding="utf-8"?>
 <p:notes xmlns:a="http://schemas.openxmlformats.org/drawingml/2006/main" xmlns:p="http://schemas.openxmlformats.org/presentationml/2006/main" xmlns:r="http://schemas.openxmlformats.org/officeDocument/2006/relationships">
   <p:cSld>
@@ -2977,28 +3315,39 @@
           <a:lstStyle/>
           <a:p>
             <a:r>
-              <a:t>Two minutes total for this whole run of slides. It is a menu, not a</a:t>
-            </a:r>
-          </a:p>
-          <a:p>
-            <a:r>
-              <a:t>lecture: they are choosing what to go and pick up later.</a:t>
+              <a:t>Hand this out before anything else, or you will spend the session</a:t>
+            </a:r>
+          </a:p>
+          <a:p>
+            <a:r>
+              <a:t>fetching parts one at a time.</a:t>
             </a:r>
           </a:p>
           <a:p/>
           <a:p>
             <a:r>
-              <a:t>Hold up the real part as you show each one. The photo is a reminder for people</a:t>
-            </a:r>
-          </a:p>
-          <a:p>
-            <a:r>
-              <a:t>reading the deck afterwards; the object in your hand is what lands in the</a:t>
-            </a:r>
-          </a:p>
-          <a:p>
-            <a:r>
-              <a:t>room.</a:t>
+              <a:t>One set per pair. The three drawer numbers are the ones people actually come</a:t>
+            </a:r>
+          </a:p>
+          <a:p>
+            <a:r>
+              <a:t>back and ask for: 8A breadboard supply, 2C H-bridge, 11F amplifier.</a:t>
+            </a:r>
+          </a:p>
+          <a:p/>
+          <a:p>
+            <a:r>
+              <a:t>Jumper wires, breadboards and resistors are not tracked in the component</a:t>
+            </a:r>
+          </a:p>
+          <a:p>
+            <a:r>
+              <a:t>database, so make sure there are enough on the tables before students</a:t>
+            </a:r>
+          </a:p>
+          <a:p>
+            <a:r>
+              <a:t>arrive.</a:t>
             </a:r>
           </a:p>
         </p:txBody>
@@ -6201,6 +6550,102 @@
               <a:buNone/>
             </a:pPr>
             <a:r>
+              <a:rPr sz="4400" b="1">
+                <a:solidFill>
+                  <a:srgbClr val="000000"/>
+                </a:solidFill>
+                <a:latin typeface="Arial"/>
+              </a:rPr>
+              <a:t>WHAT IS ON THE TABLES</a:t>
+            </a:r>
+          </a:p>
+        </p:txBody>
+      </p:sp>
+      <p:pic>
+        <p:nvPicPr>
+          <p:cNvPr id="3" name="Picture 2" descr="wordmark_dark.png"/>
+          <p:cNvPicPr>
+            <a:picLocks noChangeAspect="1"/>
+          </p:cNvPicPr>
+          <p:nvPr/>
+        </p:nvPicPr>
+        <p:blipFill>
+          <a:blip r:embed="rId2"/>
+          <a:stretch>
+            <a:fillRect/>
+          </a:stretch>
+        </p:blipFill>
+        <p:spPr>
+          <a:xfrm>
+            <a:off x="342900" y="6184900"/>
+            <a:ext cx="2070100" cy="529560"/>
+          </a:xfrm>
+          <a:prstGeom prst="rect">
+            <a:avLst/>
+          </a:prstGeom>
+        </p:spPr>
+      </p:pic>
+      <p:pic>
+        <p:nvPicPr>
+          <p:cNvPr id="4" name="Picture 3" descr="seal_dark.png"/>
+          <p:cNvPicPr>
+            <a:picLocks noChangeAspect="1"/>
+          </p:cNvPicPr>
+          <p:nvPr/>
+        </p:nvPicPr>
+        <p:blipFill>
+          <a:blip r:embed="rId3"/>
+          <a:stretch>
+            <a:fillRect/>
+          </a:stretch>
+        </p:blipFill>
+        <p:spPr>
+          <a:xfrm>
+            <a:off x="11226800" y="5969000"/>
+            <a:ext cx="713915" cy="711200"/>
+          </a:xfrm>
+          <a:prstGeom prst="rect">
+            <a:avLst/>
+          </a:prstGeom>
+        </p:spPr>
+      </p:pic>
+    </p:spTree>
+  </p:cSld>
+  <p:clrMapOvr>
+    <a:masterClrMapping/>
+  </p:clrMapOvr>
+</p:sld>
+</file>
+
+<file path=ppt/slides/slide11.xml><?xml version="1.0" encoding="utf-8"?>
+<p:sld xmlns:a="http://schemas.openxmlformats.org/drawingml/2006/main" xmlns:p="http://schemas.openxmlformats.org/presentationml/2006/main" xmlns:r="http://schemas.openxmlformats.org/officeDocument/2006/relationships">
+  <p:cSld>
+    <p:spTree>
+      <p:nvGrpSpPr>
+        <p:cNvPr id="1" name=""/>
+        <p:cNvGrpSpPr/>
+        <p:nvPr/>
+      </p:nvGrpSpPr>
+      <p:grpSpPr/>
+      <p:sp>
+        <p:nvSpPr>
+          <p:cNvPr id="2" name="Title 1"/>
+          <p:cNvSpPr>
+            <a:spLocks noGrp="1"/>
+          </p:cNvSpPr>
+          <p:nvPr>
+            <p:ph type="title"/>
+          </p:nvPr>
+        </p:nvSpPr>
+        <p:spPr/>
+        <p:txBody>
+          <a:bodyPr/>
+          <a:lstStyle/>
+          <a:p>
+            <a:pPr marL="0" indent="0" algn="l">
+              <a:buNone/>
+            </a:pPr>
+            <a:r>
               <a:rPr sz="3200" b="1">
                 <a:solidFill>
                   <a:srgbClr val="000000"/>
@@ -6413,7 +6858,7 @@
 </p:sld>
 </file>
 
-<file path=ppt/slides/slide11.xml><?xml version="1.0" encoding="utf-8"?>
+<file path=ppt/slides/slide12.xml><?xml version="1.0" encoding="utf-8"?>
 <p:sld xmlns:a="http://schemas.openxmlformats.org/drawingml/2006/main" xmlns:p="http://schemas.openxmlformats.org/presentationml/2006/main" xmlns:r="http://schemas.openxmlformats.org/officeDocument/2006/relationships">
   <p:cSld>
     <p:spTree>
@@ -6654,7 +7099,7 @@
 </p:sld>
 </file>
 
-<file path=ppt/slides/slide12.xml><?xml version="1.0" encoding="utf-8"?>
+<file path=ppt/slides/slide13.xml><?xml version="1.0" encoding="utf-8"?>
 <p:sld xmlns:a="http://schemas.openxmlformats.org/drawingml/2006/main" xmlns:p="http://schemas.openxmlformats.org/presentationml/2006/main" xmlns:r="http://schemas.openxmlformats.org/officeDocument/2006/relationships">
   <p:cSld>
     <p:spTree>
@@ -6895,7 +7340,7 @@
 </p:sld>
 </file>
 
-<file path=ppt/slides/slide13.xml><?xml version="1.0" encoding="utf-8"?>
+<file path=ppt/slides/slide14.xml><?xml version="1.0" encoding="utf-8"?>
 <p:sld xmlns:a="http://schemas.openxmlformats.org/drawingml/2006/main" xmlns:p="http://schemas.openxmlformats.org/presentationml/2006/main" xmlns:r="http://schemas.openxmlformats.org/officeDocument/2006/relationships">
   <p:cSld>
     <p:spTree>
@@ -7182,7 +7627,7 @@
 </p:sld>
 </file>
 
-<file path=ppt/slides/slide14.xml><?xml version="1.0" encoding="utf-8"?>
+<file path=ppt/slides/slide15.xml><?xml version="1.0" encoding="utf-8"?>
 <p:sld xmlns:a="http://schemas.openxmlformats.org/drawingml/2006/main" xmlns:p="http://schemas.openxmlformats.org/presentationml/2006/main" xmlns:r="http://schemas.openxmlformats.org/officeDocument/2006/relationships">
   <p:cSld>
     <p:spTree>
@@ -7423,7 +7868,7 @@
 </p:sld>
 </file>
 
-<file path=ppt/slides/slide15.xml><?xml version="1.0" encoding="utf-8"?>
+<file path=ppt/slides/slide16.xml><?xml version="1.0" encoding="utf-8"?>
 <p:sld xmlns:a="http://schemas.openxmlformats.org/drawingml/2006/main" xmlns:p="http://schemas.openxmlformats.org/presentationml/2006/main" xmlns:r="http://schemas.openxmlformats.org/officeDocument/2006/relationships">
   <p:cSld>
     <p:spTree>
@@ -7579,7 +8024,7 @@
                 </a:solidFill>
                 <a:latin typeface="Consolas"/>
               </a:rPr>
-              <a:t>Drawer 7F  |  12 large, 13 medium  |  needs an amp</a:t>
+              <a:t>Drawer 7F  |  12 large, 13 medium, 23 bone  |  needs an amp</a:t>
             </a:r>
           </a:p>
         </p:txBody>
@@ -7664,7 +8109,7 @@
 </p:sld>
 </file>
 
-<file path=ppt/slides/slide16.xml><?xml version="1.0" encoding="utf-8"?>
+<file path=ppt/slides/slide17.xml><?xml version="1.0" encoding="utf-8"?>
 <p:sld xmlns:a="http://schemas.openxmlformats.org/drawingml/2006/main" xmlns:p="http://schemas.openxmlformats.org/presentationml/2006/main" xmlns:r="http://schemas.openxmlformats.org/officeDocument/2006/relationships">
   <p:cSld>
     <p:spTree>
@@ -7699,7 +8144,7 @@
                 </a:solidFill>
                 <a:latin typeface="Arial"/>
               </a:rPr>
-              <a:t>FREESTYLE IS ENCOURAGED</a:t>
+              <a:t>SERVO</a:t>
             </a:r>
           </a:p>
         </p:txBody>
@@ -7714,117 +8159,120 @@
             <p:ph type="body" idx="1"/>
           </p:nvPr>
         </p:nvSpPr>
-        <p:spPr/>
+        <p:spPr>
+          <a:xfrm>
+            <a:off x="5461000" y="1905000"/>
+            <a:ext cx="5486400" cy="3302000"/>
+          </a:xfrm>
+        </p:spPr>
         <p:txBody>
           <a:bodyPr/>
           <a:lstStyle/>
           <a:p>
             <a:pPr marL="0" indent="0" algn="l">
               <a:lnSpc>
-                <a:spcPct val="128000"/>
-              </a:lnSpc>
-              <a:spcAft>
-                <a:spcPts val="600"/>
-              </a:spcAft>
-              <a:buNone/>
-            </a:pPr>
-            <a:r>
-              <a:rPr sz="1700" b="1">
-                <a:solidFill>
-                  <a:srgbClr val="000000"/>
-                </a:solidFill>
-                <a:latin typeface="Arial"/>
-              </a:rPr>
-              <a:t>You do not have to do the tasks in order.</a:t>
-            </a:r>
-          </a:p>
-          <a:p>
-            <a:pPr marL="0" indent="0" algn="l">
-              <a:lnSpc>
-                <a:spcPct val="128000"/>
-              </a:lnSpc>
-              <a:spcAft>
-                <a:spcPts val="600"/>
-              </a:spcAft>
-              <a:buNone/>
-            </a:pPr>
-            <a:r>
-              <a:rPr sz="1700" b="1">
-                <a:solidFill>
-                  <a:srgbClr val="000000"/>
-                </a:solidFill>
-                <a:latin typeface="Arial"/>
-              </a:rPr>
-              <a:t>You do not have to finish them.</a:t>
-            </a:r>
-          </a:p>
-          <a:p>
-            <a:pPr marL="0" indent="0" algn="l">
-              <a:lnSpc>
-                <a:spcPct val="128000"/>
+                <a:spcPct val="130000"/>
+              </a:lnSpc>
+              <a:spcAft>
+                <a:spcPts val="1200"/>
+              </a:spcAft>
+              <a:buNone/>
+            </a:pPr>
+            <a:r>
+              <a:rPr sz="1600" b="0">
+                <a:solidFill>
+                  <a:srgbClr val="000000"/>
+                </a:solidFill>
+                <a:latin typeface="Arial"/>
+              </a:rPr>
+              <a:t>A motor that holds a position instead of spinning freely. Tell it an angle and it goes there.</a:t>
+            </a:r>
+          </a:p>
+          <a:p>
+            <a:pPr marL="0" indent="0" algn="l">
+              <a:lnSpc>
+                <a:spcPct val="130000"/>
+              </a:lnSpc>
+              <a:spcAft>
+                <a:spcPts val="1400"/>
+              </a:spcAft>
+              <a:buNone/>
+            </a:pPr>
+            <a:r>
+              <a:rPr sz="1600" b="1">
+                <a:solidFill>
+                  <a:srgbClr val="002546"/>
+                </a:solidFill>
+                <a:latin typeface="Arial"/>
+              </a:rPr>
+              <a:t>Feels like: something deliberate moving, with force behind it.</a:t>
+            </a:r>
+          </a:p>
+          <a:p>
+            <a:pPr marL="0" indent="0" algn="l">
+              <a:lnSpc>
+                <a:spcPct val="130000"/>
+              </a:lnSpc>
+              <a:spcAft>
+                <a:spcPts val="400"/>
+              </a:spcAft>
+              <a:buNone/>
+            </a:pPr>
+            <a:r>
+              <a:rPr sz="900" b="1">
+                <a:solidFill>
+                  <a:srgbClr val="595959"/>
+                </a:solidFill>
+                <a:latin typeface="Arial"/>
+              </a:rPr>
+              <a:t>USED FOR</a:t>
+            </a:r>
+          </a:p>
+          <a:p>
+            <a:pPr marL="0" indent="0" algn="l">
+              <a:lnSpc>
+                <a:spcPct val="130000"/>
+              </a:lnSpc>
+              <a:spcAft>
+                <a:spcPts val="1400"/>
+              </a:spcAft>
+              <a:buNone/>
+            </a:pPr>
+            <a:r>
+              <a:rPr sz="1400" b="0">
+                <a:solidFill>
+                  <a:srgbClr val="000000"/>
+                </a:solidFill>
+                <a:latin typeface="Arial"/>
+              </a:rPr>
+              <a:t>Anything that points, pushes, opens or resists a hand.</a:t>
+            </a:r>
+          </a:p>
+          <a:p>
+            <a:pPr marL="0" indent="0" algn="l">
+              <a:lnSpc>
+                <a:spcPct val="130000"/>
               </a:lnSpc>
               <a:spcAft>
                 <a:spcPts val="0"/>
               </a:spcAft>
               <a:buNone/>
             </a:pPr>
-          </a:p>
-          <a:p>
-            <a:pPr marL="0" indent="0" algn="l">
-              <a:lnSpc>
-                <a:spcPct val="128000"/>
-              </a:lnSpc>
-              <a:spcAft>
-                <a:spcPts val="600"/>
-              </a:spcAft>
-              <a:buNone/>
-            </a:pPr>
-            <a:r>
-              <a:rPr sz="1700" b="0">
-                <a:solidFill>
-                  <a:srgbClr val="000000"/>
-                </a:solidFill>
-                <a:latin typeface="Arial"/>
-              </a:rPr>
-              <a:t>Getting task 01 working and then properly playing with task 02 beats rushing through all five.</a:t>
-            </a:r>
-          </a:p>
-          <a:p>
-            <a:pPr marL="0" indent="0" algn="l">
-              <a:lnSpc>
-                <a:spcPct val="128000"/>
-              </a:lnSpc>
-              <a:spcAft>
-                <a:spcPts val="0"/>
-              </a:spcAft>
-              <a:buNone/>
-            </a:pPr>
-          </a:p>
-          <a:p>
-            <a:pPr marL="0" indent="0" algn="l">
-              <a:lnSpc>
-                <a:spcPct val="128000"/>
-              </a:lnSpc>
-              <a:spcAft>
-                <a:spcPts val="600"/>
-              </a:spcAft>
-              <a:buNone/>
-            </a:pPr>
-            <a:r>
-              <a:rPr sz="1700" b="0">
-                <a:solidFill>
-                  <a:srgbClr val="000000"/>
-                </a:solidFill>
-                <a:latin typeface="Arial"/>
-              </a:rPr>
-              <a:t>If you want to drive something that is not in front of you, go and get it.</a:t>
+            <a:r>
+              <a:rPr sz="1200" b="0">
+                <a:solidFill>
+                  <a:srgbClr val="595959"/>
+                </a:solidFill>
+                <a:latin typeface="Consolas"/>
+              </a:rPr>
+              <a:t>Drawer 2F  |  80 in stock  |  Servo.h  |  needs its own 5V</a:t>
             </a:r>
           </a:p>
         </p:txBody>
       </p:sp>
       <p:pic>
         <p:nvPicPr>
-          <p:cNvPr id="4" name="Picture 3" descr="wordmark_dark.png"/>
+          <p:cNvPr id="4" name="Picture 3" descr="servo.jpg"/>
           <p:cNvPicPr>
             <a:picLocks noChangeAspect="1"/>
           </p:cNvPicPr>
@@ -7832,6 +8280,30 @@
         </p:nvPicPr>
         <p:blipFill>
           <a:blip r:embed="rId2"/>
+          <a:stretch>
+            <a:fillRect/>
+          </a:stretch>
+        </p:blipFill>
+        <p:spPr>
+          <a:xfrm>
+            <a:off x="914400" y="1905000"/>
+            <a:ext cx="4191000" cy="3145410"/>
+          </a:xfrm>
+          <a:prstGeom prst="rect">
+            <a:avLst/>
+          </a:prstGeom>
+        </p:spPr>
+      </p:pic>
+      <p:pic>
+        <p:nvPicPr>
+          <p:cNvPr id="5" name="Picture 4" descr="wordmark_dark.png"/>
+          <p:cNvPicPr>
+            <a:picLocks noChangeAspect="1"/>
+          </p:cNvPicPr>
+          <p:nvPr/>
+        </p:nvPicPr>
+        <p:blipFill>
+          <a:blip r:embed="rId3"/>
           <a:stretch>
             <a:fillRect/>
           </a:stretch>
@@ -7848,268 +8320,14 @@
       </p:pic>
       <p:pic>
         <p:nvPicPr>
-          <p:cNvPr id="5" name="Picture 4" descr="seal_dark.png"/>
+          <p:cNvPr id="6" name="Picture 5" descr="seal_dark.png"/>
           <p:cNvPicPr>
             <a:picLocks noChangeAspect="1"/>
           </p:cNvPicPr>
           <p:nvPr/>
         </p:nvPicPr>
         <p:blipFill>
-          <a:blip r:embed="rId3"/>
-          <a:stretch>
-            <a:fillRect/>
-          </a:stretch>
-        </p:blipFill>
-        <p:spPr>
-          <a:xfrm>
-            <a:off x="11226800" y="5969000"/>
-            <a:ext cx="713915" cy="711200"/>
-          </a:xfrm>
-          <a:prstGeom prst="rect">
-            <a:avLst/>
-          </a:prstGeom>
-        </p:spPr>
-      </p:pic>
-    </p:spTree>
-  </p:cSld>
-  <p:clrMapOvr>
-    <a:masterClrMapping/>
-  </p:clrMapOvr>
-</p:sld>
-</file>
-
-<file path=ppt/slides/slide17.xml><?xml version="1.0" encoding="utf-8"?>
-<p:sld xmlns:a="http://schemas.openxmlformats.org/drawingml/2006/main" xmlns:p="http://schemas.openxmlformats.org/presentationml/2006/main" xmlns:r="http://schemas.openxmlformats.org/officeDocument/2006/relationships">
-  <p:cSld>
-    <p:spTree>
-      <p:nvGrpSpPr>
-        <p:cNvPr id="1" name=""/>
-        <p:cNvGrpSpPr/>
-        <p:nvPr/>
-      </p:nvGrpSpPr>
-      <p:grpSpPr/>
-      <p:sp>
-        <p:nvSpPr>
-          <p:cNvPr id="2" name="Title 1"/>
-          <p:cNvSpPr>
-            <a:spLocks noGrp="1"/>
-          </p:cNvSpPr>
-          <p:nvPr>
-            <p:ph type="title"/>
-          </p:nvPr>
-        </p:nvSpPr>
-        <p:spPr/>
-        <p:txBody>
-          <a:bodyPr/>
-          <a:lstStyle/>
-          <a:p>
-            <a:pPr marL="0" indent="0" algn="l">
-              <a:buNone/>
-            </a:pPr>
-            <a:r>
-              <a:rPr sz="3200" b="1">
-                <a:solidFill>
-                  <a:srgbClr val="000000"/>
-                </a:solidFill>
-                <a:latin typeface="Arial"/>
-              </a:rPr>
-              <a:t>BEFORE YOU POWER ANYTHING</a:t>
-            </a:r>
-          </a:p>
-        </p:txBody>
-      </p:sp>
-      <p:sp>
-        <p:nvSpPr>
-          <p:cNvPr id="3" name="Text Placeholder 2"/>
-          <p:cNvSpPr>
-            <a:spLocks noGrp="1"/>
-          </p:cNvSpPr>
-          <p:nvPr>
-            <p:ph type="body" idx="1"/>
-          </p:nvPr>
-        </p:nvSpPr>
-        <p:spPr/>
-        <p:txBody>
-          <a:bodyPr/>
-          <a:lstStyle/>
-          <a:p>
-            <a:pPr marL="0" indent="0" algn="l">
-              <a:lnSpc>
-                <a:spcPct val="128000"/>
-              </a:lnSpc>
-              <a:spcAft>
-                <a:spcPts val="600"/>
-              </a:spcAft>
-              <a:buNone/>
-            </a:pPr>
-            <a:r>
-              <a:rPr sz="1700" b="1">
-                <a:solidFill>
-                  <a:srgbClr val="000000"/>
-                </a:solidFill>
-                <a:latin typeface="Arial"/>
-              </a:rPr>
-              <a:t>The solenoid and the Peltier both pull real current.</a:t>
-            </a:r>
-          </a:p>
-          <a:p>
-            <a:pPr marL="0" indent="0" algn="l">
-              <a:lnSpc>
-                <a:spcPct val="128000"/>
-              </a:lnSpc>
-              <a:spcAft>
-                <a:spcPts val="600"/>
-              </a:spcAft>
-              <a:buNone/>
-            </a:pPr>
-            <a:r>
-              <a:rPr sz="1500" b="0">
-                <a:solidFill>
-                  <a:srgbClr val="000000"/>
-                </a:solidFill>
-                <a:latin typeface="Arial"/>
-              </a:rPr>
-              <a:t>• They need their own supply. Ask before you rewire either.</a:t>
-            </a:r>
-          </a:p>
-          <a:p>
-            <a:pPr marL="0" indent="0" algn="l">
-              <a:lnSpc>
-                <a:spcPct val="128000"/>
-              </a:lnSpc>
-              <a:spcAft>
-                <a:spcPts val="0"/>
-              </a:spcAft>
-              <a:buNone/>
-            </a:pPr>
-          </a:p>
-          <a:p>
-            <a:pPr marL="0" indent="0" algn="l">
-              <a:lnSpc>
-                <a:spcPct val="128000"/>
-              </a:lnSpc>
-              <a:spcAft>
-                <a:spcPts val="600"/>
-              </a:spcAft>
-              <a:buNone/>
-            </a:pPr>
-            <a:r>
-              <a:rPr sz="1700" b="1">
-                <a:solidFill>
-                  <a:srgbClr val="000000"/>
-                </a:solidFill>
-                <a:latin typeface="Arial"/>
-              </a:rPr>
-              <a:t>The Peltier needs its heatsink on. Every time.</a:t>
-            </a:r>
-          </a:p>
-          <a:p>
-            <a:pPr marL="0" indent="0" algn="l">
-              <a:lnSpc>
-                <a:spcPct val="128000"/>
-              </a:lnSpc>
-              <a:spcAft>
-                <a:spcPts val="600"/>
-              </a:spcAft>
-              <a:buNone/>
-            </a:pPr>
-            <a:r>
-              <a:rPr sz="1500" b="0">
-                <a:solidFill>
-                  <a:srgbClr val="000000"/>
-                </a:solidFill>
-                <a:latin typeface="Arial"/>
-              </a:rPr>
-              <a:t>• Without it the tile cooks itself in about a minute.</a:t>
-            </a:r>
-          </a:p>
-          <a:p>
-            <a:pPr marL="0" indent="0" algn="l">
-              <a:lnSpc>
-                <a:spcPct val="128000"/>
-              </a:lnSpc>
-              <a:spcAft>
-                <a:spcPts val="0"/>
-              </a:spcAft>
-              <a:buNone/>
-            </a:pPr>
-          </a:p>
-          <a:p>
-            <a:pPr marL="0" indent="0" algn="l">
-              <a:lnSpc>
-                <a:spcPct val="128000"/>
-              </a:lnSpc>
-              <a:spcAft>
-                <a:spcPts val="600"/>
-              </a:spcAft>
-              <a:buNone/>
-            </a:pPr>
-            <a:r>
-              <a:rPr sz="1700" b="1">
-                <a:solidFill>
-                  <a:srgbClr val="000000"/>
-                </a:solidFill>
-                <a:latin typeface="Arial"/>
-              </a:rPr>
-              <a:t>Never drive a motor straight from a pin.</a:t>
-            </a:r>
-          </a:p>
-          <a:p>
-            <a:pPr marL="0" indent="0" algn="l">
-              <a:lnSpc>
-                <a:spcPct val="128000"/>
-              </a:lnSpc>
-              <a:spcAft>
-                <a:spcPts val="600"/>
-              </a:spcAft>
-              <a:buNone/>
-            </a:pPr>
-            <a:r>
-              <a:rPr sz="1500" b="0">
-                <a:solidFill>
-                  <a:srgbClr val="000000"/>
-                </a:solidFill>
-                <a:latin typeface="Arial"/>
-              </a:rPr>
-              <a:t>• 40 mA limit. The motor wants nearly twice that.</a:t>
-            </a:r>
-          </a:p>
-        </p:txBody>
-      </p:sp>
-      <p:pic>
-        <p:nvPicPr>
-          <p:cNvPr id="4" name="Picture 3" descr="wordmark_dark.png"/>
-          <p:cNvPicPr>
-            <a:picLocks noChangeAspect="1"/>
-          </p:cNvPicPr>
-          <p:nvPr/>
-        </p:nvPicPr>
-        <p:blipFill>
-          <a:blip r:embed="rId2"/>
-          <a:stretch>
-            <a:fillRect/>
-          </a:stretch>
-        </p:blipFill>
-        <p:spPr>
-          <a:xfrm>
-            <a:off x="342900" y="6184900"/>
-            <a:ext cx="2070100" cy="529560"/>
-          </a:xfrm>
-          <a:prstGeom prst="rect">
-            <a:avLst/>
-          </a:prstGeom>
-        </p:spPr>
-      </p:pic>
-      <p:pic>
-        <p:nvPicPr>
-          <p:cNvPr id="5" name="Picture 4" descr="seal_dark.png"/>
-          <p:cNvPicPr>
-            <a:picLocks noChangeAspect="1"/>
-          </p:cNvPicPr>
-          <p:nvPr/>
-        </p:nvPicPr>
-        <p:blipFill>
-          <a:blip r:embed="rId3"/>
+          <a:blip r:embed="rId4"/>
           <a:stretch>
             <a:fillRect/>
           </a:stretch>
@@ -8167,7 +8385,7 @@
                 </a:solidFill>
                 <a:latin typeface="Arial"/>
               </a:rPr>
-              <a:t>THE ONE THAT SURPRISES PEOPLE</a:t>
+              <a:t>STEPPER MOTOR</a:t>
             </a:r>
           </a:p>
         </p:txBody>
@@ -8182,14 +8400,39 @@
             <p:ph type="body" idx="1"/>
           </p:nvPr>
         </p:nvSpPr>
-        <p:spPr/>
+        <p:spPr>
+          <a:xfrm>
+            <a:off x="5461000" y="1905000"/>
+            <a:ext cx="5486400" cy="3302000"/>
+          </a:xfrm>
+        </p:spPr>
         <p:txBody>
           <a:bodyPr/>
           <a:lstStyle/>
           <a:p>
             <a:pPr marL="0" indent="0" algn="l">
               <a:lnSpc>
-                <a:spcPct val="128000"/>
+                <a:spcPct val="130000"/>
+              </a:lnSpc>
+              <a:spcAft>
+                <a:spcPts val="1200"/>
+              </a:spcAft>
+              <a:buNone/>
+            </a:pPr>
+            <a:r>
+              <a:rPr sz="1600" b="0">
+                <a:solidFill>
+                  <a:srgbClr val="000000"/>
+                </a:solidFill>
+                <a:latin typeface="Arial"/>
+              </a:rPr>
+              <a:t>Moves in fixed steps rather than continuously, so you always know where it is without a sensor.</a:t>
+            </a:r>
+          </a:p>
+          <a:p>
+            <a:pPr marL="0" indent="0" algn="l">
+              <a:lnSpc>
+                <a:spcPct val="130000"/>
               </a:lnSpc>
               <a:spcAft>
                 <a:spcPts val="1400"/>
@@ -8197,162 +8440,80 @@
               <a:buNone/>
             </a:pPr>
             <a:r>
-              <a:rPr sz="1700" b="0">
+              <a:rPr sz="1600" b="1">
+                <a:solidFill>
+                  <a:srgbClr val="002546"/>
+                </a:solidFill>
+                <a:latin typeface="Arial"/>
+              </a:rPr>
+              <a:t>Feels like: precise, and audibly clicky.</a:t>
+            </a:r>
+          </a:p>
+          <a:p>
+            <a:pPr marL="0" indent="0" algn="l">
+              <a:lnSpc>
+                <a:spcPct val="130000"/>
+              </a:lnSpc>
+              <a:spcAft>
+                <a:spcPts val="400"/>
+              </a:spcAft>
+              <a:buNone/>
+            </a:pPr>
+            <a:r>
+              <a:rPr sz="900" b="1">
                 <a:solidFill>
                   <a:srgbClr val="595959"/>
                 </a:solidFill>
                 <a:latin typeface="Arial"/>
               </a:rPr>
-              <a:t>Touch input for the price of a wire. The thinking is where it costs you.</a:t>
-            </a:r>
-          </a:p>
-          <a:p>
-            <a:pPr marL="0" indent="0" algn="l">
-              <a:lnSpc>
-                <a:spcPct val="128000"/>
-              </a:lnSpc>
-              <a:spcAft>
-                <a:spcPts val="600"/>
-              </a:spcAft>
-              <a:buNone/>
-            </a:pPr>
-            <a:r>
-              <a:rPr sz="1700" b="1">
-                <a:solidFill>
-                  <a:srgbClr val="000000"/>
-                </a:solidFill>
-                <a:latin typeface="Arial"/>
-              </a:rPr>
-              <a:t>reading &gt; baselineAverage() * 1.01</a:t>
-            </a:r>
-          </a:p>
-          <a:p>
-            <a:pPr marL="0" indent="0" algn="l">
-              <a:lnSpc>
-                <a:spcPct val="128000"/>
+              <a:t>USED FOR</a:t>
+            </a:r>
+          </a:p>
+          <a:p>
+            <a:pPr marL="0" indent="0" algn="l">
+              <a:lnSpc>
+                <a:spcPct val="130000"/>
+              </a:lnSpc>
+              <a:spcAft>
+                <a:spcPts val="1400"/>
+              </a:spcAft>
+              <a:buNone/>
+            </a:pPr>
+            <a:r>
+              <a:rPr sz="1400" b="0">
+                <a:solidFill>
+                  <a:srgbClr val="000000"/>
+                </a:solidFill>
+                <a:latin typeface="Arial"/>
+              </a:rPr>
+              <a:t>Slow accurate motion. Dials, sliders, anything positioned.</a:t>
+            </a:r>
+          </a:p>
+          <a:p>
+            <a:pPr marL="0" indent="0" algn="l">
+              <a:lnSpc>
+                <a:spcPct val="130000"/>
               </a:lnSpc>
               <a:spcAft>
                 <a:spcPts val="0"/>
               </a:spcAft>
               <a:buNone/>
             </a:pPr>
-          </a:p>
-          <a:p>
-            <a:pPr marL="0" indent="0" algn="l">
-              <a:lnSpc>
-                <a:spcPct val="128000"/>
-              </a:lnSpc>
-              <a:spcAft>
-                <a:spcPts val="600"/>
-              </a:spcAft>
-              <a:buNone/>
-            </a:pPr>
-            <a:r>
-              <a:rPr sz="1700" b="1">
-                <a:solidFill>
-                  <a:srgbClr val="000000"/>
-                </a:solidFill>
-                <a:latin typeface="Arial"/>
-              </a:rPr>
-              <a:t>Threshold is relative, never absolute</a:t>
-            </a:r>
-          </a:p>
-          <a:p>
-            <a:pPr marL="0" indent="0" algn="l">
-              <a:lnSpc>
-                <a:spcPct val="128000"/>
-              </a:lnSpc>
-              <a:spcAft>
-                <a:spcPts val="600"/>
-              </a:spcAft>
-              <a:buNone/>
-            </a:pPr>
-            <a:r>
-              <a:rPr sz="1500" b="0">
-                <a:solidFill>
-                  <a:srgbClr val="000000"/>
-                </a:solidFill>
-                <a:latin typeface="Arial"/>
-              </a:rPr>
-              <a:t>• Readings drift with humidity and mains hum</a:t>
-            </a:r>
-          </a:p>
-          <a:p>
-            <a:pPr marL="0" indent="0" algn="l">
-              <a:lnSpc>
-                <a:spcPct val="128000"/>
-              </a:lnSpc>
-              <a:spcAft>
-                <a:spcPts val="600"/>
-              </a:spcAft>
-              <a:buNone/>
-            </a:pPr>
-            <a:r>
-              <a:rPr sz="1500" b="0">
-                <a:solidFill>
-                  <a:srgbClr val="000000"/>
-                </a:solidFill>
-                <a:latin typeface="Arial"/>
-              </a:rPr>
-              <a:t>• Fixed threshold works at 9am, fails at 1pm</a:t>
-            </a:r>
-          </a:p>
-          <a:p>
-            <a:pPr marL="0" indent="0" algn="l">
-              <a:lnSpc>
-                <a:spcPct val="128000"/>
-              </a:lnSpc>
-              <a:spcAft>
-                <a:spcPts val="0"/>
-              </a:spcAft>
-              <a:buNone/>
-            </a:pPr>
-          </a:p>
-          <a:p>
-            <a:pPr marL="0" indent="0" algn="l">
-              <a:lnSpc>
-                <a:spcPct val="128000"/>
-              </a:lnSpc>
-              <a:spcAft>
-                <a:spcPts val="600"/>
-              </a:spcAft>
-              <a:buNone/>
-            </a:pPr>
-            <a:r>
-              <a:rPr sz="1700" b="1">
-                <a:solidFill>
-                  <a:srgbClr val="000000"/>
-                </a:solidFill>
-                <a:latin typeface="Arial"/>
-              </a:rPr>
-              <a:t>Baseline only learns while untouched</a:t>
-            </a:r>
-          </a:p>
-          <a:p>
-            <a:pPr marL="0" indent="0" algn="l">
-              <a:lnSpc>
-                <a:spcPct val="128000"/>
-              </a:lnSpc>
-              <a:spcAft>
-                <a:spcPts val="600"/>
-              </a:spcAft>
-              <a:buNone/>
-            </a:pPr>
-            <a:r>
-              <a:rPr sz="1500" b="0">
-                <a:solidFill>
-                  <a:srgbClr val="000000"/>
-                </a:solidFill>
-                <a:latin typeface="Arial"/>
-              </a:rPr>
-              <a:t>• Or a long press teaches it that a finger is normal</a:t>
+            <a:r>
+              <a:rPr sz="1200" b="0">
+                <a:solidFill>
+                  <a:srgbClr val="595959"/>
+                </a:solidFill>
+                <a:latin typeface="Consolas"/>
+              </a:rPr>
+              <a:t>Drawer 2A  |  44 in stock  |  needs a ULN2003 driver</a:t>
             </a:r>
           </a:p>
         </p:txBody>
       </p:sp>
       <p:pic>
         <p:nvPicPr>
-          <p:cNvPr id="4" name="Picture 3" descr="wordmark_dark.png"/>
+          <p:cNvPr id="4" name="Picture 3" descr="stepper.jpg"/>
           <p:cNvPicPr>
             <a:picLocks noChangeAspect="1"/>
           </p:cNvPicPr>
@@ -8360,6 +8521,30 @@
         </p:nvPicPr>
         <p:blipFill>
           <a:blip r:embed="rId2"/>
+          <a:stretch>
+            <a:fillRect/>
+          </a:stretch>
+        </p:blipFill>
+        <p:spPr>
+          <a:xfrm>
+            <a:off x="914400" y="1905000"/>
+            <a:ext cx="4191000" cy="2280942"/>
+          </a:xfrm>
+          <a:prstGeom prst="rect">
+            <a:avLst/>
+          </a:prstGeom>
+        </p:spPr>
+      </p:pic>
+      <p:pic>
+        <p:nvPicPr>
+          <p:cNvPr id="5" name="Picture 4" descr="wordmark_dark.png"/>
+          <p:cNvPicPr>
+            <a:picLocks noChangeAspect="1"/>
+          </p:cNvPicPr>
+          <p:nvPr/>
+        </p:nvPicPr>
+        <p:blipFill>
+          <a:blip r:embed="rId3"/>
           <a:stretch>
             <a:fillRect/>
           </a:stretch>
@@ -8376,14 +8561,14 @@
       </p:pic>
       <p:pic>
         <p:nvPicPr>
-          <p:cNvPr id="5" name="Picture 4" descr="seal_dark.png"/>
+          <p:cNvPr id="6" name="Picture 5" descr="seal_dark.png"/>
           <p:cNvPicPr>
             <a:picLocks noChangeAspect="1"/>
           </p:cNvPicPr>
           <p:nvPr/>
         </p:nvPicPr>
         <p:blipFill>
-          <a:blip r:embed="rId3"/>
+          <a:blip r:embed="rId4"/>
           <a:stretch>
             <a:fillRect/>
           </a:stretch>
@@ -8435,20 +8620,141 @@
               <a:buNone/>
             </a:pPr>
             <a:r>
-              <a:rPr sz="4400" b="1">
-                <a:solidFill>
-                  <a:srgbClr val="000000"/>
-                </a:solidFill>
-                <a:latin typeface="Arial"/>
-              </a:rPr>
-              <a:t>INPUTS, AND PRIOR ART</a:t>
+              <a:rPr sz="3200" b="1">
+                <a:solidFill>
+                  <a:srgbClr val="000000"/>
+                </a:solidFill>
+                <a:latin typeface="Arial"/>
+              </a:rPr>
+              <a:t>ELECTROMAGNET</a:t>
+            </a:r>
+          </a:p>
+        </p:txBody>
+      </p:sp>
+      <p:sp>
+        <p:nvSpPr>
+          <p:cNvPr id="3" name="Text Placeholder 2"/>
+          <p:cNvSpPr>
+            <a:spLocks noGrp="1"/>
+          </p:cNvSpPr>
+          <p:nvPr>
+            <p:ph type="body" idx="1"/>
+          </p:nvPr>
+        </p:nvSpPr>
+        <p:spPr>
+          <a:xfrm>
+            <a:off x="5461000" y="1905000"/>
+            <a:ext cx="5486400" cy="3302000"/>
+          </a:xfrm>
+        </p:spPr>
+        <p:txBody>
+          <a:bodyPr/>
+          <a:lstStyle/>
+          <a:p>
+            <a:pPr marL="0" indent="0" algn="l">
+              <a:lnSpc>
+                <a:spcPct val="130000"/>
+              </a:lnSpc>
+              <a:spcAft>
+                <a:spcPts val="1200"/>
+              </a:spcAft>
+              <a:buNone/>
+            </a:pPr>
+            <a:r>
+              <a:rPr sz="1600" b="0">
+                <a:solidFill>
+                  <a:srgbClr val="000000"/>
+                </a:solidFill>
+                <a:latin typeface="Arial"/>
+              </a:rPr>
+              <a:t>Grabs and releases ferrous metal on command. No moving parts of its own.</a:t>
+            </a:r>
+          </a:p>
+          <a:p>
+            <a:pPr marL="0" indent="0" algn="l">
+              <a:lnSpc>
+                <a:spcPct val="130000"/>
+              </a:lnSpc>
+              <a:spcAft>
+                <a:spcPts val="1400"/>
+              </a:spcAft>
+              <a:buNone/>
+            </a:pPr>
+            <a:r>
+              <a:rPr sz="1600" b="1">
+                <a:solidFill>
+                  <a:srgbClr val="002546"/>
+                </a:solidFill>
+                <a:latin typeface="Arial"/>
+              </a:rPr>
+              <a:t>Feels like: a grip that appears and vanishes.</a:t>
+            </a:r>
+          </a:p>
+          <a:p>
+            <a:pPr marL="0" indent="0" algn="l">
+              <a:lnSpc>
+                <a:spcPct val="130000"/>
+              </a:lnSpc>
+              <a:spcAft>
+                <a:spcPts val="400"/>
+              </a:spcAft>
+              <a:buNone/>
+            </a:pPr>
+            <a:r>
+              <a:rPr sz="900" b="1">
+                <a:solidFill>
+                  <a:srgbClr val="595959"/>
+                </a:solidFill>
+                <a:latin typeface="Arial"/>
+              </a:rPr>
+              <a:t>USED FOR</a:t>
+            </a:r>
+          </a:p>
+          <a:p>
+            <a:pPr marL="0" indent="0" algn="l">
+              <a:lnSpc>
+                <a:spcPct val="130000"/>
+              </a:lnSpc>
+              <a:spcAft>
+                <a:spcPts val="1400"/>
+              </a:spcAft>
+              <a:buNone/>
+            </a:pPr>
+            <a:r>
+              <a:rPr sz="1400" b="0">
+                <a:solidFill>
+                  <a:srgbClr val="000000"/>
+                </a:solidFill>
+                <a:latin typeface="Arial"/>
+              </a:rPr>
+              <a:t>Latches, holds, and anything that should let go on cue.</a:t>
+            </a:r>
+          </a:p>
+          <a:p>
+            <a:pPr marL="0" indent="0" algn="l">
+              <a:lnSpc>
+                <a:spcPct val="130000"/>
+              </a:lnSpc>
+              <a:spcAft>
+                <a:spcPts val="0"/>
+              </a:spcAft>
+              <a:buNone/>
+            </a:pPr>
+            <a:r>
+              <a:rPr sz="1200" b="0">
+                <a:solidFill>
+                  <a:srgbClr val="595959"/>
+                </a:solidFill>
+                <a:latin typeface="Consolas"/>
+              </a:rPr>
+              <a:t>Drawer 3D  |  17 mini, 11 standard  |  needs a MOSFET</a:t>
             </a:r>
           </a:p>
         </p:txBody>
       </p:sp>
       <p:pic>
         <p:nvPicPr>
-          <p:cNvPr id="3" name="Picture 2" descr="wordmark_dark.png"/>
+          <p:cNvPr id="4" name="Picture 3" descr="electromagnet.jpg"/>
           <p:cNvPicPr>
             <a:picLocks noChangeAspect="1"/>
           </p:cNvPicPr>
@@ -8456,6 +8762,30 @@
         </p:nvPicPr>
         <p:blipFill>
           <a:blip r:embed="rId2"/>
+          <a:stretch>
+            <a:fillRect/>
+          </a:stretch>
+        </p:blipFill>
+        <p:spPr>
+          <a:xfrm>
+            <a:off x="914400" y="1905000"/>
+            <a:ext cx="1784181" cy="3175000"/>
+          </a:xfrm>
+          <a:prstGeom prst="rect">
+            <a:avLst/>
+          </a:prstGeom>
+        </p:spPr>
+      </p:pic>
+      <p:pic>
+        <p:nvPicPr>
+          <p:cNvPr id="5" name="Picture 4" descr="wordmark_dark.png"/>
+          <p:cNvPicPr>
+            <a:picLocks noChangeAspect="1"/>
+          </p:cNvPicPr>
+          <p:nvPr/>
+        </p:nvPicPr>
+        <p:blipFill>
+          <a:blip r:embed="rId3"/>
           <a:stretch>
             <a:fillRect/>
           </a:stretch>
@@ -8472,14 +8802,14 @@
       </p:pic>
       <p:pic>
         <p:nvPicPr>
-          <p:cNvPr id="4" name="Picture 3" descr="seal_dark.png"/>
+          <p:cNvPr id="6" name="Picture 5" descr="seal_dark.png"/>
           <p:cNvPicPr>
             <a:picLocks noChangeAspect="1"/>
           </p:cNvPicPr>
           <p:nvPr/>
         </p:nvPicPr>
         <p:blipFill>
-          <a:blip r:embed="rId3"/>
+          <a:blip r:embed="rId4"/>
           <a:stretch>
             <a:fillRect/>
           </a:stretch>
@@ -8769,7 +9099,7 @@
                 </a:solidFill>
                 <a:latin typeface="Arial"/>
               </a:rPr>
-              <a:t>INPUTS WORTH KNOWING ABOUT</a:t>
+              <a:t>FREESTYLE IS ENCOURAGED</a:t>
             </a:r>
           </a:p>
         </p:txBody>
@@ -8794,18 +9124,69 @@
                 <a:spcPct val="128000"/>
               </a:lnSpc>
               <a:spcAft>
-                <a:spcPts val="1400"/>
+                <a:spcPts val="600"/>
+              </a:spcAft>
+              <a:buNone/>
+            </a:pPr>
+            <a:r>
+              <a:rPr sz="1700" b="1">
+                <a:solidFill>
+                  <a:srgbClr val="000000"/>
+                </a:solidFill>
+                <a:latin typeface="Arial"/>
+              </a:rPr>
+              <a:t>You do not have to do the tasks in order.</a:t>
+            </a:r>
+          </a:p>
+          <a:p>
+            <a:pPr marL="0" indent="0" algn="l">
+              <a:lnSpc>
+                <a:spcPct val="128000"/>
+              </a:lnSpc>
+              <a:spcAft>
+                <a:spcPts val="600"/>
+              </a:spcAft>
+              <a:buNone/>
+            </a:pPr>
+            <a:r>
+              <a:rPr sz="1700" b="1">
+                <a:solidFill>
+                  <a:srgbClr val="000000"/>
+                </a:solidFill>
+                <a:latin typeface="Arial"/>
+              </a:rPr>
+              <a:t>You do not have to finish them.</a:t>
+            </a:r>
+          </a:p>
+          <a:p>
+            <a:pPr marL="0" indent="0" algn="l">
+              <a:lnSpc>
+                <a:spcPct val="128000"/>
+              </a:lnSpc>
+              <a:spcAft>
+                <a:spcPts val="0"/>
+              </a:spcAft>
+              <a:buNone/>
+            </a:pPr>
+          </a:p>
+          <a:p>
+            <a:pPr marL="0" indent="0" algn="l">
+              <a:lnSpc>
+                <a:spcPct val="128000"/>
+              </a:lnSpc>
+              <a:spcAft>
+                <a:spcPts val="600"/>
               </a:spcAft>
               <a:buNone/>
             </a:pPr>
             <a:r>
               <a:rPr sz="1700" b="0">
                 <a:solidFill>
-                  <a:srgbClr val="595959"/>
-                </a:solidFill>
-                <a:latin typeface="Arial"/>
-              </a:rPr>
-              <a:t>One table with a sign. Wander over between tasks.</a:t>
+                  <a:srgbClr val="000000"/>
+                </a:solidFill>
+                <a:latin typeface="Arial"/>
+              </a:rPr>
+              <a:t>Getting task 01 working and then properly playing with task 02 beats rushing through all five.</a:t>
             </a:r>
           </a:p>
           <a:p>
@@ -8814,118 +9195,29 @@
                 <a:spcPct val="128000"/>
               </a:lnSpc>
               <a:spcAft>
+                <a:spcPts val="0"/>
+              </a:spcAft>
+              <a:buNone/>
+            </a:pPr>
+          </a:p>
+          <a:p>
+            <a:pPr marL="0" indent="0" algn="l">
+              <a:lnSpc>
+                <a:spcPct val="128000"/>
+              </a:lnSpc>
+              <a:spcAft>
                 <a:spcPts val="600"/>
               </a:spcAft>
               <a:buNone/>
             </a:pPr>
             <a:r>
-              <a:rPr sz="1500" b="0">
-                <a:solidFill>
-                  <a:srgbClr val="000000"/>
-                </a:solidFill>
-                <a:latin typeface="Arial"/>
-              </a:rPr>
-              <a:t>• Capacitive touch. A wire. That is task 04</a:t>
-            </a:r>
-          </a:p>
-          <a:p>
-            <a:pPr marL="0" indent="0" algn="l">
-              <a:lnSpc>
-                <a:spcPct val="128000"/>
-              </a:lnSpc>
-              <a:spcAft>
-                <a:spcPts val="600"/>
-              </a:spcAft>
-              <a:buNone/>
-            </a:pPr>
-            <a:r>
-              <a:rPr sz="1500" b="0">
-                <a:solidFill>
-                  <a:srgbClr val="000000"/>
-                </a:solidFill>
-                <a:latin typeface="Arial"/>
-              </a:rPr>
-              <a:t>• Heart rate (PPG). Useless once the hand moves</a:t>
-            </a:r>
-          </a:p>
-          <a:p>
-            <a:pPr marL="0" indent="0" algn="l">
-              <a:lnSpc>
-                <a:spcPct val="128000"/>
-              </a:lnSpc>
-              <a:spcAft>
-                <a:spcPts val="600"/>
-              </a:spcAft>
-              <a:buNone/>
-            </a:pPr>
-            <a:r>
-              <a:rPr sz="1500" b="0">
-                <a:solidFill>
-                  <a:srgbClr val="000000"/>
-                </a:solidFill>
-                <a:latin typeface="Arial"/>
-              </a:rPr>
-              <a:t>• Skin conductance (GSR). Relative change only</a:t>
-            </a:r>
-          </a:p>
-          <a:p>
-            <a:pPr marL="0" indent="0" algn="l">
-              <a:lnSpc>
-                <a:spcPct val="128000"/>
-              </a:lnSpc>
-              <a:spcAft>
-                <a:spcPts val="600"/>
-              </a:spcAft>
-              <a:buNone/>
-            </a:pPr>
-            <a:r>
-              <a:rPr sz="1500" b="0">
-                <a:solidFill>
-                  <a:srgbClr val="000000"/>
-                </a:solidFill>
-                <a:latin typeface="Arial"/>
-              </a:rPr>
-              <a:t>• Flex sensor. The cheap data glove</a:t>
-            </a:r>
-          </a:p>
-          <a:p>
-            <a:pPr marL="0" indent="0" algn="l">
-              <a:lnSpc>
-                <a:spcPct val="128000"/>
-              </a:lnSpc>
-              <a:spcAft>
-                <a:spcPts val="600"/>
-              </a:spcAft>
-              <a:buNone/>
-            </a:pPr>
-            <a:r>
-              <a:rPr sz="1500" b="0">
-                <a:solidFill>
-                  <a:srgbClr val="000000"/>
-                </a:solidFill>
-                <a:latin typeface="Arial"/>
-              </a:rPr>
-              <a:t>• Pressure (FSR). Calibrate every pad</a:t>
-            </a:r>
-          </a:p>
-          <a:p>
-            <a:pPr marL="0" indent="0" algn="l">
-              <a:lnSpc>
-                <a:spcPct val="128000"/>
-              </a:lnSpc>
-              <a:spcAft>
-                <a:spcPts val="600"/>
-              </a:spcAft>
-              <a:buNone/>
-            </a:pPr>
-            <a:r>
-              <a:rPr sz="1500" b="0">
-                <a:solidFill>
-                  <a:srgbClr val="000000"/>
-                </a:solidFill>
-                <a:latin typeface="Arial"/>
-              </a:rPr>
-              <a:t>• Your own phone. No soldering at all</a:t>
+              <a:rPr sz="1700" b="0">
+                <a:solidFill>
+                  <a:srgbClr val="000000"/>
+                </a:solidFill>
+                <a:latin typeface="Arial"/>
+              </a:rPr>
+              <a:t>If you want to drive something that is not in front of you, go and get it.</a:t>
             </a:r>
           </a:p>
         </p:txBody>
@@ -9021,7 +9313,7 @@
                 </a:solidFill>
                 <a:latin typeface="Arial"/>
               </a:rPr>
-              <a:t>TWO RIGS THAT ALREADY EXIST</a:t>
+              <a:t>BEFORE YOU POWER ANYTHING</a:t>
             </a:r>
           </a:p>
         </p:txBody>
@@ -9046,18 +9338,18 @@
                 <a:spcPct val="128000"/>
               </a:lnSpc>
               <a:spcAft>
-                <a:spcPts val="1400"/>
-              </a:spcAft>
-              <a:buNone/>
-            </a:pPr>
-            <a:r>
-              <a:rPr sz="1700" b="0">
-                <a:solidFill>
-                  <a:srgbClr val="595959"/>
-                </a:solidFill>
-                <a:latin typeface="Arial"/>
-              </a:rPr>
-              <a:t>Built here, by students at roughly your stage.</a:t>
+                <a:spcPts val="600"/>
+              </a:spcAft>
+              <a:buNone/>
+            </a:pPr>
+            <a:r>
+              <a:rPr sz="1700" b="1">
+                <a:solidFill>
+                  <a:srgbClr val="000000"/>
+                </a:solidFill>
+                <a:latin typeface="Arial"/>
+              </a:rPr>
+              <a:t>The solenoid and the Peltier both pull real current.</a:t>
             </a:r>
           </a:p>
           <a:p>
@@ -9071,13 +9363,44 @@
               <a:buNone/>
             </a:pPr>
             <a:r>
+              <a:rPr sz="1500" b="0">
+                <a:solidFill>
+                  <a:srgbClr val="000000"/>
+                </a:solidFill>
+                <a:latin typeface="Arial"/>
+              </a:rPr>
+              <a:t>• They need their own supply. Ask before you rewire either.</a:t>
+            </a:r>
+          </a:p>
+          <a:p>
+            <a:pPr marL="0" indent="0" algn="l">
+              <a:lnSpc>
+                <a:spcPct val="128000"/>
+              </a:lnSpc>
+              <a:spcAft>
+                <a:spcPts val="0"/>
+              </a:spcAft>
+              <a:buNone/>
+            </a:pPr>
+          </a:p>
+          <a:p>
+            <a:pPr marL="0" indent="0" algn="l">
+              <a:lnSpc>
+                <a:spcPct val="128000"/>
+              </a:lnSpc>
+              <a:spcAft>
+                <a:spcPts val="600"/>
+              </a:spcAft>
+              <a:buNone/>
+            </a:pPr>
+            <a:r>
               <a:rPr sz="1700" b="1">
                 <a:solidFill>
                   <a:srgbClr val="000000"/>
                 </a:solidFill>
                 <a:latin typeface="Arial"/>
               </a:rPr>
-              <a:t>Moving screen, Arduino Uno</a:t>
+              <a:t>The Peltier needs its heatsink on. Every time.</a:t>
             </a:r>
           </a:p>
           <a:p>
@@ -9097,7 +9420,7 @@
                 </a:solidFill>
                 <a:latin typeface="Arial"/>
               </a:rPr>
-              <a:t>• Breathes when idle. Retreats when touched</a:t>
+              <a:t>• Without it the tile cooks itself in about a minute.</a:t>
             </a:r>
           </a:p>
           <a:p>
@@ -9106,89 +9429,49 @@
                 <a:spcPct val="128000"/>
               </a:lnSpc>
               <a:spcAft>
+                <a:spcPts val="0"/>
+              </a:spcAft>
+              <a:buNone/>
+            </a:pPr>
+          </a:p>
+          <a:p>
+            <a:pPr marL="0" indent="0" algn="l">
+              <a:lnSpc>
+                <a:spcPct val="128000"/>
+              </a:lnSpc>
+              <a:spcAft>
                 <a:spcPts val="600"/>
               </a:spcAft>
               <a:buNone/>
             </a:pPr>
             <a:r>
+              <a:rPr sz="1700" b="1">
+                <a:solidFill>
+                  <a:srgbClr val="000000"/>
+                </a:solidFill>
+                <a:latin typeface="Arial"/>
+              </a:rPr>
+              <a:t>Never drive a motor straight from a pin.</a:t>
+            </a:r>
+          </a:p>
+          <a:p>
+            <a:pPr marL="0" indent="0" algn="l">
+              <a:lnSpc>
+                <a:spcPct val="128000"/>
+              </a:lnSpc>
+              <a:spcAft>
+                <a:spcPts val="600"/>
+              </a:spcAft>
+              <a:buNone/>
+            </a:pPr>
+            <a:r>
               <a:rPr sz="1500" b="0">
                 <a:solidFill>
                   <a:srgbClr val="000000"/>
                 </a:solidFill>
                 <a:latin typeface="Arial"/>
               </a:rPr>
-              <a:t>• Easing and idle motion do the work. A dozen lines</a:t>
-            </a:r>
-          </a:p>
-          <a:p>
-            <a:pPr marL="0" indent="0" algn="l">
-              <a:lnSpc>
-                <a:spcPct val="128000"/>
-              </a:lnSpc>
-              <a:spcAft>
-                <a:spcPts val="0"/>
-              </a:spcAft>
-              <a:buNone/>
-            </a:pPr>
-          </a:p>
-          <a:p>
-            <a:pPr marL="0" indent="0" algn="l">
-              <a:lnSpc>
-                <a:spcPct val="128000"/>
-              </a:lnSpc>
-              <a:spcAft>
-                <a:spcPts val="600"/>
-              </a:spcAft>
-              <a:buNone/>
-            </a:pPr>
-            <a:r>
-              <a:rPr sz="1700" b="1">
-                <a:solidFill>
-                  <a:srgbClr val="000000"/>
-                </a:solidFill>
-                <a:latin typeface="Arial"/>
-              </a:rPr>
-              <a:t>Instrumented sock, ESP32</a:t>
-            </a:r>
-          </a:p>
-          <a:p>
-            <a:pPr marL="0" indent="0" algn="l">
-              <a:lnSpc>
-                <a:spcPct val="128000"/>
-              </a:lnSpc>
-              <a:spcAft>
-                <a:spcPts val="600"/>
-              </a:spcAft>
-              <a:buNone/>
-            </a:pPr>
-            <a:r>
-              <a:rPr sz="1500" b="0">
-                <a:solidFill>
-                  <a:srgbClr val="000000"/>
-                </a:solidFill>
-                <a:latin typeface="Arial"/>
-              </a:rPr>
-              <a:t>• Six force sensors under a foot, batched over Wi-Fi</a:t>
-            </a:r>
-          </a:p>
-          <a:p>
-            <a:pPr marL="0" indent="0" algn="l">
-              <a:lnSpc>
-                <a:spcPct val="128000"/>
-              </a:lnSpc>
-              <a:spcAft>
-                <a:spcPts val="600"/>
-              </a:spcAft>
-              <a:buNone/>
-            </a:pPr>
-            <a:r>
-              <a:rPr sz="1500" b="0">
-                <a:solidFill>
-                  <a:srgbClr val="000000"/>
-                </a:solidFill>
-                <a:latin typeface="Arial"/>
-              </a:rPr>
-              <a:t>• Calibrate per sensor. Batch your writes</a:t>
+              <a:t>• 40 mA limit. The motor wants nearly twice that.</a:t>
             </a:r>
           </a:p>
         </p:txBody>
@@ -9278,13 +9561,287 @@
               <a:buNone/>
             </a:pPr>
             <a:r>
+              <a:rPr sz="3200" b="1">
+                <a:solidFill>
+                  <a:srgbClr val="000000"/>
+                </a:solidFill>
+                <a:latin typeface="Arial"/>
+              </a:rPr>
+              <a:t>THE ONE THAT SURPRISES PEOPLE</a:t>
+            </a:r>
+          </a:p>
+        </p:txBody>
+      </p:sp>
+      <p:sp>
+        <p:nvSpPr>
+          <p:cNvPr id="3" name="Text Placeholder 2"/>
+          <p:cNvSpPr>
+            <a:spLocks noGrp="1"/>
+          </p:cNvSpPr>
+          <p:nvPr>
+            <p:ph type="body" idx="1"/>
+          </p:nvPr>
+        </p:nvSpPr>
+        <p:spPr/>
+        <p:txBody>
+          <a:bodyPr/>
+          <a:lstStyle/>
+          <a:p>
+            <a:pPr marL="0" indent="0" algn="l">
+              <a:lnSpc>
+                <a:spcPct val="128000"/>
+              </a:lnSpc>
+              <a:spcAft>
+                <a:spcPts val="1400"/>
+              </a:spcAft>
+              <a:buNone/>
+            </a:pPr>
+            <a:r>
+              <a:rPr sz="1700" b="0">
+                <a:solidFill>
+                  <a:srgbClr val="595959"/>
+                </a:solidFill>
+                <a:latin typeface="Arial"/>
+              </a:rPr>
+              <a:t>Touch input for the price of a wire. The thinking is where it costs you.</a:t>
+            </a:r>
+          </a:p>
+          <a:p>
+            <a:pPr marL="0" indent="0" algn="l">
+              <a:lnSpc>
+                <a:spcPct val="128000"/>
+              </a:lnSpc>
+              <a:spcAft>
+                <a:spcPts val="600"/>
+              </a:spcAft>
+              <a:buNone/>
+            </a:pPr>
+            <a:r>
+              <a:rPr sz="1700" b="1">
+                <a:solidFill>
+                  <a:srgbClr val="000000"/>
+                </a:solidFill>
+                <a:latin typeface="Arial"/>
+              </a:rPr>
+              <a:t>reading &gt; baselineAverage() * 1.01</a:t>
+            </a:r>
+          </a:p>
+          <a:p>
+            <a:pPr marL="0" indent="0" algn="l">
+              <a:lnSpc>
+                <a:spcPct val="128000"/>
+              </a:lnSpc>
+              <a:spcAft>
+                <a:spcPts val="0"/>
+              </a:spcAft>
+              <a:buNone/>
+            </a:pPr>
+          </a:p>
+          <a:p>
+            <a:pPr marL="0" indent="0" algn="l">
+              <a:lnSpc>
+                <a:spcPct val="128000"/>
+              </a:lnSpc>
+              <a:spcAft>
+                <a:spcPts val="600"/>
+              </a:spcAft>
+              <a:buNone/>
+            </a:pPr>
+            <a:r>
+              <a:rPr sz="1700" b="1">
+                <a:solidFill>
+                  <a:srgbClr val="000000"/>
+                </a:solidFill>
+                <a:latin typeface="Arial"/>
+              </a:rPr>
+              <a:t>Threshold is relative, never absolute</a:t>
+            </a:r>
+          </a:p>
+          <a:p>
+            <a:pPr marL="0" indent="0" algn="l">
+              <a:lnSpc>
+                <a:spcPct val="128000"/>
+              </a:lnSpc>
+              <a:spcAft>
+                <a:spcPts val="600"/>
+              </a:spcAft>
+              <a:buNone/>
+            </a:pPr>
+            <a:r>
+              <a:rPr sz="1500" b="0">
+                <a:solidFill>
+                  <a:srgbClr val="000000"/>
+                </a:solidFill>
+                <a:latin typeface="Arial"/>
+              </a:rPr>
+              <a:t>• Readings drift with humidity and mains hum</a:t>
+            </a:r>
+          </a:p>
+          <a:p>
+            <a:pPr marL="0" indent="0" algn="l">
+              <a:lnSpc>
+                <a:spcPct val="128000"/>
+              </a:lnSpc>
+              <a:spcAft>
+                <a:spcPts val="600"/>
+              </a:spcAft>
+              <a:buNone/>
+            </a:pPr>
+            <a:r>
+              <a:rPr sz="1500" b="0">
+                <a:solidFill>
+                  <a:srgbClr val="000000"/>
+                </a:solidFill>
+                <a:latin typeface="Arial"/>
+              </a:rPr>
+              <a:t>• Fixed threshold works at 9am, fails at 1pm</a:t>
+            </a:r>
+          </a:p>
+          <a:p>
+            <a:pPr marL="0" indent="0" algn="l">
+              <a:lnSpc>
+                <a:spcPct val="128000"/>
+              </a:lnSpc>
+              <a:spcAft>
+                <a:spcPts val="0"/>
+              </a:spcAft>
+              <a:buNone/>
+            </a:pPr>
+          </a:p>
+          <a:p>
+            <a:pPr marL="0" indent="0" algn="l">
+              <a:lnSpc>
+                <a:spcPct val="128000"/>
+              </a:lnSpc>
+              <a:spcAft>
+                <a:spcPts val="600"/>
+              </a:spcAft>
+              <a:buNone/>
+            </a:pPr>
+            <a:r>
+              <a:rPr sz="1700" b="1">
+                <a:solidFill>
+                  <a:srgbClr val="000000"/>
+                </a:solidFill>
+                <a:latin typeface="Arial"/>
+              </a:rPr>
+              <a:t>Baseline only learns while untouched</a:t>
+            </a:r>
+          </a:p>
+          <a:p>
+            <a:pPr marL="0" indent="0" algn="l">
+              <a:lnSpc>
+                <a:spcPct val="128000"/>
+              </a:lnSpc>
+              <a:spcAft>
+                <a:spcPts val="600"/>
+              </a:spcAft>
+              <a:buNone/>
+            </a:pPr>
+            <a:r>
+              <a:rPr sz="1500" b="0">
+                <a:solidFill>
+                  <a:srgbClr val="000000"/>
+                </a:solidFill>
+                <a:latin typeface="Arial"/>
+              </a:rPr>
+              <a:t>• Or a long press teaches it that a finger is normal</a:t>
+            </a:r>
+          </a:p>
+        </p:txBody>
+      </p:sp>
+      <p:pic>
+        <p:nvPicPr>
+          <p:cNvPr id="4" name="Picture 3" descr="wordmark_dark.png"/>
+          <p:cNvPicPr>
+            <a:picLocks noChangeAspect="1"/>
+          </p:cNvPicPr>
+          <p:nvPr/>
+        </p:nvPicPr>
+        <p:blipFill>
+          <a:blip r:embed="rId2"/>
+          <a:stretch>
+            <a:fillRect/>
+          </a:stretch>
+        </p:blipFill>
+        <p:spPr>
+          <a:xfrm>
+            <a:off x="342900" y="6184900"/>
+            <a:ext cx="2070100" cy="529560"/>
+          </a:xfrm>
+          <a:prstGeom prst="rect">
+            <a:avLst/>
+          </a:prstGeom>
+        </p:spPr>
+      </p:pic>
+      <p:pic>
+        <p:nvPicPr>
+          <p:cNvPr id="5" name="Picture 4" descr="seal_dark.png"/>
+          <p:cNvPicPr>
+            <a:picLocks noChangeAspect="1"/>
+          </p:cNvPicPr>
+          <p:nvPr/>
+        </p:nvPicPr>
+        <p:blipFill>
+          <a:blip r:embed="rId3"/>
+          <a:stretch>
+            <a:fillRect/>
+          </a:stretch>
+        </p:blipFill>
+        <p:spPr>
+          <a:xfrm>
+            <a:off x="11226800" y="5969000"/>
+            <a:ext cx="713915" cy="711200"/>
+          </a:xfrm>
+          <a:prstGeom prst="rect">
+            <a:avLst/>
+          </a:prstGeom>
+        </p:spPr>
+      </p:pic>
+    </p:spTree>
+  </p:cSld>
+  <p:clrMapOvr>
+    <a:masterClrMapping/>
+  </p:clrMapOvr>
+</p:sld>
+</file>
+
+<file path=ppt/slides/slide23.xml><?xml version="1.0" encoding="utf-8"?>
+<p:sld xmlns:a="http://schemas.openxmlformats.org/drawingml/2006/main" xmlns:p="http://schemas.openxmlformats.org/presentationml/2006/main" xmlns:r="http://schemas.openxmlformats.org/officeDocument/2006/relationships">
+  <p:cSld>
+    <p:spTree>
+      <p:nvGrpSpPr>
+        <p:cNvPr id="1" name=""/>
+        <p:cNvGrpSpPr/>
+        <p:nvPr/>
+      </p:nvGrpSpPr>
+      <p:grpSpPr/>
+      <p:sp>
+        <p:nvSpPr>
+          <p:cNvPr id="2" name="Title 1"/>
+          <p:cNvSpPr>
+            <a:spLocks noGrp="1"/>
+          </p:cNvSpPr>
+          <p:nvPr>
+            <p:ph type="title"/>
+          </p:nvPr>
+        </p:nvSpPr>
+        <p:spPr/>
+        <p:txBody>
+          <a:bodyPr/>
+          <a:lstStyle/>
+          <a:p>
+            <a:pPr marL="0" indent="0" algn="l">
+              <a:buNone/>
+            </a:pPr>
+            <a:r>
               <a:rPr sz="4400" b="1">
                 <a:solidFill>
                   <a:srgbClr val="000000"/>
                 </a:solidFill>
                 <a:latin typeface="Arial"/>
               </a:rPr>
-              <a:t>BUILD ONE SIGNAL</a:t>
+              <a:t>INPUTS, AND PRIOR ART</a:t>
             </a:r>
           </a:p>
         </p:txBody>
@@ -9345,300 +9902,6 @@
 </p:sld>
 </file>
 
-<file path=ppt/slides/slide23.xml><?xml version="1.0" encoding="utf-8"?>
-<p:sld xmlns:a="http://schemas.openxmlformats.org/drawingml/2006/main" xmlns:p="http://schemas.openxmlformats.org/presentationml/2006/main" xmlns:r="http://schemas.openxmlformats.org/officeDocument/2006/relationships">
-  <p:cSld>
-    <p:spTree>
-      <p:nvGrpSpPr>
-        <p:cNvPr id="1" name=""/>
-        <p:cNvGrpSpPr/>
-        <p:nvPr/>
-      </p:nvGrpSpPr>
-      <p:grpSpPr/>
-      <p:sp>
-        <p:nvSpPr>
-          <p:cNvPr id="2" name="Title 1"/>
-          <p:cNvSpPr>
-            <a:spLocks noGrp="1"/>
-          </p:cNvSpPr>
-          <p:nvPr>
-            <p:ph type="title"/>
-          </p:nvPr>
-        </p:nvSpPr>
-        <p:spPr/>
-        <p:txBody>
-          <a:bodyPr/>
-          <a:lstStyle/>
-          <a:p>
-            <a:pPr marL="0" indent="0" algn="l">
-              <a:buNone/>
-            </a:pPr>
-            <a:r>
-              <a:rPr sz="3200" b="1">
-                <a:solidFill>
-                  <a:srgbClr val="000000"/>
-                </a:solidFill>
-                <a:latin typeface="Arial"/>
-              </a:rPr>
-              <a:t>THE BRIEF</a:t>
-            </a:r>
-          </a:p>
-        </p:txBody>
-      </p:sp>
-      <p:sp>
-        <p:nvSpPr>
-          <p:cNvPr id="3" name="Text Placeholder 2"/>
-          <p:cNvSpPr>
-            <a:spLocks noGrp="1"/>
-          </p:cNvSpPr>
-          <p:nvPr>
-            <p:ph type="body" idx="1"/>
-          </p:nvPr>
-        </p:nvSpPr>
-        <p:spPr/>
-        <p:txBody>
-          <a:bodyPr/>
-          <a:lstStyle/>
-          <a:p>
-            <a:pPr marL="0" indent="0" algn="l">
-              <a:lnSpc>
-                <a:spcPct val="128000"/>
-              </a:lnSpc>
-              <a:spcAft>
-                <a:spcPts val="1400"/>
-              </a:spcAft>
-              <a:buNone/>
-            </a:pPr>
-            <a:r>
-              <a:rPr sz="1700" b="0">
-                <a:solidFill>
-                  <a:srgbClr val="595959"/>
-                </a:solidFill>
-                <a:latin typeface="Arial"/>
-              </a:rPr>
-              <a:t>30 minutes. Not long enough to be precious about it.</a:t>
-            </a:r>
-          </a:p>
-          <a:p>
-            <a:pPr marL="0" indent="0" algn="l">
-              <a:lnSpc>
-                <a:spcPct val="128000"/>
-              </a:lnSpc>
-              <a:spcAft>
-                <a:spcPts val="600"/>
-              </a:spcAft>
-              <a:buNone/>
-            </a:pPr>
-            <a:r>
-              <a:rPr sz="1700" b="1">
-                <a:solidFill>
-                  <a:srgbClr val="000000"/>
-                </a:solidFill>
-                <a:latin typeface="Arial"/>
-              </a:rPr>
-              <a:t>One actuator. Three messages</a:t>
-            </a:r>
-          </a:p>
-          <a:p>
-            <a:pPr marL="0" indent="0" algn="l">
-              <a:lnSpc>
-                <a:spcPct val="128000"/>
-              </a:lnSpc>
-              <a:spcAft>
-                <a:spcPts val="600"/>
-              </a:spcAft>
-              <a:buNone/>
-            </a:pPr>
-            <a:r>
-              <a:rPr sz="1500" b="0">
-                <a:solidFill>
-                  <a:srgbClr val="000000"/>
-                </a:solidFill>
-                <a:latin typeface="Arial"/>
-              </a:rPr>
-              <a:t>• Arrived. Something wrong. Finished</a:t>
-            </a:r>
-          </a:p>
-          <a:p>
-            <a:pPr marL="0" indent="0" algn="l">
-              <a:lnSpc>
-                <a:spcPct val="128000"/>
-              </a:lnSpc>
-              <a:spcAft>
-                <a:spcPts val="0"/>
-              </a:spcAft>
-              <a:buNone/>
-            </a:pPr>
-          </a:p>
-          <a:p>
-            <a:pPr marL="0" indent="0" algn="l">
-              <a:lnSpc>
-                <a:spcPct val="128000"/>
-              </a:lnSpc>
-              <a:spcAft>
-                <a:spcPts val="600"/>
-              </a:spcAft>
-              <a:buNone/>
-            </a:pPr>
-            <a:r>
-              <a:rPr sz="1700" b="1">
-                <a:solidFill>
-                  <a:srgbClr val="000000"/>
-                </a:solidFill>
-                <a:latin typeface="Arial"/>
-              </a:rPr>
-              <a:t>Vary two things only</a:t>
-            </a:r>
-          </a:p>
-          <a:p>
-            <a:pPr marL="0" indent="0" algn="l">
-              <a:lnSpc>
-                <a:spcPct val="128000"/>
-              </a:lnSpc>
-              <a:spcAft>
-                <a:spcPts val="600"/>
-              </a:spcAft>
-              <a:buNone/>
-            </a:pPr>
-            <a:r>
-              <a:rPr sz="1500" b="0">
-                <a:solidFill>
-                  <a:srgbClr val="000000"/>
-                </a:solidFill>
-                <a:latin typeface="Arial"/>
-              </a:rPr>
-              <a:t>• Rhythm of the pulses</a:t>
-            </a:r>
-          </a:p>
-          <a:p>
-            <a:pPr marL="0" indent="0" algn="l">
-              <a:lnSpc>
-                <a:spcPct val="128000"/>
-              </a:lnSpc>
-              <a:spcAft>
-                <a:spcPts val="600"/>
-              </a:spcAft>
-              <a:buNone/>
-            </a:pPr>
-            <a:r>
-              <a:rPr sz="1500" b="0">
-                <a:solidFill>
-                  <a:srgbClr val="000000"/>
-                </a:solidFill>
-                <a:latin typeface="Arial"/>
-              </a:rPr>
-              <a:t>• How strong they are</a:t>
-            </a:r>
-          </a:p>
-          <a:p>
-            <a:pPr marL="0" indent="0" algn="l">
-              <a:lnSpc>
-                <a:spcPct val="128000"/>
-              </a:lnSpc>
-              <a:spcAft>
-                <a:spcPts val="0"/>
-              </a:spcAft>
-              <a:buNone/>
-            </a:pPr>
-          </a:p>
-          <a:p>
-            <a:pPr marL="0" indent="0" algn="l">
-              <a:lnSpc>
-                <a:spcPct val="128000"/>
-              </a:lnSpc>
-              <a:spcAft>
-                <a:spcPts val="600"/>
-              </a:spcAft>
-              <a:buNone/>
-            </a:pPr>
-            <a:r>
-              <a:rPr sz="1700" b="1">
-                <a:solidFill>
-                  <a:srgbClr val="000000"/>
-                </a:solidFill>
-                <a:latin typeface="Arial"/>
-              </a:rPr>
-              <a:t>Blind test: they name all three</a:t>
-            </a:r>
-          </a:p>
-          <a:p>
-            <a:pPr marL="0" indent="0" algn="l">
-              <a:lnSpc>
-                <a:spcPct val="128000"/>
-              </a:lnSpc>
-              <a:spcAft>
-                <a:spcPts val="600"/>
-              </a:spcAft>
-              <a:buNone/>
-            </a:pPr>
-            <a:r>
-              <a:rPr sz="1500" b="0">
-                <a:solidFill>
-                  <a:srgbClr val="000000"/>
-                </a:solidFill>
-                <a:latin typeface="Arial"/>
-              </a:rPr>
-              <a:t>• Note which two got confused, and why</a:t>
-            </a:r>
-          </a:p>
-        </p:txBody>
-      </p:sp>
-      <p:pic>
-        <p:nvPicPr>
-          <p:cNvPr id="4" name="Picture 3" descr="wordmark_dark.png"/>
-          <p:cNvPicPr>
-            <a:picLocks noChangeAspect="1"/>
-          </p:cNvPicPr>
-          <p:nvPr/>
-        </p:nvPicPr>
-        <p:blipFill>
-          <a:blip r:embed="rId2"/>
-          <a:stretch>
-            <a:fillRect/>
-          </a:stretch>
-        </p:blipFill>
-        <p:spPr>
-          <a:xfrm>
-            <a:off x="342900" y="6184900"/>
-            <a:ext cx="2070100" cy="529560"/>
-          </a:xfrm>
-          <a:prstGeom prst="rect">
-            <a:avLst/>
-          </a:prstGeom>
-        </p:spPr>
-      </p:pic>
-      <p:pic>
-        <p:nvPicPr>
-          <p:cNvPr id="5" name="Picture 4" descr="seal_dark.png"/>
-          <p:cNvPicPr>
-            <a:picLocks noChangeAspect="1"/>
-          </p:cNvPicPr>
-          <p:nvPr/>
-        </p:nvPicPr>
-        <p:blipFill>
-          <a:blip r:embed="rId3"/>
-          <a:stretch>
-            <a:fillRect/>
-          </a:stretch>
-        </p:blipFill>
-        <p:spPr>
-          <a:xfrm>
-            <a:off x="11226800" y="5969000"/>
-            <a:ext cx="713915" cy="711200"/>
-          </a:xfrm>
-          <a:prstGeom prst="rect">
-            <a:avLst/>
-          </a:prstGeom>
-        </p:spPr>
-      </p:pic>
-    </p:spTree>
-  </p:cSld>
-  <p:clrMapOvr>
-    <a:masterClrMapping/>
-  </p:clrMapOvr>
-</p:sld>
-</file>
-
 <file path=ppt/slides/slide24.xml><?xml version="1.0" encoding="utf-8"?>
 <p:sld xmlns:a="http://schemas.openxmlformats.org/drawingml/2006/main" xmlns:p="http://schemas.openxmlformats.org/presentationml/2006/main" xmlns:r="http://schemas.openxmlformats.org/officeDocument/2006/relationships">
   <p:cSld>
@@ -9674,7 +9937,7 @@
                 </a:solidFill>
                 <a:latin typeface="Arial"/>
               </a:rPr>
-              <a:t>THE CONSTRAINT THAT MATTERS</a:t>
+              <a:t>INPUTS WORTH KNOWING ABOUT</a:t>
             </a:r>
           </a:p>
         </p:txBody>
@@ -9699,18 +9962,38 @@
                 <a:spcPct val="128000"/>
               </a:lnSpc>
               <a:spcAft>
+                <a:spcPts val="1400"/>
+              </a:spcAft>
+              <a:buNone/>
+            </a:pPr>
+            <a:r>
+              <a:rPr sz="1700" b="0">
+                <a:solidFill>
+                  <a:srgbClr val="595959"/>
+                </a:solidFill>
+                <a:latin typeface="Arial"/>
+              </a:rPr>
+              <a:t>One table with a sign. Wander over between tasks.</a:t>
+            </a:r>
+          </a:p>
+          <a:p>
+            <a:pPr marL="0" indent="0" algn="l">
+              <a:lnSpc>
+                <a:spcPct val="128000"/>
+              </a:lnSpc>
+              <a:spcAft>
                 <a:spcPts val="600"/>
               </a:spcAft>
               <a:buNone/>
             </a:pPr>
             <a:r>
-              <a:rPr sz="1700" b="1">
-                <a:solidFill>
-                  <a:srgbClr val="000000"/>
-                </a:solidFill>
-                <a:latin typeface="Arial"/>
-              </a:rPr>
-              <a:t>The recipient cannot look at the device.</a:t>
+              <a:rPr sz="1500" b="0">
+                <a:solidFill>
+                  <a:srgbClr val="000000"/>
+                </a:solidFill>
+                <a:latin typeface="Arial"/>
+              </a:rPr>
+              <a:t>• Capacitive touch. A wire. That is task 04</a:t>
             </a:r>
           </a:p>
           <a:p>
@@ -9719,10 +10002,19 @@
                 <a:spcPct val="128000"/>
               </a:lnSpc>
               <a:spcAft>
-                <a:spcPts val="0"/>
-              </a:spcAft>
-              <a:buNone/>
-            </a:pPr>
+                <a:spcPts val="600"/>
+              </a:spcAft>
+              <a:buNone/>
+            </a:pPr>
+            <a:r>
+              <a:rPr sz="1500" b="0">
+                <a:solidFill>
+                  <a:srgbClr val="000000"/>
+                </a:solidFill>
+                <a:latin typeface="Arial"/>
+              </a:rPr>
+              <a:t>• Heart rate (PPG). Useless once the hand moves</a:t>
+            </a:r>
           </a:p>
           <a:p>
             <a:pPr marL="0" indent="0" algn="l">
@@ -9735,13 +10027,13 @@
               <a:buNone/>
             </a:pPr>
             <a:r>
-              <a:rPr sz="1700" b="0">
-                <a:solidFill>
-                  <a:srgbClr val="000000"/>
-                </a:solidFill>
-                <a:latin typeface="Arial"/>
-              </a:rPr>
-              <a:t>If it only works while someone watches a screen,</a:t>
+              <a:rPr sz="1500" b="0">
+                <a:solidFill>
+                  <a:srgbClr val="000000"/>
+                </a:solidFill>
+                <a:latin typeface="Arial"/>
+              </a:rPr>
+              <a:t>• Skin conductance (GSR). Relative change only</a:t>
             </a:r>
           </a:p>
           <a:p>
@@ -9755,13 +10047,53 @@
               <a:buNone/>
             </a:pPr>
             <a:r>
-              <a:rPr sz="1700" b="0">
-                <a:solidFill>
-                  <a:srgbClr val="000000"/>
-                </a:solidFill>
-                <a:latin typeface="Arial"/>
-              </a:rPr>
-              <a:t>you built a visual interface with a motor glued to it.</a:t>
+              <a:rPr sz="1500" b="0">
+                <a:solidFill>
+                  <a:srgbClr val="000000"/>
+                </a:solidFill>
+                <a:latin typeface="Arial"/>
+              </a:rPr>
+              <a:t>• Flex sensor. The cheap data glove</a:t>
+            </a:r>
+          </a:p>
+          <a:p>
+            <a:pPr marL="0" indent="0" algn="l">
+              <a:lnSpc>
+                <a:spcPct val="128000"/>
+              </a:lnSpc>
+              <a:spcAft>
+                <a:spcPts val="600"/>
+              </a:spcAft>
+              <a:buNone/>
+            </a:pPr>
+            <a:r>
+              <a:rPr sz="1500" b="0">
+                <a:solidFill>
+                  <a:srgbClr val="000000"/>
+                </a:solidFill>
+                <a:latin typeface="Arial"/>
+              </a:rPr>
+              <a:t>• Pressure (FSR). Calibrate every pad</a:t>
+            </a:r>
+          </a:p>
+          <a:p>
+            <a:pPr marL="0" indent="0" algn="l">
+              <a:lnSpc>
+                <a:spcPct val="128000"/>
+              </a:lnSpc>
+              <a:spcAft>
+                <a:spcPts val="600"/>
+              </a:spcAft>
+              <a:buNone/>
+            </a:pPr>
+            <a:r>
+              <a:rPr sz="1500" b="0">
+                <a:solidFill>
+                  <a:srgbClr val="000000"/>
+                </a:solidFill>
+                <a:latin typeface="Arial"/>
+              </a:rPr>
+              <a:t>• Your own phone. No soldering at all</a:t>
             </a:r>
           </a:p>
         </p:txBody>
@@ -9857,7 +10189,7 @@
                 </a:solidFill>
                 <a:latin typeface="Arial"/>
               </a:rPr>
-              <a:t>TEST IT</a:t>
+              <a:t>TWO RIGS THAT ALREADY EXIST</a:t>
             </a:r>
           </a:p>
         </p:txBody>
@@ -9893,7 +10225,7 @@
                 </a:solidFill>
                 <a:latin typeface="Arial"/>
               </a:rPr>
-              <a:t>Hand your device to another group with the screen turned away.</a:t>
+              <a:t>Built here, by students at roughly your stage.</a:t>
             </a:r>
           </a:p>
           <a:p>
@@ -9907,13 +10239,33 @@
               <a:buNone/>
             </a:pPr>
             <a:r>
+              <a:rPr sz="1700" b="1">
+                <a:solidFill>
+                  <a:srgbClr val="000000"/>
+                </a:solidFill>
+                <a:latin typeface="Arial"/>
+              </a:rPr>
+              <a:t>Moving screen, Arduino Uno</a:t>
+            </a:r>
+          </a:p>
+          <a:p>
+            <a:pPr marL="0" indent="0" algn="l">
+              <a:lnSpc>
+                <a:spcPct val="128000"/>
+              </a:lnSpc>
+              <a:spcAft>
+                <a:spcPts val="600"/>
+              </a:spcAft>
+              <a:buNone/>
+            </a:pPr>
+            <a:r>
               <a:rPr sz="1500" b="0">
                 <a:solidFill>
                   <a:srgbClr val="000000"/>
                 </a:solidFill>
                 <a:latin typeface="Arial"/>
               </a:rPr>
-              <a:t>• They can tell all three messages apart.</a:t>
+              <a:t>• Breathes when idle. Retreats when touched</a:t>
             </a:r>
           </a:p>
           <a:p>
@@ -9933,7 +10285,7 @@
                 </a:solidFill>
                 <a:latin typeface="Arial"/>
               </a:rPr>
-              <a:t>• It does not fire continuously when held.</a:t>
+              <a:t>• Easing and idle motion do the work. A dozen lines</a:t>
             </a:r>
           </a:p>
           <a:p>
@@ -9942,18 +10294,49 @@
                 <a:spcPct val="128000"/>
               </a:lnSpc>
               <a:spcAft>
+                <a:spcPts val="0"/>
+              </a:spcAft>
+              <a:buNone/>
+            </a:pPr>
+          </a:p>
+          <a:p>
+            <a:pPr marL="0" indent="0" algn="l">
+              <a:lnSpc>
+                <a:spcPct val="128000"/>
+              </a:lnSpc>
+              <a:spcAft>
                 <a:spcPts val="600"/>
               </a:spcAft>
               <a:buNone/>
             </a:pPr>
             <a:r>
+              <a:rPr sz="1700" b="1">
+                <a:solidFill>
+                  <a:srgbClr val="000000"/>
+                </a:solidFill>
+                <a:latin typeface="Arial"/>
+              </a:rPr>
+              <a:t>Instrumented sock, ESP32</a:t>
+            </a:r>
+          </a:p>
+          <a:p>
+            <a:pPr marL="0" indent="0" algn="l">
+              <a:lnSpc>
+                <a:spcPct val="128000"/>
+              </a:lnSpc>
+              <a:spcAft>
+                <a:spcPts val="600"/>
+              </a:spcAft>
+              <a:buNone/>
+            </a:pPr>
+            <a:r>
               <a:rPr sz="1500" b="0">
                 <a:solidFill>
                   <a:srgbClr val="000000"/>
                 </a:solidFill>
                 <a:latin typeface="Arial"/>
               </a:rPr>
-              <a:t>• You know which two got confused, and what would have separated them.</a:t>
+              <a:t>• Six force sensors under a foot, batched over Wi-Fi</a:t>
             </a:r>
           </a:p>
           <a:p>
@@ -9973,7 +10356,7 @@
                 </a:solidFill>
                 <a:latin typeface="Arial"/>
               </a:rPr>
-              <a:t>• It still works when they are not looking at it.</a:t>
+              <a:t>• Calibrate per sensor. Batch your writes</a:t>
             </a:r>
           </a:p>
         </p:txBody>
@@ -10063,25 +10446,91 @@
               <a:buNone/>
             </a:pPr>
             <a:r>
-              <a:rPr sz="3200" b="1">
-                <a:solidFill>
-                  <a:srgbClr val="000000"/>
-                </a:solidFill>
-                <a:latin typeface="Arial"/>
-              </a:rPr>
-              <a:t>WHAT YOU ACTUALLY LEARN</a:t>
-            </a:r>
-          </a:p>
-        </p:txBody>
-      </p:sp>
-      <p:sp>
-        <p:nvSpPr>
-          <p:cNvPr id="3" name="Text Placeholder 2"/>
-          <p:cNvSpPr>
-            <a:spLocks noGrp="1"/>
-          </p:cNvSpPr>
-          <p:nvPr>
-            <p:ph type="body" idx="1"/>
+              <a:rPr sz="4400" b="1">
+                <a:solidFill>
+                  <a:srgbClr val="000000"/>
+                </a:solidFill>
+                <a:latin typeface="Arial"/>
+              </a:rPr>
+              <a:t>BUILD ONE SIGNAL</a:t>
+            </a:r>
+          </a:p>
+        </p:txBody>
+      </p:sp>
+      <p:pic>
+        <p:nvPicPr>
+          <p:cNvPr id="3" name="Picture 2" descr="wordmark_dark.png"/>
+          <p:cNvPicPr>
+            <a:picLocks noChangeAspect="1"/>
+          </p:cNvPicPr>
+          <p:nvPr/>
+        </p:nvPicPr>
+        <p:blipFill>
+          <a:blip r:embed="rId2"/>
+          <a:stretch>
+            <a:fillRect/>
+          </a:stretch>
+        </p:blipFill>
+        <p:spPr>
+          <a:xfrm>
+            <a:off x="342900" y="6184900"/>
+            <a:ext cx="2070100" cy="529560"/>
+          </a:xfrm>
+          <a:prstGeom prst="rect">
+            <a:avLst/>
+          </a:prstGeom>
+        </p:spPr>
+      </p:pic>
+      <p:pic>
+        <p:nvPicPr>
+          <p:cNvPr id="4" name="Picture 3" descr="seal_dark.png"/>
+          <p:cNvPicPr>
+            <a:picLocks noChangeAspect="1"/>
+          </p:cNvPicPr>
+          <p:nvPr/>
+        </p:nvPicPr>
+        <p:blipFill>
+          <a:blip r:embed="rId3"/>
+          <a:stretch>
+            <a:fillRect/>
+          </a:stretch>
+        </p:blipFill>
+        <p:spPr>
+          <a:xfrm>
+            <a:off x="11226800" y="5969000"/>
+            <a:ext cx="713915" cy="711200"/>
+          </a:xfrm>
+          <a:prstGeom prst="rect">
+            <a:avLst/>
+          </a:prstGeom>
+        </p:spPr>
+      </p:pic>
+    </p:spTree>
+  </p:cSld>
+  <p:clrMapOvr>
+    <a:masterClrMapping/>
+  </p:clrMapOvr>
+</p:sld>
+</file>
+
+<file path=ppt/slides/slide27.xml><?xml version="1.0" encoding="utf-8"?>
+<p:sld xmlns:a="http://schemas.openxmlformats.org/drawingml/2006/main" xmlns:p="http://schemas.openxmlformats.org/presentationml/2006/main" xmlns:r="http://schemas.openxmlformats.org/officeDocument/2006/relationships">
+  <p:cSld>
+    <p:spTree>
+      <p:nvGrpSpPr>
+        <p:cNvPr id="1" name=""/>
+        <p:cNvGrpSpPr/>
+        <p:nvPr/>
+      </p:nvGrpSpPr>
+      <p:grpSpPr/>
+      <p:sp>
+        <p:nvSpPr>
+          <p:cNvPr id="2" name="Title 1"/>
+          <p:cNvSpPr>
+            <a:spLocks noGrp="1"/>
+          </p:cNvSpPr>
+          <p:nvPr>
+            <p:ph type="title"/>
           </p:nvPr>
         </p:nvSpPr>
         <p:spPr/>
@@ -10090,6 +10539,36 @@
           <a:lstStyle/>
           <a:p>
             <a:pPr marL="0" indent="0" algn="l">
+              <a:buNone/>
+            </a:pPr>
+            <a:r>
+              <a:rPr sz="3200" b="1">
+                <a:solidFill>
+                  <a:srgbClr val="000000"/>
+                </a:solidFill>
+                <a:latin typeface="Arial"/>
+              </a:rPr>
+              <a:t>THE BRIEF</a:t>
+            </a:r>
+          </a:p>
+        </p:txBody>
+      </p:sp>
+      <p:sp>
+        <p:nvSpPr>
+          <p:cNvPr id="3" name="Text Placeholder 2"/>
+          <p:cNvSpPr>
+            <a:spLocks noGrp="1"/>
+          </p:cNvSpPr>
+          <p:nvPr>
+            <p:ph type="body" idx="1"/>
+          </p:nvPr>
+        </p:nvSpPr>
+        <p:spPr/>
+        <p:txBody>
+          <a:bodyPr/>
+          <a:lstStyle/>
+          <a:p>
+            <a:pPr marL="0" indent="0" algn="l">
               <a:lnSpc>
                 <a:spcPct val="128000"/>
               </a:lnSpc>
@@ -10105,7 +10584,7 @@
                 </a:solidFill>
                 <a:latin typeface="Arial"/>
               </a:rPr>
-              <a:t>Three things you cannot get from a datasheet.</a:t>
+              <a:t>30 minutes. Not long enough to be precious about it.</a:t>
             </a:r>
           </a:p>
           <a:p>
@@ -10125,7 +10604,7 @@
                 </a:solidFill>
                 <a:latin typeface="Arial"/>
               </a:rPr>
-              <a:t>What things feel like</a:t>
+              <a:t>One actuator. Three messages</a:t>
             </a:r>
           </a:p>
           <a:p>
@@ -10145,7 +10624,7 @@
                 </a:solidFill>
                 <a:latin typeface="Arial"/>
               </a:rPr>
-              <a:t>• A motor is a nudge. A solenoid is a knock. A Peltier is slow.</a:t>
+              <a:t>• Arrived. Something wrong. Finished</a:t>
             </a:r>
           </a:p>
           <a:p>
@@ -10176,7 +10655,7 @@
                 </a:solidFill>
                 <a:latin typeface="Arial"/>
               </a:rPr>
-              <a:t>How to drive one</a:t>
+              <a:t>Vary two things only</a:t>
             </a:r>
           </a:p>
           <a:p>
@@ -10196,7 +10675,7 @@
                 </a:solidFill>
                 <a:latin typeface="Arial"/>
               </a:rPr>
-              <a:t>• PWM, direction, debouncing, and why a motor never goes straight to a pin.</a:t>
+              <a:t>• Rhythm of the pulses</a:t>
             </a:r>
           </a:p>
           <a:p>
@@ -10205,6 +10684,26 @@
                 <a:spcPct val="128000"/>
               </a:lnSpc>
               <a:spcAft>
+                <a:spcPts val="600"/>
+              </a:spcAft>
+              <a:buNone/>
+            </a:pPr>
+            <a:r>
+              <a:rPr sz="1500" b="0">
+                <a:solidFill>
+                  <a:srgbClr val="000000"/>
+                </a:solidFill>
+                <a:latin typeface="Arial"/>
+              </a:rPr>
+              <a:t>• How strong they are</a:t>
+            </a:r>
+          </a:p>
+          <a:p>
+            <a:pPr marL="0" indent="0" algn="l">
+              <a:lnSpc>
+                <a:spcPct val="128000"/>
+              </a:lnSpc>
+              <a:spcAft>
                 <a:spcPts val="0"/>
               </a:spcAft>
               <a:buNone/>
@@ -10227,7 +10726,7 @@
                 </a:solidFill>
                 <a:latin typeface="Arial"/>
               </a:rPr>
-              <a:t>What to pick</a:t>
+              <a:t>Blind test: they name all three</a:t>
             </a:r>
           </a:p>
           <a:p>
@@ -10247,7 +10746,7 @@
                 </a:solidFill>
                 <a:latin typeface="Arial"/>
               </a:rPr>
-              <a:t>• Choosing the actuator before designing the interaction, not in week 46.</a:t>
+              <a:t>• Note which two got confused, and why</a:t>
             </a:r>
           </a:p>
         </p:txBody>
@@ -10308,7 +10807,7 @@
 </p:sld>
 </file>
 
-<file path=ppt/slides/slide27.xml><?xml version="1.0" encoding="utf-8"?>
+<file path=ppt/slides/slide28.xml><?xml version="1.0" encoding="utf-8"?>
 <p:sld xmlns:a="http://schemas.openxmlformats.org/drawingml/2006/main" xmlns:p="http://schemas.openxmlformats.org/presentationml/2006/main" xmlns:r="http://schemas.openxmlformats.org/officeDocument/2006/relationships">
   <p:cSld>
     <p:spTree>
@@ -10325,7 +10824,7 @@
             <a:spLocks noGrp="1"/>
           </p:cNvSpPr>
           <p:nvPr>
-            <p:ph type="ctrTitle"/>
+            <p:ph type="title"/>
           </p:nvPr>
         </p:nvSpPr>
         <p:spPr/>
@@ -10337,25 +10836,25 @@
               <a:buNone/>
             </a:pPr>
             <a:r>
-              <a:rPr sz="5400" b="1">
-                <a:solidFill>
-                  <a:srgbClr val="FFFFFF"/>
-                </a:solidFill>
-                <a:latin typeface="Arial"/>
-              </a:rPr>
-              <a:t>GO AND TOUCH THINGS</a:t>
-            </a:r>
-          </a:p>
-        </p:txBody>
-      </p:sp>
-      <p:sp>
-        <p:nvSpPr>
-          <p:cNvPr id="3" name="Subtitle 2"/>
-          <p:cNvSpPr>
-            <a:spLocks noGrp="1"/>
-          </p:cNvSpPr>
-          <p:nvPr>
-            <p:ph type="subTitle" idx="1"/>
+              <a:rPr sz="3200" b="1">
+                <a:solidFill>
+                  <a:srgbClr val="000000"/>
+                </a:solidFill>
+                <a:latin typeface="Arial"/>
+              </a:rPr>
+              <a:t>THE CONSTRAINT THAT MATTERS</a:t>
+            </a:r>
+          </a:p>
+        </p:txBody>
+      </p:sp>
+      <p:sp>
+        <p:nvSpPr>
+          <p:cNvPr id="3" name="Text Placeholder 2"/>
+          <p:cNvSpPr>
+            <a:spLocks noGrp="1"/>
+          </p:cNvSpPr>
+          <p:nvPr>
+            <p:ph type="body" idx="1"/>
           </p:nvPr>
         </p:nvSpPr>
         <p:spPr/>
@@ -10364,23 +10863,80 @@
           <a:lstStyle/>
           <a:p>
             <a:pPr marL="0" indent="0" algn="l">
-              <a:buNone/>
-            </a:pPr>
-            <a:r>
-              <a:rPr sz="2000" b="0">
-                <a:solidFill>
-                  <a:srgbClr val="FFFFFF"/>
-                </a:solidFill>
-                <a:latin typeface="Arial"/>
-              </a:rPr>
-              <a:t>github.com/gust1527/multimodal-actuator-workshop</a:t>
+              <a:lnSpc>
+                <a:spcPct val="128000"/>
+              </a:lnSpc>
+              <a:spcAft>
+                <a:spcPts val="600"/>
+              </a:spcAft>
+              <a:buNone/>
+            </a:pPr>
+            <a:r>
+              <a:rPr sz="1700" b="1">
+                <a:solidFill>
+                  <a:srgbClr val="000000"/>
+                </a:solidFill>
+                <a:latin typeface="Arial"/>
+              </a:rPr>
+              <a:t>The recipient cannot look at the device.</a:t>
+            </a:r>
+          </a:p>
+          <a:p>
+            <a:pPr marL="0" indent="0" algn="l">
+              <a:lnSpc>
+                <a:spcPct val="128000"/>
+              </a:lnSpc>
+              <a:spcAft>
+                <a:spcPts val="0"/>
+              </a:spcAft>
+              <a:buNone/>
+            </a:pPr>
+          </a:p>
+          <a:p>
+            <a:pPr marL="0" indent="0" algn="l">
+              <a:lnSpc>
+                <a:spcPct val="128000"/>
+              </a:lnSpc>
+              <a:spcAft>
+                <a:spcPts val="600"/>
+              </a:spcAft>
+              <a:buNone/>
+            </a:pPr>
+            <a:r>
+              <a:rPr sz="1700" b="0">
+                <a:solidFill>
+                  <a:srgbClr val="000000"/>
+                </a:solidFill>
+                <a:latin typeface="Arial"/>
+              </a:rPr>
+              <a:t>If it only works while someone watches a screen,</a:t>
+            </a:r>
+          </a:p>
+          <a:p>
+            <a:pPr marL="0" indent="0" algn="l">
+              <a:lnSpc>
+                <a:spcPct val="128000"/>
+              </a:lnSpc>
+              <a:spcAft>
+                <a:spcPts val="600"/>
+              </a:spcAft>
+              <a:buNone/>
+            </a:pPr>
+            <a:r>
+              <a:rPr sz="1700" b="0">
+                <a:solidFill>
+                  <a:srgbClr val="000000"/>
+                </a:solidFill>
+                <a:latin typeface="Arial"/>
+              </a:rPr>
+              <a:t>you built a visual interface with a motor glued to it.</a:t>
             </a:r>
           </a:p>
         </p:txBody>
       </p:sp>
       <p:pic>
         <p:nvPicPr>
-          <p:cNvPr id="4" name="Picture 3" descr="wordmark_light.png"/>
+          <p:cNvPr id="4" name="Picture 3" descr="wordmark_dark.png"/>
           <p:cNvPicPr>
             <a:picLocks noChangeAspect="1"/>
           </p:cNvPicPr>
@@ -10404,7 +10960,219 @@
       </p:pic>
       <p:pic>
         <p:nvPicPr>
-          <p:cNvPr id="5" name="Picture 4" descr="seal_light.png"/>
+          <p:cNvPr id="5" name="Picture 4" descr="seal_dark.png"/>
+          <p:cNvPicPr>
+            <a:picLocks noChangeAspect="1"/>
+          </p:cNvPicPr>
+          <p:nvPr/>
+        </p:nvPicPr>
+        <p:blipFill>
+          <a:blip r:embed="rId3"/>
+          <a:stretch>
+            <a:fillRect/>
+          </a:stretch>
+        </p:blipFill>
+        <p:spPr>
+          <a:xfrm>
+            <a:off x="11226800" y="5969000"/>
+            <a:ext cx="713915" cy="711200"/>
+          </a:xfrm>
+          <a:prstGeom prst="rect">
+            <a:avLst/>
+          </a:prstGeom>
+        </p:spPr>
+      </p:pic>
+    </p:spTree>
+  </p:cSld>
+  <p:clrMapOvr>
+    <a:masterClrMapping/>
+  </p:clrMapOvr>
+</p:sld>
+</file>
+
+<file path=ppt/slides/slide29.xml><?xml version="1.0" encoding="utf-8"?>
+<p:sld xmlns:a="http://schemas.openxmlformats.org/drawingml/2006/main" xmlns:p="http://schemas.openxmlformats.org/presentationml/2006/main" xmlns:r="http://schemas.openxmlformats.org/officeDocument/2006/relationships">
+  <p:cSld>
+    <p:spTree>
+      <p:nvGrpSpPr>
+        <p:cNvPr id="1" name=""/>
+        <p:cNvGrpSpPr/>
+        <p:nvPr/>
+      </p:nvGrpSpPr>
+      <p:grpSpPr/>
+      <p:sp>
+        <p:nvSpPr>
+          <p:cNvPr id="2" name="Title 1"/>
+          <p:cNvSpPr>
+            <a:spLocks noGrp="1"/>
+          </p:cNvSpPr>
+          <p:nvPr>
+            <p:ph type="title"/>
+          </p:nvPr>
+        </p:nvSpPr>
+        <p:spPr/>
+        <p:txBody>
+          <a:bodyPr/>
+          <a:lstStyle/>
+          <a:p>
+            <a:pPr marL="0" indent="0" algn="l">
+              <a:buNone/>
+            </a:pPr>
+            <a:r>
+              <a:rPr sz="3200" b="1">
+                <a:solidFill>
+                  <a:srgbClr val="000000"/>
+                </a:solidFill>
+                <a:latin typeface="Arial"/>
+              </a:rPr>
+              <a:t>TEST IT</a:t>
+            </a:r>
+          </a:p>
+        </p:txBody>
+      </p:sp>
+      <p:sp>
+        <p:nvSpPr>
+          <p:cNvPr id="3" name="Text Placeholder 2"/>
+          <p:cNvSpPr>
+            <a:spLocks noGrp="1"/>
+          </p:cNvSpPr>
+          <p:nvPr>
+            <p:ph type="body" idx="1"/>
+          </p:nvPr>
+        </p:nvSpPr>
+        <p:spPr/>
+        <p:txBody>
+          <a:bodyPr/>
+          <a:lstStyle/>
+          <a:p>
+            <a:pPr marL="0" indent="0" algn="l">
+              <a:lnSpc>
+                <a:spcPct val="128000"/>
+              </a:lnSpc>
+              <a:spcAft>
+                <a:spcPts val="1400"/>
+              </a:spcAft>
+              <a:buNone/>
+            </a:pPr>
+            <a:r>
+              <a:rPr sz="1700" b="0">
+                <a:solidFill>
+                  <a:srgbClr val="595959"/>
+                </a:solidFill>
+                <a:latin typeface="Arial"/>
+              </a:rPr>
+              <a:t>Hand your device to another group with the screen turned away.</a:t>
+            </a:r>
+          </a:p>
+          <a:p>
+            <a:pPr marL="0" indent="0" algn="l">
+              <a:lnSpc>
+                <a:spcPct val="128000"/>
+              </a:lnSpc>
+              <a:spcAft>
+                <a:spcPts val="600"/>
+              </a:spcAft>
+              <a:buNone/>
+            </a:pPr>
+            <a:r>
+              <a:rPr sz="1500" b="0">
+                <a:solidFill>
+                  <a:srgbClr val="000000"/>
+                </a:solidFill>
+                <a:latin typeface="Arial"/>
+              </a:rPr>
+              <a:t>• They can tell all three messages apart.</a:t>
+            </a:r>
+          </a:p>
+          <a:p>
+            <a:pPr marL="0" indent="0" algn="l">
+              <a:lnSpc>
+                <a:spcPct val="128000"/>
+              </a:lnSpc>
+              <a:spcAft>
+                <a:spcPts val="600"/>
+              </a:spcAft>
+              <a:buNone/>
+            </a:pPr>
+            <a:r>
+              <a:rPr sz="1500" b="0">
+                <a:solidFill>
+                  <a:srgbClr val="000000"/>
+                </a:solidFill>
+                <a:latin typeface="Arial"/>
+              </a:rPr>
+              <a:t>• It does not fire continuously when held.</a:t>
+            </a:r>
+          </a:p>
+          <a:p>
+            <a:pPr marL="0" indent="0" algn="l">
+              <a:lnSpc>
+                <a:spcPct val="128000"/>
+              </a:lnSpc>
+              <a:spcAft>
+                <a:spcPts val="600"/>
+              </a:spcAft>
+              <a:buNone/>
+            </a:pPr>
+            <a:r>
+              <a:rPr sz="1500" b="0">
+                <a:solidFill>
+                  <a:srgbClr val="000000"/>
+                </a:solidFill>
+                <a:latin typeface="Arial"/>
+              </a:rPr>
+              <a:t>• You know which two got confused, and what would have separated them.</a:t>
+            </a:r>
+          </a:p>
+          <a:p>
+            <a:pPr marL="0" indent="0" algn="l">
+              <a:lnSpc>
+                <a:spcPct val="128000"/>
+              </a:lnSpc>
+              <a:spcAft>
+                <a:spcPts val="600"/>
+              </a:spcAft>
+              <a:buNone/>
+            </a:pPr>
+            <a:r>
+              <a:rPr sz="1500" b="0">
+                <a:solidFill>
+                  <a:srgbClr val="000000"/>
+                </a:solidFill>
+                <a:latin typeface="Arial"/>
+              </a:rPr>
+              <a:t>• It still works when they are not looking at it.</a:t>
+            </a:r>
+          </a:p>
+        </p:txBody>
+      </p:sp>
+      <p:pic>
+        <p:nvPicPr>
+          <p:cNvPr id="4" name="Picture 3" descr="wordmark_dark.png"/>
+          <p:cNvPicPr>
+            <a:picLocks noChangeAspect="1"/>
+          </p:cNvPicPr>
+          <p:nvPr/>
+        </p:nvPicPr>
+        <p:blipFill>
+          <a:blip r:embed="rId2"/>
+          <a:stretch>
+            <a:fillRect/>
+          </a:stretch>
+        </p:blipFill>
+        <p:spPr>
+          <a:xfrm>
+            <a:off x="342900" y="6184900"/>
+            <a:ext cx="2070100" cy="529560"/>
+          </a:xfrm>
+          <a:prstGeom prst="rect">
+            <a:avLst/>
+          </a:prstGeom>
+        </p:spPr>
+      </p:pic>
+      <p:pic>
+        <p:nvPicPr>
+          <p:cNvPr id="5" name="Picture 4" descr="seal_dark.png"/>
           <p:cNvPicPr>
             <a:picLocks noChangeAspect="1"/>
           </p:cNvPicPr>
@@ -10648,6 +11416,406 @@
       <p:pic>
         <p:nvPicPr>
           <p:cNvPr id="5" name="Picture 4" descr="seal_dark.png"/>
+          <p:cNvPicPr>
+            <a:picLocks noChangeAspect="1"/>
+          </p:cNvPicPr>
+          <p:nvPr/>
+        </p:nvPicPr>
+        <p:blipFill>
+          <a:blip r:embed="rId3"/>
+          <a:stretch>
+            <a:fillRect/>
+          </a:stretch>
+        </p:blipFill>
+        <p:spPr>
+          <a:xfrm>
+            <a:off x="11226800" y="5969000"/>
+            <a:ext cx="713915" cy="711200"/>
+          </a:xfrm>
+          <a:prstGeom prst="rect">
+            <a:avLst/>
+          </a:prstGeom>
+        </p:spPr>
+      </p:pic>
+    </p:spTree>
+  </p:cSld>
+  <p:clrMapOvr>
+    <a:masterClrMapping/>
+  </p:clrMapOvr>
+</p:sld>
+</file>
+
+<file path=ppt/slides/slide30.xml><?xml version="1.0" encoding="utf-8"?>
+<p:sld xmlns:a="http://schemas.openxmlformats.org/drawingml/2006/main" xmlns:p="http://schemas.openxmlformats.org/presentationml/2006/main" xmlns:r="http://schemas.openxmlformats.org/officeDocument/2006/relationships">
+  <p:cSld>
+    <p:spTree>
+      <p:nvGrpSpPr>
+        <p:cNvPr id="1" name=""/>
+        <p:cNvGrpSpPr/>
+        <p:nvPr/>
+      </p:nvGrpSpPr>
+      <p:grpSpPr/>
+      <p:sp>
+        <p:nvSpPr>
+          <p:cNvPr id="2" name="Title 1"/>
+          <p:cNvSpPr>
+            <a:spLocks noGrp="1"/>
+          </p:cNvSpPr>
+          <p:nvPr>
+            <p:ph type="title"/>
+          </p:nvPr>
+        </p:nvSpPr>
+        <p:spPr/>
+        <p:txBody>
+          <a:bodyPr/>
+          <a:lstStyle/>
+          <a:p>
+            <a:pPr marL="0" indent="0" algn="l">
+              <a:buNone/>
+            </a:pPr>
+            <a:r>
+              <a:rPr sz="3200" b="1">
+                <a:solidFill>
+                  <a:srgbClr val="000000"/>
+                </a:solidFill>
+                <a:latin typeface="Arial"/>
+              </a:rPr>
+              <a:t>WHAT YOU ACTUALLY LEARN</a:t>
+            </a:r>
+          </a:p>
+        </p:txBody>
+      </p:sp>
+      <p:sp>
+        <p:nvSpPr>
+          <p:cNvPr id="3" name="Text Placeholder 2"/>
+          <p:cNvSpPr>
+            <a:spLocks noGrp="1"/>
+          </p:cNvSpPr>
+          <p:nvPr>
+            <p:ph type="body" idx="1"/>
+          </p:nvPr>
+        </p:nvSpPr>
+        <p:spPr/>
+        <p:txBody>
+          <a:bodyPr/>
+          <a:lstStyle/>
+          <a:p>
+            <a:pPr marL="0" indent="0" algn="l">
+              <a:lnSpc>
+                <a:spcPct val="128000"/>
+              </a:lnSpc>
+              <a:spcAft>
+                <a:spcPts val="1400"/>
+              </a:spcAft>
+              <a:buNone/>
+            </a:pPr>
+            <a:r>
+              <a:rPr sz="1700" b="0">
+                <a:solidFill>
+                  <a:srgbClr val="595959"/>
+                </a:solidFill>
+                <a:latin typeface="Arial"/>
+              </a:rPr>
+              <a:t>Three things you cannot get from a datasheet.</a:t>
+            </a:r>
+          </a:p>
+          <a:p>
+            <a:pPr marL="0" indent="0" algn="l">
+              <a:lnSpc>
+                <a:spcPct val="128000"/>
+              </a:lnSpc>
+              <a:spcAft>
+                <a:spcPts val="600"/>
+              </a:spcAft>
+              <a:buNone/>
+            </a:pPr>
+            <a:r>
+              <a:rPr sz="1700" b="1">
+                <a:solidFill>
+                  <a:srgbClr val="000000"/>
+                </a:solidFill>
+                <a:latin typeface="Arial"/>
+              </a:rPr>
+              <a:t>What things feel like</a:t>
+            </a:r>
+          </a:p>
+          <a:p>
+            <a:pPr marL="0" indent="0" algn="l">
+              <a:lnSpc>
+                <a:spcPct val="128000"/>
+              </a:lnSpc>
+              <a:spcAft>
+                <a:spcPts val="600"/>
+              </a:spcAft>
+              <a:buNone/>
+            </a:pPr>
+            <a:r>
+              <a:rPr sz="1500" b="0">
+                <a:solidFill>
+                  <a:srgbClr val="000000"/>
+                </a:solidFill>
+                <a:latin typeface="Arial"/>
+              </a:rPr>
+              <a:t>• A motor is a nudge. A solenoid is a knock. A Peltier is slow.</a:t>
+            </a:r>
+          </a:p>
+          <a:p>
+            <a:pPr marL="0" indent="0" algn="l">
+              <a:lnSpc>
+                <a:spcPct val="128000"/>
+              </a:lnSpc>
+              <a:spcAft>
+                <a:spcPts val="0"/>
+              </a:spcAft>
+              <a:buNone/>
+            </a:pPr>
+          </a:p>
+          <a:p>
+            <a:pPr marL="0" indent="0" algn="l">
+              <a:lnSpc>
+                <a:spcPct val="128000"/>
+              </a:lnSpc>
+              <a:spcAft>
+                <a:spcPts val="600"/>
+              </a:spcAft>
+              <a:buNone/>
+            </a:pPr>
+            <a:r>
+              <a:rPr sz="1700" b="1">
+                <a:solidFill>
+                  <a:srgbClr val="000000"/>
+                </a:solidFill>
+                <a:latin typeface="Arial"/>
+              </a:rPr>
+              <a:t>How to drive one</a:t>
+            </a:r>
+          </a:p>
+          <a:p>
+            <a:pPr marL="0" indent="0" algn="l">
+              <a:lnSpc>
+                <a:spcPct val="128000"/>
+              </a:lnSpc>
+              <a:spcAft>
+                <a:spcPts val="600"/>
+              </a:spcAft>
+              <a:buNone/>
+            </a:pPr>
+            <a:r>
+              <a:rPr sz="1500" b="0">
+                <a:solidFill>
+                  <a:srgbClr val="000000"/>
+                </a:solidFill>
+                <a:latin typeface="Arial"/>
+              </a:rPr>
+              <a:t>• PWM, direction, debouncing, and why a motor never goes straight to a pin.</a:t>
+            </a:r>
+          </a:p>
+          <a:p>
+            <a:pPr marL="0" indent="0" algn="l">
+              <a:lnSpc>
+                <a:spcPct val="128000"/>
+              </a:lnSpc>
+              <a:spcAft>
+                <a:spcPts val="0"/>
+              </a:spcAft>
+              <a:buNone/>
+            </a:pPr>
+          </a:p>
+          <a:p>
+            <a:pPr marL="0" indent="0" algn="l">
+              <a:lnSpc>
+                <a:spcPct val="128000"/>
+              </a:lnSpc>
+              <a:spcAft>
+                <a:spcPts val="600"/>
+              </a:spcAft>
+              <a:buNone/>
+            </a:pPr>
+            <a:r>
+              <a:rPr sz="1700" b="1">
+                <a:solidFill>
+                  <a:srgbClr val="000000"/>
+                </a:solidFill>
+                <a:latin typeface="Arial"/>
+              </a:rPr>
+              <a:t>What to pick</a:t>
+            </a:r>
+          </a:p>
+          <a:p>
+            <a:pPr marL="0" indent="0" algn="l">
+              <a:lnSpc>
+                <a:spcPct val="128000"/>
+              </a:lnSpc>
+              <a:spcAft>
+                <a:spcPts val="600"/>
+              </a:spcAft>
+              <a:buNone/>
+            </a:pPr>
+            <a:r>
+              <a:rPr sz="1500" b="0">
+                <a:solidFill>
+                  <a:srgbClr val="000000"/>
+                </a:solidFill>
+                <a:latin typeface="Arial"/>
+              </a:rPr>
+              <a:t>• Choosing the actuator before designing the interaction, not in week 46.</a:t>
+            </a:r>
+          </a:p>
+        </p:txBody>
+      </p:sp>
+      <p:pic>
+        <p:nvPicPr>
+          <p:cNvPr id="4" name="Picture 3" descr="wordmark_dark.png"/>
+          <p:cNvPicPr>
+            <a:picLocks noChangeAspect="1"/>
+          </p:cNvPicPr>
+          <p:nvPr/>
+        </p:nvPicPr>
+        <p:blipFill>
+          <a:blip r:embed="rId2"/>
+          <a:stretch>
+            <a:fillRect/>
+          </a:stretch>
+        </p:blipFill>
+        <p:spPr>
+          <a:xfrm>
+            <a:off x="342900" y="6184900"/>
+            <a:ext cx="2070100" cy="529560"/>
+          </a:xfrm>
+          <a:prstGeom prst="rect">
+            <a:avLst/>
+          </a:prstGeom>
+        </p:spPr>
+      </p:pic>
+      <p:pic>
+        <p:nvPicPr>
+          <p:cNvPr id="5" name="Picture 4" descr="seal_dark.png"/>
+          <p:cNvPicPr>
+            <a:picLocks noChangeAspect="1"/>
+          </p:cNvPicPr>
+          <p:nvPr/>
+        </p:nvPicPr>
+        <p:blipFill>
+          <a:blip r:embed="rId3"/>
+          <a:stretch>
+            <a:fillRect/>
+          </a:stretch>
+        </p:blipFill>
+        <p:spPr>
+          <a:xfrm>
+            <a:off x="11226800" y="5969000"/>
+            <a:ext cx="713915" cy="711200"/>
+          </a:xfrm>
+          <a:prstGeom prst="rect">
+            <a:avLst/>
+          </a:prstGeom>
+        </p:spPr>
+      </p:pic>
+    </p:spTree>
+  </p:cSld>
+  <p:clrMapOvr>
+    <a:masterClrMapping/>
+  </p:clrMapOvr>
+</p:sld>
+</file>
+
+<file path=ppt/slides/slide31.xml><?xml version="1.0" encoding="utf-8"?>
+<p:sld xmlns:a="http://schemas.openxmlformats.org/drawingml/2006/main" xmlns:p="http://schemas.openxmlformats.org/presentationml/2006/main" xmlns:r="http://schemas.openxmlformats.org/officeDocument/2006/relationships">
+  <p:cSld>
+    <p:spTree>
+      <p:nvGrpSpPr>
+        <p:cNvPr id="1" name=""/>
+        <p:cNvGrpSpPr/>
+        <p:nvPr/>
+      </p:nvGrpSpPr>
+      <p:grpSpPr/>
+      <p:sp>
+        <p:nvSpPr>
+          <p:cNvPr id="2" name="Title 1"/>
+          <p:cNvSpPr>
+            <a:spLocks noGrp="1"/>
+          </p:cNvSpPr>
+          <p:nvPr>
+            <p:ph type="ctrTitle"/>
+          </p:nvPr>
+        </p:nvSpPr>
+        <p:spPr/>
+        <p:txBody>
+          <a:bodyPr/>
+          <a:lstStyle/>
+          <a:p>
+            <a:pPr marL="0" indent="0" algn="l">
+              <a:buNone/>
+            </a:pPr>
+            <a:r>
+              <a:rPr sz="5400" b="1">
+                <a:solidFill>
+                  <a:srgbClr val="FFFFFF"/>
+                </a:solidFill>
+                <a:latin typeface="Arial"/>
+              </a:rPr>
+              <a:t>GO AND TOUCH THINGS</a:t>
+            </a:r>
+          </a:p>
+        </p:txBody>
+      </p:sp>
+      <p:sp>
+        <p:nvSpPr>
+          <p:cNvPr id="3" name="Subtitle 2"/>
+          <p:cNvSpPr>
+            <a:spLocks noGrp="1"/>
+          </p:cNvSpPr>
+          <p:nvPr>
+            <p:ph type="subTitle" idx="1"/>
+          </p:nvPr>
+        </p:nvSpPr>
+        <p:spPr/>
+        <p:txBody>
+          <a:bodyPr/>
+          <a:lstStyle/>
+          <a:p>
+            <a:pPr marL="0" indent="0" algn="l">
+              <a:buNone/>
+            </a:pPr>
+            <a:r>
+              <a:rPr sz="2000" b="0">
+                <a:solidFill>
+                  <a:srgbClr val="FFFFFF"/>
+                </a:solidFill>
+                <a:latin typeface="Arial"/>
+              </a:rPr>
+              <a:t>github.com/gust1527/multimodal-actuator-workshop</a:t>
+            </a:r>
+          </a:p>
+        </p:txBody>
+      </p:sp>
+      <p:pic>
+        <p:nvPicPr>
+          <p:cNvPr id="4" name="Picture 3" descr="wordmark_light.png"/>
+          <p:cNvPicPr>
+            <a:picLocks noChangeAspect="1"/>
+          </p:cNvPicPr>
+          <p:nvPr/>
+        </p:nvPicPr>
+        <p:blipFill>
+          <a:blip r:embed="rId2"/>
+          <a:stretch>
+            <a:fillRect/>
+          </a:stretch>
+        </p:blipFill>
+        <p:spPr>
+          <a:xfrm>
+            <a:off x="342900" y="6184900"/>
+            <a:ext cx="2070100" cy="529560"/>
+          </a:xfrm>
+          <a:prstGeom prst="rect">
+            <a:avLst/>
+          </a:prstGeom>
+        </p:spPr>
+      </p:pic>
+      <p:pic>
+        <p:nvPicPr>
+          <p:cNvPr id="5" name="Picture 4" descr="seal_light.png"/>
           <p:cNvPicPr>
             <a:picLocks noChangeAspect="1"/>
           </p:cNvPicPr>
@@ -11885,20 +13053,249 @@
               <a:buNone/>
             </a:pPr>
             <a:r>
-              <a:rPr sz="4400" b="1">
-                <a:solidFill>
-                  <a:srgbClr val="000000"/>
-                </a:solidFill>
-                <a:latin typeface="Arial"/>
-              </a:rPr>
-              <a:t>WHAT IS ON THE TABLES</a:t>
+              <a:rPr sz="3200" b="1">
+                <a:solidFill>
+                  <a:srgbClr val="000000"/>
+                </a:solidFill>
+                <a:latin typeface="Arial"/>
+              </a:rPr>
+              <a:t>WHAT YOU GET IN THE BASE KIT</a:t>
+            </a:r>
+          </a:p>
+        </p:txBody>
+      </p:sp>
+      <p:sp>
+        <p:nvSpPr>
+          <p:cNvPr id="3" name="Text Placeholder 2"/>
+          <p:cNvSpPr>
+            <a:spLocks noGrp="1"/>
+          </p:cNvSpPr>
+          <p:nvPr>
+            <p:ph type="body" idx="1"/>
+          </p:nvPr>
+        </p:nvSpPr>
+        <p:spPr/>
+        <p:txBody>
+          <a:bodyPr/>
+          <a:lstStyle/>
+          <a:p>
+            <a:pPr marL="0" indent="0" algn="l">
+              <a:lnSpc>
+                <a:spcPct val="128000"/>
+              </a:lnSpc>
+              <a:spcAft>
+                <a:spcPts val="1400"/>
+              </a:spcAft>
+              <a:buNone/>
+            </a:pPr>
+            <a:r>
+              <a:rPr sz="1700" b="0">
+                <a:solidFill>
+                  <a:srgbClr val="595959"/>
+                </a:solidFill>
+                <a:latin typeface="Arial"/>
+              </a:rPr>
+              <a:t>One set per pair. Collect it before you start task 01.</a:t>
+            </a:r>
+          </a:p>
+          <a:p>
+            <a:pPr marL="0" indent="0" algn="l">
+              <a:lnSpc>
+                <a:spcPct val="128000"/>
+              </a:lnSpc>
+              <a:spcAft>
+                <a:spcPts val="600"/>
+              </a:spcAft>
+              <a:buNone/>
+            </a:pPr>
+            <a:r>
+              <a:rPr sz="1700" b="1">
+                <a:solidFill>
+                  <a:srgbClr val="000000"/>
+                </a:solidFill>
+                <a:latin typeface="Arial"/>
+              </a:rPr>
+              <a:t>Board, breadboard, jumper wires, USB cable</a:t>
+            </a:r>
+          </a:p>
+          <a:p>
+            <a:pPr marL="0" indent="0" algn="l">
+              <a:lnSpc>
+                <a:spcPct val="128000"/>
+              </a:lnSpc>
+              <a:spcAft>
+                <a:spcPts val="600"/>
+              </a:spcAft>
+              <a:buNone/>
+            </a:pPr>
+            <a:r>
+              <a:rPr sz="1500" b="0">
+                <a:solidFill>
+                  <a:srgbClr val="000000"/>
+                </a:solidFill>
+                <a:latin typeface="Arial"/>
+              </a:rPr>
+              <a:t>• Assorted resistors and a few transistors</a:t>
+            </a:r>
+          </a:p>
+          <a:p>
+            <a:pPr marL="0" indent="0" algn="l">
+              <a:lnSpc>
+                <a:spcPct val="128000"/>
+              </a:lnSpc>
+              <a:spcAft>
+                <a:spcPts val="0"/>
+              </a:spcAft>
+              <a:buNone/>
+            </a:pPr>
+          </a:p>
+          <a:p>
+            <a:pPr marL="0" indent="0" algn="l">
+              <a:lnSpc>
+                <a:spcPct val="128000"/>
+              </a:lnSpc>
+              <a:spcAft>
+                <a:spcPts val="600"/>
+              </a:spcAft>
+              <a:buNone/>
+            </a:pPr>
+            <a:r>
+              <a:rPr sz="1700" b="1">
+                <a:solidFill>
+                  <a:srgbClr val="000000"/>
+                </a:solidFill>
+                <a:latin typeface="Arial"/>
+              </a:rPr>
+              <a:t>Breadboard power supply, drawer 8A</a:t>
+            </a:r>
+          </a:p>
+          <a:p>
+            <a:pPr marL="0" indent="0" algn="l">
+              <a:lnSpc>
+                <a:spcPct val="128000"/>
+              </a:lnSpc>
+              <a:spcAft>
+                <a:spcPts val="600"/>
+              </a:spcAft>
+              <a:buNone/>
+            </a:pPr>
+            <a:r>
+              <a:rPr sz="1500" b="0">
+                <a:solidFill>
+                  <a:srgbClr val="000000"/>
+                </a:solidFill>
+                <a:latin typeface="Arial"/>
+              </a:rPr>
+              <a:t>• 42 in stock. Use it for anything that is not just an LED.</a:t>
+            </a:r>
+          </a:p>
+          <a:p>
+            <a:pPr marL="0" indent="0" algn="l">
+              <a:lnSpc>
+                <a:spcPct val="128000"/>
+              </a:lnSpc>
+              <a:spcAft>
+                <a:spcPts val="0"/>
+              </a:spcAft>
+              <a:buNone/>
+            </a:pPr>
+          </a:p>
+          <a:p>
+            <a:pPr marL="0" indent="0" algn="l">
+              <a:lnSpc>
+                <a:spcPct val="128000"/>
+              </a:lnSpc>
+              <a:spcAft>
+                <a:spcPts val="600"/>
+              </a:spcAft>
+              <a:buNone/>
+            </a:pPr>
+            <a:r>
+              <a:rPr sz="1700" b="1">
+                <a:solidFill>
+                  <a:srgbClr val="000000"/>
+                </a:solidFill>
+                <a:latin typeface="Arial"/>
+              </a:rPr>
+              <a:t>L9110S H-bridge, drawer 2C</a:t>
+            </a:r>
+          </a:p>
+          <a:p>
+            <a:pPr marL="0" indent="0" algn="l">
+              <a:lnSpc>
+                <a:spcPct val="128000"/>
+              </a:lnSpc>
+              <a:spcAft>
+                <a:spcPts val="600"/>
+              </a:spcAft>
+              <a:buNone/>
+            </a:pPr>
+            <a:r>
+              <a:rPr sz="1500" b="0">
+                <a:solidFill>
+                  <a:srgbClr val="000000"/>
+                </a:solidFill>
+                <a:latin typeface="Arial"/>
+              </a:rPr>
+              <a:t>• 24 in stock. Needed for the Peltier and for reversing a motor.</a:t>
+            </a:r>
+          </a:p>
+          <a:p>
+            <a:pPr marL="0" indent="0" algn="l">
+              <a:lnSpc>
+                <a:spcPct val="128000"/>
+              </a:lnSpc>
+              <a:spcAft>
+                <a:spcPts val="0"/>
+              </a:spcAft>
+              <a:buNone/>
+            </a:pPr>
+          </a:p>
+          <a:p>
+            <a:pPr marL="0" indent="0" algn="l">
+              <a:lnSpc>
+                <a:spcPct val="128000"/>
+              </a:lnSpc>
+              <a:spcAft>
+                <a:spcPts val="600"/>
+              </a:spcAft>
+              <a:buNone/>
+            </a:pPr>
+            <a:r>
+              <a:rPr sz="1700" b="1">
+                <a:solidFill>
+                  <a:srgbClr val="000000"/>
+                </a:solidFill>
+                <a:latin typeface="Arial"/>
+              </a:rPr>
+              <a:t>PAM8403 amplifier, drawer 11F</a:t>
+            </a:r>
+          </a:p>
+          <a:p>
+            <a:pPr marL="0" indent="0" algn="l">
+              <a:lnSpc>
+                <a:spcPct val="128000"/>
+              </a:lnSpc>
+              <a:spcAft>
+                <a:spcPts val="600"/>
+              </a:spcAft>
+              <a:buNone/>
+            </a:pPr>
+            <a:r>
+              <a:rPr sz="1500" b="0">
+                <a:solidFill>
+                  <a:srgbClr val="000000"/>
+                </a:solidFill>
+                <a:latin typeface="Arial"/>
+              </a:rPr>
+              <a:t>• 25 in stock. Needed to drive a transducer.</a:t>
             </a:r>
           </a:p>
         </p:txBody>
       </p:sp>
       <p:pic>
         <p:nvPicPr>
-          <p:cNvPr id="3" name="Picture 2" descr="wordmark_dark.png"/>
+          <p:cNvPr id="4" name="Picture 3" descr="wordmark_dark.png"/>
           <p:cNvPicPr>
             <a:picLocks noChangeAspect="1"/>
           </p:cNvPicPr>
@@ -11922,7 +13319,7 @@
       </p:pic>
       <p:pic>
         <p:nvPicPr>
-          <p:cNvPr id="4" name="Picture 3" descr="seal_dark.png"/>
+          <p:cNvPr id="5" name="Picture 4" descr="seal_dark.png"/>
           <p:cNvPicPr>
             <a:picLocks noChangeAspect="1"/>
           </p:cNvPicPr>

--- a/docs/multimodal-actuator-workshop.pptx
+++ b/docs/multimodal-actuator-workshop.pptx
@@ -36,6 +36,8 @@
     <p:sldId id="284" r:id="rId35"/>
     <p:sldId id="285" r:id="rId36"/>
     <p:sldId id="286" r:id="rId37"/>
+    <p:sldId id="287" r:id="rId38"/>
+    <p:sldId id="288" r:id="rId39"/>
   </p:sldIdLst>
   <p:sldSz cx="12188952" cy="6858000" type="screen4x3"/>
   <p:notesSz cx="6858000" cy="9144000"/>
@@ -2063,45 +2065,44 @@
           <a:lstStyle/>
           <a:p>
             <a:r>
-              <a:t>Five minutes, and put the actual repos on screen if you can.</a:t>
+              <a:t>Worth five minutes, because it reframes what a prototype can be. Half</a:t>
+            </a:r>
+          </a:p>
+          <a:p>
+            <a:r>
+              <a:t>the room assumes multimodal means buying hardware.</a:t>
             </a:r>
           </a:p>
           <a:p/>
           <a:p>
             <a:r>
-              <a:t>The argument: this was built by students at your stage, not by a lab with a</a:t>
-            </a:r>
-          </a:p>
-          <a:p>
-            <a:r>
-              <a:t>budget. The gap between "we should use touch" and "it moves when you touch it"</a:t>
-            </a:r>
-          </a:p>
-          <a:p>
-            <a:r>
-              <a:t>is smaller than it looks.</a:t>
+              <a:t>Have them open the page on their own phones while you talk. The split between</a:t>
+            </a:r>
+          </a:p>
+          <a:p>
+            <a:r>
+              <a:t>what works and what does not lands much harder when it is their device.</a:t>
             </a:r>
           </a:p>
           <a:p/>
           <a:p>
             <a:r>
-              <a:t>The moving screen has a browser control panel over the serial port, which is</a:t>
-            </a:r>
-          </a:p>
-          <a:p>
-            <a:r>
-              <a:t>what you will wish you had at the project demonstrations.</a:t>
-            </a:r>
-          </a:p>
-          <a:p/>
-          <a:p>
-            <a:r>
-              <a:t>Note for you: the sock repo has a hardcoded Wi-Fi password and live patient IDs</a:t>
-            </a:r>
-          </a:p>
-          <a:p>
-            <a:r>
-              <a:t>in it. Scrub before showing, or show only the calibration section.</a:t>
+              <a:t>The watch line matters for project planning: several groups every year propose</a:t>
+            </a:r>
+          </a:p>
+          <a:p>
+            <a:r>
+              <a:t>live Apple Watch or Garmin data, and neither streams to a web page. Both need a</a:t>
+            </a:r>
+          </a:p>
+          <a:p>
+            <a:r>
+              <a:t>native companion app. Fine for after-the-fact analysis, not for anything</a:t>
+            </a:r>
+          </a:p>
+          <a:p>
+            <a:r>
+              <a:t>reacting in real time inside the project weeks.</a:t>
             </a:r>
           </a:p>
         </p:txBody>
@@ -2171,18 +2172,39 @@
           <a:lstStyle/>
           <a:p>
             <a:r>
-              <a:t>1:35. The blind test.</a:t>
+              <a:t>The single most useful fact on the slide, and the one people get wrong</a:t>
+            </a:r>
+          </a:p>
+          <a:p>
+            <a:r>
+              <a:t>because a blog post said otherwise.</a:t>
             </a:r>
           </a:p>
           <a:p/>
           <a:p>
             <a:r>
-              <a:t>Most groups will already have something from task 05. This is where it gets</a:t>
-            </a:r>
-          </a:p>
-          <a:p>
-            <a:r>
-              <a:t>tested by someone who did not build it.</a:t>
+              <a:t>Say it plainly: iPhones do not vibrate from a web page. Not with a polyfill,</a:t>
+            </a:r>
+          </a:p>
+          <a:p>
+            <a:r>
+              <a:t>not with a library, not in Chrome for iOS, which is Safari underneath.</a:t>
+            </a:r>
+          </a:p>
+          <a:p/>
+          <a:p>
+            <a:r>
+              <a:t>The general lesson is bigger than vibration: check the feature on caniuse</a:t>
+            </a:r>
+          </a:p>
+          <a:p>
+            <a:r>
+              <a:t>before it goes in a project plan, not after. Two minutes now against a</a:t>
+            </a:r>
+          </a:p>
+          <a:p>
+            <a:r>
+              <a:t>rewrite in week 46.</a:t>
             </a:r>
           </a:p>
         </p:txBody>
@@ -2252,39 +2274,45 @@
           <a:lstStyle/>
           <a:p>
             <a:r>
-              <a:t>Read the brief out once, then get out of the way. Full wording, since the</a:t>
-            </a:r>
-          </a:p>
-          <a:p>
-            <a:r>
-              <a:t>slide is only the bones:</a:t>
+              <a:t>Five minutes, and put the actual repos on screen if you can.</a:t>
             </a:r>
           </a:p>
           <a:p/>
           <a:p>
             <a:r>
-              <a:t>"Pick one actuator. Encode three messages: arrived, something wrong, finished.</a:t>
-            </a:r>
-          </a:p>
-          <a:p>
-            <a:r>
-              <a:t>Vary only the rhythm of the pulses and how strong they are. Then hand it to</a:t>
-            </a:r>
-          </a:p>
-          <a:p>
-            <a:r>
-              <a:t>another group with the screen turned away and see if they can name all three."</a:t>
+              <a:t>The argument: this was built by students at your stage, not by a lab with a</a:t>
+            </a:r>
+          </a:p>
+          <a:p>
+            <a:r>
+              <a:t>budget. The gap between "we should use touch" and "it moves when you touch it"</a:t>
+            </a:r>
+          </a:p>
+          <a:p>
+            <a:r>
+              <a:t>is smaller than it looks.</a:t>
             </a:r>
           </a:p>
           <a:p/>
           <a:p>
             <a:r>
-              <a:t>If someone asks to add a second actuator, say no. The constraint is the</a:t>
-            </a:r>
-          </a:p>
-          <a:p>
-            <a:r>
-              <a:t>exercise.</a:t>
+              <a:t>The moving screen has a browser control panel over the serial port, which is</a:t>
+            </a:r>
+          </a:p>
+          <a:p>
+            <a:r>
+              <a:t>what you will wish you had at the project demonstrations.</a:t>
+            </a:r>
+          </a:p>
+          <a:p/>
+          <a:p>
+            <a:r>
+              <a:t>Note for you: the sock repo has a hardcoded Wi-Fi password and live patient IDs</a:t>
+            </a:r>
+          </a:p>
+          <a:p>
+            <a:r>
+              <a:t>in it. Scrub before showing, or show only the calibration section.</a:t>
             </a:r>
           </a:p>
         </p:txBody>
@@ -2354,24 +2382,18 @@
           <a:lstStyle/>
           <a:p>
             <a:r>
-              <a:t>The line worth repeating twice.</a:t>
+              <a:t>1:35. The blind test.</a:t>
             </a:r>
           </a:p>
           <a:p/>
           <a:p>
             <a:r>
-              <a:t>Run the test: swap groups, receiver looks away, guess all three.</a:t>
-            </a:r>
-          </a:p>
-          <a:p/>
-          <a:p>
-            <a:r>
-              <a:t>Then have each group name which two got confused and what would have separated</a:t>
-            </a:r>
-          </a:p>
-          <a:p>
-            <a:r>
-              <a:t>them. That confusion is the actual learning, not the successful ones.</a:t>
+              <a:t>Most groups will already have something from task 05. This is where it gets</a:t>
+            </a:r>
+          </a:p>
+          <a:p>
+            <a:r>
+              <a:t>tested by someone who did not build it.</a:t>
             </a:r>
           </a:p>
         </p:txBody>
@@ -2441,23 +2463,39 @@
           <a:lstStyle/>
           <a:p>
             <a:r>
-              <a:t>Put this up while the blind tests are running so groups can check</a:t>
-            </a:r>
-          </a:p>
-          <a:p>
-            <a:r>
-              <a:t>themselves without asking you.</a:t>
+              <a:t>Read the brief out once, then get out of the way. Full wording, since the</a:t>
+            </a:r>
+          </a:p>
+          <a:p>
+            <a:r>
+              <a:t>slide is only the bones:</a:t>
             </a:r>
           </a:p>
           <a:p/>
           <a:p>
             <a:r>
-              <a:t>The second line matters most: a device that fires continuously when held is</a:t>
-            </a:r>
-          </a:p>
-          <a:p>
-            <a:r>
-              <a:t>the single most common bug, and it is a debounce problem.</a:t>
+              <a:t>"Pick one actuator. Encode three messages: arrived, something wrong, finished.</a:t>
+            </a:r>
+          </a:p>
+          <a:p>
+            <a:r>
+              <a:t>Vary only the rhythm of the pulses and how strong they are. Then hand it to</a:t>
+            </a:r>
+          </a:p>
+          <a:p>
+            <a:r>
+              <a:t>another group with the screen turned away and see if they can name all three."</a:t>
+            </a:r>
+          </a:p>
+          <a:p/>
+          <a:p>
+            <a:r>
+              <a:t>If someone asks to add a second actuator, say no. The constraint is the</a:t>
+            </a:r>
+          </a:p>
+          <a:p>
+            <a:r>
+              <a:t>exercise.</a:t>
             </a:r>
           </a:p>
         </p:txBody>
@@ -2624,23 +2662,24 @@
           <a:lstStyle/>
           <a:p>
             <a:r>
-              <a:t>The closing argument. Thirty seconds.</a:t>
+              <a:t>The line worth repeating twice.</a:t>
             </a:r>
           </a:p>
           <a:p/>
           <a:p>
             <a:r>
-              <a:t>If they leave with only one thing, it should be the third: pick the actuator</a:t>
-            </a:r>
-          </a:p>
-          <a:p>
-            <a:r>
-              <a:t>before designing the interaction. Discovering in week 46 that the chosen one</a:t>
-            </a:r>
-          </a:p>
-          <a:p>
-            <a:r>
-              <a:t>cannot do the job is the expensive mistake this session exists to prevent.</a:t>
+              <a:t>Run the test: swap groups, receiver looks away, guess all three.</a:t>
+            </a:r>
+          </a:p>
+          <a:p/>
+          <a:p>
+            <a:r>
+              <a:t>Then have each group name which two got confused and what would have separated</a:t>
+            </a:r>
+          </a:p>
+          <a:p>
+            <a:r>
+              <a:t>them. That confusion is the actual learning, not the successful ones.</a:t>
             </a:r>
           </a:p>
         </p:txBody>
@@ -2666,6 +2705,178 @@
 </file>
 
 <file path=ppt/notesSlides/notesSlide31.xml><?xml version="1.0" encoding="utf-8"?>
+<p:notes xmlns:a="http://schemas.openxmlformats.org/drawingml/2006/main" xmlns:p="http://schemas.openxmlformats.org/presentationml/2006/main" xmlns:r="http://schemas.openxmlformats.org/officeDocument/2006/relationships">
+  <p:cSld>
+    <p:spTree>
+      <p:nvGrpSpPr>
+        <p:cNvPr id="1" name=""/>
+        <p:cNvGrpSpPr/>
+        <p:nvPr/>
+      </p:nvGrpSpPr>
+      <p:grpSpPr>
+        <a:xfrm>
+          <a:off x="0" y="0"/>
+          <a:ext cx="0" cy="0"/>
+          <a:chOff x="0" y="0"/>
+          <a:chExt cx="0" cy="0"/>
+        </a:xfrm>
+      </p:grpSpPr>
+      <p:sp>
+        <p:nvSpPr>
+          <p:cNvPr id="2" name="Slide Image Placeholder 1"/>
+          <p:cNvSpPr>
+            <a:spLocks noGrp="1"/>
+          </p:cNvSpPr>
+          <p:nvPr>
+            <p:ph type="sldImg" idx="2"/>
+          </p:nvPr>
+        </p:nvSpPr>
+        <p:spPr/>
+      </p:sp>
+      <p:sp>
+        <p:nvSpPr>
+          <p:cNvPr id="3" name="Notes Placeholder 2"/>
+          <p:cNvSpPr>
+            <a:spLocks noGrp="1"/>
+          </p:cNvSpPr>
+          <p:nvPr>
+            <p:ph type="body" idx="3" sz="quarter"/>
+          </p:nvPr>
+        </p:nvSpPr>
+        <p:spPr/>
+        <p:txBody>
+          <a:bodyPr/>
+          <a:lstStyle/>
+          <a:p>
+            <a:r>
+              <a:t>Put this up while the blind tests are running so groups can check</a:t>
+            </a:r>
+          </a:p>
+          <a:p>
+            <a:r>
+              <a:t>themselves without asking you.</a:t>
+            </a:r>
+          </a:p>
+          <a:p/>
+          <a:p>
+            <a:r>
+              <a:t>The second line matters most: a device that fires continuously when held is</a:t>
+            </a:r>
+          </a:p>
+          <a:p>
+            <a:r>
+              <a:t>the single most common bug, and it is a debounce problem.</a:t>
+            </a:r>
+          </a:p>
+        </p:txBody>
+      </p:sp>
+      <p:sp>
+        <p:nvSpPr>
+          <p:cNvPr id="4" name="Slide Number Placeholder 3"/>
+          <p:cNvSpPr>
+            <a:spLocks noGrp="1"/>
+          </p:cNvSpPr>
+          <p:nvPr>
+            <p:ph type="sldNum" idx="5" sz="quarter"/>
+          </p:nvPr>
+        </p:nvSpPr>
+        <p:spPr/>
+      </p:sp>
+    </p:spTree>
+  </p:cSld>
+  <p:clrMapOvr>
+    <a:masterClrMapping/>
+  </p:clrMapOvr>
+</p:notes>
+</file>
+
+<file path=ppt/notesSlides/notesSlide32.xml><?xml version="1.0" encoding="utf-8"?>
+<p:notes xmlns:a="http://schemas.openxmlformats.org/drawingml/2006/main" xmlns:p="http://schemas.openxmlformats.org/presentationml/2006/main" xmlns:r="http://schemas.openxmlformats.org/officeDocument/2006/relationships">
+  <p:cSld>
+    <p:spTree>
+      <p:nvGrpSpPr>
+        <p:cNvPr id="1" name=""/>
+        <p:cNvGrpSpPr/>
+        <p:nvPr/>
+      </p:nvGrpSpPr>
+      <p:grpSpPr>
+        <a:xfrm>
+          <a:off x="0" y="0"/>
+          <a:ext cx="0" cy="0"/>
+          <a:chOff x="0" y="0"/>
+          <a:chExt cx="0" cy="0"/>
+        </a:xfrm>
+      </p:grpSpPr>
+      <p:sp>
+        <p:nvSpPr>
+          <p:cNvPr id="2" name="Slide Image Placeholder 1"/>
+          <p:cNvSpPr>
+            <a:spLocks noGrp="1"/>
+          </p:cNvSpPr>
+          <p:nvPr>
+            <p:ph type="sldImg" idx="2"/>
+          </p:nvPr>
+        </p:nvSpPr>
+        <p:spPr/>
+      </p:sp>
+      <p:sp>
+        <p:nvSpPr>
+          <p:cNvPr id="3" name="Notes Placeholder 2"/>
+          <p:cNvSpPr>
+            <a:spLocks noGrp="1"/>
+          </p:cNvSpPr>
+          <p:nvPr>
+            <p:ph type="body" idx="3" sz="quarter"/>
+          </p:nvPr>
+        </p:nvSpPr>
+        <p:spPr/>
+        <p:txBody>
+          <a:bodyPr/>
+          <a:lstStyle/>
+          <a:p>
+            <a:r>
+              <a:t>The closing argument. Thirty seconds.</a:t>
+            </a:r>
+          </a:p>
+          <a:p/>
+          <a:p>
+            <a:r>
+              <a:t>If they leave with only one thing, it should be the third: pick the actuator</a:t>
+            </a:r>
+          </a:p>
+          <a:p>
+            <a:r>
+              <a:t>before designing the interaction. Discovering in week 46 that the chosen one</a:t>
+            </a:r>
+          </a:p>
+          <a:p>
+            <a:r>
+              <a:t>cannot do the job is the expensive mistake this session exists to prevent.</a:t>
+            </a:r>
+          </a:p>
+        </p:txBody>
+      </p:sp>
+      <p:sp>
+        <p:nvSpPr>
+          <p:cNvPr id="4" name="Slide Number Placeholder 3"/>
+          <p:cNvSpPr>
+            <a:spLocks noGrp="1"/>
+          </p:cNvSpPr>
+          <p:nvPr>
+            <p:ph type="sldNum" idx="5" sz="quarter"/>
+          </p:nvPr>
+        </p:nvSpPr>
+        <p:spPr/>
+      </p:sp>
+    </p:spTree>
+  </p:cSld>
+  <p:clrMapOvr>
+    <a:masterClrMapping/>
+  </p:clrMapOvr>
+</p:notes>
+</file>
+
+<file path=ppt/notesSlides/notesSlide33.xml><?xml version="1.0" encoding="utf-8"?>
 <p:notes xmlns:a="http://schemas.openxmlformats.org/drawingml/2006/main" xmlns:p="http://schemas.openxmlformats.org/presentationml/2006/main" xmlns:r="http://schemas.openxmlformats.org/officeDocument/2006/relationships">
   <p:cSld>
     <p:spTree>
@@ -10189,7 +10400,7 @@
                 </a:solidFill>
                 <a:latin typeface="Arial"/>
               </a:rPr>
-              <a:t>TWO RIGS THAT ALREADY EXIST</a:t>
+              <a:t>THE SENSORS ALREADY IN THE ROOM</a:t>
             </a:r>
           </a:p>
         </p:txBody>
@@ -10225,7 +10436,7 @@
                 </a:solidFill>
                 <a:latin typeface="Arial"/>
               </a:rPr>
-              <a:t>Built here, by students at roughly your stage.</a:t>
+              <a:t>Every phone here is a multimodal device. Some of it the browser will hand you, some of it it will not.</a:t>
             </a:r>
           </a:p>
           <a:p>
@@ -10245,7 +10456,7 @@
                 </a:solidFill>
                 <a:latin typeface="Arial"/>
               </a:rPr>
-              <a:t>Moving screen, Arduino Uno</a:t>
+              <a:t>Works in a web page today</a:t>
             </a:r>
           </a:p>
           <a:p>
@@ -10265,7 +10476,7 @@
                 </a:solidFill>
                 <a:latin typeface="Arial"/>
               </a:rPr>
-              <a:t>• Breathes when idle. Retreats when touched</a:t>
+              <a:t>• Accelerometer and gyroscope. Tap to grant, HTTPS only</a:t>
             </a:r>
           </a:p>
           <a:p>
@@ -10285,7 +10496,7 @@
                 </a:solidFill>
                 <a:latin typeface="Arial"/>
               </a:rPr>
-              <a:t>• Easing and idle motion do the work. A dozen lines</a:t>
+              <a:t>• Microphone. Easiest continuous input there is</a:t>
             </a:r>
           </a:p>
           <a:p>
@@ -10294,6 +10505,46 @@
                 <a:spcPct val="128000"/>
               </a:lnSpc>
               <a:spcAft>
+                <a:spcPts val="600"/>
+              </a:spcAft>
+              <a:buNone/>
+            </a:pPr>
+            <a:r>
+              <a:rPr sz="1500" b="0">
+                <a:solidFill>
+                  <a:srgbClr val="000000"/>
+                </a:solidFill>
+                <a:latin typeface="Arial"/>
+              </a:rPr>
+              <a:t>• Camera. Even reads a pulse off a face, badly</a:t>
+            </a:r>
+          </a:p>
+          <a:p>
+            <a:pPr marL="0" indent="0" algn="l">
+              <a:lnSpc>
+                <a:spcPct val="128000"/>
+              </a:lnSpc>
+              <a:spcAft>
+                <a:spcPts val="600"/>
+              </a:spcAft>
+              <a:buNone/>
+            </a:pPr>
+            <a:r>
+              <a:rPr sz="1500" b="0">
+                <a:solidFill>
+                  <a:srgbClr val="000000"/>
+                </a:solidFill>
+                <a:latin typeface="Arial"/>
+              </a:rPr>
+              <a:t>• Trackpad pressure. Pointer Events carry a 0 to 1 force</a:t>
+            </a:r>
+          </a:p>
+          <a:p>
+            <a:pPr marL="0" indent="0" algn="l">
+              <a:lnSpc>
+                <a:spcPct val="128000"/>
+              </a:lnSpc>
+              <a:spcAft>
                 <a:spcPts val="0"/>
               </a:spcAft>
               <a:buNone/>
@@ -10316,7 +10567,7 @@
                 </a:solidFill>
                 <a:latin typeface="Arial"/>
               </a:rPr>
-              <a:t>Instrumented sock, ESP32</a:t>
+              <a:t>Does NOT work, whatever the tutorial says</a:t>
             </a:r>
           </a:p>
           <a:p>
@@ -10336,7 +10587,7 @@
                 </a:solidFill>
                 <a:latin typeface="Arial"/>
               </a:rPr>
-              <a:t>• Six force sensors under a foot, batched over Wi-Fi</a:t>
+              <a:t>• Phone vibration on iOS. WebKit has never shipped it</a:t>
             </a:r>
           </a:p>
           <a:p>
@@ -10356,7 +10607,7 @@
                 </a:solidFill>
                 <a:latin typeface="Arial"/>
               </a:rPr>
-              <a:t>• Calibrate per sensor. Batch your writes</a:t>
+              <a:t>• Apple Watch or Garmin, live. Both need a native app</a:t>
             </a:r>
           </a:p>
         </p:txBody>
@@ -10446,20 +10697,158 @@
               <a:buNone/>
             </a:pPr>
             <a:r>
-              <a:rPr sz="4400" b="1">
-                <a:solidFill>
-                  <a:srgbClr val="000000"/>
-                </a:solidFill>
-                <a:latin typeface="Arial"/>
-              </a:rPr>
-              <a:t>BUILD ONE SIGNAL</a:t>
+              <a:rPr sz="3200" b="1">
+                <a:solidFill>
+                  <a:srgbClr val="000000"/>
+                </a:solidFill>
+                <a:latin typeface="Arial"/>
+              </a:rPr>
+              <a:t>THE ONE TO CHECK BEFORE YOU PROMISE IT</a:t>
+            </a:r>
+          </a:p>
+        </p:txBody>
+      </p:sp>
+      <p:sp>
+        <p:nvSpPr>
+          <p:cNvPr id="3" name="Text Placeholder 2"/>
+          <p:cNvSpPr>
+            <a:spLocks noGrp="1"/>
+          </p:cNvSpPr>
+          <p:nvPr>
+            <p:ph type="body" idx="1"/>
+          </p:nvPr>
+        </p:nvSpPr>
+        <p:spPr/>
+        <p:txBody>
+          <a:bodyPr/>
+          <a:lstStyle/>
+          <a:p>
+            <a:pPr marL="0" indent="0" algn="l">
+              <a:lnSpc>
+                <a:spcPct val="128000"/>
+              </a:lnSpc>
+              <a:spcAft>
+                <a:spcPts val="1400"/>
+              </a:spcAft>
+              <a:buNone/>
+            </a:pPr>
+            <a:r>
+              <a:rPr sz="1700" b="0">
+                <a:solidFill>
+                  <a:srgbClr val="595959"/>
+                </a:solidFill>
+                <a:latin typeface="Arial"/>
+              </a:rPr>
+              <a:t>navigator.vibrate: Android yes, iOS no, at every version to date.</a:t>
+            </a:r>
+          </a:p>
+          <a:p>
+            <a:pPr marL="0" indent="0" algn="l">
+              <a:lnSpc>
+                <a:spcPct val="128000"/>
+              </a:lnSpc>
+              <a:spcAft>
+                <a:spcPts val="600"/>
+              </a:spcAft>
+              <a:buNone/>
+            </a:pPr>
+            <a:r>
+              <a:rPr sz="1700" b="0">
+                <a:solidFill>
+                  <a:srgbClr val="000000"/>
+                </a:solidFill>
+                <a:latin typeface="Arial"/>
+              </a:rPr>
+              <a:t>caniuse lists Safari 3.1 to 27 as unsupported.</a:t>
+            </a:r>
+          </a:p>
+          <a:p>
+            <a:pPr marL="0" indent="0" algn="l">
+              <a:lnSpc>
+                <a:spcPct val="128000"/>
+              </a:lnSpc>
+              <a:spcAft>
+                <a:spcPts val="600"/>
+              </a:spcAft>
+              <a:buNone/>
+            </a:pPr>
+            <a:r>
+              <a:rPr sz="1700" b="0">
+                <a:solidFill>
+                  <a:srgbClr val="000000"/>
+                </a:solidFill>
+                <a:latin typeface="Arial"/>
+              </a:rPr>
+              <a:t>Chrome and Firefox on iOS are Safari underneath, so they inherit the gap.</a:t>
+            </a:r>
+          </a:p>
+          <a:p>
+            <a:pPr marL="0" indent="0" algn="l">
+              <a:lnSpc>
+                <a:spcPct val="128000"/>
+              </a:lnSpc>
+              <a:spcAft>
+                <a:spcPts val="0"/>
+              </a:spcAft>
+              <a:buNone/>
+            </a:pPr>
+          </a:p>
+          <a:p>
+            <a:pPr marL="0" indent="0" algn="l">
+              <a:lnSpc>
+                <a:spcPct val="128000"/>
+              </a:lnSpc>
+              <a:spcAft>
+                <a:spcPts val="600"/>
+              </a:spcAft>
+              <a:buNone/>
+            </a:pPr>
+            <a:r>
+              <a:rPr sz="1700" b="1">
+                <a:solidFill>
+                  <a:srgbClr val="000000"/>
+                </a:solidFill>
+                <a:latin typeface="Arial"/>
+              </a:rPr>
+              <a:t>"The phone buzzes" therefore works on some of the room and no iPhones.</a:t>
+            </a:r>
+          </a:p>
+          <a:p>
+            <a:pPr marL="0" indent="0" algn="l">
+              <a:lnSpc>
+                <a:spcPct val="128000"/>
+              </a:lnSpc>
+              <a:spcAft>
+                <a:spcPts val="0"/>
+              </a:spcAft>
+              <a:buNone/>
+            </a:pPr>
+          </a:p>
+          <a:p>
+            <a:pPr marL="0" indent="0" algn="l">
+              <a:lnSpc>
+                <a:spcPct val="128000"/>
+              </a:lnSpc>
+              <a:spcAft>
+                <a:spcPts val="600"/>
+              </a:spcAft>
+              <a:buNone/>
+            </a:pPr>
+            <a:r>
+              <a:rPr sz="1700" b="0">
+                <a:solidFill>
+                  <a:srgbClr val="000000"/>
+                </a:solidFill>
+                <a:latin typeface="Arial"/>
+              </a:rPr>
+              <a:t>Check the feature, not the tutorial, before it is in your plan.</a:t>
             </a:r>
           </a:p>
         </p:txBody>
       </p:sp>
       <p:pic>
         <p:nvPicPr>
-          <p:cNvPr id="3" name="Picture 2" descr="wordmark_dark.png"/>
+          <p:cNvPr id="4" name="Picture 3" descr="wordmark_dark.png"/>
           <p:cNvPicPr>
             <a:picLocks noChangeAspect="1"/>
           </p:cNvPicPr>
@@ -10483,7 +10872,7 @@
       </p:pic>
       <p:pic>
         <p:nvPicPr>
-          <p:cNvPr id="4" name="Picture 3" descr="seal_dark.png"/>
+          <p:cNvPr id="5" name="Picture 4" descr="seal_dark.png"/>
           <p:cNvPicPr>
             <a:picLocks noChangeAspect="1"/>
           </p:cNvPicPr>
@@ -10548,7 +10937,7 @@
                 </a:solidFill>
                 <a:latin typeface="Arial"/>
               </a:rPr>
-              <a:t>THE BRIEF</a:t>
+              <a:t>TWO RIGS THAT ALREADY EXIST</a:t>
             </a:r>
           </a:p>
         </p:txBody>
@@ -10584,7 +10973,7 @@
                 </a:solidFill>
                 <a:latin typeface="Arial"/>
               </a:rPr>
-              <a:t>30 minutes. Not long enough to be precious about it.</a:t>
+              <a:t>Built here, by students at roughly your stage.</a:t>
             </a:r>
           </a:p>
           <a:p>
@@ -10604,7 +10993,7 @@
                 </a:solidFill>
                 <a:latin typeface="Arial"/>
               </a:rPr>
-              <a:t>One actuator. Three messages</a:t>
+              <a:t>Moving screen, Arduino Uno</a:t>
             </a:r>
           </a:p>
           <a:p>
@@ -10624,7 +11013,7 @@
                 </a:solidFill>
                 <a:latin typeface="Arial"/>
               </a:rPr>
-              <a:t>• Arrived. Something wrong. Finished</a:t>
+              <a:t>• Breathes when idle. Retreats when touched</a:t>
             </a:r>
           </a:p>
           <a:p>
@@ -10633,6 +11022,26 @@
                 <a:spcPct val="128000"/>
               </a:lnSpc>
               <a:spcAft>
+                <a:spcPts val="600"/>
+              </a:spcAft>
+              <a:buNone/>
+            </a:pPr>
+            <a:r>
+              <a:rPr sz="1500" b="0">
+                <a:solidFill>
+                  <a:srgbClr val="000000"/>
+                </a:solidFill>
+                <a:latin typeface="Arial"/>
+              </a:rPr>
+              <a:t>• Easing and idle motion do the work. A dozen lines</a:t>
+            </a:r>
+          </a:p>
+          <a:p>
+            <a:pPr marL="0" indent="0" algn="l">
+              <a:lnSpc>
+                <a:spcPct val="128000"/>
+              </a:lnSpc>
+              <a:spcAft>
                 <a:spcPts val="0"/>
               </a:spcAft>
               <a:buNone/>
@@ -10655,7 +11064,7 @@
                 </a:solidFill>
                 <a:latin typeface="Arial"/>
               </a:rPr>
-              <a:t>Vary two things only</a:t>
+              <a:t>Instrumented sock, ESP32</a:t>
             </a:r>
           </a:p>
           <a:p>
@@ -10675,7 +11084,7 @@
                 </a:solidFill>
                 <a:latin typeface="Arial"/>
               </a:rPr>
-              <a:t>• Rhythm of the pulses</a:t>
+              <a:t>• Six force sensors under a foot, batched over Wi-Fi</a:t>
             </a:r>
           </a:p>
           <a:p>
@@ -10695,58 +11104,7 @@
                 </a:solidFill>
                 <a:latin typeface="Arial"/>
               </a:rPr>
-              <a:t>• How strong they are</a:t>
-            </a:r>
-          </a:p>
-          <a:p>
-            <a:pPr marL="0" indent="0" algn="l">
-              <a:lnSpc>
-                <a:spcPct val="128000"/>
-              </a:lnSpc>
-              <a:spcAft>
-                <a:spcPts val="0"/>
-              </a:spcAft>
-              <a:buNone/>
-            </a:pPr>
-          </a:p>
-          <a:p>
-            <a:pPr marL="0" indent="0" algn="l">
-              <a:lnSpc>
-                <a:spcPct val="128000"/>
-              </a:lnSpc>
-              <a:spcAft>
-                <a:spcPts val="600"/>
-              </a:spcAft>
-              <a:buNone/>
-            </a:pPr>
-            <a:r>
-              <a:rPr sz="1700" b="1">
-                <a:solidFill>
-                  <a:srgbClr val="000000"/>
-                </a:solidFill>
-                <a:latin typeface="Arial"/>
-              </a:rPr>
-              <a:t>Blind test: they name all three</a:t>
-            </a:r>
-          </a:p>
-          <a:p>
-            <a:pPr marL="0" indent="0" algn="l">
-              <a:lnSpc>
-                <a:spcPct val="128000"/>
-              </a:lnSpc>
-              <a:spcAft>
-                <a:spcPts val="600"/>
-              </a:spcAft>
-              <a:buNone/>
-            </a:pPr>
-            <a:r>
-              <a:rPr sz="1500" b="0">
-                <a:solidFill>
-                  <a:srgbClr val="000000"/>
-                </a:solidFill>
-                <a:latin typeface="Arial"/>
-              </a:rPr>
-              <a:t>• Note which two got confused, and why</a:t>
+              <a:t>• Calibrate per sensor. Batch your writes</a:t>
             </a:r>
           </a:p>
         </p:txBody>
@@ -10836,107 +11194,20 @@
               <a:buNone/>
             </a:pPr>
             <a:r>
-              <a:rPr sz="3200" b="1">
-                <a:solidFill>
-                  <a:srgbClr val="000000"/>
-                </a:solidFill>
-                <a:latin typeface="Arial"/>
-              </a:rPr>
-              <a:t>THE CONSTRAINT THAT MATTERS</a:t>
-            </a:r>
-          </a:p>
-        </p:txBody>
-      </p:sp>
-      <p:sp>
-        <p:nvSpPr>
-          <p:cNvPr id="3" name="Text Placeholder 2"/>
-          <p:cNvSpPr>
-            <a:spLocks noGrp="1"/>
-          </p:cNvSpPr>
-          <p:nvPr>
-            <p:ph type="body" idx="1"/>
-          </p:nvPr>
-        </p:nvSpPr>
-        <p:spPr/>
-        <p:txBody>
-          <a:bodyPr/>
-          <a:lstStyle/>
-          <a:p>
-            <a:pPr marL="0" indent="0" algn="l">
-              <a:lnSpc>
-                <a:spcPct val="128000"/>
-              </a:lnSpc>
-              <a:spcAft>
-                <a:spcPts val="600"/>
-              </a:spcAft>
-              <a:buNone/>
-            </a:pPr>
-            <a:r>
-              <a:rPr sz="1700" b="1">
-                <a:solidFill>
-                  <a:srgbClr val="000000"/>
-                </a:solidFill>
-                <a:latin typeface="Arial"/>
-              </a:rPr>
-              <a:t>The recipient cannot look at the device.</a:t>
-            </a:r>
-          </a:p>
-          <a:p>
-            <a:pPr marL="0" indent="0" algn="l">
-              <a:lnSpc>
-                <a:spcPct val="128000"/>
-              </a:lnSpc>
-              <a:spcAft>
-                <a:spcPts val="0"/>
-              </a:spcAft>
-              <a:buNone/>
-            </a:pPr>
-          </a:p>
-          <a:p>
-            <a:pPr marL="0" indent="0" algn="l">
-              <a:lnSpc>
-                <a:spcPct val="128000"/>
-              </a:lnSpc>
-              <a:spcAft>
-                <a:spcPts val="600"/>
-              </a:spcAft>
-              <a:buNone/>
-            </a:pPr>
-            <a:r>
-              <a:rPr sz="1700" b="0">
-                <a:solidFill>
-                  <a:srgbClr val="000000"/>
-                </a:solidFill>
-                <a:latin typeface="Arial"/>
-              </a:rPr>
-              <a:t>If it only works while someone watches a screen,</a:t>
-            </a:r>
-          </a:p>
-          <a:p>
-            <a:pPr marL="0" indent="0" algn="l">
-              <a:lnSpc>
-                <a:spcPct val="128000"/>
-              </a:lnSpc>
-              <a:spcAft>
-                <a:spcPts val="600"/>
-              </a:spcAft>
-              <a:buNone/>
-            </a:pPr>
-            <a:r>
-              <a:rPr sz="1700" b="0">
-                <a:solidFill>
-                  <a:srgbClr val="000000"/>
-                </a:solidFill>
-                <a:latin typeface="Arial"/>
-              </a:rPr>
-              <a:t>you built a visual interface with a motor glued to it.</a:t>
+              <a:rPr sz="4400" b="1">
+                <a:solidFill>
+                  <a:srgbClr val="000000"/>
+                </a:solidFill>
+                <a:latin typeface="Arial"/>
+              </a:rPr>
+              <a:t>BUILD ONE SIGNAL</a:t>
             </a:r>
           </a:p>
         </p:txBody>
       </p:sp>
       <p:pic>
         <p:nvPicPr>
-          <p:cNvPr id="4" name="Picture 3" descr="wordmark_dark.png"/>
+          <p:cNvPr id="3" name="Picture 2" descr="wordmark_dark.png"/>
           <p:cNvPicPr>
             <a:picLocks noChangeAspect="1"/>
           </p:cNvPicPr>
@@ -10960,7 +11231,7 @@
       </p:pic>
       <p:pic>
         <p:nvPicPr>
-          <p:cNvPr id="5" name="Picture 4" descr="seal_dark.png"/>
+          <p:cNvPr id="4" name="Picture 3" descr="seal_dark.png"/>
           <p:cNvPicPr>
             <a:picLocks noChangeAspect="1"/>
           </p:cNvPicPr>
@@ -11025,7 +11296,7 @@
                 </a:solidFill>
                 <a:latin typeface="Arial"/>
               </a:rPr>
-              <a:t>TEST IT</a:t>
+              <a:t>THE BRIEF</a:t>
             </a:r>
           </a:p>
         </p:txBody>
@@ -11061,7 +11332,7 @@
                 </a:solidFill>
                 <a:latin typeface="Arial"/>
               </a:rPr>
-              <a:t>Hand your device to another group with the screen turned away.</a:t>
+              <a:t>30 minutes. Not long enough to be precious about it.</a:t>
             </a:r>
           </a:p>
           <a:p>
@@ -11075,13 +11346,33 @@
               <a:buNone/>
             </a:pPr>
             <a:r>
+              <a:rPr sz="1700" b="1">
+                <a:solidFill>
+                  <a:srgbClr val="000000"/>
+                </a:solidFill>
+                <a:latin typeface="Arial"/>
+              </a:rPr>
+              <a:t>One actuator. Three messages</a:t>
+            </a:r>
+          </a:p>
+          <a:p>
+            <a:pPr marL="0" indent="0" algn="l">
+              <a:lnSpc>
+                <a:spcPct val="128000"/>
+              </a:lnSpc>
+              <a:spcAft>
+                <a:spcPts val="600"/>
+              </a:spcAft>
+              <a:buNone/>
+            </a:pPr>
+            <a:r>
               <a:rPr sz="1500" b="0">
                 <a:solidFill>
                   <a:srgbClr val="000000"/>
                 </a:solidFill>
                 <a:latin typeface="Arial"/>
               </a:rPr>
-              <a:t>• They can tell all three messages apart.</a:t>
+              <a:t>• Arrived. Something wrong. Finished</a:t>
             </a:r>
           </a:p>
           <a:p>
@@ -11090,18 +11381,49 @@
                 <a:spcPct val="128000"/>
               </a:lnSpc>
               <a:spcAft>
+                <a:spcPts val="0"/>
+              </a:spcAft>
+              <a:buNone/>
+            </a:pPr>
+          </a:p>
+          <a:p>
+            <a:pPr marL="0" indent="0" algn="l">
+              <a:lnSpc>
+                <a:spcPct val="128000"/>
+              </a:lnSpc>
+              <a:spcAft>
                 <a:spcPts val="600"/>
               </a:spcAft>
               <a:buNone/>
             </a:pPr>
             <a:r>
+              <a:rPr sz="1700" b="1">
+                <a:solidFill>
+                  <a:srgbClr val="000000"/>
+                </a:solidFill>
+                <a:latin typeface="Arial"/>
+              </a:rPr>
+              <a:t>Vary two things only</a:t>
+            </a:r>
+          </a:p>
+          <a:p>
+            <a:pPr marL="0" indent="0" algn="l">
+              <a:lnSpc>
+                <a:spcPct val="128000"/>
+              </a:lnSpc>
+              <a:spcAft>
+                <a:spcPts val="600"/>
+              </a:spcAft>
+              <a:buNone/>
+            </a:pPr>
+            <a:r>
               <a:rPr sz="1500" b="0">
                 <a:solidFill>
                   <a:srgbClr val="000000"/>
                 </a:solidFill>
                 <a:latin typeface="Arial"/>
               </a:rPr>
-              <a:t>• It does not fire continuously when held.</a:t>
+              <a:t>• Rhythm of the pulses</a:t>
             </a:r>
           </a:p>
           <a:p>
@@ -11121,7 +11443,7 @@
                 </a:solidFill>
                 <a:latin typeface="Arial"/>
               </a:rPr>
-              <a:t>• You know which two got confused, and what would have separated them.</a:t>
+              <a:t>• How strong they are</a:t>
             </a:r>
           </a:p>
           <a:p>
@@ -11130,18 +11452,49 @@
                 <a:spcPct val="128000"/>
               </a:lnSpc>
               <a:spcAft>
+                <a:spcPts val="0"/>
+              </a:spcAft>
+              <a:buNone/>
+            </a:pPr>
+          </a:p>
+          <a:p>
+            <a:pPr marL="0" indent="0" algn="l">
+              <a:lnSpc>
+                <a:spcPct val="128000"/>
+              </a:lnSpc>
+              <a:spcAft>
                 <a:spcPts val="600"/>
               </a:spcAft>
               <a:buNone/>
             </a:pPr>
             <a:r>
+              <a:rPr sz="1700" b="1">
+                <a:solidFill>
+                  <a:srgbClr val="000000"/>
+                </a:solidFill>
+                <a:latin typeface="Arial"/>
+              </a:rPr>
+              <a:t>Blind test: they name all three</a:t>
+            </a:r>
+          </a:p>
+          <a:p>
+            <a:pPr marL="0" indent="0" algn="l">
+              <a:lnSpc>
+                <a:spcPct val="128000"/>
+              </a:lnSpc>
+              <a:spcAft>
+                <a:spcPts val="600"/>
+              </a:spcAft>
+              <a:buNone/>
+            </a:pPr>
+            <a:r>
               <a:rPr sz="1500" b="0">
                 <a:solidFill>
                   <a:srgbClr val="000000"/>
                 </a:solidFill>
                 <a:latin typeface="Arial"/>
               </a:rPr>
-              <a:t>• It still works when they are not looking at it.</a:t>
+              <a:t>• Note which two got confused, and why</a:t>
             </a:r>
           </a:p>
         </p:txBody>
@@ -11480,7 +11833,7 @@
                 </a:solidFill>
                 <a:latin typeface="Arial"/>
               </a:rPr>
-              <a:t>WHAT YOU ACTUALLY LEARN</a:t>
+              <a:t>THE CONSTRAINT THAT MATTERS</a:t>
             </a:r>
           </a:p>
         </p:txBody>
@@ -11505,18 +11858,49 @@
                 <a:spcPct val="128000"/>
               </a:lnSpc>
               <a:spcAft>
-                <a:spcPts val="1400"/>
+                <a:spcPts val="600"/>
+              </a:spcAft>
+              <a:buNone/>
+            </a:pPr>
+            <a:r>
+              <a:rPr sz="1700" b="1">
+                <a:solidFill>
+                  <a:srgbClr val="000000"/>
+                </a:solidFill>
+                <a:latin typeface="Arial"/>
+              </a:rPr>
+              <a:t>The recipient cannot look at the device.</a:t>
+            </a:r>
+          </a:p>
+          <a:p>
+            <a:pPr marL="0" indent="0" algn="l">
+              <a:lnSpc>
+                <a:spcPct val="128000"/>
+              </a:lnSpc>
+              <a:spcAft>
+                <a:spcPts val="0"/>
+              </a:spcAft>
+              <a:buNone/>
+            </a:pPr>
+          </a:p>
+          <a:p>
+            <a:pPr marL="0" indent="0" algn="l">
+              <a:lnSpc>
+                <a:spcPct val="128000"/>
+              </a:lnSpc>
+              <a:spcAft>
+                <a:spcPts val="600"/>
               </a:spcAft>
               <a:buNone/>
             </a:pPr>
             <a:r>
               <a:rPr sz="1700" b="0">
                 <a:solidFill>
-                  <a:srgbClr val="595959"/>
-                </a:solidFill>
-                <a:latin typeface="Arial"/>
-              </a:rPr>
-              <a:t>Three things you cannot get from a datasheet.</a:t>
+                  <a:srgbClr val="000000"/>
+                </a:solidFill>
+                <a:latin typeface="Arial"/>
+              </a:rPr>
+              <a:t>If it only works while someone watches a screen,</a:t>
             </a:r>
           </a:p>
           <a:p>
@@ -11530,135 +11914,13 @@
               <a:buNone/>
             </a:pPr>
             <a:r>
-              <a:rPr sz="1700" b="1">
-                <a:solidFill>
-                  <a:srgbClr val="000000"/>
-                </a:solidFill>
-                <a:latin typeface="Arial"/>
-              </a:rPr>
-              <a:t>What things feel like</a:t>
-            </a:r>
-          </a:p>
-          <a:p>
-            <a:pPr marL="0" indent="0" algn="l">
-              <a:lnSpc>
-                <a:spcPct val="128000"/>
-              </a:lnSpc>
-              <a:spcAft>
-                <a:spcPts val="600"/>
-              </a:spcAft>
-              <a:buNone/>
-            </a:pPr>
-            <a:r>
-              <a:rPr sz="1500" b="0">
-                <a:solidFill>
-                  <a:srgbClr val="000000"/>
-                </a:solidFill>
-                <a:latin typeface="Arial"/>
-              </a:rPr>
-              <a:t>• A motor is a nudge. A solenoid is a knock. A Peltier is slow.</a:t>
-            </a:r>
-          </a:p>
-          <a:p>
-            <a:pPr marL="0" indent="0" algn="l">
-              <a:lnSpc>
-                <a:spcPct val="128000"/>
-              </a:lnSpc>
-              <a:spcAft>
-                <a:spcPts val="0"/>
-              </a:spcAft>
-              <a:buNone/>
-            </a:pPr>
-          </a:p>
-          <a:p>
-            <a:pPr marL="0" indent="0" algn="l">
-              <a:lnSpc>
-                <a:spcPct val="128000"/>
-              </a:lnSpc>
-              <a:spcAft>
-                <a:spcPts val="600"/>
-              </a:spcAft>
-              <a:buNone/>
-            </a:pPr>
-            <a:r>
-              <a:rPr sz="1700" b="1">
-                <a:solidFill>
-                  <a:srgbClr val="000000"/>
-                </a:solidFill>
-                <a:latin typeface="Arial"/>
-              </a:rPr>
-              <a:t>How to drive one</a:t>
-            </a:r>
-          </a:p>
-          <a:p>
-            <a:pPr marL="0" indent="0" algn="l">
-              <a:lnSpc>
-                <a:spcPct val="128000"/>
-              </a:lnSpc>
-              <a:spcAft>
-                <a:spcPts val="600"/>
-              </a:spcAft>
-              <a:buNone/>
-            </a:pPr>
-            <a:r>
-              <a:rPr sz="1500" b="0">
-                <a:solidFill>
-                  <a:srgbClr val="000000"/>
-                </a:solidFill>
-                <a:latin typeface="Arial"/>
-              </a:rPr>
-              <a:t>• PWM, direction, debouncing, and why a motor never goes straight to a pin.</a:t>
-            </a:r>
-          </a:p>
-          <a:p>
-            <a:pPr marL="0" indent="0" algn="l">
-              <a:lnSpc>
-                <a:spcPct val="128000"/>
-              </a:lnSpc>
-              <a:spcAft>
-                <a:spcPts val="0"/>
-              </a:spcAft>
-              <a:buNone/>
-            </a:pPr>
-          </a:p>
-          <a:p>
-            <a:pPr marL="0" indent="0" algn="l">
-              <a:lnSpc>
-                <a:spcPct val="128000"/>
-              </a:lnSpc>
-              <a:spcAft>
-                <a:spcPts val="600"/>
-              </a:spcAft>
-              <a:buNone/>
-            </a:pPr>
-            <a:r>
-              <a:rPr sz="1700" b="1">
-                <a:solidFill>
-                  <a:srgbClr val="000000"/>
-                </a:solidFill>
-                <a:latin typeface="Arial"/>
-              </a:rPr>
-              <a:t>What to pick</a:t>
-            </a:r>
-          </a:p>
-          <a:p>
-            <a:pPr marL="0" indent="0" algn="l">
-              <a:lnSpc>
-                <a:spcPct val="128000"/>
-              </a:lnSpc>
-              <a:spcAft>
-                <a:spcPts val="600"/>
-              </a:spcAft>
-              <a:buNone/>
-            </a:pPr>
-            <a:r>
-              <a:rPr sz="1500" b="0">
-                <a:solidFill>
-                  <a:srgbClr val="000000"/>
-                </a:solidFill>
-                <a:latin typeface="Arial"/>
-              </a:rPr>
-              <a:t>• Choosing the actuator before designing the interaction, not in week 46.</a:t>
+              <a:rPr sz="1700" b="0">
+                <a:solidFill>
+                  <a:srgbClr val="000000"/>
+                </a:solidFill>
+                <a:latin typeface="Arial"/>
+              </a:rPr>
+              <a:t>you built a visual interface with a motor glued to it.</a:t>
             </a:r>
           </a:p>
         </p:txBody>
@@ -11736,6 +11998,492 @@
             <a:spLocks noGrp="1"/>
           </p:cNvSpPr>
           <p:nvPr>
+            <p:ph type="title"/>
+          </p:nvPr>
+        </p:nvSpPr>
+        <p:spPr/>
+        <p:txBody>
+          <a:bodyPr/>
+          <a:lstStyle/>
+          <a:p>
+            <a:pPr marL="0" indent="0" algn="l">
+              <a:buNone/>
+            </a:pPr>
+            <a:r>
+              <a:rPr sz="3200" b="1">
+                <a:solidFill>
+                  <a:srgbClr val="000000"/>
+                </a:solidFill>
+                <a:latin typeface="Arial"/>
+              </a:rPr>
+              <a:t>TEST IT</a:t>
+            </a:r>
+          </a:p>
+        </p:txBody>
+      </p:sp>
+      <p:sp>
+        <p:nvSpPr>
+          <p:cNvPr id="3" name="Text Placeholder 2"/>
+          <p:cNvSpPr>
+            <a:spLocks noGrp="1"/>
+          </p:cNvSpPr>
+          <p:nvPr>
+            <p:ph type="body" idx="1"/>
+          </p:nvPr>
+        </p:nvSpPr>
+        <p:spPr/>
+        <p:txBody>
+          <a:bodyPr/>
+          <a:lstStyle/>
+          <a:p>
+            <a:pPr marL="0" indent="0" algn="l">
+              <a:lnSpc>
+                <a:spcPct val="128000"/>
+              </a:lnSpc>
+              <a:spcAft>
+                <a:spcPts val="1400"/>
+              </a:spcAft>
+              <a:buNone/>
+            </a:pPr>
+            <a:r>
+              <a:rPr sz="1700" b="0">
+                <a:solidFill>
+                  <a:srgbClr val="595959"/>
+                </a:solidFill>
+                <a:latin typeface="Arial"/>
+              </a:rPr>
+              <a:t>Hand your device to another group with the screen turned away.</a:t>
+            </a:r>
+          </a:p>
+          <a:p>
+            <a:pPr marL="0" indent="0" algn="l">
+              <a:lnSpc>
+                <a:spcPct val="128000"/>
+              </a:lnSpc>
+              <a:spcAft>
+                <a:spcPts val="600"/>
+              </a:spcAft>
+              <a:buNone/>
+            </a:pPr>
+            <a:r>
+              <a:rPr sz="1500" b="0">
+                <a:solidFill>
+                  <a:srgbClr val="000000"/>
+                </a:solidFill>
+                <a:latin typeface="Arial"/>
+              </a:rPr>
+              <a:t>• They can tell all three messages apart.</a:t>
+            </a:r>
+          </a:p>
+          <a:p>
+            <a:pPr marL="0" indent="0" algn="l">
+              <a:lnSpc>
+                <a:spcPct val="128000"/>
+              </a:lnSpc>
+              <a:spcAft>
+                <a:spcPts val="600"/>
+              </a:spcAft>
+              <a:buNone/>
+            </a:pPr>
+            <a:r>
+              <a:rPr sz="1500" b="0">
+                <a:solidFill>
+                  <a:srgbClr val="000000"/>
+                </a:solidFill>
+                <a:latin typeface="Arial"/>
+              </a:rPr>
+              <a:t>• It does not fire continuously when held.</a:t>
+            </a:r>
+          </a:p>
+          <a:p>
+            <a:pPr marL="0" indent="0" algn="l">
+              <a:lnSpc>
+                <a:spcPct val="128000"/>
+              </a:lnSpc>
+              <a:spcAft>
+                <a:spcPts val="600"/>
+              </a:spcAft>
+              <a:buNone/>
+            </a:pPr>
+            <a:r>
+              <a:rPr sz="1500" b="0">
+                <a:solidFill>
+                  <a:srgbClr val="000000"/>
+                </a:solidFill>
+                <a:latin typeface="Arial"/>
+              </a:rPr>
+              <a:t>• You know which two got confused, and what would have separated them.</a:t>
+            </a:r>
+          </a:p>
+          <a:p>
+            <a:pPr marL="0" indent="0" algn="l">
+              <a:lnSpc>
+                <a:spcPct val="128000"/>
+              </a:lnSpc>
+              <a:spcAft>
+                <a:spcPts val="600"/>
+              </a:spcAft>
+              <a:buNone/>
+            </a:pPr>
+            <a:r>
+              <a:rPr sz="1500" b="0">
+                <a:solidFill>
+                  <a:srgbClr val="000000"/>
+                </a:solidFill>
+                <a:latin typeface="Arial"/>
+              </a:rPr>
+              <a:t>• It still works when they are not looking at it.</a:t>
+            </a:r>
+          </a:p>
+        </p:txBody>
+      </p:sp>
+      <p:pic>
+        <p:nvPicPr>
+          <p:cNvPr id="4" name="Picture 3" descr="wordmark_dark.png"/>
+          <p:cNvPicPr>
+            <a:picLocks noChangeAspect="1"/>
+          </p:cNvPicPr>
+          <p:nvPr/>
+        </p:nvPicPr>
+        <p:blipFill>
+          <a:blip r:embed="rId2"/>
+          <a:stretch>
+            <a:fillRect/>
+          </a:stretch>
+        </p:blipFill>
+        <p:spPr>
+          <a:xfrm>
+            <a:off x="342900" y="6184900"/>
+            <a:ext cx="2070100" cy="529560"/>
+          </a:xfrm>
+          <a:prstGeom prst="rect">
+            <a:avLst/>
+          </a:prstGeom>
+        </p:spPr>
+      </p:pic>
+      <p:pic>
+        <p:nvPicPr>
+          <p:cNvPr id="5" name="Picture 4" descr="seal_dark.png"/>
+          <p:cNvPicPr>
+            <a:picLocks noChangeAspect="1"/>
+          </p:cNvPicPr>
+          <p:nvPr/>
+        </p:nvPicPr>
+        <p:blipFill>
+          <a:blip r:embed="rId3"/>
+          <a:stretch>
+            <a:fillRect/>
+          </a:stretch>
+        </p:blipFill>
+        <p:spPr>
+          <a:xfrm>
+            <a:off x="11226800" y="5969000"/>
+            <a:ext cx="713915" cy="711200"/>
+          </a:xfrm>
+          <a:prstGeom prst="rect">
+            <a:avLst/>
+          </a:prstGeom>
+        </p:spPr>
+      </p:pic>
+    </p:spTree>
+  </p:cSld>
+  <p:clrMapOvr>
+    <a:masterClrMapping/>
+  </p:clrMapOvr>
+</p:sld>
+</file>
+
+<file path=ppt/slides/slide32.xml><?xml version="1.0" encoding="utf-8"?>
+<p:sld xmlns:a="http://schemas.openxmlformats.org/drawingml/2006/main" xmlns:p="http://schemas.openxmlformats.org/presentationml/2006/main" xmlns:r="http://schemas.openxmlformats.org/officeDocument/2006/relationships">
+  <p:cSld>
+    <p:spTree>
+      <p:nvGrpSpPr>
+        <p:cNvPr id="1" name=""/>
+        <p:cNvGrpSpPr/>
+        <p:nvPr/>
+      </p:nvGrpSpPr>
+      <p:grpSpPr/>
+      <p:sp>
+        <p:nvSpPr>
+          <p:cNvPr id="2" name="Title 1"/>
+          <p:cNvSpPr>
+            <a:spLocks noGrp="1"/>
+          </p:cNvSpPr>
+          <p:nvPr>
+            <p:ph type="title"/>
+          </p:nvPr>
+        </p:nvSpPr>
+        <p:spPr/>
+        <p:txBody>
+          <a:bodyPr/>
+          <a:lstStyle/>
+          <a:p>
+            <a:pPr marL="0" indent="0" algn="l">
+              <a:buNone/>
+            </a:pPr>
+            <a:r>
+              <a:rPr sz="3200" b="1">
+                <a:solidFill>
+                  <a:srgbClr val="000000"/>
+                </a:solidFill>
+                <a:latin typeface="Arial"/>
+              </a:rPr>
+              <a:t>WHAT YOU ACTUALLY LEARN</a:t>
+            </a:r>
+          </a:p>
+        </p:txBody>
+      </p:sp>
+      <p:sp>
+        <p:nvSpPr>
+          <p:cNvPr id="3" name="Text Placeholder 2"/>
+          <p:cNvSpPr>
+            <a:spLocks noGrp="1"/>
+          </p:cNvSpPr>
+          <p:nvPr>
+            <p:ph type="body" idx="1"/>
+          </p:nvPr>
+        </p:nvSpPr>
+        <p:spPr/>
+        <p:txBody>
+          <a:bodyPr/>
+          <a:lstStyle/>
+          <a:p>
+            <a:pPr marL="0" indent="0" algn="l">
+              <a:lnSpc>
+                <a:spcPct val="128000"/>
+              </a:lnSpc>
+              <a:spcAft>
+                <a:spcPts val="1400"/>
+              </a:spcAft>
+              <a:buNone/>
+            </a:pPr>
+            <a:r>
+              <a:rPr sz="1700" b="0">
+                <a:solidFill>
+                  <a:srgbClr val="595959"/>
+                </a:solidFill>
+                <a:latin typeface="Arial"/>
+              </a:rPr>
+              <a:t>Three things you cannot get from a datasheet.</a:t>
+            </a:r>
+          </a:p>
+          <a:p>
+            <a:pPr marL="0" indent="0" algn="l">
+              <a:lnSpc>
+                <a:spcPct val="128000"/>
+              </a:lnSpc>
+              <a:spcAft>
+                <a:spcPts val="600"/>
+              </a:spcAft>
+              <a:buNone/>
+            </a:pPr>
+            <a:r>
+              <a:rPr sz="1700" b="1">
+                <a:solidFill>
+                  <a:srgbClr val="000000"/>
+                </a:solidFill>
+                <a:latin typeface="Arial"/>
+              </a:rPr>
+              <a:t>What things feel like</a:t>
+            </a:r>
+          </a:p>
+          <a:p>
+            <a:pPr marL="0" indent="0" algn="l">
+              <a:lnSpc>
+                <a:spcPct val="128000"/>
+              </a:lnSpc>
+              <a:spcAft>
+                <a:spcPts val="600"/>
+              </a:spcAft>
+              <a:buNone/>
+            </a:pPr>
+            <a:r>
+              <a:rPr sz="1500" b="0">
+                <a:solidFill>
+                  <a:srgbClr val="000000"/>
+                </a:solidFill>
+                <a:latin typeface="Arial"/>
+              </a:rPr>
+              <a:t>• A motor is a nudge. A solenoid is a knock. A Peltier is slow.</a:t>
+            </a:r>
+          </a:p>
+          <a:p>
+            <a:pPr marL="0" indent="0" algn="l">
+              <a:lnSpc>
+                <a:spcPct val="128000"/>
+              </a:lnSpc>
+              <a:spcAft>
+                <a:spcPts val="0"/>
+              </a:spcAft>
+              <a:buNone/>
+            </a:pPr>
+          </a:p>
+          <a:p>
+            <a:pPr marL="0" indent="0" algn="l">
+              <a:lnSpc>
+                <a:spcPct val="128000"/>
+              </a:lnSpc>
+              <a:spcAft>
+                <a:spcPts val="600"/>
+              </a:spcAft>
+              <a:buNone/>
+            </a:pPr>
+            <a:r>
+              <a:rPr sz="1700" b="1">
+                <a:solidFill>
+                  <a:srgbClr val="000000"/>
+                </a:solidFill>
+                <a:latin typeface="Arial"/>
+              </a:rPr>
+              <a:t>How to drive one</a:t>
+            </a:r>
+          </a:p>
+          <a:p>
+            <a:pPr marL="0" indent="0" algn="l">
+              <a:lnSpc>
+                <a:spcPct val="128000"/>
+              </a:lnSpc>
+              <a:spcAft>
+                <a:spcPts val="600"/>
+              </a:spcAft>
+              <a:buNone/>
+            </a:pPr>
+            <a:r>
+              <a:rPr sz="1500" b="0">
+                <a:solidFill>
+                  <a:srgbClr val="000000"/>
+                </a:solidFill>
+                <a:latin typeface="Arial"/>
+              </a:rPr>
+              <a:t>• PWM, direction, debouncing, and why a motor never goes straight to a pin.</a:t>
+            </a:r>
+          </a:p>
+          <a:p>
+            <a:pPr marL="0" indent="0" algn="l">
+              <a:lnSpc>
+                <a:spcPct val="128000"/>
+              </a:lnSpc>
+              <a:spcAft>
+                <a:spcPts val="0"/>
+              </a:spcAft>
+              <a:buNone/>
+            </a:pPr>
+          </a:p>
+          <a:p>
+            <a:pPr marL="0" indent="0" algn="l">
+              <a:lnSpc>
+                <a:spcPct val="128000"/>
+              </a:lnSpc>
+              <a:spcAft>
+                <a:spcPts val="600"/>
+              </a:spcAft>
+              <a:buNone/>
+            </a:pPr>
+            <a:r>
+              <a:rPr sz="1700" b="1">
+                <a:solidFill>
+                  <a:srgbClr val="000000"/>
+                </a:solidFill>
+                <a:latin typeface="Arial"/>
+              </a:rPr>
+              <a:t>What to pick</a:t>
+            </a:r>
+          </a:p>
+          <a:p>
+            <a:pPr marL="0" indent="0" algn="l">
+              <a:lnSpc>
+                <a:spcPct val="128000"/>
+              </a:lnSpc>
+              <a:spcAft>
+                <a:spcPts val="600"/>
+              </a:spcAft>
+              <a:buNone/>
+            </a:pPr>
+            <a:r>
+              <a:rPr sz="1500" b="0">
+                <a:solidFill>
+                  <a:srgbClr val="000000"/>
+                </a:solidFill>
+                <a:latin typeface="Arial"/>
+              </a:rPr>
+              <a:t>• Choosing the actuator before designing the interaction, not in week 46.</a:t>
+            </a:r>
+          </a:p>
+        </p:txBody>
+      </p:sp>
+      <p:pic>
+        <p:nvPicPr>
+          <p:cNvPr id="4" name="Picture 3" descr="wordmark_dark.png"/>
+          <p:cNvPicPr>
+            <a:picLocks noChangeAspect="1"/>
+          </p:cNvPicPr>
+          <p:nvPr/>
+        </p:nvPicPr>
+        <p:blipFill>
+          <a:blip r:embed="rId2"/>
+          <a:stretch>
+            <a:fillRect/>
+          </a:stretch>
+        </p:blipFill>
+        <p:spPr>
+          <a:xfrm>
+            <a:off x="342900" y="6184900"/>
+            <a:ext cx="2070100" cy="529560"/>
+          </a:xfrm>
+          <a:prstGeom prst="rect">
+            <a:avLst/>
+          </a:prstGeom>
+        </p:spPr>
+      </p:pic>
+      <p:pic>
+        <p:nvPicPr>
+          <p:cNvPr id="5" name="Picture 4" descr="seal_dark.png"/>
+          <p:cNvPicPr>
+            <a:picLocks noChangeAspect="1"/>
+          </p:cNvPicPr>
+          <p:nvPr/>
+        </p:nvPicPr>
+        <p:blipFill>
+          <a:blip r:embed="rId3"/>
+          <a:stretch>
+            <a:fillRect/>
+          </a:stretch>
+        </p:blipFill>
+        <p:spPr>
+          <a:xfrm>
+            <a:off x="11226800" y="5969000"/>
+            <a:ext cx="713915" cy="711200"/>
+          </a:xfrm>
+          <a:prstGeom prst="rect">
+            <a:avLst/>
+          </a:prstGeom>
+        </p:spPr>
+      </p:pic>
+    </p:spTree>
+  </p:cSld>
+  <p:clrMapOvr>
+    <a:masterClrMapping/>
+  </p:clrMapOvr>
+</p:sld>
+</file>
+
+<file path=ppt/slides/slide33.xml><?xml version="1.0" encoding="utf-8"?>
+<p:sld xmlns:a="http://schemas.openxmlformats.org/drawingml/2006/main" xmlns:p="http://schemas.openxmlformats.org/presentationml/2006/main" xmlns:r="http://schemas.openxmlformats.org/officeDocument/2006/relationships">
+  <p:cSld>
+    <p:spTree>
+      <p:nvGrpSpPr>
+        <p:cNvPr id="1" name=""/>
+        <p:cNvGrpSpPr/>
+        <p:nvPr/>
+      </p:nvGrpSpPr>
+      <p:grpSpPr/>
+      <p:sp>
+        <p:nvSpPr>
+          <p:cNvPr id="2" name="Title 1"/>
+          <p:cNvSpPr>
+            <a:spLocks noGrp="1"/>
+          </p:cNvSpPr>
+          <p:nvPr>
             <p:ph type="ctrTitle"/>
           </p:nvPr>
         </p:nvSpPr>
@@ -12647,6 +13395,26 @@
                 <a:spcPct val="128000"/>
               </a:lnSpc>
               <a:spcAft>
+                <a:spcPts val="600"/>
+              </a:spcAft>
+              <a:buNone/>
+            </a:pPr>
+            <a:r>
+              <a:rPr sz="1700" b="1">
+                <a:solidFill>
+                  <a:srgbClr val="000000"/>
+                </a:solidFill>
+                <a:latin typeface="Arial"/>
+              </a:rPr>
+              <a:t>06   Use what you have          your own phone</a:t>
+            </a:r>
+          </a:p>
+          <a:p>
+            <a:pPr marL="0" indent="0" algn="l">
+              <a:lnSpc>
+                <a:spcPct val="128000"/>
+              </a:lnSpc>
+              <a:spcAft>
                 <a:spcPts val="0"/>
               </a:spcAft>
               <a:buNone/>
@@ -12669,7 +13437,7 @@
                 </a:solidFill>
                 <a:latin typeface="Arial"/>
               </a:rPr>
-              <a:t>1 to 3 are output. 4 is input. 5 is both.</a:t>
+              <a:t>1 to 3 are output. 4 is input. 5 is both. 6 needs no board.</a:t>
             </a:r>
           </a:p>
           <a:p>

--- a/docs/multimodal-actuator-workshop.pptx
+++ b/docs/multimodal-actuator-workshop.pptx
@@ -12532,7 +12532,7 @@
                 </a:solidFill>
                 <a:latin typeface="Arial"/>
               </a:rPr>
-              <a:t>github.com/gust1527/multimodal-actuator-workshop</a:t>
+              <a:t>github.com/labtools-au/multimodal-actuator-workshop</a:t>
             </a:r>
           </a:p>
         </p:txBody>
@@ -13731,7 +13731,7 @@
                 </a:solidFill>
                 <a:latin typeface="Arial"/>
               </a:rPr>
-              <a:t>github.com/gust1527/multimodal-actuator-workshop</a:t>
+              <a:t>github.com/labtools-au/multimodal-actuator-workshop</a:t>
             </a:r>
           </a:p>
         </p:txBody>

--- a/docs/multimodal-actuator-workshop.pptx
+++ b/docs/multimodal-actuator-workshop.pptx
@@ -10456,6 +10456,37 @@
                 </a:solidFill>
                 <a:latin typeface="Arial"/>
               </a:rPr>
+              <a:t>Open sensors.chomskylab.dk on your phone right now</a:t>
+            </a:r>
+          </a:p>
+          <a:p>
+            <a:pPr marL="0" indent="0" algn="l">
+              <a:lnSpc>
+                <a:spcPct val="128000"/>
+              </a:lnSpc>
+              <a:spcAft>
+                <a:spcPts val="0"/>
+              </a:spcAft>
+              <a:buNone/>
+            </a:pPr>
+          </a:p>
+          <a:p>
+            <a:pPr marL="0" indent="0" algn="l">
+              <a:lnSpc>
+                <a:spcPct val="128000"/>
+              </a:lnSpc>
+              <a:spcAft>
+                <a:spcPts val="600"/>
+              </a:spcAft>
+              <a:buNone/>
+            </a:pPr>
+            <a:r>
+              <a:rPr sz="1700" b="1">
+                <a:solidFill>
+                  <a:srgbClr val="000000"/>
+                </a:solidFill>
+                <a:latin typeface="Arial"/>
+              </a:rPr>
               <a:t>Works in a web page today</a:t>
             </a:r>
           </a:p>
@@ -13406,7 +13437,7 @@
                 </a:solidFill>
                 <a:latin typeface="Arial"/>
               </a:rPr>
-              <a:t>06   Use what you have          your own phone</a:t>
+              <a:t>06   Use what you have          sensors.chomskylab.dk</a:t>
             </a:r>
           </a:p>
           <a:p>

--- a/docs/multimodal-actuator-workshop.pptx
+++ b/docs/multimodal-actuator-workshop.pptx
@@ -38,6 +38,9 @@
     <p:sldId id="286" r:id="rId37"/>
     <p:sldId id="287" r:id="rId38"/>
     <p:sldId id="288" r:id="rId39"/>
+    <p:sldId id="289" r:id="rId40"/>
+    <p:sldId id="290" r:id="rId41"/>
+    <p:sldId id="291" r:id="rId42"/>
   </p:sldIdLst>
   <p:sldSz cx="12188952" cy="6858000" type="screen4x3"/>
   <p:notesSz cx="6858000" cy="9144000"/>
@@ -631,28 +634,39 @@
           <a:lstStyle/>
           <a:p>
             <a:r>
-              <a:t>Two minutes total for this whole run of slides. It is a menu, not a</a:t>
-            </a:r>
-          </a:p>
-          <a:p>
-            <a:r>
-              <a:t>lecture: they are choosing what to go and pick up later.</a:t>
+              <a:t>Hand this out before anything else, or you will spend the session</a:t>
+            </a:r>
+          </a:p>
+          <a:p>
+            <a:r>
+              <a:t>fetching parts one at a time.</a:t>
             </a:r>
           </a:p>
           <a:p/>
           <a:p>
             <a:r>
-              <a:t>Hold up the real part as you show each one. The photo is a reminder for people</a:t>
-            </a:r>
-          </a:p>
-          <a:p>
-            <a:r>
-              <a:t>reading the deck afterwards; the object in your hand is what lands in the</a:t>
-            </a:r>
-          </a:p>
-          <a:p>
-            <a:r>
-              <a:t>room.</a:t>
+              <a:t>One set per pair. The three drawer numbers are the ones people actually come</a:t>
+            </a:r>
+          </a:p>
+          <a:p>
+            <a:r>
+              <a:t>back and ask for: 8A breadboard supply, 2C H-bridge, 11F amplifier.</a:t>
+            </a:r>
+          </a:p>
+          <a:p/>
+          <a:p>
+            <a:r>
+              <a:t>Jumper wires, breadboards and resistors are not tracked in the component</a:t>
+            </a:r>
+          </a:p>
+          <a:p>
+            <a:r>
+              <a:t>database, so make sure there are enough on the tables before students</a:t>
+            </a:r>
+          </a:p>
+          <a:p>
+            <a:r>
+              <a:t>arrive.</a:t>
             </a:r>
           </a:p>
         </p:txBody>
@@ -722,18 +736,28 @@
           <a:lstStyle/>
           <a:p>
             <a:r>
-              <a:t>The one everybody already owns without knowing it. Every phone has one.</a:t>
+              <a:t>Two minutes total for this whole run of slides. It is a menu, not a</a:t>
+            </a:r>
+          </a:p>
+          <a:p>
+            <a:r>
+              <a:t>lecture: they are choosing what to go and pick up later.</a:t>
             </a:r>
           </a:p>
           <a:p/>
           <a:p>
             <a:r>
-              <a:t>The point worth making: speed and strength are welded together. That single</a:t>
-            </a:r>
-          </a:p>
-          <a:p>
-            <a:r>
-              <a:t>constraint is why the other five exist.</a:t>
+              <a:t>Hold up the real part as you show each one. The photo is a reminder for people</a:t>
+            </a:r>
+          </a:p>
+          <a:p>
+            <a:r>
+              <a:t>reading the deck afterwards; the object in your hand is what lands in the</a:t>
+            </a:r>
+          </a:p>
+          <a:p>
+            <a:r>
+              <a:t>room.</a:t>
             </a:r>
           </a:p>
         </p:txBody>
@@ -803,23 +827,18 @@
           <a:lstStyle/>
           <a:p>
             <a:r>
-              <a:t>The escape from the coin motor's compromise. A crystal that flexes when</a:t>
-            </a:r>
-          </a:p>
-          <a:p>
-            <a:r>
-              <a:t>you put current across it: near-instant, almost no power, but shallow.</a:t>
+              <a:t>The one everybody already owns without knowing it. Every phone has one.</a:t>
             </a:r>
           </a:p>
           <a:p/>
           <a:p>
             <a:r>
-              <a:t>A tick, not a thump. Point anyone here who needs something to feel responsive</a:t>
-            </a:r>
-          </a:p>
-          <a:p>
-            <a:r>
-              <a:t>rather than just present. 69 in the drawer, so nobody has to share.</a:t>
+              <a:t>The point worth making: speed and strength are welded together. That single</a:t>
+            </a:r>
+          </a:p>
+          <a:p>
+            <a:r>
+              <a:t>constraint is why the other five exist.</a:t>
             </a:r>
           </a:p>
         </p:txBody>
@@ -889,23 +908,23 @@
           <a:lstStyle/>
           <a:p>
             <a:r>
-              <a:t>Pass this one around if you can. It is the one people remember, because a</a:t>
-            </a:r>
-          </a:p>
-          <a:p>
-            <a:r>
-              <a:t>knock reads as a person rather than a machine.</a:t>
+              <a:t>The escape from the coin motor's compromise. A crystal that flexes when</a:t>
+            </a:r>
+          </a:p>
+          <a:p>
+            <a:r>
+              <a:t>you put current across it: near-instant, almost no power, but shallow.</a:t>
             </a:r>
           </a:p>
           <a:p/>
           <a:p>
             <a:r>
-              <a:t>Warn them now that it needs its own supply, so it does not come as a surprise</a:t>
-            </a:r>
-          </a:p>
-          <a:p>
-            <a:r>
-              <a:t>at task 02.</a:t>
+              <a:t>A tick, not a thump. Point anyone here who needs something to feel responsive</a:t>
+            </a:r>
+          </a:p>
+          <a:p>
+            <a:r>
+              <a:t>rather than just present. 69 in the drawer, so nobody has to share.</a:t>
             </a:r>
           </a:p>
         </p:txBody>
@@ -975,18 +994,23 @@
           <a:lstStyle/>
           <a:p>
             <a:r>
-              <a:t>Hold up a wire and a piece of foil. That is genuinely the whole sensor.</a:t>
+              <a:t>Pass this one around if you can. It is the one people remember, because a</a:t>
+            </a:r>
+          </a:p>
+          <a:p>
+            <a:r>
+              <a:t>knock reads as a person rather than a machine.</a:t>
             </a:r>
           </a:p>
           <a:p/>
           <a:p>
             <a:r>
-              <a:t>This is the slide that changes what people think is possible, because it costs</a:t>
-            </a:r>
-          </a:p>
-          <a:p>
-            <a:r>
-              <a:t>nothing and hides completely inside a prototype.</a:t>
+              <a:t>Warn them now that it needs its own supply, so it does not come as a surprise</a:t>
+            </a:r>
+          </a:p>
+          <a:p>
+            <a:r>
+              <a:t>at task 02.</a:t>
             </a:r>
           </a:p>
         </p:txBody>
@@ -1056,23 +1080,18 @@
           <a:lstStyle/>
           <a:p>
             <a:r>
-              <a:t>Say the honest limitation out loud: it is slow, and hot alternating with</a:t>
-            </a:r>
-          </a:p>
-          <a:p>
-            <a:r>
-              <a:t>cold just reads as lukewarm.</a:t>
+              <a:t>Hold up a wire and a piece of foil. That is genuinely the whole sensor.</a:t>
             </a:r>
           </a:p>
           <a:p/>
           <a:p>
             <a:r>
-              <a:t>Good for slow ambient state. Wrong for alerts. Saying so here saves a project</a:t>
-            </a:r>
-          </a:p>
-          <a:p>
-            <a:r>
-              <a:t>from finding out in week 46.</a:t>
+              <a:t>This is the slide that changes what people think is possible, because it costs</a:t>
+            </a:r>
+          </a:p>
+          <a:p>
+            <a:r>
+              <a:t>nothing and hides completely inside a prototype.</a:t>
             </a:r>
           </a:p>
         </p:txBody>
@@ -1142,23 +1161,23 @@
           <a:lstStyle/>
           <a:p>
             <a:r>
-              <a:t>The redundancy argument. Same driver, one frequency you feel and one you</a:t>
-            </a:r>
-          </a:p>
-          <a:p>
-            <a:r>
-              <a:t>hear.</a:t>
+              <a:t>Say the honest limitation out loud: it is slow, and hot alternating with</a:t>
+            </a:r>
+          </a:p>
+          <a:p>
+            <a:r>
+              <a:t>cold just reads as lukewarm.</a:t>
             </a:r>
           </a:p>
           <a:p/>
           <a:p>
             <a:r>
-              <a:t>Together is not louder, it is more certain. Cheapest reliability a project can</a:t>
-            </a:r>
-          </a:p>
-          <a:p>
-            <a:r>
-              <a:t>buy, and it is also the accessibility answer.</a:t>
+              <a:t>Good for slow ambient state. Wrong for alerts. Saying so here saves a project</a:t>
+            </a:r>
+          </a:p>
+          <a:p>
+            <a:r>
+              <a:t>from finding out in week 46.</a:t>
             </a:r>
           </a:p>
         </p:txBody>
@@ -1228,18 +1247,23 @@
           <a:lstStyle/>
           <a:p>
             <a:r>
-              <a:t>Worth showing even though it is not in a task. Most projects that need</a:t>
-            </a:r>
-          </a:p>
-          <a:p>
-            <a:r>
-              <a:t>something to physically move end up here rather than on a vibration motor.</a:t>
+              <a:t>The redundancy argument. Same driver, one frequency you feel and one you</a:t>
+            </a:r>
+          </a:p>
+          <a:p>
+            <a:r>
+              <a:t>hear.</a:t>
             </a:r>
           </a:p>
           <a:p/>
           <a:p>
             <a:r>
-              <a:t>80 in stock, so nobody has to share.</a:t>
+              <a:t>Together is not louder, it is more certain. Cheapest reliability a project can</a:t>
+            </a:r>
+          </a:p>
+          <a:p>
+            <a:r>
+              <a:t>buy, and it is also the accessibility answer.</a:t>
             </a:r>
           </a:p>
         </p:txBody>
@@ -1309,18 +1333,18 @@
           <a:lstStyle/>
           <a:p>
             <a:r>
-              <a:t>The precision option. Moves in known steps, so you can position it</a:t>
-            </a:r>
-          </a:p>
-          <a:p>
-            <a:r>
-              <a:t>without any feedback sensor at all.</a:t>
+              <a:t>Worth showing even though it is not in a task. Most projects that need</a:t>
+            </a:r>
+          </a:p>
+          <a:p>
+            <a:r>
+              <a:t>something to physically move end up here rather than on a vibration motor.</a:t>
             </a:r>
           </a:p>
           <a:p/>
           <a:p>
             <a:r>
-              <a:t>Needs a ULN2003 driver board, drawer 2A, 27 of them.</a:t>
+              <a:t>80 in stock, so nobody has to share.</a:t>
             </a:r>
           </a:p>
         </p:txBody>
@@ -1390,18 +1414,18 @@
           <a:lstStyle/>
           <a:p>
             <a:r>
-              <a:t>The one people forget exists. It grabs and lets go, with nothing moving.</a:t>
+              <a:t>The precision option. Moves in known steps, so you can position it</a:t>
+            </a:r>
+          </a:p>
+          <a:p>
+            <a:r>
+              <a:t>without any feedback sensor at all.</a:t>
             </a:r>
           </a:p>
           <a:p/>
           <a:p>
             <a:r>
-              <a:t>Good answer for anything that should hold and then release: a latch, a door, a</a:t>
-            </a:r>
-          </a:p>
-          <a:p>
-            <a:r>
-              <a:t>thing that falls when the event happens.</a:t>
+              <a:t>Needs a ULN2003 driver board, drawer 2A, 27 of them.</a:t>
             </a:r>
           </a:p>
         </p:txBody>
@@ -1552,23 +1576,18 @@
           <a:lstStyle/>
           <a:p>
             <a:r>
-              <a:t>Say this out loud, do not just show it. Some students will not believe</a:t>
-            </a:r>
-          </a:p>
-          <a:p>
-            <a:r>
-              <a:t>they are allowed to skip ahead or stop early unless you tell them.</a:t>
+              <a:t>The one people forget exists. It grabs and lets go, with nothing moving.</a:t>
             </a:r>
           </a:p>
           <a:p/>
           <a:p>
             <a:r>
-              <a:t>The failure mode is a pair rushing all five tasks badly instead of doing two</a:t>
-            </a:r>
-          </a:p>
-          <a:p>
-            <a:r>
-              <a:t>properly. Name that explicitly.</a:t>
+              <a:t>Good answer for anything that should hold and then release: a latch, a door, a</a:t>
+            </a:r>
+          </a:p>
+          <a:p>
+            <a:r>
+              <a:t>thing that falls when the event happens.</a:t>
             </a:r>
           </a:p>
         </p:txBody>
@@ -1638,50 +1657,23 @@
           <a:lstStyle/>
           <a:p>
             <a:r>
-              <a:t>The only slide where you should sound firm.</a:t>
+              <a:t>Say this out loud, do not just show it. Some students will not believe</a:t>
+            </a:r>
+          </a:p>
+          <a:p>
+            <a:r>
+              <a:t>they are allowed to skip ahead or stop early unless you tell them.</a:t>
             </a:r>
           </a:p>
           <a:p/>
           <a:p>
             <a:r>
-              <a:t>Three real hazards:</a:t>
-            </a:r>
-          </a:p>
-          <a:p>
-            <a:r>
-              <a:t>  * solenoid and Peltier on their own supply, not USB</a:t>
-            </a:r>
-          </a:p>
-          <a:p>
-            <a:r>
-              <a:t>  * Peltier heatsink on before it is switched on, no exceptions</a:t>
-            </a:r>
-          </a:p>
-          <a:p>
-            <a:r>
-              <a:t>  * no motor straight from a pin</a:t>
-            </a:r>
-          </a:p>
-          <a:p/>
-          <a:p>
-            <a:r>
-              <a:t>Say the numbers: a pin gives 40 mA, the motor wants about 75. It is not a rule</a:t>
-            </a:r>
-          </a:p>
-          <a:p>
-            <a:r>
-              <a:t>they have to take on faith.</a:t>
-            </a:r>
-          </a:p>
-          <a:p/>
-          <a:p>
-            <a:r>
-              <a:t>Also mention that a board resetting when the solenoid fires is a POWER problem,</a:t>
-            </a:r>
-          </a:p>
-          <a:p>
-            <a:r>
-              <a:t>not a code bug. It will save someone twenty minutes.</a:t>
+              <a:t>The failure mode is a pair rushing all five tasks badly instead of doing two</a:t>
+            </a:r>
+          </a:p>
+          <a:p>
+            <a:r>
+              <a:t>properly. Name that explicitly.</a:t>
             </a:r>
           </a:p>
         </p:txBody>
@@ -1751,72 +1743,50 @@
           <a:lstStyle/>
           <a:p>
             <a:r>
-              <a:t>Slow down here. This is the single idea most worth stealing from today, and</a:t>
-            </a:r>
-          </a:p>
-          <a:p>
-            <a:r>
-              <a:t>it is worth interrupting the room for once most people have reached task 04.</a:t>
+              <a:t>The only slide where you should sound firm.</a:t>
             </a:r>
           </a:p>
           <a:p/>
           <a:p>
             <a:r>
-              <a:t>Two things students get wrong:</a:t>
+              <a:t>Three real hazards:</a:t>
+            </a:r>
+          </a:p>
+          <a:p>
+            <a:r>
+              <a:t>  * solenoid and Peltier on their own supply, not USB</a:t>
+            </a:r>
+          </a:p>
+          <a:p>
+            <a:r>
+              <a:t>  * Peltier heatsink on before it is switched on, no exceptions</a:t>
+            </a:r>
+          </a:p>
+          <a:p>
+            <a:r>
+              <a:t>  * no motor straight from a pin</a:t>
             </a:r>
           </a:p>
           <a:p/>
           <a:p>
             <a:r>
-              <a:t>1. A fixed threshold. Works in the morning, fails after lunch, because the</a:t>
-            </a:r>
-          </a:p>
-          <a:p>
-            <a:r>
-              <a:t>   reading drifts with humidity and mains hum.</a:t>
+              <a:t>Say the numbers: a pin gives 40 mA, the motor wants about 75. It is not a rule</a:t>
+            </a:r>
+          </a:p>
+          <a:p>
+            <a:r>
+              <a:t>they have to take on faith.</a:t>
             </a:r>
           </a:p>
           <a:p/>
           <a:p>
             <a:r>
-              <a:t>2. Feeding the baseline buffer always. A long press then teaches the baseline</a:t>
-            </a:r>
-          </a:p>
-          <a:p>
-            <a:r>
-              <a:t>   that a finger is normal, and the touch silently stops working. The buffer</a:t>
-            </a:r>
-          </a:p>
-          <a:p>
-            <a:r>
-              <a:t>   must only learn while untouched.</a:t>
-            </a:r>
-          </a:p>
-          <a:p/>
-          <a:p>
-            <a:r>
-              <a:t>Put the Serial Plotter on the projector. Watching the baseline wander while the</a:t>
-            </a:r>
-          </a:p>
-          <a:p>
-            <a:r>
-              <a:t>trigger line tracks it explains the whole design in ten seconds.</a:t>
-            </a:r>
-          </a:p>
-          <a:p/>
-          <a:p>
-            <a:r>
-              <a:t>For what it is worth, the rig this came from went through the same tuning: an</a:t>
-            </a:r>
-          </a:p>
-          <a:p>
-            <a:r>
-              <a:t>earlier version used 1.008 with a 50-sample baseline, the final one 1.01 with</a:t>
-            </a:r>
-          </a:p>
-          <a:p>
-            <a:r>
-              <a:t>25. Everyone tunes these.</a:t>
+              <a:t>Also mention that a board resetting when the solenoid fires is a POWER problem,</a:t>
+            </a:r>
+          </a:p>
+          <a:p>
+            <a:r>
+              <a:t>not a code bug. It will save someone twenty minutes.</a:t>
             </a:r>
           </a:p>
         </p:txBody>
@@ -1886,24 +1856,72 @@
           <a:lstStyle/>
           <a:p>
             <a:r>
-              <a:t>1:25. Pull the room back together.</a:t>
+              <a:t>Slow down here. This is the single idea most worth stealing from today, and</a:t>
+            </a:r>
+          </a:p>
+          <a:p>
+            <a:r>
+              <a:t>it is worth interrupting the room for once most people have reached task 04.</a:t>
             </a:r>
           </a:p>
           <a:p/>
           <a:p>
             <a:r>
-              <a:t>One sentence per group: what surprised you. No slides, no laptops. Ten minutes.</a:t>
+              <a:t>Two things students get wrong:</a:t>
             </a:r>
           </a:p>
           <a:p/>
           <a:p>
             <a:r>
-              <a:t>Expect someone to report the Peltier delay. Let that land, it is far more</a:t>
-            </a:r>
-          </a:p>
-          <a:p>
-            <a:r>
-              <a:t>persuasive from a peer than from you.</a:t>
+              <a:t>1. A fixed threshold. Works in the morning, fails after lunch, because the</a:t>
+            </a:r>
+          </a:p>
+          <a:p>
+            <a:r>
+              <a:t>   reading drifts with humidity and mains hum.</a:t>
+            </a:r>
+          </a:p>
+          <a:p/>
+          <a:p>
+            <a:r>
+              <a:t>2. Feeding the baseline buffer always. A long press then teaches the baseline</a:t>
+            </a:r>
+          </a:p>
+          <a:p>
+            <a:r>
+              <a:t>   that a finger is normal, and the touch silently stops working. The buffer</a:t>
+            </a:r>
+          </a:p>
+          <a:p>
+            <a:r>
+              <a:t>   must only learn while untouched.</a:t>
+            </a:r>
+          </a:p>
+          <a:p/>
+          <a:p>
+            <a:r>
+              <a:t>Put the Serial Plotter on the projector. Watching the baseline wander while the</a:t>
+            </a:r>
+          </a:p>
+          <a:p>
+            <a:r>
+              <a:t>trigger line tracks it explains the whole design in ten seconds.</a:t>
+            </a:r>
+          </a:p>
+          <a:p/>
+          <a:p>
+            <a:r>
+              <a:t>For what it is worth, the rig this came from went through the same tuning: an</a:t>
+            </a:r>
+          </a:p>
+          <a:p>
+            <a:r>
+              <a:t>earlier version used 1.008 with a 50-sample baseline, the final one 1.01 with</a:t>
+            </a:r>
+          </a:p>
+          <a:p>
+            <a:r>
+              <a:t>25. Everyone tunes these.</a:t>
             </a:r>
           </a:p>
         </p:txBody>
@@ -1973,29 +1991,24 @@
           <a:lstStyle/>
           <a:p>
             <a:r>
-              <a:t>Mention, do not teach. These sit on one table with a sign.</a:t>
+              <a:t>1:25. Pull the room back together.</a:t>
             </a:r>
           </a:p>
           <a:p/>
           <a:p>
             <a:r>
-              <a:t>The honest warnings matter more than the specs: PPG is useless once the hand</a:t>
-            </a:r>
-          </a:p>
-          <a:p>
-            <a:r>
-              <a:t>moves, GSR drifts so only relative change works, FSRs need per-pad calibration.</a:t>
+              <a:t>One sentence per group: what surprised you. No slides, no laptops. Ten minutes.</a:t>
             </a:r>
           </a:p>
           <a:p/>
           <a:p>
             <a:r>
-              <a:t>Push the phone option hard. For a lot of projects it beats everything else on</a:t>
-            </a:r>
-          </a:p>
-          <a:p>
-            <a:r>
-              <a:t>the table and needs no soldering at all.</a:t>
+              <a:t>Expect someone to report the Peltier delay. Let that land, it is far more</a:t>
+            </a:r>
+          </a:p>
+          <a:p>
+            <a:r>
+              <a:t>persuasive from a peer than from you.</a:t>
             </a:r>
           </a:p>
         </p:txBody>
@@ -2065,44 +2078,29 @@
           <a:lstStyle/>
           <a:p>
             <a:r>
-              <a:t>Worth five minutes, because it reframes what a prototype can be. Half</a:t>
-            </a:r>
-          </a:p>
-          <a:p>
-            <a:r>
-              <a:t>the room assumes multimodal means buying hardware.</a:t>
+              <a:t>Mention, do not teach. These sit on one table with a sign.</a:t>
             </a:r>
           </a:p>
           <a:p/>
           <a:p>
             <a:r>
-              <a:t>Have them open the page on their own phones while you talk. The split between</a:t>
-            </a:r>
-          </a:p>
-          <a:p>
-            <a:r>
-              <a:t>what works and what does not lands much harder when it is their device.</a:t>
+              <a:t>The honest warnings matter more than the specs: PPG is useless once the hand</a:t>
+            </a:r>
+          </a:p>
+          <a:p>
+            <a:r>
+              <a:t>moves, GSR drifts so only relative change works, FSRs need per-pad calibration.</a:t>
             </a:r>
           </a:p>
           <a:p/>
           <a:p>
             <a:r>
-              <a:t>The watch line matters for project planning: several groups every year propose</a:t>
-            </a:r>
-          </a:p>
-          <a:p>
-            <a:r>
-              <a:t>live Apple Watch or Garmin data, and neither streams to a web page. Both need a</a:t>
-            </a:r>
-          </a:p>
-          <a:p>
-            <a:r>
-              <a:t>native companion app. Fine for after-the-fact analysis, not for anything</a:t>
-            </a:r>
-          </a:p>
-          <a:p>
-            <a:r>
-              <a:t>reacting in real time inside the project weeks.</a:t>
+              <a:t>Push the phone option hard. For a lot of projects it beats everything else on</a:t>
+            </a:r>
+          </a:p>
+          <a:p>
+            <a:r>
+              <a:t>the table and needs no soldering at all.</a:t>
             </a:r>
           </a:p>
         </p:txBody>
@@ -2172,39 +2170,34 @@
           <a:lstStyle/>
           <a:p>
             <a:r>
-              <a:t>The single most useful fact on the slide, and the one people get wrong</a:t>
-            </a:r>
-          </a:p>
-          <a:p>
-            <a:r>
-              <a:t>because a blog post said otherwise.</a:t>
+              <a:t>The slide that earns the room's attention, so do not rush it.</a:t>
             </a:r>
           </a:p>
           <a:p/>
           <a:p>
             <a:r>
-              <a:t>Say it plainly: iPhones do not vibrate from a web page. Not with a polyfill,</a:t>
-            </a:r>
-          </a:p>
-          <a:p>
-            <a:r>
-              <a:t>not with a library, not in Chrome for iOS, which is Safari underneath.</a:t>
+              <a:t>This audience can write the code already, and they know it. Saying so out loud</a:t>
+            </a:r>
+          </a:p>
+          <a:p>
+            <a:r>
+              <a:t>buys credibility for the rest. The argument is not "you need to learn to</a:t>
+            </a:r>
+          </a:p>
+          <a:p>
+            <a:r>
+              <a:t>program a motor", it is "you cannot Google what something feels like".</a:t>
             </a:r>
           </a:p>
           <a:p/>
           <a:p>
             <a:r>
-              <a:t>The general lesson is bigger than vibration: check the feature on caniuse</a:t>
-            </a:r>
-          </a:p>
-          <a:p>
-            <a:r>
-              <a:t>before it goes in a project plan, not after. Two minutes now against a</a:t>
-            </a:r>
-          </a:p>
-          <a:p>
-            <a:r>
-              <a:t>rewrite in week 46.</a:t>
+              <a:t>The second point is practical and lands with everyone: the parts are free and</a:t>
+            </a:r>
+          </a:p>
+          <a:p>
+            <a:r>
+              <a:t>already in the building.</a:t>
             </a:r>
           </a:p>
         </p:txBody>
@@ -2274,45 +2267,66 @@
           <a:lstStyle/>
           <a:p>
             <a:r>
-              <a:t>Five minutes, and put the actual repos on screen if you can.</a:t>
+              <a:t>The slide the tinkerers will care most about, and the one where being</a:t>
+            </a:r>
+          </a:p>
+          <a:p>
+            <a:r>
+              <a:t>precise matters, because the internet is full of wrong answers.</a:t>
             </a:r>
           </a:p>
           <a:p/>
           <a:p>
             <a:r>
-              <a:t>The argument: this was built by students at your stage, not by a lab with a</a:t>
-            </a:r>
-          </a:p>
-          <a:p>
-            <a:r>
-              <a:t>budget. The gap between "we should use touch" and "it moves when you touch it"</a:t>
-            </a:r>
-          </a:p>
-          <a:p>
-            <a:r>
-              <a:t>is smaller than it looks.</a:t>
+              <a:t>The useful surprise: most Garmin watches broadcast heart rate over BLE</a:t>
+            </a:r>
+          </a:p>
+          <a:p>
+            <a:r>
+              <a:t>natively. Turn on Broadcast Heart Rate, or start a Virtual Run, and the watch</a:t>
+            </a:r>
+          </a:p>
+          <a:p>
+            <a:r>
+              <a:t>appears as an ordinary heart rate strap that Web Bluetooth can read from a web</a:t>
+            </a:r>
+          </a:p>
+          <a:p>
+            <a:r>
+              <a:t>page. No Connect IQ app, no SDK, no API key.</a:t>
             </a:r>
           </a:p>
           <a:p/>
           <a:p>
             <a:r>
-              <a:t>The moving screen has a browser control panel over the serial port, which is</a:t>
-            </a:r>
-          </a:p>
-          <a:p>
-            <a:r>
-              <a:t>what you will wish you had at the project demonstrations.</a:t>
+              <a:t>Apple Watch will not. HealthKit needs a companion watchOS app in Swift, so</a:t>
+            </a:r>
+          </a:p>
+          <a:p>
+            <a:r>
+              <a:t>third-party apps that re-broadcast over BLE are the practical route.</a:t>
             </a:r>
           </a:p>
           <a:p/>
           <a:p>
             <a:r>
-              <a:t>Note for you: the sock repo has a hardcoded Wi-Fi password and live patient IDs</a:t>
-            </a:r>
-          </a:p>
-          <a:p>
-            <a:r>
-              <a:t>in it. Scrub before showing, or show only the calibration section.</a:t>
+              <a:t>Web Bluetooth is Chrome and Edge only. Not Safari, not Firefox. Same lesson as</a:t>
+            </a:r>
+          </a:p>
+          <a:p>
+            <a:r>
+              <a:t>vibration: check the feature before it goes in a plan.</a:t>
+            </a:r>
+          </a:p>
+          <a:p/>
+          <a:p>
+            <a:r>
+              <a:t>Good project prompt if anyone wants one: a page that pairs with a strap and</a:t>
+            </a:r>
+          </a:p>
+          <a:p>
+            <a:r>
+              <a:t>drives an actuator from a live pulse. That is an afternoon.</a:t>
             </a:r>
           </a:p>
         </p:txBody>
@@ -2382,18 +2396,44 @@
           <a:lstStyle/>
           <a:p>
             <a:r>
-              <a:t>1:35. The blind test.</a:t>
+              <a:t>Worth five minutes, because it reframes what a prototype can be. Half</a:t>
+            </a:r>
+          </a:p>
+          <a:p>
+            <a:r>
+              <a:t>the room assumes multimodal means buying hardware.</a:t>
             </a:r>
           </a:p>
           <a:p/>
           <a:p>
             <a:r>
-              <a:t>Most groups will already have something from task 05. This is where it gets</a:t>
-            </a:r>
-          </a:p>
-          <a:p>
-            <a:r>
-              <a:t>tested by someone who did not build it.</a:t>
+              <a:t>Have them open the page on their own phones while you talk. The split between</a:t>
+            </a:r>
+          </a:p>
+          <a:p>
+            <a:r>
+              <a:t>what works and what does not lands much harder when it is their device.</a:t>
+            </a:r>
+          </a:p>
+          <a:p/>
+          <a:p>
+            <a:r>
+              <a:t>The watch line matters for project planning: several groups every year propose</a:t>
+            </a:r>
+          </a:p>
+          <a:p>
+            <a:r>
+              <a:t>live Apple Watch or Garmin data, and neither streams to a web page. Both need a</a:t>
+            </a:r>
+          </a:p>
+          <a:p>
+            <a:r>
+              <a:t>native companion app. Fine for after-the-fact analysis, not for anything</a:t>
+            </a:r>
+          </a:p>
+          <a:p>
+            <a:r>
+              <a:t>reacting in real time inside the project weeks.</a:t>
             </a:r>
           </a:p>
         </p:txBody>
@@ -2463,39 +2503,39 @@
           <a:lstStyle/>
           <a:p>
             <a:r>
-              <a:t>Read the brief out once, then get out of the way. Full wording, since the</a:t>
-            </a:r>
-          </a:p>
-          <a:p>
-            <a:r>
-              <a:t>slide is only the bones:</a:t>
+              <a:t>The single most useful fact on the slide, and the one people get wrong</a:t>
+            </a:r>
+          </a:p>
+          <a:p>
+            <a:r>
+              <a:t>because a blog post said otherwise.</a:t>
             </a:r>
           </a:p>
           <a:p/>
           <a:p>
             <a:r>
-              <a:t>"Pick one actuator. Encode three messages: arrived, something wrong, finished.</a:t>
-            </a:r>
-          </a:p>
-          <a:p>
-            <a:r>
-              <a:t>Vary only the rhythm of the pulses and how strong they are. Then hand it to</a:t>
-            </a:r>
-          </a:p>
-          <a:p>
-            <a:r>
-              <a:t>another group with the screen turned away and see if they can name all three."</a:t>
+              <a:t>Say it plainly: iPhones do not vibrate from a web page. Not with a polyfill,</a:t>
+            </a:r>
+          </a:p>
+          <a:p>
+            <a:r>
+              <a:t>not with a library, not in Chrome for iOS, which is Safari underneath.</a:t>
             </a:r>
           </a:p>
           <a:p/>
           <a:p>
             <a:r>
-              <a:t>If someone asks to add a second actuator, say no. The constraint is the</a:t>
-            </a:r>
-          </a:p>
-          <a:p>
-            <a:r>
-              <a:t>exercise.</a:t>
+              <a:t>The general lesson is bigger than vibration: check the feature on caniuse</a:t>
+            </a:r>
+          </a:p>
+          <a:p>
+            <a:r>
+              <a:t>before it goes in a project plan, not after. Two minutes now against a</a:t>
+            </a:r>
+          </a:p>
+          <a:p>
+            <a:r>
+              <a:t>rewrite in week 46.</a:t>
             </a:r>
           </a:p>
         </p:txBody>
@@ -2662,24 +2702,45 @@
           <a:lstStyle/>
           <a:p>
             <a:r>
-              <a:t>The line worth repeating twice.</a:t>
+              <a:t>Five minutes, and put the actual repos on screen if you can.</a:t>
             </a:r>
           </a:p>
           <a:p/>
           <a:p>
             <a:r>
-              <a:t>Run the test: swap groups, receiver looks away, guess all three.</a:t>
+              <a:t>The argument: this was built by students at your stage, not by a lab with a</a:t>
+            </a:r>
+          </a:p>
+          <a:p>
+            <a:r>
+              <a:t>budget. The gap between "we should use touch" and "it moves when you touch it"</a:t>
+            </a:r>
+          </a:p>
+          <a:p>
+            <a:r>
+              <a:t>is smaller than it looks.</a:t>
             </a:r>
           </a:p>
           <a:p/>
           <a:p>
             <a:r>
-              <a:t>Then have each group name which two got confused and what would have separated</a:t>
-            </a:r>
-          </a:p>
-          <a:p>
-            <a:r>
-              <a:t>them. That confusion is the actual learning, not the successful ones.</a:t>
+              <a:t>The moving screen has a browser control panel over the serial port, which is</a:t>
+            </a:r>
+          </a:p>
+          <a:p>
+            <a:r>
+              <a:t>what you will wish you had at the project demonstrations.</a:t>
+            </a:r>
+          </a:p>
+          <a:p/>
+          <a:p>
+            <a:r>
+              <a:t>Note for you: the sock repo has a hardcoded Wi-Fi password and live patient IDs</a:t>
+            </a:r>
+          </a:p>
+          <a:p>
+            <a:r>
+              <a:t>in it. Scrub before showing, or show only the calibration section.</a:t>
             </a:r>
           </a:p>
         </p:txBody>
@@ -2749,23 +2810,18 @@
           <a:lstStyle/>
           <a:p>
             <a:r>
-              <a:t>Put this up while the blind tests are running so groups can check</a:t>
-            </a:r>
-          </a:p>
-          <a:p>
-            <a:r>
-              <a:t>themselves without asking you.</a:t>
+              <a:t>1:35. The blind test.</a:t>
             </a:r>
           </a:p>
           <a:p/>
           <a:p>
             <a:r>
-              <a:t>The second line matters most: a device that fires continuously when held is</a:t>
-            </a:r>
-          </a:p>
-          <a:p>
-            <a:r>
-              <a:t>the single most common bug, and it is a debounce problem.</a:t>
+              <a:t>Most groups will already have something from task 05. This is where it gets</a:t>
+            </a:r>
+          </a:p>
+          <a:p>
+            <a:r>
+              <a:t>tested by someone who did not build it.</a:t>
             </a:r>
           </a:p>
         </p:txBody>
@@ -2835,23 +2891,39 @@
           <a:lstStyle/>
           <a:p>
             <a:r>
-              <a:t>The closing argument. Thirty seconds.</a:t>
+              <a:t>Read the brief out once, then get out of the way. Full wording, since the</a:t>
+            </a:r>
+          </a:p>
+          <a:p>
+            <a:r>
+              <a:t>slide is only the bones:</a:t>
             </a:r>
           </a:p>
           <a:p/>
           <a:p>
             <a:r>
-              <a:t>If they leave with only one thing, it should be the third: pick the actuator</a:t>
-            </a:r>
-          </a:p>
-          <a:p>
-            <a:r>
-              <a:t>before designing the interaction. Discovering in week 46 that the chosen one</a:t>
-            </a:r>
-          </a:p>
-          <a:p>
-            <a:r>
-              <a:t>cannot do the job is the expensive mistake this session exists to prevent.</a:t>
+              <a:t>"Pick one actuator. Encode three messages: arrived, something wrong, finished.</a:t>
+            </a:r>
+          </a:p>
+          <a:p>
+            <a:r>
+              <a:t>Vary only the rhythm of the pulses and how strong they are. Then hand it to</a:t>
+            </a:r>
+          </a:p>
+          <a:p>
+            <a:r>
+              <a:t>another group with the screen turned away and see if they can name all three."</a:t>
+            </a:r>
+          </a:p>
+          <a:p/>
+          <a:p>
+            <a:r>
+              <a:t>If someone asks to add a second actuator, say no. The constraint is the</a:t>
+            </a:r>
+          </a:p>
+          <a:p>
+            <a:r>
+              <a:t>exercise.</a:t>
             </a:r>
           </a:p>
         </p:txBody>
@@ -2921,6 +2993,265 @@
           <a:lstStyle/>
           <a:p>
             <a:r>
+              <a:t>The line worth repeating twice.</a:t>
+            </a:r>
+          </a:p>
+          <a:p/>
+          <a:p>
+            <a:r>
+              <a:t>Run the test: swap groups, receiver looks away, guess all three.</a:t>
+            </a:r>
+          </a:p>
+          <a:p/>
+          <a:p>
+            <a:r>
+              <a:t>Then have each group name which two got confused and what would have separated</a:t>
+            </a:r>
+          </a:p>
+          <a:p>
+            <a:r>
+              <a:t>them. That confusion is the actual learning, not the successful ones.</a:t>
+            </a:r>
+          </a:p>
+        </p:txBody>
+      </p:sp>
+      <p:sp>
+        <p:nvSpPr>
+          <p:cNvPr id="4" name="Slide Number Placeholder 3"/>
+          <p:cNvSpPr>
+            <a:spLocks noGrp="1"/>
+          </p:cNvSpPr>
+          <p:nvPr>
+            <p:ph type="sldNum" idx="5" sz="quarter"/>
+          </p:nvPr>
+        </p:nvSpPr>
+        <p:spPr/>
+      </p:sp>
+    </p:spTree>
+  </p:cSld>
+  <p:clrMapOvr>
+    <a:masterClrMapping/>
+  </p:clrMapOvr>
+</p:notes>
+</file>
+
+<file path=ppt/notesSlides/notesSlide34.xml><?xml version="1.0" encoding="utf-8"?>
+<p:notes xmlns:a="http://schemas.openxmlformats.org/drawingml/2006/main" xmlns:p="http://schemas.openxmlformats.org/presentationml/2006/main" xmlns:r="http://schemas.openxmlformats.org/officeDocument/2006/relationships">
+  <p:cSld>
+    <p:spTree>
+      <p:nvGrpSpPr>
+        <p:cNvPr id="1" name=""/>
+        <p:cNvGrpSpPr/>
+        <p:nvPr/>
+      </p:nvGrpSpPr>
+      <p:grpSpPr>
+        <a:xfrm>
+          <a:off x="0" y="0"/>
+          <a:ext cx="0" cy="0"/>
+          <a:chOff x="0" y="0"/>
+          <a:chExt cx="0" cy="0"/>
+        </a:xfrm>
+      </p:grpSpPr>
+      <p:sp>
+        <p:nvSpPr>
+          <p:cNvPr id="2" name="Slide Image Placeholder 1"/>
+          <p:cNvSpPr>
+            <a:spLocks noGrp="1"/>
+          </p:cNvSpPr>
+          <p:nvPr>
+            <p:ph type="sldImg" idx="2"/>
+          </p:nvPr>
+        </p:nvSpPr>
+        <p:spPr/>
+      </p:sp>
+      <p:sp>
+        <p:nvSpPr>
+          <p:cNvPr id="3" name="Notes Placeholder 2"/>
+          <p:cNvSpPr>
+            <a:spLocks noGrp="1"/>
+          </p:cNvSpPr>
+          <p:nvPr>
+            <p:ph type="body" idx="3" sz="quarter"/>
+          </p:nvPr>
+        </p:nvSpPr>
+        <p:spPr/>
+        <p:txBody>
+          <a:bodyPr/>
+          <a:lstStyle/>
+          <a:p>
+            <a:r>
+              <a:t>Put this up while the blind tests are running so groups can check</a:t>
+            </a:r>
+          </a:p>
+          <a:p>
+            <a:r>
+              <a:t>themselves without asking you.</a:t>
+            </a:r>
+          </a:p>
+          <a:p/>
+          <a:p>
+            <a:r>
+              <a:t>The second line matters most: a device that fires continuously when held is</a:t>
+            </a:r>
+          </a:p>
+          <a:p>
+            <a:r>
+              <a:t>the single most common bug, and it is a debounce problem.</a:t>
+            </a:r>
+          </a:p>
+        </p:txBody>
+      </p:sp>
+      <p:sp>
+        <p:nvSpPr>
+          <p:cNvPr id="4" name="Slide Number Placeholder 3"/>
+          <p:cNvSpPr>
+            <a:spLocks noGrp="1"/>
+          </p:cNvSpPr>
+          <p:nvPr>
+            <p:ph type="sldNum" idx="5" sz="quarter"/>
+          </p:nvPr>
+        </p:nvSpPr>
+        <p:spPr/>
+      </p:sp>
+    </p:spTree>
+  </p:cSld>
+  <p:clrMapOvr>
+    <a:masterClrMapping/>
+  </p:clrMapOvr>
+</p:notes>
+</file>
+
+<file path=ppt/notesSlides/notesSlide35.xml><?xml version="1.0" encoding="utf-8"?>
+<p:notes xmlns:a="http://schemas.openxmlformats.org/drawingml/2006/main" xmlns:p="http://schemas.openxmlformats.org/presentationml/2006/main" xmlns:r="http://schemas.openxmlformats.org/officeDocument/2006/relationships">
+  <p:cSld>
+    <p:spTree>
+      <p:nvGrpSpPr>
+        <p:cNvPr id="1" name=""/>
+        <p:cNvGrpSpPr/>
+        <p:nvPr/>
+      </p:nvGrpSpPr>
+      <p:grpSpPr>
+        <a:xfrm>
+          <a:off x="0" y="0"/>
+          <a:ext cx="0" cy="0"/>
+          <a:chOff x="0" y="0"/>
+          <a:chExt cx="0" cy="0"/>
+        </a:xfrm>
+      </p:grpSpPr>
+      <p:sp>
+        <p:nvSpPr>
+          <p:cNvPr id="2" name="Slide Image Placeholder 1"/>
+          <p:cNvSpPr>
+            <a:spLocks noGrp="1"/>
+          </p:cNvSpPr>
+          <p:nvPr>
+            <p:ph type="sldImg" idx="2"/>
+          </p:nvPr>
+        </p:nvSpPr>
+        <p:spPr/>
+      </p:sp>
+      <p:sp>
+        <p:nvSpPr>
+          <p:cNvPr id="3" name="Notes Placeholder 2"/>
+          <p:cNvSpPr>
+            <a:spLocks noGrp="1"/>
+          </p:cNvSpPr>
+          <p:nvPr>
+            <p:ph type="body" idx="3" sz="quarter"/>
+          </p:nvPr>
+        </p:nvSpPr>
+        <p:spPr/>
+        <p:txBody>
+          <a:bodyPr/>
+          <a:lstStyle/>
+          <a:p>
+            <a:r>
+              <a:t>The closing argument. Thirty seconds.</a:t>
+            </a:r>
+          </a:p>
+          <a:p/>
+          <a:p>
+            <a:r>
+              <a:t>If they leave with only one thing, it should be the third: pick the actuator</a:t>
+            </a:r>
+          </a:p>
+          <a:p>
+            <a:r>
+              <a:t>before designing the interaction. Discovering in week 46 that the chosen one</a:t>
+            </a:r>
+          </a:p>
+          <a:p>
+            <a:r>
+              <a:t>cannot do the job is the expensive mistake this session exists to prevent.</a:t>
+            </a:r>
+          </a:p>
+        </p:txBody>
+      </p:sp>
+      <p:sp>
+        <p:nvSpPr>
+          <p:cNvPr id="4" name="Slide Number Placeholder 3"/>
+          <p:cNvSpPr>
+            <a:spLocks noGrp="1"/>
+          </p:cNvSpPr>
+          <p:nvPr>
+            <p:ph type="sldNum" idx="5" sz="quarter"/>
+          </p:nvPr>
+        </p:nvSpPr>
+        <p:spPr/>
+      </p:sp>
+    </p:spTree>
+  </p:cSld>
+  <p:clrMapOvr>
+    <a:masterClrMapping/>
+  </p:clrMapOvr>
+</p:notes>
+</file>
+
+<file path=ppt/notesSlides/notesSlide36.xml><?xml version="1.0" encoding="utf-8"?>
+<p:notes xmlns:a="http://schemas.openxmlformats.org/drawingml/2006/main" xmlns:p="http://schemas.openxmlformats.org/presentationml/2006/main" xmlns:r="http://schemas.openxmlformats.org/officeDocument/2006/relationships">
+  <p:cSld>
+    <p:spTree>
+      <p:nvGrpSpPr>
+        <p:cNvPr id="1" name=""/>
+        <p:cNvGrpSpPr/>
+        <p:nvPr/>
+      </p:nvGrpSpPr>
+      <p:grpSpPr>
+        <a:xfrm>
+          <a:off x="0" y="0"/>
+          <a:ext cx="0" cy="0"/>
+          <a:chOff x="0" y="0"/>
+          <a:chExt cx="0" cy="0"/>
+        </a:xfrm>
+      </p:grpSpPr>
+      <p:sp>
+        <p:nvSpPr>
+          <p:cNvPr id="2" name="Slide Image Placeholder 1"/>
+          <p:cNvSpPr>
+            <a:spLocks noGrp="1"/>
+          </p:cNvSpPr>
+          <p:nvPr>
+            <p:ph type="sldImg" idx="2"/>
+          </p:nvPr>
+        </p:nvSpPr>
+        <p:spPr/>
+      </p:sp>
+      <p:sp>
+        <p:nvSpPr>
+          <p:cNvPr id="3" name="Notes Placeholder 2"/>
+          <p:cNvSpPr>
+            <a:spLocks noGrp="1"/>
+          </p:cNvSpPr>
+          <p:nvPr>
+            <p:ph type="body" idx="3" sz="quarter"/>
+          </p:nvPr>
+        </p:nvSpPr>
+        <p:spPr/>
+        <p:txBody>
+          <a:bodyPr/>
+          <a:lstStyle/>
+          <a:p>
+            <a:r>
               <a:t>Point them at the repo. Every task sketch is commented for them, and the</a:t>
             </a:r>
           </a:p>
@@ -3126,23 +3457,44 @@
           <a:lstStyle/>
           <a:p>
             <a:r>
-              <a:t>Show it, do not narrate it. Fifteen seconds.</a:t>
+              <a:t>Thirty seconds, and worth it: most of the room has never been told what</a:t>
+            </a:r>
+          </a:p>
+          <a:p>
+            <a:r>
+              <a:t>Chomskylab actually is, and several of them will need to borrow parts in the</a:t>
+            </a:r>
+          </a:p>
+          <a:p>
+            <a:r>
+              <a:t>project weeks.</a:t>
             </a:r>
           </a:p>
           <a:p/>
           <a:p>
             <a:r>
-              <a:t>The one hard checkpoint is 0:25. Everyone should have task 01 running by then.</a:t>
-            </a:r>
-          </a:p>
-          <a:p>
-            <a:r>
-              <a:t>If someone is still fighting drivers at 0:30, pair them with a group that is</a:t>
-            </a:r>
-          </a:p>
-          <a:p>
-            <a:r>
-              <a:t>working rather than debugging it alone.</a:t>
+              <a:t>Two things to land: the component store is real and open to them, and the lab</a:t>
+            </a:r>
+          </a:p>
+          <a:p>
+            <a:r>
+              <a:t>writes its own software. The second one matters for this audience, because it</a:t>
+            </a:r>
+          </a:p>
+          <a:p>
+            <a:r>
+              <a:t>makes the lab a place they could contribute to rather than only take from.</a:t>
+            </a:r>
+          </a:p>
+          <a:p/>
+          <a:p>
+            <a:r>
+              <a:t>If anyone asks how the drawer numbers and stock counts on these slides are so</a:t>
+            </a:r>
+          </a:p>
+          <a:p>
+            <a:r>
+              <a:t>exact: they come straight out of the lab's component database.</a:t>
             </a:r>
           </a:p>
         </p:txBody>
@@ -3212,24 +3564,23 @@
           <a:lstStyle/>
           <a:p>
             <a:r>
-              <a:t>0:10. Boards out.</a:t>
+              <a:t>Show it, do not narrate it. Fifteen seconds.</a:t>
             </a:r>
           </a:p>
           <a:p/>
           <a:p>
             <a:r>
-              <a:t>Get EVERYONE through task 01 before anyone races ahead. It is the shortest and</a:t>
-            </a:r>
-          </a:p>
-          <a:p>
-            <a:r>
-              <a:t>it flushes out the setup problems: wrong board, wrong port, missing driver.</a:t>
-            </a:r>
-          </a:p>
-          <a:p/>
-          <a:p>
-            <a:r>
-              <a:t>Once task 01 runs for a pair, they can move at their own pace.</a:t>
+              <a:t>The one hard checkpoint is 0:25. Everyone should have task 01 running by then.</a:t>
+            </a:r>
+          </a:p>
+          <a:p>
+            <a:r>
+              <a:t>If someone is still fighting drivers at 0:30, pair them with a group that is</a:t>
+            </a:r>
+          </a:p>
+          <a:p>
+            <a:r>
+              <a:t>working rather than debugging it alone.</a:t>
             </a:r>
           </a:p>
         </p:txBody>
@@ -3299,40 +3650,24 @@
           <a:lstStyle/>
           <a:p>
             <a:r>
-              <a:t>Ninety seconds on this slide, no more.</a:t>
+              <a:t>0:10. Boards out.</a:t>
             </a:r>
           </a:p>
           <a:p/>
           <a:p>
             <a:r>
-              <a:t>Name the arc, it is the point: 1 to 3 are output, 4 is input, 5 is both. By</a:t>
-            </a:r>
-          </a:p>
-          <a:p>
-            <a:r>
-              <a:t>task 5 they have built a complete interaction loop, which is the shape of most</a:t>
-            </a:r>
-          </a:p>
-          <a:p>
-            <a:r>
-              <a:t>project work.</a:t>
+              <a:t>Get EVERYONE through task 01 before anyone races ahead. It is the shortest and</a:t>
+            </a:r>
+          </a:p>
+          <a:p>
+            <a:r>
+              <a:t>it flushes out the setup problems: wrong board, wrong port, missing driver.</a:t>
             </a:r>
           </a:p>
           <a:p/>
           <a:p>
             <a:r>
-              <a:t>Say clearly that nobody is expected to finish all five. Getting 01 working and</a:t>
-            </a:r>
-          </a:p>
-          <a:p>
-            <a:r>
-              <a:t>then properly playing with 02 beats rushing all of them.</a:t>
-            </a:r>
-          </a:p>
-          <a:p/>
-          <a:p>
-            <a:r>
-              <a:t>Task 05's last experiment IS the closing brief, so the work carries over.</a:t>
+              <a:t>Once task 01 runs for a pair, they can move at their own pace.</a:t>
             </a:r>
           </a:p>
         </p:txBody>
@@ -3402,61 +3737,40 @@
           <a:lstStyle/>
           <a:p>
             <a:r>
-              <a:t>Say the format once here rather than repeating it per task.</a:t>
+              <a:t>Ninety seconds on this slide, no more.</a:t>
             </a:r>
           </a:p>
           <a:p/>
           <a:p>
             <a:r>
-              <a:t>CHANGE ME at the top: two or three numbers, already set to something that</a:t>
-            </a:r>
-          </a:p>
-          <a:p>
-            <a:r>
-              <a:t>works. THINGS TO TRY at the bottom: four experiments, easy to hard, and the</a:t>
-            </a:r>
-          </a:p>
-          <a:p>
-            <a:r>
-              <a:t>last one usually asks for a rewrite rather than a tweak.</a:t>
+              <a:t>Name the arc, it is the point: 1 to 3 are output, 4 is input, 5 is both. By</a:t>
+            </a:r>
+          </a:p>
+          <a:p>
+            <a:r>
+              <a:t>task 5 they have built a complete interaction loop, which is the shape of most</a:t>
+            </a:r>
+          </a:p>
+          <a:p>
+            <a:r>
+              <a:t>project work.</a:t>
             </a:r>
           </a:p>
           <a:p/>
           <a:p>
             <a:r>
-              <a:t>Upload problems, in the order they will hit you:</a:t>
-            </a:r>
-          </a:p>
-          <a:p>
-            <a:r>
-              <a:t>  * wrong board or port under Tools</a:t>
-            </a:r>
-          </a:p>
-          <a:p>
-            <a:r>
-              <a:t>  * ADCTouch not installed (tasks 04 and 05)</a:t>
-            </a:r>
-          </a:p>
-          <a:p>
-            <a:r>
-              <a:t>  * solenoid task: board resets when it fires means its supply is off</a:t>
+              <a:t>Say clearly that nobody is expected to finish all five. Getting 01 working and</a:t>
+            </a:r>
+          </a:p>
+          <a:p>
+            <a:r>
+              <a:t>then properly playing with 02 beats rushing all of them.</a:t>
             </a:r>
           </a:p>
           <a:p/>
           <a:p>
             <a:r>
-              <a:t>Write the repo URL on the whiteboard now. It gets asked for six times.</a:t>
-            </a:r>
-          </a:p>
-          <a:p/>
-          <a:p>
-            <a:r>
-              <a:t>If a task's hardware fails, utils/ has the diagnostics: pin_sweep, i2c_scanner,</a:t>
-            </a:r>
-          </a:p>
-          <a:p>
-            <a:r>
-              <a:t>analog_monitor.</a:t>
+              <a:t>Task 05's last experiment IS the closing brief, so the work carries over.</a:t>
             </a:r>
           </a:p>
         </p:txBody>
@@ -3526,39 +3840,61 @@
           <a:lstStyle/>
           <a:p>
             <a:r>
-              <a:t>Hand this out before anything else, or you will spend the session</a:t>
-            </a:r>
-          </a:p>
-          <a:p>
-            <a:r>
-              <a:t>fetching parts one at a time.</a:t>
+              <a:t>Say the format once here rather than repeating it per task.</a:t>
             </a:r>
           </a:p>
           <a:p/>
           <a:p>
             <a:r>
-              <a:t>One set per pair. The three drawer numbers are the ones people actually come</a:t>
-            </a:r>
-          </a:p>
-          <a:p>
-            <a:r>
-              <a:t>back and ask for: 8A breadboard supply, 2C H-bridge, 11F amplifier.</a:t>
+              <a:t>CHANGE ME at the top: two or three numbers, already set to something that</a:t>
+            </a:r>
+          </a:p>
+          <a:p>
+            <a:r>
+              <a:t>works. THINGS TO TRY at the bottom: four experiments, easy to hard, and the</a:t>
+            </a:r>
+          </a:p>
+          <a:p>
+            <a:r>
+              <a:t>last one usually asks for a rewrite rather than a tweak.</a:t>
             </a:r>
           </a:p>
           <a:p/>
           <a:p>
             <a:r>
-              <a:t>Jumper wires, breadboards and resistors are not tracked in the component</a:t>
-            </a:r>
-          </a:p>
-          <a:p>
-            <a:r>
-              <a:t>database, so make sure there are enough on the tables before students</a:t>
-            </a:r>
-          </a:p>
-          <a:p>
-            <a:r>
-              <a:t>arrive.</a:t>
+              <a:t>Upload problems, in the order they will hit you:</a:t>
+            </a:r>
+          </a:p>
+          <a:p>
+            <a:r>
+              <a:t>  * wrong board or port under Tools</a:t>
+            </a:r>
+          </a:p>
+          <a:p>
+            <a:r>
+              <a:t>  * ADCTouch not installed (tasks 04 and 05)</a:t>
+            </a:r>
+          </a:p>
+          <a:p>
+            <a:r>
+              <a:t>  * solenoid task: board resets when it fires means its supply is off</a:t>
+            </a:r>
+          </a:p>
+          <a:p/>
+          <a:p>
+            <a:r>
+              <a:t>Write the repo URL on the whiteboard now. It gets asked for six times.</a:t>
+            </a:r>
+          </a:p>
+          <a:p/>
+          <a:p>
+            <a:r>
+              <a:t>If a task's hardware fails, utils/ has the diagnostics: pin_sweep, i2c_scanner,</a:t>
+            </a:r>
+          </a:p>
+          <a:p>
+            <a:r>
+              <a:t>analog_monitor.</a:t>
             </a:r>
           </a:p>
         </p:txBody>
@@ -6761,6 +7097,370 @@
               <a:buNone/>
             </a:pPr>
             <a:r>
+              <a:rPr sz="3200" b="1">
+                <a:solidFill>
+                  <a:srgbClr val="000000"/>
+                </a:solidFill>
+                <a:latin typeface="Arial"/>
+              </a:rPr>
+              <a:t>WHAT YOU GET IN THE BASE KIT</a:t>
+            </a:r>
+          </a:p>
+        </p:txBody>
+      </p:sp>
+      <p:sp>
+        <p:nvSpPr>
+          <p:cNvPr id="3" name="Text Placeholder 2"/>
+          <p:cNvSpPr>
+            <a:spLocks noGrp="1"/>
+          </p:cNvSpPr>
+          <p:nvPr>
+            <p:ph type="body" idx="1"/>
+          </p:nvPr>
+        </p:nvSpPr>
+        <p:spPr/>
+        <p:txBody>
+          <a:bodyPr/>
+          <a:lstStyle/>
+          <a:p>
+            <a:pPr marL="0" indent="0" algn="l">
+              <a:lnSpc>
+                <a:spcPct val="128000"/>
+              </a:lnSpc>
+              <a:spcAft>
+                <a:spcPts val="1400"/>
+              </a:spcAft>
+              <a:buNone/>
+            </a:pPr>
+            <a:r>
+              <a:rPr sz="1700" b="0">
+                <a:solidFill>
+                  <a:srgbClr val="595959"/>
+                </a:solidFill>
+                <a:latin typeface="Arial"/>
+              </a:rPr>
+              <a:t>One set per pair, collected before you start task 01. Below: the three parts people always come back for.</a:t>
+            </a:r>
+          </a:p>
+          <a:p>
+            <a:pPr marL="0" indent="0" algn="l">
+              <a:lnSpc>
+                <a:spcPct val="128000"/>
+              </a:lnSpc>
+              <a:spcAft>
+                <a:spcPts val="600"/>
+              </a:spcAft>
+              <a:buNone/>
+            </a:pPr>
+            <a:r>
+              <a:rPr sz="1700" b="0">
+                <a:solidFill>
+                  <a:srgbClr val="000000"/>
+                </a:solidFill>
+                <a:latin typeface="Arial"/>
+              </a:rPr>
+              <a:t>Board, breadboard, jumper wires, resistors: on the tables.</a:t>
+            </a:r>
+          </a:p>
+          <a:p>
+            <a:pPr marL="0" indent="0" algn="l">
+              <a:lnSpc>
+                <a:spcPct val="128000"/>
+              </a:lnSpc>
+              <a:spcAft>
+                <a:spcPts val="600"/>
+              </a:spcAft>
+              <a:buNone/>
+            </a:pPr>
+            <a:r>
+              <a:rPr sz="1700" b="0">
+                <a:solidFill>
+                  <a:srgbClr val="000000"/>
+                </a:solidFill>
+                <a:latin typeface="Arial"/>
+              </a:rPr>
+              <a:t>Not in the drawers, so take what you need.</a:t>
+            </a:r>
+          </a:p>
+        </p:txBody>
+      </p:sp>
+      <p:pic>
+        <p:nvPicPr>
+          <p:cNvPr id="4" name="Picture 3" descr="wordmark_dark.png"/>
+          <p:cNvPicPr>
+            <a:picLocks noChangeAspect="1"/>
+          </p:cNvPicPr>
+          <p:nvPr/>
+        </p:nvPicPr>
+        <p:blipFill>
+          <a:blip r:embed="rId2"/>
+          <a:stretch>
+            <a:fillRect/>
+          </a:stretch>
+        </p:blipFill>
+        <p:spPr>
+          <a:xfrm>
+            <a:off x="342900" y="6184900"/>
+            <a:ext cx="2070100" cy="529560"/>
+          </a:xfrm>
+          <a:prstGeom prst="rect">
+            <a:avLst/>
+          </a:prstGeom>
+        </p:spPr>
+      </p:pic>
+      <p:pic>
+        <p:nvPicPr>
+          <p:cNvPr id="5" name="Picture 4" descr="seal_dark.png"/>
+          <p:cNvPicPr>
+            <a:picLocks noChangeAspect="1"/>
+          </p:cNvPicPr>
+          <p:nvPr/>
+        </p:nvPicPr>
+        <p:blipFill>
+          <a:blip r:embed="rId3"/>
+          <a:stretch>
+            <a:fillRect/>
+          </a:stretch>
+        </p:blipFill>
+        <p:spPr>
+          <a:xfrm>
+            <a:off x="11226800" y="5969000"/>
+            <a:ext cx="713915" cy="711200"/>
+          </a:xfrm>
+          <a:prstGeom prst="rect">
+            <a:avLst/>
+          </a:prstGeom>
+        </p:spPr>
+      </p:pic>
+      <p:pic>
+        <p:nvPicPr>
+          <p:cNvPr id="6" name="Picture 5" descr="bbpsu.jpg"/>
+          <p:cNvPicPr>
+            <a:picLocks noChangeAspect="1"/>
+          </p:cNvPicPr>
+          <p:nvPr/>
+        </p:nvPicPr>
+        <p:blipFill>
+          <a:blip r:embed="rId4"/>
+          <a:stretch>
+            <a:fillRect/>
+          </a:stretch>
+        </p:blipFill>
+        <p:spPr>
+          <a:xfrm>
+            <a:off x="914400" y="3327400"/>
+            <a:ext cx="1422400" cy="1422400"/>
+          </a:xfrm>
+          <a:prstGeom prst="rect">
+            <a:avLst/>
+          </a:prstGeom>
+        </p:spPr>
+      </p:pic>
+      <p:pic>
+        <p:nvPicPr>
+          <p:cNvPr id="7" name="Picture 6" descr="hbridge.jpg"/>
+          <p:cNvPicPr>
+            <a:picLocks noChangeAspect="1"/>
+          </p:cNvPicPr>
+          <p:nvPr/>
+        </p:nvPicPr>
+        <p:blipFill>
+          <a:blip r:embed="rId5"/>
+          <a:stretch>
+            <a:fillRect/>
+          </a:stretch>
+        </p:blipFill>
+        <p:spPr>
+          <a:xfrm>
+            <a:off x="2997200" y="3327400"/>
+            <a:ext cx="1422400" cy="1422400"/>
+          </a:xfrm>
+          <a:prstGeom prst="rect">
+            <a:avLst/>
+          </a:prstGeom>
+        </p:spPr>
+      </p:pic>
+      <p:pic>
+        <p:nvPicPr>
+          <p:cNvPr id="8" name="Picture 7" descr="amp.jpg"/>
+          <p:cNvPicPr>
+            <a:picLocks noChangeAspect="1"/>
+          </p:cNvPicPr>
+          <p:nvPr/>
+        </p:nvPicPr>
+        <p:blipFill>
+          <a:blip r:embed="rId6"/>
+          <a:stretch>
+            <a:fillRect/>
+          </a:stretch>
+        </p:blipFill>
+        <p:spPr>
+          <a:xfrm>
+            <a:off x="5080000" y="3327400"/>
+            <a:ext cx="1422400" cy="1422400"/>
+          </a:xfrm>
+          <a:prstGeom prst="rect">
+            <a:avLst/>
+          </a:prstGeom>
+        </p:spPr>
+      </p:pic>
+      <p:sp>
+        <p:nvSpPr>
+          <p:cNvPr id="9" name="TextBox 8"/>
+          <p:cNvSpPr txBox="1"/>
+          <p:nvPr/>
+        </p:nvSpPr>
+        <p:spPr>
+          <a:xfrm>
+            <a:off x="914400" y="4826000"/>
+            <a:ext cx="1905000" cy="330200"/>
+          </a:xfrm>
+          <a:prstGeom prst="rect">
+            <a:avLst/>
+          </a:prstGeom>
+          <a:noFill/>
+        </p:spPr>
+        <p:txBody>
+          <a:bodyPr wrap="square" lIns="0" rIns="0" tIns="0" bIns="0">
+            <a:spAutoFit/>
+          </a:bodyPr>
+          <a:lstStyle/>
+          <a:p>
+            <a:pPr marL="0" indent="0" algn="l">
+              <a:lnSpc>
+                <a:spcPct val="115000"/>
+              </a:lnSpc>
+              <a:buNone/>
+            </a:pPr>
+            <a:r>
+              <a:rPr sz="900">
+                <a:solidFill>
+                  <a:srgbClr val="595959"/>
+                </a:solidFill>
+                <a:latin typeface="Arial"/>
+              </a:rPr>
+              <a:t>Breadboard supply, 8A. Anything past an LED.</a:t>
+            </a:r>
+          </a:p>
+        </p:txBody>
+      </p:sp>
+      <p:sp>
+        <p:nvSpPr>
+          <p:cNvPr id="10" name="TextBox 9"/>
+          <p:cNvSpPr txBox="1"/>
+          <p:nvPr/>
+        </p:nvSpPr>
+        <p:spPr>
+          <a:xfrm>
+            <a:off x="2997200" y="4826000"/>
+            <a:ext cx="1905000" cy="330200"/>
+          </a:xfrm>
+          <a:prstGeom prst="rect">
+            <a:avLst/>
+          </a:prstGeom>
+          <a:noFill/>
+        </p:spPr>
+        <p:txBody>
+          <a:bodyPr wrap="square" lIns="0" rIns="0" tIns="0" bIns="0">
+            <a:spAutoFit/>
+          </a:bodyPr>
+          <a:lstStyle/>
+          <a:p>
+            <a:pPr marL="0" indent="0" algn="l">
+              <a:lnSpc>
+                <a:spcPct val="115000"/>
+              </a:lnSpc>
+              <a:buNone/>
+            </a:pPr>
+            <a:r>
+              <a:rPr sz="900">
+                <a:solidFill>
+                  <a:srgbClr val="595959"/>
+                </a:solidFill>
+                <a:latin typeface="Arial"/>
+              </a:rPr>
+              <a:t>L9110S H-bridge, 2C. Reversing, and the Peltier.</a:t>
+            </a:r>
+          </a:p>
+        </p:txBody>
+      </p:sp>
+      <p:sp>
+        <p:nvSpPr>
+          <p:cNvPr id="11" name="TextBox 10"/>
+          <p:cNvSpPr txBox="1"/>
+          <p:nvPr/>
+        </p:nvSpPr>
+        <p:spPr>
+          <a:xfrm>
+            <a:off x="5080000" y="4826000"/>
+            <a:ext cx="1905000" cy="330200"/>
+          </a:xfrm>
+          <a:prstGeom prst="rect">
+            <a:avLst/>
+          </a:prstGeom>
+          <a:noFill/>
+        </p:spPr>
+        <p:txBody>
+          <a:bodyPr wrap="square" lIns="0" rIns="0" tIns="0" bIns="0">
+            <a:spAutoFit/>
+          </a:bodyPr>
+          <a:lstStyle/>
+          <a:p>
+            <a:pPr marL="0" indent="0" algn="l">
+              <a:lnSpc>
+                <a:spcPct val="115000"/>
+              </a:lnSpc>
+              <a:buNone/>
+            </a:pPr>
+            <a:r>
+              <a:rPr sz="900">
+                <a:solidFill>
+                  <a:srgbClr val="595959"/>
+                </a:solidFill>
+                <a:latin typeface="Arial"/>
+              </a:rPr>
+              <a:t>PAM8403 amp, 11F. A transducer needs one.</a:t>
+            </a:r>
+          </a:p>
+        </p:txBody>
+      </p:sp>
+    </p:spTree>
+  </p:cSld>
+  <p:clrMapOvr>
+    <a:masterClrMapping/>
+  </p:clrMapOvr>
+</p:sld>
+</file>
+
+<file path=ppt/slides/slide11.xml><?xml version="1.0" encoding="utf-8"?>
+<p:sld xmlns:a="http://schemas.openxmlformats.org/drawingml/2006/main" xmlns:p="http://schemas.openxmlformats.org/presentationml/2006/main" xmlns:r="http://schemas.openxmlformats.org/officeDocument/2006/relationships">
+  <p:cSld>
+    <p:spTree>
+      <p:nvGrpSpPr>
+        <p:cNvPr id="1" name=""/>
+        <p:cNvGrpSpPr/>
+        <p:nvPr/>
+      </p:nvGrpSpPr>
+      <p:grpSpPr/>
+      <p:sp>
+        <p:nvSpPr>
+          <p:cNvPr id="2" name="Title 1"/>
+          <p:cNvSpPr>
+            <a:spLocks noGrp="1"/>
+          </p:cNvSpPr>
+          <p:nvPr>
+            <p:ph type="title"/>
+          </p:nvPr>
+        </p:nvSpPr>
+        <p:spPr/>
+        <p:txBody>
+          <a:bodyPr/>
+          <a:lstStyle/>
+          <a:p>
+            <a:pPr marL="0" indent="0" algn="l">
+              <a:buNone/>
+            </a:pPr>
+            <a:r>
               <a:rPr sz="4400" b="1">
                 <a:solidFill>
                   <a:srgbClr val="000000"/>
@@ -6828,7 +7528,7 @@
 </p:sld>
 </file>
 
-<file path=ppt/slides/slide11.xml><?xml version="1.0" encoding="utf-8"?>
+<file path=ppt/slides/slide12.xml><?xml version="1.0" encoding="utf-8"?>
 <p:sld xmlns:a="http://schemas.openxmlformats.org/drawingml/2006/main" xmlns:p="http://schemas.openxmlformats.org/presentationml/2006/main" xmlns:r="http://schemas.openxmlformats.org/officeDocument/2006/relationships">
   <p:cSld>
     <p:spTree>
@@ -7069,7 +7769,7 @@
 </p:sld>
 </file>
 
-<file path=ppt/slides/slide12.xml><?xml version="1.0" encoding="utf-8"?>
+<file path=ppt/slides/slide13.xml><?xml version="1.0" encoding="utf-8"?>
 <p:sld xmlns:a="http://schemas.openxmlformats.org/drawingml/2006/main" xmlns:p="http://schemas.openxmlformats.org/presentationml/2006/main" xmlns:r="http://schemas.openxmlformats.org/officeDocument/2006/relationships">
   <p:cSld>
     <p:spTree>
@@ -7310,7 +8010,7 @@
 </p:sld>
 </file>
 
-<file path=ppt/slides/slide13.xml><?xml version="1.0" encoding="utf-8"?>
+<file path=ppt/slides/slide14.xml><?xml version="1.0" encoding="utf-8"?>
 <p:sld xmlns:a="http://schemas.openxmlformats.org/drawingml/2006/main" xmlns:p="http://schemas.openxmlformats.org/presentationml/2006/main" xmlns:r="http://schemas.openxmlformats.org/officeDocument/2006/relationships">
   <p:cSld>
     <p:spTree>
@@ -7551,7 +8251,7 @@
 </p:sld>
 </file>
 
-<file path=ppt/slides/slide14.xml><?xml version="1.0" encoding="utf-8"?>
+<file path=ppt/slides/slide15.xml><?xml version="1.0" encoding="utf-8"?>
 <p:sld xmlns:a="http://schemas.openxmlformats.org/drawingml/2006/main" xmlns:p="http://schemas.openxmlformats.org/presentationml/2006/main" xmlns:r="http://schemas.openxmlformats.org/officeDocument/2006/relationships">
   <p:cSld>
     <p:spTree>
@@ -7627,7 +8327,7 @@
                 </a:solidFill>
                 <a:latin typeface="Arial"/>
               </a:rPr>
-              <a:t>A wire taped behind foil, card or fabric. No sensor, no breakout board.</a:t>
+              <a:t>A wire taped behind foil, card or fabric. No sensor and no breakout board, which is why the box on the left is empty.</a:t>
             </a:r>
           </a:p>
           <a:p>
@@ -7707,7 +8407,7 @@
                 </a:solidFill>
                 <a:latin typeface="Consolas"/>
               </a:rPr>
-              <a:t>No part number. A wire, on any analogue pin</a:t>
+              <a:t>No drawer, no part number, no cost. Any analogue pin</a:t>
             </a:r>
           </a:p>
         </p:txBody>
@@ -7838,7 +8538,7 @@
 </p:sld>
 </file>
 
-<file path=ppt/slides/slide15.xml><?xml version="1.0" encoding="utf-8"?>
+<file path=ppt/slides/slide16.xml><?xml version="1.0" encoding="utf-8"?>
 <p:sld xmlns:a="http://schemas.openxmlformats.org/drawingml/2006/main" xmlns:p="http://schemas.openxmlformats.org/presentationml/2006/main" xmlns:r="http://schemas.openxmlformats.org/officeDocument/2006/relationships">
   <p:cSld>
     <p:spTree>
@@ -8079,7 +8779,7 @@
 </p:sld>
 </file>
 
-<file path=ppt/slides/slide16.xml><?xml version="1.0" encoding="utf-8"?>
+<file path=ppt/slides/slide17.xml><?xml version="1.0" encoding="utf-8"?>
 <p:sld xmlns:a="http://schemas.openxmlformats.org/drawingml/2006/main" xmlns:p="http://schemas.openxmlformats.org/presentationml/2006/main" xmlns:r="http://schemas.openxmlformats.org/officeDocument/2006/relationships">
   <p:cSld>
     <p:spTree>
@@ -8320,7 +9020,7 @@
 </p:sld>
 </file>
 
-<file path=ppt/slides/slide17.xml><?xml version="1.0" encoding="utf-8"?>
+<file path=ppt/slides/slide18.xml><?xml version="1.0" encoding="utf-8"?>
 <p:sld xmlns:a="http://schemas.openxmlformats.org/drawingml/2006/main" xmlns:p="http://schemas.openxmlformats.org/presentationml/2006/main" xmlns:r="http://schemas.openxmlformats.org/officeDocument/2006/relationships">
   <p:cSld>
     <p:spTree>
@@ -8561,7 +9261,7 @@
 </p:sld>
 </file>
 
-<file path=ppt/slides/slide18.xml><?xml version="1.0" encoding="utf-8"?>
+<file path=ppt/slides/slide19.xml><?xml version="1.0" encoding="utf-8"?>
 <p:sld xmlns:a="http://schemas.openxmlformats.org/drawingml/2006/main" xmlns:p="http://schemas.openxmlformats.org/presentationml/2006/main" xmlns:r="http://schemas.openxmlformats.org/officeDocument/2006/relationships">
   <p:cSld>
     <p:spTree>
@@ -8802,7 +9502,239 @@
 </p:sld>
 </file>
 
-<file path=ppt/slides/slide19.xml><?xml version="1.0" encoding="utf-8"?>
+<file path=ppt/slides/slide2.xml><?xml version="1.0" encoding="utf-8"?>
+<p:sld xmlns:a="http://schemas.openxmlformats.org/drawingml/2006/main" xmlns:p="http://schemas.openxmlformats.org/presentationml/2006/main" xmlns:r="http://schemas.openxmlformats.org/officeDocument/2006/relationships">
+  <p:cSld>
+    <p:spTree>
+      <p:nvGrpSpPr>
+        <p:cNvPr id="1" name=""/>
+        <p:cNvGrpSpPr/>
+        <p:nvPr/>
+      </p:nvGrpSpPr>
+      <p:grpSpPr/>
+      <p:sp>
+        <p:nvSpPr>
+          <p:cNvPr id="2" name="Title 1"/>
+          <p:cNvSpPr>
+            <a:spLocks noGrp="1"/>
+          </p:cNvSpPr>
+          <p:nvPr>
+            <p:ph type="title"/>
+          </p:nvPr>
+        </p:nvSpPr>
+        <p:spPr/>
+        <p:txBody>
+          <a:bodyPr/>
+          <a:lstStyle/>
+          <a:p>
+            <a:pPr marL="0" indent="0" algn="l">
+              <a:buNone/>
+            </a:pPr>
+            <a:r>
+              <a:rPr sz="3200" b="1">
+                <a:solidFill>
+                  <a:srgbClr val="000000"/>
+                </a:solidFill>
+                <a:latin typeface="Arial"/>
+              </a:rPr>
+              <a:t>TLDR</a:t>
+            </a:r>
+          </a:p>
+        </p:txBody>
+      </p:sp>
+      <p:sp>
+        <p:nvSpPr>
+          <p:cNvPr id="3" name="Text Placeholder 2"/>
+          <p:cNvSpPr>
+            <a:spLocks noGrp="1"/>
+          </p:cNvSpPr>
+          <p:nvPr>
+            <p:ph type="body" idx="1"/>
+          </p:nvPr>
+        </p:nvSpPr>
+        <p:spPr/>
+        <p:txBody>
+          <a:bodyPr/>
+          <a:lstStyle/>
+          <a:p>
+            <a:pPr marL="0" indent="0" algn="l">
+              <a:lnSpc>
+                <a:spcPct val="128000"/>
+              </a:lnSpc>
+              <a:spcAft>
+                <a:spcPts val="1400"/>
+              </a:spcAft>
+              <a:buNone/>
+            </a:pPr>
+            <a:r>
+              <a:rPr sz="1700" b="0">
+                <a:solidFill>
+                  <a:srgbClr val="595959"/>
+                </a:solidFill>
+                <a:latin typeface="Arial"/>
+              </a:rPr>
+              <a:t>Two hours finding out what actuators feel like, and leaving able to drive one from your own code.</a:t>
+            </a:r>
+          </a:p>
+          <a:p>
+            <a:pPr marL="0" indent="0" algn="l">
+              <a:lnSpc>
+                <a:spcPct val="128000"/>
+              </a:lnSpc>
+              <a:spcAft>
+                <a:spcPts val="600"/>
+              </a:spcAft>
+              <a:buNone/>
+            </a:pPr>
+            <a:r>
+              <a:rPr sz="1700" b="0">
+                <a:solidFill>
+                  <a:srgbClr val="000000"/>
+                </a:solidFill>
+                <a:latin typeface="Arial"/>
+              </a:rPr>
+              <a:t>Get a board and run task 01. Something spins.</a:t>
+            </a:r>
+          </a:p>
+          <a:p>
+            <a:pPr marL="0" indent="0" algn="l">
+              <a:lnSpc>
+                <a:spcPct val="128000"/>
+              </a:lnSpc>
+              <a:spcAft>
+                <a:spcPts val="600"/>
+              </a:spcAft>
+              <a:buNone/>
+            </a:pPr>
+            <a:r>
+              <a:rPr sz="1700" b="0">
+                <a:solidFill>
+                  <a:srgbClr val="000000"/>
+                </a:solidFill>
+                <a:latin typeface="Arial"/>
+              </a:rPr>
+              <a:t>Change two numbers, upload again. That loop is the workshop.</a:t>
+            </a:r>
+          </a:p>
+          <a:p>
+            <a:pPr marL="0" indent="0" algn="l">
+              <a:lnSpc>
+                <a:spcPct val="128000"/>
+              </a:lnSpc>
+              <a:spcAft>
+                <a:spcPts val="600"/>
+              </a:spcAft>
+              <a:buNone/>
+            </a:pPr>
+            <a:r>
+              <a:rPr sz="1700" b="0">
+                <a:solidFill>
+                  <a:srgbClr val="000000"/>
+                </a:solidFill>
+                <a:latin typeface="Arial"/>
+              </a:rPr>
+              <a:t>Pick up the actuators you are not driving.</a:t>
+            </a:r>
+          </a:p>
+          <a:p>
+            <a:pPr marL="0" indent="0" algn="l">
+              <a:lnSpc>
+                <a:spcPct val="128000"/>
+              </a:lnSpc>
+              <a:spcAft>
+                <a:spcPts val="600"/>
+              </a:spcAft>
+              <a:buNone/>
+            </a:pPr>
+            <a:r>
+              <a:rPr sz="1700" b="0">
+                <a:solidFill>
+                  <a:srgbClr val="000000"/>
+                </a:solidFill>
+                <a:latin typeface="Arial"/>
+              </a:rPr>
+              <a:t>Work through as many of the five tasks as you get to.</a:t>
+            </a:r>
+          </a:p>
+          <a:p>
+            <a:pPr marL="0" indent="0" algn="l">
+              <a:lnSpc>
+                <a:spcPct val="128000"/>
+              </a:lnSpc>
+              <a:spcAft>
+                <a:spcPts val="600"/>
+              </a:spcAft>
+              <a:buNone/>
+            </a:pPr>
+            <a:r>
+              <a:rPr sz="1700" b="0">
+                <a:solidFill>
+                  <a:srgbClr val="000000"/>
+                </a:solidFill>
+                <a:latin typeface="Arial"/>
+              </a:rPr>
+              <a:t>Build one signal someone else can read without looking.</a:t>
+            </a:r>
+          </a:p>
+        </p:txBody>
+      </p:sp>
+      <p:pic>
+        <p:nvPicPr>
+          <p:cNvPr id="4" name="Picture 3" descr="wordmark_dark.png"/>
+          <p:cNvPicPr>
+            <a:picLocks noChangeAspect="1"/>
+          </p:cNvPicPr>
+          <p:nvPr/>
+        </p:nvPicPr>
+        <p:blipFill>
+          <a:blip r:embed="rId2"/>
+          <a:stretch>
+            <a:fillRect/>
+          </a:stretch>
+        </p:blipFill>
+        <p:spPr>
+          <a:xfrm>
+            <a:off x="342900" y="6184900"/>
+            <a:ext cx="2070100" cy="529560"/>
+          </a:xfrm>
+          <a:prstGeom prst="rect">
+            <a:avLst/>
+          </a:prstGeom>
+        </p:spPr>
+      </p:pic>
+      <p:pic>
+        <p:nvPicPr>
+          <p:cNvPr id="5" name="Picture 4" descr="seal_dark.png"/>
+          <p:cNvPicPr>
+            <a:picLocks noChangeAspect="1"/>
+          </p:cNvPicPr>
+          <p:nvPr/>
+        </p:nvPicPr>
+        <p:blipFill>
+          <a:blip r:embed="rId3"/>
+          <a:stretch>
+            <a:fillRect/>
+          </a:stretch>
+        </p:blipFill>
+        <p:spPr>
+          <a:xfrm>
+            <a:off x="11226800" y="5969000"/>
+            <a:ext cx="713915" cy="711200"/>
+          </a:xfrm>
+          <a:prstGeom prst="rect">
+            <a:avLst/>
+          </a:prstGeom>
+        </p:spPr>
+      </p:pic>
+    </p:spTree>
+  </p:cSld>
+  <p:clrMapOvr>
+    <a:masterClrMapping/>
+  </p:clrMapOvr>
+</p:sld>
+</file>
+
+<file path=ppt/slides/slide20.xml><?xml version="1.0" encoding="utf-8"?>
 <p:sld xmlns:a="http://schemas.openxmlformats.org/drawingml/2006/main" xmlns:p="http://schemas.openxmlformats.org/presentationml/2006/main" xmlns:r="http://schemas.openxmlformats.org/officeDocument/2006/relationships">
   <p:cSld>
     <p:spTree>
@@ -9043,452 +9975,6 @@
 </p:sld>
 </file>
 
-<file path=ppt/slides/slide2.xml><?xml version="1.0" encoding="utf-8"?>
-<p:sld xmlns:a="http://schemas.openxmlformats.org/drawingml/2006/main" xmlns:p="http://schemas.openxmlformats.org/presentationml/2006/main" xmlns:r="http://schemas.openxmlformats.org/officeDocument/2006/relationships">
-  <p:cSld>
-    <p:spTree>
-      <p:nvGrpSpPr>
-        <p:cNvPr id="1" name=""/>
-        <p:cNvGrpSpPr/>
-        <p:nvPr/>
-      </p:nvGrpSpPr>
-      <p:grpSpPr/>
-      <p:sp>
-        <p:nvSpPr>
-          <p:cNvPr id="2" name="Title 1"/>
-          <p:cNvSpPr>
-            <a:spLocks noGrp="1"/>
-          </p:cNvSpPr>
-          <p:nvPr>
-            <p:ph type="title"/>
-          </p:nvPr>
-        </p:nvSpPr>
-        <p:spPr/>
-        <p:txBody>
-          <a:bodyPr/>
-          <a:lstStyle/>
-          <a:p>
-            <a:pPr marL="0" indent="0" algn="l">
-              <a:buNone/>
-            </a:pPr>
-            <a:r>
-              <a:rPr sz="3200" b="1">
-                <a:solidFill>
-                  <a:srgbClr val="000000"/>
-                </a:solidFill>
-                <a:latin typeface="Arial"/>
-              </a:rPr>
-              <a:t>TLDR</a:t>
-            </a:r>
-          </a:p>
-        </p:txBody>
-      </p:sp>
-      <p:sp>
-        <p:nvSpPr>
-          <p:cNvPr id="3" name="Text Placeholder 2"/>
-          <p:cNvSpPr>
-            <a:spLocks noGrp="1"/>
-          </p:cNvSpPr>
-          <p:nvPr>
-            <p:ph type="body" idx="1"/>
-          </p:nvPr>
-        </p:nvSpPr>
-        <p:spPr/>
-        <p:txBody>
-          <a:bodyPr/>
-          <a:lstStyle/>
-          <a:p>
-            <a:pPr marL="0" indent="0" algn="l">
-              <a:lnSpc>
-                <a:spcPct val="128000"/>
-              </a:lnSpc>
-              <a:spcAft>
-                <a:spcPts val="1400"/>
-              </a:spcAft>
-              <a:buNone/>
-            </a:pPr>
-            <a:r>
-              <a:rPr sz="1700" b="0">
-                <a:solidFill>
-                  <a:srgbClr val="595959"/>
-                </a:solidFill>
-                <a:latin typeface="Arial"/>
-              </a:rPr>
-              <a:t>Two hours finding out what actuators feel like, and leaving able to drive one from your own code.</a:t>
-            </a:r>
-          </a:p>
-          <a:p>
-            <a:pPr marL="0" indent="0" algn="l">
-              <a:lnSpc>
-                <a:spcPct val="128000"/>
-              </a:lnSpc>
-              <a:spcAft>
-                <a:spcPts val="600"/>
-              </a:spcAft>
-              <a:buNone/>
-            </a:pPr>
-            <a:r>
-              <a:rPr sz="1700" b="0">
-                <a:solidFill>
-                  <a:srgbClr val="000000"/>
-                </a:solidFill>
-                <a:latin typeface="Arial"/>
-              </a:rPr>
-              <a:t>Get a board and run task 01. Something spins.</a:t>
-            </a:r>
-          </a:p>
-          <a:p>
-            <a:pPr marL="0" indent="0" algn="l">
-              <a:lnSpc>
-                <a:spcPct val="128000"/>
-              </a:lnSpc>
-              <a:spcAft>
-                <a:spcPts val="600"/>
-              </a:spcAft>
-              <a:buNone/>
-            </a:pPr>
-            <a:r>
-              <a:rPr sz="1700" b="0">
-                <a:solidFill>
-                  <a:srgbClr val="000000"/>
-                </a:solidFill>
-                <a:latin typeface="Arial"/>
-              </a:rPr>
-              <a:t>Change two numbers, upload again. That loop is the workshop.</a:t>
-            </a:r>
-          </a:p>
-          <a:p>
-            <a:pPr marL="0" indent="0" algn="l">
-              <a:lnSpc>
-                <a:spcPct val="128000"/>
-              </a:lnSpc>
-              <a:spcAft>
-                <a:spcPts val="600"/>
-              </a:spcAft>
-              <a:buNone/>
-            </a:pPr>
-            <a:r>
-              <a:rPr sz="1700" b="0">
-                <a:solidFill>
-                  <a:srgbClr val="000000"/>
-                </a:solidFill>
-                <a:latin typeface="Arial"/>
-              </a:rPr>
-              <a:t>Pick up the actuators you are not driving.</a:t>
-            </a:r>
-          </a:p>
-          <a:p>
-            <a:pPr marL="0" indent="0" algn="l">
-              <a:lnSpc>
-                <a:spcPct val="128000"/>
-              </a:lnSpc>
-              <a:spcAft>
-                <a:spcPts val="600"/>
-              </a:spcAft>
-              <a:buNone/>
-            </a:pPr>
-            <a:r>
-              <a:rPr sz="1700" b="0">
-                <a:solidFill>
-                  <a:srgbClr val="000000"/>
-                </a:solidFill>
-                <a:latin typeface="Arial"/>
-              </a:rPr>
-              <a:t>Work through as many of the five tasks as you get to.</a:t>
-            </a:r>
-          </a:p>
-          <a:p>
-            <a:pPr marL="0" indent="0" algn="l">
-              <a:lnSpc>
-                <a:spcPct val="128000"/>
-              </a:lnSpc>
-              <a:spcAft>
-                <a:spcPts val="600"/>
-              </a:spcAft>
-              <a:buNone/>
-            </a:pPr>
-            <a:r>
-              <a:rPr sz="1700" b="0">
-                <a:solidFill>
-                  <a:srgbClr val="000000"/>
-                </a:solidFill>
-                <a:latin typeface="Arial"/>
-              </a:rPr>
-              <a:t>Build one signal someone else can read without looking.</a:t>
-            </a:r>
-          </a:p>
-        </p:txBody>
-      </p:sp>
-      <p:pic>
-        <p:nvPicPr>
-          <p:cNvPr id="4" name="Picture 3" descr="wordmark_dark.png"/>
-          <p:cNvPicPr>
-            <a:picLocks noChangeAspect="1"/>
-          </p:cNvPicPr>
-          <p:nvPr/>
-        </p:nvPicPr>
-        <p:blipFill>
-          <a:blip r:embed="rId2"/>
-          <a:stretch>
-            <a:fillRect/>
-          </a:stretch>
-        </p:blipFill>
-        <p:spPr>
-          <a:xfrm>
-            <a:off x="342900" y="6184900"/>
-            <a:ext cx="2070100" cy="529560"/>
-          </a:xfrm>
-          <a:prstGeom prst="rect">
-            <a:avLst/>
-          </a:prstGeom>
-        </p:spPr>
-      </p:pic>
-      <p:pic>
-        <p:nvPicPr>
-          <p:cNvPr id="5" name="Picture 4" descr="seal_dark.png"/>
-          <p:cNvPicPr>
-            <a:picLocks noChangeAspect="1"/>
-          </p:cNvPicPr>
-          <p:nvPr/>
-        </p:nvPicPr>
-        <p:blipFill>
-          <a:blip r:embed="rId3"/>
-          <a:stretch>
-            <a:fillRect/>
-          </a:stretch>
-        </p:blipFill>
-        <p:spPr>
-          <a:xfrm>
-            <a:off x="11226800" y="5969000"/>
-            <a:ext cx="713915" cy="711200"/>
-          </a:xfrm>
-          <a:prstGeom prst="rect">
-            <a:avLst/>
-          </a:prstGeom>
-        </p:spPr>
-      </p:pic>
-    </p:spTree>
-  </p:cSld>
-  <p:clrMapOvr>
-    <a:masterClrMapping/>
-  </p:clrMapOvr>
-</p:sld>
-</file>
-
-<file path=ppt/slides/slide20.xml><?xml version="1.0" encoding="utf-8"?>
-<p:sld xmlns:a="http://schemas.openxmlformats.org/drawingml/2006/main" xmlns:p="http://schemas.openxmlformats.org/presentationml/2006/main" xmlns:r="http://schemas.openxmlformats.org/officeDocument/2006/relationships">
-  <p:cSld>
-    <p:spTree>
-      <p:nvGrpSpPr>
-        <p:cNvPr id="1" name=""/>
-        <p:cNvGrpSpPr/>
-        <p:nvPr/>
-      </p:nvGrpSpPr>
-      <p:grpSpPr/>
-      <p:sp>
-        <p:nvSpPr>
-          <p:cNvPr id="2" name="Title 1"/>
-          <p:cNvSpPr>
-            <a:spLocks noGrp="1"/>
-          </p:cNvSpPr>
-          <p:nvPr>
-            <p:ph type="title"/>
-          </p:nvPr>
-        </p:nvSpPr>
-        <p:spPr/>
-        <p:txBody>
-          <a:bodyPr/>
-          <a:lstStyle/>
-          <a:p>
-            <a:pPr marL="0" indent="0" algn="l">
-              <a:buNone/>
-            </a:pPr>
-            <a:r>
-              <a:rPr sz="3200" b="1">
-                <a:solidFill>
-                  <a:srgbClr val="000000"/>
-                </a:solidFill>
-                <a:latin typeface="Arial"/>
-              </a:rPr>
-              <a:t>FREESTYLE IS ENCOURAGED</a:t>
-            </a:r>
-          </a:p>
-        </p:txBody>
-      </p:sp>
-      <p:sp>
-        <p:nvSpPr>
-          <p:cNvPr id="3" name="Text Placeholder 2"/>
-          <p:cNvSpPr>
-            <a:spLocks noGrp="1"/>
-          </p:cNvSpPr>
-          <p:nvPr>
-            <p:ph type="body" idx="1"/>
-          </p:nvPr>
-        </p:nvSpPr>
-        <p:spPr/>
-        <p:txBody>
-          <a:bodyPr/>
-          <a:lstStyle/>
-          <a:p>
-            <a:pPr marL="0" indent="0" algn="l">
-              <a:lnSpc>
-                <a:spcPct val="128000"/>
-              </a:lnSpc>
-              <a:spcAft>
-                <a:spcPts val="600"/>
-              </a:spcAft>
-              <a:buNone/>
-            </a:pPr>
-            <a:r>
-              <a:rPr sz="1700" b="1">
-                <a:solidFill>
-                  <a:srgbClr val="000000"/>
-                </a:solidFill>
-                <a:latin typeface="Arial"/>
-              </a:rPr>
-              <a:t>You do not have to do the tasks in order.</a:t>
-            </a:r>
-          </a:p>
-          <a:p>
-            <a:pPr marL="0" indent="0" algn="l">
-              <a:lnSpc>
-                <a:spcPct val="128000"/>
-              </a:lnSpc>
-              <a:spcAft>
-                <a:spcPts val="600"/>
-              </a:spcAft>
-              <a:buNone/>
-            </a:pPr>
-            <a:r>
-              <a:rPr sz="1700" b="1">
-                <a:solidFill>
-                  <a:srgbClr val="000000"/>
-                </a:solidFill>
-                <a:latin typeface="Arial"/>
-              </a:rPr>
-              <a:t>You do not have to finish them.</a:t>
-            </a:r>
-          </a:p>
-          <a:p>
-            <a:pPr marL="0" indent="0" algn="l">
-              <a:lnSpc>
-                <a:spcPct val="128000"/>
-              </a:lnSpc>
-              <a:spcAft>
-                <a:spcPts val="0"/>
-              </a:spcAft>
-              <a:buNone/>
-            </a:pPr>
-          </a:p>
-          <a:p>
-            <a:pPr marL="0" indent="0" algn="l">
-              <a:lnSpc>
-                <a:spcPct val="128000"/>
-              </a:lnSpc>
-              <a:spcAft>
-                <a:spcPts val="600"/>
-              </a:spcAft>
-              <a:buNone/>
-            </a:pPr>
-            <a:r>
-              <a:rPr sz="1700" b="0">
-                <a:solidFill>
-                  <a:srgbClr val="000000"/>
-                </a:solidFill>
-                <a:latin typeface="Arial"/>
-              </a:rPr>
-              <a:t>Getting task 01 working and then properly playing with task 02 beats rushing through all five.</a:t>
-            </a:r>
-          </a:p>
-          <a:p>
-            <a:pPr marL="0" indent="0" algn="l">
-              <a:lnSpc>
-                <a:spcPct val="128000"/>
-              </a:lnSpc>
-              <a:spcAft>
-                <a:spcPts val="0"/>
-              </a:spcAft>
-              <a:buNone/>
-            </a:pPr>
-          </a:p>
-          <a:p>
-            <a:pPr marL="0" indent="0" algn="l">
-              <a:lnSpc>
-                <a:spcPct val="128000"/>
-              </a:lnSpc>
-              <a:spcAft>
-                <a:spcPts val="600"/>
-              </a:spcAft>
-              <a:buNone/>
-            </a:pPr>
-            <a:r>
-              <a:rPr sz="1700" b="0">
-                <a:solidFill>
-                  <a:srgbClr val="000000"/>
-                </a:solidFill>
-                <a:latin typeface="Arial"/>
-              </a:rPr>
-              <a:t>If you want to drive something that is not in front of you, go and get it.</a:t>
-            </a:r>
-          </a:p>
-        </p:txBody>
-      </p:sp>
-      <p:pic>
-        <p:nvPicPr>
-          <p:cNvPr id="4" name="Picture 3" descr="wordmark_dark.png"/>
-          <p:cNvPicPr>
-            <a:picLocks noChangeAspect="1"/>
-          </p:cNvPicPr>
-          <p:nvPr/>
-        </p:nvPicPr>
-        <p:blipFill>
-          <a:blip r:embed="rId2"/>
-          <a:stretch>
-            <a:fillRect/>
-          </a:stretch>
-        </p:blipFill>
-        <p:spPr>
-          <a:xfrm>
-            <a:off x="342900" y="6184900"/>
-            <a:ext cx="2070100" cy="529560"/>
-          </a:xfrm>
-          <a:prstGeom prst="rect">
-            <a:avLst/>
-          </a:prstGeom>
-        </p:spPr>
-      </p:pic>
-      <p:pic>
-        <p:nvPicPr>
-          <p:cNvPr id="5" name="Picture 4" descr="seal_dark.png"/>
-          <p:cNvPicPr>
-            <a:picLocks noChangeAspect="1"/>
-          </p:cNvPicPr>
-          <p:nvPr/>
-        </p:nvPicPr>
-        <p:blipFill>
-          <a:blip r:embed="rId3"/>
-          <a:stretch>
-            <a:fillRect/>
-          </a:stretch>
-        </p:blipFill>
-        <p:spPr>
-          <a:xfrm>
-            <a:off x="11226800" y="5969000"/>
-            <a:ext cx="713915" cy="711200"/>
-          </a:xfrm>
-          <a:prstGeom prst="rect">
-            <a:avLst/>
-          </a:prstGeom>
-        </p:spPr>
-      </p:pic>
-    </p:spTree>
-  </p:cSld>
-  <p:clrMapOvr>
-    <a:masterClrMapping/>
-  </p:clrMapOvr>
-</p:sld>
-</file>
-
 <file path=ppt/slides/slide21.xml><?xml version="1.0" encoding="utf-8"?>
 <p:sld xmlns:a="http://schemas.openxmlformats.org/drawingml/2006/main" xmlns:p="http://schemas.openxmlformats.org/presentationml/2006/main" xmlns:r="http://schemas.openxmlformats.org/officeDocument/2006/relationships">
   <p:cSld>
@@ -9524,7 +10010,7 @@
                 </a:solidFill>
                 <a:latin typeface="Arial"/>
               </a:rPr>
-              <a:t>BEFORE YOU POWER ANYTHING</a:t>
+              <a:t>FREESTYLE IS ENCOURAGED</a:t>
             </a:r>
           </a:p>
         </p:txBody>
@@ -9560,7 +10046,7 @@
                 </a:solidFill>
                 <a:latin typeface="Arial"/>
               </a:rPr>
-              <a:t>The solenoid and the Peltier both pull real current.</a:t>
+              <a:t>You do not have to do the tasks in order.</a:t>
             </a:r>
           </a:p>
           <a:p>
@@ -9574,13 +10060,13 @@
               <a:buNone/>
             </a:pPr>
             <a:r>
-              <a:rPr sz="1500" b="0">
-                <a:solidFill>
-                  <a:srgbClr val="000000"/>
-                </a:solidFill>
-                <a:latin typeface="Arial"/>
-              </a:rPr>
-              <a:t>• They need their own supply. Ask before you rewire either.</a:t>
+              <a:rPr sz="1700" b="1">
+                <a:solidFill>
+                  <a:srgbClr val="000000"/>
+                </a:solidFill>
+                <a:latin typeface="Arial"/>
+              </a:rPr>
+              <a:t>You do not have to finish them.</a:t>
             </a:r>
           </a:p>
           <a:p>
@@ -9605,14 +10091,25 @@
               <a:buNone/>
             </a:pPr>
             <a:r>
-              <a:rPr sz="1700" b="1">
-                <a:solidFill>
-                  <a:srgbClr val="000000"/>
-                </a:solidFill>
-                <a:latin typeface="Arial"/>
-              </a:rPr>
-              <a:t>The Peltier needs its heatsink on. Every time.</a:t>
-            </a:r>
+              <a:rPr sz="1700" b="0">
+                <a:solidFill>
+                  <a:srgbClr val="000000"/>
+                </a:solidFill>
+                <a:latin typeface="Arial"/>
+              </a:rPr>
+              <a:t>Getting task 01 working and then properly playing with task 02 beats rushing through all five.</a:t>
+            </a:r>
+          </a:p>
+          <a:p>
+            <a:pPr marL="0" indent="0" algn="l">
+              <a:lnSpc>
+                <a:spcPct val="128000"/>
+              </a:lnSpc>
+              <a:spcAft>
+                <a:spcPts val="0"/>
+              </a:spcAft>
+              <a:buNone/>
+            </a:pPr>
           </a:p>
           <a:p>
             <a:pPr marL="0" indent="0" algn="l">
@@ -9625,64 +10122,13 @@
               <a:buNone/>
             </a:pPr>
             <a:r>
-              <a:rPr sz="1500" b="0">
-                <a:solidFill>
-                  <a:srgbClr val="000000"/>
-                </a:solidFill>
-                <a:latin typeface="Arial"/>
-              </a:rPr>
-              <a:t>• Without it the tile cooks itself in about a minute.</a:t>
-            </a:r>
-          </a:p>
-          <a:p>
-            <a:pPr marL="0" indent="0" algn="l">
-              <a:lnSpc>
-                <a:spcPct val="128000"/>
-              </a:lnSpc>
-              <a:spcAft>
-                <a:spcPts val="0"/>
-              </a:spcAft>
-              <a:buNone/>
-            </a:pPr>
-          </a:p>
-          <a:p>
-            <a:pPr marL="0" indent="0" algn="l">
-              <a:lnSpc>
-                <a:spcPct val="128000"/>
-              </a:lnSpc>
-              <a:spcAft>
-                <a:spcPts val="600"/>
-              </a:spcAft>
-              <a:buNone/>
-            </a:pPr>
-            <a:r>
-              <a:rPr sz="1700" b="1">
-                <a:solidFill>
-                  <a:srgbClr val="000000"/>
-                </a:solidFill>
-                <a:latin typeface="Arial"/>
-              </a:rPr>
-              <a:t>Never drive a motor straight from a pin.</a:t>
-            </a:r>
-          </a:p>
-          <a:p>
-            <a:pPr marL="0" indent="0" algn="l">
-              <a:lnSpc>
-                <a:spcPct val="128000"/>
-              </a:lnSpc>
-              <a:spcAft>
-                <a:spcPts val="600"/>
-              </a:spcAft>
-              <a:buNone/>
-            </a:pPr>
-            <a:r>
-              <a:rPr sz="1500" b="0">
-                <a:solidFill>
-                  <a:srgbClr val="000000"/>
-                </a:solidFill>
-                <a:latin typeface="Arial"/>
-              </a:rPr>
-              <a:t>• 40 mA limit. The motor wants nearly twice that.</a:t>
+              <a:rPr sz="1700" b="0">
+                <a:solidFill>
+                  <a:srgbClr val="000000"/>
+                </a:solidFill>
+                <a:latin typeface="Arial"/>
+              </a:rPr>
+              <a:t>If you want to drive something that is not in front of you, go and get it.</a:t>
             </a:r>
           </a:p>
         </p:txBody>
@@ -9778,7 +10224,7 @@
                 </a:solidFill>
                 <a:latin typeface="Arial"/>
               </a:rPr>
-              <a:t>THE ONE THAT SURPRISES PEOPLE</a:t>
+              <a:t>BEFORE YOU POWER ANYTHING</a:t>
             </a:r>
           </a:p>
         </p:txBody>
@@ -9803,26 +10249,6 @@
                 <a:spcPct val="128000"/>
               </a:lnSpc>
               <a:spcAft>
-                <a:spcPts val="1400"/>
-              </a:spcAft>
-              <a:buNone/>
-            </a:pPr>
-            <a:r>
-              <a:rPr sz="1700" b="0">
-                <a:solidFill>
-                  <a:srgbClr val="595959"/>
-                </a:solidFill>
-                <a:latin typeface="Arial"/>
-              </a:rPr>
-              <a:t>Touch input for the price of a wire. The thinking is where it costs you.</a:t>
-            </a:r>
-          </a:p>
-          <a:p>
-            <a:pPr marL="0" indent="0" algn="l">
-              <a:lnSpc>
-                <a:spcPct val="128000"/>
-              </a:lnSpc>
-              <a:spcAft>
                 <a:spcPts val="600"/>
               </a:spcAft>
               <a:buNone/>
@@ -9834,7 +10260,27 @@
                 </a:solidFill>
                 <a:latin typeface="Arial"/>
               </a:rPr>
-              <a:t>reading &gt; baselineAverage() * 1.01</a:t>
+              <a:t>The solenoid and the Peltier both pull real current.</a:t>
+            </a:r>
+          </a:p>
+          <a:p>
+            <a:pPr marL="0" indent="0" algn="l">
+              <a:lnSpc>
+                <a:spcPct val="128000"/>
+              </a:lnSpc>
+              <a:spcAft>
+                <a:spcPts val="600"/>
+              </a:spcAft>
+              <a:buNone/>
+            </a:pPr>
+            <a:r>
+              <a:rPr sz="1500" b="0">
+                <a:solidFill>
+                  <a:srgbClr val="000000"/>
+                </a:solidFill>
+                <a:latin typeface="Arial"/>
+              </a:rPr>
+              <a:t>• They need their own supply. Ask before you rewire either.</a:t>
             </a:r>
           </a:p>
           <a:p>
@@ -9865,7 +10311,7 @@
                 </a:solidFill>
                 <a:latin typeface="Arial"/>
               </a:rPr>
-              <a:t>Threshold is relative, never absolute</a:t>
+              <a:t>The Peltier needs its heatsink on. Every time.</a:t>
             </a:r>
           </a:p>
           <a:p>
@@ -9885,8 +10331,19 @@
                 </a:solidFill>
                 <a:latin typeface="Arial"/>
               </a:rPr>
-              <a:t>• Readings drift with humidity and mains hum</a:t>
-            </a:r>
+              <a:t>• Without it the tile cooks itself in about a minute.</a:t>
+            </a:r>
+          </a:p>
+          <a:p>
+            <a:pPr marL="0" indent="0" algn="l">
+              <a:lnSpc>
+                <a:spcPct val="128000"/>
+              </a:lnSpc>
+              <a:spcAft>
+                <a:spcPts val="0"/>
+              </a:spcAft>
+              <a:buNone/>
+            </a:pPr>
           </a:p>
           <a:p>
             <a:pPr marL="0" indent="0" algn="l">
@@ -9899,64 +10356,33 @@
               <a:buNone/>
             </a:pPr>
             <a:r>
+              <a:rPr sz="1700" b="1">
+                <a:solidFill>
+                  <a:srgbClr val="000000"/>
+                </a:solidFill>
+                <a:latin typeface="Arial"/>
+              </a:rPr>
+              <a:t>Never drive a motor straight from a pin.</a:t>
+            </a:r>
+          </a:p>
+          <a:p>
+            <a:pPr marL="0" indent="0" algn="l">
+              <a:lnSpc>
+                <a:spcPct val="128000"/>
+              </a:lnSpc>
+              <a:spcAft>
+                <a:spcPts val="600"/>
+              </a:spcAft>
+              <a:buNone/>
+            </a:pPr>
+            <a:r>
               <a:rPr sz="1500" b="0">
                 <a:solidFill>
                   <a:srgbClr val="000000"/>
                 </a:solidFill>
                 <a:latin typeface="Arial"/>
               </a:rPr>
-              <a:t>• Fixed threshold works at 9am, fails at 1pm</a:t>
-            </a:r>
-          </a:p>
-          <a:p>
-            <a:pPr marL="0" indent="0" algn="l">
-              <a:lnSpc>
-                <a:spcPct val="128000"/>
-              </a:lnSpc>
-              <a:spcAft>
-                <a:spcPts val="0"/>
-              </a:spcAft>
-              <a:buNone/>
-            </a:pPr>
-          </a:p>
-          <a:p>
-            <a:pPr marL="0" indent="0" algn="l">
-              <a:lnSpc>
-                <a:spcPct val="128000"/>
-              </a:lnSpc>
-              <a:spcAft>
-                <a:spcPts val="600"/>
-              </a:spcAft>
-              <a:buNone/>
-            </a:pPr>
-            <a:r>
-              <a:rPr sz="1700" b="1">
-                <a:solidFill>
-                  <a:srgbClr val="000000"/>
-                </a:solidFill>
-                <a:latin typeface="Arial"/>
-              </a:rPr>
-              <a:t>Baseline only learns while untouched</a:t>
-            </a:r>
-          </a:p>
-          <a:p>
-            <a:pPr marL="0" indent="0" algn="l">
-              <a:lnSpc>
-                <a:spcPct val="128000"/>
-              </a:lnSpc>
-              <a:spcAft>
-                <a:spcPts val="600"/>
-              </a:spcAft>
-              <a:buNone/>
-            </a:pPr>
-            <a:r>
-              <a:rPr sz="1500" b="0">
-                <a:solidFill>
-                  <a:srgbClr val="000000"/>
-                </a:solidFill>
-                <a:latin typeface="Arial"/>
-              </a:rPr>
-              <a:t>• Or a long press teaches it that a finger is normal</a:t>
+              <a:t>• 40 mA limit. The motor wants nearly twice that.</a:t>
             </a:r>
           </a:p>
         </p:txBody>
@@ -10046,6 +10472,280 @@
               <a:buNone/>
             </a:pPr>
             <a:r>
+              <a:rPr sz="3200" b="1">
+                <a:solidFill>
+                  <a:srgbClr val="000000"/>
+                </a:solidFill>
+                <a:latin typeface="Arial"/>
+              </a:rPr>
+              <a:t>THE ONE THAT SURPRISES PEOPLE</a:t>
+            </a:r>
+          </a:p>
+        </p:txBody>
+      </p:sp>
+      <p:sp>
+        <p:nvSpPr>
+          <p:cNvPr id="3" name="Text Placeholder 2"/>
+          <p:cNvSpPr>
+            <a:spLocks noGrp="1"/>
+          </p:cNvSpPr>
+          <p:nvPr>
+            <p:ph type="body" idx="1"/>
+          </p:nvPr>
+        </p:nvSpPr>
+        <p:spPr/>
+        <p:txBody>
+          <a:bodyPr/>
+          <a:lstStyle/>
+          <a:p>
+            <a:pPr marL="0" indent="0" algn="l">
+              <a:lnSpc>
+                <a:spcPct val="128000"/>
+              </a:lnSpc>
+              <a:spcAft>
+                <a:spcPts val="1400"/>
+              </a:spcAft>
+              <a:buNone/>
+            </a:pPr>
+            <a:r>
+              <a:rPr sz="1700" b="0">
+                <a:solidFill>
+                  <a:srgbClr val="595959"/>
+                </a:solidFill>
+                <a:latin typeface="Arial"/>
+              </a:rPr>
+              <a:t>Touch input for the price of a wire. The thinking is where it costs you.</a:t>
+            </a:r>
+          </a:p>
+          <a:p>
+            <a:pPr marL="0" indent="0" algn="l">
+              <a:lnSpc>
+                <a:spcPct val="128000"/>
+              </a:lnSpc>
+              <a:spcAft>
+                <a:spcPts val="600"/>
+              </a:spcAft>
+              <a:buNone/>
+            </a:pPr>
+            <a:r>
+              <a:rPr sz="1700" b="1">
+                <a:solidFill>
+                  <a:srgbClr val="000000"/>
+                </a:solidFill>
+                <a:latin typeface="Arial"/>
+              </a:rPr>
+              <a:t>reading &gt; baselineAverage() * 1.01</a:t>
+            </a:r>
+          </a:p>
+          <a:p>
+            <a:pPr marL="0" indent="0" algn="l">
+              <a:lnSpc>
+                <a:spcPct val="128000"/>
+              </a:lnSpc>
+              <a:spcAft>
+                <a:spcPts val="0"/>
+              </a:spcAft>
+              <a:buNone/>
+            </a:pPr>
+          </a:p>
+          <a:p>
+            <a:pPr marL="0" indent="0" algn="l">
+              <a:lnSpc>
+                <a:spcPct val="128000"/>
+              </a:lnSpc>
+              <a:spcAft>
+                <a:spcPts val="600"/>
+              </a:spcAft>
+              <a:buNone/>
+            </a:pPr>
+            <a:r>
+              <a:rPr sz="1700" b="1">
+                <a:solidFill>
+                  <a:srgbClr val="000000"/>
+                </a:solidFill>
+                <a:latin typeface="Arial"/>
+              </a:rPr>
+              <a:t>Threshold is relative, never absolute</a:t>
+            </a:r>
+          </a:p>
+          <a:p>
+            <a:pPr marL="0" indent="0" algn="l">
+              <a:lnSpc>
+                <a:spcPct val="128000"/>
+              </a:lnSpc>
+              <a:spcAft>
+                <a:spcPts val="600"/>
+              </a:spcAft>
+              <a:buNone/>
+            </a:pPr>
+            <a:r>
+              <a:rPr sz="1500" b="0">
+                <a:solidFill>
+                  <a:srgbClr val="000000"/>
+                </a:solidFill>
+                <a:latin typeface="Arial"/>
+              </a:rPr>
+              <a:t>• Readings drift with humidity and mains hum</a:t>
+            </a:r>
+          </a:p>
+          <a:p>
+            <a:pPr marL="0" indent="0" algn="l">
+              <a:lnSpc>
+                <a:spcPct val="128000"/>
+              </a:lnSpc>
+              <a:spcAft>
+                <a:spcPts val="600"/>
+              </a:spcAft>
+              <a:buNone/>
+            </a:pPr>
+            <a:r>
+              <a:rPr sz="1500" b="0">
+                <a:solidFill>
+                  <a:srgbClr val="000000"/>
+                </a:solidFill>
+                <a:latin typeface="Arial"/>
+              </a:rPr>
+              <a:t>• Fixed threshold works at 9am, fails at 1pm</a:t>
+            </a:r>
+          </a:p>
+          <a:p>
+            <a:pPr marL="0" indent="0" algn="l">
+              <a:lnSpc>
+                <a:spcPct val="128000"/>
+              </a:lnSpc>
+              <a:spcAft>
+                <a:spcPts val="0"/>
+              </a:spcAft>
+              <a:buNone/>
+            </a:pPr>
+          </a:p>
+          <a:p>
+            <a:pPr marL="0" indent="0" algn="l">
+              <a:lnSpc>
+                <a:spcPct val="128000"/>
+              </a:lnSpc>
+              <a:spcAft>
+                <a:spcPts val="600"/>
+              </a:spcAft>
+              <a:buNone/>
+            </a:pPr>
+            <a:r>
+              <a:rPr sz="1700" b="1">
+                <a:solidFill>
+                  <a:srgbClr val="000000"/>
+                </a:solidFill>
+                <a:latin typeface="Arial"/>
+              </a:rPr>
+              <a:t>Baseline only learns while untouched</a:t>
+            </a:r>
+          </a:p>
+          <a:p>
+            <a:pPr marL="0" indent="0" algn="l">
+              <a:lnSpc>
+                <a:spcPct val="128000"/>
+              </a:lnSpc>
+              <a:spcAft>
+                <a:spcPts val="600"/>
+              </a:spcAft>
+              <a:buNone/>
+            </a:pPr>
+            <a:r>
+              <a:rPr sz="1500" b="0">
+                <a:solidFill>
+                  <a:srgbClr val="000000"/>
+                </a:solidFill>
+                <a:latin typeface="Arial"/>
+              </a:rPr>
+              <a:t>• Or a long press teaches it that a finger is normal</a:t>
+            </a:r>
+          </a:p>
+        </p:txBody>
+      </p:sp>
+      <p:pic>
+        <p:nvPicPr>
+          <p:cNvPr id="4" name="Picture 3" descr="wordmark_dark.png"/>
+          <p:cNvPicPr>
+            <a:picLocks noChangeAspect="1"/>
+          </p:cNvPicPr>
+          <p:nvPr/>
+        </p:nvPicPr>
+        <p:blipFill>
+          <a:blip r:embed="rId2"/>
+          <a:stretch>
+            <a:fillRect/>
+          </a:stretch>
+        </p:blipFill>
+        <p:spPr>
+          <a:xfrm>
+            <a:off x="342900" y="6184900"/>
+            <a:ext cx="2070100" cy="529560"/>
+          </a:xfrm>
+          <a:prstGeom prst="rect">
+            <a:avLst/>
+          </a:prstGeom>
+        </p:spPr>
+      </p:pic>
+      <p:pic>
+        <p:nvPicPr>
+          <p:cNvPr id="5" name="Picture 4" descr="seal_dark.png"/>
+          <p:cNvPicPr>
+            <a:picLocks noChangeAspect="1"/>
+          </p:cNvPicPr>
+          <p:nvPr/>
+        </p:nvPicPr>
+        <p:blipFill>
+          <a:blip r:embed="rId3"/>
+          <a:stretch>
+            <a:fillRect/>
+          </a:stretch>
+        </p:blipFill>
+        <p:spPr>
+          <a:xfrm>
+            <a:off x="11226800" y="5969000"/>
+            <a:ext cx="713915" cy="711200"/>
+          </a:xfrm>
+          <a:prstGeom prst="rect">
+            <a:avLst/>
+          </a:prstGeom>
+        </p:spPr>
+      </p:pic>
+    </p:spTree>
+  </p:cSld>
+  <p:clrMapOvr>
+    <a:masterClrMapping/>
+  </p:clrMapOvr>
+</p:sld>
+</file>
+
+<file path=ppt/slides/slide24.xml><?xml version="1.0" encoding="utf-8"?>
+<p:sld xmlns:a="http://schemas.openxmlformats.org/drawingml/2006/main" xmlns:p="http://schemas.openxmlformats.org/presentationml/2006/main" xmlns:r="http://schemas.openxmlformats.org/officeDocument/2006/relationships">
+  <p:cSld>
+    <p:spTree>
+      <p:nvGrpSpPr>
+        <p:cNvPr id="1" name=""/>
+        <p:cNvGrpSpPr/>
+        <p:nvPr/>
+      </p:nvGrpSpPr>
+      <p:grpSpPr/>
+      <p:sp>
+        <p:nvSpPr>
+          <p:cNvPr id="2" name="Title 1"/>
+          <p:cNvSpPr>
+            <a:spLocks noGrp="1"/>
+          </p:cNvSpPr>
+          <p:nvPr>
+            <p:ph type="title"/>
+          </p:nvPr>
+        </p:nvSpPr>
+        <p:spPr/>
+        <p:txBody>
+          <a:bodyPr/>
+          <a:lstStyle/>
+          <a:p>
+            <a:pPr marL="0" indent="0" algn="l">
+              <a:buNone/>
+            </a:pPr>
+            <a:r>
               <a:rPr sz="4400" b="1">
                 <a:solidFill>
                   <a:srgbClr val="000000"/>
@@ -10113,7 +10813,7 @@
 </p:sld>
 </file>
 
-<file path=ppt/slides/slide24.xml><?xml version="1.0" encoding="utf-8"?>
+<file path=ppt/slides/slide25.xml><?xml version="1.0" encoding="utf-8"?>
 <p:sld xmlns:a="http://schemas.openxmlformats.org/drawingml/2006/main" xmlns:p="http://schemas.openxmlformats.org/presentationml/2006/main" xmlns:r="http://schemas.openxmlformats.org/officeDocument/2006/relationships">
   <p:cSld>
     <p:spTree>
@@ -10224,67 +10924,7 @@
                 </a:solidFill>
                 <a:latin typeface="Arial"/>
               </a:rPr>
-              <a:t>• Heart rate (PPG). Useless once the hand moves</a:t>
-            </a:r>
-          </a:p>
-          <a:p>
-            <a:pPr marL="0" indent="0" algn="l">
-              <a:lnSpc>
-                <a:spcPct val="128000"/>
-              </a:lnSpc>
-              <a:spcAft>
-                <a:spcPts val="600"/>
-              </a:spcAft>
-              <a:buNone/>
-            </a:pPr>
-            <a:r>
-              <a:rPr sz="1500" b="0">
-                <a:solidFill>
-                  <a:srgbClr val="000000"/>
-                </a:solidFill>
-                <a:latin typeface="Arial"/>
-              </a:rPr>
-              <a:t>• Skin conductance (GSR). Relative change only</a:t>
-            </a:r>
-          </a:p>
-          <a:p>
-            <a:pPr marL="0" indent="0" algn="l">
-              <a:lnSpc>
-                <a:spcPct val="128000"/>
-              </a:lnSpc>
-              <a:spcAft>
-                <a:spcPts val="600"/>
-              </a:spcAft>
-              <a:buNone/>
-            </a:pPr>
-            <a:r>
-              <a:rPr sz="1500" b="0">
-                <a:solidFill>
-                  <a:srgbClr val="000000"/>
-                </a:solidFill>
-                <a:latin typeface="Arial"/>
-              </a:rPr>
-              <a:t>• Flex sensor. The cheap data glove</a:t>
-            </a:r>
-          </a:p>
-          <a:p>
-            <a:pPr marL="0" indent="0" algn="l">
-              <a:lnSpc>
-                <a:spcPct val="128000"/>
-              </a:lnSpc>
-              <a:spcAft>
-                <a:spcPts val="600"/>
-              </a:spcAft>
-              <a:buNone/>
-            </a:pPr>
-            <a:r>
-              <a:rPr sz="1500" b="0">
-                <a:solidFill>
-                  <a:srgbClr val="000000"/>
-                </a:solidFill>
-                <a:latin typeface="Arial"/>
-              </a:rPr>
-              <a:t>• Pressure (FSR). Calibrate every pad</a:t>
+              <a:t>• GSR, drawer 0C5. Exactly one in the lab, so ask first</a:t>
             </a:r>
           </a:p>
           <a:p>
@@ -10357,310 +10997,24 @@
           </a:prstGeom>
         </p:spPr>
       </p:pic>
-    </p:spTree>
-  </p:cSld>
-  <p:clrMapOvr>
-    <a:masterClrMapping/>
-  </p:clrMapOvr>
-</p:sld>
-</file>
-
-<file path=ppt/slides/slide25.xml><?xml version="1.0" encoding="utf-8"?>
-<p:sld xmlns:a="http://schemas.openxmlformats.org/drawingml/2006/main" xmlns:p="http://schemas.openxmlformats.org/presentationml/2006/main" xmlns:r="http://schemas.openxmlformats.org/officeDocument/2006/relationships">
-  <p:cSld>
-    <p:spTree>
-      <p:nvGrpSpPr>
-        <p:cNvPr id="1" name=""/>
-        <p:cNvGrpSpPr/>
-        <p:nvPr/>
-      </p:nvGrpSpPr>
-      <p:grpSpPr/>
-      <p:sp>
-        <p:nvSpPr>
-          <p:cNvPr id="2" name="Title 1"/>
-          <p:cNvSpPr>
-            <a:spLocks noGrp="1"/>
-          </p:cNvSpPr>
-          <p:nvPr>
-            <p:ph type="title"/>
-          </p:nvPr>
-        </p:nvSpPr>
-        <p:spPr/>
-        <p:txBody>
-          <a:bodyPr/>
-          <a:lstStyle/>
-          <a:p>
-            <a:pPr marL="0" indent="0" algn="l">
-              <a:buNone/>
-            </a:pPr>
-            <a:r>
-              <a:rPr sz="3200" b="1">
-                <a:solidFill>
-                  <a:srgbClr val="000000"/>
-                </a:solidFill>
-                <a:latin typeface="Arial"/>
-              </a:rPr>
-              <a:t>THE SENSORS ALREADY IN THE ROOM</a:t>
-            </a:r>
-          </a:p>
-        </p:txBody>
-      </p:sp>
-      <p:sp>
-        <p:nvSpPr>
-          <p:cNvPr id="3" name="Text Placeholder 2"/>
-          <p:cNvSpPr>
-            <a:spLocks noGrp="1"/>
-          </p:cNvSpPr>
-          <p:nvPr>
-            <p:ph type="body" idx="1"/>
-          </p:nvPr>
-        </p:nvSpPr>
-        <p:spPr/>
-        <p:txBody>
-          <a:bodyPr/>
-          <a:lstStyle/>
-          <a:p>
-            <a:pPr marL="0" indent="0" algn="l">
-              <a:lnSpc>
-                <a:spcPct val="128000"/>
-              </a:lnSpc>
-              <a:spcAft>
-                <a:spcPts val="1400"/>
-              </a:spcAft>
-              <a:buNone/>
-            </a:pPr>
-            <a:r>
-              <a:rPr sz="1700" b="0">
-                <a:solidFill>
-                  <a:srgbClr val="595959"/>
-                </a:solidFill>
-                <a:latin typeface="Arial"/>
-              </a:rPr>
-              <a:t>Every phone here is a multimodal device. Some of it the browser will hand you, some of it it will not.</a:t>
-            </a:r>
-          </a:p>
-          <a:p>
-            <a:pPr marL="0" indent="0" algn="l">
-              <a:lnSpc>
-                <a:spcPct val="128000"/>
-              </a:lnSpc>
-              <a:spcAft>
-                <a:spcPts val="600"/>
-              </a:spcAft>
-              <a:buNone/>
-            </a:pPr>
-            <a:r>
-              <a:rPr sz="1700" b="1">
-                <a:solidFill>
-                  <a:srgbClr val="000000"/>
-                </a:solidFill>
-                <a:latin typeface="Arial"/>
-              </a:rPr>
-              <a:t>Open sensors.chomskylab.dk on your phone right now</a:t>
-            </a:r>
-          </a:p>
-          <a:p>
-            <a:pPr marL="0" indent="0" algn="l">
-              <a:lnSpc>
-                <a:spcPct val="128000"/>
-              </a:lnSpc>
-              <a:spcAft>
-                <a:spcPts val="0"/>
-              </a:spcAft>
-              <a:buNone/>
-            </a:pPr>
-          </a:p>
-          <a:p>
-            <a:pPr marL="0" indent="0" algn="l">
-              <a:lnSpc>
-                <a:spcPct val="128000"/>
-              </a:lnSpc>
-              <a:spcAft>
-                <a:spcPts val="600"/>
-              </a:spcAft>
-              <a:buNone/>
-            </a:pPr>
-            <a:r>
-              <a:rPr sz="1700" b="1">
-                <a:solidFill>
-                  <a:srgbClr val="000000"/>
-                </a:solidFill>
-                <a:latin typeface="Arial"/>
-              </a:rPr>
-              <a:t>Works in a web page today</a:t>
-            </a:r>
-          </a:p>
-          <a:p>
-            <a:pPr marL="0" indent="0" algn="l">
-              <a:lnSpc>
-                <a:spcPct val="128000"/>
-              </a:lnSpc>
-              <a:spcAft>
-                <a:spcPts val="600"/>
-              </a:spcAft>
-              <a:buNone/>
-            </a:pPr>
-            <a:r>
-              <a:rPr sz="1500" b="0">
-                <a:solidFill>
-                  <a:srgbClr val="000000"/>
-                </a:solidFill>
-                <a:latin typeface="Arial"/>
-              </a:rPr>
-              <a:t>• Accelerometer and gyroscope. Tap to grant, HTTPS only</a:t>
-            </a:r>
-          </a:p>
-          <a:p>
-            <a:pPr marL="0" indent="0" algn="l">
-              <a:lnSpc>
-                <a:spcPct val="128000"/>
-              </a:lnSpc>
-              <a:spcAft>
-                <a:spcPts val="600"/>
-              </a:spcAft>
-              <a:buNone/>
-            </a:pPr>
-            <a:r>
-              <a:rPr sz="1500" b="0">
-                <a:solidFill>
-                  <a:srgbClr val="000000"/>
-                </a:solidFill>
-                <a:latin typeface="Arial"/>
-              </a:rPr>
-              <a:t>• Microphone. Easiest continuous input there is</a:t>
-            </a:r>
-          </a:p>
-          <a:p>
-            <a:pPr marL="0" indent="0" algn="l">
-              <a:lnSpc>
-                <a:spcPct val="128000"/>
-              </a:lnSpc>
-              <a:spcAft>
-                <a:spcPts val="600"/>
-              </a:spcAft>
-              <a:buNone/>
-            </a:pPr>
-            <a:r>
-              <a:rPr sz="1500" b="0">
-                <a:solidFill>
-                  <a:srgbClr val="000000"/>
-                </a:solidFill>
-                <a:latin typeface="Arial"/>
-              </a:rPr>
-              <a:t>• Camera. Even reads a pulse off a face, badly</a:t>
-            </a:r>
-          </a:p>
-          <a:p>
-            <a:pPr marL="0" indent="0" algn="l">
-              <a:lnSpc>
-                <a:spcPct val="128000"/>
-              </a:lnSpc>
-              <a:spcAft>
-                <a:spcPts val="600"/>
-              </a:spcAft>
-              <a:buNone/>
-            </a:pPr>
-            <a:r>
-              <a:rPr sz="1500" b="0">
-                <a:solidFill>
-                  <a:srgbClr val="000000"/>
-                </a:solidFill>
-                <a:latin typeface="Arial"/>
-              </a:rPr>
-              <a:t>• Trackpad pressure. Pointer Events carry a 0 to 1 force</a:t>
-            </a:r>
-          </a:p>
-          <a:p>
-            <a:pPr marL="0" indent="0" algn="l">
-              <a:lnSpc>
-                <a:spcPct val="128000"/>
-              </a:lnSpc>
-              <a:spcAft>
-                <a:spcPts val="0"/>
-              </a:spcAft>
-              <a:buNone/>
-            </a:pPr>
-          </a:p>
-          <a:p>
-            <a:pPr marL="0" indent="0" algn="l">
-              <a:lnSpc>
-                <a:spcPct val="128000"/>
-              </a:lnSpc>
-              <a:spcAft>
-                <a:spcPts val="600"/>
-              </a:spcAft>
-              <a:buNone/>
-            </a:pPr>
-            <a:r>
-              <a:rPr sz="1700" b="1">
-                <a:solidFill>
-                  <a:srgbClr val="000000"/>
-                </a:solidFill>
-                <a:latin typeface="Arial"/>
-              </a:rPr>
-              <a:t>Does NOT work, whatever the tutorial says</a:t>
-            </a:r>
-          </a:p>
-          <a:p>
-            <a:pPr marL="0" indent="0" algn="l">
-              <a:lnSpc>
-                <a:spcPct val="128000"/>
-              </a:lnSpc>
-              <a:spcAft>
-                <a:spcPts val="600"/>
-              </a:spcAft>
-              <a:buNone/>
-            </a:pPr>
-            <a:r>
-              <a:rPr sz="1500" b="0">
-                <a:solidFill>
-                  <a:srgbClr val="000000"/>
-                </a:solidFill>
-                <a:latin typeface="Arial"/>
-              </a:rPr>
-              <a:t>• Phone vibration on iOS. WebKit has never shipped it</a:t>
-            </a:r>
-          </a:p>
-          <a:p>
-            <a:pPr marL="0" indent="0" algn="l">
-              <a:lnSpc>
-                <a:spcPct val="128000"/>
-              </a:lnSpc>
-              <a:spcAft>
-                <a:spcPts val="600"/>
-              </a:spcAft>
-              <a:buNone/>
-            </a:pPr>
-            <a:r>
-              <a:rPr sz="1500" b="0">
-                <a:solidFill>
-                  <a:srgbClr val="000000"/>
-                </a:solidFill>
-                <a:latin typeface="Arial"/>
-              </a:rPr>
-              <a:t>• Apple Watch or Garmin, live. Both need a native app</a:t>
-            </a:r>
-          </a:p>
-        </p:txBody>
-      </p:sp>
       <p:pic>
         <p:nvPicPr>
-          <p:cNvPr id="4" name="Picture 3" descr="wordmark_dark.png"/>
+          <p:cNvPr id="6" name="Picture 5" descr="fsr.jpg"/>
           <p:cNvPicPr>
             <a:picLocks noChangeAspect="1"/>
           </p:cNvPicPr>
           <p:nvPr/>
         </p:nvPicPr>
         <p:blipFill>
-          <a:blip r:embed="rId2"/>
+          <a:blip r:embed="rId4"/>
           <a:stretch>
             <a:fillRect/>
           </a:stretch>
         </p:blipFill>
         <p:spPr>
           <a:xfrm>
-            <a:off x="342900" y="6184900"/>
-            <a:ext cx="2070100" cy="529560"/>
+            <a:off x="914400" y="3276600"/>
+            <a:ext cx="1895230" cy="1422400"/>
           </a:xfrm>
           <a:prstGeom prst="rect">
             <a:avLst/>
@@ -10669,28 +11023,172 @@
       </p:pic>
       <p:pic>
         <p:nvPicPr>
-          <p:cNvPr id="5" name="Picture 4" descr="seal_dark.png"/>
+          <p:cNvPr id="7" name="Picture 6" descr="flex.jpg"/>
           <p:cNvPicPr>
             <a:picLocks noChangeAspect="1"/>
           </p:cNvPicPr>
           <p:nvPr/>
         </p:nvPicPr>
         <p:blipFill>
-          <a:blip r:embed="rId3"/>
+          <a:blip r:embed="rId5"/>
           <a:stretch>
             <a:fillRect/>
           </a:stretch>
         </p:blipFill>
         <p:spPr>
           <a:xfrm>
-            <a:off x="11226800" y="5969000"/>
-            <a:ext cx="713915" cy="711200"/>
+            <a:off x="2997200" y="3276600"/>
+            <a:ext cx="1895230" cy="1422400"/>
           </a:xfrm>
           <a:prstGeom prst="rect">
             <a:avLst/>
           </a:prstGeom>
         </p:spPr>
       </p:pic>
+      <p:pic>
+        <p:nvPicPr>
+          <p:cNvPr id="8" name="Picture 7" descr="pulse.jpg"/>
+          <p:cNvPicPr>
+            <a:picLocks noChangeAspect="1"/>
+          </p:cNvPicPr>
+          <p:nvPr/>
+        </p:nvPicPr>
+        <p:blipFill>
+          <a:blip r:embed="rId6"/>
+          <a:stretch>
+            <a:fillRect/>
+          </a:stretch>
+        </p:blipFill>
+        <p:spPr>
+          <a:xfrm>
+            <a:off x="5080000" y="3276600"/>
+            <a:ext cx="1422400" cy="1422400"/>
+          </a:xfrm>
+          <a:prstGeom prst="rect">
+            <a:avLst/>
+          </a:prstGeom>
+        </p:spPr>
+      </p:pic>
+      <p:sp>
+        <p:nvSpPr>
+          <p:cNvPr id="9" name="TextBox 8"/>
+          <p:cNvSpPr txBox="1"/>
+          <p:nvPr/>
+        </p:nvSpPr>
+        <p:spPr>
+          <a:xfrm>
+            <a:off x="914400" y="4775200"/>
+            <a:ext cx="1905000" cy="330200"/>
+          </a:xfrm>
+          <a:prstGeom prst="rect">
+            <a:avLst/>
+          </a:prstGeom>
+          <a:noFill/>
+        </p:spPr>
+        <p:txBody>
+          <a:bodyPr wrap="square" lIns="0" rIns="0" tIns="0" bIns="0">
+            <a:spAutoFit/>
+          </a:bodyPr>
+          <a:lstStyle/>
+          <a:p>
+            <a:pPr marL="0" indent="0" algn="l">
+              <a:lnSpc>
+                <a:spcPct val="115000"/>
+              </a:lnSpc>
+              <a:buNone/>
+            </a:pPr>
+            <a:r>
+              <a:rPr sz="900">
+                <a:solidFill>
+                  <a:srgbClr val="595959"/>
+                </a:solidFill>
+                <a:latin typeface="Arial"/>
+              </a:rPr>
+              <a:t>Force (FSR), 4A. 46 tiny, 33 square. Calibrate each one.</a:t>
+            </a:r>
+          </a:p>
+        </p:txBody>
+      </p:sp>
+      <p:sp>
+        <p:nvSpPr>
+          <p:cNvPr id="10" name="TextBox 9"/>
+          <p:cNvSpPr txBox="1"/>
+          <p:nvPr/>
+        </p:nvSpPr>
+        <p:spPr>
+          <a:xfrm>
+            <a:off x="2997200" y="4775200"/>
+            <a:ext cx="1905000" cy="330200"/>
+          </a:xfrm>
+          <a:prstGeom prst="rect">
+            <a:avLst/>
+          </a:prstGeom>
+          <a:noFill/>
+        </p:spPr>
+        <p:txBody>
+          <a:bodyPr wrap="square" lIns="0" rIns="0" tIns="0" bIns="0">
+            <a:spAutoFit/>
+          </a:bodyPr>
+          <a:lstStyle/>
+          <a:p>
+            <a:pPr marL="0" indent="0" algn="l">
+              <a:lnSpc>
+                <a:spcPct val="115000"/>
+              </a:lnSpc>
+              <a:buNone/>
+            </a:pPr>
+            <a:r>
+              <a:rPr sz="900">
+                <a:solidFill>
+                  <a:srgbClr val="595959"/>
+                </a:solidFill>
+                <a:latin typeface="Arial"/>
+              </a:rPr>
+              <a:t>Flex, 4B. Only 8 left, so share them.</a:t>
+            </a:r>
+          </a:p>
+        </p:txBody>
+      </p:sp>
+      <p:sp>
+        <p:nvSpPr>
+          <p:cNvPr id="11" name="TextBox 10"/>
+          <p:cNvSpPr txBox="1"/>
+          <p:nvPr/>
+        </p:nvSpPr>
+        <p:spPr>
+          <a:xfrm>
+            <a:off x="5080000" y="4775200"/>
+            <a:ext cx="1905000" cy="330200"/>
+          </a:xfrm>
+          <a:prstGeom prst="rect">
+            <a:avLst/>
+          </a:prstGeom>
+          <a:noFill/>
+        </p:spPr>
+        <p:txBody>
+          <a:bodyPr wrap="square" lIns="0" rIns="0" tIns="0" bIns="0">
+            <a:spAutoFit/>
+          </a:bodyPr>
+          <a:lstStyle/>
+          <a:p>
+            <a:pPr marL="0" indent="0" algn="l">
+              <a:lnSpc>
+                <a:spcPct val="115000"/>
+              </a:lnSpc>
+              <a:buNone/>
+            </a:pPr>
+            <a:r>
+              <a:rPr sz="900">
+                <a:solidFill>
+                  <a:srgbClr val="595959"/>
+                </a:solidFill>
+                <a:latin typeface="Arial"/>
+              </a:rPr>
+              <a:t>Pulse, 9D. 9 in stock. Steady at rest, useless once moving.</a:t>
+            </a:r>
+          </a:p>
+        </p:txBody>
+      </p:sp>
     </p:spTree>
   </p:cSld>
   <p:clrMapOvr>
@@ -10734,7 +11232,7 @@
                 </a:solidFill>
                 <a:latin typeface="Arial"/>
               </a:rPr>
-              <a:t>THE ONE TO CHECK BEFORE YOU PROMISE IT</a:t>
+              <a:t>YOU ALREADY WRITE CODE. WHY COME?</a:t>
             </a:r>
           </a:p>
         </p:txBody>
@@ -10770,7 +11268,7 @@
                 </a:solidFill>
                 <a:latin typeface="Arial"/>
               </a:rPr>
-              <a:t>navigator.vibrate: Android yes, iOS no, at every version to date.</a:t>
+              <a:t>Fair question. Three honest answers.</a:t>
             </a:r>
           </a:p>
           <a:p>
@@ -10784,13 +11282,13 @@
               <a:buNone/>
             </a:pPr>
             <a:r>
-              <a:rPr sz="1700" b="0">
-                <a:solidFill>
-                  <a:srgbClr val="000000"/>
-                </a:solidFill>
-                <a:latin typeface="Arial"/>
-              </a:rPr>
-              <a:t>caniuse lists Safari 3.1 to 27 as unsupported.</a:t>
+              <a:rPr sz="1700" b="1">
+                <a:solidFill>
+                  <a:srgbClr val="000000"/>
+                </a:solidFill>
+                <a:latin typeface="Arial"/>
+              </a:rPr>
+              <a:t>You cannot Google what something feels like</a:t>
             </a:r>
           </a:p>
           <a:p>
@@ -10804,13 +11302,13 @@
               <a:buNone/>
             </a:pPr>
             <a:r>
-              <a:rPr sz="1700" b="0">
-                <a:solidFill>
-                  <a:srgbClr val="000000"/>
-                </a:solidFill>
-                <a:latin typeface="Arial"/>
-              </a:rPr>
-              <a:t>Chrome and Firefox on iOS are Safari underneath, so they inherit the gap.</a:t>
+              <a:rPr sz="1500" b="0">
+                <a:solidFill>
+                  <a:srgbClr val="000000"/>
+                </a:solidFill>
+                <a:latin typeface="Arial"/>
+              </a:rPr>
+              <a:t>• A datasheet will not tell you a Peltier takes eight seconds, or that a knock reads as a person and a buzz reads as a machine.</a:t>
             </a:r>
           </a:p>
           <a:p>
@@ -10841,7 +11339,27 @@
                 </a:solidFill>
                 <a:latin typeface="Arial"/>
               </a:rPr>
-              <a:t>"The phone buzzes" therefore works on some of the room and no iPhones.</a:t>
+              <a:t>The parts are free and already here</a:t>
+            </a:r>
+          </a:p>
+          <a:p>
+            <a:pPr marL="0" indent="0" algn="l">
+              <a:lnSpc>
+                <a:spcPct val="128000"/>
+              </a:lnSpc>
+              <a:spcAft>
+                <a:spcPts val="600"/>
+              </a:spcAft>
+              <a:buNone/>
+            </a:pPr>
+            <a:r>
+              <a:rPr sz="1500" b="0">
+                <a:solidFill>
+                  <a:srgbClr val="000000"/>
+                </a:solidFill>
+                <a:latin typeface="Arial"/>
+              </a:rPr>
+              <a:t>• Borrowing beats ordering. Nothing to buy, nothing to wait for.</a:t>
             </a:r>
           </a:p>
           <a:p>
@@ -10866,13 +11384,33 @@
               <a:buNone/>
             </a:pPr>
             <a:r>
-              <a:rPr sz="1700" b="0">
-                <a:solidFill>
-                  <a:srgbClr val="000000"/>
-                </a:solidFill>
-                <a:latin typeface="Arial"/>
-              </a:rPr>
-              <a:t>Check the feature, not the tutorial, before it is in your plan.</a:t>
+              <a:rPr sz="1700" b="1">
+                <a:solidFill>
+                  <a:srgbClr val="000000"/>
+                </a:solidFill>
+                <a:latin typeface="Arial"/>
+              </a:rPr>
+              <a:t>Your own devices are full of sensors you cannot reach</a:t>
+            </a:r>
+          </a:p>
+          <a:p>
+            <a:pPr marL="0" indent="0" algn="l">
+              <a:lnSpc>
+                <a:spcPct val="128000"/>
+              </a:lnSpc>
+              <a:spcAft>
+                <a:spcPts val="600"/>
+              </a:spcAft>
+              <a:buNone/>
+            </a:pPr>
+            <a:r>
+              <a:rPr sz="1500" b="0">
+                <a:solidFill>
+                  <a:srgbClr val="000000"/>
+                </a:solidFill>
+                <a:latin typeface="Arial"/>
+              </a:rPr>
+              <a:t>• Find out today which ones open up, and which are locked.</a:t>
             </a:r>
           </a:p>
         </p:txBody>
@@ -10968,7 +11506,7 @@
                 </a:solidFill>
                 <a:latin typeface="Arial"/>
               </a:rPr>
-              <a:t>TWO RIGS THAT ALREADY EXIST</a:t>
+              <a:t>REVERSE ENGINEER WHAT YOU ALREADY OWN</a:t>
             </a:r>
           </a:p>
         </p:txBody>
@@ -11004,7 +11542,7 @@
                 </a:solidFill>
                 <a:latin typeface="Arial"/>
               </a:rPr>
-              <a:t>Built here, by students at roughly your stage.</a:t>
+              <a:t>The trackers in your pocket and on your wrist. What opens up, and what does not.</a:t>
             </a:r>
           </a:p>
           <a:p>
@@ -11024,7 +11562,7 @@
                 </a:solidFill>
                 <a:latin typeface="Arial"/>
               </a:rPr>
-              <a:t>Moving screen, Arduino Uno</a:t>
+              <a:t>BLE heart rate strap: readable from a web page</a:t>
             </a:r>
           </a:p>
           <a:p>
@@ -11044,7 +11582,7 @@
                 </a:solidFill>
                 <a:latin typeface="Arial"/>
               </a:rPr>
-              <a:t>• Breathes when idle. Retreats when touched</a:t>
+              <a:t>• Web Bluetooth, standard GATT. Chrome and Edge only</a:t>
             </a:r>
           </a:p>
           <a:p>
@@ -11058,25 +11596,34 @@
               <a:buNone/>
             </a:pPr>
             <a:r>
+              <a:rPr sz="1700" b="1">
+                <a:solidFill>
+                  <a:srgbClr val="000000"/>
+                </a:solidFill>
+                <a:latin typeface="Arial"/>
+              </a:rPr>
+              <a:t>Most Garmin watches: the same, with no app</a:t>
+            </a:r>
+          </a:p>
+          <a:p>
+            <a:pPr marL="0" indent="0" algn="l">
+              <a:lnSpc>
+                <a:spcPct val="128000"/>
+              </a:lnSpc>
+              <a:spcAft>
+                <a:spcPts val="600"/>
+              </a:spcAft>
+              <a:buNone/>
+            </a:pPr>
+            <a:r>
               <a:rPr sz="1500" b="0">
                 <a:solidFill>
                   <a:srgbClr val="000000"/>
                 </a:solidFill>
                 <a:latin typeface="Arial"/>
               </a:rPr>
-              <a:t>• Easing and idle motion do the work. A dozen lines</a:t>
-            </a:r>
-          </a:p>
-          <a:p>
-            <a:pPr marL="0" indent="0" algn="l">
-              <a:lnSpc>
-                <a:spcPct val="128000"/>
-              </a:lnSpc>
-              <a:spcAft>
-                <a:spcPts val="0"/>
-              </a:spcAft>
-              <a:buNone/>
-            </a:pPr>
+              <a:t>• Turn on Broadcast Heart Rate and it acts as a strap</a:t>
+            </a:r>
           </a:p>
           <a:p>
             <a:pPr marL="0" indent="0" algn="l">
@@ -11095,7 +11642,7 @@
                 </a:solidFill>
                 <a:latin typeface="Arial"/>
               </a:rPr>
-              <a:t>Instrumented sock, ESP32</a:t>
+              <a:t>Apple Watch: nothing live, whatever you write</a:t>
             </a:r>
           </a:p>
           <a:p>
@@ -11115,7 +11662,7 @@
                 </a:solidFill>
                 <a:latin typeface="Arial"/>
               </a:rPr>
-              <a:t>• Six force sensors under a foot, batched over Wi-Fi</a:t>
+              <a:t>• HealthKit needs a watchOS app in Swift</a:t>
             </a:r>
           </a:p>
           <a:p>
@@ -11129,13 +11676,33 @@
               <a:buNone/>
             </a:pPr>
             <a:r>
+              <a:rPr sz="1700" b="1">
+                <a:solidFill>
+                  <a:srgbClr val="000000"/>
+                </a:solidFill>
+                <a:latin typeface="Arial"/>
+              </a:rPr>
+              <a:t>Garmin history: Connect IQ, or the API afterwards</a:t>
+            </a:r>
+          </a:p>
+          <a:p>
+            <a:pPr marL="0" indent="0" algn="l">
+              <a:lnSpc>
+                <a:spcPct val="128000"/>
+              </a:lnSpc>
+              <a:spcAft>
+                <a:spcPts val="600"/>
+              </a:spcAft>
+              <a:buNone/>
+            </a:pPr>
+            <a:r>
               <a:rPr sz="1500" b="0">
                 <a:solidFill>
                   <a:srgbClr val="000000"/>
                 </a:solidFill>
                 <a:latin typeface="Arial"/>
               </a:rPr>
-              <a:t>• Calibrate per sensor. Batch your writes</a:t>
+              <a:t>• Good for analysis. Useless for reacting in real time</a:t>
             </a:r>
           </a:p>
         </p:txBody>
@@ -11225,20 +11792,258 @@
               <a:buNone/>
             </a:pPr>
             <a:r>
-              <a:rPr sz="4400" b="1">
-                <a:solidFill>
-                  <a:srgbClr val="000000"/>
-                </a:solidFill>
-                <a:latin typeface="Arial"/>
-              </a:rPr>
-              <a:t>BUILD ONE SIGNAL</a:t>
+              <a:rPr sz="3200" b="1">
+                <a:solidFill>
+                  <a:srgbClr val="000000"/>
+                </a:solidFill>
+                <a:latin typeface="Arial"/>
+              </a:rPr>
+              <a:t>THE SENSORS ALREADY IN THE ROOM</a:t>
+            </a:r>
+          </a:p>
+        </p:txBody>
+      </p:sp>
+      <p:sp>
+        <p:nvSpPr>
+          <p:cNvPr id="3" name="Text Placeholder 2"/>
+          <p:cNvSpPr>
+            <a:spLocks noGrp="1"/>
+          </p:cNvSpPr>
+          <p:nvPr>
+            <p:ph type="body" idx="1"/>
+          </p:nvPr>
+        </p:nvSpPr>
+        <p:spPr/>
+        <p:txBody>
+          <a:bodyPr/>
+          <a:lstStyle/>
+          <a:p>
+            <a:pPr marL="0" indent="0" algn="l">
+              <a:lnSpc>
+                <a:spcPct val="128000"/>
+              </a:lnSpc>
+              <a:spcAft>
+                <a:spcPts val="1400"/>
+              </a:spcAft>
+              <a:buNone/>
+            </a:pPr>
+            <a:r>
+              <a:rPr sz="1700" b="0">
+                <a:solidFill>
+                  <a:srgbClr val="595959"/>
+                </a:solidFill>
+                <a:latin typeface="Arial"/>
+              </a:rPr>
+              <a:t>Every phone here is a multimodal device. Some of it the browser will hand you, some of it it will not.</a:t>
+            </a:r>
+          </a:p>
+          <a:p>
+            <a:pPr marL="0" indent="0" algn="l">
+              <a:lnSpc>
+                <a:spcPct val="128000"/>
+              </a:lnSpc>
+              <a:spcAft>
+                <a:spcPts val="600"/>
+              </a:spcAft>
+              <a:buNone/>
+            </a:pPr>
+            <a:r>
+              <a:rPr sz="1700" b="1">
+                <a:solidFill>
+                  <a:srgbClr val="000000"/>
+                </a:solidFill>
+                <a:latin typeface="Arial"/>
+              </a:rPr>
+              <a:t>Open sensors.chomskylab.dk on your phone right now</a:t>
+            </a:r>
+          </a:p>
+          <a:p>
+            <a:pPr marL="0" indent="0" algn="l">
+              <a:lnSpc>
+                <a:spcPct val="128000"/>
+              </a:lnSpc>
+              <a:spcAft>
+                <a:spcPts val="0"/>
+              </a:spcAft>
+              <a:buNone/>
+            </a:pPr>
+          </a:p>
+          <a:p>
+            <a:pPr marL="0" indent="0" algn="l">
+              <a:lnSpc>
+                <a:spcPct val="128000"/>
+              </a:lnSpc>
+              <a:spcAft>
+                <a:spcPts val="600"/>
+              </a:spcAft>
+              <a:buNone/>
+            </a:pPr>
+            <a:r>
+              <a:rPr sz="1700" b="1">
+                <a:solidFill>
+                  <a:srgbClr val="000000"/>
+                </a:solidFill>
+                <a:latin typeface="Arial"/>
+              </a:rPr>
+              <a:t>Works in a web page today</a:t>
+            </a:r>
+          </a:p>
+          <a:p>
+            <a:pPr marL="0" indent="0" algn="l">
+              <a:lnSpc>
+                <a:spcPct val="128000"/>
+              </a:lnSpc>
+              <a:spcAft>
+                <a:spcPts val="600"/>
+              </a:spcAft>
+              <a:buNone/>
+            </a:pPr>
+            <a:r>
+              <a:rPr sz="1500" b="0">
+                <a:solidFill>
+                  <a:srgbClr val="000000"/>
+                </a:solidFill>
+                <a:latin typeface="Arial"/>
+              </a:rPr>
+              <a:t>• Accelerometer and gyroscope. Tap to grant, HTTPS only</a:t>
+            </a:r>
+          </a:p>
+          <a:p>
+            <a:pPr marL="0" indent="0" algn="l">
+              <a:lnSpc>
+                <a:spcPct val="128000"/>
+              </a:lnSpc>
+              <a:spcAft>
+                <a:spcPts val="600"/>
+              </a:spcAft>
+              <a:buNone/>
+            </a:pPr>
+            <a:r>
+              <a:rPr sz="1500" b="0">
+                <a:solidFill>
+                  <a:srgbClr val="000000"/>
+                </a:solidFill>
+                <a:latin typeface="Arial"/>
+              </a:rPr>
+              <a:t>• Microphone. Easiest continuous input there is</a:t>
+            </a:r>
+          </a:p>
+          <a:p>
+            <a:pPr marL="0" indent="0" algn="l">
+              <a:lnSpc>
+                <a:spcPct val="128000"/>
+              </a:lnSpc>
+              <a:spcAft>
+                <a:spcPts val="600"/>
+              </a:spcAft>
+              <a:buNone/>
+            </a:pPr>
+            <a:r>
+              <a:rPr sz="1500" b="0">
+                <a:solidFill>
+                  <a:srgbClr val="000000"/>
+                </a:solidFill>
+                <a:latin typeface="Arial"/>
+              </a:rPr>
+              <a:t>• Camera. Even reads a pulse off a face, badly</a:t>
+            </a:r>
+          </a:p>
+          <a:p>
+            <a:pPr marL="0" indent="0" algn="l">
+              <a:lnSpc>
+                <a:spcPct val="128000"/>
+              </a:lnSpc>
+              <a:spcAft>
+                <a:spcPts val="600"/>
+              </a:spcAft>
+              <a:buNone/>
+            </a:pPr>
+            <a:r>
+              <a:rPr sz="1500" b="0">
+                <a:solidFill>
+                  <a:srgbClr val="000000"/>
+                </a:solidFill>
+                <a:latin typeface="Arial"/>
+              </a:rPr>
+              <a:t>• Trackpad pressure. Pointer Events carry a 0 to 1 force</a:t>
+            </a:r>
+          </a:p>
+          <a:p>
+            <a:pPr marL="0" indent="0" algn="l">
+              <a:lnSpc>
+                <a:spcPct val="128000"/>
+              </a:lnSpc>
+              <a:spcAft>
+                <a:spcPts val="0"/>
+              </a:spcAft>
+              <a:buNone/>
+            </a:pPr>
+          </a:p>
+          <a:p>
+            <a:pPr marL="0" indent="0" algn="l">
+              <a:lnSpc>
+                <a:spcPct val="128000"/>
+              </a:lnSpc>
+              <a:spcAft>
+                <a:spcPts val="600"/>
+              </a:spcAft>
+              <a:buNone/>
+            </a:pPr>
+            <a:r>
+              <a:rPr sz="1700" b="1">
+                <a:solidFill>
+                  <a:srgbClr val="000000"/>
+                </a:solidFill>
+                <a:latin typeface="Arial"/>
+              </a:rPr>
+              <a:t>Does NOT work, whatever the tutorial says</a:t>
+            </a:r>
+          </a:p>
+          <a:p>
+            <a:pPr marL="0" indent="0" algn="l">
+              <a:lnSpc>
+                <a:spcPct val="128000"/>
+              </a:lnSpc>
+              <a:spcAft>
+                <a:spcPts val="600"/>
+              </a:spcAft>
+              <a:buNone/>
+            </a:pPr>
+            <a:r>
+              <a:rPr sz="1500" b="0">
+                <a:solidFill>
+                  <a:srgbClr val="000000"/>
+                </a:solidFill>
+                <a:latin typeface="Arial"/>
+              </a:rPr>
+              <a:t>• Phone vibration on iOS. WebKit has never shipped it</a:t>
+            </a:r>
+          </a:p>
+          <a:p>
+            <a:pPr marL="0" indent="0" algn="l">
+              <a:lnSpc>
+                <a:spcPct val="128000"/>
+              </a:lnSpc>
+              <a:spcAft>
+                <a:spcPts val="600"/>
+              </a:spcAft>
+              <a:buNone/>
+            </a:pPr>
+            <a:r>
+              <a:rPr sz="1500" b="0">
+                <a:solidFill>
+                  <a:srgbClr val="000000"/>
+                </a:solidFill>
+                <a:latin typeface="Arial"/>
+              </a:rPr>
+              <a:t>• Apple Watch or Garmin, live. Both need a native app</a:t>
             </a:r>
           </a:p>
         </p:txBody>
       </p:sp>
       <p:pic>
         <p:nvPicPr>
-          <p:cNvPr id="3" name="Picture 2" descr="wordmark_dark.png"/>
+          <p:cNvPr id="4" name="Picture 3" descr="wordmark_dark.png"/>
           <p:cNvPicPr>
             <a:picLocks noChangeAspect="1"/>
           </p:cNvPicPr>
@@ -11262,7 +12067,7 @@
       </p:pic>
       <p:pic>
         <p:nvPicPr>
-          <p:cNvPr id="4" name="Picture 3" descr="seal_dark.png"/>
+          <p:cNvPr id="5" name="Picture 4" descr="seal_dark.png"/>
           <p:cNvPicPr>
             <a:picLocks noChangeAspect="1"/>
           </p:cNvPicPr>
@@ -11327,7 +12132,7 @@
                 </a:solidFill>
                 <a:latin typeface="Arial"/>
               </a:rPr>
-              <a:t>THE BRIEF</a:t>
+              <a:t>THE ONE TO CHECK BEFORE YOU PROMISE IT</a:t>
             </a:r>
           </a:p>
         </p:txBody>
@@ -11363,7 +12168,7 @@
                 </a:solidFill>
                 <a:latin typeface="Arial"/>
               </a:rPr>
-              <a:t>30 minutes. Not long enough to be precious about it.</a:t>
+              <a:t>navigator.vibrate: Android yes, iOS no, at every version to date.</a:t>
             </a:r>
           </a:p>
           <a:p>
@@ -11377,14 +12182,76 @@
               <a:buNone/>
             </a:pPr>
             <a:r>
+              <a:rPr sz="1700" b="0">
+                <a:solidFill>
+                  <a:srgbClr val="000000"/>
+                </a:solidFill>
+                <a:latin typeface="Arial"/>
+              </a:rPr>
+              <a:t>caniuse lists Safari 3.1 to 27 as unsupported.</a:t>
+            </a:r>
+          </a:p>
+          <a:p>
+            <a:pPr marL="0" indent="0" algn="l">
+              <a:lnSpc>
+                <a:spcPct val="128000"/>
+              </a:lnSpc>
+              <a:spcAft>
+                <a:spcPts val="600"/>
+              </a:spcAft>
+              <a:buNone/>
+            </a:pPr>
+            <a:r>
+              <a:rPr sz="1700" b="0">
+                <a:solidFill>
+                  <a:srgbClr val="000000"/>
+                </a:solidFill>
+                <a:latin typeface="Arial"/>
+              </a:rPr>
+              <a:t>Chrome and Firefox on iOS are Safari underneath, so they inherit the gap.</a:t>
+            </a:r>
+          </a:p>
+          <a:p>
+            <a:pPr marL="0" indent="0" algn="l">
+              <a:lnSpc>
+                <a:spcPct val="128000"/>
+              </a:lnSpc>
+              <a:spcAft>
+                <a:spcPts val="0"/>
+              </a:spcAft>
+              <a:buNone/>
+            </a:pPr>
+          </a:p>
+          <a:p>
+            <a:pPr marL="0" indent="0" algn="l">
+              <a:lnSpc>
+                <a:spcPct val="128000"/>
+              </a:lnSpc>
+              <a:spcAft>
+                <a:spcPts val="600"/>
+              </a:spcAft>
+              <a:buNone/>
+            </a:pPr>
+            <a:r>
               <a:rPr sz="1700" b="1">
                 <a:solidFill>
                   <a:srgbClr val="000000"/>
                 </a:solidFill>
                 <a:latin typeface="Arial"/>
               </a:rPr>
-              <a:t>One actuator. Three messages</a:t>
-            </a:r>
+              <a:t>"The phone buzzes" therefore works on some of the room and no iPhones.</a:t>
+            </a:r>
+          </a:p>
+          <a:p>
+            <a:pPr marL="0" indent="0" algn="l">
+              <a:lnSpc>
+                <a:spcPct val="128000"/>
+              </a:lnSpc>
+              <a:spcAft>
+                <a:spcPts val="0"/>
+              </a:spcAft>
+              <a:buNone/>
+            </a:pPr>
           </a:p>
           <a:p>
             <a:pPr marL="0" indent="0" algn="l">
@@ -11397,135 +12264,13 @@
               <a:buNone/>
             </a:pPr>
             <a:r>
-              <a:rPr sz="1500" b="0">
-                <a:solidFill>
-                  <a:srgbClr val="000000"/>
-                </a:solidFill>
-                <a:latin typeface="Arial"/>
-              </a:rPr>
-              <a:t>• Arrived. Something wrong. Finished</a:t>
-            </a:r>
-          </a:p>
-          <a:p>
-            <a:pPr marL="0" indent="0" algn="l">
-              <a:lnSpc>
-                <a:spcPct val="128000"/>
-              </a:lnSpc>
-              <a:spcAft>
-                <a:spcPts val="0"/>
-              </a:spcAft>
-              <a:buNone/>
-            </a:pPr>
-          </a:p>
-          <a:p>
-            <a:pPr marL="0" indent="0" algn="l">
-              <a:lnSpc>
-                <a:spcPct val="128000"/>
-              </a:lnSpc>
-              <a:spcAft>
-                <a:spcPts val="600"/>
-              </a:spcAft>
-              <a:buNone/>
-            </a:pPr>
-            <a:r>
-              <a:rPr sz="1700" b="1">
-                <a:solidFill>
-                  <a:srgbClr val="000000"/>
-                </a:solidFill>
-                <a:latin typeface="Arial"/>
-              </a:rPr>
-              <a:t>Vary two things only</a:t>
-            </a:r>
-          </a:p>
-          <a:p>
-            <a:pPr marL="0" indent="0" algn="l">
-              <a:lnSpc>
-                <a:spcPct val="128000"/>
-              </a:lnSpc>
-              <a:spcAft>
-                <a:spcPts val="600"/>
-              </a:spcAft>
-              <a:buNone/>
-            </a:pPr>
-            <a:r>
-              <a:rPr sz="1500" b="0">
-                <a:solidFill>
-                  <a:srgbClr val="000000"/>
-                </a:solidFill>
-                <a:latin typeface="Arial"/>
-              </a:rPr>
-              <a:t>• Rhythm of the pulses</a:t>
-            </a:r>
-          </a:p>
-          <a:p>
-            <a:pPr marL="0" indent="0" algn="l">
-              <a:lnSpc>
-                <a:spcPct val="128000"/>
-              </a:lnSpc>
-              <a:spcAft>
-                <a:spcPts val="600"/>
-              </a:spcAft>
-              <a:buNone/>
-            </a:pPr>
-            <a:r>
-              <a:rPr sz="1500" b="0">
-                <a:solidFill>
-                  <a:srgbClr val="000000"/>
-                </a:solidFill>
-                <a:latin typeface="Arial"/>
-              </a:rPr>
-              <a:t>• How strong they are</a:t>
-            </a:r>
-          </a:p>
-          <a:p>
-            <a:pPr marL="0" indent="0" algn="l">
-              <a:lnSpc>
-                <a:spcPct val="128000"/>
-              </a:lnSpc>
-              <a:spcAft>
-                <a:spcPts val="0"/>
-              </a:spcAft>
-              <a:buNone/>
-            </a:pPr>
-          </a:p>
-          <a:p>
-            <a:pPr marL="0" indent="0" algn="l">
-              <a:lnSpc>
-                <a:spcPct val="128000"/>
-              </a:lnSpc>
-              <a:spcAft>
-                <a:spcPts val="600"/>
-              </a:spcAft>
-              <a:buNone/>
-            </a:pPr>
-            <a:r>
-              <a:rPr sz="1700" b="1">
-                <a:solidFill>
-                  <a:srgbClr val="000000"/>
-                </a:solidFill>
-                <a:latin typeface="Arial"/>
-              </a:rPr>
-              <a:t>Blind test: they name all three</a:t>
-            </a:r>
-          </a:p>
-          <a:p>
-            <a:pPr marL="0" indent="0" algn="l">
-              <a:lnSpc>
-                <a:spcPct val="128000"/>
-              </a:lnSpc>
-              <a:spcAft>
-                <a:spcPts val="600"/>
-              </a:spcAft>
-              <a:buNone/>
-            </a:pPr>
-            <a:r>
-              <a:rPr sz="1500" b="0">
-                <a:solidFill>
-                  <a:srgbClr val="000000"/>
-                </a:solidFill>
-                <a:latin typeface="Arial"/>
-              </a:rPr>
-              <a:t>• Note which two got confused, and why</a:t>
+              <a:rPr sz="1700" b="0">
+                <a:solidFill>
+                  <a:srgbClr val="000000"/>
+                </a:solidFill>
+                <a:latin typeface="Arial"/>
+              </a:rPr>
+              <a:t>Check the feature, not the tutorial, before it is in your plan.</a:t>
             </a:r>
           </a:p>
         </p:txBody>
@@ -11717,7 +12462,7 @@
                 </a:solidFill>
                 <a:latin typeface="Arial"/>
               </a:rPr>
-              <a:t>• Because nobody knew a coin motor costs 12 kr</a:t>
+              <a:t>• Because nobody knew the lab has 117 coin motors</a:t>
             </a:r>
           </a:p>
           <a:p>
@@ -11864,7 +12609,7 @@
                 </a:solidFill>
                 <a:latin typeface="Arial"/>
               </a:rPr>
-              <a:t>THE CONSTRAINT THAT MATTERS</a:t>
+              <a:t>TWO RIGS THAT ALREADY EXIST</a:t>
             </a:r>
           </a:p>
         </p:txBody>
@@ -11889,6 +12634,26 @@
                 <a:spcPct val="128000"/>
               </a:lnSpc>
               <a:spcAft>
+                <a:spcPts val="1400"/>
+              </a:spcAft>
+              <a:buNone/>
+            </a:pPr>
+            <a:r>
+              <a:rPr sz="1700" b="0">
+                <a:solidFill>
+                  <a:srgbClr val="595959"/>
+                </a:solidFill>
+                <a:latin typeface="Arial"/>
+              </a:rPr>
+              <a:t>Built here, by students at roughly your stage.</a:t>
+            </a:r>
+          </a:p>
+          <a:p>
+            <a:pPr marL="0" indent="0" algn="l">
+              <a:lnSpc>
+                <a:spcPct val="128000"/>
+              </a:lnSpc>
+              <a:spcAft>
                 <a:spcPts val="600"/>
               </a:spcAft>
               <a:buNone/>
@@ -11900,7 +12665,47 @@
                 </a:solidFill>
                 <a:latin typeface="Arial"/>
               </a:rPr>
-              <a:t>The recipient cannot look at the device.</a:t>
+              <a:t>Moving screen, Arduino Uno</a:t>
+            </a:r>
+          </a:p>
+          <a:p>
+            <a:pPr marL="0" indent="0" algn="l">
+              <a:lnSpc>
+                <a:spcPct val="128000"/>
+              </a:lnSpc>
+              <a:spcAft>
+                <a:spcPts val="600"/>
+              </a:spcAft>
+              <a:buNone/>
+            </a:pPr>
+            <a:r>
+              <a:rPr sz="1500" b="0">
+                <a:solidFill>
+                  <a:srgbClr val="000000"/>
+                </a:solidFill>
+                <a:latin typeface="Arial"/>
+              </a:rPr>
+              <a:t>• Breathes when idle. Retreats when touched</a:t>
+            </a:r>
+          </a:p>
+          <a:p>
+            <a:pPr marL="0" indent="0" algn="l">
+              <a:lnSpc>
+                <a:spcPct val="128000"/>
+              </a:lnSpc>
+              <a:spcAft>
+                <a:spcPts val="600"/>
+              </a:spcAft>
+              <a:buNone/>
+            </a:pPr>
+            <a:r>
+              <a:rPr sz="1500" b="0">
+                <a:solidFill>
+                  <a:srgbClr val="000000"/>
+                </a:solidFill>
+                <a:latin typeface="Arial"/>
+              </a:rPr>
+              <a:t>• Easing and idle motion do the work. A dozen lines</a:t>
             </a:r>
           </a:p>
           <a:p>
@@ -11925,13 +12730,13 @@
               <a:buNone/>
             </a:pPr>
             <a:r>
-              <a:rPr sz="1700" b="0">
-                <a:solidFill>
-                  <a:srgbClr val="000000"/>
-                </a:solidFill>
-                <a:latin typeface="Arial"/>
-              </a:rPr>
-              <a:t>If it only works while someone watches a screen,</a:t>
+              <a:rPr sz="1700" b="1">
+                <a:solidFill>
+                  <a:srgbClr val="000000"/>
+                </a:solidFill>
+                <a:latin typeface="Arial"/>
+              </a:rPr>
+              <a:t>Instrumented sock, ESP32</a:t>
             </a:r>
           </a:p>
           <a:p>
@@ -11945,13 +12750,33 @@
               <a:buNone/>
             </a:pPr>
             <a:r>
-              <a:rPr sz="1700" b="0">
-                <a:solidFill>
-                  <a:srgbClr val="000000"/>
-                </a:solidFill>
-                <a:latin typeface="Arial"/>
-              </a:rPr>
-              <a:t>you built a visual interface with a motor glued to it.</a:t>
+              <a:rPr sz="1500" b="0">
+                <a:solidFill>
+                  <a:srgbClr val="000000"/>
+                </a:solidFill>
+                <a:latin typeface="Arial"/>
+              </a:rPr>
+              <a:t>• Six force sensors under a foot, batched over Wi-Fi</a:t>
+            </a:r>
+          </a:p>
+          <a:p>
+            <a:pPr marL="0" indent="0" algn="l">
+              <a:lnSpc>
+                <a:spcPct val="128000"/>
+              </a:lnSpc>
+              <a:spcAft>
+                <a:spcPts val="600"/>
+              </a:spcAft>
+              <a:buNone/>
+            </a:pPr>
+            <a:r>
+              <a:rPr sz="1500" b="0">
+                <a:solidFill>
+                  <a:srgbClr val="000000"/>
+                </a:solidFill>
+                <a:latin typeface="Arial"/>
+              </a:rPr>
+              <a:t>• Calibrate per sensor. Batch your writes</a:t>
             </a:r>
           </a:p>
         </p:txBody>
@@ -12041,136 +12866,20 @@
               <a:buNone/>
             </a:pPr>
             <a:r>
-              <a:rPr sz="3200" b="1">
-                <a:solidFill>
-                  <a:srgbClr val="000000"/>
-                </a:solidFill>
-                <a:latin typeface="Arial"/>
-              </a:rPr>
-              <a:t>TEST IT</a:t>
-            </a:r>
-          </a:p>
-        </p:txBody>
-      </p:sp>
-      <p:sp>
-        <p:nvSpPr>
-          <p:cNvPr id="3" name="Text Placeholder 2"/>
-          <p:cNvSpPr>
-            <a:spLocks noGrp="1"/>
-          </p:cNvSpPr>
-          <p:nvPr>
-            <p:ph type="body" idx="1"/>
-          </p:nvPr>
-        </p:nvSpPr>
-        <p:spPr/>
-        <p:txBody>
-          <a:bodyPr/>
-          <a:lstStyle/>
-          <a:p>
-            <a:pPr marL="0" indent="0" algn="l">
-              <a:lnSpc>
-                <a:spcPct val="128000"/>
-              </a:lnSpc>
-              <a:spcAft>
-                <a:spcPts val="1400"/>
-              </a:spcAft>
-              <a:buNone/>
-            </a:pPr>
-            <a:r>
-              <a:rPr sz="1700" b="0">
-                <a:solidFill>
-                  <a:srgbClr val="595959"/>
-                </a:solidFill>
-                <a:latin typeface="Arial"/>
-              </a:rPr>
-              <a:t>Hand your device to another group with the screen turned away.</a:t>
-            </a:r>
-          </a:p>
-          <a:p>
-            <a:pPr marL="0" indent="0" algn="l">
-              <a:lnSpc>
-                <a:spcPct val="128000"/>
-              </a:lnSpc>
-              <a:spcAft>
-                <a:spcPts val="600"/>
-              </a:spcAft>
-              <a:buNone/>
-            </a:pPr>
-            <a:r>
-              <a:rPr sz="1500" b="0">
-                <a:solidFill>
-                  <a:srgbClr val="000000"/>
-                </a:solidFill>
-                <a:latin typeface="Arial"/>
-              </a:rPr>
-              <a:t>• They can tell all three messages apart.</a:t>
-            </a:r>
-          </a:p>
-          <a:p>
-            <a:pPr marL="0" indent="0" algn="l">
-              <a:lnSpc>
-                <a:spcPct val="128000"/>
-              </a:lnSpc>
-              <a:spcAft>
-                <a:spcPts val="600"/>
-              </a:spcAft>
-              <a:buNone/>
-            </a:pPr>
-            <a:r>
-              <a:rPr sz="1500" b="0">
-                <a:solidFill>
-                  <a:srgbClr val="000000"/>
-                </a:solidFill>
-                <a:latin typeface="Arial"/>
-              </a:rPr>
-              <a:t>• It does not fire continuously when held.</a:t>
-            </a:r>
-          </a:p>
-          <a:p>
-            <a:pPr marL="0" indent="0" algn="l">
-              <a:lnSpc>
-                <a:spcPct val="128000"/>
-              </a:lnSpc>
-              <a:spcAft>
-                <a:spcPts val="600"/>
-              </a:spcAft>
-              <a:buNone/>
-            </a:pPr>
-            <a:r>
-              <a:rPr sz="1500" b="0">
-                <a:solidFill>
-                  <a:srgbClr val="000000"/>
-                </a:solidFill>
-                <a:latin typeface="Arial"/>
-              </a:rPr>
-              <a:t>• You know which two got confused, and what would have separated them.</a:t>
-            </a:r>
-          </a:p>
-          <a:p>
-            <a:pPr marL="0" indent="0" algn="l">
-              <a:lnSpc>
-                <a:spcPct val="128000"/>
-              </a:lnSpc>
-              <a:spcAft>
-                <a:spcPts val="600"/>
-              </a:spcAft>
-              <a:buNone/>
-            </a:pPr>
-            <a:r>
-              <a:rPr sz="1500" b="0">
-                <a:solidFill>
-                  <a:srgbClr val="000000"/>
-                </a:solidFill>
-                <a:latin typeface="Arial"/>
-              </a:rPr>
-              <a:t>• It still works when they are not looking at it.</a:t>
+              <a:rPr sz="4400" b="1">
+                <a:solidFill>
+                  <a:srgbClr val="000000"/>
+                </a:solidFill>
+                <a:latin typeface="Arial"/>
+              </a:rPr>
+              <a:t>BUILD ONE SIGNAL</a:t>
             </a:r>
           </a:p>
         </p:txBody>
       </p:sp>
       <p:pic>
         <p:nvPicPr>
-          <p:cNvPr id="4" name="Picture 3" descr="wordmark_dark.png"/>
+          <p:cNvPr id="3" name="Picture 2" descr="wordmark_dark.png"/>
           <p:cNvPicPr>
             <a:picLocks noChangeAspect="1"/>
           </p:cNvPicPr>
@@ -12194,7 +12903,7 @@
       </p:pic>
       <p:pic>
         <p:nvPicPr>
-          <p:cNvPr id="5" name="Picture 4" descr="seal_dark.png"/>
+          <p:cNvPr id="4" name="Picture 3" descr="seal_dark.png"/>
           <p:cNvPicPr>
             <a:picLocks noChangeAspect="1"/>
           </p:cNvPicPr>
@@ -12259,7 +12968,7 @@
                 </a:solidFill>
                 <a:latin typeface="Arial"/>
               </a:rPr>
-              <a:t>WHAT YOU ACTUALLY LEARN</a:t>
+              <a:t>THE BRIEF</a:t>
             </a:r>
           </a:p>
         </p:txBody>
@@ -12295,7 +13004,7 @@
                 </a:solidFill>
                 <a:latin typeface="Arial"/>
               </a:rPr>
-              <a:t>Three things you cannot get from a datasheet.</a:t>
+              <a:t>30 minutes. Not long enough to be precious about it.</a:t>
             </a:r>
           </a:p>
           <a:p>
@@ -12315,7 +13024,7 @@
                 </a:solidFill>
                 <a:latin typeface="Arial"/>
               </a:rPr>
-              <a:t>What things feel like</a:t>
+              <a:t>One actuator. Three messages</a:t>
             </a:r>
           </a:p>
           <a:p>
@@ -12335,7 +13044,7 @@
                 </a:solidFill>
                 <a:latin typeface="Arial"/>
               </a:rPr>
-              <a:t>• A motor is a nudge. A solenoid is a knock. A Peltier is slow.</a:t>
+              <a:t>• Arrived. Something wrong. Finished</a:t>
             </a:r>
           </a:p>
           <a:p>
@@ -12366,7 +13075,7 @@
                 </a:solidFill>
                 <a:latin typeface="Arial"/>
               </a:rPr>
-              <a:t>How to drive one</a:t>
+              <a:t>Vary two things only</a:t>
             </a:r>
           </a:p>
           <a:p>
@@ -12386,7 +13095,27 @@
                 </a:solidFill>
                 <a:latin typeface="Arial"/>
               </a:rPr>
-              <a:t>• PWM, direction, debouncing, and why a motor never goes straight to a pin.</a:t>
+              <a:t>• Rhythm of the pulses</a:t>
+            </a:r>
+          </a:p>
+          <a:p>
+            <a:pPr marL="0" indent="0" algn="l">
+              <a:lnSpc>
+                <a:spcPct val="128000"/>
+              </a:lnSpc>
+              <a:spcAft>
+                <a:spcPts val="600"/>
+              </a:spcAft>
+              <a:buNone/>
+            </a:pPr>
+            <a:r>
+              <a:rPr sz="1500" b="0">
+                <a:solidFill>
+                  <a:srgbClr val="000000"/>
+                </a:solidFill>
+                <a:latin typeface="Arial"/>
+              </a:rPr>
+              <a:t>• How strong they are</a:t>
             </a:r>
           </a:p>
           <a:p>
@@ -12417,7 +13146,7 @@
                 </a:solidFill>
                 <a:latin typeface="Arial"/>
               </a:rPr>
-              <a:t>What to pick</a:t>
+              <a:t>Blind test: they name all three</a:t>
             </a:r>
           </a:p>
           <a:p>
@@ -12437,7 +13166,7 @@
                 </a:solidFill>
                 <a:latin typeface="Arial"/>
               </a:rPr>
-              <a:t>• Choosing the actuator before designing the interaction, not in week 46.</a:t>
+              <a:t>• Note which two got confused, and why</a:t>
             </a:r>
           </a:p>
         </p:txBody>
@@ -12515,6 +13244,675 @@
             <a:spLocks noGrp="1"/>
           </p:cNvSpPr>
           <p:nvPr>
+            <p:ph type="title"/>
+          </p:nvPr>
+        </p:nvSpPr>
+        <p:spPr/>
+        <p:txBody>
+          <a:bodyPr/>
+          <a:lstStyle/>
+          <a:p>
+            <a:pPr marL="0" indent="0" algn="l">
+              <a:buNone/>
+            </a:pPr>
+            <a:r>
+              <a:rPr sz="3200" b="1">
+                <a:solidFill>
+                  <a:srgbClr val="000000"/>
+                </a:solidFill>
+                <a:latin typeface="Arial"/>
+              </a:rPr>
+              <a:t>THE CONSTRAINT THAT MATTERS</a:t>
+            </a:r>
+          </a:p>
+        </p:txBody>
+      </p:sp>
+      <p:sp>
+        <p:nvSpPr>
+          <p:cNvPr id="3" name="Text Placeholder 2"/>
+          <p:cNvSpPr>
+            <a:spLocks noGrp="1"/>
+          </p:cNvSpPr>
+          <p:nvPr>
+            <p:ph type="body" idx="1"/>
+          </p:nvPr>
+        </p:nvSpPr>
+        <p:spPr/>
+        <p:txBody>
+          <a:bodyPr/>
+          <a:lstStyle/>
+          <a:p>
+            <a:pPr marL="0" indent="0" algn="l">
+              <a:lnSpc>
+                <a:spcPct val="128000"/>
+              </a:lnSpc>
+              <a:spcAft>
+                <a:spcPts val="600"/>
+              </a:spcAft>
+              <a:buNone/>
+            </a:pPr>
+            <a:r>
+              <a:rPr sz="1700" b="1">
+                <a:solidFill>
+                  <a:srgbClr val="000000"/>
+                </a:solidFill>
+                <a:latin typeface="Arial"/>
+              </a:rPr>
+              <a:t>The recipient cannot look at the device.</a:t>
+            </a:r>
+          </a:p>
+          <a:p>
+            <a:pPr marL="0" indent="0" algn="l">
+              <a:lnSpc>
+                <a:spcPct val="128000"/>
+              </a:lnSpc>
+              <a:spcAft>
+                <a:spcPts val="0"/>
+              </a:spcAft>
+              <a:buNone/>
+            </a:pPr>
+          </a:p>
+          <a:p>
+            <a:pPr marL="0" indent="0" algn="l">
+              <a:lnSpc>
+                <a:spcPct val="128000"/>
+              </a:lnSpc>
+              <a:spcAft>
+                <a:spcPts val="600"/>
+              </a:spcAft>
+              <a:buNone/>
+            </a:pPr>
+            <a:r>
+              <a:rPr sz="1700" b="0">
+                <a:solidFill>
+                  <a:srgbClr val="000000"/>
+                </a:solidFill>
+                <a:latin typeface="Arial"/>
+              </a:rPr>
+              <a:t>If it only works while someone watches a screen,</a:t>
+            </a:r>
+          </a:p>
+          <a:p>
+            <a:pPr marL="0" indent="0" algn="l">
+              <a:lnSpc>
+                <a:spcPct val="128000"/>
+              </a:lnSpc>
+              <a:spcAft>
+                <a:spcPts val="600"/>
+              </a:spcAft>
+              <a:buNone/>
+            </a:pPr>
+            <a:r>
+              <a:rPr sz="1700" b="0">
+                <a:solidFill>
+                  <a:srgbClr val="000000"/>
+                </a:solidFill>
+                <a:latin typeface="Arial"/>
+              </a:rPr>
+              <a:t>you built a visual interface with a motor glued to it.</a:t>
+            </a:r>
+          </a:p>
+        </p:txBody>
+      </p:sp>
+      <p:pic>
+        <p:nvPicPr>
+          <p:cNvPr id="4" name="Picture 3" descr="wordmark_dark.png"/>
+          <p:cNvPicPr>
+            <a:picLocks noChangeAspect="1"/>
+          </p:cNvPicPr>
+          <p:nvPr/>
+        </p:nvPicPr>
+        <p:blipFill>
+          <a:blip r:embed="rId2"/>
+          <a:stretch>
+            <a:fillRect/>
+          </a:stretch>
+        </p:blipFill>
+        <p:spPr>
+          <a:xfrm>
+            <a:off x="342900" y="6184900"/>
+            <a:ext cx="2070100" cy="529560"/>
+          </a:xfrm>
+          <a:prstGeom prst="rect">
+            <a:avLst/>
+          </a:prstGeom>
+        </p:spPr>
+      </p:pic>
+      <p:pic>
+        <p:nvPicPr>
+          <p:cNvPr id="5" name="Picture 4" descr="seal_dark.png"/>
+          <p:cNvPicPr>
+            <a:picLocks noChangeAspect="1"/>
+          </p:cNvPicPr>
+          <p:nvPr/>
+        </p:nvPicPr>
+        <p:blipFill>
+          <a:blip r:embed="rId3"/>
+          <a:stretch>
+            <a:fillRect/>
+          </a:stretch>
+        </p:blipFill>
+        <p:spPr>
+          <a:xfrm>
+            <a:off x="11226800" y="5969000"/>
+            <a:ext cx="713915" cy="711200"/>
+          </a:xfrm>
+          <a:prstGeom prst="rect">
+            <a:avLst/>
+          </a:prstGeom>
+        </p:spPr>
+      </p:pic>
+    </p:spTree>
+  </p:cSld>
+  <p:clrMapOvr>
+    <a:masterClrMapping/>
+  </p:clrMapOvr>
+</p:sld>
+</file>
+
+<file path=ppt/slides/slide34.xml><?xml version="1.0" encoding="utf-8"?>
+<p:sld xmlns:a="http://schemas.openxmlformats.org/drawingml/2006/main" xmlns:p="http://schemas.openxmlformats.org/presentationml/2006/main" xmlns:r="http://schemas.openxmlformats.org/officeDocument/2006/relationships">
+  <p:cSld>
+    <p:spTree>
+      <p:nvGrpSpPr>
+        <p:cNvPr id="1" name=""/>
+        <p:cNvGrpSpPr/>
+        <p:nvPr/>
+      </p:nvGrpSpPr>
+      <p:grpSpPr/>
+      <p:sp>
+        <p:nvSpPr>
+          <p:cNvPr id="2" name="Title 1"/>
+          <p:cNvSpPr>
+            <a:spLocks noGrp="1"/>
+          </p:cNvSpPr>
+          <p:nvPr>
+            <p:ph type="title"/>
+          </p:nvPr>
+        </p:nvSpPr>
+        <p:spPr/>
+        <p:txBody>
+          <a:bodyPr/>
+          <a:lstStyle/>
+          <a:p>
+            <a:pPr marL="0" indent="0" algn="l">
+              <a:buNone/>
+            </a:pPr>
+            <a:r>
+              <a:rPr sz="3200" b="1">
+                <a:solidFill>
+                  <a:srgbClr val="000000"/>
+                </a:solidFill>
+                <a:latin typeface="Arial"/>
+              </a:rPr>
+              <a:t>TEST IT</a:t>
+            </a:r>
+          </a:p>
+        </p:txBody>
+      </p:sp>
+      <p:sp>
+        <p:nvSpPr>
+          <p:cNvPr id="3" name="Text Placeholder 2"/>
+          <p:cNvSpPr>
+            <a:spLocks noGrp="1"/>
+          </p:cNvSpPr>
+          <p:nvPr>
+            <p:ph type="body" idx="1"/>
+          </p:nvPr>
+        </p:nvSpPr>
+        <p:spPr/>
+        <p:txBody>
+          <a:bodyPr/>
+          <a:lstStyle/>
+          <a:p>
+            <a:pPr marL="0" indent="0" algn="l">
+              <a:lnSpc>
+                <a:spcPct val="128000"/>
+              </a:lnSpc>
+              <a:spcAft>
+                <a:spcPts val="1400"/>
+              </a:spcAft>
+              <a:buNone/>
+            </a:pPr>
+            <a:r>
+              <a:rPr sz="1700" b="0">
+                <a:solidFill>
+                  <a:srgbClr val="595959"/>
+                </a:solidFill>
+                <a:latin typeface="Arial"/>
+              </a:rPr>
+              <a:t>Hand your device to another group with the screen turned away.</a:t>
+            </a:r>
+          </a:p>
+          <a:p>
+            <a:pPr marL="0" indent="0" algn="l">
+              <a:lnSpc>
+                <a:spcPct val="128000"/>
+              </a:lnSpc>
+              <a:spcAft>
+                <a:spcPts val="600"/>
+              </a:spcAft>
+              <a:buNone/>
+            </a:pPr>
+            <a:r>
+              <a:rPr sz="1500" b="0">
+                <a:solidFill>
+                  <a:srgbClr val="000000"/>
+                </a:solidFill>
+                <a:latin typeface="Arial"/>
+              </a:rPr>
+              <a:t>• They can tell all three messages apart.</a:t>
+            </a:r>
+          </a:p>
+          <a:p>
+            <a:pPr marL="0" indent="0" algn="l">
+              <a:lnSpc>
+                <a:spcPct val="128000"/>
+              </a:lnSpc>
+              <a:spcAft>
+                <a:spcPts val="600"/>
+              </a:spcAft>
+              <a:buNone/>
+            </a:pPr>
+            <a:r>
+              <a:rPr sz="1500" b="0">
+                <a:solidFill>
+                  <a:srgbClr val="000000"/>
+                </a:solidFill>
+                <a:latin typeface="Arial"/>
+              </a:rPr>
+              <a:t>• It does not fire continuously when held.</a:t>
+            </a:r>
+          </a:p>
+          <a:p>
+            <a:pPr marL="0" indent="0" algn="l">
+              <a:lnSpc>
+                <a:spcPct val="128000"/>
+              </a:lnSpc>
+              <a:spcAft>
+                <a:spcPts val="600"/>
+              </a:spcAft>
+              <a:buNone/>
+            </a:pPr>
+            <a:r>
+              <a:rPr sz="1500" b="0">
+                <a:solidFill>
+                  <a:srgbClr val="000000"/>
+                </a:solidFill>
+                <a:latin typeface="Arial"/>
+              </a:rPr>
+              <a:t>• You know which two got confused, and what would have separated them.</a:t>
+            </a:r>
+          </a:p>
+          <a:p>
+            <a:pPr marL="0" indent="0" algn="l">
+              <a:lnSpc>
+                <a:spcPct val="128000"/>
+              </a:lnSpc>
+              <a:spcAft>
+                <a:spcPts val="600"/>
+              </a:spcAft>
+              <a:buNone/>
+            </a:pPr>
+            <a:r>
+              <a:rPr sz="1500" b="0">
+                <a:solidFill>
+                  <a:srgbClr val="000000"/>
+                </a:solidFill>
+                <a:latin typeface="Arial"/>
+              </a:rPr>
+              <a:t>• It still works when they are not looking at it.</a:t>
+            </a:r>
+          </a:p>
+        </p:txBody>
+      </p:sp>
+      <p:pic>
+        <p:nvPicPr>
+          <p:cNvPr id="4" name="Picture 3" descr="wordmark_dark.png"/>
+          <p:cNvPicPr>
+            <a:picLocks noChangeAspect="1"/>
+          </p:cNvPicPr>
+          <p:nvPr/>
+        </p:nvPicPr>
+        <p:blipFill>
+          <a:blip r:embed="rId2"/>
+          <a:stretch>
+            <a:fillRect/>
+          </a:stretch>
+        </p:blipFill>
+        <p:spPr>
+          <a:xfrm>
+            <a:off x="342900" y="6184900"/>
+            <a:ext cx="2070100" cy="529560"/>
+          </a:xfrm>
+          <a:prstGeom prst="rect">
+            <a:avLst/>
+          </a:prstGeom>
+        </p:spPr>
+      </p:pic>
+      <p:pic>
+        <p:nvPicPr>
+          <p:cNvPr id="5" name="Picture 4" descr="seal_dark.png"/>
+          <p:cNvPicPr>
+            <a:picLocks noChangeAspect="1"/>
+          </p:cNvPicPr>
+          <p:nvPr/>
+        </p:nvPicPr>
+        <p:blipFill>
+          <a:blip r:embed="rId3"/>
+          <a:stretch>
+            <a:fillRect/>
+          </a:stretch>
+        </p:blipFill>
+        <p:spPr>
+          <a:xfrm>
+            <a:off x="11226800" y="5969000"/>
+            <a:ext cx="713915" cy="711200"/>
+          </a:xfrm>
+          <a:prstGeom prst="rect">
+            <a:avLst/>
+          </a:prstGeom>
+        </p:spPr>
+      </p:pic>
+    </p:spTree>
+  </p:cSld>
+  <p:clrMapOvr>
+    <a:masterClrMapping/>
+  </p:clrMapOvr>
+</p:sld>
+</file>
+
+<file path=ppt/slides/slide35.xml><?xml version="1.0" encoding="utf-8"?>
+<p:sld xmlns:a="http://schemas.openxmlformats.org/drawingml/2006/main" xmlns:p="http://schemas.openxmlformats.org/presentationml/2006/main" xmlns:r="http://schemas.openxmlformats.org/officeDocument/2006/relationships">
+  <p:cSld>
+    <p:spTree>
+      <p:nvGrpSpPr>
+        <p:cNvPr id="1" name=""/>
+        <p:cNvGrpSpPr/>
+        <p:nvPr/>
+      </p:nvGrpSpPr>
+      <p:grpSpPr/>
+      <p:sp>
+        <p:nvSpPr>
+          <p:cNvPr id="2" name="Title 1"/>
+          <p:cNvSpPr>
+            <a:spLocks noGrp="1"/>
+          </p:cNvSpPr>
+          <p:nvPr>
+            <p:ph type="title"/>
+          </p:nvPr>
+        </p:nvSpPr>
+        <p:spPr/>
+        <p:txBody>
+          <a:bodyPr/>
+          <a:lstStyle/>
+          <a:p>
+            <a:pPr marL="0" indent="0" algn="l">
+              <a:buNone/>
+            </a:pPr>
+            <a:r>
+              <a:rPr sz="3200" b="1">
+                <a:solidFill>
+                  <a:srgbClr val="000000"/>
+                </a:solidFill>
+                <a:latin typeface="Arial"/>
+              </a:rPr>
+              <a:t>WHAT YOU ACTUALLY LEARN</a:t>
+            </a:r>
+          </a:p>
+        </p:txBody>
+      </p:sp>
+      <p:sp>
+        <p:nvSpPr>
+          <p:cNvPr id="3" name="Text Placeholder 2"/>
+          <p:cNvSpPr>
+            <a:spLocks noGrp="1"/>
+          </p:cNvSpPr>
+          <p:nvPr>
+            <p:ph type="body" idx="1"/>
+          </p:nvPr>
+        </p:nvSpPr>
+        <p:spPr/>
+        <p:txBody>
+          <a:bodyPr/>
+          <a:lstStyle/>
+          <a:p>
+            <a:pPr marL="0" indent="0" algn="l">
+              <a:lnSpc>
+                <a:spcPct val="128000"/>
+              </a:lnSpc>
+              <a:spcAft>
+                <a:spcPts val="1400"/>
+              </a:spcAft>
+              <a:buNone/>
+            </a:pPr>
+            <a:r>
+              <a:rPr sz="1700" b="0">
+                <a:solidFill>
+                  <a:srgbClr val="595959"/>
+                </a:solidFill>
+                <a:latin typeface="Arial"/>
+              </a:rPr>
+              <a:t>Three things you cannot get from a datasheet.</a:t>
+            </a:r>
+          </a:p>
+          <a:p>
+            <a:pPr marL="0" indent="0" algn="l">
+              <a:lnSpc>
+                <a:spcPct val="128000"/>
+              </a:lnSpc>
+              <a:spcAft>
+                <a:spcPts val="600"/>
+              </a:spcAft>
+              <a:buNone/>
+            </a:pPr>
+            <a:r>
+              <a:rPr sz="1700" b="1">
+                <a:solidFill>
+                  <a:srgbClr val="000000"/>
+                </a:solidFill>
+                <a:latin typeface="Arial"/>
+              </a:rPr>
+              <a:t>What things feel like</a:t>
+            </a:r>
+          </a:p>
+          <a:p>
+            <a:pPr marL="0" indent="0" algn="l">
+              <a:lnSpc>
+                <a:spcPct val="128000"/>
+              </a:lnSpc>
+              <a:spcAft>
+                <a:spcPts val="600"/>
+              </a:spcAft>
+              <a:buNone/>
+            </a:pPr>
+            <a:r>
+              <a:rPr sz="1500" b="0">
+                <a:solidFill>
+                  <a:srgbClr val="000000"/>
+                </a:solidFill>
+                <a:latin typeface="Arial"/>
+              </a:rPr>
+              <a:t>• A motor is a nudge. A solenoid is a knock. A Peltier is slow.</a:t>
+            </a:r>
+          </a:p>
+          <a:p>
+            <a:pPr marL="0" indent="0" algn="l">
+              <a:lnSpc>
+                <a:spcPct val="128000"/>
+              </a:lnSpc>
+              <a:spcAft>
+                <a:spcPts val="0"/>
+              </a:spcAft>
+              <a:buNone/>
+            </a:pPr>
+          </a:p>
+          <a:p>
+            <a:pPr marL="0" indent="0" algn="l">
+              <a:lnSpc>
+                <a:spcPct val="128000"/>
+              </a:lnSpc>
+              <a:spcAft>
+                <a:spcPts val="600"/>
+              </a:spcAft>
+              <a:buNone/>
+            </a:pPr>
+            <a:r>
+              <a:rPr sz="1700" b="1">
+                <a:solidFill>
+                  <a:srgbClr val="000000"/>
+                </a:solidFill>
+                <a:latin typeface="Arial"/>
+              </a:rPr>
+              <a:t>How to drive one</a:t>
+            </a:r>
+          </a:p>
+          <a:p>
+            <a:pPr marL="0" indent="0" algn="l">
+              <a:lnSpc>
+                <a:spcPct val="128000"/>
+              </a:lnSpc>
+              <a:spcAft>
+                <a:spcPts val="600"/>
+              </a:spcAft>
+              <a:buNone/>
+            </a:pPr>
+            <a:r>
+              <a:rPr sz="1500" b="0">
+                <a:solidFill>
+                  <a:srgbClr val="000000"/>
+                </a:solidFill>
+                <a:latin typeface="Arial"/>
+              </a:rPr>
+              <a:t>• PWM, direction, debouncing, and why a motor never goes straight to a pin.</a:t>
+            </a:r>
+          </a:p>
+          <a:p>
+            <a:pPr marL="0" indent="0" algn="l">
+              <a:lnSpc>
+                <a:spcPct val="128000"/>
+              </a:lnSpc>
+              <a:spcAft>
+                <a:spcPts val="0"/>
+              </a:spcAft>
+              <a:buNone/>
+            </a:pPr>
+          </a:p>
+          <a:p>
+            <a:pPr marL="0" indent="0" algn="l">
+              <a:lnSpc>
+                <a:spcPct val="128000"/>
+              </a:lnSpc>
+              <a:spcAft>
+                <a:spcPts val="600"/>
+              </a:spcAft>
+              <a:buNone/>
+            </a:pPr>
+            <a:r>
+              <a:rPr sz="1700" b="1">
+                <a:solidFill>
+                  <a:srgbClr val="000000"/>
+                </a:solidFill>
+                <a:latin typeface="Arial"/>
+              </a:rPr>
+              <a:t>What to pick</a:t>
+            </a:r>
+          </a:p>
+          <a:p>
+            <a:pPr marL="0" indent="0" algn="l">
+              <a:lnSpc>
+                <a:spcPct val="128000"/>
+              </a:lnSpc>
+              <a:spcAft>
+                <a:spcPts val="600"/>
+              </a:spcAft>
+              <a:buNone/>
+            </a:pPr>
+            <a:r>
+              <a:rPr sz="1500" b="0">
+                <a:solidFill>
+                  <a:srgbClr val="000000"/>
+                </a:solidFill>
+                <a:latin typeface="Arial"/>
+              </a:rPr>
+              <a:t>• Choosing the actuator before designing the interaction, not in week 46.</a:t>
+            </a:r>
+          </a:p>
+        </p:txBody>
+      </p:sp>
+      <p:pic>
+        <p:nvPicPr>
+          <p:cNvPr id="4" name="Picture 3" descr="wordmark_dark.png"/>
+          <p:cNvPicPr>
+            <a:picLocks noChangeAspect="1"/>
+          </p:cNvPicPr>
+          <p:nvPr/>
+        </p:nvPicPr>
+        <p:blipFill>
+          <a:blip r:embed="rId2"/>
+          <a:stretch>
+            <a:fillRect/>
+          </a:stretch>
+        </p:blipFill>
+        <p:spPr>
+          <a:xfrm>
+            <a:off x="342900" y="6184900"/>
+            <a:ext cx="2070100" cy="529560"/>
+          </a:xfrm>
+          <a:prstGeom prst="rect">
+            <a:avLst/>
+          </a:prstGeom>
+        </p:spPr>
+      </p:pic>
+      <p:pic>
+        <p:nvPicPr>
+          <p:cNvPr id="5" name="Picture 4" descr="seal_dark.png"/>
+          <p:cNvPicPr>
+            <a:picLocks noChangeAspect="1"/>
+          </p:cNvPicPr>
+          <p:nvPr/>
+        </p:nvPicPr>
+        <p:blipFill>
+          <a:blip r:embed="rId3"/>
+          <a:stretch>
+            <a:fillRect/>
+          </a:stretch>
+        </p:blipFill>
+        <p:spPr>
+          <a:xfrm>
+            <a:off x="11226800" y="5969000"/>
+            <a:ext cx="713915" cy="711200"/>
+          </a:xfrm>
+          <a:prstGeom prst="rect">
+            <a:avLst/>
+          </a:prstGeom>
+        </p:spPr>
+      </p:pic>
+    </p:spTree>
+  </p:cSld>
+  <p:clrMapOvr>
+    <a:masterClrMapping/>
+  </p:clrMapOvr>
+</p:sld>
+</file>
+
+<file path=ppt/slides/slide36.xml><?xml version="1.0" encoding="utf-8"?>
+<p:sld xmlns:a="http://schemas.openxmlformats.org/drawingml/2006/main" xmlns:p="http://schemas.openxmlformats.org/presentationml/2006/main" xmlns:r="http://schemas.openxmlformats.org/officeDocument/2006/relationships">
+  <p:cSld>
+    <p:spTree>
+      <p:nvGrpSpPr>
+        <p:cNvPr id="1" name=""/>
+        <p:cNvGrpSpPr/>
+        <p:nvPr/>
+      </p:nvGrpSpPr>
+      <p:grpSpPr/>
+      <p:sp>
+        <p:nvSpPr>
+          <p:cNvPr id="2" name="Title 1"/>
+          <p:cNvSpPr>
+            <a:spLocks noGrp="1"/>
+          </p:cNvSpPr>
+          <p:nvPr>
             <p:ph type="ctrTitle"/>
           </p:nvPr>
         </p:nvSpPr>
@@ -12933,7 +14331,7 @@
                 </a:solidFill>
                 <a:latin typeface="Arial"/>
               </a:rPr>
-              <a:t>RUN SHEET</a:t>
+              <a:t>WHO IS RUNNING THIS</a:t>
             </a:r>
           </a:p>
         </p:txBody>
@@ -12958,138 +14356,149 @@
                 <a:spcPct val="128000"/>
               </a:lnSpc>
               <a:spcAft>
-                <a:spcPts val="1600"/>
+                <a:spcPts val="1400"/>
+              </a:spcAft>
+              <a:buNone/>
+            </a:pPr>
+            <a:r>
+              <a:rPr sz="1700" b="0">
+                <a:solidFill>
+                  <a:srgbClr val="595959"/>
+                </a:solidFill>
+                <a:latin typeface="Arial"/>
+              </a:rPr>
+              <a:t>Chomskylab is the department's prototyping lab. Labtools is the team, the tooling and the parts behind it.</a:t>
+            </a:r>
+          </a:p>
+          <a:p>
+            <a:pPr marL="0" indent="0" algn="l">
+              <a:lnSpc>
+                <a:spcPct val="128000"/>
+              </a:lnSpc>
+              <a:spcAft>
+                <a:spcPts val="600"/>
+              </a:spcAft>
+              <a:buNone/>
+            </a:pPr>
+            <a:r>
+              <a:rPr sz="1700" b="1">
+                <a:solidFill>
+                  <a:srgbClr val="000000"/>
+                </a:solidFill>
+                <a:latin typeface="Arial"/>
+              </a:rPr>
+              <a:t>Everything on the tables came from the lab's component store</a:t>
+            </a:r>
+          </a:p>
+          <a:p>
+            <a:pPr marL="0" indent="0" algn="l">
+              <a:lnSpc>
+                <a:spcPct val="128000"/>
+              </a:lnSpc>
+              <a:spcAft>
+                <a:spcPts val="600"/>
               </a:spcAft>
               <a:buNone/>
             </a:pPr>
             <a:r>
               <a:rPr sz="1500" b="0">
                 <a:solidFill>
-                  <a:srgbClr val="595959"/>
-                </a:solidFill>
-                <a:latin typeface="Arial"/>
-              </a:rPr>
-              <a:t>Times are offsets from the start. The only hard checkpoint is 0:25: everyone has task 01 running.</a:t>
-            </a:r>
-          </a:p>
-          <a:p>
-            <a:pPr marL="0" indent="0" algn="l">
-              <a:lnSpc>
-                <a:spcPct val="128000"/>
-              </a:lnSpc>
-              <a:spcAft>
-                <a:spcPts val="1200"/>
-              </a:spcAft>
-              <a:buNone/>
-            </a:pPr>
-            <a:r>
-              <a:rPr sz="1400" b="0">
-                <a:solidFill>
-                  <a:srgbClr val="000000"/>
-                </a:solidFill>
-                <a:latin typeface="Consolas"/>
-              </a:rPr>
-              <a:t>0:00     10 min    Two motors, same message. Which felt urgent?</a:t>
-            </a:r>
-          </a:p>
-          <a:p>
-            <a:pPr marL="0" indent="0" algn="l">
-              <a:lnSpc>
-                <a:spcPct val="128000"/>
-              </a:lnSpc>
-              <a:spcAft>
-                <a:spcPts val="1200"/>
-              </a:spcAft>
-              <a:buNone/>
-            </a:pPr>
-            <a:r>
-              <a:rPr sz="1400" b="0">
-                <a:solidFill>
-                  <a:srgbClr val="000000"/>
-                </a:solidFill>
-                <a:latin typeface="Consolas"/>
-              </a:rPr>
-              <a:t>0:10     15 min    Boards out, task 01 running for everyone</a:t>
-            </a:r>
-          </a:p>
-          <a:p>
-            <a:pPr marL="0" indent="0" algn="l">
-              <a:lnSpc>
-                <a:spcPct val="128000"/>
-              </a:lnSpc>
-              <a:spcAft>
-                <a:spcPts val="1200"/>
-              </a:spcAft>
-              <a:buNone/>
-            </a:pPr>
-            <a:r>
-              <a:rPr sz="1400" b="0">
-                <a:solidFill>
-                  <a:srgbClr val="000000"/>
-                </a:solidFill>
-                <a:latin typeface="Consolas"/>
-              </a:rPr>
-              <a:t>0:25     60 min    Tasks 02 to 05, at your own pace</a:t>
-            </a:r>
-          </a:p>
-          <a:p>
-            <a:pPr marL="0" indent="0" algn="l">
-              <a:lnSpc>
-                <a:spcPct val="128000"/>
-              </a:lnSpc>
-              <a:spcAft>
-                <a:spcPts val="1200"/>
-              </a:spcAft>
-              <a:buNone/>
-            </a:pPr>
-            <a:r>
-              <a:rPr sz="1400" b="0">
-                <a:solidFill>
-                  <a:srgbClr val="000000"/>
-                </a:solidFill>
-                <a:latin typeface="Consolas"/>
-              </a:rPr>
-              <a:t>1:25     10 min    Round-the-room: what surprised you</a:t>
-            </a:r>
-          </a:p>
-          <a:p>
-            <a:pPr marL="0" indent="0" algn="l">
-              <a:lnSpc>
-                <a:spcPct val="128000"/>
-              </a:lnSpc>
-              <a:spcAft>
-                <a:spcPts val="1200"/>
-              </a:spcAft>
-              <a:buNone/>
-            </a:pPr>
-            <a:r>
-              <a:rPr sz="1400" b="0">
-                <a:solidFill>
-                  <a:srgbClr val="000000"/>
-                </a:solidFill>
-                <a:latin typeface="Consolas"/>
-              </a:rPr>
-              <a:t>1:35     20 min    Blind test on task 05</a:t>
-            </a:r>
-          </a:p>
-          <a:p>
-            <a:pPr marL="0" indent="0" algn="l">
-              <a:lnSpc>
-                <a:spcPct val="128000"/>
-              </a:lnSpc>
-              <a:spcAft>
-                <a:spcPts val="1200"/>
-              </a:spcAft>
-              <a:buNone/>
-            </a:pPr>
-            <a:r>
-              <a:rPr sz="1400" b="0">
-                <a:solidFill>
-                  <a:srgbClr val="000000"/>
-                </a:solidFill>
-                <a:latin typeface="Consolas"/>
-              </a:rPr>
-              <a:t>1:55      5 min    Pack down</a:t>
+                  <a:srgbClr val="000000"/>
+                </a:solidFill>
+                <a:latin typeface="Arial"/>
+              </a:rPr>
+              <a:t>• 442 components, tracked with drawer numbers and live counts</a:t>
+            </a:r>
+          </a:p>
+          <a:p>
+            <a:pPr marL="0" indent="0" algn="l">
+              <a:lnSpc>
+                <a:spcPct val="128000"/>
+              </a:lnSpc>
+              <a:spcAft>
+                <a:spcPts val="600"/>
+              </a:spcAft>
+              <a:buNone/>
+            </a:pPr>
+            <a:r>
+              <a:rPr sz="1500" b="0">
+                <a:solidFill>
+                  <a:srgbClr val="000000"/>
+                </a:solidFill>
+                <a:latin typeface="Arial"/>
+              </a:rPr>
+              <a:t>• You borrow parts for project work. Just ask</a:t>
+            </a:r>
+          </a:p>
+          <a:p>
+            <a:pPr marL="0" indent="0" algn="l">
+              <a:lnSpc>
+                <a:spcPct val="128000"/>
+              </a:lnSpc>
+              <a:spcAft>
+                <a:spcPts val="0"/>
+              </a:spcAft>
+              <a:buNone/>
+            </a:pPr>
+          </a:p>
+          <a:p>
+            <a:pPr marL="0" indent="0" algn="l">
+              <a:lnSpc>
+                <a:spcPct val="128000"/>
+              </a:lnSpc>
+              <a:spcAft>
+                <a:spcPts val="600"/>
+              </a:spcAft>
+              <a:buNone/>
+            </a:pPr>
+            <a:r>
+              <a:rPr sz="1700" b="1">
+                <a:solidFill>
+                  <a:srgbClr val="000000"/>
+                </a:solidFill>
+                <a:latin typeface="Arial"/>
+              </a:rPr>
+              <a:t>The lab also builds the software it runs on</a:t>
+            </a:r>
+          </a:p>
+          <a:p>
+            <a:pPr marL="0" indent="0" algn="l">
+              <a:lnSpc>
+                <a:spcPct val="128000"/>
+              </a:lnSpc>
+              <a:spcAft>
+                <a:spcPts val="600"/>
+              </a:spcAft>
+              <a:buNone/>
+            </a:pPr>
+            <a:r>
+              <a:rPr sz="1500" b="0">
+                <a:solidFill>
+                  <a:srgbClr val="000000"/>
+                </a:solidFill>
+                <a:latin typeface="Arial"/>
+              </a:rPr>
+              <a:t>• An event bus, a wall display, this workshop's sensor site</a:t>
+            </a:r>
+          </a:p>
+          <a:p>
+            <a:pPr marL="0" indent="0" algn="l">
+              <a:lnSpc>
+                <a:spcPct val="128000"/>
+              </a:lnSpc>
+              <a:spcAft>
+                <a:spcPts val="600"/>
+              </a:spcAft>
+              <a:buNone/>
+            </a:pPr>
+            <a:r>
+              <a:rPr sz="1500" b="0">
+                <a:solidFill>
+                  <a:srgbClr val="000000"/>
+                </a:solidFill>
+                <a:latin typeface="Arial"/>
+              </a:rPr>
+              <a:t>• All of it open, at github.com/labtools-au</a:t>
             </a:r>
           </a:p>
         </p:txBody>
@@ -13179,6 +14588,258 @@
               <a:buNone/>
             </a:pPr>
             <a:r>
+              <a:rPr sz="3200" b="1">
+                <a:solidFill>
+                  <a:srgbClr val="000000"/>
+                </a:solidFill>
+                <a:latin typeface="Arial"/>
+              </a:rPr>
+              <a:t>RUN SHEET</a:t>
+            </a:r>
+          </a:p>
+        </p:txBody>
+      </p:sp>
+      <p:sp>
+        <p:nvSpPr>
+          <p:cNvPr id="3" name="Text Placeholder 2"/>
+          <p:cNvSpPr>
+            <a:spLocks noGrp="1"/>
+          </p:cNvSpPr>
+          <p:nvPr>
+            <p:ph type="body" idx="1"/>
+          </p:nvPr>
+        </p:nvSpPr>
+        <p:spPr/>
+        <p:txBody>
+          <a:bodyPr/>
+          <a:lstStyle/>
+          <a:p>
+            <a:pPr marL="0" indent="0" algn="l">
+              <a:lnSpc>
+                <a:spcPct val="128000"/>
+              </a:lnSpc>
+              <a:spcAft>
+                <a:spcPts val="1600"/>
+              </a:spcAft>
+              <a:buNone/>
+            </a:pPr>
+            <a:r>
+              <a:rPr sz="1500" b="0">
+                <a:solidFill>
+                  <a:srgbClr val="595959"/>
+                </a:solidFill>
+                <a:latin typeface="Arial"/>
+              </a:rPr>
+              <a:t>Times are offsets from the start. The only hard checkpoint is 0:25: everyone has task 01 running.</a:t>
+            </a:r>
+          </a:p>
+          <a:p>
+            <a:pPr marL="0" indent="0" algn="l">
+              <a:lnSpc>
+                <a:spcPct val="128000"/>
+              </a:lnSpc>
+              <a:spcAft>
+                <a:spcPts val="1200"/>
+              </a:spcAft>
+              <a:buNone/>
+            </a:pPr>
+            <a:r>
+              <a:rPr sz="1400" b="0">
+                <a:solidFill>
+                  <a:srgbClr val="000000"/>
+                </a:solidFill>
+                <a:latin typeface="Consolas"/>
+              </a:rPr>
+              <a:t>0:00     10 min    Two motors, same message. Which felt urgent?</a:t>
+            </a:r>
+          </a:p>
+          <a:p>
+            <a:pPr marL="0" indent="0" algn="l">
+              <a:lnSpc>
+                <a:spcPct val="128000"/>
+              </a:lnSpc>
+              <a:spcAft>
+                <a:spcPts val="1200"/>
+              </a:spcAft>
+              <a:buNone/>
+            </a:pPr>
+            <a:r>
+              <a:rPr sz="1400" b="0">
+                <a:solidFill>
+                  <a:srgbClr val="000000"/>
+                </a:solidFill>
+                <a:latin typeface="Consolas"/>
+              </a:rPr>
+              <a:t>0:10     15 min    Boards out, task 01 running for everyone</a:t>
+            </a:r>
+          </a:p>
+          <a:p>
+            <a:pPr marL="0" indent="0" algn="l">
+              <a:lnSpc>
+                <a:spcPct val="128000"/>
+              </a:lnSpc>
+              <a:spcAft>
+                <a:spcPts val="1200"/>
+              </a:spcAft>
+              <a:buNone/>
+            </a:pPr>
+            <a:r>
+              <a:rPr sz="1400" b="0">
+                <a:solidFill>
+                  <a:srgbClr val="000000"/>
+                </a:solidFill>
+                <a:latin typeface="Consolas"/>
+              </a:rPr>
+              <a:t>0:25     60 min    Tasks 02 to 05, at your own pace</a:t>
+            </a:r>
+          </a:p>
+          <a:p>
+            <a:pPr marL="0" indent="0" algn="l">
+              <a:lnSpc>
+                <a:spcPct val="128000"/>
+              </a:lnSpc>
+              <a:spcAft>
+                <a:spcPts val="1200"/>
+              </a:spcAft>
+              <a:buNone/>
+            </a:pPr>
+            <a:r>
+              <a:rPr sz="1400" b="0">
+                <a:solidFill>
+                  <a:srgbClr val="000000"/>
+                </a:solidFill>
+                <a:latin typeface="Consolas"/>
+              </a:rPr>
+              <a:t>1:25     10 min    Round-the-room: what surprised you</a:t>
+            </a:r>
+          </a:p>
+          <a:p>
+            <a:pPr marL="0" indent="0" algn="l">
+              <a:lnSpc>
+                <a:spcPct val="128000"/>
+              </a:lnSpc>
+              <a:spcAft>
+                <a:spcPts val="1200"/>
+              </a:spcAft>
+              <a:buNone/>
+            </a:pPr>
+            <a:r>
+              <a:rPr sz="1400" b="0">
+                <a:solidFill>
+                  <a:srgbClr val="000000"/>
+                </a:solidFill>
+                <a:latin typeface="Consolas"/>
+              </a:rPr>
+              <a:t>1:35     20 min    Blind test on task 05</a:t>
+            </a:r>
+          </a:p>
+          <a:p>
+            <a:pPr marL="0" indent="0" algn="l">
+              <a:lnSpc>
+                <a:spcPct val="128000"/>
+              </a:lnSpc>
+              <a:spcAft>
+                <a:spcPts val="1200"/>
+              </a:spcAft>
+              <a:buNone/>
+            </a:pPr>
+            <a:r>
+              <a:rPr sz="1400" b="0">
+                <a:solidFill>
+                  <a:srgbClr val="000000"/>
+                </a:solidFill>
+                <a:latin typeface="Consolas"/>
+              </a:rPr>
+              <a:t>1:55      5 min    Pack down</a:t>
+            </a:r>
+          </a:p>
+        </p:txBody>
+      </p:sp>
+      <p:pic>
+        <p:nvPicPr>
+          <p:cNvPr id="4" name="Picture 3" descr="wordmark_dark.png"/>
+          <p:cNvPicPr>
+            <a:picLocks noChangeAspect="1"/>
+          </p:cNvPicPr>
+          <p:nvPr/>
+        </p:nvPicPr>
+        <p:blipFill>
+          <a:blip r:embed="rId2"/>
+          <a:stretch>
+            <a:fillRect/>
+          </a:stretch>
+        </p:blipFill>
+        <p:spPr>
+          <a:xfrm>
+            <a:off x="342900" y="6184900"/>
+            <a:ext cx="2070100" cy="529560"/>
+          </a:xfrm>
+          <a:prstGeom prst="rect">
+            <a:avLst/>
+          </a:prstGeom>
+        </p:spPr>
+      </p:pic>
+      <p:pic>
+        <p:nvPicPr>
+          <p:cNvPr id="5" name="Picture 4" descr="seal_dark.png"/>
+          <p:cNvPicPr>
+            <a:picLocks noChangeAspect="1"/>
+          </p:cNvPicPr>
+          <p:nvPr/>
+        </p:nvPicPr>
+        <p:blipFill>
+          <a:blip r:embed="rId3"/>
+          <a:stretch>
+            <a:fillRect/>
+          </a:stretch>
+        </p:blipFill>
+        <p:spPr>
+          <a:xfrm>
+            <a:off x="11226800" y="5969000"/>
+            <a:ext cx="713915" cy="711200"/>
+          </a:xfrm>
+          <a:prstGeom prst="rect">
+            <a:avLst/>
+          </a:prstGeom>
+        </p:spPr>
+      </p:pic>
+    </p:spTree>
+  </p:cSld>
+  <p:clrMapOvr>
+    <a:masterClrMapping/>
+  </p:clrMapOvr>
+</p:sld>
+</file>
+
+<file path=ppt/slides/slide7.xml><?xml version="1.0" encoding="utf-8"?>
+<p:sld xmlns:a="http://schemas.openxmlformats.org/drawingml/2006/main" xmlns:p="http://schemas.openxmlformats.org/presentationml/2006/main" xmlns:r="http://schemas.openxmlformats.org/officeDocument/2006/relationships">
+  <p:cSld>
+    <p:spTree>
+      <p:nvGrpSpPr>
+        <p:cNvPr id="1" name=""/>
+        <p:cNvGrpSpPr/>
+        <p:nvPr/>
+      </p:nvGrpSpPr>
+      <p:grpSpPr/>
+      <p:sp>
+        <p:nvSpPr>
+          <p:cNvPr id="2" name="Title 1"/>
+          <p:cNvSpPr>
+            <a:spLocks noGrp="1"/>
+          </p:cNvSpPr>
+          <p:nvPr>
+            <p:ph type="title"/>
+          </p:nvPr>
+        </p:nvSpPr>
+        <p:spPr/>
+        <p:txBody>
+          <a:bodyPr/>
+          <a:lstStyle/>
+          <a:p>
+            <a:pPr marL="0" indent="0" algn="l">
+              <a:buNone/>
+            </a:pPr>
+            <a:r>
               <a:rPr sz="4400" b="1">
                 <a:solidFill>
                   <a:srgbClr val="000000"/>
@@ -13246,309 +14907,6 @@
 </p:sld>
 </file>
 
-<file path=ppt/slides/slide7.xml><?xml version="1.0" encoding="utf-8"?>
-<p:sld xmlns:a="http://schemas.openxmlformats.org/drawingml/2006/main" xmlns:p="http://schemas.openxmlformats.org/presentationml/2006/main" xmlns:r="http://schemas.openxmlformats.org/officeDocument/2006/relationships">
-  <p:cSld>
-    <p:spTree>
-      <p:nvGrpSpPr>
-        <p:cNvPr id="1" name=""/>
-        <p:cNvGrpSpPr/>
-        <p:nvPr/>
-      </p:nvGrpSpPr>
-      <p:grpSpPr/>
-      <p:sp>
-        <p:nvSpPr>
-          <p:cNvPr id="2" name="Title 1"/>
-          <p:cNvSpPr>
-            <a:spLocks noGrp="1"/>
-          </p:cNvSpPr>
-          <p:nvPr>
-            <p:ph type="title"/>
-          </p:nvPr>
-        </p:nvSpPr>
-        <p:spPr/>
-        <p:txBody>
-          <a:bodyPr/>
-          <a:lstStyle/>
-          <a:p>
-            <a:pPr marL="0" indent="0" algn="l">
-              <a:buNone/>
-            </a:pPr>
-            <a:r>
-              <a:rPr sz="3200" b="1">
-                <a:solidFill>
-                  <a:srgbClr val="000000"/>
-                </a:solidFill>
-                <a:latin typeface="Arial"/>
-              </a:rPr>
-              <a:t>FIVE TASKS, ONE BOARD EACH</a:t>
-            </a:r>
-          </a:p>
-        </p:txBody>
-      </p:sp>
-      <p:sp>
-        <p:nvSpPr>
-          <p:cNvPr id="3" name="Text Placeholder 2"/>
-          <p:cNvSpPr>
-            <a:spLocks noGrp="1"/>
-          </p:cNvSpPr>
-          <p:nvPr>
-            <p:ph type="body" idx="1"/>
-          </p:nvPr>
-        </p:nvSpPr>
-        <p:spPr/>
-        <p:txBody>
-          <a:bodyPr/>
-          <a:lstStyle/>
-          <a:p>
-            <a:pPr marL="0" indent="0" algn="l">
-              <a:lnSpc>
-                <a:spcPct val="128000"/>
-              </a:lnSpc>
-              <a:spcAft>
-                <a:spcPts val="1400"/>
-              </a:spcAft>
-              <a:buNone/>
-            </a:pPr>
-            <a:r>
-              <a:rPr sz="1700" b="0">
-                <a:solidFill>
-                  <a:srgbClr val="595959"/>
-                </a:solidFill>
-                <a:latin typeface="Arial"/>
-              </a:rPr>
-              <a:t>Upload, change two numbers, upload again. That loop is the point.</a:t>
-            </a:r>
-          </a:p>
-          <a:p>
-            <a:pPr marL="0" indent="0" algn="l">
-              <a:lnSpc>
-                <a:spcPct val="128000"/>
-              </a:lnSpc>
-              <a:spcAft>
-                <a:spcPts val="600"/>
-              </a:spcAft>
-              <a:buNone/>
-            </a:pPr>
-            <a:r>
-              <a:rPr sz="1700" b="1">
-                <a:solidFill>
-                  <a:srgbClr val="000000"/>
-                </a:solidFill>
-                <a:latin typeface="Arial"/>
-              </a:rPr>
-              <a:t>01   Make something spin        coin motor</a:t>
-            </a:r>
-          </a:p>
-          <a:p>
-            <a:pPr marL="0" indent="0" algn="l">
-              <a:lnSpc>
-                <a:spcPct val="128000"/>
-              </a:lnSpc>
-              <a:spcAft>
-                <a:spcPts val="600"/>
-              </a:spcAft>
-              <a:buNone/>
-            </a:pPr>
-            <a:r>
-              <a:rPr sz="1700" b="1">
-                <a:solidFill>
-                  <a:srgbClr val="000000"/>
-                </a:solidFill>
-                <a:latin typeface="Arial"/>
-              </a:rPr>
-              <a:t>02   Make something tap         solenoid</a:t>
-            </a:r>
-          </a:p>
-          <a:p>
-            <a:pPr marL="0" indent="0" algn="l">
-              <a:lnSpc>
-                <a:spcPct val="128000"/>
-              </a:lnSpc>
-              <a:spcAft>
-                <a:spcPts val="600"/>
-              </a:spcAft>
-              <a:buNone/>
-            </a:pPr>
-            <a:r>
-              <a:rPr sz="1700" b="1">
-                <a:solidFill>
-                  <a:srgbClr val="000000"/>
-                </a:solidFill>
-                <a:latin typeface="Arial"/>
-              </a:rPr>
-              <a:t>03   Make something warm        Peltier tile</a:t>
-            </a:r>
-          </a:p>
-          <a:p>
-            <a:pPr marL="0" indent="0" algn="l">
-              <a:lnSpc>
-                <a:spcPct val="128000"/>
-              </a:lnSpc>
-              <a:spcAft>
-                <a:spcPts val="600"/>
-              </a:spcAft>
-              <a:buNone/>
-            </a:pPr>
-            <a:r>
-              <a:rPr sz="1700" b="1">
-                <a:solidFill>
-                  <a:srgbClr val="000000"/>
-                </a:solidFill>
-                <a:latin typeface="Arial"/>
-              </a:rPr>
-              <a:t>04   Make it notice you         a wire and foil</a:t>
-            </a:r>
-          </a:p>
-          <a:p>
-            <a:pPr marL="0" indent="0" algn="l">
-              <a:lnSpc>
-                <a:spcPct val="128000"/>
-              </a:lnSpc>
-              <a:spcAft>
-                <a:spcPts val="600"/>
-              </a:spcAft>
-              <a:buNone/>
-            </a:pPr>
-            <a:r>
-              <a:rPr sz="1700" b="1">
-                <a:solidFill>
-                  <a:srgbClr val="000000"/>
-                </a:solidFill>
-                <a:latin typeface="Arial"/>
-              </a:rPr>
-              <a:t>05   Make it answer back        both together</a:t>
-            </a:r>
-          </a:p>
-          <a:p>
-            <a:pPr marL="0" indent="0" algn="l">
-              <a:lnSpc>
-                <a:spcPct val="128000"/>
-              </a:lnSpc>
-              <a:spcAft>
-                <a:spcPts val="600"/>
-              </a:spcAft>
-              <a:buNone/>
-            </a:pPr>
-            <a:r>
-              <a:rPr sz="1700" b="1">
-                <a:solidFill>
-                  <a:srgbClr val="000000"/>
-                </a:solidFill>
-                <a:latin typeface="Arial"/>
-              </a:rPr>
-              <a:t>06   Use what you have          sensors.chomskylab.dk</a:t>
-            </a:r>
-          </a:p>
-          <a:p>
-            <a:pPr marL="0" indent="0" algn="l">
-              <a:lnSpc>
-                <a:spcPct val="128000"/>
-              </a:lnSpc>
-              <a:spcAft>
-                <a:spcPts val="0"/>
-              </a:spcAft>
-              <a:buNone/>
-            </a:pPr>
-          </a:p>
-          <a:p>
-            <a:pPr marL="0" indent="0" algn="l">
-              <a:lnSpc>
-                <a:spcPct val="128000"/>
-              </a:lnSpc>
-              <a:spcAft>
-                <a:spcPts val="600"/>
-              </a:spcAft>
-              <a:buNone/>
-            </a:pPr>
-            <a:r>
-              <a:rPr sz="1700" b="0">
-                <a:solidFill>
-                  <a:srgbClr val="000000"/>
-                </a:solidFill>
-                <a:latin typeface="Arial"/>
-              </a:rPr>
-              <a:t>1 to 3 are output. 4 is input. 5 is both. 6 needs no board.</a:t>
-            </a:r>
-          </a:p>
-          <a:p>
-            <a:pPr marL="0" indent="0" algn="l">
-              <a:lnSpc>
-                <a:spcPct val="128000"/>
-              </a:lnSpc>
-              <a:spcAft>
-                <a:spcPts val="600"/>
-              </a:spcAft>
-              <a:buNone/>
-            </a:pPr>
-            <a:r>
-              <a:rPr sz="1700" b="0">
-                <a:solidFill>
-                  <a:srgbClr val="000000"/>
-                </a:solidFill>
-                <a:latin typeface="Arial"/>
-              </a:rPr>
-              <a:t>Nobody is expected to finish all five.</a:t>
-            </a:r>
-          </a:p>
-        </p:txBody>
-      </p:sp>
-      <p:pic>
-        <p:nvPicPr>
-          <p:cNvPr id="4" name="Picture 3" descr="wordmark_dark.png"/>
-          <p:cNvPicPr>
-            <a:picLocks noChangeAspect="1"/>
-          </p:cNvPicPr>
-          <p:nvPr/>
-        </p:nvPicPr>
-        <p:blipFill>
-          <a:blip r:embed="rId2"/>
-          <a:stretch>
-            <a:fillRect/>
-          </a:stretch>
-        </p:blipFill>
-        <p:spPr>
-          <a:xfrm>
-            <a:off x="342900" y="6184900"/>
-            <a:ext cx="2070100" cy="529560"/>
-          </a:xfrm>
-          <a:prstGeom prst="rect">
-            <a:avLst/>
-          </a:prstGeom>
-        </p:spPr>
-      </p:pic>
-      <p:pic>
-        <p:nvPicPr>
-          <p:cNvPr id="5" name="Picture 4" descr="seal_dark.png"/>
-          <p:cNvPicPr>
-            <a:picLocks noChangeAspect="1"/>
-          </p:cNvPicPr>
-          <p:nvPr/>
-        </p:nvPicPr>
-        <p:blipFill>
-          <a:blip r:embed="rId3"/>
-          <a:stretch>
-            <a:fillRect/>
-          </a:stretch>
-        </p:blipFill>
-        <p:spPr>
-          <a:xfrm>
-            <a:off x="11226800" y="5969000"/>
-            <a:ext cx="713915" cy="711200"/>
-          </a:xfrm>
-          <a:prstGeom prst="rect">
-            <a:avLst/>
-          </a:prstGeom>
-        </p:spPr>
-      </p:pic>
-    </p:spTree>
-  </p:cSld>
-  <p:clrMapOvr>
-    <a:masterClrMapping/>
-  </p:clrMapOvr>
-</p:sld>
-</file>
-
 <file path=ppt/slides/slide8.xml><?xml version="1.0" encoding="utf-8"?>
 <p:sld xmlns:a="http://schemas.openxmlformats.org/drawingml/2006/main" xmlns:p="http://schemas.openxmlformats.org/presentationml/2006/main" xmlns:r="http://schemas.openxmlformats.org/officeDocument/2006/relationships">
   <p:cSld>
@@ -13584,7 +14942,7 @@
                 </a:solidFill>
                 <a:latin typeface="Arial"/>
               </a:rPr>
-              <a:t>HOW THE TASK SKETCHES WORK</a:t>
+              <a:t>FIVE TASKS, ONE BOARD EACH</a:t>
             </a:r>
           </a:p>
         </p:txBody>
@@ -13620,7 +14978,7 @@
                 </a:solidFill>
                 <a:latin typeface="Arial"/>
               </a:rPr>
-              <a:t>Every sketch runs the moment you upload it. Nothing to wire.</a:t>
+              <a:t>Upload, change two numbers, upload again. That loop is the point.</a:t>
             </a:r>
           </a:p>
           <a:p>
@@ -13640,7 +14998,7 @@
                 </a:solidFill>
                 <a:latin typeface="Arial"/>
               </a:rPr>
-              <a:t>A CHANGE ME block at the top</a:t>
+              <a:t>01   Make something spin        coin motor</a:t>
             </a:r>
           </a:p>
           <a:p>
@@ -13654,13 +15012,93 @@
               <a:buNone/>
             </a:pPr>
             <a:r>
-              <a:rPr sz="1500" b="0">
-                <a:solidFill>
-                  <a:srgbClr val="000000"/>
-                </a:solidFill>
-                <a:latin typeface="Arial"/>
-              </a:rPr>
-              <a:t>• Two or three numbers. Edit, upload, feel the difference</a:t>
+              <a:rPr sz="1700" b="1">
+                <a:solidFill>
+                  <a:srgbClr val="000000"/>
+                </a:solidFill>
+                <a:latin typeface="Arial"/>
+              </a:rPr>
+              <a:t>02   Make something tap         solenoid</a:t>
+            </a:r>
+          </a:p>
+          <a:p>
+            <a:pPr marL="0" indent="0" algn="l">
+              <a:lnSpc>
+                <a:spcPct val="128000"/>
+              </a:lnSpc>
+              <a:spcAft>
+                <a:spcPts val="600"/>
+              </a:spcAft>
+              <a:buNone/>
+            </a:pPr>
+            <a:r>
+              <a:rPr sz="1700" b="1">
+                <a:solidFill>
+                  <a:srgbClr val="000000"/>
+                </a:solidFill>
+                <a:latin typeface="Arial"/>
+              </a:rPr>
+              <a:t>03   Make something warm        Peltier tile</a:t>
+            </a:r>
+          </a:p>
+          <a:p>
+            <a:pPr marL="0" indent="0" algn="l">
+              <a:lnSpc>
+                <a:spcPct val="128000"/>
+              </a:lnSpc>
+              <a:spcAft>
+                <a:spcPts val="600"/>
+              </a:spcAft>
+              <a:buNone/>
+            </a:pPr>
+            <a:r>
+              <a:rPr sz="1700" b="1">
+                <a:solidFill>
+                  <a:srgbClr val="000000"/>
+                </a:solidFill>
+                <a:latin typeface="Arial"/>
+              </a:rPr>
+              <a:t>04   Make it notice you         a wire and foil</a:t>
+            </a:r>
+          </a:p>
+          <a:p>
+            <a:pPr marL="0" indent="0" algn="l">
+              <a:lnSpc>
+                <a:spcPct val="128000"/>
+              </a:lnSpc>
+              <a:spcAft>
+                <a:spcPts val="600"/>
+              </a:spcAft>
+              <a:buNone/>
+            </a:pPr>
+            <a:r>
+              <a:rPr sz="1700" b="1">
+                <a:solidFill>
+                  <a:srgbClr val="000000"/>
+                </a:solidFill>
+                <a:latin typeface="Arial"/>
+              </a:rPr>
+              <a:t>05   Make it answer back        both together</a:t>
+            </a:r>
+          </a:p>
+          <a:p>
+            <a:pPr marL="0" indent="0" algn="l">
+              <a:lnSpc>
+                <a:spcPct val="128000"/>
+              </a:lnSpc>
+              <a:spcAft>
+                <a:spcPts val="600"/>
+              </a:spcAft>
+              <a:buNone/>
+            </a:pPr>
+            <a:r>
+              <a:rPr sz="1700" b="1">
+                <a:solidFill>
+                  <a:srgbClr val="000000"/>
+                </a:solidFill>
+                <a:latin typeface="Arial"/>
+              </a:rPr>
+              <a:t>06   Use what you have          sensors.chomskylab.dk</a:t>
             </a:r>
           </a:p>
           <a:p>
@@ -13685,13 +15123,13 @@
               <a:buNone/>
             </a:pPr>
             <a:r>
-              <a:rPr sz="1700" b="1">
-                <a:solidFill>
-                  <a:srgbClr val="000000"/>
-                </a:solidFill>
-                <a:latin typeface="Arial"/>
-              </a:rPr>
-              <a:t>A THINGS TO TRY list at the bottom</a:t>
+              <a:rPr sz="1700" b="0">
+                <a:solidFill>
+                  <a:srgbClr val="000000"/>
+                </a:solidFill>
+                <a:latin typeface="Arial"/>
+              </a:rPr>
+              <a:t>1 to 3 are output. 4 is input. 5 is both. 6 needs no board.</a:t>
             </a:r>
           </a:p>
           <a:p>
@@ -13705,64 +15143,13 @@
               <a:buNone/>
             </a:pPr>
             <a:r>
-              <a:rPr sz="1500" b="0">
-                <a:solidFill>
-                  <a:srgbClr val="000000"/>
-                </a:solidFill>
-                <a:latin typeface="Arial"/>
-              </a:rPr>
-              <a:t>• Four experiments, roughly in order of difficulty</a:t>
-            </a:r>
-          </a:p>
-          <a:p>
-            <a:pPr marL="0" indent="0" algn="l">
-              <a:lnSpc>
-                <a:spcPct val="128000"/>
-              </a:lnSpc>
-              <a:spcAft>
-                <a:spcPts val="600"/>
-              </a:spcAft>
-              <a:buNone/>
-            </a:pPr>
-            <a:r>
-              <a:rPr sz="1500" b="0">
-                <a:solidFill>
-                  <a:srgbClr val="000000"/>
-                </a:solidFill>
-                <a:latin typeface="Arial"/>
-              </a:rPr>
-              <a:t>• The last one is usually the interesting one</a:t>
-            </a:r>
-          </a:p>
-          <a:p>
-            <a:pPr marL="0" indent="0" algn="l">
-              <a:lnSpc>
-                <a:spcPct val="128000"/>
-              </a:lnSpc>
-              <a:spcAft>
-                <a:spcPts val="0"/>
-              </a:spcAft>
-              <a:buNone/>
-            </a:pPr>
-          </a:p>
-          <a:p>
-            <a:pPr marL="0" indent="0" algn="l">
-              <a:lnSpc>
-                <a:spcPct val="128000"/>
-              </a:lnSpc>
-              <a:spcAft>
-                <a:spcPts val="600"/>
-              </a:spcAft>
-              <a:buNone/>
-            </a:pPr>
-            <a:r>
-              <a:rPr sz="1700" b="1">
-                <a:solidFill>
-                  <a:srgbClr val="000000"/>
-                </a:solidFill>
-                <a:latin typeface="Arial"/>
-              </a:rPr>
-              <a:t>github.com/labtools-au/multimodal-actuator-workshop</a:t>
+              <a:rPr sz="1700" b="0">
+                <a:solidFill>
+                  <a:srgbClr val="000000"/>
+                </a:solidFill>
+                <a:latin typeface="Arial"/>
+              </a:rPr>
+              <a:t>Nobody is expected to finish all five.</a:t>
             </a:r>
           </a:p>
         </p:txBody>
@@ -13858,7 +15245,7 @@
                 </a:solidFill>
                 <a:latin typeface="Arial"/>
               </a:rPr>
-              <a:t>WHAT YOU GET IN THE BASE KIT</a:t>
+              <a:t>HOW THE TASK SKETCHES WORK</a:t>
             </a:r>
           </a:p>
         </p:txBody>
@@ -13894,7 +15281,7 @@
                 </a:solidFill>
                 <a:latin typeface="Arial"/>
               </a:rPr>
-              <a:t>One set per pair. Collect it before you start task 01.</a:t>
+              <a:t>Every sketch runs the moment you upload it. Nothing to wire.</a:t>
             </a:r>
           </a:p>
           <a:p>
@@ -13914,7 +15301,7 @@
                 </a:solidFill>
                 <a:latin typeface="Arial"/>
               </a:rPr>
-              <a:t>Board, breadboard, jumper wires, USB cable</a:t>
+              <a:t>A CHANGE ME block at the top</a:t>
             </a:r>
           </a:p>
           <a:p>
@@ -13934,7 +15321,7 @@
                 </a:solidFill>
                 <a:latin typeface="Arial"/>
               </a:rPr>
-              <a:t>• Assorted resistors and a few transistors</a:t>
+              <a:t>• Two or three numbers. Edit, upload, feel the difference</a:t>
             </a:r>
           </a:p>
           <a:p>
@@ -13965,7 +15352,7 @@
                 </a:solidFill>
                 <a:latin typeface="Arial"/>
               </a:rPr>
-              <a:t>Breadboard power supply, drawer 8A</a:t>
+              <a:t>A THINGS TO TRY list at the bottom</a:t>
             </a:r>
           </a:p>
           <a:p>
@@ -13985,7 +15372,27 @@
                 </a:solidFill>
                 <a:latin typeface="Arial"/>
               </a:rPr>
-              <a:t>• 42 in stock. Use it for anything that is not just an LED.</a:t>
+              <a:t>• Four experiments, roughly in order of difficulty</a:t>
+            </a:r>
+          </a:p>
+          <a:p>
+            <a:pPr marL="0" indent="0" algn="l">
+              <a:lnSpc>
+                <a:spcPct val="128000"/>
+              </a:lnSpc>
+              <a:spcAft>
+                <a:spcPts val="600"/>
+              </a:spcAft>
+              <a:buNone/>
+            </a:pPr>
+            <a:r>
+              <a:rPr sz="1500" b="0">
+                <a:solidFill>
+                  <a:srgbClr val="000000"/>
+                </a:solidFill>
+                <a:latin typeface="Arial"/>
+              </a:rPr>
+              <a:t>• The last one is usually the interesting one</a:t>
             </a:r>
           </a:p>
           <a:p>
@@ -14016,78 +15423,7 @@
                 </a:solidFill>
                 <a:latin typeface="Arial"/>
               </a:rPr>
-              <a:t>L9110S H-bridge, drawer 2C</a:t>
-            </a:r>
-          </a:p>
-          <a:p>
-            <a:pPr marL="0" indent="0" algn="l">
-              <a:lnSpc>
-                <a:spcPct val="128000"/>
-              </a:lnSpc>
-              <a:spcAft>
-                <a:spcPts val="600"/>
-              </a:spcAft>
-              <a:buNone/>
-            </a:pPr>
-            <a:r>
-              <a:rPr sz="1500" b="0">
-                <a:solidFill>
-                  <a:srgbClr val="000000"/>
-                </a:solidFill>
-                <a:latin typeface="Arial"/>
-              </a:rPr>
-              <a:t>• 24 in stock. Needed for the Peltier and for reversing a motor.</a:t>
-            </a:r>
-          </a:p>
-          <a:p>
-            <a:pPr marL="0" indent="0" algn="l">
-              <a:lnSpc>
-                <a:spcPct val="128000"/>
-              </a:lnSpc>
-              <a:spcAft>
-                <a:spcPts val="0"/>
-              </a:spcAft>
-              <a:buNone/>
-            </a:pPr>
-          </a:p>
-          <a:p>
-            <a:pPr marL="0" indent="0" algn="l">
-              <a:lnSpc>
-                <a:spcPct val="128000"/>
-              </a:lnSpc>
-              <a:spcAft>
-                <a:spcPts val="600"/>
-              </a:spcAft>
-              <a:buNone/>
-            </a:pPr>
-            <a:r>
-              <a:rPr sz="1700" b="1">
-                <a:solidFill>
-                  <a:srgbClr val="000000"/>
-                </a:solidFill>
-                <a:latin typeface="Arial"/>
-              </a:rPr>
-              <a:t>PAM8403 amplifier, drawer 11F</a:t>
-            </a:r>
-          </a:p>
-          <a:p>
-            <a:pPr marL="0" indent="0" algn="l">
-              <a:lnSpc>
-                <a:spcPct val="128000"/>
-              </a:lnSpc>
-              <a:spcAft>
-                <a:spcPts val="600"/>
-              </a:spcAft>
-              <a:buNone/>
-            </a:pPr>
-            <a:r>
-              <a:rPr sz="1500" b="0">
-                <a:solidFill>
-                  <a:srgbClr val="000000"/>
-                </a:solidFill>
-                <a:latin typeface="Arial"/>
-              </a:rPr>
-              <a:t>• 25 in stock. Needed to drive a transducer.</a:t>
+              <a:t>github.com/labtools-au/multimodal-actuator-workshop</a:t>
             </a:r>
           </a:p>
         </p:txBody>

--- a/docs/multimodal-actuator-workshop.pptx
+++ b/docs/multimodal-actuator-workshop.pptx
@@ -8574,7 +8574,7 @@
                 <a:spcPct val="128000"/>
               </a:lnSpc>
               <a:spcAft>
-                <a:spcPts val="1400"/>
+                <a:spcPts val="1200"/>
               </a:spcAft>
               <a:buNone/>
             </a:pPr>
@@ -8594,7 +8594,7 @@
                 <a:spcPct val="128000"/>
               </a:lnSpc>
               <a:spcAft>
-                <a:spcPts val="600"/>
+                <a:spcPts val="400"/>
               </a:spcAft>
               <a:buNone/>
             </a:pPr>
@@ -8605,7 +8605,7 @@
                 </a:solidFill>
                 <a:latin typeface="Arial"/>
               </a:rPr>
-              <a:t>If you want to drive something not in front of you, go and get it.</a:t>
+              <a:t>If you want to drive something not in front of you, go get it.</a:t>
             </a:r>
           </a:p>
           <a:p>
@@ -8614,10 +8614,19 @@
                 <a:spcPct val="128000"/>
               </a:lnSpc>
               <a:spcAft>
-                <a:spcPts val="0"/>
-              </a:spcAft>
-              <a:buNone/>
-            </a:pPr>
+                <a:spcPts val="400"/>
+              </a:spcAft>
+              <a:buNone/>
+            </a:pPr>
+            <a:r>
+              <a:rPr sz="1700" b="1">
+                <a:solidFill>
+                  <a:srgbClr val="000000"/>
+                </a:solidFill>
+                <a:latin typeface="Arial"/>
+              </a:rPr>
+              <a:t>The three things that are not negotiable</a:t>
+            </a:r>
           </a:p>
           <a:p>
             <a:pPr marL="0" indent="0" algn="l">
@@ -8625,18 +8634,18 @@
                 <a:spcPct val="128000"/>
               </a:lnSpc>
               <a:spcAft>
-                <a:spcPts val="600"/>
-              </a:spcAft>
-              <a:buNone/>
-            </a:pPr>
-            <a:r>
-              <a:rPr sz="1700" b="1">
-                <a:solidFill>
-                  <a:srgbClr val="000000"/>
-                </a:solidFill>
-                <a:latin typeface="Arial"/>
-              </a:rPr>
-              <a:t>The three things that are not negotiable</a:t>
+                <a:spcPts val="400"/>
+              </a:spcAft>
+              <a:buNone/>
+            </a:pPr>
+            <a:r>
+              <a:rPr sz="1500" b="0">
+                <a:solidFill>
+                  <a:srgbClr val="000000"/>
+                </a:solidFill>
+                <a:latin typeface="Arial"/>
+              </a:rPr>
+              <a:t>• Solenoid and Peltier get their own supply, never USB</a:t>
             </a:r>
           </a:p>
           <a:p>
@@ -8645,7 +8654,7 @@
                 <a:spcPct val="128000"/>
               </a:lnSpc>
               <a:spcAft>
-                <a:spcPts val="600"/>
+                <a:spcPts val="400"/>
               </a:spcAft>
               <a:buNone/>
             </a:pPr>
@@ -8656,7 +8665,7 @@
                 </a:solidFill>
                 <a:latin typeface="Arial"/>
               </a:rPr>
-              <a:t>• Solenoid and Peltier get their own supply, never USB</a:t>
+              <a:t>• The Peltier heatsink goes on before it is switched on</a:t>
             </a:r>
           </a:p>
           <a:p>
@@ -8665,27 +8674,7 @@
                 <a:spcPct val="128000"/>
               </a:lnSpc>
               <a:spcAft>
-                <a:spcPts val="600"/>
-              </a:spcAft>
-              <a:buNone/>
-            </a:pPr>
-            <a:r>
-              <a:rPr sz="1500" b="0">
-                <a:solidFill>
-                  <a:srgbClr val="000000"/>
-                </a:solidFill>
-                <a:latin typeface="Arial"/>
-              </a:rPr>
-              <a:t>• The Peltier heatsink goes on before it is switched on</a:t>
-            </a:r>
-          </a:p>
-          <a:p>
-            <a:pPr marL="0" indent="0" algn="l">
-              <a:lnSpc>
-                <a:spcPct val="128000"/>
-              </a:lnSpc>
-              <a:spcAft>
-                <a:spcPts val="600"/>
+                <a:spcPts val="400"/>
               </a:spcAft>
               <a:buNone/>
             </a:pPr>
@@ -8817,7 +8806,7 @@
                 <a:spcPct val="128000"/>
               </a:lnSpc>
               <a:spcAft>
-                <a:spcPts val="1400"/>
+                <a:spcPts val="1200"/>
               </a:spcAft>
               <a:buNone/>
             </a:pPr>
@@ -8837,7 +8826,7 @@
                 <a:spcPct val="128000"/>
               </a:lnSpc>
               <a:spcAft>
-                <a:spcPts val="600"/>
+                <a:spcPts val="400"/>
               </a:spcAft>
               <a:buNone/>
             </a:pPr>
@@ -8857,10 +8846,19 @@
                 <a:spcPct val="128000"/>
               </a:lnSpc>
               <a:spcAft>
-                <a:spcPts val="0"/>
-              </a:spcAft>
-              <a:buNone/>
-            </a:pPr>
+                <a:spcPts val="400"/>
+              </a:spcAft>
+              <a:buNone/>
+            </a:pPr>
+            <a:r>
+              <a:rPr sz="1700" b="1">
+                <a:solidFill>
+                  <a:srgbClr val="000000"/>
+                </a:solidFill>
+                <a:latin typeface="Arial"/>
+              </a:rPr>
+              <a:t>Threshold is relative, never absolute</a:t>
+            </a:r>
           </a:p>
           <a:p>
             <a:pPr marL="0" indent="0" algn="l">
@@ -8868,7 +8866,47 @@
                 <a:spcPct val="128000"/>
               </a:lnSpc>
               <a:spcAft>
-                <a:spcPts val="600"/>
+                <a:spcPts val="400"/>
+              </a:spcAft>
+              <a:buNone/>
+            </a:pPr>
+            <a:r>
+              <a:rPr sz="1500" b="0">
+                <a:solidFill>
+                  <a:srgbClr val="000000"/>
+                </a:solidFill>
+                <a:latin typeface="Arial"/>
+              </a:rPr>
+              <a:t>• Readings drift with humidity and mains hum</a:t>
+            </a:r>
+          </a:p>
+          <a:p>
+            <a:pPr marL="0" indent="0" algn="l">
+              <a:lnSpc>
+                <a:spcPct val="128000"/>
+              </a:lnSpc>
+              <a:spcAft>
+                <a:spcPts val="400"/>
+              </a:spcAft>
+              <a:buNone/>
+            </a:pPr>
+            <a:r>
+              <a:rPr sz="1500" b="0">
+                <a:solidFill>
+                  <a:srgbClr val="000000"/>
+                </a:solidFill>
+                <a:latin typeface="Arial"/>
+              </a:rPr>
+              <a:t>• Fixed threshold works at 9am, fails at 1pm</a:t>
+            </a:r>
+          </a:p>
+          <a:p>
+            <a:pPr marL="0" indent="0" algn="l">
+              <a:lnSpc>
+                <a:spcPct val="128000"/>
+              </a:lnSpc>
+              <a:spcAft>
+                <a:spcPts val="400"/>
               </a:spcAft>
               <a:buNone/>
             </a:pPr>
@@ -8879,7 +8917,7 @@
                 </a:solidFill>
                 <a:latin typeface="Arial"/>
               </a:rPr>
-              <a:t>Threshold is relative, never absolute</a:t>
+              <a:t>Baseline only learns while untouched</a:t>
             </a:r>
           </a:p>
           <a:p>
@@ -8888,78 +8926,7 @@
                 <a:spcPct val="128000"/>
               </a:lnSpc>
               <a:spcAft>
-                <a:spcPts val="600"/>
-              </a:spcAft>
-              <a:buNone/>
-            </a:pPr>
-            <a:r>
-              <a:rPr sz="1500" b="0">
-                <a:solidFill>
-                  <a:srgbClr val="000000"/>
-                </a:solidFill>
-                <a:latin typeface="Arial"/>
-              </a:rPr>
-              <a:t>• Readings drift with humidity and mains hum</a:t>
-            </a:r>
-          </a:p>
-          <a:p>
-            <a:pPr marL="0" indent="0" algn="l">
-              <a:lnSpc>
-                <a:spcPct val="128000"/>
-              </a:lnSpc>
-              <a:spcAft>
-                <a:spcPts val="600"/>
-              </a:spcAft>
-              <a:buNone/>
-            </a:pPr>
-            <a:r>
-              <a:rPr sz="1500" b="0">
-                <a:solidFill>
-                  <a:srgbClr val="000000"/>
-                </a:solidFill>
-                <a:latin typeface="Arial"/>
-              </a:rPr>
-              <a:t>• Fixed threshold works at 9am, fails at 1pm</a:t>
-            </a:r>
-          </a:p>
-          <a:p>
-            <a:pPr marL="0" indent="0" algn="l">
-              <a:lnSpc>
-                <a:spcPct val="128000"/>
-              </a:lnSpc>
-              <a:spcAft>
-                <a:spcPts val="0"/>
-              </a:spcAft>
-              <a:buNone/>
-            </a:pPr>
-          </a:p>
-          <a:p>
-            <a:pPr marL="0" indent="0" algn="l">
-              <a:lnSpc>
-                <a:spcPct val="128000"/>
-              </a:lnSpc>
-              <a:spcAft>
-                <a:spcPts val="600"/>
-              </a:spcAft>
-              <a:buNone/>
-            </a:pPr>
-            <a:r>
-              <a:rPr sz="1700" b="1">
-                <a:solidFill>
-                  <a:srgbClr val="000000"/>
-                </a:solidFill>
-                <a:latin typeface="Arial"/>
-              </a:rPr>
-              <a:t>Baseline only learns while untouched</a:t>
-            </a:r>
-          </a:p>
-          <a:p>
-            <a:pPr marL="0" indent="0" algn="l">
-              <a:lnSpc>
-                <a:spcPct val="128000"/>
-              </a:lnSpc>
-              <a:spcAft>
-                <a:spcPts val="600"/>
+                <a:spcPts val="400"/>
               </a:spcAft>
               <a:buNone/>
             </a:pPr>
@@ -9091,7 +9058,7 @@
                 <a:spcPct val="128000"/>
               </a:lnSpc>
               <a:spcAft>
-                <a:spcPts val="1400"/>
+                <a:spcPts val="1200"/>
               </a:spcAft>
               <a:buNone/>
             </a:pPr>
@@ -9111,7 +9078,7 @@
                 <a:spcPct val="128000"/>
               </a:lnSpc>
               <a:spcAft>
-                <a:spcPts val="600"/>
+                <a:spcPts val="400"/>
               </a:spcAft>
               <a:buNone/>
             </a:pPr>
@@ -9131,7 +9098,7 @@
                 <a:spcPct val="128000"/>
               </a:lnSpc>
               <a:spcAft>
-                <a:spcPts val="600"/>
+                <a:spcPts val="400"/>
               </a:spcAft>
               <a:buNone/>
             </a:pPr>
@@ -9151,7 +9118,7 @@
                 <a:spcPct val="128000"/>
               </a:lnSpc>
               <a:spcAft>
-                <a:spcPts val="600"/>
+                <a:spcPts val="400"/>
               </a:spcAft>
               <a:buNone/>
             </a:pPr>
@@ -9171,7 +9138,7 @@
                 <a:spcPct val="128000"/>
               </a:lnSpc>
               <a:spcAft>
-                <a:spcPts val="600"/>
+                <a:spcPts val="400"/>
               </a:spcAft>
               <a:buNone/>
             </a:pPr>
@@ -9191,7 +9158,7 @@
                 <a:spcPct val="128000"/>
               </a:lnSpc>
               <a:spcAft>
-                <a:spcPts val="600"/>
+                <a:spcPts val="400"/>
               </a:spcAft>
               <a:buNone/>
             </a:pPr>
@@ -9419,7 +9386,7 @@
                 <a:spcPct val="128000"/>
               </a:lnSpc>
               <a:spcAft>
-                <a:spcPts val="1400"/>
+                <a:spcPts val="1200"/>
               </a:spcAft>
               <a:buNone/>
             </a:pPr>
@@ -9439,7 +9406,7 @@
                 <a:spcPct val="128000"/>
               </a:lnSpc>
               <a:spcAft>
-                <a:spcPts val="600"/>
+                <a:spcPts val="400"/>
               </a:spcAft>
               <a:buNone/>
             </a:pPr>
@@ -9459,7 +9426,7 @@
                 <a:spcPct val="128000"/>
               </a:lnSpc>
               <a:spcAft>
-                <a:spcPts val="600"/>
+                <a:spcPts val="400"/>
               </a:spcAft>
               <a:buNone/>
             </a:pPr>
@@ -9479,7 +9446,7 @@
                 <a:spcPct val="128000"/>
               </a:lnSpc>
               <a:spcAft>
-                <a:spcPts val="600"/>
+                <a:spcPts val="400"/>
               </a:spcAft>
               <a:buNone/>
             </a:pPr>
@@ -9803,7 +9770,7 @@
                 <a:spcPct val="128000"/>
               </a:lnSpc>
               <a:spcAft>
-                <a:spcPts val="1400"/>
+                <a:spcPts val="1200"/>
               </a:spcAft>
               <a:buNone/>
             </a:pPr>
@@ -9823,7 +9790,7 @@
                 <a:spcPct val="128000"/>
               </a:lnSpc>
               <a:spcAft>
-                <a:spcPts val="600"/>
+                <a:spcPts val="400"/>
               </a:spcAft>
               <a:buNone/>
             </a:pPr>
@@ -9843,7 +9810,7 @@
                 <a:spcPct val="128000"/>
               </a:lnSpc>
               <a:spcAft>
-                <a:spcPts val="600"/>
+                <a:spcPts val="400"/>
               </a:spcAft>
               <a:buNone/>
             </a:pPr>
@@ -9854,7 +9821,7 @@
                 </a:solidFill>
                 <a:latin typeface="Arial"/>
               </a:rPr>
-              <a:t>• A datasheet will not tell you a Peltier takes eight seconds, or that a knock reads as a person and a buzz reads as a machine.</a:t>
+              <a:t>• No datasheet says a knock reads as a person, a buzz as a machine</a:t>
             </a:r>
           </a:p>
           <a:p>
@@ -9863,10 +9830,19 @@
                 <a:spcPct val="128000"/>
               </a:lnSpc>
               <a:spcAft>
-                <a:spcPts val="0"/>
-              </a:spcAft>
-              <a:buNone/>
-            </a:pPr>
+                <a:spcPts val="400"/>
+              </a:spcAft>
+              <a:buNone/>
+            </a:pPr>
+            <a:r>
+              <a:rPr sz="1700" b="1">
+                <a:solidFill>
+                  <a:srgbClr val="000000"/>
+                </a:solidFill>
+                <a:latin typeface="Arial"/>
+              </a:rPr>
+              <a:t>The parts are free and already here</a:t>
+            </a:r>
           </a:p>
           <a:p>
             <a:pPr marL="0" indent="0" algn="l">
@@ -9874,7 +9850,27 @@
                 <a:spcPct val="128000"/>
               </a:lnSpc>
               <a:spcAft>
-                <a:spcPts val="600"/>
+                <a:spcPts val="400"/>
+              </a:spcAft>
+              <a:buNone/>
+            </a:pPr>
+            <a:r>
+              <a:rPr sz="1500" b="0">
+                <a:solidFill>
+                  <a:srgbClr val="000000"/>
+                </a:solidFill>
+                <a:latin typeface="Arial"/>
+              </a:rPr>
+              <a:t>• Borrowing beats ordering. Nothing to buy, nothing to wait for</a:t>
+            </a:r>
+          </a:p>
+          <a:p>
+            <a:pPr marL="0" indent="0" algn="l">
+              <a:lnSpc>
+                <a:spcPct val="128000"/>
+              </a:lnSpc>
+              <a:spcAft>
+                <a:spcPts val="400"/>
               </a:spcAft>
               <a:buNone/>
             </a:pPr>
@@ -9885,7 +9881,7 @@
                 </a:solidFill>
                 <a:latin typeface="Arial"/>
               </a:rPr>
-              <a:t>The parts are free and already here</a:t>
+              <a:t>Your devices hide sensors you may not be able to reach</a:t>
             </a:r>
           </a:p>
           <a:p>
@@ -9894,7 +9890,7 @@
                 <a:spcPct val="128000"/>
               </a:lnSpc>
               <a:spcAft>
-                <a:spcPts val="600"/>
+                <a:spcPts val="400"/>
               </a:spcAft>
               <a:buNone/>
             </a:pPr>
@@ -9905,58 +9901,7 @@
                 </a:solidFill>
                 <a:latin typeface="Arial"/>
               </a:rPr>
-              <a:t>• Borrowing beats ordering. Nothing to buy, nothing to wait for.</a:t>
-            </a:r>
-          </a:p>
-          <a:p>
-            <a:pPr marL="0" indent="0" algn="l">
-              <a:lnSpc>
-                <a:spcPct val="128000"/>
-              </a:lnSpc>
-              <a:spcAft>
-                <a:spcPts val="0"/>
-              </a:spcAft>
-              <a:buNone/>
-            </a:pPr>
-          </a:p>
-          <a:p>
-            <a:pPr marL="0" indent="0" algn="l">
-              <a:lnSpc>
-                <a:spcPct val="128000"/>
-              </a:lnSpc>
-              <a:spcAft>
-                <a:spcPts val="600"/>
-              </a:spcAft>
-              <a:buNone/>
-            </a:pPr>
-            <a:r>
-              <a:rPr sz="1700" b="1">
-                <a:solidFill>
-                  <a:srgbClr val="000000"/>
-                </a:solidFill>
-                <a:latin typeface="Arial"/>
-              </a:rPr>
-              <a:t>Your own devices are full of sensors you cannot reach</a:t>
-            </a:r>
-          </a:p>
-          <a:p>
-            <a:pPr marL="0" indent="0" algn="l">
-              <a:lnSpc>
-                <a:spcPct val="128000"/>
-              </a:lnSpc>
-              <a:spcAft>
-                <a:spcPts val="600"/>
-              </a:spcAft>
-              <a:buNone/>
-            </a:pPr>
-            <a:r>
-              <a:rPr sz="1500" b="0">
-                <a:solidFill>
-                  <a:srgbClr val="000000"/>
-                </a:solidFill>
-                <a:latin typeface="Arial"/>
-              </a:rPr>
-              <a:t>• Find out today which ones open up, and which are locked.</a:t>
+              <a:t>• Find out today which open up, and which are locked</a:t>
             </a:r>
           </a:p>
         </p:txBody>
@@ -10077,7 +10022,7 @@
                 <a:spcPct val="128000"/>
               </a:lnSpc>
               <a:spcAft>
-                <a:spcPts val="1400"/>
+                <a:spcPts val="1200"/>
               </a:spcAft>
               <a:buNone/>
             </a:pPr>
@@ -10097,7 +10042,7 @@
                 <a:spcPct val="128000"/>
               </a:lnSpc>
               <a:spcAft>
-                <a:spcPts val="600"/>
+                <a:spcPts val="400"/>
               </a:spcAft>
               <a:buNone/>
             </a:pPr>
@@ -10117,7 +10062,7 @@
                 <a:spcPct val="128000"/>
               </a:lnSpc>
               <a:spcAft>
-                <a:spcPts val="600"/>
+                <a:spcPts val="400"/>
               </a:spcAft>
               <a:buNone/>
             </a:pPr>
@@ -10137,7 +10082,7 @@
                 <a:spcPct val="128000"/>
               </a:lnSpc>
               <a:spcAft>
-                <a:spcPts val="600"/>
+                <a:spcPts val="400"/>
               </a:spcAft>
               <a:buNone/>
             </a:pPr>
@@ -10157,7 +10102,7 @@
                 <a:spcPct val="128000"/>
               </a:lnSpc>
               <a:spcAft>
-                <a:spcPts val="600"/>
+                <a:spcPts val="400"/>
               </a:spcAft>
               <a:buNone/>
             </a:pPr>
@@ -10177,7 +10122,7 @@
                 <a:spcPct val="128000"/>
               </a:lnSpc>
               <a:spcAft>
-                <a:spcPts val="600"/>
+                <a:spcPts val="400"/>
               </a:spcAft>
               <a:buNone/>
             </a:pPr>
@@ -10197,7 +10142,7 @@
                 <a:spcPct val="128000"/>
               </a:lnSpc>
               <a:spcAft>
-                <a:spcPts val="600"/>
+                <a:spcPts val="400"/>
               </a:spcAft>
               <a:buNone/>
             </a:pPr>
@@ -10217,7 +10162,7 @@
                 <a:spcPct val="128000"/>
               </a:lnSpc>
               <a:spcAft>
-                <a:spcPts val="600"/>
+                <a:spcPts val="400"/>
               </a:spcAft>
               <a:buNone/>
             </a:pPr>
@@ -10237,7 +10182,7 @@
                 <a:spcPct val="128000"/>
               </a:lnSpc>
               <a:spcAft>
-                <a:spcPts val="600"/>
+                <a:spcPts val="400"/>
               </a:spcAft>
               <a:buNone/>
             </a:pPr>
@@ -10369,7 +10314,7 @@
                 <a:spcPct val="128000"/>
               </a:lnSpc>
               <a:spcAft>
-                <a:spcPts val="1400"/>
+                <a:spcPts val="1200"/>
               </a:spcAft>
               <a:buNone/>
             </a:pPr>
@@ -10389,7 +10334,7 @@
                 <a:spcPct val="128000"/>
               </a:lnSpc>
               <a:spcAft>
-                <a:spcPts val="600"/>
+                <a:spcPts val="400"/>
               </a:spcAft>
               <a:buNone/>
             </a:pPr>
@@ -10409,7 +10354,7 @@
                 <a:spcPct val="128000"/>
               </a:lnSpc>
               <a:spcAft>
-                <a:spcPts val="600"/>
+                <a:spcPts val="400"/>
               </a:spcAft>
               <a:buNone/>
             </a:pPr>
@@ -10429,7 +10374,7 @@
                 <a:spcPct val="128000"/>
               </a:lnSpc>
               <a:spcAft>
-                <a:spcPts val="600"/>
+                <a:spcPts val="400"/>
               </a:spcAft>
               <a:buNone/>
             </a:pPr>
@@ -10449,7 +10394,7 @@
                 <a:spcPct val="128000"/>
               </a:lnSpc>
               <a:spcAft>
-                <a:spcPts val="600"/>
+                <a:spcPts val="400"/>
               </a:spcAft>
               <a:buNone/>
             </a:pPr>
@@ -10469,7 +10414,7 @@
                 <a:spcPct val="128000"/>
               </a:lnSpc>
               <a:spcAft>
-                <a:spcPts val="600"/>
+                <a:spcPts val="400"/>
               </a:spcAft>
               <a:buNone/>
             </a:pPr>
@@ -10500,7 +10445,7 @@
                 <a:spcPct val="128000"/>
               </a:lnSpc>
               <a:spcAft>
-                <a:spcPts val="600"/>
+                <a:spcPts val="400"/>
               </a:spcAft>
               <a:buNone/>
             </a:pPr>
@@ -10520,7 +10465,7 @@
                 <a:spcPct val="128000"/>
               </a:lnSpc>
               <a:spcAft>
-                <a:spcPts val="600"/>
+                <a:spcPts val="400"/>
               </a:spcAft>
               <a:buNone/>
             </a:pPr>
@@ -10652,7 +10597,7 @@
                 <a:spcPct val="128000"/>
               </a:lnSpc>
               <a:spcAft>
-                <a:spcPts val="1400"/>
+                <a:spcPts val="1200"/>
               </a:spcAft>
               <a:buNone/>
             </a:pPr>
@@ -10672,7 +10617,7 @@
                 <a:spcPct val="128000"/>
               </a:lnSpc>
               <a:spcAft>
-                <a:spcPts val="600"/>
+                <a:spcPts val="400"/>
               </a:spcAft>
               <a:buNone/>
             </a:pPr>
@@ -10692,7 +10637,7 @@
                 <a:spcPct val="128000"/>
               </a:lnSpc>
               <a:spcAft>
-                <a:spcPts val="600"/>
+                <a:spcPts val="400"/>
               </a:spcAft>
               <a:buNone/>
             </a:pPr>
@@ -10712,7 +10657,7 @@
                 <a:spcPct val="128000"/>
               </a:lnSpc>
               <a:spcAft>
-                <a:spcPts val="600"/>
+                <a:spcPts val="400"/>
               </a:spcAft>
               <a:buNone/>
             </a:pPr>
@@ -10732,10 +10677,19 @@
                 <a:spcPct val="128000"/>
               </a:lnSpc>
               <a:spcAft>
-                <a:spcPts val="0"/>
-              </a:spcAft>
-              <a:buNone/>
-            </a:pPr>
+                <a:spcPts val="400"/>
+              </a:spcAft>
+              <a:buNone/>
+            </a:pPr>
+            <a:r>
+              <a:rPr sz="1700" b="1">
+                <a:solidFill>
+                  <a:srgbClr val="000000"/>
+                </a:solidFill>
+                <a:latin typeface="Arial"/>
+              </a:rPr>
+              <a:t>Instrumented sock, ESP32</a:t>
+            </a:r>
           </a:p>
           <a:p>
             <a:pPr marL="0" indent="0" algn="l">
@@ -10743,18 +10697,18 @@
                 <a:spcPct val="128000"/>
               </a:lnSpc>
               <a:spcAft>
-                <a:spcPts val="600"/>
-              </a:spcAft>
-              <a:buNone/>
-            </a:pPr>
-            <a:r>
-              <a:rPr sz="1700" b="1">
-                <a:solidFill>
-                  <a:srgbClr val="000000"/>
-                </a:solidFill>
-                <a:latin typeface="Arial"/>
-              </a:rPr>
-              <a:t>Instrumented sock, ESP32</a:t>
+                <a:spcPts val="400"/>
+              </a:spcAft>
+              <a:buNone/>
+            </a:pPr>
+            <a:r>
+              <a:rPr sz="1500" b="0">
+                <a:solidFill>
+                  <a:srgbClr val="000000"/>
+                </a:solidFill>
+                <a:latin typeface="Arial"/>
+              </a:rPr>
+              <a:t>• Six force sensors under a foot, batched over Wi-Fi</a:t>
             </a:r>
           </a:p>
           <a:p>
@@ -10763,27 +10717,7 @@
                 <a:spcPct val="128000"/>
               </a:lnSpc>
               <a:spcAft>
-                <a:spcPts val="600"/>
-              </a:spcAft>
-              <a:buNone/>
-            </a:pPr>
-            <a:r>
-              <a:rPr sz="1500" b="0">
-                <a:solidFill>
-                  <a:srgbClr val="000000"/>
-                </a:solidFill>
-                <a:latin typeface="Arial"/>
-              </a:rPr>
-              <a:t>• Six force sensors under a foot, batched over Wi-Fi</a:t>
-            </a:r>
-          </a:p>
-          <a:p>
-            <a:pPr marL="0" indent="0" algn="l">
-              <a:lnSpc>
-                <a:spcPct val="128000"/>
-              </a:lnSpc>
-              <a:spcAft>
-                <a:spcPts val="600"/>
+                <a:spcPts val="400"/>
               </a:spcAft>
               <a:buNone/>
             </a:pPr>
@@ -11011,7 +10945,7 @@
                 <a:spcPct val="128000"/>
               </a:lnSpc>
               <a:spcAft>
-                <a:spcPts val="1400"/>
+                <a:spcPts val="1200"/>
               </a:spcAft>
               <a:buNone/>
             </a:pPr>
@@ -11031,7 +10965,7 @@
                 <a:spcPct val="128000"/>
               </a:lnSpc>
               <a:spcAft>
-                <a:spcPts val="600"/>
+                <a:spcPts val="400"/>
               </a:spcAft>
               <a:buNone/>
             </a:pPr>
@@ -11051,7 +10985,7 @@
                 <a:spcPct val="128000"/>
               </a:lnSpc>
               <a:spcAft>
-                <a:spcPts val="600"/>
+                <a:spcPts val="400"/>
               </a:spcAft>
               <a:buNone/>
             </a:pPr>
@@ -11071,10 +11005,19 @@
                 <a:spcPct val="128000"/>
               </a:lnSpc>
               <a:spcAft>
-                <a:spcPts val="0"/>
-              </a:spcAft>
-              <a:buNone/>
-            </a:pPr>
+                <a:spcPts val="400"/>
+              </a:spcAft>
+              <a:buNone/>
+            </a:pPr>
+            <a:r>
+              <a:rPr sz="1700" b="1">
+                <a:solidFill>
+                  <a:srgbClr val="000000"/>
+                </a:solidFill>
+                <a:latin typeface="Arial"/>
+              </a:rPr>
+              <a:t>Vary two things only</a:t>
+            </a:r>
           </a:p>
           <a:p>
             <a:pPr marL="0" indent="0" algn="l">
@@ -11082,7 +11025,27 @@
                 <a:spcPct val="128000"/>
               </a:lnSpc>
               <a:spcAft>
-                <a:spcPts val="600"/>
+                <a:spcPts val="400"/>
+              </a:spcAft>
+              <a:buNone/>
+            </a:pPr>
+            <a:r>
+              <a:rPr sz="1500" b="0">
+                <a:solidFill>
+                  <a:srgbClr val="000000"/>
+                </a:solidFill>
+                <a:latin typeface="Arial"/>
+              </a:rPr>
+              <a:t>• Rhythm of the pulses, and how strong they are</a:t>
+            </a:r>
+          </a:p>
+          <a:p>
+            <a:pPr marL="0" indent="0" algn="l">
+              <a:lnSpc>
+                <a:spcPct val="128000"/>
+              </a:lnSpc>
+              <a:spcAft>
+                <a:spcPts val="400"/>
               </a:spcAft>
               <a:buNone/>
             </a:pPr>
@@ -11093,7 +11056,7 @@
                 </a:solidFill>
                 <a:latin typeface="Arial"/>
               </a:rPr>
-              <a:t>Vary two things only</a:t>
+              <a:t>Blind test: they name all three</a:t>
             </a:r>
           </a:p>
           <a:p>
@@ -11102,78 +11065,7 @@
                 <a:spcPct val="128000"/>
               </a:lnSpc>
               <a:spcAft>
-                <a:spcPts val="600"/>
-              </a:spcAft>
-              <a:buNone/>
-            </a:pPr>
-            <a:r>
-              <a:rPr sz="1500" b="0">
-                <a:solidFill>
-                  <a:srgbClr val="000000"/>
-                </a:solidFill>
-                <a:latin typeface="Arial"/>
-              </a:rPr>
-              <a:t>• Rhythm of the pulses</a:t>
-            </a:r>
-          </a:p>
-          <a:p>
-            <a:pPr marL="0" indent="0" algn="l">
-              <a:lnSpc>
-                <a:spcPct val="128000"/>
-              </a:lnSpc>
-              <a:spcAft>
-                <a:spcPts val="600"/>
-              </a:spcAft>
-              <a:buNone/>
-            </a:pPr>
-            <a:r>
-              <a:rPr sz="1500" b="0">
-                <a:solidFill>
-                  <a:srgbClr val="000000"/>
-                </a:solidFill>
-                <a:latin typeface="Arial"/>
-              </a:rPr>
-              <a:t>• How strong they are</a:t>
-            </a:r>
-          </a:p>
-          <a:p>
-            <a:pPr marL="0" indent="0" algn="l">
-              <a:lnSpc>
-                <a:spcPct val="128000"/>
-              </a:lnSpc>
-              <a:spcAft>
-                <a:spcPts val="0"/>
-              </a:spcAft>
-              <a:buNone/>
-            </a:pPr>
-          </a:p>
-          <a:p>
-            <a:pPr marL="0" indent="0" algn="l">
-              <a:lnSpc>
-                <a:spcPct val="128000"/>
-              </a:lnSpc>
-              <a:spcAft>
-                <a:spcPts val="600"/>
-              </a:spcAft>
-              <a:buNone/>
-            </a:pPr>
-            <a:r>
-              <a:rPr sz="1700" b="1">
-                <a:solidFill>
-                  <a:srgbClr val="000000"/>
-                </a:solidFill>
-                <a:latin typeface="Arial"/>
-              </a:rPr>
-              <a:t>Blind test: they name all three</a:t>
-            </a:r>
-          </a:p>
-          <a:p>
-            <a:pPr marL="0" indent="0" algn="l">
-              <a:lnSpc>
-                <a:spcPct val="128000"/>
-              </a:lnSpc>
-              <a:spcAft>
-                <a:spcPts val="600"/>
+                <a:spcPts val="400"/>
               </a:spcAft>
               <a:buNone/>
             </a:pPr>
@@ -11305,7 +11197,7 @@
                 <a:spcPct val="128000"/>
               </a:lnSpc>
               <a:spcAft>
-                <a:spcPts val="600"/>
+                <a:spcPts val="400"/>
               </a:spcAft>
               <a:buNone/>
             </a:pPr>
@@ -11336,7 +11228,7 @@
                 <a:spcPct val="128000"/>
               </a:lnSpc>
               <a:spcAft>
-                <a:spcPts val="600"/>
+                <a:spcPts val="400"/>
               </a:spcAft>
               <a:buNone/>
             </a:pPr>
@@ -11356,7 +11248,7 @@
                 <a:spcPct val="128000"/>
               </a:lnSpc>
               <a:spcAft>
-                <a:spcPts val="600"/>
+                <a:spcPts val="400"/>
               </a:spcAft>
               <a:buNone/>
             </a:pPr>
@@ -11488,7 +11380,7 @@
                 <a:spcPct val="128000"/>
               </a:lnSpc>
               <a:spcAft>
-                <a:spcPts val="1400"/>
+                <a:spcPts val="1200"/>
               </a:spcAft>
               <a:buNone/>
             </a:pPr>
@@ -11508,7 +11400,7 @@
                 <a:spcPct val="128000"/>
               </a:lnSpc>
               <a:spcAft>
-                <a:spcPts val="600"/>
+                <a:spcPts val="400"/>
               </a:spcAft>
               <a:buNone/>
             </a:pPr>
@@ -11528,7 +11420,7 @@
                 <a:spcPct val="128000"/>
               </a:lnSpc>
               <a:spcAft>
-                <a:spcPts val="600"/>
+                <a:spcPts val="400"/>
               </a:spcAft>
               <a:buNone/>
             </a:pPr>
@@ -11548,7 +11440,7 @@
                 <a:spcPct val="128000"/>
               </a:lnSpc>
               <a:spcAft>
-                <a:spcPts val="600"/>
+                <a:spcPts val="400"/>
               </a:spcAft>
               <a:buNone/>
             </a:pPr>
@@ -11579,7 +11471,7 @@
                 <a:spcPct val="128000"/>
               </a:lnSpc>
               <a:spcAft>
-                <a:spcPts val="600"/>
+                <a:spcPts val="400"/>
               </a:spcAft>
               <a:buNone/>
             </a:pPr>
@@ -11599,7 +11491,7 @@
                 <a:spcPct val="128000"/>
               </a:lnSpc>
               <a:spcAft>
-                <a:spcPts val="600"/>
+                <a:spcPts val="400"/>
               </a:spcAft>
               <a:buNone/>
             </a:pPr>
@@ -11619,7 +11511,7 @@
                 <a:spcPct val="128000"/>
               </a:lnSpc>
               <a:spcAft>
-                <a:spcPts val="600"/>
+                <a:spcPts val="400"/>
               </a:spcAft>
               <a:buNone/>
             </a:pPr>
@@ -11751,7 +11643,7 @@
                 <a:spcPct val="128000"/>
               </a:lnSpc>
               <a:spcAft>
-                <a:spcPts val="1400"/>
+                <a:spcPts val="1200"/>
               </a:spcAft>
               <a:buNone/>
             </a:pPr>
@@ -11771,7 +11663,7 @@
                 <a:spcPct val="128000"/>
               </a:lnSpc>
               <a:spcAft>
-                <a:spcPts val="600"/>
+                <a:spcPts val="400"/>
               </a:spcAft>
               <a:buNone/>
             </a:pPr>
@@ -11791,7 +11683,7 @@
                 <a:spcPct val="128000"/>
               </a:lnSpc>
               <a:spcAft>
-                <a:spcPts val="600"/>
+                <a:spcPts val="400"/>
               </a:spcAft>
               <a:buNone/>
             </a:pPr>
@@ -11811,7 +11703,7 @@
                 <a:spcPct val="128000"/>
               </a:lnSpc>
               <a:spcAft>
-                <a:spcPts val="600"/>
+                <a:spcPts val="400"/>
               </a:spcAft>
               <a:buNone/>
             </a:pPr>
@@ -11842,7 +11734,7 @@
                 <a:spcPct val="128000"/>
               </a:lnSpc>
               <a:spcAft>
-                <a:spcPts val="600"/>
+                <a:spcPts val="400"/>
               </a:spcAft>
               <a:buNone/>
             </a:pPr>
@@ -11862,7 +11754,7 @@
                 <a:spcPct val="128000"/>
               </a:lnSpc>
               <a:spcAft>
-                <a:spcPts val="600"/>
+                <a:spcPts val="400"/>
               </a:spcAft>
               <a:buNone/>
             </a:pPr>
@@ -12120,7 +12012,7 @@
                 <a:spcPct val="128000"/>
               </a:lnSpc>
               <a:spcAft>
-                <a:spcPts val="600"/>
+                <a:spcPts val="400"/>
               </a:spcAft>
               <a:buNone/>
             </a:pPr>
@@ -12140,7 +12032,7 @@
                 <a:spcPct val="128000"/>
               </a:lnSpc>
               <a:spcAft>
-                <a:spcPts val="600"/>
+                <a:spcPts val="400"/>
               </a:spcAft>
               <a:buNone/>
             </a:pPr>
@@ -12160,7 +12052,7 @@
                 <a:spcPct val="128000"/>
               </a:lnSpc>
               <a:spcAft>
-                <a:spcPts val="600"/>
+                <a:spcPts val="400"/>
               </a:spcAft>
               <a:buNone/>
             </a:pPr>
@@ -12180,10 +12072,19 @@
                 <a:spcPct val="128000"/>
               </a:lnSpc>
               <a:spcAft>
-                <a:spcPts val="0"/>
-              </a:spcAft>
-              <a:buNone/>
-            </a:pPr>
+                <a:spcPts val="400"/>
+              </a:spcAft>
+              <a:buNone/>
+            </a:pPr>
+            <a:r>
+              <a:rPr sz="1700" b="1">
+                <a:solidFill>
+                  <a:srgbClr val="000000"/>
+                </a:solidFill>
+                <a:latin typeface="Arial"/>
+              </a:rPr>
+              <a:t>Actuators are on the tables at the front</a:t>
+            </a:r>
           </a:p>
           <a:p>
             <a:pPr marL="0" indent="0" algn="l">
@@ -12191,7 +12092,27 @@
                 <a:spcPct val="128000"/>
               </a:lnSpc>
               <a:spcAft>
-                <a:spcPts val="600"/>
+                <a:spcPts val="400"/>
+              </a:spcAft>
+              <a:buNone/>
+            </a:pPr>
+            <a:r>
+              <a:rPr sz="1500" b="0">
+                <a:solidFill>
+                  <a:srgbClr val="000000"/>
+                </a:solidFill>
+                <a:latin typeface="Arial"/>
+              </a:rPr>
+              <a:t>• Go and feel the ones your task does not use</a:t>
+            </a:r>
+          </a:p>
+          <a:p>
+            <a:pPr marL="0" indent="0" algn="l">
+              <a:lnSpc>
+                <a:spcPct val="128000"/>
+              </a:lnSpc>
+              <a:spcAft>
+                <a:spcPts val="400"/>
               </a:spcAft>
               <a:buNone/>
             </a:pPr>
@@ -12202,78 +12123,7 @@
                 </a:solidFill>
                 <a:latin typeface="Arial"/>
               </a:rPr>
-              <a:t>Actuators are on the tables at the front</a:t>
-            </a:r>
-          </a:p>
-          <a:p>
-            <a:pPr marL="0" indent="0" algn="l">
-              <a:lnSpc>
-                <a:spcPct val="128000"/>
-              </a:lnSpc>
-              <a:spcAft>
-                <a:spcPts val="600"/>
-              </a:spcAft>
-              <a:buNone/>
-            </a:pPr>
-            <a:r>
-              <a:rPr sz="1500" b="0">
-                <a:solidFill>
-                  <a:srgbClr val="000000"/>
-                </a:solidFill>
-                <a:latin typeface="Arial"/>
-              </a:rPr>
-              <a:t>• Go and feel the ones your task does not use</a:t>
-            </a:r>
-          </a:p>
-          <a:p>
-            <a:pPr marL="0" indent="0" algn="l">
-              <a:lnSpc>
-                <a:spcPct val="128000"/>
-              </a:lnSpc>
-              <a:spcAft>
-                <a:spcPts val="0"/>
-              </a:spcAft>
-              <a:buNone/>
-            </a:pPr>
-          </a:p>
-          <a:p>
-            <a:pPr marL="0" indent="0" algn="l">
-              <a:lnSpc>
-                <a:spcPct val="128000"/>
-              </a:lnSpc>
-              <a:spcAft>
-                <a:spcPts val="600"/>
-              </a:spcAft>
-              <a:buNone/>
-            </a:pPr>
-            <a:r>
-              <a:rPr sz="1700" b="1">
-                <a:solidFill>
-                  <a:srgbClr val="000000"/>
-                </a:solidFill>
-                <a:latin typeface="Arial"/>
-              </a:rPr>
-              <a:t>Finish by building one signal</a:t>
-            </a:r>
-          </a:p>
-          <a:p>
-            <a:pPr marL="0" indent="0" algn="l">
-              <a:lnSpc>
-                <a:spcPct val="128000"/>
-              </a:lnSpc>
-              <a:spcAft>
-                <a:spcPts val="600"/>
-              </a:spcAft>
-              <a:buNone/>
-            </a:pPr>
-            <a:r>
-              <a:rPr sz="1500" b="0">
-                <a:solidFill>
-                  <a:srgbClr val="000000"/>
-                </a:solidFill>
-                <a:latin typeface="Arial"/>
-              </a:rPr>
-              <a:t>• Someone else has to read it</a:t>
+              <a:t>Finish by building one signal someone else can read</a:t>
             </a:r>
           </a:p>
         </p:txBody>
@@ -12646,7 +12496,7 @@
                 <a:spcPct val="128000"/>
               </a:lnSpc>
               <a:spcAft>
-                <a:spcPts val="1400"/>
+                <a:spcPts val="1200"/>
               </a:spcAft>
               <a:buNone/>
             </a:pPr>
@@ -12666,7 +12516,7 @@
                 <a:spcPct val="128000"/>
               </a:lnSpc>
               <a:spcAft>
-                <a:spcPts val="600"/>
+                <a:spcPts val="400"/>
               </a:spcAft>
               <a:buNone/>
             </a:pPr>
@@ -12686,7 +12536,7 @@
                 <a:spcPct val="128000"/>
               </a:lnSpc>
               <a:spcAft>
-                <a:spcPts val="600"/>
+                <a:spcPts val="400"/>
               </a:spcAft>
               <a:buNone/>
             </a:pPr>
@@ -12706,7 +12556,7 @@
                 <a:spcPct val="128000"/>
               </a:lnSpc>
               <a:spcAft>
-                <a:spcPts val="600"/>
+                <a:spcPts val="400"/>
               </a:spcAft>
               <a:buNone/>
             </a:pPr>
@@ -12726,7 +12576,7 @@
                 <a:spcPct val="128000"/>
               </a:lnSpc>
               <a:spcAft>
-                <a:spcPts val="600"/>
+                <a:spcPts val="400"/>
               </a:spcAft>
               <a:buNone/>
             </a:pPr>
@@ -12746,7 +12596,7 @@
                 <a:spcPct val="128000"/>
               </a:lnSpc>
               <a:spcAft>
-                <a:spcPts val="600"/>
+                <a:spcPts val="400"/>
               </a:spcAft>
               <a:buNone/>
             </a:pPr>
@@ -12766,7 +12616,7 @@
                 <a:spcPct val="128000"/>
               </a:lnSpc>
               <a:spcAft>
-                <a:spcPts val="600"/>
+                <a:spcPts val="400"/>
               </a:spcAft>
               <a:buNone/>
             </a:pPr>
@@ -12797,7 +12647,7 @@
                 <a:spcPct val="128000"/>
               </a:lnSpc>
               <a:spcAft>
-                <a:spcPts val="600"/>
+                <a:spcPts val="400"/>
               </a:spcAft>
               <a:buNone/>
             </a:pPr>
@@ -12808,27 +12658,7 @@
                 </a:solidFill>
                 <a:latin typeface="Arial"/>
               </a:rPr>
-              <a:t>1 to 3 are output. 4 is input. 5 is both. 6 needs no board.</a:t>
-            </a:r>
-          </a:p>
-          <a:p>
-            <a:pPr marL="0" indent="0" algn="l">
-              <a:lnSpc>
-                <a:spcPct val="128000"/>
-              </a:lnSpc>
-              <a:spcAft>
-                <a:spcPts val="600"/>
-              </a:spcAft>
-              <a:buNone/>
-            </a:pPr>
-            <a:r>
-              <a:rPr sz="1700" b="0">
-                <a:solidFill>
-                  <a:srgbClr val="000000"/>
-                </a:solidFill>
-                <a:latin typeface="Arial"/>
-              </a:rPr>
-              <a:t>Nobody is expected to finish all five.</a:t>
+              <a:t>1 to 3 output, 4 input, 5 both. Nobody finishes all six.</a:t>
             </a:r>
           </a:p>
         </p:txBody>
@@ -12949,7 +12779,7 @@
                 <a:spcPct val="128000"/>
               </a:lnSpc>
               <a:spcAft>
-                <a:spcPts val="1400"/>
+                <a:spcPts val="1200"/>
               </a:spcAft>
               <a:buNone/>
             </a:pPr>
@@ -12960,7 +12790,7 @@
                 </a:solidFill>
                 <a:latin typeface="Arial"/>
               </a:rPr>
-              <a:t>Every sketch runs the moment you upload it. Nothing to wire.</a:t>
+              <a:t>Every sketch runs the moment you upload it. Nothing to wire. All of them: github.com/labtools-au/multimodal-actuator-workshop</a:t>
             </a:r>
           </a:p>
           <a:p>
@@ -12969,7 +12799,7 @@
                 <a:spcPct val="128000"/>
               </a:lnSpc>
               <a:spcAft>
-                <a:spcPts val="600"/>
+                <a:spcPts val="400"/>
               </a:spcAft>
               <a:buNone/>
             </a:pPr>
@@ -12989,7 +12819,7 @@
                 <a:spcPct val="128000"/>
               </a:lnSpc>
               <a:spcAft>
-                <a:spcPts val="600"/>
+                <a:spcPts val="400"/>
               </a:spcAft>
               <a:buNone/>
             </a:pPr>
@@ -13020,7 +12850,7 @@
                 <a:spcPct val="128000"/>
               </a:lnSpc>
               <a:spcAft>
-                <a:spcPts val="600"/>
+                <a:spcPts val="400"/>
               </a:spcAft>
               <a:buNone/>
             </a:pPr>
@@ -13040,7 +12870,7 @@
                 <a:spcPct val="128000"/>
               </a:lnSpc>
               <a:spcAft>
-                <a:spcPts val="600"/>
+                <a:spcPts val="400"/>
               </a:spcAft>
               <a:buNone/>
             </a:pPr>
@@ -13060,7 +12890,7 @@
                 <a:spcPct val="128000"/>
               </a:lnSpc>
               <a:spcAft>
-                <a:spcPts val="600"/>
+                <a:spcPts val="400"/>
               </a:spcAft>
               <a:buNone/>
             </a:pPr>
@@ -13072,37 +12902,6 @@
                 <a:latin typeface="Arial"/>
               </a:rPr>
               <a:t>• The last one is usually the interesting one</a:t>
-            </a:r>
-          </a:p>
-          <a:p>
-            <a:pPr marL="0" indent="0" algn="l">
-              <a:lnSpc>
-                <a:spcPct val="128000"/>
-              </a:lnSpc>
-              <a:spcAft>
-                <a:spcPts val="0"/>
-              </a:spcAft>
-              <a:buNone/>
-            </a:pPr>
-          </a:p>
-          <a:p>
-            <a:pPr marL="0" indent="0" algn="l">
-              <a:lnSpc>
-                <a:spcPct val="128000"/>
-              </a:lnSpc>
-              <a:spcAft>
-                <a:spcPts val="600"/>
-              </a:spcAft>
-              <a:buNone/>
-            </a:pPr>
-            <a:r>
-              <a:rPr sz="1700" b="1">
-                <a:solidFill>
-                  <a:srgbClr val="000000"/>
-                </a:solidFill>
-                <a:latin typeface="Arial"/>
-              </a:rPr>
-              <a:t>github.com/labtools-au/multimodal-actuator-workshop</a:t>
             </a:r>
           </a:p>
         </p:txBody>
@@ -13223,7 +13022,7 @@
                 <a:spcPct val="128000"/>
               </a:lnSpc>
               <a:spcAft>
-                <a:spcPts val="1400"/>
+                <a:spcPts val="1200"/>
               </a:spcAft>
               <a:buNone/>
             </a:pPr>
@@ -13243,7 +13042,7 @@
                 <a:spcPct val="128000"/>
               </a:lnSpc>
               <a:spcAft>
-                <a:spcPts val="600"/>
+                <a:spcPts val="400"/>
               </a:spcAft>
               <a:buNone/>
             </a:pPr>
@@ -13263,7 +13062,7 @@
                 <a:spcPct val="128000"/>
               </a:lnSpc>
               <a:spcAft>
-                <a:spcPts val="600"/>
+                <a:spcPts val="400"/>
               </a:spcAft>
               <a:buNone/>
             </a:pPr>

--- a/docs/multimodal-actuator-workshop.pptx
+++ b/docs/multimodal-actuator-workshop.pptx
@@ -1139,13 +1139,34 @@
           </a:p>
           <a:p>
             <a:r>
-              <a:t>without any feedback sensor at all.</a:t>
+              <a:t>without any feedback sensor at all. 2048 steps per revolution.</a:t>
             </a:r>
           </a:p>
           <a:p/>
           <a:p>
             <a:r>
               <a:t>Needs a ULN2003 driver board, drawer 2A, 27 of them.</a:t>
+            </a:r>
+          </a:p>
+          <a:p/>
+          <a:p>
+            <a:r>
+              <a:t>If anyone tries one: the Stepper constructor does NOT take the pins in numeric</a:t>
+            </a:r>
+          </a:p>
+          <a:p>
+            <a:r>
+              <a:t>order. Wire IN1 to IN4 on pins 8 to 11, then write Stepper(2048, 8, 10, 9, 11).</a:t>
+            </a:r>
+          </a:p>
+          <a:p>
+            <a:r>
+              <a:t>Get it wrong and it buzzes and jitters instead of turning, which looks like a</a:t>
+            </a:r>
+          </a:p>
+          <a:p>
+            <a:r>
+              <a:t>dead motor. bench_tests/07_stepper has it right, with the note.</a:t>
             </a:r>
           </a:p>
         </p:txBody>
@@ -6937,7 +6958,7 @@
                 </a:solidFill>
                 <a:latin typeface="Consolas"/>
               </a:rPr>
-              <a:t>Drawer 3E  |  24 in stock  |  5V  |  needs a MOSFET</a:t>
+              <a:t>3E  |  24  |  5V, 1.1 A, 4.5 ohm  |  3mm throw, 80g</a:t>
             </a:r>
           </a:p>
         </p:txBody>
@@ -8188,7 +8209,7 @@
                 </a:solidFill>
                 <a:latin typeface="Consolas"/>
               </a:rPr>
-              <a:t>Drawer 2A  |  44 in stock  |  needs a ULN2003 driver</a:t>
+              <a:t>2A  |  44  |  ULN2003 driver  |  2048 steps/rev</a:t>
             </a:r>
           </a:p>
         </p:txBody>
@@ -13482,7 +13503,7 @@
                 </a:solidFill>
                 <a:latin typeface="Consolas"/>
               </a:rPr>
-              <a:t>Drawer 1E  |  117 in stock  |  2.5-3.8 V  |  PWM pin</a:t>
+              <a:t>1E  |  117  |  2.5-3.8V rated  |  100 mA at 5V  |  PWM</a:t>
             </a:r>
           </a:p>
         </p:txBody>

--- a/docs/multimodal-actuator-workshop.pptx
+++ b/docs/multimodal-actuator-workshop.pptx
@@ -35,6 +35,7 @@
     <p:sldId id="283" r:id="rId34"/>
     <p:sldId id="284" r:id="rId35"/>
     <p:sldId id="285" r:id="rId36"/>
+    <p:sldId id="286" r:id="rId37"/>
   </p:sldIdLst>
   <p:sldSz cx="12188952" cy="6858000" type="screen4x3"/>
   <p:notesSz cx="6858000" cy="9144000"/>
@@ -628,23 +629,18 @@
           <a:lstStyle/>
           <a:p>
             <a:r>
-              <a:t>The escape from the coin motor's compromise. A crystal that flexes when</a:t>
-            </a:r>
-          </a:p>
-          <a:p>
-            <a:r>
-              <a:t>you put current across it: near-instant, almost no power, but shallow.</a:t>
+              <a:t>The one everybody already owns without knowing it. Every phone has one.</a:t>
             </a:r>
           </a:p>
           <a:p/>
           <a:p>
             <a:r>
-              <a:t>A tick, not a thump. Point anyone here who needs something to feel responsive</a:t>
-            </a:r>
-          </a:p>
-          <a:p>
-            <a:r>
-              <a:t>rather than just present. 69 in the drawer, so nobody has to share.</a:t>
+              <a:t>The point worth making: speed and strength are welded together. That single</a:t>
+            </a:r>
+          </a:p>
+          <a:p>
+            <a:r>
+              <a:t>constraint is why the other five exist.</a:t>
             </a:r>
           </a:p>
         </p:txBody>
@@ -714,23 +710,23 @@
           <a:lstStyle/>
           <a:p>
             <a:r>
-              <a:t>Pass this one around if you can. It is the one people remember, because a</a:t>
-            </a:r>
-          </a:p>
-          <a:p>
-            <a:r>
-              <a:t>knock reads as a person rather than a machine.</a:t>
+              <a:t>The escape from the coin motor's compromise. A crystal that flexes when</a:t>
+            </a:r>
+          </a:p>
+          <a:p>
+            <a:r>
+              <a:t>you put current across it: near-instant, almost no power, but shallow.</a:t>
             </a:r>
           </a:p>
           <a:p/>
           <a:p>
             <a:r>
-              <a:t>Warn them now that it needs its own supply, so it does not come as a surprise</a:t>
-            </a:r>
-          </a:p>
-          <a:p>
-            <a:r>
-              <a:t>at task 02.</a:t>
+              <a:t>A tick, not a thump. Point anyone here who needs something to feel responsive</a:t>
+            </a:r>
+          </a:p>
+          <a:p>
+            <a:r>
+              <a:t>rather than just present. 69 in the drawer, so nobody has to share.</a:t>
             </a:r>
           </a:p>
         </p:txBody>
@@ -800,18 +796,23 @@
           <a:lstStyle/>
           <a:p>
             <a:r>
-              <a:t>Hold up a wire and a piece of foil. That is genuinely the whole sensor.</a:t>
+              <a:t>Pass this one around if you can. It is the one people remember, because a</a:t>
+            </a:r>
+          </a:p>
+          <a:p>
+            <a:r>
+              <a:t>knock reads as a person rather than a machine.</a:t>
             </a:r>
           </a:p>
           <a:p/>
           <a:p>
             <a:r>
-              <a:t>This is the slide that changes what people think is possible, because it costs</a:t>
-            </a:r>
-          </a:p>
-          <a:p>
-            <a:r>
-              <a:t>nothing and hides completely inside a prototype.</a:t>
+              <a:t>Warn them now that it needs its own supply, so it does not come as a surprise</a:t>
+            </a:r>
+          </a:p>
+          <a:p>
+            <a:r>
+              <a:t>at task 02.</a:t>
             </a:r>
           </a:p>
         </p:txBody>
@@ -881,23 +882,18 @@
           <a:lstStyle/>
           <a:p>
             <a:r>
-              <a:t>Say the honest limitation out loud: it is slow, and hot alternating with</a:t>
-            </a:r>
-          </a:p>
-          <a:p>
-            <a:r>
-              <a:t>cold just reads as lukewarm.</a:t>
+              <a:t>Hold up a wire and a piece of foil. That is genuinely the whole sensor.</a:t>
             </a:r>
           </a:p>
           <a:p/>
           <a:p>
             <a:r>
-              <a:t>Good for slow ambient state. Wrong for alerts. Saying so here saves a project</a:t>
-            </a:r>
-          </a:p>
-          <a:p>
-            <a:r>
-              <a:t>from finding out in week 46.</a:t>
+              <a:t>This is the slide that changes what people think is possible, because it costs</a:t>
+            </a:r>
+          </a:p>
+          <a:p>
+            <a:r>
+              <a:t>nothing and hides completely inside a prototype.</a:t>
             </a:r>
           </a:p>
         </p:txBody>
@@ -967,23 +963,23 @@
           <a:lstStyle/>
           <a:p>
             <a:r>
-              <a:t>The redundancy argument. Same driver, one frequency you feel and one you</a:t>
-            </a:r>
-          </a:p>
-          <a:p>
-            <a:r>
-              <a:t>hear.</a:t>
+              <a:t>Say the honest limitation out loud: it is slow, and hot alternating with</a:t>
+            </a:r>
+          </a:p>
+          <a:p>
+            <a:r>
+              <a:t>cold just reads as lukewarm.</a:t>
             </a:r>
           </a:p>
           <a:p/>
           <a:p>
             <a:r>
-              <a:t>Together is not louder, it is more certain. Cheapest reliability a project can</a:t>
-            </a:r>
-          </a:p>
-          <a:p>
-            <a:r>
-              <a:t>buy, and it is also the accessibility answer.</a:t>
+              <a:t>Good for slow ambient state. Wrong for alerts. Saying so here saves a project</a:t>
+            </a:r>
+          </a:p>
+          <a:p>
+            <a:r>
+              <a:t>from finding out in week 46.</a:t>
             </a:r>
           </a:p>
         </p:txBody>
@@ -1053,18 +1049,23 @@
           <a:lstStyle/>
           <a:p>
             <a:r>
-              <a:t>Worth showing even though it is not in a task. Most projects that need</a:t>
-            </a:r>
-          </a:p>
-          <a:p>
-            <a:r>
-              <a:t>something to physically move end up here rather than on a vibration motor.</a:t>
+              <a:t>The redundancy argument. Same driver, one frequency you feel and one you</a:t>
+            </a:r>
+          </a:p>
+          <a:p>
+            <a:r>
+              <a:t>hear.</a:t>
             </a:r>
           </a:p>
           <a:p/>
           <a:p>
             <a:r>
-              <a:t>80 in stock, so nobody has to share.</a:t>
+              <a:t>Together is not louder, it is more certain. Cheapest reliability a project can</a:t>
+            </a:r>
+          </a:p>
+          <a:p>
+            <a:r>
+              <a:t>buy, and it is also the accessibility answer.</a:t>
             </a:r>
           </a:p>
         </p:txBody>
@@ -1134,39 +1135,18 @@
           <a:lstStyle/>
           <a:p>
             <a:r>
-              <a:t>The precision option. Moves in known steps, so you can position it</a:t>
-            </a:r>
-          </a:p>
-          <a:p>
-            <a:r>
-              <a:t>without any feedback sensor at all. 2048 steps per revolution.</a:t>
+              <a:t>Worth showing even though it is not in a task. Most projects that need</a:t>
+            </a:r>
+          </a:p>
+          <a:p>
+            <a:r>
+              <a:t>something to physically move end up here rather than on a vibration motor.</a:t>
             </a:r>
           </a:p>
           <a:p/>
           <a:p>
             <a:r>
-              <a:t>Needs a ULN2003 driver board, drawer 2A, 27 of them.</a:t>
-            </a:r>
-          </a:p>
-          <a:p/>
-          <a:p>
-            <a:r>
-              <a:t>If anyone tries one: the Stepper constructor does NOT take the pins in numeric</a:t>
-            </a:r>
-          </a:p>
-          <a:p>
-            <a:r>
-              <a:t>order. Wire IN1 to IN4 on pins 8 to 11, then write Stepper(2048, 8, 10, 9, 11).</a:t>
-            </a:r>
-          </a:p>
-          <a:p>
-            <a:r>
-              <a:t>Get it wrong and it buzzes and jitters instead of turning, which looks like a</a:t>
-            </a:r>
-          </a:p>
-          <a:p>
-            <a:r>
-              <a:t>dead motor. bench_tests/07_stepper has it right, with the note.</a:t>
+              <a:t>80 in stock, so nobody has to share.</a:t>
             </a:r>
           </a:p>
         </p:txBody>
@@ -1236,18 +1216,39 @@
           <a:lstStyle/>
           <a:p>
             <a:r>
-              <a:t>The one people forget exists. It grabs and lets go, with nothing moving.</a:t>
+              <a:t>The precision option. Moves in known steps, so you can position it</a:t>
+            </a:r>
+          </a:p>
+          <a:p>
+            <a:r>
+              <a:t>without any feedback sensor at all. 2048 steps per revolution.</a:t>
             </a:r>
           </a:p>
           <a:p/>
           <a:p>
             <a:r>
-              <a:t>Good answer for anything that should hold and then release: a latch, a door, a</a:t>
-            </a:r>
-          </a:p>
-          <a:p>
-            <a:r>
-              <a:t>thing that falls when the event happens.</a:t>
+              <a:t>Needs a ULN2003 driver board, drawer 2A, 27 of them.</a:t>
+            </a:r>
+          </a:p>
+          <a:p/>
+          <a:p>
+            <a:r>
+              <a:t>If anyone tries one: the Stepper constructor does NOT take the pins in numeric</a:t>
+            </a:r>
+          </a:p>
+          <a:p>
+            <a:r>
+              <a:t>order. Wire IN1 to IN4 on pins 8 to 11, then write Stepper(2048, 8, 10, 9, 11).</a:t>
+            </a:r>
+          </a:p>
+          <a:p>
+            <a:r>
+              <a:t>Get it wrong and it buzzes and jitters instead of turning, which looks like a</a:t>
+            </a:r>
+          </a:p>
+          <a:p>
+            <a:r>
+              <a:t>dead motor. bench_tests/07_stepper has it right, with the note.</a:t>
             </a:r>
           </a:p>
         </p:txBody>
@@ -1317,55 +1318,18 @@
           <a:lstStyle/>
           <a:p>
             <a:r>
-              <a:t>Two messages on one slide, and they pull in opposite directions on</a:t>
-            </a:r>
-          </a:p>
-          <a:p>
-            <a:r>
-              <a:t>purpose. Say the permission warmly, then change tone for the limits.</a:t>
+              <a:t>The one people forget exists. It grabs and lets go, with nothing moving.</a:t>
             </a:r>
           </a:p>
           <a:p/>
           <a:p>
             <a:r>
-              <a:t>Permission first: some students will not believe they are allowed to skip</a:t>
-            </a:r>
-          </a:p>
-          <a:p>
-            <a:r>
-              <a:t>ahead or stop early unless told. The failure mode is a pair rushing all five</a:t>
-            </a:r>
-          </a:p>
-          <a:p>
-            <a:r>
-              <a:t>badly instead of doing two properly.</a:t>
-            </a:r>
-          </a:p>
-          <a:p/>
-          <a:p>
-            <a:r>
-              <a:t>Then the three hard limits, and here you should sound firm. Say the numbers</a:t>
-            </a:r>
-          </a:p>
-          <a:p>
-            <a:r>
-              <a:t>out loud: a pin gives 40 mA, the motor wants about 75. It is not a rule they</a:t>
-            </a:r>
-          </a:p>
-          <a:p>
-            <a:r>
-              <a:t>have to take on faith.</a:t>
-            </a:r>
-          </a:p>
-          <a:p/>
-          <a:p>
-            <a:r>
-              <a:t>Worth adding: a board resetting when the solenoid fires is a POWER problem,</a:t>
-            </a:r>
-          </a:p>
-          <a:p>
-            <a:r>
-              <a:t>not a code bug. That saves someone twenty minutes.</a:t>
+              <a:t>Good answer for anything that should hold and then release: a latch, a door, a</a:t>
+            </a:r>
+          </a:p>
+          <a:p>
+            <a:r>
+              <a:t>thing that falls when the event happens.</a:t>
             </a:r>
           </a:p>
         </p:txBody>
@@ -1435,72 +1399,55 @@
           <a:lstStyle/>
           <a:p>
             <a:r>
-              <a:t>Slow down here. This is the single idea most worth stealing from today, and</a:t>
-            </a:r>
-          </a:p>
-          <a:p>
-            <a:r>
-              <a:t>it is worth interrupting the room for once most people have reached task 04.</a:t>
+              <a:t>Two messages on one slide, and they pull in opposite directions on</a:t>
+            </a:r>
+          </a:p>
+          <a:p>
+            <a:r>
+              <a:t>purpose. Say the permission warmly, then change tone for the limits.</a:t>
             </a:r>
           </a:p>
           <a:p/>
           <a:p>
             <a:r>
-              <a:t>Two things students get wrong:</a:t>
+              <a:t>Permission first: some students will not believe they are allowed to skip</a:t>
+            </a:r>
+          </a:p>
+          <a:p>
+            <a:r>
+              <a:t>ahead or stop early unless told. The failure mode is a pair rushing all five</a:t>
+            </a:r>
+          </a:p>
+          <a:p>
+            <a:r>
+              <a:t>badly instead of doing two properly.</a:t>
             </a:r>
           </a:p>
           <a:p/>
           <a:p>
             <a:r>
-              <a:t>1. A fixed threshold. Works in the morning, fails after lunch, because the</a:t>
-            </a:r>
-          </a:p>
-          <a:p>
-            <a:r>
-              <a:t>   reading drifts with humidity and mains hum.</a:t>
+              <a:t>Then the three hard limits, and here you should sound firm. Say the numbers</a:t>
+            </a:r>
+          </a:p>
+          <a:p>
+            <a:r>
+              <a:t>out loud: a pin gives 40 mA, the motor wants about 75. It is not a rule they</a:t>
+            </a:r>
+          </a:p>
+          <a:p>
+            <a:r>
+              <a:t>have to take on faith.</a:t>
             </a:r>
           </a:p>
           <a:p/>
           <a:p>
             <a:r>
-              <a:t>2. Feeding the baseline buffer always. A long press then teaches the baseline</a:t>
-            </a:r>
-          </a:p>
-          <a:p>
-            <a:r>
-              <a:t>   that a finger is normal, and the touch silently stops working. The buffer</a:t>
-            </a:r>
-          </a:p>
-          <a:p>
-            <a:r>
-              <a:t>   must only learn while untouched.</a:t>
-            </a:r>
-          </a:p>
-          <a:p/>
-          <a:p>
-            <a:r>
-              <a:t>Put the Serial Plotter on the projector. Watching the baseline wander while the</a:t>
-            </a:r>
-          </a:p>
-          <a:p>
-            <a:r>
-              <a:t>trigger line tracks it explains the whole design in ten seconds.</a:t>
-            </a:r>
-          </a:p>
-          <a:p/>
-          <a:p>
-            <a:r>
-              <a:t>For what it is worth, the rig this came from went through the same tuning: an</a:t>
-            </a:r>
-          </a:p>
-          <a:p>
-            <a:r>
-              <a:t>earlier version used 1.008 with a 50-sample baseline, the final one 1.01 with</a:t>
-            </a:r>
-          </a:p>
-          <a:p>
-            <a:r>
-              <a:t>25. Everyone tunes these.</a:t>
+              <a:t>Worth adding: a board resetting when the solenoid fires is a POWER problem,</a:t>
+            </a:r>
+          </a:p>
+          <a:p>
+            <a:r>
+              <a:t>not a code bug. That saves someone twenty minutes.</a:t>
             </a:r>
           </a:p>
         </p:txBody>
@@ -1651,24 +1598,72 @@
           <a:lstStyle/>
           <a:p>
             <a:r>
-              <a:t>1:25. Pull the room back together.</a:t>
+              <a:t>Slow down here. This is the single idea most worth stealing from today, and</a:t>
+            </a:r>
+          </a:p>
+          <a:p>
+            <a:r>
+              <a:t>it is worth interrupting the room for once most people have reached task 04.</a:t>
             </a:r>
           </a:p>
           <a:p/>
           <a:p>
             <a:r>
-              <a:t>One sentence per group: what surprised you. No slides, no laptops. Ten minutes.</a:t>
+              <a:t>Two things students get wrong:</a:t>
             </a:r>
           </a:p>
           <a:p/>
           <a:p>
             <a:r>
-              <a:t>Expect someone to report the Peltier delay. Let that land, it is far more</a:t>
-            </a:r>
-          </a:p>
-          <a:p>
-            <a:r>
-              <a:t>persuasive from a peer than from you.</a:t>
+              <a:t>1. A fixed threshold. Works in the morning, fails after lunch, because the</a:t>
+            </a:r>
+          </a:p>
+          <a:p>
+            <a:r>
+              <a:t>   reading drifts with humidity and mains hum.</a:t>
+            </a:r>
+          </a:p>
+          <a:p/>
+          <a:p>
+            <a:r>
+              <a:t>2. Feeding the baseline buffer always. A long press then teaches the baseline</a:t>
+            </a:r>
+          </a:p>
+          <a:p>
+            <a:r>
+              <a:t>   that a finger is normal, and the touch silently stops working. The buffer</a:t>
+            </a:r>
+          </a:p>
+          <a:p>
+            <a:r>
+              <a:t>   must only learn while untouched.</a:t>
+            </a:r>
+          </a:p>
+          <a:p/>
+          <a:p>
+            <a:r>
+              <a:t>Put the Serial Plotter on the projector. Watching the baseline wander while the</a:t>
+            </a:r>
+          </a:p>
+          <a:p>
+            <a:r>
+              <a:t>trigger line tracks it explains the whole design in ten seconds.</a:t>
+            </a:r>
+          </a:p>
+          <a:p/>
+          <a:p>
+            <a:r>
+              <a:t>For what it is worth, the rig this came from went through the same tuning: an</a:t>
+            </a:r>
+          </a:p>
+          <a:p>
+            <a:r>
+              <a:t>earlier version used 1.008 with a 50-sample baseline, the final one 1.01 with</a:t>
+            </a:r>
+          </a:p>
+          <a:p>
+            <a:r>
+              <a:t>25. Everyone tunes these.</a:t>
             </a:r>
           </a:p>
         </p:txBody>
@@ -1738,29 +1733,24 @@
           <a:lstStyle/>
           <a:p>
             <a:r>
-              <a:t>Mention, do not teach. These sit on one table with a sign.</a:t>
+              <a:t>1:25. Pull the room back together.</a:t>
             </a:r>
           </a:p>
           <a:p/>
           <a:p>
             <a:r>
-              <a:t>The honest warnings matter more than the specs: PPG is useless once the hand</a:t>
-            </a:r>
-          </a:p>
-          <a:p>
-            <a:r>
-              <a:t>moves, GSR drifts so only relative change works, FSRs need per-pad calibration.</a:t>
+              <a:t>One sentence per group: what surprised you. No slides, no laptops. Ten minutes.</a:t>
             </a:r>
           </a:p>
           <a:p/>
           <a:p>
             <a:r>
-              <a:t>Push the phone option hard. For a lot of projects it beats everything else on</a:t>
-            </a:r>
-          </a:p>
-          <a:p>
-            <a:r>
-              <a:t>the table and needs no soldering at all.</a:t>
+              <a:t>Expect someone to report the Peltier delay. Let that land, it is far more</a:t>
+            </a:r>
+          </a:p>
+          <a:p>
+            <a:r>
+              <a:t>persuasive from a peer than from you.</a:t>
             </a:r>
           </a:p>
         </p:txBody>
@@ -1830,34 +1820,29 @@
           <a:lstStyle/>
           <a:p>
             <a:r>
-              <a:t>The slide that earns the room's attention, so do not rush it.</a:t>
+              <a:t>Mention, do not teach. These sit on one table with a sign.</a:t>
             </a:r>
           </a:p>
           <a:p/>
           <a:p>
             <a:r>
-              <a:t>This audience can write the code already, and they know it. Saying so out loud</a:t>
-            </a:r>
-          </a:p>
-          <a:p>
-            <a:r>
-              <a:t>buys credibility for the rest. The argument is not "you need to learn to</a:t>
-            </a:r>
-          </a:p>
-          <a:p>
-            <a:r>
-              <a:t>program a motor", it is "you cannot Google what something feels like".</a:t>
+              <a:t>The honest warnings matter more than the specs: PPG is useless once the hand</a:t>
+            </a:r>
+          </a:p>
+          <a:p>
+            <a:r>
+              <a:t>moves, GSR drifts so only relative change works, FSRs need per-pad calibration.</a:t>
             </a:r>
           </a:p>
           <a:p/>
           <a:p>
             <a:r>
-              <a:t>The second point is practical and lands with everyone: the parts are free and</a:t>
-            </a:r>
-          </a:p>
-          <a:p>
-            <a:r>
-              <a:t>already in the building.</a:t>
+              <a:t>Push the phone option hard. For a lot of projects it beats everything else on</a:t>
+            </a:r>
+          </a:p>
+          <a:p>
+            <a:r>
+              <a:t>the table and needs no soldering at all.</a:t>
             </a:r>
           </a:p>
         </p:txBody>
@@ -1927,66 +1912,34 @@
           <a:lstStyle/>
           <a:p>
             <a:r>
-              <a:t>The slide the tinkerers will care most about, and the one where being</a:t>
-            </a:r>
-          </a:p>
-          <a:p>
-            <a:r>
-              <a:t>precise matters, because the internet is full of wrong answers.</a:t>
+              <a:t>The slide that earns the room's attention, so do not rush it.</a:t>
             </a:r>
           </a:p>
           <a:p/>
           <a:p>
             <a:r>
-              <a:t>The useful surprise: most Garmin watches broadcast heart rate over BLE</a:t>
-            </a:r>
-          </a:p>
-          <a:p>
-            <a:r>
-              <a:t>natively. Turn on Broadcast Heart Rate, or start a Virtual Run, and the watch</a:t>
-            </a:r>
-          </a:p>
-          <a:p>
-            <a:r>
-              <a:t>appears as an ordinary heart rate strap that Web Bluetooth can read from a web</a:t>
-            </a:r>
-          </a:p>
-          <a:p>
-            <a:r>
-              <a:t>page. No Connect IQ app, no SDK, no API key.</a:t>
+              <a:t>This audience can write the code already, and they know it. Saying so out loud</a:t>
+            </a:r>
+          </a:p>
+          <a:p>
+            <a:r>
+              <a:t>buys credibility for the rest. The argument is not "you need to learn to</a:t>
+            </a:r>
+          </a:p>
+          <a:p>
+            <a:r>
+              <a:t>program a motor", it is "you cannot Google what something feels like".</a:t>
             </a:r>
           </a:p>
           <a:p/>
           <a:p>
             <a:r>
-              <a:t>Apple Watch will not. HealthKit needs a companion watchOS app in Swift, so</a:t>
-            </a:r>
-          </a:p>
-          <a:p>
-            <a:r>
-              <a:t>third-party apps that re-broadcast over BLE are the practical route.</a:t>
-            </a:r>
-          </a:p>
-          <a:p/>
-          <a:p>
-            <a:r>
-              <a:t>Web Bluetooth is Chrome and Edge only. Not Safari, not Firefox. Same lesson as</a:t>
-            </a:r>
-          </a:p>
-          <a:p>
-            <a:r>
-              <a:t>vibration: check the feature before it goes in a plan.</a:t>
-            </a:r>
-          </a:p>
-          <a:p/>
-          <a:p>
-            <a:r>
-              <a:t>Good project prompt if anyone wants one: a page that pairs with a strap and</a:t>
-            </a:r>
-          </a:p>
-          <a:p>
-            <a:r>
-              <a:t>drives an actuator from a live pulse. That is an afternoon.</a:t>
+              <a:t>The second point is practical and lands with everyone: the parts are free and</a:t>
+            </a:r>
+          </a:p>
+          <a:p>
+            <a:r>
+              <a:t>already in the building.</a:t>
             </a:r>
           </a:p>
         </p:txBody>
@@ -2056,55 +2009,66 @@
           <a:lstStyle/>
           <a:p>
             <a:r>
-              <a:t>Have them open sensors.chomskylab.dk on their own phones while you talk.</a:t>
-            </a:r>
-          </a:p>
-          <a:p>
-            <a:r>
-              <a:t>The split between what works and what does not lands far harder on their own</a:t>
-            </a:r>
-          </a:p>
-          <a:p>
-            <a:r>
-              <a:t>device than on a slide.</a:t>
+              <a:t>The slide the tinkerers will care most about, and the one where being</a:t>
+            </a:r>
+          </a:p>
+          <a:p>
+            <a:r>
+              <a:t>precise matters, because the internet is full of wrong answers.</a:t>
             </a:r>
           </a:p>
           <a:p/>
           <a:p>
             <a:r>
-              <a:t>The bottom half is the single most useful fact here, and the one people get</a:t>
-            </a:r>
-          </a:p>
-          <a:p>
-            <a:r>
-              <a:t>wrong because a blog post said otherwise.</a:t>
+              <a:t>The useful surprise: most Garmin watches broadcast heart rate over BLE</a:t>
+            </a:r>
+          </a:p>
+          <a:p>
+            <a:r>
+              <a:t>natively. Turn on Broadcast Heart Rate, or start a Virtual Run, and the watch</a:t>
+            </a:r>
+          </a:p>
+          <a:p>
+            <a:r>
+              <a:t>appears as an ordinary heart rate strap that Web Bluetooth can read from a web</a:t>
+            </a:r>
+          </a:p>
+          <a:p>
+            <a:r>
+              <a:t>page. No Connect IQ app, no SDK, no API key.</a:t>
             </a:r>
           </a:p>
           <a:p/>
           <a:p>
             <a:r>
-              <a:t>Say it plainly: iPhones do not vibrate from a web page. Not with a polyfill,</a:t>
-            </a:r>
-          </a:p>
-          <a:p>
-            <a:r>
-              <a:t>not with a library, not in Chrome for iOS, which is Safari underneath.</a:t>
+              <a:t>Apple Watch will not. HealthKit needs a companion watchOS app in Swift, so</a:t>
+            </a:r>
+          </a:p>
+          <a:p>
+            <a:r>
+              <a:t>third-party apps that re-broadcast over BLE are the practical route.</a:t>
             </a:r>
           </a:p>
           <a:p/>
           <a:p>
             <a:r>
-              <a:t>The general lesson is bigger than vibration: check the feature on caniuse</a:t>
-            </a:r>
-          </a:p>
-          <a:p>
-            <a:r>
-              <a:t>before it goes in a project plan, not after. Two minutes now against a</a:t>
-            </a:r>
-          </a:p>
-          <a:p>
-            <a:r>
-              <a:t>rewrite in week 46.</a:t>
+              <a:t>Web Bluetooth is Chrome and Edge only. Not Safari, not Firefox. Same lesson as</a:t>
+            </a:r>
+          </a:p>
+          <a:p>
+            <a:r>
+              <a:t>vibration: check the feature before it goes in a plan.</a:t>
+            </a:r>
+          </a:p>
+          <a:p/>
+          <a:p>
+            <a:r>
+              <a:t>Good project prompt if anyone wants one: a page that pairs with a strap and</a:t>
+            </a:r>
+          </a:p>
+          <a:p>
+            <a:r>
+              <a:t>drives an actuator from a live pulse. That is an afternoon.</a:t>
             </a:r>
           </a:p>
         </p:txBody>
@@ -2174,45 +2138,55 @@
           <a:lstStyle/>
           <a:p>
             <a:r>
-              <a:t>Five minutes, and put the actual repos on screen if you can.</a:t>
+              <a:t>Have them open sensors.chomskylab.dk on their own phones while you talk.</a:t>
+            </a:r>
+          </a:p>
+          <a:p>
+            <a:r>
+              <a:t>The split between what works and what does not lands far harder on their own</a:t>
+            </a:r>
+          </a:p>
+          <a:p>
+            <a:r>
+              <a:t>device than on a slide.</a:t>
             </a:r>
           </a:p>
           <a:p/>
           <a:p>
             <a:r>
-              <a:t>The argument: this was built by students at your stage, not by a lab with a</a:t>
-            </a:r>
-          </a:p>
-          <a:p>
-            <a:r>
-              <a:t>budget. The gap between "we should use touch" and "it moves when you touch it"</a:t>
-            </a:r>
-          </a:p>
-          <a:p>
-            <a:r>
-              <a:t>is smaller than it looks.</a:t>
+              <a:t>The bottom half is the single most useful fact here, and the one people get</a:t>
+            </a:r>
+          </a:p>
+          <a:p>
+            <a:r>
+              <a:t>wrong because a blog post said otherwise.</a:t>
             </a:r>
           </a:p>
           <a:p/>
           <a:p>
             <a:r>
-              <a:t>The moving screen has a browser control panel over the serial port, which is</a:t>
-            </a:r>
-          </a:p>
-          <a:p>
-            <a:r>
-              <a:t>what you will wish you had at the project demonstrations.</a:t>
+              <a:t>Say it plainly: iPhones do not vibrate from a web page. Not with a polyfill,</a:t>
+            </a:r>
+          </a:p>
+          <a:p>
+            <a:r>
+              <a:t>not with a library, not in Chrome for iOS, which is Safari underneath.</a:t>
             </a:r>
           </a:p>
           <a:p/>
           <a:p>
             <a:r>
-              <a:t>Note for you: the sock repo has a hardcoded Wi-Fi password and live patient IDs</a:t>
-            </a:r>
-          </a:p>
-          <a:p>
-            <a:r>
-              <a:t>in it. Scrub before showing, or show only the calibration section.</a:t>
+              <a:t>The general lesson is bigger than vibration: check the feature on caniuse</a:t>
+            </a:r>
+          </a:p>
+          <a:p>
+            <a:r>
+              <a:t>before it goes in a project plan, not after. Two minutes now against a</a:t>
+            </a:r>
+          </a:p>
+          <a:p>
+            <a:r>
+              <a:t>rewrite in week 46.</a:t>
             </a:r>
           </a:p>
         </p:txBody>
@@ -2282,18 +2256,45 @@
           <a:lstStyle/>
           <a:p>
             <a:r>
-              <a:t>1:35. The blind test.</a:t>
+              <a:t>Five minutes, and put the actual repos on screen if you can.</a:t>
             </a:r>
           </a:p>
           <a:p/>
           <a:p>
             <a:r>
-              <a:t>Most groups will already have something from task 05. This is where it gets</a:t>
-            </a:r>
-          </a:p>
-          <a:p>
-            <a:r>
-              <a:t>tested by someone who did not build it.</a:t>
+              <a:t>The argument: this was built by students at your stage, not by a lab with a</a:t>
+            </a:r>
+          </a:p>
+          <a:p>
+            <a:r>
+              <a:t>budget. The gap between "we should use touch" and "it moves when you touch it"</a:t>
+            </a:r>
+          </a:p>
+          <a:p>
+            <a:r>
+              <a:t>is smaller than it looks.</a:t>
+            </a:r>
+          </a:p>
+          <a:p/>
+          <a:p>
+            <a:r>
+              <a:t>The moving screen has a browser control panel over the serial port, which is</a:t>
+            </a:r>
+          </a:p>
+          <a:p>
+            <a:r>
+              <a:t>what you will wish you had at the project demonstrations.</a:t>
+            </a:r>
+          </a:p>
+          <a:p/>
+          <a:p>
+            <a:r>
+              <a:t>Note for you: the sock repo has a hardcoded Wi-Fi password and live patient IDs</a:t>
+            </a:r>
+          </a:p>
+          <a:p>
+            <a:r>
+              <a:t>in it. Scrub before showing, or show only the calibration section.</a:t>
             </a:r>
           </a:p>
         </p:txBody>
@@ -2363,39 +2364,18 @@
           <a:lstStyle/>
           <a:p>
             <a:r>
-              <a:t>Read the brief out once, then get out of the way. Full wording, since the</a:t>
-            </a:r>
-          </a:p>
-          <a:p>
-            <a:r>
-              <a:t>slide is only the bones:</a:t>
+              <a:t>1:35. The blind test.</a:t>
             </a:r>
           </a:p>
           <a:p/>
           <a:p>
             <a:r>
-              <a:t>"Pick one actuator. Encode three messages: arrived, something wrong, finished.</a:t>
-            </a:r>
-          </a:p>
-          <a:p>
-            <a:r>
-              <a:t>Vary only the rhythm of the pulses and how strong they are. Then hand it to</a:t>
-            </a:r>
-          </a:p>
-          <a:p>
-            <a:r>
-              <a:t>another group with the screen turned away and see if they can name all three."</a:t>
-            </a:r>
-          </a:p>
-          <a:p/>
-          <a:p>
-            <a:r>
-              <a:t>If someone asks to add a second actuator, say no. The constraint is the</a:t>
-            </a:r>
-          </a:p>
-          <a:p>
-            <a:r>
-              <a:t>exercise.</a:t>
+              <a:t>Most groups will already have something from task 05. This is where it gets</a:t>
+            </a:r>
+          </a:p>
+          <a:p>
+            <a:r>
+              <a:t>tested by someone who did not build it.</a:t>
             </a:r>
           </a:p>
         </p:txBody>
@@ -2465,24 +2445,39 @@
           <a:lstStyle/>
           <a:p>
             <a:r>
-              <a:t>The line worth repeating twice.</a:t>
+              <a:t>Read the brief out once, then get out of the way. Full wording, since the</a:t>
+            </a:r>
+          </a:p>
+          <a:p>
+            <a:r>
+              <a:t>slide is only the bones:</a:t>
             </a:r>
           </a:p>
           <a:p/>
           <a:p>
             <a:r>
-              <a:t>Run the test: swap groups, receiver looks away, guess all three.</a:t>
+              <a:t>"Pick one actuator. Encode three messages: arrived, something wrong, finished.</a:t>
+            </a:r>
+          </a:p>
+          <a:p>
+            <a:r>
+              <a:t>Vary only the rhythm of the pulses and how strong they are. Then hand it to</a:t>
+            </a:r>
+          </a:p>
+          <a:p>
+            <a:r>
+              <a:t>another group with the screen turned away and see if they can name all three."</a:t>
             </a:r>
           </a:p>
           <a:p/>
           <a:p>
             <a:r>
-              <a:t>Then have each group name which two got confused and what would have separated</a:t>
-            </a:r>
-          </a:p>
-          <a:p>
-            <a:r>
-              <a:t>them. That confusion is the actual learning, not the successful ones.</a:t>
+              <a:t>If someone asks to add a second actuator, say no. The constraint is the</a:t>
+            </a:r>
+          </a:p>
+          <a:p>
+            <a:r>
+              <a:t>exercise.</a:t>
             </a:r>
           </a:p>
         </p:txBody>
@@ -2552,44 +2547,24 @@
           <a:lstStyle/>
           <a:p>
             <a:r>
-              <a:t>Put this up while the blind tests run, so groups can check themselves</a:t>
-            </a:r>
-          </a:p>
-          <a:p>
-            <a:r>
-              <a:t>without asking you.</a:t>
+              <a:t>The line worth repeating twice.</a:t>
             </a:r>
           </a:p>
           <a:p/>
           <a:p>
             <a:r>
-              <a:t>The middle line matters most: a device that fires continuously when held is</a:t>
-            </a:r>
-          </a:p>
-          <a:p>
-            <a:r>
-              <a:t>the single most common bug, and it is a debounce problem.</a:t>
+              <a:t>Run the test: swap groups, receiver looks away, guess all three.</a:t>
             </a:r>
           </a:p>
           <a:p/>
           <a:p>
             <a:r>
-              <a:t>Then close on the bottom half, thirty seconds. If they leave with one thing,</a:t>
-            </a:r>
-          </a:p>
-          <a:p>
-            <a:r>
-              <a:t>make it the last point: pick the actuator before designing the interaction.</a:t>
-            </a:r>
-          </a:p>
-          <a:p>
-            <a:r>
-              <a:t>Discovering in week 46 that the chosen one cannot do the job is the expensive</a:t>
-            </a:r>
-          </a:p>
-          <a:p>
-            <a:r>
-              <a:t>mistake this session exists to prevent.</a:t>
+              <a:t>Then have each group name which two got confused and what would have separated</a:t>
+            </a:r>
+          </a:p>
+          <a:p>
+            <a:r>
+              <a:t>them. That confusion is the actual learning, not the successful ones.</a:t>
             </a:r>
           </a:p>
         </p:txBody>
@@ -2756,6 +2731,113 @@
           <a:lstStyle/>
           <a:p>
             <a:r>
+              <a:t>Put this up while the blind tests run, so groups can check themselves</a:t>
+            </a:r>
+          </a:p>
+          <a:p>
+            <a:r>
+              <a:t>without asking you.</a:t>
+            </a:r>
+          </a:p>
+          <a:p/>
+          <a:p>
+            <a:r>
+              <a:t>The middle line matters most: a device that fires continuously when held is</a:t>
+            </a:r>
+          </a:p>
+          <a:p>
+            <a:r>
+              <a:t>the single most common bug, and it is a debounce problem.</a:t>
+            </a:r>
+          </a:p>
+          <a:p/>
+          <a:p>
+            <a:r>
+              <a:t>Then close on the bottom half, thirty seconds. If they leave with one thing,</a:t>
+            </a:r>
+          </a:p>
+          <a:p>
+            <a:r>
+              <a:t>make it the last point: pick the actuator before designing the interaction.</a:t>
+            </a:r>
+          </a:p>
+          <a:p>
+            <a:r>
+              <a:t>Discovering in week 46 that the chosen one cannot do the job is the expensive</a:t>
+            </a:r>
+          </a:p>
+          <a:p>
+            <a:r>
+              <a:t>mistake this session exists to prevent.</a:t>
+            </a:r>
+          </a:p>
+        </p:txBody>
+      </p:sp>
+      <p:sp>
+        <p:nvSpPr>
+          <p:cNvPr id="4" name="Slide Number Placeholder 3"/>
+          <p:cNvSpPr>
+            <a:spLocks noGrp="1"/>
+          </p:cNvSpPr>
+          <p:nvPr>
+            <p:ph type="sldNum" idx="5" sz="quarter"/>
+          </p:nvPr>
+        </p:nvSpPr>
+        <p:spPr/>
+      </p:sp>
+    </p:spTree>
+  </p:cSld>
+  <p:clrMapOvr>
+    <a:masterClrMapping/>
+  </p:clrMapOvr>
+</p:notes>
+</file>
+
+<file path=ppt/notesSlides/notesSlide31.xml><?xml version="1.0" encoding="utf-8"?>
+<p:notes xmlns:a="http://schemas.openxmlformats.org/drawingml/2006/main" xmlns:p="http://schemas.openxmlformats.org/presentationml/2006/main" xmlns:r="http://schemas.openxmlformats.org/officeDocument/2006/relationships">
+  <p:cSld>
+    <p:spTree>
+      <p:nvGrpSpPr>
+        <p:cNvPr id="1" name=""/>
+        <p:cNvGrpSpPr/>
+        <p:nvPr/>
+      </p:nvGrpSpPr>
+      <p:grpSpPr>
+        <a:xfrm>
+          <a:off x="0" y="0"/>
+          <a:ext cx="0" cy="0"/>
+          <a:chOff x="0" y="0"/>
+          <a:chExt cx="0" cy="0"/>
+        </a:xfrm>
+      </p:grpSpPr>
+      <p:sp>
+        <p:nvSpPr>
+          <p:cNvPr id="2" name="Slide Image Placeholder 1"/>
+          <p:cNvSpPr>
+            <a:spLocks noGrp="1"/>
+          </p:cNvSpPr>
+          <p:nvPr>
+            <p:ph type="sldImg" idx="2"/>
+          </p:nvPr>
+        </p:nvSpPr>
+        <p:spPr/>
+      </p:sp>
+      <p:sp>
+        <p:nvSpPr>
+          <p:cNvPr id="3" name="Notes Placeholder 2"/>
+          <p:cNvSpPr>
+            <a:spLocks noGrp="1"/>
+          </p:cNvSpPr>
+          <p:nvPr>
+            <p:ph type="body" idx="3" sz="quarter"/>
+          </p:nvPr>
+        </p:nvSpPr>
+        <p:spPr/>
+        <p:txBody>
+          <a:bodyPr/>
+          <a:lstStyle/>
+          <a:p>
+            <a:r>
               <a:t>Point them at the repo. Every task sketch is commented for them, and the</a:t>
             </a:r>
           </a:p>
@@ -3274,39 +3356,39 @@
           <a:lstStyle/>
           <a:p>
             <a:r>
-              <a:t>Hand this out before anything else, or you will spend the session</a:t>
-            </a:r>
-          </a:p>
-          <a:p>
-            <a:r>
-              <a:t>fetching parts one at a time.</a:t>
+              <a:t>Reference, not a talking point. Ten seconds, or skip it entirely if the</a:t>
+            </a:r>
+          </a:p>
+          <a:p>
+            <a:r>
+              <a:t>stations are already built.</a:t>
             </a:r>
           </a:p>
           <a:p/>
           <a:p>
             <a:r>
-              <a:t>One set per pair. The three drawer numbers are the ones people actually come</a:t>
-            </a:r>
-          </a:p>
-          <a:p>
-            <a:r>
-              <a:t>back and ask for: 8A breadboard supply, 2C H-bridge, 11F amplifier.</a:t>
+              <a:t>It earns its place two ways: you use it while setting the room up, and it is</a:t>
+            </a:r>
+          </a:p>
+          <a:p>
+            <a:r>
+              <a:t>the slide to jump back to when someone asks "which pin was the solenoid".</a:t>
             </a:r>
           </a:p>
           <a:p/>
           <a:p>
             <a:r>
-              <a:t>Jumper wires, breadboards and resistors are not tracked in the component</a:t>
-            </a:r>
-          </a:p>
-          <a:p>
-            <a:r>
-              <a:t>database, so make sure there are enough on the tables before students</a:t>
-            </a:r>
-          </a:p>
-          <a:p>
-            <a:r>
-              <a:t>arrive.</a:t>
+              <a:t>The bottom line is the one worth reading aloud if anyone touches the stepper:</a:t>
+            </a:r>
+          </a:p>
+          <a:p>
+            <a:r>
+              <a:t>the pins go into the constructor OUT of order, 8, 10, 9, 11. Wired in numeric</a:t>
+            </a:r>
+          </a:p>
+          <a:p>
+            <a:r>
+              <a:t>order it buzzes instead of turning and looks like a dead motor.</a:t>
             </a:r>
           </a:p>
         </p:txBody>
@@ -3376,18 +3458,39 @@
           <a:lstStyle/>
           <a:p>
             <a:r>
-              <a:t>The one everybody already owns without knowing it. Every phone has one.</a:t>
+              <a:t>Hand this out before anything else, or you will spend the session</a:t>
+            </a:r>
+          </a:p>
+          <a:p>
+            <a:r>
+              <a:t>fetching parts one at a time.</a:t>
             </a:r>
           </a:p>
           <a:p/>
           <a:p>
             <a:r>
-              <a:t>The point worth making: speed and strength are welded together. That single</a:t>
-            </a:r>
-          </a:p>
-          <a:p>
-            <a:r>
-              <a:t>constraint is why the other five exist.</a:t>
+              <a:t>One set per pair. The three drawer numbers are the ones people actually come</a:t>
+            </a:r>
+          </a:p>
+          <a:p>
+            <a:r>
+              <a:t>back and ask for: 8A breadboard supply, 2C H-bridge, 11F amplifier.</a:t>
+            </a:r>
+          </a:p>
+          <a:p/>
+          <a:p>
+            <a:r>
+              <a:t>Jumper wires, breadboards and resistors are not tracked in the component</a:t>
+            </a:r>
+          </a:p>
+          <a:p>
+            <a:r>
+              <a:t>database, so make sure there are enough on the tables before students</a:t>
+            </a:r>
+          </a:p>
+          <a:p>
+            <a:r>
+              <a:t>arrive.</a:t>
             </a:r>
           </a:p>
         </p:txBody>
@@ -6596,6 +6699,247 @@
                 </a:solidFill>
                 <a:latin typeface="Arial"/>
               </a:rPr>
+              <a:t>VIBRATING MINI MOTOR DISC</a:t>
+            </a:r>
+          </a:p>
+        </p:txBody>
+      </p:sp>
+      <p:sp>
+        <p:nvSpPr>
+          <p:cNvPr id="3" name="Text Placeholder 2"/>
+          <p:cNvSpPr>
+            <a:spLocks noGrp="1"/>
+          </p:cNvSpPr>
+          <p:nvPr>
+            <p:ph type="body" idx="1"/>
+          </p:nvPr>
+        </p:nvSpPr>
+        <p:spPr>
+          <a:xfrm>
+            <a:off x="5461000" y="1905000"/>
+            <a:ext cx="5486400" cy="3302000"/>
+          </a:xfrm>
+        </p:spPr>
+        <p:txBody>
+          <a:bodyPr/>
+          <a:lstStyle/>
+          <a:p>
+            <a:pPr marL="0" indent="0" algn="l">
+              <a:lnSpc>
+                <a:spcPct val="130000"/>
+              </a:lnSpc>
+              <a:spcAft>
+                <a:spcPts val="1200"/>
+              </a:spcAft>
+              <a:buNone/>
+            </a:pPr>
+            <a:r>
+              <a:rPr sz="1600" b="0">
+                <a:solidFill>
+                  <a:srgbClr val="000000"/>
+                </a:solidFill>
+                <a:latin typeface="Arial"/>
+              </a:rPr>
+              <a:t>An off-centre weight on a motor shaft, sealed in a disc. The same part as in your phone.</a:t>
+            </a:r>
+          </a:p>
+          <a:p>
+            <a:pPr marL="0" indent="0" algn="l">
+              <a:lnSpc>
+                <a:spcPct val="130000"/>
+              </a:lnSpc>
+              <a:spcAft>
+                <a:spcPts val="1400"/>
+              </a:spcAft>
+              <a:buNone/>
+            </a:pPr>
+            <a:r>
+              <a:rPr sz="1600" b="1">
+                <a:solidFill>
+                  <a:srgbClr val="002546"/>
+                </a:solidFill>
+                <a:latin typeface="Arial"/>
+              </a:rPr>
+              <a:t>Feels like: a buzz you cannot make gentle and fast at once.</a:t>
+            </a:r>
+          </a:p>
+          <a:p>
+            <a:pPr marL="0" indent="0" algn="l">
+              <a:lnSpc>
+                <a:spcPct val="130000"/>
+              </a:lnSpc>
+              <a:spcAft>
+                <a:spcPts val="400"/>
+              </a:spcAft>
+              <a:buNone/>
+            </a:pPr>
+            <a:r>
+              <a:rPr sz="900" b="1">
+                <a:solidFill>
+                  <a:srgbClr val="595959"/>
+                </a:solidFill>
+                <a:latin typeface="Arial"/>
+              </a:rPr>
+              <a:t>USED FOR</a:t>
+            </a:r>
+          </a:p>
+          <a:p>
+            <a:pPr marL="0" indent="0" algn="l">
+              <a:lnSpc>
+                <a:spcPct val="130000"/>
+              </a:lnSpc>
+              <a:spcAft>
+                <a:spcPts val="1400"/>
+              </a:spcAft>
+              <a:buNone/>
+            </a:pPr>
+            <a:r>
+              <a:rPr sz="1400" b="0">
+                <a:solidFill>
+                  <a:srgbClr val="000000"/>
+                </a:solidFill>
+                <a:latin typeface="Arial"/>
+              </a:rPr>
+              <a:t>Phone notifications, controller rumble, anything worn under clothing.</a:t>
+            </a:r>
+          </a:p>
+          <a:p>
+            <a:pPr marL="0" indent="0" algn="l">
+              <a:lnSpc>
+                <a:spcPct val="130000"/>
+              </a:lnSpc>
+              <a:spcAft>
+                <a:spcPts val="0"/>
+              </a:spcAft>
+              <a:buNone/>
+            </a:pPr>
+            <a:r>
+              <a:rPr sz="1200" b="0">
+                <a:solidFill>
+                  <a:srgbClr val="595959"/>
+                </a:solidFill>
+                <a:latin typeface="Consolas"/>
+              </a:rPr>
+              <a:t>1E  |  117  |  2.5-3.8V rated  |  100 mA at 5V  |  PWM</a:t>
+            </a:r>
+          </a:p>
+        </p:txBody>
+      </p:sp>
+      <p:pic>
+        <p:nvPicPr>
+          <p:cNvPr id="4" name="Picture 3" descr="erm.jpg"/>
+          <p:cNvPicPr>
+            <a:picLocks noChangeAspect="1"/>
+          </p:cNvPicPr>
+          <p:nvPr/>
+        </p:nvPicPr>
+        <p:blipFill>
+          <a:blip r:embed="rId2"/>
+          <a:stretch>
+            <a:fillRect/>
+          </a:stretch>
+        </p:blipFill>
+        <p:spPr>
+          <a:xfrm>
+            <a:off x="914400" y="1905000"/>
+            <a:ext cx="4191000" cy="3145410"/>
+          </a:xfrm>
+          <a:prstGeom prst="rect">
+            <a:avLst/>
+          </a:prstGeom>
+        </p:spPr>
+      </p:pic>
+      <p:pic>
+        <p:nvPicPr>
+          <p:cNvPr id="5" name="Picture 4" descr="wordmark_dark.png"/>
+          <p:cNvPicPr>
+            <a:picLocks noChangeAspect="1"/>
+          </p:cNvPicPr>
+          <p:nvPr/>
+        </p:nvPicPr>
+        <p:blipFill>
+          <a:blip r:embed="rId3"/>
+          <a:stretch>
+            <a:fillRect/>
+          </a:stretch>
+        </p:blipFill>
+        <p:spPr>
+          <a:xfrm>
+            <a:off x="342900" y="6184900"/>
+            <a:ext cx="2070100" cy="529560"/>
+          </a:xfrm>
+          <a:prstGeom prst="rect">
+            <a:avLst/>
+          </a:prstGeom>
+        </p:spPr>
+      </p:pic>
+      <p:pic>
+        <p:nvPicPr>
+          <p:cNvPr id="6" name="Picture 5" descr="seal_dark.png"/>
+          <p:cNvPicPr>
+            <a:picLocks noChangeAspect="1"/>
+          </p:cNvPicPr>
+          <p:nvPr/>
+        </p:nvPicPr>
+        <p:blipFill>
+          <a:blip r:embed="rId4"/>
+          <a:stretch>
+            <a:fillRect/>
+          </a:stretch>
+        </p:blipFill>
+        <p:spPr>
+          <a:xfrm>
+            <a:off x="11226800" y="5969000"/>
+            <a:ext cx="713915" cy="711200"/>
+          </a:xfrm>
+          <a:prstGeom prst="rect">
+            <a:avLst/>
+          </a:prstGeom>
+        </p:spPr>
+      </p:pic>
+    </p:spTree>
+  </p:cSld>
+  <p:clrMapOvr>
+    <a:masterClrMapping/>
+  </p:clrMapOvr>
+</p:sld>
+</file>
+
+<file path=ppt/slides/slide11.xml><?xml version="1.0" encoding="utf-8"?>
+<p:sld xmlns:a="http://schemas.openxmlformats.org/drawingml/2006/main" xmlns:p="http://schemas.openxmlformats.org/presentationml/2006/main" xmlns:r="http://schemas.openxmlformats.org/officeDocument/2006/relationships">
+  <p:cSld>
+    <p:spTree>
+      <p:nvGrpSpPr>
+        <p:cNvPr id="1" name=""/>
+        <p:cNvGrpSpPr/>
+        <p:nvPr/>
+      </p:nvGrpSpPr>
+      <p:grpSpPr/>
+      <p:sp>
+        <p:nvSpPr>
+          <p:cNvPr id="2" name="Title 1"/>
+          <p:cNvSpPr>
+            <a:spLocks noGrp="1"/>
+          </p:cNvSpPr>
+          <p:nvPr>
+            <p:ph type="title"/>
+          </p:nvPr>
+        </p:nvSpPr>
+        <p:spPr/>
+        <p:txBody>
+          <a:bodyPr/>
+          <a:lstStyle/>
+          <a:p>
+            <a:pPr marL="0" indent="0" algn="l">
+              <a:buNone/>
+            </a:pPr>
+            <a:r>
+              <a:rPr sz="3200" b="1">
+                <a:solidFill>
+                  <a:srgbClr val="000000"/>
+                </a:solidFill>
+                <a:latin typeface="Arial"/>
+              </a:rPr>
               <a:t>PIEZO ELEMENT</a:t>
             </a:r>
           </a:p>
@@ -6802,7 +7146,7 @@
 </p:sld>
 </file>
 
-<file path=ppt/slides/slide11.xml><?xml version="1.0" encoding="utf-8"?>
+<file path=ppt/slides/slide12.xml><?xml version="1.0" encoding="utf-8"?>
 <p:sld xmlns:a="http://schemas.openxmlformats.org/drawingml/2006/main" xmlns:p="http://schemas.openxmlformats.org/presentationml/2006/main" xmlns:r="http://schemas.openxmlformats.org/officeDocument/2006/relationships">
   <p:cSld>
     <p:spTree>
@@ -7043,7 +7387,7 @@
 </p:sld>
 </file>
 
-<file path=ppt/slides/slide12.xml><?xml version="1.0" encoding="utf-8"?>
+<file path=ppt/slides/slide13.xml><?xml version="1.0" encoding="utf-8"?>
 <p:sld xmlns:a="http://schemas.openxmlformats.org/drawingml/2006/main" xmlns:p="http://schemas.openxmlformats.org/presentationml/2006/main" xmlns:r="http://schemas.openxmlformats.org/officeDocument/2006/relationships">
   <p:cSld>
     <p:spTree>
@@ -7330,7 +7674,7 @@
 </p:sld>
 </file>
 
-<file path=ppt/slides/slide13.xml><?xml version="1.0" encoding="utf-8"?>
+<file path=ppt/slides/slide14.xml><?xml version="1.0" encoding="utf-8"?>
 <p:sld xmlns:a="http://schemas.openxmlformats.org/drawingml/2006/main" xmlns:p="http://schemas.openxmlformats.org/presentationml/2006/main" xmlns:r="http://schemas.openxmlformats.org/officeDocument/2006/relationships">
   <p:cSld>
     <p:spTree>
@@ -7571,7 +7915,7 @@
 </p:sld>
 </file>
 
-<file path=ppt/slides/slide14.xml><?xml version="1.0" encoding="utf-8"?>
+<file path=ppt/slides/slide15.xml><?xml version="1.0" encoding="utf-8"?>
 <p:sld xmlns:a="http://schemas.openxmlformats.org/drawingml/2006/main" xmlns:p="http://schemas.openxmlformats.org/presentationml/2006/main" xmlns:r="http://schemas.openxmlformats.org/officeDocument/2006/relationships">
   <p:cSld>
     <p:spTree>
@@ -7812,7 +8156,7 @@
 </p:sld>
 </file>
 
-<file path=ppt/slides/slide15.xml><?xml version="1.0" encoding="utf-8"?>
+<file path=ppt/slides/slide16.xml><?xml version="1.0" encoding="utf-8"?>
 <p:sld xmlns:a="http://schemas.openxmlformats.org/drawingml/2006/main" xmlns:p="http://schemas.openxmlformats.org/presentationml/2006/main" xmlns:r="http://schemas.openxmlformats.org/officeDocument/2006/relationships">
   <p:cSld>
     <p:spTree>
@@ -8053,7 +8397,7 @@
 </p:sld>
 </file>
 
-<file path=ppt/slides/slide16.xml><?xml version="1.0" encoding="utf-8"?>
+<file path=ppt/slides/slide17.xml><?xml version="1.0" encoding="utf-8"?>
 <p:sld xmlns:a="http://schemas.openxmlformats.org/drawingml/2006/main" xmlns:p="http://schemas.openxmlformats.org/presentationml/2006/main" xmlns:r="http://schemas.openxmlformats.org/officeDocument/2006/relationships">
   <p:cSld>
     <p:spTree>
@@ -8294,7 +8638,7 @@
 </p:sld>
 </file>
 
-<file path=ppt/slides/slide17.xml><?xml version="1.0" encoding="utf-8"?>
+<file path=ppt/slides/slide18.xml><?xml version="1.0" encoding="utf-8"?>
 <p:sld xmlns:a="http://schemas.openxmlformats.org/drawingml/2006/main" xmlns:p="http://schemas.openxmlformats.org/presentationml/2006/main" xmlns:r="http://schemas.openxmlformats.org/officeDocument/2006/relationships">
   <p:cSld>
     <p:spTree>
@@ -8535,238 +8879,6 @@
 </p:sld>
 </file>
 
-<file path=ppt/slides/slide18.xml><?xml version="1.0" encoding="utf-8"?>
-<p:sld xmlns:a="http://schemas.openxmlformats.org/drawingml/2006/main" xmlns:p="http://schemas.openxmlformats.org/presentationml/2006/main" xmlns:r="http://schemas.openxmlformats.org/officeDocument/2006/relationships">
-  <p:cSld>
-    <p:spTree>
-      <p:nvGrpSpPr>
-        <p:cNvPr id="1" name=""/>
-        <p:cNvGrpSpPr/>
-        <p:nvPr/>
-      </p:nvGrpSpPr>
-      <p:grpSpPr/>
-      <p:sp>
-        <p:nvSpPr>
-          <p:cNvPr id="2" name="Title 1"/>
-          <p:cNvSpPr>
-            <a:spLocks noGrp="1"/>
-          </p:cNvSpPr>
-          <p:nvPr>
-            <p:ph type="title"/>
-          </p:nvPr>
-        </p:nvSpPr>
-        <p:spPr/>
-        <p:txBody>
-          <a:bodyPr/>
-          <a:lstStyle/>
-          <a:p>
-            <a:pPr marL="0" indent="0" algn="l">
-              <a:buNone/>
-            </a:pPr>
-            <a:r>
-              <a:rPr sz="3200" b="1">
-                <a:solidFill>
-                  <a:srgbClr val="000000"/>
-                </a:solidFill>
-                <a:latin typeface="Arial"/>
-              </a:rPr>
-              <a:t>FREESTYLE, WITHIN THREE LIMITS</a:t>
-            </a:r>
-          </a:p>
-        </p:txBody>
-      </p:sp>
-      <p:sp>
-        <p:nvSpPr>
-          <p:cNvPr id="3" name="Text Placeholder 2"/>
-          <p:cNvSpPr>
-            <a:spLocks noGrp="1"/>
-          </p:cNvSpPr>
-          <p:nvPr>
-            <p:ph type="body" idx="1"/>
-          </p:nvPr>
-        </p:nvSpPr>
-        <p:spPr/>
-        <p:txBody>
-          <a:bodyPr/>
-          <a:lstStyle/>
-          <a:p>
-            <a:pPr marL="0" indent="0" algn="l">
-              <a:lnSpc>
-                <a:spcPct val="128000"/>
-              </a:lnSpc>
-              <a:spcAft>
-                <a:spcPts val="1200"/>
-              </a:spcAft>
-              <a:buNone/>
-            </a:pPr>
-            <a:r>
-              <a:rPr sz="1700" b="0">
-                <a:solidFill>
-                  <a:srgbClr val="595959"/>
-                </a:solidFill>
-                <a:latin typeface="Arial"/>
-              </a:rPr>
-              <a:t>You do not have to do the tasks in order, or finish them. Playing properly with two beats rushing all five.</a:t>
-            </a:r>
-          </a:p>
-          <a:p>
-            <a:pPr marL="0" indent="0" algn="l">
-              <a:lnSpc>
-                <a:spcPct val="128000"/>
-              </a:lnSpc>
-              <a:spcAft>
-                <a:spcPts val="400"/>
-              </a:spcAft>
-              <a:buNone/>
-            </a:pPr>
-            <a:r>
-              <a:rPr sz="1700" b="0">
-                <a:solidFill>
-                  <a:srgbClr val="000000"/>
-                </a:solidFill>
-                <a:latin typeface="Arial"/>
-              </a:rPr>
-              <a:t>If you want to drive something not in front of you, go get it.</a:t>
-            </a:r>
-          </a:p>
-          <a:p>
-            <a:pPr marL="0" indent="0" algn="l">
-              <a:lnSpc>
-                <a:spcPct val="128000"/>
-              </a:lnSpc>
-              <a:spcAft>
-                <a:spcPts val="400"/>
-              </a:spcAft>
-              <a:buNone/>
-            </a:pPr>
-            <a:r>
-              <a:rPr sz="1700" b="1">
-                <a:solidFill>
-                  <a:srgbClr val="000000"/>
-                </a:solidFill>
-                <a:latin typeface="Arial"/>
-              </a:rPr>
-              <a:t>The three things that are not negotiable</a:t>
-            </a:r>
-          </a:p>
-          <a:p>
-            <a:pPr marL="0" indent="0" algn="l">
-              <a:lnSpc>
-                <a:spcPct val="128000"/>
-              </a:lnSpc>
-              <a:spcAft>
-                <a:spcPts val="400"/>
-              </a:spcAft>
-              <a:buNone/>
-            </a:pPr>
-            <a:r>
-              <a:rPr sz="1500" b="0">
-                <a:solidFill>
-                  <a:srgbClr val="000000"/>
-                </a:solidFill>
-                <a:latin typeface="Arial"/>
-              </a:rPr>
-              <a:t>• Solenoid and Peltier get their own supply, never USB</a:t>
-            </a:r>
-          </a:p>
-          <a:p>
-            <a:pPr marL="0" indent="0" algn="l">
-              <a:lnSpc>
-                <a:spcPct val="128000"/>
-              </a:lnSpc>
-              <a:spcAft>
-                <a:spcPts val="400"/>
-              </a:spcAft>
-              <a:buNone/>
-            </a:pPr>
-            <a:r>
-              <a:rPr sz="1500" b="0">
-                <a:solidFill>
-                  <a:srgbClr val="000000"/>
-                </a:solidFill>
-                <a:latin typeface="Arial"/>
-              </a:rPr>
-              <a:t>• The Peltier heatsink goes on before it is switched on</a:t>
-            </a:r>
-          </a:p>
-          <a:p>
-            <a:pPr marL="0" indent="0" algn="l">
-              <a:lnSpc>
-                <a:spcPct val="128000"/>
-              </a:lnSpc>
-              <a:spcAft>
-                <a:spcPts val="400"/>
-              </a:spcAft>
-              <a:buNone/>
-            </a:pPr>
-            <a:r>
-              <a:rPr sz="1500" b="0">
-                <a:solidFill>
-                  <a:srgbClr val="000000"/>
-                </a:solidFill>
-                <a:latin typeface="Arial"/>
-              </a:rPr>
-              <a:t>• No motor straight from a pin. 40 mA limit, it wants 75</a:t>
-            </a:r>
-          </a:p>
-        </p:txBody>
-      </p:sp>
-      <p:pic>
-        <p:nvPicPr>
-          <p:cNvPr id="4" name="Picture 3" descr="wordmark_dark.png"/>
-          <p:cNvPicPr>
-            <a:picLocks noChangeAspect="1"/>
-          </p:cNvPicPr>
-          <p:nvPr/>
-        </p:nvPicPr>
-        <p:blipFill>
-          <a:blip r:embed="rId2"/>
-          <a:stretch>
-            <a:fillRect/>
-          </a:stretch>
-        </p:blipFill>
-        <p:spPr>
-          <a:xfrm>
-            <a:off x="342900" y="6184900"/>
-            <a:ext cx="2070100" cy="529560"/>
-          </a:xfrm>
-          <a:prstGeom prst="rect">
-            <a:avLst/>
-          </a:prstGeom>
-        </p:spPr>
-      </p:pic>
-      <p:pic>
-        <p:nvPicPr>
-          <p:cNvPr id="5" name="Picture 4" descr="seal_dark.png"/>
-          <p:cNvPicPr>
-            <a:picLocks noChangeAspect="1"/>
-          </p:cNvPicPr>
-          <p:nvPr/>
-        </p:nvPicPr>
-        <p:blipFill>
-          <a:blip r:embed="rId3"/>
-          <a:stretch>
-            <a:fillRect/>
-          </a:stretch>
-        </p:blipFill>
-        <p:spPr>
-          <a:xfrm>
-            <a:off x="11226800" y="5969000"/>
-            <a:ext cx="713915" cy="711200"/>
-          </a:xfrm>
-          <a:prstGeom prst="rect">
-            <a:avLst/>
-          </a:prstGeom>
-        </p:spPr>
-      </p:pic>
-    </p:spTree>
-  </p:cSld>
-  <p:clrMapOvr>
-    <a:masterClrMapping/>
-  </p:clrMapOvr>
-</p:sld>
-</file>
-
 <file path=ppt/slides/slide19.xml><?xml version="1.0" encoding="utf-8"?>
 <p:sld xmlns:a="http://schemas.openxmlformats.org/drawingml/2006/main" xmlns:p="http://schemas.openxmlformats.org/presentationml/2006/main" xmlns:r="http://schemas.openxmlformats.org/officeDocument/2006/relationships">
   <p:cSld>
@@ -8802,7 +8914,7 @@
                 </a:solidFill>
                 <a:latin typeface="Arial"/>
               </a:rPr>
-              <a:t>THE ONE THAT SURPRISES PEOPLE</a:t>
+              <a:t>FREESTYLE, WITHIN THREE LIMITS</a:t>
             </a:r>
           </a:p>
         </p:txBody>
@@ -8838,7 +8950,7 @@
                 </a:solidFill>
                 <a:latin typeface="Arial"/>
               </a:rPr>
-              <a:t>Touch input for the price of a wire. The thinking is where it costs you.</a:t>
+              <a:t>You do not have to do the tasks in order, or finish them. Playing properly with two beats rushing all five.</a:t>
             </a:r>
           </a:p>
           <a:p>
@@ -8852,13 +8964,33 @@
               <a:buNone/>
             </a:pPr>
             <a:r>
+              <a:rPr sz="1700" b="0">
+                <a:solidFill>
+                  <a:srgbClr val="000000"/>
+                </a:solidFill>
+                <a:latin typeface="Arial"/>
+              </a:rPr>
+              <a:t>If you want to drive something not in front of you, go get it.</a:t>
+            </a:r>
+          </a:p>
+          <a:p>
+            <a:pPr marL="0" indent="0" algn="l">
+              <a:lnSpc>
+                <a:spcPct val="128000"/>
+              </a:lnSpc>
+              <a:spcAft>
+                <a:spcPts val="400"/>
+              </a:spcAft>
+              <a:buNone/>
+            </a:pPr>
+            <a:r>
               <a:rPr sz="1700" b="1">
                 <a:solidFill>
                   <a:srgbClr val="000000"/>
                 </a:solidFill>
                 <a:latin typeface="Arial"/>
               </a:rPr>
-              <a:t>reading &gt; baselineAverage() * 1.01</a:t>
+              <a:t>The three things that are not negotiable</a:t>
             </a:r>
           </a:p>
           <a:p>
@@ -8872,13 +9004,13 @@
               <a:buNone/>
             </a:pPr>
             <a:r>
-              <a:rPr sz="1700" b="1">
-                <a:solidFill>
-                  <a:srgbClr val="000000"/>
-                </a:solidFill>
-                <a:latin typeface="Arial"/>
-              </a:rPr>
-              <a:t>Threshold is relative, never absolute</a:t>
+              <a:rPr sz="1500" b="0">
+                <a:solidFill>
+                  <a:srgbClr val="000000"/>
+                </a:solidFill>
+                <a:latin typeface="Arial"/>
+              </a:rPr>
+              <a:t>• Solenoid and Peltier get their own supply, never USB</a:t>
             </a:r>
           </a:p>
           <a:p>
@@ -8898,7 +9030,7 @@
                 </a:solidFill>
                 <a:latin typeface="Arial"/>
               </a:rPr>
-              <a:t>• Readings drift with humidity and mains hum</a:t>
+              <a:t>• The Peltier heatsink goes on before it is switched on</a:t>
             </a:r>
           </a:p>
           <a:p>
@@ -8918,47 +9050,7 @@
                 </a:solidFill>
                 <a:latin typeface="Arial"/>
               </a:rPr>
-              <a:t>• Fixed threshold works at 9am, fails at 1pm</a:t>
-            </a:r>
-          </a:p>
-          <a:p>
-            <a:pPr marL="0" indent="0" algn="l">
-              <a:lnSpc>
-                <a:spcPct val="128000"/>
-              </a:lnSpc>
-              <a:spcAft>
-                <a:spcPts val="400"/>
-              </a:spcAft>
-              <a:buNone/>
-            </a:pPr>
-            <a:r>
-              <a:rPr sz="1700" b="1">
-                <a:solidFill>
-                  <a:srgbClr val="000000"/>
-                </a:solidFill>
-                <a:latin typeface="Arial"/>
-              </a:rPr>
-              <a:t>Baseline only learns while untouched</a:t>
-            </a:r>
-          </a:p>
-          <a:p>
-            <a:pPr marL="0" indent="0" algn="l">
-              <a:lnSpc>
-                <a:spcPct val="128000"/>
-              </a:lnSpc>
-              <a:spcAft>
-                <a:spcPts val="400"/>
-              </a:spcAft>
-              <a:buNone/>
-            </a:pPr>
-            <a:r>
-              <a:rPr sz="1500" b="0">
-                <a:solidFill>
-                  <a:srgbClr val="000000"/>
-                </a:solidFill>
-                <a:latin typeface="Arial"/>
-              </a:rPr>
-              <a:t>• Or a long press teaches it that a finger is normal</a:t>
+              <a:t>• No motor straight from a pin. 40 mA limit, it wants 75</a:t>
             </a:r>
           </a:p>
         </p:txBody>
@@ -9280,6 +9372,258 @@
               <a:buNone/>
             </a:pPr>
             <a:r>
+              <a:rPr sz="3200" b="1">
+                <a:solidFill>
+                  <a:srgbClr val="000000"/>
+                </a:solidFill>
+                <a:latin typeface="Arial"/>
+              </a:rPr>
+              <a:t>THE ONE THAT SURPRISES PEOPLE</a:t>
+            </a:r>
+          </a:p>
+        </p:txBody>
+      </p:sp>
+      <p:sp>
+        <p:nvSpPr>
+          <p:cNvPr id="3" name="Text Placeholder 2"/>
+          <p:cNvSpPr>
+            <a:spLocks noGrp="1"/>
+          </p:cNvSpPr>
+          <p:nvPr>
+            <p:ph type="body" idx="1"/>
+          </p:nvPr>
+        </p:nvSpPr>
+        <p:spPr/>
+        <p:txBody>
+          <a:bodyPr/>
+          <a:lstStyle/>
+          <a:p>
+            <a:pPr marL="0" indent="0" algn="l">
+              <a:lnSpc>
+                <a:spcPct val="128000"/>
+              </a:lnSpc>
+              <a:spcAft>
+                <a:spcPts val="1200"/>
+              </a:spcAft>
+              <a:buNone/>
+            </a:pPr>
+            <a:r>
+              <a:rPr sz="1700" b="0">
+                <a:solidFill>
+                  <a:srgbClr val="595959"/>
+                </a:solidFill>
+                <a:latin typeface="Arial"/>
+              </a:rPr>
+              <a:t>Touch input for the price of a wire. The thinking is where it costs you.</a:t>
+            </a:r>
+          </a:p>
+          <a:p>
+            <a:pPr marL="0" indent="0" algn="l">
+              <a:lnSpc>
+                <a:spcPct val="128000"/>
+              </a:lnSpc>
+              <a:spcAft>
+                <a:spcPts val="400"/>
+              </a:spcAft>
+              <a:buNone/>
+            </a:pPr>
+            <a:r>
+              <a:rPr sz="1700" b="1">
+                <a:solidFill>
+                  <a:srgbClr val="000000"/>
+                </a:solidFill>
+                <a:latin typeface="Arial"/>
+              </a:rPr>
+              <a:t>reading &gt; baselineAverage() * 1.01</a:t>
+            </a:r>
+          </a:p>
+          <a:p>
+            <a:pPr marL="0" indent="0" algn="l">
+              <a:lnSpc>
+                <a:spcPct val="128000"/>
+              </a:lnSpc>
+              <a:spcAft>
+                <a:spcPts val="400"/>
+              </a:spcAft>
+              <a:buNone/>
+            </a:pPr>
+            <a:r>
+              <a:rPr sz="1700" b="1">
+                <a:solidFill>
+                  <a:srgbClr val="000000"/>
+                </a:solidFill>
+                <a:latin typeface="Arial"/>
+              </a:rPr>
+              <a:t>Threshold is relative, never absolute</a:t>
+            </a:r>
+          </a:p>
+          <a:p>
+            <a:pPr marL="0" indent="0" algn="l">
+              <a:lnSpc>
+                <a:spcPct val="128000"/>
+              </a:lnSpc>
+              <a:spcAft>
+                <a:spcPts val="400"/>
+              </a:spcAft>
+              <a:buNone/>
+            </a:pPr>
+            <a:r>
+              <a:rPr sz="1500" b="0">
+                <a:solidFill>
+                  <a:srgbClr val="000000"/>
+                </a:solidFill>
+                <a:latin typeface="Arial"/>
+              </a:rPr>
+              <a:t>• Readings drift with humidity and mains hum</a:t>
+            </a:r>
+          </a:p>
+          <a:p>
+            <a:pPr marL="0" indent="0" algn="l">
+              <a:lnSpc>
+                <a:spcPct val="128000"/>
+              </a:lnSpc>
+              <a:spcAft>
+                <a:spcPts val="400"/>
+              </a:spcAft>
+              <a:buNone/>
+            </a:pPr>
+            <a:r>
+              <a:rPr sz="1500" b="0">
+                <a:solidFill>
+                  <a:srgbClr val="000000"/>
+                </a:solidFill>
+                <a:latin typeface="Arial"/>
+              </a:rPr>
+              <a:t>• Fixed threshold works at 9am, fails at 1pm</a:t>
+            </a:r>
+          </a:p>
+          <a:p>
+            <a:pPr marL="0" indent="0" algn="l">
+              <a:lnSpc>
+                <a:spcPct val="128000"/>
+              </a:lnSpc>
+              <a:spcAft>
+                <a:spcPts val="400"/>
+              </a:spcAft>
+              <a:buNone/>
+            </a:pPr>
+            <a:r>
+              <a:rPr sz="1700" b="1">
+                <a:solidFill>
+                  <a:srgbClr val="000000"/>
+                </a:solidFill>
+                <a:latin typeface="Arial"/>
+              </a:rPr>
+              <a:t>Baseline only learns while untouched</a:t>
+            </a:r>
+          </a:p>
+          <a:p>
+            <a:pPr marL="0" indent="0" algn="l">
+              <a:lnSpc>
+                <a:spcPct val="128000"/>
+              </a:lnSpc>
+              <a:spcAft>
+                <a:spcPts val="400"/>
+              </a:spcAft>
+              <a:buNone/>
+            </a:pPr>
+            <a:r>
+              <a:rPr sz="1500" b="0">
+                <a:solidFill>
+                  <a:srgbClr val="000000"/>
+                </a:solidFill>
+                <a:latin typeface="Arial"/>
+              </a:rPr>
+              <a:t>• Or a long press teaches it that a finger is normal</a:t>
+            </a:r>
+          </a:p>
+        </p:txBody>
+      </p:sp>
+      <p:pic>
+        <p:nvPicPr>
+          <p:cNvPr id="4" name="Picture 3" descr="wordmark_dark.png"/>
+          <p:cNvPicPr>
+            <a:picLocks noChangeAspect="1"/>
+          </p:cNvPicPr>
+          <p:nvPr/>
+        </p:nvPicPr>
+        <p:blipFill>
+          <a:blip r:embed="rId2"/>
+          <a:stretch>
+            <a:fillRect/>
+          </a:stretch>
+        </p:blipFill>
+        <p:spPr>
+          <a:xfrm>
+            <a:off x="342900" y="6184900"/>
+            <a:ext cx="2070100" cy="529560"/>
+          </a:xfrm>
+          <a:prstGeom prst="rect">
+            <a:avLst/>
+          </a:prstGeom>
+        </p:spPr>
+      </p:pic>
+      <p:pic>
+        <p:nvPicPr>
+          <p:cNvPr id="5" name="Picture 4" descr="seal_dark.png"/>
+          <p:cNvPicPr>
+            <a:picLocks noChangeAspect="1"/>
+          </p:cNvPicPr>
+          <p:nvPr/>
+        </p:nvPicPr>
+        <p:blipFill>
+          <a:blip r:embed="rId3"/>
+          <a:stretch>
+            <a:fillRect/>
+          </a:stretch>
+        </p:blipFill>
+        <p:spPr>
+          <a:xfrm>
+            <a:off x="11226800" y="5969000"/>
+            <a:ext cx="713915" cy="711200"/>
+          </a:xfrm>
+          <a:prstGeom prst="rect">
+            <a:avLst/>
+          </a:prstGeom>
+        </p:spPr>
+      </p:pic>
+    </p:spTree>
+  </p:cSld>
+  <p:clrMapOvr>
+    <a:masterClrMapping/>
+  </p:clrMapOvr>
+</p:sld>
+</file>
+
+<file path=ppt/slides/slide21.xml><?xml version="1.0" encoding="utf-8"?>
+<p:sld xmlns:a="http://schemas.openxmlformats.org/drawingml/2006/main" xmlns:p="http://schemas.openxmlformats.org/presentationml/2006/main" xmlns:r="http://schemas.openxmlformats.org/officeDocument/2006/relationships">
+  <p:cSld>
+    <p:spTree>
+      <p:nvGrpSpPr>
+        <p:cNvPr id="1" name=""/>
+        <p:cNvGrpSpPr/>
+        <p:nvPr/>
+      </p:nvGrpSpPr>
+      <p:grpSpPr/>
+      <p:sp>
+        <p:nvSpPr>
+          <p:cNvPr id="2" name="Title 1"/>
+          <p:cNvSpPr>
+            <a:spLocks noGrp="1"/>
+          </p:cNvSpPr>
+          <p:nvPr>
+            <p:ph type="title"/>
+          </p:nvPr>
+        </p:nvSpPr>
+        <p:spPr/>
+        <p:txBody>
+          <a:bodyPr/>
+          <a:lstStyle/>
+          <a:p>
+            <a:pPr marL="0" indent="0" algn="l">
+              <a:buNone/>
+            </a:pPr>
+            <a:r>
               <a:rPr sz="4400" b="1">
                 <a:solidFill>
                   <a:srgbClr val="000000"/>
@@ -9347,7 +9691,7 @@
 </p:sld>
 </file>
 
-<file path=ppt/slides/slide21.xml><?xml version="1.0" encoding="utf-8"?>
+<file path=ppt/slides/slide22.xml><?xml version="1.0" encoding="utf-8"?>
 <p:sld xmlns:a="http://schemas.openxmlformats.org/drawingml/2006/main" xmlns:p="http://schemas.openxmlformats.org/presentationml/2006/main" xmlns:r="http://schemas.openxmlformats.org/officeDocument/2006/relationships">
   <p:cSld>
     <p:spTree>
@@ -9731,258 +10075,6 @@
 </p:sld>
 </file>
 
-<file path=ppt/slides/slide22.xml><?xml version="1.0" encoding="utf-8"?>
-<p:sld xmlns:a="http://schemas.openxmlformats.org/drawingml/2006/main" xmlns:p="http://schemas.openxmlformats.org/presentationml/2006/main" xmlns:r="http://schemas.openxmlformats.org/officeDocument/2006/relationships">
-  <p:cSld>
-    <p:spTree>
-      <p:nvGrpSpPr>
-        <p:cNvPr id="1" name=""/>
-        <p:cNvGrpSpPr/>
-        <p:nvPr/>
-      </p:nvGrpSpPr>
-      <p:grpSpPr/>
-      <p:sp>
-        <p:nvSpPr>
-          <p:cNvPr id="2" name="Title 1"/>
-          <p:cNvSpPr>
-            <a:spLocks noGrp="1"/>
-          </p:cNvSpPr>
-          <p:nvPr>
-            <p:ph type="title"/>
-          </p:nvPr>
-        </p:nvSpPr>
-        <p:spPr/>
-        <p:txBody>
-          <a:bodyPr/>
-          <a:lstStyle/>
-          <a:p>
-            <a:pPr marL="0" indent="0" algn="l">
-              <a:buNone/>
-            </a:pPr>
-            <a:r>
-              <a:rPr sz="3200" b="1">
-                <a:solidFill>
-                  <a:srgbClr val="000000"/>
-                </a:solidFill>
-                <a:latin typeface="Arial"/>
-              </a:rPr>
-              <a:t>YOU ALREADY WRITE CODE. WHY COME?</a:t>
-            </a:r>
-          </a:p>
-        </p:txBody>
-      </p:sp>
-      <p:sp>
-        <p:nvSpPr>
-          <p:cNvPr id="3" name="Text Placeholder 2"/>
-          <p:cNvSpPr>
-            <a:spLocks noGrp="1"/>
-          </p:cNvSpPr>
-          <p:nvPr>
-            <p:ph type="body" idx="1"/>
-          </p:nvPr>
-        </p:nvSpPr>
-        <p:spPr/>
-        <p:txBody>
-          <a:bodyPr/>
-          <a:lstStyle/>
-          <a:p>
-            <a:pPr marL="0" indent="0" algn="l">
-              <a:lnSpc>
-                <a:spcPct val="128000"/>
-              </a:lnSpc>
-              <a:spcAft>
-                <a:spcPts val="1200"/>
-              </a:spcAft>
-              <a:buNone/>
-            </a:pPr>
-            <a:r>
-              <a:rPr sz="1700" b="0">
-                <a:solidFill>
-                  <a:srgbClr val="595959"/>
-                </a:solidFill>
-                <a:latin typeface="Arial"/>
-              </a:rPr>
-              <a:t>Fair question. Three honest answers.</a:t>
-            </a:r>
-          </a:p>
-          <a:p>
-            <a:pPr marL="0" indent="0" algn="l">
-              <a:lnSpc>
-                <a:spcPct val="128000"/>
-              </a:lnSpc>
-              <a:spcAft>
-                <a:spcPts val="400"/>
-              </a:spcAft>
-              <a:buNone/>
-            </a:pPr>
-            <a:r>
-              <a:rPr sz="1700" b="1">
-                <a:solidFill>
-                  <a:srgbClr val="000000"/>
-                </a:solidFill>
-                <a:latin typeface="Arial"/>
-              </a:rPr>
-              <a:t>You cannot Google what something feels like</a:t>
-            </a:r>
-          </a:p>
-          <a:p>
-            <a:pPr marL="0" indent="0" algn="l">
-              <a:lnSpc>
-                <a:spcPct val="128000"/>
-              </a:lnSpc>
-              <a:spcAft>
-                <a:spcPts val="400"/>
-              </a:spcAft>
-              <a:buNone/>
-            </a:pPr>
-            <a:r>
-              <a:rPr sz="1500" b="0">
-                <a:solidFill>
-                  <a:srgbClr val="000000"/>
-                </a:solidFill>
-                <a:latin typeface="Arial"/>
-              </a:rPr>
-              <a:t>• No datasheet says a knock reads as a person, a buzz as a machine</a:t>
-            </a:r>
-          </a:p>
-          <a:p>
-            <a:pPr marL="0" indent="0" algn="l">
-              <a:lnSpc>
-                <a:spcPct val="128000"/>
-              </a:lnSpc>
-              <a:spcAft>
-                <a:spcPts val="400"/>
-              </a:spcAft>
-              <a:buNone/>
-            </a:pPr>
-            <a:r>
-              <a:rPr sz="1700" b="1">
-                <a:solidFill>
-                  <a:srgbClr val="000000"/>
-                </a:solidFill>
-                <a:latin typeface="Arial"/>
-              </a:rPr>
-              <a:t>The parts are free and already here</a:t>
-            </a:r>
-          </a:p>
-          <a:p>
-            <a:pPr marL="0" indent="0" algn="l">
-              <a:lnSpc>
-                <a:spcPct val="128000"/>
-              </a:lnSpc>
-              <a:spcAft>
-                <a:spcPts val="400"/>
-              </a:spcAft>
-              <a:buNone/>
-            </a:pPr>
-            <a:r>
-              <a:rPr sz="1500" b="0">
-                <a:solidFill>
-                  <a:srgbClr val="000000"/>
-                </a:solidFill>
-                <a:latin typeface="Arial"/>
-              </a:rPr>
-              <a:t>• Borrowing beats ordering. Nothing to buy, nothing to wait for</a:t>
-            </a:r>
-          </a:p>
-          <a:p>
-            <a:pPr marL="0" indent="0" algn="l">
-              <a:lnSpc>
-                <a:spcPct val="128000"/>
-              </a:lnSpc>
-              <a:spcAft>
-                <a:spcPts val="400"/>
-              </a:spcAft>
-              <a:buNone/>
-            </a:pPr>
-            <a:r>
-              <a:rPr sz="1700" b="1">
-                <a:solidFill>
-                  <a:srgbClr val="000000"/>
-                </a:solidFill>
-                <a:latin typeface="Arial"/>
-              </a:rPr>
-              <a:t>Your devices hide sensors you may not be able to reach</a:t>
-            </a:r>
-          </a:p>
-          <a:p>
-            <a:pPr marL="0" indent="0" algn="l">
-              <a:lnSpc>
-                <a:spcPct val="128000"/>
-              </a:lnSpc>
-              <a:spcAft>
-                <a:spcPts val="400"/>
-              </a:spcAft>
-              <a:buNone/>
-            </a:pPr>
-            <a:r>
-              <a:rPr sz="1500" b="0">
-                <a:solidFill>
-                  <a:srgbClr val="000000"/>
-                </a:solidFill>
-                <a:latin typeface="Arial"/>
-              </a:rPr>
-              <a:t>• Find out today which open up, and which are locked</a:t>
-            </a:r>
-          </a:p>
-        </p:txBody>
-      </p:sp>
-      <p:pic>
-        <p:nvPicPr>
-          <p:cNvPr id="4" name="Picture 3" descr="wordmark_dark.png"/>
-          <p:cNvPicPr>
-            <a:picLocks noChangeAspect="1"/>
-          </p:cNvPicPr>
-          <p:nvPr/>
-        </p:nvPicPr>
-        <p:blipFill>
-          <a:blip r:embed="rId2"/>
-          <a:stretch>
-            <a:fillRect/>
-          </a:stretch>
-        </p:blipFill>
-        <p:spPr>
-          <a:xfrm>
-            <a:off x="342900" y="6184900"/>
-            <a:ext cx="2070100" cy="529560"/>
-          </a:xfrm>
-          <a:prstGeom prst="rect">
-            <a:avLst/>
-          </a:prstGeom>
-        </p:spPr>
-      </p:pic>
-      <p:pic>
-        <p:nvPicPr>
-          <p:cNvPr id="5" name="Picture 4" descr="seal_dark.png"/>
-          <p:cNvPicPr>
-            <a:picLocks noChangeAspect="1"/>
-          </p:cNvPicPr>
-          <p:nvPr/>
-        </p:nvPicPr>
-        <p:blipFill>
-          <a:blip r:embed="rId3"/>
-          <a:stretch>
-            <a:fillRect/>
-          </a:stretch>
-        </p:blipFill>
-        <p:spPr>
-          <a:xfrm>
-            <a:off x="11226800" y="5969000"/>
-            <a:ext cx="713915" cy="711200"/>
-          </a:xfrm>
-          <a:prstGeom prst="rect">
-            <a:avLst/>
-          </a:prstGeom>
-        </p:spPr>
-      </p:pic>
-    </p:spTree>
-  </p:cSld>
-  <p:clrMapOvr>
-    <a:masterClrMapping/>
-  </p:clrMapOvr>
-</p:sld>
-</file>
-
 <file path=ppt/slides/slide23.xml><?xml version="1.0" encoding="utf-8"?>
 <p:sld xmlns:a="http://schemas.openxmlformats.org/drawingml/2006/main" xmlns:p="http://schemas.openxmlformats.org/presentationml/2006/main" xmlns:r="http://schemas.openxmlformats.org/officeDocument/2006/relationships">
   <p:cSld>
@@ -10018,7 +10110,7 @@
                 </a:solidFill>
                 <a:latin typeface="Arial"/>
               </a:rPr>
-              <a:t>REVERSE ENGINEER WHAT YOU ALREADY OWN</a:t>
+              <a:t>YOU ALREADY WRITE CODE. WHY COME?</a:t>
             </a:r>
           </a:p>
         </p:txBody>
@@ -10054,7 +10146,7 @@
                 </a:solidFill>
                 <a:latin typeface="Arial"/>
               </a:rPr>
-              <a:t>The trackers in your pocket and on your wrist. What opens up, and what does not.</a:t>
+              <a:t>Fair question. Three honest answers.</a:t>
             </a:r>
           </a:p>
           <a:p>
@@ -10074,7 +10166,7 @@
                 </a:solidFill>
                 <a:latin typeface="Arial"/>
               </a:rPr>
-              <a:t>BLE heart rate strap: readable from a web page</a:t>
+              <a:t>You cannot Google what something feels like</a:t>
             </a:r>
           </a:p>
           <a:p>
@@ -10094,7 +10186,7 @@
                 </a:solidFill>
                 <a:latin typeface="Arial"/>
               </a:rPr>
-              <a:t>• Web Bluetooth, standard GATT. Chrome and Edge only</a:t>
+              <a:t>• No datasheet says a knock reads as a person, a buzz as a machine</a:t>
             </a:r>
           </a:p>
           <a:p>
@@ -10114,7 +10206,7 @@
                 </a:solidFill>
                 <a:latin typeface="Arial"/>
               </a:rPr>
-              <a:t>Most Garmin watches: the same, with no app</a:t>
+              <a:t>The parts are free and already here</a:t>
             </a:r>
           </a:p>
           <a:p>
@@ -10134,7 +10226,7 @@
                 </a:solidFill>
                 <a:latin typeface="Arial"/>
               </a:rPr>
-              <a:t>• Turn on Broadcast Heart Rate and it acts as a strap</a:t>
+              <a:t>• Borrowing beats ordering. Nothing to buy, nothing to wait for</a:t>
             </a:r>
           </a:p>
           <a:p>
@@ -10154,7 +10246,7 @@
                 </a:solidFill>
                 <a:latin typeface="Arial"/>
               </a:rPr>
-              <a:t>Apple Watch: nothing live, whatever you write</a:t>
+              <a:t>Your devices hide sensors you may not be able to reach</a:t>
             </a:r>
           </a:p>
           <a:p>
@@ -10174,47 +10266,7 @@
                 </a:solidFill>
                 <a:latin typeface="Arial"/>
               </a:rPr>
-              <a:t>• HealthKit needs a watchOS app in Swift</a:t>
-            </a:r>
-          </a:p>
-          <a:p>
-            <a:pPr marL="0" indent="0" algn="l">
-              <a:lnSpc>
-                <a:spcPct val="128000"/>
-              </a:lnSpc>
-              <a:spcAft>
-                <a:spcPts val="400"/>
-              </a:spcAft>
-              <a:buNone/>
-            </a:pPr>
-            <a:r>
-              <a:rPr sz="1700" b="1">
-                <a:solidFill>
-                  <a:srgbClr val="000000"/>
-                </a:solidFill>
-                <a:latin typeface="Arial"/>
-              </a:rPr>
-              <a:t>Garmin history: Connect IQ, or the API afterwards</a:t>
-            </a:r>
-          </a:p>
-          <a:p>
-            <a:pPr marL="0" indent="0" algn="l">
-              <a:lnSpc>
-                <a:spcPct val="128000"/>
-              </a:lnSpc>
-              <a:spcAft>
-                <a:spcPts val="400"/>
-              </a:spcAft>
-              <a:buNone/>
-            </a:pPr>
-            <a:r>
-              <a:rPr sz="1500" b="0">
-                <a:solidFill>
-                  <a:srgbClr val="000000"/>
-                </a:solidFill>
-                <a:latin typeface="Arial"/>
-              </a:rPr>
-              <a:t>• Good for analysis. Useless for reacting in real time</a:t>
+              <a:t>• Find out today which open up, and which are locked</a:t>
             </a:r>
           </a:p>
         </p:txBody>
@@ -10310,7 +10362,7 @@
                 </a:solidFill>
                 <a:latin typeface="Arial"/>
               </a:rPr>
-              <a:t>WHAT A PHONE WILL AND WILL NOT GIVE YOU</a:t>
+              <a:t>REVERSE ENGINEER WHAT YOU ALREADY OWN</a:t>
             </a:r>
           </a:p>
         </p:txBody>
@@ -10346,7 +10398,7 @@
                 </a:solidFill>
                 <a:latin typeface="Arial"/>
               </a:rPr>
-              <a:t>Open sensors.chomskylab.dk on your own phone right now.</a:t>
+              <a:t>The trackers in your pocket and on your wrist. What opens up, and what does not.</a:t>
             </a:r>
           </a:p>
           <a:p>
@@ -10366,7 +10418,7 @@
                 </a:solidFill>
                 <a:latin typeface="Arial"/>
               </a:rPr>
-              <a:t>Works in a web page</a:t>
+              <a:t>BLE heart rate strap: readable from a web page</a:t>
             </a:r>
           </a:p>
           <a:p>
@@ -10386,7 +10438,7 @@
                 </a:solidFill>
                 <a:latin typeface="Arial"/>
               </a:rPr>
-              <a:t>• Accelerometer and gyroscope, microphone, camera</a:t>
+              <a:t>• Web Bluetooth, standard GATT. Chrome and Edge only</a:t>
             </a:r>
           </a:p>
           <a:p>
@@ -10400,13 +10452,33 @@
               <a:buNone/>
             </a:pPr>
             <a:r>
+              <a:rPr sz="1700" b="1">
+                <a:solidFill>
+                  <a:srgbClr val="000000"/>
+                </a:solidFill>
+                <a:latin typeface="Arial"/>
+              </a:rPr>
+              <a:t>Most Garmin watches: the same, with no app</a:t>
+            </a:r>
+          </a:p>
+          <a:p>
+            <a:pPr marL="0" indent="0" algn="l">
+              <a:lnSpc>
+                <a:spcPct val="128000"/>
+              </a:lnSpc>
+              <a:spcAft>
+                <a:spcPts val="400"/>
+              </a:spcAft>
+              <a:buNone/>
+            </a:pPr>
+            <a:r>
               <a:rPr sz="1500" b="0">
                 <a:solidFill>
                   <a:srgbClr val="000000"/>
                 </a:solidFill>
                 <a:latin typeface="Arial"/>
               </a:rPr>
-              <a:t>• Pointer pressure, though a trackpad reports only 0 or 0.5</a:t>
+              <a:t>• Turn on Broadcast Heart Rate and it acts as a strap</a:t>
             </a:r>
           </a:p>
           <a:p>
@@ -10426,7 +10498,7 @@
                 </a:solidFill>
                 <a:latin typeface="Arial"/>
               </a:rPr>
-              <a:t>Does not, whatever the tutorial says</a:t>
+              <a:t>Apple Watch: nothing live, whatever you write</a:t>
             </a:r>
           </a:p>
           <a:p>
@@ -10446,7 +10518,7 @@
                 </a:solidFill>
                 <a:latin typeface="Arial"/>
               </a:rPr>
-              <a:t>• Phone vibration on iOS. WebKit has never shipped it, at any version, and Chrome on iOS is Safari underneath</a:t>
+              <a:t>• HealthKit needs a watchOS app in Swift</a:t>
             </a:r>
           </a:p>
           <a:p>
@@ -10455,10 +10527,19 @@
                 <a:spcPct val="128000"/>
               </a:lnSpc>
               <a:spcAft>
-                <a:spcPts val="0"/>
-              </a:spcAft>
-              <a:buNone/>
-            </a:pPr>
+                <a:spcPts val="400"/>
+              </a:spcAft>
+              <a:buNone/>
+            </a:pPr>
+            <a:r>
+              <a:rPr sz="1700" b="1">
+                <a:solidFill>
+                  <a:srgbClr val="000000"/>
+                </a:solidFill>
+                <a:latin typeface="Arial"/>
+              </a:rPr>
+              <a:t>Garmin history: Connect IQ, or the API afterwards</a:t>
+            </a:r>
           </a:p>
           <a:p>
             <a:pPr marL="0" indent="0" algn="l">
@@ -10471,33 +10552,13 @@
               <a:buNone/>
             </a:pPr>
             <a:r>
-              <a:rPr sz="1700" b="1">
-                <a:solidFill>
-                  <a:srgbClr val="000000"/>
-                </a:solidFill>
-                <a:latin typeface="Arial"/>
-              </a:rPr>
-              <a:t>So "the phone buzzes" works on no iPhone in this room.</a:t>
-            </a:r>
-          </a:p>
-          <a:p>
-            <a:pPr marL="0" indent="0" algn="l">
-              <a:lnSpc>
-                <a:spcPct val="128000"/>
-              </a:lnSpc>
-              <a:spcAft>
-                <a:spcPts val="400"/>
-              </a:spcAft>
-              <a:buNone/>
-            </a:pPr>
-            <a:r>
               <a:rPr sz="1500" b="0">
                 <a:solidFill>
                   <a:srgbClr val="000000"/>
                 </a:solidFill>
                 <a:latin typeface="Arial"/>
               </a:rPr>
-              <a:t>• Check the feature, not the tutorial, before it is in a plan.</a:t>
+              <a:t>• Good for analysis. Useless for reacting in real time</a:t>
             </a:r>
           </a:p>
         </p:txBody>
@@ -10593,7 +10654,7 @@
                 </a:solidFill>
                 <a:latin typeface="Arial"/>
               </a:rPr>
-              <a:t>TWO RIGS THAT ALREADY EXIST</a:t>
+              <a:t>WHAT A PHONE WILL AND WILL NOT GIVE YOU</a:t>
             </a:r>
           </a:p>
         </p:txBody>
@@ -10629,7 +10690,7 @@
                 </a:solidFill>
                 <a:latin typeface="Arial"/>
               </a:rPr>
-              <a:t>Built here, by students at roughly your stage.</a:t>
+              <a:t>Open sensors.chomskylab.dk on your own phone right now.</a:t>
             </a:r>
           </a:p>
           <a:p>
@@ -10649,7 +10710,7 @@
                 </a:solidFill>
                 <a:latin typeface="Arial"/>
               </a:rPr>
-              <a:t>Moving screen, Arduino Uno</a:t>
+              <a:t>Works in a web page</a:t>
             </a:r>
           </a:p>
           <a:p>
@@ -10669,7 +10730,7 @@
                 </a:solidFill>
                 <a:latin typeface="Arial"/>
               </a:rPr>
-              <a:t>• Breathes when idle. Retreats when touched</a:t>
+              <a:t>• Accelerometer and gyroscope, microphone, camera</a:t>
             </a:r>
           </a:p>
           <a:p>
@@ -10689,7 +10750,7 @@
                 </a:solidFill>
                 <a:latin typeface="Arial"/>
               </a:rPr>
-              <a:t>• Easing and idle motion do the work. A dozen lines</a:t>
+              <a:t>• Pointer pressure, though a trackpad reports only 0 or 0.5</a:t>
             </a:r>
           </a:p>
           <a:p>
@@ -10709,7 +10770,7 @@
                 </a:solidFill>
                 <a:latin typeface="Arial"/>
               </a:rPr>
-              <a:t>Instrumented sock, ESP32</a:t>
+              <a:t>Does not, whatever the tutorial says</a:t>
             </a:r>
           </a:p>
           <a:p>
@@ -10729,7 +10790,7 @@
                 </a:solidFill>
                 <a:latin typeface="Arial"/>
               </a:rPr>
-              <a:t>• Six force sensors under a foot, batched over Wi-Fi</a:t>
+              <a:t>• Phone vibration on iOS. WebKit has never shipped it, at any version, and Chrome on iOS is Safari underneath</a:t>
             </a:r>
           </a:p>
           <a:p>
@@ -10738,18 +10799,49 @@
                 <a:spcPct val="128000"/>
               </a:lnSpc>
               <a:spcAft>
+                <a:spcPts val="0"/>
+              </a:spcAft>
+              <a:buNone/>
+            </a:pPr>
+          </a:p>
+          <a:p>
+            <a:pPr marL="0" indent="0" algn="l">
+              <a:lnSpc>
+                <a:spcPct val="128000"/>
+              </a:lnSpc>
+              <a:spcAft>
                 <a:spcPts val="400"/>
               </a:spcAft>
               <a:buNone/>
             </a:pPr>
             <a:r>
+              <a:rPr sz="1700" b="1">
+                <a:solidFill>
+                  <a:srgbClr val="000000"/>
+                </a:solidFill>
+                <a:latin typeface="Arial"/>
+              </a:rPr>
+              <a:t>So "the phone buzzes" works on no iPhone in this room.</a:t>
+            </a:r>
+          </a:p>
+          <a:p>
+            <a:pPr marL="0" indent="0" algn="l">
+              <a:lnSpc>
+                <a:spcPct val="128000"/>
+              </a:lnSpc>
+              <a:spcAft>
+                <a:spcPts val="400"/>
+              </a:spcAft>
+              <a:buNone/>
+            </a:pPr>
+            <a:r>
               <a:rPr sz="1500" b="0">
                 <a:solidFill>
                   <a:srgbClr val="000000"/>
                 </a:solidFill>
                 <a:latin typeface="Arial"/>
               </a:rPr>
-              <a:t>• Calibrate per sensor. Batch your writes</a:t>
+              <a:t>• Check the feature, not the tutorial, before it is in a plan.</a:t>
             </a:r>
           </a:p>
         </p:txBody>
@@ -10839,6 +10931,258 @@
               <a:buNone/>
             </a:pPr>
             <a:r>
+              <a:rPr sz="3200" b="1">
+                <a:solidFill>
+                  <a:srgbClr val="000000"/>
+                </a:solidFill>
+                <a:latin typeface="Arial"/>
+              </a:rPr>
+              <a:t>TWO RIGS THAT ALREADY EXIST</a:t>
+            </a:r>
+          </a:p>
+        </p:txBody>
+      </p:sp>
+      <p:sp>
+        <p:nvSpPr>
+          <p:cNvPr id="3" name="Text Placeholder 2"/>
+          <p:cNvSpPr>
+            <a:spLocks noGrp="1"/>
+          </p:cNvSpPr>
+          <p:nvPr>
+            <p:ph type="body" idx="1"/>
+          </p:nvPr>
+        </p:nvSpPr>
+        <p:spPr/>
+        <p:txBody>
+          <a:bodyPr/>
+          <a:lstStyle/>
+          <a:p>
+            <a:pPr marL="0" indent="0" algn="l">
+              <a:lnSpc>
+                <a:spcPct val="128000"/>
+              </a:lnSpc>
+              <a:spcAft>
+                <a:spcPts val="1200"/>
+              </a:spcAft>
+              <a:buNone/>
+            </a:pPr>
+            <a:r>
+              <a:rPr sz="1700" b="0">
+                <a:solidFill>
+                  <a:srgbClr val="595959"/>
+                </a:solidFill>
+                <a:latin typeface="Arial"/>
+              </a:rPr>
+              <a:t>Built here, by students at roughly your stage.</a:t>
+            </a:r>
+          </a:p>
+          <a:p>
+            <a:pPr marL="0" indent="0" algn="l">
+              <a:lnSpc>
+                <a:spcPct val="128000"/>
+              </a:lnSpc>
+              <a:spcAft>
+                <a:spcPts val="400"/>
+              </a:spcAft>
+              <a:buNone/>
+            </a:pPr>
+            <a:r>
+              <a:rPr sz="1700" b="1">
+                <a:solidFill>
+                  <a:srgbClr val="000000"/>
+                </a:solidFill>
+                <a:latin typeface="Arial"/>
+              </a:rPr>
+              <a:t>Moving screen, Arduino Uno</a:t>
+            </a:r>
+          </a:p>
+          <a:p>
+            <a:pPr marL="0" indent="0" algn="l">
+              <a:lnSpc>
+                <a:spcPct val="128000"/>
+              </a:lnSpc>
+              <a:spcAft>
+                <a:spcPts val="400"/>
+              </a:spcAft>
+              <a:buNone/>
+            </a:pPr>
+            <a:r>
+              <a:rPr sz="1500" b="0">
+                <a:solidFill>
+                  <a:srgbClr val="000000"/>
+                </a:solidFill>
+                <a:latin typeface="Arial"/>
+              </a:rPr>
+              <a:t>• Breathes when idle. Retreats when touched</a:t>
+            </a:r>
+          </a:p>
+          <a:p>
+            <a:pPr marL="0" indent="0" algn="l">
+              <a:lnSpc>
+                <a:spcPct val="128000"/>
+              </a:lnSpc>
+              <a:spcAft>
+                <a:spcPts val="400"/>
+              </a:spcAft>
+              <a:buNone/>
+            </a:pPr>
+            <a:r>
+              <a:rPr sz="1500" b="0">
+                <a:solidFill>
+                  <a:srgbClr val="000000"/>
+                </a:solidFill>
+                <a:latin typeface="Arial"/>
+              </a:rPr>
+              <a:t>• Easing and idle motion do the work. A dozen lines</a:t>
+            </a:r>
+          </a:p>
+          <a:p>
+            <a:pPr marL="0" indent="0" algn="l">
+              <a:lnSpc>
+                <a:spcPct val="128000"/>
+              </a:lnSpc>
+              <a:spcAft>
+                <a:spcPts val="400"/>
+              </a:spcAft>
+              <a:buNone/>
+            </a:pPr>
+            <a:r>
+              <a:rPr sz="1700" b="1">
+                <a:solidFill>
+                  <a:srgbClr val="000000"/>
+                </a:solidFill>
+                <a:latin typeface="Arial"/>
+              </a:rPr>
+              <a:t>Instrumented sock, ESP32</a:t>
+            </a:r>
+          </a:p>
+          <a:p>
+            <a:pPr marL="0" indent="0" algn="l">
+              <a:lnSpc>
+                <a:spcPct val="128000"/>
+              </a:lnSpc>
+              <a:spcAft>
+                <a:spcPts val="400"/>
+              </a:spcAft>
+              <a:buNone/>
+            </a:pPr>
+            <a:r>
+              <a:rPr sz="1500" b="0">
+                <a:solidFill>
+                  <a:srgbClr val="000000"/>
+                </a:solidFill>
+                <a:latin typeface="Arial"/>
+              </a:rPr>
+              <a:t>• Six force sensors under a foot, batched over Wi-Fi</a:t>
+            </a:r>
+          </a:p>
+          <a:p>
+            <a:pPr marL="0" indent="0" algn="l">
+              <a:lnSpc>
+                <a:spcPct val="128000"/>
+              </a:lnSpc>
+              <a:spcAft>
+                <a:spcPts val="400"/>
+              </a:spcAft>
+              <a:buNone/>
+            </a:pPr>
+            <a:r>
+              <a:rPr sz="1500" b="0">
+                <a:solidFill>
+                  <a:srgbClr val="000000"/>
+                </a:solidFill>
+                <a:latin typeface="Arial"/>
+              </a:rPr>
+              <a:t>• Calibrate per sensor. Batch your writes</a:t>
+            </a:r>
+          </a:p>
+        </p:txBody>
+      </p:sp>
+      <p:pic>
+        <p:nvPicPr>
+          <p:cNvPr id="4" name="Picture 3" descr="wordmark_dark.png"/>
+          <p:cNvPicPr>
+            <a:picLocks noChangeAspect="1"/>
+          </p:cNvPicPr>
+          <p:nvPr/>
+        </p:nvPicPr>
+        <p:blipFill>
+          <a:blip r:embed="rId2"/>
+          <a:stretch>
+            <a:fillRect/>
+          </a:stretch>
+        </p:blipFill>
+        <p:spPr>
+          <a:xfrm>
+            <a:off x="342900" y="6184900"/>
+            <a:ext cx="2070100" cy="529560"/>
+          </a:xfrm>
+          <a:prstGeom prst="rect">
+            <a:avLst/>
+          </a:prstGeom>
+        </p:spPr>
+      </p:pic>
+      <p:pic>
+        <p:nvPicPr>
+          <p:cNvPr id="5" name="Picture 4" descr="seal_dark.png"/>
+          <p:cNvPicPr>
+            <a:picLocks noChangeAspect="1"/>
+          </p:cNvPicPr>
+          <p:nvPr/>
+        </p:nvPicPr>
+        <p:blipFill>
+          <a:blip r:embed="rId3"/>
+          <a:stretch>
+            <a:fillRect/>
+          </a:stretch>
+        </p:blipFill>
+        <p:spPr>
+          <a:xfrm>
+            <a:off x="11226800" y="5969000"/>
+            <a:ext cx="713915" cy="711200"/>
+          </a:xfrm>
+          <a:prstGeom prst="rect">
+            <a:avLst/>
+          </a:prstGeom>
+        </p:spPr>
+      </p:pic>
+    </p:spTree>
+  </p:cSld>
+  <p:clrMapOvr>
+    <a:masterClrMapping/>
+  </p:clrMapOvr>
+</p:sld>
+</file>
+
+<file path=ppt/slides/slide27.xml><?xml version="1.0" encoding="utf-8"?>
+<p:sld xmlns:a="http://schemas.openxmlformats.org/drawingml/2006/main" xmlns:p="http://schemas.openxmlformats.org/presentationml/2006/main" xmlns:r="http://schemas.openxmlformats.org/officeDocument/2006/relationships">
+  <p:cSld>
+    <p:spTree>
+      <p:nvGrpSpPr>
+        <p:cNvPr id="1" name=""/>
+        <p:cNvGrpSpPr/>
+        <p:nvPr/>
+      </p:nvGrpSpPr>
+      <p:grpSpPr/>
+      <p:sp>
+        <p:nvSpPr>
+          <p:cNvPr id="2" name="Title 1"/>
+          <p:cNvSpPr>
+            <a:spLocks noGrp="1"/>
+          </p:cNvSpPr>
+          <p:nvPr>
+            <p:ph type="title"/>
+          </p:nvPr>
+        </p:nvSpPr>
+        <p:spPr/>
+        <p:txBody>
+          <a:bodyPr/>
+          <a:lstStyle/>
+          <a:p>
+            <a:pPr marL="0" indent="0" algn="l">
+              <a:buNone/>
+            </a:pPr>
+            <a:r>
               <a:rPr sz="4400" b="1">
                 <a:solidFill>
                   <a:srgbClr val="000000"/>
@@ -10906,258 +11250,6 @@
 </p:sld>
 </file>
 
-<file path=ppt/slides/slide27.xml><?xml version="1.0" encoding="utf-8"?>
-<p:sld xmlns:a="http://schemas.openxmlformats.org/drawingml/2006/main" xmlns:p="http://schemas.openxmlformats.org/presentationml/2006/main" xmlns:r="http://schemas.openxmlformats.org/officeDocument/2006/relationships">
-  <p:cSld>
-    <p:spTree>
-      <p:nvGrpSpPr>
-        <p:cNvPr id="1" name=""/>
-        <p:cNvGrpSpPr/>
-        <p:nvPr/>
-      </p:nvGrpSpPr>
-      <p:grpSpPr/>
-      <p:sp>
-        <p:nvSpPr>
-          <p:cNvPr id="2" name="Title 1"/>
-          <p:cNvSpPr>
-            <a:spLocks noGrp="1"/>
-          </p:cNvSpPr>
-          <p:nvPr>
-            <p:ph type="title"/>
-          </p:nvPr>
-        </p:nvSpPr>
-        <p:spPr/>
-        <p:txBody>
-          <a:bodyPr/>
-          <a:lstStyle/>
-          <a:p>
-            <a:pPr marL="0" indent="0" algn="l">
-              <a:buNone/>
-            </a:pPr>
-            <a:r>
-              <a:rPr sz="3200" b="1">
-                <a:solidFill>
-                  <a:srgbClr val="000000"/>
-                </a:solidFill>
-                <a:latin typeface="Arial"/>
-              </a:rPr>
-              <a:t>THE BRIEF</a:t>
-            </a:r>
-          </a:p>
-        </p:txBody>
-      </p:sp>
-      <p:sp>
-        <p:nvSpPr>
-          <p:cNvPr id="3" name="Text Placeholder 2"/>
-          <p:cNvSpPr>
-            <a:spLocks noGrp="1"/>
-          </p:cNvSpPr>
-          <p:nvPr>
-            <p:ph type="body" idx="1"/>
-          </p:nvPr>
-        </p:nvSpPr>
-        <p:spPr/>
-        <p:txBody>
-          <a:bodyPr/>
-          <a:lstStyle/>
-          <a:p>
-            <a:pPr marL="0" indent="0" algn="l">
-              <a:lnSpc>
-                <a:spcPct val="128000"/>
-              </a:lnSpc>
-              <a:spcAft>
-                <a:spcPts val="1200"/>
-              </a:spcAft>
-              <a:buNone/>
-            </a:pPr>
-            <a:r>
-              <a:rPr sz="1700" b="0">
-                <a:solidFill>
-                  <a:srgbClr val="595959"/>
-                </a:solidFill>
-                <a:latin typeface="Arial"/>
-              </a:rPr>
-              <a:t>30 minutes. Not long enough to be precious about it.</a:t>
-            </a:r>
-          </a:p>
-          <a:p>
-            <a:pPr marL="0" indent="0" algn="l">
-              <a:lnSpc>
-                <a:spcPct val="128000"/>
-              </a:lnSpc>
-              <a:spcAft>
-                <a:spcPts val="400"/>
-              </a:spcAft>
-              <a:buNone/>
-            </a:pPr>
-            <a:r>
-              <a:rPr sz="1700" b="1">
-                <a:solidFill>
-                  <a:srgbClr val="000000"/>
-                </a:solidFill>
-                <a:latin typeface="Arial"/>
-              </a:rPr>
-              <a:t>One actuator. Three messages</a:t>
-            </a:r>
-          </a:p>
-          <a:p>
-            <a:pPr marL="0" indent="0" algn="l">
-              <a:lnSpc>
-                <a:spcPct val="128000"/>
-              </a:lnSpc>
-              <a:spcAft>
-                <a:spcPts val="400"/>
-              </a:spcAft>
-              <a:buNone/>
-            </a:pPr>
-            <a:r>
-              <a:rPr sz="1500" b="0">
-                <a:solidFill>
-                  <a:srgbClr val="000000"/>
-                </a:solidFill>
-                <a:latin typeface="Arial"/>
-              </a:rPr>
-              <a:t>• Arrived. Something wrong. Finished</a:t>
-            </a:r>
-          </a:p>
-          <a:p>
-            <a:pPr marL="0" indent="0" algn="l">
-              <a:lnSpc>
-                <a:spcPct val="128000"/>
-              </a:lnSpc>
-              <a:spcAft>
-                <a:spcPts val="400"/>
-              </a:spcAft>
-              <a:buNone/>
-            </a:pPr>
-            <a:r>
-              <a:rPr sz="1700" b="1">
-                <a:solidFill>
-                  <a:srgbClr val="000000"/>
-                </a:solidFill>
-                <a:latin typeface="Arial"/>
-              </a:rPr>
-              <a:t>Vary two things only</a:t>
-            </a:r>
-          </a:p>
-          <a:p>
-            <a:pPr marL="0" indent="0" algn="l">
-              <a:lnSpc>
-                <a:spcPct val="128000"/>
-              </a:lnSpc>
-              <a:spcAft>
-                <a:spcPts val="400"/>
-              </a:spcAft>
-              <a:buNone/>
-            </a:pPr>
-            <a:r>
-              <a:rPr sz="1500" b="0">
-                <a:solidFill>
-                  <a:srgbClr val="000000"/>
-                </a:solidFill>
-                <a:latin typeface="Arial"/>
-              </a:rPr>
-              <a:t>• Rhythm of the pulses, and how strong they are</a:t>
-            </a:r>
-          </a:p>
-          <a:p>
-            <a:pPr marL="0" indent="0" algn="l">
-              <a:lnSpc>
-                <a:spcPct val="128000"/>
-              </a:lnSpc>
-              <a:spcAft>
-                <a:spcPts val="400"/>
-              </a:spcAft>
-              <a:buNone/>
-            </a:pPr>
-            <a:r>
-              <a:rPr sz="1700" b="1">
-                <a:solidFill>
-                  <a:srgbClr val="000000"/>
-                </a:solidFill>
-                <a:latin typeface="Arial"/>
-              </a:rPr>
-              <a:t>Blind test: they name all three</a:t>
-            </a:r>
-          </a:p>
-          <a:p>
-            <a:pPr marL="0" indent="0" algn="l">
-              <a:lnSpc>
-                <a:spcPct val="128000"/>
-              </a:lnSpc>
-              <a:spcAft>
-                <a:spcPts val="400"/>
-              </a:spcAft>
-              <a:buNone/>
-            </a:pPr>
-            <a:r>
-              <a:rPr sz="1500" b="0">
-                <a:solidFill>
-                  <a:srgbClr val="000000"/>
-                </a:solidFill>
-                <a:latin typeface="Arial"/>
-              </a:rPr>
-              <a:t>• Note which two got confused, and why</a:t>
-            </a:r>
-          </a:p>
-        </p:txBody>
-      </p:sp>
-      <p:pic>
-        <p:nvPicPr>
-          <p:cNvPr id="4" name="Picture 3" descr="wordmark_dark.png"/>
-          <p:cNvPicPr>
-            <a:picLocks noChangeAspect="1"/>
-          </p:cNvPicPr>
-          <p:nvPr/>
-        </p:nvPicPr>
-        <p:blipFill>
-          <a:blip r:embed="rId2"/>
-          <a:stretch>
-            <a:fillRect/>
-          </a:stretch>
-        </p:blipFill>
-        <p:spPr>
-          <a:xfrm>
-            <a:off x="342900" y="6184900"/>
-            <a:ext cx="2070100" cy="529560"/>
-          </a:xfrm>
-          <a:prstGeom prst="rect">
-            <a:avLst/>
-          </a:prstGeom>
-        </p:spPr>
-      </p:pic>
-      <p:pic>
-        <p:nvPicPr>
-          <p:cNvPr id="5" name="Picture 4" descr="seal_dark.png"/>
-          <p:cNvPicPr>
-            <a:picLocks noChangeAspect="1"/>
-          </p:cNvPicPr>
-          <p:nvPr/>
-        </p:nvPicPr>
-        <p:blipFill>
-          <a:blip r:embed="rId3"/>
-          <a:stretch>
-            <a:fillRect/>
-          </a:stretch>
-        </p:blipFill>
-        <p:spPr>
-          <a:xfrm>
-            <a:off x="11226800" y="5969000"/>
-            <a:ext cx="713915" cy="711200"/>
-          </a:xfrm>
-          <a:prstGeom prst="rect">
-            <a:avLst/>
-          </a:prstGeom>
-        </p:spPr>
-      </p:pic>
-    </p:spTree>
-  </p:cSld>
-  <p:clrMapOvr>
-    <a:masterClrMapping/>
-  </p:clrMapOvr>
-</p:sld>
-</file>
-
 <file path=ppt/slides/slide28.xml><?xml version="1.0" encoding="utf-8"?>
 <p:sld xmlns:a="http://schemas.openxmlformats.org/drawingml/2006/main" xmlns:p="http://schemas.openxmlformats.org/presentationml/2006/main" xmlns:r="http://schemas.openxmlformats.org/officeDocument/2006/relationships">
   <p:cSld>
@@ -11193,7 +11285,7 @@
                 </a:solidFill>
                 <a:latin typeface="Arial"/>
               </a:rPr>
-              <a:t>THE CONSTRAINT THAT MATTERS</a:t>
+              <a:t>THE BRIEF</a:t>
             </a:r>
           </a:p>
         </p:txBody>
@@ -11218,6 +11310,26 @@
                 <a:spcPct val="128000"/>
               </a:lnSpc>
               <a:spcAft>
+                <a:spcPts val="1200"/>
+              </a:spcAft>
+              <a:buNone/>
+            </a:pPr>
+            <a:r>
+              <a:rPr sz="1700" b="0">
+                <a:solidFill>
+                  <a:srgbClr val="595959"/>
+                </a:solidFill>
+                <a:latin typeface="Arial"/>
+              </a:rPr>
+              <a:t>30 minutes. Not long enough to be precious about it.</a:t>
+            </a:r>
+          </a:p>
+          <a:p>
+            <a:pPr marL="0" indent="0" algn="l">
+              <a:lnSpc>
+                <a:spcPct val="128000"/>
+              </a:lnSpc>
+              <a:spcAft>
                 <a:spcPts val="400"/>
               </a:spcAft>
               <a:buNone/>
@@ -11229,7 +11341,7 @@
                 </a:solidFill>
                 <a:latin typeface="Arial"/>
               </a:rPr>
-              <a:t>The recipient cannot look at the device.</a:t>
+              <a:t>One actuator. Three messages</a:t>
             </a:r>
           </a:p>
           <a:p>
@@ -11238,10 +11350,19 @@
                 <a:spcPct val="128000"/>
               </a:lnSpc>
               <a:spcAft>
-                <a:spcPts val="0"/>
-              </a:spcAft>
-              <a:buNone/>
-            </a:pPr>
+                <a:spcPts val="400"/>
+              </a:spcAft>
+              <a:buNone/>
+            </a:pPr>
+            <a:r>
+              <a:rPr sz="1500" b="0">
+                <a:solidFill>
+                  <a:srgbClr val="000000"/>
+                </a:solidFill>
+                <a:latin typeface="Arial"/>
+              </a:rPr>
+              <a:t>• Arrived. Something wrong. Finished</a:t>
+            </a:r>
           </a:p>
           <a:p>
             <a:pPr marL="0" indent="0" algn="l">
@@ -11254,13 +11375,13 @@
               <a:buNone/>
             </a:pPr>
             <a:r>
-              <a:rPr sz="1700" b="0">
-                <a:solidFill>
-                  <a:srgbClr val="000000"/>
-                </a:solidFill>
-                <a:latin typeface="Arial"/>
-              </a:rPr>
-              <a:t>If it only works while someone watches a screen,</a:t>
+              <a:rPr sz="1700" b="1">
+                <a:solidFill>
+                  <a:srgbClr val="000000"/>
+                </a:solidFill>
+                <a:latin typeface="Arial"/>
+              </a:rPr>
+              <a:t>Vary two things only</a:t>
             </a:r>
           </a:p>
           <a:p>
@@ -11274,13 +11395,53 @@
               <a:buNone/>
             </a:pPr>
             <a:r>
-              <a:rPr sz="1700" b="0">
-                <a:solidFill>
-                  <a:srgbClr val="000000"/>
-                </a:solidFill>
-                <a:latin typeface="Arial"/>
-              </a:rPr>
-              <a:t>you built a visual interface with a motor glued to it.</a:t>
+              <a:rPr sz="1500" b="0">
+                <a:solidFill>
+                  <a:srgbClr val="000000"/>
+                </a:solidFill>
+                <a:latin typeface="Arial"/>
+              </a:rPr>
+              <a:t>• Rhythm of the pulses, and how strong they are</a:t>
+            </a:r>
+          </a:p>
+          <a:p>
+            <a:pPr marL="0" indent="0" algn="l">
+              <a:lnSpc>
+                <a:spcPct val="128000"/>
+              </a:lnSpc>
+              <a:spcAft>
+                <a:spcPts val="400"/>
+              </a:spcAft>
+              <a:buNone/>
+            </a:pPr>
+            <a:r>
+              <a:rPr sz="1700" b="1">
+                <a:solidFill>
+                  <a:srgbClr val="000000"/>
+                </a:solidFill>
+                <a:latin typeface="Arial"/>
+              </a:rPr>
+              <a:t>Blind test: they name all three</a:t>
+            </a:r>
+          </a:p>
+          <a:p>
+            <a:pPr marL="0" indent="0" algn="l">
+              <a:lnSpc>
+                <a:spcPct val="128000"/>
+              </a:lnSpc>
+              <a:spcAft>
+                <a:spcPts val="400"/>
+              </a:spcAft>
+              <a:buNone/>
+            </a:pPr>
+            <a:r>
+              <a:rPr sz="1500" b="0">
+                <a:solidFill>
+                  <a:srgbClr val="000000"/>
+                </a:solidFill>
+                <a:latin typeface="Arial"/>
+              </a:rPr>
+              <a:t>• Note which two got confused, and why</a:t>
             </a:r>
           </a:p>
         </p:txBody>
@@ -11376,7 +11537,7 @@
                 </a:solidFill>
                 <a:latin typeface="Arial"/>
               </a:rPr>
-              <a:t>BEFORE YOU CALL IT DONE</a:t>
+              <a:t>THE CONSTRAINT THAT MATTERS</a:t>
             </a:r>
           </a:p>
         </p:txBody>
@@ -11401,18 +11562,49 @@
                 <a:spcPct val="128000"/>
               </a:lnSpc>
               <a:spcAft>
-                <a:spcPts val="1200"/>
+                <a:spcPts val="400"/>
+              </a:spcAft>
+              <a:buNone/>
+            </a:pPr>
+            <a:r>
+              <a:rPr sz="1700" b="1">
+                <a:solidFill>
+                  <a:srgbClr val="000000"/>
+                </a:solidFill>
+                <a:latin typeface="Arial"/>
+              </a:rPr>
+              <a:t>The recipient cannot look at the device.</a:t>
+            </a:r>
+          </a:p>
+          <a:p>
+            <a:pPr marL="0" indent="0" algn="l">
+              <a:lnSpc>
+                <a:spcPct val="128000"/>
+              </a:lnSpc>
+              <a:spcAft>
+                <a:spcPts val="0"/>
+              </a:spcAft>
+              <a:buNone/>
+            </a:pPr>
+          </a:p>
+          <a:p>
+            <a:pPr marL="0" indent="0" algn="l">
+              <a:lnSpc>
+                <a:spcPct val="128000"/>
+              </a:lnSpc>
+              <a:spcAft>
+                <a:spcPts val="400"/>
               </a:spcAft>
               <a:buNone/>
             </a:pPr>
             <a:r>
               <a:rPr sz="1700" b="0">
                 <a:solidFill>
-                  <a:srgbClr val="595959"/>
-                </a:solidFill>
-                <a:latin typeface="Arial"/>
-              </a:rPr>
-              <a:t>Hand your device to another group with the screen turned away.</a:t>
+                  <a:srgbClr val="000000"/>
+                </a:solidFill>
+                <a:latin typeface="Arial"/>
+              </a:rPr>
+              <a:t>If it only works while someone watches a screen,</a:t>
             </a:r>
           </a:p>
           <a:p>
@@ -11426,124 +11618,13 @@
               <a:buNone/>
             </a:pPr>
             <a:r>
-              <a:rPr sz="1500" b="0">
-                <a:solidFill>
-                  <a:srgbClr val="000000"/>
-                </a:solidFill>
-                <a:latin typeface="Arial"/>
-              </a:rPr>
-              <a:t>• They can tell all three messages apart</a:t>
-            </a:r>
-          </a:p>
-          <a:p>
-            <a:pPr marL="0" indent="0" algn="l">
-              <a:lnSpc>
-                <a:spcPct val="128000"/>
-              </a:lnSpc>
-              <a:spcAft>
-                <a:spcPts val="400"/>
-              </a:spcAft>
-              <a:buNone/>
-            </a:pPr>
-            <a:r>
-              <a:rPr sz="1500" b="0">
-                <a:solidFill>
-                  <a:srgbClr val="000000"/>
-                </a:solidFill>
-                <a:latin typeface="Arial"/>
-              </a:rPr>
-              <a:t>• It does not fire continuously when held</a:t>
-            </a:r>
-          </a:p>
-          <a:p>
-            <a:pPr marL="0" indent="0" algn="l">
-              <a:lnSpc>
-                <a:spcPct val="128000"/>
-              </a:lnSpc>
-              <a:spcAft>
-                <a:spcPts val="400"/>
-              </a:spcAft>
-              <a:buNone/>
-            </a:pPr>
-            <a:r>
-              <a:rPr sz="1500" b="0">
-                <a:solidFill>
-                  <a:srgbClr val="000000"/>
-                </a:solidFill>
-                <a:latin typeface="Arial"/>
-              </a:rPr>
-              <a:t>• You know which two got confused, and why</a:t>
-            </a:r>
-          </a:p>
-          <a:p>
-            <a:pPr marL="0" indent="0" algn="l">
-              <a:lnSpc>
-                <a:spcPct val="128000"/>
-              </a:lnSpc>
-              <a:spcAft>
-                <a:spcPts val="0"/>
-              </a:spcAft>
-              <a:buNone/>
-            </a:pPr>
-          </a:p>
-          <a:p>
-            <a:pPr marL="0" indent="0" algn="l">
-              <a:lnSpc>
-                <a:spcPct val="128000"/>
-              </a:lnSpc>
-              <a:spcAft>
-                <a:spcPts val="400"/>
-              </a:spcAft>
-              <a:buNone/>
-            </a:pPr>
-            <a:r>
-              <a:rPr sz="1700" b="1">
-                <a:solidFill>
-                  <a:srgbClr val="000000"/>
-                </a:solidFill>
-                <a:latin typeface="Arial"/>
-              </a:rPr>
-              <a:t>What you actually leave with</a:t>
-            </a:r>
-          </a:p>
-          <a:p>
-            <a:pPr marL="0" indent="0" algn="l">
-              <a:lnSpc>
-                <a:spcPct val="128000"/>
-              </a:lnSpc>
-              <a:spcAft>
-                <a:spcPts val="400"/>
-              </a:spcAft>
-              <a:buNone/>
-            </a:pPr>
-            <a:r>
-              <a:rPr sz="1500" b="0">
-                <a:solidFill>
-                  <a:srgbClr val="000000"/>
-                </a:solidFill>
-                <a:latin typeface="Arial"/>
-              </a:rPr>
-              <a:t>• What things feel like, how to drive one, and which to pick</a:t>
-            </a:r>
-          </a:p>
-          <a:p>
-            <a:pPr marL="0" indent="0" algn="l">
-              <a:lnSpc>
-                <a:spcPct val="128000"/>
-              </a:lnSpc>
-              <a:spcAft>
-                <a:spcPts val="400"/>
-              </a:spcAft>
-              <a:buNone/>
-            </a:pPr>
-            <a:r>
-              <a:rPr sz="1500" b="0">
-                <a:solidFill>
-                  <a:srgbClr val="000000"/>
-                </a:solidFill>
-                <a:latin typeface="Arial"/>
-              </a:rPr>
-              <a:t>• That last one is the expensive mistake this prevents</a:t>
+              <a:rPr sz="1700" b="0">
+                <a:solidFill>
+                  <a:srgbClr val="000000"/>
+                </a:solidFill>
+                <a:latin typeface="Arial"/>
+              </a:rPr>
+              <a:t>you built a visual interface with a motor glued to it.</a:t>
             </a:r>
           </a:p>
         </p:txBody>
@@ -11864,6 +11945,269 @@
             <a:spLocks noGrp="1"/>
           </p:cNvSpPr>
           <p:nvPr>
+            <p:ph type="title"/>
+          </p:nvPr>
+        </p:nvSpPr>
+        <p:spPr/>
+        <p:txBody>
+          <a:bodyPr/>
+          <a:lstStyle/>
+          <a:p>
+            <a:pPr marL="0" indent="0" algn="l">
+              <a:buNone/>
+            </a:pPr>
+            <a:r>
+              <a:rPr sz="3200" b="1">
+                <a:solidFill>
+                  <a:srgbClr val="000000"/>
+                </a:solidFill>
+                <a:latin typeface="Arial"/>
+              </a:rPr>
+              <a:t>BEFORE YOU CALL IT DONE</a:t>
+            </a:r>
+          </a:p>
+        </p:txBody>
+      </p:sp>
+      <p:sp>
+        <p:nvSpPr>
+          <p:cNvPr id="3" name="Text Placeholder 2"/>
+          <p:cNvSpPr>
+            <a:spLocks noGrp="1"/>
+          </p:cNvSpPr>
+          <p:nvPr>
+            <p:ph type="body" idx="1"/>
+          </p:nvPr>
+        </p:nvSpPr>
+        <p:spPr/>
+        <p:txBody>
+          <a:bodyPr/>
+          <a:lstStyle/>
+          <a:p>
+            <a:pPr marL="0" indent="0" algn="l">
+              <a:lnSpc>
+                <a:spcPct val="128000"/>
+              </a:lnSpc>
+              <a:spcAft>
+                <a:spcPts val="1200"/>
+              </a:spcAft>
+              <a:buNone/>
+            </a:pPr>
+            <a:r>
+              <a:rPr sz="1700" b="0">
+                <a:solidFill>
+                  <a:srgbClr val="595959"/>
+                </a:solidFill>
+                <a:latin typeface="Arial"/>
+              </a:rPr>
+              <a:t>Hand your device to another group with the screen turned away.</a:t>
+            </a:r>
+          </a:p>
+          <a:p>
+            <a:pPr marL="0" indent="0" algn="l">
+              <a:lnSpc>
+                <a:spcPct val="128000"/>
+              </a:lnSpc>
+              <a:spcAft>
+                <a:spcPts val="400"/>
+              </a:spcAft>
+              <a:buNone/>
+            </a:pPr>
+            <a:r>
+              <a:rPr sz="1500" b="0">
+                <a:solidFill>
+                  <a:srgbClr val="000000"/>
+                </a:solidFill>
+                <a:latin typeface="Arial"/>
+              </a:rPr>
+              <a:t>• They can tell all three messages apart</a:t>
+            </a:r>
+          </a:p>
+          <a:p>
+            <a:pPr marL="0" indent="0" algn="l">
+              <a:lnSpc>
+                <a:spcPct val="128000"/>
+              </a:lnSpc>
+              <a:spcAft>
+                <a:spcPts val="400"/>
+              </a:spcAft>
+              <a:buNone/>
+            </a:pPr>
+            <a:r>
+              <a:rPr sz="1500" b="0">
+                <a:solidFill>
+                  <a:srgbClr val="000000"/>
+                </a:solidFill>
+                <a:latin typeface="Arial"/>
+              </a:rPr>
+              <a:t>• It does not fire continuously when held</a:t>
+            </a:r>
+          </a:p>
+          <a:p>
+            <a:pPr marL="0" indent="0" algn="l">
+              <a:lnSpc>
+                <a:spcPct val="128000"/>
+              </a:lnSpc>
+              <a:spcAft>
+                <a:spcPts val="400"/>
+              </a:spcAft>
+              <a:buNone/>
+            </a:pPr>
+            <a:r>
+              <a:rPr sz="1500" b="0">
+                <a:solidFill>
+                  <a:srgbClr val="000000"/>
+                </a:solidFill>
+                <a:latin typeface="Arial"/>
+              </a:rPr>
+              <a:t>• You know which two got confused, and why</a:t>
+            </a:r>
+          </a:p>
+          <a:p>
+            <a:pPr marL="0" indent="0" algn="l">
+              <a:lnSpc>
+                <a:spcPct val="128000"/>
+              </a:lnSpc>
+              <a:spcAft>
+                <a:spcPts val="0"/>
+              </a:spcAft>
+              <a:buNone/>
+            </a:pPr>
+          </a:p>
+          <a:p>
+            <a:pPr marL="0" indent="0" algn="l">
+              <a:lnSpc>
+                <a:spcPct val="128000"/>
+              </a:lnSpc>
+              <a:spcAft>
+                <a:spcPts val="400"/>
+              </a:spcAft>
+              <a:buNone/>
+            </a:pPr>
+            <a:r>
+              <a:rPr sz="1700" b="1">
+                <a:solidFill>
+                  <a:srgbClr val="000000"/>
+                </a:solidFill>
+                <a:latin typeface="Arial"/>
+              </a:rPr>
+              <a:t>What you actually leave with</a:t>
+            </a:r>
+          </a:p>
+          <a:p>
+            <a:pPr marL="0" indent="0" algn="l">
+              <a:lnSpc>
+                <a:spcPct val="128000"/>
+              </a:lnSpc>
+              <a:spcAft>
+                <a:spcPts val="400"/>
+              </a:spcAft>
+              <a:buNone/>
+            </a:pPr>
+            <a:r>
+              <a:rPr sz="1500" b="0">
+                <a:solidFill>
+                  <a:srgbClr val="000000"/>
+                </a:solidFill>
+                <a:latin typeface="Arial"/>
+              </a:rPr>
+              <a:t>• What things feel like, how to drive one, and which to pick</a:t>
+            </a:r>
+          </a:p>
+          <a:p>
+            <a:pPr marL="0" indent="0" algn="l">
+              <a:lnSpc>
+                <a:spcPct val="128000"/>
+              </a:lnSpc>
+              <a:spcAft>
+                <a:spcPts val="400"/>
+              </a:spcAft>
+              <a:buNone/>
+            </a:pPr>
+            <a:r>
+              <a:rPr sz="1500" b="0">
+                <a:solidFill>
+                  <a:srgbClr val="000000"/>
+                </a:solidFill>
+                <a:latin typeface="Arial"/>
+              </a:rPr>
+              <a:t>• That last one is the expensive mistake this prevents</a:t>
+            </a:r>
+          </a:p>
+        </p:txBody>
+      </p:sp>
+      <p:pic>
+        <p:nvPicPr>
+          <p:cNvPr id="4" name="Picture 3" descr="wordmark_dark.png"/>
+          <p:cNvPicPr>
+            <a:picLocks noChangeAspect="1"/>
+          </p:cNvPicPr>
+          <p:nvPr/>
+        </p:nvPicPr>
+        <p:blipFill>
+          <a:blip r:embed="rId2"/>
+          <a:stretch>
+            <a:fillRect/>
+          </a:stretch>
+        </p:blipFill>
+        <p:spPr>
+          <a:xfrm>
+            <a:off x="342900" y="6184900"/>
+            <a:ext cx="2070100" cy="529560"/>
+          </a:xfrm>
+          <a:prstGeom prst="rect">
+            <a:avLst/>
+          </a:prstGeom>
+        </p:spPr>
+      </p:pic>
+      <p:pic>
+        <p:nvPicPr>
+          <p:cNvPr id="5" name="Picture 4" descr="seal_dark.png"/>
+          <p:cNvPicPr>
+            <a:picLocks noChangeAspect="1"/>
+          </p:cNvPicPr>
+          <p:nvPr/>
+        </p:nvPicPr>
+        <p:blipFill>
+          <a:blip r:embed="rId3"/>
+          <a:stretch>
+            <a:fillRect/>
+          </a:stretch>
+        </p:blipFill>
+        <p:spPr>
+          <a:xfrm>
+            <a:off x="11226800" y="5969000"/>
+            <a:ext cx="713915" cy="711200"/>
+          </a:xfrm>
+          <a:prstGeom prst="rect">
+            <a:avLst/>
+          </a:prstGeom>
+        </p:spPr>
+      </p:pic>
+    </p:spTree>
+  </p:cSld>
+  <p:clrMapOvr>
+    <a:masterClrMapping/>
+  </p:clrMapOvr>
+</p:sld>
+</file>
+
+<file path=ppt/slides/slide31.xml><?xml version="1.0" encoding="utf-8"?>
+<p:sld xmlns:a="http://schemas.openxmlformats.org/drawingml/2006/main" xmlns:p="http://schemas.openxmlformats.org/presentationml/2006/main" xmlns:r="http://schemas.openxmlformats.org/officeDocument/2006/relationships">
+  <p:cSld>
+    <p:spTree>
+      <p:nvGrpSpPr>
+        <p:cNvPr id="1" name=""/>
+        <p:cNvGrpSpPr/>
+        <p:nvPr/>
+      </p:nvGrpSpPr>
+      <p:grpSpPr/>
+      <p:sp>
+        <p:nvSpPr>
+          <p:cNvPr id="2" name="Title 1"/>
+          <p:cNvSpPr>
+            <a:spLocks noGrp="1"/>
+          </p:cNvSpPr>
+          <p:nvPr>
             <p:ph type="ctrTitle"/>
           </p:nvPr>
         </p:nvSpPr>
@@ -12984,6 +13328,240 @@
 </file>
 
 <file path=ppt/slides/slide8.xml><?xml version="1.0" encoding="utf-8"?>
+<p:sld xmlns:a="http://schemas.openxmlformats.org/drawingml/2006/main" xmlns:p="http://schemas.openxmlformats.org/presentationml/2006/main" xmlns:r="http://schemas.openxmlformats.org/officeDocument/2006/relationships">
+  <p:cSld>
+    <p:spTree>
+      <p:nvGrpSpPr>
+        <p:cNvPr id="1" name=""/>
+        <p:cNvGrpSpPr/>
+        <p:nvPr/>
+      </p:nvGrpSpPr>
+      <p:grpSpPr/>
+      <p:sp>
+        <p:nvSpPr>
+          <p:cNvPr id="2" name="Title 1"/>
+          <p:cNvSpPr>
+            <a:spLocks noGrp="1"/>
+          </p:cNvSpPr>
+          <p:nvPr>
+            <p:ph type="title"/>
+          </p:nvPr>
+        </p:nvSpPr>
+        <p:spPr/>
+        <p:txBody>
+          <a:bodyPr/>
+          <a:lstStyle/>
+          <a:p>
+            <a:pPr marL="0" indent="0" algn="l">
+              <a:buNone/>
+            </a:pPr>
+            <a:r>
+              <a:rPr sz="3200" b="1">
+                <a:solidFill>
+                  <a:srgbClr val="000000"/>
+                </a:solidFill>
+                <a:latin typeface="Arial"/>
+              </a:rPr>
+              <a:t>PIN MAP</a:t>
+            </a:r>
+          </a:p>
+        </p:txBody>
+      </p:sp>
+      <p:sp>
+        <p:nvSpPr>
+          <p:cNvPr id="3" name="Text Placeholder 2"/>
+          <p:cNvSpPr>
+            <a:spLocks noGrp="1"/>
+          </p:cNvSpPr>
+          <p:nvPr>
+            <p:ph type="body" idx="1"/>
+          </p:nvPr>
+        </p:nvSpPr>
+        <p:spPr/>
+        <p:txBody>
+          <a:bodyPr/>
+          <a:lstStyle/>
+          <a:p>
+            <a:pPr marL="0" indent="0" algn="l">
+              <a:lnSpc>
+                <a:spcPct val="128000"/>
+              </a:lnSpc>
+              <a:spcAft>
+                <a:spcPts val="700"/>
+              </a:spcAft>
+              <a:buNone/>
+            </a:pPr>
+            <a:r>
+              <a:rPr sz="1300">
+                <a:solidFill>
+                  <a:srgbClr val="000000"/>
+                </a:solidFill>
+                <a:latin typeface="Consolas"/>
+              </a:rPr>
+              <a:t>01  spin    D9  PWM         1k to PN2222 base, motor on collector</a:t>
+            </a:r>
+          </a:p>
+          <a:p>
+            <a:pPr marL="0" indent="0" algn="l">
+              <a:spcAft>
+                <a:spcPts val="700"/>
+              </a:spcAft>
+              <a:buNone/>
+            </a:pPr>
+            <a:r>
+              <a:rPr sz="1300">
+                <a:solidFill>
+                  <a:srgbClr val="000000"/>
+                </a:solidFill>
+                <a:latin typeface="Consolas"/>
+              </a:rPr>
+              <a:t>02  tap     D6              MOSFET gate, own supply, grounds joined</a:t>
+            </a:r>
+          </a:p>
+          <a:p>
+            <a:pPr marL="0" indent="0" algn="l">
+              <a:spcAft>
+                <a:spcPts val="700"/>
+              </a:spcAft>
+              <a:buNone/>
+            </a:pPr>
+            <a:r>
+              <a:rPr sz="1300">
+                <a:solidFill>
+                  <a:srgbClr val="000000"/>
+                </a:solidFill>
+                <a:latin typeface="Consolas"/>
+              </a:rPr>
+              <a:t>03  warm    D3 + D5 PWM     H-bridge low and high, bench supply</a:t>
+            </a:r>
+          </a:p>
+          <a:p>
+            <a:pPr marL="0" indent="0" algn="l">
+              <a:spcAft>
+                <a:spcPts val="700"/>
+              </a:spcAft>
+              <a:buNone/>
+            </a:pPr>
+            <a:r>
+              <a:rPr sz="1300">
+                <a:solidFill>
+                  <a:srgbClr val="000000"/>
+                </a:solidFill>
+                <a:latin typeface="Consolas"/>
+              </a:rPr>
+              <a:t>04  sense   A0              bare wire to foil. That is all of it</a:t>
+            </a:r>
+          </a:p>
+          <a:p>
+            <a:pPr marL="0" indent="0" algn="l">
+              <a:spcAft>
+                <a:spcPts val="700"/>
+              </a:spcAft>
+              <a:buNone/>
+            </a:pPr>
+            <a:r>
+              <a:rPr sz="1300">
+                <a:solidFill>
+                  <a:srgbClr val="000000"/>
+                </a:solidFill>
+                <a:latin typeface="Consolas"/>
+              </a:rPr>
+              <a:t>05  answer  A0 + D9         the pad, plus any actuator</a:t>
+            </a:r>
+          </a:p>
+          <a:p>
+            <a:pPr marL="0" indent="0" algn="l">
+              <a:spcAft>
+                <a:spcPts val="700"/>
+              </a:spcAft>
+              <a:buNone/>
+            </a:pPr>
+            <a:r>
+              <a:rPr sz="1300">
+                <a:solidFill>
+                  <a:srgbClr val="000000"/>
+                </a:solidFill>
+                <a:latin typeface="Consolas"/>
+              </a:rPr>
+              <a:t>07  stepper D8 D9 D10 D11   ULN2003 IN1 to IN4</a:t>
+            </a:r>
+          </a:p>
+          <a:p>
+            <a:pPr marL="0" indent="0" algn="l">
+              <a:spcAft>
+                <a:spcPts val="0"/>
+              </a:spcAft>
+              <a:buNone/>
+            </a:pPr>
+            <a:r>
+              <a:rPr sz="1400" b="1">
+                <a:solidFill>
+                  <a:srgbClr val="002546"/>
+                </a:solidFill>
+                <a:latin typeface="Arial"/>
+              </a:rPr>
+              <a:t>Only D3, D5, D6, D9, D10, D11 do PWM. Stepper pins go into the constructor OUT of order: 8, 10, 9, 11.</a:t>
+            </a:r>
+          </a:p>
+        </p:txBody>
+      </p:sp>
+      <p:pic>
+        <p:nvPicPr>
+          <p:cNvPr id="4" name="Picture 3" descr="wordmark_dark.png"/>
+          <p:cNvPicPr>
+            <a:picLocks noChangeAspect="1"/>
+          </p:cNvPicPr>
+          <p:nvPr/>
+        </p:nvPicPr>
+        <p:blipFill>
+          <a:blip r:embed="rId2"/>
+          <a:stretch>
+            <a:fillRect/>
+          </a:stretch>
+        </p:blipFill>
+        <p:spPr>
+          <a:xfrm>
+            <a:off x="342900" y="6184900"/>
+            <a:ext cx="2070100" cy="529560"/>
+          </a:xfrm>
+          <a:prstGeom prst="rect">
+            <a:avLst/>
+          </a:prstGeom>
+        </p:spPr>
+      </p:pic>
+      <p:pic>
+        <p:nvPicPr>
+          <p:cNvPr id="5" name="Picture 4" descr="seal_dark.png"/>
+          <p:cNvPicPr>
+            <a:picLocks noChangeAspect="1"/>
+          </p:cNvPicPr>
+          <p:nvPr/>
+        </p:nvPicPr>
+        <p:blipFill>
+          <a:blip r:embed="rId3"/>
+          <a:stretch>
+            <a:fillRect/>
+          </a:stretch>
+        </p:blipFill>
+        <p:spPr>
+          <a:xfrm>
+            <a:off x="11226800" y="5969000"/>
+            <a:ext cx="713915" cy="711200"/>
+          </a:xfrm>
+          <a:prstGeom prst="rect">
+            <a:avLst/>
+          </a:prstGeom>
+        </p:spPr>
+      </p:pic>
+    </p:spTree>
+  </p:cSld>
+  <p:clrMapOvr>
+    <a:masterClrMapping/>
+  </p:clrMapOvr>
+</p:sld>
+</file>
+
+<file path=ppt/slides/slide9.xml><?xml version="1.0" encoding="utf-8"?>
 <p:sld xmlns:a="http://schemas.openxmlformats.org/drawingml/2006/main" xmlns:p="http://schemas.openxmlformats.org/presentationml/2006/main" xmlns:r="http://schemas.openxmlformats.org/officeDocument/2006/relationships">
   <p:cSld>
     <p:spTree>
@@ -13339,247 +13917,6 @@
           </a:p>
         </p:txBody>
       </p:sp>
-    </p:spTree>
-  </p:cSld>
-  <p:clrMapOvr>
-    <a:masterClrMapping/>
-  </p:clrMapOvr>
-</p:sld>
-</file>
-
-<file path=ppt/slides/slide9.xml><?xml version="1.0" encoding="utf-8"?>
-<p:sld xmlns:a="http://schemas.openxmlformats.org/drawingml/2006/main" xmlns:p="http://schemas.openxmlformats.org/presentationml/2006/main" xmlns:r="http://schemas.openxmlformats.org/officeDocument/2006/relationships">
-  <p:cSld>
-    <p:spTree>
-      <p:nvGrpSpPr>
-        <p:cNvPr id="1" name=""/>
-        <p:cNvGrpSpPr/>
-        <p:nvPr/>
-      </p:nvGrpSpPr>
-      <p:grpSpPr/>
-      <p:sp>
-        <p:nvSpPr>
-          <p:cNvPr id="2" name="Title 1"/>
-          <p:cNvSpPr>
-            <a:spLocks noGrp="1"/>
-          </p:cNvSpPr>
-          <p:nvPr>
-            <p:ph type="title"/>
-          </p:nvPr>
-        </p:nvSpPr>
-        <p:spPr/>
-        <p:txBody>
-          <a:bodyPr/>
-          <a:lstStyle/>
-          <a:p>
-            <a:pPr marL="0" indent="0" algn="l">
-              <a:buNone/>
-            </a:pPr>
-            <a:r>
-              <a:rPr sz="3200" b="1">
-                <a:solidFill>
-                  <a:srgbClr val="000000"/>
-                </a:solidFill>
-                <a:latin typeface="Arial"/>
-              </a:rPr>
-              <a:t>VIBRATING MINI MOTOR DISC</a:t>
-            </a:r>
-          </a:p>
-        </p:txBody>
-      </p:sp>
-      <p:sp>
-        <p:nvSpPr>
-          <p:cNvPr id="3" name="Text Placeholder 2"/>
-          <p:cNvSpPr>
-            <a:spLocks noGrp="1"/>
-          </p:cNvSpPr>
-          <p:nvPr>
-            <p:ph type="body" idx="1"/>
-          </p:nvPr>
-        </p:nvSpPr>
-        <p:spPr>
-          <a:xfrm>
-            <a:off x="5461000" y="1905000"/>
-            <a:ext cx="5486400" cy="3302000"/>
-          </a:xfrm>
-        </p:spPr>
-        <p:txBody>
-          <a:bodyPr/>
-          <a:lstStyle/>
-          <a:p>
-            <a:pPr marL="0" indent="0" algn="l">
-              <a:lnSpc>
-                <a:spcPct val="130000"/>
-              </a:lnSpc>
-              <a:spcAft>
-                <a:spcPts val="1200"/>
-              </a:spcAft>
-              <a:buNone/>
-            </a:pPr>
-            <a:r>
-              <a:rPr sz="1600" b="0">
-                <a:solidFill>
-                  <a:srgbClr val="000000"/>
-                </a:solidFill>
-                <a:latin typeface="Arial"/>
-              </a:rPr>
-              <a:t>An off-centre weight on a motor shaft, sealed in a disc. The same part as in your phone.</a:t>
-            </a:r>
-          </a:p>
-          <a:p>
-            <a:pPr marL="0" indent="0" algn="l">
-              <a:lnSpc>
-                <a:spcPct val="130000"/>
-              </a:lnSpc>
-              <a:spcAft>
-                <a:spcPts val="1400"/>
-              </a:spcAft>
-              <a:buNone/>
-            </a:pPr>
-            <a:r>
-              <a:rPr sz="1600" b="1">
-                <a:solidFill>
-                  <a:srgbClr val="002546"/>
-                </a:solidFill>
-                <a:latin typeface="Arial"/>
-              </a:rPr>
-              <a:t>Feels like: a buzz you cannot make gentle and fast at once.</a:t>
-            </a:r>
-          </a:p>
-          <a:p>
-            <a:pPr marL="0" indent="0" algn="l">
-              <a:lnSpc>
-                <a:spcPct val="130000"/>
-              </a:lnSpc>
-              <a:spcAft>
-                <a:spcPts val="400"/>
-              </a:spcAft>
-              <a:buNone/>
-            </a:pPr>
-            <a:r>
-              <a:rPr sz="900" b="1">
-                <a:solidFill>
-                  <a:srgbClr val="595959"/>
-                </a:solidFill>
-                <a:latin typeface="Arial"/>
-              </a:rPr>
-              <a:t>USED FOR</a:t>
-            </a:r>
-          </a:p>
-          <a:p>
-            <a:pPr marL="0" indent="0" algn="l">
-              <a:lnSpc>
-                <a:spcPct val="130000"/>
-              </a:lnSpc>
-              <a:spcAft>
-                <a:spcPts val="1400"/>
-              </a:spcAft>
-              <a:buNone/>
-            </a:pPr>
-            <a:r>
-              <a:rPr sz="1400" b="0">
-                <a:solidFill>
-                  <a:srgbClr val="000000"/>
-                </a:solidFill>
-                <a:latin typeface="Arial"/>
-              </a:rPr>
-              <a:t>Phone notifications, controller rumble, anything worn under clothing.</a:t>
-            </a:r>
-          </a:p>
-          <a:p>
-            <a:pPr marL="0" indent="0" algn="l">
-              <a:lnSpc>
-                <a:spcPct val="130000"/>
-              </a:lnSpc>
-              <a:spcAft>
-                <a:spcPts val="0"/>
-              </a:spcAft>
-              <a:buNone/>
-            </a:pPr>
-            <a:r>
-              <a:rPr sz="1200" b="0">
-                <a:solidFill>
-                  <a:srgbClr val="595959"/>
-                </a:solidFill>
-                <a:latin typeface="Consolas"/>
-              </a:rPr>
-              <a:t>1E  |  117  |  2.5-3.8V rated  |  100 mA at 5V  |  PWM</a:t>
-            </a:r>
-          </a:p>
-        </p:txBody>
-      </p:sp>
-      <p:pic>
-        <p:nvPicPr>
-          <p:cNvPr id="4" name="Picture 3" descr="erm.jpg"/>
-          <p:cNvPicPr>
-            <a:picLocks noChangeAspect="1"/>
-          </p:cNvPicPr>
-          <p:nvPr/>
-        </p:nvPicPr>
-        <p:blipFill>
-          <a:blip r:embed="rId2"/>
-          <a:stretch>
-            <a:fillRect/>
-          </a:stretch>
-        </p:blipFill>
-        <p:spPr>
-          <a:xfrm>
-            <a:off x="914400" y="1905000"/>
-            <a:ext cx="4191000" cy="3145410"/>
-          </a:xfrm>
-          <a:prstGeom prst="rect">
-            <a:avLst/>
-          </a:prstGeom>
-        </p:spPr>
-      </p:pic>
-      <p:pic>
-        <p:nvPicPr>
-          <p:cNvPr id="5" name="Picture 4" descr="wordmark_dark.png"/>
-          <p:cNvPicPr>
-            <a:picLocks noChangeAspect="1"/>
-          </p:cNvPicPr>
-          <p:nvPr/>
-        </p:nvPicPr>
-        <p:blipFill>
-          <a:blip r:embed="rId3"/>
-          <a:stretch>
-            <a:fillRect/>
-          </a:stretch>
-        </p:blipFill>
-        <p:spPr>
-          <a:xfrm>
-            <a:off x="342900" y="6184900"/>
-            <a:ext cx="2070100" cy="529560"/>
-          </a:xfrm>
-          <a:prstGeom prst="rect">
-            <a:avLst/>
-          </a:prstGeom>
-        </p:spPr>
-      </p:pic>
-      <p:pic>
-        <p:nvPicPr>
-          <p:cNvPr id="6" name="Picture 5" descr="seal_dark.png"/>
-          <p:cNvPicPr>
-            <a:picLocks noChangeAspect="1"/>
-          </p:cNvPicPr>
-          <p:nvPr/>
-        </p:nvPicPr>
-        <p:blipFill>
-          <a:blip r:embed="rId4"/>
-          <a:stretch>
-            <a:fillRect/>
-          </a:stretch>
-        </p:blipFill>
-        <p:spPr>
-          <a:xfrm>
-            <a:off x="11226800" y="5969000"/>
-            <a:ext cx="713915" cy="711200"/>
-          </a:xfrm>
-          <a:prstGeom prst="rect">
-            <a:avLst/>
-          </a:prstGeom>
-        </p:spPr>
-      </p:pic>
     </p:spTree>
   </p:cSld>
   <p:clrMapOvr>

--- a/docs/multimodal-actuator-workshop.pptx
+++ b/docs/multimodal-actuator-workshop.pptx
@@ -13204,10 +13204,19 @@
                 <a:spcPct val="128000"/>
               </a:lnSpc>
               <a:spcAft>
-                <a:spcPts val="0"/>
-              </a:spcAft>
-              <a:buNone/>
-            </a:pPr>
+                <a:spcPts val="400"/>
+              </a:spcAft>
+              <a:buNone/>
+            </a:pPr>
+            <a:r>
+              <a:rPr sz="1700" b="1">
+                <a:solidFill>
+                  <a:srgbClr val="000000"/>
+                </a:solidFill>
+                <a:latin typeface="Arial"/>
+              </a:rPr>
+              <a:t>A THINGS TO TRY list at the bottom</a:t>
+            </a:r>
           </a:p>
           <a:p>
             <a:pPr marL="0" indent="0" algn="l">
@@ -13220,13 +13229,33 @@
               <a:buNone/>
             </a:pPr>
             <a:r>
+              <a:rPr sz="1500" b="0">
+                <a:solidFill>
+                  <a:srgbClr val="000000"/>
+                </a:solidFill>
+                <a:latin typeface="Arial"/>
+              </a:rPr>
+              <a:t>• Four experiments. The last is the interesting one</a:t>
+            </a:r>
+          </a:p>
+          <a:p>
+            <a:pPr marL="0" indent="0" algn="l">
+              <a:lnSpc>
+                <a:spcPct val="128000"/>
+              </a:lnSpc>
+              <a:spcAft>
+                <a:spcPts val="400"/>
+              </a:spcAft>
+              <a:buNone/>
+            </a:pPr>
+            <a:r>
               <a:rPr sz="1700" b="1">
                 <a:solidFill>
                   <a:srgbClr val="000000"/>
                 </a:solidFill>
                 <a:latin typeface="Arial"/>
               </a:rPr>
-              <a:t>A THINGS TO TRY list at the bottom</a:t>
+              <a:t>Three of them also run in the browser</a:t>
             </a:r>
           </a:p>
           <a:p>
@@ -13246,27 +13275,7 @@
                 </a:solidFill>
                 <a:latin typeface="Arial"/>
               </a:rPr>
-              <a:t>• Four experiments, roughly in order of difficulty</a:t>
-            </a:r>
-          </a:p>
-          <a:p>
-            <a:pPr marL="0" indent="0" algn="l">
-              <a:lnSpc>
-                <a:spcPct val="128000"/>
-              </a:lnSpc>
-              <a:spcAft>
-                <a:spcPts val="400"/>
-              </a:spcAft>
-              <a:buNone/>
-            </a:pPr>
-            <a:r>
-              <a:rPr sz="1500" b="0">
-                <a:solidFill>
-                  <a:srgbClr val="000000"/>
-                </a:solidFill>
-                <a:latin typeface="Arial"/>
-              </a:rPr>
-              <a:t>• The last one is usually the interesting one</a:t>
+              <a:t>• wokwi/ in the repo. Same code, no hardware</a:t>
             </a:r>
           </a:p>
         </p:txBody>

--- a/docs/multimodal-actuator-workshop.pptx
+++ b/docs/multimodal-actuator-workshop.pptx
@@ -9434,26 +9434,6 @@
                 </a:solidFill>
                 <a:latin typeface="Arial"/>
               </a:rPr>
-              <a:t>reading &gt; baselineAverage() * 1.01</a:t>
-            </a:r>
-          </a:p>
-          <a:p>
-            <a:pPr marL="0" indent="0" algn="l">
-              <a:lnSpc>
-                <a:spcPct val="128000"/>
-              </a:lnSpc>
-              <a:spcAft>
-                <a:spcPts val="400"/>
-              </a:spcAft>
-              <a:buNone/>
-            </a:pPr>
-            <a:r>
-              <a:rPr sz="1700" b="1">
-                <a:solidFill>
-                  <a:srgbClr val="000000"/>
-                </a:solidFill>
-                <a:latin typeface="Arial"/>
-              </a:rPr>
               <a:t>Threshold is relative, never absolute</a:t>
             </a:r>
           </a:p>
@@ -10894,6 +10874,67 @@
           </a:prstGeom>
         </p:spPr>
       </p:pic>
+      <p:pic>
+        <p:nvPicPr>
+          <p:cNvPr id="6" name="Picture 5" descr="qr_sensors.png"/>
+          <p:cNvPicPr>
+            <a:picLocks noChangeAspect="1"/>
+          </p:cNvPicPr>
+          <p:nvPr/>
+        </p:nvPicPr>
+        <p:blipFill>
+          <a:blip r:embed="rId4"/>
+          <a:stretch>
+            <a:fillRect/>
+          </a:stretch>
+        </p:blipFill>
+        <p:spPr>
+          <a:xfrm>
+            <a:off x="8890000" y="2159000"/>
+            <a:ext cx="1600200" cy="1600200"/>
+          </a:xfrm>
+          <a:prstGeom prst="rect">
+            <a:avLst/>
+          </a:prstGeom>
+        </p:spPr>
+      </p:pic>
+      <p:sp>
+        <p:nvSpPr>
+          <p:cNvPr id="7" name="TextBox 6"/>
+          <p:cNvSpPr txBox="1"/>
+          <p:nvPr/>
+        </p:nvSpPr>
+        <p:spPr>
+          <a:xfrm>
+            <a:off x="8509000" y="3835400"/>
+            <a:ext cx="2362200" cy="304800"/>
+          </a:xfrm>
+          <a:prstGeom prst="rect">
+            <a:avLst/>
+          </a:prstGeom>
+          <a:noFill/>
+        </p:spPr>
+        <p:txBody>
+          <a:bodyPr wrap="square" lIns="0" rIns="0" tIns="0" bIns="0">
+            <a:spAutoFit/>
+          </a:bodyPr>
+          <a:lstStyle/>
+          <a:p>
+            <a:pPr algn="ctr" marL="0" indent="0">
+              <a:buNone/>
+            </a:pPr>
+            <a:r>
+              <a:rPr sz="900">
+                <a:solidFill>
+                  <a:srgbClr val="595959"/>
+                </a:solidFill>
+                <a:latin typeface="Arial"/>
+              </a:rPr>
+              <a:t>sensors.chomskylab.dk</a:t>
+            </a:r>
+          </a:p>
+        </p:txBody>
+      </p:sp>
     </p:spTree>
   </p:cSld>
   <p:clrMapOvr>
@@ -12256,7 +12297,7 @@
                 </a:solidFill>
                 <a:latin typeface="Arial"/>
               </a:rPr>
-              <a:t>github.com/labtools-au/multimodal-actuator-workshop</a:t>
+              <a:t>Everything is open: code, slides and session plan</a:t>
             </a:r>
           </a:p>
         </p:txBody>
@@ -12309,6 +12350,77 @@
           </a:prstGeom>
         </p:spPr>
       </p:pic>
+      <p:pic>
+        <p:nvPicPr>
+          <p:cNvPr id="6" name="Picture 5" descr="qr_repo.png"/>
+          <p:cNvPicPr>
+            <a:picLocks noChangeAspect="1"/>
+          </p:cNvPicPr>
+          <p:nvPr/>
+        </p:nvPicPr>
+        <p:blipFill>
+          <a:blip r:embed="rId4"/>
+          <a:stretch>
+            <a:fillRect/>
+          </a:stretch>
+        </p:blipFill>
+        <p:spPr>
+          <a:xfrm>
+            <a:off x="9271000" y="3810000"/>
+            <a:ext cx="1498600" cy="1498600"/>
+          </a:xfrm>
+          <a:prstGeom prst="rect">
+            <a:avLst/>
+          </a:prstGeom>
+        </p:spPr>
+      </p:pic>
+      <p:sp>
+        <p:nvSpPr>
+          <p:cNvPr id="7" name="TextBox 6"/>
+          <p:cNvSpPr txBox="1"/>
+          <p:nvPr/>
+        </p:nvSpPr>
+        <p:spPr>
+          <a:xfrm>
+            <a:off x="8890000" y="5384800"/>
+            <a:ext cx="2260600" cy="304800"/>
+          </a:xfrm>
+          <a:prstGeom prst="rect">
+            <a:avLst/>
+          </a:prstGeom>
+          <a:noFill/>
+        </p:spPr>
+        <p:txBody>
+          <a:bodyPr wrap="square" lIns="0" rIns="0" tIns="0" bIns="0">
+            <a:spAutoFit/>
+          </a:bodyPr>
+          <a:lstStyle/>
+          <a:p>
+            <a:pPr algn="ctr" marL="0" indent="0">
+              <a:buNone/>
+            </a:pPr>
+            <a:r>
+              <a:rPr sz="900">
+                <a:solidFill>
+                  <a:srgbClr val="C8D2DC"/>
+                </a:solidFill>
+                <a:latin typeface="Arial"/>
+              </a:rPr>
+              <a:t>github.com/labtools-au/</a:t>
+            </a:r>
+            <a:br/>
+            <a:r>
+              <a:rPr sz="900">
+                <a:solidFill>
+                  <a:srgbClr val="C8D2DC"/>
+                </a:solidFill>
+                <a:latin typeface="Arial"/>
+              </a:rPr>
+              <a:t>multimodal-actuator-workshop</a:t>
+            </a:r>
+          </a:p>
+        </p:txBody>
+      </p:sp>
     </p:spTree>
   </p:cSld>
   <p:clrMapOvr>

--- a/docs/multimodal-actuator-workshop.pptx
+++ b/docs/multimodal-actuator-workshop.pptx
@@ -2952,28 +2952,55 @@
           <a:p/>
           <a:p>
             <a:r>
-              <a:t>A board each. Five tasks. Everything pre-wired. They upload, change numbers,</a:t>
-            </a:r>
-          </a:p>
-          <a:p>
-            <a:r>
-              <a:t>upload again.</a:t>
+              <a:t>A board each, and they build the circuits themselves from an empty breadboard.</a:t>
+            </a:r>
+          </a:p>
+          <a:p>
+            <a:r>
+              <a:t>Say that plainly, because a room of computer scientists will assume the</a:t>
+            </a:r>
+          </a:p>
+          <a:p>
+            <a:r>
+              <a:t>hardware is someone else's problem and wait to be handed a working rig.</a:t>
             </a:r>
           </a:p>
           <a:p/>
           <a:p>
             <a:r>
-              <a:t>The actuators they are NOT driving sit on tables around the room. Tell them</a:t>
-            </a:r>
-          </a:p>
-          <a:p>
-            <a:r>
-              <a:t>explicitly to go and pick those up between tasks. The comparison still happens,</a:t>
-            </a:r>
-          </a:p>
-          <a:p>
-            <a:r>
-              <a:t>just on their own initiative rather than on a timer.</a:t>
+              <a:t>Two or three stations each, in rising difficulty. Nobody builds all six.</a:t>
+            </a:r>
+          </a:p>
+          <a:p/>
+          <a:p>
+            <a:r>
+              <a:t>The ladder does the teaching: task 00 is two wires, task 04 is one, task 05</a:t>
+            </a:r>
+          </a:p>
+          <a:p>
+            <a:r>
+              <a:t>joins them, and only then does task 01 introduce a transistor. By the time</a:t>
+            </a:r>
+          </a:p>
+          <a:p>
+            <a:r>
+              <a:t>they meet a driver circuit they have already had three things work, which is</a:t>
+            </a:r>
+          </a:p>
+          <a:p>
+            <a:r>
+              <a:t>what makes them willing to debug the fourth.</a:t>
+            </a:r>
+          </a:p>
+          <a:p/>
+          <a:p>
+            <a:r>
+              <a:t>The actuators they are NOT building sit on tables at the front. Tell them</a:t>
+            </a:r>
+          </a:p>
+          <a:p>
+            <a:r>
+              <a:t>explicitly to go and pick those up between builds.</a:t>
             </a:r>
           </a:p>
         </p:txBody>
@@ -3049,17 +3076,39 @@
           <a:p/>
           <a:p>
             <a:r>
-              <a:t>The one hard checkpoint is 0:25. Everyone should have task 01 running by then.</a:t>
-            </a:r>
-          </a:p>
-          <a:p>
-            <a:r>
-              <a:t>If someone is still fighting drivers at 0:30, pair them with a group that is</a:t>
-            </a:r>
-          </a:p>
-          <a:p>
-            <a:r>
-              <a:t>working rather than debugging it alone.</a:t>
+              <a:t>Two hard checkpoints. At 0:20 every single person should have a piezo ticking,</a:t>
+            </a:r>
+          </a:p>
+          <a:p>
+            <a:r>
+              <a:t>because that is two wires and if it is not working the problem is the board or</a:t>
+            </a:r>
+          </a:p>
+          <a:p>
+            <a:r>
+              <a:t>the IDE, not the circuit. Fix those before anyone meets a transistor.</a:t>
+            </a:r>
+          </a:p>
+          <a:p/>
+          <a:p>
+            <a:r>
+              <a:t>At 0:40 most people should have task 01 buzzing. If someone is still fighting</a:t>
+            </a:r>
+          </a:p>
+          <a:p>
+            <a:r>
+              <a:t>it, pair them with a working group rather than leaving them to debug alone.</a:t>
+            </a:r>
+          </a:p>
+          <a:p/>
+          <a:p>
+            <a:r>
+              <a:t>Walk the room during the 45 minute block. Look for reversed diodes and</a:t>
+            </a:r>
+          </a:p>
+          <a:p>
+            <a:r>
+              <a:t>transistors in backwards; both fail silently and neither is guessable.</a:t>
             </a:r>
           </a:p>
         </p:txBody>
@@ -3135,28 +3184,49 @@
           <a:p/>
           <a:p>
             <a:r>
-              <a:t>Name the arc, it is the point: 1 to 3 are output, 4 is input, 5 is both. By</a:t>
-            </a:r>
-          </a:p>
-          <a:p>
-            <a:r>
-              <a:t>task 5 they have built a complete interaction loop, which is the shape of most</a:t>
-            </a:r>
-          </a:p>
-          <a:p>
-            <a:r>
-              <a:t>project work.</a:t>
+              <a:t>Read it as a ladder, because that is what it is. The top three need no</a:t>
+            </a:r>
+          </a:p>
+          <a:p>
+            <a:r>
+              <a:t>transistor at all: piezo, foil pad, then the two joined together. That is a</a:t>
+            </a:r>
+          </a:p>
+          <a:p>
+            <a:r>
+              <a:t>complete sense-and-respond loop built from three wires, and they can have it</a:t>
+            </a:r>
+          </a:p>
+          <a:p>
+            <a:r>
+              <a:t>working inside twenty minutes.</a:t>
             </a:r>
           </a:p>
           <a:p/>
           <a:p>
             <a:r>
-              <a:t>Say clearly that nobody is expected to finish all five. Getting 01 working and</a:t>
-            </a:r>
-          </a:p>
-          <a:p>
-            <a:r>
-              <a:t>then properly playing with 02 beats rushing all of them.</a:t>
+              <a:t>The bottom three each add exactly one new idea. Task 01 adds a transistor and</a:t>
+            </a:r>
+          </a:p>
+          <a:p>
+            <a:r>
+              <a:t>a flyback diode, because a motor draws 100 mA and a pin gives 40. Task 02 adds</a:t>
+            </a:r>
+          </a:p>
+          <a:p>
+            <a:r>
+              <a:t>a separate supply. Task 03 adds an H-bridge for direction.</a:t>
+            </a:r>
+          </a:p>
+          <a:p/>
+          <a:p>
+            <a:r>
+              <a:t>Say clearly that nobody is expected to do all six, and that two done properly</a:t>
+            </a:r>
+          </a:p>
+          <a:p>
+            <a:r>
+              <a:t>beats five rushed.</a:t>
             </a:r>
           </a:p>
           <a:p/>
@@ -3238,7 +3308,18 @@
           <a:p/>
           <a:p>
             <a:r>
-              <a:t>CHANGE ME at the top: two or three numbers, already set to something that</a:t>
+              <a:t>PINS at the very top: every leg and every wire. That block is what they build</a:t>
+            </a:r>
+          </a:p>
+          <a:p>
+            <a:r>
+              <a:t>from, and it is why nobody needs a schematic. Point at it explicitly.</a:t>
+            </a:r>
+          </a:p>
+          <a:p/>
+          <a:p>
+            <a:r>
+              <a:t>CHANGE ME below that: two or three numbers, already set to something that</a:t>
             </a:r>
           </a:p>
           <a:p>
@@ -11382,7 +11463,7 @@
                 </a:solidFill>
                 <a:latin typeface="Arial"/>
               </a:rPr>
-              <a:t>One actuator. Three messages</a:t>
+              <a:t>One actuator, whichever you built</a:t>
             </a:r>
           </a:p>
           <a:p>
@@ -11402,7 +11483,7 @@
                 </a:solidFill>
                 <a:latin typeface="Arial"/>
               </a:rPr>
-              <a:t>• Arrived. Something wrong. Finished</a:t>
+              <a:t>• Three messages: arrived, something wrong, finished</a:t>
             </a:r>
           </a:p>
           <a:p>
@@ -11422,7 +11503,7 @@
                 </a:solidFill>
                 <a:latin typeface="Arial"/>
               </a:rPr>
-              <a:t>Vary two things only</a:t>
+              <a:t>Vary rhythm above all</a:t>
             </a:r>
           </a:p>
           <a:p>
@@ -11442,7 +11523,7 @@
                 </a:solidFill>
                 <a:latin typeface="Arial"/>
               </a:rPr>
-              <a:t>• Rhythm of the pulses, and how strong they are</a:t>
+              <a:t>• Piezo: rhythm is all you have. Motor: strength too</a:t>
             </a:r>
           </a:p>
           <a:p>
@@ -12500,7 +12581,7 @@
                 </a:solidFill>
                 <a:latin typeface="Arial"/>
               </a:rPr>
-              <a:t>A board each, five tasks, everything pre-wired</a:t>
+              <a:t>A board each. You build the circuits yourself</a:t>
             </a:r>
           </a:p>
           <a:p>
@@ -12520,7 +12601,7 @@
                 </a:solidFill>
                 <a:latin typeface="Arial"/>
               </a:rPr>
-              <a:t>• Upload, change two numbers, upload again</a:t>
+              <a:t>• Every part, every wire, from an empty breadboard</a:t>
             </a:r>
           </a:p>
           <a:p>
@@ -12534,13 +12615,33 @@
               <a:buNone/>
             </a:pPr>
             <a:r>
+              <a:rPr sz="1700" b="1">
+                <a:solidFill>
+                  <a:srgbClr val="000000"/>
+                </a:solidFill>
+                <a:latin typeface="Arial"/>
+              </a:rPr>
+              <a:t>Two or three stations each, getting harder</a:t>
+            </a:r>
+          </a:p>
+          <a:p>
+            <a:pPr marL="0" indent="0" algn="l">
+              <a:lnSpc>
+                <a:spcPct val="128000"/>
+              </a:lnSpc>
+              <a:spcAft>
+                <a:spcPts val="400"/>
+              </a:spcAft>
+              <a:buNone/>
+            </a:pPr>
+            <a:r>
               <a:rPr sz="1500" b="0">
                 <a:solidFill>
                   <a:srgbClr val="000000"/>
                 </a:solidFill>
                 <a:latin typeface="Arial"/>
               </a:rPr>
-              <a:t>• You wire nothing today</a:t>
+              <a:t>• Start with two wires. End with a transistor</a:t>
             </a:r>
           </a:p>
           <a:p>
@@ -12580,7 +12681,7 @@
                 </a:solidFill>
                 <a:latin typeface="Arial"/>
               </a:rPr>
-              <a:t>• Go and feel the ones your task does not use</a:t>
+              <a:t>• Go and feel the ones you did not build</a:t>
             </a:r>
           </a:p>
           <a:p>
@@ -12772,7 +12873,7 @@
                 </a:solidFill>
                 <a:latin typeface="Consolas"/>
               </a:rPr>
-              <a:t>0:10     15 min    Boards out, task 01 running for everyone</a:t>
+              <a:t>0:10     10 min    Breadboards out. Piezo: two wires, everyone</a:t>
             </a:r>
           </a:p>
           <a:p>
@@ -12792,7 +12893,27 @@
                 </a:solidFill>
                 <a:latin typeface="Consolas"/>
               </a:rPr>
-              <a:t>0:25     60 min    Tasks 02 to 05, at your own pace</a:t>
+              <a:t>0:20     20 min    Task 01: your first driver circuit, together</a:t>
+            </a:r>
+          </a:p>
+          <a:p>
+            <a:pPr marL="0" indent="0" algn="l">
+              <a:lnSpc>
+                <a:spcPct val="128000"/>
+              </a:lnSpc>
+              <a:spcAft>
+                <a:spcPts val="1200"/>
+              </a:spcAft>
+              <a:buNone/>
+            </a:pPr>
+            <a:r>
+              <a:rPr sz="1400" b="0">
+                <a:solidFill>
+                  <a:srgbClr val="000000"/>
+                </a:solidFill>
+                <a:latin typeface="Consolas"/>
+              </a:rPr>
+              <a:t>0:40     45 min    Build on, at your own pace</a:t>
             </a:r>
           </a:p>
           <a:p>
@@ -12948,7 +13069,7 @@
                 </a:solidFill>
                 <a:latin typeface="Arial"/>
               </a:rPr>
-              <a:t>FIVE TASKS, ONE BOARD EACH</a:t>
+              <a:t>THE TASKS, IN BUILD ORDER</a:t>
             </a:r>
           </a:p>
         </p:txBody>
@@ -12984,7 +13105,7 @@
                 </a:solidFill>
                 <a:latin typeface="Arial"/>
               </a:rPr>
-              <a:t>Upload, change two numbers, upload again. That loop is the point.</a:t>
+              <a:t>Each one adds a single new thing to the circuit before it.</a:t>
             </a:r>
           </a:p>
           <a:p>
@@ -13004,7 +13125,7 @@
                 </a:solidFill>
                 <a:latin typeface="Arial"/>
               </a:rPr>
-              <a:t>01   Make something spin        coin motor</a:t>
+              <a:t>00   Make it tick        piezo             2 wires</a:t>
             </a:r>
           </a:p>
           <a:p>
@@ -13024,7 +13145,7 @@
                 </a:solidFill>
                 <a:latin typeface="Arial"/>
               </a:rPr>
-              <a:t>02   Make something tap         solenoid</a:t>
+              <a:t>04   Make it notice you  wire and foil     1 wire</a:t>
             </a:r>
           </a:p>
           <a:p>
@@ -13044,7 +13165,7 @@
                 </a:solidFill>
                 <a:latin typeface="Arial"/>
               </a:rPr>
-              <a:t>03   Make something warm        Peltier tile</a:t>
+              <a:t>05   Make it answer      both of the above 3 wires</a:t>
             </a:r>
           </a:p>
           <a:p>
@@ -13053,6 +13174,17 @@
                 <a:spcPct val="128000"/>
               </a:lnSpc>
               <a:spcAft>
+                <a:spcPts val="0"/>
+              </a:spcAft>
+              <a:buNone/>
+            </a:pPr>
+          </a:p>
+          <a:p>
+            <a:pPr marL="0" indent="0" algn="l">
+              <a:lnSpc>
+                <a:spcPct val="128000"/>
+              </a:lnSpc>
+              <a:spcAft>
                 <a:spcPts val="400"/>
               </a:spcAft>
               <a:buNone/>
@@ -13064,7 +13196,7 @@
                 </a:solidFill>
                 <a:latin typeface="Arial"/>
               </a:rPr>
-              <a:t>04   Make it notice you         a wire and foil</a:t>
+              <a:t>01   Make something spin coin motor        + transistor</a:t>
             </a:r>
           </a:p>
           <a:p>
@@ -13084,7 +13216,7 @@
                 </a:solidFill>
                 <a:latin typeface="Arial"/>
               </a:rPr>
-              <a:t>05   Make it answer back        both together</a:t>
+              <a:t>02   Make something tap  solenoid          + own supply</a:t>
             </a:r>
           </a:p>
           <a:p>
@@ -13104,7 +13236,7 @@
                 </a:solidFill>
                 <a:latin typeface="Arial"/>
               </a:rPr>
-              <a:t>06   Use what you have          sensors.chomskylab.dk</a:t>
+              <a:t>03   Make something warm Peltier tile      + H-bridge</a:t>
             </a:r>
           </a:p>
           <a:p>
@@ -13135,7 +13267,7 @@
                 </a:solidFill>
                 <a:latin typeface="Arial"/>
               </a:rPr>
-              <a:t>1 to 3 output, 4 input, 5 both. Nobody finishes all six.</a:t>
+              <a:t>Two or three each. Nobody does all of them.</a:t>
             </a:r>
           </a:p>
         </p:txBody>
@@ -13267,7 +13399,7 @@
                 </a:solidFill>
                 <a:latin typeface="Arial"/>
               </a:rPr>
-              <a:t>Every sketch runs the moment you upload it. Nothing to wire. All of them: github.com/labtools-au/multimodal-actuator-workshop</a:t>
+              <a:t>Wire it from the diagram at the top, then upload. All of them: github.com/labtools-au/multimodal-actuator-workshop</a:t>
             </a:r>
           </a:p>
           <a:p>
@@ -13287,7 +13419,7 @@
                 </a:solidFill>
                 <a:latin typeface="Arial"/>
               </a:rPr>
-              <a:t>A CHANGE ME block at the top</a:t>
+              <a:t>A PINS block at the very top</a:t>
             </a:r>
           </a:p>
           <a:p>
@@ -13307,6 +13439,46 @@
                 </a:solidFill>
                 <a:latin typeface="Arial"/>
               </a:rPr>
+              <a:t>• Every leg, every wire. Build from that, not from memory</a:t>
+            </a:r>
+          </a:p>
+          <a:p>
+            <a:pPr marL="0" indent="0" algn="l">
+              <a:lnSpc>
+                <a:spcPct val="128000"/>
+              </a:lnSpc>
+              <a:spcAft>
+                <a:spcPts val="400"/>
+              </a:spcAft>
+              <a:buNone/>
+            </a:pPr>
+            <a:r>
+              <a:rPr sz="1700" b="1">
+                <a:solidFill>
+                  <a:srgbClr val="000000"/>
+                </a:solidFill>
+                <a:latin typeface="Arial"/>
+              </a:rPr>
+              <a:t>A CHANGE ME block below it</a:t>
+            </a:r>
+          </a:p>
+          <a:p>
+            <a:pPr marL="0" indent="0" algn="l">
+              <a:lnSpc>
+                <a:spcPct val="128000"/>
+              </a:lnSpc>
+              <a:spcAft>
+                <a:spcPts val="400"/>
+              </a:spcAft>
+              <a:buNone/>
+            </a:pPr>
+            <a:r>
+              <a:rPr sz="1500" b="0">
+                <a:solidFill>
+                  <a:srgbClr val="000000"/>
+                </a:solidFill>
+                <a:latin typeface="Arial"/>
+              </a:rPr>
               <a:t>• Two or three numbers. Edit, upload, feel the difference</a:t>
             </a:r>
           </a:p>
@@ -13348,46 +13520,6 @@
                 <a:latin typeface="Arial"/>
               </a:rPr>
               <a:t>• Four experiments. The last is the interesting one</a:t>
-            </a:r>
-          </a:p>
-          <a:p>
-            <a:pPr marL="0" indent="0" algn="l">
-              <a:lnSpc>
-                <a:spcPct val="128000"/>
-              </a:lnSpc>
-              <a:spcAft>
-                <a:spcPts val="400"/>
-              </a:spcAft>
-              <a:buNone/>
-            </a:pPr>
-            <a:r>
-              <a:rPr sz="1700" b="1">
-                <a:solidFill>
-                  <a:srgbClr val="000000"/>
-                </a:solidFill>
-                <a:latin typeface="Arial"/>
-              </a:rPr>
-              <a:t>Three of them also run in the browser</a:t>
-            </a:r>
-          </a:p>
-          <a:p>
-            <a:pPr marL="0" indent="0" algn="l">
-              <a:lnSpc>
-                <a:spcPct val="128000"/>
-              </a:lnSpc>
-              <a:spcAft>
-                <a:spcPts val="400"/>
-              </a:spcAft>
-              <a:buNone/>
-            </a:pPr>
-            <a:r>
-              <a:rPr sz="1500" b="0">
-                <a:solidFill>
-                  <a:srgbClr val="000000"/>
-                </a:solidFill>
-                <a:latin typeface="Arial"/>
-              </a:rPr>
-              <a:t>• wokwi/ in the repo. Same code, no hardware</a:t>
             </a:r>
           </a:p>
         </p:txBody>

--- a/docs/multimodal-actuator-workshop.pptx
+++ b/docs/multimodal-actuator-workshop.pptx
@@ -13178,6 +13178,26 @@
               </a:spcAft>
               <a:buNone/>
             </a:pPr>
+          </a:p>
+          <a:p>
+            <a:pPr marL="0" indent="0" algn="l">
+              <a:lnSpc>
+                <a:spcPct val="128000"/>
+              </a:lnSpc>
+              <a:spcAft>
+                <a:spcPts val="400"/>
+              </a:spcAft>
+              <a:buNone/>
+            </a:pPr>
+            <a:r>
+              <a:rPr sz="1700" b="1">
+                <a:solidFill>
+                  <a:srgbClr val="000000"/>
+                </a:solidFill>
+                <a:latin typeface="Arial"/>
+              </a:rPr>
+              <a:t>07   Make it turn       stepper           6 wires, a trap</a:t>
+            </a:r>
           </a:p>
           <a:p>
             <a:pPr marL="0" indent="0" algn="l">

--- a/docs/multimodal-actuator-workshop.pptx
+++ b/docs/multimodal-actuator-workshop.pptx
@@ -31,11 +31,6 @@
     <p:sldId id="279" r:id="rId30"/>
     <p:sldId id="280" r:id="rId31"/>
     <p:sldId id="281" r:id="rId32"/>
-    <p:sldId id="282" r:id="rId33"/>
-    <p:sldId id="283" r:id="rId34"/>
-    <p:sldId id="284" r:id="rId35"/>
-    <p:sldId id="285" r:id="rId36"/>
-    <p:sldId id="286" r:id="rId37"/>
   </p:sldIdLst>
   <p:sldSz cx="12188952" cy="6858000" type="screen4x3"/>
   <p:notesSz cx="6858000" cy="9144000"/>
@@ -629,18 +624,50 @@
           <a:lstStyle/>
           <a:p>
             <a:r>
-              <a:t>The one everybody already owns without knowing it. Every phone has one.</a:t>
+              <a:t>First actuator and first build, so keep it short and get them moving.</a:t>
             </a:r>
           </a:p>
           <a:p/>
           <a:p>
             <a:r>
-              <a:t>The point worth making: speed and strength are welded together. That single</a:t>
-            </a:r>
-          </a:p>
-          <a:p>
-            <a:r>
-              <a:t>constraint is why the other five exist.</a:t>
+              <a:t>A crystal that flexes when you put current across it. Near-instant, almost no</a:t>
+            </a:r>
+          </a:p>
+          <a:p>
+            <a:r>
+              <a:t>power, but shallow. A tick, not a thump.</a:t>
+            </a:r>
+          </a:p>
+          <a:p/>
+          <a:p>
+            <a:r>
+              <a:t>Two wires and no driver, because a piezo is a capacitor and draws almost</a:t>
+            </a:r>
+          </a:p>
+          <a:p>
+            <a:r>
+              <a:t>nothing. That is the honest reason it is first, and it is worth saying: when</a:t>
+            </a:r>
+          </a:p>
+          <a:p>
+            <a:r>
+              <a:t>this works, their board, cable, port and IDE are all proven, so every later</a:t>
+            </a:r>
+          </a:p>
+          <a:p>
+            <a:r>
+              <a:t>failure is in the circuit they built.</a:t>
+            </a:r>
+          </a:p>
+          <a:p/>
+          <a:p>
+            <a:r>
+              <a:t>Tell them to press it flat against the table. It gets much louder, because the</a:t>
+            </a:r>
+          </a:p>
+          <a:p>
+            <a:r>
+              <a:t>table becomes the diaphragm. Same effect the surface transducer uses.</a:t>
             </a:r>
           </a:p>
         </p:txBody>
@@ -710,23 +737,44 @@
           <a:lstStyle/>
           <a:p>
             <a:r>
-              <a:t>The escape from the coin motor's compromise. A crystal that flexes when</a:t>
-            </a:r>
-          </a:p>
-          <a:p>
-            <a:r>
-              <a:t>you put current across it: near-instant, almost no power, but shallow.</a:t>
+              <a:t>Hold up a wire and a piece of foil. That is genuinely the whole sensor.</a:t>
             </a:r>
           </a:p>
           <a:p/>
           <a:p>
             <a:r>
-              <a:t>A tick, not a thump. Point anyone here who needs something to feel responsive</a:t>
-            </a:r>
-          </a:p>
-          <a:p>
-            <a:r>
-              <a:t>rather than just present. 69 in the drawer, so nobody has to share.</a:t>
+              <a:t>This is the slide that changes what people think is possible, because it costs</a:t>
+            </a:r>
+          </a:p>
+          <a:p>
+            <a:r>
+              <a:t>nothing and hides completely inside a prototype.</a:t>
+            </a:r>
+          </a:p>
+          <a:p/>
+          <a:p>
+            <a:r>
+              <a:t>Two things to say now rather than when it bites. Keep the board on laptop USB:</a:t>
+            </a:r>
+          </a:p>
+          <a:p>
+            <a:r>
+              <a:t>the sensing measures your body against the board's ground and that reference</a:t>
+            </a:r>
+          </a:p>
+          <a:p>
+            <a:r>
+              <a:t>arrives through the mains earth, so on a charger or a battery it goes unstable</a:t>
+            </a:r>
+          </a:p>
+          <a:p>
+            <a:r>
+              <a:t>or dead with nothing visibly wrong. And hands off the pad while it boots, or it</a:t>
+            </a:r>
+          </a:p>
+          <a:p>
+            <a:r>
+              <a:t>learns that a finger is the resting state and then nothing ever triggers.</a:t>
             </a:r>
           </a:p>
         </p:txBody>
@@ -796,23 +844,55 @@
           <a:lstStyle/>
           <a:p>
             <a:r>
-              <a:t>Pass this one around if you can. It is the one people remember, because a</a:t>
-            </a:r>
-          </a:p>
-          <a:p>
-            <a:r>
-              <a:t>knock reads as a person rather than a machine.</a:t>
+              <a:t>The precision option, and the only actuator here that goes to a POSITION</a:t>
+            </a:r>
+          </a:p>
+          <a:p>
+            <a:r>
+              <a:t>rather than a state. 2048 steps per revolution, no feedback sensor needed.</a:t>
             </a:r>
           </a:p>
           <a:p/>
           <a:p>
             <a:r>
-              <a:t>Warn them now that it needs its own supply, so it does not come as a surprise</a:t>
-            </a:r>
-          </a:p>
-          <a:p>
-            <a:r>
-              <a:t>at task 02.</a:t>
+              <a:t>Two things will bite, so say both before they start.</a:t>
+            </a:r>
+          </a:p>
+          <a:p/>
+          <a:p>
+            <a:r>
+              <a:t>The constructor does NOT take the pins in numeric order. Wire IN1 to IN4 on</a:t>
+            </a:r>
+          </a:p>
+          <a:p>
+            <a:r>
+              <a:t>pins 8 to 11, then write Stepper(2048, 8, 10, 9, 11). Get it wrong and it</a:t>
+            </a:r>
+          </a:p>
+          <a:p>
+            <a:r>
+              <a:t>buzzes and jitters instead of turning, which looks exactly like a dead motor.</a:t>
+            </a:r>
+          </a:p>
+          <a:p/>
+          <a:p>
+            <a:r>
+              <a:t>Give the driver its own 5V supply. Each coil pulls about 240 mA and the board</a:t>
+            </a:r>
+          </a:p>
+          <a:p>
+            <a:r>
+              <a:t>holds them energised even at rest, which is more than the Uno's 5V pin should</a:t>
+            </a:r>
+          </a:p>
+          <a:p>
+            <a:r>
+              <a:t>carry. The symptom is misleading: the driver LEDs light in sequence while the</a:t>
+            </a:r>
+          </a:p>
+          <a:p>
+            <a:r>
+              <a:t>shaft never moves, because LEDs need a few mA and coils need hundreds.</a:t>
             </a:r>
           </a:p>
         </p:txBody>
@@ -882,18 +962,65 @@
           <a:lstStyle/>
           <a:p>
             <a:r>
-              <a:t>Hold up a wire and a piece of foil. That is genuinely the whole sensor.</a:t>
+              <a:t>Ninety seconds, and do not read the list. The purpose is permission, not</a:t>
+            </a:r>
+          </a:p>
+          <a:p>
+            <a:r>
+              <a:t>coverage.</a:t>
             </a:r>
           </a:p>
           <a:p/>
           <a:p>
             <a:r>
-              <a:t>This is the slide that changes what people think is possible, because it costs</a:t>
-            </a:r>
-          </a:p>
-          <a:p>
-            <a:r>
-              <a:t>nothing and hides completely inside a prototype.</a:t>
+              <a:t>They are building three things today. This slide says the drawers hold a lot</a:t>
+            </a:r>
+          </a:p>
+          <a:p>
+            <a:r>
+              <a:t>more, so nobody designs a project around a coin motor just because it was the</a:t>
+            </a:r>
+          </a:p>
+          <a:p>
+            <a:r>
+              <a:t>one on the slide.</a:t>
+            </a:r>
+          </a:p>
+          <a:p/>
+          <a:p>
+            <a:r>
+              <a:t>Point out that tasks 01 to 03 are already in the repo with working code and</a:t>
+            </a:r>
+          </a:p>
+          <a:p>
+            <a:r>
+              <a:t>wiring for the motor, the solenoid and the Peltier tile. They can pick those up</a:t>
+            </a:r>
+          </a:p>
+          <a:p>
+            <a:r>
+              <a:t>in project weeks without starting from nothing.</a:t>
+            </a:r>
+          </a:p>
+          <a:p/>
+          <a:p>
+            <a:r>
+              <a:t>If someone asks which to use for a project: the solenoid is the one people</a:t>
+            </a:r>
+          </a:p>
+          <a:p>
+            <a:r>
+              <a:t>remember, because a knock reads as a person rather than a machine. The Peltier</a:t>
+            </a:r>
+          </a:p>
+          <a:p>
+            <a:r>
+              <a:t>is slow and wrong for alerts, right for ambient state. Say that now and it</a:t>
+            </a:r>
+          </a:p>
+          <a:p>
+            <a:r>
+              <a:t>saves someone finding out in week 46.</a:t>
             </a:r>
           </a:p>
         </p:txBody>
@@ -963,23 +1090,55 @@
           <a:lstStyle/>
           <a:p>
             <a:r>
-              <a:t>Say the honest limitation out loud: it is slow, and hot alternating with</a:t>
-            </a:r>
-          </a:p>
-          <a:p>
-            <a:r>
-              <a:t>cold just reads as lukewarm.</a:t>
+              <a:t>Two messages on one slide, and they pull in opposite directions on</a:t>
+            </a:r>
+          </a:p>
+          <a:p>
+            <a:r>
+              <a:t>purpose. Say the permission warmly, then change tone for the limits.</a:t>
             </a:r>
           </a:p>
           <a:p/>
           <a:p>
             <a:r>
-              <a:t>Good for slow ambient state. Wrong for alerts. Saying so here saves a project</a:t>
-            </a:r>
-          </a:p>
-          <a:p>
-            <a:r>
-              <a:t>from finding out in week 46.</a:t>
+              <a:t>Permission first: some students will not believe they are allowed to skip</a:t>
+            </a:r>
+          </a:p>
+          <a:p>
+            <a:r>
+              <a:t>ahead or stop early unless told. The failure mode is a pair rushing all five</a:t>
+            </a:r>
+          </a:p>
+          <a:p>
+            <a:r>
+              <a:t>badly instead of doing two properly.</a:t>
+            </a:r>
+          </a:p>
+          <a:p/>
+          <a:p>
+            <a:r>
+              <a:t>Then the three hard limits, and here you should sound firm. Say the numbers</a:t>
+            </a:r>
+          </a:p>
+          <a:p>
+            <a:r>
+              <a:t>out loud: a pin gives 40 mA, the motor wants about 75. It is not a rule they</a:t>
+            </a:r>
+          </a:p>
+          <a:p>
+            <a:r>
+              <a:t>have to take on faith.</a:t>
+            </a:r>
+          </a:p>
+          <a:p/>
+          <a:p>
+            <a:r>
+              <a:t>Worth adding: a board resetting when the solenoid fires is a POWER problem,</a:t>
+            </a:r>
+          </a:p>
+          <a:p>
+            <a:r>
+              <a:t>not a code bug. That saves someone twenty minutes.</a:t>
             </a:r>
           </a:p>
         </p:txBody>
@@ -1049,23 +1208,72 @@
           <a:lstStyle/>
           <a:p>
             <a:r>
-              <a:t>The redundancy argument. Same driver, one frequency you feel and one you</a:t>
-            </a:r>
-          </a:p>
-          <a:p>
-            <a:r>
-              <a:t>hear.</a:t>
+              <a:t>Slow down here. This is the single idea most worth stealing from today, and</a:t>
+            </a:r>
+          </a:p>
+          <a:p>
+            <a:r>
+              <a:t>it is worth interrupting the room for once most people have reached task 04.</a:t>
             </a:r>
           </a:p>
           <a:p/>
           <a:p>
             <a:r>
-              <a:t>Together is not louder, it is more certain. Cheapest reliability a project can</a:t>
-            </a:r>
-          </a:p>
-          <a:p>
-            <a:r>
-              <a:t>buy, and it is also the accessibility answer.</a:t>
+              <a:t>Two things students get wrong:</a:t>
+            </a:r>
+          </a:p>
+          <a:p/>
+          <a:p>
+            <a:r>
+              <a:t>1. A fixed threshold. Works in the morning, fails after lunch, because the</a:t>
+            </a:r>
+          </a:p>
+          <a:p>
+            <a:r>
+              <a:t>   reading drifts with humidity and mains hum.</a:t>
+            </a:r>
+          </a:p>
+          <a:p/>
+          <a:p>
+            <a:r>
+              <a:t>2. Feeding the baseline buffer always. A long press then teaches the baseline</a:t>
+            </a:r>
+          </a:p>
+          <a:p>
+            <a:r>
+              <a:t>   that a finger is normal, and the touch silently stops working. The buffer</a:t>
+            </a:r>
+          </a:p>
+          <a:p>
+            <a:r>
+              <a:t>   must only learn while untouched.</a:t>
+            </a:r>
+          </a:p>
+          <a:p/>
+          <a:p>
+            <a:r>
+              <a:t>Put the Serial Plotter on the projector. Watching the baseline wander while the</a:t>
+            </a:r>
+          </a:p>
+          <a:p>
+            <a:r>
+              <a:t>trigger line tracks it explains the whole design in ten seconds.</a:t>
+            </a:r>
+          </a:p>
+          <a:p/>
+          <a:p>
+            <a:r>
+              <a:t>For what it is worth, the rig this came from went through the same tuning: an</a:t>
+            </a:r>
+          </a:p>
+          <a:p>
+            <a:r>
+              <a:t>earlier version used 1.008 with a 50-sample baseline, the final one 1.01 with</a:t>
+            </a:r>
+          </a:p>
+          <a:p>
+            <a:r>
+              <a:t>25. Everyone tunes these.</a:t>
             </a:r>
           </a:p>
         </p:txBody>
@@ -1135,18 +1343,24 @@
           <a:lstStyle/>
           <a:p>
             <a:r>
-              <a:t>Worth showing even though it is not in a task. Most projects that need</a:t>
-            </a:r>
-          </a:p>
-          <a:p>
-            <a:r>
-              <a:t>something to physically move end up here rather than on a vibration motor.</a:t>
+              <a:t>1:25. Pull the room back together.</a:t>
             </a:r>
           </a:p>
           <a:p/>
           <a:p>
             <a:r>
-              <a:t>80 in stock, so nobody has to share.</a:t>
+              <a:t>One sentence per group: what surprised you. No slides, no laptops. Ten minutes.</a:t>
+            </a:r>
+          </a:p>
+          <a:p/>
+          <a:p>
+            <a:r>
+              <a:t>Expect someone to report the Peltier delay. Let that land, it is far more</a:t>
+            </a:r>
+          </a:p>
+          <a:p>
+            <a:r>
+              <a:t>persuasive from a peer than from you.</a:t>
             </a:r>
           </a:p>
         </p:txBody>
@@ -1216,39 +1430,29 @@
           <a:lstStyle/>
           <a:p>
             <a:r>
-              <a:t>The precision option. Moves in known steps, so you can position it</a:t>
-            </a:r>
-          </a:p>
-          <a:p>
-            <a:r>
-              <a:t>without any feedback sensor at all. 2048 steps per revolution.</a:t>
+              <a:t>Mention, do not teach. These sit on one table with a sign.</a:t>
             </a:r>
           </a:p>
           <a:p/>
           <a:p>
             <a:r>
-              <a:t>Needs a ULN2003 driver board, drawer 2A, 27 of them.</a:t>
+              <a:t>The honest warnings matter more than the specs: PPG is useless once the hand</a:t>
+            </a:r>
+          </a:p>
+          <a:p>
+            <a:r>
+              <a:t>moves, GSR drifts so only relative change works, FSRs need per-pad calibration.</a:t>
             </a:r>
           </a:p>
           <a:p/>
           <a:p>
             <a:r>
-              <a:t>If anyone tries one: the Stepper constructor does NOT take the pins in numeric</a:t>
-            </a:r>
-          </a:p>
-          <a:p>
-            <a:r>
-              <a:t>order. Wire IN1 to IN4 on pins 8 to 11, then write Stepper(2048, 8, 10, 9, 11).</a:t>
-            </a:r>
-          </a:p>
-          <a:p>
-            <a:r>
-              <a:t>Get it wrong and it buzzes and jitters instead of turning, which looks like a</a:t>
-            </a:r>
-          </a:p>
-          <a:p>
-            <a:r>
-              <a:t>dead motor. bench_tests/07_stepper has it right, with the note.</a:t>
+              <a:t>Push the phone option hard. For a lot of projects it beats everything else on</a:t>
+            </a:r>
+          </a:p>
+          <a:p>
+            <a:r>
+              <a:t>the table and needs no soldering at all.</a:t>
             </a:r>
           </a:p>
         </p:txBody>
@@ -1318,18 +1522,34 @@
           <a:lstStyle/>
           <a:p>
             <a:r>
-              <a:t>The one people forget exists. It grabs and lets go, with nothing moving.</a:t>
+              <a:t>The slide that earns the room's attention, so do not rush it.</a:t>
             </a:r>
           </a:p>
           <a:p/>
           <a:p>
             <a:r>
-              <a:t>Good answer for anything that should hold and then release: a latch, a door, a</a:t>
-            </a:r>
-          </a:p>
-          <a:p>
-            <a:r>
-              <a:t>thing that falls when the event happens.</a:t>
+              <a:t>This audience can write the code already, and they know it. Saying so out loud</a:t>
+            </a:r>
+          </a:p>
+          <a:p>
+            <a:r>
+              <a:t>buys credibility for the rest. The argument is not "you need to learn to</a:t>
+            </a:r>
+          </a:p>
+          <a:p>
+            <a:r>
+              <a:t>program a motor", it is "you cannot Google what something feels like".</a:t>
+            </a:r>
+          </a:p>
+          <a:p/>
+          <a:p>
+            <a:r>
+              <a:t>The second point is practical and lands with everyone: the parts are free and</a:t>
+            </a:r>
+          </a:p>
+          <a:p>
+            <a:r>
+              <a:t>already in the building.</a:t>
             </a:r>
           </a:p>
         </p:txBody>
@@ -1399,55 +1619,66 @@
           <a:lstStyle/>
           <a:p>
             <a:r>
-              <a:t>Two messages on one slide, and they pull in opposite directions on</a:t>
-            </a:r>
-          </a:p>
-          <a:p>
-            <a:r>
-              <a:t>purpose. Say the permission warmly, then change tone for the limits.</a:t>
+              <a:t>The slide the tinkerers will care most about, and the one where being</a:t>
+            </a:r>
+          </a:p>
+          <a:p>
+            <a:r>
+              <a:t>precise matters, because the internet is full of wrong answers.</a:t>
             </a:r>
           </a:p>
           <a:p/>
           <a:p>
             <a:r>
-              <a:t>Permission first: some students will not believe they are allowed to skip</a:t>
-            </a:r>
-          </a:p>
-          <a:p>
-            <a:r>
-              <a:t>ahead or stop early unless told. The failure mode is a pair rushing all five</a:t>
-            </a:r>
-          </a:p>
-          <a:p>
-            <a:r>
-              <a:t>badly instead of doing two properly.</a:t>
+              <a:t>The useful surprise: most Garmin watches broadcast heart rate over BLE</a:t>
+            </a:r>
+          </a:p>
+          <a:p>
+            <a:r>
+              <a:t>natively. Turn on Broadcast Heart Rate, or start a Virtual Run, and the watch</a:t>
+            </a:r>
+          </a:p>
+          <a:p>
+            <a:r>
+              <a:t>appears as an ordinary heart rate strap that Web Bluetooth can read from a web</a:t>
+            </a:r>
+          </a:p>
+          <a:p>
+            <a:r>
+              <a:t>page. No Connect IQ app, no SDK, no API key.</a:t>
             </a:r>
           </a:p>
           <a:p/>
           <a:p>
             <a:r>
-              <a:t>Then the three hard limits, and here you should sound firm. Say the numbers</a:t>
-            </a:r>
-          </a:p>
-          <a:p>
-            <a:r>
-              <a:t>out loud: a pin gives 40 mA, the motor wants about 75. It is not a rule they</a:t>
-            </a:r>
-          </a:p>
-          <a:p>
-            <a:r>
-              <a:t>have to take on faith.</a:t>
+              <a:t>Apple Watch will not. HealthKit needs a companion watchOS app in Swift, so</a:t>
+            </a:r>
+          </a:p>
+          <a:p>
+            <a:r>
+              <a:t>third-party apps that re-broadcast over BLE are the practical route.</a:t>
             </a:r>
           </a:p>
           <a:p/>
           <a:p>
             <a:r>
-              <a:t>Worth adding: a board resetting when the solenoid fires is a POWER problem,</a:t>
-            </a:r>
-          </a:p>
-          <a:p>
-            <a:r>
-              <a:t>not a code bug. That saves someone twenty minutes.</a:t>
+              <a:t>Web Bluetooth is Chrome and Edge only. Not Safari, not Firefox. Same lesson as</a:t>
+            </a:r>
+          </a:p>
+          <a:p>
+            <a:r>
+              <a:t>vibration: check the feature before it goes in a plan.</a:t>
+            </a:r>
+          </a:p>
+          <a:p/>
+          <a:p>
+            <a:r>
+              <a:t>Good project prompt if anyone wants one: a page that pairs with a strap and</a:t>
+            </a:r>
+          </a:p>
+          <a:p>
+            <a:r>
+              <a:t>drives an actuator from a live pulse. That is an afternoon.</a:t>
             </a:r>
           </a:p>
         </p:txBody>
@@ -1598,72 +1829,55 @@
           <a:lstStyle/>
           <a:p>
             <a:r>
-              <a:t>Slow down here. This is the single idea most worth stealing from today, and</a:t>
-            </a:r>
-          </a:p>
-          <a:p>
-            <a:r>
-              <a:t>it is worth interrupting the room for once most people have reached task 04.</a:t>
+              <a:t>Have them open sensors.chomskylab.dk on their own phones while you talk.</a:t>
+            </a:r>
+          </a:p>
+          <a:p>
+            <a:r>
+              <a:t>The split between what works and what does not lands far harder on their own</a:t>
+            </a:r>
+          </a:p>
+          <a:p>
+            <a:r>
+              <a:t>device than on a slide.</a:t>
             </a:r>
           </a:p>
           <a:p/>
           <a:p>
             <a:r>
-              <a:t>Two things students get wrong:</a:t>
+              <a:t>The bottom half is the single most useful fact here, and the one people get</a:t>
+            </a:r>
+          </a:p>
+          <a:p>
+            <a:r>
+              <a:t>wrong because a blog post said otherwise.</a:t>
             </a:r>
           </a:p>
           <a:p/>
           <a:p>
             <a:r>
-              <a:t>1. A fixed threshold. Works in the morning, fails after lunch, because the</a:t>
-            </a:r>
-          </a:p>
-          <a:p>
-            <a:r>
-              <a:t>   reading drifts with humidity and mains hum.</a:t>
+              <a:t>Say it plainly: iPhones do not vibrate from a web page. Not with a polyfill,</a:t>
+            </a:r>
+          </a:p>
+          <a:p>
+            <a:r>
+              <a:t>not with a library, not in Chrome for iOS, which is Safari underneath.</a:t>
             </a:r>
           </a:p>
           <a:p/>
           <a:p>
             <a:r>
-              <a:t>2. Feeding the baseline buffer always. A long press then teaches the baseline</a:t>
-            </a:r>
-          </a:p>
-          <a:p>
-            <a:r>
-              <a:t>   that a finger is normal, and the touch silently stops working. The buffer</a:t>
-            </a:r>
-          </a:p>
-          <a:p>
-            <a:r>
-              <a:t>   must only learn while untouched.</a:t>
-            </a:r>
-          </a:p>
-          <a:p/>
-          <a:p>
-            <a:r>
-              <a:t>Put the Serial Plotter on the projector. Watching the baseline wander while the</a:t>
-            </a:r>
-          </a:p>
-          <a:p>
-            <a:r>
-              <a:t>trigger line tracks it explains the whole design in ten seconds.</a:t>
-            </a:r>
-          </a:p>
-          <a:p/>
-          <a:p>
-            <a:r>
-              <a:t>For what it is worth, the rig this came from went through the same tuning: an</a:t>
-            </a:r>
-          </a:p>
-          <a:p>
-            <a:r>
-              <a:t>earlier version used 1.008 with a 50-sample baseline, the final one 1.01 with</a:t>
-            </a:r>
-          </a:p>
-          <a:p>
-            <a:r>
-              <a:t>25. Everyone tunes these.</a:t>
+              <a:t>The general lesson is bigger than vibration: check the feature on caniuse</a:t>
+            </a:r>
+          </a:p>
+          <a:p>
+            <a:r>
+              <a:t>before it goes in a project plan, not after. Two minutes now against a</a:t>
+            </a:r>
+          </a:p>
+          <a:p>
+            <a:r>
+              <a:t>rewrite in week 46.</a:t>
             </a:r>
           </a:p>
         </p:txBody>
@@ -1733,24 +1947,45 @@
           <a:lstStyle/>
           <a:p>
             <a:r>
-              <a:t>1:25. Pull the room back together.</a:t>
+              <a:t>Five minutes, and put the actual repos on screen if you can.</a:t>
             </a:r>
           </a:p>
           <a:p/>
           <a:p>
             <a:r>
-              <a:t>One sentence per group: what surprised you. No slides, no laptops. Ten minutes.</a:t>
+              <a:t>The argument: this was built by students at your stage, not by a lab with a</a:t>
+            </a:r>
+          </a:p>
+          <a:p>
+            <a:r>
+              <a:t>budget. The gap between "we should use touch" and "it moves when you touch it"</a:t>
+            </a:r>
+          </a:p>
+          <a:p>
+            <a:r>
+              <a:t>is smaller than it looks.</a:t>
             </a:r>
           </a:p>
           <a:p/>
           <a:p>
             <a:r>
-              <a:t>Expect someone to report the Peltier delay. Let that land, it is far more</a:t>
-            </a:r>
-          </a:p>
-          <a:p>
-            <a:r>
-              <a:t>persuasive from a peer than from you.</a:t>
+              <a:t>The moving screen has a browser control panel over the serial port, which is</a:t>
+            </a:r>
+          </a:p>
+          <a:p>
+            <a:r>
+              <a:t>what you will wish you had at the project demonstrations.</a:t>
+            </a:r>
+          </a:p>
+          <a:p/>
+          <a:p>
+            <a:r>
+              <a:t>Note for you: the sock repo has a hardcoded Wi-Fi password and live patient IDs</a:t>
+            </a:r>
+          </a:p>
+          <a:p>
+            <a:r>
+              <a:t>in it. Scrub before showing, or show only the calibration section.</a:t>
             </a:r>
           </a:p>
         </p:txBody>
@@ -1820,29 +2055,18 @@
           <a:lstStyle/>
           <a:p>
             <a:r>
-              <a:t>Mention, do not teach. These sit on one table with a sign.</a:t>
+              <a:t>1:35. The blind test.</a:t>
             </a:r>
           </a:p>
           <a:p/>
           <a:p>
             <a:r>
-              <a:t>The honest warnings matter more than the specs: PPG is useless once the hand</a:t>
-            </a:r>
-          </a:p>
-          <a:p>
-            <a:r>
-              <a:t>moves, GSR drifts so only relative change works, FSRs need per-pad calibration.</a:t>
-            </a:r>
-          </a:p>
-          <a:p/>
-          <a:p>
-            <a:r>
-              <a:t>Push the phone option hard. For a lot of projects it beats everything else on</a:t>
-            </a:r>
-          </a:p>
-          <a:p>
-            <a:r>
-              <a:t>the table and needs no soldering at all.</a:t>
+              <a:t>Most groups will already have something from task 05. This is where it gets</a:t>
+            </a:r>
+          </a:p>
+          <a:p>
+            <a:r>
+              <a:t>tested by someone who did not build it.</a:t>
             </a:r>
           </a:p>
         </p:txBody>
@@ -1912,34 +2136,39 @@
           <a:lstStyle/>
           <a:p>
             <a:r>
-              <a:t>The slide that earns the room's attention, so do not rush it.</a:t>
+              <a:t>Read the brief out once, then get out of the way. Full wording, since the</a:t>
+            </a:r>
+          </a:p>
+          <a:p>
+            <a:r>
+              <a:t>slide is only the bones:</a:t>
             </a:r>
           </a:p>
           <a:p/>
           <a:p>
             <a:r>
-              <a:t>This audience can write the code already, and they know it. Saying so out loud</a:t>
-            </a:r>
-          </a:p>
-          <a:p>
-            <a:r>
-              <a:t>buys credibility for the rest. The argument is not "you need to learn to</a:t>
-            </a:r>
-          </a:p>
-          <a:p>
-            <a:r>
-              <a:t>program a motor", it is "you cannot Google what something feels like".</a:t>
+              <a:t>"Pick one actuator. Encode three messages: arrived, something wrong, finished.</a:t>
+            </a:r>
+          </a:p>
+          <a:p>
+            <a:r>
+              <a:t>Vary only the rhythm of the pulses and how strong they are. Then hand it to</a:t>
+            </a:r>
+          </a:p>
+          <a:p>
+            <a:r>
+              <a:t>another group with the screen turned away and see if they can name all three."</a:t>
             </a:r>
           </a:p>
           <a:p/>
           <a:p>
             <a:r>
-              <a:t>The second point is practical and lands with everyone: the parts are free and</a:t>
-            </a:r>
-          </a:p>
-          <a:p>
-            <a:r>
-              <a:t>already in the building.</a:t>
+              <a:t>If someone asks to add a second actuator, say no. The constraint is the</a:t>
+            </a:r>
+          </a:p>
+          <a:p>
+            <a:r>
+              <a:t>exercise.</a:t>
             </a:r>
           </a:p>
         </p:txBody>
@@ -2009,66 +2238,24 @@
           <a:lstStyle/>
           <a:p>
             <a:r>
-              <a:t>The slide the tinkerers will care most about, and the one where being</a:t>
-            </a:r>
-          </a:p>
-          <a:p>
-            <a:r>
-              <a:t>precise matters, because the internet is full of wrong answers.</a:t>
+              <a:t>The line worth repeating twice.</a:t>
             </a:r>
           </a:p>
           <a:p/>
           <a:p>
             <a:r>
-              <a:t>The useful surprise: most Garmin watches broadcast heart rate over BLE</a:t>
-            </a:r>
-          </a:p>
-          <a:p>
-            <a:r>
-              <a:t>natively. Turn on Broadcast Heart Rate, or start a Virtual Run, and the watch</a:t>
-            </a:r>
-          </a:p>
-          <a:p>
-            <a:r>
-              <a:t>appears as an ordinary heart rate strap that Web Bluetooth can read from a web</a:t>
-            </a:r>
-          </a:p>
-          <a:p>
-            <a:r>
-              <a:t>page. No Connect IQ app, no SDK, no API key.</a:t>
+              <a:t>Run the test: swap groups, receiver looks away, guess all three.</a:t>
             </a:r>
           </a:p>
           <a:p/>
           <a:p>
             <a:r>
-              <a:t>Apple Watch will not. HealthKit needs a companion watchOS app in Swift, so</a:t>
-            </a:r>
-          </a:p>
-          <a:p>
-            <a:r>
-              <a:t>third-party apps that re-broadcast over BLE are the practical route.</a:t>
-            </a:r>
-          </a:p>
-          <a:p/>
-          <a:p>
-            <a:r>
-              <a:t>Web Bluetooth is Chrome and Edge only. Not Safari, not Firefox. Same lesson as</a:t>
-            </a:r>
-          </a:p>
-          <a:p>
-            <a:r>
-              <a:t>vibration: check the feature before it goes in a plan.</a:t>
-            </a:r>
-          </a:p>
-          <a:p/>
-          <a:p>
-            <a:r>
-              <a:t>Good project prompt if anyone wants one: a page that pairs with a strap and</a:t>
-            </a:r>
-          </a:p>
-          <a:p>
-            <a:r>
-              <a:t>drives an actuator from a live pulse. That is an afternoon.</a:t>
+              <a:t>Then have each group name which two got confused and what would have separated</a:t>
+            </a:r>
+          </a:p>
+          <a:p>
+            <a:r>
+              <a:t>them. That confusion is the actual learning, not the successful ones.</a:t>
             </a:r>
           </a:p>
         </p:txBody>
@@ -2138,55 +2325,44 @@
           <a:lstStyle/>
           <a:p>
             <a:r>
-              <a:t>Have them open sensors.chomskylab.dk on their own phones while you talk.</a:t>
-            </a:r>
-          </a:p>
-          <a:p>
-            <a:r>
-              <a:t>The split between what works and what does not lands far harder on their own</a:t>
-            </a:r>
-          </a:p>
-          <a:p>
-            <a:r>
-              <a:t>device than on a slide.</a:t>
+              <a:t>Put this up while the blind tests run, so groups can check themselves</a:t>
+            </a:r>
+          </a:p>
+          <a:p>
+            <a:r>
+              <a:t>without asking you.</a:t>
             </a:r>
           </a:p>
           <a:p/>
           <a:p>
             <a:r>
-              <a:t>The bottom half is the single most useful fact here, and the one people get</a:t>
-            </a:r>
-          </a:p>
-          <a:p>
-            <a:r>
-              <a:t>wrong because a blog post said otherwise.</a:t>
+              <a:t>The middle line matters most: a device that fires continuously when held is</a:t>
+            </a:r>
+          </a:p>
+          <a:p>
+            <a:r>
+              <a:t>the single most common bug, and it is a debounce problem.</a:t>
             </a:r>
           </a:p>
           <a:p/>
           <a:p>
             <a:r>
-              <a:t>Say it plainly: iPhones do not vibrate from a web page. Not with a polyfill,</a:t>
-            </a:r>
-          </a:p>
-          <a:p>
-            <a:r>
-              <a:t>not with a library, not in Chrome for iOS, which is Safari underneath.</a:t>
-            </a:r>
-          </a:p>
-          <a:p/>
-          <a:p>
-            <a:r>
-              <a:t>The general lesson is bigger than vibration: check the feature on caniuse</a:t>
-            </a:r>
-          </a:p>
-          <a:p>
-            <a:r>
-              <a:t>before it goes in a project plan, not after. Two minutes now against a</a:t>
-            </a:r>
-          </a:p>
-          <a:p>
-            <a:r>
-              <a:t>rewrite in week 46.</a:t>
+              <a:t>Then close on the bottom half, thirty seconds. If they leave with one thing,</a:t>
+            </a:r>
+          </a:p>
+          <a:p>
+            <a:r>
+              <a:t>make it the last point: pick the actuator before designing the interaction.</a:t>
+            </a:r>
+          </a:p>
+          <a:p>
+            <a:r>
+              <a:t>Discovering in week 46 that the chosen one cannot do the job is the expensive</a:t>
+            </a:r>
+          </a:p>
+          <a:p>
+            <a:r>
+              <a:t>mistake this session exists to prevent.</a:t>
             </a:r>
           </a:p>
         </p:txBody>
@@ -2256,315 +2432,40 @@
           <a:lstStyle/>
           <a:p>
             <a:r>
-              <a:t>Five minutes, and put the actual repos on screen if you can.</a:t>
+              <a:t>Point them at the repo. Every task sketch is commented for them, and the</a:t>
+            </a:r>
+          </a:p>
+          <a:p>
+            <a:r>
+              <a:t>bench test sketches are there too if they want to see the minimal version.</a:t>
             </a:r>
           </a:p>
           <a:p/>
           <a:p>
             <a:r>
-              <a:t>The argument: this was built by students at your stage, not by a lab with a</a:t>
-            </a:r>
-          </a:p>
-          <a:p>
-            <a:r>
-              <a:t>budget. The gap between "we should use touch" and "it moves when you touch it"</a:t>
-            </a:r>
-          </a:p>
-          <a:p>
-            <a:r>
-              <a:t>is smaller than it looks.</a:t>
+              <a:t>Last thing to say: pick your actuator before you design the interaction, not</a:t>
+            </a:r>
+          </a:p>
+          <a:p>
+            <a:r>
+              <a:t>after. Today was so they can do that from experience rather than a datasheet.</a:t>
             </a:r>
           </a:p>
           <a:p/>
           <a:p>
             <a:r>
-              <a:t>The moving screen has a browser control panel over the serial port, which is</a:t>
-            </a:r>
-          </a:p>
-          <a:p>
-            <a:r>
-              <a:t>what you will wish you had at the project demonstrations.</a:t>
+              <a:t>Pack down: everything back in the box, including the resistors. It will not all</a:t>
+            </a:r>
+          </a:p>
+          <a:p>
+            <a:r>
+              <a:t>come back.</a:t>
             </a:r>
           </a:p>
           <a:p/>
           <a:p>
             <a:r>
-              <a:t>Note for you: the sock repo has a hardcoded Wi-Fi password and live patient IDs</a:t>
-            </a:r>
-          </a:p>
-          <a:p>
-            <a:r>
-              <a:t>in it. Scrub before showing, or show only the calibration section.</a:t>
-            </a:r>
-          </a:p>
-        </p:txBody>
-      </p:sp>
-      <p:sp>
-        <p:nvSpPr>
-          <p:cNvPr id="4" name="Slide Number Placeholder 3"/>
-          <p:cNvSpPr>
-            <a:spLocks noGrp="1"/>
-          </p:cNvSpPr>
-          <p:nvPr>
-            <p:ph type="sldNum" idx="5" sz="quarter"/>
-          </p:nvPr>
-        </p:nvSpPr>
-        <p:spPr/>
-      </p:sp>
-    </p:spTree>
-  </p:cSld>
-  <p:clrMapOvr>
-    <a:masterClrMapping/>
-  </p:clrMapOvr>
-</p:notes>
-</file>
-
-<file path=ppt/notesSlides/notesSlide27.xml><?xml version="1.0" encoding="utf-8"?>
-<p:notes xmlns:a="http://schemas.openxmlformats.org/drawingml/2006/main" xmlns:p="http://schemas.openxmlformats.org/presentationml/2006/main" xmlns:r="http://schemas.openxmlformats.org/officeDocument/2006/relationships">
-  <p:cSld>
-    <p:spTree>
-      <p:nvGrpSpPr>
-        <p:cNvPr id="1" name=""/>
-        <p:cNvGrpSpPr/>
-        <p:nvPr/>
-      </p:nvGrpSpPr>
-      <p:grpSpPr>
-        <a:xfrm>
-          <a:off x="0" y="0"/>
-          <a:ext cx="0" cy="0"/>
-          <a:chOff x="0" y="0"/>
-          <a:chExt cx="0" cy="0"/>
-        </a:xfrm>
-      </p:grpSpPr>
-      <p:sp>
-        <p:nvSpPr>
-          <p:cNvPr id="2" name="Slide Image Placeholder 1"/>
-          <p:cNvSpPr>
-            <a:spLocks noGrp="1"/>
-          </p:cNvSpPr>
-          <p:nvPr>
-            <p:ph type="sldImg" idx="2"/>
-          </p:nvPr>
-        </p:nvSpPr>
-        <p:spPr/>
-      </p:sp>
-      <p:sp>
-        <p:nvSpPr>
-          <p:cNvPr id="3" name="Notes Placeholder 2"/>
-          <p:cNvSpPr>
-            <a:spLocks noGrp="1"/>
-          </p:cNvSpPr>
-          <p:nvPr>
-            <p:ph type="body" idx="3" sz="quarter"/>
-          </p:nvPr>
-        </p:nvSpPr>
-        <p:spPr/>
-        <p:txBody>
-          <a:bodyPr/>
-          <a:lstStyle/>
-          <a:p>
-            <a:r>
-              <a:t>1:35. The blind test.</a:t>
-            </a:r>
-          </a:p>
-          <a:p/>
-          <a:p>
-            <a:r>
-              <a:t>Most groups will already have something from task 05. This is where it gets</a:t>
-            </a:r>
-          </a:p>
-          <a:p>
-            <a:r>
-              <a:t>tested by someone who did not build it.</a:t>
-            </a:r>
-          </a:p>
-        </p:txBody>
-      </p:sp>
-      <p:sp>
-        <p:nvSpPr>
-          <p:cNvPr id="4" name="Slide Number Placeholder 3"/>
-          <p:cNvSpPr>
-            <a:spLocks noGrp="1"/>
-          </p:cNvSpPr>
-          <p:nvPr>
-            <p:ph type="sldNum" idx="5" sz="quarter"/>
-          </p:nvPr>
-        </p:nvSpPr>
-        <p:spPr/>
-      </p:sp>
-    </p:spTree>
-  </p:cSld>
-  <p:clrMapOvr>
-    <a:masterClrMapping/>
-  </p:clrMapOvr>
-</p:notes>
-</file>
-
-<file path=ppt/notesSlides/notesSlide28.xml><?xml version="1.0" encoding="utf-8"?>
-<p:notes xmlns:a="http://schemas.openxmlformats.org/drawingml/2006/main" xmlns:p="http://schemas.openxmlformats.org/presentationml/2006/main" xmlns:r="http://schemas.openxmlformats.org/officeDocument/2006/relationships">
-  <p:cSld>
-    <p:spTree>
-      <p:nvGrpSpPr>
-        <p:cNvPr id="1" name=""/>
-        <p:cNvGrpSpPr/>
-        <p:nvPr/>
-      </p:nvGrpSpPr>
-      <p:grpSpPr>
-        <a:xfrm>
-          <a:off x="0" y="0"/>
-          <a:ext cx="0" cy="0"/>
-          <a:chOff x="0" y="0"/>
-          <a:chExt cx="0" cy="0"/>
-        </a:xfrm>
-      </p:grpSpPr>
-      <p:sp>
-        <p:nvSpPr>
-          <p:cNvPr id="2" name="Slide Image Placeholder 1"/>
-          <p:cNvSpPr>
-            <a:spLocks noGrp="1"/>
-          </p:cNvSpPr>
-          <p:nvPr>
-            <p:ph type="sldImg" idx="2"/>
-          </p:nvPr>
-        </p:nvSpPr>
-        <p:spPr/>
-      </p:sp>
-      <p:sp>
-        <p:nvSpPr>
-          <p:cNvPr id="3" name="Notes Placeholder 2"/>
-          <p:cNvSpPr>
-            <a:spLocks noGrp="1"/>
-          </p:cNvSpPr>
-          <p:nvPr>
-            <p:ph type="body" idx="3" sz="quarter"/>
-          </p:nvPr>
-        </p:nvSpPr>
-        <p:spPr/>
-        <p:txBody>
-          <a:bodyPr/>
-          <a:lstStyle/>
-          <a:p>
-            <a:r>
-              <a:t>Read the brief out once, then get out of the way. Full wording, since the</a:t>
-            </a:r>
-          </a:p>
-          <a:p>
-            <a:r>
-              <a:t>slide is only the bones:</a:t>
-            </a:r>
-          </a:p>
-          <a:p/>
-          <a:p>
-            <a:r>
-              <a:t>"Pick one actuator. Encode three messages: arrived, something wrong, finished.</a:t>
-            </a:r>
-          </a:p>
-          <a:p>
-            <a:r>
-              <a:t>Vary only the rhythm of the pulses and how strong they are. Then hand it to</a:t>
-            </a:r>
-          </a:p>
-          <a:p>
-            <a:r>
-              <a:t>another group with the screen turned away and see if they can name all three."</a:t>
-            </a:r>
-          </a:p>
-          <a:p/>
-          <a:p>
-            <a:r>
-              <a:t>If someone asks to add a second actuator, say no. The constraint is the</a:t>
-            </a:r>
-          </a:p>
-          <a:p>
-            <a:r>
-              <a:t>exercise.</a:t>
-            </a:r>
-          </a:p>
-        </p:txBody>
-      </p:sp>
-      <p:sp>
-        <p:nvSpPr>
-          <p:cNvPr id="4" name="Slide Number Placeholder 3"/>
-          <p:cNvSpPr>
-            <a:spLocks noGrp="1"/>
-          </p:cNvSpPr>
-          <p:nvPr>
-            <p:ph type="sldNum" idx="5" sz="quarter"/>
-          </p:nvPr>
-        </p:nvSpPr>
-        <p:spPr/>
-      </p:sp>
-    </p:spTree>
-  </p:cSld>
-  <p:clrMapOvr>
-    <a:masterClrMapping/>
-  </p:clrMapOvr>
-</p:notes>
-</file>
-
-<file path=ppt/notesSlides/notesSlide29.xml><?xml version="1.0" encoding="utf-8"?>
-<p:notes xmlns:a="http://schemas.openxmlformats.org/drawingml/2006/main" xmlns:p="http://schemas.openxmlformats.org/presentationml/2006/main" xmlns:r="http://schemas.openxmlformats.org/officeDocument/2006/relationships">
-  <p:cSld>
-    <p:spTree>
-      <p:nvGrpSpPr>
-        <p:cNvPr id="1" name=""/>
-        <p:cNvGrpSpPr/>
-        <p:nvPr/>
-      </p:nvGrpSpPr>
-      <p:grpSpPr>
-        <a:xfrm>
-          <a:off x="0" y="0"/>
-          <a:ext cx="0" cy="0"/>
-          <a:chOff x="0" y="0"/>
-          <a:chExt cx="0" cy="0"/>
-        </a:xfrm>
-      </p:grpSpPr>
-      <p:sp>
-        <p:nvSpPr>
-          <p:cNvPr id="2" name="Slide Image Placeholder 1"/>
-          <p:cNvSpPr>
-            <a:spLocks noGrp="1"/>
-          </p:cNvSpPr>
-          <p:nvPr>
-            <p:ph type="sldImg" idx="2"/>
-          </p:nvPr>
-        </p:nvSpPr>
-        <p:spPr/>
-      </p:sp>
-      <p:sp>
-        <p:nvSpPr>
-          <p:cNvPr id="3" name="Notes Placeholder 2"/>
-          <p:cNvSpPr>
-            <a:spLocks noGrp="1"/>
-          </p:cNvSpPr>
-          <p:nvPr>
-            <p:ph type="body" idx="3" sz="quarter"/>
-          </p:nvPr>
-        </p:nvSpPr>
-        <p:spPr/>
-        <p:txBody>
-          <a:bodyPr/>
-          <a:lstStyle/>
-          <a:p>
-            <a:r>
-              <a:t>The line worth repeating twice.</a:t>
-            </a:r>
-          </a:p>
-          <a:p/>
-          <a:p>
-            <a:r>
-              <a:t>Run the test: swap groups, receiver looks away, guess all three.</a:t>
-            </a:r>
-          </a:p>
-          <a:p/>
-          <a:p>
-            <a:r>
-              <a:t>Then have each group name which two got confused and what would have separated</a:t>
-            </a:r>
-          </a:p>
-          <a:p>
-            <a:r>
-              <a:t>them. That confusion is the actual learning, not the successful ones.</a:t>
+              <a:t>If anyone wants to borrow parts for the project weeks, now is when they ask.</a:t>
             </a:r>
           </a:p>
         </p:txBody>
@@ -2662,216 +2563,6 @@
           <a:p>
             <a:r>
               <a:t>designed on paper then dropped. Two minutes, then move.</a:t>
-            </a:r>
-          </a:p>
-        </p:txBody>
-      </p:sp>
-      <p:sp>
-        <p:nvSpPr>
-          <p:cNvPr id="4" name="Slide Number Placeholder 3"/>
-          <p:cNvSpPr>
-            <a:spLocks noGrp="1"/>
-          </p:cNvSpPr>
-          <p:nvPr>
-            <p:ph type="sldNum" idx="5" sz="quarter"/>
-          </p:nvPr>
-        </p:nvSpPr>
-        <p:spPr/>
-      </p:sp>
-    </p:spTree>
-  </p:cSld>
-  <p:clrMapOvr>
-    <a:masterClrMapping/>
-  </p:clrMapOvr>
-</p:notes>
-</file>
-
-<file path=ppt/notesSlides/notesSlide30.xml><?xml version="1.0" encoding="utf-8"?>
-<p:notes xmlns:a="http://schemas.openxmlformats.org/drawingml/2006/main" xmlns:p="http://schemas.openxmlformats.org/presentationml/2006/main" xmlns:r="http://schemas.openxmlformats.org/officeDocument/2006/relationships">
-  <p:cSld>
-    <p:spTree>
-      <p:nvGrpSpPr>
-        <p:cNvPr id="1" name=""/>
-        <p:cNvGrpSpPr/>
-        <p:nvPr/>
-      </p:nvGrpSpPr>
-      <p:grpSpPr>
-        <a:xfrm>
-          <a:off x="0" y="0"/>
-          <a:ext cx="0" cy="0"/>
-          <a:chOff x="0" y="0"/>
-          <a:chExt cx="0" cy="0"/>
-        </a:xfrm>
-      </p:grpSpPr>
-      <p:sp>
-        <p:nvSpPr>
-          <p:cNvPr id="2" name="Slide Image Placeholder 1"/>
-          <p:cNvSpPr>
-            <a:spLocks noGrp="1"/>
-          </p:cNvSpPr>
-          <p:nvPr>
-            <p:ph type="sldImg" idx="2"/>
-          </p:nvPr>
-        </p:nvSpPr>
-        <p:spPr/>
-      </p:sp>
-      <p:sp>
-        <p:nvSpPr>
-          <p:cNvPr id="3" name="Notes Placeholder 2"/>
-          <p:cNvSpPr>
-            <a:spLocks noGrp="1"/>
-          </p:cNvSpPr>
-          <p:nvPr>
-            <p:ph type="body" idx="3" sz="quarter"/>
-          </p:nvPr>
-        </p:nvSpPr>
-        <p:spPr/>
-        <p:txBody>
-          <a:bodyPr/>
-          <a:lstStyle/>
-          <a:p>
-            <a:r>
-              <a:t>Put this up while the blind tests run, so groups can check themselves</a:t>
-            </a:r>
-          </a:p>
-          <a:p>
-            <a:r>
-              <a:t>without asking you.</a:t>
-            </a:r>
-          </a:p>
-          <a:p/>
-          <a:p>
-            <a:r>
-              <a:t>The middle line matters most: a device that fires continuously when held is</a:t>
-            </a:r>
-          </a:p>
-          <a:p>
-            <a:r>
-              <a:t>the single most common bug, and it is a debounce problem.</a:t>
-            </a:r>
-          </a:p>
-          <a:p/>
-          <a:p>
-            <a:r>
-              <a:t>Then close on the bottom half, thirty seconds. If they leave with one thing,</a:t>
-            </a:r>
-          </a:p>
-          <a:p>
-            <a:r>
-              <a:t>make it the last point: pick the actuator before designing the interaction.</a:t>
-            </a:r>
-          </a:p>
-          <a:p>
-            <a:r>
-              <a:t>Discovering in week 46 that the chosen one cannot do the job is the expensive</a:t>
-            </a:r>
-          </a:p>
-          <a:p>
-            <a:r>
-              <a:t>mistake this session exists to prevent.</a:t>
-            </a:r>
-          </a:p>
-        </p:txBody>
-      </p:sp>
-      <p:sp>
-        <p:nvSpPr>
-          <p:cNvPr id="4" name="Slide Number Placeholder 3"/>
-          <p:cNvSpPr>
-            <a:spLocks noGrp="1"/>
-          </p:cNvSpPr>
-          <p:nvPr>
-            <p:ph type="sldNum" idx="5" sz="quarter"/>
-          </p:nvPr>
-        </p:nvSpPr>
-        <p:spPr/>
-      </p:sp>
-    </p:spTree>
-  </p:cSld>
-  <p:clrMapOvr>
-    <a:masterClrMapping/>
-  </p:clrMapOvr>
-</p:notes>
-</file>
-
-<file path=ppt/notesSlides/notesSlide31.xml><?xml version="1.0" encoding="utf-8"?>
-<p:notes xmlns:a="http://schemas.openxmlformats.org/drawingml/2006/main" xmlns:p="http://schemas.openxmlformats.org/presentationml/2006/main" xmlns:r="http://schemas.openxmlformats.org/officeDocument/2006/relationships">
-  <p:cSld>
-    <p:spTree>
-      <p:nvGrpSpPr>
-        <p:cNvPr id="1" name=""/>
-        <p:cNvGrpSpPr/>
-        <p:nvPr/>
-      </p:nvGrpSpPr>
-      <p:grpSpPr>
-        <a:xfrm>
-          <a:off x="0" y="0"/>
-          <a:ext cx="0" cy="0"/>
-          <a:chOff x="0" y="0"/>
-          <a:chExt cx="0" cy="0"/>
-        </a:xfrm>
-      </p:grpSpPr>
-      <p:sp>
-        <p:nvSpPr>
-          <p:cNvPr id="2" name="Slide Image Placeholder 1"/>
-          <p:cNvSpPr>
-            <a:spLocks noGrp="1"/>
-          </p:cNvSpPr>
-          <p:nvPr>
-            <p:ph type="sldImg" idx="2"/>
-          </p:nvPr>
-        </p:nvSpPr>
-        <p:spPr/>
-      </p:sp>
-      <p:sp>
-        <p:nvSpPr>
-          <p:cNvPr id="3" name="Notes Placeholder 2"/>
-          <p:cNvSpPr>
-            <a:spLocks noGrp="1"/>
-          </p:cNvSpPr>
-          <p:nvPr>
-            <p:ph type="body" idx="3" sz="quarter"/>
-          </p:nvPr>
-        </p:nvSpPr>
-        <p:spPr/>
-        <p:txBody>
-          <a:bodyPr/>
-          <a:lstStyle/>
-          <a:p>
-            <a:r>
-              <a:t>Point them at the repo. Every task sketch is commented for them, and the</a:t>
-            </a:r>
-          </a:p>
-          <a:p>
-            <a:r>
-              <a:t>bench test sketches are there too if they want to see the minimal version.</a:t>
-            </a:r>
-          </a:p>
-          <a:p/>
-          <a:p>
-            <a:r>
-              <a:t>Last thing to say: pick your actuator before you design the interaction, not</a:t>
-            </a:r>
-          </a:p>
-          <a:p>
-            <a:r>
-              <a:t>after. Today was so they can do that from experience rather than a datasheet.</a:t>
-            </a:r>
-          </a:p>
-          <a:p/>
-          <a:p>
-            <a:r>
-              <a:t>Pack down: everything back in the box, including the resistors. It will not all</a:t>
-            </a:r>
-          </a:p>
-          <a:p>
-            <a:r>
-              <a:t>come back.</a:t>
-            </a:r>
-          </a:p>
-          <a:p/>
-          <a:p>
-            <a:r>
-              <a:t>If anyone wants to borrow parts for the project weeks, now is when they ask.</a:t>
             </a:r>
           </a:p>
         </p:txBody>
@@ -6780,7 +6471,7 @@
                 </a:solidFill>
                 <a:latin typeface="Arial"/>
               </a:rPr>
-              <a:t>VIBRATING MINI MOTOR DISC</a:t>
+              <a:t>PIEZO ELEMENT</a:t>
             </a:r>
           </a:p>
         </p:txBody>
@@ -6821,7 +6512,7 @@
                 </a:solidFill>
                 <a:latin typeface="Arial"/>
               </a:rPr>
-              <a:t>An off-centre weight on a motor shaft, sealed in a disc. The same part as in your phone.</a:t>
+              <a:t>A crystal that flexes when you put current across it. Near-instant, almost no power, but shallow.</a:t>
             </a:r>
           </a:p>
           <a:p>
@@ -6841,7 +6532,7 @@
                 </a:solidFill>
                 <a:latin typeface="Arial"/>
               </a:rPr>
-              <a:t>Feels like: a buzz you cannot make gentle and fast at once.</a:t>
+              <a:t>Feels like: a tick, not a thump.</a:t>
             </a:r>
           </a:p>
           <a:p>
@@ -6881,7 +6572,7 @@
                 </a:solidFill>
                 <a:latin typeface="Arial"/>
               </a:rPr>
-              <a:t>Phone notifications, controller rumble, anything worn under clothing.</a:t>
+              <a:t>Clicks and confirmations. Anything where lag would feel broken.</a:t>
             </a:r>
           </a:p>
           <a:p>
@@ -6901,248 +6592,7 @@
                 </a:solidFill>
                 <a:latin typeface="Consolas"/>
               </a:rPr>
-              <a:t>1E  |  117  |  2.5-3.8V rated  |  100 mA at 5V  |  PWM</a:t>
-            </a:r>
-          </a:p>
-        </p:txBody>
-      </p:sp>
-      <p:pic>
-        <p:nvPicPr>
-          <p:cNvPr id="4" name="Picture 3" descr="erm.jpg"/>
-          <p:cNvPicPr>
-            <a:picLocks noChangeAspect="1"/>
-          </p:cNvPicPr>
-          <p:nvPr/>
-        </p:nvPicPr>
-        <p:blipFill>
-          <a:blip r:embed="rId2"/>
-          <a:stretch>
-            <a:fillRect/>
-          </a:stretch>
-        </p:blipFill>
-        <p:spPr>
-          <a:xfrm>
-            <a:off x="914400" y="1905000"/>
-            <a:ext cx="4191000" cy="3145410"/>
-          </a:xfrm>
-          <a:prstGeom prst="rect">
-            <a:avLst/>
-          </a:prstGeom>
-        </p:spPr>
-      </p:pic>
-      <p:pic>
-        <p:nvPicPr>
-          <p:cNvPr id="5" name="Picture 4" descr="wordmark_dark.png"/>
-          <p:cNvPicPr>
-            <a:picLocks noChangeAspect="1"/>
-          </p:cNvPicPr>
-          <p:nvPr/>
-        </p:nvPicPr>
-        <p:blipFill>
-          <a:blip r:embed="rId3"/>
-          <a:stretch>
-            <a:fillRect/>
-          </a:stretch>
-        </p:blipFill>
-        <p:spPr>
-          <a:xfrm>
-            <a:off x="342900" y="6184900"/>
-            <a:ext cx="2070100" cy="529560"/>
-          </a:xfrm>
-          <a:prstGeom prst="rect">
-            <a:avLst/>
-          </a:prstGeom>
-        </p:spPr>
-      </p:pic>
-      <p:pic>
-        <p:nvPicPr>
-          <p:cNvPr id="6" name="Picture 5" descr="seal_dark.png"/>
-          <p:cNvPicPr>
-            <a:picLocks noChangeAspect="1"/>
-          </p:cNvPicPr>
-          <p:nvPr/>
-        </p:nvPicPr>
-        <p:blipFill>
-          <a:blip r:embed="rId4"/>
-          <a:stretch>
-            <a:fillRect/>
-          </a:stretch>
-        </p:blipFill>
-        <p:spPr>
-          <a:xfrm>
-            <a:off x="11226800" y="5969000"/>
-            <a:ext cx="713915" cy="711200"/>
-          </a:xfrm>
-          <a:prstGeom prst="rect">
-            <a:avLst/>
-          </a:prstGeom>
-        </p:spPr>
-      </p:pic>
-    </p:spTree>
-  </p:cSld>
-  <p:clrMapOvr>
-    <a:masterClrMapping/>
-  </p:clrMapOvr>
-</p:sld>
-</file>
-
-<file path=ppt/slides/slide11.xml><?xml version="1.0" encoding="utf-8"?>
-<p:sld xmlns:a="http://schemas.openxmlformats.org/drawingml/2006/main" xmlns:p="http://schemas.openxmlformats.org/presentationml/2006/main" xmlns:r="http://schemas.openxmlformats.org/officeDocument/2006/relationships">
-  <p:cSld>
-    <p:spTree>
-      <p:nvGrpSpPr>
-        <p:cNvPr id="1" name=""/>
-        <p:cNvGrpSpPr/>
-        <p:nvPr/>
-      </p:nvGrpSpPr>
-      <p:grpSpPr/>
-      <p:sp>
-        <p:nvSpPr>
-          <p:cNvPr id="2" name="Title 1"/>
-          <p:cNvSpPr>
-            <a:spLocks noGrp="1"/>
-          </p:cNvSpPr>
-          <p:nvPr>
-            <p:ph type="title"/>
-          </p:nvPr>
-        </p:nvSpPr>
-        <p:spPr/>
-        <p:txBody>
-          <a:bodyPr/>
-          <a:lstStyle/>
-          <a:p>
-            <a:pPr marL="0" indent="0" algn="l">
-              <a:buNone/>
-            </a:pPr>
-            <a:r>
-              <a:rPr sz="3200" b="1">
-                <a:solidFill>
-                  <a:srgbClr val="000000"/>
-                </a:solidFill>
-                <a:latin typeface="Arial"/>
-              </a:rPr>
-              <a:t>PIEZO ELEMENT</a:t>
-            </a:r>
-          </a:p>
-        </p:txBody>
-      </p:sp>
-      <p:sp>
-        <p:nvSpPr>
-          <p:cNvPr id="3" name="Text Placeholder 2"/>
-          <p:cNvSpPr>
-            <a:spLocks noGrp="1"/>
-          </p:cNvSpPr>
-          <p:nvPr>
-            <p:ph type="body" idx="1"/>
-          </p:nvPr>
-        </p:nvSpPr>
-        <p:spPr>
-          <a:xfrm>
-            <a:off x="5461000" y="1905000"/>
-            <a:ext cx="5486400" cy="3302000"/>
-          </a:xfrm>
-        </p:spPr>
-        <p:txBody>
-          <a:bodyPr/>
-          <a:lstStyle/>
-          <a:p>
-            <a:pPr marL="0" indent="0" algn="l">
-              <a:lnSpc>
-                <a:spcPct val="130000"/>
-              </a:lnSpc>
-              <a:spcAft>
-                <a:spcPts val="1200"/>
-              </a:spcAft>
-              <a:buNone/>
-            </a:pPr>
-            <a:r>
-              <a:rPr sz="1600" b="0">
-                <a:solidFill>
-                  <a:srgbClr val="000000"/>
-                </a:solidFill>
-                <a:latin typeface="Arial"/>
-              </a:rPr>
-              <a:t>A crystal that flexes when you put current across it. Near-instant, almost no power, but shallow.</a:t>
-            </a:r>
-          </a:p>
-          <a:p>
-            <a:pPr marL="0" indent="0" algn="l">
-              <a:lnSpc>
-                <a:spcPct val="130000"/>
-              </a:lnSpc>
-              <a:spcAft>
-                <a:spcPts val="1400"/>
-              </a:spcAft>
-              <a:buNone/>
-            </a:pPr>
-            <a:r>
-              <a:rPr sz="1600" b="1">
-                <a:solidFill>
-                  <a:srgbClr val="002546"/>
-                </a:solidFill>
-                <a:latin typeface="Arial"/>
-              </a:rPr>
-              <a:t>Feels like: a tick, not a thump.</a:t>
-            </a:r>
-          </a:p>
-          <a:p>
-            <a:pPr marL="0" indent="0" algn="l">
-              <a:lnSpc>
-                <a:spcPct val="130000"/>
-              </a:lnSpc>
-              <a:spcAft>
-                <a:spcPts val="400"/>
-              </a:spcAft>
-              <a:buNone/>
-            </a:pPr>
-            <a:r>
-              <a:rPr sz="900" b="1">
-                <a:solidFill>
-                  <a:srgbClr val="595959"/>
-                </a:solidFill>
-                <a:latin typeface="Arial"/>
-              </a:rPr>
-              <a:t>USED FOR</a:t>
-            </a:r>
-          </a:p>
-          <a:p>
-            <a:pPr marL="0" indent="0" algn="l">
-              <a:lnSpc>
-                <a:spcPct val="130000"/>
-              </a:lnSpc>
-              <a:spcAft>
-                <a:spcPts val="1400"/>
-              </a:spcAft>
-              <a:buNone/>
-            </a:pPr>
-            <a:r>
-              <a:rPr sz="1400" b="0">
-                <a:solidFill>
-                  <a:srgbClr val="000000"/>
-                </a:solidFill>
-                <a:latin typeface="Arial"/>
-              </a:rPr>
-              <a:t>Clicks and confirmations. Anything where lag would feel broken.</a:t>
-            </a:r>
-          </a:p>
-          <a:p>
-            <a:pPr marL="0" indent="0" algn="l">
-              <a:lnSpc>
-                <a:spcPct val="130000"/>
-              </a:lnSpc>
-              <a:spcAft>
-                <a:spcPts val="0"/>
-              </a:spcAft>
-              <a:buNone/>
-            </a:pPr>
-            <a:r>
-              <a:rPr sz="1200" b="0">
-                <a:solidFill>
-                  <a:srgbClr val="595959"/>
-                </a:solidFill>
-                <a:latin typeface="Consolas"/>
-              </a:rPr>
-              <a:t>Drawer 6F  |  69 in stock  |  any digital pin</a:t>
+              <a:t>Drawer 6F  |  69 in stock  |  two wires, no driver</a:t>
             </a:r>
           </a:p>
         </p:txBody>
@@ -7227,7 +6677,7 @@
 </p:sld>
 </file>
 
-<file path=ppt/slides/slide12.xml><?xml version="1.0" encoding="utf-8"?>
+<file path=ppt/slides/slide11.xml><?xml version="1.0" encoding="utf-8"?>
 <p:sld xmlns:a="http://schemas.openxmlformats.org/drawingml/2006/main" xmlns:p="http://schemas.openxmlformats.org/presentationml/2006/main" xmlns:r="http://schemas.openxmlformats.org/officeDocument/2006/relationships">
   <p:cSld>
     <p:spTree>
@@ -7262,7 +6712,7 @@
                 </a:solidFill>
                 <a:latin typeface="Arial"/>
               </a:rPr>
-              <a:t>MINI PUSH-PULL SOLENOID</a:t>
+              <a:t>CAPACITIVE PAD</a:t>
             </a:r>
           </a:p>
         </p:txBody>
@@ -7303,7 +6753,7 @@
                 </a:solidFill>
                 <a:latin typeface="Arial"/>
               </a:rPr>
-              <a:t>A coil that yanks a metal rod when you energise it. No half a tap: it fires or it does not.</a:t>
+              <a:t>A wire taped behind foil, card or fabric. No sensor and no breakout board, which is why the box on the left is empty.</a:t>
             </a:r>
           </a:p>
           <a:p>
@@ -7323,7 +6773,7 @@
                 </a:solidFill>
                 <a:latin typeface="Arial"/>
               </a:rPr>
-              <a:t>Feels like: a person tapping you, not a machine signalling.</a:t>
+              <a:t>Feels like: nothing. That is the point. The surface stays plain.</a:t>
             </a:r>
           </a:p>
           <a:p>
@@ -7363,7 +6813,7 @@
                 </a:solidFill>
                 <a:latin typeface="Arial"/>
               </a:rPr>
-              <a:t>Navigation cues on the body, braille cells, alerts in noise.</a:t>
+              <a:t>Invisible controls in wood or fabric, waterproof panels.</a:t>
             </a:r>
           </a:p>
           <a:p>
@@ -7383,248 +6833,7 @@
                 </a:solidFill>
                 <a:latin typeface="Consolas"/>
               </a:rPr>
-              <a:t>3E  |  24  |  5V, 1.1 A, 4.5 ohm  |  3mm throw, 80g</a:t>
-            </a:r>
-          </a:p>
-        </p:txBody>
-      </p:sp>
-      <p:pic>
-        <p:nvPicPr>
-          <p:cNvPr id="4" name="Picture 3" descr="solenoid.jpg"/>
-          <p:cNvPicPr>
-            <a:picLocks noChangeAspect="1"/>
-          </p:cNvPicPr>
-          <p:nvPr/>
-        </p:nvPicPr>
-        <p:blipFill>
-          <a:blip r:embed="rId2"/>
-          <a:stretch>
-            <a:fillRect/>
-          </a:stretch>
-        </p:blipFill>
-        <p:spPr>
-          <a:xfrm>
-            <a:off x="914400" y="1905000"/>
-            <a:ext cx="4191000" cy="3145410"/>
-          </a:xfrm>
-          <a:prstGeom prst="rect">
-            <a:avLst/>
-          </a:prstGeom>
-        </p:spPr>
-      </p:pic>
-      <p:pic>
-        <p:nvPicPr>
-          <p:cNvPr id="5" name="Picture 4" descr="wordmark_dark.png"/>
-          <p:cNvPicPr>
-            <a:picLocks noChangeAspect="1"/>
-          </p:cNvPicPr>
-          <p:nvPr/>
-        </p:nvPicPr>
-        <p:blipFill>
-          <a:blip r:embed="rId3"/>
-          <a:stretch>
-            <a:fillRect/>
-          </a:stretch>
-        </p:blipFill>
-        <p:spPr>
-          <a:xfrm>
-            <a:off x="342900" y="6184900"/>
-            <a:ext cx="2070100" cy="529560"/>
-          </a:xfrm>
-          <a:prstGeom prst="rect">
-            <a:avLst/>
-          </a:prstGeom>
-        </p:spPr>
-      </p:pic>
-      <p:pic>
-        <p:nvPicPr>
-          <p:cNvPr id="6" name="Picture 5" descr="seal_dark.png"/>
-          <p:cNvPicPr>
-            <a:picLocks noChangeAspect="1"/>
-          </p:cNvPicPr>
-          <p:nvPr/>
-        </p:nvPicPr>
-        <p:blipFill>
-          <a:blip r:embed="rId4"/>
-          <a:stretch>
-            <a:fillRect/>
-          </a:stretch>
-        </p:blipFill>
-        <p:spPr>
-          <a:xfrm>
-            <a:off x="11226800" y="5969000"/>
-            <a:ext cx="713915" cy="711200"/>
-          </a:xfrm>
-          <a:prstGeom prst="rect">
-            <a:avLst/>
-          </a:prstGeom>
-        </p:spPr>
-      </p:pic>
-    </p:spTree>
-  </p:cSld>
-  <p:clrMapOvr>
-    <a:masterClrMapping/>
-  </p:clrMapOvr>
-</p:sld>
-</file>
-
-<file path=ppt/slides/slide13.xml><?xml version="1.0" encoding="utf-8"?>
-<p:sld xmlns:a="http://schemas.openxmlformats.org/drawingml/2006/main" xmlns:p="http://schemas.openxmlformats.org/presentationml/2006/main" xmlns:r="http://schemas.openxmlformats.org/officeDocument/2006/relationships">
-  <p:cSld>
-    <p:spTree>
-      <p:nvGrpSpPr>
-        <p:cNvPr id="1" name=""/>
-        <p:cNvGrpSpPr/>
-        <p:nvPr/>
-      </p:nvGrpSpPr>
-      <p:grpSpPr/>
-      <p:sp>
-        <p:nvSpPr>
-          <p:cNvPr id="2" name="Title 1"/>
-          <p:cNvSpPr>
-            <a:spLocks noGrp="1"/>
-          </p:cNvSpPr>
-          <p:nvPr>
-            <p:ph type="title"/>
-          </p:nvPr>
-        </p:nvSpPr>
-        <p:spPr/>
-        <p:txBody>
-          <a:bodyPr/>
-          <a:lstStyle/>
-          <a:p>
-            <a:pPr marL="0" indent="0" algn="l">
-              <a:buNone/>
-            </a:pPr>
-            <a:r>
-              <a:rPr sz="3200" b="1">
-                <a:solidFill>
-                  <a:srgbClr val="000000"/>
-                </a:solidFill>
-                <a:latin typeface="Arial"/>
-              </a:rPr>
-              <a:t>CAPACITIVE PAD</a:t>
-            </a:r>
-          </a:p>
-        </p:txBody>
-      </p:sp>
-      <p:sp>
-        <p:nvSpPr>
-          <p:cNvPr id="3" name="Text Placeholder 2"/>
-          <p:cNvSpPr>
-            <a:spLocks noGrp="1"/>
-          </p:cNvSpPr>
-          <p:nvPr>
-            <p:ph type="body" idx="1"/>
-          </p:nvPr>
-        </p:nvSpPr>
-        <p:spPr>
-          <a:xfrm>
-            <a:off x="5461000" y="1905000"/>
-            <a:ext cx="5486400" cy="3302000"/>
-          </a:xfrm>
-        </p:spPr>
-        <p:txBody>
-          <a:bodyPr/>
-          <a:lstStyle/>
-          <a:p>
-            <a:pPr marL="0" indent="0" algn="l">
-              <a:lnSpc>
-                <a:spcPct val="130000"/>
-              </a:lnSpc>
-              <a:spcAft>
-                <a:spcPts val="1200"/>
-              </a:spcAft>
-              <a:buNone/>
-            </a:pPr>
-            <a:r>
-              <a:rPr sz="1600" b="0">
-                <a:solidFill>
-                  <a:srgbClr val="000000"/>
-                </a:solidFill>
-                <a:latin typeface="Arial"/>
-              </a:rPr>
-              <a:t>A wire taped behind foil, card or fabric. No sensor and no breakout board, which is why the box on the left is empty.</a:t>
-            </a:r>
-          </a:p>
-          <a:p>
-            <a:pPr marL="0" indent="0" algn="l">
-              <a:lnSpc>
-                <a:spcPct val="130000"/>
-              </a:lnSpc>
-              <a:spcAft>
-                <a:spcPts val="1400"/>
-              </a:spcAft>
-              <a:buNone/>
-            </a:pPr>
-            <a:r>
-              <a:rPr sz="1600" b="1">
-                <a:solidFill>
-                  <a:srgbClr val="002546"/>
-                </a:solidFill>
-                <a:latin typeface="Arial"/>
-              </a:rPr>
-              <a:t>Feels like: nothing. That is the point. The surface stays plain.</a:t>
-            </a:r>
-          </a:p>
-          <a:p>
-            <a:pPr marL="0" indent="0" algn="l">
-              <a:lnSpc>
-                <a:spcPct val="130000"/>
-              </a:lnSpc>
-              <a:spcAft>
-                <a:spcPts val="400"/>
-              </a:spcAft>
-              <a:buNone/>
-            </a:pPr>
-            <a:r>
-              <a:rPr sz="900" b="1">
-                <a:solidFill>
-                  <a:srgbClr val="595959"/>
-                </a:solidFill>
-                <a:latin typeface="Arial"/>
-              </a:rPr>
-              <a:t>USED FOR</a:t>
-            </a:r>
-          </a:p>
-          <a:p>
-            <a:pPr marL="0" indent="0" algn="l">
-              <a:lnSpc>
-                <a:spcPct val="130000"/>
-              </a:lnSpc>
-              <a:spcAft>
-                <a:spcPts val="1400"/>
-              </a:spcAft>
-              <a:buNone/>
-            </a:pPr>
-            <a:r>
-              <a:rPr sz="1400" b="0">
-                <a:solidFill>
-                  <a:srgbClr val="000000"/>
-                </a:solidFill>
-                <a:latin typeface="Arial"/>
-              </a:rPr>
-              <a:t>Invisible controls in wood or fabric, waterproof panels.</a:t>
-            </a:r>
-          </a:p>
-          <a:p>
-            <a:pPr marL="0" indent="0" algn="l">
-              <a:lnSpc>
-                <a:spcPct val="130000"/>
-              </a:lnSpc>
-              <a:spcAft>
-                <a:spcPts val="0"/>
-              </a:spcAft>
-              <a:buNone/>
-            </a:pPr>
-            <a:r>
-              <a:rPr sz="1200" b="0">
-                <a:solidFill>
-                  <a:srgbClr val="595959"/>
-                </a:solidFill>
-                <a:latin typeface="Consolas"/>
-              </a:rPr>
-              <a:t>No drawer, no part number, no cost. Any analogue pin</a:t>
+              <a:t>No drawer, no part number, no cost  |  one wire  |  keep it on USB</a:t>
             </a:r>
           </a:p>
         </p:txBody>
@@ -7755,7 +6964,7 @@
 </p:sld>
 </file>
 
-<file path=ppt/slides/slide14.xml><?xml version="1.0" encoding="utf-8"?>
+<file path=ppt/slides/slide12.xml><?xml version="1.0" encoding="utf-8"?>
 <p:sld xmlns:a="http://schemas.openxmlformats.org/drawingml/2006/main" xmlns:p="http://schemas.openxmlformats.org/presentationml/2006/main" xmlns:r="http://schemas.openxmlformats.org/officeDocument/2006/relationships">
   <p:cSld>
     <p:spTree>
@@ -7790,7 +6999,7 @@
                 </a:solidFill>
                 <a:latin typeface="Arial"/>
               </a:rPr>
-              <a:t>PELTIER TILE</a:t>
+              <a:t>STEPPER MOTOR</a:t>
             </a:r>
           </a:p>
         </p:txBody>
@@ -7831,7 +7040,7 @@
                 </a:solidFill>
                 <a:latin typeface="Arial"/>
               </a:rPr>
-              <a:t>Heats one face and cools the other. Flip the current and it reverses.</a:t>
+              <a:t>Moves in fixed steps rather than continuously, so you always know where it is without a sensor.</a:t>
             </a:r>
           </a:p>
           <a:p>
@@ -7851,7 +7060,7 @@
                 </a:solidFill>
                 <a:latin typeface="Arial"/>
               </a:rPr>
-              <a:t>Feels like: slow. Several seconds before you are sure which way.</a:t>
+              <a:t>Feels like: precise, and audibly clicky.</a:t>
             </a:r>
           </a:p>
           <a:p>
@@ -7891,7 +7100,7 @@
                 </a:solidFill>
                 <a:latin typeface="Arial"/>
               </a:rPr>
-              <a:t>Slow ambient state. Never an alert.</a:t>
+              <a:t>Slow accurate motion. Dials, sliders, anything positioned.</a:t>
             </a:r>
           </a:p>
           <a:p>
@@ -7911,730 +7120,7 @@
                 </a:solidFill>
                 <a:latin typeface="Consolas"/>
               </a:rPr>
-              <a:t>Drawer 4C  |  25 small, 35 big  |  needs an H bridge</a:t>
-            </a:r>
-          </a:p>
-        </p:txBody>
-      </p:sp>
-      <p:pic>
-        <p:nvPicPr>
-          <p:cNvPr id="4" name="Picture 3" descr="peltier.jpg"/>
-          <p:cNvPicPr>
-            <a:picLocks noChangeAspect="1"/>
-          </p:cNvPicPr>
-          <p:nvPr/>
-        </p:nvPicPr>
-        <p:blipFill>
-          <a:blip r:embed="rId2"/>
-          <a:stretch>
-            <a:fillRect/>
-          </a:stretch>
-        </p:blipFill>
-        <p:spPr>
-          <a:xfrm>
-            <a:off x="914400" y="1905000"/>
-            <a:ext cx="4191000" cy="3143250"/>
-          </a:xfrm>
-          <a:prstGeom prst="rect">
-            <a:avLst/>
-          </a:prstGeom>
-        </p:spPr>
-      </p:pic>
-      <p:pic>
-        <p:nvPicPr>
-          <p:cNvPr id="5" name="Picture 4" descr="wordmark_dark.png"/>
-          <p:cNvPicPr>
-            <a:picLocks noChangeAspect="1"/>
-          </p:cNvPicPr>
-          <p:nvPr/>
-        </p:nvPicPr>
-        <p:blipFill>
-          <a:blip r:embed="rId3"/>
-          <a:stretch>
-            <a:fillRect/>
-          </a:stretch>
-        </p:blipFill>
-        <p:spPr>
-          <a:xfrm>
-            <a:off x="342900" y="6184900"/>
-            <a:ext cx="2070100" cy="529560"/>
-          </a:xfrm>
-          <a:prstGeom prst="rect">
-            <a:avLst/>
-          </a:prstGeom>
-        </p:spPr>
-      </p:pic>
-      <p:pic>
-        <p:nvPicPr>
-          <p:cNvPr id="6" name="Picture 5" descr="seal_dark.png"/>
-          <p:cNvPicPr>
-            <a:picLocks noChangeAspect="1"/>
-          </p:cNvPicPr>
-          <p:nvPr/>
-        </p:nvPicPr>
-        <p:blipFill>
-          <a:blip r:embed="rId4"/>
-          <a:stretch>
-            <a:fillRect/>
-          </a:stretch>
-        </p:blipFill>
-        <p:spPr>
-          <a:xfrm>
-            <a:off x="11226800" y="5969000"/>
-            <a:ext cx="713915" cy="711200"/>
-          </a:xfrm>
-          <a:prstGeom prst="rect">
-            <a:avLst/>
-          </a:prstGeom>
-        </p:spPr>
-      </p:pic>
-    </p:spTree>
-  </p:cSld>
-  <p:clrMapOvr>
-    <a:masterClrMapping/>
-  </p:clrMapOvr>
-</p:sld>
-</file>
-
-<file path=ppt/slides/slide15.xml><?xml version="1.0" encoding="utf-8"?>
-<p:sld xmlns:a="http://schemas.openxmlformats.org/drawingml/2006/main" xmlns:p="http://schemas.openxmlformats.org/presentationml/2006/main" xmlns:r="http://schemas.openxmlformats.org/officeDocument/2006/relationships">
-  <p:cSld>
-    <p:spTree>
-      <p:nvGrpSpPr>
-        <p:cNvPr id="1" name=""/>
-        <p:cNvGrpSpPr/>
-        <p:nvPr/>
-      </p:nvGrpSpPr>
-      <p:grpSpPr/>
-      <p:sp>
-        <p:nvSpPr>
-          <p:cNvPr id="2" name="Title 1"/>
-          <p:cNvSpPr>
-            <a:spLocks noGrp="1"/>
-          </p:cNvSpPr>
-          <p:nvPr>
-            <p:ph type="title"/>
-          </p:nvPr>
-        </p:nvSpPr>
-        <p:spPr/>
-        <p:txBody>
-          <a:bodyPr/>
-          <a:lstStyle/>
-          <a:p>
-            <a:pPr marL="0" indent="0" algn="l">
-              <a:buNone/>
-            </a:pPr>
-            <a:r>
-              <a:rPr sz="3200" b="1">
-                <a:solidFill>
-                  <a:srgbClr val="000000"/>
-                </a:solidFill>
-                <a:latin typeface="Arial"/>
-              </a:rPr>
-              <a:t>SURFACE TRANSDUCER</a:t>
-            </a:r>
-          </a:p>
-        </p:txBody>
-      </p:sp>
-      <p:sp>
-        <p:nvSpPr>
-          <p:cNvPr id="3" name="Text Placeholder 2"/>
-          <p:cNvSpPr>
-            <a:spLocks noGrp="1"/>
-          </p:cNvSpPr>
-          <p:nvPr>
-            <p:ph type="body" idx="1"/>
-          </p:nvPr>
-        </p:nvSpPr>
-        <p:spPr>
-          <a:xfrm>
-            <a:off x="5461000" y="1905000"/>
-            <a:ext cx="5486400" cy="3302000"/>
-          </a:xfrm>
-        </p:spPr>
-        <p:txBody>
-          <a:bodyPr/>
-          <a:lstStyle/>
-          <a:p>
-            <a:pPr marL="0" indent="0" algn="l">
-              <a:lnSpc>
-                <a:spcPct val="130000"/>
-              </a:lnSpc>
-              <a:spcAft>
-                <a:spcPts val="1200"/>
-              </a:spcAft>
-              <a:buNone/>
-            </a:pPr>
-            <a:r>
-              <a:rPr sz="1600" b="0">
-                <a:solidFill>
-                  <a:srgbClr val="000000"/>
-                </a:solidFill>
-                <a:latin typeface="Arial"/>
-              </a:rPr>
-              <a:t>Turns any surface into a speaker. Drive it so one frequency is felt and another is heard, from the same part.</a:t>
-            </a:r>
-          </a:p>
-          <a:p>
-            <a:pPr marL="0" indent="0" algn="l">
-              <a:lnSpc>
-                <a:spcPct val="130000"/>
-              </a:lnSpc>
-              <a:spcAft>
-                <a:spcPts val="1400"/>
-              </a:spcAft>
-              <a:buNone/>
-            </a:pPr>
-            <a:r>
-              <a:rPr sz="1600" b="1">
-                <a:solidFill>
-                  <a:srgbClr val="002546"/>
-                </a:solidFill>
-                <a:latin typeface="Arial"/>
-              </a:rPr>
-              <a:t>Feels like: more certain, rather than louder.</a:t>
-            </a:r>
-          </a:p>
-          <a:p>
-            <a:pPr marL="0" indent="0" algn="l">
-              <a:lnSpc>
-                <a:spcPct val="130000"/>
-              </a:lnSpc>
-              <a:spcAft>
-                <a:spcPts val="400"/>
-              </a:spcAft>
-              <a:buNone/>
-            </a:pPr>
-            <a:r>
-              <a:rPr sz="900" b="1">
-                <a:solidFill>
-                  <a:srgbClr val="595959"/>
-                </a:solidFill>
-                <a:latin typeface="Arial"/>
-              </a:rPr>
-              <a:t>USED FOR</a:t>
-            </a:r>
-          </a:p>
-          <a:p>
-            <a:pPr marL="0" indent="0" algn="l">
-              <a:lnSpc>
-                <a:spcPct val="130000"/>
-              </a:lnSpc>
-              <a:spcAft>
-                <a:spcPts val="1400"/>
-              </a:spcAft>
-              <a:buNone/>
-            </a:pPr>
-            <a:r>
-              <a:rPr sz="1400" b="0">
-                <a:solidFill>
-                  <a:srgbClr val="000000"/>
-                </a:solidFill>
-                <a:latin typeface="Arial"/>
-              </a:rPr>
-              <a:t>Noisy or bright environments, and accessibility.</a:t>
-            </a:r>
-          </a:p>
-          <a:p>
-            <a:pPr marL="0" indent="0" algn="l">
-              <a:lnSpc>
-                <a:spcPct val="130000"/>
-              </a:lnSpc>
-              <a:spcAft>
-                <a:spcPts val="0"/>
-              </a:spcAft>
-              <a:buNone/>
-            </a:pPr>
-            <a:r>
-              <a:rPr sz="1200" b="0">
-                <a:solidFill>
-                  <a:srgbClr val="595959"/>
-                </a:solidFill>
-                <a:latin typeface="Consolas"/>
-              </a:rPr>
-              <a:t>Drawer 7F  |  12 large, 13 medium, 23 bone  |  needs an amp</a:t>
-            </a:r>
-          </a:p>
-        </p:txBody>
-      </p:sp>
-      <p:pic>
-        <p:nvPicPr>
-          <p:cNvPr id="4" name="Picture 3" descr="transducer.jpg"/>
-          <p:cNvPicPr>
-            <a:picLocks noChangeAspect="1"/>
-          </p:cNvPicPr>
-          <p:nvPr/>
-        </p:nvPicPr>
-        <p:blipFill>
-          <a:blip r:embed="rId2"/>
-          <a:stretch>
-            <a:fillRect/>
-          </a:stretch>
-        </p:blipFill>
-        <p:spPr>
-          <a:xfrm>
-            <a:off x="914400" y="1905000"/>
-            <a:ext cx="3175000" cy="3175000"/>
-          </a:xfrm>
-          <a:prstGeom prst="rect">
-            <a:avLst/>
-          </a:prstGeom>
-        </p:spPr>
-      </p:pic>
-      <p:pic>
-        <p:nvPicPr>
-          <p:cNvPr id="5" name="Picture 4" descr="wordmark_dark.png"/>
-          <p:cNvPicPr>
-            <a:picLocks noChangeAspect="1"/>
-          </p:cNvPicPr>
-          <p:nvPr/>
-        </p:nvPicPr>
-        <p:blipFill>
-          <a:blip r:embed="rId3"/>
-          <a:stretch>
-            <a:fillRect/>
-          </a:stretch>
-        </p:blipFill>
-        <p:spPr>
-          <a:xfrm>
-            <a:off x="342900" y="6184900"/>
-            <a:ext cx="2070100" cy="529560"/>
-          </a:xfrm>
-          <a:prstGeom prst="rect">
-            <a:avLst/>
-          </a:prstGeom>
-        </p:spPr>
-      </p:pic>
-      <p:pic>
-        <p:nvPicPr>
-          <p:cNvPr id="6" name="Picture 5" descr="seal_dark.png"/>
-          <p:cNvPicPr>
-            <a:picLocks noChangeAspect="1"/>
-          </p:cNvPicPr>
-          <p:nvPr/>
-        </p:nvPicPr>
-        <p:blipFill>
-          <a:blip r:embed="rId4"/>
-          <a:stretch>
-            <a:fillRect/>
-          </a:stretch>
-        </p:blipFill>
-        <p:spPr>
-          <a:xfrm>
-            <a:off x="11226800" y="5969000"/>
-            <a:ext cx="713915" cy="711200"/>
-          </a:xfrm>
-          <a:prstGeom prst="rect">
-            <a:avLst/>
-          </a:prstGeom>
-        </p:spPr>
-      </p:pic>
-    </p:spTree>
-  </p:cSld>
-  <p:clrMapOvr>
-    <a:masterClrMapping/>
-  </p:clrMapOvr>
-</p:sld>
-</file>
-
-<file path=ppt/slides/slide16.xml><?xml version="1.0" encoding="utf-8"?>
-<p:sld xmlns:a="http://schemas.openxmlformats.org/drawingml/2006/main" xmlns:p="http://schemas.openxmlformats.org/presentationml/2006/main" xmlns:r="http://schemas.openxmlformats.org/officeDocument/2006/relationships">
-  <p:cSld>
-    <p:spTree>
-      <p:nvGrpSpPr>
-        <p:cNvPr id="1" name=""/>
-        <p:cNvGrpSpPr/>
-        <p:nvPr/>
-      </p:nvGrpSpPr>
-      <p:grpSpPr/>
-      <p:sp>
-        <p:nvSpPr>
-          <p:cNvPr id="2" name="Title 1"/>
-          <p:cNvSpPr>
-            <a:spLocks noGrp="1"/>
-          </p:cNvSpPr>
-          <p:nvPr>
-            <p:ph type="title"/>
-          </p:nvPr>
-        </p:nvSpPr>
-        <p:spPr/>
-        <p:txBody>
-          <a:bodyPr/>
-          <a:lstStyle/>
-          <a:p>
-            <a:pPr marL="0" indent="0" algn="l">
-              <a:buNone/>
-            </a:pPr>
-            <a:r>
-              <a:rPr sz="3200" b="1">
-                <a:solidFill>
-                  <a:srgbClr val="000000"/>
-                </a:solidFill>
-                <a:latin typeface="Arial"/>
-              </a:rPr>
-              <a:t>SERVO</a:t>
-            </a:r>
-          </a:p>
-        </p:txBody>
-      </p:sp>
-      <p:sp>
-        <p:nvSpPr>
-          <p:cNvPr id="3" name="Text Placeholder 2"/>
-          <p:cNvSpPr>
-            <a:spLocks noGrp="1"/>
-          </p:cNvSpPr>
-          <p:nvPr>
-            <p:ph type="body" idx="1"/>
-          </p:nvPr>
-        </p:nvSpPr>
-        <p:spPr>
-          <a:xfrm>
-            <a:off x="5461000" y="1905000"/>
-            <a:ext cx="5486400" cy="3302000"/>
-          </a:xfrm>
-        </p:spPr>
-        <p:txBody>
-          <a:bodyPr/>
-          <a:lstStyle/>
-          <a:p>
-            <a:pPr marL="0" indent="0" algn="l">
-              <a:lnSpc>
-                <a:spcPct val="130000"/>
-              </a:lnSpc>
-              <a:spcAft>
-                <a:spcPts val="1200"/>
-              </a:spcAft>
-              <a:buNone/>
-            </a:pPr>
-            <a:r>
-              <a:rPr sz="1600" b="0">
-                <a:solidFill>
-                  <a:srgbClr val="000000"/>
-                </a:solidFill>
-                <a:latin typeface="Arial"/>
-              </a:rPr>
-              <a:t>A motor that holds a position instead of spinning freely. Tell it an angle and it goes there.</a:t>
-            </a:r>
-          </a:p>
-          <a:p>
-            <a:pPr marL="0" indent="0" algn="l">
-              <a:lnSpc>
-                <a:spcPct val="130000"/>
-              </a:lnSpc>
-              <a:spcAft>
-                <a:spcPts val="1400"/>
-              </a:spcAft>
-              <a:buNone/>
-            </a:pPr>
-            <a:r>
-              <a:rPr sz="1600" b="1">
-                <a:solidFill>
-                  <a:srgbClr val="002546"/>
-                </a:solidFill>
-                <a:latin typeface="Arial"/>
-              </a:rPr>
-              <a:t>Feels like: something deliberate moving, with force behind it.</a:t>
-            </a:r>
-          </a:p>
-          <a:p>
-            <a:pPr marL="0" indent="0" algn="l">
-              <a:lnSpc>
-                <a:spcPct val="130000"/>
-              </a:lnSpc>
-              <a:spcAft>
-                <a:spcPts val="400"/>
-              </a:spcAft>
-              <a:buNone/>
-            </a:pPr>
-            <a:r>
-              <a:rPr sz="900" b="1">
-                <a:solidFill>
-                  <a:srgbClr val="595959"/>
-                </a:solidFill>
-                <a:latin typeface="Arial"/>
-              </a:rPr>
-              <a:t>USED FOR</a:t>
-            </a:r>
-          </a:p>
-          <a:p>
-            <a:pPr marL="0" indent="0" algn="l">
-              <a:lnSpc>
-                <a:spcPct val="130000"/>
-              </a:lnSpc>
-              <a:spcAft>
-                <a:spcPts val="1400"/>
-              </a:spcAft>
-              <a:buNone/>
-            </a:pPr>
-            <a:r>
-              <a:rPr sz="1400" b="0">
-                <a:solidFill>
-                  <a:srgbClr val="000000"/>
-                </a:solidFill>
-                <a:latin typeface="Arial"/>
-              </a:rPr>
-              <a:t>Anything that points, pushes, opens or resists a hand.</a:t>
-            </a:r>
-          </a:p>
-          <a:p>
-            <a:pPr marL="0" indent="0" algn="l">
-              <a:lnSpc>
-                <a:spcPct val="130000"/>
-              </a:lnSpc>
-              <a:spcAft>
-                <a:spcPts val="0"/>
-              </a:spcAft>
-              <a:buNone/>
-            </a:pPr>
-            <a:r>
-              <a:rPr sz="1200" b="0">
-                <a:solidFill>
-                  <a:srgbClr val="595959"/>
-                </a:solidFill>
-                <a:latin typeface="Consolas"/>
-              </a:rPr>
-              <a:t>Drawer 2F  |  80 in stock  |  Servo.h  |  needs its own 5V</a:t>
-            </a:r>
-          </a:p>
-        </p:txBody>
-      </p:sp>
-      <p:pic>
-        <p:nvPicPr>
-          <p:cNvPr id="4" name="Picture 3" descr="servo.jpg"/>
-          <p:cNvPicPr>
-            <a:picLocks noChangeAspect="1"/>
-          </p:cNvPicPr>
-          <p:nvPr/>
-        </p:nvPicPr>
-        <p:blipFill>
-          <a:blip r:embed="rId2"/>
-          <a:stretch>
-            <a:fillRect/>
-          </a:stretch>
-        </p:blipFill>
-        <p:spPr>
-          <a:xfrm>
-            <a:off x="914400" y="1905000"/>
-            <a:ext cx="4191000" cy="3145410"/>
-          </a:xfrm>
-          <a:prstGeom prst="rect">
-            <a:avLst/>
-          </a:prstGeom>
-        </p:spPr>
-      </p:pic>
-      <p:pic>
-        <p:nvPicPr>
-          <p:cNvPr id="5" name="Picture 4" descr="wordmark_dark.png"/>
-          <p:cNvPicPr>
-            <a:picLocks noChangeAspect="1"/>
-          </p:cNvPicPr>
-          <p:nvPr/>
-        </p:nvPicPr>
-        <p:blipFill>
-          <a:blip r:embed="rId3"/>
-          <a:stretch>
-            <a:fillRect/>
-          </a:stretch>
-        </p:blipFill>
-        <p:spPr>
-          <a:xfrm>
-            <a:off x="342900" y="6184900"/>
-            <a:ext cx="2070100" cy="529560"/>
-          </a:xfrm>
-          <a:prstGeom prst="rect">
-            <a:avLst/>
-          </a:prstGeom>
-        </p:spPr>
-      </p:pic>
-      <p:pic>
-        <p:nvPicPr>
-          <p:cNvPr id="6" name="Picture 5" descr="seal_dark.png"/>
-          <p:cNvPicPr>
-            <a:picLocks noChangeAspect="1"/>
-          </p:cNvPicPr>
-          <p:nvPr/>
-        </p:nvPicPr>
-        <p:blipFill>
-          <a:blip r:embed="rId4"/>
-          <a:stretch>
-            <a:fillRect/>
-          </a:stretch>
-        </p:blipFill>
-        <p:spPr>
-          <a:xfrm>
-            <a:off x="11226800" y="5969000"/>
-            <a:ext cx="713915" cy="711200"/>
-          </a:xfrm>
-          <a:prstGeom prst="rect">
-            <a:avLst/>
-          </a:prstGeom>
-        </p:spPr>
-      </p:pic>
-    </p:spTree>
-  </p:cSld>
-  <p:clrMapOvr>
-    <a:masterClrMapping/>
-  </p:clrMapOvr>
-</p:sld>
-</file>
-
-<file path=ppt/slides/slide17.xml><?xml version="1.0" encoding="utf-8"?>
-<p:sld xmlns:a="http://schemas.openxmlformats.org/drawingml/2006/main" xmlns:p="http://schemas.openxmlformats.org/presentationml/2006/main" xmlns:r="http://schemas.openxmlformats.org/officeDocument/2006/relationships">
-  <p:cSld>
-    <p:spTree>
-      <p:nvGrpSpPr>
-        <p:cNvPr id="1" name=""/>
-        <p:cNvGrpSpPr/>
-        <p:nvPr/>
-      </p:nvGrpSpPr>
-      <p:grpSpPr/>
-      <p:sp>
-        <p:nvSpPr>
-          <p:cNvPr id="2" name="Title 1"/>
-          <p:cNvSpPr>
-            <a:spLocks noGrp="1"/>
-          </p:cNvSpPr>
-          <p:nvPr>
-            <p:ph type="title"/>
-          </p:nvPr>
-        </p:nvSpPr>
-        <p:spPr/>
-        <p:txBody>
-          <a:bodyPr/>
-          <a:lstStyle/>
-          <a:p>
-            <a:pPr marL="0" indent="0" algn="l">
-              <a:buNone/>
-            </a:pPr>
-            <a:r>
-              <a:rPr sz="3200" b="1">
-                <a:solidFill>
-                  <a:srgbClr val="000000"/>
-                </a:solidFill>
-                <a:latin typeface="Arial"/>
-              </a:rPr>
-              <a:t>STEPPER MOTOR</a:t>
-            </a:r>
-          </a:p>
-        </p:txBody>
-      </p:sp>
-      <p:sp>
-        <p:nvSpPr>
-          <p:cNvPr id="3" name="Text Placeholder 2"/>
-          <p:cNvSpPr>
-            <a:spLocks noGrp="1"/>
-          </p:cNvSpPr>
-          <p:nvPr>
-            <p:ph type="body" idx="1"/>
-          </p:nvPr>
-        </p:nvSpPr>
-        <p:spPr>
-          <a:xfrm>
-            <a:off x="5461000" y="1905000"/>
-            <a:ext cx="5486400" cy="3302000"/>
-          </a:xfrm>
-        </p:spPr>
-        <p:txBody>
-          <a:bodyPr/>
-          <a:lstStyle/>
-          <a:p>
-            <a:pPr marL="0" indent="0" algn="l">
-              <a:lnSpc>
-                <a:spcPct val="130000"/>
-              </a:lnSpc>
-              <a:spcAft>
-                <a:spcPts val="1200"/>
-              </a:spcAft>
-              <a:buNone/>
-            </a:pPr>
-            <a:r>
-              <a:rPr sz="1600" b="0">
-                <a:solidFill>
-                  <a:srgbClr val="000000"/>
-                </a:solidFill>
-                <a:latin typeface="Arial"/>
-              </a:rPr>
-              <a:t>Moves in fixed steps rather than continuously, so you always know where it is without a sensor.</a:t>
-            </a:r>
-          </a:p>
-          <a:p>
-            <a:pPr marL="0" indent="0" algn="l">
-              <a:lnSpc>
-                <a:spcPct val="130000"/>
-              </a:lnSpc>
-              <a:spcAft>
-                <a:spcPts val="1400"/>
-              </a:spcAft>
-              <a:buNone/>
-            </a:pPr>
-            <a:r>
-              <a:rPr sz="1600" b="1">
-                <a:solidFill>
-                  <a:srgbClr val="002546"/>
-                </a:solidFill>
-                <a:latin typeface="Arial"/>
-              </a:rPr>
-              <a:t>Feels like: precise, and audibly clicky.</a:t>
-            </a:r>
-          </a:p>
-          <a:p>
-            <a:pPr marL="0" indent="0" algn="l">
-              <a:lnSpc>
-                <a:spcPct val="130000"/>
-              </a:lnSpc>
-              <a:spcAft>
-                <a:spcPts val="400"/>
-              </a:spcAft>
-              <a:buNone/>
-            </a:pPr>
-            <a:r>
-              <a:rPr sz="900" b="1">
-                <a:solidFill>
-                  <a:srgbClr val="595959"/>
-                </a:solidFill>
-                <a:latin typeface="Arial"/>
-              </a:rPr>
-              <a:t>USED FOR</a:t>
-            </a:r>
-          </a:p>
-          <a:p>
-            <a:pPr marL="0" indent="0" algn="l">
-              <a:lnSpc>
-                <a:spcPct val="130000"/>
-              </a:lnSpc>
-              <a:spcAft>
-                <a:spcPts val="1400"/>
-              </a:spcAft>
-              <a:buNone/>
-            </a:pPr>
-            <a:r>
-              <a:rPr sz="1400" b="0">
-                <a:solidFill>
-                  <a:srgbClr val="000000"/>
-                </a:solidFill>
-                <a:latin typeface="Arial"/>
-              </a:rPr>
-              <a:t>Slow accurate motion. Dials, sliders, anything positioned.</a:t>
-            </a:r>
-          </a:p>
-          <a:p>
-            <a:pPr marL="0" indent="0" algn="l">
-              <a:lnSpc>
-                <a:spcPct val="130000"/>
-              </a:lnSpc>
-              <a:spcAft>
-                <a:spcPts val="0"/>
-              </a:spcAft>
-              <a:buNone/>
-            </a:pPr>
-            <a:r>
-              <a:rPr sz="1200" b="0">
-                <a:solidFill>
-                  <a:srgbClr val="595959"/>
-                </a:solidFill>
-                <a:latin typeface="Consolas"/>
-              </a:rPr>
-              <a:t>2A  |  44  |  ULN2003 driver  |  2048 steps/rev</a:t>
+              <a:t>2A  |  44  |  ULN2003  |  2048 steps/rev  |  own 5V supply</a:t>
             </a:r>
           </a:p>
         </p:txBody>
@@ -8719,7 +7205,7 @@
 </p:sld>
 </file>
 
-<file path=ppt/slides/slide18.xml><?xml version="1.0" encoding="utf-8"?>
+<file path=ppt/slides/slide13.xml><?xml version="1.0" encoding="utf-8"?>
 <p:sld xmlns:a="http://schemas.openxmlformats.org/drawingml/2006/main" xmlns:p="http://schemas.openxmlformats.org/presentationml/2006/main" xmlns:r="http://schemas.openxmlformats.org/officeDocument/2006/relationships">
   <p:cSld>
     <p:spTree>
@@ -8754,7 +7240,7 @@
                 </a:solidFill>
                 <a:latin typeface="Arial"/>
               </a:rPr>
-              <a:t>ELECTROMAGNET</a:t>
+              <a:t>WHAT ELSE THE LAB HAS</a:t>
             </a:r>
           </a:p>
         </p:txBody>
@@ -8769,19 +7255,14 @@
             <p:ph type="body" idx="1"/>
           </p:nvPr>
         </p:nvSpPr>
-        <p:spPr>
-          <a:xfrm>
-            <a:off x="5461000" y="1905000"/>
-            <a:ext cx="5486400" cy="3302000"/>
-          </a:xfrm>
-        </p:spPr>
+        <p:spPr/>
         <p:txBody>
           <a:bodyPr/>
           <a:lstStyle/>
           <a:p>
             <a:pPr marL="0" indent="0" algn="l">
               <a:lnSpc>
-                <a:spcPct val="130000"/>
+                <a:spcPct val="128000"/>
               </a:lnSpc>
               <a:spcAft>
                 <a:spcPts val="1200"/>
@@ -8789,39 +7270,19 @@
               <a:buNone/>
             </a:pPr>
             <a:r>
-              <a:rPr sz="1600" b="0">
-                <a:solidFill>
-                  <a:srgbClr val="000000"/>
-                </a:solidFill>
-                <a:latin typeface="Arial"/>
-              </a:rPr>
-              <a:t>Grabs and releases ferrous metal on command. No moving parts of its own.</a:t>
-            </a:r>
-          </a:p>
-          <a:p>
-            <a:pPr marL="0" indent="0" algn="l">
-              <a:lnSpc>
-                <a:spcPct val="130000"/>
-              </a:lnSpc>
-              <a:spcAft>
-                <a:spcPts val="1400"/>
-              </a:spcAft>
-              <a:buNone/>
-            </a:pPr>
-            <a:r>
-              <a:rPr sz="1600" b="1">
-                <a:solidFill>
-                  <a:srgbClr val="002546"/>
-                </a:solidFill>
-                <a:latin typeface="Arial"/>
-              </a:rPr>
-              <a:t>Feels like: a grip that appears and vanishes.</a:t>
-            </a:r>
-          </a:p>
-          <a:p>
-            <a:pPr marL="0" indent="0" algn="l">
-              <a:lnSpc>
-                <a:spcPct val="130000"/>
+              <a:rPr sz="1700" b="0">
+                <a:solidFill>
+                  <a:srgbClr val="595959"/>
+                </a:solidFill>
+                <a:latin typeface="Arial"/>
+              </a:rPr>
+              <a:t>You are not limited to today's three. All of this is in the drawers, and the repo has working code for the first three.</a:t>
+            </a:r>
+          </a:p>
+          <a:p>
+            <a:pPr marL="0" indent="0" algn="l">
+              <a:lnSpc>
+                <a:spcPct val="128000"/>
               </a:lnSpc>
               <a:spcAft>
                 <a:spcPts val="400"/>
@@ -8829,209 +7290,33 @@
               <a:buNone/>
             </a:pPr>
             <a:r>
-              <a:rPr sz="900" b="1">
-                <a:solidFill>
-                  <a:srgbClr val="595959"/>
-                </a:solidFill>
-                <a:latin typeface="Arial"/>
-              </a:rPr>
-              <a:t>USED FOR</a:t>
-            </a:r>
-          </a:p>
-          <a:p>
-            <a:pPr marL="0" indent="0" algn="l">
-              <a:lnSpc>
-                <a:spcPct val="130000"/>
-              </a:lnSpc>
-              <a:spcAft>
-                <a:spcPts val="1400"/>
-              </a:spcAft>
-              <a:buNone/>
-            </a:pPr>
-            <a:r>
-              <a:rPr sz="1400" b="0">
-                <a:solidFill>
-                  <a:srgbClr val="000000"/>
-                </a:solidFill>
-                <a:latin typeface="Arial"/>
-              </a:rPr>
-              <a:t>Latches, holds, and anything that should let go on cue.</a:t>
-            </a:r>
-          </a:p>
-          <a:p>
-            <a:pPr marL="0" indent="0" algn="l">
-              <a:lnSpc>
-                <a:spcPct val="130000"/>
-              </a:lnSpc>
-              <a:spcAft>
-                <a:spcPts val="0"/>
-              </a:spcAft>
-              <a:buNone/>
-            </a:pPr>
-            <a:r>
-              <a:rPr sz="1200" b="0">
-                <a:solidFill>
-                  <a:srgbClr val="595959"/>
-                </a:solidFill>
-                <a:latin typeface="Consolas"/>
-              </a:rPr>
-              <a:t>Drawer 3D  |  17 mini, 11 standard  |  needs a MOSFET</a:t>
-            </a:r>
-          </a:p>
-        </p:txBody>
-      </p:sp>
-      <p:pic>
-        <p:nvPicPr>
-          <p:cNvPr id="4" name="Picture 3" descr="electromagnet.jpg"/>
-          <p:cNvPicPr>
-            <a:picLocks noChangeAspect="1"/>
-          </p:cNvPicPr>
-          <p:nvPr/>
-        </p:nvPicPr>
-        <p:blipFill>
-          <a:blip r:embed="rId2"/>
-          <a:stretch>
-            <a:fillRect/>
-          </a:stretch>
-        </p:blipFill>
-        <p:spPr>
-          <a:xfrm>
-            <a:off x="914400" y="1905000"/>
-            <a:ext cx="1784181" cy="3175000"/>
-          </a:xfrm>
-          <a:prstGeom prst="rect">
-            <a:avLst/>
-          </a:prstGeom>
-        </p:spPr>
-      </p:pic>
-      <p:pic>
-        <p:nvPicPr>
-          <p:cNvPr id="5" name="Picture 4" descr="wordmark_dark.png"/>
-          <p:cNvPicPr>
-            <a:picLocks noChangeAspect="1"/>
-          </p:cNvPicPr>
-          <p:nvPr/>
-        </p:nvPicPr>
-        <p:blipFill>
-          <a:blip r:embed="rId3"/>
-          <a:stretch>
-            <a:fillRect/>
-          </a:stretch>
-        </p:blipFill>
-        <p:spPr>
-          <a:xfrm>
-            <a:off x="342900" y="6184900"/>
-            <a:ext cx="2070100" cy="529560"/>
-          </a:xfrm>
-          <a:prstGeom prst="rect">
-            <a:avLst/>
-          </a:prstGeom>
-        </p:spPr>
-      </p:pic>
-      <p:pic>
-        <p:nvPicPr>
-          <p:cNvPr id="6" name="Picture 5" descr="seal_dark.png"/>
-          <p:cNvPicPr>
-            <a:picLocks noChangeAspect="1"/>
-          </p:cNvPicPr>
-          <p:nvPr/>
-        </p:nvPicPr>
-        <p:blipFill>
-          <a:blip r:embed="rId4"/>
-          <a:stretch>
-            <a:fillRect/>
-          </a:stretch>
-        </p:blipFill>
-        <p:spPr>
-          <a:xfrm>
-            <a:off x="11226800" y="5969000"/>
-            <a:ext cx="713915" cy="711200"/>
-          </a:xfrm>
-          <a:prstGeom prst="rect">
-            <a:avLst/>
-          </a:prstGeom>
-        </p:spPr>
-      </p:pic>
-    </p:spTree>
-  </p:cSld>
-  <p:clrMapOvr>
-    <a:masterClrMapping/>
-  </p:clrMapOvr>
-</p:sld>
-</file>
-
-<file path=ppt/slides/slide19.xml><?xml version="1.0" encoding="utf-8"?>
-<p:sld xmlns:a="http://schemas.openxmlformats.org/drawingml/2006/main" xmlns:p="http://schemas.openxmlformats.org/presentationml/2006/main" xmlns:r="http://schemas.openxmlformats.org/officeDocument/2006/relationships">
-  <p:cSld>
-    <p:spTree>
-      <p:nvGrpSpPr>
-        <p:cNvPr id="1" name=""/>
-        <p:cNvGrpSpPr/>
-        <p:nvPr/>
-      </p:nvGrpSpPr>
-      <p:grpSpPr/>
-      <p:sp>
-        <p:nvSpPr>
-          <p:cNvPr id="2" name="Title 1"/>
-          <p:cNvSpPr>
-            <a:spLocks noGrp="1"/>
-          </p:cNvSpPr>
-          <p:nvPr>
-            <p:ph type="title"/>
-          </p:nvPr>
-        </p:nvSpPr>
-        <p:spPr/>
-        <p:txBody>
-          <a:bodyPr/>
-          <a:lstStyle/>
-          <a:p>
-            <a:pPr marL="0" indent="0" algn="l">
-              <a:buNone/>
-            </a:pPr>
-            <a:r>
-              <a:rPr sz="3200" b="1">
-                <a:solidFill>
-                  <a:srgbClr val="000000"/>
-                </a:solidFill>
-                <a:latin typeface="Arial"/>
-              </a:rPr>
-              <a:t>FREESTYLE, WITHIN THREE LIMITS</a:t>
-            </a:r>
-          </a:p>
-        </p:txBody>
-      </p:sp>
-      <p:sp>
-        <p:nvSpPr>
-          <p:cNvPr id="3" name="Text Placeholder 2"/>
-          <p:cNvSpPr>
-            <a:spLocks noGrp="1"/>
-          </p:cNvSpPr>
-          <p:nvPr>
-            <p:ph type="body" idx="1"/>
-          </p:nvPr>
-        </p:nvSpPr>
-        <p:spPr/>
-        <p:txBody>
-          <a:bodyPr/>
-          <a:lstStyle/>
+              <a:rPr sz="1700" b="1">
+                <a:solidFill>
+                  <a:srgbClr val="000000"/>
+                </a:solidFill>
+                <a:latin typeface="Arial"/>
+              </a:rPr>
+              <a:t>Coin motor         a buzz you cannot make gentle and fast</a:t>
+            </a:r>
+          </a:p>
           <a:p>
             <a:pPr marL="0" indent="0" algn="l">
               <a:lnSpc>
                 <a:spcPct val="128000"/>
               </a:lnSpc>
               <a:spcAft>
-                <a:spcPts val="1200"/>
-              </a:spcAft>
-              <a:buNone/>
-            </a:pPr>
-            <a:r>
-              <a:rPr sz="1700" b="0">
-                <a:solidFill>
-                  <a:srgbClr val="595959"/>
-                </a:solidFill>
-                <a:latin typeface="Arial"/>
-              </a:rPr>
-              <a:t>You do not have to do the tasks in order, or finish them. Playing properly with two beats rushing all five.</a:t>
+                <a:spcPts val="400"/>
+              </a:spcAft>
+              <a:buNone/>
+            </a:pPr>
+            <a:r>
+              <a:rPr sz="1500" b="0">
+                <a:solidFill>
+                  <a:srgbClr val="000000"/>
+                </a:solidFill>
+                <a:latin typeface="Arial"/>
+              </a:rPr>
+              <a:t>• 1E  |  117 in stock  |  needs a transistor</a:t>
             </a:r>
           </a:p>
           <a:p>
@@ -9045,13 +7330,13 @@
               <a:buNone/>
             </a:pPr>
             <a:r>
-              <a:rPr sz="1700" b="0">
-                <a:solidFill>
-                  <a:srgbClr val="000000"/>
-                </a:solidFill>
-                <a:latin typeface="Arial"/>
-              </a:rPr>
-              <a:t>If you want to drive something not in front of you, go get it.</a:t>
+              <a:rPr sz="1700" b="1">
+                <a:solidFill>
+                  <a:srgbClr val="000000"/>
+                </a:solidFill>
+                <a:latin typeface="Arial"/>
+              </a:rPr>
+              <a:t>Solenoid           a person tapping you, not a signal</a:t>
             </a:r>
           </a:p>
           <a:p>
@@ -9065,13 +7350,33 @@
               <a:buNone/>
             </a:pPr>
             <a:r>
+              <a:rPr sz="1500" b="0">
+                <a:solidFill>
+                  <a:srgbClr val="000000"/>
+                </a:solidFill>
+                <a:latin typeface="Arial"/>
+              </a:rPr>
+              <a:t>• 3E  |  24  |  1.1 A, needs its own supply</a:t>
+            </a:r>
+          </a:p>
+          <a:p>
+            <a:pPr marL="0" indent="0" algn="l">
+              <a:lnSpc>
+                <a:spcPct val="128000"/>
+              </a:lnSpc>
+              <a:spcAft>
+                <a:spcPts val="400"/>
+              </a:spcAft>
+              <a:buNone/>
+            </a:pPr>
+            <a:r>
               <a:rPr sz="1700" b="1">
                 <a:solidFill>
                   <a:srgbClr val="000000"/>
                 </a:solidFill>
                 <a:latin typeface="Arial"/>
               </a:rPr>
-              <a:t>The three things that are not negotiable</a:t>
+              <a:t>Peltier tile       heat and cold, several seconds to be sure</a:t>
             </a:r>
           </a:p>
           <a:p>
@@ -9091,7 +7396,7 @@
                 </a:solidFill>
                 <a:latin typeface="Arial"/>
               </a:rPr>
-              <a:t>• Solenoid and Peltier get their own supply, never USB</a:t>
+              <a:t>• 4C  |  60  |  needs an H bridge</a:t>
             </a:r>
           </a:p>
           <a:p>
@@ -9105,13 +7410,33 @@
               <a:buNone/>
             </a:pPr>
             <a:r>
+              <a:rPr sz="1700" b="1">
+                <a:solidFill>
+                  <a:srgbClr val="000000"/>
+                </a:solidFill>
+                <a:latin typeface="Arial"/>
+              </a:rPr>
+              <a:t>Surface transducer turns any surface into a speaker</a:t>
+            </a:r>
+          </a:p>
+          <a:p>
+            <a:pPr marL="0" indent="0" algn="l">
+              <a:lnSpc>
+                <a:spcPct val="128000"/>
+              </a:lnSpc>
+              <a:spcAft>
+                <a:spcPts val="400"/>
+              </a:spcAft>
+              <a:buNone/>
+            </a:pPr>
+            <a:r>
               <a:rPr sz="1500" b="0">
                 <a:solidFill>
                   <a:srgbClr val="000000"/>
                 </a:solidFill>
                 <a:latin typeface="Arial"/>
               </a:rPr>
-              <a:t>• The Peltier heatsink goes on before it is switched on</a:t>
+              <a:t>• 7F  |  48  |  needs an amplifier</a:t>
             </a:r>
           </a:p>
           <a:p>
@@ -9125,13 +7450,73 @@
               <a:buNone/>
             </a:pPr>
             <a:r>
+              <a:rPr sz="1700" b="1">
+                <a:solidFill>
+                  <a:srgbClr val="000000"/>
+                </a:solidFill>
+                <a:latin typeface="Arial"/>
+              </a:rPr>
+              <a:t>Servo              holds an angle, with force behind it</a:t>
+            </a:r>
+          </a:p>
+          <a:p>
+            <a:pPr marL="0" indent="0" algn="l">
+              <a:lnSpc>
+                <a:spcPct val="128000"/>
+              </a:lnSpc>
+              <a:spcAft>
+                <a:spcPts val="400"/>
+              </a:spcAft>
+              <a:buNone/>
+            </a:pPr>
+            <a:r>
               <a:rPr sz="1500" b="0">
                 <a:solidFill>
                   <a:srgbClr val="000000"/>
                 </a:solidFill>
                 <a:latin typeface="Arial"/>
               </a:rPr>
-              <a:t>• No motor straight from a pin. 40 mA limit, it wants 75</a:t>
+              <a:t>• 2F  |  80  |  Servo.h, own 5V</a:t>
+            </a:r>
+          </a:p>
+          <a:p>
+            <a:pPr marL="0" indent="0" algn="l">
+              <a:lnSpc>
+                <a:spcPct val="128000"/>
+              </a:lnSpc>
+              <a:spcAft>
+                <a:spcPts val="400"/>
+              </a:spcAft>
+              <a:buNone/>
+            </a:pPr>
+            <a:r>
+              <a:rPr sz="1700" b="1">
+                <a:solidFill>
+                  <a:srgbClr val="000000"/>
+                </a:solidFill>
+                <a:latin typeface="Arial"/>
+              </a:rPr>
+              <a:t>Electromagnet      a grip that appears and vanishes</a:t>
+            </a:r>
+          </a:p>
+          <a:p>
+            <a:pPr marL="0" indent="0" algn="l">
+              <a:lnSpc>
+                <a:spcPct val="128000"/>
+              </a:lnSpc>
+              <a:spcAft>
+                <a:spcPts val="400"/>
+              </a:spcAft>
+              <a:buNone/>
+            </a:pPr>
+            <a:r>
+              <a:rPr sz="1500" b="0">
+                <a:solidFill>
+                  <a:srgbClr val="000000"/>
+                </a:solidFill>
+                <a:latin typeface="Arial"/>
+              </a:rPr>
+              <a:t>• 3D  |  28  |  needs a MOSFET</a:t>
             </a:r>
           </a:p>
         </p:txBody>
@@ -9192,7 +7577,7 @@
 </p:sld>
 </file>
 
-<file path=ppt/slides/slide2.xml><?xml version="1.0" encoding="utf-8"?>
+<file path=ppt/slides/slide14.xml><?xml version="1.0" encoding="utf-8"?>
 <p:sld xmlns:a="http://schemas.openxmlformats.org/drawingml/2006/main" xmlns:p="http://schemas.openxmlformats.org/presentationml/2006/main" xmlns:r="http://schemas.openxmlformats.org/officeDocument/2006/relationships">
   <p:cSld>
     <p:spTree>
@@ -9227,7 +7612,7 @@
                 </a:solidFill>
                 <a:latin typeface="Arial"/>
               </a:rPr>
-              <a:t>TLDR</a:t>
+              <a:t>FREESTYLE, WITHIN THREE LIMITS</a:t>
             </a:r>
           </a:p>
         </p:txBody>
@@ -9263,7 +7648,7 @@
                 </a:solidFill>
                 <a:latin typeface="Arial"/>
               </a:rPr>
-              <a:t>Two hours finding out what actuators feel like, and leaving able to drive one from your own code.</a:t>
+              <a:t>You do not have to do the tasks in order, or finish them. Playing properly with two beats rushing all five.</a:t>
             </a:r>
           </a:p>
           <a:p>
@@ -9283,7 +7668,7 @@
                 </a:solidFill>
                 <a:latin typeface="Arial"/>
               </a:rPr>
-              <a:t>Get a board and run task 01. Something spins.</a:t>
+              <a:t>If you want to drive something not in front of you, go get it.</a:t>
             </a:r>
           </a:p>
           <a:p>
@@ -9297,13 +7682,13 @@
               <a:buNone/>
             </a:pPr>
             <a:r>
-              <a:rPr sz="1700" b="0">
-                <a:solidFill>
-                  <a:srgbClr val="000000"/>
-                </a:solidFill>
-                <a:latin typeface="Arial"/>
-              </a:rPr>
-              <a:t>Change two numbers, upload again. That loop is the workshop.</a:t>
+              <a:rPr sz="1700" b="1">
+                <a:solidFill>
+                  <a:srgbClr val="000000"/>
+                </a:solidFill>
+                <a:latin typeface="Arial"/>
+              </a:rPr>
+              <a:t>The three things that are not negotiable</a:t>
             </a:r>
           </a:p>
           <a:p>
@@ -9317,13 +7702,13 @@
               <a:buNone/>
             </a:pPr>
             <a:r>
-              <a:rPr sz="1700" b="0">
-                <a:solidFill>
-                  <a:srgbClr val="000000"/>
-                </a:solidFill>
-                <a:latin typeface="Arial"/>
-              </a:rPr>
-              <a:t>Pick up the actuators you are not driving.</a:t>
+              <a:rPr sz="1500" b="0">
+                <a:solidFill>
+                  <a:srgbClr val="000000"/>
+                </a:solidFill>
+                <a:latin typeface="Arial"/>
+              </a:rPr>
+              <a:t>• Solenoid and Peltier get their own supply, never USB</a:t>
             </a:r>
           </a:p>
           <a:p>
@@ -9337,13 +7722,13 @@
               <a:buNone/>
             </a:pPr>
             <a:r>
-              <a:rPr sz="1700" b="0">
-                <a:solidFill>
-                  <a:srgbClr val="000000"/>
-                </a:solidFill>
-                <a:latin typeface="Arial"/>
-              </a:rPr>
-              <a:t>Work through as many of the five tasks as you get to.</a:t>
+              <a:rPr sz="1500" b="0">
+                <a:solidFill>
+                  <a:srgbClr val="000000"/>
+                </a:solidFill>
+                <a:latin typeface="Arial"/>
+              </a:rPr>
+              <a:t>• The Peltier heatsink goes on before it is switched on</a:t>
             </a:r>
           </a:p>
           <a:p>
@@ -9357,13 +7742,13 @@
               <a:buNone/>
             </a:pPr>
             <a:r>
-              <a:rPr sz="1700" b="0">
-                <a:solidFill>
-                  <a:srgbClr val="000000"/>
-                </a:solidFill>
-                <a:latin typeface="Arial"/>
-              </a:rPr>
-              <a:t>Build one signal someone else can read without looking.</a:t>
+              <a:rPr sz="1500" b="0">
+                <a:solidFill>
+                  <a:srgbClr val="000000"/>
+                </a:solidFill>
+                <a:latin typeface="Arial"/>
+              </a:rPr>
+              <a:t>• No motor straight from a pin. 40 mA limit, it wants 75</a:t>
             </a:r>
           </a:p>
         </p:txBody>
@@ -9424,7 +7809,7 @@
 </p:sld>
 </file>
 
-<file path=ppt/slides/slide20.xml><?xml version="1.0" encoding="utf-8"?>
+<file path=ppt/slides/slide15.xml><?xml version="1.0" encoding="utf-8"?>
 <p:sld xmlns:a="http://schemas.openxmlformats.org/drawingml/2006/main" xmlns:p="http://schemas.openxmlformats.org/presentationml/2006/main" xmlns:r="http://schemas.openxmlformats.org/officeDocument/2006/relationships">
   <p:cSld>
     <p:spTree>
@@ -9656,7 +8041,7 @@
 </p:sld>
 </file>
 
-<file path=ppt/slides/slide21.xml><?xml version="1.0" encoding="utf-8"?>
+<file path=ppt/slides/slide16.xml><?xml version="1.0" encoding="utf-8"?>
 <p:sld xmlns:a="http://schemas.openxmlformats.org/drawingml/2006/main" xmlns:p="http://schemas.openxmlformats.org/presentationml/2006/main" xmlns:r="http://schemas.openxmlformats.org/officeDocument/2006/relationships">
   <p:cSld>
     <p:spTree>
@@ -9752,7 +8137,7 @@
 </p:sld>
 </file>
 
-<file path=ppt/slides/slide22.xml><?xml version="1.0" encoding="utf-8"?>
+<file path=ppt/slides/slide17.xml><?xml version="1.0" encoding="utf-8"?>
 <p:sld xmlns:a="http://schemas.openxmlformats.org/drawingml/2006/main" xmlns:p="http://schemas.openxmlformats.org/presentationml/2006/main" xmlns:r="http://schemas.openxmlformats.org/officeDocument/2006/relationships">
   <p:cSld>
     <p:spTree>
@@ -10136,7 +8521,7 @@
 </p:sld>
 </file>
 
-<file path=ppt/slides/slide23.xml><?xml version="1.0" encoding="utf-8"?>
+<file path=ppt/slides/slide18.xml><?xml version="1.0" encoding="utf-8"?>
 <p:sld xmlns:a="http://schemas.openxmlformats.org/drawingml/2006/main" xmlns:p="http://schemas.openxmlformats.org/presentationml/2006/main" xmlns:r="http://schemas.openxmlformats.org/officeDocument/2006/relationships">
   <p:cSld>
     <p:spTree>
@@ -10388,7 +8773,7 @@
 </p:sld>
 </file>
 
-<file path=ppt/slides/slide24.xml><?xml version="1.0" encoding="utf-8"?>
+<file path=ppt/slides/slide19.xml><?xml version="1.0" encoding="utf-8"?>
 <p:sld xmlns:a="http://schemas.openxmlformats.org/drawingml/2006/main" xmlns:p="http://schemas.openxmlformats.org/presentationml/2006/main" xmlns:r="http://schemas.openxmlformats.org/officeDocument/2006/relationships">
   <p:cSld>
     <p:spTree>
@@ -10680,7 +9065,239 @@
 </p:sld>
 </file>
 
-<file path=ppt/slides/slide25.xml><?xml version="1.0" encoding="utf-8"?>
+<file path=ppt/slides/slide2.xml><?xml version="1.0" encoding="utf-8"?>
+<p:sld xmlns:a="http://schemas.openxmlformats.org/drawingml/2006/main" xmlns:p="http://schemas.openxmlformats.org/presentationml/2006/main" xmlns:r="http://schemas.openxmlformats.org/officeDocument/2006/relationships">
+  <p:cSld>
+    <p:spTree>
+      <p:nvGrpSpPr>
+        <p:cNvPr id="1" name=""/>
+        <p:cNvGrpSpPr/>
+        <p:nvPr/>
+      </p:nvGrpSpPr>
+      <p:grpSpPr/>
+      <p:sp>
+        <p:nvSpPr>
+          <p:cNvPr id="2" name="Title 1"/>
+          <p:cNvSpPr>
+            <a:spLocks noGrp="1"/>
+          </p:cNvSpPr>
+          <p:nvPr>
+            <p:ph type="title"/>
+          </p:nvPr>
+        </p:nvSpPr>
+        <p:spPr/>
+        <p:txBody>
+          <a:bodyPr/>
+          <a:lstStyle/>
+          <a:p>
+            <a:pPr marL="0" indent="0" algn="l">
+              <a:buNone/>
+            </a:pPr>
+            <a:r>
+              <a:rPr sz="3200" b="1">
+                <a:solidFill>
+                  <a:srgbClr val="000000"/>
+                </a:solidFill>
+                <a:latin typeface="Arial"/>
+              </a:rPr>
+              <a:t>TLDR</a:t>
+            </a:r>
+          </a:p>
+        </p:txBody>
+      </p:sp>
+      <p:sp>
+        <p:nvSpPr>
+          <p:cNvPr id="3" name="Text Placeholder 2"/>
+          <p:cNvSpPr>
+            <a:spLocks noGrp="1"/>
+          </p:cNvSpPr>
+          <p:nvPr>
+            <p:ph type="body" idx="1"/>
+          </p:nvPr>
+        </p:nvSpPr>
+        <p:spPr/>
+        <p:txBody>
+          <a:bodyPr/>
+          <a:lstStyle/>
+          <a:p>
+            <a:pPr marL="0" indent="0" algn="l">
+              <a:lnSpc>
+                <a:spcPct val="128000"/>
+              </a:lnSpc>
+              <a:spcAft>
+                <a:spcPts val="1200"/>
+              </a:spcAft>
+              <a:buNone/>
+            </a:pPr>
+            <a:r>
+              <a:rPr sz="1700" b="0">
+                <a:solidFill>
+                  <a:srgbClr val="595959"/>
+                </a:solidFill>
+                <a:latin typeface="Arial"/>
+              </a:rPr>
+              <a:t>Two hours finding out what actuators feel like, and leaving able to drive one from your own code.</a:t>
+            </a:r>
+          </a:p>
+          <a:p>
+            <a:pPr marL="0" indent="0" algn="l">
+              <a:lnSpc>
+                <a:spcPct val="128000"/>
+              </a:lnSpc>
+              <a:spcAft>
+                <a:spcPts val="400"/>
+              </a:spcAft>
+              <a:buNone/>
+            </a:pPr>
+            <a:r>
+              <a:rPr sz="1700" b="0">
+                <a:solidFill>
+                  <a:srgbClr val="000000"/>
+                </a:solidFill>
+                <a:latin typeface="Arial"/>
+              </a:rPr>
+              <a:t>Get a board and run task 01. Something spins.</a:t>
+            </a:r>
+          </a:p>
+          <a:p>
+            <a:pPr marL="0" indent="0" algn="l">
+              <a:lnSpc>
+                <a:spcPct val="128000"/>
+              </a:lnSpc>
+              <a:spcAft>
+                <a:spcPts val="400"/>
+              </a:spcAft>
+              <a:buNone/>
+            </a:pPr>
+            <a:r>
+              <a:rPr sz="1700" b="0">
+                <a:solidFill>
+                  <a:srgbClr val="000000"/>
+                </a:solidFill>
+                <a:latin typeface="Arial"/>
+              </a:rPr>
+              <a:t>Change two numbers, upload again. That loop is the workshop.</a:t>
+            </a:r>
+          </a:p>
+          <a:p>
+            <a:pPr marL="0" indent="0" algn="l">
+              <a:lnSpc>
+                <a:spcPct val="128000"/>
+              </a:lnSpc>
+              <a:spcAft>
+                <a:spcPts val="400"/>
+              </a:spcAft>
+              <a:buNone/>
+            </a:pPr>
+            <a:r>
+              <a:rPr sz="1700" b="0">
+                <a:solidFill>
+                  <a:srgbClr val="000000"/>
+                </a:solidFill>
+                <a:latin typeface="Arial"/>
+              </a:rPr>
+              <a:t>Pick up the actuators you are not driving.</a:t>
+            </a:r>
+          </a:p>
+          <a:p>
+            <a:pPr marL="0" indent="0" algn="l">
+              <a:lnSpc>
+                <a:spcPct val="128000"/>
+              </a:lnSpc>
+              <a:spcAft>
+                <a:spcPts val="400"/>
+              </a:spcAft>
+              <a:buNone/>
+            </a:pPr>
+            <a:r>
+              <a:rPr sz="1700" b="0">
+                <a:solidFill>
+                  <a:srgbClr val="000000"/>
+                </a:solidFill>
+                <a:latin typeface="Arial"/>
+              </a:rPr>
+              <a:t>Work through as many of the five tasks as you get to.</a:t>
+            </a:r>
+          </a:p>
+          <a:p>
+            <a:pPr marL="0" indent="0" algn="l">
+              <a:lnSpc>
+                <a:spcPct val="128000"/>
+              </a:lnSpc>
+              <a:spcAft>
+                <a:spcPts val="400"/>
+              </a:spcAft>
+              <a:buNone/>
+            </a:pPr>
+            <a:r>
+              <a:rPr sz="1700" b="0">
+                <a:solidFill>
+                  <a:srgbClr val="000000"/>
+                </a:solidFill>
+                <a:latin typeface="Arial"/>
+              </a:rPr>
+              <a:t>Build one signal someone else can read without looking.</a:t>
+            </a:r>
+          </a:p>
+        </p:txBody>
+      </p:sp>
+      <p:pic>
+        <p:nvPicPr>
+          <p:cNvPr id="4" name="Picture 3" descr="wordmark_dark.png"/>
+          <p:cNvPicPr>
+            <a:picLocks noChangeAspect="1"/>
+          </p:cNvPicPr>
+          <p:nvPr/>
+        </p:nvPicPr>
+        <p:blipFill>
+          <a:blip r:embed="rId2"/>
+          <a:stretch>
+            <a:fillRect/>
+          </a:stretch>
+        </p:blipFill>
+        <p:spPr>
+          <a:xfrm>
+            <a:off x="342900" y="6184900"/>
+            <a:ext cx="2070100" cy="529560"/>
+          </a:xfrm>
+          <a:prstGeom prst="rect">
+            <a:avLst/>
+          </a:prstGeom>
+        </p:spPr>
+      </p:pic>
+      <p:pic>
+        <p:nvPicPr>
+          <p:cNvPr id="5" name="Picture 4" descr="seal_dark.png"/>
+          <p:cNvPicPr>
+            <a:picLocks noChangeAspect="1"/>
+          </p:cNvPicPr>
+          <p:nvPr/>
+        </p:nvPicPr>
+        <p:blipFill>
+          <a:blip r:embed="rId3"/>
+          <a:stretch>
+            <a:fillRect/>
+          </a:stretch>
+        </p:blipFill>
+        <p:spPr>
+          <a:xfrm>
+            <a:off x="11226800" y="5969000"/>
+            <a:ext cx="713915" cy="711200"/>
+          </a:xfrm>
+          <a:prstGeom prst="rect">
+            <a:avLst/>
+          </a:prstGeom>
+        </p:spPr>
+      </p:pic>
+    </p:spTree>
+  </p:cSld>
+  <p:clrMapOvr>
+    <a:masterClrMapping/>
+  </p:clrMapOvr>
+</p:sld>
+</file>
+
+<file path=ppt/slides/slide20.xml><?xml version="1.0" encoding="utf-8"?>
 <p:sld xmlns:a="http://schemas.openxmlformats.org/drawingml/2006/main" xmlns:p="http://schemas.openxmlformats.org/presentationml/2006/main" xmlns:r="http://schemas.openxmlformats.org/officeDocument/2006/relationships">
   <p:cSld>
     <p:spTree>
@@ -11024,7 +9641,7 @@
 </p:sld>
 </file>
 
-<file path=ppt/slides/slide26.xml><?xml version="1.0" encoding="utf-8"?>
+<file path=ppt/slides/slide21.xml><?xml version="1.0" encoding="utf-8"?>
 <p:sld xmlns:a="http://schemas.openxmlformats.org/drawingml/2006/main" xmlns:p="http://schemas.openxmlformats.org/presentationml/2006/main" xmlns:r="http://schemas.openxmlformats.org/officeDocument/2006/relationships">
   <p:cSld>
     <p:spTree>
@@ -11276,7 +9893,7 @@
 </p:sld>
 </file>
 
-<file path=ppt/slides/slide27.xml><?xml version="1.0" encoding="utf-8"?>
+<file path=ppt/slides/slide22.xml><?xml version="1.0" encoding="utf-8"?>
 <p:sld xmlns:a="http://schemas.openxmlformats.org/drawingml/2006/main" xmlns:p="http://schemas.openxmlformats.org/presentationml/2006/main" xmlns:r="http://schemas.openxmlformats.org/officeDocument/2006/relationships">
   <p:cSld>
     <p:spTree>
@@ -11372,7 +9989,7 @@
 </p:sld>
 </file>
 
-<file path=ppt/slides/slide28.xml><?xml version="1.0" encoding="utf-8"?>
+<file path=ppt/slides/slide23.xml><?xml version="1.0" encoding="utf-8"?>
 <p:sld xmlns:a="http://schemas.openxmlformats.org/drawingml/2006/main" xmlns:p="http://schemas.openxmlformats.org/presentationml/2006/main" xmlns:r="http://schemas.openxmlformats.org/officeDocument/2006/relationships">
   <p:cSld>
     <p:spTree>
@@ -11624,7 +10241,7 @@
 </p:sld>
 </file>
 
-<file path=ppt/slides/slide29.xml><?xml version="1.0" encoding="utf-8"?>
+<file path=ppt/slides/slide24.xml><?xml version="1.0" encoding="utf-8"?>
 <p:sld xmlns:a="http://schemas.openxmlformats.org/drawingml/2006/main" xmlns:p="http://schemas.openxmlformats.org/presentationml/2006/main" xmlns:r="http://schemas.openxmlformats.org/officeDocument/2006/relationships">
   <p:cSld>
     <p:spTree>
@@ -11807,7 +10424,7 @@
 </p:sld>
 </file>
 
-<file path=ppt/slides/slide3.xml><?xml version="1.0" encoding="utf-8"?>
+<file path=ppt/slides/slide25.xml><?xml version="1.0" encoding="utf-8"?>
 <p:sld xmlns:a="http://schemas.openxmlformats.org/drawingml/2006/main" xmlns:p="http://schemas.openxmlformats.org/presentationml/2006/main" xmlns:r="http://schemas.openxmlformats.org/officeDocument/2006/relationships">
   <p:cSld>
     <p:spTree>
@@ -11842,7 +10459,7 @@
                 </a:solidFill>
                 <a:latin typeface="Arial"/>
               </a:rPr>
-              <a:t>WHY WE ARE HERE</a:t>
+              <a:t>BEFORE YOU CALL IT DONE</a:t>
             </a:r>
           </a:p>
         </p:txBody>
@@ -11878,7 +10495,7 @@
                 </a:solidFill>
                 <a:latin typeface="Arial"/>
               </a:rPr>
-              <a:t>You can read a datasheet. You have never held one of these.</a:t>
+              <a:t>Hand your device to another group with the screen turned away.</a:t>
             </a:r>
           </a:p>
           <a:p>
@@ -11892,13 +10509,13 @@
               <a:buNone/>
             </a:pPr>
             <a:r>
-              <a:rPr sz="1700" b="0">
-                <a:solidFill>
-                  <a:srgbClr val="000000"/>
-                </a:solidFill>
-                <a:latin typeface="Arial"/>
-              </a:rPr>
-              <a:t>Most projects end up on the screen and the speaker</a:t>
+              <a:rPr sz="1500" b="0">
+                <a:solidFill>
+                  <a:srgbClr val="000000"/>
+                </a:solidFill>
+                <a:latin typeface="Arial"/>
+              </a:rPr>
+              <a:t>• They can tell all three messages apart</a:t>
             </a:r>
           </a:p>
           <a:p>
@@ -11918,7 +10535,7 @@
                 </a:solidFill>
                 <a:latin typeface="Arial"/>
               </a:rPr>
-              <a:t>• Not because touch was wrong</a:t>
+              <a:t>• It does not fire continuously when held</a:t>
             </a:r>
           </a:p>
           <a:p>
@@ -11938,7 +10555,7 @@
                 </a:solidFill>
                 <a:latin typeface="Arial"/>
               </a:rPr>
-              <a:t>• Because nobody knew the lab has 117 coin motors</a:t>
+              <a:t>• You know which two got confused, and why</a:t>
             </a:r>
           </a:p>
           <a:p>
@@ -11969,7 +10586,7 @@
                 </a:solidFill>
                 <a:latin typeface="Arial"/>
               </a:rPr>
-              <a:t>Today: decide it feels cheap, pick something else</a:t>
+              <a:t>What you actually leave with</a:t>
             </a:r>
           </a:p>
           <a:p>
@@ -11989,7 +10606,27 @@
                 </a:solidFill>
                 <a:latin typeface="Arial"/>
               </a:rPr>
-              <a:t>• Better now than in week 46</a:t>
+              <a:t>• What things feel like, how to drive one, and which to pick</a:t>
+            </a:r>
+          </a:p>
+          <a:p>
+            <a:pPr marL="0" indent="0" algn="l">
+              <a:lnSpc>
+                <a:spcPct val="128000"/>
+              </a:lnSpc>
+              <a:spcAft>
+                <a:spcPts val="400"/>
+              </a:spcAft>
+              <a:buNone/>
+            </a:pPr>
+            <a:r>
+              <a:rPr sz="1500" b="0">
+                <a:solidFill>
+                  <a:srgbClr val="000000"/>
+                </a:solidFill>
+                <a:latin typeface="Arial"/>
+              </a:rPr>
+              <a:t>• That last one is the expensive mistake this prevents</a:t>
             </a:r>
           </a:p>
         </p:txBody>
@@ -12050,270 +10687,7 @@
 </p:sld>
 </file>
 
-<file path=ppt/slides/slide30.xml><?xml version="1.0" encoding="utf-8"?>
-<p:sld xmlns:a="http://schemas.openxmlformats.org/drawingml/2006/main" xmlns:p="http://schemas.openxmlformats.org/presentationml/2006/main" xmlns:r="http://schemas.openxmlformats.org/officeDocument/2006/relationships">
-  <p:cSld>
-    <p:spTree>
-      <p:nvGrpSpPr>
-        <p:cNvPr id="1" name=""/>
-        <p:cNvGrpSpPr/>
-        <p:nvPr/>
-      </p:nvGrpSpPr>
-      <p:grpSpPr/>
-      <p:sp>
-        <p:nvSpPr>
-          <p:cNvPr id="2" name="Title 1"/>
-          <p:cNvSpPr>
-            <a:spLocks noGrp="1"/>
-          </p:cNvSpPr>
-          <p:nvPr>
-            <p:ph type="title"/>
-          </p:nvPr>
-        </p:nvSpPr>
-        <p:spPr/>
-        <p:txBody>
-          <a:bodyPr/>
-          <a:lstStyle/>
-          <a:p>
-            <a:pPr marL="0" indent="0" algn="l">
-              <a:buNone/>
-            </a:pPr>
-            <a:r>
-              <a:rPr sz="3200" b="1">
-                <a:solidFill>
-                  <a:srgbClr val="000000"/>
-                </a:solidFill>
-                <a:latin typeface="Arial"/>
-              </a:rPr>
-              <a:t>BEFORE YOU CALL IT DONE</a:t>
-            </a:r>
-          </a:p>
-        </p:txBody>
-      </p:sp>
-      <p:sp>
-        <p:nvSpPr>
-          <p:cNvPr id="3" name="Text Placeholder 2"/>
-          <p:cNvSpPr>
-            <a:spLocks noGrp="1"/>
-          </p:cNvSpPr>
-          <p:nvPr>
-            <p:ph type="body" idx="1"/>
-          </p:nvPr>
-        </p:nvSpPr>
-        <p:spPr/>
-        <p:txBody>
-          <a:bodyPr/>
-          <a:lstStyle/>
-          <a:p>
-            <a:pPr marL="0" indent="0" algn="l">
-              <a:lnSpc>
-                <a:spcPct val="128000"/>
-              </a:lnSpc>
-              <a:spcAft>
-                <a:spcPts val="1200"/>
-              </a:spcAft>
-              <a:buNone/>
-            </a:pPr>
-            <a:r>
-              <a:rPr sz="1700" b="0">
-                <a:solidFill>
-                  <a:srgbClr val="595959"/>
-                </a:solidFill>
-                <a:latin typeface="Arial"/>
-              </a:rPr>
-              <a:t>Hand your device to another group with the screen turned away.</a:t>
-            </a:r>
-          </a:p>
-          <a:p>
-            <a:pPr marL="0" indent="0" algn="l">
-              <a:lnSpc>
-                <a:spcPct val="128000"/>
-              </a:lnSpc>
-              <a:spcAft>
-                <a:spcPts val="400"/>
-              </a:spcAft>
-              <a:buNone/>
-            </a:pPr>
-            <a:r>
-              <a:rPr sz="1500" b="0">
-                <a:solidFill>
-                  <a:srgbClr val="000000"/>
-                </a:solidFill>
-                <a:latin typeface="Arial"/>
-              </a:rPr>
-              <a:t>• They can tell all three messages apart</a:t>
-            </a:r>
-          </a:p>
-          <a:p>
-            <a:pPr marL="0" indent="0" algn="l">
-              <a:lnSpc>
-                <a:spcPct val="128000"/>
-              </a:lnSpc>
-              <a:spcAft>
-                <a:spcPts val="400"/>
-              </a:spcAft>
-              <a:buNone/>
-            </a:pPr>
-            <a:r>
-              <a:rPr sz="1500" b="0">
-                <a:solidFill>
-                  <a:srgbClr val="000000"/>
-                </a:solidFill>
-                <a:latin typeface="Arial"/>
-              </a:rPr>
-              <a:t>• It does not fire continuously when held</a:t>
-            </a:r>
-          </a:p>
-          <a:p>
-            <a:pPr marL="0" indent="0" algn="l">
-              <a:lnSpc>
-                <a:spcPct val="128000"/>
-              </a:lnSpc>
-              <a:spcAft>
-                <a:spcPts val="400"/>
-              </a:spcAft>
-              <a:buNone/>
-            </a:pPr>
-            <a:r>
-              <a:rPr sz="1500" b="0">
-                <a:solidFill>
-                  <a:srgbClr val="000000"/>
-                </a:solidFill>
-                <a:latin typeface="Arial"/>
-              </a:rPr>
-              <a:t>• You know which two got confused, and why</a:t>
-            </a:r>
-          </a:p>
-          <a:p>
-            <a:pPr marL="0" indent="0" algn="l">
-              <a:lnSpc>
-                <a:spcPct val="128000"/>
-              </a:lnSpc>
-              <a:spcAft>
-                <a:spcPts val="0"/>
-              </a:spcAft>
-              <a:buNone/>
-            </a:pPr>
-          </a:p>
-          <a:p>
-            <a:pPr marL="0" indent="0" algn="l">
-              <a:lnSpc>
-                <a:spcPct val="128000"/>
-              </a:lnSpc>
-              <a:spcAft>
-                <a:spcPts val="400"/>
-              </a:spcAft>
-              <a:buNone/>
-            </a:pPr>
-            <a:r>
-              <a:rPr sz="1700" b="1">
-                <a:solidFill>
-                  <a:srgbClr val="000000"/>
-                </a:solidFill>
-                <a:latin typeface="Arial"/>
-              </a:rPr>
-              <a:t>What you actually leave with</a:t>
-            </a:r>
-          </a:p>
-          <a:p>
-            <a:pPr marL="0" indent="0" algn="l">
-              <a:lnSpc>
-                <a:spcPct val="128000"/>
-              </a:lnSpc>
-              <a:spcAft>
-                <a:spcPts val="400"/>
-              </a:spcAft>
-              <a:buNone/>
-            </a:pPr>
-            <a:r>
-              <a:rPr sz="1500" b="0">
-                <a:solidFill>
-                  <a:srgbClr val="000000"/>
-                </a:solidFill>
-                <a:latin typeface="Arial"/>
-              </a:rPr>
-              <a:t>• What things feel like, how to drive one, and which to pick</a:t>
-            </a:r>
-          </a:p>
-          <a:p>
-            <a:pPr marL="0" indent="0" algn="l">
-              <a:lnSpc>
-                <a:spcPct val="128000"/>
-              </a:lnSpc>
-              <a:spcAft>
-                <a:spcPts val="400"/>
-              </a:spcAft>
-              <a:buNone/>
-            </a:pPr>
-            <a:r>
-              <a:rPr sz="1500" b="0">
-                <a:solidFill>
-                  <a:srgbClr val="000000"/>
-                </a:solidFill>
-                <a:latin typeface="Arial"/>
-              </a:rPr>
-              <a:t>• That last one is the expensive mistake this prevents</a:t>
-            </a:r>
-          </a:p>
-        </p:txBody>
-      </p:sp>
-      <p:pic>
-        <p:nvPicPr>
-          <p:cNvPr id="4" name="Picture 3" descr="wordmark_dark.png"/>
-          <p:cNvPicPr>
-            <a:picLocks noChangeAspect="1"/>
-          </p:cNvPicPr>
-          <p:nvPr/>
-        </p:nvPicPr>
-        <p:blipFill>
-          <a:blip r:embed="rId2"/>
-          <a:stretch>
-            <a:fillRect/>
-          </a:stretch>
-        </p:blipFill>
-        <p:spPr>
-          <a:xfrm>
-            <a:off x="342900" y="6184900"/>
-            <a:ext cx="2070100" cy="529560"/>
-          </a:xfrm>
-          <a:prstGeom prst="rect">
-            <a:avLst/>
-          </a:prstGeom>
-        </p:spPr>
-      </p:pic>
-      <p:pic>
-        <p:nvPicPr>
-          <p:cNvPr id="5" name="Picture 4" descr="seal_dark.png"/>
-          <p:cNvPicPr>
-            <a:picLocks noChangeAspect="1"/>
-          </p:cNvPicPr>
-          <p:nvPr/>
-        </p:nvPicPr>
-        <p:blipFill>
-          <a:blip r:embed="rId3"/>
-          <a:stretch>
-            <a:fillRect/>
-          </a:stretch>
-        </p:blipFill>
-        <p:spPr>
-          <a:xfrm>
-            <a:off x="11226800" y="5969000"/>
-            <a:ext cx="713915" cy="711200"/>
-          </a:xfrm>
-          <a:prstGeom prst="rect">
-            <a:avLst/>
-          </a:prstGeom>
-        </p:spPr>
-      </p:pic>
-    </p:spTree>
-  </p:cSld>
-  <p:clrMapOvr>
-    <a:masterClrMapping/>
-  </p:clrMapOvr>
-</p:sld>
-</file>
-
-<file path=ppt/slides/slide31.xml><?xml version="1.0" encoding="utf-8"?>
+<file path=ppt/slides/slide26.xml><?xml version="1.0" encoding="utf-8"?>
 <p:sld xmlns:a="http://schemas.openxmlformats.org/drawingml/2006/main" xmlns:p="http://schemas.openxmlformats.org/presentationml/2006/main" xmlns:r="http://schemas.openxmlformats.org/officeDocument/2006/relationships">
   <p:cSld>
     <p:spTree>
@@ -12510,6 +10884,249 @@
 </p:sld>
 </file>
 
+<file path=ppt/slides/slide3.xml><?xml version="1.0" encoding="utf-8"?>
+<p:sld xmlns:a="http://schemas.openxmlformats.org/drawingml/2006/main" xmlns:p="http://schemas.openxmlformats.org/presentationml/2006/main" xmlns:r="http://schemas.openxmlformats.org/officeDocument/2006/relationships">
+  <p:cSld>
+    <p:spTree>
+      <p:nvGrpSpPr>
+        <p:cNvPr id="1" name=""/>
+        <p:cNvGrpSpPr/>
+        <p:nvPr/>
+      </p:nvGrpSpPr>
+      <p:grpSpPr/>
+      <p:sp>
+        <p:nvSpPr>
+          <p:cNvPr id="2" name="Title 1"/>
+          <p:cNvSpPr>
+            <a:spLocks noGrp="1"/>
+          </p:cNvSpPr>
+          <p:nvPr>
+            <p:ph type="title"/>
+          </p:nvPr>
+        </p:nvSpPr>
+        <p:spPr/>
+        <p:txBody>
+          <a:bodyPr/>
+          <a:lstStyle/>
+          <a:p>
+            <a:pPr marL="0" indent="0" algn="l">
+              <a:buNone/>
+            </a:pPr>
+            <a:r>
+              <a:rPr sz="3200" b="1">
+                <a:solidFill>
+                  <a:srgbClr val="000000"/>
+                </a:solidFill>
+                <a:latin typeface="Arial"/>
+              </a:rPr>
+              <a:t>WHY WE ARE HERE</a:t>
+            </a:r>
+          </a:p>
+        </p:txBody>
+      </p:sp>
+      <p:sp>
+        <p:nvSpPr>
+          <p:cNvPr id="3" name="Text Placeholder 2"/>
+          <p:cNvSpPr>
+            <a:spLocks noGrp="1"/>
+          </p:cNvSpPr>
+          <p:nvPr>
+            <p:ph type="body" idx="1"/>
+          </p:nvPr>
+        </p:nvSpPr>
+        <p:spPr/>
+        <p:txBody>
+          <a:bodyPr/>
+          <a:lstStyle/>
+          <a:p>
+            <a:pPr marL="0" indent="0" algn="l">
+              <a:lnSpc>
+                <a:spcPct val="128000"/>
+              </a:lnSpc>
+              <a:spcAft>
+                <a:spcPts val="1200"/>
+              </a:spcAft>
+              <a:buNone/>
+            </a:pPr>
+            <a:r>
+              <a:rPr sz="1700" b="0">
+                <a:solidFill>
+                  <a:srgbClr val="595959"/>
+                </a:solidFill>
+                <a:latin typeface="Arial"/>
+              </a:rPr>
+              <a:t>You can read a datasheet. You have never held one of these.</a:t>
+            </a:r>
+          </a:p>
+          <a:p>
+            <a:pPr marL="0" indent="0" algn="l">
+              <a:lnSpc>
+                <a:spcPct val="128000"/>
+              </a:lnSpc>
+              <a:spcAft>
+                <a:spcPts val="400"/>
+              </a:spcAft>
+              <a:buNone/>
+            </a:pPr>
+            <a:r>
+              <a:rPr sz="1700" b="0">
+                <a:solidFill>
+                  <a:srgbClr val="000000"/>
+                </a:solidFill>
+                <a:latin typeface="Arial"/>
+              </a:rPr>
+              <a:t>Most projects end up on the screen and the speaker</a:t>
+            </a:r>
+          </a:p>
+          <a:p>
+            <a:pPr marL="0" indent="0" algn="l">
+              <a:lnSpc>
+                <a:spcPct val="128000"/>
+              </a:lnSpc>
+              <a:spcAft>
+                <a:spcPts val="400"/>
+              </a:spcAft>
+              <a:buNone/>
+            </a:pPr>
+            <a:r>
+              <a:rPr sz="1500" b="0">
+                <a:solidFill>
+                  <a:srgbClr val="000000"/>
+                </a:solidFill>
+                <a:latin typeface="Arial"/>
+              </a:rPr>
+              <a:t>• Not because touch was wrong</a:t>
+            </a:r>
+          </a:p>
+          <a:p>
+            <a:pPr marL="0" indent="0" algn="l">
+              <a:lnSpc>
+                <a:spcPct val="128000"/>
+              </a:lnSpc>
+              <a:spcAft>
+                <a:spcPts val="400"/>
+              </a:spcAft>
+              <a:buNone/>
+            </a:pPr>
+            <a:r>
+              <a:rPr sz="1500" b="0">
+                <a:solidFill>
+                  <a:srgbClr val="000000"/>
+                </a:solidFill>
+                <a:latin typeface="Arial"/>
+              </a:rPr>
+              <a:t>• Because nobody knew the lab has 117 coin motors</a:t>
+            </a:r>
+          </a:p>
+          <a:p>
+            <a:pPr marL="0" indent="0" algn="l">
+              <a:lnSpc>
+                <a:spcPct val="128000"/>
+              </a:lnSpc>
+              <a:spcAft>
+                <a:spcPts val="0"/>
+              </a:spcAft>
+              <a:buNone/>
+            </a:pPr>
+          </a:p>
+          <a:p>
+            <a:pPr marL="0" indent="0" algn="l">
+              <a:lnSpc>
+                <a:spcPct val="128000"/>
+              </a:lnSpc>
+              <a:spcAft>
+                <a:spcPts val="400"/>
+              </a:spcAft>
+              <a:buNone/>
+            </a:pPr>
+            <a:r>
+              <a:rPr sz="1700" b="1">
+                <a:solidFill>
+                  <a:srgbClr val="000000"/>
+                </a:solidFill>
+                <a:latin typeface="Arial"/>
+              </a:rPr>
+              <a:t>Today: decide it feels cheap, pick something else</a:t>
+            </a:r>
+          </a:p>
+          <a:p>
+            <a:pPr marL="0" indent="0" algn="l">
+              <a:lnSpc>
+                <a:spcPct val="128000"/>
+              </a:lnSpc>
+              <a:spcAft>
+                <a:spcPts val="400"/>
+              </a:spcAft>
+              <a:buNone/>
+            </a:pPr>
+            <a:r>
+              <a:rPr sz="1500" b="0">
+                <a:solidFill>
+                  <a:srgbClr val="000000"/>
+                </a:solidFill>
+                <a:latin typeface="Arial"/>
+              </a:rPr>
+              <a:t>• Better now than in week 46</a:t>
+            </a:r>
+          </a:p>
+        </p:txBody>
+      </p:sp>
+      <p:pic>
+        <p:nvPicPr>
+          <p:cNvPr id="4" name="Picture 3" descr="wordmark_dark.png"/>
+          <p:cNvPicPr>
+            <a:picLocks noChangeAspect="1"/>
+          </p:cNvPicPr>
+          <p:nvPr/>
+        </p:nvPicPr>
+        <p:blipFill>
+          <a:blip r:embed="rId2"/>
+          <a:stretch>
+            <a:fillRect/>
+          </a:stretch>
+        </p:blipFill>
+        <p:spPr>
+          <a:xfrm>
+            <a:off x="342900" y="6184900"/>
+            <a:ext cx="2070100" cy="529560"/>
+          </a:xfrm>
+          <a:prstGeom prst="rect">
+            <a:avLst/>
+          </a:prstGeom>
+        </p:spPr>
+      </p:pic>
+      <p:pic>
+        <p:nvPicPr>
+          <p:cNvPr id="5" name="Picture 4" descr="seal_dark.png"/>
+          <p:cNvPicPr>
+            <a:picLocks noChangeAspect="1"/>
+          </p:cNvPicPr>
+          <p:nvPr/>
+        </p:nvPicPr>
+        <p:blipFill>
+          <a:blip r:embed="rId3"/>
+          <a:stretch>
+            <a:fillRect/>
+          </a:stretch>
+        </p:blipFill>
+        <p:spPr>
+          <a:xfrm>
+            <a:off x="11226800" y="5969000"/>
+            <a:ext cx="713915" cy="711200"/>
+          </a:xfrm>
+          <a:prstGeom prst="rect">
+            <a:avLst/>
+          </a:prstGeom>
+        </p:spPr>
+      </p:pic>
+    </p:spTree>
+  </p:cSld>
+  <p:clrMapOvr>
+    <a:masterClrMapping/>
+  </p:clrMapOvr>
+</p:sld>
+</file>
+
 <file path=ppt/slides/slide4.xml><?xml version="1.0" encoding="utf-8"?>
 <p:sld xmlns:a="http://schemas.openxmlformats.org/drawingml/2006/main" xmlns:p="http://schemas.openxmlformats.org/presentationml/2006/main" xmlns:r="http://schemas.openxmlformats.org/officeDocument/2006/relationships">
   <p:cSld>
@@ -12621,7 +11238,7 @@
                 </a:solidFill>
                 <a:latin typeface="Arial"/>
               </a:rPr>
-              <a:t>Two or three stations each, getting harder</a:t>
+              <a:t>Four tasks, each one wire more than the last</a:t>
             </a:r>
           </a:p>
           <a:p>
@@ -12641,7 +11258,7 @@
                 </a:solidFill>
                 <a:latin typeface="Arial"/>
               </a:rPr>
-              <a:t>• Start with two wires. End with a transistor</a:t>
+              <a:t>• Piezo, then a touch pad, then both, then a stepper</a:t>
             </a:r>
           </a:p>
           <a:p>
@@ -12873,7 +11490,7 @@
                 </a:solidFill>
                 <a:latin typeface="Consolas"/>
               </a:rPr>
-              <a:t>0:10     10 min    Breadboards out. Piezo: two wires, everyone</a:t>
+              <a:t>0:10     15 min    Task 00: piezo. Two wires, everyone</a:t>
             </a:r>
           </a:p>
           <a:p>
@@ -12893,7 +11510,7 @@
                 </a:solidFill>
                 <a:latin typeface="Consolas"/>
               </a:rPr>
-              <a:t>0:20     20 min    Task 01: your first driver circuit, together</a:t>
+              <a:t>0:25     20 min    Task 04: one wire and foil. Watch the drift</a:t>
             </a:r>
           </a:p>
           <a:p>
@@ -12913,7 +11530,27 @@
                 </a:solidFill>
                 <a:latin typeface="Consolas"/>
               </a:rPr>
-              <a:t>0:40     45 min    Build on, at your own pace</a:t>
+              <a:t>0:45     20 min    Task 05: join them. Touch in, tick out</a:t>
+            </a:r>
+          </a:p>
+          <a:p>
+            <a:pPr marL="0" indent="0" algn="l">
+              <a:lnSpc>
+                <a:spcPct val="128000"/>
+              </a:lnSpc>
+              <a:spcAft>
+                <a:spcPts val="1200"/>
+              </a:spcAft>
+              <a:buNone/>
+            </a:pPr>
+            <a:r>
+              <a:rPr sz="1400" b="0">
+                <a:solidFill>
+                  <a:srgbClr val="000000"/>
+                </a:solidFill>
+                <a:latin typeface="Consolas"/>
+              </a:rPr>
+              <a:t>1:05     20 min    Task 07: stepper, if you want it</a:t>
             </a:r>
           </a:p>
           <a:p>
@@ -13125,7 +11762,7 @@
                 </a:solidFill>
                 <a:latin typeface="Arial"/>
               </a:rPr>
-              <a:t>00   Make it tick        piezo             2 wires</a:t>
+              <a:t>00   Make it tick        piezo              2 wires</a:t>
             </a:r>
           </a:p>
           <a:p>
@@ -13145,7 +11782,7 @@
                 </a:solidFill>
                 <a:latin typeface="Arial"/>
               </a:rPr>
-              <a:t>04   Make it notice you  wire and foil     1 wire</a:t>
+              <a:t>04   Make it notice you  a wire and foil    1 wire</a:t>
             </a:r>
           </a:p>
           <a:p>
@@ -13165,7 +11802,7 @@
                 </a:solidFill>
                 <a:latin typeface="Arial"/>
               </a:rPr>
-              <a:t>05   Make it answer      both of the above 3 wires</a:t>
+              <a:t>05   Make it answer      both of the above  3 wires</a:t>
             </a:r>
           </a:p>
           <a:p>
@@ -13174,6 +11811,26 @@
                 <a:spcPct val="128000"/>
               </a:lnSpc>
               <a:spcAft>
+                <a:spcPts val="400"/>
+              </a:spcAft>
+              <a:buNone/>
+            </a:pPr>
+            <a:r>
+              <a:rPr sz="1700" b="1">
+                <a:solidFill>
+                  <a:srgbClr val="000000"/>
+                </a:solidFill>
+                <a:latin typeface="Arial"/>
+              </a:rPr>
+              <a:t>07   Make it turn        stepper            6 wires</a:t>
+            </a:r>
+          </a:p>
+          <a:p>
+            <a:pPr marL="0" indent="0" algn="l">
+              <a:lnSpc>
+                <a:spcPct val="128000"/>
+              </a:lnSpc>
+              <a:spcAft>
                 <a:spcPts val="0"/>
               </a:spcAft>
               <a:buNone/>
@@ -13190,13 +11847,13 @@
               <a:buNone/>
             </a:pPr>
             <a:r>
-              <a:rPr sz="1700" b="1">
-                <a:solidFill>
-                  <a:srgbClr val="000000"/>
-                </a:solidFill>
-                <a:latin typeface="Arial"/>
-              </a:rPr>
-              <a:t>07   Make it turn       stepper           6 wires, a trap</a:t>
+              <a:rPr sz="1700" b="0">
+                <a:solidFill>
+                  <a:srgbClr val="000000"/>
+                </a:solidFill>
+                <a:latin typeface="Arial"/>
+              </a:rPr>
+              <a:t>Four tasks, and the first three need no driver at all.</a:t>
             </a:r>
           </a:p>
           <a:p>
@@ -13210,13 +11867,13 @@
               <a:buNone/>
             </a:pPr>
             <a:r>
-              <a:rPr sz="1700" b="1">
-                <a:solidFill>
-                  <a:srgbClr val="000000"/>
-                </a:solidFill>
-                <a:latin typeface="Arial"/>
-              </a:rPr>
-              <a:t>01   Make something spin coin motor        + transistor</a:t>
+              <a:rPr sz="1700" b="0">
+                <a:solidFill>
+                  <a:srgbClr val="000000"/>
+                </a:solidFill>
+                <a:latin typeface="Arial"/>
+              </a:rPr>
+              <a:t>Tasks 01 to 03 are in the repo if you want the motor,</a:t>
             </a:r>
           </a:p>
           <a:p>
@@ -13230,64 +11887,13 @@
               <a:buNone/>
             </a:pPr>
             <a:r>
-              <a:rPr sz="1700" b="1">
-                <a:solidFill>
-                  <a:srgbClr val="000000"/>
-                </a:solidFill>
-                <a:latin typeface="Arial"/>
-              </a:rPr>
-              <a:t>02   Make something tap  solenoid          + own supply</a:t>
-            </a:r>
-          </a:p>
-          <a:p>
-            <a:pPr marL="0" indent="0" algn="l">
-              <a:lnSpc>
-                <a:spcPct val="128000"/>
-              </a:lnSpc>
-              <a:spcAft>
-                <a:spcPts val="400"/>
-              </a:spcAft>
-              <a:buNone/>
-            </a:pPr>
-            <a:r>
-              <a:rPr sz="1700" b="1">
-                <a:solidFill>
-                  <a:srgbClr val="000000"/>
-                </a:solidFill>
-                <a:latin typeface="Arial"/>
-              </a:rPr>
-              <a:t>03   Make something warm Peltier tile      + H-bridge</a:t>
-            </a:r>
-          </a:p>
-          <a:p>
-            <a:pPr marL="0" indent="0" algn="l">
-              <a:lnSpc>
-                <a:spcPct val="128000"/>
-              </a:lnSpc>
-              <a:spcAft>
-                <a:spcPts val="0"/>
-              </a:spcAft>
-              <a:buNone/>
-            </a:pPr>
-          </a:p>
-          <a:p>
-            <a:pPr marL="0" indent="0" algn="l">
-              <a:lnSpc>
-                <a:spcPct val="128000"/>
-              </a:lnSpc>
-              <a:spcAft>
-                <a:spcPts val="400"/>
-              </a:spcAft>
-              <a:buNone/>
-            </a:pPr>
-            <a:r>
               <a:rPr sz="1700" b="0">
                 <a:solidFill>
                   <a:srgbClr val="000000"/>
                 </a:solidFill>
                 <a:latin typeface="Arial"/>
               </a:rPr>
-              <a:t>Two or three each. Nobody does all of them.</a:t>
+              <a:t>the solenoid or the Peltier tile. We will not do them today.</a:t>
             </a:r>
           </a:p>
         </p:txBody>
